--- a/東金市_児童発達支援_事業所調査.pptx
+++ b/東金市_児童発達支援_事業所調査.pptx
@@ -1546,7 +1546,7 @@
         <p:spPr>
           <a:xfrm>
             <a:off x="502920" y="1783080"/>
-            <a:ext cx="6903720" cy="4434840"/>
+            <a:ext cx="6903720" cy="3474720"/>
           </a:xfrm>
           <a:prstGeom prst="rect">
             <a:avLst/>
@@ -1617,7 +1617,7 @@
         <p:spPr>
           <a:xfrm>
             <a:off x="704088" y="2331720"/>
-            <a:ext cx="6501384" cy="3758184"/>
+            <a:ext cx="6501384" cy="2852927"/>
           </a:xfrm>
           <a:prstGeom prst="rect">
             <a:avLst/>
@@ -1636,7 +1636,7 @@
               <a:buNone/>
             </a:pPr>
             <a:r>
-              <a:rPr lang="en-US" sz="1050" b="1" dirty="0">
+              <a:rPr lang="en-US" sz="1100" b="1" dirty="0">
                 <a:solidFill>
                   <a:srgbClr val="2E6BB8"/>
                 </a:solidFill>
@@ -1647,7 +1647,7 @@
               <a:t>▶</a:t>
             </a:r>
             <a:r>
-              <a:rPr lang="en-US" sz="1050" b="1" dirty="0">
+              <a:rPr lang="en-US" sz="1100" b="1" dirty="0">
                 <a:solidFill>
                   <a:srgbClr val="222222"/>
                 </a:solidFill>
@@ -1658,7 +1658,7 @@
               <a:t>対象：</a:t>
             </a:r>
             <a:r>
-              <a:rPr lang="en-US" sz="1050" dirty="0">
+              <a:rPr lang="en-US" sz="1100" dirty="0">
                 <a:solidFill>
                   <a:srgbClr val="222222"/>
                 </a:solidFill>
@@ -1678,7 +1678,7 @@
               <a:buNone/>
             </a:pPr>
             <a:r>
-              <a:rPr lang="en-US" sz="1050" b="1" dirty="0">
+              <a:rPr lang="en-US" sz="1100" b="1" dirty="0">
                 <a:solidFill>
                   <a:srgbClr val="2E6BB8"/>
                 </a:solidFill>
@@ -1689,7 +1689,7 @@
               <a:t>▶</a:t>
             </a:r>
             <a:r>
-              <a:rPr lang="en-US" sz="1050" b="1" dirty="0">
+              <a:rPr lang="en-US" sz="1100" b="1" dirty="0">
                 <a:solidFill>
                   <a:srgbClr val="222222"/>
                 </a:solidFill>
@@ -1700,7 +1700,7 @@
               <a:t>住所：</a:t>
             </a:r>
             <a:r>
-              <a:rPr lang="en-US" sz="1050" dirty="0">
+              <a:rPr lang="en-US" sz="1100" dirty="0">
                 <a:solidFill>
                   <a:srgbClr val="222222"/>
                 </a:solidFill>
@@ -1720,7 +1720,7 @@
               <a:buNone/>
             </a:pPr>
             <a:r>
-              <a:rPr lang="en-US" sz="1050" b="1" dirty="0">
+              <a:rPr lang="en-US" sz="1100" b="1" dirty="0">
                 <a:solidFill>
                   <a:srgbClr val="2E6BB8"/>
                 </a:solidFill>
@@ -1731,7 +1731,7 @@
               <a:t>▶</a:t>
             </a:r>
             <a:r>
-              <a:rPr lang="en-US" sz="1050" b="1" dirty="0">
+              <a:rPr lang="en-US" sz="1100" b="1" dirty="0">
                 <a:solidFill>
                   <a:srgbClr val="222222"/>
                 </a:solidFill>
@@ -1742,7 +1742,7 @@
               <a:t>TEL／HP：</a:t>
             </a:r>
             <a:r>
-              <a:rPr lang="en-US" sz="1050" dirty="0">
+              <a:rPr lang="en-US" sz="1100" dirty="0">
                 <a:solidFill>
                   <a:srgbClr val="222222"/>
                 </a:solidFill>
@@ -1762,7 +1762,7 @@
               <a:buNone/>
             </a:pPr>
             <a:r>
-              <a:rPr lang="en-US" sz="1050" b="1" dirty="0">
+              <a:rPr lang="en-US" sz="1100" b="1" dirty="0">
                 <a:solidFill>
                   <a:srgbClr val="2E6BB8"/>
                 </a:solidFill>
@@ -1773,7 +1773,7 @@
               <a:t>▶</a:t>
             </a:r>
             <a:r>
-              <a:rPr lang="en-US" sz="1050" b="1" dirty="0">
+              <a:rPr lang="en-US" sz="1100" b="1" dirty="0">
                 <a:solidFill>
                   <a:srgbClr val="222222"/>
                 </a:solidFill>
@@ -1784,7 +1784,7 @@
               <a:t>サービス提供時間：</a:t>
             </a:r>
             <a:r>
-              <a:rPr lang="en-US" sz="1050" dirty="0">
+              <a:rPr lang="en-US" sz="1100" dirty="0">
                 <a:solidFill>
                   <a:srgbClr val="222222"/>
                 </a:solidFill>
@@ -1804,7 +1804,7 @@
               <a:buNone/>
             </a:pPr>
             <a:r>
-              <a:rPr lang="en-US" sz="1050" b="1" dirty="0">
+              <a:rPr lang="en-US" sz="1100" b="1" dirty="0">
                 <a:solidFill>
                   <a:srgbClr val="2E6BB8"/>
                 </a:solidFill>
@@ -1815,7 +1815,7 @@
               <a:t>▶</a:t>
             </a:r>
             <a:r>
-              <a:rPr lang="en-US" sz="1050" b="1" dirty="0">
+              <a:rPr lang="en-US" sz="1100" b="1" dirty="0">
                 <a:solidFill>
                   <a:srgbClr val="222222"/>
                 </a:solidFill>
@@ -1826,7 +1826,7 @@
               <a:t>定員／職員：</a:t>
             </a:r>
             <a:r>
-              <a:rPr lang="en-US" sz="1050" dirty="0">
+              <a:rPr lang="en-US" sz="1100" dirty="0">
                 <a:solidFill>
                   <a:srgbClr val="222222"/>
                 </a:solidFill>
@@ -1858,7 +1858,7 @@
               <a:buNone/>
             </a:pPr>
             <a:r>
-              <a:rPr lang="en-US" sz="1050" b="1" dirty="0">
+              <a:rPr lang="en-US" sz="1100" b="1" dirty="0">
                 <a:solidFill>
                   <a:srgbClr val="2E6BB8"/>
                 </a:solidFill>
@@ -1869,7 +1869,7 @@
               <a:t>▶</a:t>
             </a:r>
             <a:r>
-              <a:rPr lang="en-US" sz="1050" b="1" dirty="0">
+              <a:rPr lang="en-US" sz="1100" b="1" dirty="0">
                 <a:solidFill>
                   <a:srgbClr val="222222"/>
                 </a:solidFill>
@@ -1880,7 +1880,7 @@
               <a:t>療育プログラムの特徴：</a:t>
             </a:r>
             <a:r>
-              <a:rPr lang="en-US" sz="1050" dirty="0">
+              <a:rPr lang="en-US" sz="1100" dirty="0">
                 <a:solidFill>
                   <a:srgbClr val="222222"/>
                 </a:solidFill>
@@ -1903,7 +1903,7 @@
               <a:buNone/>
             </a:pPr>
             <a:r>
-              <a:rPr lang="en-US" sz="1050" dirty="0">
+              <a:rPr lang="en-US" sz="1100" dirty="0">
                 <a:solidFill>
                   <a:srgbClr val="222222"/>
                 </a:solidFill>
@@ -1926,7 +1926,7 @@
               <a:buNone/>
             </a:pPr>
             <a:r>
-              <a:rPr lang="en-US" sz="1050" dirty="0">
+              <a:rPr lang="en-US" sz="1100" dirty="0">
                 <a:solidFill>
                   <a:srgbClr val="222222"/>
                 </a:solidFill>
@@ -1937,75 +1937,6 @@
               <a:t>・子どもの「やりたい！」「できた！」を大切にする支援方針を掲げる。</a:t>
             </a:r>
             <a:endParaRPr lang="en-US" sz="1050" dirty="0"/>
-          </a:p>
-        </p:txBody>
-      </p:sp>
-      <p:sp>
-        <p:nvSpPr>
-          <p:cNvPr id="13" name="Text 11"/>
-          <p:cNvSpPr/>
-          <p:nvPr/>
-        </p:nvSpPr>
-        <p:spPr>
-          <a:xfrm>
-            <a:off x="7635240" y="1783080"/>
-            <a:ext cx="4069080" cy="2148840"/>
-          </a:xfrm>
-          <a:prstGeom prst="rect">
-            <a:avLst/>
-          </a:prstGeom>
-          <a:solidFill>
-            <a:srgbClr val="F4F6FA"/>
-          </a:solidFill>
-          <a:ln w="12700">
-            <a:solidFill>
-              <a:srgbClr val="9AA7B8"/>
-            </a:solidFill>
-            <a:prstDash val="dash"/>
-          </a:ln>
-        </p:spPr>
-        <p:txBody>
-          <a:bodyPr wrap="square" lIns="91440" tIns="45720" rIns="91440" bIns="45720" rtlCol="0" anchor="ctr"/>
-          <a:lstStyle/>
-          <a:p>
-            <a:pPr marL="0" indent="0" algn="ctr">
-              <a:lnSpc>
-                <a:spcPct val="110000"/>
-              </a:lnSpc>
-              <a:buNone/>
-            </a:pPr>
-            <a:r>
-              <a:rPr lang="en-US" sz="1200" b="1" dirty="0">
-                <a:solidFill>
-                  <a:srgbClr val="8A99AD"/>
-                </a:solidFill>
-                <a:latin typeface="Meiryo" pitchFamily="34" charset="0"/>
-                <a:ea typeface="Meiryo" pitchFamily="34" charset="-122"/>
-                <a:cs typeface="Meiryo" pitchFamily="34" charset="-120"/>
-              </a:rPr>
-              <a:t>［ 写真挿入エリア ］</a:t>
-            </a:r>
-            <a:endParaRPr lang="en-US" sz="1200" dirty="0"/>
-          </a:p>
-          <a:p>
-            <a:pPr marL="0" indent="0" algn="ctr">
-              <a:lnSpc>
-                <a:spcPct val="110000"/>
-              </a:lnSpc>
-              <a:buNone/>
-            </a:pPr>
-            <a:r>
-              <a:rPr lang="en-US" sz="950" dirty="0">
-                <a:solidFill>
-                  <a:srgbClr val="97A4B6"/>
-                </a:solidFill>
-                <a:latin typeface="Meiryo" pitchFamily="34" charset="0"/>
-                <a:ea typeface="Meiryo" pitchFamily="34" charset="-122"/>
-                <a:cs typeface="Meiryo" pitchFamily="34" charset="-120"/>
-              </a:rPr>
-              <a:t>（公式HP kihonjuku-yuuyuu.com／発達ナビの教室・サッカー療育の写真を挿入）</a:t>
-            </a:r>
-            <a:endParaRPr lang="en-US" sz="1200" dirty="0"/>
           </a:p>
         </p:txBody>
       </p:sp>
@@ -2017,8 +1948,8 @@
         </p:nvSpPr>
         <p:spPr>
           <a:xfrm>
-            <a:off x="7635240" y="4069080"/>
-            <a:ext cx="4069080" cy="2148840"/>
+            <a:off x="7635240" y="1783080"/>
+            <a:ext cx="4069080" cy="3474720"/>
           </a:xfrm>
           <a:prstGeom prst="rect">
             <a:avLst/>
@@ -2042,7 +1973,7 @@
         </p:nvSpPr>
         <p:spPr>
           <a:xfrm>
-            <a:off x="7818120" y="4187952"/>
+            <a:off x="7818120" y="1901952"/>
             <a:ext cx="3703320" cy="320040"/>
           </a:xfrm>
           <a:prstGeom prst="rect">
@@ -2081,8 +2012,8 @@
         </p:nvSpPr>
         <p:spPr>
           <a:xfrm>
-            <a:off x="7818120" y="4526280"/>
-            <a:ext cx="3794760" cy="1600200"/>
+            <a:off x="7818120" y="2286000"/>
+            <a:ext cx="3703320" cy="2907791"/>
           </a:xfrm>
           <a:prstGeom prst="rect">
             <a:avLst/>
@@ -2102,7 +2033,7 @@
               <a:buChar char="•"/>
             </a:pPr>
             <a:r>
-              <a:rPr lang="en-US" sz="1000" dirty="0">
+              <a:rPr lang="en-US" sz="1050" dirty="0">
                 <a:solidFill>
                   <a:srgbClr val="222222"/>
                 </a:solidFill>
@@ -2126,7 +2057,7 @@
               <a:buChar char="•"/>
             </a:pPr>
             <a:r>
-              <a:rPr lang="en-US" sz="1000" dirty="0">
+              <a:rPr lang="en-US" sz="1050" dirty="0">
                 <a:solidFill>
                   <a:srgbClr val="222222"/>
                 </a:solidFill>
@@ -2150,7 +2081,7 @@
               <a:buChar char="•"/>
             </a:pPr>
             <a:r>
-              <a:rPr lang="en-US" sz="1000" dirty="0">
+              <a:rPr lang="en-US" sz="1050" dirty="0">
                 <a:solidFill>
                   <a:srgbClr val="222222"/>
                 </a:solidFill>
@@ -2165,152 +2096,199 @@
               <a:ea typeface="メイリオ" panose="020B0604030504040204" pitchFamily="50" charset="-128"/>
             </a:endParaRPr>
           </a:p>
+          <a:p>
+            <a:pPr marL="342900" indent="-342900">
+              <a:spcAft>
+                <a:spcPts val="700"/>
+              </a:spcAft>
+              <a:buSzPct val="100000"/>
+              <a:buChar char="•"/>
+            </a:pPr>
+            <a:r>
+              <a:rPr lang="en-US" sz="1050" dirty="0">
+                <a:solidFill>
+                  <a:srgbClr val="222222"/>
+                </a:solidFill>
+                <a:latin typeface="メイリオ" panose="020B0604030504040204" pitchFamily="50" charset="-128"/>
+                <a:ea typeface="メイリオ" panose="020B0604030504040204" pitchFamily="50" charset="-128"/>
+                <a:cs typeface="Meiryo" pitchFamily="34" charset="-120"/>
+              </a:rPr>
+              <a:t>土曜・長期休暇の受け皿が手薄なため、そこを埋める事業所には需要が回りやすい。</a:t>
+            </a:r>
+            <a:endParaRPr lang="en-US" sz="1000" dirty="0">
+              <a:latin typeface="メイリオ" panose="020B0604030504040204" pitchFamily="50" charset="-128"/>
+              <a:ea typeface="メイリオ" panose="020B0604030504040204" pitchFamily="50" charset="-128"/>
+            </a:endParaRPr>
+          </a:p>
         </p:txBody>
       </p:sp>
       <p:sp>
         <p:nvSpPr>
-          <p:cNvPr id="900" name="PhotoSlot 1"/>
+          <p:cNvPr id="940" name="FootBG"/>
           <p:cNvSpPr/>
           <p:nvPr/>
         </p:nvSpPr>
         <p:spPr>
           <a:xfrm>
-            <a:off x="868680" y="4882896"/>
-            <a:ext cx="1965960" cy="1152144"/>
+            <a:off x="502920" y="5394960"/>
+            <a:ext cx="11201400" cy="896112"/>
           </a:xfrm>
           <a:prstGeom prst="rect">
             <a:avLst/>
           </a:prstGeom>
           <a:solidFill>
-            <a:srgbClr val="F4F6FA"/>
+            <a:srgbClr val="EEF2F8"/>
           </a:solidFill>
           <a:ln w="12700">
             <a:solidFill>
               <a:srgbClr val="9AA7B8"/>
             </a:solidFill>
-            <a:prstDash val="dash"/>
+            <a:prstDash val="solid"/>
           </a:ln>
         </p:spPr>
-        <p:txBody>
-          <a:bodyPr wrap="square" lIns="91440" tIns="45720" rIns="91440" bIns="45720" rtlCol="0" anchor="ctr"/>
-          <a:lstStyle/>
-          <a:p>
-            <a:pPr marL="0" indent="0" algn="ctr">
-              <a:lnSpc>
-                <a:spcPct val="110000"/>
-              </a:lnSpc>
-              <a:buNone/>
-            </a:pPr>
-            <a:r>
-              <a:rPr lang="en-US" sz="900" b="1" dirty="0">
-                <a:solidFill>
-                  <a:srgbClr val="8A99AD"/>
-                </a:solidFill>
-                <a:latin typeface="Meiryo" pitchFamily="34" charset="0"/>
-                <a:ea typeface="Meiryo" pitchFamily="34" charset="-122"/>
-                <a:cs typeface="Meiryo" pitchFamily="34" charset="-120"/>
-              </a:rPr>
-              <a:t>［ 外観 / 建物 ］</a:t>
-            </a:r>
-            <a:endParaRPr lang="en-US" sz="1200" dirty="0"/>
-          </a:p>
-        </p:txBody>
       </p:sp>
       <p:sp>
         <p:nvSpPr>
-          <p:cNvPr id="901" name="PhotoSlot 2"/>
+          <p:cNvPr id="941" name="FootTitle"/>
           <p:cNvSpPr/>
           <p:nvPr/>
         </p:nvSpPr>
         <p:spPr>
           <a:xfrm>
-            <a:off x="2971800" y="4882896"/>
-            <a:ext cx="1965960" cy="1152144"/>
+            <a:off x="713232" y="5477256"/>
+            <a:ext cx="10789920" cy="274320"/>
           </a:xfrm>
           <a:prstGeom prst="rect">
             <a:avLst/>
           </a:prstGeom>
-          <a:solidFill>
-            <a:srgbClr val="F4F6FA"/>
-          </a:solidFill>
-          <a:ln w="12700">
-            <a:solidFill>
-              <a:srgbClr val="9AA7B8"/>
-            </a:solidFill>
-            <a:prstDash val="dash"/>
-          </a:ln>
+          <a:noFill/>
+          <a:ln/>
         </p:spPr>
         <p:txBody>
-          <a:bodyPr wrap="square" lIns="91440" tIns="45720" rIns="91440" bIns="45720" rtlCol="0" anchor="ctr"/>
+          <a:bodyPr wrap="square" lIns="0" tIns="0" rIns="0" bIns="0" rtlCol="0" anchor="ctr"/>
           <a:lstStyle/>
           <a:p>
-            <a:pPr marL="0" indent="0" algn="ctr">
-              <a:lnSpc>
-                <a:spcPct val="110000"/>
-              </a:lnSpc>
+            <a:pPr marL="0" indent="0">
               <a:buNone/>
             </a:pPr>
             <a:r>
-              <a:rPr lang="en-US" sz="900" b="1" dirty="0">
-                <a:solidFill>
-                  <a:srgbClr val="8A99AD"/>
-                </a:solidFill>
-                <a:latin typeface="Meiryo" pitchFamily="34" charset="0"/>
-                <a:ea typeface="Meiryo" pitchFamily="34" charset="-122"/>
-                <a:cs typeface="Meiryo" pitchFamily="34" charset="-120"/>
-              </a:rPr>
-              <a:t>［ 室内・教室 ］</a:t>
-            </a:r>
-            <a:endParaRPr lang="en-US" sz="1200" dirty="0"/>
+              <a:rPr lang="en-US" sz="1250" b="1" dirty="0">
+                <a:solidFill>
+                  <a:srgbClr val="1B3A6B"/>
+                </a:solidFill>
+                <a:latin typeface="Meiryo" pitchFamily="34" charset="0"/>
+                <a:ea typeface="Meiryo" pitchFamily="34" charset="-122"/>
+                <a:cs typeface="Meiryo" pitchFamily="34" charset="-120"/>
+              </a:rPr>
+              <a:t>出典 ／ 要確認事項</a:t>
+            </a:r>
+            <a:endParaRPr lang="en-US" sz="1250" dirty="0"/>
           </a:p>
         </p:txBody>
       </p:sp>
       <p:sp>
         <p:nvSpPr>
-          <p:cNvPr id="902" name="PhotoSlot 3"/>
+          <p:cNvPr id="13" name="FootBody"/>
           <p:cNvSpPr/>
           <p:nvPr/>
         </p:nvSpPr>
         <p:spPr>
           <a:xfrm>
-            <a:off x="5074920" y="4882896"/>
-            <a:ext cx="1965960" cy="1152144"/>
+            <a:off x="713232" y="5779008"/>
+            <a:ext cx="10789920" cy="475488"/>
           </a:xfrm>
           <a:prstGeom prst="rect">
             <a:avLst/>
           </a:prstGeom>
-          <a:solidFill>
-            <a:srgbClr val="F4F6FA"/>
-          </a:solidFill>
-          <a:ln w="12700">
-            <a:solidFill>
-              <a:srgbClr val="9AA7B8"/>
-            </a:solidFill>
-            <a:prstDash val="dash"/>
-          </a:ln>
+          <a:noFill/>
+          <a:ln/>
         </p:spPr>
         <p:txBody>
-          <a:bodyPr wrap="square" lIns="91440" tIns="45720" rIns="91440" bIns="45720" rtlCol="0" anchor="ctr"/>
+          <a:bodyPr wrap="square" lIns="0" tIns="0" rIns="0" bIns="0" rtlCol="0" anchor="t"/>
           <a:lstStyle/>
           <a:p>
-            <a:pPr marL="0" indent="0" algn="ctr">
+            <a:pPr marL="0" indent="0">
               <a:lnSpc>
-                <a:spcPct val="110000"/>
+                <a:spcPct val="103000"/>
               </a:lnSpc>
               <a:buNone/>
             </a:pPr>
             <a:r>
-              <a:rPr lang="en-US" sz="900" b="1" dirty="0">
-                <a:solidFill>
-                  <a:srgbClr val="8A99AD"/>
-                </a:solidFill>
-                <a:latin typeface="Meiryo" pitchFamily="34" charset="0"/>
-                <a:ea typeface="Meiryo" pitchFamily="34" charset="-122"/>
-                <a:cs typeface="Meiryo" pitchFamily="34" charset="-120"/>
-              </a:rPr>
-              <a:t>［ 活動風景 ］</a:t>
-            </a:r>
-            <a:endParaRPr lang="en-US" sz="1200" dirty="0"/>
+              <a:rPr lang="en-US" sz="950" b="1" dirty="0">
+                <a:solidFill>
+                  <a:srgbClr val="2E6BB8"/>
+                </a:solidFill>
+                <a:latin typeface="Meiryo" pitchFamily="34" charset="0"/>
+                <a:ea typeface="Meiryo" pitchFamily="34" charset="-122"/>
+                <a:cs typeface="Meiryo" pitchFamily="34" charset="-120"/>
+              </a:rPr>
+              <a:t>▶</a:t>
+            </a:r>
+            <a:r>
+              <a:rPr lang="en-US" sz="950" b="1" dirty="0">
+                <a:solidFill>
+                  <a:srgbClr val="222222"/>
+                </a:solidFill>
+                <a:latin typeface="Meiryo" pitchFamily="34" charset="0"/>
+                <a:ea typeface="Meiryo" pitchFamily="34" charset="-122"/>
+                <a:cs typeface="Meiryo" pitchFamily="34" charset="-120"/>
+              </a:rPr>
+              <a:t>出典：</a:t>
+            </a:r>
+            <a:r>
+              <a:rPr lang="en-US" sz="950" dirty="0">
+                <a:solidFill>
+                  <a:srgbClr val="222222"/>
+                </a:solidFill>
+                <a:latin typeface="Meiryo" pitchFamily="34" charset="0"/>
+                <a:ea typeface="Meiryo" pitchFamily="34" charset="-122"/>
+                <a:cs typeface="Meiryo" pitchFamily="34" charset="-120"/>
+              </a:rPr>
+              <a:t>公式HP kihonjuku-yuuyuu.com／LITALICO発達ナビ</a:t>
+            </a:r>
+            <a:endParaRPr lang="en-US" sz="1050" dirty="0"/>
+          </a:p>
+          <a:p>
+            <a:pPr marL="0" indent="0">
+              <a:lnSpc>
+                <a:spcPct val="103000"/>
+              </a:lnSpc>
+              <a:buNone/>
+            </a:pPr>
+            <a:r>
+              <a:rPr lang="en-US" sz="950" b="1" dirty="0">
+                <a:solidFill>
+                  <a:srgbClr val="2E6BB8"/>
+                </a:solidFill>
+                <a:latin typeface="Meiryo" pitchFamily="34" charset="0"/>
+                <a:ea typeface="Meiryo" pitchFamily="34" charset="-122"/>
+                <a:cs typeface="Meiryo" pitchFamily="34" charset="-120"/>
+              </a:rPr>
+              <a:t>▶</a:t>
+            </a:r>
+            <a:r>
+              <a:rPr lang="en-US" sz="950" b="1" dirty="0">
+                <a:solidFill>
+                  <a:srgbClr val="222222"/>
+                </a:solidFill>
+                <a:latin typeface="Meiryo" pitchFamily="34" charset="0"/>
+                <a:ea typeface="Meiryo" pitchFamily="34" charset="-122"/>
+                <a:cs typeface="Meiryo" pitchFamily="34" charset="-120"/>
+              </a:rPr>
+              <a:t>要確認事項：</a:t>
+            </a:r>
+            <a:r>
+              <a:rPr lang="en-US" sz="950" dirty="0">
+                <a:solidFill>
+                  <a:srgbClr val="222222"/>
+                </a:solidFill>
+                <a:latin typeface="Meiryo" pitchFamily="34" charset="0"/>
+                <a:ea typeface="Meiryo" pitchFamily="34" charset="-122"/>
+                <a:cs typeface="Meiryo" pitchFamily="34" charset="-120"/>
+              </a:rPr>
+              <a:t>児童発達支援の受け入れ年齢（未就学の下限）、長期休暇中の開所時間、送迎の有無</a:t>
+            </a:r>
+            <a:endParaRPr lang="en-US" sz="1050" dirty="0"/>
           </a:p>
         </p:txBody>
       </p:sp>
@@ -2577,7 +2555,7 @@
         <p:spPr>
           <a:xfrm>
             <a:off x="502920" y="1783080"/>
-            <a:ext cx="6903720" cy="4434840"/>
+            <a:ext cx="6903720" cy="3474720"/>
           </a:xfrm>
           <a:prstGeom prst="rect">
             <a:avLst/>
@@ -2648,7 +2626,7 @@
         <p:spPr>
           <a:xfrm>
             <a:off x="704088" y="2331720"/>
-            <a:ext cx="6501384" cy="3758184"/>
+            <a:ext cx="6501384" cy="2852927"/>
           </a:xfrm>
           <a:prstGeom prst="rect">
             <a:avLst/>
@@ -2667,7 +2645,7 @@
               <a:buNone/>
             </a:pPr>
             <a:r>
-              <a:rPr lang="en-US" sz="1050" b="1" dirty="0">
+              <a:rPr lang="en-US" sz="1100" b="1" dirty="0">
                 <a:solidFill>
                   <a:srgbClr val="2E6BB8"/>
                 </a:solidFill>
@@ -2678,7 +2656,7 @@
               <a:t>▶</a:t>
             </a:r>
             <a:r>
-              <a:rPr lang="en-US" sz="1050" b="1" dirty="0">
+              <a:rPr lang="en-US" sz="1100" b="1" dirty="0">
                 <a:solidFill>
                   <a:srgbClr val="222222"/>
                 </a:solidFill>
@@ -2689,7 +2667,7 @@
               <a:t>対象：</a:t>
             </a:r>
             <a:r>
-              <a:rPr lang="en-US" sz="1050" dirty="0">
+              <a:rPr lang="en-US" sz="1100" dirty="0">
                 <a:solidFill>
                   <a:srgbClr val="222222"/>
                 </a:solidFill>
@@ -2709,7 +2687,7 @@
               <a:buNone/>
             </a:pPr>
             <a:r>
-              <a:rPr lang="en-US" sz="1050" b="1" dirty="0">
+              <a:rPr lang="en-US" sz="1100" b="1" dirty="0">
                 <a:solidFill>
                   <a:srgbClr val="2E6BB8"/>
                 </a:solidFill>
@@ -2720,7 +2698,7 @@
               <a:t>▶</a:t>
             </a:r>
             <a:r>
-              <a:rPr lang="en-US" sz="1050" b="1" dirty="0">
+              <a:rPr lang="en-US" sz="1100" b="1" dirty="0">
                 <a:solidFill>
                   <a:srgbClr val="222222"/>
                 </a:solidFill>
@@ -2731,7 +2709,7 @@
               <a:t>住所：</a:t>
             </a:r>
             <a:r>
-              <a:rPr lang="en-US" sz="1050" dirty="0">
+              <a:rPr lang="en-US" sz="1100" dirty="0">
                 <a:solidFill>
                   <a:srgbClr val="222222"/>
                 </a:solidFill>
@@ -2751,7 +2729,7 @@
               <a:buNone/>
             </a:pPr>
             <a:r>
-              <a:rPr lang="en-US" sz="1050" b="1" dirty="0">
+              <a:rPr lang="en-US" sz="1100" b="1" dirty="0">
                 <a:solidFill>
                   <a:srgbClr val="2E6BB8"/>
                 </a:solidFill>
@@ -2762,7 +2740,7 @@
               <a:t>▶</a:t>
             </a:r>
             <a:r>
-              <a:rPr lang="en-US" sz="1050" b="1" dirty="0">
+              <a:rPr lang="en-US" sz="1100" b="1" dirty="0">
                 <a:solidFill>
                   <a:srgbClr val="222222"/>
                 </a:solidFill>
@@ -2773,7 +2751,7 @@
               <a:t>TEL／HP：</a:t>
             </a:r>
             <a:r>
-              <a:rPr lang="en-US" sz="1050" dirty="0">
+              <a:rPr lang="en-US" sz="1100" dirty="0">
                 <a:solidFill>
                   <a:srgbClr val="222222"/>
                 </a:solidFill>
@@ -2793,7 +2771,7 @@
               <a:buNone/>
             </a:pPr>
             <a:r>
-              <a:rPr lang="en-US" sz="1050" b="1" dirty="0">
+              <a:rPr lang="en-US" sz="1100" b="1" dirty="0">
                 <a:solidFill>
                   <a:srgbClr val="2E6BB8"/>
                 </a:solidFill>
@@ -2804,7 +2782,7 @@
               <a:t>▶</a:t>
             </a:r>
             <a:r>
-              <a:rPr lang="en-US" sz="1050" b="1" dirty="0">
+              <a:rPr lang="en-US" sz="1100" b="1" dirty="0">
                 <a:solidFill>
                   <a:srgbClr val="222222"/>
                 </a:solidFill>
@@ -2815,7 +2793,7 @@
               <a:t>サービス提供時間：</a:t>
             </a:r>
             <a:r>
-              <a:rPr lang="en-US" sz="1050" dirty="0">
+              <a:rPr lang="en-US" sz="1100" dirty="0">
                 <a:solidFill>
                   <a:srgbClr val="222222"/>
                 </a:solidFill>
@@ -2835,7 +2813,7 @@
               <a:buNone/>
             </a:pPr>
             <a:r>
-              <a:rPr lang="en-US" sz="1050" b="1" dirty="0">
+              <a:rPr lang="en-US" sz="1100" b="1" dirty="0">
                 <a:solidFill>
                   <a:srgbClr val="2E6BB8"/>
                 </a:solidFill>
@@ -2846,7 +2824,7 @@
               <a:t>▶</a:t>
             </a:r>
             <a:r>
-              <a:rPr lang="en-US" sz="1050" b="1" dirty="0">
+              <a:rPr lang="en-US" sz="1100" b="1" dirty="0">
                 <a:solidFill>
                   <a:srgbClr val="222222"/>
                 </a:solidFill>
@@ -2857,7 +2835,7 @@
               <a:t>定員：</a:t>
             </a:r>
             <a:r>
-              <a:rPr lang="en-US" sz="1050" dirty="0">
+              <a:rPr lang="en-US" sz="1100" dirty="0">
                 <a:solidFill>
                   <a:srgbClr val="222222"/>
                 </a:solidFill>
@@ -2889,7 +2867,7 @@
               <a:buNone/>
             </a:pPr>
             <a:r>
-              <a:rPr lang="en-US" sz="1050" b="1" dirty="0">
+              <a:rPr lang="en-US" sz="1100" b="1" dirty="0">
                 <a:solidFill>
                   <a:srgbClr val="2E6BB8"/>
                 </a:solidFill>
@@ -2900,7 +2878,7 @@
               <a:t>▶</a:t>
             </a:r>
             <a:r>
-              <a:rPr lang="en-US" sz="1050" b="1" dirty="0">
+              <a:rPr lang="en-US" sz="1100" b="1" dirty="0">
                 <a:solidFill>
                   <a:srgbClr val="222222"/>
                 </a:solidFill>
@@ -2911,7 +2889,7 @@
               <a:t>療育プログラムの特徴：</a:t>
             </a:r>
             <a:r>
-              <a:rPr lang="en-US" sz="1050" dirty="0">
+              <a:rPr lang="en-US" sz="1100" dirty="0">
                 <a:solidFill>
                   <a:srgbClr val="222222"/>
                 </a:solidFill>
@@ -2934,7 +2912,7 @@
               <a:buNone/>
             </a:pPr>
             <a:r>
-              <a:rPr lang="en-US" sz="1050" dirty="0">
+              <a:rPr lang="en-US" sz="1100" dirty="0">
                 <a:solidFill>
                   <a:srgbClr val="222222"/>
                 </a:solidFill>
@@ -2957,7 +2935,7 @@
               <a:buNone/>
             </a:pPr>
             <a:r>
-              <a:rPr lang="en-US" sz="1050" dirty="0">
+              <a:rPr lang="en-US" sz="1100" dirty="0">
                 <a:solidFill>
                   <a:srgbClr val="222222"/>
                 </a:solidFill>
@@ -2968,75 +2946,6 @@
               <a:t>・八坂中央は公開情報が乏しく、開所時期・定員・提供時間は要確認。</a:t>
             </a:r>
             <a:endParaRPr lang="en-US" sz="1050" dirty="0"/>
-          </a:p>
-        </p:txBody>
-      </p:sp>
-      <p:sp>
-        <p:nvSpPr>
-          <p:cNvPr id="13" name="Text 11"/>
-          <p:cNvSpPr/>
-          <p:nvPr/>
-        </p:nvSpPr>
-        <p:spPr>
-          <a:xfrm>
-            <a:off x="7635240" y="1783080"/>
-            <a:ext cx="4069080" cy="2148840"/>
-          </a:xfrm>
-          <a:prstGeom prst="rect">
-            <a:avLst/>
-          </a:prstGeom>
-          <a:solidFill>
-            <a:srgbClr val="F4F6FA"/>
-          </a:solidFill>
-          <a:ln w="12700">
-            <a:solidFill>
-              <a:srgbClr val="9AA7B8"/>
-            </a:solidFill>
-            <a:prstDash val="dash"/>
-          </a:ln>
-        </p:spPr>
-        <p:txBody>
-          <a:bodyPr wrap="square" lIns="91440" tIns="45720" rIns="91440" bIns="45720" rtlCol="0" anchor="ctr"/>
-          <a:lstStyle/>
-          <a:p>
-            <a:pPr marL="0" indent="0" algn="ctr">
-              <a:lnSpc>
-                <a:spcPct val="110000"/>
-              </a:lnSpc>
-              <a:buNone/>
-            </a:pPr>
-            <a:r>
-              <a:rPr lang="en-US" sz="1200" b="1" dirty="0">
-                <a:solidFill>
-                  <a:srgbClr val="8A99AD"/>
-                </a:solidFill>
-                <a:latin typeface="Meiryo" pitchFamily="34" charset="0"/>
-                <a:ea typeface="Meiryo" pitchFamily="34" charset="-122"/>
-                <a:cs typeface="Meiryo" pitchFamily="34" charset="-120"/>
-              </a:rPr>
-              <a:t>［ 写真挿入エリア ］</a:t>
-            </a:r>
-            <a:endParaRPr lang="en-US" sz="1200" dirty="0"/>
-          </a:p>
-          <a:p>
-            <a:pPr marL="0" indent="0" algn="ctr">
-              <a:lnSpc>
-                <a:spcPct val="110000"/>
-              </a:lnSpc>
-              <a:buNone/>
-            </a:pPr>
-            <a:r>
-              <a:rPr lang="en-US" sz="950" dirty="0">
-                <a:solidFill>
-                  <a:srgbClr val="97A4B6"/>
-                </a:solidFill>
-                <a:latin typeface="Meiryo" pitchFamily="34" charset="0"/>
-                <a:ea typeface="Meiryo" pitchFamily="34" charset="-122"/>
-                <a:cs typeface="Meiryo" pitchFamily="34" charset="-120"/>
-              </a:rPr>
-              <a:t>（公式HP kihonjuku-yuuyuu.com／児発ねっとの施設写真を挿入）</a:t>
-            </a:r>
-            <a:endParaRPr lang="en-US" sz="1200" dirty="0"/>
           </a:p>
         </p:txBody>
       </p:sp>
@@ -3048,8 +2957,8 @@
         </p:nvSpPr>
         <p:spPr>
           <a:xfrm>
-            <a:off x="7635240" y="4069080"/>
-            <a:ext cx="4069080" cy="2148840"/>
+            <a:off x="7635240" y="1783080"/>
+            <a:ext cx="4069080" cy="3474720"/>
           </a:xfrm>
           <a:prstGeom prst="rect">
             <a:avLst/>
@@ -3073,7 +2982,7 @@
         </p:nvSpPr>
         <p:spPr>
           <a:xfrm>
-            <a:off x="7818120" y="4187952"/>
+            <a:off x="7818120" y="1901952"/>
             <a:ext cx="3703320" cy="320040"/>
           </a:xfrm>
           <a:prstGeom prst="rect">
@@ -3112,8 +3021,8 @@
         </p:nvSpPr>
         <p:spPr>
           <a:xfrm>
-            <a:off x="7818120" y="4526280"/>
-            <a:ext cx="3794760" cy="1600200"/>
+            <a:off x="7818120" y="2286000"/>
+            <a:ext cx="3703320" cy="2907791"/>
           </a:xfrm>
           <a:prstGeom prst="rect">
             <a:avLst/>
@@ -3133,7 +3042,7 @@
               <a:buChar char="•"/>
             </a:pPr>
             <a:r>
-              <a:rPr lang="en-US" sz="1000" dirty="0">
+              <a:rPr lang="en-US" sz="1050" dirty="0">
                 <a:solidFill>
                   <a:srgbClr val="222222"/>
                 </a:solidFill>
@@ -3157,7 +3066,7 @@
               <a:buChar char="•"/>
             </a:pPr>
             <a:r>
-              <a:rPr lang="en-US" sz="1000" dirty="0">
+              <a:rPr lang="en-US" sz="1050" dirty="0">
                 <a:solidFill>
                   <a:srgbClr val="222222"/>
                 </a:solidFill>
@@ -3181,7 +3090,7 @@
               <a:buChar char="•"/>
             </a:pPr>
             <a:r>
-              <a:rPr lang="en-US" sz="1000" dirty="0">
+              <a:rPr lang="en-US" sz="1050" dirty="0">
                 <a:solidFill>
                   <a:srgbClr val="222222"/>
                 </a:solidFill>
@@ -3196,152 +3105,199 @@
               <a:ea typeface="メイリオ" panose="020B0604030504040204" pitchFamily="50" charset="-128"/>
             </a:endParaRPr>
           </a:p>
+          <a:p>
+            <a:pPr marL="342900" indent="-342900">
+              <a:spcAft>
+                <a:spcPts val="700"/>
+              </a:spcAft>
+              <a:buSzPct val="100000"/>
+              <a:buChar char="•"/>
+            </a:pPr>
+            <a:r>
+              <a:rPr lang="en-US" sz="1050" dirty="0">
+                <a:solidFill>
+                  <a:srgbClr val="222222"/>
+                </a:solidFill>
+                <a:latin typeface="メイリオ" panose="020B0604030504040204" pitchFamily="50" charset="-128"/>
+                <a:ea typeface="メイリオ" panose="020B0604030504040204" pitchFamily="50" charset="-128"/>
+                <a:cs typeface="Meiryo" pitchFamily="34" charset="-120"/>
+              </a:rPr>
+              <a:t>八坂台エリアへの新規出店は、基本塾3拠点との正面競合となる点に留意が必要。</a:t>
+            </a:r>
+            <a:endParaRPr lang="en-US" sz="1000" dirty="0">
+              <a:latin typeface="メイリオ" panose="020B0604030504040204" pitchFamily="50" charset="-128"/>
+              <a:ea typeface="メイリオ" panose="020B0604030504040204" pitchFamily="50" charset="-128"/>
+            </a:endParaRPr>
+          </a:p>
         </p:txBody>
       </p:sp>
       <p:sp>
         <p:nvSpPr>
-          <p:cNvPr id="900" name="PhotoSlot 1"/>
+          <p:cNvPr id="940" name="FootBG"/>
           <p:cNvSpPr/>
           <p:nvPr/>
         </p:nvSpPr>
         <p:spPr>
           <a:xfrm>
-            <a:off x="868680" y="4882896"/>
-            <a:ext cx="1965960" cy="1152144"/>
+            <a:off x="502920" y="5394960"/>
+            <a:ext cx="11201400" cy="896112"/>
           </a:xfrm>
           <a:prstGeom prst="rect">
             <a:avLst/>
           </a:prstGeom>
           <a:solidFill>
-            <a:srgbClr val="F4F6FA"/>
+            <a:srgbClr val="EEF2F8"/>
           </a:solidFill>
           <a:ln w="12700">
             <a:solidFill>
               <a:srgbClr val="9AA7B8"/>
             </a:solidFill>
-            <a:prstDash val="dash"/>
+            <a:prstDash val="solid"/>
           </a:ln>
         </p:spPr>
-        <p:txBody>
-          <a:bodyPr wrap="square" lIns="91440" tIns="45720" rIns="91440" bIns="45720" rtlCol="0" anchor="ctr"/>
-          <a:lstStyle/>
-          <a:p>
-            <a:pPr marL="0" indent="0" algn="ctr">
-              <a:lnSpc>
-                <a:spcPct val="110000"/>
-              </a:lnSpc>
-              <a:buNone/>
-            </a:pPr>
-            <a:r>
-              <a:rPr lang="en-US" sz="900" b="1" dirty="0">
-                <a:solidFill>
-                  <a:srgbClr val="8A99AD"/>
-                </a:solidFill>
-                <a:latin typeface="Meiryo" pitchFamily="34" charset="0"/>
-                <a:ea typeface="Meiryo" pitchFamily="34" charset="-122"/>
-                <a:cs typeface="Meiryo" pitchFamily="34" charset="-120"/>
-              </a:rPr>
-              <a:t>［ 外観 / 建物 ］</a:t>
-            </a:r>
-            <a:endParaRPr lang="en-US" sz="1200" dirty="0"/>
-          </a:p>
-        </p:txBody>
       </p:sp>
       <p:sp>
         <p:nvSpPr>
-          <p:cNvPr id="901" name="PhotoSlot 2"/>
+          <p:cNvPr id="941" name="FootTitle"/>
           <p:cNvSpPr/>
           <p:nvPr/>
         </p:nvSpPr>
         <p:spPr>
           <a:xfrm>
-            <a:off x="2971800" y="4882896"/>
-            <a:ext cx="1965960" cy="1152144"/>
+            <a:off x="713232" y="5477256"/>
+            <a:ext cx="10789920" cy="274320"/>
           </a:xfrm>
           <a:prstGeom prst="rect">
             <a:avLst/>
           </a:prstGeom>
-          <a:solidFill>
-            <a:srgbClr val="F4F6FA"/>
-          </a:solidFill>
-          <a:ln w="12700">
-            <a:solidFill>
-              <a:srgbClr val="9AA7B8"/>
-            </a:solidFill>
-            <a:prstDash val="dash"/>
-          </a:ln>
+          <a:noFill/>
+          <a:ln/>
         </p:spPr>
         <p:txBody>
-          <a:bodyPr wrap="square" lIns="91440" tIns="45720" rIns="91440" bIns="45720" rtlCol="0" anchor="ctr"/>
+          <a:bodyPr wrap="square" lIns="0" tIns="0" rIns="0" bIns="0" rtlCol="0" anchor="ctr"/>
           <a:lstStyle/>
           <a:p>
-            <a:pPr marL="0" indent="0" algn="ctr">
-              <a:lnSpc>
-                <a:spcPct val="110000"/>
-              </a:lnSpc>
+            <a:pPr marL="0" indent="0">
               <a:buNone/>
             </a:pPr>
             <a:r>
-              <a:rPr lang="en-US" sz="900" b="1" dirty="0">
-                <a:solidFill>
-                  <a:srgbClr val="8A99AD"/>
-                </a:solidFill>
-                <a:latin typeface="Meiryo" pitchFamily="34" charset="0"/>
-                <a:ea typeface="Meiryo" pitchFamily="34" charset="-122"/>
-                <a:cs typeface="Meiryo" pitchFamily="34" charset="-120"/>
-              </a:rPr>
-              <a:t>［ 室内・教室 ］</a:t>
-            </a:r>
-            <a:endParaRPr lang="en-US" sz="1200" dirty="0"/>
+              <a:rPr lang="en-US" sz="1250" b="1" dirty="0">
+                <a:solidFill>
+                  <a:srgbClr val="1B3A6B"/>
+                </a:solidFill>
+                <a:latin typeface="Meiryo" pitchFamily="34" charset="0"/>
+                <a:ea typeface="Meiryo" pitchFamily="34" charset="-122"/>
+                <a:cs typeface="Meiryo" pitchFamily="34" charset="-120"/>
+              </a:rPr>
+              <a:t>出典 ／ 要確認事項</a:t>
+            </a:r>
+            <a:endParaRPr lang="en-US" sz="1250" dirty="0"/>
           </a:p>
         </p:txBody>
       </p:sp>
       <p:sp>
         <p:nvSpPr>
-          <p:cNvPr id="902" name="PhotoSlot 3"/>
+          <p:cNvPr id="13" name="FootBody"/>
           <p:cNvSpPr/>
           <p:nvPr/>
         </p:nvSpPr>
         <p:spPr>
           <a:xfrm>
-            <a:off x="5074920" y="4882896"/>
-            <a:ext cx="1965960" cy="1152144"/>
+            <a:off x="713232" y="5779008"/>
+            <a:ext cx="10789920" cy="475488"/>
           </a:xfrm>
           <a:prstGeom prst="rect">
             <a:avLst/>
           </a:prstGeom>
-          <a:solidFill>
-            <a:srgbClr val="F4F6FA"/>
-          </a:solidFill>
-          <a:ln w="12700">
-            <a:solidFill>
-              <a:srgbClr val="9AA7B8"/>
-            </a:solidFill>
-            <a:prstDash val="dash"/>
-          </a:ln>
+          <a:noFill/>
+          <a:ln/>
         </p:spPr>
         <p:txBody>
-          <a:bodyPr wrap="square" lIns="91440" tIns="45720" rIns="91440" bIns="45720" rtlCol="0" anchor="ctr"/>
+          <a:bodyPr wrap="square" lIns="0" tIns="0" rIns="0" bIns="0" rtlCol="0" anchor="t"/>
           <a:lstStyle/>
           <a:p>
-            <a:pPr marL="0" indent="0" algn="ctr">
+            <a:pPr marL="0" indent="0">
               <a:lnSpc>
-                <a:spcPct val="110000"/>
+                <a:spcPct val="103000"/>
               </a:lnSpc>
               <a:buNone/>
             </a:pPr>
             <a:r>
-              <a:rPr lang="en-US" sz="900" b="1" dirty="0">
-                <a:solidFill>
-                  <a:srgbClr val="8A99AD"/>
-                </a:solidFill>
-                <a:latin typeface="Meiryo" pitchFamily="34" charset="0"/>
-                <a:ea typeface="Meiryo" pitchFamily="34" charset="-122"/>
-                <a:cs typeface="Meiryo" pitchFamily="34" charset="-120"/>
-              </a:rPr>
-              <a:t>［ 活動風景 ］</a:t>
-            </a:r>
-            <a:endParaRPr lang="en-US" sz="1200" dirty="0"/>
+              <a:rPr lang="en-US" sz="950" b="1" dirty="0">
+                <a:solidFill>
+                  <a:srgbClr val="2E6BB8"/>
+                </a:solidFill>
+                <a:latin typeface="Meiryo" pitchFamily="34" charset="0"/>
+                <a:ea typeface="Meiryo" pitchFamily="34" charset="-122"/>
+                <a:cs typeface="Meiryo" pitchFamily="34" charset="-120"/>
+              </a:rPr>
+              <a:t>▶</a:t>
+            </a:r>
+            <a:r>
+              <a:rPr lang="en-US" sz="950" b="1" dirty="0">
+                <a:solidFill>
+                  <a:srgbClr val="222222"/>
+                </a:solidFill>
+                <a:latin typeface="Meiryo" pitchFamily="34" charset="0"/>
+                <a:ea typeface="Meiryo" pitchFamily="34" charset="-122"/>
+                <a:cs typeface="Meiryo" pitchFamily="34" charset="-120"/>
+              </a:rPr>
+              <a:t>出典：</a:t>
+            </a:r>
+            <a:r>
+              <a:rPr lang="en-US" sz="950" dirty="0">
+                <a:solidFill>
+                  <a:srgbClr val="222222"/>
+                </a:solidFill>
+                <a:latin typeface="Meiryo" pitchFamily="34" charset="0"/>
+                <a:ea typeface="Meiryo" pitchFamily="34" charset="-122"/>
+                <a:cs typeface="Meiryo" pitchFamily="34" charset="-120"/>
+              </a:rPr>
+              <a:t>公式HP kihonjuku-yuuyuu.com／児発ねっと／東金市公式サイト</a:t>
+            </a:r>
+            <a:endParaRPr lang="en-US" sz="1050" dirty="0"/>
+          </a:p>
+          <a:p>
+            <a:pPr marL="0" indent="0">
+              <a:lnSpc>
+                <a:spcPct val="103000"/>
+              </a:lnSpc>
+              <a:buNone/>
+            </a:pPr>
+            <a:r>
+              <a:rPr lang="en-US" sz="950" b="1" dirty="0">
+                <a:solidFill>
+                  <a:srgbClr val="2E6BB8"/>
+                </a:solidFill>
+                <a:latin typeface="Meiryo" pitchFamily="34" charset="0"/>
+                <a:ea typeface="Meiryo" pitchFamily="34" charset="-122"/>
+                <a:cs typeface="Meiryo" pitchFamily="34" charset="-120"/>
+              </a:rPr>
+              <a:t>▶</a:t>
+            </a:r>
+            <a:r>
+              <a:rPr lang="en-US" sz="950" b="1" dirty="0">
+                <a:solidFill>
+                  <a:srgbClr val="222222"/>
+                </a:solidFill>
+                <a:latin typeface="Meiryo" pitchFamily="34" charset="0"/>
+                <a:ea typeface="Meiryo" pitchFamily="34" charset="-122"/>
+                <a:cs typeface="Meiryo" pitchFamily="34" charset="-120"/>
+              </a:rPr>
+              <a:t>要確認事項：</a:t>
+            </a:r>
+            <a:r>
+              <a:rPr lang="en-US" sz="950" dirty="0">
+                <a:solidFill>
+                  <a:srgbClr val="222222"/>
+                </a:solidFill>
+                <a:latin typeface="Meiryo" pitchFamily="34" charset="0"/>
+                <a:ea typeface="Meiryo" pitchFamily="34" charset="-122"/>
+                <a:cs typeface="Meiryo" pitchFamily="34" charset="-120"/>
+              </a:rPr>
+              <a:t>八坂中央の開所時期・正確な所在地・定員・電話番号、八坂西の定員と提供時間</a:t>
+            </a:r>
+            <a:endParaRPr lang="en-US" sz="1050" dirty="0"/>
           </a:p>
         </p:txBody>
       </p:sp>
@@ -3608,7 +3564,7 @@
         <p:spPr>
           <a:xfrm>
             <a:off x="502920" y="1783080"/>
-            <a:ext cx="6903720" cy="4434840"/>
+            <a:ext cx="6903720" cy="3474720"/>
           </a:xfrm>
           <a:prstGeom prst="rect">
             <a:avLst/>
@@ -3679,7 +3635,7 @@
         <p:spPr>
           <a:xfrm>
             <a:off x="704088" y="2331720"/>
-            <a:ext cx="6501384" cy="3758184"/>
+            <a:ext cx="6501384" cy="2852927"/>
           </a:xfrm>
           <a:prstGeom prst="rect">
             <a:avLst/>
@@ -3698,7 +3654,7 @@
               <a:buNone/>
             </a:pPr>
             <a:r>
-              <a:rPr lang="en-US" sz="1050" b="1" dirty="0">
+              <a:rPr lang="en-US" sz="1100" b="1" dirty="0">
                 <a:solidFill>
                   <a:srgbClr val="2E6BB8"/>
                 </a:solidFill>
@@ -3709,7 +3665,7 @@
               <a:t>▶</a:t>
             </a:r>
             <a:r>
-              <a:rPr lang="en-US" sz="1050" b="1" dirty="0">
+              <a:rPr lang="en-US" sz="1100" b="1" dirty="0">
                 <a:solidFill>
                   <a:srgbClr val="222222"/>
                 </a:solidFill>
@@ -3720,7 +3676,7 @@
               <a:t>対象：</a:t>
             </a:r>
             <a:r>
-              <a:rPr lang="en-US" sz="1050" dirty="0">
+              <a:rPr lang="en-US" sz="1100" dirty="0">
                 <a:solidFill>
                   <a:srgbClr val="222222"/>
                 </a:solidFill>
@@ -3740,7 +3696,7 @@
               <a:buNone/>
             </a:pPr>
             <a:r>
-              <a:rPr lang="en-US" sz="1050" b="1" dirty="0">
+              <a:rPr lang="en-US" sz="1100" b="1" dirty="0">
                 <a:solidFill>
                   <a:srgbClr val="2E6BB8"/>
                 </a:solidFill>
@@ -3751,7 +3707,7 @@
               <a:t>▶</a:t>
             </a:r>
             <a:r>
-              <a:rPr lang="en-US" sz="1050" b="1" dirty="0">
+              <a:rPr lang="en-US" sz="1100" b="1" dirty="0">
                 <a:solidFill>
                   <a:srgbClr val="222222"/>
                 </a:solidFill>
@@ -3762,7 +3718,7 @@
               <a:t>住所：</a:t>
             </a:r>
             <a:r>
-              <a:rPr lang="en-US" sz="1050" dirty="0">
+              <a:rPr lang="en-US" sz="1100" dirty="0">
                 <a:solidFill>
                   <a:srgbClr val="222222"/>
                 </a:solidFill>
@@ -3782,7 +3738,7 @@
               <a:buNone/>
             </a:pPr>
             <a:r>
-              <a:rPr lang="en-US" sz="1050" b="1" dirty="0">
+              <a:rPr lang="en-US" sz="1100" b="1" dirty="0">
                 <a:solidFill>
                   <a:srgbClr val="2E6BB8"/>
                 </a:solidFill>
@@ -3793,7 +3749,7 @@
               <a:t>▶</a:t>
             </a:r>
             <a:r>
-              <a:rPr lang="en-US" sz="1050" b="1" dirty="0">
+              <a:rPr lang="en-US" sz="1100" b="1" dirty="0">
                 <a:solidFill>
                   <a:srgbClr val="222222"/>
                 </a:solidFill>
@@ -3804,7 +3760,7 @@
               <a:t>TEL／HP：</a:t>
             </a:r>
             <a:r>
-              <a:rPr lang="en-US" sz="1050" dirty="0">
+              <a:rPr lang="en-US" sz="1100" dirty="0">
                 <a:solidFill>
                   <a:srgbClr val="222222"/>
                 </a:solidFill>
@@ -3824,7 +3780,7 @@
               <a:buNone/>
             </a:pPr>
             <a:r>
-              <a:rPr lang="en-US" sz="1050" b="1" dirty="0">
+              <a:rPr lang="en-US" sz="1100" b="1" dirty="0">
                 <a:solidFill>
                   <a:srgbClr val="2E6BB8"/>
                 </a:solidFill>
@@ -3835,7 +3791,7 @@
               <a:t>▶</a:t>
             </a:r>
             <a:r>
-              <a:rPr lang="en-US" sz="1050" b="1" dirty="0">
+              <a:rPr lang="en-US" sz="1100" b="1" dirty="0">
                 <a:solidFill>
                   <a:srgbClr val="222222"/>
                 </a:solidFill>
@@ -3846,7 +3802,7 @@
               <a:t>サービス提供時間：</a:t>
             </a:r>
             <a:r>
-              <a:rPr lang="en-US" sz="1050" dirty="0">
+              <a:rPr lang="en-US" sz="1100" dirty="0">
                 <a:solidFill>
                   <a:srgbClr val="222222"/>
                 </a:solidFill>
@@ -3866,7 +3822,7 @@
               <a:buNone/>
             </a:pPr>
             <a:r>
-              <a:rPr lang="en-US" sz="1050" b="1" dirty="0">
+              <a:rPr lang="en-US" sz="1100" b="1" dirty="0">
                 <a:solidFill>
                   <a:srgbClr val="2E6BB8"/>
                 </a:solidFill>
@@ -3877,7 +3833,7 @@
               <a:t>▶</a:t>
             </a:r>
             <a:r>
-              <a:rPr lang="en-US" sz="1050" b="1" dirty="0">
+              <a:rPr lang="en-US" sz="1100" b="1" dirty="0">
                 <a:solidFill>
                   <a:srgbClr val="222222"/>
                 </a:solidFill>
@@ -3888,7 +3844,7 @@
               <a:t>定員：</a:t>
             </a:r>
             <a:r>
-              <a:rPr lang="en-US" sz="1050" dirty="0">
+              <a:rPr lang="en-US" sz="1100" dirty="0">
                 <a:solidFill>
                   <a:srgbClr val="222222"/>
                 </a:solidFill>
@@ -3920,7 +3876,7 @@
               <a:buNone/>
             </a:pPr>
             <a:r>
-              <a:rPr lang="en-US" sz="1050" b="1" dirty="0">
+              <a:rPr lang="en-US" sz="1100" b="1" dirty="0">
                 <a:solidFill>
                   <a:srgbClr val="2E6BB8"/>
                 </a:solidFill>
@@ -3931,7 +3887,7 @@
               <a:t>▶</a:t>
             </a:r>
             <a:r>
-              <a:rPr lang="en-US" sz="1050" b="1" dirty="0">
+              <a:rPr lang="en-US" sz="1100" b="1" dirty="0">
                 <a:solidFill>
                   <a:srgbClr val="222222"/>
                 </a:solidFill>
@@ -3942,7 +3898,7 @@
               <a:t>療育プログラムの特徴：</a:t>
             </a:r>
             <a:r>
-              <a:rPr lang="en-US" sz="1050" dirty="0">
+              <a:rPr lang="en-US" sz="1100" dirty="0">
                 <a:solidFill>
                   <a:srgbClr val="222222"/>
                 </a:solidFill>
@@ -3965,7 +3921,7 @@
               <a:buNone/>
             </a:pPr>
             <a:r>
-              <a:rPr lang="en-US" sz="1050" dirty="0">
+              <a:rPr lang="en-US" sz="1100" dirty="0">
                 <a:solidFill>
                   <a:srgbClr val="222222"/>
                 </a:solidFill>
@@ -3988,7 +3944,7 @@
               <a:buNone/>
             </a:pPr>
             <a:r>
-              <a:rPr lang="en-US" sz="1050" dirty="0">
+              <a:rPr lang="en-US" sz="1100" dirty="0">
                 <a:solidFill>
                   <a:srgbClr val="222222"/>
                 </a:solidFill>
@@ -3999,75 +3955,6 @@
               <a:t>・Web上の公開情報は極めて限定的で、支援プログラムの詳細は現地・電話での確認が必要。</a:t>
             </a:r>
             <a:endParaRPr lang="en-US" sz="1050" dirty="0"/>
-          </a:p>
-        </p:txBody>
-      </p:sp>
-      <p:sp>
-        <p:nvSpPr>
-          <p:cNvPr id="13" name="Text 11"/>
-          <p:cNvSpPr/>
-          <p:nvPr/>
-        </p:nvSpPr>
-        <p:spPr>
-          <a:xfrm>
-            <a:off x="7635240" y="1783080"/>
-            <a:ext cx="4069080" cy="2148840"/>
-          </a:xfrm>
-          <a:prstGeom prst="rect">
-            <a:avLst/>
-          </a:prstGeom>
-          <a:solidFill>
-            <a:srgbClr val="F4F6FA"/>
-          </a:solidFill>
-          <a:ln w="12700">
-            <a:solidFill>
-              <a:srgbClr val="9AA7B8"/>
-            </a:solidFill>
-            <a:prstDash val="dash"/>
-          </a:ln>
-        </p:spPr>
-        <p:txBody>
-          <a:bodyPr wrap="square" lIns="91440" tIns="45720" rIns="91440" bIns="45720" rtlCol="0" anchor="ctr"/>
-          <a:lstStyle/>
-          <a:p>
-            <a:pPr marL="0" indent="0" algn="ctr">
-              <a:lnSpc>
-                <a:spcPct val="110000"/>
-              </a:lnSpc>
-              <a:buNone/>
-            </a:pPr>
-            <a:r>
-              <a:rPr lang="en-US" sz="1200" b="1" dirty="0">
-                <a:solidFill>
-                  <a:srgbClr val="8A99AD"/>
-                </a:solidFill>
-                <a:latin typeface="Meiryo" pitchFamily="34" charset="0"/>
-                <a:ea typeface="Meiryo" pitchFamily="34" charset="-122"/>
-                <a:cs typeface="Meiryo" pitchFamily="34" charset="-120"/>
-              </a:rPr>
-              <a:t>［ 写真挿入エリア ］</a:t>
-            </a:r>
-            <a:endParaRPr lang="en-US" sz="1200" dirty="0"/>
-          </a:p>
-          <a:p>
-            <a:pPr marL="0" indent="0" algn="ctr">
-              <a:lnSpc>
-                <a:spcPct val="110000"/>
-              </a:lnSpc>
-              <a:buNone/>
-            </a:pPr>
-            <a:r>
-              <a:rPr lang="en-US" sz="950" dirty="0">
-                <a:solidFill>
-                  <a:srgbClr val="97A4B6"/>
-                </a:solidFill>
-                <a:latin typeface="Meiryo" pitchFamily="34" charset="0"/>
-                <a:ea typeface="Meiryo" pitchFamily="34" charset="-122"/>
-                <a:cs typeface="Meiryo" pitchFamily="34" charset="-120"/>
-              </a:rPr>
-              <a:t>（東金市公式／発達ナビの施設外観・保育室の写真を挿入）</a:t>
-            </a:r>
-            <a:endParaRPr lang="en-US" sz="1200" dirty="0"/>
           </a:p>
         </p:txBody>
       </p:sp>
@@ -4079,8 +3966,8 @@
         </p:nvSpPr>
         <p:spPr>
           <a:xfrm>
-            <a:off x="7635240" y="4069080"/>
-            <a:ext cx="4069080" cy="2148840"/>
+            <a:off x="7635240" y="1783080"/>
+            <a:ext cx="4069080" cy="3474720"/>
           </a:xfrm>
           <a:prstGeom prst="rect">
             <a:avLst/>
@@ -4104,7 +3991,7 @@
         </p:nvSpPr>
         <p:spPr>
           <a:xfrm>
-            <a:off x="7818120" y="4187952"/>
+            <a:off x="7818120" y="1901952"/>
             <a:ext cx="3703320" cy="320040"/>
           </a:xfrm>
           <a:prstGeom prst="rect">
@@ -4143,8 +4030,8 @@
         </p:nvSpPr>
         <p:spPr>
           <a:xfrm>
-            <a:off x="7818120" y="4526280"/>
-            <a:ext cx="3794760" cy="1600200"/>
+            <a:off x="7818120" y="2286000"/>
+            <a:ext cx="3703320" cy="2907791"/>
           </a:xfrm>
           <a:prstGeom prst="rect">
             <a:avLst/>
@@ -4164,7 +4051,7 @@
               <a:buChar char="•"/>
             </a:pPr>
             <a:r>
-              <a:rPr lang="en-US" sz="1000" dirty="0">
+              <a:rPr lang="en-US" sz="1050" dirty="0">
                 <a:solidFill>
                   <a:srgbClr val="222222"/>
                 </a:solidFill>
@@ -4188,7 +4075,7 @@
               <a:buChar char="•"/>
             </a:pPr>
             <a:r>
-              <a:rPr lang="en-US" sz="1000" dirty="0">
+              <a:rPr lang="en-US" sz="1050" dirty="0">
                 <a:solidFill>
                   <a:srgbClr val="222222"/>
                 </a:solidFill>
@@ -4212,7 +4099,7 @@
               <a:buChar char="•"/>
             </a:pPr>
             <a:r>
-              <a:rPr lang="en-US" sz="1000" dirty="0">
+              <a:rPr lang="en-US" sz="1050" dirty="0">
                 <a:solidFill>
                   <a:srgbClr val="222222"/>
                 </a:solidFill>
@@ -4227,152 +4114,199 @@
               <a:ea typeface="メイリオ" panose="020B0604030504040204" pitchFamily="50" charset="-128"/>
             </a:endParaRPr>
           </a:p>
+          <a:p>
+            <a:pPr marL="342900" indent="-342900">
+              <a:spcAft>
+                <a:spcPts val="700"/>
+              </a:spcAft>
+              <a:buSzPct val="100000"/>
+              <a:buChar char="•"/>
+            </a:pPr>
+            <a:r>
+              <a:rPr lang="en-US" sz="1050" dirty="0">
+                <a:solidFill>
+                  <a:srgbClr val="222222"/>
+                </a:solidFill>
+                <a:latin typeface="メイリオ" panose="020B0604030504040204" pitchFamily="50" charset="-128"/>
+                <a:ea typeface="メイリオ" panose="020B0604030504040204" pitchFamily="50" charset="-128"/>
+                <a:cs typeface="Meiryo" pitchFamily="34" charset="-120"/>
+              </a:rPr>
+              <a:t>市北部（家之子・丘山方面）は事業所が少なく、送迎圏として狙える余地がある。</a:t>
+            </a:r>
+            <a:endParaRPr lang="en-US" sz="1000" dirty="0">
+              <a:latin typeface="メイリオ" panose="020B0604030504040204" pitchFamily="50" charset="-128"/>
+              <a:ea typeface="メイリオ" panose="020B0604030504040204" pitchFamily="50" charset="-128"/>
+            </a:endParaRPr>
+          </a:p>
         </p:txBody>
       </p:sp>
       <p:sp>
         <p:nvSpPr>
-          <p:cNvPr id="900" name="PhotoSlot 1"/>
+          <p:cNvPr id="940" name="FootBG"/>
           <p:cNvSpPr/>
           <p:nvPr/>
         </p:nvSpPr>
         <p:spPr>
           <a:xfrm>
-            <a:off x="868680" y="4882896"/>
-            <a:ext cx="1965960" cy="1152144"/>
+            <a:off x="502920" y="5394960"/>
+            <a:ext cx="11201400" cy="896112"/>
           </a:xfrm>
           <a:prstGeom prst="rect">
             <a:avLst/>
           </a:prstGeom>
           <a:solidFill>
-            <a:srgbClr val="F4F6FA"/>
+            <a:srgbClr val="EEF2F8"/>
           </a:solidFill>
           <a:ln w="12700">
             <a:solidFill>
               <a:srgbClr val="9AA7B8"/>
             </a:solidFill>
-            <a:prstDash val="dash"/>
+            <a:prstDash val="solid"/>
           </a:ln>
         </p:spPr>
-        <p:txBody>
-          <a:bodyPr wrap="square" lIns="91440" tIns="45720" rIns="91440" bIns="45720" rtlCol="0" anchor="ctr"/>
-          <a:lstStyle/>
-          <a:p>
-            <a:pPr marL="0" indent="0" algn="ctr">
-              <a:lnSpc>
-                <a:spcPct val="110000"/>
-              </a:lnSpc>
-              <a:buNone/>
-            </a:pPr>
-            <a:r>
-              <a:rPr lang="en-US" sz="900" b="1" dirty="0">
-                <a:solidFill>
-                  <a:srgbClr val="8A99AD"/>
-                </a:solidFill>
-                <a:latin typeface="Meiryo" pitchFamily="34" charset="0"/>
-                <a:ea typeface="Meiryo" pitchFamily="34" charset="-122"/>
-                <a:cs typeface="Meiryo" pitchFamily="34" charset="-120"/>
-              </a:rPr>
-              <a:t>［ 外観 / 建物 ］</a:t>
-            </a:r>
-            <a:endParaRPr lang="en-US" sz="1200" dirty="0"/>
-          </a:p>
-        </p:txBody>
       </p:sp>
       <p:sp>
         <p:nvSpPr>
-          <p:cNvPr id="901" name="PhotoSlot 2"/>
+          <p:cNvPr id="941" name="FootTitle"/>
           <p:cNvSpPr/>
           <p:nvPr/>
         </p:nvSpPr>
         <p:spPr>
           <a:xfrm>
-            <a:off x="2971800" y="4882896"/>
-            <a:ext cx="1965960" cy="1152144"/>
+            <a:off x="713232" y="5477256"/>
+            <a:ext cx="10789920" cy="274320"/>
           </a:xfrm>
           <a:prstGeom prst="rect">
             <a:avLst/>
           </a:prstGeom>
-          <a:solidFill>
-            <a:srgbClr val="F4F6FA"/>
-          </a:solidFill>
-          <a:ln w="12700">
-            <a:solidFill>
-              <a:srgbClr val="9AA7B8"/>
-            </a:solidFill>
-            <a:prstDash val="dash"/>
-          </a:ln>
+          <a:noFill/>
+          <a:ln/>
         </p:spPr>
         <p:txBody>
-          <a:bodyPr wrap="square" lIns="91440" tIns="45720" rIns="91440" bIns="45720" rtlCol="0" anchor="ctr"/>
+          <a:bodyPr wrap="square" lIns="0" tIns="0" rIns="0" bIns="0" rtlCol="0" anchor="ctr"/>
           <a:lstStyle/>
           <a:p>
-            <a:pPr marL="0" indent="0" algn="ctr">
-              <a:lnSpc>
-                <a:spcPct val="110000"/>
-              </a:lnSpc>
+            <a:pPr marL="0" indent="0">
               <a:buNone/>
             </a:pPr>
             <a:r>
-              <a:rPr lang="en-US" sz="900" b="1" dirty="0">
-                <a:solidFill>
-                  <a:srgbClr val="8A99AD"/>
-                </a:solidFill>
-                <a:latin typeface="Meiryo" pitchFamily="34" charset="0"/>
-                <a:ea typeface="Meiryo" pitchFamily="34" charset="-122"/>
-                <a:cs typeface="Meiryo" pitchFamily="34" charset="-120"/>
-              </a:rPr>
-              <a:t>［ 室内・教室 ］</a:t>
-            </a:r>
-            <a:endParaRPr lang="en-US" sz="1200" dirty="0"/>
+              <a:rPr lang="en-US" sz="1250" b="1" dirty="0">
+                <a:solidFill>
+                  <a:srgbClr val="1B3A6B"/>
+                </a:solidFill>
+                <a:latin typeface="Meiryo" pitchFamily="34" charset="0"/>
+                <a:ea typeface="Meiryo" pitchFamily="34" charset="-122"/>
+                <a:cs typeface="Meiryo" pitchFamily="34" charset="-120"/>
+              </a:rPr>
+              <a:t>出典 ／ 要確認事項</a:t>
+            </a:r>
+            <a:endParaRPr lang="en-US" sz="1250" dirty="0"/>
           </a:p>
         </p:txBody>
       </p:sp>
       <p:sp>
         <p:nvSpPr>
-          <p:cNvPr id="902" name="PhotoSlot 3"/>
+          <p:cNvPr id="13" name="FootBody"/>
           <p:cNvSpPr/>
           <p:nvPr/>
         </p:nvSpPr>
         <p:spPr>
           <a:xfrm>
-            <a:off x="5074920" y="4882896"/>
-            <a:ext cx="1965960" cy="1152144"/>
+            <a:off x="713232" y="5779008"/>
+            <a:ext cx="10789920" cy="475488"/>
           </a:xfrm>
           <a:prstGeom prst="rect">
             <a:avLst/>
           </a:prstGeom>
-          <a:solidFill>
-            <a:srgbClr val="F4F6FA"/>
-          </a:solidFill>
-          <a:ln w="12700">
-            <a:solidFill>
-              <a:srgbClr val="9AA7B8"/>
-            </a:solidFill>
-            <a:prstDash val="dash"/>
-          </a:ln>
+          <a:noFill/>
+          <a:ln/>
         </p:spPr>
         <p:txBody>
-          <a:bodyPr wrap="square" lIns="91440" tIns="45720" rIns="91440" bIns="45720" rtlCol="0" anchor="ctr"/>
+          <a:bodyPr wrap="square" lIns="0" tIns="0" rIns="0" bIns="0" rtlCol="0" anchor="t"/>
           <a:lstStyle/>
           <a:p>
-            <a:pPr marL="0" indent="0" algn="ctr">
+            <a:pPr marL="0" indent="0">
               <a:lnSpc>
-                <a:spcPct val="110000"/>
+                <a:spcPct val="103000"/>
               </a:lnSpc>
               <a:buNone/>
             </a:pPr>
             <a:r>
-              <a:rPr lang="en-US" sz="900" b="1" dirty="0">
-                <a:solidFill>
-                  <a:srgbClr val="8A99AD"/>
-                </a:solidFill>
-                <a:latin typeface="Meiryo" pitchFamily="34" charset="0"/>
-                <a:ea typeface="Meiryo" pitchFamily="34" charset="-122"/>
-                <a:cs typeface="Meiryo" pitchFamily="34" charset="-120"/>
-              </a:rPr>
-              <a:t>［ 活動風景 ］</a:t>
-            </a:r>
-            <a:endParaRPr lang="en-US" sz="1200" dirty="0"/>
+              <a:rPr lang="en-US" sz="950" b="1" dirty="0">
+                <a:solidFill>
+                  <a:srgbClr val="2E6BB8"/>
+                </a:solidFill>
+                <a:latin typeface="Meiryo" pitchFamily="34" charset="0"/>
+                <a:ea typeface="Meiryo" pitchFamily="34" charset="-122"/>
+                <a:cs typeface="Meiryo" pitchFamily="34" charset="-120"/>
+              </a:rPr>
+              <a:t>▶</a:t>
+            </a:r>
+            <a:r>
+              <a:rPr lang="en-US" sz="950" b="1" dirty="0">
+                <a:solidFill>
+                  <a:srgbClr val="222222"/>
+                </a:solidFill>
+                <a:latin typeface="Meiryo" pitchFamily="34" charset="0"/>
+                <a:ea typeface="Meiryo" pitchFamily="34" charset="-122"/>
+                <a:cs typeface="Meiryo" pitchFamily="34" charset="-120"/>
+              </a:rPr>
+              <a:t>出典：</a:t>
+            </a:r>
+            <a:r>
+              <a:rPr lang="en-US" sz="950" dirty="0">
+                <a:solidFill>
+                  <a:srgbClr val="222222"/>
+                </a:solidFill>
+                <a:latin typeface="Meiryo" pitchFamily="34" charset="0"/>
+                <a:ea typeface="Meiryo" pitchFamily="34" charset="-122"/>
+                <a:cs typeface="Meiryo" pitchFamily="34" charset="-120"/>
+              </a:rPr>
+              <a:t>東金市公式サイト／LITALICO発達ナビ 東金市 児童発達支援事業所一覧</a:t>
+            </a:r>
+            <a:endParaRPr lang="en-US" sz="1050" dirty="0"/>
+          </a:p>
+          <a:p>
+            <a:pPr marL="0" indent="0">
+              <a:lnSpc>
+                <a:spcPct val="103000"/>
+              </a:lnSpc>
+              <a:buNone/>
+            </a:pPr>
+            <a:r>
+              <a:rPr lang="en-US" sz="950" b="1" dirty="0">
+                <a:solidFill>
+                  <a:srgbClr val="2E6BB8"/>
+                </a:solidFill>
+                <a:latin typeface="Meiryo" pitchFamily="34" charset="0"/>
+                <a:ea typeface="Meiryo" pitchFamily="34" charset="-122"/>
+                <a:cs typeface="Meiryo" pitchFamily="34" charset="-120"/>
+              </a:rPr>
+              <a:t>▶</a:t>
+            </a:r>
+            <a:r>
+              <a:rPr lang="en-US" sz="950" b="1" dirty="0">
+                <a:solidFill>
+                  <a:srgbClr val="222222"/>
+                </a:solidFill>
+                <a:latin typeface="Meiryo" pitchFamily="34" charset="0"/>
+                <a:ea typeface="Meiryo" pitchFamily="34" charset="-122"/>
+                <a:cs typeface="Meiryo" pitchFamily="34" charset="-120"/>
+              </a:rPr>
+              <a:t>要確認事項：</a:t>
+            </a:r>
+            <a:r>
+              <a:rPr lang="en-US" sz="950" dirty="0">
+                <a:solidFill>
+                  <a:srgbClr val="222222"/>
+                </a:solidFill>
+                <a:latin typeface="Meiryo" pitchFamily="34" charset="0"/>
+                <a:ea typeface="Meiryo" pitchFamily="34" charset="-122"/>
+                <a:cs typeface="Meiryo" pitchFamily="34" charset="-120"/>
+              </a:rPr>
+              <a:t>運営法人、電話番号、定員、提供時間、母体となる保育所との関係　※公開情報がほぼ無い</a:t>
+            </a:r>
+            <a:endParaRPr lang="en-US" sz="1050" dirty="0"/>
           </a:p>
         </p:txBody>
       </p:sp>
@@ -4639,7 +4573,7 @@
         <p:spPr>
           <a:xfrm>
             <a:off x="502920" y="1783080"/>
-            <a:ext cx="6903720" cy="4434840"/>
+            <a:ext cx="6903720" cy="3474720"/>
           </a:xfrm>
           <a:prstGeom prst="rect">
             <a:avLst/>
@@ -4710,7 +4644,7 @@
         <p:spPr>
           <a:xfrm>
             <a:off x="704088" y="2331720"/>
-            <a:ext cx="6501384" cy="3758184"/>
+            <a:ext cx="6501384" cy="2852927"/>
           </a:xfrm>
           <a:prstGeom prst="rect">
             <a:avLst/>
@@ -4729,7 +4663,7 @@
               <a:buNone/>
             </a:pPr>
             <a:r>
-              <a:rPr lang="en-US" sz="1050" b="1" dirty="0">
+              <a:rPr lang="en-US" sz="1100" b="1" dirty="0">
                 <a:solidFill>
                   <a:srgbClr val="2E6BB8"/>
                 </a:solidFill>
@@ -4740,7 +4674,7 @@
               <a:t>▶</a:t>
             </a:r>
             <a:r>
-              <a:rPr lang="en-US" sz="1050" b="1" dirty="0">
+              <a:rPr lang="en-US" sz="1100" b="1" dirty="0">
                 <a:solidFill>
                   <a:srgbClr val="222222"/>
                 </a:solidFill>
@@ -4751,7 +4685,7 @@
               <a:t>対象：</a:t>
             </a:r>
             <a:r>
-              <a:rPr lang="en-US" sz="1050" dirty="0">
+              <a:rPr lang="en-US" sz="1100" dirty="0">
                 <a:solidFill>
                   <a:srgbClr val="222222"/>
                 </a:solidFill>
@@ -4771,7 +4705,7 @@
               <a:buNone/>
             </a:pPr>
             <a:r>
-              <a:rPr lang="en-US" sz="1050" b="1" dirty="0">
+              <a:rPr lang="en-US" sz="1100" b="1" dirty="0">
                 <a:solidFill>
                   <a:srgbClr val="2E6BB8"/>
                 </a:solidFill>
@@ -4782,7 +4716,7 @@
               <a:t>▶</a:t>
             </a:r>
             <a:r>
-              <a:rPr lang="en-US" sz="1050" b="1" dirty="0">
+              <a:rPr lang="en-US" sz="1100" b="1" dirty="0">
                 <a:solidFill>
                   <a:srgbClr val="222222"/>
                 </a:solidFill>
@@ -4793,7 +4727,7 @@
               <a:t>住所：</a:t>
             </a:r>
             <a:r>
-              <a:rPr lang="en-US" sz="1050" dirty="0">
+              <a:rPr lang="en-US" sz="1100" dirty="0">
                 <a:solidFill>
                   <a:srgbClr val="222222"/>
                 </a:solidFill>
@@ -4813,7 +4747,7 @@
               <a:buNone/>
             </a:pPr>
             <a:r>
-              <a:rPr lang="en-US" sz="1050" b="1" dirty="0">
+              <a:rPr lang="en-US" sz="1100" b="1" dirty="0">
                 <a:solidFill>
                   <a:srgbClr val="2E6BB8"/>
                 </a:solidFill>
@@ -4824,7 +4758,7 @@
               <a:t>▶</a:t>
             </a:r>
             <a:r>
-              <a:rPr lang="en-US" sz="1050" b="1" dirty="0">
+              <a:rPr lang="en-US" sz="1100" b="1" dirty="0">
                 <a:solidFill>
                   <a:srgbClr val="222222"/>
                 </a:solidFill>
@@ -4835,7 +4769,7 @@
               <a:t>TEL／HP：</a:t>
             </a:r>
             <a:r>
-              <a:rPr lang="en-US" sz="1050" dirty="0">
+              <a:rPr lang="en-US" sz="1100" dirty="0">
                 <a:solidFill>
                   <a:srgbClr val="222222"/>
                 </a:solidFill>
@@ -4855,7 +4789,7 @@
               <a:buNone/>
             </a:pPr>
             <a:r>
-              <a:rPr lang="en-US" sz="1050" b="1" dirty="0">
+              <a:rPr lang="en-US" sz="1100" b="1" dirty="0">
                 <a:solidFill>
                   <a:srgbClr val="2E6BB8"/>
                 </a:solidFill>
@@ -4866,7 +4800,7 @@
               <a:t>▶</a:t>
             </a:r>
             <a:r>
-              <a:rPr lang="en-US" sz="1050" b="1" dirty="0">
+              <a:rPr lang="en-US" sz="1100" b="1" dirty="0">
                 <a:solidFill>
                   <a:srgbClr val="222222"/>
                 </a:solidFill>
@@ -4877,7 +4811,7 @@
               <a:t>サービス提供時間：</a:t>
             </a:r>
             <a:r>
-              <a:rPr lang="en-US" sz="1050" dirty="0">
+              <a:rPr lang="en-US" sz="1100" dirty="0">
                 <a:solidFill>
                   <a:srgbClr val="222222"/>
                 </a:solidFill>
@@ -4897,7 +4831,7 @@
               <a:buNone/>
             </a:pPr>
             <a:r>
-              <a:rPr lang="en-US" sz="1050" b="1" dirty="0">
+              <a:rPr lang="en-US" sz="1100" b="1" dirty="0">
                 <a:solidFill>
                   <a:srgbClr val="2E6BB8"/>
                 </a:solidFill>
@@ -4908,7 +4842,7 @@
               <a:t>▶</a:t>
             </a:r>
             <a:r>
-              <a:rPr lang="en-US" sz="1050" b="1" dirty="0">
+              <a:rPr lang="en-US" sz="1100" b="1" dirty="0">
                 <a:solidFill>
                   <a:srgbClr val="222222"/>
                 </a:solidFill>
@@ -4919,7 +4853,7 @@
               <a:t>定員：</a:t>
             </a:r>
             <a:r>
-              <a:rPr lang="en-US" sz="1050" dirty="0">
+              <a:rPr lang="en-US" sz="1100" dirty="0">
                 <a:solidFill>
                   <a:srgbClr val="222222"/>
                 </a:solidFill>
@@ -4951,7 +4885,7 @@
               <a:buNone/>
             </a:pPr>
             <a:r>
-              <a:rPr lang="en-US" sz="1050" b="1" dirty="0">
+              <a:rPr lang="en-US" sz="1100" b="1" dirty="0">
                 <a:solidFill>
                   <a:srgbClr val="2E6BB8"/>
                 </a:solidFill>
@@ -4962,7 +4896,7 @@
               <a:t>▶</a:t>
             </a:r>
             <a:r>
-              <a:rPr lang="en-US" sz="1050" b="1" dirty="0">
+              <a:rPr lang="en-US" sz="1100" b="1" dirty="0">
                 <a:solidFill>
                   <a:srgbClr val="222222"/>
                 </a:solidFill>
@@ -4973,7 +4907,7 @@
               <a:t>療育プログラムの特徴：</a:t>
             </a:r>
             <a:r>
-              <a:rPr lang="en-US" sz="1050" dirty="0">
+              <a:rPr lang="en-US" sz="1100" dirty="0">
                 <a:solidFill>
                   <a:srgbClr val="222222"/>
                 </a:solidFill>
@@ -4996,7 +4930,7 @@
               <a:buNone/>
             </a:pPr>
             <a:r>
-              <a:rPr lang="en-US" sz="1050" dirty="0">
+              <a:rPr lang="en-US" sz="1100" dirty="0">
                 <a:solidFill>
                   <a:srgbClr val="222222"/>
                 </a:solidFill>
@@ -5019,7 +4953,7 @@
               <a:buNone/>
             </a:pPr>
             <a:r>
-              <a:rPr lang="en-US" sz="1050" dirty="0">
+              <a:rPr lang="en-US" sz="1100" dirty="0">
                 <a:solidFill>
                   <a:srgbClr val="222222"/>
                 </a:solidFill>
@@ -5030,75 +4964,6 @@
               <a:t>・同一町域の東金723にスターワーク東金（放デイ）があり、東金駅東口エリアに事業所が集積。</a:t>
             </a:r>
             <a:endParaRPr lang="en-US" sz="1050" dirty="0"/>
-          </a:p>
-        </p:txBody>
-      </p:sp>
-      <p:sp>
-        <p:nvSpPr>
-          <p:cNvPr id="13" name="Text 11"/>
-          <p:cNvSpPr/>
-          <p:nvPr/>
-        </p:nvSpPr>
-        <p:spPr>
-          <a:xfrm>
-            <a:off x="7635240" y="1783080"/>
-            <a:ext cx="4069080" cy="2148840"/>
-          </a:xfrm>
-          <a:prstGeom prst="rect">
-            <a:avLst/>
-          </a:prstGeom>
-          <a:solidFill>
-            <a:srgbClr val="F4F6FA"/>
-          </a:solidFill>
-          <a:ln w="12700">
-            <a:solidFill>
-              <a:srgbClr val="9AA7B8"/>
-            </a:solidFill>
-            <a:prstDash val="dash"/>
-          </a:ln>
-        </p:spPr>
-        <p:txBody>
-          <a:bodyPr wrap="square" lIns="91440" tIns="45720" rIns="91440" bIns="45720" rtlCol="0" anchor="ctr"/>
-          <a:lstStyle/>
-          <a:p>
-            <a:pPr marL="0" indent="0" algn="ctr">
-              <a:lnSpc>
-                <a:spcPct val="110000"/>
-              </a:lnSpc>
-              <a:buNone/>
-            </a:pPr>
-            <a:r>
-              <a:rPr lang="en-US" sz="1200" b="1" dirty="0">
-                <a:solidFill>
-                  <a:srgbClr val="8A99AD"/>
-                </a:solidFill>
-                <a:latin typeface="Meiryo" pitchFamily="34" charset="0"/>
-                <a:ea typeface="Meiryo" pitchFamily="34" charset="-122"/>
-                <a:cs typeface="Meiryo" pitchFamily="34" charset="-120"/>
-              </a:rPr>
-              <a:t>［ 写真挿入エリア ］</a:t>
-            </a:r>
-            <a:endParaRPr lang="en-US" sz="1200" dirty="0"/>
-          </a:p>
-          <a:p>
-            <a:pPr marL="0" indent="0" algn="ctr">
-              <a:lnSpc>
-                <a:spcPct val="110000"/>
-              </a:lnSpc>
-              <a:buNone/>
-            </a:pPr>
-            <a:r>
-              <a:rPr lang="en-US" sz="950" dirty="0">
-                <a:solidFill>
-                  <a:srgbClr val="97A4B6"/>
-                </a:solidFill>
-                <a:latin typeface="Meiryo" pitchFamily="34" charset="0"/>
-                <a:ea typeface="Meiryo" pitchFamily="34" charset="-122"/>
-                <a:cs typeface="Meiryo" pitchFamily="34" charset="-120"/>
-              </a:rPr>
-              <a:t>（東金市公式／発達ナビの施設写真を挿入）</a:t>
-            </a:r>
-            <a:endParaRPr lang="en-US" sz="1200" dirty="0"/>
           </a:p>
         </p:txBody>
       </p:sp>
@@ -5110,8 +4975,8 @@
         </p:nvSpPr>
         <p:spPr>
           <a:xfrm>
-            <a:off x="7635240" y="4069080"/>
-            <a:ext cx="4069080" cy="2148840"/>
+            <a:off x="7635240" y="1783080"/>
+            <a:ext cx="4069080" cy="3474720"/>
           </a:xfrm>
           <a:prstGeom prst="rect">
             <a:avLst/>
@@ -5135,7 +5000,7 @@
         </p:nvSpPr>
         <p:spPr>
           <a:xfrm>
-            <a:off x="7818120" y="4187952"/>
+            <a:off x="7818120" y="1901952"/>
             <a:ext cx="3703320" cy="320040"/>
           </a:xfrm>
           <a:prstGeom prst="rect">
@@ -5174,8 +5039,8 @@
         </p:nvSpPr>
         <p:spPr>
           <a:xfrm>
-            <a:off x="7818120" y="4526280"/>
-            <a:ext cx="3794760" cy="1600200"/>
+            <a:off x="7818120" y="2286000"/>
+            <a:ext cx="3703320" cy="2907791"/>
           </a:xfrm>
           <a:prstGeom prst="rect">
             <a:avLst/>
@@ -5195,7 +5060,7 @@
               <a:buChar char="•"/>
             </a:pPr>
             <a:r>
-              <a:rPr lang="en-US" sz="1000" dirty="0">
+              <a:rPr lang="en-US" sz="1050" dirty="0">
                 <a:solidFill>
                   <a:srgbClr val="222222"/>
                 </a:solidFill>
@@ -5219,7 +5084,7 @@
               <a:buChar char="•"/>
             </a:pPr>
             <a:r>
-              <a:rPr lang="en-US" sz="1000" dirty="0">
+              <a:rPr lang="en-US" sz="1050" dirty="0">
                 <a:solidFill>
                   <a:srgbClr val="222222"/>
                 </a:solidFill>
@@ -5243,7 +5108,7 @@
               <a:buChar char="•"/>
             </a:pPr>
             <a:r>
-              <a:rPr lang="en-US" sz="1000" dirty="0">
+              <a:rPr lang="en-US" sz="1050" dirty="0">
                 <a:solidFill>
                   <a:srgbClr val="222222"/>
                 </a:solidFill>
@@ -5258,152 +5123,199 @@
               <a:ea typeface="メイリオ" panose="020B0604030504040204" pitchFamily="50" charset="-128"/>
             </a:endParaRPr>
           </a:p>
+          <a:p>
+            <a:pPr marL="342900" indent="-342900">
+              <a:spcAft>
+                <a:spcPts val="700"/>
+              </a:spcAft>
+              <a:buSzPct val="100000"/>
+              <a:buChar char="•"/>
+            </a:pPr>
+            <a:r>
+              <a:rPr lang="en-US" sz="1050" dirty="0">
+                <a:solidFill>
+                  <a:srgbClr val="222222"/>
+                </a:solidFill>
+                <a:latin typeface="メイリオ" panose="020B0604030504040204" pitchFamily="50" charset="-128"/>
+                <a:ea typeface="メイリオ" panose="020B0604030504040204" pitchFamily="50" charset="-128"/>
+                <a:cs typeface="Meiryo" pitchFamily="34" charset="-120"/>
+              </a:rPr>
+              <a:t>東金駅東口は事業所集積地。新規参入するなら駅前以外の空白地を狙うのが現実的。</a:t>
+            </a:r>
+            <a:endParaRPr lang="en-US" sz="1000" dirty="0">
+              <a:latin typeface="メイリオ" panose="020B0604030504040204" pitchFamily="50" charset="-128"/>
+              <a:ea typeface="メイリオ" panose="020B0604030504040204" pitchFamily="50" charset="-128"/>
+            </a:endParaRPr>
+          </a:p>
         </p:txBody>
       </p:sp>
       <p:sp>
         <p:nvSpPr>
-          <p:cNvPr id="900" name="PhotoSlot 1"/>
+          <p:cNvPr id="940" name="FootBG"/>
           <p:cNvSpPr/>
           <p:nvPr/>
         </p:nvSpPr>
         <p:spPr>
           <a:xfrm>
-            <a:off x="868680" y="4882896"/>
-            <a:ext cx="1965960" cy="1152144"/>
+            <a:off x="502920" y="5394960"/>
+            <a:ext cx="11201400" cy="896112"/>
           </a:xfrm>
           <a:prstGeom prst="rect">
             <a:avLst/>
           </a:prstGeom>
           <a:solidFill>
-            <a:srgbClr val="F4F6FA"/>
+            <a:srgbClr val="EEF2F8"/>
           </a:solidFill>
           <a:ln w="12700">
             <a:solidFill>
               <a:srgbClr val="9AA7B8"/>
             </a:solidFill>
-            <a:prstDash val="dash"/>
+            <a:prstDash val="solid"/>
           </a:ln>
         </p:spPr>
-        <p:txBody>
-          <a:bodyPr wrap="square" lIns="91440" tIns="45720" rIns="91440" bIns="45720" rtlCol="0" anchor="ctr"/>
-          <a:lstStyle/>
-          <a:p>
-            <a:pPr marL="0" indent="0" algn="ctr">
-              <a:lnSpc>
-                <a:spcPct val="110000"/>
-              </a:lnSpc>
-              <a:buNone/>
-            </a:pPr>
-            <a:r>
-              <a:rPr lang="en-US" sz="900" b="1" dirty="0">
-                <a:solidFill>
-                  <a:srgbClr val="8A99AD"/>
-                </a:solidFill>
-                <a:latin typeface="Meiryo" pitchFamily="34" charset="0"/>
-                <a:ea typeface="Meiryo" pitchFamily="34" charset="-122"/>
-                <a:cs typeface="Meiryo" pitchFamily="34" charset="-120"/>
-              </a:rPr>
-              <a:t>［ 外観 / 建物 ］</a:t>
-            </a:r>
-            <a:endParaRPr lang="en-US" sz="1200" dirty="0"/>
-          </a:p>
-        </p:txBody>
       </p:sp>
       <p:sp>
         <p:nvSpPr>
-          <p:cNvPr id="901" name="PhotoSlot 2"/>
+          <p:cNvPr id="941" name="FootTitle"/>
           <p:cNvSpPr/>
           <p:nvPr/>
         </p:nvSpPr>
         <p:spPr>
           <a:xfrm>
-            <a:off x="2971800" y="4882896"/>
-            <a:ext cx="1965960" cy="1152144"/>
+            <a:off x="713232" y="5477256"/>
+            <a:ext cx="10789920" cy="274320"/>
           </a:xfrm>
           <a:prstGeom prst="rect">
             <a:avLst/>
           </a:prstGeom>
-          <a:solidFill>
-            <a:srgbClr val="F4F6FA"/>
-          </a:solidFill>
-          <a:ln w="12700">
-            <a:solidFill>
-              <a:srgbClr val="9AA7B8"/>
-            </a:solidFill>
-            <a:prstDash val="dash"/>
-          </a:ln>
+          <a:noFill/>
+          <a:ln/>
         </p:spPr>
         <p:txBody>
-          <a:bodyPr wrap="square" lIns="91440" tIns="45720" rIns="91440" bIns="45720" rtlCol="0" anchor="ctr"/>
+          <a:bodyPr wrap="square" lIns="0" tIns="0" rIns="0" bIns="0" rtlCol="0" anchor="ctr"/>
           <a:lstStyle/>
           <a:p>
-            <a:pPr marL="0" indent="0" algn="ctr">
-              <a:lnSpc>
-                <a:spcPct val="110000"/>
-              </a:lnSpc>
+            <a:pPr marL="0" indent="0">
               <a:buNone/>
             </a:pPr>
             <a:r>
-              <a:rPr lang="en-US" sz="900" b="1" dirty="0">
-                <a:solidFill>
-                  <a:srgbClr val="8A99AD"/>
-                </a:solidFill>
-                <a:latin typeface="Meiryo" pitchFamily="34" charset="0"/>
-                <a:ea typeface="Meiryo" pitchFamily="34" charset="-122"/>
-                <a:cs typeface="Meiryo" pitchFamily="34" charset="-120"/>
-              </a:rPr>
-              <a:t>［ 室内・教室 ］</a:t>
-            </a:r>
-            <a:endParaRPr lang="en-US" sz="1200" dirty="0"/>
+              <a:rPr lang="en-US" sz="1250" b="1" dirty="0">
+                <a:solidFill>
+                  <a:srgbClr val="1B3A6B"/>
+                </a:solidFill>
+                <a:latin typeface="Meiryo" pitchFamily="34" charset="0"/>
+                <a:ea typeface="Meiryo" pitchFamily="34" charset="-122"/>
+                <a:cs typeface="Meiryo" pitchFamily="34" charset="-120"/>
+              </a:rPr>
+              <a:t>出典 ／ 要確認事項</a:t>
+            </a:r>
+            <a:endParaRPr lang="en-US" sz="1250" dirty="0"/>
           </a:p>
         </p:txBody>
       </p:sp>
       <p:sp>
         <p:nvSpPr>
-          <p:cNvPr id="902" name="PhotoSlot 3"/>
+          <p:cNvPr id="13" name="FootBody"/>
           <p:cNvSpPr/>
           <p:nvPr/>
         </p:nvSpPr>
         <p:spPr>
           <a:xfrm>
-            <a:off x="5074920" y="4882896"/>
-            <a:ext cx="1965960" cy="1152144"/>
+            <a:off x="713232" y="5779008"/>
+            <a:ext cx="10789920" cy="475488"/>
           </a:xfrm>
           <a:prstGeom prst="rect">
             <a:avLst/>
           </a:prstGeom>
-          <a:solidFill>
-            <a:srgbClr val="F4F6FA"/>
-          </a:solidFill>
-          <a:ln w="12700">
-            <a:solidFill>
-              <a:srgbClr val="9AA7B8"/>
-            </a:solidFill>
-            <a:prstDash val="dash"/>
-          </a:ln>
+          <a:noFill/>
+          <a:ln/>
         </p:spPr>
         <p:txBody>
-          <a:bodyPr wrap="square" lIns="91440" tIns="45720" rIns="91440" bIns="45720" rtlCol="0" anchor="ctr"/>
+          <a:bodyPr wrap="square" lIns="0" tIns="0" rIns="0" bIns="0" rtlCol="0" anchor="t"/>
           <a:lstStyle/>
           <a:p>
-            <a:pPr marL="0" indent="0" algn="ctr">
+            <a:pPr marL="0" indent="0">
               <a:lnSpc>
-                <a:spcPct val="110000"/>
+                <a:spcPct val="103000"/>
               </a:lnSpc>
               <a:buNone/>
             </a:pPr>
             <a:r>
-              <a:rPr lang="en-US" sz="900" b="1" dirty="0">
-                <a:solidFill>
-                  <a:srgbClr val="8A99AD"/>
-                </a:solidFill>
-                <a:latin typeface="Meiryo" pitchFamily="34" charset="0"/>
-                <a:ea typeface="Meiryo" pitchFamily="34" charset="-122"/>
-                <a:cs typeface="Meiryo" pitchFamily="34" charset="-120"/>
-              </a:rPr>
-              <a:t>［ 活動風景 ］</a:t>
-            </a:r>
-            <a:endParaRPr lang="en-US" sz="1200" dirty="0"/>
+              <a:rPr lang="en-US" sz="950" b="1" dirty="0">
+                <a:solidFill>
+                  <a:srgbClr val="2E6BB8"/>
+                </a:solidFill>
+                <a:latin typeface="Meiryo" pitchFamily="34" charset="0"/>
+                <a:ea typeface="Meiryo" pitchFamily="34" charset="-122"/>
+                <a:cs typeface="Meiryo" pitchFamily="34" charset="-120"/>
+              </a:rPr>
+              <a:t>▶</a:t>
+            </a:r>
+            <a:r>
+              <a:rPr lang="en-US" sz="950" b="1" dirty="0">
+                <a:solidFill>
+                  <a:srgbClr val="222222"/>
+                </a:solidFill>
+                <a:latin typeface="Meiryo" pitchFamily="34" charset="0"/>
+                <a:ea typeface="Meiryo" pitchFamily="34" charset="-122"/>
+                <a:cs typeface="Meiryo" pitchFamily="34" charset="-120"/>
+              </a:rPr>
+              <a:t>出典：</a:t>
+            </a:r>
+            <a:r>
+              <a:rPr lang="en-US" sz="950" dirty="0">
+                <a:solidFill>
+                  <a:srgbClr val="222222"/>
+                </a:solidFill>
+                <a:latin typeface="Meiryo" pitchFamily="34" charset="0"/>
+                <a:ea typeface="Meiryo" pitchFamily="34" charset="-122"/>
+                <a:cs typeface="Meiryo" pitchFamily="34" charset="-120"/>
+              </a:rPr>
+              <a:t>東金市公式サイト／LITALICO発達ナビ 東金市 児童発達支援事業所一覧</a:t>
+            </a:r>
+            <a:endParaRPr lang="en-US" sz="1050" dirty="0"/>
+          </a:p>
+          <a:p>
+            <a:pPr marL="0" indent="0">
+              <a:lnSpc>
+                <a:spcPct val="103000"/>
+              </a:lnSpc>
+              <a:buNone/>
+            </a:pPr>
+            <a:r>
+              <a:rPr lang="en-US" sz="950" b="1" dirty="0">
+                <a:solidFill>
+                  <a:srgbClr val="2E6BB8"/>
+                </a:solidFill>
+                <a:latin typeface="Meiryo" pitchFamily="34" charset="0"/>
+                <a:ea typeface="Meiryo" pitchFamily="34" charset="-122"/>
+                <a:cs typeface="Meiryo" pitchFamily="34" charset="-120"/>
+              </a:rPr>
+              <a:t>▶</a:t>
+            </a:r>
+            <a:r>
+              <a:rPr lang="en-US" sz="950" b="1" dirty="0">
+                <a:solidFill>
+                  <a:srgbClr val="222222"/>
+                </a:solidFill>
+                <a:latin typeface="Meiryo" pitchFamily="34" charset="0"/>
+                <a:ea typeface="Meiryo" pitchFamily="34" charset="-122"/>
+                <a:cs typeface="Meiryo" pitchFamily="34" charset="-120"/>
+              </a:rPr>
+              <a:t>要確認事項：</a:t>
+            </a:r>
+            <a:r>
+              <a:rPr lang="en-US" sz="950" dirty="0">
+                <a:solidFill>
+                  <a:srgbClr val="222222"/>
+                </a:solidFill>
+                <a:latin typeface="Meiryo" pitchFamily="34" charset="0"/>
+                <a:ea typeface="Meiryo" pitchFamily="34" charset="-122"/>
+                <a:cs typeface="Meiryo" pitchFamily="34" charset="-120"/>
+              </a:rPr>
+              <a:t>運営法人、正確な電話番号、定員、提供時間、プログラム内容　※公開情報がほぼ無い</a:t>
+            </a:r>
+            <a:endParaRPr lang="en-US" sz="1050" dirty="0"/>
           </a:p>
         </p:txBody>
       </p:sp>
@@ -16941,7 +16853,7 @@
         <p:spPr>
           <a:xfrm>
             <a:off x="502920" y="1783080"/>
-            <a:ext cx="6903720" cy="4434840"/>
+            <a:ext cx="6903720" cy="3474720"/>
           </a:xfrm>
           <a:prstGeom prst="rect">
             <a:avLst/>
@@ -17012,7 +16924,7 @@
         <p:spPr>
           <a:xfrm>
             <a:off x="704088" y="2331720"/>
-            <a:ext cx="6501384" cy="3758184"/>
+            <a:ext cx="6501384" cy="2852927"/>
           </a:xfrm>
           <a:prstGeom prst="rect">
             <a:avLst/>
@@ -17031,7 +16943,7 @@
               <a:buNone/>
             </a:pPr>
             <a:r>
-              <a:rPr lang="en-US" sz="1050" b="1" dirty="0">
+              <a:rPr lang="en-US" sz="1100" b="1" dirty="0">
                 <a:solidFill>
                   <a:srgbClr val="2E6BB8"/>
                 </a:solidFill>
@@ -17042,7 +16954,7 @@
               <a:t>▶</a:t>
             </a:r>
             <a:r>
-              <a:rPr lang="en-US" sz="1050" b="1" dirty="0">
+              <a:rPr lang="en-US" sz="1100" b="1" dirty="0">
                 <a:solidFill>
                   <a:srgbClr val="222222"/>
                 </a:solidFill>
@@ -17053,7 +16965,7 @@
               <a:t>対象：</a:t>
             </a:r>
             <a:r>
-              <a:rPr lang="en-US" sz="1050" dirty="0">
+              <a:rPr lang="en-US" sz="1100" dirty="0">
                 <a:solidFill>
                   <a:srgbClr val="222222"/>
                 </a:solidFill>
@@ -17073,7 +16985,7 @@
               <a:buNone/>
             </a:pPr>
             <a:r>
-              <a:rPr lang="en-US" sz="1050" b="1" dirty="0">
+              <a:rPr lang="en-US" sz="1100" b="1" dirty="0">
                 <a:solidFill>
                   <a:srgbClr val="2E6BB8"/>
                 </a:solidFill>
@@ -17084,7 +16996,7 @@
               <a:t>▶</a:t>
             </a:r>
             <a:r>
-              <a:rPr lang="en-US" sz="1050" b="1" dirty="0">
+              <a:rPr lang="en-US" sz="1100" b="1" dirty="0">
                 <a:solidFill>
                   <a:srgbClr val="222222"/>
                 </a:solidFill>
@@ -17095,7 +17007,7 @@
               <a:t>住所：</a:t>
             </a:r>
             <a:r>
-              <a:rPr lang="en-US" sz="1050" dirty="0">
+              <a:rPr lang="en-US" sz="1100" dirty="0">
                 <a:solidFill>
                   <a:srgbClr val="222222"/>
                 </a:solidFill>
@@ -17115,7 +17027,7 @@
               <a:buNone/>
             </a:pPr>
             <a:r>
-              <a:rPr lang="en-US" sz="1050" b="1" dirty="0">
+              <a:rPr lang="en-US" sz="1100" b="1" dirty="0">
                 <a:solidFill>
                   <a:srgbClr val="2E6BB8"/>
                 </a:solidFill>
@@ -17126,7 +17038,7 @@
               <a:t>▶</a:t>
             </a:r>
             <a:r>
-              <a:rPr lang="en-US" sz="1050" b="1" dirty="0">
+              <a:rPr lang="en-US" sz="1100" b="1" dirty="0">
                 <a:solidFill>
                   <a:srgbClr val="222222"/>
                 </a:solidFill>
@@ -17137,7 +17049,7 @@
               <a:t>TEL／HP：</a:t>
             </a:r>
             <a:r>
-              <a:rPr lang="en-US" sz="1050" dirty="0">
+              <a:rPr lang="en-US" sz="1100" dirty="0">
                 <a:solidFill>
                   <a:srgbClr val="222222"/>
                 </a:solidFill>
@@ -17157,7 +17069,7 @@
               <a:buNone/>
             </a:pPr>
             <a:r>
-              <a:rPr lang="en-US" sz="1050" b="1" dirty="0">
+              <a:rPr lang="en-US" sz="1100" b="1" dirty="0">
                 <a:solidFill>
                   <a:srgbClr val="2E6BB8"/>
                 </a:solidFill>
@@ -17168,7 +17080,7 @@
               <a:t>▶</a:t>
             </a:r>
             <a:r>
-              <a:rPr lang="en-US" sz="1050" b="1" dirty="0">
+              <a:rPr lang="en-US" sz="1100" b="1" dirty="0">
                 <a:solidFill>
                   <a:srgbClr val="222222"/>
                 </a:solidFill>
@@ -17179,7 +17091,7 @@
               <a:t>アクセス：</a:t>
             </a:r>
             <a:r>
-              <a:rPr lang="en-US" sz="1050" dirty="0">
+              <a:rPr lang="en-US" sz="1100" dirty="0">
                 <a:solidFill>
                   <a:srgbClr val="222222"/>
                 </a:solidFill>
@@ -17199,7 +17111,7 @@
               <a:buNone/>
             </a:pPr>
             <a:r>
-              <a:rPr lang="en-US" sz="1050" b="1" dirty="0">
+              <a:rPr lang="en-US" sz="1100" b="1" dirty="0">
                 <a:solidFill>
                   <a:srgbClr val="2E6BB8"/>
                 </a:solidFill>
@@ -17210,7 +17122,7 @@
               <a:t>▶</a:t>
             </a:r>
             <a:r>
-              <a:rPr lang="en-US" sz="1050" b="1" dirty="0">
+              <a:rPr lang="en-US" sz="1100" b="1" dirty="0">
                 <a:solidFill>
                   <a:srgbClr val="222222"/>
                 </a:solidFill>
@@ -17221,7 +17133,7 @@
               <a:t>定員：</a:t>
             </a:r>
             <a:r>
-              <a:rPr lang="en-US" sz="1050" dirty="0">
+              <a:rPr lang="en-US" sz="1100" dirty="0">
                 <a:solidFill>
                   <a:srgbClr val="222222"/>
                 </a:solidFill>
@@ -17253,7 +17165,7 @@
               <a:buNone/>
             </a:pPr>
             <a:r>
-              <a:rPr lang="en-US" sz="1050" b="1" dirty="0">
+              <a:rPr lang="en-US" sz="1100" b="1" dirty="0">
                 <a:solidFill>
                   <a:srgbClr val="2E6BB8"/>
                 </a:solidFill>
@@ -17264,7 +17176,7 @@
               <a:t>▶</a:t>
             </a:r>
             <a:r>
-              <a:rPr lang="en-US" sz="1050" b="1" dirty="0">
+              <a:rPr lang="en-US" sz="1100" b="1" dirty="0">
                 <a:solidFill>
                   <a:srgbClr val="222222"/>
                 </a:solidFill>
@@ -17275,7 +17187,7 @@
               <a:t>療育プログラムの特徴：</a:t>
             </a:r>
             <a:r>
-              <a:rPr lang="en-US" sz="1050" dirty="0">
+              <a:rPr lang="en-US" sz="1100" dirty="0">
                 <a:solidFill>
                   <a:srgbClr val="222222"/>
                 </a:solidFill>
@@ -17298,7 +17210,7 @@
               <a:buNone/>
             </a:pPr>
             <a:r>
-              <a:rPr lang="en-US" sz="1050" dirty="0">
+              <a:rPr lang="en-US" sz="1100" dirty="0">
                 <a:solidFill>
                   <a:srgbClr val="222222"/>
                 </a:solidFill>
@@ -17321,7 +17233,7 @@
               <a:buNone/>
             </a:pPr>
             <a:r>
-              <a:rPr lang="en-US" sz="1050" dirty="0">
+              <a:rPr lang="en-US" sz="1100" dirty="0">
                 <a:solidFill>
                   <a:srgbClr val="222222"/>
                 </a:solidFill>
@@ -17344,7 +17256,7 @@
               <a:buNone/>
             </a:pPr>
             <a:r>
-              <a:rPr lang="en-US" sz="1050" dirty="0">
+              <a:rPr lang="en-US" sz="1100" dirty="0">
                 <a:solidFill>
                   <a:srgbClr val="222222"/>
                 </a:solidFill>
@@ -17355,75 +17267,6 @@
               <a:t>・設置管理条例に基づく市の公の施設。地域開放事業もあわせて実施。</a:t>
             </a:r>
             <a:endParaRPr lang="en-US" sz="1050" dirty="0"/>
-          </a:p>
-        </p:txBody>
-      </p:sp>
-      <p:sp>
-        <p:nvSpPr>
-          <p:cNvPr id="13" name="Text 11"/>
-          <p:cNvSpPr/>
-          <p:nvPr/>
-        </p:nvSpPr>
-        <p:spPr>
-          <a:xfrm>
-            <a:off x="7635240" y="1783080"/>
-            <a:ext cx="4069080" cy="2148840"/>
-          </a:xfrm>
-          <a:prstGeom prst="rect">
-            <a:avLst/>
-          </a:prstGeom>
-          <a:solidFill>
-            <a:srgbClr val="F4F6FA"/>
-          </a:solidFill>
-          <a:ln w="12700">
-            <a:solidFill>
-              <a:srgbClr val="9AA7B8"/>
-            </a:solidFill>
-            <a:prstDash val="dash"/>
-          </a:ln>
-        </p:spPr>
-        <p:txBody>
-          <a:bodyPr wrap="square" lIns="91440" tIns="45720" rIns="91440" bIns="45720" rtlCol="0" anchor="ctr"/>
-          <a:lstStyle/>
-          <a:p>
-            <a:pPr marL="0" indent="0" algn="ctr">
-              <a:lnSpc>
-                <a:spcPct val="110000"/>
-              </a:lnSpc>
-              <a:buNone/>
-            </a:pPr>
-            <a:r>
-              <a:rPr lang="en-US" sz="1200" b="1" dirty="0">
-                <a:solidFill>
-                  <a:srgbClr val="8A99AD"/>
-                </a:solidFill>
-                <a:latin typeface="Meiryo" pitchFamily="34" charset="0"/>
-                <a:ea typeface="Meiryo" pitchFamily="34" charset="-122"/>
-                <a:cs typeface="Meiryo" pitchFamily="34" charset="-120"/>
-              </a:rPr>
-              <a:t>［ 写真挿入エリア ］</a:t>
-            </a:r>
-            <a:endParaRPr lang="en-US" sz="1200" dirty="0"/>
-          </a:p>
-          <a:p>
-            <a:pPr marL="0" indent="0" algn="ctr">
-              <a:lnSpc>
-                <a:spcPct val="110000"/>
-              </a:lnSpc>
-              <a:buNone/>
-            </a:pPr>
-            <a:r>
-              <a:rPr lang="en-US" sz="950" dirty="0">
-                <a:solidFill>
-                  <a:srgbClr val="97A4B6"/>
-                </a:solidFill>
-                <a:latin typeface="Meiryo" pitchFamily="34" charset="0"/>
-                <a:ea typeface="Meiryo" pitchFamily="34" charset="-122"/>
-                <a:cs typeface="Meiryo" pitchFamily="34" charset="-120"/>
-              </a:rPr>
-              <a:t>（東金市公式サイト／東金市社協 togane-shakyo.jp の施設写真を挿入）</a:t>
-            </a:r>
-            <a:endParaRPr lang="en-US" sz="1200" dirty="0"/>
           </a:p>
         </p:txBody>
       </p:sp>
@@ -17435,8 +17278,8 @@
         </p:nvSpPr>
         <p:spPr>
           <a:xfrm>
-            <a:off x="7635240" y="4069080"/>
-            <a:ext cx="4069080" cy="2148840"/>
+            <a:off x="7635240" y="1783080"/>
+            <a:ext cx="4069080" cy="3474720"/>
           </a:xfrm>
           <a:prstGeom prst="rect">
             <a:avLst/>
@@ -17460,7 +17303,7 @@
         </p:nvSpPr>
         <p:spPr>
           <a:xfrm>
-            <a:off x="7818120" y="4187952"/>
+            <a:off x="7818120" y="1901952"/>
             <a:ext cx="3703320" cy="320040"/>
           </a:xfrm>
           <a:prstGeom prst="rect">
@@ -17499,8 +17342,8 @@
         </p:nvSpPr>
         <p:spPr>
           <a:xfrm>
-            <a:off x="7818120" y="4526280"/>
-            <a:ext cx="3794760" cy="1600200"/>
+            <a:off x="7818120" y="2286000"/>
+            <a:ext cx="3703320" cy="2907791"/>
           </a:xfrm>
           <a:prstGeom prst="rect">
             <a:avLst/>
@@ -17520,7 +17363,7 @@
               <a:buChar char="•"/>
             </a:pPr>
             <a:r>
-              <a:rPr lang="en-US" sz="1000" dirty="0">
+              <a:rPr lang="en-US" sz="1050" dirty="0">
                 <a:solidFill>
                   <a:srgbClr val="222222"/>
                 </a:solidFill>
@@ -17544,7 +17387,7 @@
               <a:buChar char="•"/>
             </a:pPr>
             <a:r>
-              <a:rPr lang="en-US" sz="1000" dirty="0">
+              <a:rPr lang="en-US" sz="1050" dirty="0">
                 <a:solidFill>
                   <a:srgbClr val="222222"/>
                 </a:solidFill>
@@ -17568,7 +17411,7 @@
               <a:buChar char="•"/>
             </a:pPr>
             <a:r>
-              <a:rPr lang="en-US" sz="1000" dirty="0">
+              <a:rPr lang="en-US" sz="1050" dirty="0">
                 <a:solidFill>
                   <a:srgbClr val="222222"/>
                 </a:solidFill>
@@ -17583,152 +17426,199 @@
               <a:ea typeface="メイリオ" panose="020B0604030504040204" pitchFamily="50" charset="-128"/>
             </a:endParaRPr>
           </a:p>
+          <a:p>
+            <a:pPr marL="342900" indent="-342900">
+              <a:spcAft>
+                <a:spcPts val="700"/>
+              </a:spcAft>
+              <a:buSzPct val="100000"/>
+              <a:buChar char="•"/>
+            </a:pPr>
+            <a:r>
+              <a:rPr lang="en-US" sz="1050" dirty="0">
+                <a:solidFill>
+                  <a:srgbClr val="222222"/>
+                </a:solidFill>
+                <a:latin typeface="メイリオ" panose="020B0604030504040204" pitchFamily="50" charset="-128"/>
+                <a:ea typeface="メイリオ" panose="020B0604030504040204" pitchFamily="50" charset="-128"/>
+                <a:cs typeface="Meiryo" pitchFamily="34" charset="-120"/>
+              </a:rPr>
+              <a:t>新規参入の観点では、公立の定員（1日15名）を超える就学前ニーズをどう受けるかが最初の需要源となる。</a:t>
+            </a:r>
+            <a:endParaRPr lang="en-US" sz="1000" dirty="0">
+              <a:latin typeface="メイリオ" panose="020B0604030504040204" pitchFamily="50" charset="-128"/>
+              <a:ea typeface="メイリオ" panose="020B0604030504040204" pitchFamily="50" charset="-128"/>
+            </a:endParaRPr>
+          </a:p>
         </p:txBody>
       </p:sp>
       <p:sp>
         <p:nvSpPr>
-          <p:cNvPr id="900" name="PhotoSlot 1"/>
+          <p:cNvPr id="940" name="FootBG"/>
           <p:cNvSpPr/>
           <p:nvPr/>
         </p:nvSpPr>
         <p:spPr>
           <a:xfrm>
-            <a:off x="868680" y="4882896"/>
-            <a:ext cx="1965960" cy="1152144"/>
+            <a:off x="502920" y="5394960"/>
+            <a:ext cx="11201400" cy="896112"/>
           </a:xfrm>
           <a:prstGeom prst="rect">
             <a:avLst/>
           </a:prstGeom>
           <a:solidFill>
-            <a:srgbClr val="F4F6FA"/>
+            <a:srgbClr val="EEF2F8"/>
           </a:solidFill>
           <a:ln w="12700">
             <a:solidFill>
               <a:srgbClr val="9AA7B8"/>
             </a:solidFill>
-            <a:prstDash val="dash"/>
+            <a:prstDash val="solid"/>
           </a:ln>
         </p:spPr>
-        <p:txBody>
-          <a:bodyPr wrap="square" lIns="91440" tIns="45720" rIns="91440" bIns="45720" rtlCol="0" anchor="ctr"/>
-          <a:lstStyle/>
-          <a:p>
-            <a:pPr marL="0" indent="0" algn="ctr">
-              <a:lnSpc>
-                <a:spcPct val="110000"/>
-              </a:lnSpc>
-              <a:buNone/>
-            </a:pPr>
-            <a:r>
-              <a:rPr lang="en-US" sz="900" b="1" dirty="0">
-                <a:solidFill>
-                  <a:srgbClr val="8A99AD"/>
-                </a:solidFill>
-                <a:latin typeface="Meiryo" pitchFamily="34" charset="0"/>
-                <a:ea typeface="Meiryo" pitchFamily="34" charset="-122"/>
-                <a:cs typeface="Meiryo" pitchFamily="34" charset="-120"/>
-              </a:rPr>
-              <a:t>［ 外観 / 建物 ］</a:t>
-            </a:r>
-            <a:endParaRPr lang="en-US" sz="1200" dirty="0"/>
-          </a:p>
-        </p:txBody>
       </p:sp>
       <p:sp>
         <p:nvSpPr>
-          <p:cNvPr id="901" name="PhotoSlot 2"/>
+          <p:cNvPr id="941" name="FootTitle"/>
           <p:cNvSpPr/>
           <p:nvPr/>
         </p:nvSpPr>
         <p:spPr>
           <a:xfrm>
-            <a:off x="2971800" y="4882896"/>
-            <a:ext cx="1965960" cy="1152144"/>
+            <a:off x="713232" y="5477256"/>
+            <a:ext cx="10789920" cy="274320"/>
           </a:xfrm>
           <a:prstGeom prst="rect">
             <a:avLst/>
           </a:prstGeom>
-          <a:solidFill>
-            <a:srgbClr val="F4F6FA"/>
-          </a:solidFill>
-          <a:ln w="12700">
-            <a:solidFill>
-              <a:srgbClr val="9AA7B8"/>
-            </a:solidFill>
-            <a:prstDash val="dash"/>
-          </a:ln>
+          <a:noFill/>
+          <a:ln/>
         </p:spPr>
         <p:txBody>
-          <a:bodyPr wrap="square" lIns="91440" tIns="45720" rIns="91440" bIns="45720" rtlCol="0" anchor="ctr"/>
+          <a:bodyPr wrap="square" lIns="0" tIns="0" rIns="0" bIns="0" rtlCol="0" anchor="ctr"/>
           <a:lstStyle/>
           <a:p>
-            <a:pPr marL="0" indent="0" algn="ctr">
-              <a:lnSpc>
-                <a:spcPct val="110000"/>
-              </a:lnSpc>
+            <a:pPr marL="0" indent="0">
               <a:buNone/>
             </a:pPr>
             <a:r>
-              <a:rPr lang="en-US" sz="900" b="1" dirty="0">
-                <a:solidFill>
-                  <a:srgbClr val="8A99AD"/>
-                </a:solidFill>
-                <a:latin typeface="Meiryo" pitchFamily="34" charset="0"/>
-                <a:ea typeface="Meiryo" pitchFamily="34" charset="-122"/>
-                <a:cs typeface="Meiryo" pitchFamily="34" charset="-120"/>
-              </a:rPr>
-              <a:t>［ 室内・教室 ］</a:t>
-            </a:r>
-            <a:endParaRPr lang="en-US" sz="1200" dirty="0"/>
+              <a:rPr lang="en-US" sz="1250" b="1" dirty="0">
+                <a:solidFill>
+                  <a:srgbClr val="1B3A6B"/>
+                </a:solidFill>
+                <a:latin typeface="Meiryo" pitchFamily="34" charset="0"/>
+                <a:ea typeface="Meiryo" pitchFamily="34" charset="-122"/>
+                <a:cs typeface="Meiryo" pitchFamily="34" charset="-120"/>
+              </a:rPr>
+              <a:t>出典 ／ 要確認事項</a:t>
+            </a:r>
+            <a:endParaRPr lang="en-US" sz="1250" dirty="0"/>
           </a:p>
         </p:txBody>
       </p:sp>
       <p:sp>
         <p:nvSpPr>
-          <p:cNvPr id="902" name="PhotoSlot 3"/>
+          <p:cNvPr id="13" name="FootBody"/>
           <p:cNvSpPr/>
           <p:nvPr/>
         </p:nvSpPr>
         <p:spPr>
           <a:xfrm>
-            <a:off x="5074920" y="4882896"/>
-            <a:ext cx="1965960" cy="1152144"/>
+            <a:off x="713232" y="5779008"/>
+            <a:ext cx="10789920" cy="475488"/>
           </a:xfrm>
           <a:prstGeom prst="rect">
             <a:avLst/>
           </a:prstGeom>
-          <a:solidFill>
-            <a:srgbClr val="F4F6FA"/>
-          </a:solidFill>
-          <a:ln w="12700">
-            <a:solidFill>
-              <a:srgbClr val="9AA7B8"/>
-            </a:solidFill>
-            <a:prstDash val="dash"/>
-          </a:ln>
+          <a:noFill/>
+          <a:ln/>
         </p:spPr>
         <p:txBody>
-          <a:bodyPr wrap="square" lIns="91440" tIns="45720" rIns="91440" bIns="45720" rtlCol="0" anchor="ctr"/>
+          <a:bodyPr wrap="square" lIns="0" tIns="0" rIns="0" bIns="0" rtlCol="0" anchor="t"/>
           <a:lstStyle/>
           <a:p>
-            <a:pPr marL="0" indent="0" algn="ctr">
+            <a:pPr marL="0" indent="0">
               <a:lnSpc>
-                <a:spcPct val="110000"/>
+                <a:spcPct val="103000"/>
               </a:lnSpc>
               <a:buNone/>
             </a:pPr>
             <a:r>
-              <a:rPr lang="en-US" sz="900" b="1" dirty="0">
-                <a:solidFill>
-                  <a:srgbClr val="8A99AD"/>
-                </a:solidFill>
-                <a:latin typeface="Meiryo" pitchFamily="34" charset="0"/>
-                <a:ea typeface="Meiryo" pitchFamily="34" charset="-122"/>
-                <a:cs typeface="Meiryo" pitchFamily="34" charset="-120"/>
-              </a:rPr>
-              <a:t>［ 活動風景 ］</a:t>
-            </a:r>
-            <a:endParaRPr lang="en-US" sz="1200" dirty="0"/>
+              <a:rPr lang="en-US" sz="950" b="1" dirty="0">
+                <a:solidFill>
+                  <a:srgbClr val="2E6BB8"/>
+                </a:solidFill>
+                <a:latin typeface="Meiryo" pitchFamily="34" charset="0"/>
+                <a:ea typeface="Meiryo" pitchFamily="34" charset="-122"/>
+                <a:cs typeface="Meiryo" pitchFamily="34" charset="-120"/>
+              </a:rPr>
+              <a:t>▶</a:t>
+            </a:r>
+            <a:r>
+              <a:rPr lang="en-US" sz="950" b="1" dirty="0">
+                <a:solidFill>
+                  <a:srgbClr val="222222"/>
+                </a:solidFill>
+                <a:latin typeface="Meiryo" pitchFamily="34" charset="0"/>
+                <a:ea typeface="Meiryo" pitchFamily="34" charset="-122"/>
+                <a:cs typeface="Meiryo" pitchFamily="34" charset="-120"/>
+              </a:rPr>
+              <a:t>出典：</a:t>
+            </a:r>
+            <a:r>
+              <a:rPr lang="en-US" sz="950" dirty="0">
+                <a:solidFill>
+                  <a:srgbClr val="222222"/>
+                </a:solidFill>
+                <a:latin typeface="Meiryo" pitchFamily="34" charset="0"/>
+                <a:ea typeface="Meiryo" pitchFamily="34" charset="-122"/>
+                <a:cs typeface="Meiryo" pitchFamily="34" charset="-120"/>
+              </a:rPr>
+              <a:t>東金市公式サイト（city.togane.chiba.jp）／東金市社会福祉協議会／みんなの障がい</a:t>
+            </a:r>
+            <a:endParaRPr lang="en-US" sz="1050" dirty="0"/>
+          </a:p>
+          <a:p>
+            <a:pPr marL="0" indent="0">
+              <a:lnSpc>
+                <a:spcPct val="103000"/>
+              </a:lnSpc>
+              <a:buNone/>
+            </a:pPr>
+            <a:r>
+              <a:rPr lang="en-US" sz="950" b="1" dirty="0">
+                <a:solidFill>
+                  <a:srgbClr val="2E6BB8"/>
+                </a:solidFill>
+                <a:latin typeface="Meiryo" pitchFamily="34" charset="0"/>
+                <a:ea typeface="Meiryo" pitchFamily="34" charset="-122"/>
+                <a:cs typeface="Meiryo" pitchFamily="34" charset="-120"/>
+              </a:rPr>
+              <a:t>▶</a:t>
+            </a:r>
+            <a:r>
+              <a:rPr lang="en-US" sz="950" b="1" dirty="0">
+                <a:solidFill>
+                  <a:srgbClr val="222222"/>
+                </a:solidFill>
+                <a:latin typeface="Meiryo" pitchFamily="34" charset="0"/>
+                <a:ea typeface="Meiryo" pitchFamily="34" charset="-122"/>
+                <a:cs typeface="Meiryo" pitchFamily="34" charset="-120"/>
+              </a:rPr>
+              <a:t>要確認事項：</a:t>
+            </a:r>
+            <a:r>
+              <a:rPr lang="en-US" sz="950" dirty="0">
+                <a:solidFill>
+                  <a:srgbClr val="222222"/>
+                </a:solidFill>
+                <a:latin typeface="Meiryo" pitchFamily="34" charset="0"/>
+                <a:ea typeface="Meiryo" pitchFamily="34" charset="-122"/>
+                <a:cs typeface="Meiryo" pitchFamily="34" charset="-120"/>
+              </a:rPr>
+              <a:t>現在の空き状況、放課後等デイサービスの対象学年の詳細、利用手続き・受給者証の要否</a:t>
+            </a:r>
+            <a:endParaRPr lang="en-US" sz="1050" dirty="0"/>
           </a:p>
         </p:txBody>
       </p:sp>
@@ -17995,7 +17885,7 @@
         <p:spPr>
           <a:xfrm>
             <a:off x="502920" y="1783080"/>
-            <a:ext cx="6903720" cy="4434840"/>
+            <a:ext cx="6903720" cy="3474720"/>
           </a:xfrm>
           <a:prstGeom prst="rect">
             <a:avLst/>
@@ -18066,7 +17956,7 @@
         <p:spPr>
           <a:xfrm>
             <a:off x="704088" y="2331720"/>
-            <a:ext cx="6501384" cy="3758184"/>
+            <a:ext cx="6501384" cy="2852927"/>
           </a:xfrm>
           <a:prstGeom prst="rect">
             <a:avLst/>
@@ -18085,7 +17975,7 @@
               <a:buNone/>
             </a:pPr>
             <a:r>
-              <a:rPr lang="en-US" sz="1050" b="1" dirty="0">
+              <a:rPr lang="en-US" sz="1100" b="1" dirty="0">
                 <a:solidFill>
                   <a:srgbClr val="2E6BB8"/>
                 </a:solidFill>
@@ -18096,7 +17986,7 @@
               <a:t>▶</a:t>
             </a:r>
             <a:r>
-              <a:rPr lang="en-US" sz="1050" b="1" dirty="0">
+              <a:rPr lang="en-US" sz="1100" b="1" dirty="0">
                 <a:solidFill>
                   <a:srgbClr val="222222"/>
                 </a:solidFill>
@@ -18107,7 +17997,7 @@
               <a:t>対象：</a:t>
             </a:r>
             <a:r>
-              <a:rPr lang="en-US" sz="1050" dirty="0">
+              <a:rPr lang="en-US" sz="1100" dirty="0">
                 <a:solidFill>
                   <a:srgbClr val="222222"/>
                 </a:solidFill>
@@ -18127,7 +18017,7 @@
               <a:buNone/>
             </a:pPr>
             <a:r>
-              <a:rPr lang="en-US" sz="1050" b="1" dirty="0">
+              <a:rPr lang="en-US" sz="1100" b="1" dirty="0">
                 <a:solidFill>
                   <a:srgbClr val="2E6BB8"/>
                 </a:solidFill>
@@ -18138,7 +18028,7 @@
               <a:t>▶</a:t>
             </a:r>
             <a:r>
-              <a:rPr lang="en-US" sz="1050" b="1" dirty="0">
+              <a:rPr lang="en-US" sz="1100" b="1" dirty="0">
                 <a:solidFill>
                   <a:srgbClr val="222222"/>
                 </a:solidFill>
@@ -18149,7 +18039,7 @@
               <a:t>住所：</a:t>
             </a:r>
             <a:r>
-              <a:rPr lang="en-US" sz="1050" dirty="0">
+              <a:rPr lang="en-US" sz="1100" dirty="0">
                 <a:solidFill>
                   <a:srgbClr val="222222"/>
                 </a:solidFill>
@@ -18169,7 +18059,7 @@
               <a:buNone/>
             </a:pPr>
             <a:r>
-              <a:rPr lang="en-US" sz="1050" b="1" dirty="0">
+              <a:rPr lang="en-US" sz="1100" b="1" dirty="0">
                 <a:solidFill>
                   <a:srgbClr val="2E6BB8"/>
                 </a:solidFill>
@@ -18180,7 +18070,7 @@
               <a:t>▶</a:t>
             </a:r>
             <a:r>
-              <a:rPr lang="en-US" sz="1050" b="1" dirty="0">
+              <a:rPr lang="en-US" sz="1100" b="1" dirty="0">
                 <a:solidFill>
                   <a:srgbClr val="222222"/>
                 </a:solidFill>
@@ -18191,7 +18081,7 @@
               <a:t>TEL／HP：</a:t>
             </a:r>
             <a:r>
-              <a:rPr lang="en-US" sz="1050" dirty="0">
+              <a:rPr lang="en-US" sz="1100" dirty="0">
                 <a:solidFill>
                   <a:srgbClr val="222222"/>
                 </a:solidFill>
@@ -18211,7 +18101,7 @@
               <a:buNone/>
             </a:pPr>
             <a:r>
-              <a:rPr lang="en-US" sz="1050" b="1" dirty="0">
+              <a:rPr lang="en-US" sz="1100" b="1" dirty="0">
                 <a:solidFill>
                   <a:srgbClr val="2E6BB8"/>
                 </a:solidFill>
@@ -18222,7 +18112,7 @@
               <a:t>▶</a:t>
             </a:r>
             <a:r>
-              <a:rPr lang="en-US" sz="1050" b="1" dirty="0">
+              <a:rPr lang="en-US" sz="1100" b="1" dirty="0">
                 <a:solidFill>
                   <a:srgbClr val="222222"/>
                 </a:solidFill>
@@ -18233,7 +18123,7 @@
               <a:t>サービス提供時間：</a:t>
             </a:r>
             <a:r>
-              <a:rPr lang="en-US" sz="1050" dirty="0">
+              <a:rPr lang="en-US" sz="1100" dirty="0">
                 <a:solidFill>
                   <a:srgbClr val="222222"/>
                 </a:solidFill>
@@ -18253,7 +18143,7 @@
               <a:buNone/>
             </a:pPr>
             <a:r>
-              <a:rPr lang="en-US" sz="1050" b="1" dirty="0">
+              <a:rPr lang="en-US" sz="1100" b="1" dirty="0">
                 <a:solidFill>
                   <a:srgbClr val="2E6BB8"/>
                 </a:solidFill>
@@ -18264,7 +18154,7 @@
               <a:t>▶</a:t>
             </a:r>
             <a:r>
-              <a:rPr lang="en-US" sz="1050" b="1" dirty="0">
+              <a:rPr lang="en-US" sz="1100" b="1" dirty="0">
                 <a:solidFill>
                   <a:srgbClr val="222222"/>
                 </a:solidFill>
@@ -18275,7 +18165,7 @@
               <a:t>定員：</a:t>
             </a:r>
             <a:r>
-              <a:rPr lang="en-US" sz="1050" dirty="0">
+              <a:rPr lang="en-US" sz="1100" dirty="0">
                 <a:solidFill>
                   <a:srgbClr val="222222"/>
                 </a:solidFill>
@@ -18307,7 +18197,7 @@
               <a:buNone/>
             </a:pPr>
             <a:r>
-              <a:rPr lang="en-US" sz="1050" b="1" dirty="0">
+              <a:rPr lang="en-US" sz="1100" b="1" dirty="0">
                 <a:solidFill>
                   <a:srgbClr val="2E6BB8"/>
                 </a:solidFill>
@@ -18318,7 +18208,7 @@
               <a:t>▶</a:t>
             </a:r>
             <a:r>
-              <a:rPr lang="en-US" sz="1050" b="1" dirty="0">
+              <a:rPr lang="en-US" sz="1100" b="1" dirty="0">
                 <a:solidFill>
                   <a:srgbClr val="222222"/>
                 </a:solidFill>
@@ -18329,7 +18219,7 @@
               <a:t>療育プログラムの特徴：</a:t>
             </a:r>
             <a:r>
-              <a:rPr lang="en-US" sz="1050" dirty="0">
+              <a:rPr lang="en-US" sz="1100" dirty="0">
                 <a:solidFill>
                   <a:srgbClr val="222222"/>
                 </a:solidFill>
@@ -18352,7 +18242,7 @@
               <a:buNone/>
             </a:pPr>
             <a:r>
-              <a:rPr lang="en-US" sz="1050" dirty="0">
+              <a:rPr lang="en-US" sz="1100" dirty="0">
                 <a:solidFill>
                   <a:srgbClr val="222222"/>
                 </a:solidFill>
@@ -18375,7 +18265,7 @@
               <a:buNone/>
             </a:pPr>
             <a:r>
-              <a:rPr lang="en-US" sz="1050" dirty="0">
+              <a:rPr lang="en-US" sz="1100" dirty="0">
                 <a:solidFill>
                   <a:srgbClr val="222222"/>
                 </a:solidFill>
@@ -18398,7 +18288,7 @@
               <a:buNone/>
             </a:pPr>
             <a:r>
-              <a:rPr lang="en-US" sz="1050" dirty="0">
+              <a:rPr lang="en-US" sz="1100" dirty="0">
                 <a:solidFill>
                   <a:srgbClr val="222222"/>
                 </a:solidFill>
@@ -18409,75 +18299,6 @@
               <a:t>・同一町域（東上宿6-1）に相談支援事業所「街かど福祉相談室るると」が所在し、相談〜通所の導線が近い。</a:t>
             </a:r>
             <a:endParaRPr lang="en-US" sz="1050" dirty="0"/>
-          </a:p>
-        </p:txBody>
-      </p:sp>
-      <p:sp>
-        <p:nvSpPr>
-          <p:cNvPr id="13" name="Text 11"/>
-          <p:cNvSpPr/>
-          <p:nvPr/>
-        </p:nvSpPr>
-        <p:spPr>
-          <a:xfrm>
-            <a:off x="7635240" y="1783080"/>
-            <a:ext cx="4069080" cy="2148840"/>
-          </a:xfrm>
-          <a:prstGeom prst="rect">
-            <a:avLst/>
-          </a:prstGeom>
-          <a:solidFill>
-            <a:srgbClr val="F4F6FA"/>
-          </a:solidFill>
-          <a:ln w="12700">
-            <a:solidFill>
-              <a:srgbClr val="9AA7B8"/>
-            </a:solidFill>
-            <a:prstDash val="dash"/>
-          </a:ln>
-        </p:spPr>
-        <p:txBody>
-          <a:bodyPr wrap="square" lIns="91440" tIns="45720" rIns="91440" bIns="45720" rtlCol="0" anchor="ctr"/>
-          <a:lstStyle/>
-          <a:p>
-            <a:pPr marL="0" indent="0" algn="ctr">
-              <a:lnSpc>
-                <a:spcPct val="110000"/>
-              </a:lnSpc>
-              <a:buNone/>
-            </a:pPr>
-            <a:r>
-              <a:rPr lang="en-US" sz="1200" b="1" dirty="0">
-                <a:solidFill>
-                  <a:srgbClr val="8A99AD"/>
-                </a:solidFill>
-                <a:latin typeface="Meiryo" pitchFamily="34" charset="0"/>
-                <a:ea typeface="Meiryo" pitchFamily="34" charset="-122"/>
-                <a:cs typeface="Meiryo" pitchFamily="34" charset="-120"/>
-              </a:rPr>
-              <a:t>［ 写真挿入エリア ］</a:t>
-            </a:r>
-            <a:endParaRPr lang="en-US" sz="1200" dirty="0"/>
-          </a:p>
-          <a:p>
-            <a:pPr marL="0" indent="0" algn="ctr">
-              <a:lnSpc>
-                <a:spcPct val="110000"/>
-              </a:lnSpc>
-              <a:buNone/>
-            </a:pPr>
-            <a:r>
-              <a:rPr lang="en-US" sz="950" dirty="0">
-                <a:solidFill>
-                  <a:srgbClr val="97A4B6"/>
-                </a:solidFill>
-                <a:latin typeface="Meiryo" pitchFamily="34" charset="0"/>
-                <a:ea typeface="Meiryo" pitchFamily="34" charset="-122"/>
-                <a:cs typeface="Meiryo" pitchFamily="34" charset="-120"/>
-              </a:rPr>
-              <a:t>（WAM NET 事業所詳細／公式HPの室内写真を挿入）</a:t>
-            </a:r>
-            <a:endParaRPr lang="en-US" sz="1200" dirty="0"/>
           </a:p>
         </p:txBody>
       </p:sp>
@@ -18489,8 +18310,8 @@
         </p:nvSpPr>
         <p:spPr>
           <a:xfrm>
-            <a:off x="7635240" y="4069080"/>
-            <a:ext cx="4069080" cy="2148840"/>
+            <a:off x="7635240" y="1783080"/>
+            <a:ext cx="4069080" cy="3474720"/>
           </a:xfrm>
           <a:prstGeom prst="rect">
             <a:avLst/>
@@ -18514,7 +18335,7 @@
         </p:nvSpPr>
         <p:spPr>
           <a:xfrm>
-            <a:off x="7818120" y="4187952"/>
+            <a:off x="7818120" y="1901952"/>
             <a:ext cx="3703320" cy="320040"/>
           </a:xfrm>
           <a:prstGeom prst="rect">
@@ -18553,8 +18374,8 @@
         </p:nvSpPr>
         <p:spPr>
           <a:xfrm>
-            <a:off x="7818120" y="4526280"/>
-            <a:ext cx="3794760" cy="1600200"/>
+            <a:off x="7818120" y="2286000"/>
+            <a:ext cx="3703320" cy="2907791"/>
           </a:xfrm>
           <a:prstGeom prst="rect">
             <a:avLst/>
@@ -18574,7 +18395,7 @@
               <a:buChar char="•"/>
             </a:pPr>
             <a:r>
-              <a:rPr lang="en-US" sz="1000" dirty="0">
+              <a:rPr lang="en-US" sz="1050" dirty="0">
                 <a:solidFill>
                   <a:srgbClr val="222222"/>
                 </a:solidFill>
@@ -18598,7 +18419,7 @@
               <a:buChar char="•"/>
             </a:pPr>
             <a:r>
-              <a:rPr lang="en-US" sz="1000" dirty="0">
+              <a:rPr lang="en-US" sz="1050" dirty="0">
                 <a:solidFill>
                   <a:srgbClr val="222222"/>
                 </a:solidFill>
@@ -18622,7 +18443,7 @@
               <a:buChar char="•"/>
             </a:pPr>
             <a:r>
-              <a:rPr lang="en-US" sz="1000" dirty="0">
+              <a:rPr lang="en-US" sz="1050" dirty="0">
                 <a:solidFill>
                   <a:srgbClr val="222222"/>
                 </a:solidFill>
@@ -18637,152 +18458,199 @@
               <a:ea typeface="メイリオ" panose="020B0604030504040204" pitchFamily="50" charset="-128"/>
             </a:endParaRPr>
           </a:p>
+          <a:p>
+            <a:pPr marL="342900" indent="-342900">
+              <a:spcAft>
+                <a:spcPts val="700"/>
+              </a:spcAft>
+              <a:buSzPct val="100000"/>
+              <a:buChar char="•"/>
+            </a:pPr>
+            <a:r>
+              <a:rPr lang="en-US" sz="1050" dirty="0">
+                <a:solidFill>
+                  <a:srgbClr val="222222"/>
+                </a:solidFill>
+                <a:latin typeface="メイリオ" panose="020B0604030504040204" pitchFamily="50" charset="-128"/>
+                <a:ea typeface="メイリオ" panose="020B0604030504040204" pitchFamily="50" charset="-128"/>
+                <a:cs typeface="Meiryo" pitchFamily="34" charset="-120"/>
+              </a:rPr>
+              <a:t>情報発信の弱さは裏返せば、Web集客に強い事業所にとって切り崩しやすい競合といえる。</a:t>
+            </a:r>
+            <a:endParaRPr lang="en-US" sz="1000" dirty="0">
+              <a:latin typeface="メイリオ" panose="020B0604030504040204" pitchFamily="50" charset="-128"/>
+              <a:ea typeface="メイリオ" panose="020B0604030504040204" pitchFamily="50" charset="-128"/>
+            </a:endParaRPr>
+          </a:p>
         </p:txBody>
       </p:sp>
       <p:sp>
         <p:nvSpPr>
-          <p:cNvPr id="900" name="PhotoSlot 1"/>
+          <p:cNvPr id="940" name="FootBG"/>
           <p:cNvSpPr/>
           <p:nvPr/>
         </p:nvSpPr>
         <p:spPr>
           <a:xfrm>
-            <a:off x="868680" y="4882896"/>
-            <a:ext cx="1965960" cy="1152144"/>
+            <a:off x="502920" y="5394960"/>
+            <a:ext cx="11201400" cy="896112"/>
           </a:xfrm>
           <a:prstGeom prst="rect">
             <a:avLst/>
           </a:prstGeom>
           <a:solidFill>
-            <a:srgbClr val="F4F6FA"/>
+            <a:srgbClr val="EEF2F8"/>
           </a:solidFill>
           <a:ln w="12700">
             <a:solidFill>
               <a:srgbClr val="9AA7B8"/>
             </a:solidFill>
-            <a:prstDash val="dash"/>
+            <a:prstDash val="solid"/>
           </a:ln>
         </p:spPr>
-        <p:txBody>
-          <a:bodyPr wrap="square" lIns="91440" tIns="45720" rIns="91440" bIns="45720" rtlCol="0" anchor="ctr"/>
-          <a:lstStyle/>
-          <a:p>
-            <a:pPr marL="0" indent="0" algn="ctr">
-              <a:lnSpc>
-                <a:spcPct val="110000"/>
-              </a:lnSpc>
-              <a:buNone/>
-            </a:pPr>
-            <a:r>
-              <a:rPr lang="en-US" sz="900" b="1" dirty="0">
-                <a:solidFill>
-                  <a:srgbClr val="8A99AD"/>
-                </a:solidFill>
-                <a:latin typeface="Meiryo" pitchFamily="34" charset="0"/>
-                <a:ea typeface="Meiryo" pitchFamily="34" charset="-122"/>
-                <a:cs typeface="Meiryo" pitchFamily="34" charset="-120"/>
-              </a:rPr>
-              <a:t>［ 外観 / 建物 ］</a:t>
-            </a:r>
-            <a:endParaRPr lang="en-US" sz="1200" dirty="0"/>
-          </a:p>
-        </p:txBody>
       </p:sp>
       <p:sp>
         <p:nvSpPr>
-          <p:cNvPr id="901" name="PhotoSlot 2"/>
+          <p:cNvPr id="941" name="FootTitle"/>
           <p:cNvSpPr/>
           <p:nvPr/>
         </p:nvSpPr>
         <p:spPr>
           <a:xfrm>
-            <a:off x="2971800" y="4882896"/>
-            <a:ext cx="1965960" cy="1152144"/>
+            <a:off x="713232" y="5477256"/>
+            <a:ext cx="10789920" cy="274320"/>
           </a:xfrm>
           <a:prstGeom prst="rect">
             <a:avLst/>
           </a:prstGeom>
-          <a:solidFill>
-            <a:srgbClr val="F4F6FA"/>
-          </a:solidFill>
-          <a:ln w="12700">
-            <a:solidFill>
-              <a:srgbClr val="9AA7B8"/>
-            </a:solidFill>
-            <a:prstDash val="dash"/>
-          </a:ln>
+          <a:noFill/>
+          <a:ln/>
         </p:spPr>
         <p:txBody>
-          <a:bodyPr wrap="square" lIns="91440" tIns="45720" rIns="91440" bIns="45720" rtlCol="0" anchor="ctr"/>
+          <a:bodyPr wrap="square" lIns="0" tIns="0" rIns="0" bIns="0" rtlCol="0" anchor="ctr"/>
           <a:lstStyle/>
           <a:p>
-            <a:pPr marL="0" indent="0" algn="ctr">
-              <a:lnSpc>
-                <a:spcPct val="110000"/>
-              </a:lnSpc>
+            <a:pPr marL="0" indent="0">
               <a:buNone/>
             </a:pPr>
             <a:r>
-              <a:rPr lang="en-US" sz="900" b="1" dirty="0">
-                <a:solidFill>
-                  <a:srgbClr val="8A99AD"/>
-                </a:solidFill>
-                <a:latin typeface="Meiryo" pitchFamily="34" charset="0"/>
-                <a:ea typeface="Meiryo" pitchFamily="34" charset="-122"/>
-                <a:cs typeface="Meiryo" pitchFamily="34" charset="-120"/>
-              </a:rPr>
-              <a:t>［ 室内・教室 ］</a:t>
-            </a:r>
-            <a:endParaRPr lang="en-US" sz="1200" dirty="0"/>
+              <a:rPr lang="en-US" sz="1250" b="1" dirty="0">
+                <a:solidFill>
+                  <a:srgbClr val="1B3A6B"/>
+                </a:solidFill>
+                <a:latin typeface="Meiryo" pitchFamily="34" charset="0"/>
+                <a:ea typeface="Meiryo" pitchFamily="34" charset="-122"/>
+                <a:cs typeface="Meiryo" pitchFamily="34" charset="-120"/>
+              </a:rPr>
+              <a:t>出典 ／ 要確認事項</a:t>
+            </a:r>
+            <a:endParaRPr lang="en-US" sz="1250" dirty="0"/>
           </a:p>
         </p:txBody>
       </p:sp>
       <p:sp>
         <p:nvSpPr>
-          <p:cNvPr id="902" name="PhotoSlot 3"/>
+          <p:cNvPr id="13" name="FootBody"/>
           <p:cNvSpPr/>
           <p:nvPr/>
         </p:nvSpPr>
         <p:spPr>
           <a:xfrm>
-            <a:off x="5074920" y="4882896"/>
-            <a:ext cx="1965960" cy="1152144"/>
+            <a:off x="713232" y="5779008"/>
+            <a:ext cx="10789920" cy="475488"/>
           </a:xfrm>
           <a:prstGeom prst="rect">
             <a:avLst/>
           </a:prstGeom>
-          <a:solidFill>
-            <a:srgbClr val="F4F6FA"/>
-          </a:solidFill>
-          <a:ln w="12700">
-            <a:solidFill>
-              <a:srgbClr val="9AA7B8"/>
-            </a:solidFill>
-            <a:prstDash val="dash"/>
-          </a:ln>
+          <a:noFill/>
+          <a:ln/>
         </p:spPr>
         <p:txBody>
-          <a:bodyPr wrap="square" lIns="91440" tIns="45720" rIns="91440" bIns="45720" rtlCol="0" anchor="ctr"/>
+          <a:bodyPr wrap="square" lIns="0" tIns="0" rIns="0" bIns="0" rtlCol="0" anchor="t"/>
           <a:lstStyle/>
           <a:p>
-            <a:pPr marL="0" indent="0" algn="ctr">
+            <a:pPr marL="0" indent="0">
               <a:lnSpc>
-                <a:spcPct val="110000"/>
+                <a:spcPct val="103000"/>
               </a:lnSpc>
               <a:buNone/>
             </a:pPr>
             <a:r>
-              <a:rPr lang="en-US" sz="900" b="1" dirty="0">
-                <a:solidFill>
-                  <a:srgbClr val="8A99AD"/>
-                </a:solidFill>
-                <a:latin typeface="Meiryo" pitchFamily="34" charset="0"/>
-                <a:ea typeface="Meiryo" pitchFamily="34" charset="-122"/>
-                <a:cs typeface="Meiryo" pitchFamily="34" charset="-120"/>
-              </a:rPr>
-              <a:t>［ 活動風景 ］</a:t>
-            </a:r>
-            <a:endParaRPr lang="en-US" sz="1200" dirty="0"/>
+              <a:rPr lang="en-US" sz="950" b="1" dirty="0">
+                <a:solidFill>
+                  <a:srgbClr val="2E6BB8"/>
+                </a:solidFill>
+                <a:latin typeface="Meiryo" pitchFamily="34" charset="0"/>
+                <a:ea typeface="Meiryo" pitchFamily="34" charset="-122"/>
+                <a:cs typeface="Meiryo" pitchFamily="34" charset="-120"/>
+              </a:rPr>
+              <a:t>▶</a:t>
+            </a:r>
+            <a:r>
+              <a:rPr lang="en-US" sz="950" b="1" dirty="0">
+                <a:solidFill>
+                  <a:srgbClr val="222222"/>
+                </a:solidFill>
+                <a:latin typeface="Meiryo" pitchFamily="34" charset="0"/>
+                <a:ea typeface="Meiryo" pitchFamily="34" charset="-122"/>
+                <a:cs typeface="Meiryo" pitchFamily="34" charset="-120"/>
+              </a:rPr>
+              <a:t>出典：</a:t>
+            </a:r>
+            <a:r>
+              <a:rPr lang="en-US" sz="950" dirty="0">
+                <a:solidFill>
+                  <a:srgbClr val="222222"/>
+                </a:solidFill>
+                <a:latin typeface="Meiryo" pitchFamily="34" charset="0"/>
+                <a:ea typeface="Meiryo" pitchFamily="34" charset="-122"/>
+                <a:cs typeface="Meiryo" pitchFamily="34" charset="-120"/>
+              </a:rPr>
+              <a:t>WAM NET 障害福祉サービス等情報公表システム／LITALICO発達ナビ／東金市公式サイト</a:t>
+            </a:r>
+            <a:endParaRPr lang="en-US" sz="1050" dirty="0"/>
+          </a:p>
+          <a:p>
+            <a:pPr marL="0" indent="0">
+              <a:lnSpc>
+                <a:spcPct val="103000"/>
+              </a:lnSpc>
+              <a:buNone/>
+            </a:pPr>
+            <a:r>
+              <a:rPr lang="en-US" sz="950" b="1" dirty="0">
+                <a:solidFill>
+                  <a:srgbClr val="2E6BB8"/>
+                </a:solidFill>
+                <a:latin typeface="Meiryo" pitchFamily="34" charset="0"/>
+                <a:ea typeface="Meiryo" pitchFamily="34" charset="-122"/>
+                <a:cs typeface="Meiryo" pitchFamily="34" charset="-120"/>
+              </a:rPr>
+              <a:t>▶</a:t>
+            </a:r>
+            <a:r>
+              <a:rPr lang="en-US" sz="950" b="1" dirty="0">
+                <a:solidFill>
+                  <a:srgbClr val="222222"/>
+                </a:solidFill>
+                <a:latin typeface="Meiryo" pitchFamily="34" charset="0"/>
+                <a:ea typeface="Meiryo" pitchFamily="34" charset="-122"/>
+                <a:cs typeface="Meiryo" pitchFamily="34" charset="-120"/>
+              </a:rPr>
+              <a:t>要確認事項：</a:t>
+            </a:r>
+            <a:r>
+              <a:rPr lang="en-US" sz="950" dirty="0">
+                <a:solidFill>
+                  <a:srgbClr val="222222"/>
+                </a:solidFill>
+                <a:latin typeface="Meiryo" pitchFamily="34" charset="0"/>
+                <a:ea typeface="Meiryo" pitchFamily="34" charset="-122"/>
+                <a:cs typeface="Meiryo" pitchFamily="34" charset="-120"/>
+              </a:rPr>
+              <a:t>運営法人、サービス提供時間、定員、送迎の有無、プログラム内容　※公開情報がほぼ無く電話ヒアリング必須</a:t>
+            </a:r>
+            <a:endParaRPr lang="en-US" sz="1050" dirty="0"/>
           </a:p>
         </p:txBody>
       </p:sp>
@@ -19049,7 +18917,7 @@
         <p:spPr>
           <a:xfrm>
             <a:off x="502920" y="1783080"/>
-            <a:ext cx="6903720" cy="4434840"/>
+            <a:ext cx="6903720" cy="3474720"/>
           </a:xfrm>
           <a:prstGeom prst="rect">
             <a:avLst/>
@@ -19120,7 +18988,7 @@
         <p:spPr>
           <a:xfrm>
             <a:off x="704088" y="2331720"/>
-            <a:ext cx="6501384" cy="3758184"/>
+            <a:ext cx="6501384" cy="2852927"/>
           </a:xfrm>
           <a:prstGeom prst="rect">
             <a:avLst/>
@@ -19139,7 +19007,7 @@
               <a:buNone/>
             </a:pPr>
             <a:r>
-              <a:rPr lang="en-US" sz="1050" b="1" dirty="0">
+              <a:rPr lang="en-US" sz="1100" b="1" dirty="0">
                 <a:solidFill>
                   <a:srgbClr val="2E6BB8"/>
                 </a:solidFill>
@@ -19150,7 +19018,7 @@
               <a:t>▶</a:t>
             </a:r>
             <a:r>
-              <a:rPr lang="en-US" sz="1050" b="1" dirty="0">
+              <a:rPr lang="en-US" sz="1100" b="1" dirty="0">
                 <a:solidFill>
                   <a:srgbClr val="222222"/>
                 </a:solidFill>
@@ -19161,7 +19029,7 @@
               <a:t>対象：</a:t>
             </a:r>
             <a:r>
-              <a:rPr lang="en-US" sz="1050" dirty="0">
+              <a:rPr lang="en-US" sz="1100" dirty="0">
                 <a:solidFill>
                   <a:srgbClr val="222222"/>
                 </a:solidFill>
@@ -19181,7 +19049,7 @@
               <a:buNone/>
             </a:pPr>
             <a:r>
-              <a:rPr lang="en-US" sz="1050" b="1" dirty="0">
+              <a:rPr lang="en-US" sz="1100" b="1" dirty="0">
                 <a:solidFill>
                   <a:srgbClr val="2E6BB8"/>
                 </a:solidFill>
@@ -19192,7 +19060,7 @@
               <a:t>▶</a:t>
             </a:r>
             <a:r>
-              <a:rPr lang="en-US" sz="1050" b="1" dirty="0">
+              <a:rPr lang="en-US" sz="1100" b="1" dirty="0">
                 <a:solidFill>
                   <a:srgbClr val="222222"/>
                 </a:solidFill>
@@ -19203,7 +19071,7 @@
               <a:t>住所：</a:t>
             </a:r>
             <a:r>
-              <a:rPr lang="en-US" sz="1050" dirty="0">
+              <a:rPr lang="en-US" sz="1100" dirty="0">
                 <a:solidFill>
                   <a:srgbClr val="222222"/>
                 </a:solidFill>
@@ -19223,7 +19091,7 @@
               <a:buNone/>
             </a:pPr>
             <a:r>
-              <a:rPr lang="en-US" sz="1050" b="1" dirty="0">
+              <a:rPr lang="en-US" sz="1100" b="1" dirty="0">
                 <a:solidFill>
                   <a:srgbClr val="2E6BB8"/>
                 </a:solidFill>
@@ -19234,7 +19102,7 @@
               <a:t>▶</a:t>
             </a:r>
             <a:r>
-              <a:rPr lang="en-US" sz="1050" b="1" dirty="0">
+              <a:rPr lang="en-US" sz="1100" b="1" dirty="0">
                 <a:solidFill>
                   <a:srgbClr val="222222"/>
                 </a:solidFill>
@@ -19245,7 +19113,7 @@
               <a:t>TEL／HP：</a:t>
             </a:r>
             <a:r>
-              <a:rPr lang="en-US" sz="1050" dirty="0">
+              <a:rPr lang="en-US" sz="1100" dirty="0">
                 <a:solidFill>
                   <a:srgbClr val="222222"/>
                 </a:solidFill>
@@ -19265,7 +19133,7 @@
               <a:buNone/>
             </a:pPr>
             <a:r>
-              <a:rPr lang="en-US" sz="1050" b="1" dirty="0">
+              <a:rPr lang="en-US" sz="1100" b="1" dirty="0">
                 <a:solidFill>
                   <a:srgbClr val="2E6BB8"/>
                 </a:solidFill>
@@ -19276,7 +19144,7 @@
               <a:t>▶</a:t>
             </a:r>
             <a:r>
-              <a:rPr lang="en-US" sz="1050" b="1" dirty="0">
+              <a:rPr lang="en-US" sz="1100" b="1" dirty="0">
                 <a:solidFill>
                   <a:srgbClr val="222222"/>
                 </a:solidFill>
@@ -19287,7 +19155,7 @@
               <a:t>サービス提供時間：</a:t>
             </a:r>
             <a:r>
-              <a:rPr lang="en-US" sz="1050" dirty="0">
+              <a:rPr lang="en-US" sz="1100" dirty="0">
                 <a:solidFill>
                   <a:srgbClr val="222222"/>
                 </a:solidFill>
@@ -19307,7 +19175,7 @@
               <a:buNone/>
             </a:pPr>
             <a:r>
-              <a:rPr lang="en-US" sz="1050" b="1" dirty="0">
+              <a:rPr lang="en-US" sz="1100" b="1" dirty="0">
                 <a:solidFill>
                   <a:srgbClr val="2E6BB8"/>
                 </a:solidFill>
@@ -19318,7 +19186,7 @@
               <a:t>▶</a:t>
             </a:r>
             <a:r>
-              <a:rPr lang="en-US" sz="1050" b="1" dirty="0">
+              <a:rPr lang="en-US" sz="1100" b="1" dirty="0">
                 <a:solidFill>
                   <a:srgbClr val="222222"/>
                 </a:solidFill>
@@ -19329,7 +19197,7 @@
               <a:t>開設：</a:t>
             </a:r>
             <a:r>
-              <a:rPr lang="en-US" sz="1050" dirty="0">
+              <a:rPr lang="en-US" sz="1100" dirty="0">
                 <a:solidFill>
                   <a:srgbClr val="222222"/>
                 </a:solidFill>
@@ -19361,7 +19229,7 @@
               <a:buNone/>
             </a:pPr>
             <a:r>
-              <a:rPr lang="en-US" sz="1050" b="1" dirty="0">
+              <a:rPr lang="en-US" sz="1100" b="1" dirty="0">
                 <a:solidFill>
                   <a:srgbClr val="2E6BB8"/>
                 </a:solidFill>
@@ -19372,7 +19240,7 @@
               <a:t>▶</a:t>
             </a:r>
             <a:r>
-              <a:rPr lang="en-US" sz="1050" b="1" dirty="0">
+              <a:rPr lang="en-US" sz="1100" b="1" dirty="0">
                 <a:solidFill>
                   <a:srgbClr val="222222"/>
                 </a:solidFill>
@@ -19383,7 +19251,7 @@
               <a:t>療育プログラムの特徴：</a:t>
             </a:r>
             <a:r>
-              <a:rPr lang="en-US" sz="1050" dirty="0">
+              <a:rPr lang="en-US" sz="1100" dirty="0">
                 <a:solidFill>
                   <a:srgbClr val="222222"/>
                 </a:solidFill>
@@ -19406,7 +19274,7 @@
               <a:buNone/>
             </a:pPr>
             <a:r>
-              <a:rPr lang="en-US" sz="1050" dirty="0">
+              <a:rPr lang="en-US" sz="1100" dirty="0">
                 <a:solidFill>
                   <a:srgbClr val="222222"/>
                 </a:solidFill>
@@ -19429,7 +19297,7 @@
               <a:buNone/>
             </a:pPr>
             <a:r>
-              <a:rPr lang="en-US" sz="1050" dirty="0">
+              <a:rPr lang="en-US" sz="1100" dirty="0">
                 <a:solidFill>
                   <a:srgbClr val="222222"/>
                 </a:solidFill>
@@ -19452,7 +19320,7 @@
               <a:buNone/>
             </a:pPr>
             <a:r>
-              <a:rPr lang="en-US" sz="1050" dirty="0">
+              <a:rPr lang="en-US" sz="1100" dirty="0">
                 <a:solidFill>
                   <a:srgbClr val="222222"/>
                 </a:solidFill>
@@ -19463,75 +19331,6 @@
               <a:t>・運営法人は千葉県内に児発・放デイ・相談支援あわせて10事業所を展開（本社：東金市道庭925-1）。</a:t>
             </a:r>
             <a:endParaRPr lang="en-US" sz="1050" dirty="0"/>
-          </a:p>
-        </p:txBody>
-      </p:sp>
-      <p:sp>
-        <p:nvSpPr>
-          <p:cNvPr id="13" name="Text 11"/>
-          <p:cNvSpPr/>
-          <p:nvPr/>
-        </p:nvSpPr>
-        <p:spPr>
-          <a:xfrm>
-            <a:off x="7635240" y="1783080"/>
-            <a:ext cx="4069080" cy="2148840"/>
-          </a:xfrm>
-          <a:prstGeom prst="rect">
-            <a:avLst/>
-          </a:prstGeom>
-          <a:solidFill>
-            <a:srgbClr val="F4F6FA"/>
-          </a:solidFill>
-          <a:ln w="12700">
-            <a:solidFill>
-              <a:srgbClr val="9AA7B8"/>
-            </a:solidFill>
-            <a:prstDash val="dash"/>
-          </a:ln>
-        </p:spPr>
-        <p:txBody>
-          <a:bodyPr wrap="square" lIns="91440" tIns="45720" rIns="91440" bIns="45720" rtlCol="0" anchor="ctr"/>
-          <a:lstStyle/>
-          <a:p>
-            <a:pPr marL="0" indent="0" algn="ctr">
-              <a:lnSpc>
-                <a:spcPct val="110000"/>
-              </a:lnSpc>
-              <a:buNone/>
-            </a:pPr>
-            <a:r>
-              <a:rPr lang="en-US" sz="1200" b="1" dirty="0">
-                <a:solidFill>
-                  <a:srgbClr val="8A99AD"/>
-                </a:solidFill>
-                <a:latin typeface="Meiryo" pitchFamily="34" charset="0"/>
-                <a:ea typeface="Meiryo" pitchFamily="34" charset="-122"/>
-                <a:cs typeface="Meiryo" pitchFamily="34" charset="-120"/>
-              </a:rPr>
-              <a:t>［ 写真挿入エリア ］</a:t>
-            </a:r>
-            <a:endParaRPr lang="en-US" sz="1200" dirty="0"/>
-          </a:p>
-          <a:p>
-            <a:pPr marL="0" indent="0" algn="ctr">
-              <a:lnSpc>
-                <a:spcPct val="110000"/>
-              </a:lnSpc>
-              <a:buNone/>
-            </a:pPr>
-            <a:r>
-              <a:rPr lang="en-US" sz="950" dirty="0">
-                <a:solidFill>
-                  <a:srgbClr val="97A4B6"/>
-                </a:solidFill>
-                <a:latin typeface="Meiryo" pitchFamily="34" charset="0"/>
-                <a:ea typeface="Meiryo" pitchFamily="34" charset="-122"/>
-                <a:cs typeface="Meiryo" pitchFamily="34" charset="-120"/>
-              </a:rPr>
-              <a:t>（公式HP kp-tougane.com／発達ナビの教室・運動あそび写真を挿入）</a:t>
-            </a:r>
-            <a:endParaRPr lang="en-US" sz="1200" dirty="0"/>
           </a:p>
         </p:txBody>
       </p:sp>
@@ -19543,8 +19342,8 @@
         </p:nvSpPr>
         <p:spPr>
           <a:xfrm>
-            <a:off x="7635240" y="4069080"/>
-            <a:ext cx="4069080" cy="2148840"/>
+            <a:off x="7635240" y="1783080"/>
+            <a:ext cx="4069080" cy="3474720"/>
           </a:xfrm>
           <a:prstGeom prst="rect">
             <a:avLst/>
@@ -19568,7 +19367,7 @@
         </p:nvSpPr>
         <p:spPr>
           <a:xfrm>
-            <a:off x="7818120" y="4187952"/>
+            <a:off x="7818120" y="1901952"/>
             <a:ext cx="3703320" cy="320040"/>
           </a:xfrm>
           <a:prstGeom prst="rect">
@@ -19607,8 +19406,8 @@
         </p:nvSpPr>
         <p:spPr>
           <a:xfrm>
-            <a:off x="7818120" y="4526280"/>
-            <a:ext cx="3794760" cy="1600200"/>
+            <a:off x="7818120" y="2286000"/>
+            <a:ext cx="3703320" cy="2907791"/>
           </a:xfrm>
           <a:prstGeom prst="rect">
             <a:avLst/>
@@ -19628,7 +19427,7 @@
               <a:buChar char="•"/>
             </a:pPr>
             <a:r>
-              <a:rPr lang="en-US" sz="1000" dirty="0">
+              <a:rPr lang="en-US" sz="1050" dirty="0">
                 <a:solidFill>
                   <a:srgbClr val="222222"/>
                 </a:solidFill>
@@ -19652,7 +19451,7 @@
               <a:buChar char="•"/>
             </a:pPr>
             <a:r>
-              <a:rPr lang="en-US" sz="1000" dirty="0">
+              <a:rPr lang="en-US" sz="1050" dirty="0">
                 <a:solidFill>
                   <a:srgbClr val="222222"/>
                 </a:solidFill>
@@ -19676,7 +19475,7 @@
               <a:buChar char="•"/>
             </a:pPr>
             <a:r>
-              <a:rPr lang="en-US" sz="1000" dirty="0">
+              <a:rPr lang="en-US" sz="1050" dirty="0">
                 <a:solidFill>
                   <a:srgbClr val="222222"/>
                 </a:solidFill>
@@ -19691,152 +19490,199 @@
               <a:ea typeface="メイリオ" panose="020B0604030504040204" pitchFamily="50" charset="-128"/>
             </a:endParaRPr>
           </a:p>
+          <a:p>
+            <a:pPr marL="342900" indent="-342900">
+              <a:spcAft>
+                <a:spcPts val="700"/>
+              </a:spcAft>
+              <a:buSzPct val="100000"/>
+              <a:buChar char="•"/>
+            </a:pPr>
+            <a:r>
+              <a:rPr lang="en-US" sz="1050" dirty="0">
+                <a:solidFill>
+                  <a:srgbClr val="222222"/>
+                </a:solidFill>
+                <a:latin typeface="メイリオ" panose="020B0604030504040204" pitchFamily="50" charset="-128"/>
+                <a:ea typeface="メイリオ" panose="020B0604030504040204" pitchFamily="50" charset="-128"/>
+                <a:cs typeface="Meiryo" pitchFamily="34" charset="-120"/>
+              </a:rPr>
+              <a:t>市内で最も認知度・集客力が高いと推察され、実質的なベンチマーク先となる事業所。</a:t>
+            </a:r>
+            <a:endParaRPr lang="en-US" sz="1000" dirty="0">
+              <a:latin typeface="メイリオ" panose="020B0604030504040204" pitchFamily="50" charset="-128"/>
+              <a:ea typeface="メイリオ" panose="020B0604030504040204" pitchFamily="50" charset="-128"/>
+            </a:endParaRPr>
+          </a:p>
         </p:txBody>
       </p:sp>
       <p:sp>
         <p:nvSpPr>
-          <p:cNvPr id="900" name="PhotoSlot 1"/>
+          <p:cNvPr id="940" name="FootBG"/>
           <p:cNvSpPr/>
           <p:nvPr/>
         </p:nvSpPr>
         <p:spPr>
           <a:xfrm>
-            <a:off x="868680" y="4882896"/>
-            <a:ext cx="1965960" cy="1152144"/>
+            <a:off x="502920" y="5394960"/>
+            <a:ext cx="11201400" cy="896112"/>
           </a:xfrm>
           <a:prstGeom prst="rect">
             <a:avLst/>
           </a:prstGeom>
           <a:solidFill>
-            <a:srgbClr val="F4F6FA"/>
+            <a:srgbClr val="EEF2F8"/>
           </a:solidFill>
           <a:ln w="12700">
             <a:solidFill>
               <a:srgbClr val="9AA7B8"/>
             </a:solidFill>
-            <a:prstDash val="dash"/>
+            <a:prstDash val="solid"/>
           </a:ln>
         </p:spPr>
-        <p:txBody>
-          <a:bodyPr wrap="square" lIns="91440" tIns="45720" rIns="91440" bIns="45720" rtlCol="0" anchor="ctr"/>
-          <a:lstStyle/>
-          <a:p>
-            <a:pPr marL="0" indent="0" algn="ctr">
-              <a:lnSpc>
-                <a:spcPct val="110000"/>
-              </a:lnSpc>
-              <a:buNone/>
-            </a:pPr>
-            <a:r>
-              <a:rPr lang="en-US" sz="900" b="1" dirty="0">
-                <a:solidFill>
-                  <a:srgbClr val="8A99AD"/>
-                </a:solidFill>
-                <a:latin typeface="Meiryo" pitchFamily="34" charset="0"/>
-                <a:ea typeface="Meiryo" pitchFamily="34" charset="-122"/>
-                <a:cs typeface="Meiryo" pitchFamily="34" charset="-120"/>
-              </a:rPr>
-              <a:t>［ 外観 / 建物 ］</a:t>
-            </a:r>
-            <a:endParaRPr lang="en-US" sz="1200" dirty="0"/>
-          </a:p>
-        </p:txBody>
       </p:sp>
       <p:sp>
         <p:nvSpPr>
-          <p:cNvPr id="901" name="PhotoSlot 2"/>
+          <p:cNvPr id="941" name="FootTitle"/>
           <p:cNvSpPr/>
           <p:nvPr/>
         </p:nvSpPr>
         <p:spPr>
           <a:xfrm>
-            <a:off x="2971800" y="4882896"/>
-            <a:ext cx="1965960" cy="1152144"/>
+            <a:off x="713232" y="5477256"/>
+            <a:ext cx="10789920" cy="274320"/>
           </a:xfrm>
           <a:prstGeom prst="rect">
             <a:avLst/>
           </a:prstGeom>
-          <a:solidFill>
-            <a:srgbClr val="F4F6FA"/>
-          </a:solidFill>
-          <a:ln w="12700">
-            <a:solidFill>
-              <a:srgbClr val="9AA7B8"/>
-            </a:solidFill>
-            <a:prstDash val="dash"/>
-          </a:ln>
+          <a:noFill/>
+          <a:ln/>
         </p:spPr>
         <p:txBody>
-          <a:bodyPr wrap="square" lIns="91440" tIns="45720" rIns="91440" bIns="45720" rtlCol="0" anchor="ctr"/>
+          <a:bodyPr wrap="square" lIns="0" tIns="0" rIns="0" bIns="0" rtlCol="0" anchor="ctr"/>
           <a:lstStyle/>
           <a:p>
-            <a:pPr marL="0" indent="0" algn="ctr">
-              <a:lnSpc>
-                <a:spcPct val="110000"/>
-              </a:lnSpc>
+            <a:pPr marL="0" indent="0">
               <a:buNone/>
             </a:pPr>
             <a:r>
-              <a:rPr lang="en-US" sz="900" b="1" dirty="0">
-                <a:solidFill>
-                  <a:srgbClr val="8A99AD"/>
-                </a:solidFill>
-                <a:latin typeface="Meiryo" pitchFamily="34" charset="0"/>
-                <a:ea typeface="Meiryo" pitchFamily="34" charset="-122"/>
-                <a:cs typeface="Meiryo" pitchFamily="34" charset="-120"/>
-              </a:rPr>
-              <a:t>［ 室内・教室 ］</a:t>
-            </a:r>
-            <a:endParaRPr lang="en-US" sz="1200" dirty="0"/>
+              <a:rPr lang="en-US" sz="1250" b="1" dirty="0">
+                <a:solidFill>
+                  <a:srgbClr val="1B3A6B"/>
+                </a:solidFill>
+                <a:latin typeface="Meiryo" pitchFamily="34" charset="0"/>
+                <a:ea typeface="Meiryo" pitchFamily="34" charset="-122"/>
+                <a:cs typeface="Meiryo" pitchFamily="34" charset="-120"/>
+              </a:rPr>
+              <a:t>出典 ／ 要確認事項</a:t>
+            </a:r>
+            <a:endParaRPr lang="en-US" sz="1250" dirty="0"/>
           </a:p>
         </p:txBody>
       </p:sp>
       <p:sp>
         <p:nvSpPr>
-          <p:cNvPr id="902" name="PhotoSlot 3"/>
+          <p:cNvPr id="13" name="FootBody"/>
           <p:cNvSpPr/>
           <p:nvPr/>
         </p:nvSpPr>
         <p:spPr>
           <a:xfrm>
-            <a:off x="5074920" y="4882896"/>
-            <a:ext cx="1965960" cy="1152144"/>
+            <a:off x="713232" y="5779008"/>
+            <a:ext cx="10789920" cy="475488"/>
           </a:xfrm>
           <a:prstGeom prst="rect">
             <a:avLst/>
           </a:prstGeom>
-          <a:solidFill>
-            <a:srgbClr val="F4F6FA"/>
-          </a:solidFill>
-          <a:ln w="12700">
-            <a:solidFill>
-              <a:srgbClr val="9AA7B8"/>
-            </a:solidFill>
-            <a:prstDash val="dash"/>
-          </a:ln>
+          <a:noFill/>
+          <a:ln/>
         </p:spPr>
         <p:txBody>
-          <a:bodyPr wrap="square" lIns="91440" tIns="45720" rIns="91440" bIns="45720" rtlCol="0" anchor="ctr"/>
+          <a:bodyPr wrap="square" lIns="0" tIns="0" rIns="0" bIns="0" rtlCol="0" anchor="t"/>
           <a:lstStyle/>
           <a:p>
-            <a:pPr marL="0" indent="0" algn="ctr">
+            <a:pPr marL="0" indent="0">
               <a:lnSpc>
-                <a:spcPct val="110000"/>
+                <a:spcPct val="103000"/>
               </a:lnSpc>
               <a:buNone/>
             </a:pPr>
             <a:r>
-              <a:rPr lang="en-US" sz="900" b="1" dirty="0">
-                <a:solidFill>
-                  <a:srgbClr val="8A99AD"/>
-                </a:solidFill>
-                <a:latin typeface="Meiryo" pitchFamily="34" charset="0"/>
-                <a:ea typeface="Meiryo" pitchFamily="34" charset="-122"/>
-                <a:cs typeface="Meiryo" pitchFamily="34" charset="-120"/>
-              </a:rPr>
-              <a:t>［ 活動風景 ］</a:t>
-            </a:r>
-            <a:endParaRPr lang="en-US" sz="1200" dirty="0"/>
+              <a:rPr lang="en-US" sz="950" b="1" dirty="0">
+                <a:solidFill>
+                  <a:srgbClr val="2E6BB8"/>
+                </a:solidFill>
+                <a:latin typeface="Meiryo" pitchFamily="34" charset="0"/>
+                <a:ea typeface="Meiryo" pitchFamily="34" charset="-122"/>
+                <a:cs typeface="Meiryo" pitchFamily="34" charset="-120"/>
+              </a:rPr>
+              <a:t>▶</a:t>
+            </a:r>
+            <a:r>
+              <a:rPr lang="en-US" sz="950" b="1" dirty="0">
+                <a:solidFill>
+                  <a:srgbClr val="222222"/>
+                </a:solidFill>
+                <a:latin typeface="Meiryo" pitchFamily="34" charset="0"/>
+                <a:ea typeface="Meiryo" pitchFamily="34" charset="-122"/>
+                <a:cs typeface="Meiryo" pitchFamily="34" charset="-120"/>
+              </a:rPr>
+              <a:t>出典：</a:t>
+            </a:r>
+            <a:r>
+              <a:rPr lang="en-US" sz="950" dirty="0">
+                <a:solidFill>
+                  <a:srgbClr val="222222"/>
+                </a:solidFill>
+                <a:latin typeface="Meiryo" pitchFamily="34" charset="0"/>
+                <a:ea typeface="Meiryo" pitchFamily="34" charset="-122"/>
+                <a:cs typeface="Meiryo" pitchFamily="34" charset="-120"/>
+              </a:rPr>
+              <a:t>公式HP kp-tougane.com／WAM NET／障害者ドットコム／児発ねっと</a:t>
+            </a:r>
+            <a:endParaRPr lang="en-US" sz="1050" dirty="0"/>
+          </a:p>
+          <a:p>
+            <a:pPr marL="0" indent="0">
+              <a:lnSpc>
+                <a:spcPct val="103000"/>
+              </a:lnSpc>
+              <a:buNone/>
+            </a:pPr>
+            <a:r>
+              <a:rPr lang="en-US" sz="950" b="1" dirty="0">
+                <a:solidFill>
+                  <a:srgbClr val="2E6BB8"/>
+                </a:solidFill>
+                <a:latin typeface="Meiryo" pitchFamily="34" charset="0"/>
+                <a:ea typeface="Meiryo" pitchFamily="34" charset="-122"/>
+                <a:cs typeface="Meiryo" pitchFamily="34" charset="-120"/>
+              </a:rPr>
+              <a:t>▶</a:t>
+            </a:r>
+            <a:r>
+              <a:rPr lang="en-US" sz="950" b="1" dirty="0">
+                <a:solidFill>
+                  <a:srgbClr val="222222"/>
+                </a:solidFill>
+                <a:latin typeface="Meiryo" pitchFamily="34" charset="0"/>
+                <a:ea typeface="Meiryo" pitchFamily="34" charset="-122"/>
+                <a:cs typeface="Meiryo" pitchFamily="34" charset="-120"/>
+              </a:rPr>
+              <a:t>要確認事項：</a:t>
+            </a:r>
+            <a:r>
+              <a:rPr lang="en-US" sz="950" dirty="0">
+                <a:solidFill>
+                  <a:srgbClr val="222222"/>
+                </a:solidFill>
+                <a:latin typeface="Meiryo" pitchFamily="34" charset="0"/>
+                <a:ea typeface="Meiryo" pitchFamily="34" charset="-122"/>
+                <a:cs typeface="Meiryo" pitchFamily="34" charset="-120"/>
+              </a:rPr>
+              <a:t>定員、現在の空き状況、送迎範囲、児童発達支援と放課後等デイサービスの時間帯区分</a:t>
+            </a:r>
+            <a:endParaRPr lang="en-US" sz="1050" dirty="0"/>
           </a:p>
         </p:txBody>
       </p:sp>
@@ -20103,7 +19949,7 @@
         <p:spPr>
           <a:xfrm>
             <a:off x="502920" y="1783080"/>
-            <a:ext cx="6903720" cy="4434840"/>
+            <a:ext cx="6903720" cy="3474720"/>
           </a:xfrm>
           <a:prstGeom prst="rect">
             <a:avLst/>
@@ -20174,7 +20020,7 @@
         <p:spPr>
           <a:xfrm>
             <a:off x="704088" y="2331720"/>
-            <a:ext cx="6501384" cy="3758184"/>
+            <a:ext cx="6501384" cy="2852927"/>
           </a:xfrm>
           <a:prstGeom prst="rect">
             <a:avLst/>
@@ -20193,7 +20039,7 @@
               <a:buNone/>
             </a:pPr>
             <a:r>
-              <a:rPr lang="en-US" sz="1050" b="1" dirty="0">
+              <a:rPr lang="en-US" sz="1100" b="1" dirty="0">
                 <a:solidFill>
                   <a:srgbClr val="2E6BB8"/>
                 </a:solidFill>
@@ -20204,7 +20050,7 @@
               <a:t>▶</a:t>
             </a:r>
             <a:r>
-              <a:rPr lang="en-US" sz="1050" b="1" dirty="0">
+              <a:rPr lang="en-US" sz="1100" b="1" dirty="0">
                 <a:solidFill>
                   <a:srgbClr val="222222"/>
                 </a:solidFill>
@@ -20215,7 +20061,7 @@
               <a:t>対象：</a:t>
             </a:r>
             <a:r>
-              <a:rPr lang="en-US" sz="1050" dirty="0">
+              <a:rPr lang="en-US" sz="1100" dirty="0">
                 <a:solidFill>
                   <a:srgbClr val="222222"/>
                 </a:solidFill>
@@ -20235,7 +20081,7 @@
               <a:buNone/>
             </a:pPr>
             <a:r>
-              <a:rPr lang="en-US" sz="1050" b="1" dirty="0">
+              <a:rPr lang="en-US" sz="1100" b="1" dirty="0">
                 <a:solidFill>
                   <a:srgbClr val="2E6BB8"/>
                 </a:solidFill>
@@ -20246,7 +20092,7 @@
               <a:t>▶</a:t>
             </a:r>
             <a:r>
-              <a:rPr lang="en-US" sz="1050" b="1" dirty="0">
+              <a:rPr lang="en-US" sz="1100" b="1" dirty="0">
                 <a:solidFill>
                   <a:srgbClr val="222222"/>
                 </a:solidFill>
@@ -20257,7 +20103,7 @@
               <a:t>住所：</a:t>
             </a:r>
             <a:r>
-              <a:rPr lang="en-US" sz="1050" dirty="0">
+              <a:rPr lang="en-US" sz="1100" dirty="0">
                 <a:solidFill>
                   <a:srgbClr val="222222"/>
                 </a:solidFill>
@@ -20277,7 +20123,7 @@
               <a:buNone/>
             </a:pPr>
             <a:r>
-              <a:rPr lang="en-US" sz="1050" b="1" dirty="0">
+              <a:rPr lang="en-US" sz="1100" b="1" dirty="0">
                 <a:solidFill>
                   <a:srgbClr val="2E6BB8"/>
                 </a:solidFill>
@@ -20288,7 +20134,7 @@
               <a:t>▶</a:t>
             </a:r>
             <a:r>
-              <a:rPr lang="en-US" sz="1050" b="1" dirty="0">
+              <a:rPr lang="en-US" sz="1100" b="1" dirty="0">
                 <a:solidFill>
                   <a:srgbClr val="222222"/>
                 </a:solidFill>
@@ -20299,7 +20145,7 @@
               <a:t>TEL／HP：</a:t>
             </a:r>
             <a:r>
-              <a:rPr lang="en-US" sz="1050" dirty="0">
+              <a:rPr lang="en-US" sz="1100" dirty="0">
                 <a:solidFill>
                   <a:srgbClr val="222222"/>
                 </a:solidFill>
@@ -20319,7 +20165,7 @@
               <a:buNone/>
             </a:pPr>
             <a:r>
-              <a:rPr lang="en-US" sz="1050" b="1" dirty="0">
+              <a:rPr lang="en-US" sz="1100" b="1" dirty="0">
                 <a:solidFill>
                   <a:srgbClr val="2E6BB8"/>
                 </a:solidFill>
@@ -20330,7 +20176,7 @@
               <a:t>▶</a:t>
             </a:r>
             <a:r>
-              <a:rPr lang="en-US" sz="1050" b="1" dirty="0">
+              <a:rPr lang="en-US" sz="1100" b="1" dirty="0">
                 <a:solidFill>
                   <a:srgbClr val="222222"/>
                 </a:solidFill>
@@ -20341,7 +20187,7 @@
               <a:t>サービス提供時間：</a:t>
             </a:r>
             <a:r>
-              <a:rPr lang="en-US" sz="1050" dirty="0">
+              <a:rPr lang="en-US" sz="1100" dirty="0">
                 <a:solidFill>
                   <a:srgbClr val="222222"/>
                 </a:solidFill>
@@ -20361,7 +20207,7 @@
               <a:buNone/>
             </a:pPr>
             <a:r>
-              <a:rPr lang="en-US" sz="1050" b="1" dirty="0">
+              <a:rPr lang="en-US" sz="1100" b="1" dirty="0">
                 <a:solidFill>
                   <a:srgbClr val="2E6BB8"/>
                 </a:solidFill>
@@ -20372,7 +20218,7 @@
               <a:t>▶</a:t>
             </a:r>
             <a:r>
-              <a:rPr lang="en-US" sz="1050" b="1" dirty="0">
+              <a:rPr lang="en-US" sz="1100" b="1" dirty="0">
                 <a:solidFill>
                   <a:srgbClr val="222222"/>
                 </a:solidFill>
@@ -20383,7 +20229,7 @@
               <a:t>定員：</a:t>
             </a:r>
             <a:r>
-              <a:rPr lang="en-US" sz="1050" dirty="0">
+              <a:rPr lang="en-US" sz="1100" dirty="0">
                 <a:solidFill>
                   <a:srgbClr val="222222"/>
                 </a:solidFill>
@@ -20415,7 +20261,7 @@
               <a:buNone/>
             </a:pPr>
             <a:r>
-              <a:rPr lang="en-US" sz="1050" b="1" dirty="0">
+              <a:rPr lang="en-US" sz="1100" b="1" dirty="0">
                 <a:solidFill>
                   <a:srgbClr val="2E6BB8"/>
                 </a:solidFill>
@@ -20426,7 +20272,7 @@
               <a:t>▶</a:t>
             </a:r>
             <a:r>
-              <a:rPr lang="en-US" sz="1050" b="1" dirty="0">
+              <a:rPr lang="en-US" sz="1100" b="1" dirty="0">
                 <a:solidFill>
                   <a:srgbClr val="222222"/>
                 </a:solidFill>
@@ -20437,7 +20283,7 @@
               <a:t>療育プログラムの特徴：</a:t>
             </a:r>
             <a:r>
-              <a:rPr lang="en-US" sz="1050" dirty="0">
+              <a:rPr lang="en-US" sz="1100" dirty="0">
                 <a:solidFill>
                   <a:srgbClr val="222222"/>
                 </a:solidFill>
@@ -20460,7 +20306,7 @@
               <a:buNone/>
             </a:pPr>
             <a:r>
-              <a:rPr lang="en-US" sz="1050" dirty="0">
+              <a:rPr lang="en-US" sz="1100" dirty="0">
                 <a:solidFill>
                   <a:srgbClr val="222222"/>
                 </a:solidFill>
@@ -20483,7 +20329,7 @@
               <a:buNone/>
             </a:pPr>
             <a:r>
-              <a:rPr lang="en-US" sz="1050" dirty="0">
+              <a:rPr lang="en-US" sz="1100" dirty="0">
                 <a:solidFill>
                   <a:srgbClr val="222222"/>
                 </a:solidFill>
@@ -20506,7 +20352,7 @@
               <a:buNone/>
             </a:pPr>
             <a:r>
-              <a:rPr lang="en-US" sz="1050" dirty="0">
+              <a:rPr lang="en-US" sz="1100" dirty="0">
                 <a:solidFill>
                   <a:srgbClr val="222222"/>
                 </a:solidFill>
@@ -20517,75 +20363,6 @@
               <a:t>・地域密着型の教室として、家庭と連携しながら安心して通える場所づくりを掲げる。</a:t>
             </a:r>
             <a:endParaRPr lang="en-US" sz="1050" dirty="0"/>
-          </a:p>
-        </p:txBody>
-      </p:sp>
-      <p:sp>
-        <p:nvSpPr>
-          <p:cNvPr id="13" name="Text 11"/>
-          <p:cNvSpPr/>
-          <p:nvPr/>
-        </p:nvSpPr>
-        <p:spPr>
-          <a:xfrm>
-            <a:off x="7635240" y="1783080"/>
-            <a:ext cx="4069080" cy="2148840"/>
-          </a:xfrm>
-          <a:prstGeom prst="rect">
-            <a:avLst/>
-          </a:prstGeom>
-          <a:solidFill>
-            <a:srgbClr val="F4F6FA"/>
-          </a:solidFill>
-          <a:ln w="12700">
-            <a:solidFill>
-              <a:srgbClr val="9AA7B8"/>
-            </a:solidFill>
-            <a:prstDash val="dash"/>
-          </a:ln>
-        </p:spPr>
-        <p:txBody>
-          <a:bodyPr wrap="square" lIns="91440" tIns="45720" rIns="91440" bIns="45720" rtlCol="0" anchor="ctr"/>
-          <a:lstStyle/>
-          <a:p>
-            <a:pPr marL="0" indent="0" algn="ctr">
-              <a:lnSpc>
-                <a:spcPct val="110000"/>
-              </a:lnSpc>
-              <a:buNone/>
-            </a:pPr>
-            <a:r>
-              <a:rPr lang="en-US" sz="1200" b="1" dirty="0">
-                <a:solidFill>
-                  <a:srgbClr val="8A99AD"/>
-                </a:solidFill>
-                <a:latin typeface="Meiryo" pitchFamily="34" charset="0"/>
-                <a:ea typeface="Meiryo" pitchFamily="34" charset="-122"/>
-                <a:cs typeface="Meiryo" pitchFamily="34" charset="-120"/>
-              </a:rPr>
-              <a:t>［ 写真挿入エリア ］</a:t>
-            </a:r>
-            <a:endParaRPr lang="en-US" sz="1200" dirty="0"/>
-          </a:p>
-          <a:p>
-            <a:pPr marL="0" indent="0" algn="ctr">
-              <a:lnSpc>
-                <a:spcPct val="110000"/>
-              </a:lnSpc>
-              <a:buNone/>
-            </a:pPr>
-            <a:r>
-              <a:rPr lang="en-US" sz="950" dirty="0">
-                <a:solidFill>
-                  <a:srgbClr val="97A4B6"/>
-                </a:solidFill>
-                <a:latin typeface="Meiryo" pitchFamily="34" charset="0"/>
-                <a:ea typeface="Meiryo" pitchFamily="34" charset="-122"/>
-                <a:cs typeface="Meiryo" pitchFamily="34" charset="-120"/>
-              </a:rPr>
-              <a:t>（公式HP kp-daini-tougane.com の教室・活動風景の写真を挿入）</a:t>
-            </a:r>
-            <a:endParaRPr lang="en-US" sz="1200" dirty="0"/>
           </a:p>
         </p:txBody>
       </p:sp>
@@ -20597,8 +20374,8 @@
         </p:nvSpPr>
         <p:spPr>
           <a:xfrm>
-            <a:off x="7635240" y="4069080"/>
-            <a:ext cx="4069080" cy="2148840"/>
+            <a:off x="7635240" y="1783080"/>
+            <a:ext cx="4069080" cy="3474720"/>
           </a:xfrm>
           <a:prstGeom prst="rect">
             <a:avLst/>
@@ -20622,7 +20399,7 @@
         </p:nvSpPr>
         <p:spPr>
           <a:xfrm>
-            <a:off x="7818120" y="4187952"/>
+            <a:off x="7818120" y="1901952"/>
             <a:ext cx="3703320" cy="320040"/>
           </a:xfrm>
           <a:prstGeom prst="rect">
@@ -20661,8 +20438,8 @@
         </p:nvSpPr>
         <p:spPr>
           <a:xfrm>
-            <a:off x="7818120" y="4526280"/>
-            <a:ext cx="3794760" cy="1600200"/>
+            <a:off x="7818120" y="2286000"/>
+            <a:ext cx="3703320" cy="2907791"/>
           </a:xfrm>
           <a:prstGeom prst="rect">
             <a:avLst/>
@@ -20682,7 +20459,7 @@
               <a:buChar char="•"/>
             </a:pPr>
             <a:r>
-              <a:rPr lang="en-US" sz="1000" dirty="0">
+              <a:rPr lang="en-US" sz="1050" dirty="0">
                 <a:solidFill>
                   <a:srgbClr val="222222"/>
                 </a:solidFill>
@@ -20706,7 +20483,7 @@
               <a:buChar char="•"/>
             </a:pPr>
             <a:r>
-              <a:rPr lang="en-US" sz="1000" dirty="0">
+              <a:rPr lang="en-US" sz="1050" dirty="0">
                 <a:solidFill>
                   <a:srgbClr val="222222"/>
                 </a:solidFill>
@@ -20730,7 +20507,7 @@
               <a:buChar char="•"/>
             </a:pPr>
             <a:r>
-              <a:rPr lang="en-US" sz="1000" dirty="0">
+              <a:rPr lang="en-US" sz="1050" dirty="0">
                 <a:solidFill>
                   <a:srgbClr val="222222"/>
                 </a:solidFill>
@@ -20745,152 +20522,199 @@
               <a:ea typeface="メイリオ" panose="020B0604030504040204" pitchFamily="50" charset="-128"/>
             </a:endParaRPr>
           </a:p>
+          <a:p>
+            <a:pPr marL="342900" indent="-342900">
+              <a:spcAft>
+                <a:spcPts val="700"/>
+              </a:spcAft>
+              <a:buSzPct val="100000"/>
+              <a:buChar char="•"/>
+            </a:pPr>
+            <a:r>
+              <a:rPr lang="en-US" sz="1050" dirty="0">
+                <a:solidFill>
+                  <a:srgbClr val="222222"/>
+                </a:solidFill>
+                <a:latin typeface="メイリオ" panose="020B0604030504040204" pitchFamily="50" charset="-128"/>
+                <a:ea typeface="メイリオ" panose="020B0604030504040204" pitchFamily="50" charset="-128"/>
+                <a:cs typeface="Meiryo" pitchFamily="34" charset="-120"/>
+              </a:rPr>
+              <a:t>田間エリアは公立・民間が近接する激戦区。差別化には時間帯と送迎範囲の設計が鍵となる。</a:t>
+            </a:r>
+            <a:endParaRPr lang="en-US" sz="1000" dirty="0">
+              <a:latin typeface="メイリオ" panose="020B0604030504040204" pitchFamily="50" charset="-128"/>
+              <a:ea typeface="メイリオ" panose="020B0604030504040204" pitchFamily="50" charset="-128"/>
+            </a:endParaRPr>
+          </a:p>
         </p:txBody>
       </p:sp>
       <p:sp>
         <p:nvSpPr>
-          <p:cNvPr id="900" name="PhotoSlot 1"/>
+          <p:cNvPr id="940" name="FootBG"/>
           <p:cNvSpPr/>
           <p:nvPr/>
         </p:nvSpPr>
         <p:spPr>
           <a:xfrm>
-            <a:off x="868680" y="4882896"/>
-            <a:ext cx="1965960" cy="1152144"/>
+            <a:off x="502920" y="5394960"/>
+            <a:ext cx="11201400" cy="896112"/>
           </a:xfrm>
           <a:prstGeom prst="rect">
             <a:avLst/>
           </a:prstGeom>
           <a:solidFill>
-            <a:srgbClr val="F4F6FA"/>
+            <a:srgbClr val="EEF2F8"/>
           </a:solidFill>
           <a:ln w="12700">
             <a:solidFill>
               <a:srgbClr val="9AA7B8"/>
             </a:solidFill>
-            <a:prstDash val="dash"/>
+            <a:prstDash val="solid"/>
           </a:ln>
         </p:spPr>
-        <p:txBody>
-          <a:bodyPr wrap="square" lIns="91440" tIns="45720" rIns="91440" bIns="45720" rtlCol="0" anchor="ctr"/>
-          <a:lstStyle/>
-          <a:p>
-            <a:pPr marL="0" indent="0" algn="ctr">
-              <a:lnSpc>
-                <a:spcPct val="110000"/>
-              </a:lnSpc>
-              <a:buNone/>
-            </a:pPr>
-            <a:r>
-              <a:rPr lang="en-US" sz="900" b="1" dirty="0">
-                <a:solidFill>
-                  <a:srgbClr val="8A99AD"/>
-                </a:solidFill>
-                <a:latin typeface="Meiryo" pitchFamily="34" charset="0"/>
-                <a:ea typeface="Meiryo" pitchFamily="34" charset="-122"/>
-                <a:cs typeface="Meiryo" pitchFamily="34" charset="-120"/>
-              </a:rPr>
-              <a:t>［ 外観 / 建物 ］</a:t>
-            </a:r>
-            <a:endParaRPr lang="en-US" sz="1200" dirty="0"/>
-          </a:p>
-        </p:txBody>
       </p:sp>
       <p:sp>
         <p:nvSpPr>
-          <p:cNvPr id="901" name="PhotoSlot 2"/>
+          <p:cNvPr id="941" name="FootTitle"/>
           <p:cNvSpPr/>
           <p:nvPr/>
         </p:nvSpPr>
         <p:spPr>
           <a:xfrm>
-            <a:off x="2971800" y="4882896"/>
-            <a:ext cx="1965960" cy="1152144"/>
+            <a:off x="713232" y="5477256"/>
+            <a:ext cx="10789920" cy="274320"/>
           </a:xfrm>
           <a:prstGeom prst="rect">
             <a:avLst/>
           </a:prstGeom>
-          <a:solidFill>
-            <a:srgbClr val="F4F6FA"/>
-          </a:solidFill>
-          <a:ln w="12700">
-            <a:solidFill>
-              <a:srgbClr val="9AA7B8"/>
-            </a:solidFill>
-            <a:prstDash val="dash"/>
-          </a:ln>
+          <a:noFill/>
+          <a:ln/>
         </p:spPr>
         <p:txBody>
-          <a:bodyPr wrap="square" lIns="91440" tIns="45720" rIns="91440" bIns="45720" rtlCol="0" anchor="ctr"/>
+          <a:bodyPr wrap="square" lIns="0" tIns="0" rIns="0" bIns="0" rtlCol="0" anchor="ctr"/>
           <a:lstStyle/>
           <a:p>
-            <a:pPr marL="0" indent="0" algn="ctr">
-              <a:lnSpc>
-                <a:spcPct val="110000"/>
-              </a:lnSpc>
+            <a:pPr marL="0" indent="0">
               <a:buNone/>
             </a:pPr>
             <a:r>
-              <a:rPr lang="en-US" sz="900" b="1" dirty="0">
-                <a:solidFill>
-                  <a:srgbClr val="8A99AD"/>
-                </a:solidFill>
-                <a:latin typeface="Meiryo" pitchFamily="34" charset="0"/>
-                <a:ea typeface="Meiryo" pitchFamily="34" charset="-122"/>
-                <a:cs typeface="Meiryo" pitchFamily="34" charset="-120"/>
-              </a:rPr>
-              <a:t>［ 室内・教室 ］</a:t>
-            </a:r>
-            <a:endParaRPr lang="en-US" sz="1200" dirty="0"/>
+              <a:rPr lang="en-US" sz="1250" b="1" dirty="0">
+                <a:solidFill>
+                  <a:srgbClr val="1B3A6B"/>
+                </a:solidFill>
+                <a:latin typeface="Meiryo" pitchFamily="34" charset="0"/>
+                <a:ea typeface="Meiryo" pitchFamily="34" charset="-122"/>
+                <a:cs typeface="Meiryo" pitchFamily="34" charset="-120"/>
+              </a:rPr>
+              <a:t>出典 ／ 要確認事項</a:t>
+            </a:r>
+            <a:endParaRPr lang="en-US" sz="1250" dirty="0"/>
           </a:p>
         </p:txBody>
       </p:sp>
       <p:sp>
         <p:nvSpPr>
-          <p:cNvPr id="902" name="PhotoSlot 3"/>
+          <p:cNvPr id="13" name="FootBody"/>
           <p:cNvSpPr/>
           <p:nvPr/>
         </p:nvSpPr>
         <p:spPr>
           <a:xfrm>
-            <a:off x="5074920" y="4882896"/>
-            <a:ext cx="1965960" cy="1152144"/>
+            <a:off x="713232" y="5779008"/>
+            <a:ext cx="10789920" cy="475488"/>
           </a:xfrm>
           <a:prstGeom prst="rect">
             <a:avLst/>
           </a:prstGeom>
-          <a:solidFill>
-            <a:srgbClr val="F4F6FA"/>
-          </a:solidFill>
-          <a:ln w="12700">
-            <a:solidFill>
-              <a:srgbClr val="9AA7B8"/>
-            </a:solidFill>
-            <a:prstDash val="dash"/>
-          </a:ln>
+          <a:noFill/>
+          <a:ln/>
         </p:spPr>
         <p:txBody>
-          <a:bodyPr wrap="square" lIns="91440" tIns="45720" rIns="91440" bIns="45720" rtlCol="0" anchor="ctr"/>
+          <a:bodyPr wrap="square" lIns="0" tIns="0" rIns="0" bIns="0" rtlCol="0" anchor="t"/>
           <a:lstStyle/>
           <a:p>
-            <a:pPr marL="0" indent="0" algn="ctr">
+            <a:pPr marL="0" indent="0">
               <a:lnSpc>
-                <a:spcPct val="110000"/>
+                <a:spcPct val="103000"/>
               </a:lnSpc>
               <a:buNone/>
             </a:pPr>
             <a:r>
-              <a:rPr lang="en-US" sz="900" b="1" dirty="0">
-                <a:solidFill>
-                  <a:srgbClr val="8A99AD"/>
-                </a:solidFill>
-                <a:latin typeface="Meiryo" pitchFamily="34" charset="0"/>
-                <a:ea typeface="Meiryo" pitchFamily="34" charset="-122"/>
-                <a:cs typeface="Meiryo" pitchFamily="34" charset="-120"/>
-              </a:rPr>
-              <a:t>［ 活動風景 ］</a:t>
-            </a:r>
-            <a:endParaRPr lang="en-US" sz="1200" dirty="0"/>
+              <a:rPr lang="en-US" sz="950" b="1" dirty="0">
+                <a:solidFill>
+                  <a:srgbClr val="2E6BB8"/>
+                </a:solidFill>
+                <a:latin typeface="Meiryo" pitchFamily="34" charset="0"/>
+                <a:ea typeface="Meiryo" pitchFamily="34" charset="-122"/>
+                <a:cs typeface="Meiryo" pitchFamily="34" charset="-120"/>
+              </a:rPr>
+              <a:t>▶</a:t>
+            </a:r>
+            <a:r>
+              <a:rPr lang="en-US" sz="950" b="1" dirty="0">
+                <a:solidFill>
+                  <a:srgbClr val="222222"/>
+                </a:solidFill>
+                <a:latin typeface="Meiryo" pitchFamily="34" charset="0"/>
+                <a:ea typeface="Meiryo" pitchFamily="34" charset="-122"/>
+                <a:cs typeface="Meiryo" pitchFamily="34" charset="-120"/>
+              </a:rPr>
+              <a:t>出典：</a:t>
+            </a:r>
+            <a:r>
+              <a:rPr lang="en-US" sz="950" dirty="0">
+                <a:solidFill>
+                  <a:srgbClr val="222222"/>
+                </a:solidFill>
+                <a:latin typeface="Meiryo" pitchFamily="34" charset="0"/>
+                <a:ea typeface="Meiryo" pitchFamily="34" charset="-122"/>
+                <a:cs typeface="Meiryo" pitchFamily="34" charset="-120"/>
+              </a:rPr>
+              <a:t>公式HP kp-daini-tougane.com／株式会社ベストグロウ公式（bestgrow-chiba.com）</a:t>
+            </a:r>
+            <a:endParaRPr lang="en-US" sz="1050" dirty="0"/>
+          </a:p>
+          <a:p>
+            <a:pPr marL="0" indent="0">
+              <a:lnSpc>
+                <a:spcPct val="103000"/>
+              </a:lnSpc>
+              <a:buNone/>
+            </a:pPr>
+            <a:r>
+              <a:rPr lang="en-US" sz="950" b="1" dirty="0">
+                <a:solidFill>
+                  <a:srgbClr val="2E6BB8"/>
+                </a:solidFill>
+                <a:latin typeface="Meiryo" pitchFamily="34" charset="0"/>
+                <a:ea typeface="Meiryo" pitchFamily="34" charset="-122"/>
+                <a:cs typeface="Meiryo" pitchFamily="34" charset="-120"/>
+              </a:rPr>
+              <a:t>▶</a:t>
+            </a:r>
+            <a:r>
+              <a:rPr lang="en-US" sz="950" b="1" dirty="0">
+                <a:solidFill>
+                  <a:srgbClr val="222222"/>
+                </a:solidFill>
+                <a:latin typeface="Meiryo" pitchFamily="34" charset="0"/>
+                <a:ea typeface="Meiryo" pitchFamily="34" charset="-122"/>
+                <a:cs typeface="Meiryo" pitchFamily="34" charset="-120"/>
+              </a:rPr>
+              <a:t>要確認事項：</a:t>
+            </a:r>
+            <a:r>
+              <a:rPr lang="en-US" sz="950" dirty="0">
+                <a:solidFill>
+                  <a:srgbClr val="222222"/>
+                </a:solidFill>
+                <a:latin typeface="Meiryo" pitchFamily="34" charset="0"/>
+                <a:ea typeface="Meiryo" pitchFamily="34" charset="-122"/>
+                <a:cs typeface="Meiryo" pitchFamily="34" charset="-120"/>
+              </a:rPr>
+              <a:t>電話番号、サービス提供時間、定員、送迎範囲、第1教室との役割分担</a:t>
+            </a:r>
+            <a:endParaRPr lang="en-US" sz="1050" dirty="0"/>
           </a:p>
         </p:txBody>
       </p:sp>
@@ -21157,7 +20981,7 @@
         <p:spPr>
           <a:xfrm>
             <a:off x="502920" y="1783080"/>
-            <a:ext cx="6903720" cy="4434840"/>
+            <a:ext cx="6903720" cy="3474720"/>
           </a:xfrm>
           <a:prstGeom prst="rect">
             <a:avLst/>
@@ -21228,7 +21052,7 @@
         <p:spPr>
           <a:xfrm>
             <a:off x="704088" y="2331720"/>
-            <a:ext cx="6501384" cy="3758184"/>
+            <a:ext cx="6501384" cy="2852927"/>
           </a:xfrm>
           <a:prstGeom prst="rect">
             <a:avLst/>
@@ -21247,7 +21071,7 @@
               <a:buNone/>
             </a:pPr>
             <a:r>
-              <a:rPr lang="en-US" sz="1050" b="1" dirty="0">
+              <a:rPr lang="en-US" sz="1100" b="1" dirty="0">
                 <a:solidFill>
                   <a:srgbClr val="2E6BB8"/>
                 </a:solidFill>
@@ -21258,7 +21082,7 @@
               <a:t>▶</a:t>
             </a:r>
             <a:r>
-              <a:rPr lang="en-US" sz="1050" b="1" dirty="0">
+              <a:rPr lang="en-US" sz="1100" b="1" dirty="0">
                 <a:solidFill>
                   <a:srgbClr val="222222"/>
                 </a:solidFill>
@@ -21269,7 +21093,7 @@
               <a:t>対象：</a:t>
             </a:r>
             <a:r>
-              <a:rPr lang="en-US" sz="1050" dirty="0">
+              <a:rPr lang="en-US" sz="1100" dirty="0">
                 <a:solidFill>
                   <a:srgbClr val="222222"/>
                 </a:solidFill>
@@ -21289,7 +21113,7 @@
               <a:buNone/>
             </a:pPr>
             <a:r>
-              <a:rPr lang="en-US" sz="1050" b="1" dirty="0">
+              <a:rPr lang="en-US" sz="1100" b="1" dirty="0">
                 <a:solidFill>
                   <a:srgbClr val="2E6BB8"/>
                 </a:solidFill>
@@ -21300,7 +21124,7 @@
               <a:t>▶</a:t>
             </a:r>
             <a:r>
-              <a:rPr lang="en-US" sz="1050" b="1" dirty="0">
+              <a:rPr lang="en-US" sz="1100" b="1" dirty="0">
                 <a:solidFill>
                   <a:srgbClr val="222222"/>
                 </a:solidFill>
@@ -21311,7 +21135,7 @@
               <a:t>住所：</a:t>
             </a:r>
             <a:r>
-              <a:rPr lang="en-US" sz="1050" dirty="0">
+              <a:rPr lang="en-US" sz="1100" dirty="0">
                 <a:solidFill>
                   <a:srgbClr val="222222"/>
                 </a:solidFill>
@@ -21331,7 +21155,7 @@
               <a:buNone/>
             </a:pPr>
             <a:r>
-              <a:rPr lang="en-US" sz="1050" b="1" dirty="0">
+              <a:rPr lang="en-US" sz="1100" b="1" dirty="0">
                 <a:solidFill>
                   <a:srgbClr val="2E6BB8"/>
                 </a:solidFill>
@@ -21342,7 +21166,7 @@
               <a:t>▶</a:t>
             </a:r>
             <a:r>
-              <a:rPr lang="en-US" sz="1050" b="1" dirty="0">
+              <a:rPr lang="en-US" sz="1100" b="1" dirty="0">
                 <a:solidFill>
                   <a:srgbClr val="222222"/>
                 </a:solidFill>
@@ -21353,7 +21177,7 @@
               <a:t>TEL／HP：</a:t>
             </a:r>
             <a:r>
-              <a:rPr lang="en-US" sz="1050" dirty="0">
+              <a:rPr lang="en-US" sz="1100" dirty="0">
                 <a:solidFill>
                   <a:srgbClr val="222222"/>
                 </a:solidFill>
@@ -21373,7 +21197,7 @@
               <a:buNone/>
             </a:pPr>
             <a:r>
-              <a:rPr lang="en-US" sz="1050" b="1" dirty="0">
+              <a:rPr lang="en-US" sz="1100" b="1" dirty="0">
                 <a:solidFill>
                   <a:srgbClr val="2E6BB8"/>
                 </a:solidFill>
@@ -21384,7 +21208,7 @@
               <a:t>▶</a:t>
             </a:r>
             <a:r>
-              <a:rPr lang="en-US" sz="1050" b="1" dirty="0">
+              <a:rPr lang="en-US" sz="1100" b="1" dirty="0">
                 <a:solidFill>
                   <a:srgbClr val="222222"/>
                 </a:solidFill>
@@ -21395,7 +21219,7 @@
               <a:t>サービス提供時間：</a:t>
             </a:r>
             <a:r>
-              <a:rPr lang="en-US" sz="1050" dirty="0">
+              <a:rPr lang="en-US" sz="1100" dirty="0">
                 <a:solidFill>
                   <a:srgbClr val="222222"/>
                 </a:solidFill>
@@ -21415,7 +21239,7 @@
               <a:buNone/>
             </a:pPr>
             <a:r>
-              <a:rPr lang="en-US" sz="1050" b="1" dirty="0">
+              <a:rPr lang="en-US" sz="1100" b="1" dirty="0">
                 <a:solidFill>
                   <a:srgbClr val="2E6BB8"/>
                 </a:solidFill>
@@ -21426,7 +21250,7 @@
               <a:t>▶</a:t>
             </a:r>
             <a:r>
-              <a:rPr lang="en-US" sz="1050" b="1" dirty="0">
+              <a:rPr lang="en-US" sz="1100" b="1" dirty="0">
                 <a:solidFill>
                   <a:srgbClr val="222222"/>
                 </a:solidFill>
@@ -21437,7 +21261,7 @@
               <a:t>定員：</a:t>
             </a:r>
             <a:r>
-              <a:rPr lang="en-US" sz="1050" dirty="0">
+              <a:rPr lang="en-US" sz="1100" dirty="0">
                 <a:solidFill>
                   <a:srgbClr val="222222"/>
                 </a:solidFill>
@@ -21469,7 +21293,7 @@
               <a:buNone/>
             </a:pPr>
             <a:r>
-              <a:rPr lang="en-US" sz="1050" b="1" dirty="0">
+              <a:rPr lang="en-US" sz="1100" b="1" dirty="0">
                 <a:solidFill>
                   <a:srgbClr val="2E6BB8"/>
                 </a:solidFill>
@@ -21480,7 +21304,7 @@
               <a:t>▶</a:t>
             </a:r>
             <a:r>
-              <a:rPr lang="en-US" sz="1050" b="1" dirty="0">
+              <a:rPr lang="en-US" sz="1100" b="1" dirty="0">
                 <a:solidFill>
                   <a:srgbClr val="222222"/>
                 </a:solidFill>
@@ -21491,7 +21315,7 @@
               <a:t>療育プログラムの特徴：</a:t>
             </a:r>
             <a:r>
-              <a:rPr lang="en-US" sz="1050" dirty="0">
+              <a:rPr lang="en-US" sz="1100" dirty="0">
                 <a:solidFill>
                   <a:srgbClr val="222222"/>
                 </a:solidFill>
@@ -21514,7 +21338,7 @@
               <a:buNone/>
             </a:pPr>
             <a:r>
-              <a:rPr lang="en-US" sz="1050" dirty="0">
+              <a:rPr lang="en-US" sz="1100" dirty="0">
                 <a:solidFill>
                   <a:srgbClr val="222222"/>
                 </a:solidFill>
@@ -21537,7 +21361,7 @@
               <a:buNone/>
             </a:pPr>
             <a:r>
-              <a:rPr lang="en-US" sz="1050" dirty="0">
+              <a:rPr lang="en-US" sz="1100" dirty="0">
                 <a:solidFill>
                   <a:srgbClr val="222222"/>
                 </a:solidFill>
@@ -21560,7 +21384,7 @@
               <a:buNone/>
             </a:pPr>
             <a:r>
-              <a:rPr lang="en-US" sz="1050" dirty="0">
+              <a:rPr lang="en-US" sz="1100" dirty="0">
                 <a:solidFill>
                   <a:srgbClr val="222222"/>
                 </a:solidFill>
@@ -21571,75 +21395,6 @@
               <a:t>・障がい児とその家族に対し、地域生活を行ううえで必要な支援を提供することを運営方針とする。</a:t>
             </a:r>
             <a:endParaRPr lang="en-US" sz="1050" dirty="0"/>
-          </a:p>
-        </p:txBody>
-      </p:sp>
-      <p:sp>
-        <p:nvSpPr>
-          <p:cNvPr id="13" name="Text 11"/>
-          <p:cNvSpPr/>
-          <p:nvPr/>
-        </p:nvSpPr>
-        <p:spPr>
-          <a:xfrm>
-            <a:off x="7635240" y="1783080"/>
-            <a:ext cx="4069080" cy="2148840"/>
-          </a:xfrm>
-          <a:prstGeom prst="rect">
-            <a:avLst/>
-          </a:prstGeom>
-          <a:solidFill>
-            <a:srgbClr val="F4F6FA"/>
-          </a:solidFill>
-          <a:ln w="12700">
-            <a:solidFill>
-              <a:srgbClr val="9AA7B8"/>
-            </a:solidFill>
-            <a:prstDash val="dash"/>
-          </a:ln>
-        </p:spPr>
-        <p:txBody>
-          <a:bodyPr wrap="square" lIns="91440" tIns="45720" rIns="91440" bIns="45720" rtlCol="0" anchor="ctr"/>
-          <a:lstStyle/>
-          <a:p>
-            <a:pPr marL="0" indent="0" algn="ctr">
-              <a:lnSpc>
-                <a:spcPct val="110000"/>
-              </a:lnSpc>
-              <a:buNone/>
-            </a:pPr>
-            <a:r>
-              <a:rPr lang="en-US" sz="1200" b="1" dirty="0">
-                <a:solidFill>
-                  <a:srgbClr val="8A99AD"/>
-                </a:solidFill>
-                <a:latin typeface="Meiryo" pitchFamily="34" charset="0"/>
-                <a:ea typeface="Meiryo" pitchFamily="34" charset="-122"/>
-                <a:cs typeface="Meiryo" pitchFamily="34" charset="-120"/>
-              </a:rPr>
-              <a:t>［ 写真挿入エリア ］</a:t>
-            </a:r>
-            <a:endParaRPr lang="en-US" sz="1200" dirty="0"/>
-          </a:p>
-          <a:p>
-            <a:pPr marL="0" indent="0" algn="ctr">
-              <a:lnSpc>
-                <a:spcPct val="110000"/>
-              </a:lnSpc>
-              <a:buNone/>
-            </a:pPr>
-            <a:r>
-              <a:rPr lang="en-US" sz="950" dirty="0">
-                <a:solidFill>
-                  <a:srgbClr val="97A4B6"/>
-                </a:solidFill>
-                <a:latin typeface="Meiryo" pitchFamily="34" charset="0"/>
-                <a:ea typeface="Meiryo" pitchFamily="34" charset="-122"/>
-                <a:cs typeface="Meiryo" pitchFamily="34" charset="-120"/>
-              </a:rPr>
-              <a:t>（公式HP kihonjuku-yuuyuu.com／発達ナビの園庭・室内写真を挿入）</a:t>
-            </a:r>
-            <a:endParaRPr lang="en-US" sz="1200" dirty="0"/>
           </a:p>
         </p:txBody>
       </p:sp>
@@ -21651,8 +21406,8 @@
         </p:nvSpPr>
         <p:spPr>
           <a:xfrm>
-            <a:off x="7635240" y="4069080"/>
-            <a:ext cx="4069080" cy="2148840"/>
+            <a:off x="7635240" y="1783080"/>
+            <a:ext cx="4069080" cy="3474720"/>
           </a:xfrm>
           <a:prstGeom prst="rect">
             <a:avLst/>
@@ -21676,7 +21431,7 @@
         </p:nvSpPr>
         <p:spPr>
           <a:xfrm>
-            <a:off x="7818120" y="4187952"/>
+            <a:off x="7818120" y="1901952"/>
             <a:ext cx="3703320" cy="320040"/>
           </a:xfrm>
           <a:prstGeom prst="rect">
@@ -21715,8 +21470,8 @@
         </p:nvSpPr>
         <p:spPr>
           <a:xfrm>
-            <a:off x="7818120" y="4526280"/>
-            <a:ext cx="3794760" cy="1600200"/>
+            <a:off x="7818120" y="2286000"/>
+            <a:ext cx="3703320" cy="2907791"/>
           </a:xfrm>
           <a:prstGeom prst="rect">
             <a:avLst/>
@@ -21736,7 +21491,7 @@
               <a:buChar char="•"/>
             </a:pPr>
             <a:r>
-              <a:rPr lang="en-US" sz="1000" dirty="0">
+              <a:rPr lang="en-US" sz="1050" dirty="0">
                 <a:solidFill>
                   <a:srgbClr val="222222"/>
                 </a:solidFill>
@@ -21760,7 +21515,7 @@
               <a:buChar char="•"/>
             </a:pPr>
             <a:r>
-              <a:rPr lang="en-US" sz="1000" dirty="0">
+              <a:rPr lang="en-US" sz="1050" dirty="0">
                 <a:solidFill>
                   <a:srgbClr val="222222"/>
                 </a:solidFill>
@@ -21784,7 +21539,7 @@
               <a:buChar char="•"/>
             </a:pPr>
             <a:r>
-              <a:rPr lang="en-US" sz="1000" dirty="0">
+              <a:rPr lang="en-US" sz="1050" dirty="0">
                 <a:solidFill>
                   <a:srgbClr val="222222"/>
                 </a:solidFill>
@@ -21799,152 +21554,199 @@
               <a:ea typeface="メイリオ" panose="020B0604030504040204" pitchFamily="50" charset="-128"/>
             </a:endParaRPr>
           </a:p>
+          <a:p>
+            <a:pPr marL="342900" indent="-342900">
+              <a:spcAft>
+                <a:spcPts val="700"/>
+              </a:spcAft>
+              <a:buSzPct val="100000"/>
+              <a:buChar char="•"/>
+            </a:pPr>
+            <a:r>
+              <a:rPr lang="en-US" sz="1050" dirty="0">
+                <a:solidFill>
+                  <a:srgbClr val="222222"/>
+                </a:solidFill>
+                <a:latin typeface="メイリオ" panose="020B0604030504040204" pitchFamily="50" charset="-128"/>
+                <a:ea typeface="メイリオ" panose="020B0604030504040204" pitchFamily="50" charset="-128"/>
+                <a:cs typeface="Meiryo" pitchFamily="34" charset="-120"/>
+              </a:rPr>
+              <a:t>多職種体制はコスト構造上も参入障壁が高く、人材採用力が最大の競合要因となる。</a:t>
+            </a:r>
+            <a:endParaRPr lang="en-US" sz="1000" dirty="0">
+              <a:latin typeface="メイリオ" panose="020B0604030504040204" pitchFamily="50" charset="-128"/>
+              <a:ea typeface="メイリオ" panose="020B0604030504040204" pitchFamily="50" charset="-128"/>
+            </a:endParaRPr>
+          </a:p>
         </p:txBody>
       </p:sp>
       <p:sp>
         <p:nvSpPr>
-          <p:cNvPr id="900" name="PhotoSlot 1"/>
+          <p:cNvPr id="940" name="FootBG"/>
           <p:cNvSpPr/>
           <p:nvPr/>
         </p:nvSpPr>
         <p:spPr>
           <a:xfrm>
-            <a:off x="868680" y="4882896"/>
-            <a:ext cx="1965960" cy="1152144"/>
+            <a:off x="502920" y="5394960"/>
+            <a:ext cx="11201400" cy="896112"/>
           </a:xfrm>
           <a:prstGeom prst="rect">
             <a:avLst/>
           </a:prstGeom>
           <a:solidFill>
-            <a:srgbClr val="F4F6FA"/>
+            <a:srgbClr val="EEF2F8"/>
           </a:solidFill>
           <a:ln w="12700">
             <a:solidFill>
               <a:srgbClr val="9AA7B8"/>
             </a:solidFill>
-            <a:prstDash val="dash"/>
+            <a:prstDash val="solid"/>
           </a:ln>
         </p:spPr>
-        <p:txBody>
-          <a:bodyPr wrap="square" lIns="91440" tIns="45720" rIns="91440" bIns="45720" rtlCol="0" anchor="ctr"/>
-          <a:lstStyle/>
-          <a:p>
-            <a:pPr marL="0" indent="0" algn="ctr">
-              <a:lnSpc>
-                <a:spcPct val="110000"/>
-              </a:lnSpc>
-              <a:buNone/>
-            </a:pPr>
-            <a:r>
-              <a:rPr lang="en-US" sz="900" b="1" dirty="0">
-                <a:solidFill>
-                  <a:srgbClr val="8A99AD"/>
-                </a:solidFill>
-                <a:latin typeface="Meiryo" pitchFamily="34" charset="0"/>
-                <a:ea typeface="Meiryo" pitchFamily="34" charset="-122"/>
-                <a:cs typeface="Meiryo" pitchFamily="34" charset="-120"/>
-              </a:rPr>
-              <a:t>［ 外観 / 建物 ］</a:t>
-            </a:r>
-            <a:endParaRPr lang="en-US" sz="1200" dirty="0"/>
-          </a:p>
-        </p:txBody>
       </p:sp>
       <p:sp>
         <p:nvSpPr>
-          <p:cNvPr id="901" name="PhotoSlot 2"/>
+          <p:cNvPr id="941" name="FootTitle"/>
           <p:cNvSpPr/>
           <p:nvPr/>
         </p:nvSpPr>
         <p:spPr>
           <a:xfrm>
-            <a:off x="2971800" y="4882896"/>
-            <a:ext cx="1965960" cy="1152144"/>
+            <a:off x="713232" y="5477256"/>
+            <a:ext cx="10789920" cy="274320"/>
           </a:xfrm>
           <a:prstGeom prst="rect">
             <a:avLst/>
           </a:prstGeom>
-          <a:solidFill>
-            <a:srgbClr val="F4F6FA"/>
-          </a:solidFill>
-          <a:ln w="12700">
-            <a:solidFill>
-              <a:srgbClr val="9AA7B8"/>
-            </a:solidFill>
-            <a:prstDash val="dash"/>
-          </a:ln>
+          <a:noFill/>
+          <a:ln/>
         </p:spPr>
         <p:txBody>
-          <a:bodyPr wrap="square" lIns="91440" tIns="45720" rIns="91440" bIns="45720" rtlCol="0" anchor="ctr"/>
+          <a:bodyPr wrap="square" lIns="0" tIns="0" rIns="0" bIns="0" rtlCol="0" anchor="ctr"/>
           <a:lstStyle/>
           <a:p>
-            <a:pPr marL="0" indent="0" algn="ctr">
-              <a:lnSpc>
-                <a:spcPct val="110000"/>
-              </a:lnSpc>
+            <a:pPr marL="0" indent="0">
               <a:buNone/>
             </a:pPr>
             <a:r>
-              <a:rPr lang="en-US" sz="900" b="1" dirty="0">
-                <a:solidFill>
-                  <a:srgbClr val="8A99AD"/>
-                </a:solidFill>
-                <a:latin typeface="Meiryo" pitchFamily="34" charset="0"/>
-                <a:ea typeface="Meiryo" pitchFamily="34" charset="-122"/>
-                <a:cs typeface="Meiryo" pitchFamily="34" charset="-120"/>
-              </a:rPr>
-              <a:t>［ 室内・教室 ］</a:t>
-            </a:r>
-            <a:endParaRPr lang="en-US" sz="1200" dirty="0"/>
+              <a:rPr lang="en-US" sz="1250" b="1" dirty="0">
+                <a:solidFill>
+                  <a:srgbClr val="1B3A6B"/>
+                </a:solidFill>
+                <a:latin typeface="Meiryo" pitchFamily="34" charset="0"/>
+                <a:ea typeface="Meiryo" pitchFamily="34" charset="-122"/>
+                <a:cs typeface="Meiryo" pitchFamily="34" charset="-120"/>
+              </a:rPr>
+              <a:t>出典 ／ 要確認事項</a:t>
+            </a:r>
+            <a:endParaRPr lang="en-US" sz="1250" dirty="0"/>
           </a:p>
         </p:txBody>
       </p:sp>
       <p:sp>
         <p:nvSpPr>
-          <p:cNvPr id="902" name="PhotoSlot 3"/>
+          <p:cNvPr id="13" name="FootBody"/>
           <p:cNvSpPr/>
           <p:nvPr/>
         </p:nvSpPr>
         <p:spPr>
           <a:xfrm>
-            <a:off x="5074920" y="4882896"/>
-            <a:ext cx="1965960" cy="1152144"/>
+            <a:off x="713232" y="5779008"/>
+            <a:ext cx="10789920" cy="475488"/>
           </a:xfrm>
           <a:prstGeom prst="rect">
             <a:avLst/>
           </a:prstGeom>
-          <a:solidFill>
-            <a:srgbClr val="F4F6FA"/>
-          </a:solidFill>
-          <a:ln w="12700">
-            <a:solidFill>
-              <a:srgbClr val="9AA7B8"/>
-            </a:solidFill>
-            <a:prstDash val="dash"/>
-          </a:ln>
+          <a:noFill/>
+          <a:ln/>
         </p:spPr>
         <p:txBody>
-          <a:bodyPr wrap="square" lIns="91440" tIns="45720" rIns="91440" bIns="45720" rtlCol="0" anchor="ctr"/>
+          <a:bodyPr wrap="square" lIns="0" tIns="0" rIns="0" bIns="0" rtlCol="0" anchor="t"/>
           <a:lstStyle/>
           <a:p>
-            <a:pPr marL="0" indent="0" algn="ctr">
+            <a:pPr marL="0" indent="0">
               <a:lnSpc>
-                <a:spcPct val="110000"/>
+                <a:spcPct val="103000"/>
               </a:lnSpc>
               <a:buNone/>
             </a:pPr>
             <a:r>
-              <a:rPr lang="en-US" sz="900" b="1" dirty="0">
-                <a:solidFill>
-                  <a:srgbClr val="8A99AD"/>
-                </a:solidFill>
-                <a:latin typeface="Meiryo" pitchFamily="34" charset="0"/>
-                <a:ea typeface="Meiryo" pitchFamily="34" charset="-122"/>
-                <a:cs typeface="Meiryo" pitchFamily="34" charset="-120"/>
-              </a:rPr>
-              <a:t>［ 活動風景 ］</a:t>
-            </a:r>
-            <a:endParaRPr lang="en-US" sz="1200" dirty="0"/>
+              <a:rPr lang="en-US" sz="950" b="1" dirty="0">
+                <a:solidFill>
+                  <a:srgbClr val="2E6BB8"/>
+                </a:solidFill>
+                <a:latin typeface="Meiryo" pitchFamily="34" charset="0"/>
+                <a:ea typeface="Meiryo" pitchFamily="34" charset="-122"/>
+                <a:cs typeface="Meiryo" pitchFamily="34" charset="-120"/>
+              </a:rPr>
+              <a:t>▶</a:t>
+            </a:r>
+            <a:r>
+              <a:rPr lang="en-US" sz="950" b="1" dirty="0">
+                <a:solidFill>
+                  <a:srgbClr val="222222"/>
+                </a:solidFill>
+                <a:latin typeface="Meiryo" pitchFamily="34" charset="0"/>
+                <a:ea typeface="Meiryo" pitchFamily="34" charset="-122"/>
+                <a:cs typeface="Meiryo" pitchFamily="34" charset="-120"/>
+              </a:rPr>
+              <a:t>出典：</a:t>
+            </a:r>
+            <a:r>
+              <a:rPr lang="en-US" sz="950" dirty="0">
+                <a:solidFill>
+                  <a:srgbClr val="222222"/>
+                </a:solidFill>
+                <a:latin typeface="Meiryo" pitchFamily="34" charset="0"/>
+                <a:ea typeface="Meiryo" pitchFamily="34" charset="-122"/>
+                <a:cs typeface="Meiryo" pitchFamily="34" charset="-120"/>
+              </a:rPr>
+              <a:t>公式HP kihonjuku-yuuyuu.com／ホイシル／児発ねっと／ADDS kikotto施設検索</a:t>
+            </a:r>
+            <a:endParaRPr lang="en-US" sz="1050" dirty="0"/>
+          </a:p>
+          <a:p>
+            <a:pPr marL="0" indent="0">
+              <a:lnSpc>
+                <a:spcPct val="103000"/>
+              </a:lnSpc>
+              <a:buNone/>
+            </a:pPr>
+            <a:r>
+              <a:rPr lang="en-US" sz="950" b="1" dirty="0">
+                <a:solidFill>
+                  <a:srgbClr val="2E6BB8"/>
+                </a:solidFill>
+                <a:latin typeface="Meiryo" pitchFamily="34" charset="0"/>
+                <a:ea typeface="Meiryo" pitchFamily="34" charset="-122"/>
+                <a:cs typeface="Meiryo" pitchFamily="34" charset="-120"/>
+              </a:rPr>
+              <a:t>▶</a:t>
+            </a:r>
+            <a:r>
+              <a:rPr lang="en-US" sz="950" b="1" dirty="0">
+                <a:solidFill>
+                  <a:srgbClr val="222222"/>
+                </a:solidFill>
+                <a:latin typeface="Meiryo" pitchFamily="34" charset="0"/>
+                <a:ea typeface="Meiryo" pitchFamily="34" charset="-122"/>
+                <a:cs typeface="Meiryo" pitchFamily="34" charset="-120"/>
+              </a:rPr>
+              <a:t>要確認事項：</a:t>
+            </a:r>
+            <a:r>
+              <a:rPr lang="en-US" sz="950" dirty="0">
+                <a:solidFill>
+                  <a:srgbClr val="222222"/>
+                </a:solidFill>
+                <a:latin typeface="Meiryo" pitchFamily="34" charset="0"/>
+                <a:ea typeface="Meiryo" pitchFamily="34" charset="-122"/>
+                <a:cs typeface="Meiryo" pitchFamily="34" charset="-120"/>
+              </a:rPr>
+              <a:t>定員、送迎の有無、児発と放デイの時間帯区分、専門職の常勤／非常勤の別</a:t>
+            </a:r>
+            <a:endParaRPr lang="en-US" sz="1050" dirty="0"/>
           </a:p>
         </p:txBody>
       </p:sp>
@@ -22211,7 +22013,7 @@
         <p:spPr>
           <a:xfrm>
             <a:off x="502920" y="1783080"/>
-            <a:ext cx="6903720" cy="4434840"/>
+            <a:ext cx="6903720" cy="3474720"/>
           </a:xfrm>
           <a:prstGeom prst="rect">
             <a:avLst/>
@@ -22282,7 +22084,7 @@
         <p:spPr>
           <a:xfrm>
             <a:off x="704088" y="2331720"/>
-            <a:ext cx="6501384" cy="3758184"/>
+            <a:ext cx="6501384" cy="2852927"/>
           </a:xfrm>
           <a:prstGeom prst="rect">
             <a:avLst/>
@@ -22301,7 +22103,7 @@
               <a:buNone/>
             </a:pPr>
             <a:r>
-              <a:rPr lang="en-US" sz="1050" b="1" dirty="0">
+              <a:rPr lang="en-US" sz="1100" b="1" dirty="0">
                 <a:solidFill>
                   <a:srgbClr val="2E6BB8"/>
                 </a:solidFill>
@@ -22312,7 +22114,7 @@
               <a:t>▶</a:t>
             </a:r>
             <a:r>
-              <a:rPr lang="en-US" sz="1050" b="1" dirty="0">
+              <a:rPr lang="en-US" sz="1100" b="1" dirty="0">
                 <a:solidFill>
                   <a:srgbClr val="222222"/>
                 </a:solidFill>
@@ -22323,7 +22125,7 @@
               <a:t>対象：</a:t>
             </a:r>
             <a:r>
-              <a:rPr lang="en-US" sz="1050" dirty="0">
+              <a:rPr lang="en-US" sz="1100" dirty="0">
                 <a:solidFill>
                   <a:srgbClr val="222222"/>
                 </a:solidFill>
@@ -22343,7 +22145,7 @@
               <a:buNone/>
             </a:pPr>
             <a:r>
-              <a:rPr lang="en-US" sz="1050" b="1" dirty="0">
+              <a:rPr lang="en-US" sz="1100" b="1" dirty="0">
                 <a:solidFill>
                   <a:srgbClr val="2E6BB8"/>
                 </a:solidFill>
@@ -22354,7 +22156,7 @@
               <a:t>▶</a:t>
             </a:r>
             <a:r>
-              <a:rPr lang="en-US" sz="1050" b="1" dirty="0">
+              <a:rPr lang="en-US" sz="1100" b="1" dirty="0">
                 <a:solidFill>
                   <a:srgbClr val="222222"/>
                 </a:solidFill>
@@ -22365,7 +22167,7 @@
               <a:t>住所：</a:t>
             </a:r>
             <a:r>
-              <a:rPr lang="en-US" sz="1050" dirty="0">
+              <a:rPr lang="en-US" sz="1100" dirty="0">
                 <a:solidFill>
                   <a:srgbClr val="222222"/>
                 </a:solidFill>
@@ -22385,7 +22187,7 @@
               <a:buNone/>
             </a:pPr>
             <a:r>
-              <a:rPr lang="en-US" sz="1050" b="1" dirty="0">
+              <a:rPr lang="en-US" sz="1100" b="1" dirty="0">
                 <a:solidFill>
                   <a:srgbClr val="2E6BB8"/>
                 </a:solidFill>
@@ -22396,7 +22198,7 @@
               <a:t>▶</a:t>
             </a:r>
             <a:r>
-              <a:rPr lang="en-US" sz="1050" b="1" dirty="0">
+              <a:rPr lang="en-US" sz="1100" b="1" dirty="0">
                 <a:solidFill>
                   <a:srgbClr val="222222"/>
                 </a:solidFill>
@@ -22407,7 +22209,7 @@
               <a:t>TEL／HP：</a:t>
             </a:r>
             <a:r>
-              <a:rPr lang="en-US" sz="1050" dirty="0">
+              <a:rPr lang="en-US" sz="1100" dirty="0">
                 <a:solidFill>
                   <a:srgbClr val="222222"/>
                 </a:solidFill>
@@ -22427,7 +22229,7 @@
               <a:buNone/>
             </a:pPr>
             <a:r>
-              <a:rPr lang="en-US" sz="1050" b="1" dirty="0">
+              <a:rPr lang="en-US" sz="1100" b="1" dirty="0">
                 <a:solidFill>
                   <a:srgbClr val="2E6BB8"/>
                 </a:solidFill>
@@ -22438,7 +22240,7 @@
               <a:t>▶</a:t>
             </a:r>
             <a:r>
-              <a:rPr lang="en-US" sz="1050" b="1" dirty="0">
+              <a:rPr lang="en-US" sz="1100" b="1" dirty="0">
                 <a:solidFill>
                   <a:srgbClr val="222222"/>
                 </a:solidFill>
@@ -22449,7 +22251,7 @@
               <a:t>サービス提供時間：</a:t>
             </a:r>
             <a:r>
-              <a:rPr lang="en-US" sz="1050" dirty="0">
+              <a:rPr lang="en-US" sz="1100" dirty="0">
                 <a:solidFill>
                   <a:srgbClr val="222222"/>
                 </a:solidFill>
@@ -22469,7 +22271,7 @@
               <a:buNone/>
             </a:pPr>
             <a:r>
-              <a:rPr lang="en-US" sz="1050" b="1" dirty="0">
+              <a:rPr lang="en-US" sz="1100" b="1" dirty="0">
                 <a:solidFill>
                   <a:srgbClr val="2E6BB8"/>
                 </a:solidFill>
@@ -22480,7 +22282,7 @@
               <a:t>▶</a:t>
             </a:r>
             <a:r>
-              <a:rPr lang="en-US" sz="1050" b="1" dirty="0">
+              <a:rPr lang="en-US" sz="1100" b="1" dirty="0">
                 <a:solidFill>
                   <a:srgbClr val="222222"/>
                 </a:solidFill>
@@ -22491,7 +22293,7 @@
               <a:t>定員／送迎：</a:t>
             </a:r>
             <a:r>
-              <a:rPr lang="en-US" sz="1050" dirty="0">
+              <a:rPr lang="en-US" sz="1100" dirty="0">
                 <a:solidFill>
                   <a:srgbClr val="222222"/>
                 </a:solidFill>
@@ -22523,7 +22325,7 @@
               <a:buNone/>
             </a:pPr>
             <a:r>
-              <a:rPr lang="en-US" sz="1050" b="1" dirty="0">
+              <a:rPr lang="en-US" sz="1100" b="1" dirty="0">
                 <a:solidFill>
                   <a:srgbClr val="2E6BB8"/>
                 </a:solidFill>
@@ -22534,7 +22336,7 @@
               <a:t>▶</a:t>
             </a:r>
             <a:r>
-              <a:rPr lang="en-US" sz="1050" b="1" dirty="0">
+              <a:rPr lang="en-US" sz="1100" b="1" dirty="0">
                 <a:solidFill>
                   <a:srgbClr val="222222"/>
                 </a:solidFill>
@@ -22545,7 +22347,7 @@
               <a:t>療育プログラムの特徴：</a:t>
             </a:r>
             <a:r>
-              <a:rPr lang="en-US" sz="1050" dirty="0">
+              <a:rPr lang="en-US" sz="1100" dirty="0">
                 <a:solidFill>
                   <a:srgbClr val="222222"/>
                 </a:solidFill>
@@ -22568,7 +22370,7 @@
               <a:buNone/>
             </a:pPr>
             <a:r>
-              <a:rPr lang="en-US" sz="1050" dirty="0">
+              <a:rPr lang="en-US" sz="1100" dirty="0">
                 <a:solidFill>
                   <a:srgbClr val="222222"/>
                 </a:solidFill>
@@ -22591,7 +22393,7 @@
               <a:buNone/>
             </a:pPr>
             <a:r>
-              <a:rPr lang="en-US" sz="1050" dirty="0">
+              <a:rPr lang="en-US" sz="1100" dirty="0">
                 <a:solidFill>
                   <a:srgbClr val="222222"/>
                 </a:solidFill>
@@ -22602,75 +22404,6 @@
               <a:t>・少人数の環境を活かし、個別対応と集団活動を組み合わせて提供。</a:t>
             </a:r>
             <a:endParaRPr lang="en-US" sz="1050" dirty="0"/>
-          </a:p>
-        </p:txBody>
-      </p:sp>
-      <p:sp>
-        <p:nvSpPr>
-          <p:cNvPr id="13" name="Text 11"/>
-          <p:cNvSpPr/>
-          <p:nvPr/>
-        </p:nvSpPr>
-        <p:spPr>
-          <a:xfrm>
-            <a:off x="7635240" y="1783080"/>
-            <a:ext cx="4069080" cy="2148840"/>
-          </a:xfrm>
-          <a:prstGeom prst="rect">
-            <a:avLst/>
-          </a:prstGeom>
-          <a:solidFill>
-            <a:srgbClr val="F4F6FA"/>
-          </a:solidFill>
-          <a:ln w="12700">
-            <a:solidFill>
-              <a:srgbClr val="9AA7B8"/>
-            </a:solidFill>
-            <a:prstDash val="dash"/>
-          </a:ln>
-        </p:spPr>
-        <p:txBody>
-          <a:bodyPr wrap="square" lIns="91440" tIns="45720" rIns="91440" bIns="45720" rtlCol="0" anchor="ctr"/>
-          <a:lstStyle/>
-          <a:p>
-            <a:pPr marL="0" indent="0" algn="ctr">
-              <a:lnSpc>
-                <a:spcPct val="110000"/>
-              </a:lnSpc>
-              <a:buNone/>
-            </a:pPr>
-            <a:r>
-              <a:rPr lang="en-US" sz="1200" b="1" dirty="0">
-                <a:solidFill>
-                  <a:srgbClr val="8A99AD"/>
-                </a:solidFill>
-                <a:latin typeface="Meiryo" pitchFamily="34" charset="0"/>
-                <a:ea typeface="Meiryo" pitchFamily="34" charset="-122"/>
-                <a:cs typeface="Meiryo" pitchFamily="34" charset="-120"/>
-              </a:rPr>
-              <a:t>［ 写真挿入エリア ］</a:t>
-            </a:r>
-            <a:endParaRPr lang="en-US" sz="1200" dirty="0"/>
-          </a:p>
-          <a:p>
-            <a:pPr marL="0" indent="0" algn="ctr">
-              <a:lnSpc>
-                <a:spcPct val="110000"/>
-              </a:lnSpc>
-              <a:buNone/>
-            </a:pPr>
-            <a:r>
-              <a:rPr lang="en-US" sz="950" dirty="0">
-                <a:solidFill>
-                  <a:srgbClr val="97A4B6"/>
-                </a:solidFill>
-                <a:latin typeface="Meiryo" pitchFamily="34" charset="0"/>
-                <a:ea typeface="Meiryo" pitchFamily="34" charset="-122"/>
-                <a:cs typeface="Meiryo" pitchFamily="34" charset="-120"/>
-              </a:rPr>
-              <a:t>（公式HP kihonjuku-yuuyuu.com／発達ナビの活動風景の写真を挿入）</a:t>
-            </a:r>
-            <a:endParaRPr lang="en-US" sz="1200" dirty="0"/>
           </a:p>
         </p:txBody>
       </p:sp>
@@ -22682,8 +22415,8 @@
         </p:nvSpPr>
         <p:spPr>
           <a:xfrm>
-            <a:off x="7635240" y="4069080"/>
-            <a:ext cx="4069080" cy="2148840"/>
+            <a:off x="7635240" y="1783080"/>
+            <a:ext cx="4069080" cy="3474720"/>
           </a:xfrm>
           <a:prstGeom prst="rect">
             <a:avLst/>
@@ -22707,7 +22440,7 @@
         </p:nvSpPr>
         <p:spPr>
           <a:xfrm>
-            <a:off x="7818120" y="4187952"/>
+            <a:off x="7818120" y="1901952"/>
             <a:ext cx="3703320" cy="320040"/>
           </a:xfrm>
           <a:prstGeom prst="rect">
@@ -22746,8 +22479,8 @@
         </p:nvSpPr>
         <p:spPr>
           <a:xfrm>
-            <a:off x="7818120" y="4526280"/>
-            <a:ext cx="3794760" cy="1600200"/>
+            <a:off x="7818120" y="2286000"/>
+            <a:ext cx="3703320" cy="2907791"/>
           </a:xfrm>
           <a:prstGeom prst="rect">
             <a:avLst/>
@@ -22767,7 +22500,7 @@
               <a:buChar char="•"/>
             </a:pPr>
             <a:r>
-              <a:rPr lang="en-US" sz="1000" dirty="0">
+              <a:rPr lang="en-US" sz="1050" dirty="0">
                 <a:solidFill>
                   <a:srgbClr val="222222"/>
                 </a:solidFill>
@@ -22791,7 +22524,7 @@
               <a:buChar char="•"/>
             </a:pPr>
             <a:r>
-              <a:rPr lang="en-US" sz="1000" dirty="0">
+              <a:rPr lang="en-US" sz="1050" dirty="0">
                 <a:solidFill>
                   <a:srgbClr val="222222"/>
                 </a:solidFill>
@@ -22815,7 +22548,7 @@
               <a:buChar char="•"/>
             </a:pPr>
             <a:r>
-              <a:rPr lang="en-US" sz="1000" dirty="0">
+              <a:rPr lang="en-US" sz="1050" dirty="0">
                 <a:solidFill>
                   <a:srgbClr val="222222"/>
                 </a:solidFill>
@@ -22830,152 +22563,199 @@
               <a:ea typeface="メイリオ" panose="020B0604030504040204" pitchFamily="50" charset="-128"/>
             </a:endParaRPr>
           </a:p>
+          <a:p>
+            <a:pPr marL="342900" indent="-342900">
+              <a:spcAft>
+                <a:spcPts val="700"/>
+              </a:spcAft>
+              <a:buSzPct val="100000"/>
+              <a:buChar char="•"/>
+            </a:pPr>
+            <a:r>
+              <a:rPr lang="en-US" sz="1050" dirty="0">
+                <a:solidFill>
+                  <a:srgbClr val="222222"/>
+                </a:solidFill>
+                <a:latin typeface="メイリオ" panose="020B0604030504040204" pitchFamily="50" charset="-128"/>
+                <a:ea typeface="メイリオ" panose="020B0604030504040204" pitchFamily="50" charset="-128"/>
+                <a:cs typeface="Meiryo" pitchFamily="34" charset="-120"/>
+              </a:rPr>
+              <a:t>立地の弱さを送迎で補う構造。送迎圏が重なる事業所とは直接競合になりやすい。</a:t>
+            </a:r>
+            <a:endParaRPr lang="en-US" sz="1000" dirty="0">
+              <a:latin typeface="メイリオ" panose="020B0604030504040204" pitchFamily="50" charset="-128"/>
+              <a:ea typeface="メイリオ" panose="020B0604030504040204" pitchFamily="50" charset="-128"/>
+            </a:endParaRPr>
+          </a:p>
         </p:txBody>
       </p:sp>
       <p:sp>
         <p:nvSpPr>
-          <p:cNvPr id="900" name="PhotoSlot 1"/>
+          <p:cNvPr id="940" name="FootBG"/>
           <p:cNvSpPr/>
           <p:nvPr/>
         </p:nvSpPr>
         <p:spPr>
           <a:xfrm>
-            <a:off x="868680" y="4882896"/>
-            <a:ext cx="1965960" cy="1152144"/>
+            <a:off x="502920" y="5394960"/>
+            <a:ext cx="11201400" cy="896112"/>
           </a:xfrm>
           <a:prstGeom prst="rect">
             <a:avLst/>
           </a:prstGeom>
           <a:solidFill>
-            <a:srgbClr val="F4F6FA"/>
+            <a:srgbClr val="EEF2F8"/>
           </a:solidFill>
           <a:ln w="12700">
             <a:solidFill>
               <a:srgbClr val="9AA7B8"/>
             </a:solidFill>
-            <a:prstDash val="dash"/>
+            <a:prstDash val="solid"/>
           </a:ln>
         </p:spPr>
-        <p:txBody>
-          <a:bodyPr wrap="square" lIns="91440" tIns="45720" rIns="91440" bIns="45720" rtlCol="0" anchor="ctr"/>
-          <a:lstStyle/>
-          <a:p>
-            <a:pPr marL="0" indent="0" algn="ctr">
-              <a:lnSpc>
-                <a:spcPct val="110000"/>
-              </a:lnSpc>
-              <a:buNone/>
-            </a:pPr>
-            <a:r>
-              <a:rPr lang="en-US" sz="900" b="1" dirty="0">
-                <a:solidFill>
-                  <a:srgbClr val="8A99AD"/>
-                </a:solidFill>
-                <a:latin typeface="Meiryo" pitchFamily="34" charset="0"/>
-                <a:ea typeface="Meiryo" pitchFamily="34" charset="-122"/>
-                <a:cs typeface="Meiryo" pitchFamily="34" charset="-120"/>
-              </a:rPr>
-              <a:t>［ 外観 / 建物 ］</a:t>
-            </a:r>
-            <a:endParaRPr lang="en-US" sz="1200" dirty="0"/>
-          </a:p>
-        </p:txBody>
       </p:sp>
       <p:sp>
         <p:nvSpPr>
-          <p:cNvPr id="901" name="PhotoSlot 2"/>
+          <p:cNvPr id="941" name="FootTitle"/>
           <p:cNvSpPr/>
           <p:nvPr/>
         </p:nvSpPr>
         <p:spPr>
           <a:xfrm>
-            <a:off x="2971800" y="4882896"/>
-            <a:ext cx="1965960" cy="1152144"/>
+            <a:off x="713232" y="5477256"/>
+            <a:ext cx="10789920" cy="274320"/>
           </a:xfrm>
           <a:prstGeom prst="rect">
             <a:avLst/>
           </a:prstGeom>
-          <a:solidFill>
-            <a:srgbClr val="F4F6FA"/>
-          </a:solidFill>
-          <a:ln w="12700">
-            <a:solidFill>
-              <a:srgbClr val="9AA7B8"/>
-            </a:solidFill>
-            <a:prstDash val="dash"/>
-          </a:ln>
+          <a:noFill/>
+          <a:ln/>
         </p:spPr>
         <p:txBody>
-          <a:bodyPr wrap="square" lIns="91440" tIns="45720" rIns="91440" bIns="45720" rtlCol="0" anchor="ctr"/>
+          <a:bodyPr wrap="square" lIns="0" tIns="0" rIns="0" bIns="0" rtlCol="0" anchor="ctr"/>
           <a:lstStyle/>
           <a:p>
-            <a:pPr marL="0" indent="0" algn="ctr">
-              <a:lnSpc>
-                <a:spcPct val="110000"/>
-              </a:lnSpc>
+            <a:pPr marL="0" indent="0">
               <a:buNone/>
             </a:pPr>
             <a:r>
-              <a:rPr lang="en-US" sz="900" b="1" dirty="0">
-                <a:solidFill>
-                  <a:srgbClr val="8A99AD"/>
-                </a:solidFill>
-                <a:latin typeface="Meiryo" pitchFamily="34" charset="0"/>
-                <a:ea typeface="Meiryo" pitchFamily="34" charset="-122"/>
-                <a:cs typeface="Meiryo" pitchFamily="34" charset="-120"/>
-              </a:rPr>
-              <a:t>［ 室内・教室 ］</a:t>
-            </a:r>
-            <a:endParaRPr lang="en-US" sz="1200" dirty="0"/>
+              <a:rPr lang="en-US" sz="1250" b="1" dirty="0">
+                <a:solidFill>
+                  <a:srgbClr val="1B3A6B"/>
+                </a:solidFill>
+                <a:latin typeface="Meiryo" pitchFamily="34" charset="0"/>
+                <a:ea typeface="Meiryo" pitchFamily="34" charset="-122"/>
+                <a:cs typeface="Meiryo" pitchFamily="34" charset="-120"/>
+              </a:rPr>
+              <a:t>出典 ／ 要確認事項</a:t>
+            </a:r>
+            <a:endParaRPr lang="en-US" sz="1250" dirty="0"/>
           </a:p>
         </p:txBody>
       </p:sp>
       <p:sp>
         <p:nvSpPr>
-          <p:cNvPr id="902" name="PhotoSlot 3"/>
+          <p:cNvPr id="13" name="FootBody"/>
           <p:cNvSpPr/>
           <p:nvPr/>
         </p:nvSpPr>
         <p:spPr>
           <a:xfrm>
-            <a:off x="5074920" y="4882896"/>
-            <a:ext cx="1965960" cy="1152144"/>
+            <a:off x="713232" y="5779008"/>
+            <a:ext cx="10789920" cy="475488"/>
           </a:xfrm>
           <a:prstGeom prst="rect">
             <a:avLst/>
           </a:prstGeom>
-          <a:solidFill>
-            <a:srgbClr val="F4F6FA"/>
-          </a:solidFill>
-          <a:ln w="12700">
-            <a:solidFill>
-              <a:srgbClr val="9AA7B8"/>
-            </a:solidFill>
-            <a:prstDash val="dash"/>
-          </a:ln>
+          <a:noFill/>
+          <a:ln/>
         </p:spPr>
         <p:txBody>
-          <a:bodyPr wrap="square" lIns="91440" tIns="45720" rIns="91440" bIns="45720" rtlCol="0" anchor="ctr"/>
+          <a:bodyPr wrap="square" lIns="0" tIns="0" rIns="0" bIns="0" rtlCol="0" anchor="t"/>
           <a:lstStyle/>
           <a:p>
-            <a:pPr marL="0" indent="0" algn="ctr">
+            <a:pPr marL="0" indent="0">
               <a:lnSpc>
-                <a:spcPct val="110000"/>
+                <a:spcPct val="103000"/>
               </a:lnSpc>
               <a:buNone/>
             </a:pPr>
             <a:r>
-              <a:rPr lang="en-US" sz="900" b="1" dirty="0">
-                <a:solidFill>
-                  <a:srgbClr val="8A99AD"/>
-                </a:solidFill>
-                <a:latin typeface="Meiryo" pitchFamily="34" charset="0"/>
-                <a:ea typeface="Meiryo" pitchFamily="34" charset="-122"/>
-                <a:cs typeface="Meiryo" pitchFamily="34" charset="-120"/>
-              </a:rPr>
-              <a:t>［ 活動風景 ］</a:t>
-            </a:r>
-            <a:endParaRPr lang="en-US" sz="1200" dirty="0"/>
+              <a:rPr lang="en-US" sz="950" b="1" dirty="0">
+                <a:solidFill>
+                  <a:srgbClr val="2E6BB8"/>
+                </a:solidFill>
+                <a:latin typeface="Meiryo" pitchFamily="34" charset="0"/>
+                <a:ea typeface="Meiryo" pitchFamily="34" charset="-122"/>
+                <a:cs typeface="Meiryo" pitchFamily="34" charset="-120"/>
+              </a:rPr>
+              <a:t>▶</a:t>
+            </a:r>
+            <a:r>
+              <a:rPr lang="en-US" sz="950" b="1" dirty="0">
+                <a:solidFill>
+                  <a:srgbClr val="222222"/>
+                </a:solidFill>
+                <a:latin typeface="Meiryo" pitchFamily="34" charset="0"/>
+                <a:ea typeface="Meiryo" pitchFamily="34" charset="-122"/>
+                <a:cs typeface="Meiryo" pitchFamily="34" charset="-120"/>
+              </a:rPr>
+              <a:t>出典：</a:t>
+            </a:r>
+            <a:r>
+              <a:rPr lang="en-US" sz="950" dirty="0">
+                <a:solidFill>
+                  <a:srgbClr val="222222"/>
+                </a:solidFill>
+                <a:latin typeface="Meiryo" pitchFamily="34" charset="0"/>
+                <a:ea typeface="Meiryo" pitchFamily="34" charset="-122"/>
+                <a:cs typeface="Meiryo" pitchFamily="34" charset="-120"/>
+              </a:rPr>
+              <a:t>公式HP kihonjuku-yuuyuu.com／LITALICO発達ナビ／イクデン／ホイシル</a:t>
+            </a:r>
+            <a:endParaRPr lang="en-US" sz="1050" dirty="0"/>
+          </a:p>
+          <a:p>
+            <a:pPr marL="0" indent="0">
+              <a:lnSpc>
+                <a:spcPct val="103000"/>
+              </a:lnSpc>
+              <a:buNone/>
+            </a:pPr>
+            <a:r>
+              <a:rPr lang="en-US" sz="950" b="1" dirty="0">
+                <a:solidFill>
+                  <a:srgbClr val="2E6BB8"/>
+                </a:solidFill>
+                <a:latin typeface="Meiryo" pitchFamily="34" charset="0"/>
+                <a:ea typeface="Meiryo" pitchFamily="34" charset="-122"/>
+                <a:cs typeface="Meiryo" pitchFamily="34" charset="-120"/>
+              </a:rPr>
+              <a:t>▶</a:t>
+            </a:r>
+            <a:r>
+              <a:rPr lang="en-US" sz="950" b="1" dirty="0">
+                <a:solidFill>
+                  <a:srgbClr val="222222"/>
+                </a:solidFill>
+                <a:latin typeface="Meiryo" pitchFamily="34" charset="0"/>
+                <a:ea typeface="Meiryo" pitchFamily="34" charset="-122"/>
+                <a:cs typeface="Meiryo" pitchFamily="34" charset="-120"/>
+              </a:rPr>
+              <a:t>要確認事項：</a:t>
+            </a:r>
+            <a:r>
+              <a:rPr lang="en-US" sz="950" dirty="0">
+                <a:solidFill>
+                  <a:srgbClr val="222222"/>
+                </a:solidFill>
+                <a:latin typeface="Meiryo" pitchFamily="34" charset="0"/>
+                <a:ea typeface="Meiryo" pitchFamily="34" charset="-122"/>
+                <a:cs typeface="Meiryo" pitchFamily="34" charset="-120"/>
+              </a:rPr>
+              <a:t>放課後等デイサービス側の定員、送迎範囲、土曜・長期休暇の開所有無</a:t>
+            </a:r>
+            <a:endParaRPr lang="en-US" sz="1050" dirty="0"/>
           </a:p>
         </p:txBody>
       </p:sp>

--- a/東金市_児童発達支援_事業所調査.pptx
+++ b/東金市_児童発達支援_事業所調査.pptx
@@ -10,18 +10,17 @@
   <p:sldIdLst>
     <p:sldId id="256" r:id="rId2"/>
     <p:sldId id="257" r:id="rId3"/>
-    <p:sldId id="258" r:id="rId24"/>
-    <p:sldId id="259" r:id="rId14"/>
-    <p:sldId id="260" r:id="rId15"/>
-    <p:sldId id="261" r:id="rId16"/>
-    <p:sldId id="262" r:id="rId17"/>
-    <p:sldId id="263" r:id="rId18"/>
-    <p:sldId id="264" r:id="rId19"/>
-    <p:sldId id="265" r:id="rId20"/>
-    <p:sldId id="266" r:id="rId21"/>
-    <p:sldId id="267" r:id="rId22"/>
-    <p:sldId id="268" r:id="rId23"/>
-    <p:sldId id="269" r:id="rId8"/>
+    <p:sldId id="258" r:id="rId14"/>
+    <p:sldId id="259" r:id="rId15"/>
+    <p:sldId id="260" r:id="rId16"/>
+    <p:sldId id="261" r:id="rId17"/>
+    <p:sldId id="262" r:id="rId18"/>
+    <p:sldId id="263" r:id="rId19"/>
+    <p:sldId id="264" r:id="rId20"/>
+    <p:sldId id="265" r:id="rId21"/>
+    <p:sldId id="266" r:id="rId22"/>
+    <p:sldId id="267" r:id="rId23"/>
+    <p:sldId id="268" r:id="rId8"/>
   </p:sldIdLst>
   <p:sldSz cx="12192000" cy="6858000"/>
   <p:notesSz cx="6858000" cy="12192000"/>
@@ -1428,7 +1427,7 @@
                 <a:ea typeface="Meiryo" pitchFamily="34" charset="-122"/>
                 <a:cs typeface="Meiryo" pitchFamily="34" charset="-120"/>
               </a:rPr>
-              <a:t>⑦ 基本塾優遊 八坂台</a:t>
+              <a:t>⑧ 基本塾優遊 八坂西 ／ 八坂中央</a:t>
             </a:r>
             <a:endParaRPr lang="en-US" sz="2100" dirty="0"/>
           </a:p>
@@ -1602,7 +1601,7 @@
                 <a:ea typeface="Meiryo" pitchFamily="34" charset="-122"/>
                 <a:cs typeface="Meiryo" pitchFamily="34" charset="-120"/>
               </a:rPr>
-              <a:t>基本塾優遊 八坂台（運営：特定非営利活動法人 基本塾）</a:t>
+              <a:t>基本塾優遊 八坂西・八坂中央（運営：特定非営利活動法人 基本塾）</a:t>
             </a:r>
             <a:endParaRPr lang="en-US" sz="1400" dirty="0"/>
           </a:p>
@@ -1666,7 +1665,7 @@
                 <a:ea typeface="Meiryo" pitchFamily="34" charset="-122"/>
                 <a:cs typeface="Meiryo" pitchFamily="34" charset="-120"/>
               </a:rPr>
-              <a:t>小学生、および翌年度に小学生になる児童（就学移行期）を中心に募集</a:t>
+              <a:t>未就学児（児童発達支援）／就学児（放課後等デイサービス）</a:t>
             </a:r>
             <a:endParaRPr lang="en-US" sz="1050" dirty="0"/>
           </a:p>
@@ -1708,7 +1707,7 @@
                 <a:ea typeface="Meiryo" pitchFamily="34" charset="-122"/>
                 <a:cs typeface="Meiryo" pitchFamily="34" charset="-120"/>
               </a:rPr>
-              <a:t>千葉県東金市八坂台5-11-1</a:t>
+              <a:t>【八坂西】千葉県東金市八坂台4-2-4（〒283-0801）　【八坂中央】東金市八坂台地区（詳細要確認）</a:t>
             </a:r>
             <a:endParaRPr lang="en-US" sz="1050" dirty="0"/>
           </a:p>
@@ -1750,7 +1749,7 @@
                 <a:ea typeface="Meiryo" pitchFamily="34" charset="-122"/>
                 <a:cs typeface="Meiryo" pitchFamily="34" charset="-120"/>
               </a:rPr>
-              <a:t>0475-51-5010 ／ kihonjuku-yuuyuu.com</a:t>
+              <a:t>【八坂西】0475-51-6631 ／ kihonjuku-yuuyuu.com　【八坂中央】要確認</a:t>
             </a:r>
             <a:endParaRPr lang="en-US" sz="1050" dirty="0"/>
           </a:p>
@@ -1792,7 +1791,7 @@
                 <a:ea typeface="Meiryo" pitchFamily="34" charset="-122"/>
                 <a:cs typeface="Meiryo" pitchFamily="34" charset="-120"/>
               </a:rPr>
-              <a:t>9:00〜18:00 ／ 定休：土曜・日曜・祝日・年末年始</a:t>
+              <a:t>9:00〜18:00（グループ共通の目安）／日曜・祝日・年末年始休</a:t>
             </a:r>
             <a:endParaRPr lang="en-US" sz="1050" dirty="0"/>
           </a:p>
@@ -1823,7 +1822,7 @@
                 <a:ea typeface="Meiryo" pitchFamily="34" charset="-122"/>
                 <a:cs typeface="Meiryo" pitchFamily="34" charset="-120"/>
               </a:rPr>
-              <a:t>定員／職員：</a:t>
+              <a:t>定員：</a:t>
             </a:r>
             <a:r>
               <a:rPr lang="en-US" sz="1100" dirty="0">
@@ -1834,7 +1833,7 @@
                 <a:ea typeface="Meiryo" pitchFamily="34" charset="-122"/>
                 <a:cs typeface="Meiryo" pitchFamily="34" charset="-120"/>
               </a:rPr>
-              <a:t>10名 ／ 児童発達支援管理責任者1名・児童指導員4名・保育士4名（計9名）</a:t>
+              <a:t>要確認（グループ他拠点は10名前後）</a:t>
             </a:r>
             <a:endParaRPr lang="en-US" sz="1050" dirty="0"/>
           </a:p>
@@ -1888,7 +1887,7 @@
                 <a:ea typeface="Meiryo" pitchFamily="34" charset="-122"/>
                 <a:cs typeface="Meiryo" pitchFamily="34" charset="-120"/>
               </a:rPr>
-              <a:t>少人数での活動・制作を基本に、地域と連携したイベントを実施。</a:t>
+              <a:t>基本塾グループ共通の個別支援プログラムと「10の活動」を基本に運営。</a:t>
             </a:r>
             <a:endParaRPr lang="en-US" sz="1050" dirty="0"/>
           </a:p>
@@ -1911,7 +1910,7 @@
                 <a:ea typeface="Meiryo" pitchFamily="34" charset="-122"/>
                 <a:cs typeface="Meiryo" pitchFamily="34" charset="-120"/>
               </a:rPr>
-              <a:t>・元サッカー選手による「サッカー療育」を導入。</a:t>
+              <a:t>・八坂台エリアに 八坂台・八坂西・八坂中央 の計3拠点を集中配置。</a:t>
             </a:r>
             <a:endParaRPr lang="en-US" sz="1050" dirty="0"/>
           </a:p>
@@ -1934,7 +1933,7 @@
                 <a:ea typeface="Meiryo" pitchFamily="34" charset="-122"/>
                 <a:cs typeface="Meiryo" pitchFamily="34" charset="-120"/>
               </a:rPr>
-              <a:t>・子どもの「やりたい！」「できた！」を大切にする支援方針を掲げる。</a:t>
+              <a:t>・八坂中央は公開情報が乏しく、開所時期・定員・提供時間は要確認。</a:t>
             </a:r>
             <a:endParaRPr lang="en-US" sz="1050" dirty="0"/>
           </a:p>
@@ -2041,7 +2040,7 @@
                 <a:ea typeface="メイリオ" panose="020B0604030504040204" pitchFamily="50" charset="-128"/>
                 <a:cs typeface="Meiryo" pitchFamily="34" charset="-120"/>
               </a:rPr>
-              <a:t>職員9名に対し定員10名と、市内でも手厚い人員配置。</a:t>
+              <a:t>八坂台エリアだけで3拠点。八坂台団地（ニュータウン）の児童人口を面で押さえる出店戦略。</a:t>
             </a:r>
             <a:endParaRPr lang="en-US" sz="1000" dirty="0">
               <a:latin typeface="メイリオ" panose="020B0604030504040204" pitchFamily="50" charset="-128"/>
@@ -2065,7 +2064,7 @@
                 <a:ea typeface="メイリオ" panose="020B0604030504040204" pitchFamily="50" charset="-128"/>
                 <a:cs typeface="Meiryo" pitchFamily="34" charset="-120"/>
               </a:rPr>
-              <a:t>「サッカー療育」という他事業所にない明確なフック。就学移行期（年長〜小学生）に的を絞った募集。</a:t>
+              <a:t>拠点を細かく分けることで少人数の環境を維持しつつ、法人としての総定員を確保するモデル。</a:t>
             </a:r>
             <a:endParaRPr lang="en-US" sz="1000" dirty="0">
               <a:latin typeface="メイリオ" panose="020B0604030504040204" pitchFamily="50" charset="-128"/>
@@ -2089,7 +2088,7 @@
                 <a:ea typeface="メイリオ" panose="020B0604030504040204" pitchFamily="50" charset="-128"/>
                 <a:cs typeface="Meiryo" pitchFamily="34" charset="-120"/>
               </a:rPr>
-              <a:t>土曜が定休のため、土曜・長期休暇のニーズは他事業所へ流れる構造。</a:t>
+              <a:t>1法人で市内児発の約半数（5／11拠点）を占め、東金市の供給構造を実質的に規定している。</a:t>
             </a:r>
             <a:endParaRPr lang="en-US" sz="1000" dirty="0">
               <a:latin typeface="メイリオ" panose="020B0604030504040204" pitchFamily="50" charset="-128"/>
@@ -2113,7 +2112,7 @@
                 <a:ea typeface="メイリオ" panose="020B0604030504040204" pitchFamily="50" charset="-128"/>
                 <a:cs typeface="Meiryo" pitchFamily="34" charset="-120"/>
               </a:rPr>
-              <a:t>土曜・長期休暇の受け皿が手薄なため、そこを埋める事業所には需要が回りやすい。</a:t>
+              <a:t>八坂台エリアへの新規出店は、基本塾3拠点との正面競合となる点に留意が必要。</a:t>
             </a:r>
             <a:endParaRPr lang="en-US" sz="1000" dirty="0">
               <a:latin typeface="メイリオ" panose="020B0604030504040204" pitchFamily="50" charset="-128"/>
@@ -2244,7 +2243,7 @@
                 <a:ea typeface="Meiryo" pitchFamily="34" charset="-122"/>
                 <a:cs typeface="Meiryo" pitchFamily="34" charset="-120"/>
               </a:rPr>
-              <a:t>公式HP kihonjuku-yuuyuu.com／LITALICO発達ナビ</a:t>
+              <a:t>公式HP kihonjuku-yuuyuu.com／児発ねっと／東金市公式サイト</a:t>
             </a:r>
             <a:endParaRPr lang="en-US" sz="1050" dirty="0"/>
           </a:p>
@@ -2286,7 +2285,7 @@
                 <a:ea typeface="Meiryo" pitchFamily="34" charset="-122"/>
                 <a:cs typeface="Meiryo" pitchFamily="34" charset="-120"/>
               </a:rPr>
-              <a:t>児童発達支援の受け入れ年齢（未就学の下限）、長期休暇中の開所時間、送迎の有無</a:t>
+              <a:t>八坂中央の開所時期・正確な所在地・定員・電話番号、八坂西の定員と提供時間</a:t>
             </a:r>
             <a:endParaRPr lang="en-US" sz="1050" dirty="0"/>
           </a:p>
@@ -2437,7 +2436,7 @@
                 <a:ea typeface="Meiryo" pitchFamily="34" charset="-122"/>
                 <a:cs typeface="Meiryo" pitchFamily="34" charset="-120"/>
               </a:rPr>
-              <a:t>⑧ 基本塾優遊 八坂西 ／ 八坂中央</a:t>
+              <a:t>⑨ 児童発達支援コンパッション保育所</a:t>
             </a:r>
             <a:endParaRPr lang="en-US" sz="2100" dirty="0"/>
           </a:p>
@@ -2611,7 +2610,7 @@
                 <a:ea typeface="Meiryo" pitchFamily="34" charset="-122"/>
                 <a:cs typeface="Meiryo" pitchFamily="34" charset="-120"/>
               </a:rPr>
-              <a:t>基本塾優遊 八坂西・八坂中央（運営：特定非営利活動法人 基本塾）</a:t>
+              <a:t>児童発達支援コンパッション保育所</a:t>
             </a:r>
             <a:endParaRPr lang="en-US" sz="1400" dirty="0"/>
           </a:p>
@@ -2675,7 +2674,7 @@
                 <a:ea typeface="Meiryo" pitchFamily="34" charset="-122"/>
                 <a:cs typeface="Meiryo" pitchFamily="34" charset="-120"/>
               </a:rPr>
-              <a:t>未就学児（児童発達支援）／就学児（放課後等デイサービス）</a:t>
+              <a:t>未就学児（児童発達支援）</a:t>
             </a:r>
             <a:endParaRPr lang="en-US" sz="1050" dirty="0"/>
           </a:p>
@@ -2717,7 +2716,7 @@
                 <a:ea typeface="Meiryo" pitchFamily="34" charset="-122"/>
                 <a:cs typeface="Meiryo" pitchFamily="34" charset="-120"/>
               </a:rPr>
-              <a:t>【八坂西】千葉県東金市八坂台4-2-4（〒283-0801）　【八坂中央】東金市八坂台地区（詳細要確認）</a:t>
+              <a:t>千葉県東金市家之子1671-36</a:t>
             </a:r>
             <a:endParaRPr lang="en-US" sz="1050" dirty="0"/>
           </a:p>
@@ -2759,7 +2758,7 @@
                 <a:ea typeface="Meiryo" pitchFamily="34" charset="-122"/>
                 <a:cs typeface="Meiryo" pitchFamily="34" charset="-120"/>
               </a:rPr>
-              <a:t>【八坂西】0475-51-6631 ／ kihonjuku-yuuyuu.com　【八坂中央】要確認</a:t>
+              <a:t>要確認（公開情報に記載なし）</a:t>
             </a:r>
             <a:endParaRPr lang="en-US" sz="1050" dirty="0"/>
           </a:p>
@@ -2801,7 +2800,7 @@
                 <a:ea typeface="Meiryo" pitchFamily="34" charset="-122"/>
                 <a:cs typeface="Meiryo" pitchFamily="34" charset="-120"/>
               </a:rPr>
-              <a:t>9:00〜18:00（グループ共通の目安）／日曜・祝日・年末年始休</a:t>
+              <a:t>要確認</a:t>
             </a:r>
             <a:endParaRPr lang="en-US" sz="1050" dirty="0"/>
           </a:p>
@@ -2843,7 +2842,7 @@
                 <a:ea typeface="Meiryo" pitchFamily="34" charset="-122"/>
                 <a:cs typeface="Meiryo" pitchFamily="34" charset="-120"/>
               </a:rPr>
-              <a:t>要確認（グループ他拠点は10名前後）</a:t>
+              <a:t>要確認</a:t>
             </a:r>
             <a:endParaRPr lang="en-US" sz="1050" dirty="0"/>
           </a:p>
@@ -2897,7 +2896,7 @@
                 <a:ea typeface="Meiryo" pitchFamily="34" charset="-122"/>
                 <a:cs typeface="Meiryo" pitchFamily="34" charset="-120"/>
               </a:rPr>
-              <a:t>基本塾グループ共通の個別支援プログラムと「10の活動」を基本に運営。</a:t>
+              <a:t>保育所を母体とする児童発達支援。保育の場と療育の場が同一施設にある併設型。</a:t>
             </a:r>
             <a:endParaRPr lang="en-US" sz="1050" dirty="0"/>
           </a:p>
@@ -2920,7 +2919,7 @@
                 <a:ea typeface="Meiryo" pitchFamily="34" charset="-122"/>
                 <a:cs typeface="Meiryo" pitchFamily="34" charset="-120"/>
               </a:rPr>
-              <a:t>・八坂台エリアに 八坂台・八坂西・八坂中央 の計3拠点を集中配置。</a:t>
+              <a:t>・市および発達支援施設検索サイトの児童発達支援事業所一覧に掲載されている。</a:t>
             </a:r>
             <a:endParaRPr lang="en-US" sz="1050" dirty="0"/>
           </a:p>
@@ -2943,7 +2942,7 @@
                 <a:ea typeface="Meiryo" pitchFamily="34" charset="-122"/>
                 <a:cs typeface="Meiryo" pitchFamily="34" charset="-120"/>
               </a:rPr>
-              <a:t>・八坂中央は公開情報が乏しく、開所時期・定員・提供時間は要確認。</a:t>
+              <a:t>・Web上の公開情報は極めて限定的で、支援プログラムの詳細は現地・電話での確認が必要。</a:t>
             </a:r>
             <a:endParaRPr lang="en-US" sz="1050" dirty="0"/>
           </a:p>
@@ -3050,7 +3049,7 @@
                 <a:ea typeface="メイリオ" panose="020B0604030504040204" pitchFamily="50" charset="-128"/>
                 <a:cs typeface="Meiryo" pitchFamily="34" charset="-120"/>
               </a:rPr>
-              <a:t>八坂台エリアだけで3拠点。八坂台団地（ニュータウン）の児童人口を面で押さえる出店戦略。</a:t>
+              <a:t>市街地から離れた家之子地区（市北部）に立地し、周辺の事業所空白地帯をカバー。</a:t>
             </a:r>
             <a:endParaRPr lang="en-US" sz="1000" dirty="0">
               <a:latin typeface="メイリオ" panose="020B0604030504040204" pitchFamily="50" charset="-128"/>
@@ -3074,7 +3073,7 @@
                 <a:ea typeface="メイリオ" panose="020B0604030504040204" pitchFamily="50" charset="-128"/>
                 <a:cs typeface="Meiryo" pitchFamily="34" charset="-120"/>
               </a:rPr>
-              <a:t>拠点を細かく分けることで少人数の環境を維持しつつ、法人としての総定員を確保するモデル。</a:t>
+              <a:t>保育所併設型は市内で唯一。定型発達児との日常的な交流が可能な環境が構造的な強み。</a:t>
             </a:r>
             <a:endParaRPr lang="en-US" sz="1000" dirty="0">
               <a:latin typeface="メイリオ" panose="020B0604030504040204" pitchFamily="50" charset="-128"/>
@@ -3098,7 +3097,7 @@
                 <a:ea typeface="メイリオ" panose="020B0604030504040204" pitchFamily="50" charset="-128"/>
                 <a:cs typeface="Meiryo" pitchFamily="34" charset="-120"/>
               </a:rPr>
-              <a:t>1法人で市内児発の約半数（5／11拠点）を占め、東金市の供給構造を実質的に規定している。</a:t>
+              <a:t>情報発信がほぼ無く、稼働状況・空き枠の把握には直接ヒアリングが必須。</a:t>
             </a:r>
             <a:endParaRPr lang="en-US" sz="1000" dirty="0">
               <a:latin typeface="メイリオ" panose="020B0604030504040204" pitchFamily="50" charset="-128"/>
@@ -3122,7 +3121,7 @@
                 <a:ea typeface="メイリオ" panose="020B0604030504040204" pitchFamily="50" charset="-128"/>
                 <a:cs typeface="Meiryo" pitchFamily="34" charset="-120"/>
               </a:rPr>
-              <a:t>八坂台エリアへの新規出店は、基本塾3拠点との正面競合となる点に留意が必要。</a:t>
+              <a:t>市北部（家之子・丘山方面）は事業所が少なく、送迎圏として狙える余地がある。</a:t>
             </a:r>
             <a:endParaRPr lang="en-US" sz="1000" dirty="0">
               <a:latin typeface="メイリオ" panose="020B0604030504040204" pitchFamily="50" charset="-128"/>
@@ -3253,7 +3252,7 @@
                 <a:ea typeface="Meiryo" pitchFamily="34" charset="-122"/>
                 <a:cs typeface="Meiryo" pitchFamily="34" charset="-120"/>
               </a:rPr>
-              <a:t>公式HP kihonjuku-yuuyuu.com／児発ねっと／東金市公式サイト</a:t>
+              <a:t>東金市公式サイト／LITALICO発達ナビ 東金市 児童発達支援事業所一覧</a:t>
             </a:r>
             <a:endParaRPr lang="en-US" sz="1050" dirty="0"/>
           </a:p>
@@ -3295,7 +3294,7 @@
                 <a:ea typeface="Meiryo" pitchFamily="34" charset="-122"/>
                 <a:cs typeface="Meiryo" pitchFamily="34" charset="-120"/>
               </a:rPr>
-              <a:t>八坂中央の開所時期・正確な所在地・定員・電話番号、八坂西の定員と提供時間</a:t>
+              <a:t>運営法人、電話番号、定員、提供時間、母体となる保育所との関係　※公開情報がほぼ無い</a:t>
             </a:r>
             <a:endParaRPr lang="en-US" sz="1050" dirty="0"/>
           </a:p>
@@ -3446,7 +3445,7 @@
                 <a:ea typeface="Meiryo" pitchFamily="34" charset="-122"/>
                 <a:cs typeface="Meiryo" pitchFamily="34" charset="-120"/>
               </a:rPr>
-              <a:t>⑨ 児童発達支援コンパッション保育所</a:t>
+              <a:t>⑩ 鴇嶺の家</a:t>
             </a:r>
             <a:endParaRPr lang="en-US" sz="2100" dirty="0"/>
           </a:p>
@@ -3620,7 +3619,7 @@
                 <a:ea typeface="Meiryo" pitchFamily="34" charset="-122"/>
                 <a:cs typeface="Meiryo" pitchFamily="34" charset="-120"/>
               </a:rPr>
-              <a:t>児童発達支援コンパッション保育所</a:t>
+              <a:t>鴇嶺の家（児童発達支援・放課後等デイサービス）</a:t>
             </a:r>
             <a:endParaRPr lang="en-US" sz="1400" dirty="0"/>
           </a:p>
@@ -3684,7 +3683,7 @@
                 <a:ea typeface="Meiryo" pitchFamily="34" charset="-122"/>
                 <a:cs typeface="Meiryo" pitchFamily="34" charset="-120"/>
               </a:rPr>
-              <a:t>未就学児（児童発達支援）</a:t>
+              <a:t>未就学児（児童発達支援）〜就学児（放課後等デイサービス）</a:t>
             </a:r>
             <a:endParaRPr lang="en-US" sz="1050" dirty="0"/>
           </a:p>
@@ -3726,7 +3725,7 @@
                 <a:ea typeface="Meiryo" pitchFamily="34" charset="-122"/>
                 <a:cs typeface="Meiryo" pitchFamily="34" charset="-120"/>
               </a:rPr>
-              <a:t>千葉県東金市家之子1671-36</a:t>
+              <a:t>千葉県東金市東金425-2</a:t>
             </a:r>
             <a:endParaRPr lang="en-US" sz="1050" dirty="0"/>
           </a:p>
@@ -3768,7 +3767,7 @@
                 <a:ea typeface="Meiryo" pitchFamily="34" charset="-122"/>
                 <a:cs typeface="Meiryo" pitchFamily="34" charset="-120"/>
               </a:rPr>
-              <a:t>要確認（公開情報に記載なし）</a:t>
+              <a:t>要確認（公開情報では下4桁「0285」までの記載にとどまる）／公開HPなし</a:t>
             </a:r>
             <a:endParaRPr lang="en-US" sz="1050" dirty="0"/>
           </a:p>
@@ -3906,7 +3905,7 @@
                 <a:ea typeface="Meiryo" pitchFamily="34" charset="-122"/>
                 <a:cs typeface="Meiryo" pitchFamily="34" charset="-120"/>
               </a:rPr>
-              <a:t>保育所を母体とする児童発達支援。保育の場と療育の場が同一施設にある併設型。</a:t>
+              <a:t>児童発達支援と放課後等デイサービスを併設。プログラム内容は公開情報からは確認できず要確認。</a:t>
             </a:r>
             <a:endParaRPr lang="en-US" sz="1050" dirty="0"/>
           </a:p>
@@ -3929,7 +3928,7 @@
                 <a:ea typeface="Meiryo" pitchFamily="34" charset="-122"/>
                 <a:cs typeface="Meiryo" pitchFamily="34" charset="-120"/>
               </a:rPr>
-              <a:t>・市および発達支援施設検索サイトの児童発達支援事業所一覧に掲載されている。</a:t>
+              <a:t>・東金地区（旧市街・鴇嶺小学校区）に立地し、学校からの通所導線が近い。</a:t>
             </a:r>
             <a:endParaRPr lang="en-US" sz="1050" dirty="0"/>
           </a:p>
@@ -3952,7 +3951,7 @@
                 <a:ea typeface="Meiryo" pitchFamily="34" charset="-122"/>
                 <a:cs typeface="Meiryo" pitchFamily="34" charset="-120"/>
               </a:rPr>
-              <a:t>・Web上の公開情報は極めて限定的で、支援プログラムの詳細は現地・電話での確認が必要。</a:t>
+              <a:t>・同一町域の東金723にスターワーク東金（放デイ）があり、東金駅東口エリアに事業所が集積。</a:t>
             </a:r>
             <a:endParaRPr lang="en-US" sz="1050" dirty="0"/>
           </a:p>
@@ -4059,7 +4058,7 @@
                 <a:ea typeface="メイリオ" panose="020B0604030504040204" pitchFamily="50" charset="-128"/>
                 <a:cs typeface="Meiryo" pitchFamily="34" charset="-120"/>
               </a:rPr>
-              <a:t>市街地から離れた家之子地区（市北部）に立地し、周辺の事業所空白地帯をカバー。</a:t>
+              <a:t>鴇嶺小学校区の中心部に位置し、学区内からの徒歩・短距離送迎に適した立地。</a:t>
             </a:r>
             <a:endParaRPr lang="en-US" sz="1000" dirty="0">
               <a:latin typeface="メイリオ" panose="020B0604030504040204" pitchFamily="50" charset="-128"/>
@@ -4083,7 +4082,7 @@
                 <a:ea typeface="メイリオ" panose="020B0604030504040204" pitchFamily="50" charset="-128"/>
                 <a:cs typeface="Meiryo" pitchFamily="34" charset="-120"/>
               </a:rPr>
-              <a:t>保育所併設型は市内で唯一。定型発達児との日常的な交流が可能な環境が構造的な強み。</a:t>
+              <a:t>東金駅東口エリアの事業所集積地にあり、競合との距離が近い。</a:t>
             </a:r>
             <a:endParaRPr lang="en-US" sz="1000" dirty="0">
               <a:latin typeface="メイリオ" panose="020B0604030504040204" pitchFamily="50" charset="-128"/>
@@ -4107,7 +4106,7 @@
                 <a:ea typeface="メイリオ" panose="020B0604030504040204" pitchFamily="50" charset="-128"/>
                 <a:cs typeface="Meiryo" pitchFamily="34" charset="-120"/>
               </a:rPr>
-              <a:t>情報発信がほぼ無く、稼働状況・空き枠の把握には直接ヒアリングが必須。</a:t>
+              <a:t>情報発信が乏しく、実態把握は市社会福祉課・相談支援事業所経由での確認が現実的。</a:t>
             </a:r>
             <a:endParaRPr lang="en-US" sz="1000" dirty="0">
               <a:latin typeface="メイリオ" panose="020B0604030504040204" pitchFamily="50" charset="-128"/>
@@ -4131,7 +4130,7 @@
                 <a:ea typeface="メイリオ" panose="020B0604030504040204" pitchFamily="50" charset="-128"/>
                 <a:cs typeface="Meiryo" pitchFamily="34" charset="-120"/>
               </a:rPr>
-              <a:t>市北部（家之子・丘山方面）は事業所が少なく、送迎圏として狙える余地がある。</a:t>
+              <a:t>東金駅東口は事業所集積地。新規参入するなら駅前以外の空白地を狙うのが現実的。</a:t>
             </a:r>
             <a:endParaRPr lang="en-US" sz="1000" dirty="0">
               <a:latin typeface="メイリオ" panose="020B0604030504040204" pitchFamily="50" charset="-128"/>
@@ -4304,7 +4303,7 @@
                 <a:ea typeface="Meiryo" pitchFamily="34" charset="-122"/>
                 <a:cs typeface="Meiryo" pitchFamily="34" charset="-120"/>
               </a:rPr>
-              <a:t>運営法人、電話番号、定員、提供時間、母体となる保育所との関係　※公開情報がほぼ無い</a:t>
+              <a:t>運営法人、正確な電話番号、定員、提供時間、プログラム内容　※公開情報がほぼ無い</a:t>
             </a:r>
             <a:endParaRPr lang="en-US" sz="1050" dirty="0"/>
           </a:p>
@@ -4319,1015 +4318,6 @@
 </file>
 
 <file path=ppt/slides/slide13.xml><?xml version="1.0" encoding="utf-8"?>
-<p:sld xmlns:a="http://schemas.openxmlformats.org/drawingml/2006/main" xmlns:r="http://schemas.openxmlformats.org/officeDocument/2006/relationships" xmlns:p="http://schemas.openxmlformats.org/presentationml/2006/main">
-  <p:cSld name="Slide 3">
-    <p:bg>
-      <p:bgPr>
-        <a:solidFill>
-          <a:srgbClr val="FFFFFF"/>
-        </a:solidFill>
-        <a:effectLst/>
-      </p:bgPr>
-    </p:bg>
-    <p:spTree>
-      <p:nvGrpSpPr>
-        <p:cNvPr id="1" name=""/>
-        <p:cNvGrpSpPr/>
-        <p:nvPr/>
-      </p:nvGrpSpPr>
-      <p:grpSpPr>
-        <a:xfrm>
-          <a:off x="0" y="0"/>
-          <a:ext cx="0" cy="0"/>
-          <a:chOff x="0" y="0"/>
-          <a:chExt cx="0" cy="0"/>
-        </a:xfrm>
-      </p:grpSpPr>
-      <p:sp>
-        <p:nvSpPr>
-          <p:cNvPr id="2" name="Shape 0"/>
-          <p:cNvSpPr/>
-          <p:nvPr/>
-        </p:nvSpPr>
-        <p:spPr>
-          <a:xfrm>
-            <a:off x="0" y="0"/>
-            <a:ext cx="12188952" cy="932688"/>
-          </a:xfrm>
-          <a:prstGeom prst="rect">
-            <a:avLst/>
-          </a:prstGeom>
-          <a:solidFill>
-            <a:srgbClr val="1B3A6B"/>
-          </a:solidFill>
-          <a:ln/>
-        </p:spPr>
-      </p:sp>
-      <p:sp>
-        <p:nvSpPr>
-          <p:cNvPr id="3" name="Shape 1"/>
-          <p:cNvSpPr/>
-          <p:nvPr/>
-        </p:nvSpPr>
-        <p:spPr>
-          <a:xfrm>
-            <a:off x="0" y="0"/>
-            <a:ext cx="164592" cy="932688"/>
-          </a:xfrm>
-          <a:prstGeom prst="rect">
-            <a:avLst/>
-          </a:prstGeom>
-          <a:solidFill>
-            <a:srgbClr val="13294B"/>
-          </a:solidFill>
-          <a:ln/>
-        </p:spPr>
-      </p:sp>
-      <p:sp>
-        <p:nvSpPr>
-          <p:cNvPr id="4" name="Text 2"/>
-          <p:cNvSpPr/>
-          <p:nvPr/>
-        </p:nvSpPr>
-        <p:spPr>
-          <a:xfrm>
-            <a:off x="502920" y="54864"/>
-            <a:ext cx="8686800" cy="822960"/>
-          </a:xfrm>
-          <a:prstGeom prst="rect">
-            <a:avLst/>
-          </a:prstGeom>
-          <a:noFill/>
-          <a:ln/>
-        </p:spPr>
-        <p:txBody>
-          <a:bodyPr wrap="square" lIns="0" tIns="0" rIns="0" bIns="0" rtlCol="0" anchor="ctr"/>
-          <a:lstStyle/>
-          <a:p>
-            <a:pPr marL="0" indent="0">
-              <a:buNone/>
-            </a:pPr>
-            <a:r>
-              <a:rPr lang="en-US" sz="3000" b="1" dirty="0">
-                <a:solidFill>
-                  <a:srgbClr val="FFFFFF"/>
-                </a:solidFill>
-                <a:latin typeface="Meiryo" pitchFamily="34" charset="0"/>
-                <a:ea typeface="Meiryo" pitchFamily="34" charset="-122"/>
-                <a:cs typeface="Meiryo" pitchFamily="34" charset="-120"/>
-              </a:rPr>
-              <a:t>II．　事業所別 詳細</a:t>
-            </a:r>
-            <a:endParaRPr lang="en-US" sz="3000" dirty="0"/>
-          </a:p>
-        </p:txBody>
-      </p:sp>
-      <p:sp>
-        <p:nvSpPr>
-          <p:cNvPr id="5" name="Text 3"/>
-          <p:cNvSpPr/>
-          <p:nvPr/>
-        </p:nvSpPr>
-        <p:spPr>
-          <a:xfrm>
-            <a:off x="502920" y="1115568"/>
-            <a:ext cx="8503920" cy="457200"/>
-          </a:xfrm>
-          <a:prstGeom prst="rect">
-            <a:avLst/>
-          </a:prstGeom>
-          <a:noFill/>
-          <a:ln/>
-        </p:spPr>
-        <p:txBody>
-          <a:bodyPr wrap="square" lIns="0" tIns="0" rIns="0" bIns="0" rtlCol="0" anchor="ctr"/>
-          <a:lstStyle/>
-          <a:p>
-            <a:pPr marL="0" indent="0">
-              <a:buNone/>
-            </a:pPr>
-            <a:r>
-              <a:rPr lang="en-US" sz="2100" b="1" dirty="0">
-                <a:solidFill>
-                  <a:srgbClr val="222222"/>
-                </a:solidFill>
-                <a:latin typeface="Meiryo" pitchFamily="34" charset="0"/>
-                <a:ea typeface="Meiryo" pitchFamily="34" charset="-122"/>
-                <a:cs typeface="Meiryo" pitchFamily="34" charset="-120"/>
-              </a:rPr>
-              <a:t>⑩ 鴇嶺の家</a:t>
-            </a:r>
-            <a:endParaRPr lang="en-US" sz="2100" dirty="0"/>
-          </a:p>
-        </p:txBody>
-      </p:sp>
-      <p:sp>
-        <p:nvSpPr>
-          <p:cNvPr id="6" name="Shape 4"/>
-          <p:cNvSpPr/>
-          <p:nvPr/>
-        </p:nvSpPr>
-        <p:spPr>
-          <a:xfrm>
-            <a:off x="10104120" y="1170432"/>
-            <a:ext cx="1600200" cy="457200"/>
-          </a:xfrm>
-          <a:prstGeom prst="rect">
-            <a:avLst/>
-          </a:prstGeom>
-          <a:solidFill>
-            <a:srgbClr val="FFFFFF"/>
-          </a:solidFill>
-          <a:ln w="15875">
-            <a:solidFill>
-              <a:srgbClr val="1B3A6B"/>
-            </a:solidFill>
-            <a:prstDash val="solid"/>
-          </a:ln>
-        </p:spPr>
-      </p:sp>
-      <p:sp>
-        <p:nvSpPr>
-          <p:cNvPr id="7" name="Text 5"/>
-          <p:cNvSpPr/>
-          <p:nvPr/>
-        </p:nvSpPr>
-        <p:spPr>
-          <a:xfrm>
-            <a:off x="10104120" y="1170432"/>
-            <a:ext cx="1600200" cy="457200"/>
-          </a:xfrm>
-          <a:prstGeom prst="rect">
-            <a:avLst/>
-          </a:prstGeom>
-          <a:noFill/>
-          <a:ln/>
-        </p:spPr>
-        <p:txBody>
-          <a:bodyPr wrap="square" lIns="0" tIns="0" rIns="0" bIns="0" rtlCol="0" anchor="ctr"/>
-          <a:lstStyle/>
-          <a:p>
-            <a:pPr marL="0" indent="0" algn="ctr">
-              <a:buNone/>
-            </a:pPr>
-            <a:r>
-              <a:rPr lang="en-US" sz="1400" b="1" dirty="0">
-                <a:solidFill>
-                  <a:srgbClr val="1B3A6B"/>
-                </a:solidFill>
-                <a:latin typeface="Meiryo" pitchFamily="34" charset="0"/>
-                <a:ea typeface="Meiryo" pitchFamily="34" charset="-122"/>
-                <a:cs typeface="Meiryo" pitchFamily="34" charset="-120"/>
-              </a:rPr>
-              <a:t>東金市</a:t>
-            </a:r>
-            <a:endParaRPr lang="en-US" sz="1400" dirty="0"/>
-          </a:p>
-        </p:txBody>
-      </p:sp>
-      <p:sp>
-        <p:nvSpPr>
-          <p:cNvPr id="8" name="Text 6"/>
-          <p:cNvSpPr/>
-          <p:nvPr/>
-        </p:nvSpPr>
-        <p:spPr>
-          <a:xfrm>
-            <a:off x="502920" y="6510528"/>
-            <a:ext cx="7315200" cy="274320"/>
-          </a:xfrm>
-          <a:prstGeom prst="rect">
-            <a:avLst/>
-          </a:prstGeom>
-          <a:noFill/>
-          <a:ln/>
-        </p:spPr>
-        <p:txBody>
-          <a:bodyPr wrap="square" lIns="0" tIns="0" rIns="0" bIns="0" rtlCol="0" anchor="ctr"/>
-          <a:lstStyle/>
-          <a:p>
-            <a:pPr marL="0" indent="0">
-              <a:buNone/>
-            </a:pPr>
-            <a:r>
-              <a:rPr lang="en-US" sz="850" dirty="0">
-                <a:solidFill>
-                  <a:srgbClr val="666666"/>
-                </a:solidFill>
-                <a:latin typeface="Meiryo" pitchFamily="34" charset="0"/>
-                <a:ea typeface="Meiryo" pitchFamily="34" charset="-122"/>
-                <a:cs typeface="Meiryo" pitchFamily="34" charset="-120"/>
-              </a:rPr>
-              <a:t>Copyright Funai Soken Group. All rights reserved.</a:t>
-            </a:r>
-            <a:endParaRPr lang="en-US" sz="850" dirty="0"/>
-          </a:p>
-        </p:txBody>
-      </p:sp>
-      <p:sp>
-        <p:nvSpPr>
-          <p:cNvPr id="9" name="Shape 7"/>
-          <p:cNvSpPr/>
-          <p:nvPr/>
-        </p:nvSpPr>
-        <p:spPr>
-          <a:xfrm>
-            <a:off x="502920" y="1783080"/>
-            <a:ext cx="6903720" cy="3474720"/>
-          </a:xfrm>
-          <a:prstGeom prst="rect">
-            <a:avLst/>
-          </a:prstGeom>
-          <a:solidFill>
-            <a:srgbClr val="FFFFFF"/>
-          </a:solidFill>
-          <a:ln w="12700">
-            <a:solidFill>
-              <a:srgbClr val="9AA7B8"/>
-            </a:solidFill>
-            <a:prstDash val="solid"/>
-          </a:ln>
-          <a:effectLst>
-            <a:outerShdw blurRad="63500" dist="25400" dir="8100000" algn="bl" rotWithShape="0">
-              <a:srgbClr val="000000">
-                <a:alpha val="12000"/>
-              </a:srgbClr>
-            </a:outerShdw>
-          </a:effectLst>
-        </p:spPr>
-      </p:sp>
-      <p:sp>
-        <p:nvSpPr>
-          <p:cNvPr id="10" name="Text 8"/>
-          <p:cNvSpPr/>
-          <p:nvPr/>
-        </p:nvSpPr>
-        <p:spPr>
-          <a:xfrm>
-            <a:off x="704088" y="1911096"/>
-            <a:ext cx="6501384" cy="384048"/>
-          </a:xfrm>
-          <a:prstGeom prst="rect">
-            <a:avLst/>
-          </a:prstGeom>
-          <a:noFill/>
-          <a:ln/>
-        </p:spPr>
-        <p:txBody>
-          <a:bodyPr wrap="square" lIns="0" tIns="0" rIns="0" bIns="0" rtlCol="0" anchor="ctr"/>
-          <a:lstStyle/>
-          <a:p>
-            <a:pPr marL="0" indent="0">
-              <a:buNone/>
-            </a:pPr>
-            <a:r>
-              <a:rPr lang="en-US" sz="1400" b="1" dirty="0">
-                <a:solidFill>
-                  <a:srgbClr val="1B3A6B"/>
-                </a:solidFill>
-                <a:latin typeface="Meiryo" pitchFamily="34" charset="0"/>
-                <a:ea typeface="Meiryo" pitchFamily="34" charset="-122"/>
-                <a:cs typeface="Meiryo" pitchFamily="34" charset="-120"/>
-              </a:rPr>
-              <a:t>鴇嶺の家（児童発達支援・放課後等デイサービス）</a:t>
-            </a:r>
-            <a:endParaRPr lang="en-US" sz="1400" dirty="0"/>
-          </a:p>
-        </p:txBody>
-      </p:sp>
-      <p:sp>
-        <p:nvSpPr>
-          <p:cNvPr id="11" name="Text 9"/>
-          <p:cNvSpPr/>
-          <p:nvPr/>
-        </p:nvSpPr>
-        <p:spPr>
-          <a:xfrm>
-            <a:off x="704088" y="2331720"/>
-            <a:ext cx="6501384" cy="2852927"/>
-          </a:xfrm>
-          <a:prstGeom prst="rect">
-            <a:avLst/>
-          </a:prstGeom>
-          <a:noFill/>
-          <a:ln/>
-        </p:spPr>
-        <p:txBody>
-          <a:bodyPr wrap="square" lIns="0" tIns="0" rIns="0" bIns="0" rtlCol="0" anchor="t"/>
-          <a:lstStyle/>
-          <a:p>
-            <a:pPr marL="0" indent="0">
-              <a:lnSpc>
-                <a:spcPct val="103000"/>
-              </a:lnSpc>
-              <a:buNone/>
-            </a:pPr>
-            <a:r>
-              <a:rPr lang="en-US" sz="1100" b="1" dirty="0">
-                <a:solidFill>
-                  <a:srgbClr val="2E6BB8"/>
-                </a:solidFill>
-                <a:latin typeface="Meiryo" pitchFamily="34" charset="0"/>
-                <a:ea typeface="Meiryo" pitchFamily="34" charset="-122"/>
-                <a:cs typeface="Meiryo" pitchFamily="34" charset="-120"/>
-              </a:rPr>
-              <a:t>▶</a:t>
-            </a:r>
-            <a:r>
-              <a:rPr lang="en-US" sz="1100" b="1" dirty="0">
-                <a:solidFill>
-                  <a:srgbClr val="222222"/>
-                </a:solidFill>
-                <a:latin typeface="Meiryo" pitchFamily="34" charset="0"/>
-                <a:ea typeface="Meiryo" pitchFamily="34" charset="-122"/>
-                <a:cs typeface="Meiryo" pitchFamily="34" charset="-120"/>
-              </a:rPr>
-              <a:t>対象：</a:t>
-            </a:r>
-            <a:r>
-              <a:rPr lang="en-US" sz="1100" dirty="0">
-                <a:solidFill>
-                  <a:srgbClr val="222222"/>
-                </a:solidFill>
-                <a:latin typeface="Meiryo" pitchFamily="34" charset="0"/>
-                <a:ea typeface="Meiryo" pitchFamily="34" charset="-122"/>
-                <a:cs typeface="Meiryo" pitchFamily="34" charset="-120"/>
-              </a:rPr>
-              <a:t>未就学児（児童発達支援）〜就学児（放課後等デイサービス）</a:t>
-            </a:r>
-            <a:endParaRPr lang="en-US" sz="1050" dirty="0"/>
-          </a:p>
-          <a:p>
-            <a:pPr marL="0" indent="0">
-              <a:lnSpc>
-                <a:spcPct val="103000"/>
-              </a:lnSpc>
-              <a:buNone/>
-            </a:pPr>
-            <a:r>
-              <a:rPr lang="en-US" sz="1100" b="1" dirty="0">
-                <a:solidFill>
-                  <a:srgbClr val="2E6BB8"/>
-                </a:solidFill>
-                <a:latin typeface="Meiryo" pitchFamily="34" charset="0"/>
-                <a:ea typeface="Meiryo" pitchFamily="34" charset="-122"/>
-                <a:cs typeface="Meiryo" pitchFamily="34" charset="-120"/>
-              </a:rPr>
-              <a:t>▶</a:t>
-            </a:r>
-            <a:r>
-              <a:rPr lang="en-US" sz="1100" b="1" dirty="0">
-                <a:solidFill>
-                  <a:srgbClr val="222222"/>
-                </a:solidFill>
-                <a:latin typeface="Meiryo" pitchFamily="34" charset="0"/>
-                <a:ea typeface="Meiryo" pitchFamily="34" charset="-122"/>
-                <a:cs typeface="Meiryo" pitchFamily="34" charset="-120"/>
-              </a:rPr>
-              <a:t>住所：</a:t>
-            </a:r>
-            <a:r>
-              <a:rPr lang="en-US" sz="1100" dirty="0">
-                <a:solidFill>
-                  <a:srgbClr val="222222"/>
-                </a:solidFill>
-                <a:latin typeface="Meiryo" pitchFamily="34" charset="0"/>
-                <a:ea typeface="Meiryo" pitchFamily="34" charset="-122"/>
-                <a:cs typeface="Meiryo" pitchFamily="34" charset="-120"/>
-              </a:rPr>
-              <a:t>千葉県東金市東金425-2</a:t>
-            </a:r>
-            <a:endParaRPr lang="en-US" sz="1050" dirty="0"/>
-          </a:p>
-          <a:p>
-            <a:pPr marL="0" indent="0">
-              <a:lnSpc>
-                <a:spcPct val="103000"/>
-              </a:lnSpc>
-              <a:buNone/>
-            </a:pPr>
-            <a:r>
-              <a:rPr lang="en-US" sz="1100" b="1" dirty="0">
-                <a:solidFill>
-                  <a:srgbClr val="2E6BB8"/>
-                </a:solidFill>
-                <a:latin typeface="Meiryo" pitchFamily="34" charset="0"/>
-                <a:ea typeface="Meiryo" pitchFamily="34" charset="-122"/>
-                <a:cs typeface="Meiryo" pitchFamily="34" charset="-120"/>
-              </a:rPr>
-              <a:t>▶</a:t>
-            </a:r>
-            <a:r>
-              <a:rPr lang="en-US" sz="1100" b="1" dirty="0">
-                <a:solidFill>
-                  <a:srgbClr val="222222"/>
-                </a:solidFill>
-                <a:latin typeface="Meiryo" pitchFamily="34" charset="0"/>
-                <a:ea typeface="Meiryo" pitchFamily="34" charset="-122"/>
-                <a:cs typeface="Meiryo" pitchFamily="34" charset="-120"/>
-              </a:rPr>
-              <a:t>TEL／HP：</a:t>
-            </a:r>
-            <a:r>
-              <a:rPr lang="en-US" sz="1100" dirty="0">
-                <a:solidFill>
-                  <a:srgbClr val="222222"/>
-                </a:solidFill>
-                <a:latin typeface="Meiryo" pitchFamily="34" charset="0"/>
-                <a:ea typeface="Meiryo" pitchFamily="34" charset="-122"/>
-                <a:cs typeface="Meiryo" pitchFamily="34" charset="-120"/>
-              </a:rPr>
-              <a:t>要確認（公開情報では下4桁「0285」までの記載にとどまる）／公開HPなし</a:t>
-            </a:r>
-            <a:endParaRPr lang="en-US" sz="1050" dirty="0"/>
-          </a:p>
-          <a:p>
-            <a:pPr marL="0" indent="0">
-              <a:lnSpc>
-                <a:spcPct val="103000"/>
-              </a:lnSpc>
-              <a:buNone/>
-            </a:pPr>
-            <a:r>
-              <a:rPr lang="en-US" sz="1100" b="1" dirty="0">
-                <a:solidFill>
-                  <a:srgbClr val="2E6BB8"/>
-                </a:solidFill>
-                <a:latin typeface="Meiryo" pitchFamily="34" charset="0"/>
-                <a:ea typeface="Meiryo" pitchFamily="34" charset="-122"/>
-                <a:cs typeface="Meiryo" pitchFamily="34" charset="-120"/>
-              </a:rPr>
-              <a:t>▶</a:t>
-            </a:r>
-            <a:r>
-              <a:rPr lang="en-US" sz="1100" b="1" dirty="0">
-                <a:solidFill>
-                  <a:srgbClr val="222222"/>
-                </a:solidFill>
-                <a:latin typeface="Meiryo" pitchFamily="34" charset="0"/>
-                <a:ea typeface="Meiryo" pitchFamily="34" charset="-122"/>
-                <a:cs typeface="Meiryo" pitchFamily="34" charset="-120"/>
-              </a:rPr>
-              <a:t>サービス提供時間：</a:t>
-            </a:r>
-            <a:r>
-              <a:rPr lang="en-US" sz="1100" dirty="0">
-                <a:solidFill>
-                  <a:srgbClr val="222222"/>
-                </a:solidFill>
-                <a:latin typeface="Meiryo" pitchFamily="34" charset="0"/>
-                <a:ea typeface="Meiryo" pitchFamily="34" charset="-122"/>
-                <a:cs typeface="Meiryo" pitchFamily="34" charset="-120"/>
-              </a:rPr>
-              <a:t>要確認</a:t>
-            </a:r>
-            <a:endParaRPr lang="en-US" sz="1050" dirty="0"/>
-          </a:p>
-          <a:p>
-            <a:pPr marL="0" indent="0">
-              <a:lnSpc>
-                <a:spcPct val="103000"/>
-              </a:lnSpc>
-              <a:buNone/>
-            </a:pPr>
-            <a:r>
-              <a:rPr lang="en-US" sz="1100" b="1" dirty="0">
-                <a:solidFill>
-                  <a:srgbClr val="2E6BB8"/>
-                </a:solidFill>
-                <a:latin typeface="Meiryo" pitchFamily="34" charset="0"/>
-                <a:ea typeface="Meiryo" pitchFamily="34" charset="-122"/>
-                <a:cs typeface="Meiryo" pitchFamily="34" charset="-120"/>
-              </a:rPr>
-              <a:t>▶</a:t>
-            </a:r>
-            <a:r>
-              <a:rPr lang="en-US" sz="1100" b="1" dirty="0">
-                <a:solidFill>
-                  <a:srgbClr val="222222"/>
-                </a:solidFill>
-                <a:latin typeface="Meiryo" pitchFamily="34" charset="0"/>
-                <a:ea typeface="Meiryo" pitchFamily="34" charset="-122"/>
-                <a:cs typeface="Meiryo" pitchFamily="34" charset="-120"/>
-              </a:rPr>
-              <a:t>定員：</a:t>
-            </a:r>
-            <a:r>
-              <a:rPr lang="en-US" sz="1100" dirty="0">
-                <a:solidFill>
-                  <a:srgbClr val="222222"/>
-                </a:solidFill>
-                <a:latin typeface="Meiryo" pitchFamily="34" charset="0"/>
-                <a:ea typeface="Meiryo" pitchFamily="34" charset="-122"/>
-                <a:cs typeface="Meiryo" pitchFamily="34" charset="-120"/>
-              </a:rPr>
-              <a:t>要確認</a:t>
-            </a:r>
-            <a:endParaRPr lang="en-US" sz="1050" dirty="0"/>
-          </a:p>
-          <a:p>
-            <a:pPr marL="0" indent="0">
-              <a:lnSpc>
-                <a:spcPct val="103000"/>
-              </a:lnSpc>
-              <a:spcAft>
-                <a:spcPts val="500"/>
-              </a:spcAft>
-              <a:buNone/>
-            </a:pPr>
-            <a:endParaRPr lang="en-US" sz="1050" dirty="0"/>
-          </a:p>
-          <a:p>
-            <a:pPr marL="0" indent="0">
-              <a:lnSpc>
-                <a:spcPct val="103000"/>
-              </a:lnSpc>
-              <a:buNone/>
-            </a:pPr>
-            <a:r>
-              <a:rPr lang="en-US" sz="1100" b="1" dirty="0">
-                <a:solidFill>
-                  <a:srgbClr val="2E6BB8"/>
-                </a:solidFill>
-                <a:latin typeface="Meiryo" pitchFamily="34" charset="0"/>
-                <a:ea typeface="Meiryo" pitchFamily="34" charset="-122"/>
-                <a:cs typeface="Meiryo" pitchFamily="34" charset="-120"/>
-              </a:rPr>
-              <a:t>▶</a:t>
-            </a:r>
-            <a:r>
-              <a:rPr lang="en-US" sz="1100" b="1" dirty="0">
-                <a:solidFill>
-                  <a:srgbClr val="222222"/>
-                </a:solidFill>
-                <a:latin typeface="Meiryo" pitchFamily="34" charset="0"/>
-                <a:ea typeface="Meiryo" pitchFamily="34" charset="-122"/>
-                <a:cs typeface="Meiryo" pitchFamily="34" charset="-120"/>
-              </a:rPr>
-              <a:t>療育プログラムの特徴：</a:t>
-            </a:r>
-            <a:r>
-              <a:rPr lang="en-US" sz="1100" dirty="0">
-                <a:solidFill>
-                  <a:srgbClr val="222222"/>
-                </a:solidFill>
-                <a:latin typeface="Meiryo" pitchFamily="34" charset="0"/>
-                <a:ea typeface="Meiryo" pitchFamily="34" charset="-122"/>
-                <a:cs typeface="Meiryo" pitchFamily="34" charset="-120"/>
-              </a:rPr>
-              <a:t>児童発達支援と放課後等デイサービスを併設。プログラム内容は公開情報からは確認できず要確認。</a:t>
-            </a:r>
-            <a:endParaRPr lang="en-US" sz="1050" dirty="0"/>
-          </a:p>
-          <a:p>
-            <a:pPr marL="0" indent="0">
-              <a:lnSpc>
-                <a:spcPct val="103000"/>
-              </a:lnSpc>
-              <a:spcAft>
-                <a:spcPts val="500"/>
-              </a:spcAft>
-              <a:buNone/>
-            </a:pPr>
-            <a:r>
-              <a:rPr lang="en-US" sz="1100" dirty="0">
-                <a:solidFill>
-                  <a:srgbClr val="222222"/>
-                </a:solidFill>
-                <a:latin typeface="Meiryo" pitchFamily="34" charset="0"/>
-                <a:ea typeface="Meiryo" pitchFamily="34" charset="-122"/>
-                <a:cs typeface="Meiryo" pitchFamily="34" charset="-120"/>
-              </a:rPr>
-              <a:t>・東金地区（旧市街・鴇嶺小学校区）に立地し、学校からの通所導線が近い。</a:t>
-            </a:r>
-            <a:endParaRPr lang="en-US" sz="1050" dirty="0"/>
-          </a:p>
-          <a:p>
-            <a:pPr marL="0" indent="0">
-              <a:lnSpc>
-                <a:spcPct val="103000"/>
-              </a:lnSpc>
-              <a:spcAft>
-                <a:spcPts val="500"/>
-              </a:spcAft>
-              <a:buNone/>
-            </a:pPr>
-            <a:r>
-              <a:rPr lang="en-US" sz="1100" dirty="0">
-                <a:solidFill>
-                  <a:srgbClr val="222222"/>
-                </a:solidFill>
-                <a:latin typeface="Meiryo" pitchFamily="34" charset="0"/>
-                <a:ea typeface="Meiryo" pitchFamily="34" charset="-122"/>
-                <a:cs typeface="Meiryo" pitchFamily="34" charset="-120"/>
-              </a:rPr>
-              <a:t>・同一町域の東金723にスターワーク東金（放デイ）があり、東金駅東口エリアに事業所が集積。</a:t>
-            </a:r>
-            <a:endParaRPr lang="en-US" sz="1050" dirty="0"/>
-          </a:p>
-        </p:txBody>
-      </p:sp>
-      <p:sp>
-        <p:nvSpPr>
-          <p:cNvPr id="14" name="Shape 12"/>
-          <p:cNvSpPr/>
-          <p:nvPr/>
-        </p:nvSpPr>
-        <p:spPr>
-          <a:xfrm>
-            <a:off x="7635240" y="1783080"/>
-            <a:ext cx="4069080" cy="3474720"/>
-          </a:xfrm>
-          <a:prstGeom prst="rect">
-            <a:avLst/>
-          </a:prstGeom>
-          <a:solidFill>
-            <a:srgbClr val="EEF2F8"/>
-          </a:solidFill>
-          <a:ln w="12700">
-            <a:solidFill>
-              <a:srgbClr val="9AA7B8"/>
-            </a:solidFill>
-            <a:prstDash val="solid"/>
-          </a:ln>
-        </p:spPr>
-      </p:sp>
-      <p:sp>
-        <p:nvSpPr>
-          <p:cNvPr id="15" name="Text 13"/>
-          <p:cNvSpPr/>
-          <p:nvPr/>
-        </p:nvSpPr>
-        <p:spPr>
-          <a:xfrm>
-            <a:off x="7818120" y="1901952"/>
-            <a:ext cx="3703320" cy="320040"/>
-          </a:xfrm>
-          <a:prstGeom prst="rect">
-            <a:avLst/>
-          </a:prstGeom>
-          <a:noFill/>
-          <a:ln/>
-        </p:spPr>
-        <p:txBody>
-          <a:bodyPr wrap="square" lIns="0" tIns="0" rIns="0" bIns="0" rtlCol="0" anchor="ctr"/>
-          <a:lstStyle/>
-          <a:p>
-            <a:pPr marL="0" indent="0">
-              <a:buNone/>
-            </a:pPr>
-            <a:r>
-              <a:rPr lang="en-US" sz="1250" b="1" dirty="0">
-                <a:solidFill>
-                  <a:srgbClr val="1B3A6B"/>
-                </a:solidFill>
-                <a:latin typeface="Meiryo" pitchFamily="34" charset="0"/>
-                <a:ea typeface="Meiryo" pitchFamily="34" charset="-122"/>
-                <a:cs typeface="Meiryo" pitchFamily="34" charset="-120"/>
-              </a:rPr>
-              <a:t>注目ポイント</a:t>
-            </a:r>
-            <a:endParaRPr lang="en-US" sz="1250" dirty="0"/>
-          </a:p>
-        </p:txBody>
-      </p:sp>
-      <p:sp>
-        <p:nvSpPr>
-          <p:cNvPr id="16" name="Text 14"/>
-          <p:cNvSpPr/>
-          <p:nvPr/>
-        </p:nvSpPr>
-        <p:spPr>
-          <a:xfrm>
-            <a:off x="7818120" y="2286000"/>
-            <a:ext cx="3703320" cy="2907791"/>
-          </a:xfrm>
-          <a:prstGeom prst="rect">
-            <a:avLst/>
-          </a:prstGeom>
-          <a:noFill/>
-          <a:ln/>
-        </p:spPr>
-        <p:txBody>
-          <a:bodyPr wrap="square" lIns="0" tIns="0" rIns="0" bIns="0" rtlCol="0" anchor="t"/>
-          <a:lstStyle/>
-          <a:p>
-            <a:pPr marL="342900" indent="-342900">
-              <a:spcAft>
-                <a:spcPts val="700"/>
-              </a:spcAft>
-              <a:buSzPct val="100000"/>
-              <a:buChar char="•"/>
-            </a:pPr>
-            <a:r>
-              <a:rPr lang="en-US" sz="1050" dirty="0">
-                <a:solidFill>
-                  <a:srgbClr val="222222"/>
-                </a:solidFill>
-                <a:latin typeface="メイリオ" panose="020B0604030504040204" pitchFamily="50" charset="-128"/>
-                <a:ea typeface="メイリオ" panose="020B0604030504040204" pitchFamily="50" charset="-128"/>
-                <a:cs typeface="Meiryo" pitchFamily="34" charset="-120"/>
-              </a:rPr>
-              <a:t>鴇嶺小学校区の中心部に位置し、学区内からの徒歩・短距離送迎に適した立地。</a:t>
-            </a:r>
-            <a:endParaRPr lang="en-US" sz="1000" dirty="0">
-              <a:latin typeface="メイリオ" panose="020B0604030504040204" pitchFamily="50" charset="-128"/>
-              <a:ea typeface="メイリオ" panose="020B0604030504040204" pitchFamily="50" charset="-128"/>
-            </a:endParaRPr>
-          </a:p>
-          <a:p>
-            <a:pPr marL="342900" indent="-342900">
-              <a:spcAft>
-                <a:spcPts val="700"/>
-              </a:spcAft>
-              <a:buSzPct val="100000"/>
-              <a:buChar char="•"/>
-            </a:pPr>
-            <a:r>
-              <a:rPr lang="en-US" sz="1050" dirty="0">
-                <a:solidFill>
-                  <a:srgbClr val="222222"/>
-                </a:solidFill>
-                <a:latin typeface="メイリオ" panose="020B0604030504040204" pitchFamily="50" charset="-128"/>
-                <a:ea typeface="メイリオ" panose="020B0604030504040204" pitchFamily="50" charset="-128"/>
-                <a:cs typeface="Meiryo" pitchFamily="34" charset="-120"/>
-              </a:rPr>
-              <a:t>東金駅東口エリアの事業所集積地にあり、競合との距離が近い。</a:t>
-            </a:r>
-            <a:endParaRPr lang="en-US" sz="1000" dirty="0">
-              <a:latin typeface="メイリオ" panose="020B0604030504040204" pitchFamily="50" charset="-128"/>
-              <a:ea typeface="メイリオ" panose="020B0604030504040204" pitchFamily="50" charset="-128"/>
-            </a:endParaRPr>
-          </a:p>
-          <a:p>
-            <a:pPr marL="342900" indent="-342900">
-              <a:spcAft>
-                <a:spcPts val="700"/>
-              </a:spcAft>
-              <a:buSzPct val="100000"/>
-              <a:buChar char="•"/>
-            </a:pPr>
-            <a:r>
-              <a:rPr lang="en-US" sz="1050" dirty="0">
-                <a:solidFill>
-                  <a:srgbClr val="222222"/>
-                </a:solidFill>
-                <a:latin typeface="メイリオ" panose="020B0604030504040204" pitchFamily="50" charset="-128"/>
-                <a:ea typeface="メイリオ" panose="020B0604030504040204" pitchFamily="50" charset="-128"/>
-                <a:cs typeface="Meiryo" pitchFamily="34" charset="-120"/>
-              </a:rPr>
-              <a:t>情報発信が乏しく、実態把握は市社会福祉課・相談支援事業所経由での確認が現実的。</a:t>
-            </a:r>
-            <a:endParaRPr lang="en-US" sz="1000" dirty="0">
-              <a:latin typeface="メイリオ" panose="020B0604030504040204" pitchFamily="50" charset="-128"/>
-              <a:ea typeface="メイリオ" panose="020B0604030504040204" pitchFamily="50" charset="-128"/>
-            </a:endParaRPr>
-          </a:p>
-          <a:p>
-            <a:pPr marL="342900" indent="-342900">
-              <a:spcAft>
-                <a:spcPts val="700"/>
-              </a:spcAft>
-              <a:buSzPct val="100000"/>
-              <a:buChar char="•"/>
-            </a:pPr>
-            <a:r>
-              <a:rPr lang="en-US" sz="1050" dirty="0">
-                <a:solidFill>
-                  <a:srgbClr val="222222"/>
-                </a:solidFill>
-                <a:latin typeface="メイリオ" panose="020B0604030504040204" pitchFamily="50" charset="-128"/>
-                <a:ea typeface="メイリオ" panose="020B0604030504040204" pitchFamily="50" charset="-128"/>
-                <a:cs typeface="Meiryo" pitchFamily="34" charset="-120"/>
-              </a:rPr>
-              <a:t>東金駅東口は事業所集積地。新規参入するなら駅前以外の空白地を狙うのが現実的。</a:t>
-            </a:r>
-            <a:endParaRPr lang="en-US" sz="1000" dirty="0">
-              <a:latin typeface="メイリオ" panose="020B0604030504040204" pitchFamily="50" charset="-128"/>
-              <a:ea typeface="メイリオ" panose="020B0604030504040204" pitchFamily="50" charset="-128"/>
-            </a:endParaRPr>
-          </a:p>
-        </p:txBody>
-      </p:sp>
-      <p:sp>
-        <p:nvSpPr>
-          <p:cNvPr id="940" name="FootBG"/>
-          <p:cNvSpPr/>
-          <p:nvPr/>
-        </p:nvSpPr>
-        <p:spPr>
-          <a:xfrm>
-            <a:off x="502920" y="5394960"/>
-            <a:ext cx="11201400" cy="896112"/>
-          </a:xfrm>
-          <a:prstGeom prst="rect">
-            <a:avLst/>
-          </a:prstGeom>
-          <a:solidFill>
-            <a:srgbClr val="EEF2F8"/>
-          </a:solidFill>
-          <a:ln w="12700">
-            <a:solidFill>
-              <a:srgbClr val="9AA7B8"/>
-            </a:solidFill>
-            <a:prstDash val="solid"/>
-          </a:ln>
-        </p:spPr>
-      </p:sp>
-      <p:sp>
-        <p:nvSpPr>
-          <p:cNvPr id="941" name="FootTitle"/>
-          <p:cNvSpPr/>
-          <p:nvPr/>
-        </p:nvSpPr>
-        <p:spPr>
-          <a:xfrm>
-            <a:off x="713232" y="5477256"/>
-            <a:ext cx="10789920" cy="274320"/>
-          </a:xfrm>
-          <a:prstGeom prst="rect">
-            <a:avLst/>
-          </a:prstGeom>
-          <a:noFill/>
-          <a:ln/>
-        </p:spPr>
-        <p:txBody>
-          <a:bodyPr wrap="square" lIns="0" tIns="0" rIns="0" bIns="0" rtlCol="0" anchor="ctr"/>
-          <a:lstStyle/>
-          <a:p>
-            <a:pPr marL="0" indent="0">
-              <a:buNone/>
-            </a:pPr>
-            <a:r>
-              <a:rPr lang="en-US" sz="1250" b="1" dirty="0">
-                <a:solidFill>
-                  <a:srgbClr val="1B3A6B"/>
-                </a:solidFill>
-                <a:latin typeface="Meiryo" pitchFamily="34" charset="0"/>
-                <a:ea typeface="Meiryo" pitchFamily="34" charset="-122"/>
-                <a:cs typeface="Meiryo" pitchFamily="34" charset="-120"/>
-              </a:rPr>
-              <a:t>出典 ／ 要確認事項</a:t>
-            </a:r>
-            <a:endParaRPr lang="en-US" sz="1250" dirty="0"/>
-          </a:p>
-        </p:txBody>
-      </p:sp>
-      <p:sp>
-        <p:nvSpPr>
-          <p:cNvPr id="13" name="FootBody"/>
-          <p:cNvSpPr/>
-          <p:nvPr/>
-        </p:nvSpPr>
-        <p:spPr>
-          <a:xfrm>
-            <a:off x="713232" y="5779008"/>
-            <a:ext cx="10789920" cy="475488"/>
-          </a:xfrm>
-          <a:prstGeom prst="rect">
-            <a:avLst/>
-          </a:prstGeom>
-          <a:noFill/>
-          <a:ln/>
-        </p:spPr>
-        <p:txBody>
-          <a:bodyPr wrap="square" lIns="0" tIns="0" rIns="0" bIns="0" rtlCol="0" anchor="t"/>
-          <a:lstStyle/>
-          <a:p>
-            <a:pPr marL="0" indent="0">
-              <a:lnSpc>
-                <a:spcPct val="103000"/>
-              </a:lnSpc>
-              <a:buNone/>
-            </a:pPr>
-            <a:r>
-              <a:rPr lang="en-US" sz="950" b="1" dirty="0">
-                <a:solidFill>
-                  <a:srgbClr val="2E6BB8"/>
-                </a:solidFill>
-                <a:latin typeface="Meiryo" pitchFamily="34" charset="0"/>
-                <a:ea typeface="Meiryo" pitchFamily="34" charset="-122"/>
-                <a:cs typeface="Meiryo" pitchFamily="34" charset="-120"/>
-              </a:rPr>
-              <a:t>▶</a:t>
-            </a:r>
-            <a:r>
-              <a:rPr lang="en-US" sz="950" b="1" dirty="0">
-                <a:solidFill>
-                  <a:srgbClr val="222222"/>
-                </a:solidFill>
-                <a:latin typeface="Meiryo" pitchFamily="34" charset="0"/>
-                <a:ea typeface="Meiryo" pitchFamily="34" charset="-122"/>
-                <a:cs typeface="Meiryo" pitchFamily="34" charset="-120"/>
-              </a:rPr>
-              <a:t>出典：</a:t>
-            </a:r>
-            <a:r>
-              <a:rPr lang="en-US" sz="950" dirty="0">
-                <a:solidFill>
-                  <a:srgbClr val="222222"/>
-                </a:solidFill>
-                <a:latin typeface="Meiryo" pitchFamily="34" charset="0"/>
-                <a:ea typeface="Meiryo" pitchFamily="34" charset="-122"/>
-                <a:cs typeface="Meiryo" pitchFamily="34" charset="-120"/>
-              </a:rPr>
-              <a:t>東金市公式サイト／LITALICO発達ナビ 東金市 児童発達支援事業所一覧</a:t>
-            </a:r>
-            <a:endParaRPr lang="en-US" sz="1050" dirty="0"/>
-          </a:p>
-          <a:p>
-            <a:pPr marL="0" indent="0">
-              <a:lnSpc>
-                <a:spcPct val="103000"/>
-              </a:lnSpc>
-              <a:buNone/>
-            </a:pPr>
-            <a:r>
-              <a:rPr lang="en-US" sz="950" b="1" dirty="0">
-                <a:solidFill>
-                  <a:srgbClr val="2E6BB8"/>
-                </a:solidFill>
-                <a:latin typeface="Meiryo" pitchFamily="34" charset="0"/>
-                <a:ea typeface="Meiryo" pitchFamily="34" charset="-122"/>
-                <a:cs typeface="Meiryo" pitchFamily="34" charset="-120"/>
-              </a:rPr>
-              <a:t>▶</a:t>
-            </a:r>
-            <a:r>
-              <a:rPr lang="en-US" sz="950" b="1" dirty="0">
-                <a:solidFill>
-                  <a:srgbClr val="222222"/>
-                </a:solidFill>
-                <a:latin typeface="Meiryo" pitchFamily="34" charset="0"/>
-                <a:ea typeface="Meiryo" pitchFamily="34" charset="-122"/>
-                <a:cs typeface="Meiryo" pitchFamily="34" charset="-120"/>
-              </a:rPr>
-              <a:t>要確認事項：</a:t>
-            </a:r>
-            <a:r>
-              <a:rPr lang="en-US" sz="950" dirty="0">
-                <a:solidFill>
-                  <a:srgbClr val="222222"/>
-                </a:solidFill>
-                <a:latin typeface="Meiryo" pitchFamily="34" charset="0"/>
-                <a:ea typeface="Meiryo" pitchFamily="34" charset="-122"/>
-                <a:cs typeface="Meiryo" pitchFamily="34" charset="-120"/>
-              </a:rPr>
-              <a:t>運営法人、正確な電話番号、定員、提供時間、プログラム内容　※公開情報がほぼ無い</a:t>
-            </a:r>
-            <a:endParaRPr lang="en-US" sz="1050" dirty="0"/>
-          </a:p>
-        </p:txBody>
-      </p:sp>
-    </p:spTree>
-  </p:cSld>
-  <p:clrMapOvr>
-    <a:masterClrMapping/>
-  </p:clrMapOvr>
-</p:sld>
-</file>
-
-<file path=ppt/slides/slide14.xml><?xml version="1.0" encoding="utf-8"?>
 <p:sld xmlns:a="http://schemas.openxmlformats.org/drawingml/2006/main" xmlns:r="http://schemas.openxmlformats.org/officeDocument/2006/relationships" xmlns:p="http://schemas.openxmlformats.org/presentationml/2006/main">
   <p:cSld name="Slide 7">
     <p:bg>
@@ -7933,42 +6923,42 @@
             <a:tbl>
               <a:tblPr/>
               <a:tblGrid>
-                <a:gridCol w="566928">
+                <a:gridCol w="502920">
                   <a:extLst>
                     <a:ext uri="{9D8B030D-6E8A-4147-A177-3AD203B41FA5}">
                       <a16:colId xmlns:a16="http://schemas.microsoft.com/office/drawing/2014/main" val="20000"/>
                     </a:ext>
                   </a:extLst>
                 </a:gridCol>
-                <a:gridCol w="2697480">
+                <a:gridCol w="2606040">
                   <a:extLst>
                     <a:ext uri="{9D8B030D-6E8A-4147-A177-3AD203B41FA5}">
                       <a16:colId xmlns:a16="http://schemas.microsoft.com/office/drawing/2014/main" val="20001"/>
                     </a:ext>
                   </a:extLst>
                 </a:gridCol>
-                <a:gridCol w="2103120">
+                <a:gridCol w="2011680">
                   <a:extLst>
                     <a:ext uri="{9D8B030D-6E8A-4147-A177-3AD203B41FA5}">
                       <a16:colId xmlns:a16="http://schemas.microsoft.com/office/drawing/2014/main" val="20002"/>
                     </a:ext>
                   </a:extLst>
                 </a:gridCol>
-                <a:gridCol w="960120">
+                <a:gridCol w="2468880">
                   <a:extLst>
                     <a:ext uri="{9D8B030D-6E8A-4147-A177-3AD203B41FA5}">
                       <a16:colId xmlns:a16="http://schemas.microsoft.com/office/drawing/2014/main" val="20003"/>
                     </a:ext>
                   </a:extLst>
                 </a:gridCol>
-                <a:gridCol w="3063240">
+                <a:gridCol w="1325880">
                   <a:extLst>
                     <a:ext uri="{9D8B030D-6E8A-4147-A177-3AD203B41FA5}">
                       <a16:colId xmlns:a16="http://schemas.microsoft.com/office/drawing/2014/main" val="20004"/>
                     </a:ext>
                   </a:extLst>
                 </a:gridCol>
-                <a:gridCol w="1810512">
+                <a:gridCol w="2286000">
                   <a:extLst>
                     <a:ext uri="{9D8B030D-6E8A-4147-A177-3AD203B41FA5}">
                       <a16:colId xmlns:a16="http://schemas.microsoft.com/office/drawing/2014/main" val="20005"/>
@@ -8198,74 +7188,6 @@
                           <a:ea typeface="Meiryo" pitchFamily="34" charset="-122"/>
                           <a:cs typeface="Meiryo" pitchFamily="34" charset="-120"/>
                         </a:rPr>
-                        <a:t>併設</a:t>
-                      </a:r>
-                      <a:endParaRPr lang="en-US" sz="1100" dirty="0">
-                        <a:latin typeface="Meiryo" charset="0"/>
-                        <a:ea typeface="Meiryo" charset="0"/>
-                        <a:cs typeface="Meiryo" charset="0"/>
-                      </a:endParaRPr>
-                    </a:p>
-                  </a:txBody>
-                  <a:tcPr anchor="ctr" marT="18000" marB="18000" marL="64008" marR="45720">
-                    <a:lnL w="9525" cap="flat" cmpd="sng" algn="ctr">
-                      <a:solidFill>
-                        <a:srgbClr val="BFBFBF"/>
-                      </a:solidFill>
-                      <a:prstDash val="solid"/>
-                      <a:round/>
-                      <a:headEnd type="none" w="med" len="med"/>
-                      <a:tailEnd type="none" w="med" len="med"/>
-                    </a:lnL>
-                    <a:lnR w="9525" cap="flat" cmpd="sng" algn="ctr">
-                      <a:solidFill>
-                        <a:srgbClr val="BFBFBF"/>
-                      </a:solidFill>
-                      <a:prstDash val="solid"/>
-                      <a:round/>
-                      <a:headEnd type="none" w="med" len="med"/>
-                      <a:tailEnd type="none" w="med" len="med"/>
-                    </a:lnR>
-                    <a:lnT w="9525" cap="flat" cmpd="sng" algn="ctr">
-                      <a:solidFill>
-                        <a:srgbClr val="BFBFBF"/>
-                      </a:solidFill>
-                      <a:prstDash val="solid"/>
-                      <a:round/>
-                      <a:headEnd type="none" w="med" len="med"/>
-                      <a:tailEnd type="none" w="med" len="med"/>
-                    </a:lnT>
-                    <a:lnB w="9525" cap="flat" cmpd="sng" algn="ctr">
-                      <a:solidFill>
-                        <a:srgbClr val="BFBFBF"/>
-                      </a:solidFill>
-                      <a:prstDash val="solid"/>
-                      <a:round/>
-                      <a:headEnd type="none" w="med" len="med"/>
-                      <a:tailEnd type="none" w="med" len="med"/>
-                    </a:lnB>
-                    <a:solidFill>
-                      <a:srgbClr val="1B3A6B"/>
-                    </a:solidFill>
-                  </a:tcPr>
-                </a:tc>
-                <a:tc>
-                  <a:txBody>
-                    <a:bodyPr/>
-                    <a:lstStyle/>
-                    <a:p>
-                      <a:pPr marL="0" indent="0" algn="ctr">
-                        <a:buNone/>
-                      </a:pPr>
-                      <a:r>
-                        <a:rPr lang="en-US" sz="950" b="1" dirty="0">
-                          <a:solidFill>
-                            <a:srgbClr val="FFFFFF"/>
-                          </a:solidFill>
-                          <a:latin typeface="Meiryo" pitchFamily="34" charset="0"/>
-                          <a:ea typeface="Meiryo" pitchFamily="34" charset="-122"/>
-                          <a:cs typeface="Meiryo" pitchFamily="34" charset="-120"/>
-                        </a:rPr>
                         <a:t>所在地（東金市）</a:t>
                       </a:r>
                       <a:endParaRPr lang="en-US" sz="1100" dirty="0">
@@ -8335,6 +7257,74 @@
                           <a:cs typeface="Meiryo" pitchFamily="34" charset="-120"/>
                         </a:rPr>
                         <a:t>TEL</a:t>
+                      </a:r>
+                      <a:endParaRPr lang="en-US" sz="1100" dirty="0">
+                        <a:latin typeface="Meiryo" charset="0"/>
+                        <a:ea typeface="Meiryo" charset="0"/>
+                        <a:cs typeface="Meiryo" charset="0"/>
+                      </a:endParaRPr>
+                    </a:p>
+                  </a:txBody>
+                  <a:tcPr anchor="ctr" marT="18000" marB="18000" marL="64008" marR="45720">
+                    <a:lnL w="9525" cap="flat" cmpd="sng" algn="ctr">
+                      <a:solidFill>
+                        <a:srgbClr val="BFBFBF"/>
+                      </a:solidFill>
+                      <a:prstDash val="solid"/>
+                      <a:round/>
+                      <a:headEnd type="none" w="med" len="med"/>
+                      <a:tailEnd type="none" w="med" len="med"/>
+                    </a:lnL>
+                    <a:lnR w="9525" cap="flat" cmpd="sng" algn="ctr">
+                      <a:solidFill>
+                        <a:srgbClr val="BFBFBF"/>
+                      </a:solidFill>
+                      <a:prstDash val="solid"/>
+                      <a:round/>
+                      <a:headEnd type="none" w="med" len="med"/>
+                      <a:tailEnd type="none" w="med" len="med"/>
+                    </a:lnR>
+                    <a:lnT w="9525" cap="flat" cmpd="sng" algn="ctr">
+                      <a:solidFill>
+                        <a:srgbClr val="BFBFBF"/>
+                      </a:solidFill>
+                      <a:prstDash val="solid"/>
+                      <a:round/>
+                      <a:headEnd type="none" w="med" len="med"/>
+                      <a:tailEnd type="none" w="med" len="med"/>
+                    </a:lnT>
+                    <a:lnB w="9525" cap="flat" cmpd="sng" algn="ctr">
+                      <a:solidFill>
+                        <a:srgbClr val="BFBFBF"/>
+                      </a:solidFill>
+                      <a:prstDash val="solid"/>
+                      <a:round/>
+                      <a:headEnd type="none" w="med" len="med"/>
+                      <a:tailEnd type="none" w="med" len="med"/>
+                    </a:lnB>
+                    <a:solidFill>
+                      <a:srgbClr val="1B3A6B"/>
+                    </a:solidFill>
+                  </a:tcPr>
+                </a:tc>
+                <a:tc>
+                  <a:txBody>
+                    <a:bodyPr/>
+                    <a:lstStyle/>
+                    <a:p>
+                      <a:pPr marL="0" indent="0" algn="ctr">
+                        <a:buNone/>
+                      </a:pPr>
+                      <a:r>
+                        <a:rPr lang="en-US" sz="950" b="1" dirty="0">
+                          <a:solidFill>
+                            <a:srgbClr val="FFFFFF"/>
+                          </a:solidFill>
+                          <a:latin typeface="Meiryo" pitchFamily="34" charset="0"/>
+                          <a:ea typeface="Meiryo" pitchFamily="34" charset="-122"/>
+                          <a:cs typeface="Meiryo" pitchFamily="34" charset="-120"/>
+                        </a:rPr>
+                        <a:t>HP ／ 出典（リンク）</a:t>
                       </a:r>
                       <a:endParaRPr lang="en-US" sz="1100" dirty="0">
                         <a:latin typeface="Meiryo" charset="0"/>
@@ -8604,7 +7594,7 @@
                           <a:ea typeface="Meiryo" pitchFamily="34" charset="-122"/>
                           <a:cs typeface="Meiryo" pitchFamily="34" charset="-120"/>
                         </a:rPr>
-                        <a:t>児発＋放デイ</a:t>
+                        <a:t>田間3-9-1 ふれあいセンター2F</a:t>
                       </a:r>
                       <a:endParaRPr lang="en-US" sz="1100" dirty="0">
                         <a:latin typeface="Meiryo" charset="0"/>
@@ -8669,7 +7659,7 @@
                           <a:ea typeface="Meiryo" pitchFamily="34" charset="-122"/>
                           <a:cs typeface="Meiryo" pitchFamily="34" charset="-120"/>
                         </a:rPr>
-                        <a:t>田間3-9-1 ふれあいセンター2F</a:t>
+                        <a:t>0475-54-1197</a:t>
                       </a:r>
                       <a:endParaRPr lang="en-US" sz="1100" dirty="0">
                         <a:latin typeface="Meiryo" charset="0"/>
@@ -8726,12 +7716,16 @@
                         <a:buNone/>
                       </a:pPr>
                       <a:r>
-                        <a:rPr lang="en-US" sz="900" dirty="0">
+                        <a:rPr lang="en-US" sz="900" dirty="0" u="sng">
+                          <a:solidFill>
+                            <a:srgbClr val="1F5FA8"/>
+                          </a:solidFill>
                           <a:latin typeface="Meiryo" charset="0"/>
                           <a:ea typeface="Meiryo" charset="0"/>
                           <a:cs typeface="Meiryo" charset="0"/>
+                          <a:hlinkClick r:id="rId3"/>
                         </a:rPr>
-                        <a:t>0475-54-1197</a:t>
+                        <a:t>東金市公式サイト</a:t>
                       </a:r>
                     </a:p>
                   </a:txBody>
@@ -8993,7 +7987,7 @@
                           <a:ea typeface="Meiryo" pitchFamily="34" charset="-122"/>
                           <a:cs typeface="Meiryo" pitchFamily="34" charset="-120"/>
                         </a:rPr>
-                        <a:t>児発＋放デイ</a:t>
+                        <a:t>東上宿6-2</a:t>
                       </a:r>
                       <a:endParaRPr lang="en-US" sz="1100" dirty="0">
                         <a:latin typeface="Meiryo" charset="0"/>
@@ -9058,7 +8052,7 @@
                           <a:ea typeface="Meiryo" pitchFamily="34" charset="-122"/>
                           <a:cs typeface="Meiryo" pitchFamily="34" charset="-120"/>
                         </a:rPr>
-                        <a:t>東上宿6-2</a:t>
+                        <a:t>0475-50-1081</a:t>
                       </a:r>
                       <a:endParaRPr lang="en-US" sz="1100" dirty="0">
                         <a:latin typeface="Meiryo" charset="0"/>
@@ -9115,12 +8109,16 @@
                         <a:buNone/>
                       </a:pPr>
                       <a:r>
-                        <a:rPr lang="en-US" sz="900" dirty="0">
+                        <a:rPr lang="en-US" sz="900" dirty="0" u="sng">
+                          <a:solidFill>
+                            <a:srgbClr val="1F5FA8"/>
+                          </a:solidFill>
                           <a:latin typeface="Meiryo" charset="0"/>
                           <a:ea typeface="Meiryo" charset="0"/>
                           <a:cs typeface="Meiryo" charset="0"/>
+                          <a:hlinkClick r:id="rId4"/>
                         </a:rPr>
-                        <a:t>0475-50-1081</a:t>
+                        <a:t>WAM NET 事業所詳細</a:t>
                       </a:r>
                     </a:p>
                   </a:txBody>
@@ -9382,7 +8380,7 @@
                           <a:ea typeface="Meiryo" pitchFamily="34" charset="-122"/>
                           <a:cs typeface="Meiryo" pitchFamily="34" charset="-120"/>
                         </a:rPr>
-                        <a:t>児発＋放デイ</a:t>
+                        <a:t>東新宿18-1 酒造ビル105号</a:t>
                       </a:r>
                       <a:endParaRPr lang="en-US" sz="1100" dirty="0">
                         <a:latin typeface="Meiryo" charset="0"/>
@@ -9447,7 +8445,7 @@
                           <a:ea typeface="Meiryo" pitchFamily="34" charset="-122"/>
                           <a:cs typeface="Meiryo" pitchFamily="34" charset="-120"/>
                         </a:rPr>
-                        <a:t>東新宿18-1 酒造ビル105号</a:t>
+                        <a:t>0475-77-8577</a:t>
                       </a:r>
                       <a:endParaRPr lang="en-US" sz="1100" dirty="0">
                         <a:latin typeface="Meiryo" charset="0"/>
@@ -9504,12 +8502,16 @@
                         <a:buNone/>
                       </a:pPr>
                       <a:r>
-                        <a:rPr lang="en-US" sz="900" dirty="0">
+                        <a:rPr lang="en-US" sz="900" dirty="0" u="sng">
+                          <a:solidFill>
+                            <a:srgbClr val="1F5FA8"/>
+                          </a:solidFill>
                           <a:latin typeface="Meiryo" charset="0"/>
                           <a:ea typeface="Meiryo" charset="0"/>
                           <a:cs typeface="Meiryo" charset="0"/>
+                          <a:hlinkClick r:id="rId5"/>
                         </a:rPr>
-                        <a:t>0475-77-8577</a:t>
+                        <a:t>kp-tougane.com</a:t>
                       </a:r>
                     </a:p>
                   </a:txBody>
@@ -9771,7 +8773,7 @@
                           <a:ea typeface="Meiryo" pitchFamily="34" charset="-122"/>
                           <a:cs typeface="Meiryo" pitchFamily="34" charset="-120"/>
                         </a:rPr>
-                        <a:t>児発＋放デイ</a:t>
+                        <a:t>田間1-6-4</a:t>
                       </a:r>
                       <a:endParaRPr lang="en-US" sz="1100" dirty="0">
                         <a:latin typeface="Meiryo" charset="0"/>
@@ -9836,7 +8838,7 @@
                           <a:ea typeface="Meiryo" pitchFamily="34" charset="-122"/>
                           <a:cs typeface="Meiryo" pitchFamily="34" charset="-120"/>
                         </a:rPr>
-                        <a:t>田間1-6-4</a:t>
+                        <a:t>要確認</a:t>
                       </a:r>
                       <a:endParaRPr lang="en-US" sz="1100" dirty="0">
                         <a:latin typeface="Meiryo" charset="0"/>
@@ -9893,12 +8895,16 @@
                         <a:buNone/>
                       </a:pPr>
                       <a:r>
-                        <a:rPr lang="en-US" sz="900" dirty="0">
+                        <a:rPr lang="en-US" sz="900" dirty="0" u="sng">
+                          <a:solidFill>
+                            <a:srgbClr val="1F5FA8"/>
+                          </a:solidFill>
                           <a:latin typeface="Meiryo" charset="0"/>
                           <a:ea typeface="Meiryo" charset="0"/>
                           <a:cs typeface="Meiryo" charset="0"/>
+                          <a:hlinkClick r:id="rId6"/>
                         </a:rPr>
-                        <a:t>要確認</a:t>
+                        <a:t>kp-daini-tougane.com</a:t>
                       </a:r>
                     </a:p>
                   </a:txBody>
@@ -10160,7 +9166,7 @@
                           <a:ea typeface="Meiryo" pitchFamily="34" charset="-122"/>
                           <a:cs typeface="Meiryo" pitchFamily="34" charset="-120"/>
                         </a:rPr>
-                        <a:t>児発＋放デイ</a:t>
+                        <a:t>日吉台2-26-3</a:t>
                       </a:r>
                       <a:endParaRPr lang="en-US" sz="1100" dirty="0">
                         <a:latin typeface="Meiryo" charset="0"/>
@@ -10225,7 +9231,7 @@
                           <a:ea typeface="Meiryo" pitchFamily="34" charset="-122"/>
                           <a:cs typeface="Meiryo" pitchFamily="34" charset="-120"/>
                         </a:rPr>
-                        <a:t>日吉台2-26-3</a:t>
+                        <a:t>0475-52-6414</a:t>
                       </a:r>
                       <a:endParaRPr lang="en-US" sz="1100" dirty="0">
                         <a:latin typeface="Meiryo" charset="0"/>
@@ -10282,12 +9288,16 @@
                         <a:buNone/>
                       </a:pPr>
                       <a:r>
-                        <a:rPr lang="en-US" sz="900" dirty="0">
+                        <a:rPr lang="en-US" sz="900" dirty="0" u="sng">
+                          <a:solidFill>
+                            <a:srgbClr val="1F5FA8"/>
+                          </a:solidFill>
                           <a:latin typeface="Meiryo" charset="0"/>
                           <a:ea typeface="Meiryo" charset="0"/>
                           <a:cs typeface="Meiryo" charset="0"/>
+                          <a:hlinkClick r:id="rId7"/>
                         </a:rPr>
-                        <a:t>0475-52-6414</a:t>
+                        <a:t>kihonjuku-yuuyuu.com</a:t>
                       </a:r>
                     </a:p>
                   </a:txBody>
@@ -10549,7 +9559,7 @@
                           <a:ea typeface="Meiryo" pitchFamily="34" charset="-122"/>
                           <a:cs typeface="Meiryo" pitchFamily="34" charset="-120"/>
                         </a:rPr>
-                        <a:t>児発＋放デイ</a:t>
+                        <a:t>松之郷2423-1</a:t>
                       </a:r>
                       <a:endParaRPr lang="en-US" sz="1100" dirty="0">
                         <a:latin typeface="Meiryo" charset="0"/>
@@ -10614,7 +9624,7 @@
                           <a:ea typeface="Meiryo" pitchFamily="34" charset="-122"/>
                           <a:cs typeface="Meiryo" pitchFamily="34" charset="-120"/>
                         </a:rPr>
-                        <a:t>松之郷2423-1</a:t>
+                        <a:t>0475-51-4082</a:t>
                       </a:r>
                       <a:endParaRPr lang="en-US" sz="1100" dirty="0">
                         <a:latin typeface="Meiryo" charset="0"/>
@@ -10671,12 +9681,16 @@
                         <a:buNone/>
                       </a:pPr>
                       <a:r>
-                        <a:rPr lang="en-US" sz="900" dirty="0">
+                        <a:rPr lang="en-US" sz="900" dirty="0" u="sng">
+                          <a:solidFill>
+                            <a:srgbClr val="1F5FA8"/>
+                          </a:solidFill>
                           <a:latin typeface="Meiryo" charset="0"/>
                           <a:ea typeface="Meiryo" charset="0"/>
                           <a:cs typeface="Meiryo" charset="0"/>
+                          <a:hlinkClick r:id="rId7"/>
                         </a:rPr>
-                        <a:t>0475-51-4082</a:t>
+                        <a:t>kihonjuku-yuuyuu.com</a:t>
                       </a:r>
                     </a:p>
                   </a:txBody>
@@ -10938,7 +9952,7 @@
                           <a:ea typeface="Meiryo" pitchFamily="34" charset="-122"/>
                           <a:cs typeface="Meiryo" pitchFamily="34" charset="-120"/>
                         </a:rPr>
-                        <a:t>児発＋放デイ</a:t>
+                        <a:t>八坂台5-11-1</a:t>
                       </a:r>
                       <a:endParaRPr lang="en-US" sz="1100" dirty="0">
                         <a:latin typeface="Meiryo" charset="0"/>
@@ -11003,7 +10017,7 @@
                           <a:ea typeface="Meiryo" pitchFamily="34" charset="-122"/>
                           <a:cs typeface="Meiryo" pitchFamily="34" charset="-120"/>
                         </a:rPr>
-                        <a:t>八坂台5-11-1</a:t>
+                        <a:t>0475-51-5010</a:t>
                       </a:r>
                       <a:endParaRPr lang="en-US" sz="1100" dirty="0">
                         <a:latin typeface="Meiryo" charset="0"/>
@@ -11060,12 +10074,16 @@
                         <a:buNone/>
                       </a:pPr>
                       <a:r>
-                        <a:rPr lang="en-US" sz="900" dirty="0">
+                        <a:rPr lang="en-US" sz="900" dirty="0" u="sng">
+                          <a:solidFill>
+                            <a:srgbClr val="1F5FA8"/>
+                          </a:solidFill>
                           <a:latin typeface="Meiryo" charset="0"/>
                           <a:ea typeface="Meiryo" charset="0"/>
                           <a:cs typeface="Meiryo" charset="0"/>
+                          <a:hlinkClick r:id="rId7"/>
                         </a:rPr>
-                        <a:t>0475-51-5010</a:t>
+                        <a:t>kihonjuku-yuuyuu.com</a:t>
                       </a:r>
                     </a:p>
                   </a:txBody>
@@ -11327,7 +10345,7 @@
                           <a:ea typeface="Meiryo" pitchFamily="34" charset="-122"/>
                           <a:cs typeface="Meiryo" pitchFamily="34" charset="-120"/>
                         </a:rPr>
-                        <a:t>児発＋放デイ</a:t>
+                        <a:t>八坂台4-2-4</a:t>
                       </a:r>
                       <a:endParaRPr lang="en-US" sz="1100" dirty="0">
                         <a:latin typeface="Meiryo" charset="0"/>
@@ -11392,7 +10410,7 @@
                           <a:ea typeface="Meiryo" pitchFamily="34" charset="-122"/>
                           <a:cs typeface="Meiryo" pitchFamily="34" charset="-120"/>
                         </a:rPr>
-                        <a:t>八坂台4-2-4</a:t>
+                        <a:t>0475-51-6631</a:t>
                       </a:r>
                       <a:endParaRPr lang="en-US" sz="1100" dirty="0">
                         <a:latin typeface="Meiryo" charset="0"/>
@@ -11449,12 +10467,16 @@
                         <a:buNone/>
                       </a:pPr>
                       <a:r>
-                        <a:rPr lang="en-US" sz="900" dirty="0">
+                        <a:rPr lang="en-US" sz="900" dirty="0" u="sng">
+                          <a:solidFill>
+                            <a:srgbClr val="1F5FA8"/>
+                          </a:solidFill>
                           <a:latin typeface="Meiryo" charset="0"/>
                           <a:ea typeface="Meiryo" charset="0"/>
                           <a:cs typeface="Meiryo" charset="0"/>
+                          <a:hlinkClick r:id="rId7"/>
                         </a:rPr>
-                        <a:t>0475-51-6631</a:t>
+                        <a:t>kihonjuku-yuuyuu.com</a:t>
                       </a:r>
                     </a:p>
                   </a:txBody>
@@ -11716,7 +10738,7 @@
                           <a:ea typeface="Meiryo" pitchFamily="34" charset="-122"/>
                           <a:cs typeface="Meiryo" pitchFamily="34" charset="-120"/>
                         </a:rPr>
-                        <a:t>児発＋放デイ</a:t>
+                        <a:t>八坂台地区（要確認）</a:t>
                       </a:r>
                       <a:endParaRPr lang="en-US" sz="1100" dirty="0">
                         <a:latin typeface="Meiryo" charset="0"/>
@@ -11781,7 +10803,7 @@
                           <a:ea typeface="Meiryo" pitchFamily="34" charset="-122"/>
                           <a:cs typeface="Meiryo" pitchFamily="34" charset="-120"/>
                         </a:rPr>
-                        <a:t>八坂台地区（要確認）</a:t>
+                        <a:t>要確認</a:t>
                       </a:r>
                       <a:endParaRPr lang="en-US" sz="1100" dirty="0">
                         <a:latin typeface="Meiryo" charset="0"/>
@@ -11838,12 +10860,16 @@
                         <a:buNone/>
                       </a:pPr>
                       <a:r>
-                        <a:rPr lang="en-US" sz="900" dirty="0">
+                        <a:rPr lang="en-US" sz="900" dirty="0" u="sng">
+                          <a:solidFill>
+                            <a:srgbClr val="1F5FA8"/>
+                          </a:solidFill>
                           <a:latin typeface="Meiryo" charset="0"/>
                           <a:ea typeface="Meiryo" charset="0"/>
                           <a:cs typeface="Meiryo" charset="0"/>
+                          <a:hlinkClick r:id="rId7"/>
                         </a:rPr>
-                        <a:t>要確認</a:t>
+                        <a:t>kihonjuku-yuuyuu.com</a:t>
                       </a:r>
                     </a:p>
                   </a:txBody>
@@ -12105,7 +11131,7 @@
                           <a:ea typeface="Meiryo" pitchFamily="34" charset="-122"/>
                           <a:cs typeface="Meiryo" pitchFamily="34" charset="-120"/>
                         </a:rPr>
-                        <a:t>児発</a:t>
+                        <a:t>家之子1671-36</a:t>
                       </a:r>
                       <a:endParaRPr lang="en-US" sz="1100" dirty="0">
                         <a:latin typeface="Meiryo" charset="0"/>
@@ -12170,7 +11196,7 @@
                           <a:ea typeface="Meiryo" pitchFamily="34" charset="-122"/>
                           <a:cs typeface="Meiryo" pitchFamily="34" charset="-120"/>
                         </a:rPr>
-                        <a:t>家之子1671-36</a:t>
+                        <a:t>要確認</a:t>
                       </a:r>
                       <a:endParaRPr lang="en-US" sz="1100" dirty="0">
                         <a:latin typeface="Meiryo" charset="0"/>
@@ -12227,12 +11253,16 @@
                         <a:buNone/>
                       </a:pPr>
                       <a:r>
-                        <a:rPr lang="en-US" sz="900" dirty="0">
+                        <a:rPr lang="en-US" sz="900" dirty="0" u="sng">
+                          <a:solidFill>
+                            <a:srgbClr val="1F5FA8"/>
+                          </a:solidFill>
                           <a:latin typeface="Meiryo" charset="0"/>
                           <a:ea typeface="Meiryo" charset="0"/>
                           <a:cs typeface="Meiryo" charset="0"/>
+                          <a:hlinkClick r:id="rId8"/>
                         </a:rPr>
-                        <a:t>要確認</a:t>
+                        <a:t>LITALICO発達ナビ 東金市一覧</a:t>
                       </a:r>
                     </a:p>
                   </a:txBody>
@@ -12494,7 +11524,7 @@
                           <a:ea typeface="Meiryo" pitchFamily="34" charset="-122"/>
                           <a:cs typeface="Meiryo" pitchFamily="34" charset="-120"/>
                         </a:rPr>
-                        <a:t>児発＋放デイ</a:t>
+                        <a:t>東金425-2</a:t>
                       </a:r>
                       <a:endParaRPr lang="en-US" sz="1100" dirty="0">
                         <a:latin typeface="Meiryo" charset="0"/>
@@ -12559,7 +11589,7 @@
                           <a:ea typeface="Meiryo" pitchFamily="34" charset="-122"/>
                           <a:cs typeface="Meiryo" pitchFamily="34" charset="-120"/>
                         </a:rPr>
-                        <a:t>東金425-2</a:t>
+                        <a:t>要確認</a:t>
                       </a:r>
                       <a:endParaRPr lang="en-US" sz="1100" dirty="0">
                         <a:latin typeface="Meiryo" charset="0"/>
@@ -12616,12 +11646,16 @@
                         <a:buNone/>
                       </a:pPr>
                       <a:r>
-                        <a:rPr lang="en-US" sz="900" dirty="0">
+                        <a:rPr lang="en-US" sz="900" dirty="0" u="sng">
+                          <a:solidFill>
+                            <a:srgbClr val="1F5FA8"/>
+                          </a:solidFill>
                           <a:latin typeface="Meiryo" charset="0"/>
                           <a:ea typeface="Meiryo" charset="0"/>
                           <a:cs typeface="Meiryo" charset="0"/>
+                          <a:hlinkClick r:id="rId8"/>
                         </a:rPr>
-                        <a:t>要確認</a:t>
+                        <a:t>LITALICO発達ナビ 東金市一覧</a:t>
                       </a:r>
                     </a:p>
                   </a:txBody>
@@ -12707,7 +11741,7 @@
                 <a:ea typeface="Meiryo" pitchFamily="34" charset="-122"/>
                 <a:cs typeface="Meiryo" pitchFamily="34" charset="-120"/>
               </a:rPr>
-              <a:t>※「児童発達支援」の指定を受けている事業所を抽出（放課後等デイサービス専業・相談支援は次頁に参考掲載）。基本塾優遊は同一法人の5拠点のため、八坂西・八坂中央は⑧として1枚にまとめて掲載。出典：東金市公式サイト／LITALICO発達ナビ／児発ねっと／ホイシル／WAM NET／各事業所公式HP（2026年8月時点の公開情報）。</a:t>
+              <a:t>※「児童発達支援」の指定を受けている事業所を抽出。⑨を除き放課後等デイサービスを併設。基本塾優遊はNPO法人基本塾の5拠点（詳細頁では八坂西・八坂中央を⑧として集約）。「HP／出典」欄はクリックで該当ページを開きます。公式HPが確認できない事業所は出典元（東金市公式／WAM NET／LITALICO発達ナビ）へのリンクを掲載。2026年8月時点の公開情報。</a:t>
             </a:r>
             <a:endParaRPr lang="en-US" sz="1000" dirty="0"/>
           </a:p>
@@ -12768,7 +11802,7 @@
 
 <file path=ppt/slides/slide3.xml><?xml version="1.0" encoding="utf-8"?>
 <p:sld xmlns:a="http://schemas.openxmlformats.org/drawingml/2006/main" xmlns:r="http://schemas.openxmlformats.org/officeDocument/2006/relationships" xmlns:p="http://schemas.openxmlformats.org/presentationml/2006/main">
-  <p:cSld name="Slide 2">
+  <p:cSld name="Slide 3">
     <p:bg>
       <p:bgPr>
         <a:solidFill>
@@ -12833,6 +11867,45 @@
       </p:sp>
       <p:sp>
         <p:nvSpPr>
+          <p:cNvPr id="4" name="Text 2"/>
+          <p:cNvSpPr/>
+          <p:nvPr/>
+        </p:nvSpPr>
+        <p:spPr>
+          <a:xfrm>
+            <a:off x="502920" y="54864"/>
+            <a:ext cx="8686800" cy="822960"/>
+          </a:xfrm>
+          <a:prstGeom prst="rect">
+            <a:avLst/>
+          </a:prstGeom>
+          <a:noFill/>
+          <a:ln/>
+        </p:spPr>
+        <p:txBody>
+          <a:bodyPr wrap="square" lIns="0" tIns="0" rIns="0" bIns="0" rtlCol="0" anchor="ctr"/>
+          <a:lstStyle/>
+          <a:p>
+            <a:pPr marL="0" indent="0">
+              <a:buNone/>
+            </a:pPr>
+            <a:r>
+              <a:rPr lang="en-US" sz="3000" b="1" dirty="0">
+                <a:solidFill>
+                  <a:srgbClr val="FFFFFF"/>
+                </a:solidFill>
+                <a:latin typeface="Meiryo" pitchFamily="34" charset="0"/>
+                <a:ea typeface="Meiryo" pitchFamily="34" charset="-122"/>
+                <a:cs typeface="Meiryo" pitchFamily="34" charset="-120"/>
+              </a:rPr>
+              <a:t>II．　事業所別 詳細</a:t>
+            </a:r>
+            <a:endParaRPr lang="en-US" sz="3000" dirty="0"/>
+          </a:p>
+        </p:txBody>
+      </p:sp>
+      <p:sp>
+        <p:nvSpPr>
           <p:cNvPr id="5" name="Text 3"/>
           <p:cNvSpPr/>
           <p:nvPr/>
@@ -12856,15 +11929,15 @@
               <a:buNone/>
             </a:pPr>
             <a:r>
-              <a:rPr lang="ja-JP" altLang="en-US" sz="2100" b="1" dirty="0">
-                <a:solidFill>
-                  <a:srgbClr val="222222"/>
-                </a:solidFill>
-                <a:latin typeface="Meiryo" pitchFamily="34" charset="0"/>
-                <a:ea typeface="Meiryo" pitchFamily="34" charset="-122"/>
-                <a:cs typeface="Meiryo" pitchFamily="34" charset="-120"/>
-              </a:rPr>
-              <a:t>■ 参考｜放課後等デイサービス専業・障害児相談支援事業所</a:t>
+              <a:rPr lang="en-US" sz="2100" b="1" dirty="0">
+                <a:solidFill>
+                  <a:srgbClr val="222222"/>
+                </a:solidFill>
+                <a:latin typeface="Meiryo" pitchFamily="34" charset="0"/>
+                <a:ea typeface="Meiryo" pitchFamily="34" charset="-122"/>
+                <a:cs typeface="Meiryo" pitchFamily="34" charset="-120"/>
+              </a:rPr>
+              <a:t>① 東金市簡易マザーズホーム</a:t>
             </a:r>
             <a:endParaRPr lang="en-US" sz="2100" dirty="0"/>
           </a:p>
@@ -12872,7 +11945,71 @@
       </p:sp>
       <p:sp>
         <p:nvSpPr>
-          <p:cNvPr id="6" name="Text 4"/>
+          <p:cNvPr id="6" name="Shape 4"/>
+          <p:cNvSpPr/>
+          <p:nvPr/>
+        </p:nvSpPr>
+        <p:spPr>
+          <a:xfrm>
+            <a:off x="10104120" y="1170432"/>
+            <a:ext cx="1600200" cy="457200"/>
+          </a:xfrm>
+          <a:prstGeom prst="rect">
+            <a:avLst/>
+          </a:prstGeom>
+          <a:solidFill>
+            <a:srgbClr val="FFFFFF"/>
+          </a:solidFill>
+          <a:ln w="15875">
+            <a:solidFill>
+              <a:srgbClr val="1B3A6B"/>
+            </a:solidFill>
+            <a:prstDash val="solid"/>
+          </a:ln>
+        </p:spPr>
+      </p:sp>
+      <p:sp>
+        <p:nvSpPr>
+          <p:cNvPr id="7" name="Text 5"/>
+          <p:cNvSpPr/>
+          <p:nvPr/>
+        </p:nvSpPr>
+        <p:spPr>
+          <a:xfrm>
+            <a:off x="10104120" y="1170432"/>
+            <a:ext cx="1600200" cy="457200"/>
+          </a:xfrm>
+          <a:prstGeom prst="rect">
+            <a:avLst/>
+          </a:prstGeom>
+          <a:noFill/>
+          <a:ln/>
+        </p:spPr>
+        <p:txBody>
+          <a:bodyPr wrap="square" lIns="0" tIns="0" rIns="0" bIns="0" rtlCol="0" anchor="ctr"/>
+          <a:lstStyle/>
+          <a:p>
+            <a:pPr marL="0" indent="0" algn="ctr">
+              <a:buNone/>
+            </a:pPr>
+            <a:r>
+              <a:rPr lang="en-US" sz="1400" b="1" dirty="0">
+                <a:solidFill>
+                  <a:srgbClr val="1B3A6B"/>
+                </a:solidFill>
+                <a:latin typeface="Meiryo" pitchFamily="34" charset="0"/>
+                <a:ea typeface="Meiryo" pitchFamily="34" charset="-122"/>
+                <a:cs typeface="Meiryo" pitchFamily="34" charset="-120"/>
+              </a:rPr>
+              <a:t>東金市</a:t>
+            </a:r>
+            <a:endParaRPr lang="en-US" sz="1400" dirty="0"/>
+          </a:p>
+        </p:txBody>
+      </p:sp>
+      <p:sp>
+        <p:nvSpPr>
+          <p:cNvPr id="8" name="Text 6"/>
           <p:cNvSpPr/>
           <p:nvPr/>
         </p:nvSpPr>
@@ -12909,3613 +12046,48 @@
           </a:p>
         </p:txBody>
       </p:sp>
-      <p:graphicFrame>
-        <p:nvGraphicFramePr>
-          <p:cNvPr id="7" name="Table 0"/>
-          <p:cNvGraphicFramePr>
-            <a:graphicFrameLocks noGrp="1"/>
-          </p:cNvGraphicFramePr>
-          <p:nvPr>
-            <p:extLst>
-              <p:ext uri="{D42A27DB-BD31-4B8C-83A1-F6EECF244321}">
-                <p14:modId xmlns:p14="http://schemas.microsoft.com/office/powerpoint/2010/main" val="2088185084"/>
-              </p:ext>
-            </p:extLst>
-          </p:nvPr>
-        </p:nvGraphicFramePr>
-        <p:xfrm>
-          <a:off x="502920" y="1783080"/>
-          <a:ext cx="11201400" cy="3840480"/>
-        </p:xfrm>
-        <a:graphic>
-          <a:graphicData uri="http://schemas.openxmlformats.org/drawingml/2006/table">
-            <a:tbl>
-              <a:tblPr/>
-              <a:tblGrid>
-                <a:gridCol w="566928">
-                  <a:extLst>
-                    <a:ext uri="{9D8B030D-6E8A-4147-A177-3AD203B41FA5}">
-                      <a16:colId xmlns:a16="http://schemas.microsoft.com/office/drawing/2014/main" val="20000"/>
-                    </a:ext>
-                  </a:extLst>
-                </a:gridCol>
-                <a:gridCol w="2834640">
-                  <a:extLst>
-                    <a:ext uri="{9D8B030D-6E8A-4147-A177-3AD203B41FA5}">
-                      <a16:colId xmlns:a16="http://schemas.microsoft.com/office/drawing/2014/main" val="20001"/>
-                    </a:ext>
-                  </a:extLst>
-                </a:gridCol>
-                <a:gridCol w="1737360">
-                  <a:extLst>
-                    <a:ext uri="{9D8B030D-6E8A-4147-A177-3AD203B41FA5}">
-                      <a16:colId xmlns:a16="http://schemas.microsoft.com/office/drawing/2014/main" val="20002"/>
-                    </a:ext>
-                  </a:extLst>
-                </a:gridCol>
-                <a:gridCol w="2331720">
-                  <a:extLst>
-                    <a:ext uri="{9D8B030D-6E8A-4147-A177-3AD203B41FA5}">
-                      <a16:colId xmlns:a16="http://schemas.microsoft.com/office/drawing/2014/main" val="20003"/>
-                    </a:ext>
-                  </a:extLst>
-                </a:gridCol>
-                <a:gridCol w="2148840">
-                  <a:extLst>
-                    <a:ext uri="{9D8B030D-6E8A-4147-A177-3AD203B41FA5}">
-                      <a16:colId xmlns:a16="http://schemas.microsoft.com/office/drawing/2014/main" val="20004"/>
-                    </a:ext>
-                  </a:extLst>
-                </a:gridCol>
-                <a:gridCol w="1581912">
-                  <a:extLst>
-                    <a:ext uri="{9D8B030D-6E8A-4147-A177-3AD203B41FA5}">
-                      <a16:colId xmlns:a16="http://schemas.microsoft.com/office/drawing/2014/main" val="20005"/>
-                    </a:ext>
-                  </a:extLst>
-                </a:gridCol>
-              </a:tblGrid>
-              <a:tr h="426720">
-                <a:tc>
-                  <a:txBody>
-                    <a:bodyPr/>
-                    <a:lstStyle/>
-                    <a:p>
-                      <a:pPr marL="0" indent="0" algn="ctr">
-                        <a:buNone/>
-                      </a:pPr>
-                      <a:r>
-                        <a:rPr lang="en-US" sz="950" b="1" dirty="0">
-                          <a:solidFill>
-                            <a:srgbClr val="FFFFFF"/>
-                          </a:solidFill>
-                          <a:latin typeface="Meiryo" pitchFamily="34" charset="0"/>
-                          <a:ea typeface="Meiryo" pitchFamily="34" charset="-122"/>
-                          <a:cs typeface="Meiryo" pitchFamily="34" charset="-120"/>
-                        </a:rPr>
-                        <a:t>No.</a:t>
-                      </a:r>
-                      <a:endParaRPr lang="en-US" sz="1100" dirty="0">
-                        <a:latin typeface="Meiryo" charset="0"/>
-                        <a:ea typeface="Meiryo" charset="0"/>
-                        <a:cs typeface="Meiryo" charset="0"/>
-                      </a:endParaRPr>
-                    </a:p>
-                  </a:txBody>
-                  <a:tcPr anchor="ctr" marT="18000" marB="18000" marL="64008" marR="45720">
-                    <a:lnL w="9525" cap="flat" cmpd="sng" algn="ctr">
-                      <a:solidFill>
-                        <a:srgbClr val="BFBFBF"/>
-                      </a:solidFill>
-                      <a:prstDash val="solid"/>
-                      <a:round/>
-                      <a:headEnd type="none" w="med" len="med"/>
-                      <a:tailEnd type="none" w="med" len="med"/>
-                    </a:lnL>
-                    <a:lnR w="9525" cap="flat" cmpd="sng" algn="ctr">
-                      <a:solidFill>
-                        <a:srgbClr val="BFBFBF"/>
-                      </a:solidFill>
-                      <a:prstDash val="solid"/>
-                      <a:round/>
-                      <a:headEnd type="none" w="med" len="med"/>
-                      <a:tailEnd type="none" w="med" len="med"/>
-                    </a:lnR>
-                    <a:lnT w="9525" cap="flat" cmpd="sng" algn="ctr">
-                      <a:solidFill>
-                        <a:srgbClr val="BFBFBF"/>
-                      </a:solidFill>
-                      <a:prstDash val="solid"/>
-                      <a:round/>
-                      <a:headEnd type="none" w="med" len="med"/>
-                      <a:tailEnd type="none" w="med" len="med"/>
-                    </a:lnT>
-                    <a:lnB w="9525" cap="flat" cmpd="sng" algn="ctr">
-                      <a:solidFill>
-                        <a:srgbClr val="BFBFBF"/>
-                      </a:solidFill>
-                      <a:prstDash val="solid"/>
-                      <a:round/>
-                      <a:headEnd type="none" w="med" len="med"/>
-                      <a:tailEnd type="none" w="med" len="med"/>
-                    </a:lnB>
-                    <a:solidFill>
-                      <a:srgbClr val="1B3A6B"/>
-                    </a:solidFill>
-                  </a:tcPr>
-                </a:tc>
-                <a:tc>
-                  <a:txBody>
-                    <a:bodyPr/>
-                    <a:lstStyle/>
-                    <a:p>
-                      <a:pPr marL="0" indent="0" algn="ctr">
-                        <a:buNone/>
-                      </a:pPr>
-                      <a:r>
-                        <a:rPr lang="en-US" sz="950" b="1" dirty="0">
-                          <a:solidFill>
-                            <a:srgbClr val="FFFFFF"/>
-                          </a:solidFill>
-                          <a:latin typeface="Meiryo" pitchFamily="34" charset="0"/>
-                          <a:ea typeface="Meiryo" pitchFamily="34" charset="-122"/>
-                          <a:cs typeface="Meiryo" pitchFamily="34" charset="-120"/>
-                        </a:rPr>
-                        <a:t>事業所名</a:t>
-                      </a:r>
-                      <a:endParaRPr lang="en-US" sz="1100" dirty="0">
-                        <a:latin typeface="Meiryo" charset="0"/>
-                        <a:ea typeface="Meiryo" charset="0"/>
-                        <a:cs typeface="Meiryo" charset="0"/>
-                      </a:endParaRPr>
-                    </a:p>
-                  </a:txBody>
-                  <a:tcPr anchor="ctr" marT="18000" marB="18000" marL="64008" marR="45720">
-                    <a:lnL w="9525" cap="flat" cmpd="sng" algn="ctr">
-                      <a:solidFill>
-                        <a:srgbClr val="BFBFBF"/>
-                      </a:solidFill>
-                      <a:prstDash val="solid"/>
-                      <a:round/>
-                      <a:headEnd type="none" w="med" len="med"/>
-                      <a:tailEnd type="none" w="med" len="med"/>
-                    </a:lnL>
-                    <a:lnR w="9525" cap="flat" cmpd="sng" algn="ctr">
-                      <a:solidFill>
-                        <a:srgbClr val="BFBFBF"/>
-                      </a:solidFill>
-                      <a:prstDash val="solid"/>
-                      <a:round/>
-                      <a:headEnd type="none" w="med" len="med"/>
-                      <a:tailEnd type="none" w="med" len="med"/>
-                    </a:lnR>
-                    <a:lnT w="9525" cap="flat" cmpd="sng" algn="ctr">
-                      <a:solidFill>
-                        <a:srgbClr val="BFBFBF"/>
-                      </a:solidFill>
-                      <a:prstDash val="solid"/>
-                      <a:round/>
-                      <a:headEnd type="none" w="med" len="med"/>
-                      <a:tailEnd type="none" w="med" len="med"/>
-                    </a:lnT>
-                    <a:lnB w="9525" cap="flat" cmpd="sng" algn="ctr">
-                      <a:solidFill>
-                        <a:srgbClr val="BFBFBF"/>
-                      </a:solidFill>
-                      <a:prstDash val="solid"/>
-                      <a:round/>
-                      <a:headEnd type="none" w="med" len="med"/>
-                      <a:tailEnd type="none" w="med" len="med"/>
-                    </a:lnB>
-                    <a:solidFill>
-                      <a:srgbClr val="1B3A6B"/>
-                    </a:solidFill>
-                  </a:tcPr>
-                </a:tc>
-                <a:tc>
-                  <a:txBody>
-                    <a:bodyPr/>
-                    <a:lstStyle/>
-                    <a:p>
-                      <a:pPr marL="0" indent="0" algn="ctr">
-                        <a:buNone/>
-                      </a:pPr>
-                      <a:r>
-                        <a:rPr lang="en-US" sz="950" b="1" dirty="0">
-                          <a:solidFill>
-                            <a:srgbClr val="FFFFFF"/>
-                          </a:solidFill>
-                          <a:latin typeface="Meiryo" pitchFamily="34" charset="0"/>
-                          <a:ea typeface="Meiryo" pitchFamily="34" charset="-122"/>
-                          <a:cs typeface="Meiryo" pitchFamily="34" charset="-120"/>
-                        </a:rPr>
-                        <a:t>区分</a:t>
-                      </a:r>
-                      <a:endParaRPr lang="en-US" sz="1100" dirty="0">
-                        <a:latin typeface="Meiryo" charset="0"/>
-                        <a:ea typeface="Meiryo" charset="0"/>
-                        <a:cs typeface="Meiryo" charset="0"/>
-                      </a:endParaRPr>
-                    </a:p>
-                  </a:txBody>
-                  <a:tcPr anchor="ctr" marT="18000" marB="18000" marL="64008" marR="45720">
-                    <a:lnL w="9525" cap="flat" cmpd="sng" algn="ctr">
-                      <a:solidFill>
-                        <a:srgbClr val="BFBFBF"/>
-                      </a:solidFill>
-                      <a:prstDash val="solid"/>
-                      <a:round/>
-                      <a:headEnd type="none" w="med" len="med"/>
-                      <a:tailEnd type="none" w="med" len="med"/>
-                    </a:lnL>
-                    <a:lnR w="9525" cap="flat" cmpd="sng" algn="ctr">
-                      <a:solidFill>
-                        <a:srgbClr val="BFBFBF"/>
-                      </a:solidFill>
-                      <a:prstDash val="solid"/>
-                      <a:round/>
-                      <a:headEnd type="none" w="med" len="med"/>
-                      <a:tailEnd type="none" w="med" len="med"/>
-                    </a:lnR>
-                    <a:lnT w="9525" cap="flat" cmpd="sng" algn="ctr">
-                      <a:solidFill>
-                        <a:srgbClr val="BFBFBF"/>
-                      </a:solidFill>
-                      <a:prstDash val="solid"/>
-                      <a:round/>
-                      <a:headEnd type="none" w="med" len="med"/>
-                      <a:tailEnd type="none" w="med" len="med"/>
-                    </a:lnT>
-                    <a:lnB w="9525" cap="flat" cmpd="sng" algn="ctr">
-                      <a:solidFill>
-                        <a:srgbClr val="BFBFBF"/>
-                      </a:solidFill>
-                      <a:prstDash val="solid"/>
-                      <a:round/>
-                      <a:headEnd type="none" w="med" len="med"/>
-                      <a:tailEnd type="none" w="med" len="med"/>
-                    </a:lnB>
-                    <a:solidFill>
-                      <a:srgbClr val="1B3A6B"/>
-                    </a:solidFill>
-                  </a:tcPr>
-                </a:tc>
-                <a:tc>
-                  <a:txBody>
-                    <a:bodyPr/>
-                    <a:lstStyle/>
-                    <a:p>
-                      <a:pPr marL="0" indent="0" algn="ctr">
-                        <a:buNone/>
-                      </a:pPr>
-                      <a:r>
-                        <a:rPr lang="en-US" sz="950" b="1" dirty="0" err="1">
-                          <a:solidFill>
-                            <a:srgbClr val="FFFFFF"/>
-                          </a:solidFill>
-                          <a:latin typeface="Meiryo" pitchFamily="34" charset="0"/>
-                          <a:ea typeface="Meiryo" pitchFamily="34" charset="-122"/>
-                          <a:cs typeface="Meiryo" pitchFamily="34" charset="-120"/>
-                        </a:rPr>
-                        <a:t>運営法人</a:t>
-                      </a:r>
-                      <a:endParaRPr lang="en-US" sz="1100" dirty="0">
-                        <a:latin typeface="Meiryo" charset="0"/>
-                        <a:ea typeface="Meiryo" charset="0"/>
-                        <a:cs typeface="Meiryo" charset="0"/>
-                      </a:endParaRPr>
-                    </a:p>
-                  </a:txBody>
-                  <a:tcPr anchor="ctr" marT="18000" marB="18000" marL="64008" marR="45720">
-                    <a:lnL w="9525" cap="flat" cmpd="sng" algn="ctr">
-                      <a:solidFill>
-                        <a:srgbClr val="BFBFBF"/>
-                      </a:solidFill>
-                      <a:prstDash val="solid"/>
-                      <a:round/>
-                      <a:headEnd type="none" w="med" len="med"/>
-                      <a:tailEnd type="none" w="med" len="med"/>
-                    </a:lnL>
-                    <a:lnR w="9525" cap="flat" cmpd="sng" algn="ctr">
-                      <a:solidFill>
-                        <a:srgbClr val="BFBFBF"/>
-                      </a:solidFill>
-                      <a:prstDash val="solid"/>
-                      <a:round/>
-                      <a:headEnd type="none" w="med" len="med"/>
-                      <a:tailEnd type="none" w="med" len="med"/>
-                    </a:lnR>
-                    <a:lnT w="9525" cap="flat" cmpd="sng" algn="ctr">
-                      <a:solidFill>
-                        <a:srgbClr val="BFBFBF"/>
-                      </a:solidFill>
-                      <a:prstDash val="solid"/>
-                      <a:round/>
-                      <a:headEnd type="none" w="med" len="med"/>
-                      <a:tailEnd type="none" w="med" len="med"/>
-                    </a:lnT>
-                    <a:lnB w="9525" cap="flat" cmpd="sng" algn="ctr">
-                      <a:solidFill>
-                        <a:srgbClr val="BFBFBF"/>
-                      </a:solidFill>
-                      <a:prstDash val="solid"/>
-                      <a:round/>
-                      <a:headEnd type="none" w="med" len="med"/>
-                      <a:tailEnd type="none" w="med" len="med"/>
-                    </a:lnB>
-                    <a:solidFill>
-                      <a:srgbClr val="1B3A6B"/>
-                    </a:solidFill>
-                  </a:tcPr>
-                </a:tc>
-                <a:tc>
-                  <a:txBody>
-                    <a:bodyPr/>
-                    <a:lstStyle/>
-                    <a:p>
-                      <a:pPr marL="0" indent="0" algn="ctr">
-                        <a:buNone/>
-                      </a:pPr>
-                      <a:r>
-                        <a:rPr lang="en-US" sz="950" b="1" dirty="0">
-                          <a:solidFill>
-                            <a:srgbClr val="FFFFFF"/>
-                          </a:solidFill>
-                          <a:latin typeface="Meiryo" pitchFamily="34" charset="0"/>
-                          <a:ea typeface="Meiryo" pitchFamily="34" charset="-122"/>
-                          <a:cs typeface="Meiryo" pitchFamily="34" charset="-120"/>
-                        </a:rPr>
-                        <a:t>所在地（東金市）</a:t>
-                      </a:r>
-                      <a:endParaRPr lang="en-US" sz="1100" dirty="0">
-                        <a:latin typeface="Meiryo" charset="0"/>
-                        <a:ea typeface="Meiryo" charset="0"/>
-                        <a:cs typeface="Meiryo" charset="0"/>
-                      </a:endParaRPr>
-                    </a:p>
-                  </a:txBody>
-                  <a:tcPr anchor="ctr" marT="18000" marB="18000" marL="64008" marR="45720">
-                    <a:lnL w="9525" cap="flat" cmpd="sng" algn="ctr">
-                      <a:solidFill>
-                        <a:srgbClr val="BFBFBF"/>
-                      </a:solidFill>
-                      <a:prstDash val="solid"/>
-                      <a:round/>
-                      <a:headEnd type="none" w="med" len="med"/>
-                      <a:tailEnd type="none" w="med" len="med"/>
-                    </a:lnL>
-                    <a:lnR w="9525" cap="flat" cmpd="sng" algn="ctr">
-                      <a:solidFill>
-                        <a:srgbClr val="BFBFBF"/>
-                      </a:solidFill>
-                      <a:prstDash val="solid"/>
-                      <a:round/>
-                      <a:headEnd type="none" w="med" len="med"/>
-                      <a:tailEnd type="none" w="med" len="med"/>
-                    </a:lnR>
-                    <a:lnT w="9525" cap="flat" cmpd="sng" algn="ctr">
-                      <a:solidFill>
-                        <a:srgbClr val="BFBFBF"/>
-                      </a:solidFill>
-                      <a:prstDash val="solid"/>
-                      <a:round/>
-                      <a:headEnd type="none" w="med" len="med"/>
-                      <a:tailEnd type="none" w="med" len="med"/>
-                    </a:lnT>
-                    <a:lnB w="9525" cap="flat" cmpd="sng" algn="ctr">
-                      <a:solidFill>
-                        <a:srgbClr val="BFBFBF"/>
-                      </a:solidFill>
-                      <a:prstDash val="solid"/>
-                      <a:round/>
-                      <a:headEnd type="none" w="med" len="med"/>
-                      <a:tailEnd type="none" w="med" len="med"/>
-                    </a:lnB>
-                    <a:solidFill>
-                      <a:srgbClr val="1B3A6B"/>
-                    </a:solidFill>
-                  </a:tcPr>
-                </a:tc>
-                <a:tc>
-                  <a:txBody>
-                    <a:bodyPr/>
-                    <a:lstStyle/>
-                    <a:p>
-                      <a:pPr marL="0" indent="0" algn="ctr">
-                        <a:buNone/>
-                      </a:pPr>
-                      <a:r>
-                        <a:rPr lang="en-US" sz="950" b="1" dirty="0">
-                          <a:solidFill>
-                            <a:srgbClr val="FFFFFF"/>
-                          </a:solidFill>
-                          <a:latin typeface="Meiryo" pitchFamily="34" charset="0"/>
-                          <a:ea typeface="Meiryo" pitchFamily="34" charset="-122"/>
-                          <a:cs typeface="Meiryo" pitchFamily="34" charset="-120"/>
-                        </a:rPr>
-                        <a:t>TEL</a:t>
-                      </a:r>
-                      <a:endParaRPr lang="en-US" sz="1100" dirty="0">
-                        <a:latin typeface="Meiryo" charset="0"/>
-                        <a:ea typeface="Meiryo" charset="0"/>
-                        <a:cs typeface="Meiryo" charset="0"/>
-                      </a:endParaRPr>
-                    </a:p>
-                  </a:txBody>
-                  <a:tcPr anchor="ctr" marT="18000" marB="18000" marL="64008" marR="45720">
-                    <a:lnL w="9525" cap="flat" cmpd="sng" algn="ctr">
-                      <a:solidFill>
-                        <a:srgbClr val="BFBFBF"/>
-                      </a:solidFill>
-                      <a:prstDash val="solid"/>
-                      <a:round/>
-                      <a:headEnd type="none" w="med" len="med"/>
-                      <a:tailEnd type="none" w="med" len="med"/>
-                    </a:lnL>
-                    <a:lnR w="9525" cap="flat" cmpd="sng" algn="ctr">
-                      <a:solidFill>
-                        <a:srgbClr val="BFBFBF"/>
-                      </a:solidFill>
-                      <a:prstDash val="solid"/>
-                      <a:round/>
-                      <a:headEnd type="none" w="med" len="med"/>
-                      <a:tailEnd type="none" w="med" len="med"/>
-                    </a:lnR>
-                    <a:lnT w="9525" cap="flat" cmpd="sng" algn="ctr">
-                      <a:solidFill>
-                        <a:srgbClr val="BFBFBF"/>
-                      </a:solidFill>
-                      <a:prstDash val="solid"/>
-                      <a:round/>
-                      <a:headEnd type="none" w="med" len="med"/>
-                      <a:tailEnd type="none" w="med" len="med"/>
-                    </a:lnT>
-                    <a:lnB w="9525" cap="flat" cmpd="sng" algn="ctr">
-                      <a:solidFill>
-                        <a:srgbClr val="BFBFBF"/>
-                      </a:solidFill>
-                      <a:prstDash val="solid"/>
-                      <a:round/>
-                      <a:headEnd type="none" w="med" len="med"/>
-                      <a:tailEnd type="none" w="med" len="med"/>
-                    </a:lnB>
-                    <a:solidFill>
-                      <a:srgbClr val="1B3A6B"/>
-                    </a:solidFill>
-                  </a:tcPr>
-                </a:tc>
-                <a:extLst>
-                  <a:ext uri="{0D108BD9-81ED-4DB2-BD59-A6C34878D82A}">
-                    <a16:rowId xmlns:a16="http://schemas.microsoft.com/office/drawing/2014/main" val="10000"/>
-                  </a:ext>
-                </a:extLst>
-              </a:tr>
-              <a:tr h="426720">
-                <a:tc>
-                  <a:txBody>
-                    <a:bodyPr/>
-                    <a:lstStyle/>
-                    <a:p>
-                      <a:pPr marL="0" indent="0" algn="ctr">
-                        <a:buNone/>
-                      </a:pPr>
-                      <a:r>
-                        <a:rPr lang="en-US" sz="900" b="1" dirty="0">
-                          <a:solidFill>
-                            <a:srgbClr val="222222"/>
-                          </a:solidFill>
-                          <a:latin typeface="Meiryo" pitchFamily="34" charset="0"/>
-                          <a:ea typeface="Meiryo" pitchFamily="34" charset="-122"/>
-                          <a:cs typeface="Meiryo" pitchFamily="34" charset="-120"/>
-                        </a:rPr>
-                        <a:t>1</a:t>
-                      </a:r>
-                      <a:endParaRPr lang="en-US" sz="1100" dirty="0">
-                        <a:latin typeface="Meiryo" charset="0"/>
-                        <a:ea typeface="Meiryo" charset="0"/>
-                        <a:cs typeface="Meiryo" charset="0"/>
-                      </a:endParaRPr>
-                    </a:p>
-                  </a:txBody>
-                  <a:tcPr anchor="ctr" marT="18000" marB="18000" marL="64008" marR="45720">
-                    <a:lnL w="9525" cap="flat" cmpd="sng" algn="ctr">
-                      <a:solidFill>
-                        <a:srgbClr val="BFBFBF"/>
-                      </a:solidFill>
-                      <a:prstDash val="solid"/>
-                      <a:round/>
-                      <a:headEnd type="none" w="med" len="med"/>
-                      <a:tailEnd type="none" w="med" len="med"/>
-                    </a:lnL>
-                    <a:lnR w="9525" cap="flat" cmpd="sng" algn="ctr">
-                      <a:solidFill>
-                        <a:srgbClr val="BFBFBF"/>
-                      </a:solidFill>
-                      <a:prstDash val="solid"/>
-                      <a:round/>
-                      <a:headEnd type="none" w="med" len="med"/>
-                      <a:tailEnd type="none" w="med" len="med"/>
-                    </a:lnR>
-                    <a:lnT w="9525" cap="flat" cmpd="sng" algn="ctr">
-                      <a:solidFill>
-                        <a:srgbClr val="BFBFBF"/>
-                      </a:solidFill>
-                      <a:prstDash val="solid"/>
-                      <a:round/>
-                      <a:headEnd type="none" w="med" len="med"/>
-                      <a:tailEnd type="none" w="med" len="med"/>
-                    </a:lnT>
-                    <a:lnB w="9525" cap="flat" cmpd="sng" algn="ctr">
-                      <a:solidFill>
-                        <a:srgbClr val="BFBFBF"/>
-                      </a:solidFill>
-                      <a:prstDash val="solid"/>
-                      <a:round/>
-                      <a:headEnd type="none" w="med" len="med"/>
-                      <a:tailEnd type="none" w="med" len="med"/>
-                    </a:lnB>
-                  </a:tcPr>
-                </a:tc>
-                <a:tc>
-                  <a:txBody>
-                    <a:bodyPr/>
-                    <a:lstStyle/>
-                    <a:p>
-                      <a:pPr marL="0" indent="0" algn="l">
-                        <a:buNone/>
-                      </a:pPr>
-                      <a:r>
-                        <a:rPr lang="en-US" sz="900" b="1" dirty="0">
-                          <a:solidFill>
-                            <a:srgbClr val="222222"/>
-                          </a:solidFill>
-                          <a:latin typeface="Meiryo" pitchFamily="34" charset="0"/>
-                          <a:ea typeface="Meiryo" pitchFamily="34" charset="-122"/>
-                          <a:cs typeface="Meiryo" pitchFamily="34" charset="-120"/>
-                        </a:rPr>
-                        <a:t>スターワーク東金</a:t>
-                      </a:r>
-                      <a:endParaRPr lang="en-US" sz="1100" dirty="0">
-                        <a:latin typeface="Meiryo" charset="0"/>
-                        <a:ea typeface="Meiryo" charset="0"/>
-                        <a:cs typeface="Meiryo" charset="0"/>
-                      </a:endParaRPr>
-                    </a:p>
-                  </a:txBody>
-                  <a:tcPr anchor="ctr" marT="18000" marB="18000" marL="64008" marR="45720">
-                    <a:lnL w="9525" cap="flat" cmpd="sng" algn="ctr">
-                      <a:solidFill>
-                        <a:srgbClr val="BFBFBF"/>
-                      </a:solidFill>
-                      <a:prstDash val="solid"/>
-                      <a:round/>
-                      <a:headEnd type="none" w="med" len="med"/>
-                      <a:tailEnd type="none" w="med" len="med"/>
-                    </a:lnL>
-                    <a:lnR w="9525" cap="flat" cmpd="sng" algn="ctr">
-                      <a:solidFill>
-                        <a:srgbClr val="BFBFBF"/>
-                      </a:solidFill>
-                      <a:prstDash val="solid"/>
-                      <a:round/>
-                      <a:headEnd type="none" w="med" len="med"/>
-                      <a:tailEnd type="none" w="med" len="med"/>
-                    </a:lnR>
-                    <a:lnT w="9525" cap="flat" cmpd="sng" algn="ctr">
-                      <a:solidFill>
-                        <a:srgbClr val="BFBFBF"/>
-                      </a:solidFill>
-                      <a:prstDash val="solid"/>
-                      <a:round/>
-                      <a:headEnd type="none" w="med" len="med"/>
-                      <a:tailEnd type="none" w="med" len="med"/>
-                    </a:lnT>
-                    <a:lnB w="9525" cap="flat" cmpd="sng" algn="ctr">
-                      <a:solidFill>
-                        <a:srgbClr val="BFBFBF"/>
-                      </a:solidFill>
-                      <a:prstDash val="solid"/>
-                      <a:round/>
-                      <a:headEnd type="none" w="med" len="med"/>
-                      <a:tailEnd type="none" w="med" len="med"/>
-                    </a:lnB>
-                  </a:tcPr>
-                </a:tc>
-                <a:tc>
-                  <a:txBody>
-                    <a:bodyPr/>
-                    <a:lstStyle/>
-                    <a:p>
-                      <a:pPr marL="0" indent="0" algn="l">
-                        <a:buNone/>
-                      </a:pPr>
-                      <a:r>
-                        <a:rPr lang="en-US" sz="900" dirty="0">
-                          <a:solidFill>
-                            <a:srgbClr val="222222"/>
-                          </a:solidFill>
-                          <a:latin typeface="Meiryo" pitchFamily="34" charset="0"/>
-                          <a:ea typeface="Meiryo" pitchFamily="34" charset="-122"/>
-                          <a:cs typeface="Meiryo" pitchFamily="34" charset="-120"/>
-                        </a:rPr>
-                        <a:t>放課後等デイサービス</a:t>
-                      </a:r>
-                      <a:endParaRPr lang="en-US" sz="1100" dirty="0">
-                        <a:latin typeface="Meiryo" charset="0"/>
-                        <a:ea typeface="Meiryo" charset="0"/>
-                        <a:cs typeface="Meiryo" charset="0"/>
-                      </a:endParaRPr>
-                    </a:p>
-                  </a:txBody>
-                  <a:tcPr anchor="ctr" marT="18000" marB="18000" marL="64008" marR="45720">
-                    <a:lnL w="9525" cap="flat" cmpd="sng" algn="ctr">
-                      <a:solidFill>
-                        <a:srgbClr val="BFBFBF"/>
-                      </a:solidFill>
-                      <a:prstDash val="solid"/>
-                      <a:round/>
-                      <a:headEnd type="none" w="med" len="med"/>
-                      <a:tailEnd type="none" w="med" len="med"/>
-                    </a:lnL>
-                    <a:lnR w="9525" cap="flat" cmpd="sng" algn="ctr">
-                      <a:solidFill>
-                        <a:srgbClr val="BFBFBF"/>
-                      </a:solidFill>
-                      <a:prstDash val="solid"/>
-                      <a:round/>
-                      <a:headEnd type="none" w="med" len="med"/>
-                      <a:tailEnd type="none" w="med" len="med"/>
-                    </a:lnR>
-                    <a:lnT w="9525" cap="flat" cmpd="sng" algn="ctr">
-                      <a:solidFill>
-                        <a:srgbClr val="BFBFBF"/>
-                      </a:solidFill>
-                      <a:prstDash val="solid"/>
-                      <a:round/>
-                      <a:headEnd type="none" w="med" len="med"/>
-                      <a:tailEnd type="none" w="med" len="med"/>
-                    </a:lnT>
-                    <a:lnB w="9525" cap="flat" cmpd="sng" algn="ctr">
-                      <a:solidFill>
-                        <a:srgbClr val="BFBFBF"/>
-                      </a:solidFill>
-                      <a:prstDash val="solid"/>
-                      <a:round/>
-                      <a:headEnd type="none" w="med" len="med"/>
-                      <a:tailEnd type="none" w="med" len="med"/>
-                    </a:lnB>
-                  </a:tcPr>
-                </a:tc>
-                <a:tc>
-                  <a:txBody>
-                    <a:bodyPr/>
-                    <a:lstStyle/>
-                    <a:p>
-                      <a:pPr marL="0" indent="0" algn="l">
-                        <a:buNone/>
-                      </a:pPr>
-                      <a:r>
-                        <a:rPr lang="en-US" sz="900" dirty="0">
-                          <a:solidFill>
-                            <a:srgbClr val="222222"/>
-                          </a:solidFill>
-                          <a:latin typeface="Meiryo" pitchFamily="34" charset="0"/>
-                          <a:ea typeface="Meiryo" pitchFamily="34" charset="-122"/>
-                          <a:cs typeface="Meiryo" pitchFamily="34" charset="-120"/>
-                        </a:rPr>
-                        <a:t>株式会社ベストグロウ</a:t>
-                      </a:r>
-                      <a:endParaRPr lang="en-US" sz="1100" dirty="0">
-                        <a:latin typeface="Meiryo" charset="0"/>
-                        <a:ea typeface="Meiryo" charset="0"/>
-                        <a:cs typeface="Meiryo" charset="0"/>
-                      </a:endParaRPr>
-                    </a:p>
-                  </a:txBody>
-                  <a:tcPr anchor="ctr" marT="18000" marB="18000" marL="64008" marR="45720">
-                    <a:lnL w="9525" cap="flat" cmpd="sng" algn="ctr">
-                      <a:solidFill>
-                        <a:srgbClr val="BFBFBF"/>
-                      </a:solidFill>
-                      <a:prstDash val="solid"/>
-                      <a:round/>
-                      <a:headEnd type="none" w="med" len="med"/>
-                      <a:tailEnd type="none" w="med" len="med"/>
-                    </a:lnL>
-                    <a:lnR w="9525" cap="flat" cmpd="sng" algn="ctr">
-                      <a:solidFill>
-                        <a:srgbClr val="BFBFBF"/>
-                      </a:solidFill>
-                      <a:prstDash val="solid"/>
-                      <a:round/>
-                      <a:headEnd type="none" w="med" len="med"/>
-                      <a:tailEnd type="none" w="med" len="med"/>
-                    </a:lnR>
-                    <a:lnT w="9525" cap="flat" cmpd="sng" algn="ctr">
-                      <a:solidFill>
-                        <a:srgbClr val="BFBFBF"/>
-                      </a:solidFill>
-                      <a:prstDash val="solid"/>
-                      <a:round/>
-                      <a:headEnd type="none" w="med" len="med"/>
-                      <a:tailEnd type="none" w="med" len="med"/>
-                    </a:lnT>
-                    <a:lnB w="9525" cap="flat" cmpd="sng" algn="ctr">
-                      <a:solidFill>
-                        <a:srgbClr val="BFBFBF"/>
-                      </a:solidFill>
-                      <a:prstDash val="solid"/>
-                      <a:round/>
-                      <a:headEnd type="none" w="med" len="med"/>
-                      <a:tailEnd type="none" w="med" len="med"/>
-                    </a:lnB>
-                  </a:tcPr>
-                </a:tc>
-                <a:tc>
-                  <a:txBody>
-                    <a:bodyPr/>
-                    <a:lstStyle/>
-                    <a:p>
-                      <a:pPr marL="0" indent="0" algn="l">
-                        <a:buNone/>
-                      </a:pPr>
-                      <a:r>
-                        <a:rPr lang="en-US" sz="900" dirty="0">
-                          <a:solidFill>
-                            <a:srgbClr val="222222"/>
-                          </a:solidFill>
-                          <a:latin typeface="Meiryo" pitchFamily="34" charset="0"/>
-                          <a:ea typeface="Meiryo" pitchFamily="34" charset="-122"/>
-                          <a:cs typeface="Meiryo" pitchFamily="34" charset="-120"/>
-                        </a:rPr>
-                        <a:t>東金723 谷井ビル2・3F</a:t>
-                      </a:r>
-                      <a:endParaRPr lang="en-US" sz="1100" dirty="0">
-                        <a:latin typeface="Meiryo" charset="0"/>
-                        <a:ea typeface="Meiryo" charset="0"/>
-                        <a:cs typeface="Meiryo" charset="0"/>
-                      </a:endParaRPr>
-                    </a:p>
-                  </a:txBody>
-                  <a:tcPr anchor="ctr" marT="18000" marB="18000" marL="64008" marR="45720">
-                    <a:lnL w="9525" cap="flat" cmpd="sng" algn="ctr">
-                      <a:solidFill>
-                        <a:srgbClr val="BFBFBF"/>
-                      </a:solidFill>
-                      <a:prstDash val="solid"/>
-                      <a:round/>
-                      <a:headEnd type="none" w="med" len="med"/>
-                      <a:tailEnd type="none" w="med" len="med"/>
-                    </a:lnL>
-                    <a:lnR w="9525" cap="flat" cmpd="sng" algn="ctr">
-                      <a:solidFill>
-                        <a:srgbClr val="BFBFBF"/>
-                      </a:solidFill>
-                      <a:prstDash val="solid"/>
-                      <a:round/>
-                      <a:headEnd type="none" w="med" len="med"/>
-                      <a:tailEnd type="none" w="med" len="med"/>
-                    </a:lnR>
-                    <a:lnT w="9525" cap="flat" cmpd="sng" algn="ctr">
-                      <a:solidFill>
-                        <a:srgbClr val="BFBFBF"/>
-                      </a:solidFill>
-                      <a:prstDash val="solid"/>
-                      <a:round/>
-                      <a:headEnd type="none" w="med" len="med"/>
-                      <a:tailEnd type="none" w="med" len="med"/>
-                    </a:lnT>
-                    <a:lnB w="9525" cap="flat" cmpd="sng" algn="ctr">
-                      <a:solidFill>
-                        <a:srgbClr val="BFBFBF"/>
-                      </a:solidFill>
-                      <a:prstDash val="solid"/>
-                      <a:round/>
-                      <a:headEnd type="none" w="med" len="med"/>
-                      <a:tailEnd type="none" w="med" len="med"/>
-                    </a:lnB>
-                  </a:tcPr>
-                </a:tc>
-                <a:tc>
-                  <a:txBody>
-                    <a:bodyPr/>
-                    <a:lstStyle/>
-                    <a:p>
-                      <a:pPr marL="0" indent="0" algn="l">
-                        <a:buNone/>
-                      </a:pPr>
-                      <a:r>
-                        <a:rPr lang="en-US" sz="900" dirty="0">
-                          <a:latin typeface="Meiryo" charset="0"/>
-                          <a:ea typeface="Meiryo" charset="0"/>
-                          <a:cs typeface="Meiryo" charset="0"/>
-                        </a:rPr>
-                        <a:t>要確認</a:t>
-                      </a:r>
-                    </a:p>
-                  </a:txBody>
-                  <a:tcPr anchor="ctr" marT="18000" marB="18000" marL="64008" marR="45720">
-                    <a:lnL w="9525" cap="flat" cmpd="sng" algn="ctr">
-                      <a:solidFill>
-                        <a:srgbClr val="BFBFBF"/>
-                      </a:solidFill>
-                      <a:prstDash val="solid"/>
-                      <a:round/>
-                      <a:headEnd type="none" w="med" len="med"/>
-                      <a:tailEnd type="none" w="med" len="med"/>
-                    </a:lnL>
-                    <a:lnR w="9525" cap="flat" cmpd="sng" algn="ctr">
-                      <a:solidFill>
-                        <a:srgbClr val="BFBFBF"/>
-                      </a:solidFill>
-                      <a:prstDash val="solid"/>
-                      <a:round/>
-                      <a:headEnd type="none" w="med" len="med"/>
-                      <a:tailEnd type="none" w="med" len="med"/>
-                    </a:lnR>
-                    <a:lnT w="9525" cap="flat" cmpd="sng" algn="ctr">
-                      <a:solidFill>
-                        <a:srgbClr val="BFBFBF"/>
-                      </a:solidFill>
-                      <a:prstDash val="solid"/>
-                      <a:round/>
-                      <a:headEnd type="none" w="med" len="med"/>
-                      <a:tailEnd type="none" w="med" len="med"/>
-                    </a:lnT>
-                    <a:lnB w="9525" cap="flat" cmpd="sng" algn="ctr">
-                      <a:solidFill>
-                        <a:srgbClr val="BFBFBF"/>
-                      </a:solidFill>
-                      <a:prstDash val="solid"/>
-                      <a:round/>
-                      <a:headEnd type="none" w="med" len="med"/>
-                      <a:tailEnd type="none" w="med" len="med"/>
-                    </a:lnB>
-                  </a:tcPr>
-                </a:tc>
-                <a:extLst>
-                  <a:ext uri="{0D108BD9-81ED-4DB2-BD59-A6C34878D82A}">
-                    <a16:rowId xmlns:a16="http://schemas.microsoft.com/office/drawing/2014/main" val="10001"/>
-                  </a:ext>
-                </a:extLst>
-              </a:tr>
-              <a:tr h="426720">
-                <a:tc>
-                  <a:txBody>
-                    <a:bodyPr/>
-                    <a:lstStyle/>
-                    <a:p>
-                      <a:pPr marL="0" indent="0" algn="ctr">
-                        <a:buNone/>
-                      </a:pPr>
-                      <a:r>
-                        <a:rPr lang="en-US" sz="900" b="1" dirty="0">
-                          <a:solidFill>
-                            <a:srgbClr val="222222"/>
-                          </a:solidFill>
-                          <a:latin typeface="Meiryo" pitchFamily="34" charset="0"/>
-                          <a:ea typeface="Meiryo" pitchFamily="34" charset="-122"/>
-                          <a:cs typeface="Meiryo" pitchFamily="34" charset="-120"/>
-                        </a:rPr>
-                        <a:t>2</a:t>
-                      </a:r>
-                      <a:endParaRPr lang="en-US" sz="1100" dirty="0">
-                        <a:latin typeface="Meiryo" charset="0"/>
-                        <a:ea typeface="Meiryo" charset="0"/>
-                        <a:cs typeface="Meiryo" charset="0"/>
-                      </a:endParaRPr>
-                    </a:p>
-                  </a:txBody>
-                  <a:tcPr anchor="ctr" marT="18000" marB="18000" marL="64008" marR="45720">
-                    <a:lnL w="9525" cap="flat" cmpd="sng" algn="ctr">
-                      <a:solidFill>
-                        <a:srgbClr val="BFBFBF"/>
-                      </a:solidFill>
-                      <a:prstDash val="solid"/>
-                      <a:round/>
-                      <a:headEnd type="none" w="med" len="med"/>
-                      <a:tailEnd type="none" w="med" len="med"/>
-                    </a:lnL>
-                    <a:lnR w="9525" cap="flat" cmpd="sng" algn="ctr">
-                      <a:solidFill>
-                        <a:srgbClr val="BFBFBF"/>
-                      </a:solidFill>
-                      <a:prstDash val="solid"/>
-                      <a:round/>
-                      <a:headEnd type="none" w="med" len="med"/>
-                      <a:tailEnd type="none" w="med" len="med"/>
-                    </a:lnR>
-                    <a:lnT w="9525" cap="flat" cmpd="sng" algn="ctr">
-                      <a:solidFill>
-                        <a:srgbClr val="BFBFBF"/>
-                      </a:solidFill>
-                      <a:prstDash val="solid"/>
-                      <a:round/>
-                      <a:headEnd type="none" w="med" len="med"/>
-                      <a:tailEnd type="none" w="med" len="med"/>
-                    </a:lnT>
-                    <a:lnB w="9525" cap="flat" cmpd="sng" algn="ctr">
-                      <a:solidFill>
-                        <a:srgbClr val="BFBFBF"/>
-                      </a:solidFill>
-                      <a:prstDash val="solid"/>
-                      <a:round/>
-                      <a:headEnd type="none" w="med" len="med"/>
-                      <a:tailEnd type="none" w="med" len="med"/>
-                    </a:lnB>
-                  </a:tcPr>
-                </a:tc>
-                <a:tc>
-                  <a:txBody>
-                    <a:bodyPr/>
-                    <a:lstStyle/>
-                    <a:p>
-                      <a:pPr marL="0" indent="0" algn="l">
-                        <a:buNone/>
-                      </a:pPr>
-                      <a:r>
-                        <a:rPr lang="en-US" sz="900" b="1" dirty="0">
-                          <a:solidFill>
-                            <a:srgbClr val="222222"/>
-                          </a:solidFill>
-                          <a:latin typeface="Meiryo" pitchFamily="34" charset="0"/>
-                          <a:ea typeface="Meiryo" pitchFamily="34" charset="-122"/>
-                          <a:cs typeface="Meiryo" pitchFamily="34" charset="-120"/>
-                        </a:rPr>
-                        <a:t>エスポワール</a:t>
-                      </a:r>
-                      <a:endParaRPr lang="en-US" sz="1100" dirty="0">
-                        <a:latin typeface="Meiryo" charset="0"/>
-                        <a:ea typeface="Meiryo" charset="0"/>
-                        <a:cs typeface="Meiryo" charset="0"/>
-                      </a:endParaRPr>
-                    </a:p>
-                  </a:txBody>
-                  <a:tcPr anchor="ctr" marT="18000" marB="18000" marL="64008" marR="45720">
-                    <a:lnL w="9525" cap="flat" cmpd="sng" algn="ctr">
-                      <a:solidFill>
-                        <a:srgbClr val="BFBFBF"/>
-                      </a:solidFill>
-                      <a:prstDash val="solid"/>
-                      <a:round/>
-                      <a:headEnd type="none" w="med" len="med"/>
-                      <a:tailEnd type="none" w="med" len="med"/>
-                    </a:lnL>
-                    <a:lnR w="9525" cap="flat" cmpd="sng" algn="ctr">
-                      <a:solidFill>
-                        <a:srgbClr val="BFBFBF"/>
-                      </a:solidFill>
-                      <a:prstDash val="solid"/>
-                      <a:round/>
-                      <a:headEnd type="none" w="med" len="med"/>
-                      <a:tailEnd type="none" w="med" len="med"/>
-                    </a:lnR>
-                    <a:lnT w="9525" cap="flat" cmpd="sng" algn="ctr">
-                      <a:solidFill>
-                        <a:srgbClr val="BFBFBF"/>
-                      </a:solidFill>
-                      <a:prstDash val="solid"/>
-                      <a:round/>
-                      <a:headEnd type="none" w="med" len="med"/>
-                      <a:tailEnd type="none" w="med" len="med"/>
-                    </a:lnT>
-                    <a:lnB w="9525" cap="flat" cmpd="sng" algn="ctr">
-                      <a:solidFill>
-                        <a:srgbClr val="BFBFBF"/>
-                      </a:solidFill>
-                      <a:prstDash val="solid"/>
-                      <a:round/>
-                      <a:headEnd type="none" w="med" len="med"/>
-                      <a:tailEnd type="none" w="med" len="med"/>
-                    </a:lnB>
-                  </a:tcPr>
-                </a:tc>
-                <a:tc>
-                  <a:txBody>
-                    <a:bodyPr/>
-                    <a:lstStyle/>
-                    <a:p>
-                      <a:pPr marL="0" indent="0" algn="l">
-                        <a:buNone/>
-                      </a:pPr>
-                      <a:r>
-                        <a:rPr lang="en-US" sz="900" dirty="0">
-                          <a:solidFill>
-                            <a:srgbClr val="222222"/>
-                          </a:solidFill>
-                          <a:latin typeface="Meiryo" pitchFamily="34" charset="0"/>
-                          <a:ea typeface="Meiryo" pitchFamily="34" charset="-122"/>
-                          <a:cs typeface="Meiryo" pitchFamily="34" charset="-120"/>
-                        </a:rPr>
-                        <a:t>放課後等デイサービス</a:t>
-                      </a:r>
-                      <a:endParaRPr lang="en-US" sz="1100" dirty="0">
-                        <a:latin typeface="Meiryo" charset="0"/>
-                        <a:ea typeface="Meiryo" charset="0"/>
-                        <a:cs typeface="Meiryo" charset="0"/>
-                      </a:endParaRPr>
-                    </a:p>
-                  </a:txBody>
-                  <a:tcPr anchor="ctr" marT="18000" marB="18000" marL="64008" marR="45720">
-                    <a:lnL w="9525" cap="flat" cmpd="sng" algn="ctr">
-                      <a:solidFill>
-                        <a:srgbClr val="BFBFBF"/>
-                      </a:solidFill>
-                      <a:prstDash val="solid"/>
-                      <a:round/>
-                      <a:headEnd type="none" w="med" len="med"/>
-                      <a:tailEnd type="none" w="med" len="med"/>
-                    </a:lnL>
-                    <a:lnR w="9525" cap="flat" cmpd="sng" algn="ctr">
-                      <a:solidFill>
-                        <a:srgbClr val="BFBFBF"/>
-                      </a:solidFill>
-                      <a:prstDash val="solid"/>
-                      <a:round/>
-                      <a:headEnd type="none" w="med" len="med"/>
-                      <a:tailEnd type="none" w="med" len="med"/>
-                    </a:lnR>
-                    <a:lnT w="9525" cap="flat" cmpd="sng" algn="ctr">
-                      <a:solidFill>
-                        <a:srgbClr val="BFBFBF"/>
-                      </a:solidFill>
-                      <a:prstDash val="solid"/>
-                      <a:round/>
-                      <a:headEnd type="none" w="med" len="med"/>
-                      <a:tailEnd type="none" w="med" len="med"/>
-                    </a:lnT>
-                    <a:lnB w="9525" cap="flat" cmpd="sng" algn="ctr">
-                      <a:solidFill>
-                        <a:srgbClr val="BFBFBF"/>
-                      </a:solidFill>
-                      <a:prstDash val="solid"/>
-                      <a:round/>
-                      <a:headEnd type="none" w="med" len="med"/>
-                      <a:tailEnd type="none" w="med" len="med"/>
-                    </a:lnB>
-                  </a:tcPr>
-                </a:tc>
-                <a:tc>
-                  <a:txBody>
-                    <a:bodyPr/>
-                    <a:lstStyle/>
-                    <a:p>
-                      <a:pPr marL="0" indent="0" algn="l">
-                        <a:buNone/>
-                      </a:pPr>
-                      <a:r>
-                        <a:rPr lang="en-US" sz="900" dirty="0">
-                          <a:solidFill>
-                            <a:srgbClr val="222222"/>
-                          </a:solidFill>
-                          <a:latin typeface="Meiryo" pitchFamily="34" charset="0"/>
-                          <a:ea typeface="Meiryo" pitchFamily="34" charset="-122"/>
-                          <a:cs typeface="Meiryo" pitchFamily="34" charset="-120"/>
-                        </a:rPr>
-                        <a:t>要確認</a:t>
-                      </a:r>
-                      <a:endParaRPr lang="en-US" sz="1100" dirty="0">
-                        <a:latin typeface="Meiryo" charset="0"/>
-                        <a:ea typeface="Meiryo" charset="0"/>
-                        <a:cs typeface="Meiryo" charset="0"/>
-                      </a:endParaRPr>
-                    </a:p>
-                  </a:txBody>
-                  <a:tcPr anchor="ctr" marT="18000" marB="18000" marL="64008" marR="45720">
-                    <a:lnL w="9525" cap="flat" cmpd="sng" algn="ctr">
-                      <a:solidFill>
-                        <a:srgbClr val="BFBFBF"/>
-                      </a:solidFill>
-                      <a:prstDash val="solid"/>
-                      <a:round/>
-                      <a:headEnd type="none" w="med" len="med"/>
-                      <a:tailEnd type="none" w="med" len="med"/>
-                    </a:lnL>
-                    <a:lnR w="9525" cap="flat" cmpd="sng" algn="ctr">
-                      <a:solidFill>
-                        <a:srgbClr val="BFBFBF"/>
-                      </a:solidFill>
-                      <a:prstDash val="solid"/>
-                      <a:round/>
-                      <a:headEnd type="none" w="med" len="med"/>
-                      <a:tailEnd type="none" w="med" len="med"/>
-                    </a:lnR>
-                    <a:lnT w="9525" cap="flat" cmpd="sng" algn="ctr">
-                      <a:solidFill>
-                        <a:srgbClr val="BFBFBF"/>
-                      </a:solidFill>
-                      <a:prstDash val="solid"/>
-                      <a:round/>
-                      <a:headEnd type="none" w="med" len="med"/>
-                      <a:tailEnd type="none" w="med" len="med"/>
-                    </a:lnT>
-                    <a:lnB w="9525" cap="flat" cmpd="sng" algn="ctr">
-                      <a:solidFill>
-                        <a:srgbClr val="BFBFBF"/>
-                      </a:solidFill>
-                      <a:prstDash val="solid"/>
-                      <a:round/>
-                      <a:headEnd type="none" w="med" len="med"/>
-                      <a:tailEnd type="none" w="med" len="med"/>
-                    </a:lnB>
-                  </a:tcPr>
-                </a:tc>
-                <a:tc>
-                  <a:txBody>
-                    <a:bodyPr/>
-                    <a:lstStyle/>
-                    <a:p>
-                      <a:pPr marL="0" indent="0" algn="l">
-                        <a:buNone/>
-                      </a:pPr>
-                      <a:r>
-                        <a:rPr lang="en-US" sz="900" dirty="0">
-                          <a:solidFill>
-                            <a:srgbClr val="222222"/>
-                          </a:solidFill>
-                          <a:latin typeface="Meiryo" pitchFamily="34" charset="0"/>
-                          <a:ea typeface="Meiryo" pitchFamily="34" charset="-122"/>
-                          <a:cs typeface="Meiryo" pitchFamily="34" charset="-120"/>
-                        </a:rPr>
-                        <a:t>田間2-56-10</a:t>
-                      </a:r>
-                      <a:endParaRPr lang="en-US" sz="1100" dirty="0">
-                        <a:latin typeface="Meiryo" charset="0"/>
-                        <a:ea typeface="Meiryo" charset="0"/>
-                        <a:cs typeface="Meiryo" charset="0"/>
-                      </a:endParaRPr>
-                    </a:p>
-                  </a:txBody>
-                  <a:tcPr anchor="ctr" marT="18000" marB="18000" marL="64008" marR="45720">
-                    <a:lnL w="9525" cap="flat" cmpd="sng" algn="ctr">
-                      <a:solidFill>
-                        <a:srgbClr val="BFBFBF"/>
-                      </a:solidFill>
-                      <a:prstDash val="solid"/>
-                      <a:round/>
-                      <a:headEnd type="none" w="med" len="med"/>
-                      <a:tailEnd type="none" w="med" len="med"/>
-                    </a:lnL>
-                    <a:lnR w="9525" cap="flat" cmpd="sng" algn="ctr">
-                      <a:solidFill>
-                        <a:srgbClr val="BFBFBF"/>
-                      </a:solidFill>
-                      <a:prstDash val="solid"/>
-                      <a:round/>
-                      <a:headEnd type="none" w="med" len="med"/>
-                      <a:tailEnd type="none" w="med" len="med"/>
-                    </a:lnR>
-                    <a:lnT w="9525" cap="flat" cmpd="sng" algn="ctr">
-                      <a:solidFill>
-                        <a:srgbClr val="BFBFBF"/>
-                      </a:solidFill>
-                      <a:prstDash val="solid"/>
-                      <a:round/>
-                      <a:headEnd type="none" w="med" len="med"/>
-                      <a:tailEnd type="none" w="med" len="med"/>
-                    </a:lnT>
-                    <a:lnB w="9525" cap="flat" cmpd="sng" algn="ctr">
-                      <a:solidFill>
-                        <a:srgbClr val="BFBFBF"/>
-                      </a:solidFill>
-                      <a:prstDash val="solid"/>
-                      <a:round/>
-                      <a:headEnd type="none" w="med" len="med"/>
-                      <a:tailEnd type="none" w="med" len="med"/>
-                    </a:lnB>
-                  </a:tcPr>
-                </a:tc>
-                <a:tc>
-                  <a:txBody>
-                    <a:bodyPr/>
-                    <a:lstStyle/>
-                    <a:p>
-                      <a:pPr marL="0" indent="0" algn="l">
-                        <a:buNone/>
-                      </a:pPr>
-                      <a:r>
-                        <a:rPr lang="en-US" sz="900" dirty="0">
-                          <a:latin typeface="Meiryo" charset="0"/>
-                          <a:ea typeface="Meiryo" charset="0"/>
-                          <a:cs typeface="Meiryo" charset="0"/>
-                        </a:rPr>
-                        <a:t>050-3145-9731</a:t>
-                      </a:r>
-                    </a:p>
-                  </a:txBody>
-                  <a:tcPr anchor="ctr" marT="18000" marB="18000" marL="64008" marR="45720">
-                    <a:lnL w="9525" cap="flat" cmpd="sng" algn="ctr">
-                      <a:solidFill>
-                        <a:srgbClr val="BFBFBF"/>
-                      </a:solidFill>
-                      <a:prstDash val="solid"/>
-                      <a:round/>
-                      <a:headEnd type="none" w="med" len="med"/>
-                      <a:tailEnd type="none" w="med" len="med"/>
-                    </a:lnL>
-                    <a:lnR w="9525" cap="flat" cmpd="sng" algn="ctr">
-                      <a:solidFill>
-                        <a:srgbClr val="BFBFBF"/>
-                      </a:solidFill>
-                      <a:prstDash val="solid"/>
-                      <a:round/>
-                      <a:headEnd type="none" w="med" len="med"/>
-                      <a:tailEnd type="none" w="med" len="med"/>
-                    </a:lnR>
-                    <a:lnT w="9525" cap="flat" cmpd="sng" algn="ctr">
-                      <a:solidFill>
-                        <a:srgbClr val="BFBFBF"/>
-                      </a:solidFill>
-                      <a:prstDash val="solid"/>
-                      <a:round/>
-                      <a:headEnd type="none" w="med" len="med"/>
-                      <a:tailEnd type="none" w="med" len="med"/>
-                    </a:lnT>
-                    <a:lnB w="9525" cap="flat" cmpd="sng" algn="ctr">
-                      <a:solidFill>
-                        <a:srgbClr val="BFBFBF"/>
-                      </a:solidFill>
-                      <a:prstDash val="solid"/>
-                      <a:round/>
-                      <a:headEnd type="none" w="med" len="med"/>
-                      <a:tailEnd type="none" w="med" len="med"/>
-                    </a:lnB>
-                  </a:tcPr>
-                </a:tc>
-                <a:extLst>
-                  <a:ext uri="{0D108BD9-81ED-4DB2-BD59-A6C34878D82A}">
-                    <a16:rowId xmlns:a16="http://schemas.microsoft.com/office/drawing/2014/main" val="10001"/>
-                  </a:ext>
-                </a:extLst>
-              </a:tr>
-              <a:tr h="426720">
-                <a:tc>
-                  <a:txBody>
-                    <a:bodyPr/>
-                    <a:lstStyle/>
-                    <a:p>
-                      <a:pPr marL="0" indent="0" algn="ctr">
-                        <a:buNone/>
-                      </a:pPr>
-                      <a:r>
-                        <a:rPr lang="en-US" sz="900" b="1" dirty="0">
-                          <a:solidFill>
-                            <a:srgbClr val="222222"/>
-                          </a:solidFill>
-                          <a:latin typeface="Meiryo" pitchFamily="34" charset="0"/>
-                          <a:ea typeface="Meiryo" pitchFamily="34" charset="-122"/>
-                          <a:cs typeface="Meiryo" pitchFamily="34" charset="-120"/>
-                        </a:rPr>
-                        <a:t>3</a:t>
-                      </a:r>
-                      <a:endParaRPr lang="en-US" sz="1100" dirty="0">
-                        <a:latin typeface="Meiryo" charset="0"/>
-                        <a:ea typeface="Meiryo" charset="0"/>
-                        <a:cs typeface="Meiryo" charset="0"/>
-                      </a:endParaRPr>
-                    </a:p>
-                  </a:txBody>
-                  <a:tcPr anchor="ctr" marT="18000" marB="18000" marL="64008" marR="45720">
-                    <a:lnL w="9525" cap="flat" cmpd="sng" algn="ctr">
-                      <a:solidFill>
-                        <a:srgbClr val="BFBFBF"/>
-                      </a:solidFill>
-                      <a:prstDash val="solid"/>
-                      <a:round/>
-                      <a:headEnd type="none" w="med" len="med"/>
-                      <a:tailEnd type="none" w="med" len="med"/>
-                    </a:lnL>
-                    <a:lnR w="9525" cap="flat" cmpd="sng" algn="ctr">
-                      <a:solidFill>
-                        <a:srgbClr val="BFBFBF"/>
-                      </a:solidFill>
-                      <a:prstDash val="solid"/>
-                      <a:round/>
-                      <a:headEnd type="none" w="med" len="med"/>
-                      <a:tailEnd type="none" w="med" len="med"/>
-                    </a:lnR>
-                    <a:lnT w="9525" cap="flat" cmpd="sng" algn="ctr">
-                      <a:solidFill>
-                        <a:srgbClr val="BFBFBF"/>
-                      </a:solidFill>
-                      <a:prstDash val="solid"/>
-                      <a:round/>
-                      <a:headEnd type="none" w="med" len="med"/>
-                      <a:tailEnd type="none" w="med" len="med"/>
-                    </a:lnT>
-                    <a:lnB w="9525" cap="flat" cmpd="sng" algn="ctr">
-                      <a:solidFill>
-                        <a:srgbClr val="BFBFBF"/>
-                      </a:solidFill>
-                      <a:prstDash val="solid"/>
-                      <a:round/>
-                      <a:headEnd type="none" w="med" len="med"/>
-                      <a:tailEnd type="none" w="med" len="med"/>
-                    </a:lnB>
-                  </a:tcPr>
-                </a:tc>
-                <a:tc>
-                  <a:txBody>
-                    <a:bodyPr/>
-                    <a:lstStyle/>
-                    <a:p>
-                      <a:pPr marL="0" indent="0" algn="l">
-                        <a:buNone/>
-                      </a:pPr>
-                      <a:r>
-                        <a:rPr lang="en-US" sz="900" b="1" dirty="0">
-                          <a:solidFill>
-                            <a:srgbClr val="222222"/>
-                          </a:solidFill>
-                          <a:latin typeface="Meiryo" pitchFamily="34" charset="0"/>
-                          <a:ea typeface="Meiryo" pitchFamily="34" charset="-122"/>
-                          <a:cs typeface="Meiryo" pitchFamily="34" charset="-120"/>
-                        </a:rPr>
-                        <a:t>ぬくもりKid's</a:t>
-                      </a:r>
-                      <a:endParaRPr lang="en-US" sz="1100" dirty="0">
-                        <a:latin typeface="Meiryo" charset="0"/>
-                        <a:ea typeface="Meiryo" charset="0"/>
-                        <a:cs typeface="Meiryo" charset="0"/>
-                      </a:endParaRPr>
-                    </a:p>
-                  </a:txBody>
-                  <a:tcPr anchor="ctr" marT="18000" marB="18000" marL="64008" marR="45720">
-                    <a:lnL w="9525" cap="flat" cmpd="sng" algn="ctr">
-                      <a:solidFill>
-                        <a:srgbClr val="BFBFBF"/>
-                      </a:solidFill>
-                      <a:prstDash val="solid"/>
-                      <a:round/>
-                      <a:headEnd type="none" w="med" len="med"/>
-                      <a:tailEnd type="none" w="med" len="med"/>
-                    </a:lnL>
-                    <a:lnR w="9525" cap="flat" cmpd="sng" algn="ctr">
-                      <a:solidFill>
-                        <a:srgbClr val="BFBFBF"/>
-                      </a:solidFill>
-                      <a:prstDash val="solid"/>
-                      <a:round/>
-                      <a:headEnd type="none" w="med" len="med"/>
-                      <a:tailEnd type="none" w="med" len="med"/>
-                    </a:lnR>
-                    <a:lnT w="9525" cap="flat" cmpd="sng" algn="ctr">
-                      <a:solidFill>
-                        <a:srgbClr val="BFBFBF"/>
-                      </a:solidFill>
-                      <a:prstDash val="solid"/>
-                      <a:round/>
-                      <a:headEnd type="none" w="med" len="med"/>
-                      <a:tailEnd type="none" w="med" len="med"/>
-                    </a:lnT>
-                    <a:lnB w="9525" cap="flat" cmpd="sng" algn="ctr">
-                      <a:solidFill>
-                        <a:srgbClr val="BFBFBF"/>
-                      </a:solidFill>
-                      <a:prstDash val="solid"/>
-                      <a:round/>
-                      <a:headEnd type="none" w="med" len="med"/>
-                      <a:tailEnd type="none" w="med" len="med"/>
-                    </a:lnB>
-                  </a:tcPr>
-                </a:tc>
-                <a:tc>
-                  <a:txBody>
-                    <a:bodyPr/>
-                    <a:lstStyle/>
-                    <a:p>
-                      <a:pPr marL="0" indent="0" algn="l">
-                        <a:buNone/>
-                      </a:pPr>
-                      <a:r>
-                        <a:rPr lang="en-US" sz="900" dirty="0">
-                          <a:solidFill>
-                            <a:srgbClr val="222222"/>
-                          </a:solidFill>
-                          <a:latin typeface="Meiryo" pitchFamily="34" charset="0"/>
-                          <a:ea typeface="Meiryo" pitchFamily="34" charset="-122"/>
-                          <a:cs typeface="Meiryo" pitchFamily="34" charset="-120"/>
-                        </a:rPr>
-                        <a:t>放課後等デイサービス</a:t>
-                      </a:r>
-                      <a:endParaRPr lang="en-US" sz="1100" dirty="0">
-                        <a:latin typeface="Meiryo" charset="0"/>
-                        <a:ea typeface="Meiryo" charset="0"/>
-                        <a:cs typeface="Meiryo" charset="0"/>
-                      </a:endParaRPr>
-                    </a:p>
-                  </a:txBody>
-                  <a:tcPr anchor="ctr" marT="18000" marB="18000" marL="64008" marR="45720">
-                    <a:lnL w="9525" cap="flat" cmpd="sng" algn="ctr">
-                      <a:solidFill>
-                        <a:srgbClr val="BFBFBF"/>
-                      </a:solidFill>
-                      <a:prstDash val="solid"/>
-                      <a:round/>
-                      <a:headEnd type="none" w="med" len="med"/>
-                      <a:tailEnd type="none" w="med" len="med"/>
-                    </a:lnL>
-                    <a:lnR w="9525" cap="flat" cmpd="sng" algn="ctr">
-                      <a:solidFill>
-                        <a:srgbClr val="BFBFBF"/>
-                      </a:solidFill>
-                      <a:prstDash val="solid"/>
-                      <a:round/>
-                      <a:headEnd type="none" w="med" len="med"/>
-                      <a:tailEnd type="none" w="med" len="med"/>
-                    </a:lnR>
-                    <a:lnT w="9525" cap="flat" cmpd="sng" algn="ctr">
-                      <a:solidFill>
-                        <a:srgbClr val="BFBFBF"/>
-                      </a:solidFill>
-                      <a:prstDash val="solid"/>
-                      <a:round/>
-                      <a:headEnd type="none" w="med" len="med"/>
-                      <a:tailEnd type="none" w="med" len="med"/>
-                    </a:lnT>
-                    <a:lnB w="9525" cap="flat" cmpd="sng" algn="ctr">
-                      <a:solidFill>
-                        <a:srgbClr val="BFBFBF"/>
-                      </a:solidFill>
-                      <a:prstDash val="solid"/>
-                      <a:round/>
-                      <a:headEnd type="none" w="med" len="med"/>
-                      <a:tailEnd type="none" w="med" len="med"/>
-                    </a:lnB>
-                  </a:tcPr>
-                </a:tc>
-                <a:tc>
-                  <a:txBody>
-                    <a:bodyPr/>
-                    <a:lstStyle/>
-                    <a:p>
-                      <a:pPr marL="0" indent="0" algn="l">
-                        <a:buNone/>
-                      </a:pPr>
-                      <a:r>
-                        <a:rPr lang="en-US" sz="900" dirty="0">
-                          <a:solidFill>
-                            <a:srgbClr val="222222"/>
-                          </a:solidFill>
-                          <a:latin typeface="Meiryo" pitchFamily="34" charset="0"/>
-                          <a:ea typeface="Meiryo" pitchFamily="34" charset="-122"/>
-                          <a:cs typeface="Meiryo" pitchFamily="34" charset="-120"/>
-                        </a:rPr>
-                        <a:t>要確認</a:t>
-                      </a:r>
-                      <a:endParaRPr lang="en-US" sz="1100" dirty="0">
-                        <a:latin typeface="Meiryo" charset="0"/>
-                        <a:ea typeface="Meiryo" charset="0"/>
-                        <a:cs typeface="Meiryo" charset="0"/>
-                      </a:endParaRPr>
-                    </a:p>
-                  </a:txBody>
-                  <a:tcPr anchor="ctr" marT="18000" marB="18000" marL="64008" marR="45720">
-                    <a:lnL w="9525" cap="flat" cmpd="sng" algn="ctr">
-                      <a:solidFill>
-                        <a:srgbClr val="BFBFBF"/>
-                      </a:solidFill>
-                      <a:prstDash val="solid"/>
-                      <a:round/>
-                      <a:headEnd type="none" w="med" len="med"/>
-                      <a:tailEnd type="none" w="med" len="med"/>
-                    </a:lnL>
-                    <a:lnR w="9525" cap="flat" cmpd="sng" algn="ctr">
-                      <a:solidFill>
-                        <a:srgbClr val="BFBFBF"/>
-                      </a:solidFill>
-                      <a:prstDash val="solid"/>
-                      <a:round/>
-                      <a:headEnd type="none" w="med" len="med"/>
-                      <a:tailEnd type="none" w="med" len="med"/>
-                    </a:lnR>
-                    <a:lnT w="9525" cap="flat" cmpd="sng" algn="ctr">
-                      <a:solidFill>
-                        <a:srgbClr val="BFBFBF"/>
-                      </a:solidFill>
-                      <a:prstDash val="solid"/>
-                      <a:round/>
-                      <a:headEnd type="none" w="med" len="med"/>
-                      <a:tailEnd type="none" w="med" len="med"/>
-                    </a:lnT>
-                    <a:lnB w="9525" cap="flat" cmpd="sng" algn="ctr">
-                      <a:solidFill>
-                        <a:srgbClr val="BFBFBF"/>
-                      </a:solidFill>
-                      <a:prstDash val="solid"/>
-                      <a:round/>
-                      <a:headEnd type="none" w="med" len="med"/>
-                      <a:tailEnd type="none" w="med" len="med"/>
-                    </a:lnB>
-                  </a:tcPr>
-                </a:tc>
-                <a:tc>
-                  <a:txBody>
-                    <a:bodyPr/>
-                    <a:lstStyle/>
-                    <a:p>
-                      <a:pPr marL="0" indent="0" algn="l">
-                        <a:buNone/>
-                      </a:pPr>
-                      <a:r>
-                        <a:rPr lang="en-US" sz="900" dirty="0">
-                          <a:solidFill>
-                            <a:srgbClr val="222222"/>
-                          </a:solidFill>
-                          <a:latin typeface="Meiryo" pitchFamily="34" charset="0"/>
-                          <a:ea typeface="Meiryo" pitchFamily="34" charset="-122"/>
-                          <a:cs typeface="Meiryo" pitchFamily="34" charset="-120"/>
-                        </a:rPr>
-                        <a:t>八坂台5-29-1</a:t>
-                      </a:r>
-                      <a:endParaRPr lang="en-US" sz="1100" dirty="0">
-                        <a:latin typeface="Meiryo" charset="0"/>
-                        <a:ea typeface="Meiryo" charset="0"/>
-                        <a:cs typeface="Meiryo" charset="0"/>
-                      </a:endParaRPr>
-                    </a:p>
-                  </a:txBody>
-                  <a:tcPr anchor="ctr" marT="18000" marB="18000" marL="64008" marR="45720">
-                    <a:lnL w="9525" cap="flat" cmpd="sng" algn="ctr">
-                      <a:solidFill>
-                        <a:srgbClr val="BFBFBF"/>
-                      </a:solidFill>
-                      <a:prstDash val="solid"/>
-                      <a:round/>
-                      <a:headEnd type="none" w="med" len="med"/>
-                      <a:tailEnd type="none" w="med" len="med"/>
-                    </a:lnL>
-                    <a:lnR w="9525" cap="flat" cmpd="sng" algn="ctr">
-                      <a:solidFill>
-                        <a:srgbClr val="BFBFBF"/>
-                      </a:solidFill>
-                      <a:prstDash val="solid"/>
-                      <a:round/>
-                      <a:headEnd type="none" w="med" len="med"/>
-                      <a:tailEnd type="none" w="med" len="med"/>
-                    </a:lnR>
-                    <a:lnT w="9525" cap="flat" cmpd="sng" algn="ctr">
-                      <a:solidFill>
-                        <a:srgbClr val="BFBFBF"/>
-                      </a:solidFill>
-                      <a:prstDash val="solid"/>
-                      <a:round/>
-                      <a:headEnd type="none" w="med" len="med"/>
-                      <a:tailEnd type="none" w="med" len="med"/>
-                    </a:lnT>
-                    <a:lnB w="9525" cap="flat" cmpd="sng" algn="ctr">
-                      <a:solidFill>
-                        <a:srgbClr val="BFBFBF"/>
-                      </a:solidFill>
-                      <a:prstDash val="solid"/>
-                      <a:round/>
-                      <a:headEnd type="none" w="med" len="med"/>
-                      <a:tailEnd type="none" w="med" len="med"/>
-                    </a:lnB>
-                  </a:tcPr>
-                </a:tc>
-                <a:tc>
-                  <a:txBody>
-                    <a:bodyPr/>
-                    <a:lstStyle/>
-                    <a:p>
-                      <a:pPr marL="0" indent="0" algn="l">
-                        <a:buNone/>
-                      </a:pPr>
-                      <a:r>
-                        <a:rPr lang="en-US" sz="900" dirty="0">
-                          <a:latin typeface="Meiryo" charset="0"/>
-                          <a:ea typeface="Meiryo" charset="0"/>
-                          <a:cs typeface="Meiryo" charset="0"/>
-                        </a:rPr>
-                        <a:t>要確認</a:t>
-                      </a:r>
-                    </a:p>
-                  </a:txBody>
-                  <a:tcPr anchor="ctr" marT="18000" marB="18000" marL="64008" marR="45720">
-                    <a:lnL w="9525" cap="flat" cmpd="sng" algn="ctr">
-                      <a:solidFill>
-                        <a:srgbClr val="BFBFBF"/>
-                      </a:solidFill>
-                      <a:prstDash val="solid"/>
-                      <a:round/>
-                      <a:headEnd type="none" w="med" len="med"/>
-                      <a:tailEnd type="none" w="med" len="med"/>
-                    </a:lnL>
-                    <a:lnR w="9525" cap="flat" cmpd="sng" algn="ctr">
-                      <a:solidFill>
-                        <a:srgbClr val="BFBFBF"/>
-                      </a:solidFill>
-                      <a:prstDash val="solid"/>
-                      <a:round/>
-                      <a:headEnd type="none" w="med" len="med"/>
-                      <a:tailEnd type="none" w="med" len="med"/>
-                    </a:lnR>
-                    <a:lnT w="9525" cap="flat" cmpd="sng" algn="ctr">
-                      <a:solidFill>
-                        <a:srgbClr val="BFBFBF"/>
-                      </a:solidFill>
-                      <a:prstDash val="solid"/>
-                      <a:round/>
-                      <a:headEnd type="none" w="med" len="med"/>
-                      <a:tailEnd type="none" w="med" len="med"/>
-                    </a:lnT>
-                    <a:lnB w="9525" cap="flat" cmpd="sng" algn="ctr">
-                      <a:solidFill>
-                        <a:srgbClr val="BFBFBF"/>
-                      </a:solidFill>
-                      <a:prstDash val="solid"/>
-                      <a:round/>
-                      <a:headEnd type="none" w="med" len="med"/>
-                      <a:tailEnd type="none" w="med" len="med"/>
-                    </a:lnB>
-                  </a:tcPr>
-                </a:tc>
-                <a:extLst>
-                  <a:ext uri="{0D108BD9-81ED-4DB2-BD59-A6C34878D82A}">
-                    <a16:rowId xmlns:a16="http://schemas.microsoft.com/office/drawing/2014/main" val="10001"/>
-                  </a:ext>
-                </a:extLst>
-              </a:tr>
-              <a:tr h="426720">
-                <a:tc>
-                  <a:txBody>
-                    <a:bodyPr/>
-                    <a:lstStyle/>
-                    <a:p>
-                      <a:pPr marL="0" indent="0" algn="ctr">
-                        <a:buNone/>
-                      </a:pPr>
-                      <a:r>
-                        <a:rPr lang="en-US" sz="900" b="1" dirty="0">
-                          <a:solidFill>
-                            <a:srgbClr val="222222"/>
-                          </a:solidFill>
-                          <a:latin typeface="Meiryo" pitchFamily="34" charset="0"/>
-                          <a:ea typeface="Meiryo" pitchFamily="34" charset="-122"/>
-                          <a:cs typeface="Meiryo" pitchFamily="34" charset="-120"/>
-                        </a:rPr>
-                        <a:t>4</a:t>
-                      </a:r>
-                      <a:endParaRPr lang="en-US" sz="1100" dirty="0">
-                        <a:latin typeface="Meiryo" charset="0"/>
-                        <a:ea typeface="Meiryo" charset="0"/>
-                        <a:cs typeface="Meiryo" charset="0"/>
-                      </a:endParaRPr>
-                    </a:p>
-                  </a:txBody>
-                  <a:tcPr anchor="ctr" marT="18000" marB="18000" marL="64008" marR="45720">
-                    <a:lnL w="9525" cap="flat" cmpd="sng" algn="ctr">
-                      <a:solidFill>
-                        <a:srgbClr val="BFBFBF"/>
-                      </a:solidFill>
-                      <a:prstDash val="solid"/>
-                      <a:round/>
-                      <a:headEnd type="none" w="med" len="med"/>
-                      <a:tailEnd type="none" w="med" len="med"/>
-                    </a:lnL>
-                    <a:lnR w="9525" cap="flat" cmpd="sng" algn="ctr">
-                      <a:solidFill>
-                        <a:srgbClr val="BFBFBF"/>
-                      </a:solidFill>
-                      <a:prstDash val="solid"/>
-                      <a:round/>
-                      <a:headEnd type="none" w="med" len="med"/>
-                      <a:tailEnd type="none" w="med" len="med"/>
-                    </a:lnR>
-                    <a:lnT w="9525" cap="flat" cmpd="sng" algn="ctr">
-                      <a:solidFill>
-                        <a:srgbClr val="BFBFBF"/>
-                      </a:solidFill>
-                      <a:prstDash val="solid"/>
-                      <a:round/>
-                      <a:headEnd type="none" w="med" len="med"/>
-                      <a:tailEnd type="none" w="med" len="med"/>
-                    </a:lnT>
-                    <a:lnB w="9525" cap="flat" cmpd="sng" algn="ctr">
-                      <a:solidFill>
-                        <a:srgbClr val="BFBFBF"/>
-                      </a:solidFill>
-                      <a:prstDash val="solid"/>
-                      <a:round/>
-                      <a:headEnd type="none" w="med" len="med"/>
-                      <a:tailEnd type="none" w="med" len="med"/>
-                    </a:lnB>
-                  </a:tcPr>
-                </a:tc>
-                <a:tc>
-                  <a:txBody>
-                    <a:bodyPr/>
-                    <a:lstStyle/>
-                    <a:p>
-                      <a:pPr marL="0" indent="0" algn="l">
-                        <a:buNone/>
-                      </a:pPr>
-                      <a:r>
-                        <a:rPr lang="en-US" sz="900" b="1" dirty="0">
-                          <a:solidFill>
-                            <a:srgbClr val="222222"/>
-                          </a:solidFill>
-                          <a:latin typeface="Meiryo" pitchFamily="34" charset="0"/>
-                          <a:ea typeface="Meiryo" pitchFamily="34" charset="-122"/>
-                          <a:cs typeface="Meiryo" pitchFamily="34" charset="-120"/>
-                        </a:rPr>
-                        <a:t>ホッとスタジオ</a:t>
-                      </a:r>
-                      <a:endParaRPr lang="en-US" sz="1100" dirty="0">
-                        <a:latin typeface="Meiryo" charset="0"/>
-                        <a:ea typeface="Meiryo" charset="0"/>
-                        <a:cs typeface="Meiryo" charset="0"/>
-                      </a:endParaRPr>
-                    </a:p>
-                  </a:txBody>
-                  <a:tcPr anchor="ctr" marT="18000" marB="18000" marL="64008" marR="45720">
-                    <a:lnL w="9525" cap="flat" cmpd="sng" algn="ctr">
-                      <a:solidFill>
-                        <a:srgbClr val="BFBFBF"/>
-                      </a:solidFill>
-                      <a:prstDash val="solid"/>
-                      <a:round/>
-                      <a:headEnd type="none" w="med" len="med"/>
-                      <a:tailEnd type="none" w="med" len="med"/>
-                    </a:lnL>
-                    <a:lnR w="9525" cap="flat" cmpd="sng" algn="ctr">
-                      <a:solidFill>
-                        <a:srgbClr val="BFBFBF"/>
-                      </a:solidFill>
-                      <a:prstDash val="solid"/>
-                      <a:round/>
-                      <a:headEnd type="none" w="med" len="med"/>
-                      <a:tailEnd type="none" w="med" len="med"/>
-                    </a:lnR>
-                    <a:lnT w="9525" cap="flat" cmpd="sng" algn="ctr">
-                      <a:solidFill>
-                        <a:srgbClr val="BFBFBF"/>
-                      </a:solidFill>
-                      <a:prstDash val="solid"/>
-                      <a:round/>
-                      <a:headEnd type="none" w="med" len="med"/>
-                      <a:tailEnd type="none" w="med" len="med"/>
-                    </a:lnT>
-                    <a:lnB w="9525" cap="flat" cmpd="sng" algn="ctr">
-                      <a:solidFill>
-                        <a:srgbClr val="BFBFBF"/>
-                      </a:solidFill>
-                      <a:prstDash val="solid"/>
-                      <a:round/>
-                      <a:headEnd type="none" w="med" len="med"/>
-                      <a:tailEnd type="none" w="med" len="med"/>
-                    </a:lnB>
-                  </a:tcPr>
-                </a:tc>
-                <a:tc>
-                  <a:txBody>
-                    <a:bodyPr/>
-                    <a:lstStyle/>
-                    <a:p>
-                      <a:pPr marL="0" indent="0" algn="l">
-                        <a:buNone/>
-                      </a:pPr>
-                      <a:r>
-                        <a:rPr lang="en-US" sz="900" dirty="0">
-                          <a:solidFill>
-                            <a:srgbClr val="222222"/>
-                          </a:solidFill>
-                          <a:latin typeface="Meiryo" pitchFamily="34" charset="0"/>
-                          <a:ea typeface="Meiryo" pitchFamily="34" charset="-122"/>
-                          <a:cs typeface="Meiryo" pitchFamily="34" charset="-120"/>
-                        </a:rPr>
-                        <a:t>放課後等デイサービス</a:t>
-                      </a:r>
-                      <a:endParaRPr lang="en-US" sz="1100" dirty="0">
-                        <a:latin typeface="Meiryo" charset="0"/>
-                        <a:ea typeface="Meiryo" charset="0"/>
-                        <a:cs typeface="Meiryo" charset="0"/>
-                      </a:endParaRPr>
-                    </a:p>
-                  </a:txBody>
-                  <a:tcPr anchor="ctr" marT="18000" marB="18000" marL="64008" marR="45720">
-                    <a:lnL w="9525" cap="flat" cmpd="sng" algn="ctr">
-                      <a:solidFill>
-                        <a:srgbClr val="BFBFBF"/>
-                      </a:solidFill>
-                      <a:prstDash val="solid"/>
-                      <a:round/>
-                      <a:headEnd type="none" w="med" len="med"/>
-                      <a:tailEnd type="none" w="med" len="med"/>
-                    </a:lnL>
-                    <a:lnR w="9525" cap="flat" cmpd="sng" algn="ctr">
-                      <a:solidFill>
-                        <a:srgbClr val="BFBFBF"/>
-                      </a:solidFill>
-                      <a:prstDash val="solid"/>
-                      <a:round/>
-                      <a:headEnd type="none" w="med" len="med"/>
-                      <a:tailEnd type="none" w="med" len="med"/>
-                    </a:lnR>
-                    <a:lnT w="9525" cap="flat" cmpd="sng" algn="ctr">
-                      <a:solidFill>
-                        <a:srgbClr val="BFBFBF"/>
-                      </a:solidFill>
-                      <a:prstDash val="solid"/>
-                      <a:round/>
-                      <a:headEnd type="none" w="med" len="med"/>
-                      <a:tailEnd type="none" w="med" len="med"/>
-                    </a:lnT>
-                    <a:lnB w="9525" cap="flat" cmpd="sng" algn="ctr">
-                      <a:solidFill>
-                        <a:srgbClr val="BFBFBF"/>
-                      </a:solidFill>
-                      <a:prstDash val="solid"/>
-                      <a:round/>
-                      <a:headEnd type="none" w="med" len="med"/>
-                      <a:tailEnd type="none" w="med" len="med"/>
-                    </a:lnB>
-                  </a:tcPr>
-                </a:tc>
-                <a:tc>
-                  <a:txBody>
-                    <a:bodyPr/>
-                    <a:lstStyle/>
-                    <a:p>
-                      <a:pPr marL="0" indent="0" algn="l">
-                        <a:buNone/>
-                      </a:pPr>
-                      <a:r>
-                        <a:rPr lang="en-US" sz="900" dirty="0">
-                          <a:solidFill>
-                            <a:srgbClr val="222222"/>
-                          </a:solidFill>
-                          <a:latin typeface="Meiryo" pitchFamily="34" charset="0"/>
-                          <a:ea typeface="Meiryo" pitchFamily="34" charset="-122"/>
-                          <a:cs typeface="Meiryo" pitchFamily="34" charset="-120"/>
-                        </a:rPr>
-                        <a:t>要確認</a:t>
-                      </a:r>
-                      <a:endParaRPr lang="en-US" sz="1100" dirty="0">
-                        <a:latin typeface="Meiryo" charset="0"/>
-                        <a:ea typeface="Meiryo" charset="0"/>
-                        <a:cs typeface="Meiryo" charset="0"/>
-                      </a:endParaRPr>
-                    </a:p>
-                  </a:txBody>
-                  <a:tcPr anchor="ctr" marT="18000" marB="18000" marL="64008" marR="45720">
-                    <a:lnL w="9525" cap="flat" cmpd="sng" algn="ctr">
-                      <a:solidFill>
-                        <a:srgbClr val="BFBFBF"/>
-                      </a:solidFill>
-                      <a:prstDash val="solid"/>
-                      <a:round/>
-                      <a:headEnd type="none" w="med" len="med"/>
-                      <a:tailEnd type="none" w="med" len="med"/>
-                    </a:lnL>
-                    <a:lnR w="9525" cap="flat" cmpd="sng" algn="ctr">
-                      <a:solidFill>
-                        <a:srgbClr val="BFBFBF"/>
-                      </a:solidFill>
-                      <a:prstDash val="solid"/>
-                      <a:round/>
-                      <a:headEnd type="none" w="med" len="med"/>
-                      <a:tailEnd type="none" w="med" len="med"/>
-                    </a:lnR>
-                    <a:lnT w="9525" cap="flat" cmpd="sng" algn="ctr">
-                      <a:solidFill>
-                        <a:srgbClr val="BFBFBF"/>
-                      </a:solidFill>
-                      <a:prstDash val="solid"/>
-                      <a:round/>
-                      <a:headEnd type="none" w="med" len="med"/>
-                      <a:tailEnd type="none" w="med" len="med"/>
-                    </a:lnT>
-                    <a:lnB w="9525" cap="flat" cmpd="sng" algn="ctr">
-                      <a:solidFill>
-                        <a:srgbClr val="BFBFBF"/>
-                      </a:solidFill>
-                      <a:prstDash val="solid"/>
-                      <a:round/>
-                      <a:headEnd type="none" w="med" len="med"/>
-                      <a:tailEnd type="none" w="med" len="med"/>
-                    </a:lnB>
-                  </a:tcPr>
-                </a:tc>
-                <a:tc>
-                  <a:txBody>
-                    <a:bodyPr/>
-                    <a:lstStyle/>
-                    <a:p>
-                      <a:pPr marL="0" indent="0" algn="l">
-                        <a:buNone/>
-                      </a:pPr>
-                      <a:r>
-                        <a:rPr lang="en-US" sz="900" dirty="0">
-                          <a:solidFill>
-                            <a:srgbClr val="222222"/>
-                          </a:solidFill>
-                          <a:latin typeface="Meiryo" pitchFamily="34" charset="0"/>
-                          <a:ea typeface="Meiryo" pitchFamily="34" charset="-122"/>
-                          <a:cs typeface="Meiryo" pitchFamily="34" charset="-120"/>
-                        </a:rPr>
-                        <a:t>西福俵103-35</a:t>
-                      </a:r>
-                      <a:endParaRPr lang="en-US" sz="1100" dirty="0">
-                        <a:latin typeface="Meiryo" charset="0"/>
-                        <a:ea typeface="Meiryo" charset="0"/>
-                        <a:cs typeface="Meiryo" charset="0"/>
-                      </a:endParaRPr>
-                    </a:p>
-                  </a:txBody>
-                  <a:tcPr anchor="ctr" marT="18000" marB="18000" marL="64008" marR="45720">
-                    <a:lnL w="9525" cap="flat" cmpd="sng" algn="ctr">
-                      <a:solidFill>
-                        <a:srgbClr val="BFBFBF"/>
-                      </a:solidFill>
-                      <a:prstDash val="solid"/>
-                      <a:round/>
-                      <a:headEnd type="none" w="med" len="med"/>
-                      <a:tailEnd type="none" w="med" len="med"/>
-                    </a:lnL>
-                    <a:lnR w="9525" cap="flat" cmpd="sng" algn="ctr">
-                      <a:solidFill>
-                        <a:srgbClr val="BFBFBF"/>
-                      </a:solidFill>
-                      <a:prstDash val="solid"/>
-                      <a:round/>
-                      <a:headEnd type="none" w="med" len="med"/>
-                      <a:tailEnd type="none" w="med" len="med"/>
-                    </a:lnR>
-                    <a:lnT w="9525" cap="flat" cmpd="sng" algn="ctr">
-                      <a:solidFill>
-                        <a:srgbClr val="BFBFBF"/>
-                      </a:solidFill>
-                      <a:prstDash val="solid"/>
-                      <a:round/>
-                      <a:headEnd type="none" w="med" len="med"/>
-                      <a:tailEnd type="none" w="med" len="med"/>
-                    </a:lnT>
-                    <a:lnB w="9525" cap="flat" cmpd="sng" algn="ctr">
-                      <a:solidFill>
-                        <a:srgbClr val="BFBFBF"/>
-                      </a:solidFill>
-                      <a:prstDash val="solid"/>
-                      <a:round/>
-                      <a:headEnd type="none" w="med" len="med"/>
-                      <a:tailEnd type="none" w="med" len="med"/>
-                    </a:lnB>
-                  </a:tcPr>
-                </a:tc>
-                <a:tc>
-                  <a:txBody>
-                    <a:bodyPr/>
-                    <a:lstStyle/>
-                    <a:p>
-                      <a:pPr marL="0" indent="0" algn="l">
-                        <a:buNone/>
-                      </a:pPr>
-                      <a:r>
-                        <a:rPr lang="en-US" sz="900" dirty="0">
-                          <a:latin typeface="Meiryo" charset="0"/>
-                          <a:ea typeface="Meiryo" charset="0"/>
-                          <a:cs typeface="Meiryo" charset="0"/>
-                        </a:rPr>
-                        <a:t>要確認</a:t>
-                      </a:r>
-                    </a:p>
-                  </a:txBody>
-                  <a:tcPr anchor="ctr" marT="18000" marB="18000" marL="64008" marR="45720">
-                    <a:lnL w="9525" cap="flat" cmpd="sng" algn="ctr">
-                      <a:solidFill>
-                        <a:srgbClr val="BFBFBF"/>
-                      </a:solidFill>
-                      <a:prstDash val="solid"/>
-                      <a:round/>
-                      <a:headEnd type="none" w="med" len="med"/>
-                      <a:tailEnd type="none" w="med" len="med"/>
-                    </a:lnL>
-                    <a:lnR w="9525" cap="flat" cmpd="sng" algn="ctr">
-                      <a:solidFill>
-                        <a:srgbClr val="BFBFBF"/>
-                      </a:solidFill>
-                      <a:prstDash val="solid"/>
-                      <a:round/>
-                      <a:headEnd type="none" w="med" len="med"/>
-                      <a:tailEnd type="none" w="med" len="med"/>
-                    </a:lnR>
-                    <a:lnT w="9525" cap="flat" cmpd="sng" algn="ctr">
-                      <a:solidFill>
-                        <a:srgbClr val="BFBFBF"/>
-                      </a:solidFill>
-                      <a:prstDash val="solid"/>
-                      <a:round/>
-                      <a:headEnd type="none" w="med" len="med"/>
-                      <a:tailEnd type="none" w="med" len="med"/>
-                    </a:lnT>
-                    <a:lnB w="9525" cap="flat" cmpd="sng" algn="ctr">
-                      <a:solidFill>
-                        <a:srgbClr val="BFBFBF"/>
-                      </a:solidFill>
-                      <a:prstDash val="solid"/>
-                      <a:round/>
-                      <a:headEnd type="none" w="med" len="med"/>
-                      <a:tailEnd type="none" w="med" len="med"/>
-                    </a:lnB>
-                  </a:tcPr>
-                </a:tc>
-                <a:extLst>
-                  <a:ext uri="{0D108BD9-81ED-4DB2-BD59-A6C34878D82A}">
-                    <a16:rowId xmlns:a16="http://schemas.microsoft.com/office/drawing/2014/main" val="10001"/>
-                  </a:ext>
-                </a:extLst>
-              </a:tr>
-              <a:tr h="426720">
-                <a:tc>
-                  <a:txBody>
-                    <a:bodyPr/>
-                    <a:lstStyle/>
-                    <a:p>
-                      <a:pPr marL="0" indent="0" algn="ctr">
-                        <a:buNone/>
-                      </a:pPr>
-                      <a:r>
-                        <a:rPr lang="en-US" sz="900" b="1" dirty="0">
-                          <a:solidFill>
-                            <a:srgbClr val="222222"/>
-                          </a:solidFill>
-                          <a:latin typeface="Meiryo" pitchFamily="34" charset="0"/>
-                          <a:ea typeface="Meiryo" pitchFamily="34" charset="-122"/>
-                          <a:cs typeface="Meiryo" pitchFamily="34" charset="-120"/>
-                        </a:rPr>
-                        <a:t>5</a:t>
-                      </a:r>
-                      <a:endParaRPr lang="en-US" sz="1100" dirty="0">
-                        <a:latin typeface="Meiryo" charset="0"/>
-                        <a:ea typeface="Meiryo" charset="0"/>
-                        <a:cs typeface="Meiryo" charset="0"/>
-                      </a:endParaRPr>
-                    </a:p>
-                  </a:txBody>
-                  <a:tcPr anchor="ctr" marT="18000" marB="18000" marL="64008" marR="45720">
-                    <a:lnL w="9525" cap="flat" cmpd="sng" algn="ctr">
-                      <a:solidFill>
-                        <a:srgbClr val="BFBFBF"/>
-                      </a:solidFill>
-                      <a:prstDash val="solid"/>
-                      <a:round/>
-                      <a:headEnd type="none" w="med" len="med"/>
-                      <a:tailEnd type="none" w="med" len="med"/>
-                    </a:lnL>
-                    <a:lnR w="9525" cap="flat" cmpd="sng" algn="ctr">
-                      <a:solidFill>
-                        <a:srgbClr val="BFBFBF"/>
-                      </a:solidFill>
-                      <a:prstDash val="solid"/>
-                      <a:round/>
-                      <a:headEnd type="none" w="med" len="med"/>
-                      <a:tailEnd type="none" w="med" len="med"/>
-                    </a:lnR>
-                    <a:lnT w="9525" cap="flat" cmpd="sng" algn="ctr">
-                      <a:solidFill>
-                        <a:srgbClr val="BFBFBF"/>
-                      </a:solidFill>
-                      <a:prstDash val="solid"/>
-                      <a:round/>
-                      <a:headEnd type="none" w="med" len="med"/>
-                      <a:tailEnd type="none" w="med" len="med"/>
-                    </a:lnT>
-                    <a:lnB w="9525" cap="flat" cmpd="sng" algn="ctr">
-                      <a:solidFill>
-                        <a:srgbClr val="BFBFBF"/>
-                      </a:solidFill>
-                      <a:prstDash val="solid"/>
-                      <a:round/>
-                      <a:headEnd type="none" w="med" len="med"/>
-                      <a:tailEnd type="none" w="med" len="med"/>
-                    </a:lnB>
-                  </a:tcPr>
-                </a:tc>
-                <a:tc>
-                  <a:txBody>
-                    <a:bodyPr/>
-                    <a:lstStyle/>
-                    <a:p>
-                      <a:pPr marL="0" indent="0" algn="l">
-                        <a:buNone/>
-                      </a:pPr>
-                      <a:r>
-                        <a:rPr lang="en-US" sz="900" b="1" dirty="0">
-                          <a:solidFill>
-                            <a:srgbClr val="222222"/>
-                          </a:solidFill>
-                          <a:latin typeface="Meiryo" pitchFamily="34" charset="0"/>
-                          <a:ea typeface="Meiryo" pitchFamily="34" charset="-122"/>
-                          <a:cs typeface="Meiryo" pitchFamily="34" charset="-120"/>
-                        </a:rPr>
-                        <a:t>相談支援事業所 アプリング</a:t>
-                      </a:r>
-                      <a:endParaRPr lang="en-US" sz="1100" dirty="0">
-                        <a:latin typeface="Meiryo" charset="0"/>
-                        <a:ea typeface="Meiryo" charset="0"/>
-                        <a:cs typeface="Meiryo" charset="0"/>
-                      </a:endParaRPr>
-                    </a:p>
-                  </a:txBody>
-                  <a:tcPr anchor="ctr" marT="18000" marB="18000" marL="64008" marR="45720">
-                    <a:lnL w="9525" cap="flat" cmpd="sng" algn="ctr">
-                      <a:solidFill>
-                        <a:srgbClr val="BFBFBF"/>
-                      </a:solidFill>
-                      <a:prstDash val="solid"/>
-                      <a:round/>
-                      <a:headEnd type="none" w="med" len="med"/>
-                      <a:tailEnd type="none" w="med" len="med"/>
-                    </a:lnL>
-                    <a:lnR w="9525" cap="flat" cmpd="sng" algn="ctr">
-                      <a:solidFill>
-                        <a:srgbClr val="BFBFBF"/>
-                      </a:solidFill>
-                      <a:prstDash val="solid"/>
-                      <a:round/>
-                      <a:headEnd type="none" w="med" len="med"/>
-                      <a:tailEnd type="none" w="med" len="med"/>
-                    </a:lnR>
-                    <a:lnT w="9525" cap="flat" cmpd="sng" algn="ctr">
-                      <a:solidFill>
-                        <a:srgbClr val="BFBFBF"/>
-                      </a:solidFill>
-                      <a:prstDash val="solid"/>
-                      <a:round/>
-                      <a:headEnd type="none" w="med" len="med"/>
-                      <a:tailEnd type="none" w="med" len="med"/>
-                    </a:lnT>
-                    <a:lnB w="9525" cap="flat" cmpd="sng" algn="ctr">
-                      <a:solidFill>
-                        <a:srgbClr val="BFBFBF"/>
-                      </a:solidFill>
-                      <a:prstDash val="solid"/>
-                      <a:round/>
-                      <a:headEnd type="none" w="med" len="med"/>
-                      <a:tailEnd type="none" w="med" len="med"/>
-                    </a:lnB>
-                  </a:tcPr>
-                </a:tc>
-                <a:tc>
-                  <a:txBody>
-                    <a:bodyPr/>
-                    <a:lstStyle/>
-                    <a:p>
-                      <a:pPr marL="0" indent="0" algn="l">
-                        <a:buNone/>
-                      </a:pPr>
-                      <a:r>
-                        <a:rPr lang="en-US" sz="900" dirty="0">
-                          <a:solidFill>
-                            <a:srgbClr val="222222"/>
-                          </a:solidFill>
-                          <a:latin typeface="Meiryo" pitchFamily="34" charset="0"/>
-                          <a:ea typeface="Meiryo" pitchFamily="34" charset="-122"/>
-                          <a:cs typeface="Meiryo" pitchFamily="34" charset="-120"/>
-                        </a:rPr>
-                        <a:t>障害児相談支援</a:t>
-                      </a:r>
-                      <a:endParaRPr lang="en-US" sz="1100" dirty="0">
-                        <a:latin typeface="Meiryo" charset="0"/>
-                        <a:ea typeface="Meiryo" charset="0"/>
-                        <a:cs typeface="Meiryo" charset="0"/>
-                      </a:endParaRPr>
-                    </a:p>
-                  </a:txBody>
-                  <a:tcPr anchor="ctr" marT="18000" marB="18000" marL="64008" marR="45720">
-                    <a:lnL w="9525" cap="flat" cmpd="sng" algn="ctr">
-                      <a:solidFill>
-                        <a:srgbClr val="BFBFBF"/>
-                      </a:solidFill>
-                      <a:prstDash val="solid"/>
-                      <a:round/>
-                      <a:headEnd type="none" w="med" len="med"/>
-                      <a:tailEnd type="none" w="med" len="med"/>
-                    </a:lnL>
-                    <a:lnR w="9525" cap="flat" cmpd="sng" algn="ctr">
-                      <a:solidFill>
-                        <a:srgbClr val="BFBFBF"/>
-                      </a:solidFill>
-                      <a:prstDash val="solid"/>
-                      <a:round/>
-                      <a:headEnd type="none" w="med" len="med"/>
-                      <a:tailEnd type="none" w="med" len="med"/>
-                    </a:lnR>
-                    <a:lnT w="9525" cap="flat" cmpd="sng" algn="ctr">
-                      <a:solidFill>
-                        <a:srgbClr val="BFBFBF"/>
-                      </a:solidFill>
-                      <a:prstDash val="solid"/>
-                      <a:round/>
-                      <a:headEnd type="none" w="med" len="med"/>
-                      <a:tailEnd type="none" w="med" len="med"/>
-                    </a:lnT>
-                    <a:lnB w="9525" cap="flat" cmpd="sng" algn="ctr">
-                      <a:solidFill>
-                        <a:srgbClr val="BFBFBF"/>
-                      </a:solidFill>
-                      <a:prstDash val="solid"/>
-                      <a:round/>
-                      <a:headEnd type="none" w="med" len="med"/>
-                      <a:tailEnd type="none" w="med" len="med"/>
-                    </a:lnB>
-                  </a:tcPr>
-                </a:tc>
-                <a:tc>
-                  <a:txBody>
-                    <a:bodyPr/>
-                    <a:lstStyle/>
-                    <a:p>
-                      <a:pPr marL="0" indent="0" algn="l">
-                        <a:buNone/>
-                      </a:pPr>
-                      <a:r>
-                        <a:rPr lang="en-US" sz="900" dirty="0">
-                          <a:solidFill>
-                            <a:srgbClr val="222222"/>
-                          </a:solidFill>
-                          <a:latin typeface="Meiryo" pitchFamily="34" charset="0"/>
-                          <a:ea typeface="Meiryo" pitchFamily="34" charset="-122"/>
-                          <a:cs typeface="Meiryo" pitchFamily="34" charset="-120"/>
-                        </a:rPr>
-                        <a:t>要確認</a:t>
-                      </a:r>
-                      <a:endParaRPr lang="en-US" sz="1100" dirty="0">
-                        <a:latin typeface="Meiryo" charset="0"/>
-                        <a:ea typeface="Meiryo" charset="0"/>
-                        <a:cs typeface="Meiryo" charset="0"/>
-                      </a:endParaRPr>
-                    </a:p>
-                  </a:txBody>
-                  <a:tcPr anchor="ctr" marT="18000" marB="18000" marL="64008" marR="45720">
-                    <a:lnL w="9525" cap="flat" cmpd="sng" algn="ctr">
-                      <a:solidFill>
-                        <a:srgbClr val="BFBFBF"/>
-                      </a:solidFill>
-                      <a:prstDash val="solid"/>
-                      <a:round/>
-                      <a:headEnd type="none" w="med" len="med"/>
-                      <a:tailEnd type="none" w="med" len="med"/>
-                    </a:lnL>
-                    <a:lnR w="9525" cap="flat" cmpd="sng" algn="ctr">
-                      <a:solidFill>
-                        <a:srgbClr val="BFBFBF"/>
-                      </a:solidFill>
-                      <a:prstDash val="solid"/>
-                      <a:round/>
-                      <a:headEnd type="none" w="med" len="med"/>
-                      <a:tailEnd type="none" w="med" len="med"/>
-                    </a:lnR>
-                    <a:lnT w="9525" cap="flat" cmpd="sng" algn="ctr">
-                      <a:solidFill>
-                        <a:srgbClr val="BFBFBF"/>
-                      </a:solidFill>
-                      <a:prstDash val="solid"/>
-                      <a:round/>
-                      <a:headEnd type="none" w="med" len="med"/>
-                      <a:tailEnd type="none" w="med" len="med"/>
-                    </a:lnT>
-                    <a:lnB w="9525" cap="flat" cmpd="sng" algn="ctr">
-                      <a:solidFill>
-                        <a:srgbClr val="BFBFBF"/>
-                      </a:solidFill>
-                      <a:prstDash val="solid"/>
-                      <a:round/>
-                      <a:headEnd type="none" w="med" len="med"/>
-                      <a:tailEnd type="none" w="med" len="med"/>
-                    </a:lnB>
-                  </a:tcPr>
-                </a:tc>
-                <a:tc>
-                  <a:txBody>
-                    <a:bodyPr/>
-                    <a:lstStyle/>
-                    <a:p>
-                      <a:pPr marL="0" indent="0" algn="l">
-                        <a:buNone/>
-                      </a:pPr>
-                      <a:r>
-                        <a:rPr lang="en-US" sz="900" dirty="0">
-                          <a:solidFill>
-                            <a:srgbClr val="222222"/>
-                          </a:solidFill>
-                          <a:latin typeface="Meiryo" pitchFamily="34" charset="0"/>
-                          <a:ea typeface="Meiryo" pitchFamily="34" charset="-122"/>
-                          <a:cs typeface="Meiryo" pitchFamily="34" charset="-120"/>
-                        </a:rPr>
-                        <a:t>東金市内</a:t>
-                      </a:r>
-                      <a:endParaRPr lang="en-US" sz="1100" dirty="0">
-                        <a:latin typeface="Meiryo" charset="0"/>
-                        <a:ea typeface="Meiryo" charset="0"/>
-                        <a:cs typeface="Meiryo" charset="0"/>
-                      </a:endParaRPr>
-                    </a:p>
-                  </a:txBody>
-                  <a:tcPr anchor="ctr" marT="18000" marB="18000" marL="64008" marR="45720">
-                    <a:lnL w="9525" cap="flat" cmpd="sng" algn="ctr">
-                      <a:solidFill>
-                        <a:srgbClr val="BFBFBF"/>
-                      </a:solidFill>
-                      <a:prstDash val="solid"/>
-                      <a:round/>
-                      <a:headEnd type="none" w="med" len="med"/>
-                      <a:tailEnd type="none" w="med" len="med"/>
-                    </a:lnL>
-                    <a:lnR w="9525" cap="flat" cmpd="sng" algn="ctr">
-                      <a:solidFill>
-                        <a:srgbClr val="BFBFBF"/>
-                      </a:solidFill>
-                      <a:prstDash val="solid"/>
-                      <a:round/>
-                      <a:headEnd type="none" w="med" len="med"/>
-                      <a:tailEnd type="none" w="med" len="med"/>
-                    </a:lnR>
-                    <a:lnT w="9525" cap="flat" cmpd="sng" algn="ctr">
-                      <a:solidFill>
-                        <a:srgbClr val="BFBFBF"/>
-                      </a:solidFill>
-                      <a:prstDash val="solid"/>
-                      <a:round/>
-                      <a:headEnd type="none" w="med" len="med"/>
-                      <a:tailEnd type="none" w="med" len="med"/>
-                    </a:lnT>
-                    <a:lnB w="9525" cap="flat" cmpd="sng" algn="ctr">
-                      <a:solidFill>
-                        <a:srgbClr val="BFBFBF"/>
-                      </a:solidFill>
-                      <a:prstDash val="solid"/>
-                      <a:round/>
-                      <a:headEnd type="none" w="med" len="med"/>
-                      <a:tailEnd type="none" w="med" len="med"/>
-                    </a:lnB>
-                  </a:tcPr>
-                </a:tc>
-                <a:tc>
-                  <a:txBody>
-                    <a:bodyPr/>
-                    <a:lstStyle/>
-                    <a:p>
-                      <a:pPr marL="0" indent="0" algn="l">
-                        <a:buNone/>
-                      </a:pPr>
-                      <a:r>
-                        <a:rPr lang="en-US" sz="900" dirty="0">
-                          <a:latin typeface="Meiryo" charset="0"/>
-                          <a:ea typeface="Meiryo" charset="0"/>
-                          <a:cs typeface="Meiryo" charset="0"/>
-                        </a:rPr>
-                        <a:t>要確認</a:t>
-                      </a:r>
-                    </a:p>
-                  </a:txBody>
-                  <a:tcPr anchor="ctr" marT="18000" marB="18000" marL="64008" marR="45720">
-                    <a:lnL w="9525" cap="flat" cmpd="sng" algn="ctr">
-                      <a:solidFill>
-                        <a:srgbClr val="BFBFBF"/>
-                      </a:solidFill>
-                      <a:prstDash val="solid"/>
-                      <a:round/>
-                      <a:headEnd type="none" w="med" len="med"/>
-                      <a:tailEnd type="none" w="med" len="med"/>
-                    </a:lnL>
-                    <a:lnR w="9525" cap="flat" cmpd="sng" algn="ctr">
-                      <a:solidFill>
-                        <a:srgbClr val="BFBFBF"/>
-                      </a:solidFill>
-                      <a:prstDash val="solid"/>
-                      <a:round/>
-                      <a:headEnd type="none" w="med" len="med"/>
-                      <a:tailEnd type="none" w="med" len="med"/>
-                    </a:lnR>
-                    <a:lnT w="9525" cap="flat" cmpd="sng" algn="ctr">
-                      <a:solidFill>
-                        <a:srgbClr val="BFBFBF"/>
-                      </a:solidFill>
-                      <a:prstDash val="solid"/>
-                      <a:round/>
-                      <a:headEnd type="none" w="med" len="med"/>
-                      <a:tailEnd type="none" w="med" len="med"/>
-                    </a:lnT>
-                    <a:lnB w="9525" cap="flat" cmpd="sng" algn="ctr">
-                      <a:solidFill>
-                        <a:srgbClr val="BFBFBF"/>
-                      </a:solidFill>
-                      <a:prstDash val="solid"/>
-                      <a:round/>
-                      <a:headEnd type="none" w="med" len="med"/>
-                      <a:tailEnd type="none" w="med" len="med"/>
-                    </a:lnB>
-                  </a:tcPr>
-                </a:tc>
-                <a:extLst>
-                  <a:ext uri="{0D108BD9-81ED-4DB2-BD59-A6C34878D82A}">
-                    <a16:rowId xmlns:a16="http://schemas.microsoft.com/office/drawing/2014/main" val="10001"/>
-                  </a:ext>
-                </a:extLst>
-              </a:tr>
-              <a:tr h="426720">
-                <a:tc>
-                  <a:txBody>
-                    <a:bodyPr/>
-                    <a:lstStyle/>
-                    <a:p>
-                      <a:pPr marL="0" indent="0" algn="ctr">
-                        <a:buNone/>
-                      </a:pPr>
-                      <a:r>
-                        <a:rPr lang="en-US" sz="900" b="1" dirty="0">
-                          <a:solidFill>
-                            <a:srgbClr val="222222"/>
-                          </a:solidFill>
-                          <a:latin typeface="Meiryo" pitchFamily="34" charset="0"/>
-                          <a:ea typeface="Meiryo" pitchFamily="34" charset="-122"/>
-                          <a:cs typeface="Meiryo" pitchFamily="34" charset="-120"/>
-                        </a:rPr>
-                        <a:t>6</a:t>
-                      </a:r>
-                      <a:endParaRPr lang="en-US" sz="1100" dirty="0">
-                        <a:latin typeface="Meiryo" charset="0"/>
-                        <a:ea typeface="Meiryo" charset="0"/>
-                        <a:cs typeface="Meiryo" charset="0"/>
-                      </a:endParaRPr>
-                    </a:p>
-                  </a:txBody>
-                  <a:tcPr anchor="ctr" marT="18000" marB="18000" marL="64008" marR="45720">
-                    <a:lnL w="9525" cap="flat" cmpd="sng" algn="ctr">
-                      <a:solidFill>
-                        <a:srgbClr val="BFBFBF"/>
-                      </a:solidFill>
-                      <a:prstDash val="solid"/>
-                      <a:round/>
-                      <a:headEnd type="none" w="med" len="med"/>
-                      <a:tailEnd type="none" w="med" len="med"/>
-                    </a:lnL>
-                    <a:lnR w="9525" cap="flat" cmpd="sng" algn="ctr">
-                      <a:solidFill>
-                        <a:srgbClr val="BFBFBF"/>
-                      </a:solidFill>
-                      <a:prstDash val="solid"/>
-                      <a:round/>
-                      <a:headEnd type="none" w="med" len="med"/>
-                      <a:tailEnd type="none" w="med" len="med"/>
-                    </a:lnR>
-                    <a:lnT w="9525" cap="flat" cmpd="sng" algn="ctr">
-                      <a:solidFill>
-                        <a:srgbClr val="BFBFBF"/>
-                      </a:solidFill>
-                      <a:prstDash val="solid"/>
-                      <a:round/>
-                      <a:headEnd type="none" w="med" len="med"/>
-                      <a:tailEnd type="none" w="med" len="med"/>
-                    </a:lnT>
-                    <a:lnB w="9525" cap="flat" cmpd="sng" algn="ctr">
-                      <a:solidFill>
-                        <a:srgbClr val="BFBFBF"/>
-                      </a:solidFill>
-                      <a:prstDash val="solid"/>
-                      <a:round/>
-                      <a:headEnd type="none" w="med" len="med"/>
-                      <a:tailEnd type="none" w="med" len="med"/>
-                    </a:lnB>
-                  </a:tcPr>
-                </a:tc>
-                <a:tc>
-                  <a:txBody>
-                    <a:bodyPr/>
-                    <a:lstStyle/>
-                    <a:p>
-                      <a:pPr marL="0" indent="0" algn="l">
-                        <a:buNone/>
-                      </a:pPr>
-                      <a:r>
-                        <a:rPr lang="en-US" sz="900" b="1" dirty="0">
-                          <a:solidFill>
-                            <a:srgbClr val="222222"/>
-                          </a:solidFill>
-                          <a:latin typeface="Meiryo" pitchFamily="34" charset="0"/>
-                          <a:ea typeface="Meiryo" pitchFamily="34" charset="-122"/>
-                          <a:cs typeface="Meiryo" pitchFamily="34" charset="-120"/>
-                        </a:rPr>
-                        <a:t>街かど福祉相談室 るると</a:t>
-                      </a:r>
-                      <a:endParaRPr lang="en-US" sz="1100" dirty="0">
-                        <a:latin typeface="Meiryo" charset="0"/>
-                        <a:ea typeface="Meiryo" charset="0"/>
-                        <a:cs typeface="Meiryo" charset="0"/>
-                      </a:endParaRPr>
-                    </a:p>
-                  </a:txBody>
-                  <a:tcPr anchor="ctr" marT="18000" marB="18000" marL="64008" marR="45720">
-                    <a:lnL w="9525" cap="flat" cmpd="sng" algn="ctr">
-                      <a:solidFill>
-                        <a:srgbClr val="BFBFBF"/>
-                      </a:solidFill>
-                      <a:prstDash val="solid"/>
-                      <a:round/>
-                      <a:headEnd type="none" w="med" len="med"/>
-                      <a:tailEnd type="none" w="med" len="med"/>
-                    </a:lnL>
-                    <a:lnR w="9525" cap="flat" cmpd="sng" algn="ctr">
-                      <a:solidFill>
-                        <a:srgbClr val="BFBFBF"/>
-                      </a:solidFill>
-                      <a:prstDash val="solid"/>
-                      <a:round/>
-                      <a:headEnd type="none" w="med" len="med"/>
-                      <a:tailEnd type="none" w="med" len="med"/>
-                    </a:lnR>
-                    <a:lnT w="9525" cap="flat" cmpd="sng" algn="ctr">
-                      <a:solidFill>
-                        <a:srgbClr val="BFBFBF"/>
-                      </a:solidFill>
-                      <a:prstDash val="solid"/>
-                      <a:round/>
-                      <a:headEnd type="none" w="med" len="med"/>
-                      <a:tailEnd type="none" w="med" len="med"/>
-                    </a:lnT>
-                    <a:lnB w="9525" cap="flat" cmpd="sng" algn="ctr">
-                      <a:solidFill>
-                        <a:srgbClr val="BFBFBF"/>
-                      </a:solidFill>
-                      <a:prstDash val="solid"/>
-                      <a:round/>
-                      <a:headEnd type="none" w="med" len="med"/>
-                      <a:tailEnd type="none" w="med" len="med"/>
-                    </a:lnB>
-                  </a:tcPr>
-                </a:tc>
-                <a:tc>
-                  <a:txBody>
-                    <a:bodyPr/>
-                    <a:lstStyle/>
-                    <a:p>
-                      <a:pPr marL="0" indent="0" algn="l">
-                        <a:buNone/>
-                      </a:pPr>
-                      <a:r>
-                        <a:rPr lang="en-US" sz="900" dirty="0">
-                          <a:solidFill>
-                            <a:srgbClr val="222222"/>
-                          </a:solidFill>
-                          <a:latin typeface="Meiryo" pitchFamily="34" charset="0"/>
-                          <a:ea typeface="Meiryo" pitchFamily="34" charset="-122"/>
-                          <a:cs typeface="Meiryo" pitchFamily="34" charset="-120"/>
-                        </a:rPr>
-                        <a:t>障害児相談支援</a:t>
-                      </a:r>
-                      <a:endParaRPr lang="en-US" sz="1100" dirty="0">
-                        <a:latin typeface="Meiryo" charset="0"/>
-                        <a:ea typeface="Meiryo" charset="0"/>
-                        <a:cs typeface="Meiryo" charset="0"/>
-                      </a:endParaRPr>
-                    </a:p>
-                  </a:txBody>
-                  <a:tcPr anchor="ctr" marT="18000" marB="18000" marL="64008" marR="45720">
-                    <a:lnL w="9525" cap="flat" cmpd="sng" algn="ctr">
-                      <a:solidFill>
-                        <a:srgbClr val="BFBFBF"/>
-                      </a:solidFill>
-                      <a:prstDash val="solid"/>
-                      <a:round/>
-                      <a:headEnd type="none" w="med" len="med"/>
-                      <a:tailEnd type="none" w="med" len="med"/>
-                    </a:lnL>
-                    <a:lnR w="9525" cap="flat" cmpd="sng" algn="ctr">
-                      <a:solidFill>
-                        <a:srgbClr val="BFBFBF"/>
-                      </a:solidFill>
-                      <a:prstDash val="solid"/>
-                      <a:round/>
-                      <a:headEnd type="none" w="med" len="med"/>
-                      <a:tailEnd type="none" w="med" len="med"/>
-                    </a:lnR>
-                    <a:lnT w="9525" cap="flat" cmpd="sng" algn="ctr">
-                      <a:solidFill>
-                        <a:srgbClr val="BFBFBF"/>
-                      </a:solidFill>
-                      <a:prstDash val="solid"/>
-                      <a:round/>
-                      <a:headEnd type="none" w="med" len="med"/>
-                      <a:tailEnd type="none" w="med" len="med"/>
-                    </a:lnT>
-                    <a:lnB w="9525" cap="flat" cmpd="sng" algn="ctr">
-                      <a:solidFill>
-                        <a:srgbClr val="BFBFBF"/>
-                      </a:solidFill>
-                      <a:prstDash val="solid"/>
-                      <a:round/>
-                      <a:headEnd type="none" w="med" len="med"/>
-                      <a:tailEnd type="none" w="med" len="med"/>
-                    </a:lnB>
-                  </a:tcPr>
-                </a:tc>
-                <a:tc>
-                  <a:txBody>
-                    <a:bodyPr/>
-                    <a:lstStyle/>
-                    <a:p>
-                      <a:pPr marL="0" indent="0" algn="l">
-                        <a:buNone/>
-                      </a:pPr>
-                      <a:r>
-                        <a:rPr lang="en-US" sz="900" dirty="0">
-                          <a:solidFill>
-                            <a:srgbClr val="222222"/>
-                          </a:solidFill>
-                          <a:latin typeface="Meiryo" pitchFamily="34" charset="0"/>
-                          <a:ea typeface="Meiryo" pitchFamily="34" charset="-122"/>
-                          <a:cs typeface="Meiryo" pitchFamily="34" charset="-120"/>
-                        </a:rPr>
-                        <a:t>要確認</a:t>
-                      </a:r>
-                      <a:endParaRPr lang="en-US" sz="1100" dirty="0">
-                        <a:latin typeface="Meiryo" charset="0"/>
-                        <a:ea typeface="Meiryo" charset="0"/>
-                        <a:cs typeface="Meiryo" charset="0"/>
-                      </a:endParaRPr>
-                    </a:p>
-                  </a:txBody>
-                  <a:tcPr anchor="ctr" marT="18000" marB="18000" marL="64008" marR="45720">
-                    <a:lnL w="9525" cap="flat" cmpd="sng" algn="ctr">
-                      <a:solidFill>
-                        <a:srgbClr val="BFBFBF"/>
-                      </a:solidFill>
-                      <a:prstDash val="solid"/>
-                      <a:round/>
-                      <a:headEnd type="none" w="med" len="med"/>
-                      <a:tailEnd type="none" w="med" len="med"/>
-                    </a:lnL>
-                    <a:lnR w="9525" cap="flat" cmpd="sng" algn="ctr">
-                      <a:solidFill>
-                        <a:srgbClr val="BFBFBF"/>
-                      </a:solidFill>
-                      <a:prstDash val="solid"/>
-                      <a:round/>
-                      <a:headEnd type="none" w="med" len="med"/>
-                      <a:tailEnd type="none" w="med" len="med"/>
-                    </a:lnR>
-                    <a:lnT w="9525" cap="flat" cmpd="sng" algn="ctr">
-                      <a:solidFill>
-                        <a:srgbClr val="BFBFBF"/>
-                      </a:solidFill>
-                      <a:prstDash val="solid"/>
-                      <a:round/>
-                      <a:headEnd type="none" w="med" len="med"/>
-                      <a:tailEnd type="none" w="med" len="med"/>
-                    </a:lnT>
-                    <a:lnB w="9525" cap="flat" cmpd="sng" algn="ctr">
-                      <a:solidFill>
-                        <a:srgbClr val="BFBFBF"/>
-                      </a:solidFill>
-                      <a:prstDash val="solid"/>
-                      <a:round/>
-                      <a:headEnd type="none" w="med" len="med"/>
-                      <a:tailEnd type="none" w="med" len="med"/>
-                    </a:lnB>
-                  </a:tcPr>
-                </a:tc>
-                <a:tc>
-                  <a:txBody>
-                    <a:bodyPr/>
-                    <a:lstStyle/>
-                    <a:p>
-                      <a:pPr marL="0" indent="0" algn="l">
-                        <a:buNone/>
-                      </a:pPr>
-                      <a:r>
-                        <a:rPr lang="en-US" sz="900" dirty="0">
-                          <a:solidFill>
-                            <a:srgbClr val="222222"/>
-                          </a:solidFill>
-                          <a:latin typeface="Meiryo" pitchFamily="34" charset="0"/>
-                          <a:ea typeface="Meiryo" pitchFamily="34" charset="-122"/>
-                          <a:cs typeface="Meiryo" pitchFamily="34" charset="-120"/>
-                        </a:rPr>
-                        <a:t>東上宿6-1</a:t>
-                      </a:r>
-                      <a:endParaRPr lang="en-US" sz="1100" dirty="0">
-                        <a:latin typeface="Meiryo" charset="0"/>
-                        <a:ea typeface="Meiryo" charset="0"/>
-                        <a:cs typeface="Meiryo" charset="0"/>
-                      </a:endParaRPr>
-                    </a:p>
-                  </a:txBody>
-                  <a:tcPr anchor="ctr" marT="18000" marB="18000" marL="64008" marR="45720">
-                    <a:lnL w="9525" cap="flat" cmpd="sng" algn="ctr">
-                      <a:solidFill>
-                        <a:srgbClr val="BFBFBF"/>
-                      </a:solidFill>
-                      <a:prstDash val="solid"/>
-                      <a:round/>
-                      <a:headEnd type="none" w="med" len="med"/>
-                      <a:tailEnd type="none" w="med" len="med"/>
-                    </a:lnL>
-                    <a:lnR w="9525" cap="flat" cmpd="sng" algn="ctr">
-                      <a:solidFill>
-                        <a:srgbClr val="BFBFBF"/>
-                      </a:solidFill>
-                      <a:prstDash val="solid"/>
-                      <a:round/>
-                      <a:headEnd type="none" w="med" len="med"/>
-                      <a:tailEnd type="none" w="med" len="med"/>
-                    </a:lnR>
-                    <a:lnT w="9525" cap="flat" cmpd="sng" algn="ctr">
-                      <a:solidFill>
-                        <a:srgbClr val="BFBFBF"/>
-                      </a:solidFill>
-                      <a:prstDash val="solid"/>
-                      <a:round/>
-                      <a:headEnd type="none" w="med" len="med"/>
-                      <a:tailEnd type="none" w="med" len="med"/>
-                    </a:lnT>
-                    <a:lnB w="9525" cap="flat" cmpd="sng" algn="ctr">
-                      <a:solidFill>
-                        <a:srgbClr val="BFBFBF"/>
-                      </a:solidFill>
-                      <a:prstDash val="solid"/>
-                      <a:round/>
-                      <a:headEnd type="none" w="med" len="med"/>
-                      <a:tailEnd type="none" w="med" len="med"/>
-                    </a:lnB>
-                  </a:tcPr>
-                </a:tc>
-                <a:tc>
-                  <a:txBody>
-                    <a:bodyPr/>
-                    <a:lstStyle/>
-                    <a:p>
-                      <a:pPr marL="0" indent="0" algn="l">
-                        <a:buNone/>
-                      </a:pPr>
-                      <a:r>
-                        <a:rPr lang="en-US" sz="900" dirty="0">
-                          <a:latin typeface="Meiryo" charset="0"/>
-                          <a:ea typeface="Meiryo" charset="0"/>
-                          <a:cs typeface="Meiryo" charset="0"/>
-                        </a:rPr>
-                        <a:t>要確認</a:t>
-                      </a:r>
-                    </a:p>
-                  </a:txBody>
-                  <a:tcPr anchor="ctr" marT="18000" marB="18000" marL="64008" marR="45720">
-                    <a:lnL w="9525" cap="flat" cmpd="sng" algn="ctr">
-                      <a:solidFill>
-                        <a:srgbClr val="BFBFBF"/>
-                      </a:solidFill>
-                      <a:prstDash val="solid"/>
-                      <a:round/>
-                      <a:headEnd type="none" w="med" len="med"/>
-                      <a:tailEnd type="none" w="med" len="med"/>
-                    </a:lnL>
-                    <a:lnR w="9525" cap="flat" cmpd="sng" algn="ctr">
-                      <a:solidFill>
-                        <a:srgbClr val="BFBFBF"/>
-                      </a:solidFill>
-                      <a:prstDash val="solid"/>
-                      <a:round/>
-                      <a:headEnd type="none" w="med" len="med"/>
-                      <a:tailEnd type="none" w="med" len="med"/>
-                    </a:lnR>
-                    <a:lnT w="9525" cap="flat" cmpd="sng" algn="ctr">
-                      <a:solidFill>
-                        <a:srgbClr val="BFBFBF"/>
-                      </a:solidFill>
-                      <a:prstDash val="solid"/>
-                      <a:round/>
-                      <a:headEnd type="none" w="med" len="med"/>
-                      <a:tailEnd type="none" w="med" len="med"/>
-                    </a:lnT>
-                    <a:lnB w="9525" cap="flat" cmpd="sng" algn="ctr">
-                      <a:solidFill>
-                        <a:srgbClr val="BFBFBF"/>
-                      </a:solidFill>
-                      <a:prstDash val="solid"/>
-                      <a:round/>
-                      <a:headEnd type="none" w="med" len="med"/>
-                      <a:tailEnd type="none" w="med" len="med"/>
-                    </a:lnB>
-                  </a:tcPr>
-                </a:tc>
-                <a:extLst>
-                  <a:ext uri="{0D108BD9-81ED-4DB2-BD59-A6C34878D82A}">
-                    <a16:rowId xmlns:a16="http://schemas.microsoft.com/office/drawing/2014/main" val="10001"/>
-                  </a:ext>
-                </a:extLst>
-              </a:tr>
-              <a:tr h="426720">
-                <a:tc>
-                  <a:txBody>
-                    <a:bodyPr/>
-                    <a:lstStyle/>
-                    <a:p>
-                      <a:pPr marL="0" indent="0" algn="ctr">
-                        <a:buNone/>
-                      </a:pPr>
-                      <a:r>
-                        <a:rPr lang="en-US" sz="900" b="1" dirty="0">
-                          <a:solidFill>
-                            <a:srgbClr val="222222"/>
-                          </a:solidFill>
-                          <a:latin typeface="Meiryo" pitchFamily="34" charset="0"/>
-                          <a:ea typeface="Meiryo" pitchFamily="34" charset="-122"/>
-                          <a:cs typeface="Meiryo" pitchFamily="34" charset="-120"/>
-                        </a:rPr>
-                        <a:t>7</a:t>
-                      </a:r>
-                      <a:endParaRPr lang="en-US" sz="1100" dirty="0">
-                        <a:latin typeface="Meiryo" charset="0"/>
-                        <a:ea typeface="Meiryo" charset="0"/>
-                        <a:cs typeface="Meiryo" charset="0"/>
-                      </a:endParaRPr>
-                    </a:p>
-                  </a:txBody>
-                  <a:tcPr anchor="ctr" marT="18000" marB="18000" marL="64008" marR="45720">
-                    <a:lnL w="9525" cap="flat" cmpd="sng" algn="ctr">
-                      <a:solidFill>
-                        <a:srgbClr val="BFBFBF"/>
-                      </a:solidFill>
-                      <a:prstDash val="solid"/>
-                      <a:round/>
-                      <a:headEnd type="none" w="med" len="med"/>
-                      <a:tailEnd type="none" w="med" len="med"/>
-                    </a:lnL>
-                    <a:lnR w="9525" cap="flat" cmpd="sng" algn="ctr">
-                      <a:solidFill>
-                        <a:srgbClr val="BFBFBF"/>
-                      </a:solidFill>
-                      <a:prstDash val="solid"/>
-                      <a:round/>
-                      <a:headEnd type="none" w="med" len="med"/>
-                      <a:tailEnd type="none" w="med" len="med"/>
-                    </a:lnR>
-                    <a:lnT w="9525" cap="flat" cmpd="sng" algn="ctr">
-                      <a:solidFill>
-                        <a:srgbClr val="BFBFBF"/>
-                      </a:solidFill>
-                      <a:prstDash val="solid"/>
-                      <a:round/>
-                      <a:headEnd type="none" w="med" len="med"/>
-                      <a:tailEnd type="none" w="med" len="med"/>
-                    </a:lnT>
-                    <a:lnB w="9525" cap="flat" cmpd="sng" algn="ctr">
-                      <a:solidFill>
-                        <a:srgbClr val="BFBFBF"/>
-                      </a:solidFill>
-                      <a:prstDash val="solid"/>
-                      <a:round/>
-                      <a:headEnd type="none" w="med" len="med"/>
-                      <a:tailEnd type="none" w="med" len="med"/>
-                    </a:lnB>
-                  </a:tcPr>
-                </a:tc>
-                <a:tc>
-                  <a:txBody>
-                    <a:bodyPr/>
-                    <a:lstStyle/>
-                    <a:p>
-                      <a:pPr marL="0" indent="0" algn="l">
-                        <a:buNone/>
-                      </a:pPr>
-                      <a:r>
-                        <a:rPr lang="en-US" sz="900" b="1" dirty="0">
-                          <a:solidFill>
-                            <a:srgbClr val="222222"/>
-                          </a:solidFill>
-                          <a:latin typeface="Meiryo" pitchFamily="34" charset="0"/>
-                          <a:ea typeface="Meiryo" pitchFamily="34" charset="-122"/>
-                          <a:cs typeface="Meiryo" pitchFamily="34" charset="-120"/>
-                        </a:rPr>
-                        <a:t>カマラードの里</a:t>
-                      </a:r>
-                      <a:endParaRPr lang="en-US" sz="1100" dirty="0">
-                        <a:latin typeface="Meiryo" charset="0"/>
-                        <a:ea typeface="Meiryo" charset="0"/>
-                        <a:cs typeface="Meiryo" charset="0"/>
-                      </a:endParaRPr>
-                    </a:p>
-                  </a:txBody>
-                  <a:tcPr anchor="ctr" marT="18000" marB="18000" marL="64008" marR="45720">
-                    <a:lnL w="9525" cap="flat" cmpd="sng" algn="ctr">
-                      <a:solidFill>
-                        <a:srgbClr val="BFBFBF"/>
-                      </a:solidFill>
-                      <a:prstDash val="solid"/>
-                      <a:round/>
-                      <a:headEnd type="none" w="med" len="med"/>
-                      <a:tailEnd type="none" w="med" len="med"/>
-                    </a:lnL>
-                    <a:lnR w="9525" cap="flat" cmpd="sng" algn="ctr">
-                      <a:solidFill>
-                        <a:srgbClr val="BFBFBF"/>
-                      </a:solidFill>
-                      <a:prstDash val="solid"/>
-                      <a:round/>
-                      <a:headEnd type="none" w="med" len="med"/>
-                      <a:tailEnd type="none" w="med" len="med"/>
-                    </a:lnR>
-                    <a:lnT w="9525" cap="flat" cmpd="sng" algn="ctr">
-                      <a:solidFill>
-                        <a:srgbClr val="BFBFBF"/>
-                      </a:solidFill>
-                      <a:prstDash val="solid"/>
-                      <a:round/>
-                      <a:headEnd type="none" w="med" len="med"/>
-                      <a:tailEnd type="none" w="med" len="med"/>
-                    </a:lnT>
-                    <a:lnB w="9525" cap="flat" cmpd="sng" algn="ctr">
-                      <a:solidFill>
-                        <a:srgbClr val="BFBFBF"/>
-                      </a:solidFill>
-                      <a:prstDash val="solid"/>
-                      <a:round/>
-                      <a:headEnd type="none" w="med" len="med"/>
-                      <a:tailEnd type="none" w="med" len="med"/>
-                    </a:lnB>
-                  </a:tcPr>
-                </a:tc>
-                <a:tc>
-                  <a:txBody>
-                    <a:bodyPr/>
-                    <a:lstStyle/>
-                    <a:p>
-                      <a:pPr marL="0" indent="0" algn="l">
-                        <a:buNone/>
-                      </a:pPr>
-                      <a:r>
-                        <a:rPr lang="en-US" sz="900" dirty="0">
-                          <a:solidFill>
-                            <a:srgbClr val="222222"/>
-                          </a:solidFill>
-                          <a:latin typeface="Meiryo" pitchFamily="34" charset="0"/>
-                          <a:ea typeface="Meiryo" pitchFamily="34" charset="-122"/>
-                          <a:cs typeface="Meiryo" pitchFamily="34" charset="-120"/>
-                        </a:rPr>
-                        <a:t>障害児相談支援</a:t>
-                      </a:r>
-                      <a:endParaRPr lang="en-US" sz="1100" dirty="0">
-                        <a:latin typeface="Meiryo" charset="0"/>
-                        <a:ea typeface="Meiryo" charset="0"/>
-                        <a:cs typeface="Meiryo" charset="0"/>
-                      </a:endParaRPr>
-                    </a:p>
-                  </a:txBody>
-                  <a:tcPr anchor="ctr" marT="18000" marB="18000" marL="64008" marR="45720">
-                    <a:lnL w="9525" cap="flat" cmpd="sng" algn="ctr">
-                      <a:solidFill>
-                        <a:srgbClr val="BFBFBF"/>
-                      </a:solidFill>
-                      <a:prstDash val="solid"/>
-                      <a:round/>
-                      <a:headEnd type="none" w="med" len="med"/>
-                      <a:tailEnd type="none" w="med" len="med"/>
-                    </a:lnL>
-                    <a:lnR w="9525" cap="flat" cmpd="sng" algn="ctr">
-                      <a:solidFill>
-                        <a:srgbClr val="BFBFBF"/>
-                      </a:solidFill>
-                      <a:prstDash val="solid"/>
-                      <a:round/>
-                      <a:headEnd type="none" w="med" len="med"/>
-                      <a:tailEnd type="none" w="med" len="med"/>
-                    </a:lnR>
-                    <a:lnT w="9525" cap="flat" cmpd="sng" algn="ctr">
-                      <a:solidFill>
-                        <a:srgbClr val="BFBFBF"/>
-                      </a:solidFill>
-                      <a:prstDash val="solid"/>
-                      <a:round/>
-                      <a:headEnd type="none" w="med" len="med"/>
-                      <a:tailEnd type="none" w="med" len="med"/>
-                    </a:lnT>
-                    <a:lnB w="9525" cap="flat" cmpd="sng" algn="ctr">
-                      <a:solidFill>
-                        <a:srgbClr val="BFBFBF"/>
-                      </a:solidFill>
-                      <a:prstDash val="solid"/>
-                      <a:round/>
-                      <a:headEnd type="none" w="med" len="med"/>
-                      <a:tailEnd type="none" w="med" len="med"/>
-                    </a:lnB>
-                  </a:tcPr>
-                </a:tc>
-                <a:tc>
-                  <a:txBody>
-                    <a:bodyPr/>
-                    <a:lstStyle/>
-                    <a:p>
-                      <a:pPr marL="0" indent="0" algn="l">
-                        <a:buNone/>
-                      </a:pPr>
-                      <a:r>
-                        <a:rPr lang="en-US" sz="900" dirty="0">
-                          <a:solidFill>
-                            <a:srgbClr val="222222"/>
-                          </a:solidFill>
-                          <a:latin typeface="Meiryo" pitchFamily="34" charset="0"/>
-                          <a:ea typeface="Meiryo" pitchFamily="34" charset="-122"/>
-                          <a:cs typeface="Meiryo" pitchFamily="34" charset="-120"/>
-                        </a:rPr>
-                        <a:t>要確認</a:t>
-                      </a:r>
-                      <a:endParaRPr lang="en-US" sz="1100" dirty="0">
-                        <a:latin typeface="Meiryo" charset="0"/>
-                        <a:ea typeface="Meiryo" charset="0"/>
-                        <a:cs typeface="Meiryo" charset="0"/>
-                      </a:endParaRPr>
-                    </a:p>
-                  </a:txBody>
-                  <a:tcPr anchor="ctr" marT="18000" marB="18000" marL="64008" marR="45720">
-                    <a:lnL w="9525" cap="flat" cmpd="sng" algn="ctr">
-                      <a:solidFill>
-                        <a:srgbClr val="BFBFBF"/>
-                      </a:solidFill>
-                      <a:prstDash val="solid"/>
-                      <a:round/>
-                      <a:headEnd type="none" w="med" len="med"/>
-                      <a:tailEnd type="none" w="med" len="med"/>
-                    </a:lnL>
-                    <a:lnR w="9525" cap="flat" cmpd="sng" algn="ctr">
-                      <a:solidFill>
-                        <a:srgbClr val="BFBFBF"/>
-                      </a:solidFill>
-                      <a:prstDash val="solid"/>
-                      <a:round/>
-                      <a:headEnd type="none" w="med" len="med"/>
-                      <a:tailEnd type="none" w="med" len="med"/>
-                    </a:lnR>
-                    <a:lnT w="9525" cap="flat" cmpd="sng" algn="ctr">
-                      <a:solidFill>
-                        <a:srgbClr val="BFBFBF"/>
-                      </a:solidFill>
-                      <a:prstDash val="solid"/>
-                      <a:round/>
-                      <a:headEnd type="none" w="med" len="med"/>
-                      <a:tailEnd type="none" w="med" len="med"/>
-                    </a:lnT>
-                    <a:lnB w="9525" cap="flat" cmpd="sng" algn="ctr">
-                      <a:solidFill>
-                        <a:srgbClr val="BFBFBF"/>
-                      </a:solidFill>
-                      <a:prstDash val="solid"/>
-                      <a:round/>
-                      <a:headEnd type="none" w="med" len="med"/>
-                      <a:tailEnd type="none" w="med" len="med"/>
-                    </a:lnB>
-                  </a:tcPr>
-                </a:tc>
-                <a:tc>
-                  <a:txBody>
-                    <a:bodyPr/>
-                    <a:lstStyle/>
-                    <a:p>
-                      <a:pPr marL="0" indent="0" algn="l">
-                        <a:buNone/>
-                      </a:pPr>
-                      <a:r>
-                        <a:rPr lang="en-US" sz="900" dirty="0">
-                          <a:solidFill>
-                            <a:srgbClr val="222222"/>
-                          </a:solidFill>
-                          <a:latin typeface="Meiryo" pitchFamily="34" charset="0"/>
-                          <a:ea typeface="Meiryo" pitchFamily="34" charset="-122"/>
-                          <a:cs typeface="Meiryo" pitchFamily="34" charset="-120"/>
-                        </a:rPr>
-                        <a:t>東金市内</a:t>
-                      </a:r>
-                      <a:endParaRPr lang="en-US" sz="1100" dirty="0">
-                        <a:latin typeface="Meiryo" charset="0"/>
-                        <a:ea typeface="Meiryo" charset="0"/>
-                        <a:cs typeface="Meiryo" charset="0"/>
-                      </a:endParaRPr>
-                    </a:p>
-                  </a:txBody>
-                  <a:tcPr anchor="ctr" marT="18000" marB="18000" marL="64008" marR="45720">
-                    <a:lnL w="9525" cap="flat" cmpd="sng" algn="ctr">
-                      <a:solidFill>
-                        <a:srgbClr val="BFBFBF"/>
-                      </a:solidFill>
-                      <a:prstDash val="solid"/>
-                      <a:round/>
-                      <a:headEnd type="none" w="med" len="med"/>
-                      <a:tailEnd type="none" w="med" len="med"/>
-                    </a:lnL>
-                    <a:lnR w="9525" cap="flat" cmpd="sng" algn="ctr">
-                      <a:solidFill>
-                        <a:srgbClr val="BFBFBF"/>
-                      </a:solidFill>
-                      <a:prstDash val="solid"/>
-                      <a:round/>
-                      <a:headEnd type="none" w="med" len="med"/>
-                      <a:tailEnd type="none" w="med" len="med"/>
-                    </a:lnR>
-                    <a:lnT w="9525" cap="flat" cmpd="sng" algn="ctr">
-                      <a:solidFill>
-                        <a:srgbClr val="BFBFBF"/>
-                      </a:solidFill>
-                      <a:prstDash val="solid"/>
-                      <a:round/>
-                      <a:headEnd type="none" w="med" len="med"/>
-                      <a:tailEnd type="none" w="med" len="med"/>
-                    </a:lnT>
-                    <a:lnB w="9525" cap="flat" cmpd="sng" algn="ctr">
-                      <a:solidFill>
-                        <a:srgbClr val="BFBFBF"/>
-                      </a:solidFill>
-                      <a:prstDash val="solid"/>
-                      <a:round/>
-                      <a:headEnd type="none" w="med" len="med"/>
-                      <a:tailEnd type="none" w="med" len="med"/>
-                    </a:lnB>
-                  </a:tcPr>
-                </a:tc>
-                <a:tc>
-                  <a:txBody>
-                    <a:bodyPr/>
-                    <a:lstStyle/>
-                    <a:p>
-                      <a:pPr marL="0" indent="0" algn="l">
-                        <a:buNone/>
-                      </a:pPr>
-                      <a:r>
-                        <a:rPr lang="en-US" sz="900" dirty="0">
-                          <a:latin typeface="Meiryo" charset="0"/>
-                          <a:ea typeface="Meiryo" charset="0"/>
-                          <a:cs typeface="Meiryo" charset="0"/>
-                        </a:rPr>
-                        <a:t>要確認</a:t>
-                      </a:r>
-                    </a:p>
-                  </a:txBody>
-                  <a:tcPr anchor="ctr" marT="18000" marB="18000" marL="64008" marR="45720">
-                    <a:lnL w="9525" cap="flat" cmpd="sng" algn="ctr">
-                      <a:solidFill>
-                        <a:srgbClr val="BFBFBF"/>
-                      </a:solidFill>
-                      <a:prstDash val="solid"/>
-                      <a:round/>
-                      <a:headEnd type="none" w="med" len="med"/>
-                      <a:tailEnd type="none" w="med" len="med"/>
-                    </a:lnL>
-                    <a:lnR w="9525" cap="flat" cmpd="sng" algn="ctr">
-                      <a:solidFill>
-                        <a:srgbClr val="BFBFBF"/>
-                      </a:solidFill>
-                      <a:prstDash val="solid"/>
-                      <a:round/>
-                      <a:headEnd type="none" w="med" len="med"/>
-                      <a:tailEnd type="none" w="med" len="med"/>
-                    </a:lnR>
-                    <a:lnT w="9525" cap="flat" cmpd="sng" algn="ctr">
-                      <a:solidFill>
-                        <a:srgbClr val="BFBFBF"/>
-                      </a:solidFill>
-                      <a:prstDash val="solid"/>
-                      <a:round/>
-                      <a:headEnd type="none" w="med" len="med"/>
-                      <a:tailEnd type="none" w="med" len="med"/>
-                    </a:lnT>
-                    <a:lnB w="9525" cap="flat" cmpd="sng" algn="ctr">
-                      <a:solidFill>
-                        <a:srgbClr val="BFBFBF"/>
-                      </a:solidFill>
-                      <a:prstDash val="solid"/>
-                      <a:round/>
-                      <a:headEnd type="none" w="med" len="med"/>
-                      <a:tailEnd type="none" w="med" len="med"/>
-                    </a:lnB>
-                  </a:tcPr>
-                </a:tc>
-                <a:extLst>
-                  <a:ext uri="{0D108BD9-81ED-4DB2-BD59-A6C34878D82A}">
-                    <a16:rowId xmlns:a16="http://schemas.microsoft.com/office/drawing/2014/main" val="10001"/>
-                  </a:ext>
-                </a:extLst>
-              </a:tr>
-              <a:tr h="426720">
-                <a:tc>
-                  <a:txBody>
-                    <a:bodyPr/>
-                    <a:lstStyle/>
-                    <a:p>
-                      <a:pPr marL="0" indent="0" algn="ctr">
-                        <a:buNone/>
-                      </a:pPr>
-                      <a:r>
-                        <a:rPr lang="en-US" sz="900" b="1" dirty="0">
-                          <a:solidFill>
-                            <a:srgbClr val="222222"/>
-                          </a:solidFill>
-                          <a:latin typeface="Meiryo" pitchFamily="34" charset="0"/>
-                          <a:ea typeface="Meiryo" pitchFamily="34" charset="-122"/>
-                          <a:cs typeface="Meiryo" pitchFamily="34" charset="-120"/>
-                        </a:rPr>
-                        <a:t>8</a:t>
-                      </a:r>
-                      <a:endParaRPr lang="en-US" sz="1100" dirty="0">
-                        <a:latin typeface="Meiryo" charset="0"/>
-                        <a:ea typeface="Meiryo" charset="0"/>
-                        <a:cs typeface="Meiryo" charset="0"/>
-                      </a:endParaRPr>
-                    </a:p>
-                  </a:txBody>
-                  <a:tcPr anchor="ctr" marT="18000" marB="18000" marL="64008" marR="45720">
-                    <a:lnL w="9525" cap="flat" cmpd="sng" algn="ctr">
-                      <a:solidFill>
-                        <a:srgbClr val="BFBFBF"/>
-                      </a:solidFill>
-                      <a:prstDash val="solid"/>
-                      <a:round/>
-                      <a:headEnd type="none" w="med" len="med"/>
-                      <a:tailEnd type="none" w="med" len="med"/>
-                    </a:lnL>
-                    <a:lnR w="9525" cap="flat" cmpd="sng" algn="ctr">
-                      <a:solidFill>
-                        <a:srgbClr val="BFBFBF"/>
-                      </a:solidFill>
-                      <a:prstDash val="solid"/>
-                      <a:round/>
-                      <a:headEnd type="none" w="med" len="med"/>
-                      <a:tailEnd type="none" w="med" len="med"/>
-                    </a:lnR>
-                    <a:lnT w="9525" cap="flat" cmpd="sng" algn="ctr">
-                      <a:solidFill>
-                        <a:srgbClr val="BFBFBF"/>
-                      </a:solidFill>
-                      <a:prstDash val="solid"/>
-                      <a:round/>
-                      <a:headEnd type="none" w="med" len="med"/>
-                      <a:tailEnd type="none" w="med" len="med"/>
-                    </a:lnT>
-                    <a:lnB w="9525" cap="flat" cmpd="sng" algn="ctr">
-                      <a:solidFill>
-                        <a:srgbClr val="BFBFBF"/>
-                      </a:solidFill>
-                      <a:prstDash val="solid"/>
-                      <a:round/>
-                      <a:headEnd type="none" w="med" len="med"/>
-                      <a:tailEnd type="none" w="med" len="med"/>
-                    </a:lnB>
-                  </a:tcPr>
-                </a:tc>
-                <a:tc>
-                  <a:txBody>
-                    <a:bodyPr/>
-                    <a:lstStyle/>
-                    <a:p>
-                      <a:pPr marL="0" indent="0" algn="l">
-                        <a:buNone/>
-                      </a:pPr>
-                      <a:r>
-                        <a:rPr lang="en-US" sz="900" b="1" dirty="0">
-                          <a:solidFill>
-                            <a:srgbClr val="222222"/>
-                          </a:solidFill>
-                          <a:latin typeface="Meiryo" pitchFamily="34" charset="0"/>
-                          <a:ea typeface="Meiryo" pitchFamily="34" charset="-122"/>
-                          <a:cs typeface="Meiryo" pitchFamily="34" charset="-120"/>
-                        </a:rPr>
-                        <a:t>こどもプラス相談支援事業所</a:t>
-                      </a:r>
-                      <a:endParaRPr lang="en-US" sz="1100" dirty="0">
-                        <a:latin typeface="Meiryo" charset="0"/>
-                        <a:ea typeface="Meiryo" charset="0"/>
-                        <a:cs typeface="Meiryo" charset="0"/>
-                      </a:endParaRPr>
-                    </a:p>
-                  </a:txBody>
-                  <a:tcPr anchor="ctr" marT="18000" marB="18000" marL="64008" marR="45720">
-                    <a:lnL w="9525" cap="flat" cmpd="sng" algn="ctr">
-                      <a:solidFill>
-                        <a:srgbClr val="BFBFBF"/>
-                      </a:solidFill>
-                      <a:prstDash val="solid"/>
-                      <a:round/>
-                      <a:headEnd type="none" w="med" len="med"/>
-                      <a:tailEnd type="none" w="med" len="med"/>
-                    </a:lnL>
-                    <a:lnR w="9525" cap="flat" cmpd="sng" algn="ctr">
-                      <a:solidFill>
-                        <a:srgbClr val="BFBFBF"/>
-                      </a:solidFill>
-                      <a:prstDash val="solid"/>
-                      <a:round/>
-                      <a:headEnd type="none" w="med" len="med"/>
-                      <a:tailEnd type="none" w="med" len="med"/>
-                    </a:lnR>
-                    <a:lnT w="9525" cap="flat" cmpd="sng" algn="ctr">
-                      <a:solidFill>
-                        <a:srgbClr val="BFBFBF"/>
-                      </a:solidFill>
-                      <a:prstDash val="solid"/>
-                      <a:round/>
-                      <a:headEnd type="none" w="med" len="med"/>
-                      <a:tailEnd type="none" w="med" len="med"/>
-                    </a:lnT>
-                    <a:lnB w="9525" cap="flat" cmpd="sng" algn="ctr">
-                      <a:solidFill>
-                        <a:srgbClr val="BFBFBF"/>
-                      </a:solidFill>
-                      <a:prstDash val="solid"/>
-                      <a:round/>
-                      <a:headEnd type="none" w="med" len="med"/>
-                      <a:tailEnd type="none" w="med" len="med"/>
-                    </a:lnB>
-                  </a:tcPr>
-                </a:tc>
-                <a:tc>
-                  <a:txBody>
-                    <a:bodyPr/>
-                    <a:lstStyle/>
-                    <a:p>
-                      <a:pPr marL="0" indent="0" algn="l">
-                        <a:buNone/>
-                      </a:pPr>
-                      <a:r>
-                        <a:rPr lang="en-US" sz="900" dirty="0">
-                          <a:solidFill>
-                            <a:srgbClr val="222222"/>
-                          </a:solidFill>
-                          <a:latin typeface="Meiryo" pitchFamily="34" charset="0"/>
-                          <a:ea typeface="Meiryo" pitchFamily="34" charset="-122"/>
-                          <a:cs typeface="Meiryo" pitchFamily="34" charset="-120"/>
-                        </a:rPr>
-                        <a:t>障害児相談支援</a:t>
-                      </a:r>
-                      <a:endParaRPr lang="en-US" sz="1100" dirty="0">
-                        <a:latin typeface="Meiryo" charset="0"/>
-                        <a:ea typeface="Meiryo" charset="0"/>
-                        <a:cs typeface="Meiryo" charset="0"/>
-                      </a:endParaRPr>
-                    </a:p>
-                  </a:txBody>
-                  <a:tcPr anchor="ctr" marT="18000" marB="18000" marL="64008" marR="45720">
-                    <a:lnL w="9525" cap="flat" cmpd="sng" algn="ctr">
-                      <a:solidFill>
-                        <a:srgbClr val="BFBFBF"/>
-                      </a:solidFill>
-                      <a:prstDash val="solid"/>
-                      <a:round/>
-                      <a:headEnd type="none" w="med" len="med"/>
-                      <a:tailEnd type="none" w="med" len="med"/>
-                    </a:lnL>
-                    <a:lnR w="9525" cap="flat" cmpd="sng" algn="ctr">
-                      <a:solidFill>
-                        <a:srgbClr val="BFBFBF"/>
-                      </a:solidFill>
-                      <a:prstDash val="solid"/>
-                      <a:round/>
-                      <a:headEnd type="none" w="med" len="med"/>
-                      <a:tailEnd type="none" w="med" len="med"/>
-                    </a:lnR>
-                    <a:lnT w="9525" cap="flat" cmpd="sng" algn="ctr">
-                      <a:solidFill>
-                        <a:srgbClr val="BFBFBF"/>
-                      </a:solidFill>
-                      <a:prstDash val="solid"/>
-                      <a:round/>
-                      <a:headEnd type="none" w="med" len="med"/>
-                      <a:tailEnd type="none" w="med" len="med"/>
-                    </a:lnT>
-                    <a:lnB w="9525" cap="flat" cmpd="sng" algn="ctr">
-                      <a:solidFill>
-                        <a:srgbClr val="BFBFBF"/>
-                      </a:solidFill>
-                      <a:prstDash val="solid"/>
-                      <a:round/>
-                      <a:headEnd type="none" w="med" len="med"/>
-                      <a:tailEnd type="none" w="med" len="med"/>
-                    </a:lnB>
-                  </a:tcPr>
-                </a:tc>
-                <a:tc>
-                  <a:txBody>
-                    <a:bodyPr/>
-                    <a:lstStyle/>
-                    <a:p>
-                      <a:pPr marL="0" indent="0" algn="l">
-                        <a:buNone/>
-                      </a:pPr>
-                      <a:r>
-                        <a:rPr lang="en-US" sz="900" dirty="0">
-                          <a:solidFill>
-                            <a:srgbClr val="222222"/>
-                          </a:solidFill>
-                          <a:latin typeface="Meiryo" pitchFamily="34" charset="0"/>
-                          <a:ea typeface="Meiryo" pitchFamily="34" charset="-122"/>
-                          <a:cs typeface="Meiryo" pitchFamily="34" charset="-120"/>
-                        </a:rPr>
-                        <a:t>株式会社ベストグロウ</a:t>
-                      </a:r>
-                      <a:endParaRPr lang="en-US" sz="1100" dirty="0">
-                        <a:latin typeface="Meiryo" charset="0"/>
-                        <a:ea typeface="Meiryo" charset="0"/>
-                        <a:cs typeface="Meiryo" charset="0"/>
-                      </a:endParaRPr>
-                    </a:p>
-                  </a:txBody>
-                  <a:tcPr anchor="ctr" marT="18000" marB="18000" marL="64008" marR="45720">
-                    <a:lnL w="9525" cap="flat" cmpd="sng" algn="ctr">
-                      <a:solidFill>
-                        <a:srgbClr val="BFBFBF"/>
-                      </a:solidFill>
-                      <a:prstDash val="solid"/>
-                      <a:round/>
-                      <a:headEnd type="none" w="med" len="med"/>
-                      <a:tailEnd type="none" w="med" len="med"/>
-                    </a:lnL>
-                    <a:lnR w="9525" cap="flat" cmpd="sng" algn="ctr">
-                      <a:solidFill>
-                        <a:srgbClr val="BFBFBF"/>
-                      </a:solidFill>
-                      <a:prstDash val="solid"/>
-                      <a:round/>
-                      <a:headEnd type="none" w="med" len="med"/>
-                      <a:tailEnd type="none" w="med" len="med"/>
-                    </a:lnR>
-                    <a:lnT w="9525" cap="flat" cmpd="sng" algn="ctr">
-                      <a:solidFill>
-                        <a:srgbClr val="BFBFBF"/>
-                      </a:solidFill>
-                      <a:prstDash val="solid"/>
-                      <a:round/>
-                      <a:headEnd type="none" w="med" len="med"/>
-                      <a:tailEnd type="none" w="med" len="med"/>
-                    </a:lnT>
-                    <a:lnB w="9525" cap="flat" cmpd="sng" algn="ctr">
-                      <a:solidFill>
-                        <a:srgbClr val="BFBFBF"/>
-                      </a:solidFill>
-                      <a:prstDash val="solid"/>
-                      <a:round/>
-                      <a:headEnd type="none" w="med" len="med"/>
-                      <a:tailEnd type="none" w="med" len="med"/>
-                    </a:lnB>
-                  </a:tcPr>
-                </a:tc>
-                <a:tc>
-                  <a:txBody>
-                    <a:bodyPr/>
-                    <a:lstStyle/>
-                    <a:p>
-                      <a:pPr marL="0" indent="0" algn="l">
-                        <a:buNone/>
-                      </a:pPr>
-                      <a:r>
-                        <a:rPr lang="en-US" sz="900" dirty="0">
-                          <a:solidFill>
-                            <a:srgbClr val="222222"/>
-                          </a:solidFill>
-                          <a:latin typeface="Meiryo" pitchFamily="34" charset="0"/>
-                          <a:ea typeface="Meiryo" pitchFamily="34" charset="-122"/>
-                          <a:cs typeface="Meiryo" pitchFamily="34" charset="-120"/>
-                        </a:rPr>
-                        <a:t>東金市内（道庭925-1）</a:t>
-                      </a:r>
-                      <a:endParaRPr lang="en-US" sz="1100" dirty="0">
-                        <a:latin typeface="Meiryo" charset="0"/>
-                        <a:ea typeface="Meiryo" charset="0"/>
-                        <a:cs typeface="Meiryo" charset="0"/>
-                      </a:endParaRPr>
-                    </a:p>
-                  </a:txBody>
-                  <a:tcPr anchor="ctr" marT="18000" marB="18000" marL="64008" marR="45720">
-                    <a:lnL w="9525" cap="flat" cmpd="sng" algn="ctr">
-                      <a:solidFill>
-                        <a:srgbClr val="BFBFBF"/>
-                      </a:solidFill>
-                      <a:prstDash val="solid"/>
-                      <a:round/>
-                      <a:headEnd type="none" w="med" len="med"/>
-                      <a:tailEnd type="none" w="med" len="med"/>
-                    </a:lnL>
-                    <a:lnR w="9525" cap="flat" cmpd="sng" algn="ctr">
-                      <a:solidFill>
-                        <a:srgbClr val="BFBFBF"/>
-                      </a:solidFill>
-                      <a:prstDash val="solid"/>
-                      <a:round/>
-                      <a:headEnd type="none" w="med" len="med"/>
-                      <a:tailEnd type="none" w="med" len="med"/>
-                    </a:lnR>
-                    <a:lnT w="9525" cap="flat" cmpd="sng" algn="ctr">
-                      <a:solidFill>
-                        <a:srgbClr val="BFBFBF"/>
-                      </a:solidFill>
-                      <a:prstDash val="solid"/>
-                      <a:round/>
-                      <a:headEnd type="none" w="med" len="med"/>
-                      <a:tailEnd type="none" w="med" len="med"/>
-                    </a:lnT>
-                    <a:lnB w="9525" cap="flat" cmpd="sng" algn="ctr">
-                      <a:solidFill>
-                        <a:srgbClr val="BFBFBF"/>
-                      </a:solidFill>
-                      <a:prstDash val="solid"/>
-                      <a:round/>
-                      <a:headEnd type="none" w="med" len="med"/>
-                      <a:tailEnd type="none" w="med" len="med"/>
-                    </a:lnB>
-                  </a:tcPr>
-                </a:tc>
-                <a:tc>
-                  <a:txBody>
-                    <a:bodyPr/>
-                    <a:lstStyle/>
-                    <a:p>
-                      <a:pPr marL="0" indent="0" algn="l">
-                        <a:buNone/>
-                      </a:pPr>
-                      <a:r>
-                        <a:rPr lang="en-US" sz="900" dirty="0">
-                          <a:latin typeface="Meiryo" charset="0"/>
-                          <a:ea typeface="Meiryo" charset="0"/>
-                          <a:cs typeface="Meiryo" charset="0"/>
-                        </a:rPr>
-                        <a:t>0475-77-8577</a:t>
-                      </a:r>
-                    </a:p>
-                  </a:txBody>
-                  <a:tcPr anchor="ctr" marT="18000" marB="18000" marL="64008" marR="45720">
-                    <a:lnL w="9525" cap="flat" cmpd="sng" algn="ctr">
-                      <a:solidFill>
-                        <a:srgbClr val="BFBFBF"/>
-                      </a:solidFill>
-                      <a:prstDash val="solid"/>
-                      <a:round/>
-                      <a:headEnd type="none" w="med" len="med"/>
-                      <a:tailEnd type="none" w="med" len="med"/>
-                    </a:lnL>
-                    <a:lnR w="9525" cap="flat" cmpd="sng" algn="ctr">
-                      <a:solidFill>
-                        <a:srgbClr val="BFBFBF"/>
-                      </a:solidFill>
-                      <a:prstDash val="solid"/>
-                      <a:round/>
-                      <a:headEnd type="none" w="med" len="med"/>
-                      <a:tailEnd type="none" w="med" len="med"/>
-                    </a:lnR>
-                    <a:lnT w="9525" cap="flat" cmpd="sng" algn="ctr">
-                      <a:solidFill>
-                        <a:srgbClr val="BFBFBF"/>
-                      </a:solidFill>
-                      <a:prstDash val="solid"/>
-                      <a:round/>
-                      <a:headEnd type="none" w="med" len="med"/>
-                      <a:tailEnd type="none" w="med" len="med"/>
-                    </a:lnT>
-                    <a:lnB w="9525" cap="flat" cmpd="sng" algn="ctr">
-                      <a:solidFill>
-                        <a:srgbClr val="BFBFBF"/>
-                      </a:solidFill>
-                      <a:prstDash val="solid"/>
-                      <a:round/>
-                      <a:headEnd type="none" w="med" len="med"/>
-                      <a:tailEnd type="none" w="med" len="med"/>
-                    </a:lnB>
-                  </a:tcPr>
-                </a:tc>
-                <a:extLst>
-                  <a:ext uri="{0D108BD9-81ED-4DB2-BD59-A6C34878D82A}">
-                    <a16:rowId xmlns:a16="http://schemas.microsoft.com/office/drawing/2014/main" val="10001"/>
-                  </a:ext>
-                </a:extLst>
-              </a:tr>
-            </a:tbl>
-          </a:graphicData>
-        </a:graphic>
-      </p:graphicFrame>
       <p:sp>
         <p:nvSpPr>
-          <p:cNvPr id="8" name="Text 5"/>
+          <p:cNvPr id="9" name="Shape 7"/>
           <p:cNvSpPr/>
           <p:nvPr/>
         </p:nvSpPr>
         <p:spPr>
           <a:xfrm>
-            <a:off x="502920" y="5870448"/>
-            <a:ext cx="11201400" cy="566928"/>
+            <a:off x="502920" y="1783080"/>
+            <a:ext cx="6903720" cy="3474720"/>
+          </a:xfrm>
+          <a:prstGeom prst="rect">
+            <a:avLst/>
+          </a:prstGeom>
+          <a:solidFill>
+            <a:srgbClr val="FFFFFF"/>
+          </a:solidFill>
+          <a:ln w="12700">
+            <a:solidFill>
+              <a:srgbClr val="9AA7B8"/>
+            </a:solidFill>
+            <a:prstDash val="solid"/>
+          </a:ln>
+          <a:effectLst>
+            <a:outerShdw blurRad="63500" dist="25400" dir="8100000" algn="bl" rotWithShape="0">
+              <a:srgbClr val="000000">
+                <a:alpha val="12000"/>
+              </a:srgbClr>
+            </a:outerShdw>
+          </a:effectLst>
+        </p:spPr>
+      </p:sp>
+      <p:sp>
+        <p:nvSpPr>
+          <p:cNvPr id="10" name="Text 8"/>
+          <p:cNvSpPr/>
+          <p:nvPr/>
+        </p:nvSpPr>
+        <p:spPr>
+          <a:xfrm>
+            <a:off x="704088" y="1911096"/>
+            <a:ext cx="6501384" cy="384048"/>
           </a:xfrm>
           <a:prstGeom prst="rect">
             <a:avLst/>
@@ -16531,36 +12103,410 @@
               <a:buNone/>
             </a:pPr>
             <a:r>
-              <a:rPr lang="en-US" sz="1000" i="1" dirty="0">
-                <a:solidFill>
-                  <a:srgbClr val="666666"/>
-                </a:solidFill>
-                <a:latin typeface="Meiryo" pitchFamily="34" charset="0"/>
-                <a:ea typeface="Meiryo" pitchFamily="34" charset="-122"/>
-                <a:cs typeface="Meiryo" pitchFamily="34" charset="-120"/>
-              </a:rPr>
-              <a:t>※本頁は児童発達支援の指定が公開情報で確認できない事業所。スターワーク東金は中高生向け就労準備型の放デイで、未就学児は対象外。障害児相談支援事業所は受給者証申請・障害児支援利用計画の作成窓口となるため参考掲載。</a:t>
-            </a:r>
-            <a:endParaRPr lang="en-US" sz="1000" dirty="0"/>
+              <a:rPr lang="en-US" sz="1400" b="1" dirty="0">
+                <a:solidFill>
+                  <a:srgbClr val="1B3A6B"/>
+                </a:solidFill>
+                <a:latin typeface="Meiryo" pitchFamily="34" charset="0"/>
+                <a:ea typeface="Meiryo" pitchFamily="34" charset="-122"/>
+                <a:cs typeface="Meiryo" pitchFamily="34" charset="-120"/>
+              </a:rPr>
+              <a:t>東金市簡易マザーズホーム（設置：東金市／運営：東金市社会福祉協議会）</a:t>
+            </a:r>
+            <a:endParaRPr lang="en-US" sz="1400" dirty="0"/>
           </a:p>
         </p:txBody>
       </p:sp>
       <p:sp>
         <p:nvSpPr>
-          <p:cNvPr id="9" name="Text 2">
-            <a:extLst>
-              <a:ext uri="{FF2B5EF4-FFF2-40B4-BE49-F238E27FC236}">
-                <a16:creationId xmlns:a16="http://schemas.microsoft.com/office/drawing/2014/main" id="{AE6EA86F-D6CF-F073-0F92-8C04FD76AAC7}"/>
-              </a:ext>
-            </a:extLst>
-          </p:cNvPr>
+          <p:cNvPr id="11" name="Text 9"/>
           <p:cNvSpPr/>
           <p:nvPr/>
         </p:nvSpPr>
         <p:spPr>
           <a:xfrm>
-            <a:off x="502920" y="54864"/>
-            <a:ext cx="8686800" cy="822960"/>
+            <a:off x="704088" y="2331720"/>
+            <a:ext cx="6501384" cy="2852927"/>
+          </a:xfrm>
+          <a:prstGeom prst="rect">
+            <a:avLst/>
+          </a:prstGeom>
+          <a:noFill/>
+          <a:ln/>
+        </p:spPr>
+        <p:txBody>
+          <a:bodyPr wrap="square" lIns="0" tIns="0" rIns="0" bIns="0" rtlCol="0" anchor="t"/>
+          <a:lstStyle/>
+          <a:p>
+            <a:pPr marL="0" indent="0">
+              <a:lnSpc>
+                <a:spcPct val="103000"/>
+              </a:lnSpc>
+              <a:buNone/>
+            </a:pPr>
+            <a:r>
+              <a:rPr lang="en-US" sz="1100" b="1" dirty="0">
+                <a:solidFill>
+                  <a:srgbClr val="2E6BB8"/>
+                </a:solidFill>
+                <a:latin typeface="Meiryo" pitchFamily="34" charset="0"/>
+                <a:ea typeface="Meiryo" pitchFamily="34" charset="-122"/>
+                <a:cs typeface="Meiryo" pitchFamily="34" charset="-120"/>
+              </a:rPr>
+              <a:t>▶</a:t>
+            </a:r>
+            <a:r>
+              <a:rPr lang="en-US" sz="1100" b="1" dirty="0">
+                <a:solidFill>
+                  <a:srgbClr val="222222"/>
+                </a:solidFill>
+                <a:latin typeface="Meiryo" pitchFamily="34" charset="0"/>
+                <a:ea typeface="Meiryo" pitchFamily="34" charset="-122"/>
+                <a:cs typeface="Meiryo" pitchFamily="34" charset="-120"/>
+              </a:rPr>
+              <a:t>対象：</a:t>
+            </a:r>
+            <a:r>
+              <a:rPr lang="en-US" sz="1100" dirty="0">
+                <a:solidFill>
+                  <a:srgbClr val="222222"/>
+                </a:solidFill>
+                <a:latin typeface="Meiryo" pitchFamily="34" charset="0"/>
+                <a:ea typeface="Meiryo" pitchFamily="34" charset="-122"/>
+                <a:cs typeface="Meiryo" pitchFamily="34" charset="-120"/>
+              </a:rPr>
+              <a:t>原則、市内に住所を有する心身に障がいのある就学前児童のうち、保護者と共に通所できる児童（伝染性疾病のない方）</a:t>
+            </a:r>
+            <a:endParaRPr lang="en-US" sz="1050" dirty="0"/>
+          </a:p>
+          <a:p>
+            <a:pPr marL="0" indent="0">
+              <a:lnSpc>
+                <a:spcPct val="103000"/>
+              </a:lnSpc>
+              <a:buNone/>
+            </a:pPr>
+            <a:r>
+              <a:rPr lang="en-US" sz="1100" b="1" dirty="0">
+                <a:solidFill>
+                  <a:srgbClr val="2E6BB8"/>
+                </a:solidFill>
+                <a:latin typeface="Meiryo" pitchFamily="34" charset="0"/>
+                <a:ea typeface="Meiryo" pitchFamily="34" charset="-122"/>
+                <a:cs typeface="Meiryo" pitchFamily="34" charset="-120"/>
+              </a:rPr>
+              <a:t>▶</a:t>
+            </a:r>
+            <a:r>
+              <a:rPr lang="en-US" sz="1100" b="1" dirty="0">
+                <a:solidFill>
+                  <a:srgbClr val="222222"/>
+                </a:solidFill>
+                <a:latin typeface="Meiryo" pitchFamily="34" charset="0"/>
+                <a:ea typeface="Meiryo" pitchFamily="34" charset="-122"/>
+                <a:cs typeface="Meiryo" pitchFamily="34" charset="-120"/>
+              </a:rPr>
+              <a:t>住所：</a:t>
+            </a:r>
+            <a:r>
+              <a:rPr lang="en-US" sz="1100" dirty="0">
+                <a:solidFill>
+                  <a:srgbClr val="222222"/>
+                </a:solidFill>
+                <a:latin typeface="Meiryo" pitchFamily="34" charset="0"/>
+                <a:ea typeface="Meiryo" pitchFamily="34" charset="-122"/>
+                <a:cs typeface="Meiryo" pitchFamily="34" charset="-120"/>
+              </a:rPr>
+              <a:t>千葉県東金市田間3丁目9番地1　東金市ふれあいセンター（保健福祉センター）2階</a:t>
+            </a:r>
+            <a:endParaRPr lang="en-US" sz="1050" dirty="0"/>
+          </a:p>
+          <a:p>
+            <a:pPr marL="0" indent="0">
+              <a:lnSpc>
+                <a:spcPct val="103000"/>
+              </a:lnSpc>
+              <a:buNone/>
+            </a:pPr>
+            <a:r>
+              <a:rPr lang="en-US" sz="1100" b="1" dirty="0">
+                <a:solidFill>
+                  <a:srgbClr val="2E6BB8"/>
+                </a:solidFill>
+                <a:latin typeface="Meiryo" pitchFamily="34" charset="0"/>
+                <a:ea typeface="Meiryo" pitchFamily="34" charset="-122"/>
+                <a:cs typeface="Meiryo" pitchFamily="34" charset="-120"/>
+              </a:rPr>
+              <a:t>▶</a:t>
+            </a:r>
+            <a:r>
+              <a:rPr lang="en-US" sz="1100" b="1" dirty="0">
+                <a:solidFill>
+                  <a:srgbClr val="222222"/>
+                </a:solidFill>
+                <a:latin typeface="Meiryo" pitchFamily="34" charset="0"/>
+                <a:ea typeface="Meiryo" pitchFamily="34" charset="-122"/>
+                <a:cs typeface="Meiryo" pitchFamily="34" charset="-120"/>
+              </a:rPr>
+              <a:t>TEL／HP：</a:t>
+            </a:r>
+            <a:r>
+              <a:rPr lang="en-US" sz="1100" dirty="0">
+                <a:solidFill>
+                  <a:srgbClr val="222222"/>
+                </a:solidFill>
+                <a:latin typeface="Meiryo" pitchFamily="34" charset="0"/>
+                <a:ea typeface="Meiryo" pitchFamily="34" charset="-122"/>
+                <a:cs typeface="Meiryo" pitchFamily="34" charset="-120"/>
+              </a:rPr>
+              <a:t>0475-54-1197 ／ city.togane.chiba.jp（東金市公式）・togane-shakyo.jp</a:t>
+            </a:r>
+            <a:endParaRPr lang="en-US" sz="1050" dirty="0"/>
+          </a:p>
+          <a:p>
+            <a:pPr marL="0" indent="0">
+              <a:lnSpc>
+                <a:spcPct val="103000"/>
+              </a:lnSpc>
+              <a:buNone/>
+            </a:pPr>
+            <a:r>
+              <a:rPr lang="en-US" sz="1100" b="1" dirty="0">
+                <a:solidFill>
+                  <a:srgbClr val="2E6BB8"/>
+                </a:solidFill>
+                <a:latin typeface="Meiryo" pitchFamily="34" charset="0"/>
+                <a:ea typeface="Meiryo" pitchFamily="34" charset="-122"/>
+                <a:cs typeface="Meiryo" pitchFamily="34" charset="-120"/>
+              </a:rPr>
+              <a:t>▶</a:t>
+            </a:r>
+            <a:r>
+              <a:rPr lang="en-US" sz="1100" b="1" dirty="0">
+                <a:solidFill>
+                  <a:srgbClr val="222222"/>
+                </a:solidFill>
+                <a:latin typeface="Meiryo" pitchFamily="34" charset="0"/>
+                <a:ea typeface="Meiryo" pitchFamily="34" charset="-122"/>
+                <a:cs typeface="Meiryo" pitchFamily="34" charset="-120"/>
+              </a:rPr>
+              <a:t>アクセス：</a:t>
+            </a:r>
+            <a:r>
+              <a:rPr lang="en-US" sz="1100" dirty="0">
+                <a:solidFill>
+                  <a:srgbClr val="222222"/>
+                </a:solidFill>
+                <a:latin typeface="Meiryo" pitchFamily="34" charset="0"/>
+                <a:ea typeface="Meiryo" pitchFamily="34" charset="-122"/>
+                <a:cs typeface="Meiryo" pitchFamily="34" charset="-120"/>
+              </a:rPr>
+              <a:t>JR東金線 東金駅から徒歩約15分。東金市役所前より循環バスあり。</a:t>
+            </a:r>
+            <a:endParaRPr lang="en-US" sz="1050" dirty="0"/>
+          </a:p>
+          <a:p>
+            <a:pPr marL="0" indent="0">
+              <a:lnSpc>
+                <a:spcPct val="103000"/>
+              </a:lnSpc>
+              <a:buNone/>
+            </a:pPr>
+            <a:r>
+              <a:rPr lang="en-US" sz="1100" b="1" dirty="0">
+                <a:solidFill>
+                  <a:srgbClr val="2E6BB8"/>
+                </a:solidFill>
+                <a:latin typeface="Meiryo" pitchFamily="34" charset="0"/>
+                <a:ea typeface="Meiryo" pitchFamily="34" charset="-122"/>
+                <a:cs typeface="Meiryo" pitchFamily="34" charset="-120"/>
+              </a:rPr>
+              <a:t>▶</a:t>
+            </a:r>
+            <a:r>
+              <a:rPr lang="en-US" sz="1100" b="1" dirty="0">
+                <a:solidFill>
+                  <a:srgbClr val="222222"/>
+                </a:solidFill>
+                <a:latin typeface="Meiryo" pitchFamily="34" charset="0"/>
+                <a:ea typeface="Meiryo" pitchFamily="34" charset="-122"/>
+                <a:cs typeface="Meiryo" pitchFamily="34" charset="-120"/>
+              </a:rPr>
+              <a:t>定員：</a:t>
+            </a:r>
+            <a:r>
+              <a:rPr lang="en-US" sz="1100" dirty="0">
+                <a:solidFill>
+                  <a:srgbClr val="222222"/>
+                </a:solidFill>
+                <a:latin typeface="Meiryo" pitchFamily="34" charset="0"/>
+                <a:ea typeface="Meiryo" pitchFamily="34" charset="-122"/>
+                <a:cs typeface="Meiryo" pitchFamily="34" charset="-120"/>
+              </a:rPr>
+              <a:t>児童発達支援 1日15名</a:t>
+            </a:r>
+            <a:endParaRPr lang="en-US" sz="1050" dirty="0"/>
+          </a:p>
+          <a:p>
+            <a:pPr marL="0" indent="0">
+              <a:lnSpc>
+                <a:spcPct val="103000"/>
+              </a:lnSpc>
+              <a:spcAft>
+                <a:spcPts val="500"/>
+              </a:spcAft>
+              <a:buNone/>
+            </a:pPr>
+            <a:endParaRPr lang="en-US" sz="1050" dirty="0"/>
+          </a:p>
+          <a:p>
+            <a:pPr marL="0" indent="0">
+              <a:lnSpc>
+                <a:spcPct val="103000"/>
+              </a:lnSpc>
+              <a:buNone/>
+            </a:pPr>
+            <a:r>
+              <a:rPr lang="en-US" sz="1100" b="1" dirty="0">
+                <a:solidFill>
+                  <a:srgbClr val="2E6BB8"/>
+                </a:solidFill>
+                <a:latin typeface="Meiryo" pitchFamily="34" charset="0"/>
+                <a:ea typeface="Meiryo" pitchFamily="34" charset="-122"/>
+                <a:cs typeface="Meiryo" pitchFamily="34" charset="-120"/>
+              </a:rPr>
+              <a:t>▶</a:t>
+            </a:r>
+            <a:r>
+              <a:rPr lang="en-US" sz="1100" b="1" dirty="0">
+                <a:solidFill>
+                  <a:srgbClr val="222222"/>
+                </a:solidFill>
+                <a:latin typeface="Meiryo" pitchFamily="34" charset="0"/>
+                <a:ea typeface="Meiryo" pitchFamily="34" charset="-122"/>
+                <a:cs typeface="Meiryo" pitchFamily="34" charset="-120"/>
+              </a:rPr>
+              <a:t>療育プログラムの特徴：</a:t>
+            </a:r>
+            <a:r>
+              <a:rPr lang="en-US" sz="1100" dirty="0">
+                <a:solidFill>
+                  <a:srgbClr val="222222"/>
+                </a:solidFill>
+                <a:latin typeface="Meiryo" pitchFamily="34" charset="0"/>
+                <a:ea typeface="Meiryo" pitchFamily="34" charset="-122"/>
+                <a:cs typeface="Meiryo" pitchFamily="34" charset="-120"/>
+              </a:rPr>
+              <a:t>生活を支援することで児童の発達を援助することを目的とする。</a:t>
+            </a:r>
+            <a:endParaRPr lang="en-US" sz="1050" dirty="0"/>
+          </a:p>
+          <a:p>
+            <a:pPr marL="0" indent="0">
+              <a:lnSpc>
+                <a:spcPct val="103000"/>
+              </a:lnSpc>
+              <a:spcAft>
+                <a:spcPts val="500"/>
+              </a:spcAft>
+              <a:buNone/>
+            </a:pPr>
+            <a:r>
+              <a:rPr lang="en-US" sz="1100" dirty="0">
+                <a:solidFill>
+                  <a:srgbClr val="222222"/>
+                </a:solidFill>
+                <a:latin typeface="Meiryo" pitchFamily="34" charset="0"/>
+                <a:ea typeface="Meiryo" pitchFamily="34" charset="-122"/>
+                <a:cs typeface="Meiryo" pitchFamily="34" charset="-120"/>
+              </a:rPr>
+              <a:t>・運動、おもちゃ・ゲームなどのあそびを用いたグループ活動が支援の中心。</a:t>
+            </a:r>
+            <a:endParaRPr lang="en-US" sz="1050" dirty="0"/>
+          </a:p>
+          <a:p>
+            <a:pPr marL="0" indent="0">
+              <a:lnSpc>
+                <a:spcPct val="103000"/>
+              </a:lnSpc>
+              <a:spcAft>
+                <a:spcPts val="500"/>
+              </a:spcAft>
+              <a:buNone/>
+            </a:pPr>
+            <a:r>
+              <a:rPr lang="en-US" sz="1100" dirty="0">
+                <a:solidFill>
+                  <a:srgbClr val="222222"/>
+                </a:solidFill>
+                <a:latin typeface="Meiryo" pitchFamily="34" charset="0"/>
+                <a:ea typeface="Meiryo" pitchFamily="34" charset="-122"/>
+                <a:cs typeface="Meiryo" pitchFamily="34" charset="-120"/>
+              </a:rPr>
+              <a:t>・小学1・2年生向けに学習指導とソーシャルスキルトレーニングを実施（放課後等デイサービス）。</a:t>
+            </a:r>
+            <a:endParaRPr lang="en-US" sz="1050" dirty="0"/>
+          </a:p>
+          <a:p>
+            <a:pPr marL="0" indent="0">
+              <a:lnSpc>
+                <a:spcPct val="103000"/>
+              </a:lnSpc>
+              <a:spcAft>
+                <a:spcPts val="500"/>
+              </a:spcAft>
+              <a:buNone/>
+            </a:pPr>
+            <a:r>
+              <a:rPr lang="en-US" sz="1100" dirty="0">
+                <a:solidFill>
+                  <a:srgbClr val="222222"/>
+                </a:solidFill>
+                <a:latin typeface="Meiryo" pitchFamily="34" charset="0"/>
+                <a:ea typeface="Meiryo" pitchFamily="34" charset="-122"/>
+                <a:cs typeface="Meiryo" pitchFamily="34" charset="-120"/>
+              </a:rPr>
+              <a:t>・設置管理条例に基づく市の公の施設。地域開放事業もあわせて実施。</a:t>
+            </a:r>
+            <a:endParaRPr lang="en-US" sz="1050" dirty="0"/>
+          </a:p>
+        </p:txBody>
+      </p:sp>
+      <p:sp>
+        <p:nvSpPr>
+          <p:cNvPr id="14" name="Shape 12"/>
+          <p:cNvSpPr/>
+          <p:nvPr/>
+        </p:nvSpPr>
+        <p:spPr>
+          <a:xfrm>
+            <a:off x="7635240" y="1783080"/>
+            <a:ext cx="4069080" cy="3474720"/>
+          </a:xfrm>
+          <a:prstGeom prst="rect">
+            <a:avLst/>
+          </a:prstGeom>
+          <a:solidFill>
+            <a:srgbClr val="EEF2F8"/>
+          </a:solidFill>
+          <a:ln w="12700">
+            <a:solidFill>
+              <a:srgbClr val="9AA7B8"/>
+            </a:solidFill>
+            <a:prstDash val="solid"/>
+          </a:ln>
+        </p:spPr>
+      </p:sp>
+      <p:sp>
+        <p:nvSpPr>
+          <p:cNvPr id="15" name="Text 13"/>
+          <p:cNvSpPr/>
+          <p:nvPr/>
+        </p:nvSpPr>
+        <p:spPr>
+          <a:xfrm>
+            <a:off x="7818120" y="1901952"/>
+            <a:ext cx="3703320" cy="320040"/>
           </a:xfrm>
           <a:prstGeom prst="rect">
             <a:avLst/>
@@ -16576,17 +12522,305 @@
               <a:buNone/>
             </a:pPr>
             <a:r>
-              <a:rPr lang="en-US" sz="3000" b="1" dirty="0">
-                <a:solidFill>
-                  <a:srgbClr val="FFFFFF"/>
-                </a:solidFill>
-                <a:latin typeface="Meiryo" pitchFamily="34" charset="0"/>
-                <a:ea typeface="Meiryo" pitchFamily="34" charset="-122"/>
-                <a:cs typeface="Meiryo" pitchFamily="34" charset="-120"/>
-              </a:rPr>
-              <a:t>I．　対象事業所一覧</a:t>
-            </a:r>
-            <a:endParaRPr lang="en-US" sz="3000" dirty="0"/>
+              <a:rPr lang="en-US" sz="1250" b="1" dirty="0">
+                <a:solidFill>
+                  <a:srgbClr val="1B3A6B"/>
+                </a:solidFill>
+                <a:latin typeface="Meiryo" pitchFamily="34" charset="0"/>
+                <a:ea typeface="Meiryo" pitchFamily="34" charset="-122"/>
+                <a:cs typeface="Meiryo" pitchFamily="34" charset="-120"/>
+              </a:rPr>
+              <a:t>注目ポイント</a:t>
+            </a:r>
+            <a:endParaRPr lang="en-US" sz="1250" dirty="0"/>
+          </a:p>
+        </p:txBody>
+      </p:sp>
+      <p:sp>
+        <p:nvSpPr>
+          <p:cNvPr id="16" name="Text 14"/>
+          <p:cNvSpPr/>
+          <p:nvPr/>
+        </p:nvSpPr>
+        <p:spPr>
+          <a:xfrm>
+            <a:off x="7818120" y="2286000"/>
+            <a:ext cx="3703320" cy="2907791"/>
+          </a:xfrm>
+          <a:prstGeom prst="rect">
+            <a:avLst/>
+          </a:prstGeom>
+          <a:noFill/>
+          <a:ln/>
+        </p:spPr>
+        <p:txBody>
+          <a:bodyPr wrap="square" lIns="0" tIns="0" rIns="0" bIns="0" rtlCol="0" anchor="t"/>
+          <a:lstStyle/>
+          <a:p>
+            <a:pPr marL="342900" indent="-342900">
+              <a:spcAft>
+                <a:spcPts val="700"/>
+              </a:spcAft>
+              <a:buSzPct val="100000"/>
+              <a:buChar char="•"/>
+            </a:pPr>
+            <a:r>
+              <a:rPr lang="en-US" sz="1050" dirty="0">
+                <a:solidFill>
+                  <a:srgbClr val="222222"/>
+                </a:solidFill>
+                <a:latin typeface="メイリオ" panose="020B0604030504040204" pitchFamily="50" charset="-128"/>
+                <a:ea typeface="メイリオ" panose="020B0604030504040204" pitchFamily="50" charset="-128"/>
+                <a:cs typeface="Meiryo" pitchFamily="34" charset="-120"/>
+              </a:rPr>
+              <a:t>市内で唯一の公立（市設置）児童発達支援。乳幼児健診からの流れで最初につながる“入口”機能を担う。</a:t>
+            </a:r>
+            <a:endParaRPr lang="en-US" sz="1000" dirty="0">
+              <a:latin typeface="メイリオ" panose="020B0604030504040204" pitchFamily="50" charset="-128"/>
+              <a:ea typeface="メイリオ" panose="020B0604030504040204" pitchFamily="50" charset="-128"/>
+            </a:endParaRPr>
+          </a:p>
+          <a:p>
+            <a:pPr marL="342900" indent="-342900">
+              <a:spcAft>
+                <a:spcPts val="700"/>
+              </a:spcAft>
+              <a:buSzPct val="100000"/>
+              <a:buChar char="•"/>
+            </a:pPr>
+            <a:r>
+              <a:rPr lang="en-US" sz="1050" dirty="0">
+                <a:solidFill>
+                  <a:srgbClr val="222222"/>
+                </a:solidFill>
+                <a:latin typeface="メイリオ" panose="020B0604030504040204" pitchFamily="50" charset="-128"/>
+                <a:ea typeface="メイリオ" panose="020B0604030504040204" pitchFamily="50" charset="-128"/>
+                <a:cs typeface="Meiryo" pitchFamily="34" charset="-120"/>
+              </a:rPr>
+              <a:t>保護者同伴通所が原則の親子通園型。母子分離で預かる民間事業所とは役割が構造的に異なる。</a:t>
+            </a:r>
+            <a:endParaRPr lang="en-US" sz="1000" dirty="0">
+              <a:latin typeface="メイリオ" panose="020B0604030504040204" pitchFamily="50" charset="-128"/>
+              <a:ea typeface="メイリオ" panose="020B0604030504040204" pitchFamily="50" charset="-128"/>
+            </a:endParaRPr>
+          </a:p>
+          <a:p>
+            <a:pPr marL="342900" indent="-342900">
+              <a:spcAft>
+                <a:spcPts val="700"/>
+              </a:spcAft>
+              <a:buSzPct val="100000"/>
+              <a:buChar char="•"/>
+            </a:pPr>
+            <a:r>
+              <a:rPr lang="en-US" sz="1050" dirty="0">
+                <a:solidFill>
+                  <a:srgbClr val="222222"/>
+                </a:solidFill>
+                <a:latin typeface="メイリオ" panose="020B0604030504040204" pitchFamily="50" charset="-128"/>
+                <a:ea typeface="メイリオ" panose="020B0604030504040204" pitchFamily="50" charset="-128"/>
+                <a:cs typeface="Meiryo" pitchFamily="34" charset="-120"/>
+              </a:rPr>
+              <a:t>定員が1日15名と限られ、就学前の療育ニーズの受け皿が民間事業所へ流れやすい構造。</a:t>
+            </a:r>
+            <a:endParaRPr lang="en-US" sz="1000" dirty="0">
+              <a:latin typeface="メイリオ" panose="020B0604030504040204" pitchFamily="50" charset="-128"/>
+              <a:ea typeface="メイリオ" panose="020B0604030504040204" pitchFamily="50" charset="-128"/>
+            </a:endParaRPr>
+          </a:p>
+          <a:p>
+            <a:pPr marL="342900" indent="-342900">
+              <a:spcAft>
+                <a:spcPts val="700"/>
+              </a:spcAft>
+              <a:buSzPct val="100000"/>
+              <a:buChar char="•"/>
+            </a:pPr>
+            <a:r>
+              <a:rPr lang="en-US" sz="1050" dirty="0">
+                <a:solidFill>
+                  <a:srgbClr val="222222"/>
+                </a:solidFill>
+                <a:latin typeface="メイリオ" panose="020B0604030504040204" pitchFamily="50" charset="-128"/>
+                <a:ea typeface="メイリオ" panose="020B0604030504040204" pitchFamily="50" charset="-128"/>
+                <a:cs typeface="Meiryo" pitchFamily="34" charset="-120"/>
+              </a:rPr>
+              <a:t>新規参入の観点では、公立の定員（1日15名）を超える就学前ニーズをどう受けるかが最初の需要源となる。</a:t>
+            </a:r>
+            <a:endParaRPr lang="en-US" sz="1000" dirty="0">
+              <a:latin typeface="メイリオ" panose="020B0604030504040204" pitchFamily="50" charset="-128"/>
+              <a:ea typeface="メイリオ" panose="020B0604030504040204" pitchFamily="50" charset="-128"/>
+            </a:endParaRPr>
+          </a:p>
+        </p:txBody>
+      </p:sp>
+      <p:sp>
+        <p:nvSpPr>
+          <p:cNvPr id="940" name="FootBG"/>
+          <p:cNvSpPr/>
+          <p:nvPr/>
+        </p:nvSpPr>
+        <p:spPr>
+          <a:xfrm>
+            <a:off x="502920" y="5394960"/>
+            <a:ext cx="11201400" cy="896112"/>
+          </a:xfrm>
+          <a:prstGeom prst="rect">
+            <a:avLst/>
+          </a:prstGeom>
+          <a:solidFill>
+            <a:srgbClr val="EEF2F8"/>
+          </a:solidFill>
+          <a:ln w="12700">
+            <a:solidFill>
+              <a:srgbClr val="9AA7B8"/>
+            </a:solidFill>
+            <a:prstDash val="solid"/>
+          </a:ln>
+        </p:spPr>
+      </p:sp>
+      <p:sp>
+        <p:nvSpPr>
+          <p:cNvPr id="941" name="FootTitle"/>
+          <p:cNvSpPr/>
+          <p:nvPr/>
+        </p:nvSpPr>
+        <p:spPr>
+          <a:xfrm>
+            <a:off x="713232" y="5477256"/>
+            <a:ext cx="10789920" cy="274320"/>
+          </a:xfrm>
+          <a:prstGeom prst="rect">
+            <a:avLst/>
+          </a:prstGeom>
+          <a:noFill/>
+          <a:ln/>
+        </p:spPr>
+        <p:txBody>
+          <a:bodyPr wrap="square" lIns="0" tIns="0" rIns="0" bIns="0" rtlCol="0" anchor="ctr"/>
+          <a:lstStyle/>
+          <a:p>
+            <a:pPr marL="0" indent="0">
+              <a:buNone/>
+            </a:pPr>
+            <a:r>
+              <a:rPr lang="en-US" sz="1250" b="1" dirty="0">
+                <a:solidFill>
+                  <a:srgbClr val="1B3A6B"/>
+                </a:solidFill>
+                <a:latin typeface="Meiryo" pitchFamily="34" charset="0"/>
+                <a:ea typeface="Meiryo" pitchFamily="34" charset="-122"/>
+                <a:cs typeface="Meiryo" pitchFamily="34" charset="-120"/>
+              </a:rPr>
+              <a:t>出典 ／ 要確認事項</a:t>
+            </a:r>
+            <a:endParaRPr lang="en-US" sz="1250" dirty="0"/>
+          </a:p>
+        </p:txBody>
+      </p:sp>
+      <p:sp>
+        <p:nvSpPr>
+          <p:cNvPr id="13" name="FootBody"/>
+          <p:cNvSpPr/>
+          <p:nvPr/>
+        </p:nvSpPr>
+        <p:spPr>
+          <a:xfrm>
+            <a:off x="713232" y="5779008"/>
+            <a:ext cx="10789920" cy="475488"/>
+          </a:xfrm>
+          <a:prstGeom prst="rect">
+            <a:avLst/>
+          </a:prstGeom>
+          <a:noFill/>
+          <a:ln/>
+        </p:spPr>
+        <p:txBody>
+          <a:bodyPr wrap="square" lIns="0" tIns="0" rIns="0" bIns="0" rtlCol="0" anchor="t"/>
+          <a:lstStyle/>
+          <a:p>
+            <a:pPr marL="0" indent="0">
+              <a:lnSpc>
+                <a:spcPct val="103000"/>
+              </a:lnSpc>
+              <a:buNone/>
+            </a:pPr>
+            <a:r>
+              <a:rPr lang="en-US" sz="950" b="1" dirty="0">
+                <a:solidFill>
+                  <a:srgbClr val="2E6BB8"/>
+                </a:solidFill>
+                <a:latin typeface="Meiryo" pitchFamily="34" charset="0"/>
+                <a:ea typeface="Meiryo" pitchFamily="34" charset="-122"/>
+                <a:cs typeface="Meiryo" pitchFamily="34" charset="-120"/>
+              </a:rPr>
+              <a:t>▶</a:t>
+            </a:r>
+            <a:r>
+              <a:rPr lang="en-US" sz="950" b="1" dirty="0">
+                <a:solidFill>
+                  <a:srgbClr val="222222"/>
+                </a:solidFill>
+                <a:latin typeface="Meiryo" pitchFamily="34" charset="0"/>
+                <a:ea typeface="Meiryo" pitchFamily="34" charset="-122"/>
+                <a:cs typeface="Meiryo" pitchFamily="34" charset="-120"/>
+              </a:rPr>
+              <a:t>出典：</a:t>
+            </a:r>
+            <a:r>
+              <a:rPr lang="en-US" sz="950" dirty="0">
+                <a:solidFill>
+                  <a:srgbClr val="222222"/>
+                </a:solidFill>
+                <a:latin typeface="Meiryo" pitchFamily="34" charset="0"/>
+                <a:ea typeface="Meiryo" pitchFamily="34" charset="-122"/>
+                <a:cs typeface="Meiryo" pitchFamily="34" charset="-120"/>
+              </a:rPr>
+              <a:t>東金市公式サイト（city.togane.chiba.jp）／東金市社会福祉協議会／みんなの障がい</a:t>
+            </a:r>
+            <a:endParaRPr lang="en-US" sz="1050" dirty="0"/>
+          </a:p>
+          <a:p>
+            <a:pPr marL="0" indent="0">
+              <a:lnSpc>
+                <a:spcPct val="103000"/>
+              </a:lnSpc>
+              <a:buNone/>
+            </a:pPr>
+            <a:r>
+              <a:rPr lang="en-US" sz="950" b="1" dirty="0">
+                <a:solidFill>
+                  <a:srgbClr val="2E6BB8"/>
+                </a:solidFill>
+                <a:latin typeface="Meiryo" pitchFamily="34" charset="0"/>
+                <a:ea typeface="Meiryo" pitchFamily="34" charset="-122"/>
+                <a:cs typeface="Meiryo" pitchFamily="34" charset="-120"/>
+              </a:rPr>
+              <a:t>▶</a:t>
+            </a:r>
+            <a:r>
+              <a:rPr lang="en-US" sz="950" b="1" dirty="0">
+                <a:solidFill>
+                  <a:srgbClr val="222222"/>
+                </a:solidFill>
+                <a:latin typeface="Meiryo" pitchFamily="34" charset="0"/>
+                <a:ea typeface="Meiryo" pitchFamily="34" charset="-122"/>
+                <a:cs typeface="Meiryo" pitchFamily="34" charset="-120"/>
+              </a:rPr>
+              <a:t>要確認事項：</a:t>
+            </a:r>
+            <a:r>
+              <a:rPr lang="en-US" sz="950" dirty="0">
+                <a:solidFill>
+                  <a:srgbClr val="222222"/>
+                </a:solidFill>
+                <a:latin typeface="Meiryo" pitchFamily="34" charset="0"/>
+                <a:ea typeface="Meiryo" pitchFamily="34" charset="-122"/>
+                <a:cs typeface="Meiryo" pitchFamily="34" charset="-120"/>
+              </a:rPr>
+              <a:t>現在の空き状況、放課後等デイサービスの対象学年の詳細、利用手続き・受給者証の要否</a:t>
+            </a:r>
+            <a:endParaRPr lang="en-US" sz="1050" dirty="0"/>
           </a:p>
         </p:txBody>
       </p:sp>
@@ -16735,7 +12969,7 @@
                 <a:ea typeface="Meiryo" pitchFamily="34" charset="-122"/>
                 <a:cs typeface="Meiryo" pitchFamily="34" charset="-120"/>
               </a:rPr>
-              <a:t>① 東金市簡易マザーズホーム</a:t>
+              <a:t>② 子ども支援センターぽけっと</a:t>
             </a:r>
             <a:endParaRPr lang="en-US" sz="2100" dirty="0"/>
           </a:p>
@@ -16909,7 +13143,7 @@
                 <a:ea typeface="Meiryo" pitchFamily="34" charset="-122"/>
                 <a:cs typeface="Meiryo" pitchFamily="34" charset="-120"/>
               </a:rPr>
-              <a:t>東金市簡易マザーズホーム（設置：東金市／運営：東金市社会福祉協議会）</a:t>
+              <a:t>子ども支援センターぽけっと（児童発達支援・放課後等デイサービス）</a:t>
             </a:r>
             <a:endParaRPr lang="en-US" sz="1400" dirty="0"/>
           </a:p>
@@ -16973,7 +13207,7 @@
                 <a:ea typeface="Meiryo" pitchFamily="34" charset="-122"/>
                 <a:cs typeface="Meiryo" pitchFamily="34" charset="-120"/>
               </a:rPr>
-              <a:t>原則、市内に住所を有する心身に障がいのある就学前児童のうち、保護者と共に通所できる児童（伝染性疾病のない方）</a:t>
+              <a:t>未就学児（児童発達支援）〜就学児（放課後等デイサービス）</a:t>
             </a:r>
             <a:endParaRPr lang="en-US" sz="1050" dirty="0"/>
           </a:p>
@@ -17015,7 +13249,7 @@
                 <a:ea typeface="Meiryo" pitchFamily="34" charset="-122"/>
                 <a:cs typeface="Meiryo" pitchFamily="34" charset="-120"/>
               </a:rPr>
-              <a:t>千葉県東金市田間3丁目9番地1　東金市ふれあいセンター（保健福祉センター）2階</a:t>
+              <a:t>千葉県東金市東上宿6番地2</a:t>
             </a:r>
             <a:endParaRPr lang="en-US" sz="1050" dirty="0"/>
           </a:p>
@@ -17057,7 +13291,7 @@
                 <a:ea typeface="Meiryo" pitchFamily="34" charset="-122"/>
                 <a:cs typeface="Meiryo" pitchFamily="34" charset="-120"/>
               </a:rPr>
-              <a:t>0475-54-1197 ／ city.togane.chiba.jp（東金市公式）・togane-shakyo.jp</a:t>
+              <a:t>0475-50-1081 ／ WAM NET（障害福祉サービス等情報公表システム）に事業所情報を掲載</a:t>
             </a:r>
             <a:endParaRPr lang="en-US" sz="1050" dirty="0"/>
           </a:p>
@@ -17088,7 +13322,7 @@
                 <a:ea typeface="Meiryo" pitchFamily="34" charset="-122"/>
                 <a:cs typeface="Meiryo" pitchFamily="34" charset="-120"/>
               </a:rPr>
-              <a:t>アクセス：</a:t>
+              <a:t>サービス提供時間：</a:t>
             </a:r>
             <a:r>
               <a:rPr lang="en-US" sz="1100" dirty="0">
@@ -17099,7 +13333,7 @@
                 <a:ea typeface="Meiryo" pitchFamily="34" charset="-122"/>
                 <a:cs typeface="Meiryo" pitchFamily="34" charset="-120"/>
               </a:rPr>
-              <a:t>JR東金線 東金駅から徒歩約15分。東金市役所前より循環バスあり。</a:t>
+              <a:t>要確認（公開情報に記載なし）</a:t>
             </a:r>
             <a:endParaRPr lang="en-US" sz="1050" dirty="0"/>
           </a:p>
@@ -17141,7 +13375,7 @@
                 <a:ea typeface="Meiryo" pitchFamily="34" charset="-122"/>
                 <a:cs typeface="Meiryo" pitchFamily="34" charset="-120"/>
               </a:rPr>
-              <a:t>児童発達支援 1日15名</a:t>
+              <a:t>要確認</a:t>
             </a:r>
             <a:endParaRPr lang="en-US" sz="1050" dirty="0"/>
           </a:p>
@@ -17195,7 +13429,7 @@
                 <a:ea typeface="Meiryo" pitchFamily="34" charset="-122"/>
                 <a:cs typeface="Meiryo" pitchFamily="34" charset="-120"/>
               </a:rPr>
-              <a:t>生活を支援することで児童の発達を援助することを目的とする。</a:t>
+              <a:t>公開情報が限られており、支援内容の詳細は事業所への直接確認が必要。</a:t>
             </a:r>
             <a:endParaRPr lang="en-US" sz="1050" dirty="0"/>
           </a:p>
@@ -17218,7 +13452,7 @@
                 <a:ea typeface="Meiryo" pitchFamily="34" charset="-122"/>
                 <a:cs typeface="Meiryo" pitchFamily="34" charset="-120"/>
               </a:rPr>
-              <a:t>・運動、おもちゃ・ゲームなどのあそびを用いたグループ活動が支援の中心。</a:t>
+              <a:t>・児童発達支援と放課後等デイサービスを併設し、未就学から就学後まで継続利用できる体制。</a:t>
             </a:r>
             <a:endParaRPr lang="en-US" sz="1050" dirty="0"/>
           </a:p>
@@ -17241,7 +13475,7 @@
                 <a:ea typeface="Meiryo" pitchFamily="34" charset="-122"/>
                 <a:cs typeface="Meiryo" pitchFamily="34" charset="-120"/>
               </a:rPr>
-              <a:t>・小学1・2年生向けに学習指導とソーシャルスキルトレーニングを実施（放課後等デイサービス）。</a:t>
+              <a:t>・東金駅・市役所に近い東上宿の市街地に立地。</a:t>
             </a:r>
             <a:endParaRPr lang="en-US" sz="1050" dirty="0"/>
           </a:p>
@@ -17264,7 +13498,7 @@
                 <a:ea typeface="Meiryo" pitchFamily="34" charset="-122"/>
                 <a:cs typeface="Meiryo" pitchFamily="34" charset="-120"/>
               </a:rPr>
-              <a:t>・設置管理条例に基づく市の公の施設。地域開放事業もあわせて実施。</a:t>
+              <a:t>・同一町域（東上宿6-1）に相談支援事業所「街かど福祉相談室るると」が所在し、相談〜通所の導線が近い。</a:t>
             </a:r>
             <a:endParaRPr lang="en-US" sz="1050" dirty="0"/>
           </a:p>
@@ -17371,7 +13605,7 @@
                 <a:ea typeface="メイリオ" panose="020B0604030504040204" pitchFamily="50" charset="-128"/>
                 <a:cs typeface="Meiryo" pitchFamily="34" charset="-120"/>
               </a:rPr>
-              <a:t>市内で唯一の公立（市設置）児童発達支援。乳幼児健診からの流れで最初につながる“入口”機能を担う。</a:t>
+              <a:t>市街地中心部の立地で、駅・市役所方面からのアクセス性が高い。</a:t>
             </a:r>
             <a:endParaRPr lang="en-US" sz="1000" dirty="0">
               <a:latin typeface="メイリオ" panose="020B0604030504040204" pitchFamily="50" charset="-128"/>
@@ -17395,7 +13629,7 @@
                 <a:ea typeface="メイリオ" panose="020B0604030504040204" pitchFamily="50" charset="-128"/>
                 <a:cs typeface="Meiryo" pitchFamily="34" charset="-120"/>
               </a:rPr>
-              <a:t>保護者同伴通所が原則の親子通園型。母子分離で預かる民間事業所とは役割が構造的に異なる。</a:t>
+              <a:t>児発／放デイの一貫利用が可能な、市内では数少ないタイプ。</a:t>
             </a:r>
             <a:endParaRPr lang="en-US" sz="1000" dirty="0">
               <a:latin typeface="メイリオ" panose="020B0604030504040204" pitchFamily="50" charset="-128"/>
@@ -17419,7 +13653,7 @@
                 <a:ea typeface="メイリオ" panose="020B0604030504040204" pitchFamily="50" charset="-128"/>
                 <a:cs typeface="Meiryo" pitchFamily="34" charset="-120"/>
               </a:rPr>
-              <a:t>定員が1日15名と限られ、就学前の療育ニーズの受け皿が民間事業所へ流れやすい構造。</a:t>
+              <a:t>Web上の情報発信が乏しく、集客は行政・相談支援経由の紹介が中心と推察される。</a:t>
             </a:r>
             <a:endParaRPr lang="en-US" sz="1000" dirty="0">
               <a:latin typeface="メイリオ" panose="020B0604030504040204" pitchFamily="50" charset="-128"/>
@@ -17443,7 +13677,7 @@
                 <a:ea typeface="メイリオ" panose="020B0604030504040204" pitchFamily="50" charset="-128"/>
                 <a:cs typeface="Meiryo" pitchFamily="34" charset="-120"/>
               </a:rPr>
-              <a:t>新規参入の観点では、公立の定員（1日15名）を超える就学前ニーズをどう受けるかが最初の需要源となる。</a:t>
+              <a:t>情報発信の弱さは裏返せば、Web集客に強い事業所にとって切り崩しやすい競合といえる。</a:t>
             </a:r>
             <a:endParaRPr lang="en-US" sz="1000" dirty="0">
               <a:latin typeface="メイリオ" panose="020B0604030504040204" pitchFamily="50" charset="-128"/>
@@ -17574,7 +13808,7 @@
                 <a:ea typeface="Meiryo" pitchFamily="34" charset="-122"/>
                 <a:cs typeface="Meiryo" pitchFamily="34" charset="-120"/>
               </a:rPr>
-              <a:t>東金市公式サイト（city.togane.chiba.jp）／東金市社会福祉協議会／みんなの障がい</a:t>
+              <a:t>WAM NET 障害福祉サービス等情報公表システム／LITALICO発達ナビ／東金市公式サイト</a:t>
             </a:r>
             <a:endParaRPr lang="en-US" sz="1050" dirty="0"/>
           </a:p>
@@ -17616,7 +13850,7 @@
                 <a:ea typeface="Meiryo" pitchFamily="34" charset="-122"/>
                 <a:cs typeface="Meiryo" pitchFamily="34" charset="-120"/>
               </a:rPr>
-              <a:t>現在の空き状況、放課後等デイサービスの対象学年の詳細、利用手続き・受給者証の要否</a:t>
+              <a:t>運営法人、サービス提供時間、定員、送迎の有無、プログラム内容　※公開情報がほぼ無く電話ヒアリング必須</a:t>
             </a:r>
             <a:endParaRPr lang="en-US" sz="1050" dirty="0"/>
           </a:p>
@@ -17767,7 +14001,7 @@
                 <a:ea typeface="Meiryo" pitchFamily="34" charset="-122"/>
                 <a:cs typeface="Meiryo" pitchFamily="34" charset="-120"/>
               </a:rPr>
-              <a:t>② 子ども支援センターぽけっと</a:t>
+              <a:t>③ こどもプラス東金教室</a:t>
             </a:r>
             <a:endParaRPr lang="en-US" sz="2100" dirty="0"/>
           </a:p>
@@ -17941,7 +14175,7 @@
                 <a:ea typeface="Meiryo" pitchFamily="34" charset="-122"/>
                 <a:cs typeface="Meiryo" pitchFamily="34" charset="-120"/>
               </a:rPr>
-              <a:t>子ども支援センターぽけっと（児童発達支援・放課後等デイサービス）</a:t>
+              <a:t>こどもプラス東金教室（運営：株式会社ベストグロウ）</a:t>
             </a:r>
             <a:endParaRPr lang="en-US" sz="1400" dirty="0"/>
           </a:p>
@@ -18005,7 +14239,7 @@
                 <a:ea typeface="Meiryo" pitchFamily="34" charset="-122"/>
                 <a:cs typeface="Meiryo" pitchFamily="34" charset="-120"/>
               </a:rPr>
-              <a:t>未就学児（児童発達支援）〜就学児（放課後等デイサービス）</a:t>
+              <a:t>未就学児（児童発達支援）／就学児（放課後等デイサービス）</a:t>
             </a:r>
             <a:endParaRPr lang="en-US" sz="1050" dirty="0"/>
           </a:p>
@@ -18047,7 +14281,7 @@
                 <a:ea typeface="Meiryo" pitchFamily="34" charset="-122"/>
                 <a:cs typeface="Meiryo" pitchFamily="34" charset="-120"/>
               </a:rPr>
-              <a:t>千葉県東金市東上宿6番地2</a:t>
+              <a:t>千葉県東金市東新宿18-1 酒造ビル105号（JR東金線 東金駅から徒歩約7〜9分）</a:t>
             </a:r>
             <a:endParaRPr lang="en-US" sz="1050" dirty="0"/>
           </a:p>
@@ -18089,7 +14323,7 @@
                 <a:ea typeface="Meiryo" pitchFamily="34" charset="-122"/>
                 <a:cs typeface="Meiryo" pitchFamily="34" charset="-120"/>
               </a:rPr>
-              <a:t>0475-50-1081 ／ WAM NET（障害福祉サービス等情報公表システム）に事業所情報を掲載</a:t>
+              <a:t>0475-77-8577 ／ kp-tougane.com</a:t>
             </a:r>
             <a:endParaRPr lang="en-US" sz="1050" dirty="0"/>
           </a:p>
@@ -18131,7 +14365,7 @@
                 <a:ea typeface="Meiryo" pitchFamily="34" charset="-122"/>
                 <a:cs typeface="Meiryo" pitchFamily="34" charset="-120"/>
               </a:rPr>
-              <a:t>要確認（公開情報に記載なし）</a:t>
+              <a:t>平日 9:00〜18:00　※送迎あり</a:t>
             </a:r>
             <a:endParaRPr lang="en-US" sz="1050" dirty="0"/>
           </a:p>
@@ -18162,7 +14396,7 @@
                 <a:ea typeface="Meiryo" pitchFamily="34" charset="-122"/>
                 <a:cs typeface="Meiryo" pitchFamily="34" charset="-120"/>
               </a:rPr>
-              <a:t>定員：</a:t>
+              <a:t>開設：</a:t>
             </a:r>
             <a:r>
               <a:rPr lang="en-US" sz="1100" dirty="0">
@@ -18173,7 +14407,7 @@
                 <a:ea typeface="Meiryo" pitchFamily="34" charset="-122"/>
                 <a:cs typeface="Meiryo" pitchFamily="34" charset="-120"/>
               </a:rPr>
-              <a:t>要確認</a:t>
+              <a:t>2015年7月1日</a:t>
             </a:r>
             <a:endParaRPr lang="en-US" sz="1050" dirty="0"/>
           </a:p>
@@ -18227,7 +14461,7 @@
                 <a:ea typeface="Meiryo" pitchFamily="34" charset="-122"/>
                 <a:cs typeface="Meiryo" pitchFamily="34" charset="-120"/>
               </a:rPr>
-              <a:t>公開情報が限られており、支援内容の詳細は事業所への直接確認が必要。</a:t>
+              <a:t>運動療育を主軸に、学習・あそびを取り入れた総合的な療育を提供。</a:t>
             </a:r>
             <a:endParaRPr lang="en-US" sz="1050" dirty="0"/>
           </a:p>
@@ -18250,7 +14484,7 @@
                 <a:ea typeface="Meiryo" pitchFamily="34" charset="-122"/>
                 <a:cs typeface="Meiryo" pitchFamily="34" charset="-120"/>
               </a:rPr>
-              <a:t>・児童発達支援と放課後等デイサービスを併設し、未就学から就学後まで継続利用できる体制。</a:t>
+              <a:t>・「柳沢運動プログラム」を導入。運動あそびが大脳活動の発達を促すという理論に基づくカリキュラム。</a:t>
             </a:r>
             <a:endParaRPr lang="en-US" sz="1050" dirty="0"/>
           </a:p>
@@ -18273,7 +14507,7 @@
                 <a:ea typeface="Meiryo" pitchFamily="34" charset="-122"/>
                 <a:cs typeface="Meiryo" pitchFamily="34" charset="-120"/>
               </a:rPr>
-              <a:t>・東金駅・市役所に近い東上宿の市街地に立地。</a:t>
+              <a:t>・全身の筋力向上・けがの減少に加え、情緒の安定、切り替えの上達、ルール理解の定着を効果として掲げる。</a:t>
             </a:r>
             <a:endParaRPr lang="en-US" sz="1050" dirty="0"/>
           </a:p>
@@ -18296,7 +14530,7 @@
                 <a:ea typeface="Meiryo" pitchFamily="34" charset="-122"/>
                 <a:cs typeface="Meiryo" pitchFamily="34" charset="-120"/>
               </a:rPr>
-              <a:t>・同一町域（東上宿6-1）に相談支援事業所「街かど福祉相談室るると」が所在し、相談〜通所の導線が近い。</a:t>
+              <a:t>・運営法人は千葉県内に児発・放デイ・相談支援あわせて10事業所を展開（本社：東金市道庭925-1）。</a:t>
             </a:r>
             <a:endParaRPr lang="en-US" sz="1050" dirty="0"/>
           </a:p>
@@ -18403,7 +14637,7 @@
                 <a:ea typeface="メイリオ" panose="020B0604030504040204" pitchFamily="50" charset="-128"/>
                 <a:cs typeface="Meiryo" pitchFamily="34" charset="-120"/>
               </a:rPr>
-              <a:t>市街地中心部の立地で、駅・市役所方面からのアクセス性が高い。</a:t>
+              <a:t>東金駅至近＋送迎ありで、通所利便性は市内トップクラス。</a:t>
             </a:r>
             <a:endParaRPr lang="en-US" sz="1000" dirty="0">
               <a:latin typeface="メイリオ" panose="020B0604030504040204" pitchFamily="50" charset="-128"/>
@@ -18427,7 +14661,7 @@
                 <a:ea typeface="メイリオ" panose="020B0604030504040204" pitchFamily="50" charset="-128"/>
                 <a:cs typeface="Meiryo" pitchFamily="34" charset="-120"/>
               </a:rPr>
-              <a:t>児発／放デイの一貫利用が可能な、市内では数少ないタイプ。</a:t>
+              <a:t>「運動療育」という明確なプログラム軸を打ち出し、Webでの情報発信量も市内最大級。</a:t>
             </a:r>
             <a:endParaRPr lang="en-US" sz="1000" dirty="0">
               <a:latin typeface="メイリオ" panose="020B0604030504040204" pitchFamily="50" charset="-128"/>
@@ -18451,7 +14685,7 @@
                 <a:ea typeface="メイリオ" panose="020B0604030504040204" pitchFamily="50" charset="-128"/>
                 <a:cs typeface="Meiryo" pitchFamily="34" charset="-120"/>
               </a:rPr>
-              <a:t>Web上の情報発信が乏しく、集客は行政・相談支援経由の紹介が中心と推察される。</a:t>
+              <a:t>同一法人の第2教室・相談支援事業所と連携し、相談から通所まで法人内で完結する導線を構築。</a:t>
             </a:r>
             <a:endParaRPr lang="en-US" sz="1000" dirty="0">
               <a:latin typeface="メイリオ" panose="020B0604030504040204" pitchFamily="50" charset="-128"/>
@@ -18475,7 +14709,7 @@
                 <a:ea typeface="メイリオ" panose="020B0604030504040204" pitchFamily="50" charset="-128"/>
                 <a:cs typeface="Meiryo" pitchFamily="34" charset="-120"/>
               </a:rPr>
-              <a:t>情報発信の弱さは裏返せば、Web集客に強い事業所にとって切り崩しやすい競合といえる。</a:t>
+              <a:t>市内で最も認知度・集客力が高いと推察され、実質的なベンチマーク先となる事業所。</a:t>
             </a:r>
             <a:endParaRPr lang="en-US" sz="1000" dirty="0">
               <a:latin typeface="メイリオ" panose="020B0604030504040204" pitchFamily="50" charset="-128"/>
@@ -18606,7 +14840,7 @@
                 <a:ea typeface="Meiryo" pitchFamily="34" charset="-122"/>
                 <a:cs typeface="Meiryo" pitchFamily="34" charset="-120"/>
               </a:rPr>
-              <a:t>WAM NET 障害福祉サービス等情報公表システム／LITALICO発達ナビ／東金市公式サイト</a:t>
+              <a:t>公式HP kp-tougane.com／WAM NET／障害者ドットコム／児発ねっと</a:t>
             </a:r>
             <a:endParaRPr lang="en-US" sz="1050" dirty="0"/>
           </a:p>
@@ -18648,7 +14882,7 @@
                 <a:ea typeface="Meiryo" pitchFamily="34" charset="-122"/>
                 <a:cs typeface="Meiryo" pitchFamily="34" charset="-120"/>
               </a:rPr>
-              <a:t>運営法人、サービス提供時間、定員、送迎の有無、プログラム内容　※公開情報がほぼ無く電話ヒアリング必須</a:t>
+              <a:t>定員、現在の空き状況、送迎範囲、児童発達支援と放課後等デイサービスの時間帯区分</a:t>
             </a:r>
             <a:endParaRPr lang="en-US" sz="1050" dirty="0"/>
           </a:p>
@@ -18799,7 +15033,7 @@
                 <a:ea typeface="Meiryo" pitchFamily="34" charset="-122"/>
                 <a:cs typeface="Meiryo" pitchFamily="34" charset="-120"/>
               </a:rPr>
-              <a:t>③ こどもプラス東金教室</a:t>
+              <a:t>④ こどもプラス第2東金教室</a:t>
             </a:r>
             <a:endParaRPr lang="en-US" sz="2100" dirty="0"/>
           </a:p>
@@ -18973,7 +15207,7 @@
                 <a:ea typeface="Meiryo" pitchFamily="34" charset="-122"/>
                 <a:cs typeface="Meiryo" pitchFamily="34" charset="-120"/>
               </a:rPr>
-              <a:t>こどもプラス東金教室（運営：株式会社ベストグロウ）</a:t>
+              <a:t>こどもプラス第2東金教室（運営：株式会社ベストグロウ）</a:t>
             </a:r>
             <a:endParaRPr lang="en-US" sz="1400" dirty="0"/>
           </a:p>
@@ -19079,7 +15313,7 @@
                 <a:ea typeface="Meiryo" pitchFamily="34" charset="-122"/>
                 <a:cs typeface="Meiryo" pitchFamily="34" charset="-120"/>
               </a:rPr>
-              <a:t>千葉県東金市東新宿18-1 酒造ビル105号（JR東金線 東金駅から徒歩約7〜9分）</a:t>
+              <a:t>千葉県東金市田間1丁目6番地4号</a:t>
             </a:r>
             <a:endParaRPr lang="en-US" sz="1050" dirty="0"/>
           </a:p>
@@ -19121,7 +15355,7 @@
                 <a:ea typeface="Meiryo" pitchFamily="34" charset="-122"/>
                 <a:cs typeface="Meiryo" pitchFamily="34" charset="-120"/>
               </a:rPr>
-              <a:t>0475-77-8577 ／ kp-tougane.com</a:t>
+              <a:t>要確認（法人代表 0475-77-8577）／ kp-daini-tougane.com</a:t>
             </a:r>
             <a:endParaRPr lang="en-US" sz="1050" dirty="0"/>
           </a:p>
@@ -19163,7 +15397,7 @@
                 <a:ea typeface="Meiryo" pitchFamily="34" charset="-122"/>
                 <a:cs typeface="Meiryo" pitchFamily="34" charset="-120"/>
               </a:rPr>
-              <a:t>平日 9:00〜18:00　※送迎あり</a:t>
+              <a:t>要確認</a:t>
             </a:r>
             <a:endParaRPr lang="en-US" sz="1050" dirty="0"/>
           </a:p>
@@ -19194,7 +15428,7 @@
                 <a:ea typeface="Meiryo" pitchFamily="34" charset="-122"/>
                 <a:cs typeface="Meiryo" pitchFamily="34" charset="-120"/>
               </a:rPr>
-              <a:t>開設：</a:t>
+              <a:t>定員：</a:t>
             </a:r>
             <a:r>
               <a:rPr lang="en-US" sz="1100" dirty="0">
@@ -19205,7 +15439,7 @@
                 <a:ea typeface="Meiryo" pitchFamily="34" charset="-122"/>
                 <a:cs typeface="Meiryo" pitchFamily="34" charset="-120"/>
               </a:rPr>
-              <a:t>2015年7月1日</a:t>
+              <a:t>要確認</a:t>
             </a:r>
             <a:endParaRPr lang="en-US" sz="1050" dirty="0"/>
           </a:p>
@@ -19259,7 +15493,7 @@
                 <a:ea typeface="Meiryo" pitchFamily="34" charset="-122"/>
                 <a:cs typeface="Meiryo" pitchFamily="34" charset="-120"/>
               </a:rPr>
-              <a:t>運動療育を主軸に、学習・あそびを取り入れた総合的な療育を提供。</a:t>
+              <a:t>発達段階に合わせた支援と、楽しく取り組める運動療育を組み合わせて提供。</a:t>
             </a:r>
             <a:endParaRPr lang="en-US" sz="1050" dirty="0"/>
           </a:p>
@@ -19282,7 +15516,7 @@
                 <a:ea typeface="Meiryo" pitchFamily="34" charset="-122"/>
                 <a:cs typeface="Meiryo" pitchFamily="34" charset="-120"/>
               </a:rPr>
-              <a:t>・「柳沢運動プログラム」を導入。運動あそびが大脳活動の発達を促すという理論に基づくカリキュラム。</a:t>
+              <a:t>・脳の活性化につながる「柳沢運動プログラム」を取り入れ、毎日の活動を構成。</a:t>
             </a:r>
             <a:endParaRPr lang="en-US" sz="1050" dirty="0"/>
           </a:p>
@@ -19305,7 +15539,7 @@
                 <a:ea typeface="Meiryo" pitchFamily="34" charset="-122"/>
                 <a:cs typeface="Meiryo" pitchFamily="34" charset="-120"/>
               </a:rPr>
-              <a:t>・全身の筋力向上・けがの減少に加え、情緒の安定、切り替えの上達、ルール理解の定着を効果として掲げる。</a:t>
+              <a:t>・学習と運動あそびのバランスを取りながら、子どもの「できた！」を積み重ねることを重視。</a:t>
             </a:r>
             <a:endParaRPr lang="en-US" sz="1050" dirty="0"/>
           </a:p>
@@ -19328,7 +15562,7 @@
                 <a:ea typeface="Meiryo" pitchFamily="34" charset="-122"/>
                 <a:cs typeface="Meiryo" pitchFamily="34" charset="-120"/>
               </a:rPr>
-              <a:t>・運営法人は千葉県内に児発・放デイ・相談支援あわせて10事業所を展開（本社：東金市道庭925-1）。</a:t>
+              <a:t>・地域密着型の教室として、家庭と連携しながら安心して通える場所づくりを掲げる。</a:t>
             </a:r>
             <a:endParaRPr lang="en-US" sz="1050" dirty="0"/>
           </a:p>
@@ -19435,7 +15669,7 @@
                 <a:ea typeface="メイリオ" panose="020B0604030504040204" pitchFamily="50" charset="-128"/>
                 <a:cs typeface="Meiryo" pitchFamily="34" charset="-120"/>
               </a:rPr>
-              <a:t>東金駅至近＋送迎ありで、通所利便性は市内トップクラス。</a:t>
+              <a:t>③と同一法人・同一プログラムの2拠点目。田間エリア（市役所・ふれあいセンター側）をカバーし市内を面で展開。</a:t>
             </a:r>
             <a:endParaRPr lang="en-US" sz="1000" dirty="0">
               <a:latin typeface="メイリオ" panose="020B0604030504040204" pitchFamily="50" charset="-128"/>
@@ -19459,7 +15693,7 @@
                 <a:ea typeface="メイリオ" panose="020B0604030504040204" pitchFamily="50" charset="-128"/>
                 <a:cs typeface="Meiryo" pitchFamily="34" charset="-120"/>
               </a:rPr>
-              <a:t>「運動療育」という明確なプログラム軸を打ち出し、Webでの情報発信量も市内最大級。</a:t>
+              <a:t>公立の簡易マザーズホーム（田間3-9-1）と同一エリアにあり、公立からの移行導線が近い。</a:t>
             </a:r>
             <a:endParaRPr lang="en-US" sz="1000" dirty="0">
               <a:latin typeface="メイリオ" panose="020B0604030504040204" pitchFamily="50" charset="-128"/>
@@ -19483,7 +15717,7 @@
                 <a:ea typeface="メイリオ" panose="020B0604030504040204" pitchFamily="50" charset="-128"/>
                 <a:cs typeface="Meiryo" pitchFamily="34" charset="-120"/>
               </a:rPr>
-              <a:t>同一法人の第2教室・相談支援事業所と連携し、相談から通所まで法人内で完結する導線を構築。</a:t>
+              <a:t>第1教室が「運動主軸」なのに対し「学習と運動のバランス」を明示し、法人内でも訴求を微差別化。</a:t>
             </a:r>
             <a:endParaRPr lang="en-US" sz="1000" dirty="0">
               <a:latin typeface="メイリオ" panose="020B0604030504040204" pitchFamily="50" charset="-128"/>
@@ -19507,7 +15741,7 @@
                 <a:ea typeface="メイリオ" panose="020B0604030504040204" pitchFamily="50" charset="-128"/>
                 <a:cs typeface="Meiryo" pitchFamily="34" charset="-120"/>
               </a:rPr>
-              <a:t>市内で最も認知度・集客力が高いと推察され、実質的なベンチマーク先となる事業所。</a:t>
+              <a:t>田間エリアは公立・民間が近接する激戦区。差別化には時間帯と送迎範囲の設計が鍵となる。</a:t>
             </a:r>
             <a:endParaRPr lang="en-US" sz="1000" dirty="0">
               <a:latin typeface="メイリオ" panose="020B0604030504040204" pitchFamily="50" charset="-128"/>
@@ -19638,7 +15872,7 @@
                 <a:ea typeface="Meiryo" pitchFamily="34" charset="-122"/>
                 <a:cs typeface="Meiryo" pitchFamily="34" charset="-120"/>
               </a:rPr>
-              <a:t>公式HP kp-tougane.com／WAM NET／障害者ドットコム／児発ねっと</a:t>
+              <a:t>公式HP kp-daini-tougane.com／株式会社ベストグロウ公式（bestgrow-chiba.com）</a:t>
             </a:r>
             <a:endParaRPr lang="en-US" sz="1050" dirty="0"/>
           </a:p>
@@ -19680,7 +15914,7 @@
                 <a:ea typeface="Meiryo" pitchFamily="34" charset="-122"/>
                 <a:cs typeface="Meiryo" pitchFamily="34" charset="-120"/>
               </a:rPr>
-              <a:t>定員、現在の空き状況、送迎範囲、児童発達支援と放課後等デイサービスの時間帯区分</a:t>
+              <a:t>電話番号、サービス提供時間、定員、送迎範囲、第1教室との役割分担</a:t>
             </a:r>
             <a:endParaRPr lang="en-US" sz="1050" dirty="0"/>
           </a:p>
@@ -19831,7 +16065,7 @@
                 <a:ea typeface="Meiryo" pitchFamily="34" charset="-122"/>
                 <a:cs typeface="Meiryo" pitchFamily="34" charset="-120"/>
               </a:rPr>
-              <a:t>④ こどもプラス第2東金教室</a:t>
+              <a:t>⑤ 基本塾優遊 日吉台</a:t>
             </a:r>
             <a:endParaRPr lang="en-US" sz="2100" dirty="0"/>
           </a:p>
@@ -20005,7 +16239,7 @@
                 <a:ea typeface="Meiryo" pitchFamily="34" charset="-122"/>
                 <a:cs typeface="Meiryo" pitchFamily="34" charset="-120"/>
               </a:rPr>
-              <a:t>こどもプラス第2東金教室（運営：株式会社ベストグロウ）</a:t>
+              <a:t>基本塾優遊 日吉台（運営：特定非営利活動法人 基本塾）</a:t>
             </a:r>
             <a:endParaRPr lang="en-US" sz="1400" dirty="0"/>
           </a:p>
@@ -20111,7 +16345,7 @@
                 <a:ea typeface="Meiryo" pitchFamily="34" charset="-122"/>
                 <a:cs typeface="Meiryo" pitchFamily="34" charset="-120"/>
               </a:rPr>
-              <a:t>千葉県東金市田間1丁目6番地4号</a:t>
+              <a:t>千葉県東金市日吉台2-26-3</a:t>
             </a:r>
             <a:endParaRPr lang="en-US" sz="1050" dirty="0"/>
           </a:p>
@@ -20153,7 +16387,7 @@
                 <a:ea typeface="Meiryo" pitchFamily="34" charset="-122"/>
                 <a:cs typeface="Meiryo" pitchFamily="34" charset="-120"/>
               </a:rPr>
-              <a:t>要確認（法人代表 0475-77-8577）／ kp-daini-tougane.com</a:t>
+              <a:t>0475-52-6414 ／ kihonjuku-yuuyuu.com（info@kihonjuku-yuuyuu.com）</a:t>
             </a:r>
             <a:endParaRPr lang="en-US" sz="1050" dirty="0"/>
           </a:p>
@@ -20195,7 +16429,7 @@
                 <a:ea typeface="Meiryo" pitchFamily="34" charset="-122"/>
                 <a:cs typeface="Meiryo" pitchFamily="34" charset="-120"/>
               </a:rPr>
-              <a:t>要確認</a:t>
+              <a:t>9:00〜18:00（グループ共通の目安）／日曜・祝日・年末年始休</a:t>
             </a:r>
             <a:endParaRPr lang="en-US" sz="1050" dirty="0"/>
           </a:p>
@@ -20291,7 +16525,7 @@
                 <a:ea typeface="Meiryo" pitchFamily="34" charset="-122"/>
                 <a:cs typeface="Meiryo" pitchFamily="34" charset="-120"/>
               </a:rPr>
-              <a:t>発達段階に合わせた支援と、楽しく取り組める運動療育を組み合わせて提供。</a:t>
+              <a:t>園庭を備え、リトミック・体操・英語教育など多様なプログラムを提供。</a:t>
             </a:r>
             <a:endParaRPr lang="en-US" sz="1050" dirty="0"/>
           </a:p>
@@ -20314,7 +16548,7 @@
                 <a:ea typeface="Meiryo" pitchFamily="34" charset="-122"/>
                 <a:cs typeface="Meiryo" pitchFamily="34" charset="-120"/>
               </a:rPr>
-              <a:t>・脳の活性化につながる「柳沢運動プログラム」を取り入れ、毎日の活動を構成。</a:t>
+              <a:t>・在籍：児童発達支援管理責任者、小学校校長経験者、幼稚園園長経験者、特別支援教育士、</a:t>
             </a:r>
             <a:endParaRPr lang="en-US" sz="1050" dirty="0"/>
           </a:p>
@@ -20337,7 +16571,7 @@
                 <a:ea typeface="Meiryo" pitchFamily="34" charset="-122"/>
                 <a:cs typeface="Meiryo" pitchFamily="34" charset="-120"/>
               </a:rPr>
-              <a:t>・学習と運動あそびのバランスを取りながら、子どもの「できた！」を積み重ねることを重視。</a:t>
+              <a:t xml:space="preserve">　教育カウンセラー、心理検査士、言語聴覚士 ほか。</a:t>
             </a:r>
             <a:endParaRPr lang="en-US" sz="1050" dirty="0"/>
           </a:p>
@@ -20360,7 +16594,7 @@
                 <a:ea typeface="Meiryo" pitchFamily="34" charset="-122"/>
                 <a:cs typeface="Meiryo" pitchFamily="34" charset="-120"/>
               </a:rPr>
-              <a:t>・地域密着型の教室として、家庭と連携しながら安心して通える場所づくりを掲げる。</a:t>
+              <a:t>・障がい児とその家族に対し、地域生活を行ううえで必要な支援を提供することを運営方針とする。</a:t>
             </a:r>
             <a:endParaRPr lang="en-US" sz="1050" dirty="0"/>
           </a:p>
@@ -20467,7 +16701,7 @@
                 <a:ea typeface="メイリオ" panose="020B0604030504040204" pitchFamily="50" charset="-128"/>
                 <a:cs typeface="Meiryo" pitchFamily="34" charset="-120"/>
               </a:rPr>
-              <a:t>③と同一法人・同一プログラムの2拠点目。田間エリア（市役所・ふれあいセンター側）をカバーし市内を面で展開。</a:t>
+              <a:t>市内5拠点を展開する最大手NPO「基本塾」の中核拠点。教育畑の専門人材の厚みが最大の差別化要素。</a:t>
             </a:r>
             <a:endParaRPr lang="en-US" sz="1000" dirty="0">
               <a:latin typeface="メイリオ" panose="020B0604030504040204" pitchFamily="50" charset="-128"/>
@@ -20491,7 +16725,7 @@
                 <a:ea typeface="メイリオ" panose="020B0604030504040204" pitchFamily="50" charset="-128"/>
                 <a:cs typeface="Meiryo" pitchFamily="34" charset="-120"/>
               </a:rPr>
-              <a:t>公立の簡易マザーズホーム（田間3-9-1）と同一エリアにあり、公立からの移行導線が近い。</a:t>
+              <a:t>園庭を保有し屋外活動が可能。テナント型の民間事業所にはない環境資源を持つ。</a:t>
             </a:r>
             <a:endParaRPr lang="en-US" sz="1000" dirty="0">
               <a:latin typeface="メイリオ" panose="020B0604030504040204" pitchFamily="50" charset="-128"/>
@@ -20515,7 +16749,7 @@
                 <a:ea typeface="メイリオ" panose="020B0604030504040204" pitchFamily="50" charset="-128"/>
                 <a:cs typeface="Meiryo" pitchFamily="34" charset="-120"/>
               </a:rPr>
-              <a:t>第1教室が「運動主軸」なのに対し「学習と運動のバランス」を明示し、法人内でも訴求を微差別化。</a:t>
+              <a:t>言語聴覚士・心理検査士の在籍により、アセスメントから個別支援計画までの質を訴求できる体制。</a:t>
             </a:r>
             <a:endParaRPr lang="en-US" sz="1000" dirty="0">
               <a:latin typeface="メイリオ" panose="020B0604030504040204" pitchFamily="50" charset="-128"/>
@@ -20539,7 +16773,7 @@
                 <a:ea typeface="メイリオ" panose="020B0604030504040204" pitchFamily="50" charset="-128"/>
                 <a:cs typeface="Meiryo" pitchFamily="34" charset="-120"/>
               </a:rPr>
-              <a:t>田間エリアは公立・民間が近接する激戦区。差別化には時間帯と送迎範囲の設計が鍵となる。</a:t>
+              <a:t>多職種体制はコスト構造上も参入障壁が高く、人材採用力が最大の競合要因となる。</a:t>
             </a:r>
             <a:endParaRPr lang="en-US" sz="1000" dirty="0">
               <a:latin typeface="メイリオ" panose="020B0604030504040204" pitchFamily="50" charset="-128"/>
@@ -20670,7 +16904,7 @@
                 <a:ea typeface="Meiryo" pitchFamily="34" charset="-122"/>
                 <a:cs typeface="Meiryo" pitchFamily="34" charset="-120"/>
               </a:rPr>
-              <a:t>公式HP kp-daini-tougane.com／株式会社ベストグロウ公式（bestgrow-chiba.com）</a:t>
+              <a:t>公式HP kihonjuku-yuuyuu.com／ホイシル／児発ねっと／ADDS kikotto施設検索</a:t>
             </a:r>
             <a:endParaRPr lang="en-US" sz="1050" dirty="0"/>
           </a:p>
@@ -20712,7 +16946,7 @@
                 <a:ea typeface="Meiryo" pitchFamily="34" charset="-122"/>
                 <a:cs typeface="Meiryo" pitchFamily="34" charset="-120"/>
               </a:rPr>
-              <a:t>電話番号、サービス提供時間、定員、送迎範囲、第1教室との役割分担</a:t>
+              <a:t>定員、送迎の有無、児発と放デイの時間帯区分、専門職の常勤／非常勤の別</a:t>
             </a:r>
             <a:endParaRPr lang="en-US" sz="1050" dirty="0"/>
           </a:p>
@@ -20863,7 +17097,7 @@
                 <a:ea typeface="Meiryo" pitchFamily="34" charset="-122"/>
                 <a:cs typeface="Meiryo" pitchFamily="34" charset="-120"/>
               </a:rPr>
-              <a:t>⑤ 基本塾優遊 日吉台</a:t>
+              <a:t>⑥ 基本塾優遊 松之郷</a:t>
             </a:r>
             <a:endParaRPr lang="en-US" sz="2100" dirty="0"/>
           </a:p>
@@ -21037,7 +17271,7 @@
                 <a:ea typeface="Meiryo" pitchFamily="34" charset="-122"/>
                 <a:cs typeface="Meiryo" pitchFamily="34" charset="-120"/>
               </a:rPr>
-              <a:t>基本塾優遊 日吉台（運営：特定非営利活動法人 基本塾）</a:t>
+              <a:t>基本塾優遊 松之郷（運営：特定非営利活動法人 基本塾）</a:t>
             </a:r>
             <a:endParaRPr lang="en-US" sz="1400" dirty="0"/>
           </a:p>
@@ -21101,7 +17335,7 @@
                 <a:ea typeface="Meiryo" pitchFamily="34" charset="-122"/>
                 <a:cs typeface="Meiryo" pitchFamily="34" charset="-120"/>
               </a:rPr>
-              <a:t>未就学児（児童発達支援）／就学児（放課後等デイサービス）</a:t>
+              <a:t>未就学児〜就学児／身体障がい・知的障がい・精神障がい・難病</a:t>
             </a:r>
             <a:endParaRPr lang="en-US" sz="1050" dirty="0"/>
           </a:p>
@@ -21143,7 +17377,7 @@
                 <a:ea typeface="Meiryo" pitchFamily="34" charset="-122"/>
                 <a:cs typeface="Meiryo" pitchFamily="34" charset="-120"/>
               </a:rPr>
-              <a:t>千葉県東金市日吉台2-26-3</a:t>
+              <a:t>千葉県東金市松之郷2423-1（〒283-0805／JR東金線 東金駅から徒歩約19分）</a:t>
             </a:r>
             <a:endParaRPr lang="en-US" sz="1050" dirty="0"/>
           </a:p>
@@ -21185,7 +17419,7 @@
                 <a:ea typeface="Meiryo" pitchFamily="34" charset="-122"/>
                 <a:cs typeface="Meiryo" pitchFamily="34" charset="-120"/>
               </a:rPr>
-              <a:t>0475-52-6414 ／ kihonjuku-yuuyuu.com（info@kihonjuku-yuuyuu.com）</a:t>
+              <a:t>0475-51-4082 ／ kihonjuku-yuuyuu.com</a:t>
             </a:r>
             <a:endParaRPr lang="en-US" sz="1050" dirty="0"/>
           </a:p>
@@ -21227,7 +17461,7 @@
                 <a:ea typeface="Meiryo" pitchFamily="34" charset="-122"/>
                 <a:cs typeface="Meiryo" pitchFamily="34" charset="-120"/>
               </a:rPr>
-              <a:t>9:00〜18:00（グループ共通の目安）／日曜・祝日・年末年始休</a:t>
+              <a:t>9:00〜18:00（目安）／定休：日曜・祝日・年末年始</a:t>
             </a:r>
             <a:endParaRPr lang="en-US" sz="1050" dirty="0"/>
           </a:p>
@@ -21258,7 +17492,7 @@
                 <a:ea typeface="Meiryo" pitchFamily="34" charset="-122"/>
                 <a:cs typeface="Meiryo" pitchFamily="34" charset="-120"/>
               </a:rPr>
-              <a:t>定員：</a:t>
+              <a:t>定員／送迎：</a:t>
             </a:r>
             <a:r>
               <a:rPr lang="en-US" sz="1100" dirty="0">
@@ -21269,7 +17503,7 @@
                 <a:ea typeface="Meiryo" pitchFamily="34" charset="-122"/>
                 <a:cs typeface="Meiryo" pitchFamily="34" charset="-120"/>
               </a:rPr>
-              <a:t>要確認</a:t>
+              <a:t>児童発達支援 10名 ／ 送迎あり（要相談）</a:t>
             </a:r>
             <a:endParaRPr lang="en-US" sz="1050" dirty="0"/>
           </a:p>
@@ -21323,7 +17557,7 @@
                 <a:ea typeface="Meiryo" pitchFamily="34" charset="-122"/>
                 <a:cs typeface="Meiryo" pitchFamily="34" charset="-120"/>
               </a:rPr>
-              <a:t>園庭を備え、リトミック・体操・英語教育など多様なプログラムを提供。</a:t>
+              <a:t>一人ひとりのニーズに応じた個別支援プログラムを編成。</a:t>
             </a:r>
             <a:endParaRPr lang="en-US" sz="1050" dirty="0"/>
           </a:p>
@@ -21346,7 +17580,7 @@
                 <a:ea typeface="Meiryo" pitchFamily="34" charset="-122"/>
                 <a:cs typeface="Meiryo" pitchFamily="34" charset="-120"/>
               </a:rPr>
-              <a:t>・在籍：児童発達支援管理責任者、小学校校長経験者、幼稚園園長経験者、特別支援教育士、</a:t>
+              <a:t>・「10の活動」を通じ、アートセラピー・運動・社会性を育むグループ活動をバランスよく実施。</a:t>
             </a:r>
             <a:endParaRPr lang="en-US" sz="1050" dirty="0"/>
           </a:p>
@@ -21369,30 +17603,7 @@
                 <a:ea typeface="Meiryo" pitchFamily="34" charset="-122"/>
                 <a:cs typeface="Meiryo" pitchFamily="34" charset="-120"/>
               </a:rPr>
-              <a:t xml:space="preserve">　教育カウンセラー、心理検査士、言語聴覚士 ほか。</a:t>
-            </a:r>
-            <a:endParaRPr lang="en-US" sz="1050" dirty="0"/>
-          </a:p>
-          <a:p>
-            <a:pPr marL="0" indent="0">
-              <a:lnSpc>
-                <a:spcPct val="103000"/>
-              </a:lnSpc>
-              <a:spcAft>
-                <a:spcPts val="500"/>
-              </a:spcAft>
-              <a:buNone/>
-            </a:pPr>
-            <a:r>
-              <a:rPr lang="en-US" sz="1100" dirty="0">
-                <a:solidFill>
-                  <a:srgbClr val="222222"/>
-                </a:solidFill>
-                <a:latin typeface="Meiryo" pitchFamily="34" charset="0"/>
-                <a:ea typeface="Meiryo" pitchFamily="34" charset="-122"/>
-                <a:cs typeface="Meiryo" pitchFamily="34" charset="-120"/>
-              </a:rPr>
-              <a:t>・障がい児とその家族に対し、地域生活を行ううえで必要な支援を提供することを運営方針とする。</a:t>
+              <a:t>・少人数の環境を活かし、個別対応と集団活動を組み合わせて提供。</a:t>
             </a:r>
             <a:endParaRPr lang="en-US" sz="1050" dirty="0"/>
           </a:p>
@@ -21499,7 +17710,7 @@
                 <a:ea typeface="メイリオ" panose="020B0604030504040204" pitchFamily="50" charset="-128"/>
                 <a:cs typeface="Meiryo" pitchFamily="34" charset="-120"/>
               </a:rPr>
-              <a:t>市内5拠点を展開する最大手NPO「基本塾」の中核拠点。教育畑の専門人材の厚みが最大の差別化要素。</a:t>
+              <a:t>定員10名の小規模・個別重視型。グループ内では「個別支援＋アートセラピー」が特徴。</a:t>
             </a:r>
             <a:endParaRPr lang="en-US" sz="1000" dirty="0">
               <a:latin typeface="メイリオ" panose="020B0604030504040204" pitchFamily="50" charset="-128"/>
@@ -21523,7 +17734,7 @@
                 <a:ea typeface="メイリオ" panose="020B0604030504040204" pitchFamily="50" charset="-128"/>
                 <a:cs typeface="Meiryo" pitchFamily="34" charset="-120"/>
               </a:rPr>
-              <a:t>園庭を保有し屋外活動が可能。テナント型の民間事業所にはない環境資源を持つ。</a:t>
+              <a:t>駅から徒歩約19分と距離があり、送迎（要相談）の可否が利用のハードルになりやすい。</a:t>
             </a:r>
             <a:endParaRPr lang="en-US" sz="1000" dirty="0">
               <a:latin typeface="メイリオ" panose="020B0604030504040204" pitchFamily="50" charset="-128"/>
@@ -21547,7 +17758,7 @@
                 <a:ea typeface="メイリオ" panose="020B0604030504040204" pitchFamily="50" charset="-128"/>
                 <a:cs typeface="Meiryo" pitchFamily="34" charset="-120"/>
               </a:rPr>
-              <a:t>言語聴覚士・心理検査士の在籍により、アセスメントから個別支援計画までの質を訴求できる体制。</a:t>
+              <a:t>対象を身体・知的・精神・難病まで広く取り、受け入れ幅が広い。</a:t>
             </a:r>
             <a:endParaRPr lang="en-US" sz="1000" dirty="0">
               <a:latin typeface="メイリオ" panose="020B0604030504040204" pitchFamily="50" charset="-128"/>
@@ -21571,7 +17782,7 @@
                 <a:ea typeface="メイリオ" panose="020B0604030504040204" pitchFamily="50" charset="-128"/>
                 <a:cs typeface="Meiryo" pitchFamily="34" charset="-120"/>
               </a:rPr>
-              <a:t>多職種体制はコスト構造上も参入障壁が高く、人材採用力が最大の競合要因となる。</a:t>
+              <a:t>立地の弱さを送迎で補う構造。送迎圏が重なる事業所とは直接競合になりやすい。</a:t>
             </a:r>
             <a:endParaRPr lang="en-US" sz="1000" dirty="0">
               <a:latin typeface="メイリオ" panose="020B0604030504040204" pitchFamily="50" charset="-128"/>
@@ -21702,7 +17913,7 @@
                 <a:ea typeface="Meiryo" pitchFamily="34" charset="-122"/>
                 <a:cs typeface="Meiryo" pitchFamily="34" charset="-120"/>
               </a:rPr>
-              <a:t>公式HP kihonjuku-yuuyuu.com／ホイシル／児発ねっと／ADDS kikotto施設検索</a:t>
+              <a:t>公式HP kihonjuku-yuuyuu.com／LITALICO発達ナビ／イクデン／ホイシル</a:t>
             </a:r>
             <a:endParaRPr lang="en-US" sz="1050" dirty="0"/>
           </a:p>
@@ -21744,7 +17955,7 @@
                 <a:ea typeface="Meiryo" pitchFamily="34" charset="-122"/>
                 <a:cs typeface="Meiryo" pitchFamily="34" charset="-120"/>
               </a:rPr>
-              <a:t>定員、送迎の有無、児発と放デイの時間帯区分、専門職の常勤／非常勤の別</a:t>
+              <a:t>放課後等デイサービス側の定員、送迎範囲、土曜・長期休暇の開所有無</a:t>
             </a:r>
             <a:endParaRPr lang="en-US" sz="1050" dirty="0"/>
           </a:p>
@@ -21895,7 +18106,7 @@
                 <a:ea typeface="Meiryo" pitchFamily="34" charset="-122"/>
                 <a:cs typeface="Meiryo" pitchFamily="34" charset="-120"/>
               </a:rPr>
-              <a:t>⑥ 基本塾優遊 松之郷</a:t>
+              <a:t>⑦ 基本塾優遊 八坂台</a:t>
             </a:r>
             <a:endParaRPr lang="en-US" sz="2100" dirty="0"/>
           </a:p>
@@ -22069,7 +18280,7 @@
                 <a:ea typeface="Meiryo" pitchFamily="34" charset="-122"/>
                 <a:cs typeface="Meiryo" pitchFamily="34" charset="-120"/>
               </a:rPr>
-              <a:t>基本塾優遊 松之郷（運営：特定非営利活動法人 基本塾）</a:t>
+              <a:t>基本塾優遊 八坂台（運営：特定非営利活動法人 基本塾）</a:t>
             </a:r>
             <a:endParaRPr lang="en-US" sz="1400" dirty="0"/>
           </a:p>
@@ -22133,7 +18344,7 @@
                 <a:ea typeface="Meiryo" pitchFamily="34" charset="-122"/>
                 <a:cs typeface="Meiryo" pitchFamily="34" charset="-120"/>
               </a:rPr>
-              <a:t>未就学児〜就学児／身体障がい・知的障がい・精神障がい・難病</a:t>
+              <a:t>小学生、および翌年度に小学生になる児童（就学移行期）を中心に募集</a:t>
             </a:r>
             <a:endParaRPr lang="en-US" sz="1050" dirty="0"/>
           </a:p>
@@ -22175,7 +18386,7 @@
                 <a:ea typeface="Meiryo" pitchFamily="34" charset="-122"/>
                 <a:cs typeface="Meiryo" pitchFamily="34" charset="-120"/>
               </a:rPr>
-              <a:t>千葉県東金市松之郷2423-1（〒283-0805／JR東金線 東金駅から徒歩約19分）</a:t>
+              <a:t>千葉県東金市八坂台5-11-1</a:t>
             </a:r>
             <a:endParaRPr lang="en-US" sz="1050" dirty="0"/>
           </a:p>
@@ -22217,7 +18428,7 @@
                 <a:ea typeface="Meiryo" pitchFamily="34" charset="-122"/>
                 <a:cs typeface="Meiryo" pitchFamily="34" charset="-120"/>
               </a:rPr>
-              <a:t>0475-51-4082 ／ kihonjuku-yuuyuu.com</a:t>
+              <a:t>0475-51-5010 ／ kihonjuku-yuuyuu.com</a:t>
             </a:r>
             <a:endParaRPr lang="en-US" sz="1050" dirty="0"/>
           </a:p>
@@ -22259,7 +18470,7 @@
                 <a:ea typeface="Meiryo" pitchFamily="34" charset="-122"/>
                 <a:cs typeface="Meiryo" pitchFamily="34" charset="-120"/>
               </a:rPr>
-              <a:t>9:00〜18:00（目安）／定休：日曜・祝日・年末年始</a:t>
+              <a:t>9:00〜18:00 ／ 定休：土曜・日曜・祝日・年末年始</a:t>
             </a:r>
             <a:endParaRPr lang="en-US" sz="1050" dirty="0"/>
           </a:p>
@@ -22290,7 +18501,7 @@
                 <a:ea typeface="Meiryo" pitchFamily="34" charset="-122"/>
                 <a:cs typeface="Meiryo" pitchFamily="34" charset="-120"/>
               </a:rPr>
-              <a:t>定員／送迎：</a:t>
+              <a:t>定員／職員：</a:t>
             </a:r>
             <a:r>
               <a:rPr lang="en-US" sz="1100" dirty="0">
@@ -22301,7 +18512,7 @@
                 <a:ea typeface="Meiryo" pitchFamily="34" charset="-122"/>
                 <a:cs typeface="Meiryo" pitchFamily="34" charset="-120"/>
               </a:rPr>
-              <a:t>児童発達支援 10名 ／ 送迎あり（要相談）</a:t>
+              <a:t>10名 ／ 児童発達支援管理責任者1名・児童指導員4名・保育士4名（計9名）</a:t>
             </a:r>
             <a:endParaRPr lang="en-US" sz="1050" dirty="0"/>
           </a:p>
@@ -22355,7 +18566,7 @@
                 <a:ea typeface="Meiryo" pitchFamily="34" charset="-122"/>
                 <a:cs typeface="Meiryo" pitchFamily="34" charset="-120"/>
               </a:rPr>
-              <a:t>一人ひとりのニーズに応じた個別支援プログラムを編成。</a:t>
+              <a:t>少人数での活動・制作を基本に、地域と連携したイベントを実施。</a:t>
             </a:r>
             <a:endParaRPr lang="en-US" sz="1050" dirty="0"/>
           </a:p>
@@ -22378,7 +18589,7 @@
                 <a:ea typeface="Meiryo" pitchFamily="34" charset="-122"/>
                 <a:cs typeface="Meiryo" pitchFamily="34" charset="-120"/>
               </a:rPr>
-              <a:t>・「10の活動」を通じ、アートセラピー・運動・社会性を育むグループ活動をバランスよく実施。</a:t>
+              <a:t>・元サッカー選手による「サッカー療育」を導入。</a:t>
             </a:r>
             <a:endParaRPr lang="en-US" sz="1050" dirty="0"/>
           </a:p>
@@ -22401,7 +18612,7 @@
                 <a:ea typeface="Meiryo" pitchFamily="34" charset="-122"/>
                 <a:cs typeface="Meiryo" pitchFamily="34" charset="-120"/>
               </a:rPr>
-              <a:t>・少人数の環境を活かし、個別対応と集団活動を組み合わせて提供。</a:t>
+              <a:t>・子どもの「やりたい！」「できた！」を大切にする支援方針を掲げる。</a:t>
             </a:r>
             <a:endParaRPr lang="en-US" sz="1050" dirty="0"/>
           </a:p>
@@ -22508,7 +18719,7 @@
                 <a:ea typeface="メイリオ" panose="020B0604030504040204" pitchFamily="50" charset="-128"/>
                 <a:cs typeface="Meiryo" pitchFamily="34" charset="-120"/>
               </a:rPr>
-              <a:t>定員10名の小規模・個別重視型。グループ内では「個別支援＋アートセラピー」が特徴。</a:t>
+              <a:t>職員9名に対し定員10名と、市内でも手厚い人員配置。</a:t>
             </a:r>
             <a:endParaRPr lang="en-US" sz="1000" dirty="0">
               <a:latin typeface="メイリオ" panose="020B0604030504040204" pitchFamily="50" charset="-128"/>
@@ -22532,7 +18743,7 @@
                 <a:ea typeface="メイリオ" panose="020B0604030504040204" pitchFamily="50" charset="-128"/>
                 <a:cs typeface="Meiryo" pitchFamily="34" charset="-120"/>
               </a:rPr>
-              <a:t>駅から徒歩約19分と距離があり、送迎（要相談）の可否が利用のハードルになりやすい。</a:t>
+              <a:t>「サッカー療育」という他事業所にない明確なフック。就学移行期（年長〜小学生）に的を絞った募集。</a:t>
             </a:r>
             <a:endParaRPr lang="en-US" sz="1000" dirty="0">
               <a:latin typeface="メイリオ" panose="020B0604030504040204" pitchFamily="50" charset="-128"/>
@@ -22556,7 +18767,7 @@
                 <a:ea typeface="メイリオ" panose="020B0604030504040204" pitchFamily="50" charset="-128"/>
                 <a:cs typeface="Meiryo" pitchFamily="34" charset="-120"/>
               </a:rPr>
-              <a:t>対象を身体・知的・精神・難病まで広く取り、受け入れ幅が広い。</a:t>
+              <a:t>土曜が定休のため、土曜・長期休暇のニーズは他事業所へ流れる構造。</a:t>
             </a:r>
             <a:endParaRPr lang="en-US" sz="1000" dirty="0">
               <a:latin typeface="メイリオ" panose="020B0604030504040204" pitchFamily="50" charset="-128"/>
@@ -22580,7 +18791,7 @@
                 <a:ea typeface="メイリオ" panose="020B0604030504040204" pitchFamily="50" charset="-128"/>
                 <a:cs typeface="Meiryo" pitchFamily="34" charset="-120"/>
               </a:rPr>
-              <a:t>立地の弱さを送迎で補う構造。送迎圏が重なる事業所とは直接競合になりやすい。</a:t>
+              <a:t>土曜・長期休暇の受け皿が手薄なため、そこを埋める事業所には需要が回りやすい。</a:t>
             </a:r>
             <a:endParaRPr lang="en-US" sz="1000" dirty="0">
               <a:latin typeface="メイリオ" panose="020B0604030504040204" pitchFamily="50" charset="-128"/>
@@ -22711,7 +18922,7 @@
                 <a:ea typeface="Meiryo" pitchFamily="34" charset="-122"/>
                 <a:cs typeface="Meiryo" pitchFamily="34" charset="-120"/>
               </a:rPr>
-              <a:t>公式HP kihonjuku-yuuyuu.com／LITALICO発達ナビ／イクデン／ホイシル</a:t>
+              <a:t>公式HP kihonjuku-yuuyuu.com／LITALICO発達ナビ</a:t>
             </a:r>
             <a:endParaRPr lang="en-US" sz="1050" dirty="0"/>
           </a:p>
@@ -22753,7 +18964,7 @@
                 <a:ea typeface="Meiryo" pitchFamily="34" charset="-122"/>
                 <a:cs typeface="Meiryo" pitchFamily="34" charset="-120"/>
               </a:rPr>
-              <a:t>放課後等デイサービス側の定員、送迎範囲、土曜・長期休暇の開所有無</a:t>
+              <a:t>児童発達支援の受け入れ年齢（未就学の下限）、長期休暇中の開所時間、送迎の有無</a:t>
             </a:r>
             <a:endParaRPr lang="en-US" sz="1050" dirty="0"/>
           </a:p>

--- a/東金市_児童発達支援_事業所調査.pptx
+++ b/東金市_児童発達支援_事業所調査.pptx
@@ -17,7 +17,8 @@
     <p:sldId id="262" r:id="rId18"/>
     <p:sldId id="263" r:id="rId19"/>
     <p:sldId id="264" r:id="rId20"/>
-    <p:sldId id="265" r:id="rId8"/>
+    <p:sldId id="265" r:id="rId21"/>
+    <p:sldId id="266" r:id="rId8"/>
   </p:sldIdLst>
   <p:sldSz cx="12192000" cy="6858000"/>
   <p:notesSz cx="6858000" cy="12192000"/>
@@ -1096,7 +1097,7 @@
                 <a:ea typeface="メイリオ" panose="020B0604030504040204" pitchFamily="50" charset="-128"/>
                 <a:cs typeface="Meiryo" pitchFamily="34" charset="-120"/>
               </a:rPr>
-              <a:t>東金市内 全10事業所（11拠点）の個別整理</a:t>
+              <a:t>東金市内 全12拠点（運営主体6）の個別整理</a:t>
             </a:r>
             <a:endParaRPr lang="en-US" altLang="ja-JP" sz="1600" b="1" dirty="0">
               <a:latin typeface="メイリオ" panose="020B0604030504040204" pitchFamily="50" charset="-128"/>
@@ -1288,6 +1289,968 @@
 </file>
 
 <file path=ppt/slides/slide10.xml><?xml version="1.0" encoding="utf-8"?>
+<p:sld xmlns:a="http://schemas.openxmlformats.org/drawingml/2006/main" xmlns:r="http://schemas.openxmlformats.org/officeDocument/2006/relationships" xmlns:p="http://schemas.openxmlformats.org/presentationml/2006/main">
+  <p:cSld name="Slide 3">
+    <p:bg>
+      <p:bgPr>
+        <a:solidFill>
+          <a:srgbClr val="FFFFFF"/>
+        </a:solidFill>
+        <a:effectLst/>
+      </p:bgPr>
+    </p:bg>
+    <p:spTree>
+      <p:nvGrpSpPr>
+        <p:cNvPr id="1" name=""/>
+        <p:cNvGrpSpPr/>
+        <p:nvPr/>
+      </p:nvGrpSpPr>
+      <p:grpSpPr>
+        <a:xfrm>
+          <a:off x="0" y="0"/>
+          <a:ext cx="0" cy="0"/>
+          <a:chOff x="0" y="0"/>
+          <a:chExt cx="0" cy="0"/>
+        </a:xfrm>
+      </p:grpSpPr>
+      <p:sp>
+        <p:nvSpPr>
+          <p:cNvPr id="2" name="Shape 0"/>
+          <p:cNvSpPr/>
+          <p:nvPr/>
+        </p:nvSpPr>
+        <p:spPr>
+          <a:xfrm>
+            <a:off x="0" y="0"/>
+            <a:ext cx="12188952" cy="932688"/>
+          </a:xfrm>
+          <a:prstGeom prst="rect">
+            <a:avLst/>
+          </a:prstGeom>
+          <a:solidFill>
+            <a:srgbClr val="1B3A6B"/>
+          </a:solidFill>
+          <a:ln/>
+        </p:spPr>
+      </p:sp>
+      <p:sp>
+        <p:nvSpPr>
+          <p:cNvPr id="3" name="Shape 1"/>
+          <p:cNvSpPr/>
+          <p:nvPr/>
+        </p:nvSpPr>
+        <p:spPr>
+          <a:xfrm>
+            <a:off x="0" y="0"/>
+            <a:ext cx="164592" cy="932688"/>
+          </a:xfrm>
+          <a:prstGeom prst="rect">
+            <a:avLst/>
+          </a:prstGeom>
+          <a:solidFill>
+            <a:srgbClr val="13294B"/>
+          </a:solidFill>
+          <a:ln/>
+        </p:spPr>
+      </p:sp>
+      <p:sp>
+        <p:nvSpPr>
+          <p:cNvPr id="4" name="Text 2"/>
+          <p:cNvSpPr/>
+          <p:nvPr/>
+        </p:nvSpPr>
+        <p:spPr>
+          <a:xfrm>
+            <a:off x="502920" y="54864"/>
+            <a:ext cx="8686800" cy="822960"/>
+          </a:xfrm>
+          <a:prstGeom prst="rect">
+            <a:avLst/>
+          </a:prstGeom>
+          <a:noFill/>
+          <a:ln/>
+        </p:spPr>
+        <p:txBody>
+          <a:bodyPr wrap="square" lIns="0" tIns="0" rIns="0" bIns="0" rtlCol="0" anchor="ctr"/>
+          <a:lstStyle/>
+          <a:p>
+            <a:pPr marL="0" indent="0">
+              <a:buNone/>
+            </a:pPr>
+            <a:r>
+              <a:rPr lang="en-US" sz="3000" b="1" dirty="0">
+                <a:solidFill>
+                  <a:srgbClr val="FFFFFF"/>
+                </a:solidFill>
+                <a:latin typeface="Meiryo" pitchFamily="34" charset="0"/>
+                <a:ea typeface="Meiryo" pitchFamily="34" charset="-122"/>
+                <a:cs typeface="Meiryo" pitchFamily="34" charset="-120"/>
+              </a:rPr>
+              <a:t>II．　事業所別 詳細</a:t>
+            </a:r>
+            <a:endParaRPr lang="en-US" sz="3000" dirty="0"/>
+          </a:p>
+        </p:txBody>
+      </p:sp>
+      <p:sp>
+        <p:nvSpPr>
+          <p:cNvPr id="5" name="Text 3"/>
+          <p:cNvSpPr/>
+          <p:nvPr/>
+        </p:nvSpPr>
+        <p:spPr>
+          <a:xfrm>
+            <a:off x="502920" y="1115568"/>
+            <a:ext cx="8503920" cy="457200"/>
+          </a:xfrm>
+          <a:prstGeom prst="rect">
+            <a:avLst/>
+          </a:prstGeom>
+          <a:noFill/>
+          <a:ln/>
+        </p:spPr>
+        <p:txBody>
+          <a:bodyPr wrap="square" lIns="0" tIns="0" rIns="0" bIns="0" rtlCol="0" anchor="ctr"/>
+          <a:lstStyle/>
+          <a:p>
+            <a:pPr marL="0" indent="0">
+              <a:buNone/>
+            </a:pPr>
+            <a:r>
+              <a:rPr lang="en-US" sz="2100" b="1" dirty="0">
+                <a:solidFill>
+                  <a:srgbClr val="222222"/>
+                </a:solidFill>
+                <a:latin typeface="Meiryo" pitchFamily="34" charset="0"/>
+                <a:ea typeface="Meiryo" pitchFamily="34" charset="-122"/>
+                <a:cs typeface="Meiryo" pitchFamily="34" charset="-120"/>
+              </a:rPr>
+              <a:t>⑧ 鴇嶺の家</a:t>
+            </a:r>
+            <a:endParaRPr lang="en-US" sz="2100" dirty="0"/>
+          </a:p>
+        </p:txBody>
+      </p:sp>
+      <p:sp>
+        <p:nvSpPr>
+          <p:cNvPr id="6" name="Shape 4"/>
+          <p:cNvSpPr/>
+          <p:nvPr/>
+        </p:nvSpPr>
+        <p:spPr>
+          <a:xfrm>
+            <a:off x="10104120" y="1170432"/>
+            <a:ext cx="1600200" cy="457200"/>
+          </a:xfrm>
+          <a:prstGeom prst="rect">
+            <a:avLst/>
+          </a:prstGeom>
+          <a:solidFill>
+            <a:srgbClr val="FFFFFF"/>
+          </a:solidFill>
+          <a:ln w="15875">
+            <a:solidFill>
+              <a:srgbClr val="1B3A6B"/>
+            </a:solidFill>
+            <a:prstDash val="solid"/>
+          </a:ln>
+        </p:spPr>
+      </p:sp>
+      <p:sp>
+        <p:nvSpPr>
+          <p:cNvPr id="7" name="Text 5"/>
+          <p:cNvSpPr/>
+          <p:nvPr/>
+        </p:nvSpPr>
+        <p:spPr>
+          <a:xfrm>
+            <a:off x="10104120" y="1170432"/>
+            <a:ext cx="1600200" cy="457200"/>
+          </a:xfrm>
+          <a:prstGeom prst="rect">
+            <a:avLst/>
+          </a:prstGeom>
+          <a:noFill/>
+          <a:ln/>
+        </p:spPr>
+        <p:txBody>
+          <a:bodyPr wrap="square" lIns="0" tIns="0" rIns="0" bIns="0" rtlCol="0" anchor="ctr"/>
+          <a:lstStyle/>
+          <a:p>
+            <a:pPr marL="0" indent="0" algn="ctr">
+              <a:buNone/>
+            </a:pPr>
+            <a:r>
+              <a:rPr lang="en-US" sz="1400" b="1" dirty="0">
+                <a:solidFill>
+                  <a:srgbClr val="1B3A6B"/>
+                </a:solidFill>
+                <a:latin typeface="Meiryo" pitchFamily="34" charset="0"/>
+                <a:ea typeface="Meiryo" pitchFamily="34" charset="-122"/>
+                <a:cs typeface="Meiryo" pitchFamily="34" charset="-120"/>
+              </a:rPr>
+              <a:t>東金市</a:t>
+            </a:r>
+            <a:endParaRPr lang="en-US" sz="1400" dirty="0"/>
+          </a:p>
+        </p:txBody>
+      </p:sp>
+      <p:sp>
+        <p:nvSpPr>
+          <p:cNvPr id="8" name="Text 6"/>
+          <p:cNvSpPr/>
+          <p:nvPr/>
+        </p:nvSpPr>
+        <p:spPr>
+          <a:xfrm>
+            <a:off x="502920" y="6510528"/>
+            <a:ext cx="7315200" cy="274320"/>
+          </a:xfrm>
+          <a:prstGeom prst="rect">
+            <a:avLst/>
+          </a:prstGeom>
+          <a:noFill/>
+          <a:ln/>
+        </p:spPr>
+        <p:txBody>
+          <a:bodyPr wrap="square" lIns="0" tIns="0" rIns="0" bIns="0" rtlCol="0" anchor="ctr"/>
+          <a:lstStyle/>
+          <a:p>
+            <a:pPr marL="0" indent="0">
+              <a:buNone/>
+            </a:pPr>
+            <a:r>
+              <a:rPr lang="en-US" sz="850" dirty="0">
+                <a:solidFill>
+                  <a:srgbClr val="666666"/>
+                </a:solidFill>
+                <a:latin typeface="Meiryo" pitchFamily="34" charset="0"/>
+                <a:ea typeface="Meiryo" pitchFamily="34" charset="-122"/>
+                <a:cs typeface="Meiryo" pitchFamily="34" charset="-120"/>
+              </a:rPr>
+              <a:t>Copyright Funai Soken Group. All rights reserved.</a:t>
+            </a:r>
+            <a:endParaRPr lang="en-US" sz="850" dirty="0"/>
+          </a:p>
+        </p:txBody>
+      </p:sp>
+      <p:sp>
+        <p:nvSpPr>
+          <p:cNvPr id="9" name="Shape 7"/>
+          <p:cNvSpPr/>
+          <p:nvPr/>
+        </p:nvSpPr>
+        <p:spPr>
+          <a:xfrm>
+            <a:off x="502920" y="1783080"/>
+            <a:ext cx="6903720" cy="4434840"/>
+          </a:xfrm>
+          <a:prstGeom prst="rect">
+            <a:avLst/>
+          </a:prstGeom>
+          <a:solidFill>
+            <a:srgbClr val="FFFFFF"/>
+          </a:solidFill>
+          <a:ln w="12700">
+            <a:solidFill>
+              <a:srgbClr val="9AA7B8"/>
+            </a:solidFill>
+            <a:prstDash val="solid"/>
+          </a:ln>
+          <a:effectLst>
+            <a:outerShdw blurRad="63500" dist="25400" dir="8100000" algn="bl" rotWithShape="0">
+              <a:srgbClr val="000000">
+                <a:alpha val="12000"/>
+              </a:srgbClr>
+            </a:outerShdw>
+          </a:effectLst>
+        </p:spPr>
+      </p:sp>
+      <p:sp>
+        <p:nvSpPr>
+          <p:cNvPr id="10" name="Text 8"/>
+          <p:cNvSpPr/>
+          <p:nvPr/>
+        </p:nvSpPr>
+        <p:spPr>
+          <a:xfrm>
+            <a:off x="704088" y="1911096"/>
+            <a:ext cx="6501384" cy="384048"/>
+          </a:xfrm>
+          <a:prstGeom prst="rect">
+            <a:avLst/>
+          </a:prstGeom>
+          <a:noFill/>
+          <a:ln/>
+        </p:spPr>
+        <p:txBody>
+          <a:bodyPr wrap="square" lIns="0" tIns="0" rIns="0" bIns="0" rtlCol="0" anchor="ctr"/>
+          <a:lstStyle/>
+          <a:p>
+            <a:pPr marL="0" indent="0">
+              <a:buNone/>
+            </a:pPr>
+            <a:r>
+              <a:rPr lang="en-US" sz="1400" b="1" dirty="0">
+                <a:solidFill>
+                  <a:srgbClr val="1B3A6B"/>
+                </a:solidFill>
+                <a:latin typeface="Meiryo" pitchFamily="34" charset="0"/>
+                <a:ea typeface="Meiryo" pitchFamily="34" charset="-122"/>
+                <a:cs typeface="Meiryo" pitchFamily="34" charset="-120"/>
+              </a:rPr>
+              <a:t>鴇嶺の家（児童発達支援・放課後等デイサービス）</a:t>
+            </a:r>
+            <a:endParaRPr lang="en-US" sz="1400" dirty="0"/>
+          </a:p>
+        </p:txBody>
+      </p:sp>
+      <p:sp>
+        <p:nvSpPr>
+          <p:cNvPr id="11" name="Text 9"/>
+          <p:cNvSpPr/>
+          <p:nvPr/>
+        </p:nvSpPr>
+        <p:spPr>
+          <a:xfrm>
+            <a:off x="704088" y="2331720"/>
+            <a:ext cx="6501384" cy="3813048"/>
+          </a:xfrm>
+          <a:prstGeom prst="rect">
+            <a:avLst/>
+          </a:prstGeom>
+          <a:noFill/>
+          <a:ln/>
+        </p:spPr>
+        <p:txBody>
+          <a:bodyPr wrap="square" lIns="0" tIns="0" rIns="0" bIns="0" rtlCol="0" anchor="t"/>
+          <a:lstStyle/>
+          <a:p>
+            <a:pPr marL="0" indent="0">
+              <a:lnSpc>
+                <a:spcPct val="103000"/>
+              </a:lnSpc>
+              <a:buNone/>
+            </a:pPr>
+            <a:r>
+              <a:rPr lang="en-US" sz="1050" b="1" dirty="0">
+                <a:solidFill>
+                  <a:srgbClr val="2E6BB8"/>
+                </a:solidFill>
+                <a:latin typeface="Meiryo" pitchFamily="34" charset="0"/>
+                <a:ea typeface="Meiryo" pitchFamily="34" charset="-122"/>
+                <a:cs typeface="Meiryo" pitchFamily="34" charset="-120"/>
+              </a:rPr>
+              <a:t>▶</a:t>
+            </a:r>
+            <a:r>
+              <a:rPr lang="en-US" sz="1050" b="1" dirty="0">
+                <a:solidFill>
+                  <a:srgbClr val="222222"/>
+                </a:solidFill>
+                <a:latin typeface="Meiryo" pitchFamily="34" charset="0"/>
+                <a:ea typeface="Meiryo" pitchFamily="34" charset="-122"/>
+                <a:cs typeface="Meiryo" pitchFamily="34" charset="-120"/>
+              </a:rPr>
+              <a:t>対象：</a:t>
+            </a:r>
+            <a:r>
+              <a:rPr lang="en-US" sz="1050" dirty="0">
+                <a:solidFill>
+                  <a:srgbClr val="222222"/>
+                </a:solidFill>
+                <a:latin typeface="Meiryo" pitchFamily="34" charset="0"/>
+                <a:ea typeface="Meiryo" pitchFamily="34" charset="-122"/>
+                <a:cs typeface="Meiryo" pitchFamily="34" charset="-120"/>
+              </a:rPr>
+              <a:t>未就学児（児童発達支援）〜就学児（放課後等デイサービス）</a:t>
+            </a:r>
+            <a:endParaRPr lang="en-US" sz="1050" dirty="0"/>
+          </a:p>
+          <a:p>
+            <a:pPr marL="0" indent="0">
+              <a:lnSpc>
+                <a:spcPct val="103000"/>
+              </a:lnSpc>
+              <a:buNone/>
+            </a:pPr>
+            <a:r>
+              <a:rPr lang="en-US" sz="1050" b="1" dirty="0">
+                <a:solidFill>
+                  <a:srgbClr val="2E6BB8"/>
+                </a:solidFill>
+                <a:latin typeface="Meiryo" pitchFamily="34" charset="0"/>
+                <a:ea typeface="Meiryo" pitchFamily="34" charset="-122"/>
+                <a:cs typeface="Meiryo" pitchFamily="34" charset="-120"/>
+              </a:rPr>
+              <a:t>▶</a:t>
+            </a:r>
+            <a:r>
+              <a:rPr lang="en-US" sz="1050" b="1" dirty="0">
+                <a:solidFill>
+                  <a:srgbClr val="222222"/>
+                </a:solidFill>
+                <a:latin typeface="Meiryo" pitchFamily="34" charset="0"/>
+                <a:ea typeface="Meiryo" pitchFamily="34" charset="-122"/>
+                <a:cs typeface="Meiryo" pitchFamily="34" charset="-120"/>
+              </a:rPr>
+              <a:t>住所：</a:t>
+            </a:r>
+            <a:r>
+              <a:rPr lang="en-US" sz="1050" dirty="0">
+                <a:solidFill>
+                  <a:srgbClr val="222222"/>
+                </a:solidFill>
+                <a:latin typeface="Meiryo" pitchFamily="34" charset="0"/>
+                <a:ea typeface="Meiryo" pitchFamily="34" charset="-122"/>
+                <a:cs typeface="Meiryo" pitchFamily="34" charset="-120"/>
+              </a:rPr>
+              <a:t>千葉県東金市東金425-2</a:t>
+            </a:r>
+            <a:endParaRPr lang="en-US" sz="1050" dirty="0"/>
+          </a:p>
+          <a:p>
+            <a:pPr marL="0" indent="0">
+              <a:lnSpc>
+                <a:spcPct val="103000"/>
+              </a:lnSpc>
+              <a:buNone/>
+            </a:pPr>
+            <a:r>
+              <a:rPr lang="en-US" sz="1050" b="1" dirty="0">
+                <a:solidFill>
+                  <a:srgbClr val="2E6BB8"/>
+                </a:solidFill>
+                <a:latin typeface="Meiryo" pitchFamily="34" charset="0"/>
+                <a:ea typeface="Meiryo" pitchFamily="34" charset="-122"/>
+                <a:cs typeface="Meiryo" pitchFamily="34" charset="-120"/>
+              </a:rPr>
+              <a:t>▶</a:t>
+            </a:r>
+            <a:r>
+              <a:rPr lang="en-US" sz="1050" b="1" dirty="0">
+                <a:solidFill>
+                  <a:srgbClr val="222222"/>
+                </a:solidFill>
+                <a:latin typeface="Meiryo" pitchFamily="34" charset="0"/>
+                <a:ea typeface="Meiryo" pitchFamily="34" charset="-122"/>
+                <a:cs typeface="Meiryo" pitchFamily="34" charset="-120"/>
+              </a:rPr>
+              <a:t>TEL／HP：</a:t>
+            </a:r>
+            <a:r>
+              <a:rPr lang="en-US" sz="1050" dirty="0">
+                <a:solidFill>
+                  <a:srgbClr val="222222"/>
+                </a:solidFill>
+                <a:latin typeface="Meiryo" pitchFamily="34" charset="0"/>
+                <a:ea typeface="Meiryo" pitchFamily="34" charset="-122"/>
+                <a:cs typeface="Meiryo" pitchFamily="34" charset="-120"/>
+              </a:rPr>
+              <a:t>要確認（公開情報では下4桁「0285」までの記載にとどまる）／公開HPなし</a:t>
+            </a:r>
+            <a:endParaRPr lang="en-US" sz="1050" dirty="0"/>
+          </a:p>
+          <a:p>
+            <a:pPr marL="0" indent="0">
+              <a:lnSpc>
+                <a:spcPct val="103000"/>
+              </a:lnSpc>
+              <a:buNone/>
+            </a:pPr>
+            <a:r>
+              <a:rPr lang="en-US" sz="1050" b="1" dirty="0">
+                <a:solidFill>
+                  <a:srgbClr val="2E6BB8"/>
+                </a:solidFill>
+                <a:latin typeface="Meiryo" pitchFamily="34" charset="0"/>
+                <a:ea typeface="Meiryo" pitchFamily="34" charset="-122"/>
+                <a:cs typeface="Meiryo" pitchFamily="34" charset="-120"/>
+              </a:rPr>
+              <a:t>▶</a:t>
+            </a:r>
+            <a:r>
+              <a:rPr lang="en-US" sz="1050" b="1" dirty="0">
+                <a:solidFill>
+                  <a:srgbClr val="222222"/>
+                </a:solidFill>
+                <a:latin typeface="Meiryo" pitchFamily="34" charset="0"/>
+                <a:ea typeface="Meiryo" pitchFamily="34" charset="-122"/>
+                <a:cs typeface="Meiryo" pitchFamily="34" charset="-120"/>
+              </a:rPr>
+              <a:t>サービス提供時間／定員：</a:t>
+            </a:r>
+            <a:r>
+              <a:rPr lang="en-US" sz="1050" dirty="0">
+                <a:solidFill>
+                  <a:srgbClr val="222222"/>
+                </a:solidFill>
+                <a:latin typeface="Meiryo" pitchFamily="34" charset="0"/>
+                <a:ea typeface="Meiryo" pitchFamily="34" charset="-122"/>
+                <a:cs typeface="Meiryo" pitchFamily="34" charset="-120"/>
+              </a:rPr>
+              <a:t>いずれも要確認</a:t>
+            </a:r>
+            <a:endParaRPr lang="en-US" sz="1050" dirty="0"/>
+          </a:p>
+          <a:p>
+            <a:pPr marL="0" indent="0">
+              <a:lnSpc>
+                <a:spcPct val="103000"/>
+              </a:lnSpc>
+              <a:spcAft>
+                <a:spcPts val="500"/>
+              </a:spcAft>
+              <a:buNone/>
+            </a:pPr>
+            <a:endParaRPr lang="en-US" sz="1050" dirty="0"/>
+          </a:p>
+          <a:p>
+            <a:pPr marL="0" indent="0">
+              <a:lnSpc>
+                <a:spcPct val="103000"/>
+              </a:lnSpc>
+              <a:buNone/>
+            </a:pPr>
+            <a:r>
+              <a:rPr lang="en-US" sz="1050" b="1" dirty="0">
+                <a:solidFill>
+                  <a:srgbClr val="2E6BB8"/>
+                </a:solidFill>
+                <a:latin typeface="Meiryo" pitchFamily="34" charset="0"/>
+                <a:ea typeface="Meiryo" pitchFamily="34" charset="-122"/>
+                <a:cs typeface="Meiryo" pitchFamily="34" charset="-120"/>
+              </a:rPr>
+              <a:t>▶</a:t>
+            </a:r>
+            <a:r>
+              <a:rPr lang="en-US" sz="1050" b="1" dirty="0">
+                <a:solidFill>
+                  <a:srgbClr val="222222"/>
+                </a:solidFill>
+                <a:latin typeface="Meiryo" pitchFamily="34" charset="0"/>
+                <a:ea typeface="Meiryo" pitchFamily="34" charset="-122"/>
+                <a:cs typeface="Meiryo" pitchFamily="34" charset="-120"/>
+              </a:rPr>
+              <a:t>療育プログラムの特徴：</a:t>
+            </a:r>
+            <a:r>
+              <a:rPr lang="en-US" sz="1050" dirty="0">
+                <a:solidFill>
+                  <a:srgbClr val="222222"/>
+                </a:solidFill>
+                <a:latin typeface="Meiryo" pitchFamily="34" charset="0"/>
+                <a:ea typeface="Meiryo" pitchFamily="34" charset="-122"/>
+                <a:cs typeface="Meiryo" pitchFamily="34" charset="-120"/>
+              </a:rPr>
+              <a:t>児童発達支援と放課後等デイサービスを併設。プログラム内容は公開情報からは確認できず要確認。</a:t>
+            </a:r>
+            <a:endParaRPr lang="en-US" sz="1050" dirty="0"/>
+          </a:p>
+          <a:p>
+            <a:pPr marL="0" indent="0">
+              <a:lnSpc>
+                <a:spcPct val="103000"/>
+              </a:lnSpc>
+              <a:spcAft>
+                <a:spcPts val="500"/>
+              </a:spcAft>
+              <a:buNone/>
+            </a:pPr>
+            <a:r>
+              <a:rPr lang="en-US" sz="1050" dirty="0">
+                <a:solidFill>
+                  <a:srgbClr val="222222"/>
+                </a:solidFill>
+                <a:latin typeface="Meiryo" pitchFamily="34" charset="0"/>
+                <a:ea typeface="Meiryo" pitchFamily="34" charset="-122"/>
+                <a:cs typeface="Meiryo" pitchFamily="34" charset="-120"/>
+              </a:rPr>
+              <a:t>・東金地区（旧市街・鴇嶺小学校区）に立地し、学校からの通所導線が近い。</a:t>
+            </a:r>
+            <a:endParaRPr lang="en-US" sz="1050" dirty="0"/>
+          </a:p>
+          <a:p>
+            <a:pPr marL="0" indent="0">
+              <a:lnSpc>
+                <a:spcPct val="103000"/>
+              </a:lnSpc>
+              <a:spcAft>
+                <a:spcPts val="500"/>
+              </a:spcAft>
+              <a:buNone/>
+            </a:pPr>
+            <a:r>
+              <a:rPr lang="en-US" sz="1050" dirty="0">
+                <a:solidFill>
+                  <a:srgbClr val="222222"/>
+                </a:solidFill>
+                <a:latin typeface="Meiryo" pitchFamily="34" charset="0"/>
+                <a:ea typeface="Meiryo" pitchFamily="34" charset="-122"/>
+                <a:cs typeface="Meiryo" pitchFamily="34" charset="-120"/>
+              </a:rPr>
+              <a:t>・同一町域の東金723にスターワーク東金（放デイ）があり、東金駅東口エリアに事業所が集積。</a:t>
+            </a:r>
+            <a:endParaRPr lang="en-US" sz="1050" dirty="0"/>
+          </a:p>
+          <a:p>
+            <a:pPr marL="0" indent="0">
+              <a:lnSpc>
+                <a:spcPct val="103000"/>
+              </a:lnSpc>
+              <a:spcAft>
+                <a:spcPts val="500"/>
+              </a:spcAft>
+              <a:buNone/>
+            </a:pPr>
+            <a:endParaRPr lang="en-US" sz="1050" dirty="0"/>
+          </a:p>
+          <a:p>
+            <a:pPr marL="0" indent="0">
+              <a:lnSpc>
+                <a:spcPct val="103000"/>
+              </a:lnSpc>
+              <a:buNone/>
+            </a:pPr>
+            <a:r>
+              <a:rPr lang="en-US" sz="1050" b="1" dirty="0">
+                <a:solidFill>
+                  <a:srgbClr val="2E6BB8"/>
+                </a:solidFill>
+                <a:latin typeface="Meiryo" pitchFamily="34" charset="0"/>
+                <a:ea typeface="Meiryo" pitchFamily="34" charset="-122"/>
+                <a:cs typeface="Meiryo" pitchFamily="34" charset="-120"/>
+              </a:rPr>
+              <a:t>▶</a:t>
+            </a:r>
+            <a:r>
+              <a:rPr lang="en-US" sz="1050" b="1" dirty="0">
+                <a:solidFill>
+                  <a:srgbClr val="222222"/>
+                </a:solidFill>
+                <a:latin typeface="Meiryo" pitchFamily="34" charset="0"/>
+                <a:ea typeface="Meiryo" pitchFamily="34" charset="-122"/>
+                <a:cs typeface="Meiryo" pitchFamily="34" charset="-120"/>
+              </a:rPr>
+              <a:t>出典：</a:t>
+            </a:r>
+            <a:r>
+              <a:rPr lang="en-US" sz="1050" dirty="0">
+                <a:solidFill>
+                  <a:srgbClr val="222222"/>
+                </a:solidFill>
+                <a:latin typeface="Meiryo" pitchFamily="34" charset="0"/>
+                <a:ea typeface="Meiryo" pitchFamily="34" charset="-122"/>
+                <a:cs typeface="Meiryo" pitchFamily="34" charset="-120"/>
+              </a:rPr>
+              <a:t>東金市公式サイト／LITALICO発達ナビ 東金市 児童発達支援事業所一覧</a:t>
+            </a:r>
+            <a:endParaRPr lang="en-US" sz="1050" dirty="0"/>
+          </a:p>
+          <a:p>
+            <a:pPr marL="0" indent="0">
+              <a:lnSpc>
+                <a:spcPct val="103000"/>
+              </a:lnSpc>
+              <a:buNone/>
+            </a:pPr>
+            <a:r>
+              <a:rPr lang="en-US" sz="1050" b="1" dirty="0">
+                <a:solidFill>
+                  <a:srgbClr val="2E6BB8"/>
+                </a:solidFill>
+                <a:latin typeface="Meiryo" pitchFamily="34" charset="0"/>
+                <a:ea typeface="Meiryo" pitchFamily="34" charset="-122"/>
+                <a:cs typeface="Meiryo" pitchFamily="34" charset="-120"/>
+              </a:rPr>
+              <a:t>▶</a:t>
+            </a:r>
+            <a:r>
+              <a:rPr lang="en-US" sz="1050" b="1" dirty="0">
+                <a:solidFill>
+                  <a:srgbClr val="222222"/>
+                </a:solidFill>
+                <a:latin typeface="Meiryo" pitchFamily="34" charset="0"/>
+                <a:ea typeface="Meiryo" pitchFamily="34" charset="-122"/>
+                <a:cs typeface="Meiryo" pitchFamily="34" charset="-120"/>
+              </a:rPr>
+              <a:t>要確認事項：</a:t>
+            </a:r>
+            <a:r>
+              <a:rPr lang="en-US" sz="1050" dirty="0">
+                <a:solidFill>
+                  <a:srgbClr val="222222"/>
+                </a:solidFill>
+                <a:latin typeface="Meiryo" pitchFamily="34" charset="0"/>
+                <a:ea typeface="Meiryo" pitchFamily="34" charset="-122"/>
+                <a:cs typeface="Meiryo" pitchFamily="34" charset="-120"/>
+              </a:rPr>
+              <a:t>運営法人、正確な電話番号、定員、提供時間、プログラム内容　※公開情報がほぼ無い</a:t>
+            </a:r>
+            <a:endParaRPr lang="en-US" sz="1050" dirty="0"/>
+          </a:p>
+        </p:txBody>
+      </p:sp>
+      <p:sp>
+        <p:nvSpPr>
+          <p:cNvPr id="13" name="Text 11"/>
+          <p:cNvSpPr/>
+          <p:nvPr/>
+        </p:nvSpPr>
+        <p:spPr>
+          <a:xfrm>
+            <a:off x="7635240" y="1783080"/>
+            <a:ext cx="4069080" cy="2148840"/>
+          </a:xfrm>
+          <a:prstGeom prst="rect">
+            <a:avLst/>
+          </a:prstGeom>
+          <a:solidFill>
+            <a:srgbClr val="F4F6FA"/>
+          </a:solidFill>
+          <a:ln w="12700">
+            <a:solidFill>
+              <a:srgbClr val="9AA7B8"/>
+            </a:solidFill>
+            <a:prstDash val="dash"/>
+          </a:ln>
+        </p:spPr>
+        <p:txBody>
+          <a:bodyPr wrap="square" lIns="91440" tIns="45720" rIns="91440" bIns="45720" rtlCol="0" anchor="ctr"/>
+          <a:lstStyle/>
+          <a:p>
+            <a:pPr marL="0" indent="0" algn="ctr">
+              <a:lnSpc>
+                <a:spcPct val="110000"/>
+              </a:lnSpc>
+              <a:buNone/>
+            </a:pPr>
+            <a:r>
+              <a:rPr lang="en-US" sz="1200" b="1" dirty="0">
+                <a:solidFill>
+                  <a:srgbClr val="8A99AD"/>
+                </a:solidFill>
+                <a:latin typeface="Meiryo" pitchFamily="34" charset="0"/>
+                <a:ea typeface="Meiryo" pitchFamily="34" charset="-122"/>
+                <a:cs typeface="Meiryo" pitchFamily="34" charset="-120"/>
+              </a:rPr>
+              <a:t>［ 写真挿入エリア ］</a:t>
+            </a:r>
+            <a:endParaRPr lang="en-US" sz="1200" dirty="0"/>
+          </a:p>
+          <a:p>
+            <a:pPr marL="0" indent="0" algn="ctr">
+              <a:lnSpc>
+                <a:spcPct val="110000"/>
+              </a:lnSpc>
+              <a:buNone/>
+            </a:pPr>
+            <a:r>
+              <a:rPr lang="en-US" sz="950" dirty="0">
+                <a:solidFill>
+                  <a:srgbClr val="97A4B6"/>
+                </a:solidFill>
+                <a:latin typeface="Meiryo" pitchFamily="34" charset="0"/>
+                <a:ea typeface="Meiryo" pitchFamily="34" charset="-122"/>
+                <a:cs typeface="Meiryo" pitchFamily="34" charset="-120"/>
+              </a:rPr>
+              <a:t>（LITALICO発達ナビ／東金市公式の施設写真を挿入）</a:t>
+            </a:r>
+            <a:endParaRPr lang="en-US" sz="1200" dirty="0"/>
+          </a:p>
+        </p:txBody>
+      </p:sp>
+      <p:sp>
+        <p:nvSpPr>
+          <p:cNvPr id="14" name="Shape 12"/>
+          <p:cNvSpPr/>
+          <p:nvPr/>
+        </p:nvSpPr>
+        <p:spPr>
+          <a:xfrm>
+            <a:off x="7635240" y="4069080"/>
+            <a:ext cx="4069080" cy="2148840"/>
+          </a:xfrm>
+          <a:prstGeom prst="rect">
+            <a:avLst/>
+          </a:prstGeom>
+          <a:solidFill>
+            <a:srgbClr val="EEF2F8"/>
+          </a:solidFill>
+          <a:ln w="12700">
+            <a:solidFill>
+              <a:srgbClr val="9AA7B8"/>
+            </a:solidFill>
+            <a:prstDash val="solid"/>
+          </a:ln>
+        </p:spPr>
+      </p:sp>
+      <p:sp>
+        <p:nvSpPr>
+          <p:cNvPr id="15" name="Text 13"/>
+          <p:cNvSpPr/>
+          <p:nvPr/>
+        </p:nvSpPr>
+        <p:spPr>
+          <a:xfrm>
+            <a:off x="7818120" y="4187952"/>
+            <a:ext cx="3703320" cy="320040"/>
+          </a:xfrm>
+          <a:prstGeom prst="rect">
+            <a:avLst/>
+          </a:prstGeom>
+          <a:noFill/>
+          <a:ln/>
+        </p:spPr>
+        <p:txBody>
+          <a:bodyPr wrap="square" lIns="0" tIns="0" rIns="0" bIns="0" rtlCol="0" anchor="ctr"/>
+          <a:lstStyle/>
+          <a:p>
+            <a:pPr marL="0" indent="0">
+              <a:buNone/>
+            </a:pPr>
+            <a:r>
+              <a:rPr lang="en-US" sz="1250" b="1" dirty="0">
+                <a:solidFill>
+                  <a:srgbClr val="1B3A6B"/>
+                </a:solidFill>
+                <a:latin typeface="Meiryo" pitchFamily="34" charset="0"/>
+                <a:ea typeface="Meiryo" pitchFamily="34" charset="-122"/>
+                <a:cs typeface="Meiryo" pitchFamily="34" charset="-120"/>
+              </a:rPr>
+              <a:t>注目ポイント</a:t>
+            </a:r>
+            <a:endParaRPr lang="en-US" sz="1250" dirty="0"/>
+          </a:p>
+        </p:txBody>
+      </p:sp>
+      <p:sp>
+        <p:nvSpPr>
+          <p:cNvPr id="16" name="Text 14"/>
+          <p:cNvSpPr/>
+          <p:nvPr/>
+        </p:nvSpPr>
+        <p:spPr>
+          <a:xfrm>
+            <a:off x="7818120" y="4553712"/>
+            <a:ext cx="3703320" cy="1554480"/>
+          </a:xfrm>
+          <a:prstGeom prst="rect">
+            <a:avLst/>
+          </a:prstGeom>
+          <a:noFill/>
+          <a:ln/>
+        </p:spPr>
+        <p:txBody>
+          <a:bodyPr wrap="square" lIns="0" tIns="0" rIns="0" bIns="0" rtlCol="0" anchor="t"/>
+          <a:lstStyle/>
+          <a:p>
+            <a:pPr marL="342900" indent="-342900">
+              <a:spcAft>
+                <a:spcPts val="700"/>
+              </a:spcAft>
+              <a:buSzPct val="100000"/>
+              <a:buChar char="•"/>
+            </a:pPr>
+            <a:r>
+              <a:rPr lang="en-US" sz="950" dirty="0">
+                <a:solidFill>
+                  <a:srgbClr val="222222"/>
+                </a:solidFill>
+                <a:latin typeface="メイリオ" panose="020B0604030504040204" pitchFamily="50" charset="-128"/>
+                <a:ea typeface="メイリオ" panose="020B0604030504040204" pitchFamily="50" charset="-128"/>
+                <a:cs typeface="Meiryo" pitchFamily="34" charset="-120"/>
+              </a:rPr>
+              <a:t>鴇嶺小学校区の中心部に位置し、学区内からの徒歩・短距離送迎に適した立地。</a:t>
+            </a:r>
+            <a:endParaRPr lang="en-US" sz="1000" dirty="0">
+              <a:latin typeface="メイリオ" panose="020B0604030504040204" pitchFamily="50" charset="-128"/>
+              <a:ea typeface="メイリオ" panose="020B0604030504040204" pitchFamily="50" charset="-128"/>
+            </a:endParaRPr>
+          </a:p>
+          <a:p>
+            <a:pPr marL="342900" indent="-342900">
+              <a:spcAft>
+                <a:spcPts val="700"/>
+              </a:spcAft>
+              <a:buSzPct val="100000"/>
+              <a:buChar char="•"/>
+            </a:pPr>
+            <a:r>
+              <a:rPr lang="en-US" sz="950" dirty="0">
+                <a:solidFill>
+                  <a:srgbClr val="222222"/>
+                </a:solidFill>
+                <a:latin typeface="メイリオ" panose="020B0604030504040204" pitchFamily="50" charset="-128"/>
+                <a:ea typeface="メイリオ" panose="020B0604030504040204" pitchFamily="50" charset="-128"/>
+                <a:cs typeface="Meiryo" pitchFamily="34" charset="-120"/>
+              </a:rPr>
+              <a:t>東金駅東口エリアの事業所集積地にあり、競合との距離が近い。</a:t>
+            </a:r>
+            <a:endParaRPr lang="en-US" sz="1000" dirty="0">
+              <a:latin typeface="メイリオ" panose="020B0604030504040204" pitchFamily="50" charset="-128"/>
+              <a:ea typeface="メイリオ" panose="020B0604030504040204" pitchFamily="50" charset="-128"/>
+            </a:endParaRPr>
+          </a:p>
+          <a:p>
+            <a:pPr marL="342900" indent="-342900">
+              <a:spcAft>
+                <a:spcPts val="700"/>
+              </a:spcAft>
+              <a:buSzPct val="100000"/>
+              <a:buChar char="•"/>
+            </a:pPr>
+            <a:r>
+              <a:rPr lang="en-US" sz="950" dirty="0">
+                <a:solidFill>
+                  <a:srgbClr val="222222"/>
+                </a:solidFill>
+                <a:latin typeface="メイリオ" panose="020B0604030504040204" pitchFamily="50" charset="-128"/>
+                <a:ea typeface="メイリオ" panose="020B0604030504040204" pitchFamily="50" charset="-128"/>
+                <a:cs typeface="Meiryo" pitchFamily="34" charset="-120"/>
+              </a:rPr>
+              <a:t>情報発信が乏しく、実態把握は市社会福祉課・相談支援事業所経由での確認が現実的。</a:t>
+            </a:r>
+            <a:endParaRPr lang="en-US" sz="1000" dirty="0">
+              <a:latin typeface="メイリオ" panose="020B0604030504040204" pitchFamily="50" charset="-128"/>
+              <a:ea typeface="メイリオ" panose="020B0604030504040204" pitchFamily="50" charset="-128"/>
+            </a:endParaRPr>
+          </a:p>
+          <a:p>
+            <a:pPr marL="342900" indent="-342900">
+              <a:spcAft>
+                <a:spcPts val="700"/>
+              </a:spcAft>
+              <a:buSzPct val="100000"/>
+              <a:buChar char="•"/>
+            </a:pPr>
+            <a:r>
+              <a:rPr lang="en-US" sz="950" dirty="0">
+                <a:solidFill>
+                  <a:srgbClr val="222222"/>
+                </a:solidFill>
+                <a:latin typeface="メイリオ" panose="020B0604030504040204" pitchFamily="50" charset="-128"/>
+                <a:ea typeface="メイリオ" panose="020B0604030504040204" pitchFamily="50" charset="-128"/>
+                <a:cs typeface="Meiryo" pitchFamily="34" charset="-120"/>
+              </a:rPr>
+              <a:t>東金駅東口は事業所集積地。新規参入するなら駅前以外の空白地を狙うのが現実的。</a:t>
+            </a:r>
+            <a:endParaRPr lang="en-US" sz="1000" dirty="0">
+              <a:latin typeface="メイリオ" panose="020B0604030504040204" pitchFamily="50" charset="-128"/>
+              <a:ea typeface="メイリオ" panose="020B0604030504040204" pitchFamily="50" charset="-128"/>
+            </a:endParaRPr>
+          </a:p>
+        </p:txBody>
+      </p:sp>
+    </p:spTree>
+  </p:cSld>
+  <p:clrMapOvr>
+    <a:masterClrMapping/>
+  </p:clrMapOvr>
+</p:sld>
+</file>
+
+<file path=ppt/slides/slide11.xml><?xml version="1.0" encoding="utf-8"?>
 <p:sld xmlns:a="http://schemas.openxmlformats.org/drawingml/2006/main" xmlns:r="http://schemas.openxmlformats.org/officeDocument/2006/relationships" xmlns:p="http://schemas.openxmlformats.org/presentationml/2006/main">
   <p:cSld name="Slide 7">
     <p:bg>
@@ -1507,7 +2470,7 @@
         </p:nvGraphicFramePr>
         <p:xfrm>
           <a:off x="487680" y="1627632"/>
-          <a:ext cx="11201399" cy="2962656"/>
+          <a:ext cx="11201399" cy="2788920"/>
         </p:xfrm>
         <a:graphic>
           <a:graphicData uri="http://schemas.openxmlformats.org/drawingml/2006/table">
@@ -1550,7 +2513,7 @@
                   </a:extLst>
                 </a:gridCol>
               </a:tblGrid>
-              <a:tr h="493776">
+              <a:tr h="464820">
                 <a:tc>
                   <a:txBody>
                     <a:bodyPr/>
@@ -1897,7 +2860,7 @@
                   </a:ext>
                 </a:extLst>
               </a:tr>
-              <a:tr h="493776">
+              <a:tr h="464820">
                 <a:tc>
                   <a:txBody>
                     <a:bodyPr/>
@@ -2229,7 +3192,7 @@
                   </a:ext>
                 </a:extLst>
               </a:tr>
-              <a:tr h="493776">
+              <a:tr h="464820">
                 <a:tc>
                   <a:txBody>
                     <a:bodyPr/>
@@ -2561,7 +3524,7 @@
                   </a:ext>
                 </a:extLst>
               </a:tr>
-              <a:tr h="493776">
+              <a:tr h="464820">
                 <a:tc>
                   <a:txBody>
                     <a:bodyPr/>
@@ -2893,7 +3856,7 @@
                   </a:ext>
                 </a:extLst>
               </a:tr>
-              <a:tr h="493776">
+              <a:tr h="464820">
                 <a:tc>
                   <a:txBody>
                     <a:bodyPr/>
@@ -2911,7 +3874,7 @@
                           <a:ea typeface="Meiryo" pitchFamily="34" charset="-122"/>
                           <a:cs typeface="Meiryo" pitchFamily="34" charset="-120"/>
                         </a:rPr>
-                        <a:t>子ども支援センターぽけっと</a:t>
+                        <a:t>子ども支援センター（まあちる／ぽけっと）</a:t>
                       </a:r>
                       <a:endParaRPr lang="en-US" sz="1050" dirty="0">
                         <a:latin typeface="Meiryo" charset="0"/>
@@ -2976,7 +3939,339 @@
                           <a:ea typeface="Meiryo" pitchFamily="34" charset="-122"/>
                           <a:cs typeface="Meiryo" pitchFamily="34" charset="-120"/>
                         </a:rPr>
-                        <a:t>1</a:t>
+                        <a:t>2</a:t>
+                      </a:r>
+                      <a:endParaRPr lang="en-US" sz="1050" dirty="0">
+                        <a:latin typeface="Meiryo" charset="0"/>
+                        <a:ea typeface="Meiryo" charset="0"/>
+                        <a:cs typeface="Meiryo" charset="0"/>
+                      </a:endParaRPr>
+                    </a:p>
+                  </a:txBody>
+                  <a:tcPr anchor="ctr" marT="18000" marB="18000" marL="64008" marR="45720">
+                    <a:lnL w="9525" cap="flat" cmpd="sng" algn="ctr">
+                      <a:solidFill>
+                        <a:srgbClr val="BFBFBF"/>
+                      </a:solidFill>
+                      <a:prstDash val="solid"/>
+                      <a:round/>
+                      <a:headEnd type="none" w="med" len="med"/>
+                      <a:tailEnd type="none" w="med" len="med"/>
+                    </a:lnL>
+                    <a:lnR w="9525" cap="flat" cmpd="sng" algn="ctr">
+                      <a:solidFill>
+                        <a:srgbClr val="BFBFBF"/>
+                      </a:solidFill>
+                      <a:prstDash val="solid"/>
+                      <a:round/>
+                      <a:headEnd type="none" w="med" len="med"/>
+                      <a:tailEnd type="none" w="med" len="med"/>
+                    </a:lnR>
+                    <a:lnT w="9525" cap="flat" cmpd="sng" algn="ctr">
+                      <a:solidFill>
+                        <a:srgbClr val="BFBFBF"/>
+                      </a:solidFill>
+                      <a:prstDash val="solid"/>
+                      <a:round/>
+                      <a:headEnd type="none" w="med" len="med"/>
+                      <a:tailEnd type="none" w="med" len="med"/>
+                    </a:lnT>
+                    <a:lnB w="9525" cap="flat" cmpd="sng" algn="ctr">
+                      <a:solidFill>
+                        <a:srgbClr val="BFBFBF"/>
+                      </a:solidFill>
+                      <a:prstDash val="solid"/>
+                      <a:round/>
+                      <a:headEnd type="none" w="med" len="med"/>
+                      <a:tailEnd type="none" w="med" len="med"/>
+                    </a:lnB>
+                  </a:tcPr>
+                </a:tc>
+                <a:tc>
+                  <a:txBody>
+                    <a:bodyPr/>
+                    <a:lstStyle/>
+                    <a:p>
+                      <a:pPr marL="0" indent="0" algn="l">
+                        <a:buNone/>
+                      </a:pPr>
+                      <a:r>
+                        <a:rPr lang="en-US" sz="900" dirty="0">
+                          <a:solidFill>
+                            <a:srgbClr val="222222"/>
+                          </a:solidFill>
+                          <a:latin typeface="Meiryo" pitchFamily="34" charset="0"/>
+                          <a:ea typeface="Meiryo" pitchFamily="34" charset="-122"/>
+                          <a:cs typeface="Meiryo" pitchFamily="34" charset="-120"/>
+                        </a:rPr>
+                        <a:t>民間・年齢分離型</a:t>
+                      </a:r>
+                      <a:endParaRPr lang="en-US" sz="1050" dirty="0">
+                        <a:latin typeface="Meiryo" charset="0"/>
+                        <a:ea typeface="Meiryo" charset="0"/>
+                        <a:cs typeface="Meiryo" charset="0"/>
+                      </a:endParaRPr>
+                    </a:p>
+                  </a:txBody>
+                  <a:tcPr anchor="ctr" marT="18000" marB="18000" marL="64008" marR="45720">
+                    <a:lnL w="9525" cap="flat" cmpd="sng" algn="ctr">
+                      <a:solidFill>
+                        <a:srgbClr val="BFBFBF"/>
+                      </a:solidFill>
+                      <a:prstDash val="solid"/>
+                      <a:round/>
+                      <a:headEnd type="none" w="med" len="med"/>
+                      <a:tailEnd type="none" w="med" len="med"/>
+                    </a:lnL>
+                    <a:lnR w="9525" cap="flat" cmpd="sng" algn="ctr">
+                      <a:solidFill>
+                        <a:srgbClr val="BFBFBF"/>
+                      </a:solidFill>
+                      <a:prstDash val="solid"/>
+                      <a:round/>
+                      <a:headEnd type="none" w="med" len="med"/>
+                      <a:tailEnd type="none" w="med" len="med"/>
+                    </a:lnR>
+                    <a:lnT w="9525" cap="flat" cmpd="sng" algn="ctr">
+                      <a:solidFill>
+                        <a:srgbClr val="BFBFBF"/>
+                      </a:solidFill>
+                      <a:prstDash val="solid"/>
+                      <a:round/>
+                      <a:headEnd type="none" w="med" len="med"/>
+                      <a:tailEnd type="none" w="med" len="med"/>
+                    </a:lnT>
+                    <a:lnB w="9525" cap="flat" cmpd="sng" algn="ctr">
+                      <a:solidFill>
+                        <a:srgbClr val="BFBFBF"/>
+                      </a:solidFill>
+                      <a:prstDash val="solid"/>
+                      <a:round/>
+                      <a:headEnd type="none" w="med" len="med"/>
+                      <a:tailEnd type="none" w="med" len="med"/>
+                    </a:lnB>
+                  </a:tcPr>
+                </a:tc>
+                <a:tc>
+                  <a:txBody>
+                    <a:bodyPr/>
+                    <a:lstStyle/>
+                    <a:p>
+                      <a:pPr marL="0" indent="0" algn="l">
+                        <a:buNone/>
+                      </a:pPr>
+                      <a:r>
+                        <a:rPr lang="en-US" sz="900" dirty="0">
+                          <a:solidFill>
+                            <a:srgbClr val="222222"/>
+                          </a:solidFill>
+                          <a:latin typeface="Meiryo" pitchFamily="34" charset="0"/>
+                          <a:ea typeface="Meiryo" pitchFamily="34" charset="-122"/>
+                          <a:cs typeface="Meiryo" pitchFamily="34" charset="-120"/>
+                        </a:rPr>
+                        <a:t>まあちる＝主に2〜12歳（火〜土）、ぽけっと＝主に6〜18歳（月〜土）。9:00〜18:00</a:t>
+                      </a:r>
+                      <a:endParaRPr lang="en-US" sz="1050" dirty="0">
+                        <a:latin typeface="Meiryo" charset="0"/>
+                        <a:ea typeface="Meiryo" charset="0"/>
+                        <a:cs typeface="Meiryo" charset="0"/>
+                      </a:endParaRPr>
+                    </a:p>
+                  </a:txBody>
+                  <a:tcPr anchor="ctr" marT="18000" marB="18000" marL="64008" marR="45720">
+                    <a:lnL w="9525" cap="flat" cmpd="sng" algn="ctr">
+                      <a:solidFill>
+                        <a:srgbClr val="BFBFBF"/>
+                      </a:solidFill>
+                      <a:prstDash val="solid"/>
+                      <a:round/>
+                      <a:headEnd type="none" w="med" len="med"/>
+                      <a:tailEnd type="none" w="med" len="med"/>
+                    </a:lnL>
+                    <a:lnR w="9525" cap="flat" cmpd="sng" algn="ctr">
+                      <a:solidFill>
+                        <a:srgbClr val="BFBFBF"/>
+                      </a:solidFill>
+                      <a:prstDash val="solid"/>
+                      <a:round/>
+                      <a:headEnd type="none" w="med" len="med"/>
+                      <a:tailEnd type="none" w="med" len="med"/>
+                    </a:lnR>
+                    <a:lnT w="9525" cap="flat" cmpd="sng" algn="ctr">
+                      <a:solidFill>
+                        <a:srgbClr val="BFBFBF"/>
+                      </a:solidFill>
+                      <a:prstDash val="solid"/>
+                      <a:round/>
+                      <a:headEnd type="none" w="med" len="med"/>
+                      <a:tailEnd type="none" w="med" len="med"/>
+                    </a:lnT>
+                    <a:lnB w="9525" cap="flat" cmpd="sng" algn="ctr">
+                      <a:solidFill>
+                        <a:srgbClr val="BFBFBF"/>
+                      </a:solidFill>
+                      <a:prstDash val="solid"/>
+                      <a:round/>
+                      <a:headEnd type="none" w="med" len="med"/>
+                      <a:tailEnd type="none" w="med" len="med"/>
+                    </a:lnB>
+                  </a:tcPr>
+                </a:tc>
+                <a:tc>
+                  <a:txBody>
+                    <a:bodyPr/>
+                    <a:lstStyle/>
+                    <a:p>
+                      <a:pPr marL="0" indent="0" algn="l">
+                        <a:buNone/>
+                      </a:pPr>
+                      <a:r>
+                        <a:rPr lang="en-US" sz="900" dirty="0">
+                          <a:solidFill>
+                            <a:srgbClr val="222222"/>
+                          </a:solidFill>
+                          <a:latin typeface="Meiryo" pitchFamily="34" charset="0"/>
+                          <a:ea typeface="Meiryo" pitchFamily="34" charset="-122"/>
+                          <a:cs typeface="Meiryo" pitchFamily="34" charset="-120"/>
+                        </a:rPr>
+                        <a:t>東岩崎・東上宿</a:t>
+                      </a:r>
+                      <a:endParaRPr lang="en-US" sz="1050" dirty="0">
+                        <a:latin typeface="Meiryo" charset="0"/>
+                        <a:ea typeface="Meiryo" charset="0"/>
+                        <a:cs typeface="Meiryo" charset="0"/>
+                      </a:endParaRPr>
+                    </a:p>
+                  </a:txBody>
+                  <a:tcPr anchor="ctr" marT="18000" marB="18000" marL="64008" marR="45720">
+                    <a:lnL w="9525" cap="flat" cmpd="sng" algn="ctr">
+                      <a:solidFill>
+                        <a:srgbClr val="BFBFBF"/>
+                      </a:solidFill>
+                      <a:prstDash val="solid"/>
+                      <a:round/>
+                      <a:headEnd type="none" w="med" len="med"/>
+                      <a:tailEnd type="none" w="med" len="med"/>
+                    </a:lnL>
+                    <a:lnR w="9525" cap="flat" cmpd="sng" algn="ctr">
+                      <a:solidFill>
+                        <a:srgbClr val="BFBFBF"/>
+                      </a:solidFill>
+                      <a:prstDash val="solid"/>
+                      <a:round/>
+                      <a:headEnd type="none" w="med" len="med"/>
+                      <a:tailEnd type="none" w="med" len="med"/>
+                    </a:lnR>
+                    <a:lnT w="9525" cap="flat" cmpd="sng" algn="ctr">
+                      <a:solidFill>
+                        <a:srgbClr val="BFBFBF"/>
+                      </a:solidFill>
+                      <a:prstDash val="solid"/>
+                      <a:round/>
+                      <a:headEnd type="none" w="med" len="med"/>
+                      <a:tailEnd type="none" w="med" len="med"/>
+                    </a:lnT>
+                    <a:lnB w="9525" cap="flat" cmpd="sng" algn="ctr">
+                      <a:solidFill>
+                        <a:srgbClr val="BFBFBF"/>
+                      </a:solidFill>
+                      <a:prstDash val="solid"/>
+                      <a:round/>
+                      <a:headEnd type="none" w="med" len="med"/>
+                      <a:tailEnd type="none" w="med" len="med"/>
+                    </a:lnB>
+                  </a:tcPr>
+                </a:tc>
+                <a:extLst>
+                  <a:ext uri="{0D108BD9-81ED-4DB2-BD59-A6C34878D82A}">
+                    <a16:rowId xmlns:a16="http://schemas.microsoft.com/office/drawing/2014/main" val="10001"/>
+                  </a:ext>
+                </a:extLst>
+              </a:tr>
+              <a:tr h="464820">
+                <a:tc>
+                  <a:txBody>
+                    <a:bodyPr/>
+                    <a:lstStyle/>
+                    <a:p>
+                      <a:pPr marL="0" indent="0" algn="l">
+                        <a:buNone/>
+                      </a:pPr>
+                      <a:r>
+                        <a:rPr lang="en-US" sz="900" b="1" dirty="0">
+                          <a:solidFill>
+                            <a:srgbClr val="222222"/>
+                          </a:solidFill>
+                          <a:latin typeface="Meiryo" pitchFamily="34" charset="0"/>
+                          <a:ea typeface="Meiryo" pitchFamily="34" charset="-122"/>
+                          <a:cs typeface="Meiryo" pitchFamily="34" charset="-120"/>
+                        </a:rPr>
+                        <a:t>コンパッション保育所／鴇嶺の家</a:t>
+                      </a:r>
+                      <a:endParaRPr lang="en-US" sz="1050" dirty="0">
+                        <a:latin typeface="Meiryo" charset="0"/>
+                        <a:ea typeface="Meiryo" charset="0"/>
+                        <a:cs typeface="Meiryo" charset="0"/>
+                      </a:endParaRPr>
+                    </a:p>
+                  </a:txBody>
+                  <a:tcPr anchor="ctr" marT="18000" marB="18000" marL="64008" marR="45720">
+                    <a:lnL w="9525" cap="flat" cmpd="sng" algn="ctr">
+                      <a:solidFill>
+                        <a:srgbClr val="BFBFBF"/>
+                      </a:solidFill>
+                      <a:prstDash val="solid"/>
+                      <a:round/>
+                      <a:headEnd type="none" w="med" len="med"/>
+                      <a:tailEnd type="none" w="med" len="med"/>
+                    </a:lnL>
+                    <a:lnR w="9525" cap="flat" cmpd="sng" algn="ctr">
+                      <a:solidFill>
+                        <a:srgbClr val="BFBFBF"/>
+                      </a:solidFill>
+                      <a:prstDash val="solid"/>
+                      <a:round/>
+                      <a:headEnd type="none" w="med" len="med"/>
+                      <a:tailEnd type="none" w="med" len="med"/>
+                    </a:lnR>
+                    <a:lnT w="9525" cap="flat" cmpd="sng" algn="ctr">
+                      <a:solidFill>
+                        <a:srgbClr val="BFBFBF"/>
+                      </a:solidFill>
+                      <a:prstDash val="solid"/>
+                      <a:round/>
+                      <a:headEnd type="none" w="med" len="med"/>
+                      <a:tailEnd type="none" w="med" len="med"/>
+                    </a:lnT>
+                    <a:lnB w="9525" cap="flat" cmpd="sng" algn="ctr">
+                      <a:solidFill>
+                        <a:srgbClr val="BFBFBF"/>
+                      </a:solidFill>
+                      <a:prstDash val="solid"/>
+                      <a:round/>
+                      <a:headEnd type="none" w="med" len="med"/>
+                      <a:tailEnd type="none" w="med" len="med"/>
+                    </a:lnB>
+                  </a:tcPr>
+                </a:tc>
+                <a:tc>
+                  <a:txBody>
+                    <a:bodyPr/>
+                    <a:lstStyle/>
+                    <a:p>
+                      <a:pPr marL="0" indent="0" algn="l">
+                        <a:buNone/>
+                      </a:pPr>
+                      <a:r>
+                        <a:rPr lang="en-US" sz="900" dirty="0">
+                          <a:solidFill>
+                            <a:srgbClr val="222222"/>
+                          </a:solidFill>
+                          <a:latin typeface="Meiryo" pitchFamily="34" charset="0"/>
+                          <a:ea typeface="Meiryo" pitchFamily="34" charset="-122"/>
+                          <a:cs typeface="Meiryo" pitchFamily="34" charset="-120"/>
+                        </a:rPr>
+                        <a:t>2</a:t>
                       </a:r>
                       <a:endParaRPr lang="en-US" sz="1050" dirty="0">
                         <a:latin typeface="Meiryo" charset="0"/>
@@ -3106,338 +4401,6 @@
                           <a:ea typeface="Meiryo" pitchFamily="34" charset="-122"/>
                           <a:cs typeface="Meiryo" pitchFamily="34" charset="-120"/>
                         </a:rPr>
-                        <a:t>児発＋放デイ併設。市街地立地</a:t>
-                      </a:r>
-                      <a:endParaRPr lang="en-US" sz="1050" dirty="0">
-                        <a:latin typeface="Meiryo" charset="0"/>
-                        <a:ea typeface="Meiryo" charset="0"/>
-                        <a:cs typeface="Meiryo" charset="0"/>
-                      </a:endParaRPr>
-                    </a:p>
-                  </a:txBody>
-                  <a:tcPr anchor="ctr" marT="18000" marB="18000" marL="64008" marR="45720">
-                    <a:lnL w="9525" cap="flat" cmpd="sng" algn="ctr">
-                      <a:solidFill>
-                        <a:srgbClr val="BFBFBF"/>
-                      </a:solidFill>
-                      <a:prstDash val="solid"/>
-                      <a:round/>
-                      <a:headEnd type="none" w="med" len="med"/>
-                      <a:tailEnd type="none" w="med" len="med"/>
-                    </a:lnL>
-                    <a:lnR w="9525" cap="flat" cmpd="sng" algn="ctr">
-                      <a:solidFill>
-                        <a:srgbClr val="BFBFBF"/>
-                      </a:solidFill>
-                      <a:prstDash val="solid"/>
-                      <a:round/>
-                      <a:headEnd type="none" w="med" len="med"/>
-                      <a:tailEnd type="none" w="med" len="med"/>
-                    </a:lnR>
-                    <a:lnT w="9525" cap="flat" cmpd="sng" algn="ctr">
-                      <a:solidFill>
-                        <a:srgbClr val="BFBFBF"/>
-                      </a:solidFill>
-                      <a:prstDash val="solid"/>
-                      <a:round/>
-                      <a:headEnd type="none" w="med" len="med"/>
-                      <a:tailEnd type="none" w="med" len="med"/>
-                    </a:lnT>
-                    <a:lnB w="9525" cap="flat" cmpd="sng" algn="ctr">
-                      <a:solidFill>
-                        <a:srgbClr val="BFBFBF"/>
-                      </a:solidFill>
-                      <a:prstDash val="solid"/>
-                      <a:round/>
-                      <a:headEnd type="none" w="med" len="med"/>
-                      <a:tailEnd type="none" w="med" len="med"/>
-                    </a:lnB>
-                  </a:tcPr>
-                </a:tc>
-                <a:tc>
-                  <a:txBody>
-                    <a:bodyPr/>
-                    <a:lstStyle/>
-                    <a:p>
-                      <a:pPr marL="0" indent="0" algn="l">
-                        <a:buNone/>
-                      </a:pPr>
-                      <a:r>
-                        <a:rPr lang="en-US" sz="900" dirty="0">
-                          <a:solidFill>
-                            <a:srgbClr val="222222"/>
-                          </a:solidFill>
-                          <a:latin typeface="Meiryo" pitchFamily="34" charset="0"/>
-                          <a:ea typeface="Meiryo" pitchFamily="34" charset="-122"/>
-                          <a:cs typeface="Meiryo" pitchFamily="34" charset="-120"/>
-                        </a:rPr>
-                        <a:t>東上宿</a:t>
-                      </a:r>
-                      <a:endParaRPr lang="en-US" sz="1050" dirty="0">
-                        <a:latin typeface="Meiryo" charset="0"/>
-                        <a:ea typeface="Meiryo" charset="0"/>
-                        <a:cs typeface="Meiryo" charset="0"/>
-                      </a:endParaRPr>
-                    </a:p>
-                  </a:txBody>
-                  <a:tcPr anchor="ctr" marT="18000" marB="18000" marL="64008" marR="45720">
-                    <a:lnL w="9525" cap="flat" cmpd="sng" algn="ctr">
-                      <a:solidFill>
-                        <a:srgbClr val="BFBFBF"/>
-                      </a:solidFill>
-                      <a:prstDash val="solid"/>
-                      <a:round/>
-                      <a:headEnd type="none" w="med" len="med"/>
-                      <a:tailEnd type="none" w="med" len="med"/>
-                    </a:lnL>
-                    <a:lnR w="9525" cap="flat" cmpd="sng" algn="ctr">
-                      <a:solidFill>
-                        <a:srgbClr val="BFBFBF"/>
-                      </a:solidFill>
-                      <a:prstDash val="solid"/>
-                      <a:round/>
-                      <a:headEnd type="none" w="med" len="med"/>
-                      <a:tailEnd type="none" w="med" len="med"/>
-                    </a:lnR>
-                    <a:lnT w="9525" cap="flat" cmpd="sng" algn="ctr">
-                      <a:solidFill>
-                        <a:srgbClr val="BFBFBF"/>
-                      </a:solidFill>
-                      <a:prstDash val="solid"/>
-                      <a:round/>
-                      <a:headEnd type="none" w="med" len="med"/>
-                      <a:tailEnd type="none" w="med" len="med"/>
-                    </a:lnT>
-                    <a:lnB w="9525" cap="flat" cmpd="sng" algn="ctr">
-                      <a:solidFill>
-                        <a:srgbClr val="BFBFBF"/>
-                      </a:solidFill>
-                      <a:prstDash val="solid"/>
-                      <a:round/>
-                      <a:headEnd type="none" w="med" len="med"/>
-                      <a:tailEnd type="none" w="med" len="med"/>
-                    </a:lnB>
-                  </a:tcPr>
-                </a:tc>
-                <a:extLst>
-                  <a:ext uri="{0D108BD9-81ED-4DB2-BD59-A6C34878D82A}">
-                    <a16:rowId xmlns:a16="http://schemas.microsoft.com/office/drawing/2014/main" val="10001"/>
-                  </a:ext>
-                </a:extLst>
-              </a:tr>
-              <a:tr h="493776">
-                <a:tc>
-                  <a:txBody>
-                    <a:bodyPr/>
-                    <a:lstStyle/>
-                    <a:p>
-                      <a:pPr marL="0" indent="0" algn="l">
-                        <a:buNone/>
-                      </a:pPr>
-                      <a:r>
-                        <a:rPr lang="en-US" sz="900" b="1" dirty="0">
-                          <a:solidFill>
-                            <a:srgbClr val="222222"/>
-                          </a:solidFill>
-                          <a:latin typeface="Meiryo" pitchFamily="34" charset="0"/>
-                          <a:ea typeface="Meiryo" pitchFamily="34" charset="-122"/>
-                          <a:cs typeface="Meiryo" pitchFamily="34" charset="-120"/>
-                        </a:rPr>
-                        <a:t>コンパッション保育所／鴇嶺の家</a:t>
-                      </a:r>
-                      <a:endParaRPr lang="en-US" sz="1050" dirty="0">
-                        <a:latin typeface="Meiryo" charset="0"/>
-                        <a:ea typeface="Meiryo" charset="0"/>
-                        <a:cs typeface="Meiryo" charset="0"/>
-                      </a:endParaRPr>
-                    </a:p>
-                  </a:txBody>
-                  <a:tcPr anchor="ctr" marT="18000" marB="18000" marL="64008" marR="45720">
-                    <a:lnL w="9525" cap="flat" cmpd="sng" algn="ctr">
-                      <a:solidFill>
-                        <a:srgbClr val="BFBFBF"/>
-                      </a:solidFill>
-                      <a:prstDash val="solid"/>
-                      <a:round/>
-                      <a:headEnd type="none" w="med" len="med"/>
-                      <a:tailEnd type="none" w="med" len="med"/>
-                    </a:lnL>
-                    <a:lnR w="9525" cap="flat" cmpd="sng" algn="ctr">
-                      <a:solidFill>
-                        <a:srgbClr val="BFBFBF"/>
-                      </a:solidFill>
-                      <a:prstDash val="solid"/>
-                      <a:round/>
-                      <a:headEnd type="none" w="med" len="med"/>
-                      <a:tailEnd type="none" w="med" len="med"/>
-                    </a:lnR>
-                    <a:lnT w="9525" cap="flat" cmpd="sng" algn="ctr">
-                      <a:solidFill>
-                        <a:srgbClr val="BFBFBF"/>
-                      </a:solidFill>
-                      <a:prstDash val="solid"/>
-                      <a:round/>
-                      <a:headEnd type="none" w="med" len="med"/>
-                      <a:tailEnd type="none" w="med" len="med"/>
-                    </a:lnT>
-                    <a:lnB w="9525" cap="flat" cmpd="sng" algn="ctr">
-                      <a:solidFill>
-                        <a:srgbClr val="BFBFBF"/>
-                      </a:solidFill>
-                      <a:prstDash val="solid"/>
-                      <a:round/>
-                      <a:headEnd type="none" w="med" len="med"/>
-                      <a:tailEnd type="none" w="med" len="med"/>
-                    </a:lnB>
-                  </a:tcPr>
-                </a:tc>
-                <a:tc>
-                  <a:txBody>
-                    <a:bodyPr/>
-                    <a:lstStyle/>
-                    <a:p>
-                      <a:pPr marL="0" indent="0" algn="l">
-                        <a:buNone/>
-                      </a:pPr>
-                      <a:r>
-                        <a:rPr lang="en-US" sz="900" dirty="0">
-                          <a:solidFill>
-                            <a:srgbClr val="222222"/>
-                          </a:solidFill>
-                          <a:latin typeface="Meiryo" pitchFamily="34" charset="0"/>
-                          <a:ea typeface="Meiryo" pitchFamily="34" charset="-122"/>
-                          <a:cs typeface="Meiryo" pitchFamily="34" charset="-120"/>
-                        </a:rPr>
-                        <a:t>2</a:t>
-                      </a:r>
-                      <a:endParaRPr lang="en-US" sz="1050" dirty="0">
-                        <a:latin typeface="Meiryo" charset="0"/>
-                        <a:ea typeface="Meiryo" charset="0"/>
-                        <a:cs typeface="Meiryo" charset="0"/>
-                      </a:endParaRPr>
-                    </a:p>
-                  </a:txBody>
-                  <a:tcPr anchor="ctr" marT="18000" marB="18000" marL="64008" marR="45720">
-                    <a:lnL w="9525" cap="flat" cmpd="sng" algn="ctr">
-                      <a:solidFill>
-                        <a:srgbClr val="BFBFBF"/>
-                      </a:solidFill>
-                      <a:prstDash val="solid"/>
-                      <a:round/>
-                      <a:headEnd type="none" w="med" len="med"/>
-                      <a:tailEnd type="none" w="med" len="med"/>
-                    </a:lnL>
-                    <a:lnR w="9525" cap="flat" cmpd="sng" algn="ctr">
-                      <a:solidFill>
-                        <a:srgbClr val="BFBFBF"/>
-                      </a:solidFill>
-                      <a:prstDash val="solid"/>
-                      <a:round/>
-                      <a:headEnd type="none" w="med" len="med"/>
-                      <a:tailEnd type="none" w="med" len="med"/>
-                    </a:lnR>
-                    <a:lnT w="9525" cap="flat" cmpd="sng" algn="ctr">
-                      <a:solidFill>
-                        <a:srgbClr val="BFBFBF"/>
-                      </a:solidFill>
-                      <a:prstDash val="solid"/>
-                      <a:round/>
-                      <a:headEnd type="none" w="med" len="med"/>
-                      <a:tailEnd type="none" w="med" len="med"/>
-                    </a:lnT>
-                    <a:lnB w="9525" cap="flat" cmpd="sng" algn="ctr">
-                      <a:solidFill>
-                        <a:srgbClr val="BFBFBF"/>
-                      </a:solidFill>
-                      <a:prstDash val="solid"/>
-                      <a:round/>
-                      <a:headEnd type="none" w="med" len="med"/>
-                      <a:tailEnd type="none" w="med" len="med"/>
-                    </a:lnB>
-                  </a:tcPr>
-                </a:tc>
-                <a:tc>
-                  <a:txBody>
-                    <a:bodyPr/>
-                    <a:lstStyle/>
-                    <a:p>
-                      <a:pPr marL="0" indent="0" algn="l">
-                        <a:buNone/>
-                      </a:pPr>
-                      <a:r>
-                        <a:rPr lang="en-US" sz="900" dirty="0">
-                          <a:solidFill>
-                            <a:srgbClr val="222222"/>
-                          </a:solidFill>
-                          <a:latin typeface="Meiryo" pitchFamily="34" charset="0"/>
-                          <a:ea typeface="Meiryo" pitchFamily="34" charset="-122"/>
-                          <a:cs typeface="Meiryo" pitchFamily="34" charset="-120"/>
-                        </a:rPr>
-                        <a:t>民間（詳細要確認）</a:t>
-                      </a:r>
-                      <a:endParaRPr lang="en-US" sz="1050" dirty="0">
-                        <a:latin typeface="Meiryo" charset="0"/>
-                        <a:ea typeface="Meiryo" charset="0"/>
-                        <a:cs typeface="Meiryo" charset="0"/>
-                      </a:endParaRPr>
-                    </a:p>
-                  </a:txBody>
-                  <a:tcPr anchor="ctr" marT="18000" marB="18000" marL="64008" marR="45720">
-                    <a:lnL w="9525" cap="flat" cmpd="sng" algn="ctr">
-                      <a:solidFill>
-                        <a:srgbClr val="BFBFBF"/>
-                      </a:solidFill>
-                      <a:prstDash val="solid"/>
-                      <a:round/>
-                      <a:headEnd type="none" w="med" len="med"/>
-                      <a:tailEnd type="none" w="med" len="med"/>
-                    </a:lnL>
-                    <a:lnR w="9525" cap="flat" cmpd="sng" algn="ctr">
-                      <a:solidFill>
-                        <a:srgbClr val="BFBFBF"/>
-                      </a:solidFill>
-                      <a:prstDash val="solid"/>
-                      <a:round/>
-                      <a:headEnd type="none" w="med" len="med"/>
-                      <a:tailEnd type="none" w="med" len="med"/>
-                    </a:lnR>
-                    <a:lnT w="9525" cap="flat" cmpd="sng" algn="ctr">
-                      <a:solidFill>
-                        <a:srgbClr val="BFBFBF"/>
-                      </a:solidFill>
-                      <a:prstDash val="solid"/>
-                      <a:round/>
-                      <a:headEnd type="none" w="med" len="med"/>
-                      <a:tailEnd type="none" w="med" len="med"/>
-                    </a:lnT>
-                    <a:lnB w="9525" cap="flat" cmpd="sng" algn="ctr">
-                      <a:solidFill>
-                        <a:srgbClr val="BFBFBF"/>
-                      </a:solidFill>
-                      <a:prstDash val="solid"/>
-                      <a:round/>
-                      <a:headEnd type="none" w="med" len="med"/>
-                      <a:tailEnd type="none" w="med" len="med"/>
-                    </a:lnB>
-                  </a:tcPr>
-                </a:tc>
-                <a:tc>
-                  <a:txBody>
-                    <a:bodyPr/>
-                    <a:lstStyle/>
-                    <a:p>
-                      <a:pPr marL="0" indent="0" algn="l">
-                        <a:buNone/>
-                      </a:pPr>
-                      <a:r>
-                        <a:rPr lang="en-US" sz="900" dirty="0">
-                          <a:solidFill>
-                            <a:srgbClr val="222222"/>
-                          </a:solidFill>
-                          <a:latin typeface="Meiryo" pitchFamily="34" charset="0"/>
-                          <a:ea typeface="Meiryo" pitchFamily="34" charset="-122"/>
-                          <a:cs typeface="Meiryo" pitchFamily="34" charset="-120"/>
-                        </a:rPr>
                         <a:t>保育所併設型（コンパッション）／児発＋放デイ併設（鴇嶺の家）</a:t>
                       </a:r>
                       <a:endParaRPr lang="en-US" sz="1050" dirty="0">
@@ -3569,8 +4532,8 @@
         </p:nvSpPr>
         <p:spPr>
           <a:xfrm>
-            <a:off x="502920" y="4718304"/>
-            <a:ext cx="11201400" cy="1737360"/>
+            <a:off x="502920" y="4507992"/>
+            <a:ext cx="11201400" cy="1929384"/>
           </a:xfrm>
           <a:prstGeom prst="rect">
             <a:avLst/>
@@ -3594,7 +4557,7 @@
         </p:nvSpPr>
         <p:spPr>
           <a:xfrm>
-            <a:off x="713232" y="4818888"/>
+            <a:off x="713232" y="4599432"/>
             <a:ext cx="10789920" cy="320040"/>
           </a:xfrm>
           <a:prstGeom prst="rect">
@@ -3633,8 +4596,8 @@
         </p:nvSpPr>
         <p:spPr>
           <a:xfrm>
-            <a:off x="713232" y="5148072"/>
-            <a:ext cx="10789920" cy="1261872"/>
+            <a:off x="713232" y="4928616"/>
+            <a:ext cx="10789920" cy="1463040"/>
           </a:xfrm>
           <a:prstGeom prst="rect">
             <a:avLst/>
@@ -3654,7 +4617,7 @@
               <a:buChar char="•"/>
             </a:pPr>
             <a:r>
-              <a:rPr lang="en-US" sz="900" dirty="0">
+              <a:rPr lang="en-US" sz="850" dirty="0">
                 <a:solidFill>
                   <a:srgbClr val="222222"/>
                 </a:solidFill>
@@ -3662,7 +4625,7 @@
                 <a:ea typeface="メイリオ" panose="020B0604030504040204" pitchFamily="50" charset="-128"/>
                 <a:cs typeface="Meiryo" pitchFamily="34" charset="-120"/>
               </a:rPr>
-              <a:t>東金市の児童発達支援は【公立1＋民間6事業者／計11拠点】。うち5拠点をNPO法人基本塾、2拠点を株式会社ベストグロウが占め、実質2グループで市内拠点の約6割を押さえる寡占構造にある。</a:t>
+              <a:t>東金市の児童発達支援は【公立1＋民間5運営主体／計12拠点】。うち基本塾5・ベストグロウ2・子ども支援センター2と、実質3グループで市内拠点の四分の三を押さえる寡占構造にある。</a:t>
             </a:r>
             <a:endParaRPr lang="en-US" sz="1000" dirty="0">
               <a:latin typeface="メイリオ" panose="020B0604030504040204" pitchFamily="50" charset="-128"/>
@@ -3678,7 +4641,7 @@
               <a:buChar char="•"/>
             </a:pPr>
             <a:r>
-              <a:rPr lang="en-US" sz="900" dirty="0">
+              <a:rPr lang="en-US" sz="850" dirty="0">
                 <a:solidFill>
                   <a:srgbClr val="222222"/>
                 </a:solidFill>
@@ -3702,7 +4665,7 @@
               <a:buChar char="•"/>
             </a:pPr>
             <a:r>
-              <a:rPr lang="en-US" sz="900" dirty="0">
+              <a:rPr lang="en-US" sz="850" dirty="0">
                 <a:solidFill>
                   <a:srgbClr val="222222"/>
                 </a:solidFill>
@@ -3710,7 +4673,31 @@
                 <a:ea typeface="メイリオ" panose="020B0604030504040204" pitchFamily="50" charset="-128"/>
                 <a:cs typeface="Meiryo" pitchFamily="34" charset="-120"/>
               </a:rPr>
-              <a:t>立地は八坂台・日吉台のニュータウン側と東金駅周辺に集中。市南西部（福俵・求名・丘山地区）は空白地帯であり、送迎圏の設計次第で新規参入の余地がある。一方、公開情報が乏しい事業所（②⑥⑦）が3件あり、稼働率・空き枠は市社会福祉課および相談支援事業所へのヒアリングで補完が必要。</a:t>
+              <a:t>子ども支援センターは まあちる（主に2〜12歳）と ぽけっと（主に6〜18歳）で年齢帯を分ける2拠点運営。市内で未就学の受け皿を明確に担うのは 公立①・まあちる②・こどもプラス④⑤・基本塾⑥ に限られる。</a:t>
+            </a:r>
+            <a:endParaRPr lang="en-US" sz="1000" dirty="0">
+              <a:latin typeface="メイリオ" panose="020B0604030504040204" pitchFamily="50" charset="-128"/>
+              <a:ea typeface="メイリオ" panose="020B0604030504040204" pitchFamily="50" charset="-128"/>
+            </a:endParaRPr>
+          </a:p>
+          <a:p>
+            <a:pPr marL="342900" indent="-342900">
+              <a:spcAft>
+                <a:spcPts val="500"/>
+              </a:spcAft>
+              <a:buSzPct val="100000"/>
+              <a:buChar char="•"/>
+            </a:pPr>
+            <a:r>
+              <a:rPr lang="en-US" sz="850" dirty="0">
+                <a:solidFill>
+                  <a:srgbClr val="222222"/>
+                </a:solidFill>
+                <a:latin typeface="メイリオ" panose="020B0604030504040204" pitchFamily="50" charset="-128"/>
+                <a:ea typeface="メイリオ" panose="020B0604030504040204" pitchFamily="50" charset="-128"/>
+                <a:cs typeface="Meiryo" pitchFamily="34" charset="-120"/>
+              </a:rPr>
+              <a:t>立地は八坂台・日吉台のニュータウン側と東金駅周辺に集中。市南西部（福俵・求名・丘山地区）は空白地帯で、送迎圏の設計次第で新規参入の余地がある。なお公開情報が乏しい⑦⑧の稼働率・空き枠は市社会福祉課・相談支援事業所へのヒアリングで補完が必要。</a:t>
             </a:r>
             <a:endParaRPr lang="en-US" sz="1000" dirty="0">
               <a:latin typeface="メイリオ" panose="020B0604030504040204" pitchFamily="50" charset="-128"/>
@@ -3825,7 +4812,7 @@
                 <a:ea typeface="Meiryo" pitchFamily="34" charset="-122"/>
                 <a:cs typeface="Meiryo" pitchFamily="34" charset="-120"/>
               </a:rPr>
-              <a:t>■ 東金市内の児童発達支援事業所　全7事業者・11拠点</a:t>
+              <a:t>■ 東金市内の児童発達支援事業所　全12拠点（運営主体6）</a:t>
             </a:r>
             <a:endParaRPr lang="en-US" sz="2100" dirty="0"/>
           </a:p>
@@ -3936,7 +4923,7 @@
                   </a:extLst>
                 </a:gridCol>
               </a:tblGrid>
-              <a:tr h="331469">
+              <a:tr h="305972">
                 <a:tc>
                   <a:txBody>
                     <a:bodyPr/>
@@ -4351,7 +5338,7 @@
                   </a:ext>
                 </a:extLst>
               </a:tr>
-              <a:tr h="331469">
+              <a:tr h="305972">
                 <a:tc>
                   <a:txBody>
                     <a:bodyPr/>
@@ -4744,7 +5731,7 @@
                   </a:ext>
                 </a:extLst>
               </a:tr>
-              <a:tr h="331469">
+              <a:tr h="305972">
                 <a:tc>
                   <a:txBody>
                     <a:bodyPr/>
@@ -4827,7 +5814,1316 @@
                           <a:ea typeface="Meiryo" pitchFamily="34" charset="-122"/>
                           <a:cs typeface="Meiryo" pitchFamily="34" charset="-120"/>
                         </a:rPr>
-                        <a:t>子ども支援センターぽけっと</a:t>
+                        <a:t>子ども支援センター まあちる</a:t>
+                      </a:r>
+                      <a:endParaRPr lang="en-US" sz="1100" dirty="0">
+                        <a:latin typeface="Meiryo" charset="0"/>
+                        <a:ea typeface="Meiryo" charset="0"/>
+                        <a:cs typeface="Meiryo" charset="0"/>
+                      </a:endParaRPr>
+                    </a:p>
+                  </a:txBody>
+                  <a:tcPr anchor="ctr" marT="18000" marB="18000" marL="64008" marR="45720">
+                    <a:lnL w="9525" cap="flat" cmpd="sng" algn="ctr">
+                      <a:solidFill>
+                        <a:srgbClr val="BFBFBF"/>
+                      </a:solidFill>
+                      <a:prstDash val="solid"/>
+                      <a:round/>
+                      <a:headEnd type="none" w="med" len="med"/>
+                      <a:tailEnd type="none" w="med" len="med"/>
+                    </a:lnL>
+                    <a:lnR w="9525" cap="flat" cmpd="sng" algn="ctr">
+                      <a:solidFill>
+                        <a:srgbClr val="BFBFBF"/>
+                      </a:solidFill>
+                      <a:prstDash val="solid"/>
+                      <a:round/>
+                      <a:headEnd type="none" w="med" len="med"/>
+                      <a:tailEnd type="none" w="med" len="med"/>
+                    </a:lnR>
+                    <a:lnT w="9525" cap="flat" cmpd="sng" algn="ctr">
+                      <a:solidFill>
+                        <a:srgbClr val="BFBFBF"/>
+                      </a:solidFill>
+                      <a:prstDash val="solid"/>
+                      <a:round/>
+                      <a:headEnd type="none" w="med" len="med"/>
+                      <a:tailEnd type="none" w="med" len="med"/>
+                    </a:lnT>
+                    <a:lnB w="9525" cap="flat" cmpd="sng" algn="ctr">
+                      <a:solidFill>
+                        <a:srgbClr val="BFBFBF"/>
+                      </a:solidFill>
+                      <a:prstDash val="solid"/>
+                      <a:round/>
+                      <a:headEnd type="none" w="med" len="med"/>
+                      <a:tailEnd type="none" w="med" len="med"/>
+                    </a:lnB>
+                  </a:tcPr>
+                </a:tc>
+                <a:tc>
+                  <a:txBody>
+                    <a:bodyPr/>
+                    <a:lstStyle/>
+                    <a:p>
+                      <a:pPr marL="0" indent="0" algn="l">
+                        <a:buNone/>
+                      </a:pPr>
+                      <a:r>
+                        <a:rPr lang="en-US" sz="900" dirty="0">
+                          <a:solidFill>
+                            <a:srgbClr val="222222"/>
+                          </a:solidFill>
+                          <a:latin typeface="Meiryo" pitchFamily="34" charset="0"/>
+                          <a:ea typeface="Meiryo" pitchFamily="34" charset="-122"/>
+                          <a:cs typeface="Meiryo" pitchFamily="34" charset="-120"/>
+                        </a:rPr>
+                        <a:t>子ども支援センター（要確認）</a:t>
+                      </a:r>
+                      <a:endParaRPr lang="en-US" sz="1100" dirty="0">
+                        <a:latin typeface="Meiryo" charset="0"/>
+                        <a:ea typeface="Meiryo" charset="0"/>
+                        <a:cs typeface="Meiryo" charset="0"/>
+                      </a:endParaRPr>
+                    </a:p>
+                  </a:txBody>
+                  <a:tcPr anchor="ctr" marT="18000" marB="18000" marL="64008" marR="45720">
+                    <a:lnL w="9525" cap="flat" cmpd="sng" algn="ctr">
+                      <a:solidFill>
+                        <a:srgbClr val="BFBFBF"/>
+                      </a:solidFill>
+                      <a:prstDash val="solid"/>
+                      <a:round/>
+                      <a:headEnd type="none" w="med" len="med"/>
+                      <a:tailEnd type="none" w="med" len="med"/>
+                    </a:lnL>
+                    <a:lnR w="9525" cap="flat" cmpd="sng" algn="ctr">
+                      <a:solidFill>
+                        <a:srgbClr val="BFBFBF"/>
+                      </a:solidFill>
+                      <a:prstDash val="solid"/>
+                      <a:round/>
+                      <a:headEnd type="none" w="med" len="med"/>
+                      <a:tailEnd type="none" w="med" len="med"/>
+                    </a:lnR>
+                    <a:lnT w="9525" cap="flat" cmpd="sng" algn="ctr">
+                      <a:solidFill>
+                        <a:srgbClr val="BFBFBF"/>
+                      </a:solidFill>
+                      <a:prstDash val="solid"/>
+                      <a:round/>
+                      <a:headEnd type="none" w="med" len="med"/>
+                      <a:tailEnd type="none" w="med" len="med"/>
+                    </a:lnT>
+                    <a:lnB w="9525" cap="flat" cmpd="sng" algn="ctr">
+                      <a:solidFill>
+                        <a:srgbClr val="BFBFBF"/>
+                      </a:solidFill>
+                      <a:prstDash val="solid"/>
+                      <a:round/>
+                      <a:headEnd type="none" w="med" len="med"/>
+                      <a:tailEnd type="none" w="med" len="med"/>
+                    </a:lnB>
+                  </a:tcPr>
+                </a:tc>
+                <a:tc>
+                  <a:txBody>
+                    <a:bodyPr/>
+                    <a:lstStyle/>
+                    <a:p>
+                      <a:pPr marL="0" indent="0" algn="l">
+                        <a:buNone/>
+                      </a:pPr>
+                      <a:r>
+                        <a:rPr lang="en-US" sz="900" dirty="0">
+                          <a:solidFill>
+                            <a:srgbClr val="222222"/>
+                          </a:solidFill>
+                          <a:latin typeface="Meiryo" pitchFamily="34" charset="0"/>
+                          <a:ea typeface="Meiryo" pitchFamily="34" charset="-122"/>
+                          <a:cs typeface="Meiryo" pitchFamily="34" charset="-120"/>
+                        </a:rPr>
+                        <a:t>東岩崎2-10 えびすビル103号室</a:t>
+                      </a:r>
+                      <a:endParaRPr lang="en-US" sz="1100" dirty="0">
+                        <a:latin typeface="Meiryo" charset="0"/>
+                        <a:ea typeface="Meiryo" charset="0"/>
+                        <a:cs typeface="Meiryo" charset="0"/>
+                      </a:endParaRPr>
+                    </a:p>
+                  </a:txBody>
+                  <a:tcPr anchor="ctr" marT="18000" marB="18000" marL="64008" marR="45720">
+                    <a:lnL w="9525" cap="flat" cmpd="sng" algn="ctr">
+                      <a:solidFill>
+                        <a:srgbClr val="BFBFBF"/>
+                      </a:solidFill>
+                      <a:prstDash val="solid"/>
+                      <a:round/>
+                      <a:headEnd type="none" w="med" len="med"/>
+                      <a:tailEnd type="none" w="med" len="med"/>
+                    </a:lnL>
+                    <a:lnR w="9525" cap="flat" cmpd="sng" algn="ctr">
+                      <a:solidFill>
+                        <a:srgbClr val="BFBFBF"/>
+                      </a:solidFill>
+                      <a:prstDash val="solid"/>
+                      <a:round/>
+                      <a:headEnd type="none" w="med" len="med"/>
+                      <a:tailEnd type="none" w="med" len="med"/>
+                    </a:lnR>
+                    <a:lnT w="9525" cap="flat" cmpd="sng" algn="ctr">
+                      <a:solidFill>
+                        <a:srgbClr val="BFBFBF"/>
+                      </a:solidFill>
+                      <a:prstDash val="solid"/>
+                      <a:round/>
+                      <a:headEnd type="none" w="med" len="med"/>
+                      <a:tailEnd type="none" w="med" len="med"/>
+                    </a:lnT>
+                    <a:lnB w="9525" cap="flat" cmpd="sng" algn="ctr">
+                      <a:solidFill>
+                        <a:srgbClr val="BFBFBF"/>
+                      </a:solidFill>
+                      <a:prstDash val="solid"/>
+                      <a:round/>
+                      <a:headEnd type="none" w="med" len="med"/>
+                      <a:tailEnd type="none" w="med" len="med"/>
+                    </a:lnB>
+                  </a:tcPr>
+                </a:tc>
+                <a:tc>
+                  <a:txBody>
+                    <a:bodyPr/>
+                    <a:lstStyle/>
+                    <a:p>
+                      <a:pPr marL="0" indent="0" algn="l">
+                        <a:buNone/>
+                      </a:pPr>
+                      <a:r>
+                        <a:rPr lang="en-US" sz="900" dirty="0">
+                          <a:solidFill>
+                            <a:srgbClr val="222222"/>
+                          </a:solidFill>
+                          <a:latin typeface="Meiryo" pitchFamily="34" charset="0"/>
+                          <a:ea typeface="Meiryo" pitchFamily="34" charset="-122"/>
+                          <a:cs typeface="Meiryo" pitchFamily="34" charset="-120"/>
+                        </a:rPr>
+                        <a:t>0475-71-3657</a:t>
+                      </a:r>
+                      <a:endParaRPr lang="en-US" sz="1100" dirty="0">
+                        <a:latin typeface="Meiryo" charset="0"/>
+                        <a:ea typeface="Meiryo" charset="0"/>
+                        <a:cs typeface="Meiryo" charset="0"/>
+                      </a:endParaRPr>
+                    </a:p>
+                  </a:txBody>
+                  <a:tcPr anchor="ctr" marT="18000" marB="18000" marL="64008" marR="45720">
+                    <a:lnL w="9525" cap="flat" cmpd="sng" algn="ctr">
+                      <a:solidFill>
+                        <a:srgbClr val="BFBFBF"/>
+                      </a:solidFill>
+                      <a:prstDash val="solid"/>
+                      <a:round/>
+                      <a:headEnd type="none" w="med" len="med"/>
+                      <a:tailEnd type="none" w="med" len="med"/>
+                    </a:lnL>
+                    <a:lnR w="9525" cap="flat" cmpd="sng" algn="ctr">
+                      <a:solidFill>
+                        <a:srgbClr val="BFBFBF"/>
+                      </a:solidFill>
+                      <a:prstDash val="solid"/>
+                      <a:round/>
+                      <a:headEnd type="none" w="med" len="med"/>
+                      <a:tailEnd type="none" w="med" len="med"/>
+                    </a:lnR>
+                    <a:lnT w="9525" cap="flat" cmpd="sng" algn="ctr">
+                      <a:solidFill>
+                        <a:srgbClr val="BFBFBF"/>
+                      </a:solidFill>
+                      <a:prstDash val="solid"/>
+                      <a:round/>
+                      <a:headEnd type="none" w="med" len="med"/>
+                      <a:tailEnd type="none" w="med" len="med"/>
+                    </a:lnT>
+                    <a:lnB w="9525" cap="flat" cmpd="sng" algn="ctr">
+                      <a:solidFill>
+                        <a:srgbClr val="BFBFBF"/>
+                      </a:solidFill>
+                      <a:prstDash val="solid"/>
+                      <a:round/>
+                      <a:headEnd type="none" w="med" len="med"/>
+                      <a:tailEnd type="none" w="med" len="med"/>
+                    </a:lnB>
+                  </a:tcPr>
+                </a:tc>
+                <a:tc>
+                  <a:txBody>
+                    <a:bodyPr/>
+                    <a:lstStyle/>
+                    <a:p>
+                      <a:pPr marL="0" indent="0" algn="l">
+                        <a:buNone/>
+                      </a:pPr>
+                      <a:r>
+                        <a:rPr lang="en-US" sz="900" dirty="0" u="sng">
+                          <a:solidFill>
+                            <a:srgbClr val="1F5FA8"/>
+                          </a:solidFill>
+                          <a:latin typeface="Meiryo" charset="0"/>
+                          <a:ea typeface="Meiryo" charset="0"/>
+                          <a:cs typeface="Meiryo" charset="0"/>
+                          <a:hlinkClick r:id="rId4"/>
+                        </a:rPr>
+                        <a:t>chibasha-kodomo2.com/maachiru</a:t>
+                      </a:r>
+                    </a:p>
+                  </a:txBody>
+                  <a:tcPr anchor="ctr" marT="18000" marB="18000" marL="64008" marR="45720">
+                    <a:lnL w="9525" cap="flat" cmpd="sng" algn="ctr">
+                      <a:solidFill>
+                        <a:srgbClr val="BFBFBF"/>
+                      </a:solidFill>
+                      <a:prstDash val="solid"/>
+                      <a:round/>
+                      <a:headEnd type="none" w="med" len="med"/>
+                      <a:tailEnd type="none" w="med" len="med"/>
+                    </a:lnL>
+                    <a:lnR w="9525" cap="flat" cmpd="sng" algn="ctr">
+                      <a:solidFill>
+                        <a:srgbClr val="BFBFBF"/>
+                      </a:solidFill>
+                      <a:prstDash val="solid"/>
+                      <a:round/>
+                      <a:headEnd type="none" w="med" len="med"/>
+                      <a:tailEnd type="none" w="med" len="med"/>
+                    </a:lnR>
+                    <a:lnT w="9525" cap="flat" cmpd="sng" algn="ctr">
+                      <a:solidFill>
+                        <a:srgbClr val="BFBFBF"/>
+                      </a:solidFill>
+                      <a:prstDash val="solid"/>
+                      <a:round/>
+                      <a:headEnd type="none" w="med" len="med"/>
+                      <a:tailEnd type="none" w="med" len="med"/>
+                    </a:lnT>
+                    <a:lnB w="9525" cap="flat" cmpd="sng" algn="ctr">
+                      <a:solidFill>
+                        <a:srgbClr val="BFBFBF"/>
+                      </a:solidFill>
+                      <a:prstDash val="solid"/>
+                      <a:round/>
+                      <a:headEnd type="none" w="med" len="med"/>
+                      <a:tailEnd type="none" w="med" len="med"/>
+                    </a:lnB>
+                  </a:tcPr>
+                </a:tc>
+                <a:extLst>
+                  <a:ext uri="{0D108BD9-81ED-4DB2-BD59-A6C34878D82A}">
+                    <a16:rowId xmlns:a16="http://schemas.microsoft.com/office/drawing/2014/main" val="10001"/>
+                  </a:ext>
+                </a:extLst>
+              </a:tr>
+              <a:tr h="305972">
+                <a:tc>
+                  <a:txBody>
+                    <a:bodyPr/>
+                    <a:lstStyle/>
+                    <a:p>
+                      <a:pPr marL="0" indent="0" algn="ctr">
+                        <a:buNone/>
+                      </a:pPr>
+                      <a:r>
+                        <a:rPr lang="en-US" sz="900" b="1" dirty="0">
+                          <a:solidFill>
+                            <a:srgbClr val="222222"/>
+                          </a:solidFill>
+                          <a:latin typeface="Meiryo" pitchFamily="34" charset="0"/>
+                          <a:ea typeface="Meiryo" pitchFamily="34" charset="-122"/>
+                          <a:cs typeface="Meiryo" pitchFamily="34" charset="-120"/>
+                        </a:rPr>
+                        <a:t>③</a:t>
+                      </a:r>
+                      <a:endParaRPr lang="en-US" sz="1100" dirty="0">
+                        <a:latin typeface="Meiryo" charset="0"/>
+                        <a:ea typeface="Meiryo" charset="0"/>
+                        <a:cs typeface="Meiryo" charset="0"/>
+                      </a:endParaRPr>
+                    </a:p>
+                  </a:txBody>
+                  <a:tcPr anchor="ctr" marT="18000" marB="18000" marL="64008" marR="45720">
+                    <a:lnL w="9525" cap="flat" cmpd="sng" algn="ctr">
+                      <a:solidFill>
+                        <a:srgbClr val="BFBFBF"/>
+                      </a:solidFill>
+                      <a:prstDash val="solid"/>
+                      <a:round/>
+                      <a:headEnd type="none" w="med" len="med"/>
+                      <a:tailEnd type="none" w="med" len="med"/>
+                    </a:lnL>
+                    <a:lnR w="9525" cap="flat" cmpd="sng" algn="ctr">
+                      <a:solidFill>
+                        <a:srgbClr val="BFBFBF"/>
+                      </a:solidFill>
+                      <a:prstDash val="solid"/>
+                      <a:round/>
+                      <a:headEnd type="none" w="med" len="med"/>
+                      <a:tailEnd type="none" w="med" len="med"/>
+                    </a:lnR>
+                    <a:lnT w="9525" cap="flat" cmpd="sng" algn="ctr">
+                      <a:solidFill>
+                        <a:srgbClr val="BFBFBF"/>
+                      </a:solidFill>
+                      <a:prstDash val="solid"/>
+                      <a:round/>
+                      <a:headEnd type="none" w="med" len="med"/>
+                      <a:tailEnd type="none" w="med" len="med"/>
+                    </a:lnT>
+                    <a:lnB w="9525" cap="flat" cmpd="sng" algn="ctr">
+                      <a:solidFill>
+                        <a:srgbClr val="BFBFBF"/>
+                      </a:solidFill>
+                      <a:prstDash val="solid"/>
+                      <a:round/>
+                      <a:headEnd type="none" w="med" len="med"/>
+                      <a:tailEnd type="none" w="med" len="med"/>
+                    </a:lnB>
+                  </a:tcPr>
+                </a:tc>
+                <a:tc>
+                  <a:txBody>
+                    <a:bodyPr/>
+                    <a:lstStyle/>
+                    <a:p>
+                      <a:pPr marL="0" indent="0" algn="l">
+                        <a:buNone/>
+                      </a:pPr>
+                      <a:r>
+                        <a:rPr lang="en-US" sz="900" b="1" dirty="0">
+                          <a:solidFill>
+                            <a:srgbClr val="222222"/>
+                          </a:solidFill>
+                          <a:latin typeface="Meiryo" pitchFamily="34" charset="0"/>
+                          <a:ea typeface="Meiryo" pitchFamily="34" charset="-122"/>
+                          <a:cs typeface="Meiryo" pitchFamily="34" charset="-120"/>
+                        </a:rPr>
+                        <a:t>子ども支援センター ぽけっと</a:t>
+                      </a:r>
+                      <a:endParaRPr lang="en-US" sz="1100" dirty="0">
+                        <a:latin typeface="Meiryo" charset="0"/>
+                        <a:ea typeface="Meiryo" charset="0"/>
+                        <a:cs typeface="Meiryo" charset="0"/>
+                      </a:endParaRPr>
+                    </a:p>
+                  </a:txBody>
+                  <a:tcPr anchor="ctr" marT="18000" marB="18000" marL="64008" marR="45720">
+                    <a:lnL w="9525" cap="flat" cmpd="sng" algn="ctr">
+                      <a:solidFill>
+                        <a:srgbClr val="BFBFBF"/>
+                      </a:solidFill>
+                      <a:prstDash val="solid"/>
+                      <a:round/>
+                      <a:headEnd type="none" w="med" len="med"/>
+                      <a:tailEnd type="none" w="med" len="med"/>
+                    </a:lnL>
+                    <a:lnR w="9525" cap="flat" cmpd="sng" algn="ctr">
+                      <a:solidFill>
+                        <a:srgbClr val="BFBFBF"/>
+                      </a:solidFill>
+                      <a:prstDash val="solid"/>
+                      <a:round/>
+                      <a:headEnd type="none" w="med" len="med"/>
+                      <a:tailEnd type="none" w="med" len="med"/>
+                    </a:lnR>
+                    <a:lnT w="9525" cap="flat" cmpd="sng" algn="ctr">
+                      <a:solidFill>
+                        <a:srgbClr val="BFBFBF"/>
+                      </a:solidFill>
+                      <a:prstDash val="solid"/>
+                      <a:round/>
+                      <a:headEnd type="none" w="med" len="med"/>
+                      <a:tailEnd type="none" w="med" len="med"/>
+                    </a:lnT>
+                    <a:lnB w="9525" cap="flat" cmpd="sng" algn="ctr">
+                      <a:solidFill>
+                        <a:srgbClr val="BFBFBF"/>
+                      </a:solidFill>
+                      <a:prstDash val="solid"/>
+                      <a:round/>
+                      <a:headEnd type="none" w="med" len="med"/>
+                      <a:tailEnd type="none" w="med" len="med"/>
+                    </a:lnB>
+                  </a:tcPr>
+                </a:tc>
+                <a:tc>
+                  <a:txBody>
+                    <a:bodyPr/>
+                    <a:lstStyle/>
+                    <a:p>
+                      <a:pPr marL="0" indent="0" algn="l">
+                        <a:buNone/>
+                      </a:pPr>
+                      <a:r>
+                        <a:rPr lang="en-US" sz="900" dirty="0">
+                          <a:solidFill>
+                            <a:srgbClr val="222222"/>
+                          </a:solidFill>
+                          <a:latin typeface="Meiryo" pitchFamily="34" charset="0"/>
+                          <a:ea typeface="Meiryo" pitchFamily="34" charset="-122"/>
+                          <a:cs typeface="Meiryo" pitchFamily="34" charset="-120"/>
+                        </a:rPr>
+                        <a:t>子ども支援センター（要確認）</a:t>
+                      </a:r>
+                      <a:endParaRPr lang="en-US" sz="1100" dirty="0">
+                        <a:latin typeface="Meiryo" charset="0"/>
+                        <a:ea typeface="Meiryo" charset="0"/>
+                        <a:cs typeface="Meiryo" charset="0"/>
+                      </a:endParaRPr>
+                    </a:p>
+                  </a:txBody>
+                  <a:tcPr anchor="ctr" marT="18000" marB="18000" marL="64008" marR="45720">
+                    <a:lnL w="9525" cap="flat" cmpd="sng" algn="ctr">
+                      <a:solidFill>
+                        <a:srgbClr val="BFBFBF"/>
+                      </a:solidFill>
+                      <a:prstDash val="solid"/>
+                      <a:round/>
+                      <a:headEnd type="none" w="med" len="med"/>
+                      <a:tailEnd type="none" w="med" len="med"/>
+                    </a:lnL>
+                    <a:lnR w="9525" cap="flat" cmpd="sng" algn="ctr">
+                      <a:solidFill>
+                        <a:srgbClr val="BFBFBF"/>
+                      </a:solidFill>
+                      <a:prstDash val="solid"/>
+                      <a:round/>
+                      <a:headEnd type="none" w="med" len="med"/>
+                      <a:tailEnd type="none" w="med" len="med"/>
+                    </a:lnR>
+                    <a:lnT w="9525" cap="flat" cmpd="sng" algn="ctr">
+                      <a:solidFill>
+                        <a:srgbClr val="BFBFBF"/>
+                      </a:solidFill>
+                      <a:prstDash val="solid"/>
+                      <a:round/>
+                      <a:headEnd type="none" w="med" len="med"/>
+                      <a:tailEnd type="none" w="med" len="med"/>
+                    </a:lnT>
+                    <a:lnB w="9525" cap="flat" cmpd="sng" algn="ctr">
+                      <a:solidFill>
+                        <a:srgbClr val="BFBFBF"/>
+                      </a:solidFill>
+                      <a:prstDash val="solid"/>
+                      <a:round/>
+                      <a:headEnd type="none" w="med" len="med"/>
+                      <a:tailEnd type="none" w="med" len="med"/>
+                    </a:lnB>
+                  </a:tcPr>
+                </a:tc>
+                <a:tc>
+                  <a:txBody>
+                    <a:bodyPr/>
+                    <a:lstStyle/>
+                    <a:p>
+                      <a:pPr marL="0" indent="0" algn="l">
+                        <a:buNone/>
+                      </a:pPr>
+                      <a:r>
+                        <a:rPr lang="en-US" sz="900" dirty="0">
+                          <a:solidFill>
+                            <a:srgbClr val="222222"/>
+                          </a:solidFill>
+                          <a:latin typeface="Meiryo" pitchFamily="34" charset="0"/>
+                          <a:ea typeface="Meiryo" pitchFamily="34" charset="-122"/>
+                          <a:cs typeface="Meiryo" pitchFamily="34" charset="-120"/>
+                        </a:rPr>
+                        <a:t>東上宿6番地2</a:t>
+                      </a:r>
+                      <a:endParaRPr lang="en-US" sz="1100" dirty="0">
+                        <a:latin typeface="Meiryo" charset="0"/>
+                        <a:ea typeface="Meiryo" charset="0"/>
+                        <a:cs typeface="Meiryo" charset="0"/>
+                      </a:endParaRPr>
+                    </a:p>
+                  </a:txBody>
+                  <a:tcPr anchor="ctr" marT="18000" marB="18000" marL="64008" marR="45720">
+                    <a:lnL w="9525" cap="flat" cmpd="sng" algn="ctr">
+                      <a:solidFill>
+                        <a:srgbClr val="BFBFBF"/>
+                      </a:solidFill>
+                      <a:prstDash val="solid"/>
+                      <a:round/>
+                      <a:headEnd type="none" w="med" len="med"/>
+                      <a:tailEnd type="none" w="med" len="med"/>
+                    </a:lnL>
+                    <a:lnR w="9525" cap="flat" cmpd="sng" algn="ctr">
+                      <a:solidFill>
+                        <a:srgbClr val="BFBFBF"/>
+                      </a:solidFill>
+                      <a:prstDash val="solid"/>
+                      <a:round/>
+                      <a:headEnd type="none" w="med" len="med"/>
+                      <a:tailEnd type="none" w="med" len="med"/>
+                    </a:lnR>
+                    <a:lnT w="9525" cap="flat" cmpd="sng" algn="ctr">
+                      <a:solidFill>
+                        <a:srgbClr val="BFBFBF"/>
+                      </a:solidFill>
+                      <a:prstDash val="solid"/>
+                      <a:round/>
+                      <a:headEnd type="none" w="med" len="med"/>
+                      <a:tailEnd type="none" w="med" len="med"/>
+                    </a:lnT>
+                    <a:lnB w="9525" cap="flat" cmpd="sng" algn="ctr">
+                      <a:solidFill>
+                        <a:srgbClr val="BFBFBF"/>
+                      </a:solidFill>
+                      <a:prstDash val="solid"/>
+                      <a:round/>
+                      <a:headEnd type="none" w="med" len="med"/>
+                      <a:tailEnd type="none" w="med" len="med"/>
+                    </a:lnB>
+                  </a:tcPr>
+                </a:tc>
+                <a:tc>
+                  <a:txBody>
+                    <a:bodyPr/>
+                    <a:lstStyle/>
+                    <a:p>
+                      <a:pPr marL="0" indent="0" algn="l">
+                        <a:buNone/>
+                      </a:pPr>
+                      <a:r>
+                        <a:rPr lang="en-US" sz="900" dirty="0">
+                          <a:solidFill>
+                            <a:srgbClr val="222222"/>
+                          </a:solidFill>
+                          <a:latin typeface="Meiryo" pitchFamily="34" charset="0"/>
+                          <a:ea typeface="Meiryo" pitchFamily="34" charset="-122"/>
+                          <a:cs typeface="Meiryo" pitchFamily="34" charset="-120"/>
+                        </a:rPr>
+                        <a:t>0475-50-1081</a:t>
+                      </a:r>
+                      <a:endParaRPr lang="en-US" sz="1100" dirty="0">
+                        <a:latin typeface="Meiryo" charset="0"/>
+                        <a:ea typeface="Meiryo" charset="0"/>
+                        <a:cs typeface="Meiryo" charset="0"/>
+                      </a:endParaRPr>
+                    </a:p>
+                  </a:txBody>
+                  <a:tcPr anchor="ctr" marT="18000" marB="18000" marL="64008" marR="45720">
+                    <a:lnL w="9525" cap="flat" cmpd="sng" algn="ctr">
+                      <a:solidFill>
+                        <a:srgbClr val="BFBFBF"/>
+                      </a:solidFill>
+                      <a:prstDash val="solid"/>
+                      <a:round/>
+                      <a:headEnd type="none" w="med" len="med"/>
+                      <a:tailEnd type="none" w="med" len="med"/>
+                    </a:lnL>
+                    <a:lnR w="9525" cap="flat" cmpd="sng" algn="ctr">
+                      <a:solidFill>
+                        <a:srgbClr val="BFBFBF"/>
+                      </a:solidFill>
+                      <a:prstDash val="solid"/>
+                      <a:round/>
+                      <a:headEnd type="none" w="med" len="med"/>
+                      <a:tailEnd type="none" w="med" len="med"/>
+                    </a:lnR>
+                    <a:lnT w="9525" cap="flat" cmpd="sng" algn="ctr">
+                      <a:solidFill>
+                        <a:srgbClr val="BFBFBF"/>
+                      </a:solidFill>
+                      <a:prstDash val="solid"/>
+                      <a:round/>
+                      <a:headEnd type="none" w="med" len="med"/>
+                      <a:tailEnd type="none" w="med" len="med"/>
+                    </a:lnT>
+                    <a:lnB w="9525" cap="flat" cmpd="sng" algn="ctr">
+                      <a:solidFill>
+                        <a:srgbClr val="BFBFBF"/>
+                      </a:solidFill>
+                      <a:prstDash val="solid"/>
+                      <a:round/>
+                      <a:headEnd type="none" w="med" len="med"/>
+                      <a:tailEnd type="none" w="med" len="med"/>
+                    </a:lnB>
+                  </a:tcPr>
+                </a:tc>
+                <a:tc>
+                  <a:txBody>
+                    <a:bodyPr/>
+                    <a:lstStyle/>
+                    <a:p>
+                      <a:pPr marL="0" indent="0" algn="l">
+                        <a:buNone/>
+                      </a:pPr>
+                      <a:r>
+                        <a:rPr lang="en-US" sz="900" dirty="0" u="sng">
+                          <a:solidFill>
+                            <a:srgbClr val="1F5FA8"/>
+                          </a:solidFill>
+                          <a:latin typeface="Meiryo" charset="0"/>
+                          <a:ea typeface="Meiryo" charset="0"/>
+                          <a:cs typeface="Meiryo" charset="0"/>
+                          <a:hlinkClick r:id="rId5"/>
+                        </a:rPr>
+                        <a:t>chibasha-kodomo2.com/poketto</a:t>
+                      </a:r>
+                    </a:p>
+                  </a:txBody>
+                  <a:tcPr anchor="ctr" marT="18000" marB="18000" marL="64008" marR="45720">
+                    <a:lnL w="9525" cap="flat" cmpd="sng" algn="ctr">
+                      <a:solidFill>
+                        <a:srgbClr val="BFBFBF"/>
+                      </a:solidFill>
+                      <a:prstDash val="solid"/>
+                      <a:round/>
+                      <a:headEnd type="none" w="med" len="med"/>
+                      <a:tailEnd type="none" w="med" len="med"/>
+                    </a:lnL>
+                    <a:lnR w="9525" cap="flat" cmpd="sng" algn="ctr">
+                      <a:solidFill>
+                        <a:srgbClr val="BFBFBF"/>
+                      </a:solidFill>
+                      <a:prstDash val="solid"/>
+                      <a:round/>
+                      <a:headEnd type="none" w="med" len="med"/>
+                      <a:tailEnd type="none" w="med" len="med"/>
+                    </a:lnR>
+                    <a:lnT w="9525" cap="flat" cmpd="sng" algn="ctr">
+                      <a:solidFill>
+                        <a:srgbClr val="BFBFBF"/>
+                      </a:solidFill>
+                      <a:prstDash val="solid"/>
+                      <a:round/>
+                      <a:headEnd type="none" w="med" len="med"/>
+                      <a:tailEnd type="none" w="med" len="med"/>
+                    </a:lnT>
+                    <a:lnB w="9525" cap="flat" cmpd="sng" algn="ctr">
+                      <a:solidFill>
+                        <a:srgbClr val="BFBFBF"/>
+                      </a:solidFill>
+                      <a:prstDash val="solid"/>
+                      <a:round/>
+                      <a:headEnd type="none" w="med" len="med"/>
+                      <a:tailEnd type="none" w="med" len="med"/>
+                    </a:lnB>
+                  </a:tcPr>
+                </a:tc>
+                <a:extLst>
+                  <a:ext uri="{0D108BD9-81ED-4DB2-BD59-A6C34878D82A}">
+                    <a16:rowId xmlns:a16="http://schemas.microsoft.com/office/drawing/2014/main" val="10001"/>
+                  </a:ext>
+                </a:extLst>
+              </a:tr>
+              <a:tr h="305972">
+                <a:tc>
+                  <a:txBody>
+                    <a:bodyPr/>
+                    <a:lstStyle/>
+                    <a:p>
+                      <a:pPr marL="0" indent="0" algn="ctr">
+                        <a:buNone/>
+                      </a:pPr>
+                      <a:r>
+                        <a:rPr lang="en-US" sz="900" b="1" dirty="0">
+                          <a:solidFill>
+                            <a:srgbClr val="222222"/>
+                          </a:solidFill>
+                          <a:latin typeface="Meiryo" pitchFamily="34" charset="0"/>
+                          <a:ea typeface="Meiryo" pitchFamily="34" charset="-122"/>
+                          <a:cs typeface="Meiryo" pitchFamily="34" charset="-120"/>
+                        </a:rPr>
+                        <a:t>④</a:t>
+                      </a:r>
+                      <a:endParaRPr lang="en-US" sz="1100" dirty="0">
+                        <a:latin typeface="Meiryo" charset="0"/>
+                        <a:ea typeface="Meiryo" charset="0"/>
+                        <a:cs typeface="Meiryo" charset="0"/>
+                      </a:endParaRPr>
+                    </a:p>
+                  </a:txBody>
+                  <a:tcPr anchor="ctr" marT="18000" marB="18000" marL="64008" marR="45720">
+                    <a:lnL w="9525" cap="flat" cmpd="sng" algn="ctr">
+                      <a:solidFill>
+                        <a:srgbClr val="BFBFBF"/>
+                      </a:solidFill>
+                      <a:prstDash val="solid"/>
+                      <a:round/>
+                      <a:headEnd type="none" w="med" len="med"/>
+                      <a:tailEnd type="none" w="med" len="med"/>
+                    </a:lnL>
+                    <a:lnR w="9525" cap="flat" cmpd="sng" algn="ctr">
+                      <a:solidFill>
+                        <a:srgbClr val="BFBFBF"/>
+                      </a:solidFill>
+                      <a:prstDash val="solid"/>
+                      <a:round/>
+                      <a:headEnd type="none" w="med" len="med"/>
+                      <a:tailEnd type="none" w="med" len="med"/>
+                    </a:lnR>
+                    <a:lnT w="9525" cap="flat" cmpd="sng" algn="ctr">
+                      <a:solidFill>
+                        <a:srgbClr val="BFBFBF"/>
+                      </a:solidFill>
+                      <a:prstDash val="solid"/>
+                      <a:round/>
+                      <a:headEnd type="none" w="med" len="med"/>
+                      <a:tailEnd type="none" w="med" len="med"/>
+                    </a:lnT>
+                    <a:lnB w="9525" cap="flat" cmpd="sng" algn="ctr">
+                      <a:solidFill>
+                        <a:srgbClr val="BFBFBF"/>
+                      </a:solidFill>
+                      <a:prstDash val="solid"/>
+                      <a:round/>
+                      <a:headEnd type="none" w="med" len="med"/>
+                      <a:tailEnd type="none" w="med" len="med"/>
+                    </a:lnB>
+                  </a:tcPr>
+                </a:tc>
+                <a:tc>
+                  <a:txBody>
+                    <a:bodyPr/>
+                    <a:lstStyle/>
+                    <a:p>
+                      <a:pPr marL="0" indent="0" algn="l">
+                        <a:buNone/>
+                      </a:pPr>
+                      <a:r>
+                        <a:rPr lang="en-US" sz="900" b="1" dirty="0">
+                          <a:solidFill>
+                            <a:srgbClr val="222222"/>
+                          </a:solidFill>
+                          <a:latin typeface="Meiryo" pitchFamily="34" charset="0"/>
+                          <a:ea typeface="Meiryo" pitchFamily="34" charset="-122"/>
+                          <a:cs typeface="Meiryo" pitchFamily="34" charset="-120"/>
+                        </a:rPr>
+                        <a:t>こどもプラス東金教室</a:t>
+                      </a:r>
+                      <a:endParaRPr lang="en-US" sz="1100" dirty="0">
+                        <a:latin typeface="Meiryo" charset="0"/>
+                        <a:ea typeface="Meiryo" charset="0"/>
+                        <a:cs typeface="Meiryo" charset="0"/>
+                      </a:endParaRPr>
+                    </a:p>
+                  </a:txBody>
+                  <a:tcPr anchor="ctr" marT="18000" marB="18000" marL="64008" marR="45720">
+                    <a:lnL w="9525" cap="flat" cmpd="sng" algn="ctr">
+                      <a:solidFill>
+                        <a:srgbClr val="BFBFBF"/>
+                      </a:solidFill>
+                      <a:prstDash val="solid"/>
+                      <a:round/>
+                      <a:headEnd type="none" w="med" len="med"/>
+                      <a:tailEnd type="none" w="med" len="med"/>
+                    </a:lnL>
+                    <a:lnR w="9525" cap="flat" cmpd="sng" algn="ctr">
+                      <a:solidFill>
+                        <a:srgbClr val="BFBFBF"/>
+                      </a:solidFill>
+                      <a:prstDash val="solid"/>
+                      <a:round/>
+                      <a:headEnd type="none" w="med" len="med"/>
+                      <a:tailEnd type="none" w="med" len="med"/>
+                    </a:lnR>
+                    <a:lnT w="9525" cap="flat" cmpd="sng" algn="ctr">
+                      <a:solidFill>
+                        <a:srgbClr val="BFBFBF"/>
+                      </a:solidFill>
+                      <a:prstDash val="solid"/>
+                      <a:round/>
+                      <a:headEnd type="none" w="med" len="med"/>
+                      <a:tailEnd type="none" w="med" len="med"/>
+                    </a:lnT>
+                    <a:lnB w="9525" cap="flat" cmpd="sng" algn="ctr">
+                      <a:solidFill>
+                        <a:srgbClr val="BFBFBF"/>
+                      </a:solidFill>
+                      <a:prstDash val="solid"/>
+                      <a:round/>
+                      <a:headEnd type="none" w="med" len="med"/>
+                      <a:tailEnd type="none" w="med" len="med"/>
+                    </a:lnB>
+                  </a:tcPr>
+                </a:tc>
+                <a:tc>
+                  <a:txBody>
+                    <a:bodyPr/>
+                    <a:lstStyle/>
+                    <a:p>
+                      <a:pPr marL="0" indent="0" algn="l">
+                        <a:buNone/>
+                      </a:pPr>
+                      <a:r>
+                        <a:rPr lang="en-US" sz="900" dirty="0">
+                          <a:solidFill>
+                            <a:srgbClr val="222222"/>
+                          </a:solidFill>
+                          <a:latin typeface="Meiryo" pitchFamily="34" charset="0"/>
+                          <a:ea typeface="Meiryo" pitchFamily="34" charset="-122"/>
+                          <a:cs typeface="Meiryo" pitchFamily="34" charset="-120"/>
+                        </a:rPr>
+                        <a:t>株式会社ベストグロウ</a:t>
+                      </a:r>
+                      <a:endParaRPr lang="en-US" sz="1100" dirty="0">
+                        <a:latin typeface="Meiryo" charset="0"/>
+                        <a:ea typeface="Meiryo" charset="0"/>
+                        <a:cs typeface="Meiryo" charset="0"/>
+                      </a:endParaRPr>
+                    </a:p>
+                  </a:txBody>
+                  <a:tcPr anchor="ctr" marT="18000" marB="18000" marL="64008" marR="45720">
+                    <a:lnL w="9525" cap="flat" cmpd="sng" algn="ctr">
+                      <a:solidFill>
+                        <a:srgbClr val="BFBFBF"/>
+                      </a:solidFill>
+                      <a:prstDash val="solid"/>
+                      <a:round/>
+                      <a:headEnd type="none" w="med" len="med"/>
+                      <a:tailEnd type="none" w="med" len="med"/>
+                    </a:lnL>
+                    <a:lnR w="9525" cap="flat" cmpd="sng" algn="ctr">
+                      <a:solidFill>
+                        <a:srgbClr val="BFBFBF"/>
+                      </a:solidFill>
+                      <a:prstDash val="solid"/>
+                      <a:round/>
+                      <a:headEnd type="none" w="med" len="med"/>
+                      <a:tailEnd type="none" w="med" len="med"/>
+                    </a:lnR>
+                    <a:lnT w="9525" cap="flat" cmpd="sng" algn="ctr">
+                      <a:solidFill>
+                        <a:srgbClr val="BFBFBF"/>
+                      </a:solidFill>
+                      <a:prstDash val="solid"/>
+                      <a:round/>
+                      <a:headEnd type="none" w="med" len="med"/>
+                      <a:tailEnd type="none" w="med" len="med"/>
+                    </a:lnT>
+                    <a:lnB w="9525" cap="flat" cmpd="sng" algn="ctr">
+                      <a:solidFill>
+                        <a:srgbClr val="BFBFBF"/>
+                      </a:solidFill>
+                      <a:prstDash val="solid"/>
+                      <a:round/>
+                      <a:headEnd type="none" w="med" len="med"/>
+                      <a:tailEnd type="none" w="med" len="med"/>
+                    </a:lnB>
+                  </a:tcPr>
+                </a:tc>
+                <a:tc>
+                  <a:txBody>
+                    <a:bodyPr/>
+                    <a:lstStyle/>
+                    <a:p>
+                      <a:pPr marL="0" indent="0" algn="l">
+                        <a:buNone/>
+                      </a:pPr>
+                      <a:r>
+                        <a:rPr lang="en-US" sz="900" dirty="0">
+                          <a:solidFill>
+                            <a:srgbClr val="222222"/>
+                          </a:solidFill>
+                          <a:latin typeface="Meiryo" pitchFamily="34" charset="0"/>
+                          <a:ea typeface="Meiryo" pitchFamily="34" charset="-122"/>
+                          <a:cs typeface="Meiryo" pitchFamily="34" charset="-120"/>
+                        </a:rPr>
+                        <a:t>東新宿18-1 酒造ビル105号</a:t>
+                      </a:r>
+                      <a:endParaRPr lang="en-US" sz="1100" dirty="0">
+                        <a:latin typeface="Meiryo" charset="0"/>
+                        <a:ea typeface="Meiryo" charset="0"/>
+                        <a:cs typeface="Meiryo" charset="0"/>
+                      </a:endParaRPr>
+                    </a:p>
+                  </a:txBody>
+                  <a:tcPr anchor="ctr" marT="18000" marB="18000" marL="64008" marR="45720">
+                    <a:lnL w="9525" cap="flat" cmpd="sng" algn="ctr">
+                      <a:solidFill>
+                        <a:srgbClr val="BFBFBF"/>
+                      </a:solidFill>
+                      <a:prstDash val="solid"/>
+                      <a:round/>
+                      <a:headEnd type="none" w="med" len="med"/>
+                      <a:tailEnd type="none" w="med" len="med"/>
+                    </a:lnL>
+                    <a:lnR w="9525" cap="flat" cmpd="sng" algn="ctr">
+                      <a:solidFill>
+                        <a:srgbClr val="BFBFBF"/>
+                      </a:solidFill>
+                      <a:prstDash val="solid"/>
+                      <a:round/>
+                      <a:headEnd type="none" w="med" len="med"/>
+                      <a:tailEnd type="none" w="med" len="med"/>
+                    </a:lnR>
+                    <a:lnT w="9525" cap="flat" cmpd="sng" algn="ctr">
+                      <a:solidFill>
+                        <a:srgbClr val="BFBFBF"/>
+                      </a:solidFill>
+                      <a:prstDash val="solid"/>
+                      <a:round/>
+                      <a:headEnd type="none" w="med" len="med"/>
+                      <a:tailEnd type="none" w="med" len="med"/>
+                    </a:lnT>
+                    <a:lnB w="9525" cap="flat" cmpd="sng" algn="ctr">
+                      <a:solidFill>
+                        <a:srgbClr val="BFBFBF"/>
+                      </a:solidFill>
+                      <a:prstDash val="solid"/>
+                      <a:round/>
+                      <a:headEnd type="none" w="med" len="med"/>
+                      <a:tailEnd type="none" w="med" len="med"/>
+                    </a:lnB>
+                  </a:tcPr>
+                </a:tc>
+                <a:tc>
+                  <a:txBody>
+                    <a:bodyPr/>
+                    <a:lstStyle/>
+                    <a:p>
+                      <a:pPr marL="0" indent="0" algn="l">
+                        <a:buNone/>
+                      </a:pPr>
+                      <a:r>
+                        <a:rPr lang="en-US" sz="900" dirty="0">
+                          <a:solidFill>
+                            <a:srgbClr val="222222"/>
+                          </a:solidFill>
+                          <a:latin typeface="Meiryo" pitchFamily="34" charset="0"/>
+                          <a:ea typeface="Meiryo" pitchFamily="34" charset="-122"/>
+                          <a:cs typeface="Meiryo" pitchFamily="34" charset="-120"/>
+                        </a:rPr>
+                        <a:t>0475-77-8577</a:t>
+                      </a:r>
+                      <a:endParaRPr lang="en-US" sz="1100" dirty="0">
+                        <a:latin typeface="Meiryo" charset="0"/>
+                        <a:ea typeface="Meiryo" charset="0"/>
+                        <a:cs typeface="Meiryo" charset="0"/>
+                      </a:endParaRPr>
+                    </a:p>
+                  </a:txBody>
+                  <a:tcPr anchor="ctr" marT="18000" marB="18000" marL="64008" marR="45720">
+                    <a:lnL w="9525" cap="flat" cmpd="sng" algn="ctr">
+                      <a:solidFill>
+                        <a:srgbClr val="BFBFBF"/>
+                      </a:solidFill>
+                      <a:prstDash val="solid"/>
+                      <a:round/>
+                      <a:headEnd type="none" w="med" len="med"/>
+                      <a:tailEnd type="none" w="med" len="med"/>
+                    </a:lnL>
+                    <a:lnR w="9525" cap="flat" cmpd="sng" algn="ctr">
+                      <a:solidFill>
+                        <a:srgbClr val="BFBFBF"/>
+                      </a:solidFill>
+                      <a:prstDash val="solid"/>
+                      <a:round/>
+                      <a:headEnd type="none" w="med" len="med"/>
+                      <a:tailEnd type="none" w="med" len="med"/>
+                    </a:lnR>
+                    <a:lnT w="9525" cap="flat" cmpd="sng" algn="ctr">
+                      <a:solidFill>
+                        <a:srgbClr val="BFBFBF"/>
+                      </a:solidFill>
+                      <a:prstDash val="solid"/>
+                      <a:round/>
+                      <a:headEnd type="none" w="med" len="med"/>
+                      <a:tailEnd type="none" w="med" len="med"/>
+                    </a:lnT>
+                    <a:lnB w="9525" cap="flat" cmpd="sng" algn="ctr">
+                      <a:solidFill>
+                        <a:srgbClr val="BFBFBF"/>
+                      </a:solidFill>
+                      <a:prstDash val="solid"/>
+                      <a:round/>
+                      <a:headEnd type="none" w="med" len="med"/>
+                      <a:tailEnd type="none" w="med" len="med"/>
+                    </a:lnB>
+                  </a:tcPr>
+                </a:tc>
+                <a:tc>
+                  <a:txBody>
+                    <a:bodyPr/>
+                    <a:lstStyle/>
+                    <a:p>
+                      <a:pPr marL="0" indent="0" algn="l">
+                        <a:buNone/>
+                      </a:pPr>
+                      <a:r>
+                        <a:rPr lang="en-US" sz="900" dirty="0" u="sng">
+                          <a:solidFill>
+                            <a:srgbClr val="1F5FA8"/>
+                          </a:solidFill>
+                          <a:latin typeface="Meiryo" charset="0"/>
+                          <a:ea typeface="Meiryo" charset="0"/>
+                          <a:cs typeface="Meiryo" charset="0"/>
+                          <a:hlinkClick r:id="rId6"/>
+                        </a:rPr>
+                        <a:t>kp-tougane.com</a:t>
+                      </a:r>
+                    </a:p>
+                  </a:txBody>
+                  <a:tcPr anchor="ctr" marT="18000" marB="18000" marL="64008" marR="45720">
+                    <a:lnL w="9525" cap="flat" cmpd="sng" algn="ctr">
+                      <a:solidFill>
+                        <a:srgbClr val="BFBFBF"/>
+                      </a:solidFill>
+                      <a:prstDash val="solid"/>
+                      <a:round/>
+                      <a:headEnd type="none" w="med" len="med"/>
+                      <a:tailEnd type="none" w="med" len="med"/>
+                    </a:lnL>
+                    <a:lnR w="9525" cap="flat" cmpd="sng" algn="ctr">
+                      <a:solidFill>
+                        <a:srgbClr val="BFBFBF"/>
+                      </a:solidFill>
+                      <a:prstDash val="solid"/>
+                      <a:round/>
+                      <a:headEnd type="none" w="med" len="med"/>
+                      <a:tailEnd type="none" w="med" len="med"/>
+                    </a:lnR>
+                    <a:lnT w="9525" cap="flat" cmpd="sng" algn="ctr">
+                      <a:solidFill>
+                        <a:srgbClr val="BFBFBF"/>
+                      </a:solidFill>
+                      <a:prstDash val="solid"/>
+                      <a:round/>
+                      <a:headEnd type="none" w="med" len="med"/>
+                      <a:tailEnd type="none" w="med" len="med"/>
+                    </a:lnT>
+                    <a:lnB w="9525" cap="flat" cmpd="sng" algn="ctr">
+                      <a:solidFill>
+                        <a:srgbClr val="BFBFBF"/>
+                      </a:solidFill>
+                      <a:prstDash val="solid"/>
+                      <a:round/>
+                      <a:headEnd type="none" w="med" len="med"/>
+                      <a:tailEnd type="none" w="med" len="med"/>
+                    </a:lnB>
+                  </a:tcPr>
+                </a:tc>
+                <a:extLst>
+                  <a:ext uri="{0D108BD9-81ED-4DB2-BD59-A6C34878D82A}">
+                    <a16:rowId xmlns:a16="http://schemas.microsoft.com/office/drawing/2014/main" val="10001"/>
+                  </a:ext>
+                </a:extLst>
+              </a:tr>
+              <a:tr h="305972">
+                <a:tc>
+                  <a:txBody>
+                    <a:bodyPr/>
+                    <a:lstStyle/>
+                    <a:p>
+                      <a:pPr marL="0" indent="0" algn="ctr">
+                        <a:buNone/>
+                      </a:pPr>
+                      <a:r>
+                        <a:rPr lang="en-US" sz="900" b="1" dirty="0">
+                          <a:solidFill>
+                            <a:srgbClr val="222222"/>
+                          </a:solidFill>
+                          <a:latin typeface="Meiryo" pitchFamily="34" charset="0"/>
+                          <a:ea typeface="Meiryo" pitchFamily="34" charset="-122"/>
+                          <a:cs typeface="Meiryo" pitchFamily="34" charset="-120"/>
+                        </a:rPr>
+                        <a:t>⑤</a:t>
+                      </a:r>
+                      <a:endParaRPr lang="en-US" sz="1100" dirty="0">
+                        <a:latin typeface="Meiryo" charset="0"/>
+                        <a:ea typeface="Meiryo" charset="0"/>
+                        <a:cs typeface="Meiryo" charset="0"/>
+                      </a:endParaRPr>
+                    </a:p>
+                  </a:txBody>
+                  <a:tcPr anchor="ctr" marT="18000" marB="18000" marL="64008" marR="45720">
+                    <a:lnL w="9525" cap="flat" cmpd="sng" algn="ctr">
+                      <a:solidFill>
+                        <a:srgbClr val="BFBFBF"/>
+                      </a:solidFill>
+                      <a:prstDash val="solid"/>
+                      <a:round/>
+                      <a:headEnd type="none" w="med" len="med"/>
+                      <a:tailEnd type="none" w="med" len="med"/>
+                    </a:lnL>
+                    <a:lnR w="9525" cap="flat" cmpd="sng" algn="ctr">
+                      <a:solidFill>
+                        <a:srgbClr val="BFBFBF"/>
+                      </a:solidFill>
+                      <a:prstDash val="solid"/>
+                      <a:round/>
+                      <a:headEnd type="none" w="med" len="med"/>
+                      <a:tailEnd type="none" w="med" len="med"/>
+                    </a:lnR>
+                    <a:lnT w="9525" cap="flat" cmpd="sng" algn="ctr">
+                      <a:solidFill>
+                        <a:srgbClr val="BFBFBF"/>
+                      </a:solidFill>
+                      <a:prstDash val="solid"/>
+                      <a:round/>
+                      <a:headEnd type="none" w="med" len="med"/>
+                      <a:tailEnd type="none" w="med" len="med"/>
+                    </a:lnT>
+                    <a:lnB w="9525" cap="flat" cmpd="sng" algn="ctr">
+                      <a:solidFill>
+                        <a:srgbClr val="BFBFBF"/>
+                      </a:solidFill>
+                      <a:prstDash val="solid"/>
+                      <a:round/>
+                      <a:headEnd type="none" w="med" len="med"/>
+                      <a:tailEnd type="none" w="med" len="med"/>
+                    </a:lnB>
+                  </a:tcPr>
+                </a:tc>
+                <a:tc>
+                  <a:txBody>
+                    <a:bodyPr/>
+                    <a:lstStyle/>
+                    <a:p>
+                      <a:pPr marL="0" indent="0" algn="l">
+                        <a:buNone/>
+                      </a:pPr>
+                      <a:r>
+                        <a:rPr lang="en-US" sz="900" b="1" dirty="0">
+                          <a:solidFill>
+                            <a:srgbClr val="222222"/>
+                          </a:solidFill>
+                          <a:latin typeface="Meiryo" pitchFamily="34" charset="0"/>
+                          <a:ea typeface="Meiryo" pitchFamily="34" charset="-122"/>
+                          <a:cs typeface="Meiryo" pitchFamily="34" charset="-120"/>
+                        </a:rPr>
+                        <a:t>こどもプラス第2東金教室</a:t>
+                      </a:r>
+                      <a:endParaRPr lang="en-US" sz="1100" dirty="0">
+                        <a:latin typeface="Meiryo" charset="0"/>
+                        <a:ea typeface="Meiryo" charset="0"/>
+                        <a:cs typeface="Meiryo" charset="0"/>
+                      </a:endParaRPr>
+                    </a:p>
+                  </a:txBody>
+                  <a:tcPr anchor="ctr" marT="18000" marB="18000" marL="64008" marR="45720">
+                    <a:lnL w="9525" cap="flat" cmpd="sng" algn="ctr">
+                      <a:solidFill>
+                        <a:srgbClr val="BFBFBF"/>
+                      </a:solidFill>
+                      <a:prstDash val="solid"/>
+                      <a:round/>
+                      <a:headEnd type="none" w="med" len="med"/>
+                      <a:tailEnd type="none" w="med" len="med"/>
+                    </a:lnL>
+                    <a:lnR w="9525" cap="flat" cmpd="sng" algn="ctr">
+                      <a:solidFill>
+                        <a:srgbClr val="BFBFBF"/>
+                      </a:solidFill>
+                      <a:prstDash val="solid"/>
+                      <a:round/>
+                      <a:headEnd type="none" w="med" len="med"/>
+                      <a:tailEnd type="none" w="med" len="med"/>
+                    </a:lnR>
+                    <a:lnT w="9525" cap="flat" cmpd="sng" algn="ctr">
+                      <a:solidFill>
+                        <a:srgbClr val="BFBFBF"/>
+                      </a:solidFill>
+                      <a:prstDash val="solid"/>
+                      <a:round/>
+                      <a:headEnd type="none" w="med" len="med"/>
+                      <a:tailEnd type="none" w="med" len="med"/>
+                    </a:lnT>
+                    <a:lnB w="9525" cap="flat" cmpd="sng" algn="ctr">
+                      <a:solidFill>
+                        <a:srgbClr val="BFBFBF"/>
+                      </a:solidFill>
+                      <a:prstDash val="solid"/>
+                      <a:round/>
+                      <a:headEnd type="none" w="med" len="med"/>
+                      <a:tailEnd type="none" w="med" len="med"/>
+                    </a:lnB>
+                  </a:tcPr>
+                </a:tc>
+                <a:tc>
+                  <a:txBody>
+                    <a:bodyPr/>
+                    <a:lstStyle/>
+                    <a:p>
+                      <a:pPr marL="0" indent="0" algn="l">
+                        <a:buNone/>
+                      </a:pPr>
+                      <a:r>
+                        <a:rPr lang="en-US" sz="900" dirty="0">
+                          <a:solidFill>
+                            <a:srgbClr val="222222"/>
+                          </a:solidFill>
+                          <a:latin typeface="Meiryo" pitchFamily="34" charset="0"/>
+                          <a:ea typeface="Meiryo" pitchFamily="34" charset="-122"/>
+                          <a:cs typeface="Meiryo" pitchFamily="34" charset="-120"/>
+                        </a:rPr>
+                        <a:t>株式会社ベストグロウ</a:t>
+                      </a:r>
+                      <a:endParaRPr lang="en-US" sz="1100" dirty="0">
+                        <a:latin typeface="Meiryo" charset="0"/>
+                        <a:ea typeface="Meiryo" charset="0"/>
+                        <a:cs typeface="Meiryo" charset="0"/>
+                      </a:endParaRPr>
+                    </a:p>
+                  </a:txBody>
+                  <a:tcPr anchor="ctr" marT="18000" marB="18000" marL="64008" marR="45720">
+                    <a:lnL w="9525" cap="flat" cmpd="sng" algn="ctr">
+                      <a:solidFill>
+                        <a:srgbClr val="BFBFBF"/>
+                      </a:solidFill>
+                      <a:prstDash val="solid"/>
+                      <a:round/>
+                      <a:headEnd type="none" w="med" len="med"/>
+                      <a:tailEnd type="none" w="med" len="med"/>
+                    </a:lnL>
+                    <a:lnR w="9525" cap="flat" cmpd="sng" algn="ctr">
+                      <a:solidFill>
+                        <a:srgbClr val="BFBFBF"/>
+                      </a:solidFill>
+                      <a:prstDash val="solid"/>
+                      <a:round/>
+                      <a:headEnd type="none" w="med" len="med"/>
+                      <a:tailEnd type="none" w="med" len="med"/>
+                    </a:lnR>
+                    <a:lnT w="9525" cap="flat" cmpd="sng" algn="ctr">
+                      <a:solidFill>
+                        <a:srgbClr val="BFBFBF"/>
+                      </a:solidFill>
+                      <a:prstDash val="solid"/>
+                      <a:round/>
+                      <a:headEnd type="none" w="med" len="med"/>
+                      <a:tailEnd type="none" w="med" len="med"/>
+                    </a:lnT>
+                    <a:lnB w="9525" cap="flat" cmpd="sng" algn="ctr">
+                      <a:solidFill>
+                        <a:srgbClr val="BFBFBF"/>
+                      </a:solidFill>
+                      <a:prstDash val="solid"/>
+                      <a:round/>
+                      <a:headEnd type="none" w="med" len="med"/>
+                      <a:tailEnd type="none" w="med" len="med"/>
+                    </a:lnB>
+                  </a:tcPr>
+                </a:tc>
+                <a:tc>
+                  <a:txBody>
+                    <a:bodyPr/>
+                    <a:lstStyle/>
+                    <a:p>
+                      <a:pPr marL="0" indent="0" algn="l">
+                        <a:buNone/>
+                      </a:pPr>
+                      <a:r>
+                        <a:rPr lang="en-US" sz="900" dirty="0">
+                          <a:solidFill>
+                            <a:srgbClr val="222222"/>
+                          </a:solidFill>
+                          <a:latin typeface="Meiryo" pitchFamily="34" charset="0"/>
+                          <a:ea typeface="Meiryo" pitchFamily="34" charset="-122"/>
+                          <a:cs typeface="Meiryo" pitchFamily="34" charset="-120"/>
+                        </a:rPr>
+                        <a:t>田間1-6-4</a:t>
                       </a:r>
                       <a:endParaRPr lang="en-US" sz="1100" dirty="0">
                         <a:latin typeface="Meiryo" charset="0"/>
@@ -4949,7 +7245,75 @@
                         <a:buNone/>
                       </a:pPr>
                       <a:r>
-                        <a:rPr lang="en-US" sz="900" dirty="0">
+                        <a:rPr lang="en-US" sz="900" dirty="0" u="sng">
+                          <a:solidFill>
+                            <a:srgbClr val="1F5FA8"/>
+                          </a:solidFill>
+                          <a:latin typeface="Meiryo" charset="0"/>
+                          <a:ea typeface="Meiryo" charset="0"/>
+                          <a:cs typeface="Meiryo" charset="0"/>
+                          <a:hlinkClick r:id="rId7"/>
+                        </a:rPr>
+                        <a:t>kp-daini-tougane.com</a:t>
+                      </a:r>
+                    </a:p>
+                  </a:txBody>
+                  <a:tcPr anchor="ctr" marT="18000" marB="18000" marL="64008" marR="45720">
+                    <a:lnL w="9525" cap="flat" cmpd="sng" algn="ctr">
+                      <a:solidFill>
+                        <a:srgbClr val="BFBFBF"/>
+                      </a:solidFill>
+                      <a:prstDash val="solid"/>
+                      <a:round/>
+                      <a:headEnd type="none" w="med" len="med"/>
+                      <a:tailEnd type="none" w="med" len="med"/>
+                    </a:lnL>
+                    <a:lnR w="9525" cap="flat" cmpd="sng" algn="ctr">
+                      <a:solidFill>
+                        <a:srgbClr val="BFBFBF"/>
+                      </a:solidFill>
+                      <a:prstDash val="solid"/>
+                      <a:round/>
+                      <a:headEnd type="none" w="med" len="med"/>
+                      <a:tailEnd type="none" w="med" len="med"/>
+                    </a:lnR>
+                    <a:lnT w="9525" cap="flat" cmpd="sng" algn="ctr">
+                      <a:solidFill>
+                        <a:srgbClr val="BFBFBF"/>
+                      </a:solidFill>
+                      <a:prstDash val="solid"/>
+                      <a:round/>
+                      <a:headEnd type="none" w="med" len="med"/>
+                      <a:tailEnd type="none" w="med" len="med"/>
+                    </a:lnT>
+                    <a:lnB w="9525" cap="flat" cmpd="sng" algn="ctr">
+                      <a:solidFill>
+                        <a:srgbClr val="BFBFBF"/>
+                      </a:solidFill>
+                      <a:prstDash val="solid"/>
+                      <a:round/>
+                      <a:headEnd type="none" w="med" len="med"/>
+                      <a:tailEnd type="none" w="med" len="med"/>
+                    </a:lnB>
+                  </a:tcPr>
+                </a:tc>
+                <a:extLst>
+                  <a:ext uri="{0D108BD9-81ED-4DB2-BD59-A6C34878D82A}">
+                    <a16:rowId xmlns:a16="http://schemas.microsoft.com/office/drawing/2014/main" val="10001"/>
+                  </a:ext>
+                </a:extLst>
+              </a:tr>
+              <a:tr h="305972">
+                <a:tc>
+                  <a:txBody>
+                    <a:bodyPr/>
+                    <a:lstStyle/>
+                    <a:p>
+                      <a:pPr marL="0" indent="0" algn="ctr">
+                        <a:buNone/>
+                      </a:pPr>
+                      <a:r>
+                        <a:rPr lang="en-US" sz="900" b="1" dirty="0">
                           <a:solidFill>
                             <a:srgbClr val="222222"/>
                           </a:solidFill>
@@ -4957,7 +7321,72 @@
                           <a:ea typeface="Meiryo" pitchFamily="34" charset="-122"/>
                           <a:cs typeface="Meiryo" pitchFamily="34" charset="-120"/>
                         </a:rPr>
-                        <a:t>東上宿6-2</a:t>
+                        <a:t>⑥</a:t>
+                      </a:r>
+                      <a:endParaRPr lang="en-US" sz="1100" dirty="0">
+                        <a:latin typeface="Meiryo" charset="0"/>
+                        <a:ea typeface="Meiryo" charset="0"/>
+                        <a:cs typeface="Meiryo" charset="0"/>
+                      </a:endParaRPr>
+                    </a:p>
+                  </a:txBody>
+                  <a:tcPr anchor="ctr" marT="18000" marB="18000" marL="64008" marR="45720">
+                    <a:lnL w="9525" cap="flat" cmpd="sng" algn="ctr">
+                      <a:solidFill>
+                        <a:srgbClr val="BFBFBF"/>
+                      </a:solidFill>
+                      <a:prstDash val="solid"/>
+                      <a:round/>
+                      <a:headEnd type="none" w="med" len="med"/>
+                      <a:tailEnd type="none" w="med" len="med"/>
+                    </a:lnL>
+                    <a:lnR w="9525" cap="flat" cmpd="sng" algn="ctr">
+                      <a:solidFill>
+                        <a:srgbClr val="BFBFBF"/>
+                      </a:solidFill>
+                      <a:prstDash val="solid"/>
+                      <a:round/>
+                      <a:headEnd type="none" w="med" len="med"/>
+                      <a:tailEnd type="none" w="med" len="med"/>
+                    </a:lnR>
+                    <a:lnT w="9525" cap="flat" cmpd="sng" algn="ctr">
+                      <a:solidFill>
+                        <a:srgbClr val="BFBFBF"/>
+                      </a:solidFill>
+                      <a:prstDash val="solid"/>
+                      <a:round/>
+                      <a:headEnd type="none" w="med" len="med"/>
+                      <a:tailEnd type="none" w="med" len="med"/>
+                    </a:lnT>
+                    <a:lnB w="9525" cap="flat" cmpd="sng" algn="ctr">
+                      <a:solidFill>
+                        <a:srgbClr val="BFBFBF"/>
+                      </a:solidFill>
+                      <a:prstDash val="solid"/>
+                      <a:round/>
+                      <a:headEnd type="none" w="med" len="med"/>
+                      <a:tailEnd type="none" w="med" len="med"/>
+                    </a:lnB>
+                  </a:tcPr>
+                </a:tc>
+                <a:tc>
+                  <a:txBody>
+                    <a:bodyPr/>
+                    <a:lstStyle/>
+                    <a:p>
+                      <a:pPr marL="0" indent="0" algn="l">
+                        <a:buNone/>
+                      </a:pPr>
+                      <a:r>
+                        <a:rPr lang="en-US" sz="900" b="1" dirty="0">
+                          <a:solidFill>
+                            <a:srgbClr val="222222"/>
+                          </a:solidFill>
+                          <a:latin typeface="Meiryo" pitchFamily="34" charset="0"/>
+                          <a:ea typeface="Meiryo" pitchFamily="34" charset="-122"/>
+                          <a:cs typeface="Meiryo" pitchFamily="34" charset="-120"/>
+                        </a:rPr>
+                        <a:t>基本塾優遊 日吉台</a:t>
                       </a:r>
                       <a:endParaRPr lang="en-US" sz="1100" dirty="0">
                         <a:latin typeface="Meiryo" charset="0"/>
@@ -5022,7 +7451,137 @@
                           <a:ea typeface="Meiryo" pitchFamily="34" charset="-122"/>
                           <a:cs typeface="Meiryo" pitchFamily="34" charset="-120"/>
                         </a:rPr>
-                        <a:t>0475-50-1081</a:t>
+                        <a:t>NPO法人 基本塾</a:t>
+                      </a:r>
+                      <a:endParaRPr lang="en-US" sz="1100" dirty="0">
+                        <a:latin typeface="Meiryo" charset="0"/>
+                        <a:ea typeface="Meiryo" charset="0"/>
+                        <a:cs typeface="Meiryo" charset="0"/>
+                      </a:endParaRPr>
+                    </a:p>
+                  </a:txBody>
+                  <a:tcPr anchor="ctr" marT="18000" marB="18000" marL="64008" marR="45720">
+                    <a:lnL w="9525" cap="flat" cmpd="sng" algn="ctr">
+                      <a:solidFill>
+                        <a:srgbClr val="BFBFBF"/>
+                      </a:solidFill>
+                      <a:prstDash val="solid"/>
+                      <a:round/>
+                      <a:headEnd type="none" w="med" len="med"/>
+                      <a:tailEnd type="none" w="med" len="med"/>
+                    </a:lnL>
+                    <a:lnR w="9525" cap="flat" cmpd="sng" algn="ctr">
+                      <a:solidFill>
+                        <a:srgbClr val="BFBFBF"/>
+                      </a:solidFill>
+                      <a:prstDash val="solid"/>
+                      <a:round/>
+                      <a:headEnd type="none" w="med" len="med"/>
+                      <a:tailEnd type="none" w="med" len="med"/>
+                    </a:lnR>
+                    <a:lnT w="9525" cap="flat" cmpd="sng" algn="ctr">
+                      <a:solidFill>
+                        <a:srgbClr val="BFBFBF"/>
+                      </a:solidFill>
+                      <a:prstDash val="solid"/>
+                      <a:round/>
+                      <a:headEnd type="none" w="med" len="med"/>
+                      <a:tailEnd type="none" w="med" len="med"/>
+                    </a:lnT>
+                    <a:lnB w="9525" cap="flat" cmpd="sng" algn="ctr">
+                      <a:solidFill>
+                        <a:srgbClr val="BFBFBF"/>
+                      </a:solidFill>
+                      <a:prstDash val="solid"/>
+                      <a:round/>
+                      <a:headEnd type="none" w="med" len="med"/>
+                      <a:tailEnd type="none" w="med" len="med"/>
+                    </a:lnB>
+                  </a:tcPr>
+                </a:tc>
+                <a:tc>
+                  <a:txBody>
+                    <a:bodyPr/>
+                    <a:lstStyle/>
+                    <a:p>
+                      <a:pPr marL="0" indent="0" algn="l">
+                        <a:buNone/>
+                      </a:pPr>
+                      <a:r>
+                        <a:rPr lang="en-US" sz="900" dirty="0">
+                          <a:solidFill>
+                            <a:srgbClr val="222222"/>
+                          </a:solidFill>
+                          <a:latin typeface="Meiryo" pitchFamily="34" charset="0"/>
+                          <a:ea typeface="Meiryo" pitchFamily="34" charset="-122"/>
+                          <a:cs typeface="Meiryo" pitchFamily="34" charset="-120"/>
+                        </a:rPr>
+                        <a:t>日吉台2-26-3</a:t>
+                      </a:r>
+                      <a:endParaRPr lang="en-US" sz="1100" dirty="0">
+                        <a:latin typeface="Meiryo" charset="0"/>
+                        <a:ea typeface="Meiryo" charset="0"/>
+                        <a:cs typeface="Meiryo" charset="0"/>
+                      </a:endParaRPr>
+                    </a:p>
+                  </a:txBody>
+                  <a:tcPr anchor="ctr" marT="18000" marB="18000" marL="64008" marR="45720">
+                    <a:lnL w="9525" cap="flat" cmpd="sng" algn="ctr">
+                      <a:solidFill>
+                        <a:srgbClr val="BFBFBF"/>
+                      </a:solidFill>
+                      <a:prstDash val="solid"/>
+                      <a:round/>
+                      <a:headEnd type="none" w="med" len="med"/>
+                      <a:tailEnd type="none" w="med" len="med"/>
+                    </a:lnL>
+                    <a:lnR w="9525" cap="flat" cmpd="sng" algn="ctr">
+                      <a:solidFill>
+                        <a:srgbClr val="BFBFBF"/>
+                      </a:solidFill>
+                      <a:prstDash val="solid"/>
+                      <a:round/>
+                      <a:headEnd type="none" w="med" len="med"/>
+                      <a:tailEnd type="none" w="med" len="med"/>
+                    </a:lnR>
+                    <a:lnT w="9525" cap="flat" cmpd="sng" algn="ctr">
+                      <a:solidFill>
+                        <a:srgbClr val="BFBFBF"/>
+                      </a:solidFill>
+                      <a:prstDash val="solid"/>
+                      <a:round/>
+                      <a:headEnd type="none" w="med" len="med"/>
+                      <a:tailEnd type="none" w="med" len="med"/>
+                    </a:lnT>
+                    <a:lnB w="9525" cap="flat" cmpd="sng" algn="ctr">
+                      <a:solidFill>
+                        <a:srgbClr val="BFBFBF"/>
+                      </a:solidFill>
+                      <a:prstDash val="solid"/>
+                      <a:round/>
+                      <a:headEnd type="none" w="med" len="med"/>
+                      <a:tailEnd type="none" w="med" len="med"/>
+                    </a:lnB>
+                  </a:tcPr>
+                </a:tc>
+                <a:tc>
+                  <a:txBody>
+                    <a:bodyPr/>
+                    <a:lstStyle/>
+                    <a:p>
+                      <a:pPr marL="0" indent="0" algn="l">
+                        <a:buNone/>
+                      </a:pPr>
+                      <a:r>
+                        <a:rPr lang="en-US" sz="900" dirty="0">
+                          <a:solidFill>
+                            <a:srgbClr val="222222"/>
+                          </a:solidFill>
+                          <a:latin typeface="Meiryo" pitchFamily="34" charset="0"/>
+                          <a:ea typeface="Meiryo" pitchFamily="34" charset="-122"/>
+                          <a:cs typeface="Meiryo" pitchFamily="34" charset="-120"/>
+                        </a:rPr>
+                        <a:t>0475-52-6414</a:t>
                       </a:r>
                       <a:endParaRPr lang="en-US" sz="1100" dirty="0">
                         <a:latin typeface="Meiryo" charset="0"/>
@@ -5086,9 +7645,9 @@
                           <a:latin typeface="Meiryo" charset="0"/>
                           <a:ea typeface="Meiryo" charset="0"/>
                           <a:cs typeface="Meiryo" charset="0"/>
-                          <a:hlinkClick r:id="rId4"/>
+                          <a:hlinkClick r:id="rId8"/>
                         </a:rPr>
-                        <a:t>WAM NET 事業所詳細</a:t>
+                        <a:t>kihonjuku-yuuyuu.com</a:t>
                       </a:r>
                     </a:p>
                   </a:txBody>
@@ -5137,7 +7696,7 @@
                   </a:ext>
                 </a:extLst>
               </a:tr>
-              <a:tr h="331469">
+              <a:tr h="305972">
                 <a:tc>
                   <a:txBody>
                     <a:bodyPr/>
@@ -5155,7 +7714,7 @@
                           <a:ea typeface="Meiryo" pitchFamily="34" charset="-122"/>
                           <a:cs typeface="Meiryo" pitchFamily="34" charset="-120"/>
                         </a:rPr>
-                        <a:t>③</a:t>
+                        <a:t>⑥</a:t>
                       </a:r>
                       <a:endParaRPr lang="en-US" sz="1100" dirty="0">
                         <a:latin typeface="Meiryo" charset="0"/>
@@ -5220,7 +7779,7 @@
                           <a:ea typeface="Meiryo" pitchFamily="34" charset="-122"/>
                           <a:cs typeface="Meiryo" pitchFamily="34" charset="-120"/>
                         </a:rPr>
-                        <a:t>こどもプラス東金教室</a:t>
+                        <a:t>基本塾優遊 松之郷</a:t>
                       </a:r>
                       <a:endParaRPr lang="en-US" sz="1100" dirty="0">
                         <a:latin typeface="Meiryo" charset="0"/>
@@ -5285,7 +7844,7 @@
                           <a:ea typeface="Meiryo" pitchFamily="34" charset="-122"/>
                           <a:cs typeface="Meiryo" pitchFamily="34" charset="-120"/>
                         </a:rPr>
-                        <a:t>株式会社ベストグロウ</a:t>
+                        <a:t>NPO法人 基本塾</a:t>
                       </a:r>
                       <a:endParaRPr lang="en-US" sz="1100" dirty="0">
                         <a:latin typeface="Meiryo" charset="0"/>
@@ -5350,7 +7909,7 @@
                           <a:ea typeface="Meiryo" pitchFamily="34" charset="-122"/>
                           <a:cs typeface="Meiryo" pitchFamily="34" charset="-120"/>
                         </a:rPr>
-                        <a:t>東新宿18-1 酒造ビル105号</a:t>
+                        <a:t>松之郷2423-1</a:t>
                       </a:r>
                       <a:endParaRPr lang="en-US" sz="1100" dirty="0">
                         <a:latin typeface="Meiryo" charset="0"/>
@@ -5415,7 +7974,7 @@
                           <a:ea typeface="Meiryo" pitchFamily="34" charset="-122"/>
                           <a:cs typeface="Meiryo" pitchFamily="34" charset="-120"/>
                         </a:rPr>
-                        <a:t>0475-77-8577</a:t>
+                        <a:t>0475-51-4082</a:t>
                       </a:r>
                       <a:endParaRPr lang="en-US" sz="1100" dirty="0">
                         <a:latin typeface="Meiryo" charset="0"/>
@@ -5479,9 +8038,9 @@
                           <a:latin typeface="Meiryo" charset="0"/>
                           <a:ea typeface="Meiryo" charset="0"/>
                           <a:cs typeface="Meiryo" charset="0"/>
-                          <a:hlinkClick r:id="rId5"/>
+                          <a:hlinkClick r:id="rId8"/>
                         </a:rPr>
-                        <a:t>kp-tougane.com</a:t>
+                        <a:t>kihonjuku-yuuyuu.com</a:t>
                       </a:r>
                     </a:p>
                   </a:txBody>
@@ -5530,7 +8089,7 @@
                   </a:ext>
                 </a:extLst>
               </a:tr>
-              <a:tr h="331469">
+              <a:tr h="305972">
                 <a:tc>
                   <a:txBody>
                     <a:bodyPr/>
@@ -5548,7 +8107,7 @@
                           <a:ea typeface="Meiryo" pitchFamily="34" charset="-122"/>
                           <a:cs typeface="Meiryo" pitchFamily="34" charset="-120"/>
                         </a:rPr>
-                        <a:t>④</a:t>
+                        <a:t>⑥</a:t>
                       </a:r>
                       <a:endParaRPr lang="en-US" sz="1100" dirty="0">
                         <a:latin typeface="Meiryo" charset="0"/>
@@ -5613,7 +8172,7 @@
                           <a:ea typeface="Meiryo" pitchFamily="34" charset="-122"/>
                           <a:cs typeface="Meiryo" pitchFamily="34" charset="-120"/>
                         </a:rPr>
-                        <a:t>こどもプラス第2東金教室</a:t>
+                        <a:t>基本塾優遊 八坂台</a:t>
                       </a:r>
                       <a:endParaRPr lang="en-US" sz="1100" dirty="0">
                         <a:latin typeface="Meiryo" charset="0"/>
@@ -5678,7 +8237,7 @@
                           <a:ea typeface="Meiryo" pitchFamily="34" charset="-122"/>
                           <a:cs typeface="Meiryo" pitchFamily="34" charset="-120"/>
                         </a:rPr>
-                        <a:t>株式会社ベストグロウ</a:t>
+                        <a:t>NPO法人 基本塾</a:t>
                       </a:r>
                       <a:endParaRPr lang="en-US" sz="1100" dirty="0">
                         <a:latin typeface="Meiryo" charset="0"/>
@@ -5743,7 +8302,793 @@
                           <a:ea typeface="Meiryo" pitchFamily="34" charset="-122"/>
                           <a:cs typeface="Meiryo" pitchFamily="34" charset="-120"/>
                         </a:rPr>
-                        <a:t>田間1-6-4</a:t>
+                        <a:t>八坂台5-11-1</a:t>
+                      </a:r>
+                      <a:endParaRPr lang="en-US" sz="1100" dirty="0">
+                        <a:latin typeface="Meiryo" charset="0"/>
+                        <a:ea typeface="Meiryo" charset="0"/>
+                        <a:cs typeface="Meiryo" charset="0"/>
+                      </a:endParaRPr>
+                    </a:p>
+                  </a:txBody>
+                  <a:tcPr anchor="ctr" marT="18000" marB="18000" marL="64008" marR="45720">
+                    <a:lnL w="9525" cap="flat" cmpd="sng" algn="ctr">
+                      <a:solidFill>
+                        <a:srgbClr val="BFBFBF"/>
+                      </a:solidFill>
+                      <a:prstDash val="solid"/>
+                      <a:round/>
+                      <a:headEnd type="none" w="med" len="med"/>
+                      <a:tailEnd type="none" w="med" len="med"/>
+                    </a:lnL>
+                    <a:lnR w="9525" cap="flat" cmpd="sng" algn="ctr">
+                      <a:solidFill>
+                        <a:srgbClr val="BFBFBF"/>
+                      </a:solidFill>
+                      <a:prstDash val="solid"/>
+                      <a:round/>
+                      <a:headEnd type="none" w="med" len="med"/>
+                      <a:tailEnd type="none" w="med" len="med"/>
+                    </a:lnR>
+                    <a:lnT w="9525" cap="flat" cmpd="sng" algn="ctr">
+                      <a:solidFill>
+                        <a:srgbClr val="BFBFBF"/>
+                      </a:solidFill>
+                      <a:prstDash val="solid"/>
+                      <a:round/>
+                      <a:headEnd type="none" w="med" len="med"/>
+                      <a:tailEnd type="none" w="med" len="med"/>
+                    </a:lnT>
+                    <a:lnB w="9525" cap="flat" cmpd="sng" algn="ctr">
+                      <a:solidFill>
+                        <a:srgbClr val="BFBFBF"/>
+                      </a:solidFill>
+                      <a:prstDash val="solid"/>
+                      <a:round/>
+                      <a:headEnd type="none" w="med" len="med"/>
+                      <a:tailEnd type="none" w="med" len="med"/>
+                    </a:lnB>
+                  </a:tcPr>
+                </a:tc>
+                <a:tc>
+                  <a:txBody>
+                    <a:bodyPr/>
+                    <a:lstStyle/>
+                    <a:p>
+                      <a:pPr marL="0" indent="0" algn="l">
+                        <a:buNone/>
+                      </a:pPr>
+                      <a:r>
+                        <a:rPr lang="en-US" sz="900" dirty="0">
+                          <a:solidFill>
+                            <a:srgbClr val="222222"/>
+                          </a:solidFill>
+                          <a:latin typeface="Meiryo" pitchFamily="34" charset="0"/>
+                          <a:ea typeface="Meiryo" pitchFamily="34" charset="-122"/>
+                          <a:cs typeface="Meiryo" pitchFamily="34" charset="-120"/>
+                        </a:rPr>
+                        <a:t>0475-51-5010</a:t>
+                      </a:r>
+                      <a:endParaRPr lang="en-US" sz="1100" dirty="0">
+                        <a:latin typeface="Meiryo" charset="0"/>
+                        <a:ea typeface="Meiryo" charset="0"/>
+                        <a:cs typeface="Meiryo" charset="0"/>
+                      </a:endParaRPr>
+                    </a:p>
+                  </a:txBody>
+                  <a:tcPr anchor="ctr" marT="18000" marB="18000" marL="64008" marR="45720">
+                    <a:lnL w="9525" cap="flat" cmpd="sng" algn="ctr">
+                      <a:solidFill>
+                        <a:srgbClr val="BFBFBF"/>
+                      </a:solidFill>
+                      <a:prstDash val="solid"/>
+                      <a:round/>
+                      <a:headEnd type="none" w="med" len="med"/>
+                      <a:tailEnd type="none" w="med" len="med"/>
+                    </a:lnL>
+                    <a:lnR w="9525" cap="flat" cmpd="sng" algn="ctr">
+                      <a:solidFill>
+                        <a:srgbClr val="BFBFBF"/>
+                      </a:solidFill>
+                      <a:prstDash val="solid"/>
+                      <a:round/>
+                      <a:headEnd type="none" w="med" len="med"/>
+                      <a:tailEnd type="none" w="med" len="med"/>
+                    </a:lnR>
+                    <a:lnT w="9525" cap="flat" cmpd="sng" algn="ctr">
+                      <a:solidFill>
+                        <a:srgbClr val="BFBFBF"/>
+                      </a:solidFill>
+                      <a:prstDash val="solid"/>
+                      <a:round/>
+                      <a:headEnd type="none" w="med" len="med"/>
+                      <a:tailEnd type="none" w="med" len="med"/>
+                    </a:lnT>
+                    <a:lnB w="9525" cap="flat" cmpd="sng" algn="ctr">
+                      <a:solidFill>
+                        <a:srgbClr val="BFBFBF"/>
+                      </a:solidFill>
+                      <a:prstDash val="solid"/>
+                      <a:round/>
+                      <a:headEnd type="none" w="med" len="med"/>
+                      <a:tailEnd type="none" w="med" len="med"/>
+                    </a:lnB>
+                  </a:tcPr>
+                </a:tc>
+                <a:tc>
+                  <a:txBody>
+                    <a:bodyPr/>
+                    <a:lstStyle/>
+                    <a:p>
+                      <a:pPr marL="0" indent="0" algn="l">
+                        <a:buNone/>
+                      </a:pPr>
+                      <a:r>
+                        <a:rPr lang="en-US" sz="900" dirty="0" u="sng">
+                          <a:solidFill>
+                            <a:srgbClr val="1F5FA8"/>
+                          </a:solidFill>
+                          <a:latin typeface="Meiryo" charset="0"/>
+                          <a:ea typeface="Meiryo" charset="0"/>
+                          <a:cs typeface="Meiryo" charset="0"/>
+                          <a:hlinkClick r:id="rId8"/>
+                        </a:rPr>
+                        <a:t>kihonjuku-yuuyuu.com</a:t>
+                      </a:r>
+                    </a:p>
+                  </a:txBody>
+                  <a:tcPr anchor="ctr" marT="18000" marB="18000" marL="64008" marR="45720">
+                    <a:lnL w="9525" cap="flat" cmpd="sng" algn="ctr">
+                      <a:solidFill>
+                        <a:srgbClr val="BFBFBF"/>
+                      </a:solidFill>
+                      <a:prstDash val="solid"/>
+                      <a:round/>
+                      <a:headEnd type="none" w="med" len="med"/>
+                      <a:tailEnd type="none" w="med" len="med"/>
+                    </a:lnL>
+                    <a:lnR w="9525" cap="flat" cmpd="sng" algn="ctr">
+                      <a:solidFill>
+                        <a:srgbClr val="BFBFBF"/>
+                      </a:solidFill>
+                      <a:prstDash val="solid"/>
+                      <a:round/>
+                      <a:headEnd type="none" w="med" len="med"/>
+                      <a:tailEnd type="none" w="med" len="med"/>
+                    </a:lnR>
+                    <a:lnT w="9525" cap="flat" cmpd="sng" algn="ctr">
+                      <a:solidFill>
+                        <a:srgbClr val="BFBFBF"/>
+                      </a:solidFill>
+                      <a:prstDash val="solid"/>
+                      <a:round/>
+                      <a:headEnd type="none" w="med" len="med"/>
+                      <a:tailEnd type="none" w="med" len="med"/>
+                    </a:lnT>
+                    <a:lnB w="9525" cap="flat" cmpd="sng" algn="ctr">
+                      <a:solidFill>
+                        <a:srgbClr val="BFBFBF"/>
+                      </a:solidFill>
+                      <a:prstDash val="solid"/>
+                      <a:round/>
+                      <a:headEnd type="none" w="med" len="med"/>
+                      <a:tailEnd type="none" w="med" len="med"/>
+                    </a:lnB>
+                  </a:tcPr>
+                </a:tc>
+                <a:extLst>
+                  <a:ext uri="{0D108BD9-81ED-4DB2-BD59-A6C34878D82A}">
+                    <a16:rowId xmlns:a16="http://schemas.microsoft.com/office/drawing/2014/main" val="10001"/>
+                  </a:ext>
+                </a:extLst>
+              </a:tr>
+              <a:tr h="305972">
+                <a:tc>
+                  <a:txBody>
+                    <a:bodyPr/>
+                    <a:lstStyle/>
+                    <a:p>
+                      <a:pPr marL="0" indent="0" algn="ctr">
+                        <a:buNone/>
+                      </a:pPr>
+                      <a:r>
+                        <a:rPr lang="en-US" sz="900" b="1" dirty="0">
+                          <a:solidFill>
+                            <a:srgbClr val="222222"/>
+                          </a:solidFill>
+                          <a:latin typeface="Meiryo" pitchFamily="34" charset="0"/>
+                          <a:ea typeface="Meiryo" pitchFamily="34" charset="-122"/>
+                          <a:cs typeface="Meiryo" pitchFamily="34" charset="-120"/>
+                        </a:rPr>
+                        <a:t>⑥</a:t>
+                      </a:r>
+                      <a:endParaRPr lang="en-US" sz="1100" dirty="0">
+                        <a:latin typeface="Meiryo" charset="0"/>
+                        <a:ea typeface="Meiryo" charset="0"/>
+                        <a:cs typeface="Meiryo" charset="0"/>
+                      </a:endParaRPr>
+                    </a:p>
+                  </a:txBody>
+                  <a:tcPr anchor="ctr" marT="18000" marB="18000" marL="64008" marR="45720">
+                    <a:lnL w="9525" cap="flat" cmpd="sng" algn="ctr">
+                      <a:solidFill>
+                        <a:srgbClr val="BFBFBF"/>
+                      </a:solidFill>
+                      <a:prstDash val="solid"/>
+                      <a:round/>
+                      <a:headEnd type="none" w="med" len="med"/>
+                      <a:tailEnd type="none" w="med" len="med"/>
+                    </a:lnL>
+                    <a:lnR w="9525" cap="flat" cmpd="sng" algn="ctr">
+                      <a:solidFill>
+                        <a:srgbClr val="BFBFBF"/>
+                      </a:solidFill>
+                      <a:prstDash val="solid"/>
+                      <a:round/>
+                      <a:headEnd type="none" w="med" len="med"/>
+                      <a:tailEnd type="none" w="med" len="med"/>
+                    </a:lnR>
+                    <a:lnT w="9525" cap="flat" cmpd="sng" algn="ctr">
+                      <a:solidFill>
+                        <a:srgbClr val="BFBFBF"/>
+                      </a:solidFill>
+                      <a:prstDash val="solid"/>
+                      <a:round/>
+                      <a:headEnd type="none" w="med" len="med"/>
+                      <a:tailEnd type="none" w="med" len="med"/>
+                    </a:lnT>
+                    <a:lnB w="9525" cap="flat" cmpd="sng" algn="ctr">
+                      <a:solidFill>
+                        <a:srgbClr val="BFBFBF"/>
+                      </a:solidFill>
+                      <a:prstDash val="solid"/>
+                      <a:round/>
+                      <a:headEnd type="none" w="med" len="med"/>
+                      <a:tailEnd type="none" w="med" len="med"/>
+                    </a:lnB>
+                  </a:tcPr>
+                </a:tc>
+                <a:tc>
+                  <a:txBody>
+                    <a:bodyPr/>
+                    <a:lstStyle/>
+                    <a:p>
+                      <a:pPr marL="0" indent="0" algn="l">
+                        <a:buNone/>
+                      </a:pPr>
+                      <a:r>
+                        <a:rPr lang="en-US" sz="900" b="1" dirty="0">
+                          <a:solidFill>
+                            <a:srgbClr val="222222"/>
+                          </a:solidFill>
+                          <a:latin typeface="Meiryo" pitchFamily="34" charset="0"/>
+                          <a:ea typeface="Meiryo" pitchFamily="34" charset="-122"/>
+                          <a:cs typeface="Meiryo" pitchFamily="34" charset="-120"/>
+                        </a:rPr>
+                        <a:t>基本塾優遊 八坂西</a:t>
+                      </a:r>
+                      <a:endParaRPr lang="en-US" sz="1100" dirty="0">
+                        <a:latin typeface="Meiryo" charset="0"/>
+                        <a:ea typeface="Meiryo" charset="0"/>
+                        <a:cs typeface="Meiryo" charset="0"/>
+                      </a:endParaRPr>
+                    </a:p>
+                  </a:txBody>
+                  <a:tcPr anchor="ctr" marT="18000" marB="18000" marL="64008" marR="45720">
+                    <a:lnL w="9525" cap="flat" cmpd="sng" algn="ctr">
+                      <a:solidFill>
+                        <a:srgbClr val="BFBFBF"/>
+                      </a:solidFill>
+                      <a:prstDash val="solid"/>
+                      <a:round/>
+                      <a:headEnd type="none" w="med" len="med"/>
+                      <a:tailEnd type="none" w="med" len="med"/>
+                    </a:lnL>
+                    <a:lnR w="9525" cap="flat" cmpd="sng" algn="ctr">
+                      <a:solidFill>
+                        <a:srgbClr val="BFBFBF"/>
+                      </a:solidFill>
+                      <a:prstDash val="solid"/>
+                      <a:round/>
+                      <a:headEnd type="none" w="med" len="med"/>
+                      <a:tailEnd type="none" w="med" len="med"/>
+                    </a:lnR>
+                    <a:lnT w="9525" cap="flat" cmpd="sng" algn="ctr">
+                      <a:solidFill>
+                        <a:srgbClr val="BFBFBF"/>
+                      </a:solidFill>
+                      <a:prstDash val="solid"/>
+                      <a:round/>
+                      <a:headEnd type="none" w="med" len="med"/>
+                      <a:tailEnd type="none" w="med" len="med"/>
+                    </a:lnT>
+                    <a:lnB w="9525" cap="flat" cmpd="sng" algn="ctr">
+                      <a:solidFill>
+                        <a:srgbClr val="BFBFBF"/>
+                      </a:solidFill>
+                      <a:prstDash val="solid"/>
+                      <a:round/>
+                      <a:headEnd type="none" w="med" len="med"/>
+                      <a:tailEnd type="none" w="med" len="med"/>
+                    </a:lnB>
+                  </a:tcPr>
+                </a:tc>
+                <a:tc>
+                  <a:txBody>
+                    <a:bodyPr/>
+                    <a:lstStyle/>
+                    <a:p>
+                      <a:pPr marL="0" indent="0" algn="l">
+                        <a:buNone/>
+                      </a:pPr>
+                      <a:r>
+                        <a:rPr lang="en-US" sz="900" dirty="0">
+                          <a:solidFill>
+                            <a:srgbClr val="222222"/>
+                          </a:solidFill>
+                          <a:latin typeface="Meiryo" pitchFamily="34" charset="0"/>
+                          <a:ea typeface="Meiryo" pitchFamily="34" charset="-122"/>
+                          <a:cs typeface="Meiryo" pitchFamily="34" charset="-120"/>
+                        </a:rPr>
+                        <a:t>NPO法人 基本塾</a:t>
+                      </a:r>
+                      <a:endParaRPr lang="en-US" sz="1100" dirty="0">
+                        <a:latin typeface="Meiryo" charset="0"/>
+                        <a:ea typeface="Meiryo" charset="0"/>
+                        <a:cs typeface="Meiryo" charset="0"/>
+                      </a:endParaRPr>
+                    </a:p>
+                  </a:txBody>
+                  <a:tcPr anchor="ctr" marT="18000" marB="18000" marL="64008" marR="45720">
+                    <a:lnL w="9525" cap="flat" cmpd="sng" algn="ctr">
+                      <a:solidFill>
+                        <a:srgbClr val="BFBFBF"/>
+                      </a:solidFill>
+                      <a:prstDash val="solid"/>
+                      <a:round/>
+                      <a:headEnd type="none" w="med" len="med"/>
+                      <a:tailEnd type="none" w="med" len="med"/>
+                    </a:lnL>
+                    <a:lnR w="9525" cap="flat" cmpd="sng" algn="ctr">
+                      <a:solidFill>
+                        <a:srgbClr val="BFBFBF"/>
+                      </a:solidFill>
+                      <a:prstDash val="solid"/>
+                      <a:round/>
+                      <a:headEnd type="none" w="med" len="med"/>
+                      <a:tailEnd type="none" w="med" len="med"/>
+                    </a:lnR>
+                    <a:lnT w="9525" cap="flat" cmpd="sng" algn="ctr">
+                      <a:solidFill>
+                        <a:srgbClr val="BFBFBF"/>
+                      </a:solidFill>
+                      <a:prstDash val="solid"/>
+                      <a:round/>
+                      <a:headEnd type="none" w="med" len="med"/>
+                      <a:tailEnd type="none" w="med" len="med"/>
+                    </a:lnT>
+                    <a:lnB w="9525" cap="flat" cmpd="sng" algn="ctr">
+                      <a:solidFill>
+                        <a:srgbClr val="BFBFBF"/>
+                      </a:solidFill>
+                      <a:prstDash val="solid"/>
+                      <a:round/>
+                      <a:headEnd type="none" w="med" len="med"/>
+                      <a:tailEnd type="none" w="med" len="med"/>
+                    </a:lnB>
+                  </a:tcPr>
+                </a:tc>
+                <a:tc>
+                  <a:txBody>
+                    <a:bodyPr/>
+                    <a:lstStyle/>
+                    <a:p>
+                      <a:pPr marL="0" indent="0" algn="l">
+                        <a:buNone/>
+                      </a:pPr>
+                      <a:r>
+                        <a:rPr lang="en-US" sz="900" dirty="0">
+                          <a:solidFill>
+                            <a:srgbClr val="222222"/>
+                          </a:solidFill>
+                          <a:latin typeface="Meiryo" pitchFamily="34" charset="0"/>
+                          <a:ea typeface="Meiryo" pitchFamily="34" charset="-122"/>
+                          <a:cs typeface="Meiryo" pitchFamily="34" charset="-120"/>
+                        </a:rPr>
+                        <a:t>八坂台4-2-4</a:t>
+                      </a:r>
+                      <a:endParaRPr lang="en-US" sz="1100" dirty="0">
+                        <a:latin typeface="Meiryo" charset="0"/>
+                        <a:ea typeface="Meiryo" charset="0"/>
+                        <a:cs typeface="Meiryo" charset="0"/>
+                      </a:endParaRPr>
+                    </a:p>
+                  </a:txBody>
+                  <a:tcPr anchor="ctr" marT="18000" marB="18000" marL="64008" marR="45720">
+                    <a:lnL w="9525" cap="flat" cmpd="sng" algn="ctr">
+                      <a:solidFill>
+                        <a:srgbClr val="BFBFBF"/>
+                      </a:solidFill>
+                      <a:prstDash val="solid"/>
+                      <a:round/>
+                      <a:headEnd type="none" w="med" len="med"/>
+                      <a:tailEnd type="none" w="med" len="med"/>
+                    </a:lnL>
+                    <a:lnR w="9525" cap="flat" cmpd="sng" algn="ctr">
+                      <a:solidFill>
+                        <a:srgbClr val="BFBFBF"/>
+                      </a:solidFill>
+                      <a:prstDash val="solid"/>
+                      <a:round/>
+                      <a:headEnd type="none" w="med" len="med"/>
+                      <a:tailEnd type="none" w="med" len="med"/>
+                    </a:lnR>
+                    <a:lnT w="9525" cap="flat" cmpd="sng" algn="ctr">
+                      <a:solidFill>
+                        <a:srgbClr val="BFBFBF"/>
+                      </a:solidFill>
+                      <a:prstDash val="solid"/>
+                      <a:round/>
+                      <a:headEnd type="none" w="med" len="med"/>
+                      <a:tailEnd type="none" w="med" len="med"/>
+                    </a:lnT>
+                    <a:lnB w="9525" cap="flat" cmpd="sng" algn="ctr">
+                      <a:solidFill>
+                        <a:srgbClr val="BFBFBF"/>
+                      </a:solidFill>
+                      <a:prstDash val="solid"/>
+                      <a:round/>
+                      <a:headEnd type="none" w="med" len="med"/>
+                      <a:tailEnd type="none" w="med" len="med"/>
+                    </a:lnB>
+                  </a:tcPr>
+                </a:tc>
+                <a:tc>
+                  <a:txBody>
+                    <a:bodyPr/>
+                    <a:lstStyle/>
+                    <a:p>
+                      <a:pPr marL="0" indent="0" algn="l">
+                        <a:buNone/>
+                      </a:pPr>
+                      <a:r>
+                        <a:rPr lang="en-US" sz="900" dirty="0">
+                          <a:solidFill>
+                            <a:srgbClr val="222222"/>
+                          </a:solidFill>
+                          <a:latin typeface="Meiryo" pitchFamily="34" charset="0"/>
+                          <a:ea typeface="Meiryo" pitchFamily="34" charset="-122"/>
+                          <a:cs typeface="Meiryo" pitchFamily="34" charset="-120"/>
+                        </a:rPr>
+                        <a:t>0475-51-6631</a:t>
+                      </a:r>
+                      <a:endParaRPr lang="en-US" sz="1100" dirty="0">
+                        <a:latin typeface="Meiryo" charset="0"/>
+                        <a:ea typeface="Meiryo" charset="0"/>
+                        <a:cs typeface="Meiryo" charset="0"/>
+                      </a:endParaRPr>
+                    </a:p>
+                  </a:txBody>
+                  <a:tcPr anchor="ctr" marT="18000" marB="18000" marL="64008" marR="45720">
+                    <a:lnL w="9525" cap="flat" cmpd="sng" algn="ctr">
+                      <a:solidFill>
+                        <a:srgbClr val="BFBFBF"/>
+                      </a:solidFill>
+                      <a:prstDash val="solid"/>
+                      <a:round/>
+                      <a:headEnd type="none" w="med" len="med"/>
+                      <a:tailEnd type="none" w="med" len="med"/>
+                    </a:lnL>
+                    <a:lnR w="9525" cap="flat" cmpd="sng" algn="ctr">
+                      <a:solidFill>
+                        <a:srgbClr val="BFBFBF"/>
+                      </a:solidFill>
+                      <a:prstDash val="solid"/>
+                      <a:round/>
+                      <a:headEnd type="none" w="med" len="med"/>
+                      <a:tailEnd type="none" w="med" len="med"/>
+                    </a:lnR>
+                    <a:lnT w="9525" cap="flat" cmpd="sng" algn="ctr">
+                      <a:solidFill>
+                        <a:srgbClr val="BFBFBF"/>
+                      </a:solidFill>
+                      <a:prstDash val="solid"/>
+                      <a:round/>
+                      <a:headEnd type="none" w="med" len="med"/>
+                      <a:tailEnd type="none" w="med" len="med"/>
+                    </a:lnT>
+                    <a:lnB w="9525" cap="flat" cmpd="sng" algn="ctr">
+                      <a:solidFill>
+                        <a:srgbClr val="BFBFBF"/>
+                      </a:solidFill>
+                      <a:prstDash val="solid"/>
+                      <a:round/>
+                      <a:headEnd type="none" w="med" len="med"/>
+                      <a:tailEnd type="none" w="med" len="med"/>
+                    </a:lnB>
+                  </a:tcPr>
+                </a:tc>
+                <a:tc>
+                  <a:txBody>
+                    <a:bodyPr/>
+                    <a:lstStyle/>
+                    <a:p>
+                      <a:pPr marL="0" indent="0" algn="l">
+                        <a:buNone/>
+                      </a:pPr>
+                      <a:r>
+                        <a:rPr lang="en-US" sz="900" dirty="0" u="sng">
+                          <a:solidFill>
+                            <a:srgbClr val="1F5FA8"/>
+                          </a:solidFill>
+                          <a:latin typeface="Meiryo" charset="0"/>
+                          <a:ea typeface="Meiryo" charset="0"/>
+                          <a:cs typeface="Meiryo" charset="0"/>
+                          <a:hlinkClick r:id="rId8"/>
+                        </a:rPr>
+                        <a:t>kihonjuku-yuuyuu.com</a:t>
+                      </a:r>
+                    </a:p>
+                  </a:txBody>
+                  <a:tcPr anchor="ctr" marT="18000" marB="18000" marL="64008" marR="45720">
+                    <a:lnL w="9525" cap="flat" cmpd="sng" algn="ctr">
+                      <a:solidFill>
+                        <a:srgbClr val="BFBFBF"/>
+                      </a:solidFill>
+                      <a:prstDash val="solid"/>
+                      <a:round/>
+                      <a:headEnd type="none" w="med" len="med"/>
+                      <a:tailEnd type="none" w="med" len="med"/>
+                    </a:lnL>
+                    <a:lnR w="9525" cap="flat" cmpd="sng" algn="ctr">
+                      <a:solidFill>
+                        <a:srgbClr val="BFBFBF"/>
+                      </a:solidFill>
+                      <a:prstDash val="solid"/>
+                      <a:round/>
+                      <a:headEnd type="none" w="med" len="med"/>
+                      <a:tailEnd type="none" w="med" len="med"/>
+                    </a:lnR>
+                    <a:lnT w="9525" cap="flat" cmpd="sng" algn="ctr">
+                      <a:solidFill>
+                        <a:srgbClr val="BFBFBF"/>
+                      </a:solidFill>
+                      <a:prstDash val="solid"/>
+                      <a:round/>
+                      <a:headEnd type="none" w="med" len="med"/>
+                      <a:tailEnd type="none" w="med" len="med"/>
+                    </a:lnT>
+                    <a:lnB w="9525" cap="flat" cmpd="sng" algn="ctr">
+                      <a:solidFill>
+                        <a:srgbClr val="BFBFBF"/>
+                      </a:solidFill>
+                      <a:prstDash val="solid"/>
+                      <a:round/>
+                      <a:headEnd type="none" w="med" len="med"/>
+                      <a:tailEnd type="none" w="med" len="med"/>
+                    </a:lnB>
+                  </a:tcPr>
+                </a:tc>
+                <a:extLst>
+                  <a:ext uri="{0D108BD9-81ED-4DB2-BD59-A6C34878D82A}">
+                    <a16:rowId xmlns:a16="http://schemas.microsoft.com/office/drawing/2014/main" val="10001"/>
+                  </a:ext>
+                </a:extLst>
+              </a:tr>
+              <a:tr h="305972">
+                <a:tc>
+                  <a:txBody>
+                    <a:bodyPr/>
+                    <a:lstStyle/>
+                    <a:p>
+                      <a:pPr marL="0" indent="0" algn="ctr">
+                        <a:buNone/>
+                      </a:pPr>
+                      <a:r>
+                        <a:rPr lang="en-US" sz="900" b="1" dirty="0">
+                          <a:solidFill>
+                            <a:srgbClr val="222222"/>
+                          </a:solidFill>
+                          <a:latin typeface="Meiryo" pitchFamily="34" charset="0"/>
+                          <a:ea typeface="Meiryo" pitchFamily="34" charset="-122"/>
+                          <a:cs typeface="Meiryo" pitchFamily="34" charset="-120"/>
+                        </a:rPr>
+                        <a:t>⑥</a:t>
+                      </a:r>
+                      <a:endParaRPr lang="en-US" sz="1100" dirty="0">
+                        <a:latin typeface="Meiryo" charset="0"/>
+                        <a:ea typeface="Meiryo" charset="0"/>
+                        <a:cs typeface="Meiryo" charset="0"/>
+                      </a:endParaRPr>
+                    </a:p>
+                  </a:txBody>
+                  <a:tcPr anchor="ctr" marT="18000" marB="18000" marL="64008" marR="45720">
+                    <a:lnL w="9525" cap="flat" cmpd="sng" algn="ctr">
+                      <a:solidFill>
+                        <a:srgbClr val="BFBFBF"/>
+                      </a:solidFill>
+                      <a:prstDash val="solid"/>
+                      <a:round/>
+                      <a:headEnd type="none" w="med" len="med"/>
+                      <a:tailEnd type="none" w="med" len="med"/>
+                    </a:lnL>
+                    <a:lnR w="9525" cap="flat" cmpd="sng" algn="ctr">
+                      <a:solidFill>
+                        <a:srgbClr val="BFBFBF"/>
+                      </a:solidFill>
+                      <a:prstDash val="solid"/>
+                      <a:round/>
+                      <a:headEnd type="none" w="med" len="med"/>
+                      <a:tailEnd type="none" w="med" len="med"/>
+                    </a:lnR>
+                    <a:lnT w="9525" cap="flat" cmpd="sng" algn="ctr">
+                      <a:solidFill>
+                        <a:srgbClr val="BFBFBF"/>
+                      </a:solidFill>
+                      <a:prstDash val="solid"/>
+                      <a:round/>
+                      <a:headEnd type="none" w="med" len="med"/>
+                      <a:tailEnd type="none" w="med" len="med"/>
+                    </a:lnT>
+                    <a:lnB w="9525" cap="flat" cmpd="sng" algn="ctr">
+                      <a:solidFill>
+                        <a:srgbClr val="BFBFBF"/>
+                      </a:solidFill>
+                      <a:prstDash val="solid"/>
+                      <a:round/>
+                      <a:headEnd type="none" w="med" len="med"/>
+                      <a:tailEnd type="none" w="med" len="med"/>
+                    </a:lnB>
+                  </a:tcPr>
+                </a:tc>
+                <a:tc>
+                  <a:txBody>
+                    <a:bodyPr/>
+                    <a:lstStyle/>
+                    <a:p>
+                      <a:pPr marL="0" indent="0" algn="l">
+                        <a:buNone/>
+                      </a:pPr>
+                      <a:r>
+                        <a:rPr lang="en-US" sz="900" b="1" dirty="0">
+                          <a:solidFill>
+                            <a:srgbClr val="222222"/>
+                          </a:solidFill>
+                          <a:latin typeface="Meiryo" pitchFamily="34" charset="0"/>
+                          <a:ea typeface="Meiryo" pitchFamily="34" charset="-122"/>
+                          <a:cs typeface="Meiryo" pitchFamily="34" charset="-120"/>
+                        </a:rPr>
+                        <a:t>基本塾優遊 八坂中央</a:t>
+                      </a:r>
+                      <a:endParaRPr lang="en-US" sz="1100" dirty="0">
+                        <a:latin typeface="Meiryo" charset="0"/>
+                        <a:ea typeface="Meiryo" charset="0"/>
+                        <a:cs typeface="Meiryo" charset="0"/>
+                      </a:endParaRPr>
+                    </a:p>
+                  </a:txBody>
+                  <a:tcPr anchor="ctr" marT="18000" marB="18000" marL="64008" marR="45720">
+                    <a:lnL w="9525" cap="flat" cmpd="sng" algn="ctr">
+                      <a:solidFill>
+                        <a:srgbClr val="BFBFBF"/>
+                      </a:solidFill>
+                      <a:prstDash val="solid"/>
+                      <a:round/>
+                      <a:headEnd type="none" w="med" len="med"/>
+                      <a:tailEnd type="none" w="med" len="med"/>
+                    </a:lnL>
+                    <a:lnR w="9525" cap="flat" cmpd="sng" algn="ctr">
+                      <a:solidFill>
+                        <a:srgbClr val="BFBFBF"/>
+                      </a:solidFill>
+                      <a:prstDash val="solid"/>
+                      <a:round/>
+                      <a:headEnd type="none" w="med" len="med"/>
+                      <a:tailEnd type="none" w="med" len="med"/>
+                    </a:lnR>
+                    <a:lnT w="9525" cap="flat" cmpd="sng" algn="ctr">
+                      <a:solidFill>
+                        <a:srgbClr val="BFBFBF"/>
+                      </a:solidFill>
+                      <a:prstDash val="solid"/>
+                      <a:round/>
+                      <a:headEnd type="none" w="med" len="med"/>
+                      <a:tailEnd type="none" w="med" len="med"/>
+                    </a:lnT>
+                    <a:lnB w="9525" cap="flat" cmpd="sng" algn="ctr">
+                      <a:solidFill>
+                        <a:srgbClr val="BFBFBF"/>
+                      </a:solidFill>
+                      <a:prstDash val="solid"/>
+                      <a:round/>
+                      <a:headEnd type="none" w="med" len="med"/>
+                      <a:tailEnd type="none" w="med" len="med"/>
+                    </a:lnB>
+                  </a:tcPr>
+                </a:tc>
+                <a:tc>
+                  <a:txBody>
+                    <a:bodyPr/>
+                    <a:lstStyle/>
+                    <a:p>
+                      <a:pPr marL="0" indent="0" algn="l">
+                        <a:buNone/>
+                      </a:pPr>
+                      <a:r>
+                        <a:rPr lang="en-US" sz="900" dirty="0">
+                          <a:solidFill>
+                            <a:srgbClr val="222222"/>
+                          </a:solidFill>
+                          <a:latin typeface="Meiryo" pitchFamily="34" charset="0"/>
+                          <a:ea typeface="Meiryo" pitchFamily="34" charset="-122"/>
+                          <a:cs typeface="Meiryo" pitchFamily="34" charset="-120"/>
+                        </a:rPr>
+                        <a:t>NPO法人 基本塾</a:t>
+                      </a:r>
+                      <a:endParaRPr lang="en-US" sz="1100" dirty="0">
+                        <a:latin typeface="Meiryo" charset="0"/>
+                        <a:ea typeface="Meiryo" charset="0"/>
+                        <a:cs typeface="Meiryo" charset="0"/>
+                      </a:endParaRPr>
+                    </a:p>
+                  </a:txBody>
+                  <a:tcPr anchor="ctr" marT="18000" marB="18000" marL="64008" marR="45720">
+                    <a:lnL w="9525" cap="flat" cmpd="sng" algn="ctr">
+                      <a:solidFill>
+                        <a:srgbClr val="BFBFBF"/>
+                      </a:solidFill>
+                      <a:prstDash val="solid"/>
+                      <a:round/>
+                      <a:headEnd type="none" w="med" len="med"/>
+                      <a:tailEnd type="none" w="med" len="med"/>
+                    </a:lnL>
+                    <a:lnR w="9525" cap="flat" cmpd="sng" algn="ctr">
+                      <a:solidFill>
+                        <a:srgbClr val="BFBFBF"/>
+                      </a:solidFill>
+                      <a:prstDash val="solid"/>
+                      <a:round/>
+                      <a:headEnd type="none" w="med" len="med"/>
+                      <a:tailEnd type="none" w="med" len="med"/>
+                    </a:lnR>
+                    <a:lnT w="9525" cap="flat" cmpd="sng" algn="ctr">
+                      <a:solidFill>
+                        <a:srgbClr val="BFBFBF"/>
+                      </a:solidFill>
+                      <a:prstDash val="solid"/>
+                      <a:round/>
+                      <a:headEnd type="none" w="med" len="med"/>
+                      <a:tailEnd type="none" w="med" len="med"/>
+                    </a:lnT>
+                    <a:lnB w="9525" cap="flat" cmpd="sng" algn="ctr">
+                      <a:solidFill>
+                        <a:srgbClr val="BFBFBF"/>
+                      </a:solidFill>
+                      <a:prstDash val="solid"/>
+                      <a:round/>
+                      <a:headEnd type="none" w="med" len="med"/>
+                      <a:tailEnd type="none" w="med" len="med"/>
+                    </a:lnB>
+                  </a:tcPr>
+                </a:tc>
+                <a:tc>
+                  <a:txBody>
+                    <a:bodyPr/>
+                    <a:lstStyle/>
+                    <a:p>
+                      <a:pPr marL="0" indent="0" algn="l">
+                        <a:buNone/>
+                      </a:pPr>
+                      <a:r>
+                        <a:rPr lang="en-US" sz="900" dirty="0">
+                          <a:solidFill>
+                            <a:srgbClr val="222222"/>
+                          </a:solidFill>
+                          <a:latin typeface="Meiryo" pitchFamily="34" charset="0"/>
+                          <a:ea typeface="Meiryo" pitchFamily="34" charset="-122"/>
+                          <a:cs typeface="Meiryo" pitchFamily="34" charset="-120"/>
+                        </a:rPr>
+                        <a:t>八坂台地区（要確認）</a:t>
                       </a:r>
                       <a:endParaRPr lang="en-US" sz="1100" dirty="0">
                         <a:latin typeface="Meiryo" charset="0"/>
@@ -5872,9 +9217,9 @@
                           <a:latin typeface="Meiryo" charset="0"/>
                           <a:ea typeface="Meiryo" charset="0"/>
                           <a:cs typeface="Meiryo" charset="0"/>
-                          <a:hlinkClick r:id="rId6"/>
+                          <a:hlinkClick r:id="rId8"/>
                         </a:rPr>
-                        <a:t>kp-daini-tougane.com</a:t>
+                        <a:t>kihonjuku-yuuyuu.com</a:t>
                       </a:r>
                     </a:p>
                   </a:txBody>
@@ -5923,7 +9268,7 @@
                   </a:ext>
                 </a:extLst>
               </a:tr>
-              <a:tr h="331469">
+              <a:tr h="305972">
                 <a:tc>
                   <a:txBody>
                     <a:bodyPr/>
@@ -5941,7 +9286,7 @@
                           <a:ea typeface="Meiryo" pitchFamily="34" charset="-122"/>
                           <a:cs typeface="Meiryo" pitchFamily="34" charset="-120"/>
                         </a:rPr>
-                        <a:t>⑤</a:t>
+                        <a:t>⑦</a:t>
                       </a:r>
                       <a:endParaRPr lang="en-US" sz="1100" dirty="0">
                         <a:latin typeface="Meiryo" charset="0"/>
@@ -6006,7 +9351,7 @@
                           <a:ea typeface="Meiryo" pitchFamily="34" charset="-122"/>
                           <a:cs typeface="Meiryo" pitchFamily="34" charset="-120"/>
                         </a:rPr>
-                        <a:t>基本塾優遊 日吉台</a:t>
+                        <a:t>児童発達支援コンパッション保育所</a:t>
                       </a:r>
                       <a:endParaRPr lang="en-US" sz="1100" dirty="0">
                         <a:latin typeface="Meiryo" charset="0"/>
@@ -6071,7 +9416,7 @@
                           <a:ea typeface="Meiryo" pitchFamily="34" charset="-122"/>
                           <a:cs typeface="Meiryo" pitchFamily="34" charset="-120"/>
                         </a:rPr>
-                        <a:t>NPO法人 基本塾</a:t>
+                        <a:t>要確認（保育所併設）</a:t>
                       </a:r>
                       <a:endParaRPr lang="en-US" sz="1100" dirty="0">
                         <a:latin typeface="Meiryo" charset="0"/>
@@ -6136,1579 +9481,7 @@
                           <a:ea typeface="Meiryo" pitchFamily="34" charset="-122"/>
                           <a:cs typeface="Meiryo" pitchFamily="34" charset="-120"/>
                         </a:rPr>
-                        <a:t>日吉台2-26-3</a:t>
-                      </a:r>
-                      <a:endParaRPr lang="en-US" sz="1100" dirty="0">
-                        <a:latin typeface="Meiryo" charset="0"/>
-                        <a:ea typeface="Meiryo" charset="0"/>
-                        <a:cs typeface="Meiryo" charset="0"/>
-                      </a:endParaRPr>
-                    </a:p>
-                  </a:txBody>
-                  <a:tcPr anchor="ctr" marT="18000" marB="18000" marL="64008" marR="45720">
-                    <a:lnL w="9525" cap="flat" cmpd="sng" algn="ctr">
-                      <a:solidFill>
-                        <a:srgbClr val="BFBFBF"/>
-                      </a:solidFill>
-                      <a:prstDash val="solid"/>
-                      <a:round/>
-                      <a:headEnd type="none" w="med" len="med"/>
-                      <a:tailEnd type="none" w="med" len="med"/>
-                    </a:lnL>
-                    <a:lnR w="9525" cap="flat" cmpd="sng" algn="ctr">
-                      <a:solidFill>
-                        <a:srgbClr val="BFBFBF"/>
-                      </a:solidFill>
-                      <a:prstDash val="solid"/>
-                      <a:round/>
-                      <a:headEnd type="none" w="med" len="med"/>
-                      <a:tailEnd type="none" w="med" len="med"/>
-                    </a:lnR>
-                    <a:lnT w="9525" cap="flat" cmpd="sng" algn="ctr">
-                      <a:solidFill>
-                        <a:srgbClr val="BFBFBF"/>
-                      </a:solidFill>
-                      <a:prstDash val="solid"/>
-                      <a:round/>
-                      <a:headEnd type="none" w="med" len="med"/>
-                      <a:tailEnd type="none" w="med" len="med"/>
-                    </a:lnT>
-                    <a:lnB w="9525" cap="flat" cmpd="sng" algn="ctr">
-                      <a:solidFill>
-                        <a:srgbClr val="BFBFBF"/>
-                      </a:solidFill>
-                      <a:prstDash val="solid"/>
-                      <a:round/>
-                      <a:headEnd type="none" w="med" len="med"/>
-                      <a:tailEnd type="none" w="med" len="med"/>
-                    </a:lnB>
-                  </a:tcPr>
-                </a:tc>
-                <a:tc>
-                  <a:txBody>
-                    <a:bodyPr/>
-                    <a:lstStyle/>
-                    <a:p>
-                      <a:pPr marL="0" indent="0" algn="l">
-                        <a:buNone/>
-                      </a:pPr>
-                      <a:r>
-                        <a:rPr lang="en-US" sz="900" dirty="0">
-                          <a:solidFill>
-                            <a:srgbClr val="222222"/>
-                          </a:solidFill>
-                          <a:latin typeface="Meiryo" pitchFamily="34" charset="0"/>
-                          <a:ea typeface="Meiryo" pitchFamily="34" charset="-122"/>
-                          <a:cs typeface="Meiryo" pitchFamily="34" charset="-120"/>
-                        </a:rPr>
-                        <a:t>0475-52-6414</a:t>
-                      </a:r>
-                      <a:endParaRPr lang="en-US" sz="1100" dirty="0">
-                        <a:latin typeface="Meiryo" charset="0"/>
-                        <a:ea typeface="Meiryo" charset="0"/>
-                        <a:cs typeface="Meiryo" charset="0"/>
-                      </a:endParaRPr>
-                    </a:p>
-                  </a:txBody>
-                  <a:tcPr anchor="ctr" marT="18000" marB="18000" marL="64008" marR="45720">
-                    <a:lnL w="9525" cap="flat" cmpd="sng" algn="ctr">
-                      <a:solidFill>
-                        <a:srgbClr val="BFBFBF"/>
-                      </a:solidFill>
-                      <a:prstDash val="solid"/>
-                      <a:round/>
-                      <a:headEnd type="none" w="med" len="med"/>
-                      <a:tailEnd type="none" w="med" len="med"/>
-                    </a:lnL>
-                    <a:lnR w="9525" cap="flat" cmpd="sng" algn="ctr">
-                      <a:solidFill>
-                        <a:srgbClr val="BFBFBF"/>
-                      </a:solidFill>
-                      <a:prstDash val="solid"/>
-                      <a:round/>
-                      <a:headEnd type="none" w="med" len="med"/>
-                      <a:tailEnd type="none" w="med" len="med"/>
-                    </a:lnR>
-                    <a:lnT w="9525" cap="flat" cmpd="sng" algn="ctr">
-                      <a:solidFill>
-                        <a:srgbClr val="BFBFBF"/>
-                      </a:solidFill>
-                      <a:prstDash val="solid"/>
-                      <a:round/>
-                      <a:headEnd type="none" w="med" len="med"/>
-                      <a:tailEnd type="none" w="med" len="med"/>
-                    </a:lnT>
-                    <a:lnB w="9525" cap="flat" cmpd="sng" algn="ctr">
-                      <a:solidFill>
-                        <a:srgbClr val="BFBFBF"/>
-                      </a:solidFill>
-                      <a:prstDash val="solid"/>
-                      <a:round/>
-                      <a:headEnd type="none" w="med" len="med"/>
-                      <a:tailEnd type="none" w="med" len="med"/>
-                    </a:lnB>
-                  </a:tcPr>
-                </a:tc>
-                <a:tc>
-                  <a:txBody>
-                    <a:bodyPr/>
-                    <a:lstStyle/>
-                    <a:p>
-                      <a:pPr marL="0" indent="0" algn="l">
-                        <a:buNone/>
-                      </a:pPr>
-                      <a:r>
-                        <a:rPr lang="en-US" sz="900" dirty="0" u="sng">
-                          <a:solidFill>
-                            <a:srgbClr val="1F5FA8"/>
-                          </a:solidFill>
-                          <a:latin typeface="Meiryo" charset="0"/>
-                          <a:ea typeface="Meiryo" charset="0"/>
-                          <a:cs typeface="Meiryo" charset="0"/>
-                          <a:hlinkClick r:id="rId7"/>
-                        </a:rPr>
-                        <a:t>kihonjuku-yuuyuu.com</a:t>
-                      </a:r>
-                    </a:p>
-                  </a:txBody>
-                  <a:tcPr anchor="ctr" marT="18000" marB="18000" marL="64008" marR="45720">
-                    <a:lnL w="9525" cap="flat" cmpd="sng" algn="ctr">
-                      <a:solidFill>
-                        <a:srgbClr val="BFBFBF"/>
-                      </a:solidFill>
-                      <a:prstDash val="solid"/>
-                      <a:round/>
-                      <a:headEnd type="none" w="med" len="med"/>
-                      <a:tailEnd type="none" w="med" len="med"/>
-                    </a:lnL>
-                    <a:lnR w="9525" cap="flat" cmpd="sng" algn="ctr">
-                      <a:solidFill>
-                        <a:srgbClr val="BFBFBF"/>
-                      </a:solidFill>
-                      <a:prstDash val="solid"/>
-                      <a:round/>
-                      <a:headEnd type="none" w="med" len="med"/>
-                      <a:tailEnd type="none" w="med" len="med"/>
-                    </a:lnR>
-                    <a:lnT w="9525" cap="flat" cmpd="sng" algn="ctr">
-                      <a:solidFill>
-                        <a:srgbClr val="BFBFBF"/>
-                      </a:solidFill>
-                      <a:prstDash val="solid"/>
-                      <a:round/>
-                      <a:headEnd type="none" w="med" len="med"/>
-                      <a:tailEnd type="none" w="med" len="med"/>
-                    </a:lnT>
-                    <a:lnB w="9525" cap="flat" cmpd="sng" algn="ctr">
-                      <a:solidFill>
-                        <a:srgbClr val="BFBFBF"/>
-                      </a:solidFill>
-                      <a:prstDash val="solid"/>
-                      <a:round/>
-                      <a:headEnd type="none" w="med" len="med"/>
-                      <a:tailEnd type="none" w="med" len="med"/>
-                    </a:lnB>
-                  </a:tcPr>
-                </a:tc>
-                <a:extLst>
-                  <a:ext uri="{0D108BD9-81ED-4DB2-BD59-A6C34878D82A}">
-                    <a16:rowId xmlns:a16="http://schemas.microsoft.com/office/drawing/2014/main" val="10001"/>
-                  </a:ext>
-                </a:extLst>
-              </a:tr>
-              <a:tr h="331469">
-                <a:tc>
-                  <a:txBody>
-                    <a:bodyPr/>
-                    <a:lstStyle/>
-                    <a:p>
-                      <a:pPr marL="0" indent="0" algn="ctr">
-                        <a:buNone/>
-                      </a:pPr>
-                      <a:r>
-                        <a:rPr lang="en-US" sz="900" b="1" dirty="0">
-                          <a:solidFill>
-                            <a:srgbClr val="222222"/>
-                          </a:solidFill>
-                          <a:latin typeface="Meiryo" pitchFamily="34" charset="0"/>
-                          <a:ea typeface="Meiryo" pitchFamily="34" charset="-122"/>
-                          <a:cs typeface="Meiryo" pitchFamily="34" charset="-120"/>
-                        </a:rPr>
-                        <a:t>⑤</a:t>
-                      </a:r>
-                      <a:endParaRPr lang="en-US" sz="1100" dirty="0">
-                        <a:latin typeface="Meiryo" charset="0"/>
-                        <a:ea typeface="Meiryo" charset="0"/>
-                        <a:cs typeface="Meiryo" charset="0"/>
-                      </a:endParaRPr>
-                    </a:p>
-                  </a:txBody>
-                  <a:tcPr anchor="ctr" marT="18000" marB="18000" marL="64008" marR="45720">
-                    <a:lnL w="9525" cap="flat" cmpd="sng" algn="ctr">
-                      <a:solidFill>
-                        <a:srgbClr val="BFBFBF"/>
-                      </a:solidFill>
-                      <a:prstDash val="solid"/>
-                      <a:round/>
-                      <a:headEnd type="none" w="med" len="med"/>
-                      <a:tailEnd type="none" w="med" len="med"/>
-                    </a:lnL>
-                    <a:lnR w="9525" cap="flat" cmpd="sng" algn="ctr">
-                      <a:solidFill>
-                        <a:srgbClr val="BFBFBF"/>
-                      </a:solidFill>
-                      <a:prstDash val="solid"/>
-                      <a:round/>
-                      <a:headEnd type="none" w="med" len="med"/>
-                      <a:tailEnd type="none" w="med" len="med"/>
-                    </a:lnR>
-                    <a:lnT w="9525" cap="flat" cmpd="sng" algn="ctr">
-                      <a:solidFill>
-                        <a:srgbClr val="BFBFBF"/>
-                      </a:solidFill>
-                      <a:prstDash val="solid"/>
-                      <a:round/>
-                      <a:headEnd type="none" w="med" len="med"/>
-                      <a:tailEnd type="none" w="med" len="med"/>
-                    </a:lnT>
-                    <a:lnB w="9525" cap="flat" cmpd="sng" algn="ctr">
-                      <a:solidFill>
-                        <a:srgbClr val="BFBFBF"/>
-                      </a:solidFill>
-                      <a:prstDash val="solid"/>
-                      <a:round/>
-                      <a:headEnd type="none" w="med" len="med"/>
-                      <a:tailEnd type="none" w="med" len="med"/>
-                    </a:lnB>
-                  </a:tcPr>
-                </a:tc>
-                <a:tc>
-                  <a:txBody>
-                    <a:bodyPr/>
-                    <a:lstStyle/>
-                    <a:p>
-                      <a:pPr marL="0" indent="0" algn="l">
-                        <a:buNone/>
-                      </a:pPr>
-                      <a:r>
-                        <a:rPr lang="en-US" sz="900" b="1" dirty="0">
-                          <a:solidFill>
-                            <a:srgbClr val="222222"/>
-                          </a:solidFill>
-                          <a:latin typeface="Meiryo" pitchFamily="34" charset="0"/>
-                          <a:ea typeface="Meiryo" pitchFamily="34" charset="-122"/>
-                          <a:cs typeface="Meiryo" pitchFamily="34" charset="-120"/>
-                        </a:rPr>
-                        <a:t>基本塾優遊 松之郷</a:t>
-                      </a:r>
-                      <a:endParaRPr lang="en-US" sz="1100" dirty="0">
-                        <a:latin typeface="Meiryo" charset="0"/>
-                        <a:ea typeface="Meiryo" charset="0"/>
-                        <a:cs typeface="Meiryo" charset="0"/>
-                      </a:endParaRPr>
-                    </a:p>
-                  </a:txBody>
-                  <a:tcPr anchor="ctr" marT="18000" marB="18000" marL="64008" marR="45720">
-                    <a:lnL w="9525" cap="flat" cmpd="sng" algn="ctr">
-                      <a:solidFill>
-                        <a:srgbClr val="BFBFBF"/>
-                      </a:solidFill>
-                      <a:prstDash val="solid"/>
-                      <a:round/>
-                      <a:headEnd type="none" w="med" len="med"/>
-                      <a:tailEnd type="none" w="med" len="med"/>
-                    </a:lnL>
-                    <a:lnR w="9525" cap="flat" cmpd="sng" algn="ctr">
-                      <a:solidFill>
-                        <a:srgbClr val="BFBFBF"/>
-                      </a:solidFill>
-                      <a:prstDash val="solid"/>
-                      <a:round/>
-                      <a:headEnd type="none" w="med" len="med"/>
-                      <a:tailEnd type="none" w="med" len="med"/>
-                    </a:lnR>
-                    <a:lnT w="9525" cap="flat" cmpd="sng" algn="ctr">
-                      <a:solidFill>
-                        <a:srgbClr val="BFBFBF"/>
-                      </a:solidFill>
-                      <a:prstDash val="solid"/>
-                      <a:round/>
-                      <a:headEnd type="none" w="med" len="med"/>
-                      <a:tailEnd type="none" w="med" len="med"/>
-                    </a:lnT>
-                    <a:lnB w="9525" cap="flat" cmpd="sng" algn="ctr">
-                      <a:solidFill>
-                        <a:srgbClr val="BFBFBF"/>
-                      </a:solidFill>
-                      <a:prstDash val="solid"/>
-                      <a:round/>
-                      <a:headEnd type="none" w="med" len="med"/>
-                      <a:tailEnd type="none" w="med" len="med"/>
-                    </a:lnB>
-                  </a:tcPr>
-                </a:tc>
-                <a:tc>
-                  <a:txBody>
-                    <a:bodyPr/>
-                    <a:lstStyle/>
-                    <a:p>
-                      <a:pPr marL="0" indent="0" algn="l">
-                        <a:buNone/>
-                      </a:pPr>
-                      <a:r>
-                        <a:rPr lang="en-US" sz="900" dirty="0">
-                          <a:solidFill>
-                            <a:srgbClr val="222222"/>
-                          </a:solidFill>
-                          <a:latin typeface="Meiryo" pitchFamily="34" charset="0"/>
-                          <a:ea typeface="Meiryo" pitchFamily="34" charset="-122"/>
-                          <a:cs typeface="Meiryo" pitchFamily="34" charset="-120"/>
-                        </a:rPr>
-                        <a:t>NPO法人 基本塾</a:t>
-                      </a:r>
-                      <a:endParaRPr lang="en-US" sz="1100" dirty="0">
-                        <a:latin typeface="Meiryo" charset="0"/>
-                        <a:ea typeface="Meiryo" charset="0"/>
-                        <a:cs typeface="Meiryo" charset="0"/>
-                      </a:endParaRPr>
-                    </a:p>
-                  </a:txBody>
-                  <a:tcPr anchor="ctr" marT="18000" marB="18000" marL="64008" marR="45720">
-                    <a:lnL w="9525" cap="flat" cmpd="sng" algn="ctr">
-                      <a:solidFill>
-                        <a:srgbClr val="BFBFBF"/>
-                      </a:solidFill>
-                      <a:prstDash val="solid"/>
-                      <a:round/>
-                      <a:headEnd type="none" w="med" len="med"/>
-                      <a:tailEnd type="none" w="med" len="med"/>
-                    </a:lnL>
-                    <a:lnR w="9525" cap="flat" cmpd="sng" algn="ctr">
-                      <a:solidFill>
-                        <a:srgbClr val="BFBFBF"/>
-                      </a:solidFill>
-                      <a:prstDash val="solid"/>
-                      <a:round/>
-                      <a:headEnd type="none" w="med" len="med"/>
-                      <a:tailEnd type="none" w="med" len="med"/>
-                    </a:lnR>
-                    <a:lnT w="9525" cap="flat" cmpd="sng" algn="ctr">
-                      <a:solidFill>
-                        <a:srgbClr val="BFBFBF"/>
-                      </a:solidFill>
-                      <a:prstDash val="solid"/>
-                      <a:round/>
-                      <a:headEnd type="none" w="med" len="med"/>
-                      <a:tailEnd type="none" w="med" len="med"/>
-                    </a:lnT>
-                    <a:lnB w="9525" cap="flat" cmpd="sng" algn="ctr">
-                      <a:solidFill>
-                        <a:srgbClr val="BFBFBF"/>
-                      </a:solidFill>
-                      <a:prstDash val="solid"/>
-                      <a:round/>
-                      <a:headEnd type="none" w="med" len="med"/>
-                      <a:tailEnd type="none" w="med" len="med"/>
-                    </a:lnB>
-                  </a:tcPr>
-                </a:tc>
-                <a:tc>
-                  <a:txBody>
-                    <a:bodyPr/>
-                    <a:lstStyle/>
-                    <a:p>
-                      <a:pPr marL="0" indent="0" algn="l">
-                        <a:buNone/>
-                      </a:pPr>
-                      <a:r>
-                        <a:rPr lang="en-US" sz="900" dirty="0">
-                          <a:solidFill>
-                            <a:srgbClr val="222222"/>
-                          </a:solidFill>
-                          <a:latin typeface="Meiryo" pitchFamily="34" charset="0"/>
-                          <a:ea typeface="Meiryo" pitchFamily="34" charset="-122"/>
-                          <a:cs typeface="Meiryo" pitchFamily="34" charset="-120"/>
-                        </a:rPr>
-                        <a:t>松之郷2423-1</a:t>
-                      </a:r>
-                      <a:endParaRPr lang="en-US" sz="1100" dirty="0">
-                        <a:latin typeface="Meiryo" charset="0"/>
-                        <a:ea typeface="Meiryo" charset="0"/>
-                        <a:cs typeface="Meiryo" charset="0"/>
-                      </a:endParaRPr>
-                    </a:p>
-                  </a:txBody>
-                  <a:tcPr anchor="ctr" marT="18000" marB="18000" marL="64008" marR="45720">
-                    <a:lnL w="9525" cap="flat" cmpd="sng" algn="ctr">
-                      <a:solidFill>
-                        <a:srgbClr val="BFBFBF"/>
-                      </a:solidFill>
-                      <a:prstDash val="solid"/>
-                      <a:round/>
-                      <a:headEnd type="none" w="med" len="med"/>
-                      <a:tailEnd type="none" w="med" len="med"/>
-                    </a:lnL>
-                    <a:lnR w="9525" cap="flat" cmpd="sng" algn="ctr">
-                      <a:solidFill>
-                        <a:srgbClr val="BFBFBF"/>
-                      </a:solidFill>
-                      <a:prstDash val="solid"/>
-                      <a:round/>
-                      <a:headEnd type="none" w="med" len="med"/>
-                      <a:tailEnd type="none" w="med" len="med"/>
-                    </a:lnR>
-                    <a:lnT w="9525" cap="flat" cmpd="sng" algn="ctr">
-                      <a:solidFill>
-                        <a:srgbClr val="BFBFBF"/>
-                      </a:solidFill>
-                      <a:prstDash val="solid"/>
-                      <a:round/>
-                      <a:headEnd type="none" w="med" len="med"/>
-                      <a:tailEnd type="none" w="med" len="med"/>
-                    </a:lnT>
-                    <a:lnB w="9525" cap="flat" cmpd="sng" algn="ctr">
-                      <a:solidFill>
-                        <a:srgbClr val="BFBFBF"/>
-                      </a:solidFill>
-                      <a:prstDash val="solid"/>
-                      <a:round/>
-                      <a:headEnd type="none" w="med" len="med"/>
-                      <a:tailEnd type="none" w="med" len="med"/>
-                    </a:lnB>
-                  </a:tcPr>
-                </a:tc>
-                <a:tc>
-                  <a:txBody>
-                    <a:bodyPr/>
-                    <a:lstStyle/>
-                    <a:p>
-                      <a:pPr marL="0" indent="0" algn="l">
-                        <a:buNone/>
-                      </a:pPr>
-                      <a:r>
-                        <a:rPr lang="en-US" sz="900" dirty="0">
-                          <a:solidFill>
-                            <a:srgbClr val="222222"/>
-                          </a:solidFill>
-                          <a:latin typeface="Meiryo" pitchFamily="34" charset="0"/>
-                          <a:ea typeface="Meiryo" pitchFamily="34" charset="-122"/>
-                          <a:cs typeface="Meiryo" pitchFamily="34" charset="-120"/>
-                        </a:rPr>
-                        <a:t>0475-51-4082</a:t>
-                      </a:r>
-                      <a:endParaRPr lang="en-US" sz="1100" dirty="0">
-                        <a:latin typeface="Meiryo" charset="0"/>
-                        <a:ea typeface="Meiryo" charset="0"/>
-                        <a:cs typeface="Meiryo" charset="0"/>
-                      </a:endParaRPr>
-                    </a:p>
-                  </a:txBody>
-                  <a:tcPr anchor="ctr" marT="18000" marB="18000" marL="64008" marR="45720">
-                    <a:lnL w="9525" cap="flat" cmpd="sng" algn="ctr">
-                      <a:solidFill>
-                        <a:srgbClr val="BFBFBF"/>
-                      </a:solidFill>
-                      <a:prstDash val="solid"/>
-                      <a:round/>
-                      <a:headEnd type="none" w="med" len="med"/>
-                      <a:tailEnd type="none" w="med" len="med"/>
-                    </a:lnL>
-                    <a:lnR w="9525" cap="flat" cmpd="sng" algn="ctr">
-                      <a:solidFill>
-                        <a:srgbClr val="BFBFBF"/>
-                      </a:solidFill>
-                      <a:prstDash val="solid"/>
-                      <a:round/>
-                      <a:headEnd type="none" w="med" len="med"/>
-                      <a:tailEnd type="none" w="med" len="med"/>
-                    </a:lnR>
-                    <a:lnT w="9525" cap="flat" cmpd="sng" algn="ctr">
-                      <a:solidFill>
-                        <a:srgbClr val="BFBFBF"/>
-                      </a:solidFill>
-                      <a:prstDash val="solid"/>
-                      <a:round/>
-                      <a:headEnd type="none" w="med" len="med"/>
-                      <a:tailEnd type="none" w="med" len="med"/>
-                    </a:lnT>
-                    <a:lnB w="9525" cap="flat" cmpd="sng" algn="ctr">
-                      <a:solidFill>
-                        <a:srgbClr val="BFBFBF"/>
-                      </a:solidFill>
-                      <a:prstDash val="solid"/>
-                      <a:round/>
-                      <a:headEnd type="none" w="med" len="med"/>
-                      <a:tailEnd type="none" w="med" len="med"/>
-                    </a:lnB>
-                  </a:tcPr>
-                </a:tc>
-                <a:tc>
-                  <a:txBody>
-                    <a:bodyPr/>
-                    <a:lstStyle/>
-                    <a:p>
-                      <a:pPr marL="0" indent="0" algn="l">
-                        <a:buNone/>
-                      </a:pPr>
-                      <a:r>
-                        <a:rPr lang="en-US" sz="900" dirty="0" u="sng">
-                          <a:solidFill>
-                            <a:srgbClr val="1F5FA8"/>
-                          </a:solidFill>
-                          <a:latin typeface="Meiryo" charset="0"/>
-                          <a:ea typeface="Meiryo" charset="0"/>
-                          <a:cs typeface="Meiryo" charset="0"/>
-                          <a:hlinkClick r:id="rId7"/>
-                        </a:rPr>
-                        <a:t>kihonjuku-yuuyuu.com</a:t>
-                      </a:r>
-                    </a:p>
-                  </a:txBody>
-                  <a:tcPr anchor="ctr" marT="18000" marB="18000" marL="64008" marR="45720">
-                    <a:lnL w="9525" cap="flat" cmpd="sng" algn="ctr">
-                      <a:solidFill>
-                        <a:srgbClr val="BFBFBF"/>
-                      </a:solidFill>
-                      <a:prstDash val="solid"/>
-                      <a:round/>
-                      <a:headEnd type="none" w="med" len="med"/>
-                      <a:tailEnd type="none" w="med" len="med"/>
-                    </a:lnL>
-                    <a:lnR w="9525" cap="flat" cmpd="sng" algn="ctr">
-                      <a:solidFill>
-                        <a:srgbClr val="BFBFBF"/>
-                      </a:solidFill>
-                      <a:prstDash val="solid"/>
-                      <a:round/>
-                      <a:headEnd type="none" w="med" len="med"/>
-                      <a:tailEnd type="none" w="med" len="med"/>
-                    </a:lnR>
-                    <a:lnT w="9525" cap="flat" cmpd="sng" algn="ctr">
-                      <a:solidFill>
-                        <a:srgbClr val="BFBFBF"/>
-                      </a:solidFill>
-                      <a:prstDash val="solid"/>
-                      <a:round/>
-                      <a:headEnd type="none" w="med" len="med"/>
-                      <a:tailEnd type="none" w="med" len="med"/>
-                    </a:lnT>
-                    <a:lnB w="9525" cap="flat" cmpd="sng" algn="ctr">
-                      <a:solidFill>
-                        <a:srgbClr val="BFBFBF"/>
-                      </a:solidFill>
-                      <a:prstDash val="solid"/>
-                      <a:round/>
-                      <a:headEnd type="none" w="med" len="med"/>
-                      <a:tailEnd type="none" w="med" len="med"/>
-                    </a:lnB>
-                  </a:tcPr>
-                </a:tc>
-                <a:extLst>
-                  <a:ext uri="{0D108BD9-81ED-4DB2-BD59-A6C34878D82A}">
-                    <a16:rowId xmlns:a16="http://schemas.microsoft.com/office/drawing/2014/main" val="10001"/>
-                  </a:ext>
-                </a:extLst>
-              </a:tr>
-              <a:tr h="331469">
-                <a:tc>
-                  <a:txBody>
-                    <a:bodyPr/>
-                    <a:lstStyle/>
-                    <a:p>
-                      <a:pPr marL="0" indent="0" algn="ctr">
-                        <a:buNone/>
-                      </a:pPr>
-                      <a:r>
-                        <a:rPr lang="en-US" sz="900" b="1" dirty="0">
-                          <a:solidFill>
-                            <a:srgbClr val="222222"/>
-                          </a:solidFill>
-                          <a:latin typeface="Meiryo" pitchFamily="34" charset="0"/>
-                          <a:ea typeface="Meiryo" pitchFamily="34" charset="-122"/>
-                          <a:cs typeface="Meiryo" pitchFamily="34" charset="-120"/>
-                        </a:rPr>
-                        <a:t>⑤</a:t>
-                      </a:r>
-                      <a:endParaRPr lang="en-US" sz="1100" dirty="0">
-                        <a:latin typeface="Meiryo" charset="0"/>
-                        <a:ea typeface="Meiryo" charset="0"/>
-                        <a:cs typeface="Meiryo" charset="0"/>
-                      </a:endParaRPr>
-                    </a:p>
-                  </a:txBody>
-                  <a:tcPr anchor="ctr" marT="18000" marB="18000" marL="64008" marR="45720">
-                    <a:lnL w="9525" cap="flat" cmpd="sng" algn="ctr">
-                      <a:solidFill>
-                        <a:srgbClr val="BFBFBF"/>
-                      </a:solidFill>
-                      <a:prstDash val="solid"/>
-                      <a:round/>
-                      <a:headEnd type="none" w="med" len="med"/>
-                      <a:tailEnd type="none" w="med" len="med"/>
-                    </a:lnL>
-                    <a:lnR w="9525" cap="flat" cmpd="sng" algn="ctr">
-                      <a:solidFill>
-                        <a:srgbClr val="BFBFBF"/>
-                      </a:solidFill>
-                      <a:prstDash val="solid"/>
-                      <a:round/>
-                      <a:headEnd type="none" w="med" len="med"/>
-                      <a:tailEnd type="none" w="med" len="med"/>
-                    </a:lnR>
-                    <a:lnT w="9525" cap="flat" cmpd="sng" algn="ctr">
-                      <a:solidFill>
-                        <a:srgbClr val="BFBFBF"/>
-                      </a:solidFill>
-                      <a:prstDash val="solid"/>
-                      <a:round/>
-                      <a:headEnd type="none" w="med" len="med"/>
-                      <a:tailEnd type="none" w="med" len="med"/>
-                    </a:lnT>
-                    <a:lnB w="9525" cap="flat" cmpd="sng" algn="ctr">
-                      <a:solidFill>
-                        <a:srgbClr val="BFBFBF"/>
-                      </a:solidFill>
-                      <a:prstDash val="solid"/>
-                      <a:round/>
-                      <a:headEnd type="none" w="med" len="med"/>
-                      <a:tailEnd type="none" w="med" len="med"/>
-                    </a:lnB>
-                  </a:tcPr>
-                </a:tc>
-                <a:tc>
-                  <a:txBody>
-                    <a:bodyPr/>
-                    <a:lstStyle/>
-                    <a:p>
-                      <a:pPr marL="0" indent="0" algn="l">
-                        <a:buNone/>
-                      </a:pPr>
-                      <a:r>
-                        <a:rPr lang="en-US" sz="900" b="1" dirty="0">
-                          <a:solidFill>
-                            <a:srgbClr val="222222"/>
-                          </a:solidFill>
-                          <a:latin typeface="Meiryo" pitchFamily="34" charset="0"/>
-                          <a:ea typeface="Meiryo" pitchFamily="34" charset="-122"/>
-                          <a:cs typeface="Meiryo" pitchFamily="34" charset="-120"/>
-                        </a:rPr>
-                        <a:t>基本塾優遊 八坂台</a:t>
-                      </a:r>
-                      <a:endParaRPr lang="en-US" sz="1100" dirty="0">
-                        <a:latin typeface="Meiryo" charset="0"/>
-                        <a:ea typeface="Meiryo" charset="0"/>
-                        <a:cs typeface="Meiryo" charset="0"/>
-                      </a:endParaRPr>
-                    </a:p>
-                  </a:txBody>
-                  <a:tcPr anchor="ctr" marT="18000" marB="18000" marL="64008" marR="45720">
-                    <a:lnL w="9525" cap="flat" cmpd="sng" algn="ctr">
-                      <a:solidFill>
-                        <a:srgbClr val="BFBFBF"/>
-                      </a:solidFill>
-                      <a:prstDash val="solid"/>
-                      <a:round/>
-                      <a:headEnd type="none" w="med" len="med"/>
-                      <a:tailEnd type="none" w="med" len="med"/>
-                    </a:lnL>
-                    <a:lnR w="9525" cap="flat" cmpd="sng" algn="ctr">
-                      <a:solidFill>
-                        <a:srgbClr val="BFBFBF"/>
-                      </a:solidFill>
-                      <a:prstDash val="solid"/>
-                      <a:round/>
-                      <a:headEnd type="none" w="med" len="med"/>
-                      <a:tailEnd type="none" w="med" len="med"/>
-                    </a:lnR>
-                    <a:lnT w="9525" cap="flat" cmpd="sng" algn="ctr">
-                      <a:solidFill>
-                        <a:srgbClr val="BFBFBF"/>
-                      </a:solidFill>
-                      <a:prstDash val="solid"/>
-                      <a:round/>
-                      <a:headEnd type="none" w="med" len="med"/>
-                      <a:tailEnd type="none" w="med" len="med"/>
-                    </a:lnT>
-                    <a:lnB w="9525" cap="flat" cmpd="sng" algn="ctr">
-                      <a:solidFill>
-                        <a:srgbClr val="BFBFBF"/>
-                      </a:solidFill>
-                      <a:prstDash val="solid"/>
-                      <a:round/>
-                      <a:headEnd type="none" w="med" len="med"/>
-                      <a:tailEnd type="none" w="med" len="med"/>
-                    </a:lnB>
-                  </a:tcPr>
-                </a:tc>
-                <a:tc>
-                  <a:txBody>
-                    <a:bodyPr/>
-                    <a:lstStyle/>
-                    <a:p>
-                      <a:pPr marL="0" indent="0" algn="l">
-                        <a:buNone/>
-                      </a:pPr>
-                      <a:r>
-                        <a:rPr lang="en-US" sz="900" dirty="0">
-                          <a:solidFill>
-                            <a:srgbClr val="222222"/>
-                          </a:solidFill>
-                          <a:latin typeface="Meiryo" pitchFamily="34" charset="0"/>
-                          <a:ea typeface="Meiryo" pitchFamily="34" charset="-122"/>
-                          <a:cs typeface="Meiryo" pitchFamily="34" charset="-120"/>
-                        </a:rPr>
-                        <a:t>NPO法人 基本塾</a:t>
-                      </a:r>
-                      <a:endParaRPr lang="en-US" sz="1100" dirty="0">
-                        <a:latin typeface="Meiryo" charset="0"/>
-                        <a:ea typeface="Meiryo" charset="0"/>
-                        <a:cs typeface="Meiryo" charset="0"/>
-                      </a:endParaRPr>
-                    </a:p>
-                  </a:txBody>
-                  <a:tcPr anchor="ctr" marT="18000" marB="18000" marL="64008" marR="45720">
-                    <a:lnL w="9525" cap="flat" cmpd="sng" algn="ctr">
-                      <a:solidFill>
-                        <a:srgbClr val="BFBFBF"/>
-                      </a:solidFill>
-                      <a:prstDash val="solid"/>
-                      <a:round/>
-                      <a:headEnd type="none" w="med" len="med"/>
-                      <a:tailEnd type="none" w="med" len="med"/>
-                    </a:lnL>
-                    <a:lnR w="9525" cap="flat" cmpd="sng" algn="ctr">
-                      <a:solidFill>
-                        <a:srgbClr val="BFBFBF"/>
-                      </a:solidFill>
-                      <a:prstDash val="solid"/>
-                      <a:round/>
-                      <a:headEnd type="none" w="med" len="med"/>
-                      <a:tailEnd type="none" w="med" len="med"/>
-                    </a:lnR>
-                    <a:lnT w="9525" cap="flat" cmpd="sng" algn="ctr">
-                      <a:solidFill>
-                        <a:srgbClr val="BFBFBF"/>
-                      </a:solidFill>
-                      <a:prstDash val="solid"/>
-                      <a:round/>
-                      <a:headEnd type="none" w="med" len="med"/>
-                      <a:tailEnd type="none" w="med" len="med"/>
-                    </a:lnT>
-                    <a:lnB w="9525" cap="flat" cmpd="sng" algn="ctr">
-                      <a:solidFill>
-                        <a:srgbClr val="BFBFBF"/>
-                      </a:solidFill>
-                      <a:prstDash val="solid"/>
-                      <a:round/>
-                      <a:headEnd type="none" w="med" len="med"/>
-                      <a:tailEnd type="none" w="med" len="med"/>
-                    </a:lnB>
-                  </a:tcPr>
-                </a:tc>
-                <a:tc>
-                  <a:txBody>
-                    <a:bodyPr/>
-                    <a:lstStyle/>
-                    <a:p>
-                      <a:pPr marL="0" indent="0" algn="l">
-                        <a:buNone/>
-                      </a:pPr>
-                      <a:r>
-                        <a:rPr lang="en-US" sz="900" dirty="0">
-                          <a:solidFill>
-                            <a:srgbClr val="222222"/>
-                          </a:solidFill>
-                          <a:latin typeface="Meiryo" pitchFamily="34" charset="0"/>
-                          <a:ea typeface="Meiryo" pitchFamily="34" charset="-122"/>
-                          <a:cs typeface="Meiryo" pitchFamily="34" charset="-120"/>
-                        </a:rPr>
-                        <a:t>八坂台5-11-1</a:t>
-                      </a:r>
-                      <a:endParaRPr lang="en-US" sz="1100" dirty="0">
-                        <a:latin typeface="Meiryo" charset="0"/>
-                        <a:ea typeface="Meiryo" charset="0"/>
-                        <a:cs typeface="Meiryo" charset="0"/>
-                      </a:endParaRPr>
-                    </a:p>
-                  </a:txBody>
-                  <a:tcPr anchor="ctr" marT="18000" marB="18000" marL="64008" marR="45720">
-                    <a:lnL w="9525" cap="flat" cmpd="sng" algn="ctr">
-                      <a:solidFill>
-                        <a:srgbClr val="BFBFBF"/>
-                      </a:solidFill>
-                      <a:prstDash val="solid"/>
-                      <a:round/>
-                      <a:headEnd type="none" w="med" len="med"/>
-                      <a:tailEnd type="none" w="med" len="med"/>
-                    </a:lnL>
-                    <a:lnR w="9525" cap="flat" cmpd="sng" algn="ctr">
-                      <a:solidFill>
-                        <a:srgbClr val="BFBFBF"/>
-                      </a:solidFill>
-                      <a:prstDash val="solid"/>
-                      <a:round/>
-                      <a:headEnd type="none" w="med" len="med"/>
-                      <a:tailEnd type="none" w="med" len="med"/>
-                    </a:lnR>
-                    <a:lnT w="9525" cap="flat" cmpd="sng" algn="ctr">
-                      <a:solidFill>
-                        <a:srgbClr val="BFBFBF"/>
-                      </a:solidFill>
-                      <a:prstDash val="solid"/>
-                      <a:round/>
-                      <a:headEnd type="none" w="med" len="med"/>
-                      <a:tailEnd type="none" w="med" len="med"/>
-                    </a:lnT>
-                    <a:lnB w="9525" cap="flat" cmpd="sng" algn="ctr">
-                      <a:solidFill>
-                        <a:srgbClr val="BFBFBF"/>
-                      </a:solidFill>
-                      <a:prstDash val="solid"/>
-                      <a:round/>
-                      <a:headEnd type="none" w="med" len="med"/>
-                      <a:tailEnd type="none" w="med" len="med"/>
-                    </a:lnB>
-                  </a:tcPr>
-                </a:tc>
-                <a:tc>
-                  <a:txBody>
-                    <a:bodyPr/>
-                    <a:lstStyle/>
-                    <a:p>
-                      <a:pPr marL="0" indent="0" algn="l">
-                        <a:buNone/>
-                      </a:pPr>
-                      <a:r>
-                        <a:rPr lang="en-US" sz="900" dirty="0">
-                          <a:solidFill>
-                            <a:srgbClr val="222222"/>
-                          </a:solidFill>
-                          <a:latin typeface="Meiryo" pitchFamily="34" charset="0"/>
-                          <a:ea typeface="Meiryo" pitchFamily="34" charset="-122"/>
-                          <a:cs typeface="Meiryo" pitchFamily="34" charset="-120"/>
-                        </a:rPr>
-                        <a:t>0475-51-5010</a:t>
-                      </a:r>
-                      <a:endParaRPr lang="en-US" sz="1100" dirty="0">
-                        <a:latin typeface="Meiryo" charset="0"/>
-                        <a:ea typeface="Meiryo" charset="0"/>
-                        <a:cs typeface="Meiryo" charset="0"/>
-                      </a:endParaRPr>
-                    </a:p>
-                  </a:txBody>
-                  <a:tcPr anchor="ctr" marT="18000" marB="18000" marL="64008" marR="45720">
-                    <a:lnL w="9525" cap="flat" cmpd="sng" algn="ctr">
-                      <a:solidFill>
-                        <a:srgbClr val="BFBFBF"/>
-                      </a:solidFill>
-                      <a:prstDash val="solid"/>
-                      <a:round/>
-                      <a:headEnd type="none" w="med" len="med"/>
-                      <a:tailEnd type="none" w="med" len="med"/>
-                    </a:lnL>
-                    <a:lnR w="9525" cap="flat" cmpd="sng" algn="ctr">
-                      <a:solidFill>
-                        <a:srgbClr val="BFBFBF"/>
-                      </a:solidFill>
-                      <a:prstDash val="solid"/>
-                      <a:round/>
-                      <a:headEnd type="none" w="med" len="med"/>
-                      <a:tailEnd type="none" w="med" len="med"/>
-                    </a:lnR>
-                    <a:lnT w="9525" cap="flat" cmpd="sng" algn="ctr">
-                      <a:solidFill>
-                        <a:srgbClr val="BFBFBF"/>
-                      </a:solidFill>
-                      <a:prstDash val="solid"/>
-                      <a:round/>
-                      <a:headEnd type="none" w="med" len="med"/>
-                      <a:tailEnd type="none" w="med" len="med"/>
-                    </a:lnT>
-                    <a:lnB w="9525" cap="flat" cmpd="sng" algn="ctr">
-                      <a:solidFill>
-                        <a:srgbClr val="BFBFBF"/>
-                      </a:solidFill>
-                      <a:prstDash val="solid"/>
-                      <a:round/>
-                      <a:headEnd type="none" w="med" len="med"/>
-                      <a:tailEnd type="none" w="med" len="med"/>
-                    </a:lnB>
-                  </a:tcPr>
-                </a:tc>
-                <a:tc>
-                  <a:txBody>
-                    <a:bodyPr/>
-                    <a:lstStyle/>
-                    <a:p>
-                      <a:pPr marL="0" indent="0" algn="l">
-                        <a:buNone/>
-                      </a:pPr>
-                      <a:r>
-                        <a:rPr lang="en-US" sz="900" dirty="0" u="sng">
-                          <a:solidFill>
-                            <a:srgbClr val="1F5FA8"/>
-                          </a:solidFill>
-                          <a:latin typeface="Meiryo" charset="0"/>
-                          <a:ea typeface="Meiryo" charset="0"/>
-                          <a:cs typeface="Meiryo" charset="0"/>
-                          <a:hlinkClick r:id="rId7"/>
-                        </a:rPr>
-                        <a:t>kihonjuku-yuuyuu.com</a:t>
-                      </a:r>
-                    </a:p>
-                  </a:txBody>
-                  <a:tcPr anchor="ctr" marT="18000" marB="18000" marL="64008" marR="45720">
-                    <a:lnL w="9525" cap="flat" cmpd="sng" algn="ctr">
-                      <a:solidFill>
-                        <a:srgbClr val="BFBFBF"/>
-                      </a:solidFill>
-                      <a:prstDash val="solid"/>
-                      <a:round/>
-                      <a:headEnd type="none" w="med" len="med"/>
-                      <a:tailEnd type="none" w="med" len="med"/>
-                    </a:lnL>
-                    <a:lnR w="9525" cap="flat" cmpd="sng" algn="ctr">
-                      <a:solidFill>
-                        <a:srgbClr val="BFBFBF"/>
-                      </a:solidFill>
-                      <a:prstDash val="solid"/>
-                      <a:round/>
-                      <a:headEnd type="none" w="med" len="med"/>
-                      <a:tailEnd type="none" w="med" len="med"/>
-                    </a:lnR>
-                    <a:lnT w="9525" cap="flat" cmpd="sng" algn="ctr">
-                      <a:solidFill>
-                        <a:srgbClr val="BFBFBF"/>
-                      </a:solidFill>
-                      <a:prstDash val="solid"/>
-                      <a:round/>
-                      <a:headEnd type="none" w="med" len="med"/>
-                      <a:tailEnd type="none" w="med" len="med"/>
-                    </a:lnT>
-                    <a:lnB w="9525" cap="flat" cmpd="sng" algn="ctr">
-                      <a:solidFill>
-                        <a:srgbClr val="BFBFBF"/>
-                      </a:solidFill>
-                      <a:prstDash val="solid"/>
-                      <a:round/>
-                      <a:headEnd type="none" w="med" len="med"/>
-                      <a:tailEnd type="none" w="med" len="med"/>
-                    </a:lnB>
-                  </a:tcPr>
-                </a:tc>
-                <a:extLst>
-                  <a:ext uri="{0D108BD9-81ED-4DB2-BD59-A6C34878D82A}">
-                    <a16:rowId xmlns:a16="http://schemas.microsoft.com/office/drawing/2014/main" val="10001"/>
-                  </a:ext>
-                </a:extLst>
-              </a:tr>
-              <a:tr h="331469">
-                <a:tc>
-                  <a:txBody>
-                    <a:bodyPr/>
-                    <a:lstStyle/>
-                    <a:p>
-                      <a:pPr marL="0" indent="0" algn="ctr">
-                        <a:buNone/>
-                      </a:pPr>
-                      <a:r>
-                        <a:rPr lang="en-US" sz="900" b="1" dirty="0">
-                          <a:solidFill>
-                            <a:srgbClr val="222222"/>
-                          </a:solidFill>
-                          <a:latin typeface="Meiryo" pitchFamily="34" charset="0"/>
-                          <a:ea typeface="Meiryo" pitchFamily="34" charset="-122"/>
-                          <a:cs typeface="Meiryo" pitchFamily="34" charset="-120"/>
-                        </a:rPr>
-                        <a:t>⑤</a:t>
-                      </a:r>
-                      <a:endParaRPr lang="en-US" sz="1100" dirty="0">
-                        <a:latin typeface="Meiryo" charset="0"/>
-                        <a:ea typeface="Meiryo" charset="0"/>
-                        <a:cs typeface="Meiryo" charset="0"/>
-                      </a:endParaRPr>
-                    </a:p>
-                  </a:txBody>
-                  <a:tcPr anchor="ctr" marT="18000" marB="18000" marL="64008" marR="45720">
-                    <a:lnL w="9525" cap="flat" cmpd="sng" algn="ctr">
-                      <a:solidFill>
-                        <a:srgbClr val="BFBFBF"/>
-                      </a:solidFill>
-                      <a:prstDash val="solid"/>
-                      <a:round/>
-                      <a:headEnd type="none" w="med" len="med"/>
-                      <a:tailEnd type="none" w="med" len="med"/>
-                    </a:lnL>
-                    <a:lnR w="9525" cap="flat" cmpd="sng" algn="ctr">
-                      <a:solidFill>
-                        <a:srgbClr val="BFBFBF"/>
-                      </a:solidFill>
-                      <a:prstDash val="solid"/>
-                      <a:round/>
-                      <a:headEnd type="none" w="med" len="med"/>
-                      <a:tailEnd type="none" w="med" len="med"/>
-                    </a:lnR>
-                    <a:lnT w="9525" cap="flat" cmpd="sng" algn="ctr">
-                      <a:solidFill>
-                        <a:srgbClr val="BFBFBF"/>
-                      </a:solidFill>
-                      <a:prstDash val="solid"/>
-                      <a:round/>
-                      <a:headEnd type="none" w="med" len="med"/>
-                      <a:tailEnd type="none" w="med" len="med"/>
-                    </a:lnT>
-                    <a:lnB w="9525" cap="flat" cmpd="sng" algn="ctr">
-                      <a:solidFill>
-                        <a:srgbClr val="BFBFBF"/>
-                      </a:solidFill>
-                      <a:prstDash val="solid"/>
-                      <a:round/>
-                      <a:headEnd type="none" w="med" len="med"/>
-                      <a:tailEnd type="none" w="med" len="med"/>
-                    </a:lnB>
-                  </a:tcPr>
-                </a:tc>
-                <a:tc>
-                  <a:txBody>
-                    <a:bodyPr/>
-                    <a:lstStyle/>
-                    <a:p>
-                      <a:pPr marL="0" indent="0" algn="l">
-                        <a:buNone/>
-                      </a:pPr>
-                      <a:r>
-                        <a:rPr lang="en-US" sz="900" b="1" dirty="0">
-                          <a:solidFill>
-                            <a:srgbClr val="222222"/>
-                          </a:solidFill>
-                          <a:latin typeface="Meiryo" pitchFamily="34" charset="0"/>
-                          <a:ea typeface="Meiryo" pitchFamily="34" charset="-122"/>
-                          <a:cs typeface="Meiryo" pitchFamily="34" charset="-120"/>
-                        </a:rPr>
-                        <a:t>基本塾優遊 八坂西</a:t>
-                      </a:r>
-                      <a:endParaRPr lang="en-US" sz="1100" dirty="0">
-                        <a:latin typeface="Meiryo" charset="0"/>
-                        <a:ea typeface="Meiryo" charset="0"/>
-                        <a:cs typeface="Meiryo" charset="0"/>
-                      </a:endParaRPr>
-                    </a:p>
-                  </a:txBody>
-                  <a:tcPr anchor="ctr" marT="18000" marB="18000" marL="64008" marR="45720">
-                    <a:lnL w="9525" cap="flat" cmpd="sng" algn="ctr">
-                      <a:solidFill>
-                        <a:srgbClr val="BFBFBF"/>
-                      </a:solidFill>
-                      <a:prstDash val="solid"/>
-                      <a:round/>
-                      <a:headEnd type="none" w="med" len="med"/>
-                      <a:tailEnd type="none" w="med" len="med"/>
-                    </a:lnL>
-                    <a:lnR w="9525" cap="flat" cmpd="sng" algn="ctr">
-                      <a:solidFill>
-                        <a:srgbClr val="BFBFBF"/>
-                      </a:solidFill>
-                      <a:prstDash val="solid"/>
-                      <a:round/>
-                      <a:headEnd type="none" w="med" len="med"/>
-                      <a:tailEnd type="none" w="med" len="med"/>
-                    </a:lnR>
-                    <a:lnT w="9525" cap="flat" cmpd="sng" algn="ctr">
-                      <a:solidFill>
-                        <a:srgbClr val="BFBFBF"/>
-                      </a:solidFill>
-                      <a:prstDash val="solid"/>
-                      <a:round/>
-                      <a:headEnd type="none" w="med" len="med"/>
-                      <a:tailEnd type="none" w="med" len="med"/>
-                    </a:lnT>
-                    <a:lnB w="9525" cap="flat" cmpd="sng" algn="ctr">
-                      <a:solidFill>
-                        <a:srgbClr val="BFBFBF"/>
-                      </a:solidFill>
-                      <a:prstDash val="solid"/>
-                      <a:round/>
-                      <a:headEnd type="none" w="med" len="med"/>
-                      <a:tailEnd type="none" w="med" len="med"/>
-                    </a:lnB>
-                  </a:tcPr>
-                </a:tc>
-                <a:tc>
-                  <a:txBody>
-                    <a:bodyPr/>
-                    <a:lstStyle/>
-                    <a:p>
-                      <a:pPr marL="0" indent="0" algn="l">
-                        <a:buNone/>
-                      </a:pPr>
-                      <a:r>
-                        <a:rPr lang="en-US" sz="900" dirty="0">
-                          <a:solidFill>
-                            <a:srgbClr val="222222"/>
-                          </a:solidFill>
-                          <a:latin typeface="Meiryo" pitchFamily="34" charset="0"/>
-                          <a:ea typeface="Meiryo" pitchFamily="34" charset="-122"/>
-                          <a:cs typeface="Meiryo" pitchFamily="34" charset="-120"/>
-                        </a:rPr>
-                        <a:t>NPO法人 基本塾</a:t>
-                      </a:r>
-                      <a:endParaRPr lang="en-US" sz="1100" dirty="0">
-                        <a:latin typeface="Meiryo" charset="0"/>
-                        <a:ea typeface="Meiryo" charset="0"/>
-                        <a:cs typeface="Meiryo" charset="0"/>
-                      </a:endParaRPr>
-                    </a:p>
-                  </a:txBody>
-                  <a:tcPr anchor="ctr" marT="18000" marB="18000" marL="64008" marR="45720">
-                    <a:lnL w="9525" cap="flat" cmpd="sng" algn="ctr">
-                      <a:solidFill>
-                        <a:srgbClr val="BFBFBF"/>
-                      </a:solidFill>
-                      <a:prstDash val="solid"/>
-                      <a:round/>
-                      <a:headEnd type="none" w="med" len="med"/>
-                      <a:tailEnd type="none" w="med" len="med"/>
-                    </a:lnL>
-                    <a:lnR w="9525" cap="flat" cmpd="sng" algn="ctr">
-                      <a:solidFill>
-                        <a:srgbClr val="BFBFBF"/>
-                      </a:solidFill>
-                      <a:prstDash val="solid"/>
-                      <a:round/>
-                      <a:headEnd type="none" w="med" len="med"/>
-                      <a:tailEnd type="none" w="med" len="med"/>
-                    </a:lnR>
-                    <a:lnT w="9525" cap="flat" cmpd="sng" algn="ctr">
-                      <a:solidFill>
-                        <a:srgbClr val="BFBFBF"/>
-                      </a:solidFill>
-                      <a:prstDash val="solid"/>
-                      <a:round/>
-                      <a:headEnd type="none" w="med" len="med"/>
-                      <a:tailEnd type="none" w="med" len="med"/>
-                    </a:lnT>
-                    <a:lnB w="9525" cap="flat" cmpd="sng" algn="ctr">
-                      <a:solidFill>
-                        <a:srgbClr val="BFBFBF"/>
-                      </a:solidFill>
-                      <a:prstDash val="solid"/>
-                      <a:round/>
-                      <a:headEnd type="none" w="med" len="med"/>
-                      <a:tailEnd type="none" w="med" len="med"/>
-                    </a:lnB>
-                  </a:tcPr>
-                </a:tc>
-                <a:tc>
-                  <a:txBody>
-                    <a:bodyPr/>
-                    <a:lstStyle/>
-                    <a:p>
-                      <a:pPr marL="0" indent="0" algn="l">
-                        <a:buNone/>
-                      </a:pPr>
-                      <a:r>
-                        <a:rPr lang="en-US" sz="900" dirty="0">
-                          <a:solidFill>
-                            <a:srgbClr val="222222"/>
-                          </a:solidFill>
-                          <a:latin typeface="Meiryo" pitchFamily="34" charset="0"/>
-                          <a:ea typeface="Meiryo" pitchFamily="34" charset="-122"/>
-                          <a:cs typeface="Meiryo" pitchFamily="34" charset="-120"/>
-                        </a:rPr>
-                        <a:t>八坂台4-2-4</a:t>
-                      </a:r>
-                      <a:endParaRPr lang="en-US" sz="1100" dirty="0">
-                        <a:latin typeface="Meiryo" charset="0"/>
-                        <a:ea typeface="Meiryo" charset="0"/>
-                        <a:cs typeface="Meiryo" charset="0"/>
-                      </a:endParaRPr>
-                    </a:p>
-                  </a:txBody>
-                  <a:tcPr anchor="ctr" marT="18000" marB="18000" marL="64008" marR="45720">
-                    <a:lnL w="9525" cap="flat" cmpd="sng" algn="ctr">
-                      <a:solidFill>
-                        <a:srgbClr val="BFBFBF"/>
-                      </a:solidFill>
-                      <a:prstDash val="solid"/>
-                      <a:round/>
-                      <a:headEnd type="none" w="med" len="med"/>
-                      <a:tailEnd type="none" w="med" len="med"/>
-                    </a:lnL>
-                    <a:lnR w="9525" cap="flat" cmpd="sng" algn="ctr">
-                      <a:solidFill>
-                        <a:srgbClr val="BFBFBF"/>
-                      </a:solidFill>
-                      <a:prstDash val="solid"/>
-                      <a:round/>
-                      <a:headEnd type="none" w="med" len="med"/>
-                      <a:tailEnd type="none" w="med" len="med"/>
-                    </a:lnR>
-                    <a:lnT w="9525" cap="flat" cmpd="sng" algn="ctr">
-                      <a:solidFill>
-                        <a:srgbClr val="BFBFBF"/>
-                      </a:solidFill>
-                      <a:prstDash val="solid"/>
-                      <a:round/>
-                      <a:headEnd type="none" w="med" len="med"/>
-                      <a:tailEnd type="none" w="med" len="med"/>
-                    </a:lnT>
-                    <a:lnB w="9525" cap="flat" cmpd="sng" algn="ctr">
-                      <a:solidFill>
-                        <a:srgbClr val="BFBFBF"/>
-                      </a:solidFill>
-                      <a:prstDash val="solid"/>
-                      <a:round/>
-                      <a:headEnd type="none" w="med" len="med"/>
-                      <a:tailEnd type="none" w="med" len="med"/>
-                    </a:lnB>
-                  </a:tcPr>
-                </a:tc>
-                <a:tc>
-                  <a:txBody>
-                    <a:bodyPr/>
-                    <a:lstStyle/>
-                    <a:p>
-                      <a:pPr marL="0" indent="0" algn="l">
-                        <a:buNone/>
-                      </a:pPr>
-                      <a:r>
-                        <a:rPr lang="en-US" sz="900" dirty="0">
-                          <a:solidFill>
-                            <a:srgbClr val="222222"/>
-                          </a:solidFill>
-                          <a:latin typeface="Meiryo" pitchFamily="34" charset="0"/>
-                          <a:ea typeface="Meiryo" pitchFamily="34" charset="-122"/>
-                          <a:cs typeface="Meiryo" pitchFamily="34" charset="-120"/>
-                        </a:rPr>
-                        <a:t>0475-51-6631</a:t>
-                      </a:r>
-                      <a:endParaRPr lang="en-US" sz="1100" dirty="0">
-                        <a:latin typeface="Meiryo" charset="0"/>
-                        <a:ea typeface="Meiryo" charset="0"/>
-                        <a:cs typeface="Meiryo" charset="0"/>
-                      </a:endParaRPr>
-                    </a:p>
-                  </a:txBody>
-                  <a:tcPr anchor="ctr" marT="18000" marB="18000" marL="64008" marR="45720">
-                    <a:lnL w="9525" cap="flat" cmpd="sng" algn="ctr">
-                      <a:solidFill>
-                        <a:srgbClr val="BFBFBF"/>
-                      </a:solidFill>
-                      <a:prstDash val="solid"/>
-                      <a:round/>
-                      <a:headEnd type="none" w="med" len="med"/>
-                      <a:tailEnd type="none" w="med" len="med"/>
-                    </a:lnL>
-                    <a:lnR w="9525" cap="flat" cmpd="sng" algn="ctr">
-                      <a:solidFill>
-                        <a:srgbClr val="BFBFBF"/>
-                      </a:solidFill>
-                      <a:prstDash val="solid"/>
-                      <a:round/>
-                      <a:headEnd type="none" w="med" len="med"/>
-                      <a:tailEnd type="none" w="med" len="med"/>
-                    </a:lnR>
-                    <a:lnT w="9525" cap="flat" cmpd="sng" algn="ctr">
-                      <a:solidFill>
-                        <a:srgbClr val="BFBFBF"/>
-                      </a:solidFill>
-                      <a:prstDash val="solid"/>
-                      <a:round/>
-                      <a:headEnd type="none" w="med" len="med"/>
-                      <a:tailEnd type="none" w="med" len="med"/>
-                    </a:lnT>
-                    <a:lnB w="9525" cap="flat" cmpd="sng" algn="ctr">
-                      <a:solidFill>
-                        <a:srgbClr val="BFBFBF"/>
-                      </a:solidFill>
-                      <a:prstDash val="solid"/>
-                      <a:round/>
-                      <a:headEnd type="none" w="med" len="med"/>
-                      <a:tailEnd type="none" w="med" len="med"/>
-                    </a:lnB>
-                  </a:tcPr>
-                </a:tc>
-                <a:tc>
-                  <a:txBody>
-                    <a:bodyPr/>
-                    <a:lstStyle/>
-                    <a:p>
-                      <a:pPr marL="0" indent="0" algn="l">
-                        <a:buNone/>
-                      </a:pPr>
-                      <a:r>
-                        <a:rPr lang="en-US" sz="900" dirty="0" u="sng">
-                          <a:solidFill>
-                            <a:srgbClr val="1F5FA8"/>
-                          </a:solidFill>
-                          <a:latin typeface="Meiryo" charset="0"/>
-                          <a:ea typeface="Meiryo" charset="0"/>
-                          <a:cs typeface="Meiryo" charset="0"/>
-                          <a:hlinkClick r:id="rId7"/>
-                        </a:rPr>
-                        <a:t>kihonjuku-yuuyuu.com</a:t>
-                      </a:r>
-                    </a:p>
-                  </a:txBody>
-                  <a:tcPr anchor="ctr" marT="18000" marB="18000" marL="64008" marR="45720">
-                    <a:lnL w="9525" cap="flat" cmpd="sng" algn="ctr">
-                      <a:solidFill>
-                        <a:srgbClr val="BFBFBF"/>
-                      </a:solidFill>
-                      <a:prstDash val="solid"/>
-                      <a:round/>
-                      <a:headEnd type="none" w="med" len="med"/>
-                      <a:tailEnd type="none" w="med" len="med"/>
-                    </a:lnL>
-                    <a:lnR w="9525" cap="flat" cmpd="sng" algn="ctr">
-                      <a:solidFill>
-                        <a:srgbClr val="BFBFBF"/>
-                      </a:solidFill>
-                      <a:prstDash val="solid"/>
-                      <a:round/>
-                      <a:headEnd type="none" w="med" len="med"/>
-                      <a:tailEnd type="none" w="med" len="med"/>
-                    </a:lnR>
-                    <a:lnT w="9525" cap="flat" cmpd="sng" algn="ctr">
-                      <a:solidFill>
-                        <a:srgbClr val="BFBFBF"/>
-                      </a:solidFill>
-                      <a:prstDash val="solid"/>
-                      <a:round/>
-                      <a:headEnd type="none" w="med" len="med"/>
-                      <a:tailEnd type="none" w="med" len="med"/>
-                    </a:lnT>
-                    <a:lnB w="9525" cap="flat" cmpd="sng" algn="ctr">
-                      <a:solidFill>
-                        <a:srgbClr val="BFBFBF"/>
-                      </a:solidFill>
-                      <a:prstDash val="solid"/>
-                      <a:round/>
-                      <a:headEnd type="none" w="med" len="med"/>
-                      <a:tailEnd type="none" w="med" len="med"/>
-                    </a:lnB>
-                  </a:tcPr>
-                </a:tc>
-                <a:extLst>
-                  <a:ext uri="{0D108BD9-81ED-4DB2-BD59-A6C34878D82A}">
-                    <a16:rowId xmlns:a16="http://schemas.microsoft.com/office/drawing/2014/main" val="10001"/>
-                  </a:ext>
-                </a:extLst>
-              </a:tr>
-              <a:tr h="331469">
-                <a:tc>
-                  <a:txBody>
-                    <a:bodyPr/>
-                    <a:lstStyle/>
-                    <a:p>
-                      <a:pPr marL="0" indent="0" algn="ctr">
-                        <a:buNone/>
-                      </a:pPr>
-                      <a:r>
-                        <a:rPr lang="en-US" sz="900" b="1" dirty="0">
-                          <a:solidFill>
-                            <a:srgbClr val="222222"/>
-                          </a:solidFill>
-                          <a:latin typeface="Meiryo" pitchFamily="34" charset="0"/>
-                          <a:ea typeface="Meiryo" pitchFamily="34" charset="-122"/>
-                          <a:cs typeface="Meiryo" pitchFamily="34" charset="-120"/>
-                        </a:rPr>
-                        <a:t>⑤</a:t>
-                      </a:r>
-                      <a:endParaRPr lang="en-US" sz="1100" dirty="0">
-                        <a:latin typeface="Meiryo" charset="0"/>
-                        <a:ea typeface="Meiryo" charset="0"/>
-                        <a:cs typeface="Meiryo" charset="0"/>
-                      </a:endParaRPr>
-                    </a:p>
-                  </a:txBody>
-                  <a:tcPr anchor="ctr" marT="18000" marB="18000" marL="64008" marR="45720">
-                    <a:lnL w="9525" cap="flat" cmpd="sng" algn="ctr">
-                      <a:solidFill>
-                        <a:srgbClr val="BFBFBF"/>
-                      </a:solidFill>
-                      <a:prstDash val="solid"/>
-                      <a:round/>
-                      <a:headEnd type="none" w="med" len="med"/>
-                      <a:tailEnd type="none" w="med" len="med"/>
-                    </a:lnL>
-                    <a:lnR w="9525" cap="flat" cmpd="sng" algn="ctr">
-                      <a:solidFill>
-                        <a:srgbClr val="BFBFBF"/>
-                      </a:solidFill>
-                      <a:prstDash val="solid"/>
-                      <a:round/>
-                      <a:headEnd type="none" w="med" len="med"/>
-                      <a:tailEnd type="none" w="med" len="med"/>
-                    </a:lnR>
-                    <a:lnT w="9525" cap="flat" cmpd="sng" algn="ctr">
-                      <a:solidFill>
-                        <a:srgbClr val="BFBFBF"/>
-                      </a:solidFill>
-                      <a:prstDash val="solid"/>
-                      <a:round/>
-                      <a:headEnd type="none" w="med" len="med"/>
-                      <a:tailEnd type="none" w="med" len="med"/>
-                    </a:lnT>
-                    <a:lnB w="9525" cap="flat" cmpd="sng" algn="ctr">
-                      <a:solidFill>
-                        <a:srgbClr val="BFBFBF"/>
-                      </a:solidFill>
-                      <a:prstDash val="solid"/>
-                      <a:round/>
-                      <a:headEnd type="none" w="med" len="med"/>
-                      <a:tailEnd type="none" w="med" len="med"/>
-                    </a:lnB>
-                  </a:tcPr>
-                </a:tc>
-                <a:tc>
-                  <a:txBody>
-                    <a:bodyPr/>
-                    <a:lstStyle/>
-                    <a:p>
-                      <a:pPr marL="0" indent="0" algn="l">
-                        <a:buNone/>
-                      </a:pPr>
-                      <a:r>
-                        <a:rPr lang="en-US" sz="900" b="1" dirty="0">
-                          <a:solidFill>
-                            <a:srgbClr val="222222"/>
-                          </a:solidFill>
-                          <a:latin typeface="Meiryo" pitchFamily="34" charset="0"/>
-                          <a:ea typeface="Meiryo" pitchFamily="34" charset="-122"/>
-                          <a:cs typeface="Meiryo" pitchFamily="34" charset="-120"/>
-                        </a:rPr>
-                        <a:t>基本塾優遊 八坂中央</a:t>
-                      </a:r>
-                      <a:endParaRPr lang="en-US" sz="1100" dirty="0">
-                        <a:latin typeface="Meiryo" charset="0"/>
-                        <a:ea typeface="Meiryo" charset="0"/>
-                        <a:cs typeface="Meiryo" charset="0"/>
-                      </a:endParaRPr>
-                    </a:p>
-                  </a:txBody>
-                  <a:tcPr anchor="ctr" marT="18000" marB="18000" marL="64008" marR="45720">
-                    <a:lnL w="9525" cap="flat" cmpd="sng" algn="ctr">
-                      <a:solidFill>
-                        <a:srgbClr val="BFBFBF"/>
-                      </a:solidFill>
-                      <a:prstDash val="solid"/>
-                      <a:round/>
-                      <a:headEnd type="none" w="med" len="med"/>
-                      <a:tailEnd type="none" w="med" len="med"/>
-                    </a:lnL>
-                    <a:lnR w="9525" cap="flat" cmpd="sng" algn="ctr">
-                      <a:solidFill>
-                        <a:srgbClr val="BFBFBF"/>
-                      </a:solidFill>
-                      <a:prstDash val="solid"/>
-                      <a:round/>
-                      <a:headEnd type="none" w="med" len="med"/>
-                      <a:tailEnd type="none" w="med" len="med"/>
-                    </a:lnR>
-                    <a:lnT w="9525" cap="flat" cmpd="sng" algn="ctr">
-                      <a:solidFill>
-                        <a:srgbClr val="BFBFBF"/>
-                      </a:solidFill>
-                      <a:prstDash val="solid"/>
-                      <a:round/>
-                      <a:headEnd type="none" w="med" len="med"/>
-                      <a:tailEnd type="none" w="med" len="med"/>
-                    </a:lnT>
-                    <a:lnB w="9525" cap="flat" cmpd="sng" algn="ctr">
-                      <a:solidFill>
-                        <a:srgbClr val="BFBFBF"/>
-                      </a:solidFill>
-                      <a:prstDash val="solid"/>
-                      <a:round/>
-                      <a:headEnd type="none" w="med" len="med"/>
-                      <a:tailEnd type="none" w="med" len="med"/>
-                    </a:lnB>
-                  </a:tcPr>
-                </a:tc>
-                <a:tc>
-                  <a:txBody>
-                    <a:bodyPr/>
-                    <a:lstStyle/>
-                    <a:p>
-                      <a:pPr marL="0" indent="0" algn="l">
-                        <a:buNone/>
-                      </a:pPr>
-                      <a:r>
-                        <a:rPr lang="en-US" sz="900" dirty="0">
-                          <a:solidFill>
-                            <a:srgbClr val="222222"/>
-                          </a:solidFill>
-                          <a:latin typeface="Meiryo" pitchFamily="34" charset="0"/>
-                          <a:ea typeface="Meiryo" pitchFamily="34" charset="-122"/>
-                          <a:cs typeface="Meiryo" pitchFamily="34" charset="-120"/>
-                        </a:rPr>
-                        <a:t>NPO法人 基本塾</a:t>
-                      </a:r>
-                      <a:endParaRPr lang="en-US" sz="1100" dirty="0">
-                        <a:latin typeface="Meiryo" charset="0"/>
-                        <a:ea typeface="Meiryo" charset="0"/>
-                        <a:cs typeface="Meiryo" charset="0"/>
-                      </a:endParaRPr>
-                    </a:p>
-                  </a:txBody>
-                  <a:tcPr anchor="ctr" marT="18000" marB="18000" marL="64008" marR="45720">
-                    <a:lnL w="9525" cap="flat" cmpd="sng" algn="ctr">
-                      <a:solidFill>
-                        <a:srgbClr val="BFBFBF"/>
-                      </a:solidFill>
-                      <a:prstDash val="solid"/>
-                      <a:round/>
-                      <a:headEnd type="none" w="med" len="med"/>
-                      <a:tailEnd type="none" w="med" len="med"/>
-                    </a:lnL>
-                    <a:lnR w="9525" cap="flat" cmpd="sng" algn="ctr">
-                      <a:solidFill>
-                        <a:srgbClr val="BFBFBF"/>
-                      </a:solidFill>
-                      <a:prstDash val="solid"/>
-                      <a:round/>
-                      <a:headEnd type="none" w="med" len="med"/>
-                      <a:tailEnd type="none" w="med" len="med"/>
-                    </a:lnR>
-                    <a:lnT w="9525" cap="flat" cmpd="sng" algn="ctr">
-                      <a:solidFill>
-                        <a:srgbClr val="BFBFBF"/>
-                      </a:solidFill>
-                      <a:prstDash val="solid"/>
-                      <a:round/>
-                      <a:headEnd type="none" w="med" len="med"/>
-                      <a:tailEnd type="none" w="med" len="med"/>
-                    </a:lnT>
-                    <a:lnB w="9525" cap="flat" cmpd="sng" algn="ctr">
-                      <a:solidFill>
-                        <a:srgbClr val="BFBFBF"/>
-                      </a:solidFill>
-                      <a:prstDash val="solid"/>
-                      <a:round/>
-                      <a:headEnd type="none" w="med" len="med"/>
-                      <a:tailEnd type="none" w="med" len="med"/>
-                    </a:lnB>
-                  </a:tcPr>
-                </a:tc>
-                <a:tc>
-                  <a:txBody>
-                    <a:bodyPr/>
-                    <a:lstStyle/>
-                    <a:p>
-                      <a:pPr marL="0" indent="0" algn="l">
-                        <a:buNone/>
-                      </a:pPr>
-                      <a:r>
-                        <a:rPr lang="en-US" sz="900" dirty="0">
-                          <a:solidFill>
-                            <a:srgbClr val="222222"/>
-                          </a:solidFill>
-                          <a:latin typeface="Meiryo" pitchFamily="34" charset="0"/>
-                          <a:ea typeface="Meiryo" pitchFamily="34" charset="-122"/>
-                          <a:cs typeface="Meiryo" pitchFamily="34" charset="-120"/>
-                        </a:rPr>
-                        <a:t>八坂台地区（要確認）</a:t>
+                        <a:t>家之子1671-36</a:t>
                       </a:r>
                       <a:endParaRPr lang="en-US" sz="1100" dirty="0">
                         <a:latin typeface="Meiryo" charset="0"/>
@@ -7837,9 +9610,9 @@
                           <a:latin typeface="Meiryo" charset="0"/>
                           <a:ea typeface="Meiryo" charset="0"/>
                           <a:cs typeface="Meiryo" charset="0"/>
-                          <a:hlinkClick r:id="rId7"/>
+                          <a:hlinkClick r:id="rId9"/>
                         </a:rPr>
-                        <a:t>kihonjuku-yuuyuu.com</a:t>
+                        <a:t>LITALICO発達ナビ 東金市一覧</a:t>
                       </a:r>
                     </a:p>
                   </a:txBody>
@@ -7888,7 +9661,7 @@
                   </a:ext>
                 </a:extLst>
               </a:tr>
-              <a:tr h="331469">
+              <a:tr h="305972">
                 <a:tc>
                   <a:txBody>
                     <a:bodyPr/>
@@ -7906,7 +9679,7 @@
                           <a:ea typeface="Meiryo" pitchFamily="34" charset="-122"/>
                           <a:cs typeface="Meiryo" pitchFamily="34" charset="-120"/>
                         </a:rPr>
-                        <a:t>⑥</a:t>
+                        <a:t>⑧</a:t>
                       </a:r>
                       <a:endParaRPr lang="en-US" sz="1100" dirty="0">
                         <a:latin typeface="Meiryo" charset="0"/>
@@ -7971,137 +9744,7 @@
                           <a:ea typeface="Meiryo" pitchFamily="34" charset="-122"/>
                           <a:cs typeface="Meiryo" pitchFamily="34" charset="-120"/>
                         </a:rPr>
-                        <a:t>児童発達支援コンパッション保育所</a:t>
-                      </a:r>
-                      <a:endParaRPr lang="en-US" sz="1100" dirty="0">
-                        <a:latin typeface="Meiryo" charset="0"/>
-                        <a:ea typeface="Meiryo" charset="0"/>
-                        <a:cs typeface="Meiryo" charset="0"/>
-                      </a:endParaRPr>
-                    </a:p>
-                  </a:txBody>
-                  <a:tcPr anchor="ctr" marT="18000" marB="18000" marL="64008" marR="45720">
-                    <a:lnL w="9525" cap="flat" cmpd="sng" algn="ctr">
-                      <a:solidFill>
-                        <a:srgbClr val="BFBFBF"/>
-                      </a:solidFill>
-                      <a:prstDash val="solid"/>
-                      <a:round/>
-                      <a:headEnd type="none" w="med" len="med"/>
-                      <a:tailEnd type="none" w="med" len="med"/>
-                    </a:lnL>
-                    <a:lnR w="9525" cap="flat" cmpd="sng" algn="ctr">
-                      <a:solidFill>
-                        <a:srgbClr val="BFBFBF"/>
-                      </a:solidFill>
-                      <a:prstDash val="solid"/>
-                      <a:round/>
-                      <a:headEnd type="none" w="med" len="med"/>
-                      <a:tailEnd type="none" w="med" len="med"/>
-                    </a:lnR>
-                    <a:lnT w="9525" cap="flat" cmpd="sng" algn="ctr">
-                      <a:solidFill>
-                        <a:srgbClr val="BFBFBF"/>
-                      </a:solidFill>
-                      <a:prstDash val="solid"/>
-                      <a:round/>
-                      <a:headEnd type="none" w="med" len="med"/>
-                      <a:tailEnd type="none" w="med" len="med"/>
-                    </a:lnT>
-                    <a:lnB w="9525" cap="flat" cmpd="sng" algn="ctr">
-                      <a:solidFill>
-                        <a:srgbClr val="BFBFBF"/>
-                      </a:solidFill>
-                      <a:prstDash val="solid"/>
-                      <a:round/>
-                      <a:headEnd type="none" w="med" len="med"/>
-                      <a:tailEnd type="none" w="med" len="med"/>
-                    </a:lnB>
-                  </a:tcPr>
-                </a:tc>
-                <a:tc>
-                  <a:txBody>
-                    <a:bodyPr/>
-                    <a:lstStyle/>
-                    <a:p>
-                      <a:pPr marL="0" indent="0" algn="l">
-                        <a:buNone/>
-                      </a:pPr>
-                      <a:r>
-                        <a:rPr lang="en-US" sz="900" dirty="0">
-                          <a:solidFill>
-                            <a:srgbClr val="222222"/>
-                          </a:solidFill>
-                          <a:latin typeface="Meiryo" pitchFamily="34" charset="0"/>
-                          <a:ea typeface="Meiryo" pitchFamily="34" charset="-122"/>
-                          <a:cs typeface="Meiryo" pitchFamily="34" charset="-120"/>
-                        </a:rPr>
-                        <a:t>要確認（保育所併設）</a:t>
-                      </a:r>
-                      <a:endParaRPr lang="en-US" sz="1100" dirty="0">
-                        <a:latin typeface="Meiryo" charset="0"/>
-                        <a:ea typeface="Meiryo" charset="0"/>
-                        <a:cs typeface="Meiryo" charset="0"/>
-                      </a:endParaRPr>
-                    </a:p>
-                  </a:txBody>
-                  <a:tcPr anchor="ctr" marT="18000" marB="18000" marL="64008" marR="45720">
-                    <a:lnL w="9525" cap="flat" cmpd="sng" algn="ctr">
-                      <a:solidFill>
-                        <a:srgbClr val="BFBFBF"/>
-                      </a:solidFill>
-                      <a:prstDash val="solid"/>
-                      <a:round/>
-                      <a:headEnd type="none" w="med" len="med"/>
-                      <a:tailEnd type="none" w="med" len="med"/>
-                    </a:lnL>
-                    <a:lnR w="9525" cap="flat" cmpd="sng" algn="ctr">
-                      <a:solidFill>
-                        <a:srgbClr val="BFBFBF"/>
-                      </a:solidFill>
-                      <a:prstDash val="solid"/>
-                      <a:round/>
-                      <a:headEnd type="none" w="med" len="med"/>
-                      <a:tailEnd type="none" w="med" len="med"/>
-                    </a:lnR>
-                    <a:lnT w="9525" cap="flat" cmpd="sng" algn="ctr">
-                      <a:solidFill>
-                        <a:srgbClr val="BFBFBF"/>
-                      </a:solidFill>
-                      <a:prstDash val="solid"/>
-                      <a:round/>
-                      <a:headEnd type="none" w="med" len="med"/>
-                      <a:tailEnd type="none" w="med" len="med"/>
-                    </a:lnT>
-                    <a:lnB w="9525" cap="flat" cmpd="sng" algn="ctr">
-                      <a:solidFill>
-                        <a:srgbClr val="BFBFBF"/>
-                      </a:solidFill>
-                      <a:prstDash val="solid"/>
-                      <a:round/>
-                      <a:headEnd type="none" w="med" len="med"/>
-                      <a:tailEnd type="none" w="med" len="med"/>
-                    </a:lnB>
-                  </a:tcPr>
-                </a:tc>
-                <a:tc>
-                  <a:txBody>
-                    <a:bodyPr/>
-                    <a:lstStyle/>
-                    <a:p>
-                      <a:pPr marL="0" indent="0" algn="l">
-                        <a:buNone/>
-                      </a:pPr>
-                      <a:r>
-                        <a:rPr lang="en-US" sz="900" dirty="0">
-                          <a:solidFill>
-                            <a:srgbClr val="222222"/>
-                          </a:solidFill>
-                          <a:latin typeface="Meiryo" pitchFamily="34" charset="0"/>
-                          <a:ea typeface="Meiryo" pitchFamily="34" charset="-122"/>
-                          <a:cs typeface="Meiryo" pitchFamily="34" charset="-120"/>
-                        </a:rPr>
-                        <a:t>家之子1671-36</a:t>
+                        <a:t>鴇嶺の家</a:t>
                       </a:r>
                       <a:endParaRPr lang="en-US" sz="1100" dirty="0">
                         <a:latin typeface="Meiryo" charset="0"/>
@@ -8223,75 +9866,7 @@
                         <a:buNone/>
                       </a:pPr>
                       <a:r>
-                        <a:rPr lang="en-US" sz="900" dirty="0" u="sng">
-                          <a:solidFill>
-                            <a:srgbClr val="1F5FA8"/>
-                          </a:solidFill>
-                          <a:latin typeface="Meiryo" charset="0"/>
-                          <a:ea typeface="Meiryo" charset="0"/>
-                          <a:cs typeface="Meiryo" charset="0"/>
-                          <a:hlinkClick r:id="rId8"/>
-                        </a:rPr>
-                        <a:t>LITALICO発達ナビ 東金市一覧</a:t>
-                      </a:r>
-                    </a:p>
-                  </a:txBody>
-                  <a:tcPr anchor="ctr" marT="18000" marB="18000" marL="64008" marR="45720">
-                    <a:lnL w="9525" cap="flat" cmpd="sng" algn="ctr">
-                      <a:solidFill>
-                        <a:srgbClr val="BFBFBF"/>
-                      </a:solidFill>
-                      <a:prstDash val="solid"/>
-                      <a:round/>
-                      <a:headEnd type="none" w="med" len="med"/>
-                      <a:tailEnd type="none" w="med" len="med"/>
-                    </a:lnL>
-                    <a:lnR w="9525" cap="flat" cmpd="sng" algn="ctr">
-                      <a:solidFill>
-                        <a:srgbClr val="BFBFBF"/>
-                      </a:solidFill>
-                      <a:prstDash val="solid"/>
-                      <a:round/>
-                      <a:headEnd type="none" w="med" len="med"/>
-                      <a:tailEnd type="none" w="med" len="med"/>
-                    </a:lnR>
-                    <a:lnT w="9525" cap="flat" cmpd="sng" algn="ctr">
-                      <a:solidFill>
-                        <a:srgbClr val="BFBFBF"/>
-                      </a:solidFill>
-                      <a:prstDash val="solid"/>
-                      <a:round/>
-                      <a:headEnd type="none" w="med" len="med"/>
-                      <a:tailEnd type="none" w="med" len="med"/>
-                    </a:lnT>
-                    <a:lnB w="9525" cap="flat" cmpd="sng" algn="ctr">
-                      <a:solidFill>
-                        <a:srgbClr val="BFBFBF"/>
-                      </a:solidFill>
-                      <a:prstDash val="solid"/>
-                      <a:round/>
-                      <a:headEnd type="none" w="med" len="med"/>
-                      <a:tailEnd type="none" w="med" len="med"/>
-                    </a:lnB>
-                  </a:tcPr>
-                </a:tc>
-                <a:extLst>
-                  <a:ext uri="{0D108BD9-81ED-4DB2-BD59-A6C34878D82A}">
-                    <a16:rowId xmlns:a16="http://schemas.microsoft.com/office/drawing/2014/main" val="10001"/>
-                  </a:ext>
-                </a:extLst>
-              </a:tr>
-              <a:tr h="331469">
-                <a:tc>
-                  <a:txBody>
-                    <a:bodyPr/>
-                    <a:lstStyle/>
-                    <a:p>
-                      <a:pPr marL="0" indent="0" algn="ctr">
-                        <a:buNone/>
-                      </a:pPr>
-                      <a:r>
-                        <a:rPr lang="en-US" sz="900" b="1" dirty="0">
+                        <a:rPr lang="en-US" sz="900" dirty="0">
                           <a:solidFill>
                             <a:srgbClr val="222222"/>
                           </a:solidFill>
@@ -8299,72 +9874,7 @@
                           <a:ea typeface="Meiryo" pitchFamily="34" charset="-122"/>
                           <a:cs typeface="Meiryo" pitchFamily="34" charset="-120"/>
                         </a:rPr>
-                        <a:t>⑦</a:t>
-                      </a:r>
-                      <a:endParaRPr lang="en-US" sz="1100" dirty="0">
-                        <a:latin typeface="Meiryo" charset="0"/>
-                        <a:ea typeface="Meiryo" charset="0"/>
-                        <a:cs typeface="Meiryo" charset="0"/>
-                      </a:endParaRPr>
-                    </a:p>
-                  </a:txBody>
-                  <a:tcPr anchor="ctr" marT="18000" marB="18000" marL="64008" marR="45720">
-                    <a:lnL w="9525" cap="flat" cmpd="sng" algn="ctr">
-                      <a:solidFill>
-                        <a:srgbClr val="BFBFBF"/>
-                      </a:solidFill>
-                      <a:prstDash val="solid"/>
-                      <a:round/>
-                      <a:headEnd type="none" w="med" len="med"/>
-                      <a:tailEnd type="none" w="med" len="med"/>
-                    </a:lnL>
-                    <a:lnR w="9525" cap="flat" cmpd="sng" algn="ctr">
-                      <a:solidFill>
-                        <a:srgbClr val="BFBFBF"/>
-                      </a:solidFill>
-                      <a:prstDash val="solid"/>
-                      <a:round/>
-                      <a:headEnd type="none" w="med" len="med"/>
-                      <a:tailEnd type="none" w="med" len="med"/>
-                    </a:lnR>
-                    <a:lnT w="9525" cap="flat" cmpd="sng" algn="ctr">
-                      <a:solidFill>
-                        <a:srgbClr val="BFBFBF"/>
-                      </a:solidFill>
-                      <a:prstDash val="solid"/>
-                      <a:round/>
-                      <a:headEnd type="none" w="med" len="med"/>
-                      <a:tailEnd type="none" w="med" len="med"/>
-                    </a:lnT>
-                    <a:lnB w="9525" cap="flat" cmpd="sng" algn="ctr">
-                      <a:solidFill>
-                        <a:srgbClr val="BFBFBF"/>
-                      </a:solidFill>
-                      <a:prstDash val="solid"/>
-                      <a:round/>
-                      <a:headEnd type="none" w="med" len="med"/>
-                      <a:tailEnd type="none" w="med" len="med"/>
-                    </a:lnB>
-                  </a:tcPr>
-                </a:tc>
-                <a:tc>
-                  <a:txBody>
-                    <a:bodyPr/>
-                    <a:lstStyle/>
-                    <a:p>
-                      <a:pPr marL="0" indent="0" algn="l">
-                        <a:buNone/>
-                      </a:pPr>
-                      <a:r>
-                        <a:rPr lang="en-US" sz="900" b="1" dirty="0">
-                          <a:solidFill>
-                            <a:srgbClr val="222222"/>
-                          </a:solidFill>
-                          <a:latin typeface="Meiryo" pitchFamily="34" charset="0"/>
-                          <a:ea typeface="Meiryo" pitchFamily="34" charset="-122"/>
-                          <a:cs typeface="Meiryo" pitchFamily="34" charset="-120"/>
-                        </a:rPr>
-                        <a:t>鴇嶺の家</a:t>
+                        <a:t>東金425-2</a:t>
                       </a:r>
                       <a:endParaRPr lang="en-US" sz="1100" dirty="0">
                         <a:latin typeface="Meiryo" charset="0"/>
@@ -8486,136 +9996,6 @@
                         <a:buNone/>
                       </a:pPr>
                       <a:r>
-                        <a:rPr lang="en-US" sz="900" dirty="0">
-                          <a:solidFill>
-                            <a:srgbClr val="222222"/>
-                          </a:solidFill>
-                          <a:latin typeface="Meiryo" pitchFamily="34" charset="0"/>
-                          <a:ea typeface="Meiryo" pitchFamily="34" charset="-122"/>
-                          <a:cs typeface="Meiryo" pitchFamily="34" charset="-120"/>
-                        </a:rPr>
-                        <a:t>東金425-2</a:t>
-                      </a:r>
-                      <a:endParaRPr lang="en-US" sz="1100" dirty="0">
-                        <a:latin typeface="Meiryo" charset="0"/>
-                        <a:ea typeface="Meiryo" charset="0"/>
-                        <a:cs typeface="Meiryo" charset="0"/>
-                      </a:endParaRPr>
-                    </a:p>
-                  </a:txBody>
-                  <a:tcPr anchor="ctr" marT="18000" marB="18000" marL="64008" marR="45720">
-                    <a:lnL w="9525" cap="flat" cmpd="sng" algn="ctr">
-                      <a:solidFill>
-                        <a:srgbClr val="BFBFBF"/>
-                      </a:solidFill>
-                      <a:prstDash val="solid"/>
-                      <a:round/>
-                      <a:headEnd type="none" w="med" len="med"/>
-                      <a:tailEnd type="none" w="med" len="med"/>
-                    </a:lnL>
-                    <a:lnR w="9525" cap="flat" cmpd="sng" algn="ctr">
-                      <a:solidFill>
-                        <a:srgbClr val="BFBFBF"/>
-                      </a:solidFill>
-                      <a:prstDash val="solid"/>
-                      <a:round/>
-                      <a:headEnd type="none" w="med" len="med"/>
-                      <a:tailEnd type="none" w="med" len="med"/>
-                    </a:lnR>
-                    <a:lnT w="9525" cap="flat" cmpd="sng" algn="ctr">
-                      <a:solidFill>
-                        <a:srgbClr val="BFBFBF"/>
-                      </a:solidFill>
-                      <a:prstDash val="solid"/>
-                      <a:round/>
-                      <a:headEnd type="none" w="med" len="med"/>
-                      <a:tailEnd type="none" w="med" len="med"/>
-                    </a:lnT>
-                    <a:lnB w="9525" cap="flat" cmpd="sng" algn="ctr">
-                      <a:solidFill>
-                        <a:srgbClr val="BFBFBF"/>
-                      </a:solidFill>
-                      <a:prstDash val="solid"/>
-                      <a:round/>
-                      <a:headEnd type="none" w="med" len="med"/>
-                      <a:tailEnd type="none" w="med" len="med"/>
-                    </a:lnB>
-                  </a:tcPr>
-                </a:tc>
-                <a:tc>
-                  <a:txBody>
-                    <a:bodyPr/>
-                    <a:lstStyle/>
-                    <a:p>
-                      <a:pPr marL="0" indent="0" algn="l">
-                        <a:buNone/>
-                      </a:pPr>
-                      <a:r>
-                        <a:rPr lang="en-US" sz="900" dirty="0">
-                          <a:solidFill>
-                            <a:srgbClr val="222222"/>
-                          </a:solidFill>
-                          <a:latin typeface="Meiryo" pitchFamily="34" charset="0"/>
-                          <a:ea typeface="Meiryo" pitchFamily="34" charset="-122"/>
-                          <a:cs typeface="Meiryo" pitchFamily="34" charset="-120"/>
-                        </a:rPr>
-                        <a:t>要確認</a:t>
-                      </a:r>
-                      <a:endParaRPr lang="en-US" sz="1100" dirty="0">
-                        <a:latin typeface="Meiryo" charset="0"/>
-                        <a:ea typeface="Meiryo" charset="0"/>
-                        <a:cs typeface="Meiryo" charset="0"/>
-                      </a:endParaRPr>
-                    </a:p>
-                  </a:txBody>
-                  <a:tcPr anchor="ctr" marT="18000" marB="18000" marL="64008" marR="45720">
-                    <a:lnL w="9525" cap="flat" cmpd="sng" algn="ctr">
-                      <a:solidFill>
-                        <a:srgbClr val="BFBFBF"/>
-                      </a:solidFill>
-                      <a:prstDash val="solid"/>
-                      <a:round/>
-                      <a:headEnd type="none" w="med" len="med"/>
-                      <a:tailEnd type="none" w="med" len="med"/>
-                    </a:lnL>
-                    <a:lnR w="9525" cap="flat" cmpd="sng" algn="ctr">
-                      <a:solidFill>
-                        <a:srgbClr val="BFBFBF"/>
-                      </a:solidFill>
-                      <a:prstDash val="solid"/>
-                      <a:round/>
-                      <a:headEnd type="none" w="med" len="med"/>
-                      <a:tailEnd type="none" w="med" len="med"/>
-                    </a:lnR>
-                    <a:lnT w="9525" cap="flat" cmpd="sng" algn="ctr">
-                      <a:solidFill>
-                        <a:srgbClr val="BFBFBF"/>
-                      </a:solidFill>
-                      <a:prstDash val="solid"/>
-                      <a:round/>
-                      <a:headEnd type="none" w="med" len="med"/>
-                      <a:tailEnd type="none" w="med" len="med"/>
-                    </a:lnT>
-                    <a:lnB w="9525" cap="flat" cmpd="sng" algn="ctr">
-                      <a:solidFill>
-                        <a:srgbClr val="BFBFBF"/>
-                      </a:solidFill>
-                      <a:prstDash val="solid"/>
-                      <a:round/>
-                      <a:headEnd type="none" w="med" len="med"/>
-                      <a:tailEnd type="none" w="med" len="med"/>
-                    </a:lnB>
-                  </a:tcPr>
-                </a:tc>
-                <a:tc>
-                  <a:txBody>
-                    <a:bodyPr/>
-                    <a:lstStyle/>
-                    <a:p>
-                      <a:pPr marL="0" indent="0" algn="l">
-                        <a:buNone/>
-                      </a:pPr>
-                      <a:r>
                         <a:rPr lang="en-US" sz="900" dirty="0" u="sng">
                           <a:solidFill>
                             <a:srgbClr val="1F5FA8"/>
@@ -8623,7 +10003,7 @@
                           <a:latin typeface="Meiryo" charset="0"/>
                           <a:ea typeface="Meiryo" charset="0"/>
                           <a:cs typeface="Meiryo" charset="0"/>
-                          <a:hlinkClick r:id="rId8"/>
+                          <a:hlinkClick r:id="rId9"/>
                         </a:rPr>
                         <a:t>LITALICO発達ナビ 東金市一覧</a:t>
                       </a:r>
@@ -8711,7 +10091,7 @@
                 <a:ea typeface="Meiryo" pitchFamily="34" charset="-122"/>
                 <a:cs typeface="Meiryo" pitchFamily="34" charset="-120"/>
               </a:rPr>
-              <a:t>※「児童発達支援」の指定を受けている事業所を抽出。⑥を除き放課後等デイサービスを併設。⑤基本塾優遊はNPO法人基本塾の5拠点で、詳細頁では1枚に集約。「HP／出典」欄はクリックで該当ページを開きます（公式HPが確認できない事業所は出典元へのリンク）。2026年8月時点の公開情報にもとづく整理のため、掲載内容は各事業所への確認を推奨。</a:t>
+              <a:t>※「児童発達支援」の指定を受けている事業所を抽出。⑦を除き放課後等デイサービスを併設。②③は同一運営（公式サイト chibasha-kodomo2.com）、⑥基本塾優遊はNPO法人基本塾の5拠点で詳細頁では1枚に集約。「HP／出典」欄はクリックで該当ページを開きます。②③は事業所公式サイトのため未掲載の集約サイトあり。2026年8月時点の公開情報にもとづく整理のため、掲載内容は各事業所への確認を推奨。</a:t>
             </a:r>
             <a:endParaRPr lang="en-US" sz="1000" dirty="0"/>
           </a:p>
@@ -9934,7 +11314,7 @@
                 <a:ea typeface="Meiryo" pitchFamily="34" charset="-122"/>
                 <a:cs typeface="Meiryo" pitchFamily="34" charset="-120"/>
               </a:rPr>
-              <a:t>② 子ども支援センターぽけっと</a:t>
+              <a:t>② 子ども支援センター まあちる</a:t>
             </a:r>
             <a:endParaRPr lang="en-US" sz="2100" dirty="0"/>
           </a:p>
@@ -10108,7 +11488,7 @@
                 <a:ea typeface="Meiryo" pitchFamily="34" charset="-122"/>
                 <a:cs typeface="Meiryo" pitchFamily="34" charset="-120"/>
               </a:rPr>
-              <a:t>子ども支援センターぽけっと（児童発達支援・放課後等デイサービス）</a:t>
+              <a:t>子ども支援センター まあちる（児童発達支援・放課後等デイサービス）</a:t>
             </a:r>
             <a:endParaRPr lang="en-US" sz="1400" dirty="0"/>
           </a:p>
@@ -10172,7 +11552,7 @@
                 <a:ea typeface="Meiryo" pitchFamily="34" charset="-122"/>
                 <a:cs typeface="Meiryo" pitchFamily="34" charset="-120"/>
               </a:rPr>
-              <a:t>未就学児（児童発達支援）〜就学児（放課後等デイサービス）</a:t>
+              <a:t>通所受給者証をお持ちのお子さん　※在籍は主に2歳〜12歳（未就学児〜小学生が中心）</a:t>
             </a:r>
             <a:endParaRPr lang="en-US" sz="1050" dirty="0"/>
           </a:p>
@@ -10214,7 +11594,7 @@
                 <a:ea typeface="Meiryo" pitchFamily="34" charset="-122"/>
                 <a:cs typeface="Meiryo" pitchFamily="34" charset="-120"/>
               </a:rPr>
-              <a:t>千葉県東金市東上宿6番地2</a:t>
+              <a:t>〒283-0068 千葉県東金市東岩崎2-10 えびすビル103号室</a:t>
             </a:r>
             <a:endParaRPr lang="en-US" sz="1050" dirty="0"/>
           </a:p>
@@ -10256,7 +11636,7 @@
                 <a:ea typeface="Meiryo" pitchFamily="34" charset="-122"/>
                 <a:cs typeface="Meiryo" pitchFamily="34" charset="-120"/>
               </a:rPr>
-              <a:t>0475-50-1081 ／ WAM NET（障害福祉サービス等情報公表システム）に事業所情報を掲載</a:t>
+              <a:t>0475-71-3657 ／ chibasha-kodomo2.com/maachiru</a:t>
             </a:r>
             <a:endParaRPr lang="en-US" sz="1050" dirty="0"/>
           </a:p>
@@ -10287,7 +11667,7 @@
                 <a:ea typeface="Meiryo" pitchFamily="34" charset="-122"/>
                 <a:cs typeface="Meiryo" pitchFamily="34" charset="-120"/>
               </a:rPr>
-              <a:t>サービス提供時間／定員：</a:t>
+              <a:t>受付時間：</a:t>
             </a:r>
             <a:r>
               <a:rPr lang="en-US" sz="1050" dirty="0">
@@ -10298,7 +11678,49 @@
                 <a:ea typeface="Meiryo" pitchFamily="34" charset="-122"/>
                 <a:cs typeface="Meiryo" pitchFamily="34" charset="-120"/>
               </a:rPr>
-              <a:t>いずれも要確認（公開情報に記載なし）</a:t>
+              <a:t>火曜〜土曜 9:00〜18:00　※日曜・月曜は電話受付外</a:t>
+            </a:r>
+            <a:endParaRPr lang="en-US" sz="1050" dirty="0"/>
+          </a:p>
+          <a:p>
+            <a:pPr marL="0" indent="0">
+              <a:lnSpc>
+                <a:spcPct val="103000"/>
+              </a:lnSpc>
+              <a:buNone/>
+            </a:pPr>
+            <a:r>
+              <a:rPr lang="en-US" sz="1050" b="1" dirty="0">
+                <a:solidFill>
+                  <a:srgbClr val="2E6BB8"/>
+                </a:solidFill>
+                <a:latin typeface="Meiryo" pitchFamily="34" charset="0"/>
+                <a:ea typeface="Meiryo" pitchFamily="34" charset="-122"/>
+                <a:cs typeface="Meiryo" pitchFamily="34" charset="-120"/>
+              </a:rPr>
+              <a:t>▶</a:t>
+            </a:r>
+            <a:r>
+              <a:rPr lang="en-US" sz="1050" b="1" dirty="0">
+                <a:solidFill>
+                  <a:srgbClr val="222222"/>
+                </a:solidFill>
+                <a:latin typeface="Meiryo" pitchFamily="34" charset="0"/>
+                <a:ea typeface="Meiryo" pitchFamily="34" charset="-122"/>
+                <a:cs typeface="Meiryo" pitchFamily="34" charset="-120"/>
+              </a:rPr>
+              <a:t>定員：</a:t>
+            </a:r>
+            <a:r>
+              <a:rPr lang="en-US" sz="1050" dirty="0">
+                <a:solidFill>
+                  <a:srgbClr val="222222"/>
+                </a:solidFill>
+                <a:latin typeface="Meiryo" pitchFamily="34" charset="0"/>
+                <a:ea typeface="Meiryo" pitchFamily="34" charset="-122"/>
+                <a:cs typeface="Meiryo" pitchFamily="34" charset="-120"/>
+              </a:rPr>
+              <a:t>要確認</a:t>
             </a:r>
             <a:endParaRPr lang="en-US" sz="1050" dirty="0"/>
           </a:p>
@@ -10352,7 +11774,7 @@
                 <a:ea typeface="Meiryo" pitchFamily="34" charset="-122"/>
                 <a:cs typeface="Meiryo" pitchFamily="34" charset="-120"/>
               </a:rPr>
-              <a:t>公開情報が限られており、支援内容の詳細は事業所への直接確認が必要。</a:t>
+              <a:t>「生きる力」を育むことを掲げ、児童発達支援と放課後等デイサービスを提供。</a:t>
             </a:r>
             <a:endParaRPr lang="en-US" sz="1050" dirty="0"/>
           </a:p>
@@ -10375,7 +11797,7 @@
                 <a:ea typeface="Meiryo" pitchFamily="34" charset="-122"/>
                 <a:cs typeface="Meiryo" pitchFamily="34" charset="-120"/>
               </a:rPr>
-              <a:t>・児童発達支援と放課後等デイサービスを併設し、未就学から就学後まで継続利用できる体制。</a:t>
+              <a:t>・児発＝日常生活における基本動作や知識技術の習得支援、幼稚園等への入園・小学校入学に向けた集団生活への適応訓練。</a:t>
             </a:r>
             <a:endParaRPr lang="en-US" sz="1050" dirty="0"/>
           </a:p>
@@ -10398,7 +11820,7 @@
                 <a:ea typeface="Meiryo" pitchFamily="34" charset="-122"/>
                 <a:cs typeface="Meiryo" pitchFamily="34" charset="-120"/>
               </a:rPr>
-              <a:t>・東金駅・市役所に近い東上宿の市街地に立地。</a:t>
+              <a:t>・放デイ＝個別・集団活動を通じた日常動作の習得と集団生活への適応支援。</a:t>
             </a:r>
             <a:endParaRPr lang="en-US" sz="1050" dirty="0"/>
           </a:p>
@@ -10421,7 +11843,7 @@
                 <a:ea typeface="Meiryo" pitchFamily="34" charset="-122"/>
                 <a:cs typeface="Meiryo" pitchFamily="34" charset="-120"/>
               </a:rPr>
-              <a:t>・同一町域（東上宿6-1）に相談支援事業所「街かど福祉相談室るると」が所在し、相談〜通所の導線が近い。</a:t>
+              <a:t>・事業所内見学を随時受付。電話・問い合わせフォームから相談・見学に対応。</a:t>
             </a:r>
             <a:endParaRPr lang="en-US" sz="1050" dirty="0"/>
           </a:p>
@@ -10475,7 +11897,7 @@
                 <a:ea typeface="Meiryo" pitchFamily="34" charset="-122"/>
                 <a:cs typeface="Meiryo" pitchFamily="34" charset="-120"/>
               </a:rPr>
-              <a:t>WAM NET 障害福祉サービス等情報公表システム／LITALICO発達ナビ／東金市公式サイト</a:t>
+              <a:t>公式サイト chibasha-kodomo2.com（子ども支援センター まあちる／ぽけっと）</a:t>
             </a:r>
             <a:endParaRPr lang="en-US" sz="1050" dirty="0"/>
           </a:p>
@@ -10517,7 +11939,7 @@
                 <a:ea typeface="Meiryo" pitchFamily="34" charset="-122"/>
                 <a:cs typeface="Meiryo" pitchFamily="34" charset="-120"/>
               </a:rPr>
-              <a:t>運営法人、サービス提供時間、定員、送迎の有無、プログラム内容　※公開情報がほぼ無く電話ヒアリング必須</a:t>
+              <a:t>運営法人の正式名称、定員、サービス提供時間（受付時間とは別）、送迎の有無、指定年月日</a:t>
             </a:r>
             <a:endParaRPr lang="en-US" sz="1050" dirty="0"/>
           </a:p>
@@ -10586,7 +12008,7 @@
                 <a:ea typeface="Meiryo" pitchFamily="34" charset="-122"/>
                 <a:cs typeface="Meiryo" pitchFamily="34" charset="-120"/>
               </a:rPr>
-              <a:t>（WAM NET 事業所詳細／公式HPの室内写真を挿入）</a:t>
+              <a:t>（公式サイト chibasha-kodomo2.com/maachiru 掲載の教室・活動写真を挿入）</a:t>
             </a:r>
             <a:endParaRPr lang="en-US" sz="1200" dirty="0"/>
           </a:p>
@@ -10693,7 +12115,7 @@
                 <a:ea typeface="メイリオ" panose="020B0604030504040204" pitchFamily="50" charset="-128"/>
                 <a:cs typeface="Meiryo" pitchFamily="34" charset="-120"/>
               </a:rPr>
-              <a:t>市街地中心部の立地で、駅・市役所方面からのアクセス性が高い。</a:t>
+              <a:t>同一運営の「ぽけっと」（主に6〜18歳）と年齢帯を分ける“年齢分離型”の2拠点運営。未就学の受け皿はまあちるが担う。</a:t>
             </a:r>
             <a:endParaRPr lang="en-US" sz="1000" dirty="0">
               <a:latin typeface="メイリオ" panose="020B0604030504040204" pitchFamily="50" charset="-128"/>
@@ -10717,7 +12139,7 @@
                 <a:ea typeface="メイリオ" panose="020B0604030504040204" pitchFamily="50" charset="-128"/>
                 <a:cs typeface="Meiryo" pitchFamily="34" charset="-120"/>
               </a:rPr>
-              <a:t>児発／放デイの一貫利用が可能な、市内では数少ないタイプ。</a:t>
+              <a:t>在籍が主に2〜12歳で、未就学から小学生までを継続して見られる点が訴求ポイント。</a:t>
             </a:r>
             <a:endParaRPr lang="en-US" sz="1000" dirty="0">
               <a:latin typeface="メイリオ" panose="020B0604030504040204" pitchFamily="50" charset="-128"/>
@@ -10741,7 +12163,7 @@
                 <a:ea typeface="メイリオ" panose="020B0604030504040204" pitchFamily="50" charset="-128"/>
                 <a:cs typeface="Meiryo" pitchFamily="34" charset="-120"/>
               </a:rPr>
-              <a:t>Web上の情報発信が乏しく、集客は行政・相談支援経由の紹介が中心と推察される。</a:t>
+              <a:t>東岩崎はJR東金駅の東側エリア。ぽけっと（東上宿）とあわせ市街地を2拠点でカバー。</a:t>
             </a:r>
             <a:endParaRPr lang="en-US" sz="1000" dirty="0">
               <a:latin typeface="メイリオ" panose="020B0604030504040204" pitchFamily="50" charset="-128"/>
@@ -10765,7 +12187,7 @@
                 <a:ea typeface="メイリオ" panose="020B0604030504040204" pitchFamily="50" charset="-128"/>
                 <a:cs typeface="Meiryo" pitchFamily="34" charset="-120"/>
               </a:rPr>
-              <a:t>情報発信の弱さは裏返せば、Web集客に強い事業所にとって切り崩しやすい競合といえる。</a:t>
+              <a:t>LITALICO発達ナビ等の集約サイトに未掲載で、公式サイト以外からは見つけにくい。認知獲得が競合上の課題。</a:t>
             </a:r>
             <a:endParaRPr lang="en-US" sz="1000" dirty="0">
               <a:latin typeface="メイリオ" panose="020B0604030504040204" pitchFamily="50" charset="-128"/>
@@ -10919,7 +12341,7 @@
                 <a:ea typeface="Meiryo" pitchFamily="34" charset="-122"/>
                 <a:cs typeface="Meiryo" pitchFamily="34" charset="-120"/>
               </a:rPr>
-              <a:t>③ こどもプラス東金教室</a:t>
+              <a:t>③ 子ども支援センター ぽけっと</a:t>
             </a:r>
             <a:endParaRPr lang="en-US" sz="2100" dirty="0"/>
           </a:p>
@@ -11093,7 +12515,7 @@
                 <a:ea typeface="Meiryo" pitchFamily="34" charset="-122"/>
                 <a:cs typeface="Meiryo" pitchFamily="34" charset="-120"/>
               </a:rPr>
-              <a:t>こどもプラス東金教室（運営：株式会社ベストグロウ）</a:t>
+              <a:t>子ども支援センター ぽけっと（児童発達支援・放課後等デイサービス）</a:t>
             </a:r>
             <a:endParaRPr lang="en-US" sz="1400" dirty="0"/>
           </a:p>
@@ -11157,7 +12579,7 @@
                 <a:ea typeface="Meiryo" pitchFamily="34" charset="-122"/>
                 <a:cs typeface="Meiryo" pitchFamily="34" charset="-120"/>
               </a:rPr>
-              <a:t>未就学児（児童発達支援）／就学児（放課後等デイサービス）</a:t>
+              <a:t>通所受給者証をお持ちのお子さん　※在籍は主に6歳〜18歳（就学児が中心）</a:t>
             </a:r>
             <a:endParaRPr lang="en-US" sz="1050" dirty="0"/>
           </a:p>
@@ -11199,7 +12621,7 @@
                 <a:ea typeface="Meiryo" pitchFamily="34" charset="-122"/>
                 <a:cs typeface="Meiryo" pitchFamily="34" charset="-120"/>
               </a:rPr>
-              <a:t>千葉県東金市東新宿18-1 酒造ビル105号（JR東金線 東金駅から徒歩約7〜9分）</a:t>
+              <a:t>〒283-0067 千葉県東金市東上宿6番地2</a:t>
             </a:r>
             <a:endParaRPr lang="en-US" sz="1050" dirty="0"/>
           </a:p>
@@ -11241,7 +12663,7 @@
                 <a:ea typeface="Meiryo" pitchFamily="34" charset="-122"/>
                 <a:cs typeface="Meiryo" pitchFamily="34" charset="-120"/>
               </a:rPr>
-              <a:t>0475-77-8577 ／ kp-tougane.com</a:t>
+              <a:t>0475-50-1081 ／ chibasha-kodomo2.com/poketto</a:t>
             </a:r>
             <a:endParaRPr lang="en-US" sz="1050" dirty="0"/>
           </a:p>
@@ -11272,7 +12694,7 @@
                 <a:ea typeface="Meiryo" pitchFamily="34" charset="-122"/>
                 <a:cs typeface="Meiryo" pitchFamily="34" charset="-120"/>
               </a:rPr>
-              <a:t>サービス提供時間：</a:t>
+              <a:t>受付時間：</a:t>
             </a:r>
             <a:r>
               <a:rPr lang="en-US" sz="1050" dirty="0">
@@ -11283,7 +12705,49 @@
                 <a:ea typeface="Meiryo" pitchFamily="34" charset="-122"/>
                 <a:cs typeface="Meiryo" pitchFamily="34" charset="-120"/>
               </a:rPr>
-              <a:t>平日 9:00〜18:00　※送迎あり／開設：2015年7月1日</a:t>
+              <a:t>月曜〜土曜 9:00〜18:00</a:t>
+            </a:r>
+            <a:endParaRPr lang="en-US" sz="1050" dirty="0"/>
+          </a:p>
+          <a:p>
+            <a:pPr marL="0" indent="0">
+              <a:lnSpc>
+                <a:spcPct val="103000"/>
+              </a:lnSpc>
+              <a:buNone/>
+            </a:pPr>
+            <a:r>
+              <a:rPr lang="en-US" sz="1050" b="1" dirty="0">
+                <a:solidFill>
+                  <a:srgbClr val="2E6BB8"/>
+                </a:solidFill>
+                <a:latin typeface="Meiryo" pitchFamily="34" charset="0"/>
+                <a:ea typeface="Meiryo" pitchFamily="34" charset="-122"/>
+                <a:cs typeface="Meiryo" pitchFamily="34" charset="-120"/>
+              </a:rPr>
+              <a:t>▶</a:t>
+            </a:r>
+            <a:r>
+              <a:rPr lang="en-US" sz="1050" b="1" dirty="0">
+                <a:solidFill>
+                  <a:srgbClr val="222222"/>
+                </a:solidFill>
+                <a:latin typeface="Meiryo" pitchFamily="34" charset="0"/>
+                <a:ea typeface="Meiryo" pitchFamily="34" charset="-122"/>
+                <a:cs typeface="Meiryo" pitchFamily="34" charset="-120"/>
+              </a:rPr>
+              <a:t>定員：</a:t>
+            </a:r>
+            <a:r>
+              <a:rPr lang="en-US" sz="1050" dirty="0">
+                <a:solidFill>
+                  <a:srgbClr val="222222"/>
+                </a:solidFill>
+                <a:latin typeface="Meiryo" pitchFamily="34" charset="0"/>
+                <a:ea typeface="Meiryo" pitchFamily="34" charset="-122"/>
+                <a:cs typeface="Meiryo" pitchFamily="34" charset="-120"/>
+              </a:rPr>
+              <a:t>要確認</a:t>
             </a:r>
             <a:endParaRPr lang="en-US" sz="1050" dirty="0"/>
           </a:p>
@@ -11337,7 +12801,7 @@
                 <a:ea typeface="Meiryo" pitchFamily="34" charset="-122"/>
                 <a:cs typeface="Meiryo" pitchFamily="34" charset="-120"/>
               </a:rPr>
-              <a:t>運動療育を主軸に、学習・あそびを取り入れた総合的な療育を提供。</a:t>
+              <a:t>「生きる力」を育むことを掲げ、児童発達支援と放課後等デイサービスを提供。</a:t>
             </a:r>
             <a:endParaRPr lang="en-US" sz="1050" dirty="0"/>
           </a:p>
@@ -11360,7 +12824,7 @@
                 <a:ea typeface="Meiryo" pitchFamily="34" charset="-122"/>
                 <a:cs typeface="Meiryo" pitchFamily="34" charset="-120"/>
               </a:rPr>
-              <a:t>・「柳沢運動プログラム」を導入。運動あそびが大脳活動の発達を促すという理論に基づくカリキュラム。</a:t>
+              <a:t>・在籍が主に6〜18歳のため、実態は放課後等デイサービス中心の運営とみられる。</a:t>
             </a:r>
             <a:endParaRPr lang="en-US" sz="1050" dirty="0"/>
           </a:p>
@@ -11383,7 +12847,7 @@
                 <a:ea typeface="Meiryo" pitchFamily="34" charset="-122"/>
                 <a:cs typeface="Meiryo" pitchFamily="34" charset="-120"/>
               </a:rPr>
-              <a:t>・全身の筋力向上・けがの減少に加え、情緒の安定、切り替えの上達、ルール理解の定着を効果として掲げる。</a:t>
+              <a:t>・放デイは放課後・長期休暇に利用し、できることを増やして自立を促し、居場所を増やすことを目的に掲げる。</a:t>
             </a:r>
             <a:endParaRPr lang="en-US" sz="1050" dirty="0"/>
           </a:p>
@@ -11406,7 +12870,7 @@
                 <a:ea typeface="Meiryo" pitchFamily="34" charset="-122"/>
                 <a:cs typeface="Meiryo" pitchFamily="34" charset="-120"/>
               </a:rPr>
-              <a:t>・運営法人は千葉県内に児発・放デイ・相談支援あわせて10事業所を展開（本社：東金市道庭925-1）。</a:t>
+              <a:t>・東金駅・市役所に近い東上宿に立地。同一町域（東上宿6-1）に相談支援事業所「街かど福祉相談室るると」が所在。</a:t>
             </a:r>
             <a:endParaRPr lang="en-US" sz="1050" dirty="0"/>
           </a:p>
@@ -11420,6 +12884,29 @@
               </a:spcAft>
               <a:buNone/>
             </a:pPr>
+            <a:r>
+              <a:rPr lang="en-US" sz="1050" dirty="0">
+                <a:solidFill>
+                  <a:srgbClr val="222222"/>
+                </a:solidFill>
+                <a:latin typeface="Meiryo" pitchFamily="34" charset="0"/>
+                <a:ea typeface="Meiryo" pitchFamily="34" charset="-122"/>
+                <a:cs typeface="Meiryo" pitchFamily="34" charset="-120"/>
+              </a:rPr>
+              <a:t>・月刊で活動報告をWeb掲載（2026年8月時点で「7月のぽけっと」を公開）。</a:t>
+            </a:r>
+            <a:endParaRPr lang="en-US" sz="1050" dirty="0"/>
+          </a:p>
+          <a:p>
+            <a:pPr marL="0" indent="0">
+              <a:lnSpc>
+                <a:spcPct val="103000"/>
+              </a:lnSpc>
+              <a:spcAft>
+                <a:spcPts val="500"/>
+              </a:spcAft>
+              <a:buNone/>
+            </a:pPr>
             <a:endParaRPr lang="en-US" sz="1050" dirty="0"/>
           </a:p>
           <a:p>
@@ -11460,7 +12947,7 @@
                 <a:ea typeface="Meiryo" pitchFamily="34" charset="-122"/>
                 <a:cs typeface="Meiryo" pitchFamily="34" charset="-120"/>
               </a:rPr>
-              <a:t>公式HP kp-tougane.com／WAM NET／障害者ドットコム／児発ねっと</a:t>
+              <a:t>公式サイト chibasha-kodomo2.com／WAM NET 障害福祉サービス等情報公表システム／LITALICO発達ナビ</a:t>
             </a:r>
             <a:endParaRPr lang="en-US" sz="1050" dirty="0"/>
           </a:p>
@@ -11502,7 +12989,7 @@
                 <a:ea typeface="Meiryo" pitchFamily="34" charset="-122"/>
                 <a:cs typeface="Meiryo" pitchFamily="34" charset="-120"/>
               </a:rPr>
-              <a:t>定員、現在の空き状況、送迎範囲、児童発達支援と放課後等デイサービスの時間帯区分</a:t>
+              <a:t>運営法人の正式名称、定員、児発の受け入れ実績（未就学の在籍有無）、送迎の有無</a:t>
             </a:r>
             <a:endParaRPr lang="en-US" sz="1050" dirty="0"/>
           </a:p>
@@ -11571,7 +13058,7 @@
                 <a:ea typeface="Meiryo" pitchFamily="34" charset="-122"/>
                 <a:cs typeface="Meiryo" pitchFamily="34" charset="-120"/>
               </a:rPr>
-              <a:t>（公式HP kp-tougane.com 掲載の教室・運動あそびの写真を挿入）</a:t>
+              <a:t>（公式サイト chibasha-kodomo2.com/poketto 掲載の教室・活動写真を挿入）</a:t>
             </a:r>
             <a:endParaRPr lang="en-US" sz="1200" dirty="0"/>
           </a:p>
@@ -11678,7 +13165,7 @@
                 <a:ea typeface="メイリオ" panose="020B0604030504040204" pitchFamily="50" charset="-128"/>
                 <a:cs typeface="Meiryo" pitchFamily="34" charset="-120"/>
               </a:rPr>
-              <a:t>東金駅至近＋送迎ありで、通所利便性は市内トップクラス。</a:t>
+              <a:t>同一運営の「まあちる」と年齢帯を分担。ぽけっとは就学児〜高校生を受け持つ年長側の拠点。</a:t>
             </a:r>
             <a:endParaRPr lang="en-US" sz="1000" dirty="0">
               <a:latin typeface="メイリオ" panose="020B0604030504040204" pitchFamily="50" charset="-128"/>
@@ -11702,7 +13189,7 @@
                 <a:ea typeface="メイリオ" panose="020B0604030504040204" pitchFamily="50" charset="-128"/>
                 <a:cs typeface="Meiryo" pitchFamily="34" charset="-120"/>
               </a:rPr>
-              <a:t>「運動療育」という明確なプログラム軸を打ち出し、Webでの情報発信量も市内最大級。</a:t>
+              <a:t>月曜〜土曜受付とまあちる（火〜土）より稼働日が多く、土曜ニーズにも対応。</a:t>
             </a:r>
             <a:endParaRPr lang="en-US" sz="1000" dirty="0">
               <a:latin typeface="メイリオ" panose="020B0604030504040204" pitchFamily="50" charset="-128"/>
@@ -11726,7 +13213,7 @@
                 <a:ea typeface="メイリオ" panose="020B0604030504040204" pitchFamily="50" charset="-128"/>
                 <a:cs typeface="Meiryo" pitchFamily="34" charset="-120"/>
               </a:rPr>
-              <a:t>同一法人の第2教室・相談支援事業所と連携し、相談から通所まで法人内で完結する導線を構築。</a:t>
+              <a:t>市街地中心部の立地で、駅・市役所方面からのアクセス性が高い。</a:t>
             </a:r>
             <a:endParaRPr lang="en-US" sz="1000" dirty="0">
               <a:latin typeface="メイリオ" panose="020B0604030504040204" pitchFamily="50" charset="-128"/>
@@ -11750,7 +13237,7 @@
                 <a:ea typeface="メイリオ" panose="020B0604030504040204" pitchFamily="50" charset="-128"/>
                 <a:cs typeface="Meiryo" pitchFamily="34" charset="-120"/>
               </a:rPr>
-              <a:t>市内で最も認知度・集客力が高いと推察され、実質的なベンチマーク先となる事業所。</a:t>
+              <a:t>児発の指定はあるが在籍は就学児中心。未就学の療育ニーズは実質まあちるまたは他事業所へ流れる構造。</a:t>
             </a:r>
             <a:endParaRPr lang="en-US" sz="1000" dirty="0">
               <a:latin typeface="メイリオ" panose="020B0604030504040204" pitchFamily="50" charset="-128"/>
@@ -11904,7 +13391,7 @@
                 <a:ea typeface="Meiryo" pitchFamily="34" charset="-122"/>
                 <a:cs typeface="Meiryo" pitchFamily="34" charset="-120"/>
               </a:rPr>
-              <a:t>④ こどもプラス第2東金教室</a:t>
+              <a:t>④ こどもプラス東金教室</a:t>
             </a:r>
             <a:endParaRPr lang="en-US" sz="2100" dirty="0"/>
           </a:p>
@@ -12078,7 +13565,7 @@
                 <a:ea typeface="Meiryo" pitchFamily="34" charset="-122"/>
                 <a:cs typeface="Meiryo" pitchFamily="34" charset="-120"/>
               </a:rPr>
-              <a:t>こどもプラス第2東金教室（運営：株式会社ベストグロウ）</a:t>
+              <a:t>こどもプラス東金教室（運営：株式会社ベストグロウ）</a:t>
             </a:r>
             <a:endParaRPr lang="en-US" sz="1400" dirty="0"/>
           </a:p>
@@ -12184,7 +13671,7 @@
                 <a:ea typeface="Meiryo" pitchFamily="34" charset="-122"/>
                 <a:cs typeface="Meiryo" pitchFamily="34" charset="-120"/>
               </a:rPr>
-              <a:t>千葉県東金市田間1丁目6番地4号</a:t>
+              <a:t>千葉県東金市東新宿18-1 酒造ビル105号（JR東金線 東金駅から徒歩約7〜9分）</a:t>
             </a:r>
             <a:endParaRPr lang="en-US" sz="1050" dirty="0"/>
           </a:p>
@@ -12226,7 +13713,7 @@
                 <a:ea typeface="Meiryo" pitchFamily="34" charset="-122"/>
                 <a:cs typeface="Meiryo" pitchFamily="34" charset="-120"/>
               </a:rPr>
-              <a:t>要確認（法人代表 0475-77-8577）／ kp-daini-tougane.com</a:t>
+              <a:t>0475-77-8577 ／ kp-tougane.com</a:t>
             </a:r>
             <a:endParaRPr lang="en-US" sz="1050" dirty="0"/>
           </a:p>
@@ -12257,7 +13744,7 @@
                 <a:ea typeface="Meiryo" pitchFamily="34" charset="-122"/>
                 <a:cs typeface="Meiryo" pitchFamily="34" charset="-120"/>
               </a:rPr>
-              <a:t>サービス提供時間／定員：</a:t>
+              <a:t>サービス提供時間：</a:t>
             </a:r>
             <a:r>
               <a:rPr lang="en-US" sz="1050" dirty="0">
@@ -12268,7 +13755,7 @@
                 <a:ea typeface="Meiryo" pitchFamily="34" charset="-122"/>
                 <a:cs typeface="Meiryo" pitchFamily="34" charset="-120"/>
               </a:rPr>
-              <a:t>いずれも要確認</a:t>
+              <a:t>平日 9:00〜18:00　※送迎あり／開設：2015年7月1日</a:t>
             </a:r>
             <a:endParaRPr lang="en-US" sz="1050" dirty="0"/>
           </a:p>
@@ -12322,7 +13809,7 @@
                 <a:ea typeface="Meiryo" pitchFamily="34" charset="-122"/>
                 <a:cs typeface="Meiryo" pitchFamily="34" charset="-120"/>
               </a:rPr>
-              <a:t>発達段階に合わせた支援と、楽しく取り組める運動療育を組み合わせて提供。</a:t>
+              <a:t>運動療育を主軸に、学習・あそびを取り入れた総合的な療育を提供。</a:t>
             </a:r>
             <a:endParaRPr lang="en-US" sz="1050" dirty="0"/>
           </a:p>
@@ -12345,7 +13832,7 @@
                 <a:ea typeface="Meiryo" pitchFamily="34" charset="-122"/>
                 <a:cs typeface="Meiryo" pitchFamily="34" charset="-120"/>
               </a:rPr>
-              <a:t>・脳の活性化につながる「柳沢運動プログラム」を取り入れ、毎日の活動を構成。</a:t>
+              <a:t>・「柳沢運動プログラム」を導入。運動あそびが大脳活動の発達を促すという理論に基づくカリキュラム。</a:t>
             </a:r>
             <a:endParaRPr lang="en-US" sz="1050" dirty="0"/>
           </a:p>
@@ -12368,7 +13855,7 @@
                 <a:ea typeface="Meiryo" pitchFamily="34" charset="-122"/>
                 <a:cs typeface="Meiryo" pitchFamily="34" charset="-120"/>
               </a:rPr>
-              <a:t>・学習と運動あそびのバランスを取りながら、子どもの「できた！」を積み重ねることを重視。</a:t>
+              <a:t>・全身の筋力向上・けがの減少に加え、情緒の安定、切り替えの上達、ルール理解の定着を効果として掲げる。</a:t>
             </a:r>
             <a:endParaRPr lang="en-US" sz="1050" dirty="0"/>
           </a:p>
@@ -12391,7 +13878,7 @@
                 <a:ea typeface="Meiryo" pitchFamily="34" charset="-122"/>
                 <a:cs typeface="Meiryo" pitchFamily="34" charset="-120"/>
               </a:rPr>
-              <a:t>・地域密着型の教室として、家庭と連携しながら安心して通える場所づくりを掲げる。</a:t>
+              <a:t>・運営法人は千葉県内に児発・放デイ・相談支援あわせて10事業所を展開（本社：東金市道庭925-1）。</a:t>
             </a:r>
             <a:endParaRPr lang="en-US" sz="1050" dirty="0"/>
           </a:p>
@@ -12445,7 +13932,7 @@
                 <a:ea typeface="Meiryo" pitchFamily="34" charset="-122"/>
                 <a:cs typeface="Meiryo" pitchFamily="34" charset="-120"/>
               </a:rPr>
-              <a:t>公式HP kp-daini-tougane.com／株式会社ベストグロウ公式（bestgrow-chiba.com）</a:t>
+              <a:t>公式HP kp-tougane.com／WAM NET／障害者ドットコム／児発ねっと</a:t>
             </a:r>
             <a:endParaRPr lang="en-US" sz="1050" dirty="0"/>
           </a:p>
@@ -12487,7 +13974,7 @@
                 <a:ea typeface="Meiryo" pitchFamily="34" charset="-122"/>
                 <a:cs typeface="Meiryo" pitchFamily="34" charset="-120"/>
               </a:rPr>
-              <a:t>電話番号、サービス提供時間、定員、送迎範囲、第1教室との役割分担</a:t>
+              <a:t>定員、現在の空き状況、送迎範囲、児童発達支援と放課後等デイサービスの時間帯区分</a:t>
             </a:r>
             <a:endParaRPr lang="en-US" sz="1050" dirty="0"/>
           </a:p>
@@ -12556,7 +14043,7 @@
                 <a:ea typeface="Meiryo" pitchFamily="34" charset="-122"/>
                 <a:cs typeface="Meiryo" pitchFamily="34" charset="-120"/>
               </a:rPr>
-              <a:t>（公式HP kp-daini-tougane.com 掲載の教室・活動風景の写真を挿入）</a:t>
+              <a:t>（公式HP kp-tougane.com 掲載の教室・運動あそびの写真を挿入）</a:t>
             </a:r>
             <a:endParaRPr lang="en-US" sz="1200" dirty="0"/>
           </a:p>
@@ -12663,7 +14150,7 @@
                 <a:ea typeface="メイリオ" panose="020B0604030504040204" pitchFamily="50" charset="-128"/>
                 <a:cs typeface="Meiryo" pitchFamily="34" charset="-120"/>
               </a:rPr>
-              <a:t>③と同一法人・同一プログラムの2拠点目。田間エリア（市役所・ふれあいセンター側）をカバーし市内を面で展開。</a:t>
+              <a:t>東金駅至近＋送迎ありで、通所利便性は市内トップクラス。</a:t>
             </a:r>
             <a:endParaRPr lang="en-US" sz="1000" dirty="0">
               <a:latin typeface="メイリオ" panose="020B0604030504040204" pitchFamily="50" charset="-128"/>
@@ -12687,7 +14174,7 @@
                 <a:ea typeface="メイリオ" panose="020B0604030504040204" pitchFamily="50" charset="-128"/>
                 <a:cs typeface="Meiryo" pitchFamily="34" charset="-120"/>
               </a:rPr>
-              <a:t>公立の簡易マザーズホーム（田間3-9-1）と同一エリアにあり、公立からの移行導線が近い。</a:t>
+              <a:t>「運動療育」という明確なプログラム軸を打ち出し、Webでの情報発信量も市内最大級。</a:t>
             </a:r>
             <a:endParaRPr lang="en-US" sz="1000" dirty="0">
               <a:latin typeface="メイリオ" panose="020B0604030504040204" pitchFamily="50" charset="-128"/>
@@ -12711,7 +14198,7 @@
                 <a:ea typeface="メイリオ" panose="020B0604030504040204" pitchFamily="50" charset="-128"/>
                 <a:cs typeface="Meiryo" pitchFamily="34" charset="-120"/>
               </a:rPr>
-              <a:t>第1教室が「運動主軸」なのに対し「学習と運動のバランス」を明示し、法人内でも訴求を微差別化。</a:t>
+              <a:t>同一法人の第2教室・相談支援事業所と連携し、相談から通所まで法人内で完結する導線を構築。</a:t>
             </a:r>
             <a:endParaRPr lang="en-US" sz="1000" dirty="0">
               <a:latin typeface="メイリオ" panose="020B0604030504040204" pitchFamily="50" charset="-128"/>
@@ -12735,7 +14222,7 @@
                 <a:ea typeface="メイリオ" panose="020B0604030504040204" pitchFamily="50" charset="-128"/>
                 <a:cs typeface="Meiryo" pitchFamily="34" charset="-120"/>
               </a:rPr>
-              <a:t>田間エリアは公立・民間が近接する激戦区。差別化には時間帯と送迎範囲の設計が鍵となる。</a:t>
+              <a:t>市内で最も認知度・集客力が高いと推察され、実質的なベンチマーク先となる事業所。</a:t>
             </a:r>
             <a:endParaRPr lang="en-US" sz="1000" dirty="0">
               <a:latin typeface="メイリオ" panose="020B0604030504040204" pitchFamily="50" charset="-128"/>
@@ -12889,7 +14376,7 @@
                 <a:ea typeface="Meiryo" pitchFamily="34" charset="-122"/>
                 <a:cs typeface="Meiryo" pitchFamily="34" charset="-120"/>
               </a:rPr>
-              <a:t>⑤ 基本塾優遊（市内5拠点）</a:t>
+              <a:t>⑤ こどもプラス第2東金教室</a:t>
             </a:r>
             <a:endParaRPr lang="en-US" sz="2100" dirty="0"/>
           </a:p>
@@ -13063,7 +14550,7 @@
                 <a:ea typeface="Meiryo" pitchFamily="34" charset="-122"/>
                 <a:cs typeface="Meiryo" pitchFamily="34" charset="-120"/>
               </a:rPr>
-              <a:t>基本塾優遊（運営：特定非営利活動法人 基本塾）　市内5拠点</a:t>
+              <a:t>こどもプラス第2東金教室（運営：株式会社ベストグロウ）</a:t>
             </a:r>
             <a:endParaRPr lang="en-US" sz="1400" dirty="0"/>
           </a:p>
@@ -13097,7 +14584,7 @@
               <a:buNone/>
             </a:pPr>
             <a:r>
-              <a:rPr lang="en-US" sz="1000" b="1" dirty="0">
+              <a:rPr lang="en-US" sz="1050" b="1" dirty="0">
                 <a:solidFill>
                   <a:srgbClr val="2E6BB8"/>
                 </a:solidFill>
@@ -13108,7 +14595,7 @@
               <a:t>▶</a:t>
             </a:r>
             <a:r>
-              <a:rPr lang="en-US" sz="1000" b="1" dirty="0">
+              <a:rPr lang="en-US" sz="1050" b="1" dirty="0">
                 <a:solidFill>
                   <a:srgbClr val="222222"/>
                 </a:solidFill>
@@ -13119,15 +14606,15 @@
               <a:t>対象：</a:t>
             </a:r>
             <a:r>
-              <a:rPr lang="en-US" sz="1000" dirty="0">
-                <a:solidFill>
-                  <a:srgbClr val="222222"/>
-                </a:solidFill>
-                <a:latin typeface="Meiryo" pitchFamily="34" charset="0"/>
-                <a:ea typeface="Meiryo" pitchFamily="34" charset="-122"/>
-                <a:cs typeface="Meiryo" pitchFamily="34" charset="-120"/>
-              </a:rPr>
-              <a:t>未就学児（児発）／就学児（放デイ）　※松之郷は身体・知的・精神障がい・難病まで対応、八坂台は小学生・翌年度就学予定児が中心</a:t>
+              <a:rPr lang="en-US" sz="1050" dirty="0">
+                <a:solidFill>
+                  <a:srgbClr val="222222"/>
+                </a:solidFill>
+                <a:latin typeface="Meiryo" pitchFamily="34" charset="0"/>
+                <a:ea typeface="Meiryo" pitchFamily="34" charset="-122"/>
+                <a:cs typeface="Meiryo" pitchFamily="34" charset="-120"/>
+              </a:rPr>
+              <a:t>未就学児（児童発達支援）／就学児（放課後等デイサービス）</a:t>
             </a:r>
             <a:endParaRPr lang="en-US" sz="1050" dirty="0"/>
           </a:p>
@@ -13139,7 +14626,7 @@
               <a:buNone/>
             </a:pPr>
             <a:r>
-              <a:rPr lang="en-US" sz="1000" b="1" dirty="0">
+              <a:rPr lang="en-US" sz="1050" b="1" dirty="0">
                 <a:solidFill>
                   <a:srgbClr val="2E6BB8"/>
                 </a:solidFill>
@@ -13150,26 +14637,110 @@
               <a:t>▶</a:t>
             </a:r>
             <a:r>
-              <a:rPr lang="en-US" sz="1000" b="1" dirty="0">
-                <a:solidFill>
-                  <a:srgbClr val="222222"/>
-                </a:solidFill>
-                <a:latin typeface="Meiryo" pitchFamily="34" charset="0"/>
-                <a:ea typeface="Meiryo" pitchFamily="34" charset="-122"/>
-                <a:cs typeface="Meiryo" pitchFamily="34" charset="-120"/>
-              </a:rPr>
-              <a:t>拠点／TEL：</a:t>
-            </a:r>
-            <a:r>
-              <a:rPr lang="en-US" sz="1000" dirty="0">
-                <a:solidFill>
-                  <a:srgbClr val="222222"/>
-                </a:solidFill>
-                <a:latin typeface="Meiryo" pitchFamily="34" charset="0"/>
-                <a:ea typeface="Meiryo" pitchFamily="34" charset="-122"/>
-                <a:cs typeface="Meiryo" pitchFamily="34" charset="-120"/>
-              </a:rPr>
-              <a:t>【日吉台】日吉台2-26-3／0475-52-6414　【松之郷】松之郷2423-1／0475-51-4082</a:t>
+              <a:rPr lang="en-US" sz="1050" b="1" dirty="0">
+                <a:solidFill>
+                  <a:srgbClr val="222222"/>
+                </a:solidFill>
+                <a:latin typeface="Meiryo" pitchFamily="34" charset="0"/>
+                <a:ea typeface="Meiryo" pitchFamily="34" charset="-122"/>
+                <a:cs typeface="Meiryo" pitchFamily="34" charset="-120"/>
+              </a:rPr>
+              <a:t>住所：</a:t>
+            </a:r>
+            <a:r>
+              <a:rPr lang="en-US" sz="1050" dirty="0">
+                <a:solidFill>
+                  <a:srgbClr val="222222"/>
+                </a:solidFill>
+                <a:latin typeface="Meiryo" pitchFamily="34" charset="0"/>
+                <a:ea typeface="Meiryo" pitchFamily="34" charset="-122"/>
+                <a:cs typeface="Meiryo" pitchFamily="34" charset="-120"/>
+              </a:rPr>
+              <a:t>千葉県東金市田間1丁目6番地4号</a:t>
+            </a:r>
+            <a:endParaRPr lang="en-US" sz="1050" dirty="0"/>
+          </a:p>
+          <a:p>
+            <a:pPr marL="0" indent="0">
+              <a:lnSpc>
+                <a:spcPct val="103000"/>
+              </a:lnSpc>
+              <a:buNone/>
+            </a:pPr>
+            <a:r>
+              <a:rPr lang="en-US" sz="1050" b="1" dirty="0">
+                <a:solidFill>
+                  <a:srgbClr val="2E6BB8"/>
+                </a:solidFill>
+                <a:latin typeface="Meiryo" pitchFamily="34" charset="0"/>
+                <a:ea typeface="Meiryo" pitchFamily="34" charset="-122"/>
+                <a:cs typeface="Meiryo" pitchFamily="34" charset="-120"/>
+              </a:rPr>
+              <a:t>▶</a:t>
+            </a:r>
+            <a:r>
+              <a:rPr lang="en-US" sz="1050" b="1" dirty="0">
+                <a:solidFill>
+                  <a:srgbClr val="222222"/>
+                </a:solidFill>
+                <a:latin typeface="Meiryo" pitchFamily="34" charset="0"/>
+                <a:ea typeface="Meiryo" pitchFamily="34" charset="-122"/>
+                <a:cs typeface="Meiryo" pitchFamily="34" charset="-120"/>
+              </a:rPr>
+              <a:t>TEL／HP：</a:t>
+            </a:r>
+            <a:r>
+              <a:rPr lang="en-US" sz="1050" dirty="0">
+                <a:solidFill>
+                  <a:srgbClr val="222222"/>
+                </a:solidFill>
+                <a:latin typeface="Meiryo" pitchFamily="34" charset="0"/>
+                <a:ea typeface="Meiryo" pitchFamily="34" charset="-122"/>
+                <a:cs typeface="Meiryo" pitchFamily="34" charset="-120"/>
+              </a:rPr>
+              <a:t>要確認（法人代表 0475-77-8577）／ kp-daini-tougane.com</a:t>
+            </a:r>
+            <a:endParaRPr lang="en-US" sz="1050" dirty="0"/>
+          </a:p>
+          <a:p>
+            <a:pPr marL="0" indent="0">
+              <a:lnSpc>
+                <a:spcPct val="103000"/>
+              </a:lnSpc>
+              <a:buNone/>
+            </a:pPr>
+            <a:r>
+              <a:rPr lang="en-US" sz="1050" b="1" dirty="0">
+                <a:solidFill>
+                  <a:srgbClr val="2E6BB8"/>
+                </a:solidFill>
+                <a:latin typeface="Meiryo" pitchFamily="34" charset="0"/>
+                <a:ea typeface="Meiryo" pitchFamily="34" charset="-122"/>
+                <a:cs typeface="Meiryo" pitchFamily="34" charset="-120"/>
+              </a:rPr>
+              <a:t>▶</a:t>
+            </a:r>
+            <a:r>
+              <a:rPr lang="en-US" sz="1050" b="1" dirty="0">
+                <a:solidFill>
+                  <a:srgbClr val="222222"/>
+                </a:solidFill>
+                <a:latin typeface="Meiryo" pitchFamily="34" charset="0"/>
+                <a:ea typeface="Meiryo" pitchFamily="34" charset="-122"/>
+                <a:cs typeface="Meiryo" pitchFamily="34" charset="-120"/>
+              </a:rPr>
+              <a:t>サービス提供時間／定員：</a:t>
+            </a:r>
+            <a:r>
+              <a:rPr lang="en-US" sz="1050" dirty="0">
+                <a:solidFill>
+                  <a:srgbClr val="222222"/>
+                </a:solidFill>
+                <a:latin typeface="Meiryo" pitchFamily="34" charset="0"/>
+                <a:ea typeface="Meiryo" pitchFamily="34" charset="-122"/>
+                <a:cs typeface="Meiryo" pitchFamily="34" charset="-120"/>
+              </a:rPr>
+              <a:t>いずれも要確認</a:t>
             </a:r>
             <a:endParaRPr lang="en-US" sz="1050" dirty="0"/>
           </a:p>
@@ -13183,17 +14754,6 @@
               </a:spcAft>
               <a:buNone/>
             </a:pPr>
-            <a:r>
-              <a:rPr lang="en-US" sz="1000" dirty="0">
-                <a:solidFill>
-                  <a:srgbClr val="222222"/>
-                </a:solidFill>
-                <a:latin typeface="Meiryo" pitchFamily="34" charset="0"/>
-                <a:ea typeface="Meiryo" pitchFamily="34" charset="-122"/>
-                <a:cs typeface="Meiryo" pitchFamily="34" charset="-120"/>
-              </a:rPr>
-              <a:t xml:space="preserve">　　　　　　【八坂台】八坂台5-11-1／0475-51-5010　【八坂西】八坂台4-2-4／0475-51-6631　【八坂中央】要確認</a:t>
-            </a:r>
             <a:endParaRPr lang="en-US" sz="1050" dirty="0"/>
           </a:p>
           <a:p>
@@ -13204,7 +14764,7 @@
               <a:buNone/>
             </a:pPr>
             <a:r>
-              <a:rPr lang="en-US" sz="1000" b="1" dirty="0">
+              <a:rPr lang="en-US" sz="1050" b="1" dirty="0">
                 <a:solidFill>
                   <a:srgbClr val="2E6BB8"/>
                 </a:solidFill>
@@ -13215,68 +14775,26 @@
               <a:t>▶</a:t>
             </a:r>
             <a:r>
-              <a:rPr lang="en-US" sz="1000" b="1" dirty="0">
-                <a:solidFill>
-                  <a:srgbClr val="222222"/>
-                </a:solidFill>
-                <a:latin typeface="Meiryo" pitchFamily="34" charset="0"/>
-                <a:ea typeface="Meiryo" pitchFamily="34" charset="-122"/>
-                <a:cs typeface="Meiryo" pitchFamily="34" charset="-120"/>
-              </a:rPr>
-              <a:t>HP：</a:t>
-            </a:r>
-            <a:r>
-              <a:rPr lang="en-US" sz="1000" dirty="0">
-                <a:solidFill>
-                  <a:srgbClr val="222222"/>
-                </a:solidFill>
-                <a:latin typeface="Meiryo" pitchFamily="34" charset="0"/>
-                <a:ea typeface="Meiryo" pitchFamily="34" charset="-122"/>
-                <a:cs typeface="Meiryo" pitchFamily="34" charset="-120"/>
-              </a:rPr>
-              <a:t>kihonjuku-yuuyuu.com（info@kihonjuku-yuuyuu.com）</a:t>
-            </a:r>
-            <a:endParaRPr lang="en-US" sz="1050" dirty="0"/>
-          </a:p>
-          <a:p>
-            <a:pPr marL="0" indent="0">
-              <a:lnSpc>
-                <a:spcPct val="103000"/>
-              </a:lnSpc>
-              <a:buNone/>
-            </a:pPr>
-            <a:r>
-              <a:rPr lang="en-US" sz="1000" b="1" dirty="0">
-                <a:solidFill>
-                  <a:srgbClr val="2E6BB8"/>
-                </a:solidFill>
-                <a:latin typeface="Meiryo" pitchFamily="34" charset="0"/>
-                <a:ea typeface="Meiryo" pitchFamily="34" charset="-122"/>
-                <a:cs typeface="Meiryo" pitchFamily="34" charset="-120"/>
-              </a:rPr>
-              <a:t>▶</a:t>
-            </a:r>
-            <a:r>
-              <a:rPr lang="en-US" sz="1000" b="1" dirty="0">
-                <a:solidFill>
-                  <a:srgbClr val="222222"/>
-                </a:solidFill>
-                <a:latin typeface="Meiryo" pitchFamily="34" charset="0"/>
-                <a:ea typeface="Meiryo" pitchFamily="34" charset="-122"/>
-                <a:cs typeface="Meiryo" pitchFamily="34" charset="-120"/>
-              </a:rPr>
-              <a:t>提供時間／定員：</a:t>
-            </a:r>
-            <a:r>
-              <a:rPr lang="en-US" sz="1000" dirty="0">
-                <a:solidFill>
-                  <a:srgbClr val="222222"/>
-                </a:solidFill>
-                <a:latin typeface="Meiryo" pitchFamily="34" charset="0"/>
-                <a:ea typeface="Meiryo" pitchFamily="34" charset="-122"/>
-                <a:cs typeface="Meiryo" pitchFamily="34" charset="-120"/>
-              </a:rPr>
-              <a:t>9:00〜18:00（共通の目安）・日曜祝日年末年始休　※八坂台は土曜も定休</a:t>
+              <a:rPr lang="en-US" sz="1050" b="1" dirty="0">
+                <a:solidFill>
+                  <a:srgbClr val="222222"/>
+                </a:solidFill>
+                <a:latin typeface="Meiryo" pitchFamily="34" charset="0"/>
+                <a:ea typeface="Meiryo" pitchFamily="34" charset="-122"/>
+                <a:cs typeface="Meiryo" pitchFamily="34" charset="-120"/>
+              </a:rPr>
+              <a:t>療育プログラムの特徴：</a:t>
+            </a:r>
+            <a:r>
+              <a:rPr lang="en-US" sz="1050" dirty="0">
+                <a:solidFill>
+                  <a:srgbClr val="222222"/>
+                </a:solidFill>
+                <a:latin typeface="Meiryo" pitchFamily="34" charset="0"/>
+                <a:ea typeface="Meiryo" pitchFamily="34" charset="-122"/>
+                <a:cs typeface="Meiryo" pitchFamily="34" charset="-120"/>
+              </a:rPr>
+              <a:t>発達段階に合わせた支援と、楽しく取り組める運動療育を組み合わせて提供。</a:t>
             </a:r>
             <a:endParaRPr lang="en-US" sz="1050" dirty="0"/>
           </a:p>
@@ -13291,15 +14809,15 @@
               <a:buNone/>
             </a:pPr>
             <a:r>
-              <a:rPr lang="en-US" sz="1000" dirty="0">
-                <a:solidFill>
-                  <a:srgbClr val="222222"/>
-                </a:solidFill>
-                <a:latin typeface="Meiryo" pitchFamily="34" charset="0"/>
-                <a:ea typeface="Meiryo" pitchFamily="34" charset="-122"/>
-                <a:cs typeface="Meiryo" pitchFamily="34" charset="-120"/>
-              </a:rPr>
-              <a:t xml:space="preserve">　　　　　　　　松之郷10名（送迎あり・要相談）、八坂台10名・職員9名（児発管1・児童指導員4・保育士4）、他拠点は要確認</a:t>
+              <a:rPr lang="en-US" sz="1050" dirty="0">
+                <a:solidFill>
+                  <a:srgbClr val="222222"/>
+                </a:solidFill>
+                <a:latin typeface="Meiryo" pitchFamily="34" charset="0"/>
+                <a:ea typeface="Meiryo" pitchFamily="34" charset="-122"/>
+                <a:cs typeface="Meiryo" pitchFamily="34" charset="-120"/>
+              </a:rPr>
+              <a:t>・脳の活性化につながる「柳沢運動プログラム」を取り入れ、毎日の活動を構成。</a:t>
             </a:r>
             <a:endParaRPr lang="en-US" sz="1050" dirty="0"/>
           </a:p>
@@ -13313,47 +14831,16 @@
               </a:spcAft>
               <a:buNone/>
             </a:pPr>
-            <a:endParaRPr lang="en-US" sz="1050" dirty="0"/>
-          </a:p>
-          <a:p>
-            <a:pPr marL="0" indent="0">
-              <a:lnSpc>
-                <a:spcPct val="103000"/>
-              </a:lnSpc>
-              <a:buNone/>
-            </a:pPr>
-            <a:r>
-              <a:rPr lang="en-US" sz="1000" b="1" dirty="0">
-                <a:solidFill>
-                  <a:srgbClr val="2E6BB8"/>
-                </a:solidFill>
-                <a:latin typeface="Meiryo" pitchFamily="34" charset="0"/>
-                <a:ea typeface="Meiryo" pitchFamily="34" charset="-122"/>
-                <a:cs typeface="Meiryo" pitchFamily="34" charset="-120"/>
-              </a:rPr>
-              <a:t>▶</a:t>
-            </a:r>
-            <a:r>
-              <a:rPr lang="en-US" sz="1000" b="1" dirty="0">
-                <a:solidFill>
-                  <a:srgbClr val="222222"/>
-                </a:solidFill>
-                <a:latin typeface="Meiryo" pitchFamily="34" charset="0"/>
-                <a:ea typeface="Meiryo" pitchFamily="34" charset="-122"/>
-                <a:cs typeface="Meiryo" pitchFamily="34" charset="-120"/>
-              </a:rPr>
-              <a:t>療育プログラムの特徴：</a:t>
-            </a:r>
-            <a:r>
-              <a:rPr lang="en-US" sz="1000" dirty="0">
-                <a:solidFill>
-                  <a:srgbClr val="222222"/>
-                </a:solidFill>
-                <a:latin typeface="Meiryo" pitchFamily="34" charset="0"/>
-                <a:ea typeface="Meiryo" pitchFamily="34" charset="-122"/>
-                <a:cs typeface="Meiryo" pitchFamily="34" charset="-120"/>
-              </a:rPr>
-              <a:t>個々のニーズに応じた個別支援プログラムと「10の活動」を全拠点共通の基本形とする。</a:t>
+            <a:r>
+              <a:rPr lang="en-US" sz="1050" dirty="0">
+                <a:solidFill>
+                  <a:srgbClr val="222222"/>
+                </a:solidFill>
+                <a:latin typeface="Meiryo" pitchFamily="34" charset="0"/>
+                <a:ea typeface="Meiryo" pitchFamily="34" charset="-122"/>
+                <a:cs typeface="Meiryo" pitchFamily="34" charset="-120"/>
+              </a:rPr>
+              <a:t>・学習と運動あそびのバランスを取りながら、子どもの「できた！」を積み重ねることを重視。</a:t>
             </a:r>
             <a:endParaRPr lang="en-US" sz="1050" dirty="0"/>
           </a:p>
@@ -13368,15 +14855,15 @@
               <a:buNone/>
             </a:pPr>
             <a:r>
-              <a:rPr lang="en-US" sz="1000" dirty="0">
-                <a:solidFill>
-                  <a:srgbClr val="222222"/>
-                </a:solidFill>
-                <a:latin typeface="Meiryo" pitchFamily="34" charset="0"/>
-                <a:ea typeface="Meiryo" pitchFamily="34" charset="-122"/>
-                <a:cs typeface="Meiryo" pitchFamily="34" charset="-120"/>
-              </a:rPr>
-              <a:t>・日吉台＝園庭あり。リトミック・体操・英語教育。小学校校長／幼稚園園長経験者、特別支援教育士、心理検査士、言語聴覚士などが在籍。</a:t>
+              <a:rPr lang="en-US" sz="1050" dirty="0">
+                <a:solidFill>
+                  <a:srgbClr val="222222"/>
+                </a:solidFill>
+                <a:latin typeface="Meiryo" pitchFamily="34" charset="0"/>
+                <a:ea typeface="Meiryo" pitchFamily="34" charset="-122"/>
+                <a:cs typeface="Meiryo" pitchFamily="34" charset="-120"/>
+              </a:rPr>
+              <a:t>・地域密着型の教室として、家庭と連携しながら安心して通える場所づくりを掲げる。</a:t>
             </a:r>
             <a:endParaRPr lang="en-US" sz="1050" dirty="0"/>
           </a:p>
@@ -13390,29 +14877,6 @@
               </a:spcAft>
               <a:buNone/>
             </a:pPr>
-            <a:r>
-              <a:rPr lang="en-US" sz="1000" dirty="0">
-                <a:solidFill>
-                  <a:srgbClr val="222222"/>
-                </a:solidFill>
-                <a:latin typeface="Meiryo" pitchFamily="34" charset="0"/>
-                <a:ea typeface="Meiryo" pitchFamily="34" charset="-122"/>
-                <a:cs typeface="Meiryo" pitchFamily="34" charset="-120"/>
-              </a:rPr>
-              <a:t>・松之郷＝アートセラピー・運動・社会性を育むグループ活動。／八坂台＝少人数の活動・制作、地域連携イベント、元サッカー選手の「サッカー療育」。</a:t>
-            </a:r>
-            <a:endParaRPr lang="en-US" sz="1050" dirty="0"/>
-          </a:p>
-          <a:p>
-            <a:pPr marL="0" indent="0">
-              <a:lnSpc>
-                <a:spcPct val="103000"/>
-              </a:lnSpc>
-              <a:spcAft>
-                <a:spcPts val="500"/>
-              </a:spcAft>
-              <a:buNone/>
-            </a:pPr>
             <a:endParaRPr lang="en-US" sz="1050" dirty="0"/>
           </a:p>
           <a:p>
@@ -13423,7 +14887,7 @@
               <a:buNone/>
             </a:pPr>
             <a:r>
-              <a:rPr lang="en-US" sz="1000" b="1" dirty="0">
+              <a:rPr lang="en-US" sz="1050" b="1" dirty="0">
                 <a:solidFill>
                   <a:srgbClr val="2E6BB8"/>
                 </a:solidFill>
@@ -13434,7 +14898,7 @@
               <a:t>▶</a:t>
             </a:r>
             <a:r>
-              <a:rPr lang="en-US" sz="1000" b="1" dirty="0">
+              <a:rPr lang="en-US" sz="1050" b="1" dirty="0">
                 <a:solidFill>
                   <a:srgbClr val="222222"/>
                 </a:solidFill>
@@ -13445,15 +14909,15 @@
               <a:t>出典：</a:t>
             </a:r>
             <a:r>
-              <a:rPr lang="en-US" sz="1000" dirty="0">
-                <a:solidFill>
-                  <a:srgbClr val="222222"/>
-                </a:solidFill>
-                <a:latin typeface="Meiryo" pitchFamily="34" charset="0"/>
-                <a:ea typeface="Meiryo" pitchFamily="34" charset="-122"/>
-                <a:cs typeface="Meiryo" pitchFamily="34" charset="-120"/>
-              </a:rPr>
-              <a:t>公式HP kihonjuku-yuuyuu.com／LITALICO発達ナビ／児発ねっと／ホイシル／ADDS kikotto施設検索</a:t>
+              <a:rPr lang="en-US" sz="1050" dirty="0">
+                <a:solidFill>
+                  <a:srgbClr val="222222"/>
+                </a:solidFill>
+                <a:latin typeface="Meiryo" pitchFamily="34" charset="0"/>
+                <a:ea typeface="Meiryo" pitchFamily="34" charset="-122"/>
+                <a:cs typeface="Meiryo" pitchFamily="34" charset="-120"/>
+              </a:rPr>
+              <a:t>公式HP kp-daini-tougane.com／株式会社ベストグロウ公式（bestgrow-chiba.com）</a:t>
             </a:r>
             <a:endParaRPr lang="en-US" sz="1050" dirty="0"/>
           </a:p>
@@ -13465,7 +14929,7 @@
               <a:buNone/>
             </a:pPr>
             <a:r>
-              <a:rPr lang="en-US" sz="1000" b="1" dirty="0">
+              <a:rPr lang="en-US" sz="1050" b="1" dirty="0">
                 <a:solidFill>
                   <a:srgbClr val="2E6BB8"/>
                 </a:solidFill>
@@ -13476,7 +14940,7 @@
               <a:t>▶</a:t>
             </a:r>
             <a:r>
-              <a:rPr lang="en-US" sz="1000" b="1" dirty="0">
+              <a:rPr lang="en-US" sz="1050" b="1" dirty="0">
                 <a:solidFill>
                   <a:srgbClr val="222222"/>
                 </a:solidFill>
@@ -13487,15 +14951,15 @@
               <a:t>要確認事項：</a:t>
             </a:r>
             <a:r>
-              <a:rPr lang="en-US" sz="1000" dirty="0">
-                <a:solidFill>
-                  <a:srgbClr val="222222"/>
-                </a:solidFill>
-                <a:latin typeface="Meiryo" pitchFamily="34" charset="0"/>
-                <a:ea typeface="Meiryo" pitchFamily="34" charset="-122"/>
-                <a:cs typeface="Meiryo" pitchFamily="34" charset="-120"/>
-              </a:rPr>
-              <a:t>日吉台・八坂西・八坂中央の定員、児発と放デイの時間帯区分、各拠点の送迎範囲、八坂中央の開所時期・所在地・TEL</a:t>
+              <a:rPr lang="en-US" sz="1050" dirty="0">
+                <a:solidFill>
+                  <a:srgbClr val="222222"/>
+                </a:solidFill>
+                <a:latin typeface="Meiryo" pitchFamily="34" charset="0"/>
+                <a:ea typeface="Meiryo" pitchFamily="34" charset="-122"/>
+                <a:cs typeface="Meiryo" pitchFamily="34" charset="-120"/>
+              </a:rPr>
+              <a:t>電話番号、サービス提供時間、定員、送迎範囲、第1教室との役割分担</a:t>
             </a:r>
             <a:endParaRPr lang="en-US" sz="1050" dirty="0"/>
           </a:p>
@@ -13564,7 +15028,7 @@
                 <a:ea typeface="Meiryo" pitchFamily="34" charset="-122"/>
                 <a:cs typeface="Meiryo" pitchFamily="34" charset="-120"/>
               </a:rPr>
-              <a:t>（公式HP kihonjuku-yuuyuu.com 掲載の各拠点の教室・園庭・活動写真を挿入）</a:t>
+              <a:t>（公式HP kp-daini-tougane.com 掲載の教室・活動風景の写真を挿入）</a:t>
             </a:r>
             <a:endParaRPr lang="en-US" sz="1200" dirty="0"/>
           </a:p>
@@ -13671,7 +15135,7 @@
                 <a:ea typeface="メイリオ" panose="020B0604030504040204" pitchFamily="50" charset="-128"/>
                 <a:cs typeface="Meiryo" pitchFamily="34" charset="-120"/>
               </a:rPr>
-              <a:t>市内11拠点のうち5拠点を占める最大手。1法人で東金市の児童発達支援供給の約半数を握る。</a:t>
+              <a:t>④と同一法人・同一プログラムの2拠点目。田間エリア（市役所・ふれあいセンター側）をカバーし市内を面で展開。</a:t>
             </a:r>
             <a:endParaRPr lang="en-US" sz="1000" dirty="0">
               <a:latin typeface="メイリオ" panose="020B0604030504040204" pitchFamily="50" charset="-128"/>
@@ -13695,7 +15159,7 @@
                 <a:ea typeface="メイリオ" panose="020B0604030504040204" pitchFamily="50" charset="-128"/>
                 <a:cs typeface="Meiryo" pitchFamily="34" charset="-120"/>
               </a:rPr>
-              <a:t>教育畑の専門人材（校長・園長経験者、言語聴覚士、心理検査士）の厚みが最大の差別化要素で、参入障壁も高い。</a:t>
+              <a:t>公立の簡易マザーズホーム（田間3-9-1）と同一エリアにあり、公立からの移行導線が近い。</a:t>
             </a:r>
             <a:endParaRPr lang="en-US" sz="1000" dirty="0">
               <a:latin typeface="メイリオ" panose="020B0604030504040204" pitchFamily="50" charset="-128"/>
@@ -13719,7 +15183,7 @@
                 <a:ea typeface="メイリオ" panose="020B0604030504040204" pitchFamily="50" charset="-128"/>
                 <a:cs typeface="Meiryo" pitchFamily="34" charset="-120"/>
               </a:rPr>
-              <a:t>拠点を小規模に分散させ、少人数環境を保ちながら総定員を確保するモデル。八坂台エリアだけで3拠点。</a:t>
+              <a:t>第1教室が「運動主軸」なのに対し「学習と運動のバランス」を明示し、法人内でも訴求を微差別化。</a:t>
             </a:r>
             <a:endParaRPr lang="en-US" sz="1000" dirty="0">
               <a:latin typeface="メイリオ" panose="020B0604030504040204" pitchFamily="50" charset="-128"/>
@@ -13743,7 +15207,7 @@
                 <a:ea typeface="メイリオ" panose="020B0604030504040204" pitchFamily="50" charset="-128"/>
                 <a:cs typeface="Meiryo" pitchFamily="34" charset="-120"/>
               </a:rPr>
-              <a:t>八坂台・日吉台への新規出店は基本塾との正面競合。土曜（八坂台は定休）や送迎圏の隙間が狙い目となる。</a:t>
+              <a:t>田間エリアは公立・民間が近接する激戦区。差別化には時間帯と送迎範囲の設計が鍵となる。</a:t>
             </a:r>
             <a:endParaRPr lang="en-US" sz="1000" dirty="0">
               <a:latin typeface="メイリオ" panose="020B0604030504040204" pitchFamily="50" charset="-128"/>
@@ -13897,7 +15361,7 @@
                 <a:ea typeface="Meiryo" pitchFamily="34" charset="-122"/>
                 <a:cs typeface="Meiryo" pitchFamily="34" charset="-120"/>
               </a:rPr>
-              <a:t>⑥ 児童発達支援コンパッション保育所</a:t>
+              <a:t>⑥ 基本塾優遊（市内5拠点）</a:t>
             </a:r>
             <a:endParaRPr lang="en-US" sz="2100" dirty="0"/>
           </a:p>
@@ -14071,7 +15535,7 @@
                 <a:ea typeface="Meiryo" pitchFamily="34" charset="-122"/>
                 <a:cs typeface="Meiryo" pitchFamily="34" charset="-120"/>
               </a:rPr>
-              <a:t>児童発達支援コンパッション保育所</a:t>
+              <a:t>基本塾優遊（運営：特定非営利活動法人 基本塾）　市内5拠点</a:t>
             </a:r>
             <a:endParaRPr lang="en-US" sz="1400" dirty="0"/>
           </a:p>
@@ -14105,7 +15569,7 @@
               <a:buNone/>
             </a:pPr>
             <a:r>
-              <a:rPr lang="en-US" sz="1050" b="1" dirty="0">
+              <a:rPr lang="en-US" sz="1000" b="1" dirty="0">
                 <a:solidFill>
                   <a:srgbClr val="2E6BB8"/>
                 </a:solidFill>
@@ -14116,7 +15580,7 @@
               <a:t>▶</a:t>
             </a:r>
             <a:r>
-              <a:rPr lang="en-US" sz="1050" b="1" dirty="0">
+              <a:rPr lang="en-US" sz="1000" b="1" dirty="0">
                 <a:solidFill>
                   <a:srgbClr val="222222"/>
                 </a:solidFill>
@@ -14127,15 +15591,15 @@
               <a:t>対象：</a:t>
             </a:r>
             <a:r>
-              <a:rPr lang="en-US" sz="1050" dirty="0">
-                <a:solidFill>
-                  <a:srgbClr val="222222"/>
-                </a:solidFill>
-                <a:latin typeface="Meiryo" pitchFamily="34" charset="0"/>
-                <a:ea typeface="Meiryo" pitchFamily="34" charset="-122"/>
-                <a:cs typeface="Meiryo" pitchFamily="34" charset="-120"/>
-              </a:rPr>
-              <a:t>未就学児（児童発達支援）</a:t>
+              <a:rPr lang="en-US" sz="1000" dirty="0">
+                <a:solidFill>
+                  <a:srgbClr val="222222"/>
+                </a:solidFill>
+                <a:latin typeface="Meiryo" pitchFamily="34" charset="0"/>
+                <a:ea typeface="Meiryo" pitchFamily="34" charset="-122"/>
+                <a:cs typeface="Meiryo" pitchFamily="34" charset="-120"/>
+              </a:rPr>
+              <a:t>未就学児（児発）／就学児（放デイ）　※松之郷は身体・知的・精神障がい・難病まで対応、八坂台は小学生・翌年度就学予定児が中心</a:t>
             </a:r>
             <a:endParaRPr lang="en-US" sz="1050" dirty="0"/>
           </a:p>
@@ -14147,7 +15611,7 @@
               <a:buNone/>
             </a:pPr>
             <a:r>
-              <a:rPr lang="en-US" sz="1050" b="1" dirty="0">
+              <a:rPr lang="en-US" sz="1000" b="1" dirty="0">
                 <a:solidFill>
                   <a:srgbClr val="2E6BB8"/>
                 </a:solidFill>
@@ -14158,110 +15622,26 @@
               <a:t>▶</a:t>
             </a:r>
             <a:r>
-              <a:rPr lang="en-US" sz="1050" b="1" dirty="0">
-                <a:solidFill>
-                  <a:srgbClr val="222222"/>
-                </a:solidFill>
-                <a:latin typeface="Meiryo" pitchFamily="34" charset="0"/>
-                <a:ea typeface="Meiryo" pitchFamily="34" charset="-122"/>
-                <a:cs typeface="Meiryo" pitchFamily="34" charset="-120"/>
-              </a:rPr>
-              <a:t>住所：</a:t>
-            </a:r>
-            <a:r>
-              <a:rPr lang="en-US" sz="1050" dirty="0">
-                <a:solidFill>
-                  <a:srgbClr val="222222"/>
-                </a:solidFill>
-                <a:latin typeface="Meiryo" pitchFamily="34" charset="0"/>
-                <a:ea typeface="Meiryo" pitchFamily="34" charset="-122"/>
-                <a:cs typeface="Meiryo" pitchFamily="34" charset="-120"/>
-              </a:rPr>
-              <a:t>千葉県東金市家之子1671-36</a:t>
-            </a:r>
-            <a:endParaRPr lang="en-US" sz="1050" dirty="0"/>
-          </a:p>
-          <a:p>
-            <a:pPr marL="0" indent="0">
-              <a:lnSpc>
-                <a:spcPct val="103000"/>
-              </a:lnSpc>
-              <a:buNone/>
-            </a:pPr>
-            <a:r>
-              <a:rPr lang="en-US" sz="1050" b="1" dirty="0">
-                <a:solidFill>
-                  <a:srgbClr val="2E6BB8"/>
-                </a:solidFill>
-                <a:latin typeface="Meiryo" pitchFamily="34" charset="0"/>
-                <a:ea typeface="Meiryo" pitchFamily="34" charset="-122"/>
-                <a:cs typeface="Meiryo" pitchFamily="34" charset="-120"/>
-              </a:rPr>
-              <a:t>▶</a:t>
-            </a:r>
-            <a:r>
-              <a:rPr lang="en-US" sz="1050" b="1" dirty="0">
-                <a:solidFill>
-                  <a:srgbClr val="222222"/>
-                </a:solidFill>
-                <a:latin typeface="Meiryo" pitchFamily="34" charset="0"/>
-                <a:ea typeface="Meiryo" pitchFamily="34" charset="-122"/>
-                <a:cs typeface="Meiryo" pitchFamily="34" charset="-120"/>
-              </a:rPr>
-              <a:t>TEL／HP：</a:t>
-            </a:r>
-            <a:r>
-              <a:rPr lang="en-US" sz="1050" dirty="0">
-                <a:solidFill>
-                  <a:srgbClr val="222222"/>
-                </a:solidFill>
-                <a:latin typeface="Meiryo" pitchFamily="34" charset="0"/>
-                <a:ea typeface="Meiryo" pitchFamily="34" charset="-122"/>
-                <a:cs typeface="Meiryo" pitchFamily="34" charset="-120"/>
-              </a:rPr>
-              <a:t>要確認（公開情報に記載なし）</a:t>
-            </a:r>
-            <a:endParaRPr lang="en-US" sz="1050" dirty="0"/>
-          </a:p>
-          <a:p>
-            <a:pPr marL="0" indent="0">
-              <a:lnSpc>
-                <a:spcPct val="103000"/>
-              </a:lnSpc>
-              <a:buNone/>
-            </a:pPr>
-            <a:r>
-              <a:rPr lang="en-US" sz="1050" b="1" dirty="0">
-                <a:solidFill>
-                  <a:srgbClr val="2E6BB8"/>
-                </a:solidFill>
-                <a:latin typeface="Meiryo" pitchFamily="34" charset="0"/>
-                <a:ea typeface="Meiryo" pitchFamily="34" charset="-122"/>
-                <a:cs typeface="Meiryo" pitchFamily="34" charset="-120"/>
-              </a:rPr>
-              <a:t>▶</a:t>
-            </a:r>
-            <a:r>
-              <a:rPr lang="en-US" sz="1050" b="1" dirty="0">
-                <a:solidFill>
-                  <a:srgbClr val="222222"/>
-                </a:solidFill>
-                <a:latin typeface="Meiryo" pitchFamily="34" charset="0"/>
-                <a:ea typeface="Meiryo" pitchFamily="34" charset="-122"/>
-                <a:cs typeface="Meiryo" pitchFamily="34" charset="-120"/>
-              </a:rPr>
-              <a:t>サービス提供時間／定員：</a:t>
-            </a:r>
-            <a:r>
-              <a:rPr lang="en-US" sz="1050" dirty="0">
-                <a:solidFill>
-                  <a:srgbClr val="222222"/>
-                </a:solidFill>
-                <a:latin typeface="Meiryo" pitchFamily="34" charset="0"/>
-                <a:ea typeface="Meiryo" pitchFamily="34" charset="-122"/>
-                <a:cs typeface="Meiryo" pitchFamily="34" charset="-120"/>
-              </a:rPr>
-              <a:t>いずれも要確認</a:t>
+              <a:rPr lang="en-US" sz="1000" b="1" dirty="0">
+                <a:solidFill>
+                  <a:srgbClr val="222222"/>
+                </a:solidFill>
+                <a:latin typeface="Meiryo" pitchFamily="34" charset="0"/>
+                <a:ea typeface="Meiryo" pitchFamily="34" charset="-122"/>
+                <a:cs typeface="Meiryo" pitchFamily="34" charset="-120"/>
+              </a:rPr>
+              <a:t>拠点／TEL：</a:t>
+            </a:r>
+            <a:r>
+              <a:rPr lang="en-US" sz="1000" dirty="0">
+                <a:solidFill>
+                  <a:srgbClr val="222222"/>
+                </a:solidFill>
+                <a:latin typeface="Meiryo" pitchFamily="34" charset="0"/>
+                <a:ea typeface="Meiryo" pitchFamily="34" charset="-122"/>
+                <a:cs typeface="Meiryo" pitchFamily="34" charset="-120"/>
+              </a:rPr>
+              <a:t>【日吉台】日吉台2-26-3／0475-52-6414　【松之郷】松之郷2423-1／0475-51-4082</a:t>
             </a:r>
             <a:endParaRPr lang="en-US" sz="1050" dirty="0"/>
           </a:p>
@@ -14275,6 +15655,17 @@
               </a:spcAft>
               <a:buNone/>
             </a:pPr>
+            <a:r>
+              <a:rPr lang="en-US" sz="1000" dirty="0">
+                <a:solidFill>
+                  <a:srgbClr val="222222"/>
+                </a:solidFill>
+                <a:latin typeface="Meiryo" pitchFamily="34" charset="0"/>
+                <a:ea typeface="Meiryo" pitchFamily="34" charset="-122"/>
+                <a:cs typeface="Meiryo" pitchFamily="34" charset="-120"/>
+              </a:rPr>
+              <a:t xml:space="preserve">　　　　　　【八坂台】八坂台5-11-1／0475-51-5010　【八坂西】八坂台4-2-4／0475-51-6631　【八坂中央】要確認</a:t>
+            </a:r>
             <a:endParaRPr lang="en-US" sz="1050" dirty="0"/>
           </a:p>
           <a:p>
@@ -14285,7 +15676,7 @@
               <a:buNone/>
             </a:pPr>
             <a:r>
-              <a:rPr lang="en-US" sz="1050" b="1" dirty="0">
+              <a:rPr lang="en-US" sz="1000" b="1" dirty="0">
                 <a:solidFill>
                   <a:srgbClr val="2E6BB8"/>
                 </a:solidFill>
@@ -14296,26 +15687,68 @@
               <a:t>▶</a:t>
             </a:r>
             <a:r>
-              <a:rPr lang="en-US" sz="1050" b="1" dirty="0">
-                <a:solidFill>
-                  <a:srgbClr val="222222"/>
-                </a:solidFill>
-                <a:latin typeface="Meiryo" pitchFamily="34" charset="0"/>
-                <a:ea typeface="Meiryo" pitchFamily="34" charset="-122"/>
-                <a:cs typeface="Meiryo" pitchFamily="34" charset="-120"/>
-              </a:rPr>
-              <a:t>療育プログラムの特徴：</a:t>
-            </a:r>
-            <a:r>
-              <a:rPr lang="en-US" sz="1050" dirty="0">
-                <a:solidFill>
-                  <a:srgbClr val="222222"/>
-                </a:solidFill>
-                <a:latin typeface="Meiryo" pitchFamily="34" charset="0"/>
-                <a:ea typeface="Meiryo" pitchFamily="34" charset="-122"/>
-                <a:cs typeface="Meiryo" pitchFamily="34" charset="-120"/>
-              </a:rPr>
-              <a:t>保育所を母体とする児童発達支援。保育の場と療育の場が同一施設にある併設型。</a:t>
+              <a:rPr lang="en-US" sz="1000" b="1" dirty="0">
+                <a:solidFill>
+                  <a:srgbClr val="222222"/>
+                </a:solidFill>
+                <a:latin typeface="Meiryo" pitchFamily="34" charset="0"/>
+                <a:ea typeface="Meiryo" pitchFamily="34" charset="-122"/>
+                <a:cs typeface="Meiryo" pitchFamily="34" charset="-120"/>
+              </a:rPr>
+              <a:t>HP：</a:t>
+            </a:r>
+            <a:r>
+              <a:rPr lang="en-US" sz="1000" dirty="0">
+                <a:solidFill>
+                  <a:srgbClr val="222222"/>
+                </a:solidFill>
+                <a:latin typeface="Meiryo" pitchFamily="34" charset="0"/>
+                <a:ea typeface="Meiryo" pitchFamily="34" charset="-122"/>
+                <a:cs typeface="Meiryo" pitchFamily="34" charset="-120"/>
+              </a:rPr>
+              <a:t>kihonjuku-yuuyuu.com（info@kihonjuku-yuuyuu.com）</a:t>
+            </a:r>
+            <a:endParaRPr lang="en-US" sz="1050" dirty="0"/>
+          </a:p>
+          <a:p>
+            <a:pPr marL="0" indent="0">
+              <a:lnSpc>
+                <a:spcPct val="103000"/>
+              </a:lnSpc>
+              <a:buNone/>
+            </a:pPr>
+            <a:r>
+              <a:rPr lang="en-US" sz="1000" b="1" dirty="0">
+                <a:solidFill>
+                  <a:srgbClr val="2E6BB8"/>
+                </a:solidFill>
+                <a:latin typeface="Meiryo" pitchFamily="34" charset="0"/>
+                <a:ea typeface="Meiryo" pitchFamily="34" charset="-122"/>
+                <a:cs typeface="Meiryo" pitchFamily="34" charset="-120"/>
+              </a:rPr>
+              <a:t>▶</a:t>
+            </a:r>
+            <a:r>
+              <a:rPr lang="en-US" sz="1000" b="1" dirty="0">
+                <a:solidFill>
+                  <a:srgbClr val="222222"/>
+                </a:solidFill>
+                <a:latin typeface="Meiryo" pitchFamily="34" charset="0"/>
+                <a:ea typeface="Meiryo" pitchFamily="34" charset="-122"/>
+                <a:cs typeface="Meiryo" pitchFamily="34" charset="-120"/>
+              </a:rPr>
+              <a:t>提供時間／定員：</a:t>
+            </a:r>
+            <a:r>
+              <a:rPr lang="en-US" sz="1000" dirty="0">
+                <a:solidFill>
+                  <a:srgbClr val="222222"/>
+                </a:solidFill>
+                <a:latin typeface="Meiryo" pitchFamily="34" charset="0"/>
+                <a:ea typeface="Meiryo" pitchFamily="34" charset="-122"/>
+                <a:cs typeface="Meiryo" pitchFamily="34" charset="-120"/>
+              </a:rPr>
+              <a:t>9:00〜18:00（共通の目安）・日曜祝日年末年始休　※八坂台は土曜も定休</a:t>
             </a:r>
             <a:endParaRPr lang="en-US" sz="1050" dirty="0"/>
           </a:p>
@@ -14330,15 +15763,15 @@
               <a:buNone/>
             </a:pPr>
             <a:r>
-              <a:rPr lang="en-US" sz="1050" dirty="0">
-                <a:solidFill>
-                  <a:srgbClr val="222222"/>
-                </a:solidFill>
-                <a:latin typeface="Meiryo" pitchFamily="34" charset="0"/>
-                <a:ea typeface="Meiryo" pitchFamily="34" charset="-122"/>
-                <a:cs typeface="Meiryo" pitchFamily="34" charset="-120"/>
-              </a:rPr>
-              <a:t>・市および発達支援施設検索サイトの児童発達支援事業所一覧に掲載されている。</a:t>
+              <a:rPr lang="en-US" sz="1000" dirty="0">
+                <a:solidFill>
+                  <a:srgbClr val="222222"/>
+                </a:solidFill>
+                <a:latin typeface="Meiryo" pitchFamily="34" charset="0"/>
+                <a:ea typeface="Meiryo" pitchFamily="34" charset="-122"/>
+                <a:cs typeface="Meiryo" pitchFamily="34" charset="-120"/>
+              </a:rPr>
+              <a:t xml:space="preserve">　　　　　　　　松之郷10名（送迎あり・要相談）、八坂台10名・職員9名（児発管1・児童指導員4・保育士4）、他拠点は要確認</a:t>
             </a:r>
             <a:endParaRPr lang="en-US" sz="1050" dirty="0"/>
           </a:p>
@@ -14352,16 +15785,47 @@
               </a:spcAft>
               <a:buNone/>
             </a:pPr>
-            <a:r>
-              <a:rPr lang="en-US" sz="1050" dirty="0">
-                <a:solidFill>
-                  <a:srgbClr val="222222"/>
-                </a:solidFill>
-                <a:latin typeface="Meiryo" pitchFamily="34" charset="0"/>
-                <a:ea typeface="Meiryo" pitchFamily="34" charset="-122"/>
-                <a:cs typeface="Meiryo" pitchFamily="34" charset="-120"/>
-              </a:rPr>
-              <a:t>・Web上の公開情報は極めて限定的で、支援プログラムの詳細は現地・電話での確認が必要。</a:t>
+            <a:endParaRPr lang="en-US" sz="1050" dirty="0"/>
+          </a:p>
+          <a:p>
+            <a:pPr marL="0" indent="0">
+              <a:lnSpc>
+                <a:spcPct val="103000"/>
+              </a:lnSpc>
+              <a:buNone/>
+            </a:pPr>
+            <a:r>
+              <a:rPr lang="en-US" sz="1000" b="1" dirty="0">
+                <a:solidFill>
+                  <a:srgbClr val="2E6BB8"/>
+                </a:solidFill>
+                <a:latin typeface="Meiryo" pitchFamily="34" charset="0"/>
+                <a:ea typeface="Meiryo" pitchFamily="34" charset="-122"/>
+                <a:cs typeface="Meiryo" pitchFamily="34" charset="-120"/>
+              </a:rPr>
+              <a:t>▶</a:t>
+            </a:r>
+            <a:r>
+              <a:rPr lang="en-US" sz="1000" b="1" dirty="0">
+                <a:solidFill>
+                  <a:srgbClr val="222222"/>
+                </a:solidFill>
+                <a:latin typeface="Meiryo" pitchFamily="34" charset="0"/>
+                <a:ea typeface="Meiryo" pitchFamily="34" charset="-122"/>
+                <a:cs typeface="Meiryo" pitchFamily="34" charset="-120"/>
+              </a:rPr>
+              <a:t>療育プログラムの特徴：</a:t>
+            </a:r>
+            <a:r>
+              <a:rPr lang="en-US" sz="1000" dirty="0">
+                <a:solidFill>
+                  <a:srgbClr val="222222"/>
+                </a:solidFill>
+                <a:latin typeface="Meiryo" pitchFamily="34" charset="0"/>
+                <a:ea typeface="Meiryo" pitchFamily="34" charset="-122"/>
+                <a:cs typeface="Meiryo" pitchFamily="34" charset="-120"/>
+              </a:rPr>
+              <a:t>個々のニーズに応じた個別支援プログラムと「10の活動」を全拠点共通の基本形とする。</a:t>
             </a:r>
             <a:endParaRPr lang="en-US" sz="1050" dirty="0"/>
           </a:p>
@@ -14375,6 +15839,52 @@
               </a:spcAft>
               <a:buNone/>
             </a:pPr>
+            <a:r>
+              <a:rPr lang="en-US" sz="1000" dirty="0">
+                <a:solidFill>
+                  <a:srgbClr val="222222"/>
+                </a:solidFill>
+                <a:latin typeface="Meiryo" pitchFamily="34" charset="0"/>
+                <a:ea typeface="Meiryo" pitchFamily="34" charset="-122"/>
+                <a:cs typeface="Meiryo" pitchFamily="34" charset="-120"/>
+              </a:rPr>
+              <a:t>・日吉台＝園庭あり。リトミック・体操・英語教育。小学校校長／幼稚園園長経験者、特別支援教育士、心理検査士、言語聴覚士などが在籍。</a:t>
+            </a:r>
+            <a:endParaRPr lang="en-US" sz="1050" dirty="0"/>
+          </a:p>
+          <a:p>
+            <a:pPr marL="0" indent="0">
+              <a:lnSpc>
+                <a:spcPct val="103000"/>
+              </a:lnSpc>
+              <a:spcAft>
+                <a:spcPts val="500"/>
+              </a:spcAft>
+              <a:buNone/>
+            </a:pPr>
+            <a:r>
+              <a:rPr lang="en-US" sz="1000" dirty="0">
+                <a:solidFill>
+                  <a:srgbClr val="222222"/>
+                </a:solidFill>
+                <a:latin typeface="Meiryo" pitchFamily="34" charset="0"/>
+                <a:ea typeface="Meiryo" pitchFamily="34" charset="-122"/>
+                <a:cs typeface="Meiryo" pitchFamily="34" charset="-120"/>
+              </a:rPr>
+              <a:t>・松之郷＝アートセラピー・運動・社会性を育むグループ活動。／八坂台＝少人数の活動・制作、地域連携イベント、元サッカー選手の「サッカー療育」。</a:t>
+            </a:r>
+            <a:endParaRPr lang="en-US" sz="1050" dirty="0"/>
+          </a:p>
+          <a:p>
+            <a:pPr marL="0" indent="0">
+              <a:lnSpc>
+                <a:spcPct val="103000"/>
+              </a:lnSpc>
+              <a:spcAft>
+                <a:spcPts val="500"/>
+              </a:spcAft>
+              <a:buNone/>
+            </a:pPr>
             <a:endParaRPr lang="en-US" sz="1050" dirty="0"/>
           </a:p>
           <a:p>
@@ -14385,7 +15895,7 @@
               <a:buNone/>
             </a:pPr>
             <a:r>
-              <a:rPr lang="en-US" sz="1050" b="1" dirty="0">
+              <a:rPr lang="en-US" sz="1000" b="1" dirty="0">
                 <a:solidFill>
                   <a:srgbClr val="2E6BB8"/>
                 </a:solidFill>
@@ -14396,7 +15906,7 @@
               <a:t>▶</a:t>
             </a:r>
             <a:r>
-              <a:rPr lang="en-US" sz="1050" b="1" dirty="0">
+              <a:rPr lang="en-US" sz="1000" b="1" dirty="0">
                 <a:solidFill>
                   <a:srgbClr val="222222"/>
                 </a:solidFill>
@@ -14407,15 +15917,15 @@
               <a:t>出典：</a:t>
             </a:r>
             <a:r>
-              <a:rPr lang="en-US" sz="1050" dirty="0">
-                <a:solidFill>
-                  <a:srgbClr val="222222"/>
-                </a:solidFill>
-                <a:latin typeface="Meiryo" pitchFamily="34" charset="0"/>
-                <a:ea typeface="Meiryo" pitchFamily="34" charset="-122"/>
-                <a:cs typeface="Meiryo" pitchFamily="34" charset="-120"/>
-              </a:rPr>
-              <a:t>東金市公式サイト／LITALICO発達ナビ 東金市 児童発達支援事業所一覧</a:t>
+              <a:rPr lang="en-US" sz="1000" dirty="0">
+                <a:solidFill>
+                  <a:srgbClr val="222222"/>
+                </a:solidFill>
+                <a:latin typeface="Meiryo" pitchFamily="34" charset="0"/>
+                <a:ea typeface="Meiryo" pitchFamily="34" charset="-122"/>
+                <a:cs typeface="Meiryo" pitchFamily="34" charset="-120"/>
+              </a:rPr>
+              <a:t>公式HP kihonjuku-yuuyuu.com／LITALICO発達ナビ／児発ねっと／ホイシル／ADDS kikotto施設検索</a:t>
             </a:r>
             <a:endParaRPr lang="en-US" sz="1050" dirty="0"/>
           </a:p>
@@ -14427,7 +15937,7 @@
               <a:buNone/>
             </a:pPr>
             <a:r>
-              <a:rPr lang="en-US" sz="1050" b="1" dirty="0">
+              <a:rPr lang="en-US" sz="1000" b="1" dirty="0">
                 <a:solidFill>
                   <a:srgbClr val="2E6BB8"/>
                 </a:solidFill>
@@ -14438,7 +15948,7 @@
               <a:t>▶</a:t>
             </a:r>
             <a:r>
-              <a:rPr lang="en-US" sz="1050" b="1" dirty="0">
+              <a:rPr lang="en-US" sz="1000" b="1" dirty="0">
                 <a:solidFill>
                   <a:srgbClr val="222222"/>
                 </a:solidFill>
@@ -14449,15 +15959,15 @@
               <a:t>要確認事項：</a:t>
             </a:r>
             <a:r>
-              <a:rPr lang="en-US" sz="1050" dirty="0">
-                <a:solidFill>
-                  <a:srgbClr val="222222"/>
-                </a:solidFill>
-                <a:latin typeface="Meiryo" pitchFamily="34" charset="0"/>
-                <a:ea typeface="Meiryo" pitchFamily="34" charset="-122"/>
-                <a:cs typeface="Meiryo" pitchFamily="34" charset="-120"/>
-              </a:rPr>
-              <a:t>運営法人、電話番号、定員、提供時間、母体となる保育所との関係　※公開情報がほぼ無い</a:t>
+              <a:rPr lang="en-US" sz="1000" dirty="0">
+                <a:solidFill>
+                  <a:srgbClr val="222222"/>
+                </a:solidFill>
+                <a:latin typeface="Meiryo" pitchFamily="34" charset="0"/>
+                <a:ea typeface="Meiryo" pitchFamily="34" charset="-122"/>
+                <a:cs typeface="Meiryo" pitchFamily="34" charset="-120"/>
+              </a:rPr>
+              <a:t>日吉台・八坂西・八坂中央の定員、児発と放デイの時間帯区分、各拠点の送迎範囲、八坂中央の開所時期・所在地・TEL</a:t>
             </a:r>
             <a:endParaRPr lang="en-US" sz="1050" dirty="0"/>
           </a:p>
@@ -14526,7 +16036,7 @@
                 <a:ea typeface="Meiryo" pitchFamily="34" charset="-122"/>
                 <a:cs typeface="Meiryo" pitchFamily="34" charset="-120"/>
               </a:rPr>
-              <a:t>（LITALICO発達ナビ／東金市公式の施設外観・保育室の写真を挿入）</a:t>
+              <a:t>（公式HP kihonjuku-yuuyuu.com 掲載の各拠点の教室・園庭・活動写真を挿入）</a:t>
             </a:r>
             <a:endParaRPr lang="en-US" sz="1200" dirty="0"/>
           </a:p>
@@ -14633,7 +16143,7 @@
                 <a:ea typeface="メイリオ" panose="020B0604030504040204" pitchFamily="50" charset="-128"/>
                 <a:cs typeface="Meiryo" pitchFamily="34" charset="-120"/>
               </a:rPr>
-              <a:t>市街地から離れた家之子地区（市北部）に立地し、周辺の事業所空白地帯をカバー。</a:t>
+              <a:t>市内12拠点のうち5拠点を占める最大手。1法人で東金市の児童発達支援供給の4割超を握る。</a:t>
             </a:r>
             <a:endParaRPr lang="en-US" sz="1000" dirty="0">
               <a:latin typeface="メイリオ" panose="020B0604030504040204" pitchFamily="50" charset="-128"/>
@@ -14657,7 +16167,7 @@
                 <a:ea typeface="メイリオ" panose="020B0604030504040204" pitchFamily="50" charset="-128"/>
                 <a:cs typeface="Meiryo" pitchFamily="34" charset="-120"/>
               </a:rPr>
-              <a:t>保育所併設型は市内で唯一。定型発達児との日常的な交流が可能な環境が構造的な強み。</a:t>
+              <a:t>教育畑の専門人材（校長・園長経験者、言語聴覚士、心理検査士）の厚みが最大の差別化要素で、参入障壁も高い。</a:t>
             </a:r>
             <a:endParaRPr lang="en-US" sz="1000" dirty="0">
               <a:latin typeface="メイリオ" panose="020B0604030504040204" pitchFamily="50" charset="-128"/>
@@ -14681,7 +16191,7 @@
                 <a:ea typeface="メイリオ" panose="020B0604030504040204" pitchFamily="50" charset="-128"/>
                 <a:cs typeface="Meiryo" pitchFamily="34" charset="-120"/>
               </a:rPr>
-              <a:t>情報発信がほぼ無く、稼働状況・空き枠の把握には直接ヒアリングが必須。</a:t>
+              <a:t>拠点を小規模に分散させ、少人数環境を保ちながら総定員を確保するモデル。八坂台エリアだけで3拠点。</a:t>
             </a:r>
             <a:endParaRPr lang="en-US" sz="1000" dirty="0">
               <a:latin typeface="メイリオ" panose="020B0604030504040204" pitchFamily="50" charset="-128"/>
@@ -14705,7 +16215,7 @@
                 <a:ea typeface="メイリオ" panose="020B0604030504040204" pitchFamily="50" charset="-128"/>
                 <a:cs typeface="Meiryo" pitchFamily="34" charset="-120"/>
               </a:rPr>
-              <a:t>市北部（家之子・丘山方面）は事業所が少なく、送迎圏として狙える余地がある。</a:t>
+              <a:t>八坂台・日吉台への新規出店は基本塾との正面競合。土曜（八坂台は定休）や送迎圏の隙間が狙い目となる。</a:t>
             </a:r>
             <a:endParaRPr lang="en-US" sz="1000" dirty="0">
               <a:latin typeface="メイリオ" panose="020B0604030504040204" pitchFamily="50" charset="-128"/>
@@ -14859,7 +16369,7 @@
                 <a:ea typeface="Meiryo" pitchFamily="34" charset="-122"/>
                 <a:cs typeface="Meiryo" pitchFamily="34" charset="-120"/>
               </a:rPr>
-              <a:t>⑦ 鴇嶺の家</a:t>
+              <a:t>⑦ 児童発達支援コンパッション保育所</a:t>
             </a:r>
             <a:endParaRPr lang="en-US" sz="2100" dirty="0"/>
           </a:p>
@@ -15033,7 +16543,7 @@
                 <a:ea typeface="Meiryo" pitchFamily="34" charset="-122"/>
                 <a:cs typeface="Meiryo" pitchFamily="34" charset="-120"/>
               </a:rPr>
-              <a:t>鴇嶺の家（児童発達支援・放課後等デイサービス）</a:t>
+              <a:t>児童発達支援コンパッション保育所</a:t>
             </a:r>
             <a:endParaRPr lang="en-US" sz="1400" dirty="0"/>
           </a:p>
@@ -15097,7 +16607,7 @@
                 <a:ea typeface="Meiryo" pitchFamily="34" charset="-122"/>
                 <a:cs typeface="Meiryo" pitchFamily="34" charset="-120"/>
               </a:rPr>
-              <a:t>未就学児（児童発達支援）〜就学児（放課後等デイサービス）</a:t>
+              <a:t>未就学児（児童発達支援）</a:t>
             </a:r>
             <a:endParaRPr lang="en-US" sz="1050" dirty="0"/>
           </a:p>
@@ -15139,7 +16649,7 @@
                 <a:ea typeface="Meiryo" pitchFamily="34" charset="-122"/>
                 <a:cs typeface="Meiryo" pitchFamily="34" charset="-120"/>
               </a:rPr>
-              <a:t>千葉県東金市東金425-2</a:t>
+              <a:t>千葉県東金市家之子1671-36</a:t>
             </a:r>
             <a:endParaRPr lang="en-US" sz="1050" dirty="0"/>
           </a:p>
@@ -15181,7 +16691,7 @@
                 <a:ea typeface="Meiryo" pitchFamily="34" charset="-122"/>
                 <a:cs typeface="Meiryo" pitchFamily="34" charset="-120"/>
               </a:rPr>
-              <a:t>要確認（公開情報では下4桁「0285」までの記載にとどまる）／公開HPなし</a:t>
+              <a:t>要確認（公開情報に記載なし）</a:t>
             </a:r>
             <a:endParaRPr lang="en-US" sz="1050" dirty="0"/>
           </a:p>
@@ -15277,7 +16787,7 @@
                 <a:ea typeface="Meiryo" pitchFamily="34" charset="-122"/>
                 <a:cs typeface="Meiryo" pitchFamily="34" charset="-120"/>
               </a:rPr>
-              <a:t>児童発達支援と放課後等デイサービスを併設。プログラム内容は公開情報からは確認できず要確認。</a:t>
+              <a:t>保育所を母体とする児童発達支援。保育の場と療育の場が同一施設にある併設型。</a:t>
             </a:r>
             <a:endParaRPr lang="en-US" sz="1050" dirty="0"/>
           </a:p>
@@ -15300,7 +16810,7 @@
                 <a:ea typeface="Meiryo" pitchFamily="34" charset="-122"/>
                 <a:cs typeface="Meiryo" pitchFamily="34" charset="-120"/>
               </a:rPr>
-              <a:t>・東金地区（旧市街・鴇嶺小学校区）に立地し、学校からの通所導線が近い。</a:t>
+              <a:t>・市および発達支援施設検索サイトの児童発達支援事業所一覧に掲載されている。</a:t>
             </a:r>
             <a:endParaRPr lang="en-US" sz="1050" dirty="0"/>
           </a:p>
@@ -15323,7 +16833,7 @@
                 <a:ea typeface="Meiryo" pitchFamily="34" charset="-122"/>
                 <a:cs typeface="Meiryo" pitchFamily="34" charset="-120"/>
               </a:rPr>
-              <a:t>・同一町域の東金723にスターワーク東金（放デイ）があり、東金駅東口エリアに事業所が集積。</a:t>
+              <a:t>・Web上の公開情報は極めて限定的で、支援プログラムの詳細は現地・電話での確認が必要。</a:t>
             </a:r>
             <a:endParaRPr lang="en-US" sz="1050" dirty="0"/>
           </a:p>
@@ -15419,7 +16929,7 @@
                 <a:ea typeface="Meiryo" pitchFamily="34" charset="-122"/>
                 <a:cs typeface="Meiryo" pitchFamily="34" charset="-120"/>
               </a:rPr>
-              <a:t>運営法人、正確な電話番号、定員、提供時間、プログラム内容　※公開情報がほぼ無い</a:t>
+              <a:t>運営法人、電話番号、定員、提供時間、母体となる保育所との関係　※公開情報がほぼ無い</a:t>
             </a:r>
             <a:endParaRPr lang="en-US" sz="1050" dirty="0"/>
           </a:p>
@@ -15488,7 +16998,7 @@
                 <a:ea typeface="Meiryo" pitchFamily="34" charset="-122"/>
                 <a:cs typeface="Meiryo" pitchFamily="34" charset="-120"/>
               </a:rPr>
-              <a:t>（LITALICO発達ナビ／東金市公式の施設写真を挿入）</a:t>
+              <a:t>（LITALICO発達ナビ／東金市公式の施設外観・保育室の写真を挿入）</a:t>
             </a:r>
             <a:endParaRPr lang="en-US" sz="1200" dirty="0"/>
           </a:p>
@@ -15595,7 +17105,7 @@
                 <a:ea typeface="メイリオ" panose="020B0604030504040204" pitchFamily="50" charset="-128"/>
                 <a:cs typeface="Meiryo" pitchFamily="34" charset="-120"/>
               </a:rPr>
-              <a:t>鴇嶺小学校区の中心部に位置し、学区内からの徒歩・短距離送迎に適した立地。</a:t>
+              <a:t>市街地から離れた家之子地区（市北部）に立地し、周辺の事業所空白地帯をカバー。</a:t>
             </a:r>
             <a:endParaRPr lang="en-US" sz="1000" dirty="0">
               <a:latin typeface="メイリオ" panose="020B0604030504040204" pitchFamily="50" charset="-128"/>
@@ -15619,7 +17129,7 @@
                 <a:ea typeface="メイリオ" panose="020B0604030504040204" pitchFamily="50" charset="-128"/>
                 <a:cs typeface="Meiryo" pitchFamily="34" charset="-120"/>
               </a:rPr>
-              <a:t>東金駅東口エリアの事業所集積地にあり、競合との距離が近い。</a:t>
+              <a:t>保育所併設型は市内で唯一。定型発達児との日常的な交流が可能な環境が構造的な強み。</a:t>
             </a:r>
             <a:endParaRPr lang="en-US" sz="1000" dirty="0">
               <a:latin typeface="メイリオ" panose="020B0604030504040204" pitchFamily="50" charset="-128"/>
@@ -15643,7 +17153,7 @@
                 <a:ea typeface="メイリオ" panose="020B0604030504040204" pitchFamily="50" charset="-128"/>
                 <a:cs typeface="Meiryo" pitchFamily="34" charset="-120"/>
               </a:rPr>
-              <a:t>情報発信が乏しく、実態把握は市社会福祉課・相談支援事業所経由での確認が現実的。</a:t>
+              <a:t>情報発信がほぼ無く、稼働状況・空き枠の把握には直接ヒアリングが必須。</a:t>
             </a:r>
             <a:endParaRPr lang="en-US" sz="1000" dirty="0">
               <a:latin typeface="メイリオ" panose="020B0604030504040204" pitchFamily="50" charset="-128"/>
@@ -15667,7 +17177,7 @@
                 <a:ea typeface="メイリオ" panose="020B0604030504040204" pitchFamily="50" charset="-128"/>
                 <a:cs typeface="Meiryo" pitchFamily="34" charset="-120"/>
               </a:rPr>
-              <a:t>東金駅東口は事業所集積地。新規参入するなら駅前以外の空白地を狙うのが現実的。</a:t>
+              <a:t>市北部（家之子・丘山方面）は事業所が少なく、送迎圏として狙える余地がある。</a:t>
             </a:r>
             <a:endParaRPr lang="en-US" sz="1000" dirty="0">
               <a:latin typeface="メイリオ" panose="020B0604030504040204" pitchFamily="50" charset="-128"/>

--- a/東金市_児童発達支援_事業所調査.pptx
+++ b/東金市_児童発達支援_事業所調査.pptx
@@ -18,7 +18,9 @@
     <p:sldId id="263" r:id="rId19"/>
     <p:sldId id="264" r:id="rId20"/>
     <p:sldId id="265" r:id="rId21"/>
-    <p:sldId id="266" r:id="rId8"/>
+    <p:sldId id="266" r:id="rId22"/>
+    <p:sldId id="267" r:id="rId23"/>
+    <p:sldId id="268" r:id="rId8"/>
   </p:sldIdLst>
   <p:sldSz cx="12192000" cy="6858000"/>
   <p:notesSz cx="6858000" cy="12192000"/>
@@ -1097,7 +1099,7 @@
                 <a:ea typeface="メイリオ" panose="020B0604030504040204" pitchFamily="50" charset="-128"/>
                 <a:cs typeface="Meiryo" pitchFamily="34" charset="-120"/>
               </a:rPr>
-              <a:t>東金市内 全12拠点（運営主体6）の個別整理</a:t>
+              <a:t>東金市内 全16拠点（運営主体8）の個別整理</a:t>
             </a:r>
             <a:endParaRPr lang="en-US" altLang="ja-JP" sz="1600" b="1" dirty="0">
               <a:latin typeface="メイリオ" panose="020B0604030504040204" pitchFamily="50" charset="-128"/>
@@ -1425,7 +1427,7 @@
                 <a:ea typeface="Meiryo" pitchFamily="34" charset="-122"/>
                 <a:cs typeface="Meiryo" pitchFamily="34" charset="-120"/>
               </a:rPr>
-              <a:t>⑧ 鴇嶺の家</a:t>
+              <a:t>⑧ 果実の木 求名</a:t>
             </a:r>
             <a:endParaRPr lang="en-US" sz="2100" dirty="0"/>
           </a:p>
@@ -1599,7 +1601,7 @@
                 <a:ea typeface="Meiryo" pitchFamily="34" charset="-122"/>
                 <a:cs typeface="Meiryo" pitchFamily="34" charset="-120"/>
               </a:rPr>
-              <a:t>鴇嶺の家（児童発達支援・放課後等デイサービス）</a:t>
+              <a:t>果実の木 求名（児童発達支援）</a:t>
             </a:r>
             <a:endParaRPr lang="en-US" sz="1400" dirty="0"/>
           </a:p>
@@ -1663,7 +1665,7 @@
                 <a:ea typeface="Meiryo" pitchFamily="34" charset="-122"/>
                 <a:cs typeface="Meiryo" pitchFamily="34" charset="-120"/>
               </a:rPr>
-              <a:t>未就学児（児童発達支援）〜就学児（放課後等デイサービス）</a:t>
+              <a:t>未就学児（児童発達支援）</a:t>
             </a:r>
             <a:endParaRPr lang="en-US" sz="1050" dirty="0"/>
           </a:p>
@@ -1705,7 +1707,7 @@
                 <a:ea typeface="Meiryo" pitchFamily="34" charset="-122"/>
                 <a:cs typeface="Meiryo" pitchFamily="34" charset="-120"/>
               </a:rPr>
-              <a:t>千葉県東金市東金425-2</a:t>
+              <a:t>千葉県東金市　JR東金線 求名駅から約593m（正確な所在地は要確認）</a:t>
             </a:r>
             <a:endParaRPr lang="en-US" sz="1050" dirty="0"/>
           </a:p>
@@ -1747,7 +1749,7 @@
                 <a:ea typeface="Meiryo" pitchFamily="34" charset="-122"/>
                 <a:cs typeface="Meiryo" pitchFamily="34" charset="-120"/>
               </a:rPr>
-              <a:t>要確認（公開情報では下4桁「0285」までの記載にとどまる）／公開HPなし</a:t>
+              <a:t>要確認（公開情報に記載なし）</a:t>
             </a:r>
             <a:endParaRPr lang="en-US" sz="1050" dirty="0"/>
           </a:p>
@@ -1843,7 +1845,7 @@
                 <a:ea typeface="Meiryo" pitchFamily="34" charset="-122"/>
                 <a:cs typeface="Meiryo" pitchFamily="34" charset="-120"/>
               </a:rPr>
-              <a:t>児童発達支援と放課後等デイサービスを併設。プログラム内容は公開情報からは確認できず要確認。</a:t>
+              <a:t>公開情報が極めて限定的で、支援内容は要確認。</a:t>
             </a:r>
             <a:endParaRPr lang="en-US" sz="1050" dirty="0"/>
           </a:p>
@@ -1866,7 +1868,7 @@
                 <a:ea typeface="Meiryo" pitchFamily="34" charset="-122"/>
                 <a:cs typeface="Meiryo" pitchFamily="34" charset="-120"/>
               </a:rPr>
-              <a:t>・東金地区（旧市街・鴇嶺小学校区）に立地し、学校からの通所導線が近い。</a:t>
+              <a:t>・集約サイトの児童発達支援一覧に掲載。市南西部の求名駅圏に立地。</a:t>
             </a:r>
             <a:endParaRPr lang="en-US" sz="1050" dirty="0"/>
           </a:p>
@@ -1889,7 +1891,7 @@
                 <a:ea typeface="Meiryo" pitchFamily="34" charset="-122"/>
                 <a:cs typeface="Meiryo" pitchFamily="34" charset="-120"/>
               </a:rPr>
-              <a:t>・同一町域の東金723にスターワーク東金（放デイ）があり、東金駅東口エリアに事業所が集積。</a:t>
+              <a:t>・同一エリアにエスポワール第2があり、求名駅圏は2事業所が並ぶ。</a:t>
             </a:r>
             <a:endParaRPr lang="en-US" sz="1050" dirty="0"/>
           </a:p>
@@ -1903,6 +1905,29 @@
               </a:spcAft>
               <a:buNone/>
             </a:pPr>
+            <a:r>
+              <a:rPr lang="en-US" sz="1050" dirty="0">
+                <a:solidFill>
+                  <a:srgbClr val="222222"/>
+                </a:solidFill>
+                <a:latin typeface="Meiryo" pitchFamily="34" charset="0"/>
+                <a:ea typeface="Meiryo" pitchFamily="34" charset="-122"/>
+                <a:cs typeface="Meiryo" pitchFamily="34" charset="-120"/>
+              </a:rPr>
+              <a:t>・「果実の木」は熊本市等にも同名の放課後等デイサービスがあり、同系列か否かは要確認。</a:t>
+            </a:r>
+            <a:endParaRPr lang="en-US" sz="1050" dirty="0"/>
+          </a:p>
+          <a:p>
+            <a:pPr marL="0" indent="0">
+              <a:lnSpc>
+                <a:spcPct val="103000"/>
+              </a:lnSpc>
+              <a:spcAft>
+                <a:spcPts val="500"/>
+              </a:spcAft>
+              <a:buNone/>
+            </a:pPr>
             <a:endParaRPr lang="en-US" sz="1050" dirty="0"/>
           </a:p>
           <a:p>
@@ -1943,7 +1968,7 @@
                 <a:ea typeface="Meiryo" pitchFamily="34" charset="-122"/>
                 <a:cs typeface="Meiryo" pitchFamily="34" charset="-120"/>
               </a:rPr>
-              <a:t>東金市公式サイト／LITALICO発達ナビ 東金市 児童発達支援事業所一覧</a:t>
+              <a:t>ホイシル 東金市 児童発達支援一覧（www.hoicil.com/f?area=122131&amp;facility_kind=15）</a:t>
             </a:r>
             <a:endParaRPr lang="en-US" sz="1050" dirty="0"/>
           </a:p>
@@ -1985,7 +2010,7 @@
                 <a:ea typeface="Meiryo" pitchFamily="34" charset="-122"/>
                 <a:cs typeface="Meiryo" pitchFamily="34" charset="-120"/>
               </a:rPr>
-              <a:t>運営法人、正確な電話番号、定員、提供時間、プログラム内容　※公開情報がほぼ無い</a:t>
+              <a:t>正式名称・所在地・電話番号、運営法人、定員、提供時間、他県の同名事業所との関係</a:t>
             </a:r>
             <a:endParaRPr lang="en-US" sz="1050" dirty="0"/>
           </a:p>
@@ -2054,7 +2079,7 @@
                 <a:ea typeface="Meiryo" pitchFamily="34" charset="-122"/>
                 <a:cs typeface="Meiryo" pitchFamily="34" charset="-120"/>
               </a:rPr>
-              <a:t>（LITALICO発達ナビ／東金市公式の施設写真を挿入）</a:t>
+              <a:t>（ホイシル／LITALICO発達ナビ掲載の施設写真を挿入）</a:t>
             </a:r>
             <a:endParaRPr lang="en-US" sz="1200" dirty="0"/>
           </a:p>
@@ -2161,7 +2186,7 @@
                 <a:ea typeface="メイリオ" panose="020B0604030504040204" pitchFamily="50" charset="-128"/>
                 <a:cs typeface="Meiryo" pitchFamily="34" charset="-120"/>
               </a:rPr>
-              <a:t>鴇嶺小学校区の中心部に位置し、学区内からの徒歩・短距離送迎に適した立地。</a:t>
+              <a:t>求名駅圏で確認できる数少ない児童発達支援。市南西部の受け皿を担う。</a:t>
             </a:r>
             <a:endParaRPr lang="en-US" sz="1000" dirty="0">
               <a:latin typeface="メイリオ" panose="020B0604030504040204" pitchFamily="50" charset="-128"/>
@@ -2185,7 +2210,7 @@
                 <a:ea typeface="メイリオ" panose="020B0604030504040204" pitchFamily="50" charset="-128"/>
                 <a:cs typeface="Meiryo" pitchFamily="34" charset="-120"/>
               </a:rPr>
-              <a:t>東金駅東口エリアの事業所集積地にあり、競合との距離が近い。</a:t>
+              <a:t>東金駅圏に集中する既存事業所とは商圏が異なり、直接競合になりにくい立地。</a:t>
             </a:r>
             <a:endParaRPr lang="en-US" sz="1000" dirty="0">
               <a:latin typeface="メイリオ" panose="020B0604030504040204" pitchFamily="50" charset="-128"/>
@@ -2209,7 +2234,7 @@
                 <a:ea typeface="メイリオ" panose="020B0604030504040204" pitchFamily="50" charset="-128"/>
                 <a:cs typeface="Meiryo" pitchFamily="34" charset="-120"/>
               </a:rPr>
-              <a:t>情報発信が乏しく、実態把握は市社会福祉課・相談支援事業所経由での確認が現実的。</a:t>
+              <a:t>市南西部（求名・丘山地区）は従来「空白地帯」と見ていたが、実際には出店が進みつつある。</a:t>
             </a:r>
             <a:endParaRPr lang="en-US" sz="1000" dirty="0">
               <a:latin typeface="メイリオ" panose="020B0604030504040204" pitchFamily="50" charset="-128"/>
@@ -2233,7 +2258,7 @@
                 <a:ea typeface="メイリオ" panose="020B0604030504040204" pitchFamily="50" charset="-128"/>
                 <a:cs typeface="Meiryo" pitchFamily="34" charset="-120"/>
               </a:rPr>
-              <a:t>東金駅東口は事業所集積地。新規参入するなら駅前以外の空白地を狙うのが現実的。</a:t>
+              <a:t>公開情報がほぼ無く、実態把握は市社会福祉課・相談支援事業所経由での確認が現実的。</a:t>
             </a:r>
             <a:endParaRPr lang="en-US" sz="1000" dirty="0">
               <a:latin typeface="メイリオ" panose="020B0604030504040204" pitchFamily="50" charset="-128"/>
@@ -2251,6 +2276,1930 @@
 </file>
 
 <file path=ppt/slides/slide11.xml><?xml version="1.0" encoding="utf-8"?>
+<p:sld xmlns:a="http://schemas.openxmlformats.org/drawingml/2006/main" xmlns:r="http://schemas.openxmlformats.org/officeDocument/2006/relationships" xmlns:p="http://schemas.openxmlformats.org/presentationml/2006/main">
+  <p:cSld name="Slide 3">
+    <p:bg>
+      <p:bgPr>
+        <a:solidFill>
+          <a:srgbClr val="FFFFFF"/>
+        </a:solidFill>
+        <a:effectLst/>
+      </p:bgPr>
+    </p:bg>
+    <p:spTree>
+      <p:nvGrpSpPr>
+        <p:cNvPr id="1" name=""/>
+        <p:cNvGrpSpPr/>
+        <p:nvPr/>
+      </p:nvGrpSpPr>
+      <p:grpSpPr>
+        <a:xfrm>
+          <a:off x="0" y="0"/>
+          <a:ext cx="0" cy="0"/>
+          <a:chOff x="0" y="0"/>
+          <a:chExt cx="0" cy="0"/>
+        </a:xfrm>
+      </p:grpSpPr>
+      <p:sp>
+        <p:nvSpPr>
+          <p:cNvPr id="2" name="Shape 0"/>
+          <p:cNvSpPr/>
+          <p:nvPr/>
+        </p:nvSpPr>
+        <p:spPr>
+          <a:xfrm>
+            <a:off x="0" y="0"/>
+            <a:ext cx="12188952" cy="932688"/>
+          </a:xfrm>
+          <a:prstGeom prst="rect">
+            <a:avLst/>
+          </a:prstGeom>
+          <a:solidFill>
+            <a:srgbClr val="1B3A6B"/>
+          </a:solidFill>
+          <a:ln/>
+        </p:spPr>
+      </p:sp>
+      <p:sp>
+        <p:nvSpPr>
+          <p:cNvPr id="3" name="Shape 1"/>
+          <p:cNvSpPr/>
+          <p:nvPr/>
+        </p:nvSpPr>
+        <p:spPr>
+          <a:xfrm>
+            <a:off x="0" y="0"/>
+            <a:ext cx="164592" cy="932688"/>
+          </a:xfrm>
+          <a:prstGeom prst="rect">
+            <a:avLst/>
+          </a:prstGeom>
+          <a:solidFill>
+            <a:srgbClr val="13294B"/>
+          </a:solidFill>
+          <a:ln/>
+        </p:spPr>
+      </p:sp>
+      <p:sp>
+        <p:nvSpPr>
+          <p:cNvPr id="4" name="Text 2"/>
+          <p:cNvSpPr/>
+          <p:nvPr/>
+        </p:nvSpPr>
+        <p:spPr>
+          <a:xfrm>
+            <a:off x="502920" y="54864"/>
+            <a:ext cx="8686800" cy="822960"/>
+          </a:xfrm>
+          <a:prstGeom prst="rect">
+            <a:avLst/>
+          </a:prstGeom>
+          <a:noFill/>
+          <a:ln/>
+        </p:spPr>
+        <p:txBody>
+          <a:bodyPr wrap="square" lIns="0" tIns="0" rIns="0" bIns="0" rtlCol="0" anchor="ctr"/>
+          <a:lstStyle/>
+          <a:p>
+            <a:pPr marL="0" indent="0">
+              <a:buNone/>
+            </a:pPr>
+            <a:r>
+              <a:rPr lang="en-US" sz="3000" b="1" dirty="0">
+                <a:solidFill>
+                  <a:srgbClr val="FFFFFF"/>
+                </a:solidFill>
+                <a:latin typeface="Meiryo" pitchFamily="34" charset="0"/>
+                <a:ea typeface="Meiryo" pitchFamily="34" charset="-122"/>
+                <a:cs typeface="Meiryo" pitchFamily="34" charset="-120"/>
+              </a:rPr>
+              <a:t>II．　事業所別 詳細</a:t>
+            </a:r>
+            <a:endParaRPr lang="en-US" sz="3000" dirty="0"/>
+          </a:p>
+        </p:txBody>
+      </p:sp>
+      <p:sp>
+        <p:nvSpPr>
+          <p:cNvPr id="5" name="Text 3"/>
+          <p:cNvSpPr/>
+          <p:nvPr/>
+        </p:nvSpPr>
+        <p:spPr>
+          <a:xfrm>
+            <a:off x="502920" y="1115568"/>
+            <a:ext cx="8503920" cy="457200"/>
+          </a:xfrm>
+          <a:prstGeom prst="rect">
+            <a:avLst/>
+          </a:prstGeom>
+          <a:noFill/>
+          <a:ln/>
+        </p:spPr>
+        <p:txBody>
+          <a:bodyPr wrap="square" lIns="0" tIns="0" rIns="0" bIns="0" rtlCol="0" anchor="ctr"/>
+          <a:lstStyle/>
+          <a:p>
+            <a:pPr marL="0" indent="0">
+              <a:buNone/>
+            </a:pPr>
+            <a:r>
+              <a:rPr lang="en-US" sz="2100" b="1" dirty="0">
+                <a:solidFill>
+                  <a:srgbClr val="222222"/>
+                </a:solidFill>
+                <a:latin typeface="Meiryo" pitchFamily="34" charset="0"/>
+                <a:ea typeface="Meiryo" pitchFamily="34" charset="-122"/>
+                <a:cs typeface="Meiryo" pitchFamily="34" charset="-120"/>
+              </a:rPr>
+              <a:t>⑨ 児童発達支援コンパッション保育所</a:t>
+            </a:r>
+            <a:endParaRPr lang="en-US" sz="2100" dirty="0"/>
+          </a:p>
+        </p:txBody>
+      </p:sp>
+      <p:sp>
+        <p:nvSpPr>
+          <p:cNvPr id="6" name="Shape 4"/>
+          <p:cNvSpPr/>
+          <p:nvPr/>
+        </p:nvSpPr>
+        <p:spPr>
+          <a:xfrm>
+            <a:off x="10104120" y="1170432"/>
+            <a:ext cx="1600200" cy="457200"/>
+          </a:xfrm>
+          <a:prstGeom prst="rect">
+            <a:avLst/>
+          </a:prstGeom>
+          <a:solidFill>
+            <a:srgbClr val="FFFFFF"/>
+          </a:solidFill>
+          <a:ln w="15875">
+            <a:solidFill>
+              <a:srgbClr val="1B3A6B"/>
+            </a:solidFill>
+            <a:prstDash val="solid"/>
+          </a:ln>
+        </p:spPr>
+      </p:sp>
+      <p:sp>
+        <p:nvSpPr>
+          <p:cNvPr id="7" name="Text 5"/>
+          <p:cNvSpPr/>
+          <p:nvPr/>
+        </p:nvSpPr>
+        <p:spPr>
+          <a:xfrm>
+            <a:off x="10104120" y="1170432"/>
+            <a:ext cx="1600200" cy="457200"/>
+          </a:xfrm>
+          <a:prstGeom prst="rect">
+            <a:avLst/>
+          </a:prstGeom>
+          <a:noFill/>
+          <a:ln/>
+        </p:spPr>
+        <p:txBody>
+          <a:bodyPr wrap="square" lIns="0" tIns="0" rIns="0" bIns="0" rtlCol="0" anchor="ctr"/>
+          <a:lstStyle/>
+          <a:p>
+            <a:pPr marL="0" indent="0" algn="ctr">
+              <a:buNone/>
+            </a:pPr>
+            <a:r>
+              <a:rPr lang="en-US" sz="1400" b="1" dirty="0">
+                <a:solidFill>
+                  <a:srgbClr val="1B3A6B"/>
+                </a:solidFill>
+                <a:latin typeface="Meiryo" pitchFamily="34" charset="0"/>
+                <a:ea typeface="Meiryo" pitchFamily="34" charset="-122"/>
+                <a:cs typeface="Meiryo" pitchFamily="34" charset="-120"/>
+              </a:rPr>
+              <a:t>東金市</a:t>
+            </a:r>
+            <a:endParaRPr lang="en-US" sz="1400" dirty="0"/>
+          </a:p>
+        </p:txBody>
+      </p:sp>
+      <p:sp>
+        <p:nvSpPr>
+          <p:cNvPr id="8" name="Text 6"/>
+          <p:cNvSpPr/>
+          <p:nvPr/>
+        </p:nvSpPr>
+        <p:spPr>
+          <a:xfrm>
+            <a:off x="502920" y="6510528"/>
+            <a:ext cx="7315200" cy="274320"/>
+          </a:xfrm>
+          <a:prstGeom prst="rect">
+            <a:avLst/>
+          </a:prstGeom>
+          <a:noFill/>
+          <a:ln/>
+        </p:spPr>
+        <p:txBody>
+          <a:bodyPr wrap="square" lIns="0" tIns="0" rIns="0" bIns="0" rtlCol="0" anchor="ctr"/>
+          <a:lstStyle/>
+          <a:p>
+            <a:pPr marL="0" indent="0">
+              <a:buNone/>
+            </a:pPr>
+            <a:r>
+              <a:rPr lang="en-US" sz="850" dirty="0">
+                <a:solidFill>
+                  <a:srgbClr val="666666"/>
+                </a:solidFill>
+                <a:latin typeface="Meiryo" pitchFamily="34" charset="0"/>
+                <a:ea typeface="Meiryo" pitchFamily="34" charset="-122"/>
+                <a:cs typeface="Meiryo" pitchFamily="34" charset="-120"/>
+              </a:rPr>
+              <a:t>Copyright Funai Soken Group. All rights reserved.</a:t>
+            </a:r>
+            <a:endParaRPr lang="en-US" sz="850" dirty="0"/>
+          </a:p>
+        </p:txBody>
+      </p:sp>
+      <p:sp>
+        <p:nvSpPr>
+          <p:cNvPr id="9" name="Shape 7"/>
+          <p:cNvSpPr/>
+          <p:nvPr/>
+        </p:nvSpPr>
+        <p:spPr>
+          <a:xfrm>
+            <a:off x="502920" y="1783080"/>
+            <a:ext cx="6903720" cy="4434840"/>
+          </a:xfrm>
+          <a:prstGeom prst="rect">
+            <a:avLst/>
+          </a:prstGeom>
+          <a:solidFill>
+            <a:srgbClr val="FFFFFF"/>
+          </a:solidFill>
+          <a:ln w="12700">
+            <a:solidFill>
+              <a:srgbClr val="9AA7B8"/>
+            </a:solidFill>
+            <a:prstDash val="solid"/>
+          </a:ln>
+          <a:effectLst>
+            <a:outerShdw blurRad="63500" dist="25400" dir="8100000" algn="bl" rotWithShape="0">
+              <a:srgbClr val="000000">
+                <a:alpha val="12000"/>
+              </a:srgbClr>
+            </a:outerShdw>
+          </a:effectLst>
+        </p:spPr>
+      </p:sp>
+      <p:sp>
+        <p:nvSpPr>
+          <p:cNvPr id="10" name="Text 8"/>
+          <p:cNvSpPr/>
+          <p:nvPr/>
+        </p:nvSpPr>
+        <p:spPr>
+          <a:xfrm>
+            <a:off x="704088" y="1911096"/>
+            <a:ext cx="6501384" cy="384048"/>
+          </a:xfrm>
+          <a:prstGeom prst="rect">
+            <a:avLst/>
+          </a:prstGeom>
+          <a:noFill/>
+          <a:ln/>
+        </p:spPr>
+        <p:txBody>
+          <a:bodyPr wrap="square" lIns="0" tIns="0" rIns="0" bIns="0" rtlCol="0" anchor="ctr"/>
+          <a:lstStyle/>
+          <a:p>
+            <a:pPr marL="0" indent="0">
+              <a:buNone/>
+            </a:pPr>
+            <a:r>
+              <a:rPr lang="en-US" sz="1400" b="1" dirty="0">
+                <a:solidFill>
+                  <a:srgbClr val="1B3A6B"/>
+                </a:solidFill>
+                <a:latin typeface="Meiryo" pitchFamily="34" charset="0"/>
+                <a:ea typeface="Meiryo" pitchFamily="34" charset="-122"/>
+                <a:cs typeface="Meiryo" pitchFamily="34" charset="-120"/>
+              </a:rPr>
+              <a:t>児童発達支援コンパッション保育所</a:t>
+            </a:r>
+            <a:endParaRPr lang="en-US" sz="1400" dirty="0"/>
+          </a:p>
+        </p:txBody>
+      </p:sp>
+      <p:sp>
+        <p:nvSpPr>
+          <p:cNvPr id="11" name="Text 9"/>
+          <p:cNvSpPr/>
+          <p:nvPr/>
+        </p:nvSpPr>
+        <p:spPr>
+          <a:xfrm>
+            <a:off x="704088" y="2331720"/>
+            <a:ext cx="6501384" cy="3813048"/>
+          </a:xfrm>
+          <a:prstGeom prst="rect">
+            <a:avLst/>
+          </a:prstGeom>
+          <a:noFill/>
+          <a:ln/>
+        </p:spPr>
+        <p:txBody>
+          <a:bodyPr wrap="square" lIns="0" tIns="0" rIns="0" bIns="0" rtlCol="0" anchor="t"/>
+          <a:lstStyle/>
+          <a:p>
+            <a:pPr marL="0" indent="0">
+              <a:lnSpc>
+                <a:spcPct val="103000"/>
+              </a:lnSpc>
+              <a:buNone/>
+            </a:pPr>
+            <a:r>
+              <a:rPr lang="en-US" sz="1050" b="1" dirty="0">
+                <a:solidFill>
+                  <a:srgbClr val="2E6BB8"/>
+                </a:solidFill>
+                <a:latin typeface="Meiryo" pitchFamily="34" charset="0"/>
+                <a:ea typeface="Meiryo" pitchFamily="34" charset="-122"/>
+                <a:cs typeface="Meiryo" pitchFamily="34" charset="-120"/>
+              </a:rPr>
+              <a:t>▶</a:t>
+            </a:r>
+            <a:r>
+              <a:rPr lang="en-US" sz="1050" b="1" dirty="0">
+                <a:solidFill>
+                  <a:srgbClr val="222222"/>
+                </a:solidFill>
+                <a:latin typeface="Meiryo" pitchFamily="34" charset="0"/>
+                <a:ea typeface="Meiryo" pitchFamily="34" charset="-122"/>
+                <a:cs typeface="Meiryo" pitchFamily="34" charset="-120"/>
+              </a:rPr>
+              <a:t>対象：</a:t>
+            </a:r>
+            <a:r>
+              <a:rPr lang="en-US" sz="1050" dirty="0">
+                <a:solidFill>
+                  <a:srgbClr val="222222"/>
+                </a:solidFill>
+                <a:latin typeface="Meiryo" pitchFamily="34" charset="0"/>
+                <a:ea typeface="Meiryo" pitchFamily="34" charset="-122"/>
+                <a:cs typeface="Meiryo" pitchFamily="34" charset="-120"/>
+              </a:rPr>
+              <a:t>未就学児（児童発達支援）</a:t>
+            </a:r>
+            <a:endParaRPr lang="en-US" sz="1050" dirty="0"/>
+          </a:p>
+          <a:p>
+            <a:pPr marL="0" indent="0">
+              <a:lnSpc>
+                <a:spcPct val="103000"/>
+              </a:lnSpc>
+              <a:buNone/>
+            </a:pPr>
+            <a:r>
+              <a:rPr lang="en-US" sz="1050" b="1" dirty="0">
+                <a:solidFill>
+                  <a:srgbClr val="2E6BB8"/>
+                </a:solidFill>
+                <a:latin typeface="Meiryo" pitchFamily="34" charset="0"/>
+                <a:ea typeface="Meiryo" pitchFamily="34" charset="-122"/>
+                <a:cs typeface="Meiryo" pitchFamily="34" charset="-120"/>
+              </a:rPr>
+              <a:t>▶</a:t>
+            </a:r>
+            <a:r>
+              <a:rPr lang="en-US" sz="1050" b="1" dirty="0">
+                <a:solidFill>
+                  <a:srgbClr val="222222"/>
+                </a:solidFill>
+                <a:latin typeface="Meiryo" pitchFamily="34" charset="0"/>
+                <a:ea typeface="Meiryo" pitchFamily="34" charset="-122"/>
+                <a:cs typeface="Meiryo" pitchFamily="34" charset="-120"/>
+              </a:rPr>
+              <a:t>住所：</a:t>
+            </a:r>
+            <a:r>
+              <a:rPr lang="en-US" sz="1050" dirty="0">
+                <a:solidFill>
+                  <a:srgbClr val="222222"/>
+                </a:solidFill>
+                <a:latin typeface="Meiryo" pitchFamily="34" charset="0"/>
+                <a:ea typeface="Meiryo" pitchFamily="34" charset="-122"/>
+                <a:cs typeface="Meiryo" pitchFamily="34" charset="-120"/>
+              </a:rPr>
+              <a:t>千葉県東金市家之子1671-36</a:t>
+            </a:r>
+            <a:endParaRPr lang="en-US" sz="1050" dirty="0"/>
+          </a:p>
+          <a:p>
+            <a:pPr marL="0" indent="0">
+              <a:lnSpc>
+                <a:spcPct val="103000"/>
+              </a:lnSpc>
+              <a:buNone/>
+            </a:pPr>
+            <a:r>
+              <a:rPr lang="en-US" sz="1050" b="1" dirty="0">
+                <a:solidFill>
+                  <a:srgbClr val="2E6BB8"/>
+                </a:solidFill>
+                <a:latin typeface="Meiryo" pitchFamily="34" charset="0"/>
+                <a:ea typeface="Meiryo" pitchFamily="34" charset="-122"/>
+                <a:cs typeface="Meiryo" pitchFamily="34" charset="-120"/>
+              </a:rPr>
+              <a:t>▶</a:t>
+            </a:r>
+            <a:r>
+              <a:rPr lang="en-US" sz="1050" b="1" dirty="0">
+                <a:solidFill>
+                  <a:srgbClr val="222222"/>
+                </a:solidFill>
+                <a:latin typeface="Meiryo" pitchFamily="34" charset="0"/>
+                <a:ea typeface="Meiryo" pitchFamily="34" charset="-122"/>
+                <a:cs typeface="Meiryo" pitchFamily="34" charset="-120"/>
+              </a:rPr>
+              <a:t>TEL／HP：</a:t>
+            </a:r>
+            <a:r>
+              <a:rPr lang="en-US" sz="1050" dirty="0">
+                <a:solidFill>
+                  <a:srgbClr val="222222"/>
+                </a:solidFill>
+                <a:latin typeface="Meiryo" pitchFamily="34" charset="0"/>
+                <a:ea typeface="Meiryo" pitchFamily="34" charset="-122"/>
+                <a:cs typeface="Meiryo" pitchFamily="34" charset="-120"/>
+              </a:rPr>
+              <a:t>要確認（公開情報に記載なし）</a:t>
+            </a:r>
+            <a:endParaRPr lang="en-US" sz="1050" dirty="0"/>
+          </a:p>
+          <a:p>
+            <a:pPr marL="0" indent="0">
+              <a:lnSpc>
+                <a:spcPct val="103000"/>
+              </a:lnSpc>
+              <a:buNone/>
+            </a:pPr>
+            <a:r>
+              <a:rPr lang="en-US" sz="1050" b="1" dirty="0">
+                <a:solidFill>
+                  <a:srgbClr val="2E6BB8"/>
+                </a:solidFill>
+                <a:latin typeface="Meiryo" pitchFamily="34" charset="0"/>
+                <a:ea typeface="Meiryo" pitchFamily="34" charset="-122"/>
+                <a:cs typeface="Meiryo" pitchFamily="34" charset="-120"/>
+              </a:rPr>
+              <a:t>▶</a:t>
+            </a:r>
+            <a:r>
+              <a:rPr lang="en-US" sz="1050" b="1" dirty="0">
+                <a:solidFill>
+                  <a:srgbClr val="222222"/>
+                </a:solidFill>
+                <a:latin typeface="Meiryo" pitchFamily="34" charset="0"/>
+                <a:ea typeface="Meiryo" pitchFamily="34" charset="-122"/>
+                <a:cs typeface="Meiryo" pitchFamily="34" charset="-120"/>
+              </a:rPr>
+              <a:t>サービス提供時間／定員：</a:t>
+            </a:r>
+            <a:r>
+              <a:rPr lang="en-US" sz="1050" dirty="0">
+                <a:solidFill>
+                  <a:srgbClr val="222222"/>
+                </a:solidFill>
+                <a:latin typeface="Meiryo" pitchFamily="34" charset="0"/>
+                <a:ea typeface="Meiryo" pitchFamily="34" charset="-122"/>
+                <a:cs typeface="Meiryo" pitchFamily="34" charset="-120"/>
+              </a:rPr>
+              <a:t>いずれも要確認</a:t>
+            </a:r>
+            <a:endParaRPr lang="en-US" sz="1050" dirty="0"/>
+          </a:p>
+          <a:p>
+            <a:pPr marL="0" indent="0">
+              <a:lnSpc>
+                <a:spcPct val="103000"/>
+              </a:lnSpc>
+              <a:spcAft>
+                <a:spcPts val="500"/>
+              </a:spcAft>
+              <a:buNone/>
+            </a:pPr>
+            <a:endParaRPr lang="en-US" sz="1050" dirty="0"/>
+          </a:p>
+          <a:p>
+            <a:pPr marL="0" indent="0">
+              <a:lnSpc>
+                <a:spcPct val="103000"/>
+              </a:lnSpc>
+              <a:buNone/>
+            </a:pPr>
+            <a:r>
+              <a:rPr lang="en-US" sz="1050" b="1" dirty="0">
+                <a:solidFill>
+                  <a:srgbClr val="2E6BB8"/>
+                </a:solidFill>
+                <a:latin typeface="Meiryo" pitchFamily="34" charset="0"/>
+                <a:ea typeface="Meiryo" pitchFamily="34" charset="-122"/>
+                <a:cs typeface="Meiryo" pitchFamily="34" charset="-120"/>
+              </a:rPr>
+              <a:t>▶</a:t>
+            </a:r>
+            <a:r>
+              <a:rPr lang="en-US" sz="1050" b="1" dirty="0">
+                <a:solidFill>
+                  <a:srgbClr val="222222"/>
+                </a:solidFill>
+                <a:latin typeface="Meiryo" pitchFamily="34" charset="0"/>
+                <a:ea typeface="Meiryo" pitchFamily="34" charset="-122"/>
+                <a:cs typeface="Meiryo" pitchFamily="34" charset="-120"/>
+              </a:rPr>
+              <a:t>療育プログラムの特徴：</a:t>
+            </a:r>
+            <a:r>
+              <a:rPr lang="en-US" sz="1050" dirty="0">
+                <a:solidFill>
+                  <a:srgbClr val="222222"/>
+                </a:solidFill>
+                <a:latin typeface="Meiryo" pitchFamily="34" charset="0"/>
+                <a:ea typeface="Meiryo" pitchFamily="34" charset="-122"/>
+                <a:cs typeface="Meiryo" pitchFamily="34" charset="-120"/>
+              </a:rPr>
+              <a:t>保育所を母体とする児童発達支援。保育の場と療育の場が同一施設にある併設型。</a:t>
+            </a:r>
+            <a:endParaRPr lang="en-US" sz="1050" dirty="0"/>
+          </a:p>
+          <a:p>
+            <a:pPr marL="0" indent="0">
+              <a:lnSpc>
+                <a:spcPct val="103000"/>
+              </a:lnSpc>
+              <a:spcAft>
+                <a:spcPts val="500"/>
+              </a:spcAft>
+              <a:buNone/>
+            </a:pPr>
+            <a:r>
+              <a:rPr lang="en-US" sz="1050" dirty="0">
+                <a:solidFill>
+                  <a:srgbClr val="222222"/>
+                </a:solidFill>
+                <a:latin typeface="Meiryo" pitchFamily="34" charset="0"/>
+                <a:ea typeface="Meiryo" pitchFamily="34" charset="-122"/>
+                <a:cs typeface="Meiryo" pitchFamily="34" charset="-120"/>
+              </a:rPr>
+              <a:t>・市および発達支援施設検索サイトの児童発達支援事業所一覧に掲載されている。</a:t>
+            </a:r>
+            <a:endParaRPr lang="en-US" sz="1050" dirty="0"/>
+          </a:p>
+          <a:p>
+            <a:pPr marL="0" indent="0">
+              <a:lnSpc>
+                <a:spcPct val="103000"/>
+              </a:lnSpc>
+              <a:spcAft>
+                <a:spcPts val="500"/>
+              </a:spcAft>
+              <a:buNone/>
+            </a:pPr>
+            <a:r>
+              <a:rPr lang="en-US" sz="1050" dirty="0">
+                <a:solidFill>
+                  <a:srgbClr val="222222"/>
+                </a:solidFill>
+                <a:latin typeface="Meiryo" pitchFamily="34" charset="0"/>
+                <a:ea typeface="Meiryo" pitchFamily="34" charset="-122"/>
+                <a:cs typeface="Meiryo" pitchFamily="34" charset="-120"/>
+              </a:rPr>
+              <a:t>・Web上の公開情報は極めて限定的で、支援プログラムの詳細は現地・電話での確認が必要。</a:t>
+            </a:r>
+            <a:endParaRPr lang="en-US" sz="1050" dirty="0"/>
+          </a:p>
+          <a:p>
+            <a:pPr marL="0" indent="0">
+              <a:lnSpc>
+                <a:spcPct val="103000"/>
+              </a:lnSpc>
+              <a:spcAft>
+                <a:spcPts val="500"/>
+              </a:spcAft>
+              <a:buNone/>
+            </a:pPr>
+            <a:endParaRPr lang="en-US" sz="1050" dirty="0"/>
+          </a:p>
+          <a:p>
+            <a:pPr marL="0" indent="0">
+              <a:lnSpc>
+                <a:spcPct val="103000"/>
+              </a:lnSpc>
+              <a:buNone/>
+            </a:pPr>
+            <a:r>
+              <a:rPr lang="en-US" sz="1050" b="1" dirty="0">
+                <a:solidFill>
+                  <a:srgbClr val="2E6BB8"/>
+                </a:solidFill>
+                <a:latin typeface="Meiryo" pitchFamily="34" charset="0"/>
+                <a:ea typeface="Meiryo" pitchFamily="34" charset="-122"/>
+                <a:cs typeface="Meiryo" pitchFamily="34" charset="-120"/>
+              </a:rPr>
+              <a:t>▶</a:t>
+            </a:r>
+            <a:r>
+              <a:rPr lang="en-US" sz="1050" b="1" dirty="0">
+                <a:solidFill>
+                  <a:srgbClr val="222222"/>
+                </a:solidFill>
+                <a:latin typeface="Meiryo" pitchFamily="34" charset="0"/>
+                <a:ea typeface="Meiryo" pitchFamily="34" charset="-122"/>
+                <a:cs typeface="Meiryo" pitchFamily="34" charset="-120"/>
+              </a:rPr>
+              <a:t>出典：</a:t>
+            </a:r>
+            <a:r>
+              <a:rPr lang="en-US" sz="1050" dirty="0">
+                <a:solidFill>
+                  <a:srgbClr val="222222"/>
+                </a:solidFill>
+                <a:latin typeface="Meiryo" pitchFamily="34" charset="0"/>
+                <a:ea typeface="Meiryo" pitchFamily="34" charset="-122"/>
+                <a:cs typeface="Meiryo" pitchFamily="34" charset="-120"/>
+              </a:rPr>
+              <a:t>東金市公式サイト／LITALICO発達ナビ 東金市 児童発達支援事業所一覧</a:t>
+            </a:r>
+            <a:endParaRPr lang="en-US" sz="1050" dirty="0"/>
+          </a:p>
+          <a:p>
+            <a:pPr marL="0" indent="0">
+              <a:lnSpc>
+                <a:spcPct val="103000"/>
+              </a:lnSpc>
+              <a:buNone/>
+            </a:pPr>
+            <a:r>
+              <a:rPr lang="en-US" sz="1050" b="1" dirty="0">
+                <a:solidFill>
+                  <a:srgbClr val="2E6BB8"/>
+                </a:solidFill>
+                <a:latin typeface="Meiryo" pitchFamily="34" charset="0"/>
+                <a:ea typeface="Meiryo" pitchFamily="34" charset="-122"/>
+                <a:cs typeface="Meiryo" pitchFamily="34" charset="-120"/>
+              </a:rPr>
+              <a:t>▶</a:t>
+            </a:r>
+            <a:r>
+              <a:rPr lang="en-US" sz="1050" b="1" dirty="0">
+                <a:solidFill>
+                  <a:srgbClr val="222222"/>
+                </a:solidFill>
+                <a:latin typeface="Meiryo" pitchFamily="34" charset="0"/>
+                <a:ea typeface="Meiryo" pitchFamily="34" charset="-122"/>
+                <a:cs typeface="Meiryo" pitchFamily="34" charset="-120"/>
+              </a:rPr>
+              <a:t>要確認事項：</a:t>
+            </a:r>
+            <a:r>
+              <a:rPr lang="en-US" sz="1050" dirty="0">
+                <a:solidFill>
+                  <a:srgbClr val="222222"/>
+                </a:solidFill>
+                <a:latin typeface="Meiryo" pitchFamily="34" charset="0"/>
+                <a:ea typeface="Meiryo" pitchFamily="34" charset="-122"/>
+                <a:cs typeface="Meiryo" pitchFamily="34" charset="-120"/>
+              </a:rPr>
+              <a:t>運営法人、電話番号、定員、提供時間、母体となる保育所との関係　※公開情報がほぼ無い</a:t>
+            </a:r>
+            <a:endParaRPr lang="en-US" sz="1050" dirty="0"/>
+          </a:p>
+        </p:txBody>
+      </p:sp>
+      <p:sp>
+        <p:nvSpPr>
+          <p:cNvPr id="13" name="Text 11"/>
+          <p:cNvSpPr/>
+          <p:nvPr/>
+        </p:nvSpPr>
+        <p:spPr>
+          <a:xfrm>
+            <a:off x="7635240" y="1783080"/>
+            <a:ext cx="4069080" cy="2148840"/>
+          </a:xfrm>
+          <a:prstGeom prst="rect">
+            <a:avLst/>
+          </a:prstGeom>
+          <a:solidFill>
+            <a:srgbClr val="F4F6FA"/>
+          </a:solidFill>
+          <a:ln w="12700">
+            <a:solidFill>
+              <a:srgbClr val="9AA7B8"/>
+            </a:solidFill>
+            <a:prstDash val="dash"/>
+          </a:ln>
+        </p:spPr>
+        <p:txBody>
+          <a:bodyPr wrap="square" lIns="91440" tIns="45720" rIns="91440" bIns="45720" rtlCol="0" anchor="ctr"/>
+          <a:lstStyle/>
+          <a:p>
+            <a:pPr marL="0" indent="0" algn="ctr">
+              <a:lnSpc>
+                <a:spcPct val="110000"/>
+              </a:lnSpc>
+              <a:buNone/>
+            </a:pPr>
+            <a:r>
+              <a:rPr lang="en-US" sz="1200" b="1" dirty="0">
+                <a:solidFill>
+                  <a:srgbClr val="8A99AD"/>
+                </a:solidFill>
+                <a:latin typeface="Meiryo" pitchFamily="34" charset="0"/>
+                <a:ea typeface="Meiryo" pitchFamily="34" charset="-122"/>
+                <a:cs typeface="Meiryo" pitchFamily="34" charset="-120"/>
+              </a:rPr>
+              <a:t>［ 写真挿入エリア ］</a:t>
+            </a:r>
+            <a:endParaRPr lang="en-US" sz="1200" dirty="0"/>
+          </a:p>
+          <a:p>
+            <a:pPr marL="0" indent="0" algn="ctr">
+              <a:lnSpc>
+                <a:spcPct val="110000"/>
+              </a:lnSpc>
+              <a:buNone/>
+            </a:pPr>
+            <a:r>
+              <a:rPr lang="en-US" sz="950" dirty="0">
+                <a:solidFill>
+                  <a:srgbClr val="97A4B6"/>
+                </a:solidFill>
+                <a:latin typeface="Meiryo" pitchFamily="34" charset="0"/>
+                <a:ea typeface="Meiryo" pitchFamily="34" charset="-122"/>
+                <a:cs typeface="Meiryo" pitchFamily="34" charset="-120"/>
+              </a:rPr>
+              <a:t>（LITALICO発達ナビ／東金市公式の施設外観・保育室の写真を挿入）</a:t>
+            </a:r>
+            <a:endParaRPr lang="en-US" sz="1200" dirty="0"/>
+          </a:p>
+        </p:txBody>
+      </p:sp>
+      <p:sp>
+        <p:nvSpPr>
+          <p:cNvPr id="14" name="Shape 12"/>
+          <p:cNvSpPr/>
+          <p:nvPr/>
+        </p:nvSpPr>
+        <p:spPr>
+          <a:xfrm>
+            <a:off x="7635240" y="4069080"/>
+            <a:ext cx="4069080" cy="2148840"/>
+          </a:xfrm>
+          <a:prstGeom prst="rect">
+            <a:avLst/>
+          </a:prstGeom>
+          <a:solidFill>
+            <a:srgbClr val="EEF2F8"/>
+          </a:solidFill>
+          <a:ln w="12700">
+            <a:solidFill>
+              <a:srgbClr val="9AA7B8"/>
+            </a:solidFill>
+            <a:prstDash val="solid"/>
+          </a:ln>
+        </p:spPr>
+      </p:sp>
+      <p:sp>
+        <p:nvSpPr>
+          <p:cNvPr id="15" name="Text 13"/>
+          <p:cNvSpPr/>
+          <p:nvPr/>
+        </p:nvSpPr>
+        <p:spPr>
+          <a:xfrm>
+            <a:off x="7818120" y="4187952"/>
+            <a:ext cx="3703320" cy="320040"/>
+          </a:xfrm>
+          <a:prstGeom prst="rect">
+            <a:avLst/>
+          </a:prstGeom>
+          <a:noFill/>
+          <a:ln/>
+        </p:spPr>
+        <p:txBody>
+          <a:bodyPr wrap="square" lIns="0" tIns="0" rIns="0" bIns="0" rtlCol="0" anchor="ctr"/>
+          <a:lstStyle/>
+          <a:p>
+            <a:pPr marL="0" indent="0">
+              <a:buNone/>
+            </a:pPr>
+            <a:r>
+              <a:rPr lang="en-US" sz="1250" b="1" dirty="0">
+                <a:solidFill>
+                  <a:srgbClr val="1B3A6B"/>
+                </a:solidFill>
+                <a:latin typeface="Meiryo" pitchFamily="34" charset="0"/>
+                <a:ea typeface="Meiryo" pitchFamily="34" charset="-122"/>
+                <a:cs typeface="Meiryo" pitchFamily="34" charset="-120"/>
+              </a:rPr>
+              <a:t>注目ポイント</a:t>
+            </a:r>
+            <a:endParaRPr lang="en-US" sz="1250" dirty="0"/>
+          </a:p>
+        </p:txBody>
+      </p:sp>
+      <p:sp>
+        <p:nvSpPr>
+          <p:cNvPr id="16" name="Text 14"/>
+          <p:cNvSpPr/>
+          <p:nvPr/>
+        </p:nvSpPr>
+        <p:spPr>
+          <a:xfrm>
+            <a:off x="7818120" y="4553712"/>
+            <a:ext cx="3703320" cy="1554480"/>
+          </a:xfrm>
+          <a:prstGeom prst="rect">
+            <a:avLst/>
+          </a:prstGeom>
+          <a:noFill/>
+          <a:ln/>
+        </p:spPr>
+        <p:txBody>
+          <a:bodyPr wrap="square" lIns="0" tIns="0" rIns="0" bIns="0" rtlCol="0" anchor="t"/>
+          <a:lstStyle/>
+          <a:p>
+            <a:pPr marL="342900" indent="-342900">
+              <a:spcAft>
+                <a:spcPts val="700"/>
+              </a:spcAft>
+              <a:buSzPct val="100000"/>
+              <a:buChar char="•"/>
+            </a:pPr>
+            <a:r>
+              <a:rPr lang="en-US" sz="950" dirty="0">
+                <a:solidFill>
+                  <a:srgbClr val="222222"/>
+                </a:solidFill>
+                <a:latin typeface="メイリオ" panose="020B0604030504040204" pitchFamily="50" charset="-128"/>
+                <a:ea typeface="メイリオ" panose="020B0604030504040204" pitchFamily="50" charset="-128"/>
+                <a:cs typeface="Meiryo" pitchFamily="34" charset="-120"/>
+              </a:rPr>
+              <a:t>市街地から離れた家之子地区（市北部）に立地し、周辺の事業所空白地帯をカバー。</a:t>
+            </a:r>
+            <a:endParaRPr lang="en-US" sz="1000" dirty="0">
+              <a:latin typeface="メイリオ" panose="020B0604030504040204" pitchFamily="50" charset="-128"/>
+              <a:ea typeface="メイリオ" panose="020B0604030504040204" pitchFamily="50" charset="-128"/>
+            </a:endParaRPr>
+          </a:p>
+          <a:p>
+            <a:pPr marL="342900" indent="-342900">
+              <a:spcAft>
+                <a:spcPts val="700"/>
+              </a:spcAft>
+              <a:buSzPct val="100000"/>
+              <a:buChar char="•"/>
+            </a:pPr>
+            <a:r>
+              <a:rPr lang="en-US" sz="950" dirty="0">
+                <a:solidFill>
+                  <a:srgbClr val="222222"/>
+                </a:solidFill>
+                <a:latin typeface="メイリオ" panose="020B0604030504040204" pitchFamily="50" charset="-128"/>
+                <a:ea typeface="メイリオ" panose="020B0604030504040204" pitchFamily="50" charset="-128"/>
+                <a:cs typeface="Meiryo" pitchFamily="34" charset="-120"/>
+              </a:rPr>
+              <a:t>保育所併設型は市内で唯一。定型発達児との日常的な交流が可能な環境が構造的な強み。</a:t>
+            </a:r>
+            <a:endParaRPr lang="en-US" sz="1000" dirty="0">
+              <a:latin typeface="メイリオ" panose="020B0604030504040204" pitchFamily="50" charset="-128"/>
+              <a:ea typeface="メイリオ" panose="020B0604030504040204" pitchFamily="50" charset="-128"/>
+            </a:endParaRPr>
+          </a:p>
+          <a:p>
+            <a:pPr marL="342900" indent="-342900">
+              <a:spcAft>
+                <a:spcPts val="700"/>
+              </a:spcAft>
+              <a:buSzPct val="100000"/>
+              <a:buChar char="•"/>
+            </a:pPr>
+            <a:r>
+              <a:rPr lang="en-US" sz="950" dirty="0">
+                <a:solidFill>
+                  <a:srgbClr val="222222"/>
+                </a:solidFill>
+                <a:latin typeface="メイリオ" panose="020B0604030504040204" pitchFamily="50" charset="-128"/>
+                <a:ea typeface="メイリオ" panose="020B0604030504040204" pitchFamily="50" charset="-128"/>
+                <a:cs typeface="Meiryo" pitchFamily="34" charset="-120"/>
+              </a:rPr>
+              <a:t>情報発信がほぼ無く、稼働状況・空き枠の把握には直接ヒアリングが必須。</a:t>
+            </a:r>
+            <a:endParaRPr lang="en-US" sz="1000" dirty="0">
+              <a:latin typeface="メイリオ" panose="020B0604030504040204" pitchFamily="50" charset="-128"/>
+              <a:ea typeface="メイリオ" panose="020B0604030504040204" pitchFamily="50" charset="-128"/>
+            </a:endParaRPr>
+          </a:p>
+          <a:p>
+            <a:pPr marL="342900" indent="-342900">
+              <a:spcAft>
+                <a:spcPts val="700"/>
+              </a:spcAft>
+              <a:buSzPct val="100000"/>
+              <a:buChar char="•"/>
+            </a:pPr>
+            <a:r>
+              <a:rPr lang="en-US" sz="950" dirty="0">
+                <a:solidFill>
+                  <a:srgbClr val="222222"/>
+                </a:solidFill>
+                <a:latin typeface="メイリオ" panose="020B0604030504040204" pitchFamily="50" charset="-128"/>
+                <a:ea typeface="メイリオ" panose="020B0604030504040204" pitchFamily="50" charset="-128"/>
+                <a:cs typeface="Meiryo" pitchFamily="34" charset="-120"/>
+              </a:rPr>
+              <a:t>市北部（家之子・丘山方面）は事業所が少なく、送迎圏として狙える余地がある。</a:t>
+            </a:r>
+            <a:endParaRPr lang="en-US" sz="1000" dirty="0">
+              <a:latin typeface="メイリオ" panose="020B0604030504040204" pitchFamily="50" charset="-128"/>
+              <a:ea typeface="メイリオ" panose="020B0604030504040204" pitchFamily="50" charset="-128"/>
+            </a:endParaRPr>
+          </a:p>
+        </p:txBody>
+      </p:sp>
+    </p:spTree>
+  </p:cSld>
+  <p:clrMapOvr>
+    <a:masterClrMapping/>
+  </p:clrMapOvr>
+</p:sld>
+</file>
+
+<file path=ppt/slides/slide12.xml><?xml version="1.0" encoding="utf-8"?>
+<p:sld xmlns:a="http://schemas.openxmlformats.org/drawingml/2006/main" xmlns:r="http://schemas.openxmlformats.org/officeDocument/2006/relationships" xmlns:p="http://schemas.openxmlformats.org/presentationml/2006/main">
+  <p:cSld name="Slide 3">
+    <p:bg>
+      <p:bgPr>
+        <a:solidFill>
+          <a:srgbClr val="FFFFFF"/>
+        </a:solidFill>
+        <a:effectLst/>
+      </p:bgPr>
+    </p:bg>
+    <p:spTree>
+      <p:nvGrpSpPr>
+        <p:cNvPr id="1" name=""/>
+        <p:cNvGrpSpPr/>
+        <p:nvPr/>
+      </p:nvGrpSpPr>
+      <p:grpSpPr>
+        <a:xfrm>
+          <a:off x="0" y="0"/>
+          <a:ext cx="0" cy="0"/>
+          <a:chOff x="0" y="0"/>
+          <a:chExt cx="0" cy="0"/>
+        </a:xfrm>
+      </p:grpSpPr>
+      <p:sp>
+        <p:nvSpPr>
+          <p:cNvPr id="2" name="Shape 0"/>
+          <p:cNvSpPr/>
+          <p:nvPr/>
+        </p:nvSpPr>
+        <p:spPr>
+          <a:xfrm>
+            <a:off x="0" y="0"/>
+            <a:ext cx="12188952" cy="932688"/>
+          </a:xfrm>
+          <a:prstGeom prst="rect">
+            <a:avLst/>
+          </a:prstGeom>
+          <a:solidFill>
+            <a:srgbClr val="1B3A6B"/>
+          </a:solidFill>
+          <a:ln/>
+        </p:spPr>
+      </p:sp>
+      <p:sp>
+        <p:nvSpPr>
+          <p:cNvPr id="3" name="Shape 1"/>
+          <p:cNvSpPr/>
+          <p:nvPr/>
+        </p:nvSpPr>
+        <p:spPr>
+          <a:xfrm>
+            <a:off x="0" y="0"/>
+            <a:ext cx="164592" cy="932688"/>
+          </a:xfrm>
+          <a:prstGeom prst="rect">
+            <a:avLst/>
+          </a:prstGeom>
+          <a:solidFill>
+            <a:srgbClr val="13294B"/>
+          </a:solidFill>
+          <a:ln/>
+        </p:spPr>
+      </p:sp>
+      <p:sp>
+        <p:nvSpPr>
+          <p:cNvPr id="4" name="Text 2"/>
+          <p:cNvSpPr/>
+          <p:nvPr/>
+        </p:nvSpPr>
+        <p:spPr>
+          <a:xfrm>
+            <a:off x="502920" y="54864"/>
+            <a:ext cx="8686800" cy="822960"/>
+          </a:xfrm>
+          <a:prstGeom prst="rect">
+            <a:avLst/>
+          </a:prstGeom>
+          <a:noFill/>
+          <a:ln/>
+        </p:spPr>
+        <p:txBody>
+          <a:bodyPr wrap="square" lIns="0" tIns="0" rIns="0" bIns="0" rtlCol="0" anchor="ctr"/>
+          <a:lstStyle/>
+          <a:p>
+            <a:pPr marL="0" indent="0">
+              <a:buNone/>
+            </a:pPr>
+            <a:r>
+              <a:rPr lang="en-US" sz="3000" b="1" dirty="0">
+                <a:solidFill>
+                  <a:srgbClr val="FFFFFF"/>
+                </a:solidFill>
+                <a:latin typeface="Meiryo" pitchFamily="34" charset="0"/>
+                <a:ea typeface="Meiryo" pitchFamily="34" charset="-122"/>
+                <a:cs typeface="Meiryo" pitchFamily="34" charset="-120"/>
+              </a:rPr>
+              <a:t>II．　事業所別 詳細</a:t>
+            </a:r>
+            <a:endParaRPr lang="en-US" sz="3000" dirty="0"/>
+          </a:p>
+        </p:txBody>
+      </p:sp>
+      <p:sp>
+        <p:nvSpPr>
+          <p:cNvPr id="5" name="Text 3"/>
+          <p:cNvSpPr/>
+          <p:nvPr/>
+        </p:nvSpPr>
+        <p:spPr>
+          <a:xfrm>
+            <a:off x="502920" y="1115568"/>
+            <a:ext cx="8503920" cy="457200"/>
+          </a:xfrm>
+          <a:prstGeom prst="rect">
+            <a:avLst/>
+          </a:prstGeom>
+          <a:noFill/>
+          <a:ln/>
+        </p:spPr>
+        <p:txBody>
+          <a:bodyPr wrap="square" lIns="0" tIns="0" rIns="0" bIns="0" rtlCol="0" anchor="ctr"/>
+          <a:lstStyle/>
+          <a:p>
+            <a:pPr marL="0" indent="0">
+              <a:buNone/>
+            </a:pPr>
+            <a:r>
+              <a:rPr lang="en-US" sz="2100" b="1" dirty="0">
+                <a:solidFill>
+                  <a:srgbClr val="222222"/>
+                </a:solidFill>
+                <a:latin typeface="Meiryo" pitchFamily="34" charset="0"/>
+                <a:ea typeface="Meiryo" pitchFamily="34" charset="-122"/>
+                <a:cs typeface="Meiryo" pitchFamily="34" charset="-120"/>
+              </a:rPr>
+              <a:t>⑩ 鴇嶺の家</a:t>
+            </a:r>
+            <a:endParaRPr lang="en-US" sz="2100" dirty="0"/>
+          </a:p>
+        </p:txBody>
+      </p:sp>
+      <p:sp>
+        <p:nvSpPr>
+          <p:cNvPr id="6" name="Shape 4"/>
+          <p:cNvSpPr/>
+          <p:nvPr/>
+        </p:nvSpPr>
+        <p:spPr>
+          <a:xfrm>
+            <a:off x="10104120" y="1170432"/>
+            <a:ext cx="1600200" cy="457200"/>
+          </a:xfrm>
+          <a:prstGeom prst="rect">
+            <a:avLst/>
+          </a:prstGeom>
+          <a:solidFill>
+            <a:srgbClr val="FFFFFF"/>
+          </a:solidFill>
+          <a:ln w="15875">
+            <a:solidFill>
+              <a:srgbClr val="1B3A6B"/>
+            </a:solidFill>
+            <a:prstDash val="solid"/>
+          </a:ln>
+        </p:spPr>
+      </p:sp>
+      <p:sp>
+        <p:nvSpPr>
+          <p:cNvPr id="7" name="Text 5"/>
+          <p:cNvSpPr/>
+          <p:nvPr/>
+        </p:nvSpPr>
+        <p:spPr>
+          <a:xfrm>
+            <a:off x="10104120" y="1170432"/>
+            <a:ext cx="1600200" cy="457200"/>
+          </a:xfrm>
+          <a:prstGeom prst="rect">
+            <a:avLst/>
+          </a:prstGeom>
+          <a:noFill/>
+          <a:ln/>
+        </p:spPr>
+        <p:txBody>
+          <a:bodyPr wrap="square" lIns="0" tIns="0" rIns="0" bIns="0" rtlCol="0" anchor="ctr"/>
+          <a:lstStyle/>
+          <a:p>
+            <a:pPr marL="0" indent="0" algn="ctr">
+              <a:buNone/>
+            </a:pPr>
+            <a:r>
+              <a:rPr lang="en-US" sz="1400" b="1" dirty="0">
+                <a:solidFill>
+                  <a:srgbClr val="1B3A6B"/>
+                </a:solidFill>
+                <a:latin typeface="Meiryo" pitchFamily="34" charset="0"/>
+                <a:ea typeface="Meiryo" pitchFamily="34" charset="-122"/>
+                <a:cs typeface="Meiryo" pitchFamily="34" charset="-120"/>
+              </a:rPr>
+              <a:t>東金市</a:t>
+            </a:r>
+            <a:endParaRPr lang="en-US" sz="1400" dirty="0"/>
+          </a:p>
+        </p:txBody>
+      </p:sp>
+      <p:sp>
+        <p:nvSpPr>
+          <p:cNvPr id="8" name="Text 6"/>
+          <p:cNvSpPr/>
+          <p:nvPr/>
+        </p:nvSpPr>
+        <p:spPr>
+          <a:xfrm>
+            <a:off x="502920" y="6510528"/>
+            <a:ext cx="7315200" cy="274320"/>
+          </a:xfrm>
+          <a:prstGeom prst="rect">
+            <a:avLst/>
+          </a:prstGeom>
+          <a:noFill/>
+          <a:ln/>
+        </p:spPr>
+        <p:txBody>
+          <a:bodyPr wrap="square" lIns="0" tIns="0" rIns="0" bIns="0" rtlCol="0" anchor="ctr"/>
+          <a:lstStyle/>
+          <a:p>
+            <a:pPr marL="0" indent="0">
+              <a:buNone/>
+            </a:pPr>
+            <a:r>
+              <a:rPr lang="en-US" sz="850" dirty="0">
+                <a:solidFill>
+                  <a:srgbClr val="666666"/>
+                </a:solidFill>
+                <a:latin typeface="Meiryo" pitchFamily="34" charset="0"/>
+                <a:ea typeface="Meiryo" pitchFamily="34" charset="-122"/>
+                <a:cs typeface="Meiryo" pitchFamily="34" charset="-120"/>
+              </a:rPr>
+              <a:t>Copyright Funai Soken Group. All rights reserved.</a:t>
+            </a:r>
+            <a:endParaRPr lang="en-US" sz="850" dirty="0"/>
+          </a:p>
+        </p:txBody>
+      </p:sp>
+      <p:sp>
+        <p:nvSpPr>
+          <p:cNvPr id="9" name="Shape 7"/>
+          <p:cNvSpPr/>
+          <p:nvPr/>
+        </p:nvSpPr>
+        <p:spPr>
+          <a:xfrm>
+            <a:off x="502920" y="1783080"/>
+            <a:ext cx="6903720" cy="4434840"/>
+          </a:xfrm>
+          <a:prstGeom prst="rect">
+            <a:avLst/>
+          </a:prstGeom>
+          <a:solidFill>
+            <a:srgbClr val="FFFFFF"/>
+          </a:solidFill>
+          <a:ln w="12700">
+            <a:solidFill>
+              <a:srgbClr val="9AA7B8"/>
+            </a:solidFill>
+            <a:prstDash val="solid"/>
+          </a:ln>
+          <a:effectLst>
+            <a:outerShdw blurRad="63500" dist="25400" dir="8100000" algn="bl" rotWithShape="0">
+              <a:srgbClr val="000000">
+                <a:alpha val="12000"/>
+              </a:srgbClr>
+            </a:outerShdw>
+          </a:effectLst>
+        </p:spPr>
+      </p:sp>
+      <p:sp>
+        <p:nvSpPr>
+          <p:cNvPr id="10" name="Text 8"/>
+          <p:cNvSpPr/>
+          <p:nvPr/>
+        </p:nvSpPr>
+        <p:spPr>
+          <a:xfrm>
+            <a:off x="704088" y="1911096"/>
+            <a:ext cx="6501384" cy="384048"/>
+          </a:xfrm>
+          <a:prstGeom prst="rect">
+            <a:avLst/>
+          </a:prstGeom>
+          <a:noFill/>
+          <a:ln/>
+        </p:spPr>
+        <p:txBody>
+          <a:bodyPr wrap="square" lIns="0" tIns="0" rIns="0" bIns="0" rtlCol="0" anchor="ctr"/>
+          <a:lstStyle/>
+          <a:p>
+            <a:pPr marL="0" indent="0">
+              <a:buNone/>
+            </a:pPr>
+            <a:r>
+              <a:rPr lang="en-US" sz="1400" b="1" dirty="0">
+                <a:solidFill>
+                  <a:srgbClr val="1B3A6B"/>
+                </a:solidFill>
+                <a:latin typeface="Meiryo" pitchFamily="34" charset="0"/>
+                <a:ea typeface="Meiryo" pitchFamily="34" charset="-122"/>
+                <a:cs typeface="Meiryo" pitchFamily="34" charset="-120"/>
+              </a:rPr>
+              <a:t>鴇嶺の家（児童発達支援・放課後等デイサービス）</a:t>
+            </a:r>
+            <a:endParaRPr lang="en-US" sz="1400" dirty="0"/>
+          </a:p>
+        </p:txBody>
+      </p:sp>
+      <p:sp>
+        <p:nvSpPr>
+          <p:cNvPr id="11" name="Text 9"/>
+          <p:cNvSpPr/>
+          <p:nvPr/>
+        </p:nvSpPr>
+        <p:spPr>
+          <a:xfrm>
+            <a:off x="704088" y="2331720"/>
+            <a:ext cx="6501384" cy="3813048"/>
+          </a:xfrm>
+          <a:prstGeom prst="rect">
+            <a:avLst/>
+          </a:prstGeom>
+          <a:noFill/>
+          <a:ln/>
+        </p:spPr>
+        <p:txBody>
+          <a:bodyPr wrap="square" lIns="0" tIns="0" rIns="0" bIns="0" rtlCol="0" anchor="t"/>
+          <a:lstStyle/>
+          <a:p>
+            <a:pPr marL="0" indent="0">
+              <a:lnSpc>
+                <a:spcPct val="103000"/>
+              </a:lnSpc>
+              <a:buNone/>
+            </a:pPr>
+            <a:r>
+              <a:rPr lang="en-US" sz="1050" b="1" dirty="0">
+                <a:solidFill>
+                  <a:srgbClr val="2E6BB8"/>
+                </a:solidFill>
+                <a:latin typeface="Meiryo" pitchFamily="34" charset="0"/>
+                <a:ea typeface="Meiryo" pitchFamily="34" charset="-122"/>
+                <a:cs typeface="Meiryo" pitchFamily="34" charset="-120"/>
+              </a:rPr>
+              <a:t>▶</a:t>
+            </a:r>
+            <a:r>
+              <a:rPr lang="en-US" sz="1050" b="1" dirty="0">
+                <a:solidFill>
+                  <a:srgbClr val="222222"/>
+                </a:solidFill>
+                <a:latin typeface="Meiryo" pitchFamily="34" charset="0"/>
+                <a:ea typeface="Meiryo" pitchFamily="34" charset="-122"/>
+                <a:cs typeface="Meiryo" pitchFamily="34" charset="-120"/>
+              </a:rPr>
+              <a:t>対象：</a:t>
+            </a:r>
+            <a:r>
+              <a:rPr lang="en-US" sz="1050" dirty="0">
+                <a:solidFill>
+                  <a:srgbClr val="222222"/>
+                </a:solidFill>
+                <a:latin typeface="Meiryo" pitchFamily="34" charset="0"/>
+                <a:ea typeface="Meiryo" pitchFamily="34" charset="-122"/>
+                <a:cs typeface="Meiryo" pitchFamily="34" charset="-120"/>
+              </a:rPr>
+              <a:t>未就学児（児童発達支援）〜就学児（放課後等デイサービス）</a:t>
+            </a:r>
+            <a:endParaRPr lang="en-US" sz="1050" dirty="0"/>
+          </a:p>
+          <a:p>
+            <a:pPr marL="0" indent="0">
+              <a:lnSpc>
+                <a:spcPct val="103000"/>
+              </a:lnSpc>
+              <a:buNone/>
+            </a:pPr>
+            <a:r>
+              <a:rPr lang="en-US" sz="1050" b="1" dirty="0">
+                <a:solidFill>
+                  <a:srgbClr val="2E6BB8"/>
+                </a:solidFill>
+                <a:latin typeface="Meiryo" pitchFamily="34" charset="0"/>
+                <a:ea typeface="Meiryo" pitchFamily="34" charset="-122"/>
+                <a:cs typeface="Meiryo" pitchFamily="34" charset="-120"/>
+              </a:rPr>
+              <a:t>▶</a:t>
+            </a:r>
+            <a:r>
+              <a:rPr lang="en-US" sz="1050" b="1" dirty="0">
+                <a:solidFill>
+                  <a:srgbClr val="222222"/>
+                </a:solidFill>
+                <a:latin typeface="Meiryo" pitchFamily="34" charset="0"/>
+                <a:ea typeface="Meiryo" pitchFamily="34" charset="-122"/>
+                <a:cs typeface="Meiryo" pitchFamily="34" charset="-120"/>
+              </a:rPr>
+              <a:t>住所：</a:t>
+            </a:r>
+            <a:r>
+              <a:rPr lang="en-US" sz="1050" dirty="0">
+                <a:solidFill>
+                  <a:srgbClr val="222222"/>
+                </a:solidFill>
+                <a:latin typeface="Meiryo" pitchFamily="34" charset="0"/>
+                <a:ea typeface="Meiryo" pitchFamily="34" charset="-122"/>
+                <a:cs typeface="Meiryo" pitchFamily="34" charset="-120"/>
+              </a:rPr>
+              <a:t>千葉県東金市東金425-2</a:t>
+            </a:r>
+            <a:endParaRPr lang="en-US" sz="1050" dirty="0"/>
+          </a:p>
+          <a:p>
+            <a:pPr marL="0" indent="0">
+              <a:lnSpc>
+                <a:spcPct val="103000"/>
+              </a:lnSpc>
+              <a:buNone/>
+            </a:pPr>
+            <a:r>
+              <a:rPr lang="en-US" sz="1050" b="1" dirty="0">
+                <a:solidFill>
+                  <a:srgbClr val="2E6BB8"/>
+                </a:solidFill>
+                <a:latin typeface="Meiryo" pitchFamily="34" charset="0"/>
+                <a:ea typeface="Meiryo" pitchFamily="34" charset="-122"/>
+                <a:cs typeface="Meiryo" pitchFamily="34" charset="-120"/>
+              </a:rPr>
+              <a:t>▶</a:t>
+            </a:r>
+            <a:r>
+              <a:rPr lang="en-US" sz="1050" b="1" dirty="0">
+                <a:solidFill>
+                  <a:srgbClr val="222222"/>
+                </a:solidFill>
+                <a:latin typeface="Meiryo" pitchFamily="34" charset="0"/>
+                <a:ea typeface="Meiryo" pitchFamily="34" charset="-122"/>
+                <a:cs typeface="Meiryo" pitchFamily="34" charset="-120"/>
+              </a:rPr>
+              <a:t>TEL／HP：</a:t>
+            </a:r>
+            <a:r>
+              <a:rPr lang="en-US" sz="1050" dirty="0">
+                <a:solidFill>
+                  <a:srgbClr val="222222"/>
+                </a:solidFill>
+                <a:latin typeface="Meiryo" pitchFamily="34" charset="0"/>
+                <a:ea typeface="Meiryo" pitchFamily="34" charset="-122"/>
+                <a:cs typeface="Meiryo" pitchFamily="34" charset="-120"/>
+              </a:rPr>
+              <a:t>要確認（公開情報では下4桁「0285」までの記載にとどまる）／公開HPなし</a:t>
+            </a:r>
+            <a:endParaRPr lang="en-US" sz="1050" dirty="0"/>
+          </a:p>
+          <a:p>
+            <a:pPr marL="0" indent="0">
+              <a:lnSpc>
+                <a:spcPct val="103000"/>
+              </a:lnSpc>
+              <a:buNone/>
+            </a:pPr>
+            <a:r>
+              <a:rPr lang="en-US" sz="1050" b="1" dirty="0">
+                <a:solidFill>
+                  <a:srgbClr val="2E6BB8"/>
+                </a:solidFill>
+                <a:latin typeface="Meiryo" pitchFamily="34" charset="0"/>
+                <a:ea typeface="Meiryo" pitchFamily="34" charset="-122"/>
+                <a:cs typeface="Meiryo" pitchFamily="34" charset="-120"/>
+              </a:rPr>
+              <a:t>▶</a:t>
+            </a:r>
+            <a:r>
+              <a:rPr lang="en-US" sz="1050" b="1" dirty="0">
+                <a:solidFill>
+                  <a:srgbClr val="222222"/>
+                </a:solidFill>
+                <a:latin typeface="Meiryo" pitchFamily="34" charset="0"/>
+                <a:ea typeface="Meiryo" pitchFamily="34" charset="-122"/>
+                <a:cs typeface="Meiryo" pitchFamily="34" charset="-120"/>
+              </a:rPr>
+              <a:t>サービス提供時間／定員：</a:t>
+            </a:r>
+            <a:r>
+              <a:rPr lang="en-US" sz="1050" dirty="0">
+                <a:solidFill>
+                  <a:srgbClr val="222222"/>
+                </a:solidFill>
+                <a:latin typeface="Meiryo" pitchFamily="34" charset="0"/>
+                <a:ea typeface="Meiryo" pitchFamily="34" charset="-122"/>
+                <a:cs typeface="Meiryo" pitchFamily="34" charset="-120"/>
+              </a:rPr>
+              <a:t>いずれも要確認</a:t>
+            </a:r>
+            <a:endParaRPr lang="en-US" sz="1050" dirty="0"/>
+          </a:p>
+          <a:p>
+            <a:pPr marL="0" indent="0">
+              <a:lnSpc>
+                <a:spcPct val="103000"/>
+              </a:lnSpc>
+              <a:spcAft>
+                <a:spcPts val="500"/>
+              </a:spcAft>
+              <a:buNone/>
+            </a:pPr>
+            <a:endParaRPr lang="en-US" sz="1050" dirty="0"/>
+          </a:p>
+          <a:p>
+            <a:pPr marL="0" indent="0">
+              <a:lnSpc>
+                <a:spcPct val="103000"/>
+              </a:lnSpc>
+              <a:buNone/>
+            </a:pPr>
+            <a:r>
+              <a:rPr lang="en-US" sz="1050" b="1" dirty="0">
+                <a:solidFill>
+                  <a:srgbClr val="2E6BB8"/>
+                </a:solidFill>
+                <a:latin typeface="Meiryo" pitchFamily="34" charset="0"/>
+                <a:ea typeface="Meiryo" pitchFamily="34" charset="-122"/>
+                <a:cs typeface="Meiryo" pitchFamily="34" charset="-120"/>
+              </a:rPr>
+              <a:t>▶</a:t>
+            </a:r>
+            <a:r>
+              <a:rPr lang="en-US" sz="1050" b="1" dirty="0">
+                <a:solidFill>
+                  <a:srgbClr val="222222"/>
+                </a:solidFill>
+                <a:latin typeface="Meiryo" pitchFamily="34" charset="0"/>
+                <a:ea typeface="Meiryo" pitchFamily="34" charset="-122"/>
+                <a:cs typeface="Meiryo" pitchFamily="34" charset="-120"/>
+              </a:rPr>
+              <a:t>療育プログラムの特徴：</a:t>
+            </a:r>
+            <a:r>
+              <a:rPr lang="en-US" sz="1050" dirty="0">
+                <a:solidFill>
+                  <a:srgbClr val="222222"/>
+                </a:solidFill>
+                <a:latin typeface="Meiryo" pitchFamily="34" charset="0"/>
+                <a:ea typeface="Meiryo" pitchFamily="34" charset="-122"/>
+                <a:cs typeface="Meiryo" pitchFamily="34" charset="-120"/>
+              </a:rPr>
+              <a:t>児童発達支援と放課後等デイサービスを併設。プログラム内容は公開情報からは確認できず要確認。</a:t>
+            </a:r>
+            <a:endParaRPr lang="en-US" sz="1050" dirty="0"/>
+          </a:p>
+          <a:p>
+            <a:pPr marL="0" indent="0">
+              <a:lnSpc>
+                <a:spcPct val="103000"/>
+              </a:lnSpc>
+              <a:spcAft>
+                <a:spcPts val="500"/>
+              </a:spcAft>
+              <a:buNone/>
+            </a:pPr>
+            <a:r>
+              <a:rPr lang="en-US" sz="1050" dirty="0">
+                <a:solidFill>
+                  <a:srgbClr val="222222"/>
+                </a:solidFill>
+                <a:latin typeface="Meiryo" pitchFamily="34" charset="0"/>
+                <a:ea typeface="Meiryo" pitchFamily="34" charset="-122"/>
+                <a:cs typeface="Meiryo" pitchFamily="34" charset="-120"/>
+              </a:rPr>
+              <a:t>・東金地区（旧市街・鴇嶺小学校区）に立地し、学校からの通所導線が近い。</a:t>
+            </a:r>
+            <a:endParaRPr lang="en-US" sz="1050" dirty="0"/>
+          </a:p>
+          <a:p>
+            <a:pPr marL="0" indent="0">
+              <a:lnSpc>
+                <a:spcPct val="103000"/>
+              </a:lnSpc>
+              <a:spcAft>
+                <a:spcPts val="500"/>
+              </a:spcAft>
+              <a:buNone/>
+            </a:pPr>
+            <a:r>
+              <a:rPr lang="en-US" sz="1050" dirty="0">
+                <a:solidFill>
+                  <a:srgbClr val="222222"/>
+                </a:solidFill>
+                <a:latin typeface="Meiryo" pitchFamily="34" charset="0"/>
+                <a:ea typeface="Meiryo" pitchFamily="34" charset="-122"/>
+                <a:cs typeface="Meiryo" pitchFamily="34" charset="-120"/>
+              </a:rPr>
+              <a:t>・同一町域の東金723にスターワーク東金（放デイ）があり、東金駅東口エリアに事業所が集積。</a:t>
+            </a:r>
+            <a:endParaRPr lang="en-US" sz="1050" dirty="0"/>
+          </a:p>
+          <a:p>
+            <a:pPr marL="0" indent="0">
+              <a:lnSpc>
+                <a:spcPct val="103000"/>
+              </a:lnSpc>
+              <a:spcAft>
+                <a:spcPts val="500"/>
+              </a:spcAft>
+              <a:buNone/>
+            </a:pPr>
+            <a:endParaRPr lang="en-US" sz="1050" dirty="0"/>
+          </a:p>
+          <a:p>
+            <a:pPr marL="0" indent="0">
+              <a:lnSpc>
+                <a:spcPct val="103000"/>
+              </a:lnSpc>
+              <a:buNone/>
+            </a:pPr>
+            <a:r>
+              <a:rPr lang="en-US" sz="1050" b="1" dirty="0">
+                <a:solidFill>
+                  <a:srgbClr val="2E6BB8"/>
+                </a:solidFill>
+                <a:latin typeface="Meiryo" pitchFamily="34" charset="0"/>
+                <a:ea typeface="Meiryo" pitchFamily="34" charset="-122"/>
+                <a:cs typeface="Meiryo" pitchFamily="34" charset="-120"/>
+              </a:rPr>
+              <a:t>▶</a:t>
+            </a:r>
+            <a:r>
+              <a:rPr lang="en-US" sz="1050" b="1" dirty="0">
+                <a:solidFill>
+                  <a:srgbClr val="222222"/>
+                </a:solidFill>
+                <a:latin typeface="Meiryo" pitchFamily="34" charset="0"/>
+                <a:ea typeface="Meiryo" pitchFamily="34" charset="-122"/>
+                <a:cs typeface="Meiryo" pitchFamily="34" charset="-120"/>
+              </a:rPr>
+              <a:t>出典：</a:t>
+            </a:r>
+            <a:r>
+              <a:rPr lang="en-US" sz="1050" dirty="0">
+                <a:solidFill>
+                  <a:srgbClr val="222222"/>
+                </a:solidFill>
+                <a:latin typeface="Meiryo" pitchFamily="34" charset="0"/>
+                <a:ea typeface="Meiryo" pitchFamily="34" charset="-122"/>
+                <a:cs typeface="Meiryo" pitchFamily="34" charset="-120"/>
+              </a:rPr>
+              <a:t>東金市公式サイト／LITALICO発達ナビ 東金市 児童発達支援事業所一覧</a:t>
+            </a:r>
+            <a:endParaRPr lang="en-US" sz="1050" dirty="0"/>
+          </a:p>
+          <a:p>
+            <a:pPr marL="0" indent="0">
+              <a:lnSpc>
+                <a:spcPct val="103000"/>
+              </a:lnSpc>
+              <a:buNone/>
+            </a:pPr>
+            <a:r>
+              <a:rPr lang="en-US" sz="1050" b="1" dirty="0">
+                <a:solidFill>
+                  <a:srgbClr val="2E6BB8"/>
+                </a:solidFill>
+                <a:latin typeface="Meiryo" pitchFamily="34" charset="0"/>
+                <a:ea typeface="Meiryo" pitchFamily="34" charset="-122"/>
+                <a:cs typeface="Meiryo" pitchFamily="34" charset="-120"/>
+              </a:rPr>
+              <a:t>▶</a:t>
+            </a:r>
+            <a:r>
+              <a:rPr lang="en-US" sz="1050" b="1" dirty="0">
+                <a:solidFill>
+                  <a:srgbClr val="222222"/>
+                </a:solidFill>
+                <a:latin typeface="Meiryo" pitchFamily="34" charset="0"/>
+                <a:ea typeface="Meiryo" pitchFamily="34" charset="-122"/>
+                <a:cs typeface="Meiryo" pitchFamily="34" charset="-120"/>
+              </a:rPr>
+              <a:t>要確認事項：</a:t>
+            </a:r>
+            <a:r>
+              <a:rPr lang="en-US" sz="1050" dirty="0">
+                <a:solidFill>
+                  <a:srgbClr val="222222"/>
+                </a:solidFill>
+                <a:latin typeface="Meiryo" pitchFamily="34" charset="0"/>
+                <a:ea typeface="Meiryo" pitchFamily="34" charset="-122"/>
+                <a:cs typeface="Meiryo" pitchFamily="34" charset="-120"/>
+              </a:rPr>
+              <a:t>運営法人、正確な電話番号、定員、提供時間、プログラム内容　※公開情報がほぼ無い</a:t>
+            </a:r>
+            <a:endParaRPr lang="en-US" sz="1050" dirty="0"/>
+          </a:p>
+        </p:txBody>
+      </p:sp>
+      <p:sp>
+        <p:nvSpPr>
+          <p:cNvPr id="13" name="Text 11"/>
+          <p:cNvSpPr/>
+          <p:nvPr/>
+        </p:nvSpPr>
+        <p:spPr>
+          <a:xfrm>
+            <a:off x="7635240" y="1783080"/>
+            <a:ext cx="4069080" cy="2148840"/>
+          </a:xfrm>
+          <a:prstGeom prst="rect">
+            <a:avLst/>
+          </a:prstGeom>
+          <a:solidFill>
+            <a:srgbClr val="F4F6FA"/>
+          </a:solidFill>
+          <a:ln w="12700">
+            <a:solidFill>
+              <a:srgbClr val="9AA7B8"/>
+            </a:solidFill>
+            <a:prstDash val="dash"/>
+          </a:ln>
+        </p:spPr>
+        <p:txBody>
+          <a:bodyPr wrap="square" lIns="91440" tIns="45720" rIns="91440" bIns="45720" rtlCol="0" anchor="ctr"/>
+          <a:lstStyle/>
+          <a:p>
+            <a:pPr marL="0" indent="0" algn="ctr">
+              <a:lnSpc>
+                <a:spcPct val="110000"/>
+              </a:lnSpc>
+              <a:buNone/>
+            </a:pPr>
+            <a:r>
+              <a:rPr lang="en-US" sz="1200" b="1" dirty="0">
+                <a:solidFill>
+                  <a:srgbClr val="8A99AD"/>
+                </a:solidFill>
+                <a:latin typeface="Meiryo" pitchFamily="34" charset="0"/>
+                <a:ea typeface="Meiryo" pitchFamily="34" charset="-122"/>
+                <a:cs typeface="Meiryo" pitchFamily="34" charset="-120"/>
+              </a:rPr>
+              <a:t>［ 写真挿入エリア ］</a:t>
+            </a:r>
+            <a:endParaRPr lang="en-US" sz="1200" dirty="0"/>
+          </a:p>
+          <a:p>
+            <a:pPr marL="0" indent="0" algn="ctr">
+              <a:lnSpc>
+                <a:spcPct val="110000"/>
+              </a:lnSpc>
+              <a:buNone/>
+            </a:pPr>
+            <a:r>
+              <a:rPr lang="en-US" sz="950" dirty="0">
+                <a:solidFill>
+                  <a:srgbClr val="97A4B6"/>
+                </a:solidFill>
+                <a:latin typeface="Meiryo" pitchFamily="34" charset="0"/>
+                <a:ea typeface="Meiryo" pitchFamily="34" charset="-122"/>
+                <a:cs typeface="Meiryo" pitchFamily="34" charset="-120"/>
+              </a:rPr>
+              <a:t>（LITALICO発達ナビ／東金市公式の施設写真を挿入）</a:t>
+            </a:r>
+            <a:endParaRPr lang="en-US" sz="1200" dirty="0"/>
+          </a:p>
+        </p:txBody>
+      </p:sp>
+      <p:sp>
+        <p:nvSpPr>
+          <p:cNvPr id="14" name="Shape 12"/>
+          <p:cNvSpPr/>
+          <p:nvPr/>
+        </p:nvSpPr>
+        <p:spPr>
+          <a:xfrm>
+            <a:off x="7635240" y="4069080"/>
+            <a:ext cx="4069080" cy="2148840"/>
+          </a:xfrm>
+          <a:prstGeom prst="rect">
+            <a:avLst/>
+          </a:prstGeom>
+          <a:solidFill>
+            <a:srgbClr val="EEF2F8"/>
+          </a:solidFill>
+          <a:ln w="12700">
+            <a:solidFill>
+              <a:srgbClr val="9AA7B8"/>
+            </a:solidFill>
+            <a:prstDash val="solid"/>
+          </a:ln>
+        </p:spPr>
+      </p:sp>
+      <p:sp>
+        <p:nvSpPr>
+          <p:cNvPr id="15" name="Text 13"/>
+          <p:cNvSpPr/>
+          <p:nvPr/>
+        </p:nvSpPr>
+        <p:spPr>
+          <a:xfrm>
+            <a:off x="7818120" y="4187952"/>
+            <a:ext cx="3703320" cy="320040"/>
+          </a:xfrm>
+          <a:prstGeom prst="rect">
+            <a:avLst/>
+          </a:prstGeom>
+          <a:noFill/>
+          <a:ln/>
+        </p:spPr>
+        <p:txBody>
+          <a:bodyPr wrap="square" lIns="0" tIns="0" rIns="0" bIns="0" rtlCol="0" anchor="ctr"/>
+          <a:lstStyle/>
+          <a:p>
+            <a:pPr marL="0" indent="0">
+              <a:buNone/>
+            </a:pPr>
+            <a:r>
+              <a:rPr lang="en-US" sz="1250" b="1" dirty="0">
+                <a:solidFill>
+                  <a:srgbClr val="1B3A6B"/>
+                </a:solidFill>
+                <a:latin typeface="Meiryo" pitchFamily="34" charset="0"/>
+                <a:ea typeface="Meiryo" pitchFamily="34" charset="-122"/>
+                <a:cs typeface="Meiryo" pitchFamily="34" charset="-120"/>
+              </a:rPr>
+              <a:t>注目ポイント</a:t>
+            </a:r>
+            <a:endParaRPr lang="en-US" sz="1250" dirty="0"/>
+          </a:p>
+        </p:txBody>
+      </p:sp>
+      <p:sp>
+        <p:nvSpPr>
+          <p:cNvPr id="16" name="Text 14"/>
+          <p:cNvSpPr/>
+          <p:nvPr/>
+        </p:nvSpPr>
+        <p:spPr>
+          <a:xfrm>
+            <a:off x="7818120" y="4553712"/>
+            <a:ext cx="3703320" cy="1554480"/>
+          </a:xfrm>
+          <a:prstGeom prst="rect">
+            <a:avLst/>
+          </a:prstGeom>
+          <a:noFill/>
+          <a:ln/>
+        </p:spPr>
+        <p:txBody>
+          <a:bodyPr wrap="square" lIns="0" tIns="0" rIns="0" bIns="0" rtlCol="0" anchor="t"/>
+          <a:lstStyle/>
+          <a:p>
+            <a:pPr marL="342900" indent="-342900">
+              <a:spcAft>
+                <a:spcPts val="700"/>
+              </a:spcAft>
+              <a:buSzPct val="100000"/>
+              <a:buChar char="•"/>
+            </a:pPr>
+            <a:r>
+              <a:rPr lang="en-US" sz="950" dirty="0">
+                <a:solidFill>
+                  <a:srgbClr val="222222"/>
+                </a:solidFill>
+                <a:latin typeface="メイリオ" panose="020B0604030504040204" pitchFamily="50" charset="-128"/>
+                <a:ea typeface="メイリオ" panose="020B0604030504040204" pitchFamily="50" charset="-128"/>
+                <a:cs typeface="Meiryo" pitchFamily="34" charset="-120"/>
+              </a:rPr>
+              <a:t>鴇嶺小学校区の中心部に位置し、学区内からの徒歩・短距離送迎に適した立地。</a:t>
+            </a:r>
+            <a:endParaRPr lang="en-US" sz="1000" dirty="0">
+              <a:latin typeface="メイリオ" panose="020B0604030504040204" pitchFamily="50" charset="-128"/>
+              <a:ea typeface="メイリオ" panose="020B0604030504040204" pitchFamily="50" charset="-128"/>
+            </a:endParaRPr>
+          </a:p>
+          <a:p>
+            <a:pPr marL="342900" indent="-342900">
+              <a:spcAft>
+                <a:spcPts val="700"/>
+              </a:spcAft>
+              <a:buSzPct val="100000"/>
+              <a:buChar char="•"/>
+            </a:pPr>
+            <a:r>
+              <a:rPr lang="en-US" sz="950" dirty="0">
+                <a:solidFill>
+                  <a:srgbClr val="222222"/>
+                </a:solidFill>
+                <a:latin typeface="メイリオ" panose="020B0604030504040204" pitchFamily="50" charset="-128"/>
+                <a:ea typeface="メイリオ" panose="020B0604030504040204" pitchFamily="50" charset="-128"/>
+                <a:cs typeface="Meiryo" pitchFamily="34" charset="-120"/>
+              </a:rPr>
+              <a:t>東金駅東口エリアの事業所集積地にあり、競合との距離が近い。</a:t>
+            </a:r>
+            <a:endParaRPr lang="en-US" sz="1000" dirty="0">
+              <a:latin typeface="メイリオ" panose="020B0604030504040204" pitchFamily="50" charset="-128"/>
+              <a:ea typeface="メイリオ" panose="020B0604030504040204" pitchFamily="50" charset="-128"/>
+            </a:endParaRPr>
+          </a:p>
+          <a:p>
+            <a:pPr marL="342900" indent="-342900">
+              <a:spcAft>
+                <a:spcPts val="700"/>
+              </a:spcAft>
+              <a:buSzPct val="100000"/>
+              <a:buChar char="•"/>
+            </a:pPr>
+            <a:r>
+              <a:rPr lang="en-US" sz="950" dirty="0">
+                <a:solidFill>
+                  <a:srgbClr val="222222"/>
+                </a:solidFill>
+                <a:latin typeface="メイリオ" panose="020B0604030504040204" pitchFamily="50" charset="-128"/>
+                <a:ea typeface="メイリオ" panose="020B0604030504040204" pitchFamily="50" charset="-128"/>
+                <a:cs typeface="Meiryo" pitchFamily="34" charset="-120"/>
+              </a:rPr>
+              <a:t>情報発信が乏しく、実態把握は市社会福祉課・相談支援事業所経由での確認が現実的。</a:t>
+            </a:r>
+            <a:endParaRPr lang="en-US" sz="1000" dirty="0">
+              <a:latin typeface="メイリオ" panose="020B0604030504040204" pitchFamily="50" charset="-128"/>
+              <a:ea typeface="メイリオ" panose="020B0604030504040204" pitchFamily="50" charset="-128"/>
+            </a:endParaRPr>
+          </a:p>
+          <a:p>
+            <a:pPr marL="342900" indent="-342900">
+              <a:spcAft>
+                <a:spcPts val="700"/>
+              </a:spcAft>
+              <a:buSzPct val="100000"/>
+              <a:buChar char="•"/>
+            </a:pPr>
+            <a:r>
+              <a:rPr lang="en-US" sz="950" dirty="0">
+                <a:solidFill>
+                  <a:srgbClr val="222222"/>
+                </a:solidFill>
+                <a:latin typeface="メイリオ" panose="020B0604030504040204" pitchFamily="50" charset="-128"/>
+                <a:ea typeface="メイリオ" panose="020B0604030504040204" pitchFamily="50" charset="-128"/>
+                <a:cs typeface="Meiryo" pitchFamily="34" charset="-120"/>
+              </a:rPr>
+              <a:t>東金駅東口は事業所集積地。新規参入するなら駅前以外の空白地を狙うのが現実的。</a:t>
+            </a:r>
+            <a:endParaRPr lang="en-US" sz="1000" dirty="0">
+              <a:latin typeface="メイリオ" panose="020B0604030504040204" pitchFamily="50" charset="-128"/>
+              <a:ea typeface="メイリオ" panose="020B0604030504040204" pitchFamily="50" charset="-128"/>
+            </a:endParaRPr>
+          </a:p>
+        </p:txBody>
+      </p:sp>
+    </p:spTree>
+  </p:cSld>
+  <p:clrMapOvr>
+    <a:masterClrMapping/>
+  </p:clrMapOvr>
+</p:sld>
+</file>
+
+<file path=ppt/slides/slide13.xml><?xml version="1.0" encoding="utf-8"?>
 <p:sld xmlns:a="http://schemas.openxmlformats.org/drawingml/2006/main" xmlns:r="http://schemas.openxmlformats.org/officeDocument/2006/relationships" xmlns:p="http://schemas.openxmlformats.org/presentationml/2006/main">
   <p:cSld name="Slide 7">
     <p:bg>
@@ -2513,7 +4462,7 @@
                   </a:extLst>
                 </a:gridCol>
               </a:tblGrid>
-              <a:tr h="464820">
+              <a:tr h="398417">
                 <a:tc>
                   <a:txBody>
                     <a:bodyPr/>
@@ -2860,7 +4809,1335 @@
                   </a:ext>
                 </a:extLst>
               </a:tr>
-              <a:tr h="464820">
+              <a:tr h="398417">
+                <a:tc>
+                  <a:txBody>
+                    <a:bodyPr/>
+                    <a:lstStyle/>
+                    <a:p>
+                      <a:pPr marL="0" indent="0" algn="l">
+                        <a:buNone/>
+                      </a:pPr>
+                      <a:r>
+                        <a:rPr lang="en-US" sz="900" b="1" dirty="0">
+                          <a:solidFill>
+                            <a:srgbClr val="222222"/>
+                          </a:solidFill>
+                          <a:latin typeface="Meiryo" pitchFamily="34" charset="0"/>
+                          <a:ea typeface="Meiryo" pitchFamily="34" charset="-122"/>
+                          <a:cs typeface="Meiryo" pitchFamily="34" charset="-120"/>
+                        </a:rPr>
+                        <a:t>NPO法人 基本塾（基本塾優遊）</a:t>
+                      </a:r>
+                      <a:endParaRPr lang="en-US" sz="1050" dirty="0">
+                        <a:latin typeface="Meiryo" charset="0"/>
+                        <a:ea typeface="Meiryo" charset="0"/>
+                        <a:cs typeface="Meiryo" charset="0"/>
+                      </a:endParaRPr>
+                    </a:p>
+                  </a:txBody>
+                  <a:tcPr anchor="ctr" marT="18000" marB="18000" marL="64008" marR="45720">
+                    <a:lnL w="9525" cap="flat" cmpd="sng" algn="ctr">
+                      <a:solidFill>
+                        <a:srgbClr val="BFBFBF"/>
+                      </a:solidFill>
+                      <a:prstDash val="solid"/>
+                      <a:round/>
+                      <a:headEnd type="none" w="med" len="med"/>
+                      <a:tailEnd type="none" w="med" len="med"/>
+                    </a:lnL>
+                    <a:lnR w="9525" cap="flat" cmpd="sng" algn="ctr">
+                      <a:solidFill>
+                        <a:srgbClr val="BFBFBF"/>
+                      </a:solidFill>
+                      <a:prstDash val="solid"/>
+                      <a:round/>
+                      <a:headEnd type="none" w="med" len="med"/>
+                      <a:tailEnd type="none" w="med" len="med"/>
+                    </a:lnR>
+                    <a:lnT w="9525" cap="flat" cmpd="sng" algn="ctr">
+                      <a:solidFill>
+                        <a:srgbClr val="BFBFBF"/>
+                      </a:solidFill>
+                      <a:prstDash val="solid"/>
+                      <a:round/>
+                      <a:headEnd type="none" w="med" len="med"/>
+                      <a:tailEnd type="none" w="med" len="med"/>
+                    </a:lnT>
+                    <a:lnB w="9525" cap="flat" cmpd="sng" algn="ctr">
+                      <a:solidFill>
+                        <a:srgbClr val="BFBFBF"/>
+                      </a:solidFill>
+                      <a:prstDash val="solid"/>
+                      <a:round/>
+                      <a:headEnd type="none" w="med" len="med"/>
+                      <a:tailEnd type="none" w="med" len="med"/>
+                    </a:lnB>
+                  </a:tcPr>
+                </a:tc>
+                <a:tc>
+                  <a:txBody>
+                    <a:bodyPr/>
+                    <a:lstStyle/>
+                    <a:p>
+                      <a:pPr marL="0" indent="0" algn="l">
+                        <a:buNone/>
+                      </a:pPr>
+                      <a:r>
+                        <a:rPr lang="en-US" sz="900" dirty="0">
+                          <a:solidFill>
+                            <a:srgbClr val="222222"/>
+                          </a:solidFill>
+                          <a:latin typeface="Meiryo" pitchFamily="34" charset="0"/>
+                          <a:ea typeface="Meiryo" pitchFamily="34" charset="-122"/>
+                          <a:cs typeface="Meiryo" pitchFamily="34" charset="-120"/>
+                        </a:rPr>
+                        <a:t>6</a:t>
+                      </a:r>
+                      <a:endParaRPr lang="en-US" sz="1050" dirty="0">
+                        <a:latin typeface="Meiryo" charset="0"/>
+                        <a:ea typeface="Meiryo" charset="0"/>
+                        <a:cs typeface="Meiryo" charset="0"/>
+                      </a:endParaRPr>
+                    </a:p>
+                  </a:txBody>
+                  <a:tcPr anchor="ctr" marT="18000" marB="18000" marL="64008" marR="45720">
+                    <a:lnL w="9525" cap="flat" cmpd="sng" algn="ctr">
+                      <a:solidFill>
+                        <a:srgbClr val="BFBFBF"/>
+                      </a:solidFill>
+                      <a:prstDash val="solid"/>
+                      <a:round/>
+                      <a:headEnd type="none" w="med" len="med"/>
+                      <a:tailEnd type="none" w="med" len="med"/>
+                    </a:lnL>
+                    <a:lnR w="9525" cap="flat" cmpd="sng" algn="ctr">
+                      <a:solidFill>
+                        <a:srgbClr val="BFBFBF"/>
+                      </a:solidFill>
+                      <a:prstDash val="solid"/>
+                      <a:round/>
+                      <a:headEnd type="none" w="med" len="med"/>
+                      <a:tailEnd type="none" w="med" len="med"/>
+                    </a:lnR>
+                    <a:lnT w="9525" cap="flat" cmpd="sng" algn="ctr">
+                      <a:solidFill>
+                        <a:srgbClr val="BFBFBF"/>
+                      </a:solidFill>
+                      <a:prstDash val="solid"/>
+                      <a:round/>
+                      <a:headEnd type="none" w="med" len="med"/>
+                      <a:tailEnd type="none" w="med" len="med"/>
+                    </a:lnT>
+                    <a:lnB w="9525" cap="flat" cmpd="sng" algn="ctr">
+                      <a:solidFill>
+                        <a:srgbClr val="BFBFBF"/>
+                      </a:solidFill>
+                      <a:prstDash val="solid"/>
+                      <a:round/>
+                      <a:headEnd type="none" w="med" len="med"/>
+                      <a:tailEnd type="none" w="med" len="med"/>
+                    </a:lnB>
+                  </a:tcPr>
+                </a:tc>
+                <a:tc>
+                  <a:txBody>
+                    <a:bodyPr/>
+                    <a:lstStyle/>
+                    <a:p>
+                      <a:pPr marL="0" indent="0" algn="l">
+                        <a:buNone/>
+                      </a:pPr>
+                      <a:r>
+                        <a:rPr lang="en-US" sz="900" dirty="0">
+                          <a:solidFill>
+                            <a:srgbClr val="222222"/>
+                          </a:solidFill>
+                          <a:latin typeface="Meiryo" pitchFamily="34" charset="0"/>
+                          <a:ea typeface="Meiryo" pitchFamily="34" charset="-122"/>
+                          <a:cs typeface="Meiryo" pitchFamily="34" charset="-120"/>
+                        </a:rPr>
+                        <a:t>民間・市内最大手</a:t>
+                      </a:r>
+                      <a:endParaRPr lang="en-US" sz="1050" dirty="0">
+                        <a:latin typeface="Meiryo" charset="0"/>
+                        <a:ea typeface="Meiryo" charset="0"/>
+                        <a:cs typeface="Meiryo" charset="0"/>
+                      </a:endParaRPr>
+                    </a:p>
+                  </a:txBody>
+                  <a:tcPr anchor="ctr" marT="18000" marB="18000" marL="64008" marR="45720">
+                    <a:lnL w="9525" cap="flat" cmpd="sng" algn="ctr">
+                      <a:solidFill>
+                        <a:srgbClr val="BFBFBF"/>
+                      </a:solidFill>
+                      <a:prstDash val="solid"/>
+                      <a:round/>
+                      <a:headEnd type="none" w="med" len="med"/>
+                      <a:tailEnd type="none" w="med" len="med"/>
+                    </a:lnL>
+                    <a:lnR w="9525" cap="flat" cmpd="sng" algn="ctr">
+                      <a:solidFill>
+                        <a:srgbClr val="BFBFBF"/>
+                      </a:solidFill>
+                      <a:prstDash val="solid"/>
+                      <a:round/>
+                      <a:headEnd type="none" w="med" len="med"/>
+                      <a:tailEnd type="none" w="med" len="med"/>
+                    </a:lnR>
+                    <a:lnT w="9525" cap="flat" cmpd="sng" algn="ctr">
+                      <a:solidFill>
+                        <a:srgbClr val="BFBFBF"/>
+                      </a:solidFill>
+                      <a:prstDash val="solid"/>
+                      <a:round/>
+                      <a:headEnd type="none" w="med" len="med"/>
+                      <a:tailEnd type="none" w="med" len="med"/>
+                    </a:lnT>
+                    <a:lnB w="9525" cap="flat" cmpd="sng" algn="ctr">
+                      <a:solidFill>
+                        <a:srgbClr val="BFBFBF"/>
+                      </a:solidFill>
+                      <a:prstDash val="solid"/>
+                      <a:round/>
+                      <a:headEnd type="none" w="med" len="med"/>
+                      <a:tailEnd type="none" w="med" len="med"/>
+                    </a:lnB>
+                  </a:tcPr>
+                </a:tc>
+                <a:tc>
+                  <a:txBody>
+                    <a:bodyPr/>
+                    <a:lstStyle/>
+                    <a:p>
+                      <a:pPr marL="0" indent="0" algn="l">
+                        <a:buNone/>
+                      </a:pPr>
+                      <a:r>
+                        <a:rPr lang="en-US" sz="900" dirty="0">
+                          <a:solidFill>
+                            <a:srgbClr val="222222"/>
+                          </a:solidFill>
+                          <a:latin typeface="Meiryo" pitchFamily="34" charset="0"/>
+                          <a:ea typeface="Meiryo" pitchFamily="34" charset="-122"/>
+                          <a:cs typeface="Meiryo" pitchFamily="34" charset="-120"/>
+                        </a:rPr>
+                        <a:t>個別支援＋「10の活動」。園庭・多職種（ST・心理検査士等）、サッカー療育</a:t>
+                      </a:r>
+                      <a:endParaRPr lang="en-US" sz="1050" dirty="0">
+                        <a:latin typeface="Meiryo" charset="0"/>
+                        <a:ea typeface="Meiryo" charset="0"/>
+                        <a:cs typeface="Meiryo" charset="0"/>
+                      </a:endParaRPr>
+                    </a:p>
+                  </a:txBody>
+                  <a:tcPr anchor="ctr" marT="18000" marB="18000" marL="64008" marR="45720">
+                    <a:lnL w="9525" cap="flat" cmpd="sng" algn="ctr">
+                      <a:solidFill>
+                        <a:srgbClr val="BFBFBF"/>
+                      </a:solidFill>
+                      <a:prstDash val="solid"/>
+                      <a:round/>
+                      <a:headEnd type="none" w="med" len="med"/>
+                      <a:tailEnd type="none" w="med" len="med"/>
+                    </a:lnL>
+                    <a:lnR w="9525" cap="flat" cmpd="sng" algn="ctr">
+                      <a:solidFill>
+                        <a:srgbClr val="BFBFBF"/>
+                      </a:solidFill>
+                      <a:prstDash val="solid"/>
+                      <a:round/>
+                      <a:headEnd type="none" w="med" len="med"/>
+                      <a:tailEnd type="none" w="med" len="med"/>
+                    </a:lnR>
+                    <a:lnT w="9525" cap="flat" cmpd="sng" algn="ctr">
+                      <a:solidFill>
+                        <a:srgbClr val="BFBFBF"/>
+                      </a:solidFill>
+                      <a:prstDash val="solid"/>
+                      <a:round/>
+                      <a:headEnd type="none" w="med" len="med"/>
+                      <a:tailEnd type="none" w="med" len="med"/>
+                    </a:lnT>
+                    <a:lnB w="9525" cap="flat" cmpd="sng" algn="ctr">
+                      <a:solidFill>
+                        <a:srgbClr val="BFBFBF"/>
+                      </a:solidFill>
+                      <a:prstDash val="solid"/>
+                      <a:round/>
+                      <a:headEnd type="none" w="med" len="med"/>
+                      <a:tailEnd type="none" w="med" len="med"/>
+                    </a:lnB>
+                  </a:tcPr>
+                </a:tc>
+                <a:tc>
+                  <a:txBody>
+                    <a:bodyPr/>
+                    <a:lstStyle/>
+                    <a:p>
+                      <a:pPr marL="0" indent="0" algn="l">
+                        <a:buNone/>
+                      </a:pPr>
+                      <a:r>
+                        <a:rPr lang="en-US" sz="900" dirty="0">
+                          <a:solidFill>
+                            <a:srgbClr val="222222"/>
+                          </a:solidFill>
+                          <a:latin typeface="Meiryo" pitchFamily="34" charset="0"/>
+                          <a:ea typeface="Meiryo" pitchFamily="34" charset="-122"/>
+                          <a:cs typeface="Meiryo" pitchFamily="34" charset="-120"/>
+                        </a:rPr>
+                        <a:t>日吉台・八坂台・松之郷</a:t>
+                      </a:r>
+                      <a:endParaRPr lang="en-US" sz="1050" dirty="0">
+                        <a:latin typeface="Meiryo" charset="0"/>
+                        <a:ea typeface="Meiryo" charset="0"/>
+                        <a:cs typeface="Meiryo" charset="0"/>
+                      </a:endParaRPr>
+                    </a:p>
+                  </a:txBody>
+                  <a:tcPr anchor="ctr" marT="18000" marB="18000" marL="64008" marR="45720">
+                    <a:lnL w="9525" cap="flat" cmpd="sng" algn="ctr">
+                      <a:solidFill>
+                        <a:srgbClr val="BFBFBF"/>
+                      </a:solidFill>
+                      <a:prstDash val="solid"/>
+                      <a:round/>
+                      <a:headEnd type="none" w="med" len="med"/>
+                      <a:tailEnd type="none" w="med" len="med"/>
+                    </a:lnL>
+                    <a:lnR w="9525" cap="flat" cmpd="sng" algn="ctr">
+                      <a:solidFill>
+                        <a:srgbClr val="BFBFBF"/>
+                      </a:solidFill>
+                      <a:prstDash val="solid"/>
+                      <a:round/>
+                      <a:headEnd type="none" w="med" len="med"/>
+                      <a:tailEnd type="none" w="med" len="med"/>
+                    </a:lnR>
+                    <a:lnT w="9525" cap="flat" cmpd="sng" algn="ctr">
+                      <a:solidFill>
+                        <a:srgbClr val="BFBFBF"/>
+                      </a:solidFill>
+                      <a:prstDash val="solid"/>
+                      <a:round/>
+                      <a:headEnd type="none" w="med" len="med"/>
+                      <a:tailEnd type="none" w="med" len="med"/>
+                    </a:lnT>
+                    <a:lnB w="9525" cap="flat" cmpd="sng" algn="ctr">
+                      <a:solidFill>
+                        <a:srgbClr val="BFBFBF"/>
+                      </a:solidFill>
+                      <a:prstDash val="solid"/>
+                      <a:round/>
+                      <a:headEnd type="none" w="med" len="med"/>
+                      <a:tailEnd type="none" w="med" len="med"/>
+                    </a:lnB>
+                  </a:tcPr>
+                </a:tc>
+                <a:extLst>
+                  <a:ext uri="{0D108BD9-81ED-4DB2-BD59-A6C34878D82A}">
+                    <a16:rowId xmlns:a16="http://schemas.microsoft.com/office/drawing/2014/main" val="10001"/>
+                  </a:ext>
+                </a:extLst>
+              </a:tr>
+              <a:tr h="398417">
+                <a:tc>
+                  <a:txBody>
+                    <a:bodyPr/>
+                    <a:lstStyle/>
+                    <a:p>
+                      <a:pPr marL="0" indent="0" algn="l">
+                        <a:buNone/>
+                      </a:pPr>
+                      <a:r>
+                        <a:rPr lang="en-US" sz="900" b="1" dirty="0">
+                          <a:solidFill>
+                            <a:srgbClr val="222222"/>
+                          </a:solidFill>
+                          <a:latin typeface="Meiryo" pitchFamily="34" charset="0"/>
+                          <a:ea typeface="Meiryo" pitchFamily="34" charset="-122"/>
+                          <a:cs typeface="Meiryo" pitchFamily="34" charset="-120"/>
+                        </a:rPr>
+                        <a:t>株式会社ベストグロウ（こどもプラス）</a:t>
+                      </a:r>
+                      <a:endParaRPr lang="en-US" sz="1050" dirty="0">
+                        <a:latin typeface="Meiryo" charset="0"/>
+                        <a:ea typeface="Meiryo" charset="0"/>
+                        <a:cs typeface="Meiryo" charset="0"/>
+                      </a:endParaRPr>
+                    </a:p>
+                  </a:txBody>
+                  <a:tcPr anchor="ctr" marT="18000" marB="18000" marL="64008" marR="45720">
+                    <a:lnL w="9525" cap="flat" cmpd="sng" algn="ctr">
+                      <a:solidFill>
+                        <a:srgbClr val="BFBFBF"/>
+                      </a:solidFill>
+                      <a:prstDash val="solid"/>
+                      <a:round/>
+                      <a:headEnd type="none" w="med" len="med"/>
+                      <a:tailEnd type="none" w="med" len="med"/>
+                    </a:lnL>
+                    <a:lnR w="9525" cap="flat" cmpd="sng" algn="ctr">
+                      <a:solidFill>
+                        <a:srgbClr val="BFBFBF"/>
+                      </a:solidFill>
+                      <a:prstDash val="solid"/>
+                      <a:round/>
+                      <a:headEnd type="none" w="med" len="med"/>
+                      <a:tailEnd type="none" w="med" len="med"/>
+                    </a:lnR>
+                    <a:lnT w="9525" cap="flat" cmpd="sng" algn="ctr">
+                      <a:solidFill>
+                        <a:srgbClr val="BFBFBF"/>
+                      </a:solidFill>
+                      <a:prstDash val="solid"/>
+                      <a:round/>
+                      <a:headEnd type="none" w="med" len="med"/>
+                      <a:tailEnd type="none" w="med" len="med"/>
+                    </a:lnT>
+                    <a:lnB w="9525" cap="flat" cmpd="sng" algn="ctr">
+                      <a:solidFill>
+                        <a:srgbClr val="BFBFBF"/>
+                      </a:solidFill>
+                      <a:prstDash val="solid"/>
+                      <a:round/>
+                      <a:headEnd type="none" w="med" len="med"/>
+                      <a:tailEnd type="none" w="med" len="med"/>
+                    </a:lnB>
+                  </a:tcPr>
+                </a:tc>
+                <a:tc>
+                  <a:txBody>
+                    <a:bodyPr/>
+                    <a:lstStyle/>
+                    <a:p>
+                      <a:pPr marL="0" indent="0" algn="l">
+                        <a:buNone/>
+                      </a:pPr>
+                      <a:r>
+                        <a:rPr lang="en-US" sz="900" dirty="0">
+                          <a:solidFill>
+                            <a:srgbClr val="222222"/>
+                          </a:solidFill>
+                          <a:latin typeface="Meiryo" pitchFamily="34" charset="0"/>
+                          <a:ea typeface="Meiryo" pitchFamily="34" charset="-122"/>
+                          <a:cs typeface="Meiryo" pitchFamily="34" charset="-120"/>
+                        </a:rPr>
+                        <a:t>2</a:t>
+                      </a:r>
+                      <a:endParaRPr lang="en-US" sz="1050" dirty="0">
+                        <a:latin typeface="Meiryo" charset="0"/>
+                        <a:ea typeface="Meiryo" charset="0"/>
+                        <a:cs typeface="Meiryo" charset="0"/>
+                      </a:endParaRPr>
+                    </a:p>
+                  </a:txBody>
+                  <a:tcPr anchor="ctr" marT="18000" marB="18000" marL="64008" marR="45720">
+                    <a:lnL w="9525" cap="flat" cmpd="sng" algn="ctr">
+                      <a:solidFill>
+                        <a:srgbClr val="BFBFBF"/>
+                      </a:solidFill>
+                      <a:prstDash val="solid"/>
+                      <a:round/>
+                      <a:headEnd type="none" w="med" len="med"/>
+                      <a:tailEnd type="none" w="med" len="med"/>
+                    </a:lnL>
+                    <a:lnR w="9525" cap="flat" cmpd="sng" algn="ctr">
+                      <a:solidFill>
+                        <a:srgbClr val="BFBFBF"/>
+                      </a:solidFill>
+                      <a:prstDash val="solid"/>
+                      <a:round/>
+                      <a:headEnd type="none" w="med" len="med"/>
+                      <a:tailEnd type="none" w="med" len="med"/>
+                    </a:lnR>
+                    <a:lnT w="9525" cap="flat" cmpd="sng" algn="ctr">
+                      <a:solidFill>
+                        <a:srgbClr val="BFBFBF"/>
+                      </a:solidFill>
+                      <a:prstDash val="solid"/>
+                      <a:round/>
+                      <a:headEnd type="none" w="med" len="med"/>
+                      <a:tailEnd type="none" w="med" len="med"/>
+                    </a:lnT>
+                    <a:lnB w="9525" cap="flat" cmpd="sng" algn="ctr">
+                      <a:solidFill>
+                        <a:srgbClr val="BFBFBF"/>
+                      </a:solidFill>
+                      <a:prstDash val="solid"/>
+                      <a:round/>
+                      <a:headEnd type="none" w="med" len="med"/>
+                      <a:tailEnd type="none" w="med" len="med"/>
+                    </a:lnB>
+                  </a:tcPr>
+                </a:tc>
+                <a:tc>
+                  <a:txBody>
+                    <a:bodyPr/>
+                    <a:lstStyle/>
+                    <a:p>
+                      <a:pPr marL="0" indent="0" algn="l">
+                        <a:buNone/>
+                      </a:pPr>
+                      <a:r>
+                        <a:rPr lang="en-US" sz="900" dirty="0">
+                          <a:solidFill>
+                            <a:srgbClr val="222222"/>
+                          </a:solidFill>
+                          <a:latin typeface="Meiryo" pitchFamily="34" charset="0"/>
+                          <a:ea typeface="Meiryo" pitchFamily="34" charset="-122"/>
+                          <a:cs typeface="Meiryo" pitchFamily="34" charset="-120"/>
+                        </a:rPr>
+                        <a:t>民間・運動療育特化</a:t>
+                      </a:r>
+                      <a:endParaRPr lang="en-US" sz="1050" dirty="0">
+                        <a:latin typeface="Meiryo" charset="0"/>
+                        <a:ea typeface="Meiryo" charset="0"/>
+                        <a:cs typeface="Meiryo" charset="0"/>
+                      </a:endParaRPr>
+                    </a:p>
+                  </a:txBody>
+                  <a:tcPr anchor="ctr" marT="18000" marB="18000" marL="64008" marR="45720">
+                    <a:lnL w="9525" cap="flat" cmpd="sng" algn="ctr">
+                      <a:solidFill>
+                        <a:srgbClr val="BFBFBF"/>
+                      </a:solidFill>
+                      <a:prstDash val="solid"/>
+                      <a:round/>
+                      <a:headEnd type="none" w="med" len="med"/>
+                      <a:tailEnd type="none" w="med" len="med"/>
+                    </a:lnL>
+                    <a:lnR w="9525" cap="flat" cmpd="sng" algn="ctr">
+                      <a:solidFill>
+                        <a:srgbClr val="BFBFBF"/>
+                      </a:solidFill>
+                      <a:prstDash val="solid"/>
+                      <a:round/>
+                      <a:headEnd type="none" w="med" len="med"/>
+                      <a:tailEnd type="none" w="med" len="med"/>
+                    </a:lnR>
+                    <a:lnT w="9525" cap="flat" cmpd="sng" algn="ctr">
+                      <a:solidFill>
+                        <a:srgbClr val="BFBFBF"/>
+                      </a:solidFill>
+                      <a:prstDash val="solid"/>
+                      <a:round/>
+                      <a:headEnd type="none" w="med" len="med"/>
+                      <a:tailEnd type="none" w="med" len="med"/>
+                    </a:lnT>
+                    <a:lnB w="9525" cap="flat" cmpd="sng" algn="ctr">
+                      <a:solidFill>
+                        <a:srgbClr val="BFBFBF"/>
+                      </a:solidFill>
+                      <a:prstDash val="solid"/>
+                      <a:round/>
+                      <a:headEnd type="none" w="med" len="med"/>
+                      <a:tailEnd type="none" w="med" len="med"/>
+                    </a:lnB>
+                  </a:tcPr>
+                </a:tc>
+                <a:tc>
+                  <a:txBody>
+                    <a:bodyPr/>
+                    <a:lstStyle/>
+                    <a:p>
+                      <a:pPr marL="0" indent="0" algn="l">
+                        <a:buNone/>
+                      </a:pPr>
+                      <a:r>
+                        <a:rPr lang="en-US" sz="900" dirty="0">
+                          <a:solidFill>
+                            <a:srgbClr val="222222"/>
+                          </a:solidFill>
+                          <a:latin typeface="Meiryo" pitchFamily="34" charset="0"/>
+                          <a:ea typeface="Meiryo" pitchFamily="34" charset="-122"/>
+                          <a:cs typeface="Meiryo" pitchFamily="34" charset="-120"/>
+                        </a:rPr>
+                        <a:t>柳沢運動プログラムによる運動療育。平日9:00〜18:00・送迎あり</a:t>
+                      </a:r>
+                      <a:endParaRPr lang="en-US" sz="1050" dirty="0">
+                        <a:latin typeface="Meiryo" charset="0"/>
+                        <a:ea typeface="Meiryo" charset="0"/>
+                        <a:cs typeface="Meiryo" charset="0"/>
+                      </a:endParaRPr>
+                    </a:p>
+                  </a:txBody>
+                  <a:tcPr anchor="ctr" marT="18000" marB="18000" marL="64008" marR="45720">
+                    <a:lnL w="9525" cap="flat" cmpd="sng" algn="ctr">
+                      <a:solidFill>
+                        <a:srgbClr val="BFBFBF"/>
+                      </a:solidFill>
+                      <a:prstDash val="solid"/>
+                      <a:round/>
+                      <a:headEnd type="none" w="med" len="med"/>
+                      <a:tailEnd type="none" w="med" len="med"/>
+                    </a:lnL>
+                    <a:lnR w="9525" cap="flat" cmpd="sng" algn="ctr">
+                      <a:solidFill>
+                        <a:srgbClr val="BFBFBF"/>
+                      </a:solidFill>
+                      <a:prstDash val="solid"/>
+                      <a:round/>
+                      <a:headEnd type="none" w="med" len="med"/>
+                      <a:tailEnd type="none" w="med" len="med"/>
+                    </a:lnR>
+                    <a:lnT w="9525" cap="flat" cmpd="sng" algn="ctr">
+                      <a:solidFill>
+                        <a:srgbClr val="BFBFBF"/>
+                      </a:solidFill>
+                      <a:prstDash val="solid"/>
+                      <a:round/>
+                      <a:headEnd type="none" w="med" len="med"/>
+                      <a:tailEnd type="none" w="med" len="med"/>
+                    </a:lnT>
+                    <a:lnB w="9525" cap="flat" cmpd="sng" algn="ctr">
+                      <a:solidFill>
+                        <a:srgbClr val="BFBFBF"/>
+                      </a:solidFill>
+                      <a:prstDash val="solid"/>
+                      <a:round/>
+                      <a:headEnd type="none" w="med" len="med"/>
+                      <a:tailEnd type="none" w="med" len="med"/>
+                    </a:lnB>
+                  </a:tcPr>
+                </a:tc>
+                <a:tc>
+                  <a:txBody>
+                    <a:bodyPr/>
+                    <a:lstStyle/>
+                    <a:p>
+                      <a:pPr marL="0" indent="0" algn="l">
+                        <a:buNone/>
+                      </a:pPr>
+                      <a:r>
+                        <a:rPr lang="en-US" sz="900" dirty="0">
+                          <a:solidFill>
+                            <a:srgbClr val="222222"/>
+                          </a:solidFill>
+                          <a:latin typeface="Meiryo" pitchFamily="34" charset="0"/>
+                          <a:ea typeface="Meiryo" pitchFamily="34" charset="-122"/>
+                          <a:cs typeface="Meiryo" pitchFamily="34" charset="-120"/>
+                        </a:rPr>
+                        <a:t>東新宿・田間</a:t>
+                      </a:r>
+                      <a:endParaRPr lang="en-US" sz="1050" dirty="0">
+                        <a:latin typeface="Meiryo" charset="0"/>
+                        <a:ea typeface="Meiryo" charset="0"/>
+                        <a:cs typeface="Meiryo" charset="0"/>
+                      </a:endParaRPr>
+                    </a:p>
+                  </a:txBody>
+                  <a:tcPr anchor="ctr" marT="18000" marB="18000" marL="64008" marR="45720">
+                    <a:lnL w="9525" cap="flat" cmpd="sng" algn="ctr">
+                      <a:solidFill>
+                        <a:srgbClr val="BFBFBF"/>
+                      </a:solidFill>
+                      <a:prstDash val="solid"/>
+                      <a:round/>
+                      <a:headEnd type="none" w="med" len="med"/>
+                      <a:tailEnd type="none" w="med" len="med"/>
+                    </a:lnL>
+                    <a:lnR w="9525" cap="flat" cmpd="sng" algn="ctr">
+                      <a:solidFill>
+                        <a:srgbClr val="BFBFBF"/>
+                      </a:solidFill>
+                      <a:prstDash val="solid"/>
+                      <a:round/>
+                      <a:headEnd type="none" w="med" len="med"/>
+                      <a:tailEnd type="none" w="med" len="med"/>
+                    </a:lnR>
+                    <a:lnT w="9525" cap="flat" cmpd="sng" algn="ctr">
+                      <a:solidFill>
+                        <a:srgbClr val="BFBFBF"/>
+                      </a:solidFill>
+                      <a:prstDash val="solid"/>
+                      <a:round/>
+                      <a:headEnd type="none" w="med" len="med"/>
+                      <a:tailEnd type="none" w="med" len="med"/>
+                    </a:lnT>
+                    <a:lnB w="9525" cap="flat" cmpd="sng" algn="ctr">
+                      <a:solidFill>
+                        <a:srgbClr val="BFBFBF"/>
+                      </a:solidFill>
+                      <a:prstDash val="solid"/>
+                      <a:round/>
+                      <a:headEnd type="none" w="med" len="med"/>
+                      <a:tailEnd type="none" w="med" len="med"/>
+                    </a:lnB>
+                  </a:tcPr>
+                </a:tc>
+                <a:extLst>
+                  <a:ext uri="{0D108BD9-81ED-4DB2-BD59-A6C34878D82A}">
+                    <a16:rowId xmlns:a16="http://schemas.microsoft.com/office/drawing/2014/main" val="10001"/>
+                  </a:ext>
+                </a:extLst>
+              </a:tr>
+              <a:tr h="398417">
+                <a:tc>
+                  <a:txBody>
+                    <a:bodyPr/>
+                    <a:lstStyle/>
+                    <a:p>
+                      <a:pPr marL="0" indent="0" algn="l">
+                        <a:buNone/>
+                      </a:pPr>
+                      <a:r>
+                        <a:rPr lang="en-US" sz="900" b="1" dirty="0">
+                          <a:solidFill>
+                            <a:srgbClr val="222222"/>
+                          </a:solidFill>
+                          <a:latin typeface="Meiryo" pitchFamily="34" charset="0"/>
+                          <a:ea typeface="Meiryo" pitchFamily="34" charset="-122"/>
+                          <a:cs typeface="Meiryo" pitchFamily="34" charset="-120"/>
+                        </a:rPr>
+                        <a:t>子ども支援センター（まあちる／ぽけっと）</a:t>
+                      </a:r>
+                      <a:endParaRPr lang="en-US" sz="1050" dirty="0">
+                        <a:latin typeface="Meiryo" charset="0"/>
+                        <a:ea typeface="Meiryo" charset="0"/>
+                        <a:cs typeface="Meiryo" charset="0"/>
+                      </a:endParaRPr>
+                    </a:p>
+                  </a:txBody>
+                  <a:tcPr anchor="ctr" marT="18000" marB="18000" marL="64008" marR="45720">
+                    <a:lnL w="9525" cap="flat" cmpd="sng" algn="ctr">
+                      <a:solidFill>
+                        <a:srgbClr val="BFBFBF"/>
+                      </a:solidFill>
+                      <a:prstDash val="solid"/>
+                      <a:round/>
+                      <a:headEnd type="none" w="med" len="med"/>
+                      <a:tailEnd type="none" w="med" len="med"/>
+                    </a:lnL>
+                    <a:lnR w="9525" cap="flat" cmpd="sng" algn="ctr">
+                      <a:solidFill>
+                        <a:srgbClr val="BFBFBF"/>
+                      </a:solidFill>
+                      <a:prstDash val="solid"/>
+                      <a:round/>
+                      <a:headEnd type="none" w="med" len="med"/>
+                      <a:tailEnd type="none" w="med" len="med"/>
+                    </a:lnR>
+                    <a:lnT w="9525" cap="flat" cmpd="sng" algn="ctr">
+                      <a:solidFill>
+                        <a:srgbClr val="BFBFBF"/>
+                      </a:solidFill>
+                      <a:prstDash val="solid"/>
+                      <a:round/>
+                      <a:headEnd type="none" w="med" len="med"/>
+                      <a:tailEnd type="none" w="med" len="med"/>
+                    </a:lnT>
+                    <a:lnB w="9525" cap="flat" cmpd="sng" algn="ctr">
+                      <a:solidFill>
+                        <a:srgbClr val="BFBFBF"/>
+                      </a:solidFill>
+                      <a:prstDash val="solid"/>
+                      <a:round/>
+                      <a:headEnd type="none" w="med" len="med"/>
+                      <a:tailEnd type="none" w="med" len="med"/>
+                    </a:lnB>
+                  </a:tcPr>
+                </a:tc>
+                <a:tc>
+                  <a:txBody>
+                    <a:bodyPr/>
+                    <a:lstStyle/>
+                    <a:p>
+                      <a:pPr marL="0" indent="0" algn="l">
+                        <a:buNone/>
+                      </a:pPr>
+                      <a:r>
+                        <a:rPr lang="en-US" sz="900" dirty="0">
+                          <a:solidFill>
+                            <a:srgbClr val="222222"/>
+                          </a:solidFill>
+                          <a:latin typeface="Meiryo" pitchFamily="34" charset="0"/>
+                          <a:ea typeface="Meiryo" pitchFamily="34" charset="-122"/>
+                          <a:cs typeface="Meiryo" pitchFamily="34" charset="-120"/>
+                        </a:rPr>
+                        <a:t>2</a:t>
+                      </a:r>
+                      <a:endParaRPr lang="en-US" sz="1050" dirty="0">
+                        <a:latin typeface="Meiryo" charset="0"/>
+                        <a:ea typeface="Meiryo" charset="0"/>
+                        <a:cs typeface="Meiryo" charset="0"/>
+                      </a:endParaRPr>
+                    </a:p>
+                  </a:txBody>
+                  <a:tcPr anchor="ctr" marT="18000" marB="18000" marL="64008" marR="45720">
+                    <a:lnL w="9525" cap="flat" cmpd="sng" algn="ctr">
+                      <a:solidFill>
+                        <a:srgbClr val="BFBFBF"/>
+                      </a:solidFill>
+                      <a:prstDash val="solid"/>
+                      <a:round/>
+                      <a:headEnd type="none" w="med" len="med"/>
+                      <a:tailEnd type="none" w="med" len="med"/>
+                    </a:lnL>
+                    <a:lnR w="9525" cap="flat" cmpd="sng" algn="ctr">
+                      <a:solidFill>
+                        <a:srgbClr val="BFBFBF"/>
+                      </a:solidFill>
+                      <a:prstDash val="solid"/>
+                      <a:round/>
+                      <a:headEnd type="none" w="med" len="med"/>
+                      <a:tailEnd type="none" w="med" len="med"/>
+                    </a:lnR>
+                    <a:lnT w="9525" cap="flat" cmpd="sng" algn="ctr">
+                      <a:solidFill>
+                        <a:srgbClr val="BFBFBF"/>
+                      </a:solidFill>
+                      <a:prstDash val="solid"/>
+                      <a:round/>
+                      <a:headEnd type="none" w="med" len="med"/>
+                      <a:tailEnd type="none" w="med" len="med"/>
+                    </a:lnT>
+                    <a:lnB w="9525" cap="flat" cmpd="sng" algn="ctr">
+                      <a:solidFill>
+                        <a:srgbClr val="BFBFBF"/>
+                      </a:solidFill>
+                      <a:prstDash val="solid"/>
+                      <a:round/>
+                      <a:headEnd type="none" w="med" len="med"/>
+                      <a:tailEnd type="none" w="med" len="med"/>
+                    </a:lnB>
+                  </a:tcPr>
+                </a:tc>
+                <a:tc>
+                  <a:txBody>
+                    <a:bodyPr/>
+                    <a:lstStyle/>
+                    <a:p>
+                      <a:pPr marL="0" indent="0" algn="l">
+                        <a:buNone/>
+                      </a:pPr>
+                      <a:r>
+                        <a:rPr lang="en-US" sz="900" dirty="0">
+                          <a:solidFill>
+                            <a:srgbClr val="222222"/>
+                          </a:solidFill>
+                          <a:latin typeface="Meiryo" pitchFamily="34" charset="0"/>
+                          <a:ea typeface="Meiryo" pitchFamily="34" charset="-122"/>
+                          <a:cs typeface="Meiryo" pitchFamily="34" charset="-120"/>
+                        </a:rPr>
+                        <a:t>民間・年齢分離型</a:t>
+                      </a:r>
+                      <a:endParaRPr lang="en-US" sz="1050" dirty="0">
+                        <a:latin typeface="Meiryo" charset="0"/>
+                        <a:ea typeface="Meiryo" charset="0"/>
+                        <a:cs typeface="Meiryo" charset="0"/>
+                      </a:endParaRPr>
+                    </a:p>
+                  </a:txBody>
+                  <a:tcPr anchor="ctr" marT="18000" marB="18000" marL="64008" marR="45720">
+                    <a:lnL w="9525" cap="flat" cmpd="sng" algn="ctr">
+                      <a:solidFill>
+                        <a:srgbClr val="BFBFBF"/>
+                      </a:solidFill>
+                      <a:prstDash val="solid"/>
+                      <a:round/>
+                      <a:headEnd type="none" w="med" len="med"/>
+                      <a:tailEnd type="none" w="med" len="med"/>
+                    </a:lnL>
+                    <a:lnR w="9525" cap="flat" cmpd="sng" algn="ctr">
+                      <a:solidFill>
+                        <a:srgbClr val="BFBFBF"/>
+                      </a:solidFill>
+                      <a:prstDash val="solid"/>
+                      <a:round/>
+                      <a:headEnd type="none" w="med" len="med"/>
+                      <a:tailEnd type="none" w="med" len="med"/>
+                    </a:lnR>
+                    <a:lnT w="9525" cap="flat" cmpd="sng" algn="ctr">
+                      <a:solidFill>
+                        <a:srgbClr val="BFBFBF"/>
+                      </a:solidFill>
+                      <a:prstDash val="solid"/>
+                      <a:round/>
+                      <a:headEnd type="none" w="med" len="med"/>
+                      <a:tailEnd type="none" w="med" len="med"/>
+                    </a:lnT>
+                    <a:lnB w="9525" cap="flat" cmpd="sng" algn="ctr">
+                      <a:solidFill>
+                        <a:srgbClr val="BFBFBF"/>
+                      </a:solidFill>
+                      <a:prstDash val="solid"/>
+                      <a:round/>
+                      <a:headEnd type="none" w="med" len="med"/>
+                      <a:tailEnd type="none" w="med" len="med"/>
+                    </a:lnB>
+                  </a:tcPr>
+                </a:tc>
+                <a:tc>
+                  <a:txBody>
+                    <a:bodyPr/>
+                    <a:lstStyle/>
+                    <a:p>
+                      <a:pPr marL="0" indent="0" algn="l">
+                        <a:buNone/>
+                      </a:pPr>
+                      <a:r>
+                        <a:rPr lang="en-US" sz="900" dirty="0">
+                          <a:solidFill>
+                            <a:srgbClr val="222222"/>
+                          </a:solidFill>
+                          <a:latin typeface="Meiryo" pitchFamily="34" charset="0"/>
+                          <a:ea typeface="Meiryo" pitchFamily="34" charset="-122"/>
+                          <a:cs typeface="Meiryo" pitchFamily="34" charset="-120"/>
+                        </a:rPr>
+                        <a:t>まあちる＝主に2〜12歳（火〜土）、ぽけっと＝主に6〜18歳（月〜土）</a:t>
+                      </a:r>
+                      <a:endParaRPr lang="en-US" sz="1050" dirty="0">
+                        <a:latin typeface="Meiryo" charset="0"/>
+                        <a:ea typeface="Meiryo" charset="0"/>
+                        <a:cs typeface="Meiryo" charset="0"/>
+                      </a:endParaRPr>
+                    </a:p>
+                  </a:txBody>
+                  <a:tcPr anchor="ctr" marT="18000" marB="18000" marL="64008" marR="45720">
+                    <a:lnL w="9525" cap="flat" cmpd="sng" algn="ctr">
+                      <a:solidFill>
+                        <a:srgbClr val="BFBFBF"/>
+                      </a:solidFill>
+                      <a:prstDash val="solid"/>
+                      <a:round/>
+                      <a:headEnd type="none" w="med" len="med"/>
+                      <a:tailEnd type="none" w="med" len="med"/>
+                    </a:lnL>
+                    <a:lnR w="9525" cap="flat" cmpd="sng" algn="ctr">
+                      <a:solidFill>
+                        <a:srgbClr val="BFBFBF"/>
+                      </a:solidFill>
+                      <a:prstDash val="solid"/>
+                      <a:round/>
+                      <a:headEnd type="none" w="med" len="med"/>
+                      <a:tailEnd type="none" w="med" len="med"/>
+                    </a:lnR>
+                    <a:lnT w="9525" cap="flat" cmpd="sng" algn="ctr">
+                      <a:solidFill>
+                        <a:srgbClr val="BFBFBF"/>
+                      </a:solidFill>
+                      <a:prstDash val="solid"/>
+                      <a:round/>
+                      <a:headEnd type="none" w="med" len="med"/>
+                      <a:tailEnd type="none" w="med" len="med"/>
+                    </a:lnT>
+                    <a:lnB w="9525" cap="flat" cmpd="sng" algn="ctr">
+                      <a:solidFill>
+                        <a:srgbClr val="BFBFBF"/>
+                      </a:solidFill>
+                      <a:prstDash val="solid"/>
+                      <a:round/>
+                      <a:headEnd type="none" w="med" len="med"/>
+                      <a:tailEnd type="none" w="med" len="med"/>
+                    </a:lnB>
+                  </a:tcPr>
+                </a:tc>
+                <a:tc>
+                  <a:txBody>
+                    <a:bodyPr/>
+                    <a:lstStyle/>
+                    <a:p>
+                      <a:pPr marL="0" indent="0" algn="l">
+                        <a:buNone/>
+                      </a:pPr>
+                      <a:r>
+                        <a:rPr lang="en-US" sz="900" dirty="0">
+                          <a:solidFill>
+                            <a:srgbClr val="222222"/>
+                          </a:solidFill>
+                          <a:latin typeface="Meiryo" pitchFamily="34" charset="0"/>
+                          <a:ea typeface="Meiryo" pitchFamily="34" charset="-122"/>
+                          <a:cs typeface="Meiryo" pitchFamily="34" charset="-120"/>
+                        </a:rPr>
+                        <a:t>東岩崎・東上宿</a:t>
+                      </a:r>
+                      <a:endParaRPr lang="en-US" sz="1050" dirty="0">
+                        <a:latin typeface="Meiryo" charset="0"/>
+                        <a:ea typeface="Meiryo" charset="0"/>
+                        <a:cs typeface="Meiryo" charset="0"/>
+                      </a:endParaRPr>
+                    </a:p>
+                  </a:txBody>
+                  <a:tcPr anchor="ctr" marT="18000" marB="18000" marL="64008" marR="45720">
+                    <a:lnL w="9525" cap="flat" cmpd="sng" algn="ctr">
+                      <a:solidFill>
+                        <a:srgbClr val="BFBFBF"/>
+                      </a:solidFill>
+                      <a:prstDash val="solid"/>
+                      <a:round/>
+                      <a:headEnd type="none" w="med" len="med"/>
+                      <a:tailEnd type="none" w="med" len="med"/>
+                    </a:lnL>
+                    <a:lnR w="9525" cap="flat" cmpd="sng" algn="ctr">
+                      <a:solidFill>
+                        <a:srgbClr val="BFBFBF"/>
+                      </a:solidFill>
+                      <a:prstDash val="solid"/>
+                      <a:round/>
+                      <a:headEnd type="none" w="med" len="med"/>
+                      <a:tailEnd type="none" w="med" len="med"/>
+                    </a:lnR>
+                    <a:lnT w="9525" cap="flat" cmpd="sng" algn="ctr">
+                      <a:solidFill>
+                        <a:srgbClr val="BFBFBF"/>
+                      </a:solidFill>
+                      <a:prstDash val="solid"/>
+                      <a:round/>
+                      <a:headEnd type="none" w="med" len="med"/>
+                      <a:tailEnd type="none" w="med" len="med"/>
+                    </a:lnT>
+                    <a:lnB w="9525" cap="flat" cmpd="sng" algn="ctr">
+                      <a:solidFill>
+                        <a:srgbClr val="BFBFBF"/>
+                      </a:solidFill>
+                      <a:prstDash val="solid"/>
+                      <a:round/>
+                      <a:headEnd type="none" w="med" len="med"/>
+                      <a:tailEnd type="none" w="med" len="med"/>
+                    </a:lnB>
+                  </a:tcPr>
+                </a:tc>
+                <a:extLst>
+                  <a:ext uri="{0D108BD9-81ED-4DB2-BD59-A6C34878D82A}">
+                    <a16:rowId xmlns:a16="http://schemas.microsoft.com/office/drawing/2014/main" val="10001"/>
+                  </a:ext>
+                </a:extLst>
+              </a:tr>
+              <a:tr h="398417">
+                <a:tc>
+                  <a:txBody>
+                    <a:bodyPr/>
+                    <a:lstStyle/>
+                    <a:p>
+                      <a:pPr marL="0" indent="0" algn="l">
+                        <a:buNone/>
+                      </a:pPr>
+                      <a:r>
+                        <a:rPr lang="en-US" sz="900" b="1" dirty="0">
+                          <a:solidFill>
+                            <a:srgbClr val="222222"/>
+                          </a:solidFill>
+                          <a:latin typeface="Meiryo" pitchFamily="34" charset="0"/>
+                          <a:ea typeface="Meiryo" pitchFamily="34" charset="-122"/>
+                          <a:cs typeface="Meiryo" pitchFamily="34" charset="-120"/>
+                        </a:rPr>
+                        <a:t>エスポワール（本体／第2）</a:t>
+                      </a:r>
+                      <a:endParaRPr lang="en-US" sz="1050" dirty="0">
+                        <a:latin typeface="Meiryo" charset="0"/>
+                        <a:ea typeface="Meiryo" charset="0"/>
+                        <a:cs typeface="Meiryo" charset="0"/>
+                      </a:endParaRPr>
+                    </a:p>
+                  </a:txBody>
+                  <a:tcPr anchor="ctr" marT="18000" marB="18000" marL="64008" marR="45720">
+                    <a:lnL w="9525" cap="flat" cmpd="sng" algn="ctr">
+                      <a:solidFill>
+                        <a:srgbClr val="BFBFBF"/>
+                      </a:solidFill>
+                      <a:prstDash val="solid"/>
+                      <a:round/>
+                      <a:headEnd type="none" w="med" len="med"/>
+                      <a:tailEnd type="none" w="med" len="med"/>
+                    </a:lnL>
+                    <a:lnR w="9525" cap="flat" cmpd="sng" algn="ctr">
+                      <a:solidFill>
+                        <a:srgbClr val="BFBFBF"/>
+                      </a:solidFill>
+                      <a:prstDash val="solid"/>
+                      <a:round/>
+                      <a:headEnd type="none" w="med" len="med"/>
+                      <a:tailEnd type="none" w="med" len="med"/>
+                    </a:lnR>
+                    <a:lnT w="9525" cap="flat" cmpd="sng" algn="ctr">
+                      <a:solidFill>
+                        <a:srgbClr val="BFBFBF"/>
+                      </a:solidFill>
+                      <a:prstDash val="solid"/>
+                      <a:round/>
+                      <a:headEnd type="none" w="med" len="med"/>
+                      <a:tailEnd type="none" w="med" len="med"/>
+                    </a:lnT>
+                    <a:lnB w="9525" cap="flat" cmpd="sng" algn="ctr">
+                      <a:solidFill>
+                        <a:srgbClr val="BFBFBF"/>
+                      </a:solidFill>
+                      <a:prstDash val="solid"/>
+                      <a:round/>
+                      <a:headEnd type="none" w="med" len="med"/>
+                      <a:tailEnd type="none" w="med" len="med"/>
+                    </a:lnB>
+                  </a:tcPr>
+                </a:tc>
+                <a:tc>
+                  <a:txBody>
+                    <a:bodyPr/>
+                    <a:lstStyle/>
+                    <a:p>
+                      <a:pPr marL="0" indent="0" algn="l">
+                        <a:buNone/>
+                      </a:pPr>
+                      <a:r>
+                        <a:rPr lang="en-US" sz="900" dirty="0">
+                          <a:solidFill>
+                            <a:srgbClr val="222222"/>
+                          </a:solidFill>
+                          <a:latin typeface="Meiryo" pitchFamily="34" charset="0"/>
+                          <a:ea typeface="Meiryo" pitchFamily="34" charset="-122"/>
+                          <a:cs typeface="Meiryo" pitchFamily="34" charset="-120"/>
+                        </a:rPr>
+                        <a:t>2</a:t>
+                      </a:r>
+                      <a:endParaRPr lang="en-US" sz="1050" dirty="0">
+                        <a:latin typeface="Meiryo" charset="0"/>
+                        <a:ea typeface="Meiryo" charset="0"/>
+                        <a:cs typeface="Meiryo" charset="0"/>
+                      </a:endParaRPr>
+                    </a:p>
+                  </a:txBody>
+                  <a:tcPr anchor="ctr" marT="18000" marB="18000" marL="64008" marR="45720">
+                    <a:lnL w="9525" cap="flat" cmpd="sng" algn="ctr">
+                      <a:solidFill>
+                        <a:srgbClr val="BFBFBF"/>
+                      </a:solidFill>
+                      <a:prstDash val="solid"/>
+                      <a:round/>
+                      <a:headEnd type="none" w="med" len="med"/>
+                      <a:tailEnd type="none" w="med" len="med"/>
+                    </a:lnL>
+                    <a:lnR w="9525" cap="flat" cmpd="sng" algn="ctr">
+                      <a:solidFill>
+                        <a:srgbClr val="BFBFBF"/>
+                      </a:solidFill>
+                      <a:prstDash val="solid"/>
+                      <a:round/>
+                      <a:headEnd type="none" w="med" len="med"/>
+                      <a:tailEnd type="none" w="med" len="med"/>
+                    </a:lnR>
+                    <a:lnT w="9525" cap="flat" cmpd="sng" algn="ctr">
+                      <a:solidFill>
+                        <a:srgbClr val="BFBFBF"/>
+                      </a:solidFill>
+                      <a:prstDash val="solid"/>
+                      <a:round/>
+                      <a:headEnd type="none" w="med" len="med"/>
+                      <a:tailEnd type="none" w="med" len="med"/>
+                    </a:lnT>
+                    <a:lnB w="9525" cap="flat" cmpd="sng" algn="ctr">
+                      <a:solidFill>
+                        <a:srgbClr val="BFBFBF"/>
+                      </a:solidFill>
+                      <a:prstDash val="solid"/>
+                      <a:round/>
+                      <a:headEnd type="none" w="med" len="med"/>
+                      <a:tailEnd type="none" w="med" len="med"/>
+                    </a:lnB>
+                  </a:tcPr>
+                </a:tc>
+                <a:tc>
+                  <a:txBody>
+                    <a:bodyPr/>
+                    <a:lstStyle/>
+                    <a:p>
+                      <a:pPr marL="0" indent="0" algn="l">
+                        <a:buNone/>
+                      </a:pPr>
+                      <a:r>
+                        <a:rPr lang="en-US" sz="900" dirty="0">
+                          <a:solidFill>
+                            <a:srgbClr val="222222"/>
+                          </a:solidFill>
+                          <a:latin typeface="Meiryo" pitchFamily="34" charset="0"/>
+                          <a:ea typeface="Meiryo" pitchFamily="34" charset="-122"/>
+                          <a:cs typeface="Meiryo" pitchFamily="34" charset="-120"/>
+                        </a:rPr>
+                        <a:t>民間（詳細要確認）</a:t>
+                      </a:r>
+                      <a:endParaRPr lang="en-US" sz="1050" dirty="0">
+                        <a:latin typeface="Meiryo" charset="0"/>
+                        <a:ea typeface="Meiryo" charset="0"/>
+                        <a:cs typeface="Meiryo" charset="0"/>
+                      </a:endParaRPr>
+                    </a:p>
+                  </a:txBody>
+                  <a:tcPr anchor="ctr" marT="18000" marB="18000" marL="64008" marR="45720">
+                    <a:lnL w="9525" cap="flat" cmpd="sng" algn="ctr">
+                      <a:solidFill>
+                        <a:srgbClr val="BFBFBF"/>
+                      </a:solidFill>
+                      <a:prstDash val="solid"/>
+                      <a:round/>
+                      <a:headEnd type="none" w="med" len="med"/>
+                      <a:tailEnd type="none" w="med" len="med"/>
+                    </a:lnL>
+                    <a:lnR w="9525" cap="flat" cmpd="sng" algn="ctr">
+                      <a:solidFill>
+                        <a:srgbClr val="BFBFBF"/>
+                      </a:solidFill>
+                      <a:prstDash val="solid"/>
+                      <a:round/>
+                      <a:headEnd type="none" w="med" len="med"/>
+                      <a:tailEnd type="none" w="med" len="med"/>
+                    </a:lnR>
+                    <a:lnT w="9525" cap="flat" cmpd="sng" algn="ctr">
+                      <a:solidFill>
+                        <a:srgbClr val="BFBFBF"/>
+                      </a:solidFill>
+                      <a:prstDash val="solid"/>
+                      <a:round/>
+                      <a:headEnd type="none" w="med" len="med"/>
+                      <a:tailEnd type="none" w="med" len="med"/>
+                    </a:lnT>
+                    <a:lnB w="9525" cap="flat" cmpd="sng" algn="ctr">
+                      <a:solidFill>
+                        <a:srgbClr val="BFBFBF"/>
+                      </a:solidFill>
+                      <a:prstDash val="solid"/>
+                      <a:round/>
+                      <a:headEnd type="none" w="med" len="med"/>
+                      <a:tailEnd type="none" w="med" len="med"/>
+                    </a:lnB>
+                  </a:tcPr>
+                </a:tc>
+                <a:tc>
+                  <a:txBody>
+                    <a:bodyPr/>
+                    <a:lstStyle/>
+                    <a:p>
+                      <a:pPr marL="0" indent="0" algn="l">
+                        <a:buNone/>
+                      </a:pPr>
+                      <a:r>
+                        <a:rPr lang="en-US" sz="900" dirty="0">
+                          <a:solidFill>
+                            <a:srgbClr val="222222"/>
+                          </a:solidFill>
+                          <a:latin typeface="Meiryo" pitchFamily="34" charset="0"/>
+                          <a:ea typeface="Meiryo" pitchFamily="34" charset="-122"/>
+                          <a:cs typeface="Meiryo" pitchFamily="34" charset="-120"/>
+                        </a:rPr>
+                        <a:t>児発＋放デイ併設。発達ナビ上「空きあり」表示</a:t>
+                      </a:r>
+                      <a:endParaRPr lang="en-US" sz="1050" dirty="0">
+                        <a:latin typeface="Meiryo" charset="0"/>
+                        <a:ea typeface="Meiryo" charset="0"/>
+                        <a:cs typeface="Meiryo" charset="0"/>
+                      </a:endParaRPr>
+                    </a:p>
+                  </a:txBody>
+                  <a:tcPr anchor="ctr" marT="18000" marB="18000" marL="64008" marR="45720">
+                    <a:lnL w="9525" cap="flat" cmpd="sng" algn="ctr">
+                      <a:solidFill>
+                        <a:srgbClr val="BFBFBF"/>
+                      </a:solidFill>
+                      <a:prstDash val="solid"/>
+                      <a:round/>
+                      <a:headEnd type="none" w="med" len="med"/>
+                      <a:tailEnd type="none" w="med" len="med"/>
+                    </a:lnL>
+                    <a:lnR w="9525" cap="flat" cmpd="sng" algn="ctr">
+                      <a:solidFill>
+                        <a:srgbClr val="BFBFBF"/>
+                      </a:solidFill>
+                      <a:prstDash val="solid"/>
+                      <a:round/>
+                      <a:headEnd type="none" w="med" len="med"/>
+                      <a:tailEnd type="none" w="med" len="med"/>
+                    </a:lnR>
+                    <a:lnT w="9525" cap="flat" cmpd="sng" algn="ctr">
+                      <a:solidFill>
+                        <a:srgbClr val="BFBFBF"/>
+                      </a:solidFill>
+                      <a:prstDash val="solid"/>
+                      <a:round/>
+                      <a:headEnd type="none" w="med" len="med"/>
+                      <a:tailEnd type="none" w="med" len="med"/>
+                    </a:lnT>
+                    <a:lnB w="9525" cap="flat" cmpd="sng" algn="ctr">
+                      <a:solidFill>
+                        <a:srgbClr val="BFBFBF"/>
+                      </a:solidFill>
+                      <a:prstDash val="solid"/>
+                      <a:round/>
+                      <a:headEnd type="none" w="med" len="med"/>
+                      <a:tailEnd type="none" w="med" len="med"/>
+                    </a:lnB>
+                  </a:tcPr>
+                </a:tc>
+                <a:tc>
+                  <a:txBody>
+                    <a:bodyPr/>
+                    <a:lstStyle/>
+                    <a:p>
+                      <a:pPr marL="0" indent="0" algn="l">
+                        <a:buNone/>
+                      </a:pPr>
+                      <a:r>
+                        <a:rPr lang="en-US" sz="900" dirty="0">
+                          <a:solidFill>
+                            <a:srgbClr val="222222"/>
+                          </a:solidFill>
+                          <a:latin typeface="Meiryo" pitchFamily="34" charset="0"/>
+                          <a:ea typeface="Meiryo" pitchFamily="34" charset="-122"/>
+                          <a:cs typeface="Meiryo" pitchFamily="34" charset="-120"/>
+                        </a:rPr>
+                        <a:t>田間・求名</a:t>
+                      </a:r>
+                      <a:endParaRPr lang="en-US" sz="1050" dirty="0">
+                        <a:latin typeface="Meiryo" charset="0"/>
+                        <a:ea typeface="Meiryo" charset="0"/>
+                        <a:cs typeface="Meiryo" charset="0"/>
+                      </a:endParaRPr>
+                    </a:p>
+                  </a:txBody>
+                  <a:tcPr anchor="ctr" marT="18000" marB="18000" marL="64008" marR="45720">
+                    <a:lnL w="9525" cap="flat" cmpd="sng" algn="ctr">
+                      <a:solidFill>
+                        <a:srgbClr val="BFBFBF"/>
+                      </a:solidFill>
+                      <a:prstDash val="solid"/>
+                      <a:round/>
+                      <a:headEnd type="none" w="med" len="med"/>
+                      <a:tailEnd type="none" w="med" len="med"/>
+                    </a:lnL>
+                    <a:lnR w="9525" cap="flat" cmpd="sng" algn="ctr">
+                      <a:solidFill>
+                        <a:srgbClr val="BFBFBF"/>
+                      </a:solidFill>
+                      <a:prstDash val="solid"/>
+                      <a:round/>
+                      <a:headEnd type="none" w="med" len="med"/>
+                      <a:tailEnd type="none" w="med" len="med"/>
+                    </a:lnR>
+                    <a:lnT w="9525" cap="flat" cmpd="sng" algn="ctr">
+                      <a:solidFill>
+                        <a:srgbClr val="BFBFBF"/>
+                      </a:solidFill>
+                      <a:prstDash val="solid"/>
+                      <a:round/>
+                      <a:headEnd type="none" w="med" len="med"/>
+                      <a:tailEnd type="none" w="med" len="med"/>
+                    </a:lnT>
+                    <a:lnB w="9525" cap="flat" cmpd="sng" algn="ctr">
+                      <a:solidFill>
+                        <a:srgbClr val="BFBFBF"/>
+                      </a:solidFill>
+                      <a:prstDash val="solid"/>
+                      <a:round/>
+                      <a:headEnd type="none" w="med" len="med"/>
+                      <a:tailEnd type="none" w="med" len="med"/>
+                    </a:lnB>
+                  </a:tcPr>
+                </a:tc>
+                <a:extLst>
+                  <a:ext uri="{0D108BD9-81ED-4DB2-BD59-A6C34878D82A}">
+                    <a16:rowId xmlns:a16="http://schemas.microsoft.com/office/drawing/2014/main" val="10001"/>
+                  </a:ext>
+                </a:extLst>
+              </a:tr>
+              <a:tr h="398417">
                 <a:tc>
                   <a:txBody>
                     <a:bodyPr/>
@@ -3192,7 +6469,7 @@
                   </a:ext>
                 </a:extLst>
               </a:tr>
-              <a:tr h="464820">
+              <a:tr h="398417">
                 <a:tc>
                   <a:txBody>
                     <a:bodyPr/>
@@ -3210,7 +6487,7 @@
                           <a:ea typeface="Meiryo" pitchFamily="34" charset="-122"/>
                           <a:cs typeface="Meiryo" pitchFamily="34" charset="-120"/>
                         </a:rPr>
-                        <a:t>NPO法人 基本塾</a:t>
+                        <a:t>果実の木求名／コンパッション保育所／鴇嶺の家</a:t>
                       </a:r>
                       <a:endParaRPr lang="en-US" sz="1050" dirty="0">
                         <a:latin typeface="Meiryo" charset="0"/>
@@ -3275,1003 +6552,7 @@
                           <a:ea typeface="Meiryo" pitchFamily="34" charset="-122"/>
                           <a:cs typeface="Meiryo" pitchFamily="34" charset="-120"/>
                         </a:rPr>
-                        <a:t>5</a:t>
-                      </a:r>
-                      <a:endParaRPr lang="en-US" sz="1050" dirty="0">
-                        <a:latin typeface="Meiryo" charset="0"/>
-                        <a:ea typeface="Meiryo" charset="0"/>
-                        <a:cs typeface="Meiryo" charset="0"/>
-                      </a:endParaRPr>
-                    </a:p>
-                  </a:txBody>
-                  <a:tcPr anchor="ctr" marT="18000" marB="18000" marL="64008" marR="45720">
-                    <a:lnL w="9525" cap="flat" cmpd="sng" algn="ctr">
-                      <a:solidFill>
-                        <a:srgbClr val="BFBFBF"/>
-                      </a:solidFill>
-                      <a:prstDash val="solid"/>
-                      <a:round/>
-                      <a:headEnd type="none" w="med" len="med"/>
-                      <a:tailEnd type="none" w="med" len="med"/>
-                    </a:lnL>
-                    <a:lnR w="9525" cap="flat" cmpd="sng" algn="ctr">
-                      <a:solidFill>
-                        <a:srgbClr val="BFBFBF"/>
-                      </a:solidFill>
-                      <a:prstDash val="solid"/>
-                      <a:round/>
-                      <a:headEnd type="none" w="med" len="med"/>
-                      <a:tailEnd type="none" w="med" len="med"/>
-                    </a:lnR>
-                    <a:lnT w="9525" cap="flat" cmpd="sng" algn="ctr">
-                      <a:solidFill>
-                        <a:srgbClr val="BFBFBF"/>
-                      </a:solidFill>
-                      <a:prstDash val="solid"/>
-                      <a:round/>
-                      <a:headEnd type="none" w="med" len="med"/>
-                      <a:tailEnd type="none" w="med" len="med"/>
-                    </a:lnT>
-                    <a:lnB w="9525" cap="flat" cmpd="sng" algn="ctr">
-                      <a:solidFill>
-                        <a:srgbClr val="BFBFBF"/>
-                      </a:solidFill>
-                      <a:prstDash val="solid"/>
-                      <a:round/>
-                      <a:headEnd type="none" w="med" len="med"/>
-                      <a:tailEnd type="none" w="med" len="med"/>
-                    </a:lnB>
-                  </a:tcPr>
-                </a:tc>
-                <a:tc>
-                  <a:txBody>
-                    <a:bodyPr/>
-                    <a:lstStyle/>
-                    <a:p>
-                      <a:pPr marL="0" indent="0" algn="l">
-                        <a:buNone/>
-                      </a:pPr>
-                      <a:r>
-                        <a:rPr lang="en-US" sz="900" dirty="0">
-                          <a:solidFill>
-                            <a:srgbClr val="222222"/>
-                          </a:solidFill>
-                          <a:latin typeface="Meiryo" pitchFamily="34" charset="0"/>
-                          <a:ea typeface="Meiryo" pitchFamily="34" charset="-122"/>
-                          <a:cs typeface="Meiryo" pitchFamily="34" charset="-120"/>
-                        </a:rPr>
-                        <a:t>民間・市内最大手</a:t>
-                      </a:r>
-                      <a:endParaRPr lang="en-US" sz="1050" dirty="0">
-                        <a:latin typeface="Meiryo" charset="0"/>
-                        <a:ea typeface="Meiryo" charset="0"/>
-                        <a:cs typeface="Meiryo" charset="0"/>
-                      </a:endParaRPr>
-                    </a:p>
-                  </a:txBody>
-                  <a:tcPr anchor="ctr" marT="18000" marB="18000" marL="64008" marR="45720">
-                    <a:lnL w="9525" cap="flat" cmpd="sng" algn="ctr">
-                      <a:solidFill>
-                        <a:srgbClr val="BFBFBF"/>
-                      </a:solidFill>
-                      <a:prstDash val="solid"/>
-                      <a:round/>
-                      <a:headEnd type="none" w="med" len="med"/>
-                      <a:tailEnd type="none" w="med" len="med"/>
-                    </a:lnL>
-                    <a:lnR w="9525" cap="flat" cmpd="sng" algn="ctr">
-                      <a:solidFill>
-                        <a:srgbClr val="BFBFBF"/>
-                      </a:solidFill>
-                      <a:prstDash val="solid"/>
-                      <a:round/>
-                      <a:headEnd type="none" w="med" len="med"/>
-                      <a:tailEnd type="none" w="med" len="med"/>
-                    </a:lnR>
-                    <a:lnT w="9525" cap="flat" cmpd="sng" algn="ctr">
-                      <a:solidFill>
-                        <a:srgbClr val="BFBFBF"/>
-                      </a:solidFill>
-                      <a:prstDash val="solid"/>
-                      <a:round/>
-                      <a:headEnd type="none" w="med" len="med"/>
-                      <a:tailEnd type="none" w="med" len="med"/>
-                    </a:lnT>
-                    <a:lnB w="9525" cap="flat" cmpd="sng" algn="ctr">
-                      <a:solidFill>
-                        <a:srgbClr val="BFBFBF"/>
-                      </a:solidFill>
-                      <a:prstDash val="solid"/>
-                      <a:round/>
-                      <a:headEnd type="none" w="med" len="med"/>
-                      <a:tailEnd type="none" w="med" len="med"/>
-                    </a:lnB>
-                  </a:tcPr>
-                </a:tc>
-                <a:tc>
-                  <a:txBody>
-                    <a:bodyPr/>
-                    <a:lstStyle/>
-                    <a:p>
-                      <a:pPr marL="0" indent="0" algn="l">
-                        <a:buNone/>
-                      </a:pPr>
-                      <a:r>
-                        <a:rPr lang="en-US" sz="900" dirty="0">
-                          <a:solidFill>
-                            <a:srgbClr val="222222"/>
-                          </a:solidFill>
-                          <a:latin typeface="Meiryo" pitchFamily="34" charset="0"/>
-                          <a:ea typeface="Meiryo" pitchFamily="34" charset="-122"/>
-                          <a:cs typeface="Meiryo" pitchFamily="34" charset="-120"/>
-                        </a:rPr>
-                        <a:t>個別支援＋「10の活動」。園庭・多職種（ST・心理検査士等）、サッカー療育</a:t>
-                      </a:r>
-                      <a:endParaRPr lang="en-US" sz="1050" dirty="0">
-                        <a:latin typeface="Meiryo" charset="0"/>
-                        <a:ea typeface="Meiryo" charset="0"/>
-                        <a:cs typeface="Meiryo" charset="0"/>
-                      </a:endParaRPr>
-                    </a:p>
-                  </a:txBody>
-                  <a:tcPr anchor="ctr" marT="18000" marB="18000" marL="64008" marR="45720">
-                    <a:lnL w="9525" cap="flat" cmpd="sng" algn="ctr">
-                      <a:solidFill>
-                        <a:srgbClr val="BFBFBF"/>
-                      </a:solidFill>
-                      <a:prstDash val="solid"/>
-                      <a:round/>
-                      <a:headEnd type="none" w="med" len="med"/>
-                      <a:tailEnd type="none" w="med" len="med"/>
-                    </a:lnL>
-                    <a:lnR w="9525" cap="flat" cmpd="sng" algn="ctr">
-                      <a:solidFill>
-                        <a:srgbClr val="BFBFBF"/>
-                      </a:solidFill>
-                      <a:prstDash val="solid"/>
-                      <a:round/>
-                      <a:headEnd type="none" w="med" len="med"/>
-                      <a:tailEnd type="none" w="med" len="med"/>
-                    </a:lnR>
-                    <a:lnT w="9525" cap="flat" cmpd="sng" algn="ctr">
-                      <a:solidFill>
-                        <a:srgbClr val="BFBFBF"/>
-                      </a:solidFill>
-                      <a:prstDash val="solid"/>
-                      <a:round/>
-                      <a:headEnd type="none" w="med" len="med"/>
-                      <a:tailEnd type="none" w="med" len="med"/>
-                    </a:lnT>
-                    <a:lnB w="9525" cap="flat" cmpd="sng" algn="ctr">
-                      <a:solidFill>
-                        <a:srgbClr val="BFBFBF"/>
-                      </a:solidFill>
-                      <a:prstDash val="solid"/>
-                      <a:round/>
-                      <a:headEnd type="none" w="med" len="med"/>
-                      <a:tailEnd type="none" w="med" len="med"/>
-                    </a:lnB>
-                  </a:tcPr>
-                </a:tc>
-                <a:tc>
-                  <a:txBody>
-                    <a:bodyPr/>
-                    <a:lstStyle/>
-                    <a:p>
-                      <a:pPr marL="0" indent="0" algn="l">
-                        <a:buNone/>
-                      </a:pPr>
-                      <a:r>
-                        <a:rPr lang="en-US" sz="900" dirty="0">
-                          <a:solidFill>
-                            <a:srgbClr val="222222"/>
-                          </a:solidFill>
-                          <a:latin typeface="Meiryo" pitchFamily="34" charset="0"/>
-                          <a:ea typeface="Meiryo" pitchFamily="34" charset="-122"/>
-                          <a:cs typeface="Meiryo" pitchFamily="34" charset="-120"/>
-                        </a:rPr>
-                        <a:t>日吉台・松之郷・八坂台</a:t>
-                      </a:r>
-                      <a:endParaRPr lang="en-US" sz="1050" dirty="0">
-                        <a:latin typeface="Meiryo" charset="0"/>
-                        <a:ea typeface="Meiryo" charset="0"/>
-                        <a:cs typeface="Meiryo" charset="0"/>
-                      </a:endParaRPr>
-                    </a:p>
-                  </a:txBody>
-                  <a:tcPr anchor="ctr" marT="18000" marB="18000" marL="64008" marR="45720">
-                    <a:lnL w="9525" cap="flat" cmpd="sng" algn="ctr">
-                      <a:solidFill>
-                        <a:srgbClr val="BFBFBF"/>
-                      </a:solidFill>
-                      <a:prstDash val="solid"/>
-                      <a:round/>
-                      <a:headEnd type="none" w="med" len="med"/>
-                      <a:tailEnd type="none" w="med" len="med"/>
-                    </a:lnL>
-                    <a:lnR w="9525" cap="flat" cmpd="sng" algn="ctr">
-                      <a:solidFill>
-                        <a:srgbClr val="BFBFBF"/>
-                      </a:solidFill>
-                      <a:prstDash val="solid"/>
-                      <a:round/>
-                      <a:headEnd type="none" w="med" len="med"/>
-                      <a:tailEnd type="none" w="med" len="med"/>
-                    </a:lnR>
-                    <a:lnT w="9525" cap="flat" cmpd="sng" algn="ctr">
-                      <a:solidFill>
-                        <a:srgbClr val="BFBFBF"/>
-                      </a:solidFill>
-                      <a:prstDash val="solid"/>
-                      <a:round/>
-                      <a:headEnd type="none" w="med" len="med"/>
-                      <a:tailEnd type="none" w="med" len="med"/>
-                    </a:lnT>
-                    <a:lnB w="9525" cap="flat" cmpd="sng" algn="ctr">
-                      <a:solidFill>
-                        <a:srgbClr val="BFBFBF"/>
-                      </a:solidFill>
-                      <a:prstDash val="solid"/>
-                      <a:round/>
-                      <a:headEnd type="none" w="med" len="med"/>
-                      <a:tailEnd type="none" w="med" len="med"/>
-                    </a:lnB>
-                  </a:tcPr>
-                </a:tc>
-                <a:extLst>
-                  <a:ext uri="{0D108BD9-81ED-4DB2-BD59-A6C34878D82A}">
-                    <a16:rowId xmlns:a16="http://schemas.microsoft.com/office/drawing/2014/main" val="10001"/>
-                  </a:ext>
-                </a:extLst>
-              </a:tr>
-              <a:tr h="464820">
-                <a:tc>
-                  <a:txBody>
-                    <a:bodyPr/>
-                    <a:lstStyle/>
-                    <a:p>
-                      <a:pPr marL="0" indent="0" algn="l">
-                        <a:buNone/>
-                      </a:pPr>
-                      <a:r>
-                        <a:rPr lang="en-US" sz="900" b="1" dirty="0">
-                          <a:solidFill>
-                            <a:srgbClr val="222222"/>
-                          </a:solidFill>
-                          <a:latin typeface="Meiryo" pitchFamily="34" charset="0"/>
-                          <a:ea typeface="Meiryo" pitchFamily="34" charset="-122"/>
-                          <a:cs typeface="Meiryo" pitchFamily="34" charset="-120"/>
-                        </a:rPr>
-                        <a:t>株式会社ベストグロウ</a:t>
-                      </a:r>
-                      <a:endParaRPr lang="en-US" sz="1050" dirty="0">
-                        <a:latin typeface="Meiryo" charset="0"/>
-                        <a:ea typeface="Meiryo" charset="0"/>
-                        <a:cs typeface="Meiryo" charset="0"/>
-                      </a:endParaRPr>
-                    </a:p>
-                  </a:txBody>
-                  <a:tcPr anchor="ctr" marT="18000" marB="18000" marL="64008" marR="45720">
-                    <a:lnL w="9525" cap="flat" cmpd="sng" algn="ctr">
-                      <a:solidFill>
-                        <a:srgbClr val="BFBFBF"/>
-                      </a:solidFill>
-                      <a:prstDash val="solid"/>
-                      <a:round/>
-                      <a:headEnd type="none" w="med" len="med"/>
-                      <a:tailEnd type="none" w="med" len="med"/>
-                    </a:lnL>
-                    <a:lnR w="9525" cap="flat" cmpd="sng" algn="ctr">
-                      <a:solidFill>
-                        <a:srgbClr val="BFBFBF"/>
-                      </a:solidFill>
-                      <a:prstDash val="solid"/>
-                      <a:round/>
-                      <a:headEnd type="none" w="med" len="med"/>
-                      <a:tailEnd type="none" w="med" len="med"/>
-                    </a:lnR>
-                    <a:lnT w="9525" cap="flat" cmpd="sng" algn="ctr">
-                      <a:solidFill>
-                        <a:srgbClr val="BFBFBF"/>
-                      </a:solidFill>
-                      <a:prstDash val="solid"/>
-                      <a:round/>
-                      <a:headEnd type="none" w="med" len="med"/>
-                      <a:tailEnd type="none" w="med" len="med"/>
-                    </a:lnT>
-                    <a:lnB w="9525" cap="flat" cmpd="sng" algn="ctr">
-                      <a:solidFill>
-                        <a:srgbClr val="BFBFBF"/>
-                      </a:solidFill>
-                      <a:prstDash val="solid"/>
-                      <a:round/>
-                      <a:headEnd type="none" w="med" len="med"/>
-                      <a:tailEnd type="none" w="med" len="med"/>
-                    </a:lnB>
-                  </a:tcPr>
-                </a:tc>
-                <a:tc>
-                  <a:txBody>
-                    <a:bodyPr/>
-                    <a:lstStyle/>
-                    <a:p>
-                      <a:pPr marL="0" indent="0" algn="l">
-                        <a:buNone/>
-                      </a:pPr>
-                      <a:r>
-                        <a:rPr lang="en-US" sz="900" dirty="0">
-                          <a:solidFill>
-                            <a:srgbClr val="222222"/>
-                          </a:solidFill>
-                          <a:latin typeface="Meiryo" pitchFamily="34" charset="0"/>
-                          <a:ea typeface="Meiryo" pitchFamily="34" charset="-122"/>
-                          <a:cs typeface="Meiryo" pitchFamily="34" charset="-120"/>
-                        </a:rPr>
-                        <a:t>2</a:t>
-                      </a:r>
-                      <a:endParaRPr lang="en-US" sz="1050" dirty="0">
-                        <a:latin typeface="Meiryo" charset="0"/>
-                        <a:ea typeface="Meiryo" charset="0"/>
-                        <a:cs typeface="Meiryo" charset="0"/>
-                      </a:endParaRPr>
-                    </a:p>
-                  </a:txBody>
-                  <a:tcPr anchor="ctr" marT="18000" marB="18000" marL="64008" marR="45720">
-                    <a:lnL w="9525" cap="flat" cmpd="sng" algn="ctr">
-                      <a:solidFill>
-                        <a:srgbClr val="BFBFBF"/>
-                      </a:solidFill>
-                      <a:prstDash val="solid"/>
-                      <a:round/>
-                      <a:headEnd type="none" w="med" len="med"/>
-                      <a:tailEnd type="none" w="med" len="med"/>
-                    </a:lnL>
-                    <a:lnR w="9525" cap="flat" cmpd="sng" algn="ctr">
-                      <a:solidFill>
-                        <a:srgbClr val="BFBFBF"/>
-                      </a:solidFill>
-                      <a:prstDash val="solid"/>
-                      <a:round/>
-                      <a:headEnd type="none" w="med" len="med"/>
-                      <a:tailEnd type="none" w="med" len="med"/>
-                    </a:lnR>
-                    <a:lnT w="9525" cap="flat" cmpd="sng" algn="ctr">
-                      <a:solidFill>
-                        <a:srgbClr val="BFBFBF"/>
-                      </a:solidFill>
-                      <a:prstDash val="solid"/>
-                      <a:round/>
-                      <a:headEnd type="none" w="med" len="med"/>
-                      <a:tailEnd type="none" w="med" len="med"/>
-                    </a:lnT>
-                    <a:lnB w="9525" cap="flat" cmpd="sng" algn="ctr">
-                      <a:solidFill>
-                        <a:srgbClr val="BFBFBF"/>
-                      </a:solidFill>
-                      <a:prstDash val="solid"/>
-                      <a:round/>
-                      <a:headEnd type="none" w="med" len="med"/>
-                      <a:tailEnd type="none" w="med" len="med"/>
-                    </a:lnB>
-                  </a:tcPr>
-                </a:tc>
-                <a:tc>
-                  <a:txBody>
-                    <a:bodyPr/>
-                    <a:lstStyle/>
-                    <a:p>
-                      <a:pPr marL="0" indent="0" algn="l">
-                        <a:buNone/>
-                      </a:pPr>
-                      <a:r>
-                        <a:rPr lang="en-US" sz="900" dirty="0">
-                          <a:solidFill>
-                            <a:srgbClr val="222222"/>
-                          </a:solidFill>
-                          <a:latin typeface="Meiryo" pitchFamily="34" charset="0"/>
-                          <a:ea typeface="Meiryo" pitchFamily="34" charset="-122"/>
-                          <a:cs typeface="Meiryo" pitchFamily="34" charset="-120"/>
-                        </a:rPr>
-                        <a:t>民間・運動療育特化</a:t>
-                      </a:r>
-                      <a:endParaRPr lang="en-US" sz="1050" dirty="0">
-                        <a:latin typeface="Meiryo" charset="0"/>
-                        <a:ea typeface="Meiryo" charset="0"/>
-                        <a:cs typeface="Meiryo" charset="0"/>
-                      </a:endParaRPr>
-                    </a:p>
-                  </a:txBody>
-                  <a:tcPr anchor="ctr" marT="18000" marB="18000" marL="64008" marR="45720">
-                    <a:lnL w="9525" cap="flat" cmpd="sng" algn="ctr">
-                      <a:solidFill>
-                        <a:srgbClr val="BFBFBF"/>
-                      </a:solidFill>
-                      <a:prstDash val="solid"/>
-                      <a:round/>
-                      <a:headEnd type="none" w="med" len="med"/>
-                      <a:tailEnd type="none" w="med" len="med"/>
-                    </a:lnL>
-                    <a:lnR w="9525" cap="flat" cmpd="sng" algn="ctr">
-                      <a:solidFill>
-                        <a:srgbClr val="BFBFBF"/>
-                      </a:solidFill>
-                      <a:prstDash val="solid"/>
-                      <a:round/>
-                      <a:headEnd type="none" w="med" len="med"/>
-                      <a:tailEnd type="none" w="med" len="med"/>
-                    </a:lnR>
-                    <a:lnT w="9525" cap="flat" cmpd="sng" algn="ctr">
-                      <a:solidFill>
-                        <a:srgbClr val="BFBFBF"/>
-                      </a:solidFill>
-                      <a:prstDash val="solid"/>
-                      <a:round/>
-                      <a:headEnd type="none" w="med" len="med"/>
-                      <a:tailEnd type="none" w="med" len="med"/>
-                    </a:lnT>
-                    <a:lnB w="9525" cap="flat" cmpd="sng" algn="ctr">
-                      <a:solidFill>
-                        <a:srgbClr val="BFBFBF"/>
-                      </a:solidFill>
-                      <a:prstDash val="solid"/>
-                      <a:round/>
-                      <a:headEnd type="none" w="med" len="med"/>
-                      <a:tailEnd type="none" w="med" len="med"/>
-                    </a:lnB>
-                  </a:tcPr>
-                </a:tc>
-                <a:tc>
-                  <a:txBody>
-                    <a:bodyPr/>
-                    <a:lstStyle/>
-                    <a:p>
-                      <a:pPr marL="0" indent="0" algn="l">
-                        <a:buNone/>
-                      </a:pPr>
-                      <a:r>
-                        <a:rPr lang="en-US" sz="900" dirty="0">
-                          <a:solidFill>
-                            <a:srgbClr val="222222"/>
-                          </a:solidFill>
-                          <a:latin typeface="Meiryo" pitchFamily="34" charset="0"/>
-                          <a:ea typeface="Meiryo" pitchFamily="34" charset="-122"/>
-                          <a:cs typeface="Meiryo" pitchFamily="34" charset="-120"/>
-                        </a:rPr>
-                        <a:t>柳沢運動プログラムによる運動療育。平日9:00〜18:00・送迎あり</a:t>
-                      </a:r>
-                      <a:endParaRPr lang="en-US" sz="1050" dirty="0">
-                        <a:latin typeface="Meiryo" charset="0"/>
-                        <a:ea typeface="Meiryo" charset="0"/>
-                        <a:cs typeface="Meiryo" charset="0"/>
-                      </a:endParaRPr>
-                    </a:p>
-                  </a:txBody>
-                  <a:tcPr anchor="ctr" marT="18000" marB="18000" marL="64008" marR="45720">
-                    <a:lnL w="9525" cap="flat" cmpd="sng" algn="ctr">
-                      <a:solidFill>
-                        <a:srgbClr val="BFBFBF"/>
-                      </a:solidFill>
-                      <a:prstDash val="solid"/>
-                      <a:round/>
-                      <a:headEnd type="none" w="med" len="med"/>
-                      <a:tailEnd type="none" w="med" len="med"/>
-                    </a:lnL>
-                    <a:lnR w="9525" cap="flat" cmpd="sng" algn="ctr">
-                      <a:solidFill>
-                        <a:srgbClr val="BFBFBF"/>
-                      </a:solidFill>
-                      <a:prstDash val="solid"/>
-                      <a:round/>
-                      <a:headEnd type="none" w="med" len="med"/>
-                      <a:tailEnd type="none" w="med" len="med"/>
-                    </a:lnR>
-                    <a:lnT w="9525" cap="flat" cmpd="sng" algn="ctr">
-                      <a:solidFill>
-                        <a:srgbClr val="BFBFBF"/>
-                      </a:solidFill>
-                      <a:prstDash val="solid"/>
-                      <a:round/>
-                      <a:headEnd type="none" w="med" len="med"/>
-                      <a:tailEnd type="none" w="med" len="med"/>
-                    </a:lnT>
-                    <a:lnB w="9525" cap="flat" cmpd="sng" algn="ctr">
-                      <a:solidFill>
-                        <a:srgbClr val="BFBFBF"/>
-                      </a:solidFill>
-                      <a:prstDash val="solid"/>
-                      <a:round/>
-                      <a:headEnd type="none" w="med" len="med"/>
-                      <a:tailEnd type="none" w="med" len="med"/>
-                    </a:lnB>
-                  </a:tcPr>
-                </a:tc>
-                <a:tc>
-                  <a:txBody>
-                    <a:bodyPr/>
-                    <a:lstStyle/>
-                    <a:p>
-                      <a:pPr marL="0" indent="0" algn="l">
-                        <a:buNone/>
-                      </a:pPr>
-                      <a:r>
-                        <a:rPr lang="en-US" sz="900" dirty="0">
-                          <a:solidFill>
-                            <a:srgbClr val="222222"/>
-                          </a:solidFill>
-                          <a:latin typeface="Meiryo" pitchFamily="34" charset="0"/>
-                          <a:ea typeface="Meiryo" pitchFamily="34" charset="-122"/>
-                          <a:cs typeface="Meiryo" pitchFamily="34" charset="-120"/>
-                        </a:rPr>
-                        <a:t>東新宿・田間</a:t>
-                      </a:r>
-                      <a:endParaRPr lang="en-US" sz="1050" dirty="0">
-                        <a:latin typeface="Meiryo" charset="0"/>
-                        <a:ea typeface="Meiryo" charset="0"/>
-                        <a:cs typeface="Meiryo" charset="0"/>
-                      </a:endParaRPr>
-                    </a:p>
-                  </a:txBody>
-                  <a:tcPr anchor="ctr" marT="18000" marB="18000" marL="64008" marR="45720">
-                    <a:lnL w="9525" cap="flat" cmpd="sng" algn="ctr">
-                      <a:solidFill>
-                        <a:srgbClr val="BFBFBF"/>
-                      </a:solidFill>
-                      <a:prstDash val="solid"/>
-                      <a:round/>
-                      <a:headEnd type="none" w="med" len="med"/>
-                      <a:tailEnd type="none" w="med" len="med"/>
-                    </a:lnL>
-                    <a:lnR w="9525" cap="flat" cmpd="sng" algn="ctr">
-                      <a:solidFill>
-                        <a:srgbClr val="BFBFBF"/>
-                      </a:solidFill>
-                      <a:prstDash val="solid"/>
-                      <a:round/>
-                      <a:headEnd type="none" w="med" len="med"/>
-                      <a:tailEnd type="none" w="med" len="med"/>
-                    </a:lnR>
-                    <a:lnT w="9525" cap="flat" cmpd="sng" algn="ctr">
-                      <a:solidFill>
-                        <a:srgbClr val="BFBFBF"/>
-                      </a:solidFill>
-                      <a:prstDash val="solid"/>
-                      <a:round/>
-                      <a:headEnd type="none" w="med" len="med"/>
-                      <a:tailEnd type="none" w="med" len="med"/>
-                    </a:lnT>
-                    <a:lnB w="9525" cap="flat" cmpd="sng" algn="ctr">
-                      <a:solidFill>
-                        <a:srgbClr val="BFBFBF"/>
-                      </a:solidFill>
-                      <a:prstDash val="solid"/>
-                      <a:round/>
-                      <a:headEnd type="none" w="med" len="med"/>
-                      <a:tailEnd type="none" w="med" len="med"/>
-                    </a:lnB>
-                  </a:tcPr>
-                </a:tc>
-                <a:extLst>
-                  <a:ext uri="{0D108BD9-81ED-4DB2-BD59-A6C34878D82A}">
-                    <a16:rowId xmlns:a16="http://schemas.microsoft.com/office/drawing/2014/main" val="10001"/>
-                  </a:ext>
-                </a:extLst>
-              </a:tr>
-              <a:tr h="464820">
-                <a:tc>
-                  <a:txBody>
-                    <a:bodyPr/>
-                    <a:lstStyle/>
-                    <a:p>
-                      <a:pPr marL="0" indent="0" algn="l">
-                        <a:buNone/>
-                      </a:pPr>
-                      <a:r>
-                        <a:rPr lang="en-US" sz="900" b="1" dirty="0">
-                          <a:solidFill>
-                            <a:srgbClr val="222222"/>
-                          </a:solidFill>
-                          <a:latin typeface="Meiryo" pitchFamily="34" charset="0"/>
-                          <a:ea typeface="Meiryo" pitchFamily="34" charset="-122"/>
-                          <a:cs typeface="Meiryo" pitchFamily="34" charset="-120"/>
-                        </a:rPr>
-                        <a:t>子ども支援センター（まあちる／ぽけっと）</a:t>
-                      </a:r>
-                      <a:endParaRPr lang="en-US" sz="1050" dirty="0">
-                        <a:latin typeface="Meiryo" charset="0"/>
-                        <a:ea typeface="Meiryo" charset="0"/>
-                        <a:cs typeface="Meiryo" charset="0"/>
-                      </a:endParaRPr>
-                    </a:p>
-                  </a:txBody>
-                  <a:tcPr anchor="ctr" marT="18000" marB="18000" marL="64008" marR="45720">
-                    <a:lnL w="9525" cap="flat" cmpd="sng" algn="ctr">
-                      <a:solidFill>
-                        <a:srgbClr val="BFBFBF"/>
-                      </a:solidFill>
-                      <a:prstDash val="solid"/>
-                      <a:round/>
-                      <a:headEnd type="none" w="med" len="med"/>
-                      <a:tailEnd type="none" w="med" len="med"/>
-                    </a:lnL>
-                    <a:lnR w="9525" cap="flat" cmpd="sng" algn="ctr">
-                      <a:solidFill>
-                        <a:srgbClr val="BFBFBF"/>
-                      </a:solidFill>
-                      <a:prstDash val="solid"/>
-                      <a:round/>
-                      <a:headEnd type="none" w="med" len="med"/>
-                      <a:tailEnd type="none" w="med" len="med"/>
-                    </a:lnR>
-                    <a:lnT w="9525" cap="flat" cmpd="sng" algn="ctr">
-                      <a:solidFill>
-                        <a:srgbClr val="BFBFBF"/>
-                      </a:solidFill>
-                      <a:prstDash val="solid"/>
-                      <a:round/>
-                      <a:headEnd type="none" w="med" len="med"/>
-                      <a:tailEnd type="none" w="med" len="med"/>
-                    </a:lnT>
-                    <a:lnB w="9525" cap="flat" cmpd="sng" algn="ctr">
-                      <a:solidFill>
-                        <a:srgbClr val="BFBFBF"/>
-                      </a:solidFill>
-                      <a:prstDash val="solid"/>
-                      <a:round/>
-                      <a:headEnd type="none" w="med" len="med"/>
-                      <a:tailEnd type="none" w="med" len="med"/>
-                    </a:lnB>
-                  </a:tcPr>
-                </a:tc>
-                <a:tc>
-                  <a:txBody>
-                    <a:bodyPr/>
-                    <a:lstStyle/>
-                    <a:p>
-                      <a:pPr marL="0" indent="0" algn="l">
-                        <a:buNone/>
-                      </a:pPr>
-                      <a:r>
-                        <a:rPr lang="en-US" sz="900" dirty="0">
-                          <a:solidFill>
-                            <a:srgbClr val="222222"/>
-                          </a:solidFill>
-                          <a:latin typeface="Meiryo" pitchFamily="34" charset="0"/>
-                          <a:ea typeface="Meiryo" pitchFamily="34" charset="-122"/>
-                          <a:cs typeface="Meiryo" pitchFamily="34" charset="-120"/>
-                        </a:rPr>
-                        <a:t>2</a:t>
-                      </a:r>
-                      <a:endParaRPr lang="en-US" sz="1050" dirty="0">
-                        <a:latin typeface="Meiryo" charset="0"/>
-                        <a:ea typeface="Meiryo" charset="0"/>
-                        <a:cs typeface="Meiryo" charset="0"/>
-                      </a:endParaRPr>
-                    </a:p>
-                  </a:txBody>
-                  <a:tcPr anchor="ctr" marT="18000" marB="18000" marL="64008" marR="45720">
-                    <a:lnL w="9525" cap="flat" cmpd="sng" algn="ctr">
-                      <a:solidFill>
-                        <a:srgbClr val="BFBFBF"/>
-                      </a:solidFill>
-                      <a:prstDash val="solid"/>
-                      <a:round/>
-                      <a:headEnd type="none" w="med" len="med"/>
-                      <a:tailEnd type="none" w="med" len="med"/>
-                    </a:lnL>
-                    <a:lnR w="9525" cap="flat" cmpd="sng" algn="ctr">
-                      <a:solidFill>
-                        <a:srgbClr val="BFBFBF"/>
-                      </a:solidFill>
-                      <a:prstDash val="solid"/>
-                      <a:round/>
-                      <a:headEnd type="none" w="med" len="med"/>
-                      <a:tailEnd type="none" w="med" len="med"/>
-                    </a:lnR>
-                    <a:lnT w="9525" cap="flat" cmpd="sng" algn="ctr">
-                      <a:solidFill>
-                        <a:srgbClr val="BFBFBF"/>
-                      </a:solidFill>
-                      <a:prstDash val="solid"/>
-                      <a:round/>
-                      <a:headEnd type="none" w="med" len="med"/>
-                      <a:tailEnd type="none" w="med" len="med"/>
-                    </a:lnT>
-                    <a:lnB w="9525" cap="flat" cmpd="sng" algn="ctr">
-                      <a:solidFill>
-                        <a:srgbClr val="BFBFBF"/>
-                      </a:solidFill>
-                      <a:prstDash val="solid"/>
-                      <a:round/>
-                      <a:headEnd type="none" w="med" len="med"/>
-                      <a:tailEnd type="none" w="med" len="med"/>
-                    </a:lnB>
-                  </a:tcPr>
-                </a:tc>
-                <a:tc>
-                  <a:txBody>
-                    <a:bodyPr/>
-                    <a:lstStyle/>
-                    <a:p>
-                      <a:pPr marL="0" indent="0" algn="l">
-                        <a:buNone/>
-                      </a:pPr>
-                      <a:r>
-                        <a:rPr lang="en-US" sz="900" dirty="0">
-                          <a:solidFill>
-                            <a:srgbClr val="222222"/>
-                          </a:solidFill>
-                          <a:latin typeface="Meiryo" pitchFamily="34" charset="0"/>
-                          <a:ea typeface="Meiryo" pitchFamily="34" charset="-122"/>
-                          <a:cs typeface="Meiryo" pitchFamily="34" charset="-120"/>
-                        </a:rPr>
-                        <a:t>民間・年齢分離型</a:t>
-                      </a:r>
-                      <a:endParaRPr lang="en-US" sz="1050" dirty="0">
-                        <a:latin typeface="Meiryo" charset="0"/>
-                        <a:ea typeface="Meiryo" charset="0"/>
-                        <a:cs typeface="Meiryo" charset="0"/>
-                      </a:endParaRPr>
-                    </a:p>
-                  </a:txBody>
-                  <a:tcPr anchor="ctr" marT="18000" marB="18000" marL="64008" marR="45720">
-                    <a:lnL w="9525" cap="flat" cmpd="sng" algn="ctr">
-                      <a:solidFill>
-                        <a:srgbClr val="BFBFBF"/>
-                      </a:solidFill>
-                      <a:prstDash val="solid"/>
-                      <a:round/>
-                      <a:headEnd type="none" w="med" len="med"/>
-                      <a:tailEnd type="none" w="med" len="med"/>
-                    </a:lnL>
-                    <a:lnR w="9525" cap="flat" cmpd="sng" algn="ctr">
-                      <a:solidFill>
-                        <a:srgbClr val="BFBFBF"/>
-                      </a:solidFill>
-                      <a:prstDash val="solid"/>
-                      <a:round/>
-                      <a:headEnd type="none" w="med" len="med"/>
-                      <a:tailEnd type="none" w="med" len="med"/>
-                    </a:lnR>
-                    <a:lnT w="9525" cap="flat" cmpd="sng" algn="ctr">
-                      <a:solidFill>
-                        <a:srgbClr val="BFBFBF"/>
-                      </a:solidFill>
-                      <a:prstDash val="solid"/>
-                      <a:round/>
-                      <a:headEnd type="none" w="med" len="med"/>
-                      <a:tailEnd type="none" w="med" len="med"/>
-                    </a:lnT>
-                    <a:lnB w="9525" cap="flat" cmpd="sng" algn="ctr">
-                      <a:solidFill>
-                        <a:srgbClr val="BFBFBF"/>
-                      </a:solidFill>
-                      <a:prstDash val="solid"/>
-                      <a:round/>
-                      <a:headEnd type="none" w="med" len="med"/>
-                      <a:tailEnd type="none" w="med" len="med"/>
-                    </a:lnB>
-                  </a:tcPr>
-                </a:tc>
-                <a:tc>
-                  <a:txBody>
-                    <a:bodyPr/>
-                    <a:lstStyle/>
-                    <a:p>
-                      <a:pPr marL="0" indent="0" algn="l">
-                        <a:buNone/>
-                      </a:pPr>
-                      <a:r>
-                        <a:rPr lang="en-US" sz="900" dirty="0">
-                          <a:solidFill>
-                            <a:srgbClr val="222222"/>
-                          </a:solidFill>
-                          <a:latin typeface="Meiryo" pitchFamily="34" charset="0"/>
-                          <a:ea typeface="Meiryo" pitchFamily="34" charset="-122"/>
-                          <a:cs typeface="Meiryo" pitchFamily="34" charset="-120"/>
-                        </a:rPr>
-                        <a:t>まあちる＝主に2〜12歳（火〜土）、ぽけっと＝主に6〜18歳（月〜土）。9:00〜18:00</a:t>
-                      </a:r>
-                      <a:endParaRPr lang="en-US" sz="1050" dirty="0">
-                        <a:latin typeface="Meiryo" charset="0"/>
-                        <a:ea typeface="Meiryo" charset="0"/>
-                        <a:cs typeface="Meiryo" charset="0"/>
-                      </a:endParaRPr>
-                    </a:p>
-                  </a:txBody>
-                  <a:tcPr anchor="ctr" marT="18000" marB="18000" marL="64008" marR="45720">
-                    <a:lnL w="9525" cap="flat" cmpd="sng" algn="ctr">
-                      <a:solidFill>
-                        <a:srgbClr val="BFBFBF"/>
-                      </a:solidFill>
-                      <a:prstDash val="solid"/>
-                      <a:round/>
-                      <a:headEnd type="none" w="med" len="med"/>
-                      <a:tailEnd type="none" w="med" len="med"/>
-                    </a:lnL>
-                    <a:lnR w="9525" cap="flat" cmpd="sng" algn="ctr">
-                      <a:solidFill>
-                        <a:srgbClr val="BFBFBF"/>
-                      </a:solidFill>
-                      <a:prstDash val="solid"/>
-                      <a:round/>
-                      <a:headEnd type="none" w="med" len="med"/>
-                      <a:tailEnd type="none" w="med" len="med"/>
-                    </a:lnR>
-                    <a:lnT w="9525" cap="flat" cmpd="sng" algn="ctr">
-                      <a:solidFill>
-                        <a:srgbClr val="BFBFBF"/>
-                      </a:solidFill>
-                      <a:prstDash val="solid"/>
-                      <a:round/>
-                      <a:headEnd type="none" w="med" len="med"/>
-                      <a:tailEnd type="none" w="med" len="med"/>
-                    </a:lnT>
-                    <a:lnB w="9525" cap="flat" cmpd="sng" algn="ctr">
-                      <a:solidFill>
-                        <a:srgbClr val="BFBFBF"/>
-                      </a:solidFill>
-                      <a:prstDash val="solid"/>
-                      <a:round/>
-                      <a:headEnd type="none" w="med" len="med"/>
-                      <a:tailEnd type="none" w="med" len="med"/>
-                    </a:lnB>
-                  </a:tcPr>
-                </a:tc>
-                <a:tc>
-                  <a:txBody>
-                    <a:bodyPr/>
-                    <a:lstStyle/>
-                    <a:p>
-                      <a:pPr marL="0" indent="0" algn="l">
-                        <a:buNone/>
-                      </a:pPr>
-                      <a:r>
-                        <a:rPr lang="en-US" sz="900" dirty="0">
-                          <a:solidFill>
-                            <a:srgbClr val="222222"/>
-                          </a:solidFill>
-                          <a:latin typeface="Meiryo" pitchFamily="34" charset="0"/>
-                          <a:ea typeface="Meiryo" pitchFamily="34" charset="-122"/>
-                          <a:cs typeface="Meiryo" pitchFamily="34" charset="-120"/>
-                        </a:rPr>
-                        <a:t>東岩崎・東上宿</a:t>
-                      </a:r>
-                      <a:endParaRPr lang="en-US" sz="1050" dirty="0">
-                        <a:latin typeface="Meiryo" charset="0"/>
-                        <a:ea typeface="Meiryo" charset="0"/>
-                        <a:cs typeface="Meiryo" charset="0"/>
-                      </a:endParaRPr>
-                    </a:p>
-                  </a:txBody>
-                  <a:tcPr anchor="ctr" marT="18000" marB="18000" marL="64008" marR="45720">
-                    <a:lnL w="9525" cap="flat" cmpd="sng" algn="ctr">
-                      <a:solidFill>
-                        <a:srgbClr val="BFBFBF"/>
-                      </a:solidFill>
-                      <a:prstDash val="solid"/>
-                      <a:round/>
-                      <a:headEnd type="none" w="med" len="med"/>
-                      <a:tailEnd type="none" w="med" len="med"/>
-                    </a:lnL>
-                    <a:lnR w="9525" cap="flat" cmpd="sng" algn="ctr">
-                      <a:solidFill>
-                        <a:srgbClr val="BFBFBF"/>
-                      </a:solidFill>
-                      <a:prstDash val="solid"/>
-                      <a:round/>
-                      <a:headEnd type="none" w="med" len="med"/>
-                      <a:tailEnd type="none" w="med" len="med"/>
-                    </a:lnR>
-                    <a:lnT w="9525" cap="flat" cmpd="sng" algn="ctr">
-                      <a:solidFill>
-                        <a:srgbClr val="BFBFBF"/>
-                      </a:solidFill>
-                      <a:prstDash val="solid"/>
-                      <a:round/>
-                      <a:headEnd type="none" w="med" len="med"/>
-                      <a:tailEnd type="none" w="med" len="med"/>
-                    </a:lnT>
-                    <a:lnB w="9525" cap="flat" cmpd="sng" algn="ctr">
-                      <a:solidFill>
-                        <a:srgbClr val="BFBFBF"/>
-                      </a:solidFill>
-                      <a:prstDash val="solid"/>
-                      <a:round/>
-                      <a:headEnd type="none" w="med" len="med"/>
-                      <a:tailEnd type="none" w="med" len="med"/>
-                    </a:lnB>
-                  </a:tcPr>
-                </a:tc>
-                <a:extLst>
-                  <a:ext uri="{0D108BD9-81ED-4DB2-BD59-A6C34878D82A}">
-                    <a16:rowId xmlns:a16="http://schemas.microsoft.com/office/drawing/2014/main" val="10001"/>
-                  </a:ext>
-                </a:extLst>
-              </a:tr>
-              <a:tr h="464820">
-                <a:tc>
-                  <a:txBody>
-                    <a:bodyPr/>
-                    <a:lstStyle/>
-                    <a:p>
-                      <a:pPr marL="0" indent="0" algn="l">
-                        <a:buNone/>
-                      </a:pPr>
-                      <a:r>
-                        <a:rPr lang="en-US" sz="900" b="1" dirty="0">
-                          <a:solidFill>
-                            <a:srgbClr val="222222"/>
-                          </a:solidFill>
-                          <a:latin typeface="Meiryo" pitchFamily="34" charset="0"/>
-                          <a:ea typeface="Meiryo" pitchFamily="34" charset="-122"/>
-                          <a:cs typeface="Meiryo" pitchFamily="34" charset="-120"/>
-                        </a:rPr>
-                        <a:t>コンパッション保育所／鴇嶺の家</a:t>
-                      </a:r>
-                      <a:endParaRPr lang="en-US" sz="1050" dirty="0">
-                        <a:latin typeface="Meiryo" charset="0"/>
-                        <a:ea typeface="Meiryo" charset="0"/>
-                        <a:cs typeface="Meiryo" charset="0"/>
-                      </a:endParaRPr>
-                    </a:p>
-                  </a:txBody>
-                  <a:tcPr anchor="ctr" marT="18000" marB="18000" marL="64008" marR="45720">
-                    <a:lnL w="9525" cap="flat" cmpd="sng" algn="ctr">
-                      <a:solidFill>
-                        <a:srgbClr val="BFBFBF"/>
-                      </a:solidFill>
-                      <a:prstDash val="solid"/>
-                      <a:round/>
-                      <a:headEnd type="none" w="med" len="med"/>
-                      <a:tailEnd type="none" w="med" len="med"/>
-                    </a:lnL>
-                    <a:lnR w="9525" cap="flat" cmpd="sng" algn="ctr">
-                      <a:solidFill>
-                        <a:srgbClr val="BFBFBF"/>
-                      </a:solidFill>
-                      <a:prstDash val="solid"/>
-                      <a:round/>
-                      <a:headEnd type="none" w="med" len="med"/>
-                      <a:tailEnd type="none" w="med" len="med"/>
-                    </a:lnR>
-                    <a:lnT w="9525" cap="flat" cmpd="sng" algn="ctr">
-                      <a:solidFill>
-                        <a:srgbClr val="BFBFBF"/>
-                      </a:solidFill>
-                      <a:prstDash val="solid"/>
-                      <a:round/>
-                      <a:headEnd type="none" w="med" len="med"/>
-                      <a:tailEnd type="none" w="med" len="med"/>
-                    </a:lnT>
-                    <a:lnB w="9525" cap="flat" cmpd="sng" algn="ctr">
-                      <a:solidFill>
-                        <a:srgbClr val="BFBFBF"/>
-                      </a:solidFill>
-                      <a:prstDash val="solid"/>
-                      <a:round/>
-                      <a:headEnd type="none" w="med" len="med"/>
-                      <a:tailEnd type="none" w="med" len="med"/>
-                    </a:lnB>
-                  </a:tcPr>
-                </a:tc>
-                <a:tc>
-                  <a:txBody>
-                    <a:bodyPr/>
-                    <a:lstStyle/>
-                    <a:p>
-                      <a:pPr marL="0" indent="0" algn="l">
-                        <a:buNone/>
-                      </a:pPr>
-                      <a:r>
-                        <a:rPr lang="en-US" sz="900" dirty="0">
-                          <a:solidFill>
-                            <a:srgbClr val="222222"/>
-                          </a:solidFill>
-                          <a:latin typeface="Meiryo" pitchFamily="34" charset="0"/>
-                          <a:ea typeface="Meiryo" pitchFamily="34" charset="-122"/>
-                          <a:cs typeface="Meiryo" pitchFamily="34" charset="-120"/>
-                        </a:rPr>
-                        <a:t>2</a:t>
+                        <a:t>3</a:t>
                       </a:r>
                       <a:endParaRPr lang="en-US" sz="1050" dirty="0">
                         <a:latin typeface="Meiryo" charset="0"/>
@@ -4401,7 +6682,7 @@
                           <a:ea typeface="Meiryo" pitchFamily="34" charset="-122"/>
                           <a:cs typeface="Meiryo" pitchFamily="34" charset="-120"/>
                         </a:rPr>
-                        <a:t>保育所併設型（コンパッション）／児発＋放デイ併設（鴇嶺の家）</a:t>
+                        <a:t>求名駅圏・市北部・旧市街にそれぞれ立地。公開情報が乏しく要確認</a:t>
                       </a:r>
                       <a:endParaRPr lang="en-US" sz="1050" dirty="0">
                         <a:latin typeface="Meiryo" charset="0"/>
@@ -4466,7 +6747,7 @@
                           <a:ea typeface="Meiryo" pitchFamily="34" charset="-122"/>
                           <a:cs typeface="Meiryo" pitchFamily="34" charset="-120"/>
                         </a:rPr>
-                        <a:t>家之子・東金</a:t>
+                        <a:t>求名・家之子・東金</a:t>
                       </a:r>
                       <a:endParaRPr lang="en-US" sz="1050" dirty="0">
                         <a:latin typeface="Meiryo" charset="0"/>
@@ -4625,7 +6906,7 @@
                 <a:ea typeface="メイリオ" panose="020B0604030504040204" pitchFamily="50" charset="-128"/>
                 <a:cs typeface="Meiryo" pitchFamily="34" charset="-120"/>
               </a:rPr>
-              <a:t>東金市の児童発達支援は【公立1＋民間5運営主体／計12拠点】。うち基本塾5・ベストグロウ2・子ども支援センター2と、実質3グループで市内拠点の四分の三を押さえる寡占構造にある。</a:t>
+              <a:t>東金市の児童発達支援は【公立1＋民間7運営主体／計16拠点】。基本塾6・ベストグロウ2・子ども支援センター2・エスポワール2と、上位4グループで市内拠点の四分の三を押さえる寡占構造にある。</a:t>
             </a:r>
             <a:endParaRPr lang="en-US" sz="1000" dirty="0">
               <a:latin typeface="メイリオ" panose="020B0604030504040204" pitchFamily="50" charset="-128"/>
@@ -4673,7 +6954,7 @@
                 <a:ea typeface="メイリオ" panose="020B0604030504040204" pitchFamily="50" charset="-128"/>
                 <a:cs typeface="Meiryo" pitchFamily="34" charset="-120"/>
               </a:rPr>
-              <a:t>子ども支援センターは まあちる（主に2〜12歳）と ぽけっと（主に6〜18歳）で年齢帯を分ける2拠点運営。市内で未就学の受け皿を明確に担うのは 公立①・まあちる②・こどもプラス④⑤・基本塾⑥ に限られる。</a:t>
+              <a:t>子ども支援センターは まあちる（主に2〜12歳）と ぽけっと（主に6〜18歳）で年齢帯を分ける2拠点運営。市内で未就学の受け皿を明確に担うのは 公立①・まあちる②・こどもプラス④⑤・基本塾⑥ が中心。</a:t>
             </a:r>
             <a:endParaRPr lang="en-US" sz="1000" dirty="0">
               <a:latin typeface="メイリオ" panose="020B0604030504040204" pitchFamily="50" charset="-128"/>
@@ -4697,7 +6978,31 @@
                 <a:ea typeface="メイリオ" panose="020B0604030504040204" pitchFamily="50" charset="-128"/>
                 <a:cs typeface="Meiryo" pitchFamily="34" charset="-120"/>
               </a:rPr>
-              <a:t>立地は八坂台・日吉台のニュータウン側と東金駅周辺に集中。市南西部（福俵・求名・丘山地区）は空白地帯で、送迎圏の設計次第で新規参入の余地がある。なお公開情報が乏しい⑦⑧の稼働率・空き枠は市社会福祉課・相談支援事業所へのヒアリングで補完が必要。</a:t>
+              <a:t>立地は日吉台・八坂台のニュータウン側と東金駅周辺に集中する一方、求名駅圏にもエスポワール第2・果実の木求名が出店済みで、単純な空白地帯は残り少ない。新規参入は立地よりプログラムの差別化と送迎設計で勝負する局面。</a:t>
+            </a:r>
+            <a:endParaRPr lang="en-US" sz="1000" dirty="0">
+              <a:latin typeface="メイリオ" panose="020B0604030504040204" pitchFamily="50" charset="-128"/>
+              <a:ea typeface="メイリオ" panose="020B0604030504040204" pitchFamily="50" charset="-128"/>
+            </a:endParaRPr>
+          </a:p>
+          <a:p>
+            <a:pPr marL="342900" indent="-342900">
+              <a:spcAft>
+                <a:spcPts val="500"/>
+              </a:spcAft>
+              <a:buSzPct val="100000"/>
+              <a:buChar char="•"/>
+            </a:pPr>
+            <a:r>
+              <a:rPr lang="en-US" sz="850" dirty="0">
+                <a:solidFill>
+                  <a:srgbClr val="222222"/>
+                </a:solidFill>
+                <a:latin typeface="メイリオ" panose="020B0604030504040204" pitchFamily="50" charset="-128"/>
+                <a:ea typeface="メイリオ" panose="020B0604030504040204" pitchFamily="50" charset="-128"/>
+                <a:cs typeface="Meiryo" pitchFamily="34" charset="-120"/>
+              </a:rPr>
+              <a:t>公開情報が乏しい事業所（⑦⑧⑨⑩）が4件あり、稼働率・空き枠・運営法人は市社会福祉課および相談支援事業所へのヒアリングで補完が必要。</a:t>
             </a:r>
             <a:endParaRPr lang="en-US" sz="1000" dirty="0">
               <a:latin typeface="メイリオ" panose="020B0604030504040204" pitchFamily="50" charset="-128"/>
@@ -4812,7 +7117,7 @@
                 <a:ea typeface="Meiryo" pitchFamily="34" charset="-122"/>
                 <a:cs typeface="Meiryo" pitchFamily="34" charset="-120"/>
               </a:rPr>
-              <a:t>■ 東金市内の児童発達支援事業所　全12拠点（運営主体6）</a:t>
+              <a:t>■ 東金市内の児童発達支援事業所　全16拠点（運営主体8）</a:t>
             </a:r>
             <a:endParaRPr lang="en-US" sz="2100" dirty="0"/>
           </a:p>
@@ -4872,8 +7177,8 @@
           </p:nvPr>
         </p:nvGraphicFramePr>
         <p:xfrm>
-          <a:off x="502920" y="1783080"/>
-          <a:ext cx="11201400" cy="3977639"/>
+          <a:off x="502920" y="1719072"/>
+          <a:ext cx="11201400" cy="4096512"/>
         </p:xfrm>
         <a:graphic>
           <a:graphicData uri="http://schemas.openxmlformats.org/drawingml/2006/table">
@@ -4923,7 +7228,7 @@
                   </a:extLst>
                 </a:gridCol>
               </a:tblGrid>
-              <a:tr h="305972">
+              <a:tr h="240971">
                 <a:tc>
                   <a:txBody>
                     <a:bodyPr/>
@@ -4933,7 +7238,7 @@
                         <a:buNone/>
                       </a:pPr>
                       <a:r>
-                        <a:rPr lang="en-US" sz="950" b="1" dirty="0">
+                        <a:rPr lang="en-US" sz="850" b="1" dirty="0">
                           <a:solidFill>
                             <a:srgbClr val="FFFFFF"/>
                           </a:solidFill>
@@ -5001,7 +7306,7 @@
                         <a:buNone/>
                       </a:pPr>
                       <a:r>
-                        <a:rPr lang="en-US" sz="950" b="1" dirty="0">
+                        <a:rPr lang="en-US" sz="850" b="1" dirty="0">
                           <a:solidFill>
                             <a:srgbClr val="FFFFFF"/>
                           </a:solidFill>
@@ -5069,7 +7374,7 @@
                         <a:buNone/>
                       </a:pPr>
                       <a:r>
-                        <a:rPr lang="en-US" sz="950" b="1" dirty="0">
+                        <a:rPr lang="en-US" sz="850" b="1" dirty="0">
                           <a:solidFill>
                             <a:srgbClr val="FFFFFF"/>
                           </a:solidFill>
@@ -5137,7 +7442,7 @@
                         <a:buNone/>
                       </a:pPr>
                       <a:r>
-                        <a:rPr lang="en-US" sz="950" b="1" dirty="0" err="1">
+                        <a:rPr lang="en-US" sz="850" b="1" dirty="0" err="1">
                           <a:solidFill>
                             <a:srgbClr val="FFFFFF"/>
                           </a:solidFill>
@@ -5205,7 +7510,7 @@
                         <a:buNone/>
                       </a:pPr>
                       <a:r>
-                        <a:rPr lang="en-US" sz="950" b="1" dirty="0">
+                        <a:rPr lang="en-US" sz="850" b="1" dirty="0">
                           <a:solidFill>
                             <a:srgbClr val="FFFFFF"/>
                           </a:solidFill>
@@ -5273,7 +7578,7 @@
                         <a:buNone/>
                       </a:pPr>
                       <a:r>
-                        <a:rPr lang="en-US" sz="950" b="1" dirty="0">
+                        <a:rPr lang="en-US" sz="850" b="1" dirty="0">
                           <a:solidFill>
                             <a:srgbClr val="FFFFFF"/>
                           </a:solidFill>
@@ -5338,7 +7643,7 @@
                   </a:ext>
                 </a:extLst>
               </a:tr>
-              <a:tr h="305972">
+              <a:tr h="240971">
                 <a:tc>
                   <a:txBody>
                     <a:bodyPr/>
@@ -5348,7 +7653,7 @@
                         <a:buNone/>
                       </a:pPr>
                       <a:r>
-                        <a:rPr lang="en-US" sz="900" b="1" dirty="0">
+                        <a:rPr lang="en-US" sz="800" b="1" dirty="0">
                           <a:solidFill>
                             <a:srgbClr val="222222"/>
                           </a:solidFill>
@@ -5413,7 +7718,7 @@
                         <a:buNone/>
                       </a:pPr>
                       <a:r>
-                        <a:rPr lang="en-US" sz="900" b="1" dirty="0">
+                        <a:rPr lang="en-US" sz="800" b="1" dirty="0">
                           <a:solidFill>
                             <a:srgbClr val="222222"/>
                           </a:solidFill>
@@ -5478,7 +7783,7 @@
                         <a:buNone/>
                       </a:pPr>
                       <a:r>
-                        <a:rPr lang="en-US" sz="900" dirty="0">
+                        <a:rPr lang="en-US" sz="800" dirty="0">
                           <a:solidFill>
                             <a:srgbClr val="222222"/>
                           </a:solidFill>
@@ -5543,7 +7848,7 @@
                         <a:buNone/>
                       </a:pPr>
                       <a:r>
-                        <a:rPr lang="en-US" sz="900" dirty="0">
+                        <a:rPr lang="en-US" sz="800" dirty="0">
                           <a:solidFill>
                             <a:srgbClr val="222222"/>
                           </a:solidFill>
@@ -5608,7 +7913,7 @@
                         <a:buNone/>
                       </a:pPr>
                       <a:r>
-                        <a:rPr lang="en-US" sz="900" dirty="0">
+                        <a:rPr lang="en-US" sz="800" dirty="0">
                           <a:solidFill>
                             <a:srgbClr val="222222"/>
                           </a:solidFill>
@@ -5673,7 +7978,7 @@
                         <a:buNone/>
                       </a:pPr>
                       <a:r>
-                        <a:rPr lang="en-US" sz="900" dirty="0" u="sng">
+                        <a:rPr lang="en-US" sz="800" dirty="0" u="sng">
                           <a:solidFill>
                             <a:srgbClr val="1F5FA8"/>
                           </a:solidFill>
@@ -5731,7 +8036,7 @@
                   </a:ext>
                 </a:extLst>
               </a:tr>
-              <a:tr h="305972">
+              <a:tr h="240971">
                 <a:tc>
                   <a:txBody>
                     <a:bodyPr/>
@@ -5741,7 +8046,7 @@
                         <a:buNone/>
                       </a:pPr>
                       <a:r>
-                        <a:rPr lang="en-US" sz="900" b="1" dirty="0">
+                        <a:rPr lang="en-US" sz="800" b="1" dirty="0">
                           <a:solidFill>
                             <a:srgbClr val="222222"/>
                           </a:solidFill>
@@ -5806,7 +8111,7 @@
                         <a:buNone/>
                       </a:pPr>
                       <a:r>
-                        <a:rPr lang="en-US" sz="900" b="1" dirty="0">
+                        <a:rPr lang="en-US" sz="800" b="1" dirty="0">
                           <a:solidFill>
                             <a:srgbClr val="222222"/>
                           </a:solidFill>
@@ -5871,7 +8176,7 @@
                         <a:buNone/>
                       </a:pPr>
                       <a:r>
-                        <a:rPr lang="en-US" sz="900" dirty="0">
+                        <a:rPr lang="en-US" sz="800" dirty="0">
                           <a:solidFill>
                             <a:srgbClr val="222222"/>
                           </a:solidFill>
@@ -5936,7 +8241,7 @@
                         <a:buNone/>
                       </a:pPr>
                       <a:r>
-                        <a:rPr lang="en-US" sz="900" dirty="0">
+                        <a:rPr lang="en-US" sz="800" dirty="0">
                           <a:solidFill>
                             <a:srgbClr val="222222"/>
                           </a:solidFill>
@@ -6001,7 +8306,7 @@
                         <a:buNone/>
                       </a:pPr>
                       <a:r>
-                        <a:rPr lang="en-US" sz="900" dirty="0">
+                        <a:rPr lang="en-US" sz="800" dirty="0">
                           <a:solidFill>
                             <a:srgbClr val="222222"/>
                           </a:solidFill>
@@ -6066,7 +8371,7 @@
                         <a:buNone/>
                       </a:pPr>
                       <a:r>
-                        <a:rPr lang="en-US" sz="900" dirty="0" u="sng">
+                        <a:rPr lang="en-US" sz="800" dirty="0" u="sng">
                           <a:solidFill>
                             <a:srgbClr val="1F5FA8"/>
                           </a:solidFill>
@@ -6124,7 +8429,7 @@
                   </a:ext>
                 </a:extLst>
               </a:tr>
-              <a:tr h="305972">
+              <a:tr h="240971">
                 <a:tc>
                   <a:txBody>
                     <a:bodyPr/>
@@ -6134,7 +8439,7 @@
                         <a:buNone/>
                       </a:pPr>
                       <a:r>
-                        <a:rPr lang="en-US" sz="900" b="1" dirty="0">
+                        <a:rPr lang="en-US" sz="800" b="1" dirty="0">
                           <a:solidFill>
                             <a:srgbClr val="222222"/>
                           </a:solidFill>
@@ -6199,7 +8504,7 @@
                         <a:buNone/>
                       </a:pPr>
                       <a:r>
-                        <a:rPr lang="en-US" sz="900" b="1" dirty="0">
+                        <a:rPr lang="en-US" sz="800" b="1" dirty="0">
                           <a:solidFill>
                             <a:srgbClr val="222222"/>
                           </a:solidFill>
@@ -6264,7 +8569,7 @@
                         <a:buNone/>
                       </a:pPr>
                       <a:r>
-                        <a:rPr lang="en-US" sz="900" dirty="0">
+                        <a:rPr lang="en-US" sz="800" dirty="0">
                           <a:solidFill>
                             <a:srgbClr val="222222"/>
                           </a:solidFill>
@@ -6329,7 +8634,7 @@
                         <a:buNone/>
                       </a:pPr>
                       <a:r>
-                        <a:rPr lang="en-US" sz="900" dirty="0">
+                        <a:rPr lang="en-US" sz="800" dirty="0">
                           <a:solidFill>
                             <a:srgbClr val="222222"/>
                           </a:solidFill>
@@ -6394,7 +8699,7 @@
                         <a:buNone/>
                       </a:pPr>
                       <a:r>
-                        <a:rPr lang="en-US" sz="900" dirty="0">
+                        <a:rPr lang="en-US" sz="800" dirty="0">
                           <a:solidFill>
                             <a:srgbClr val="222222"/>
                           </a:solidFill>
@@ -6459,7 +8764,7 @@
                         <a:buNone/>
                       </a:pPr>
                       <a:r>
-                        <a:rPr lang="en-US" sz="900" dirty="0" u="sng">
+                        <a:rPr lang="en-US" sz="800" dirty="0" u="sng">
                           <a:solidFill>
                             <a:srgbClr val="1F5FA8"/>
                           </a:solidFill>
@@ -6517,7 +8822,7 @@
                   </a:ext>
                 </a:extLst>
               </a:tr>
-              <a:tr h="305972">
+              <a:tr h="240971">
                 <a:tc>
                   <a:txBody>
                     <a:bodyPr/>
@@ -6527,7 +8832,7 @@
                         <a:buNone/>
                       </a:pPr>
                       <a:r>
-                        <a:rPr lang="en-US" sz="900" b="1" dirty="0">
+                        <a:rPr lang="en-US" sz="800" b="1" dirty="0">
                           <a:solidFill>
                             <a:srgbClr val="222222"/>
                           </a:solidFill>
@@ -6592,7 +8897,7 @@
                         <a:buNone/>
                       </a:pPr>
                       <a:r>
-                        <a:rPr lang="en-US" sz="900" b="1" dirty="0">
+                        <a:rPr lang="en-US" sz="800" b="1" dirty="0">
                           <a:solidFill>
                             <a:srgbClr val="222222"/>
                           </a:solidFill>
@@ -6657,7 +8962,7 @@
                         <a:buNone/>
                       </a:pPr>
                       <a:r>
-                        <a:rPr lang="en-US" sz="900" dirty="0">
+                        <a:rPr lang="en-US" sz="800" dirty="0">
                           <a:solidFill>
                             <a:srgbClr val="222222"/>
                           </a:solidFill>
@@ -6722,7 +9027,7 @@
                         <a:buNone/>
                       </a:pPr>
                       <a:r>
-                        <a:rPr lang="en-US" sz="900" dirty="0">
+                        <a:rPr lang="en-US" sz="800" dirty="0">
                           <a:solidFill>
                             <a:srgbClr val="222222"/>
                           </a:solidFill>
@@ -6787,7 +9092,7 @@
                         <a:buNone/>
                       </a:pPr>
                       <a:r>
-                        <a:rPr lang="en-US" sz="900" dirty="0">
+                        <a:rPr lang="en-US" sz="800" dirty="0">
                           <a:solidFill>
                             <a:srgbClr val="222222"/>
                           </a:solidFill>
@@ -6852,7 +9157,7 @@
                         <a:buNone/>
                       </a:pPr>
                       <a:r>
-                        <a:rPr lang="en-US" sz="900" dirty="0" u="sng">
+                        <a:rPr lang="en-US" sz="800" dirty="0" u="sng">
                           <a:solidFill>
                             <a:srgbClr val="1F5FA8"/>
                           </a:solidFill>
@@ -6910,7 +9215,7 @@
                   </a:ext>
                 </a:extLst>
               </a:tr>
-              <a:tr h="305972">
+              <a:tr h="240971">
                 <a:tc>
                   <a:txBody>
                     <a:bodyPr/>
@@ -6920,7 +9225,7 @@
                         <a:buNone/>
                       </a:pPr>
                       <a:r>
-                        <a:rPr lang="en-US" sz="900" b="1" dirty="0">
+                        <a:rPr lang="en-US" sz="800" b="1" dirty="0">
                           <a:solidFill>
                             <a:srgbClr val="222222"/>
                           </a:solidFill>
@@ -6985,7 +9290,7 @@
                         <a:buNone/>
                       </a:pPr>
                       <a:r>
-                        <a:rPr lang="en-US" sz="900" b="1" dirty="0">
+                        <a:rPr lang="en-US" sz="800" b="1" dirty="0">
                           <a:solidFill>
                             <a:srgbClr val="222222"/>
                           </a:solidFill>
@@ -7050,7 +9355,7 @@
                         <a:buNone/>
                       </a:pPr>
                       <a:r>
-                        <a:rPr lang="en-US" sz="900" dirty="0">
+                        <a:rPr lang="en-US" sz="800" dirty="0">
                           <a:solidFill>
                             <a:srgbClr val="222222"/>
                           </a:solidFill>
@@ -7115,7 +9420,7 @@
                         <a:buNone/>
                       </a:pPr>
                       <a:r>
-                        <a:rPr lang="en-US" sz="900" dirty="0">
+                        <a:rPr lang="en-US" sz="800" dirty="0">
                           <a:solidFill>
                             <a:srgbClr val="222222"/>
                           </a:solidFill>
@@ -7180,7 +9485,7 @@
                         <a:buNone/>
                       </a:pPr>
                       <a:r>
-                        <a:rPr lang="en-US" sz="900" dirty="0">
+                        <a:rPr lang="en-US" sz="800" dirty="0">
                           <a:solidFill>
                             <a:srgbClr val="222222"/>
                           </a:solidFill>
@@ -7245,7 +9550,7 @@
                         <a:buNone/>
                       </a:pPr>
                       <a:r>
-                        <a:rPr lang="en-US" sz="900" dirty="0" u="sng">
+                        <a:rPr lang="en-US" sz="800" dirty="0" u="sng">
                           <a:solidFill>
                             <a:srgbClr val="1F5FA8"/>
                           </a:solidFill>
@@ -7303,7 +9608,7 @@
                   </a:ext>
                 </a:extLst>
               </a:tr>
-              <a:tr h="305972">
+              <a:tr h="240971">
                 <a:tc>
                   <a:txBody>
                     <a:bodyPr/>
@@ -7313,7 +9618,7 @@
                         <a:buNone/>
                       </a:pPr>
                       <a:r>
-                        <a:rPr lang="en-US" sz="900" b="1" dirty="0">
+                        <a:rPr lang="en-US" sz="800" b="1" dirty="0">
                           <a:solidFill>
                             <a:srgbClr val="222222"/>
                           </a:solidFill>
@@ -7378,7 +9683,7 @@
                         <a:buNone/>
                       </a:pPr>
                       <a:r>
-                        <a:rPr lang="en-US" sz="900" b="1" dirty="0">
+                        <a:rPr lang="en-US" sz="800" b="1" dirty="0">
                           <a:solidFill>
                             <a:srgbClr val="222222"/>
                           </a:solidFill>
@@ -7443,7 +9748,7 @@
                         <a:buNone/>
                       </a:pPr>
                       <a:r>
-                        <a:rPr lang="en-US" sz="900" dirty="0">
+                        <a:rPr lang="en-US" sz="800" dirty="0">
                           <a:solidFill>
                             <a:srgbClr val="222222"/>
                           </a:solidFill>
@@ -7508,7 +9813,7 @@
                         <a:buNone/>
                       </a:pPr>
                       <a:r>
-                        <a:rPr lang="en-US" sz="900" dirty="0">
+                        <a:rPr lang="en-US" sz="800" dirty="0">
                           <a:solidFill>
                             <a:srgbClr val="222222"/>
                           </a:solidFill>
@@ -7573,7 +9878,7 @@
                         <a:buNone/>
                       </a:pPr>
                       <a:r>
-                        <a:rPr lang="en-US" sz="900" dirty="0">
+                        <a:rPr lang="en-US" sz="800" dirty="0">
                           <a:solidFill>
                             <a:srgbClr val="222222"/>
                           </a:solidFill>
@@ -7638,7 +9943,7 @@
                         <a:buNone/>
                       </a:pPr>
                       <a:r>
-                        <a:rPr lang="en-US" sz="900" dirty="0" u="sng">
+                        <a:rPr lang="en-US" sz="800" dirty="0" u="sng">
                           <a:solidFill>
                             <a:srgbClr val="1F5FA8"/>
                           </a:solidFill>
@@ -7696,7 +10001,7 @@
                   </a:ext>
                 </a:extLst>
               </a:tr>
-              <a:tr h="305972">
+              <a:tr h="240971">
                 <a:tc>
                   <a:txBody>
                     <a:bodyPr/>
@@ -7706,7 +10011,7 @@
                         <a:buNone/>
                       </a:pPr>
                       <a:r>
-                        <a:rPr lang="en-US" sz="900" b="1" dirty="0">
+                        <a:rPr lang="en-US" sz="800" b="1" dirty="0">
                           <a:solidFill>
                             <a:srgbClr val="222222"/>
                           </a:solidFill>
@@ -7771,7 +10076,400 @@
                         <a:buNone/>
                       </a:pPr>
                       <a:r>
-                        <a:rPr lang="en-US" sz="900" b="1" dirty="0">
+                        <a:rPr lang="en-US" sz="800" b="1" dirty="0">
+                          <a:solidFill>
+                            <a:srgbClr val="222222"/>
+                          </a:solidFill>
+                          <a:latin typeface="Meiryo" pitchFamily="34" charset="0"/>
+                          <a:ea typeface="Meiryo" pitchFamily="34" charset="-122"/>
+                          <a:cs typeface="Meiryo" pitchFamily="34" charset="-120"/>
+                        </a:rPr>
+                        <a:t>基本塾優遊 西が丘</a:t>
+                      </a:r>
+                      <a:endParaRPr lang="en-US" sz="1100" dirty="0">
+                        <a:latin typeface="Meiryo" charset="0"/>
+                        <a:ea typeface="Meiryo" charset="0"/>
+                        <a:cs typeface="Meiryo" charset="0"/>
+                      </a:endParaRPr>
+                    </a:p>
+                  </a:txBody>
+                  <a:tcPr anchor="ctr" marT="18000" marB="18000" marL="64008" marR="45720">
+                    <a:lnL w="9525" cap="flat" cmpd="sng" algn="ctr">
+                      <a:solidFill>
+                        <a:srgbClr val="BFBFBF"/>
+                      </a:solidFill>
+                      <a:prstDash val="solid"/>
+                      <a:round/>
+                      <a:headEnd type="none" w="med" len="med"/>
+                      <a:tailEnd type="none" w="med" len="med"/>
+                    </a:lnL>
+                    <a:lnR w="9525" cap="flat" cmpd="sng" algn="ctr">
+                      <a:solidFill>
+                        <a:srgbClr val="BFBFBF"/>
+                      </a:solidFill>
+                      <a:prstDash val="solid"/>
+                      <a:round/>
+                      <a:headEnd type="none" w="med" len="med"/>
+                      <a:tailEnd type="none" w="med" len="med"/>
+                    </a:lnR>
+                    <a:lnT w="9525" cap="flat" cmpd="sng" algn="ctr">
+                      <a:solidFill>
+                        <a:srgbClr val="BFBFBF"/>
+                      </a:solidFill>
+                      <a:prstDash val="solid"/>
+                      <a:round/>
+                      <a:headEnd type="none" w="med" len="med"/>
+                      <a:tailEnd type="none" w="med" len="med"/>
+                    </a:lnT>
+                    <a:lnB w="9525" cap="flat" cmpd="sng" algn="ctr">
+                      <a:solidFill>
+                        <a:srgbClr val="BFBFBF"/>
+                      </a:solidFill>
+                      <a:prstDash val="solid"/>
+                      <a:round/>
+                      <a:headEnd type="none" w="med" len="med"/>
+                      <a:tailEnd type="none" w="med" len="med"/>
+                    </a:lnB>
+                  </a:tcPr>
+                </a:tc>
+                <a:tc>
+                  <a:txBody>
+                    <a:bodyPr/>
+                    <a:lstStyle/>
+                    <a:p>
+                      <a:pPr marL="0" indent="0" algn="l">
+                        <a:buNone/>
+                      </a:pPr>
+                      <a:r>
+                        <a:rPr lang="en-US" sz="800" dirty="0">
+                          <a:solidFill>
+                            <a:srgbClr val="222222"/>
+                          </a:solidFill>
+                          <a:latin typeface="Meiryo" pitchFamily="34" charset="0"/>
+                          <a:ea typeface="Meiryo" pitchFamily="34" charset="-122"/>
+                          <a:cs typeface="Meiryo" pitchFamily="34" charset="-120"/>
+                        </a:rPr>
+                        <a:t>NPO法人 基本塾</a:t>
+                      </a:r>
+                      <a:endParaRPr lang="en-US" sz="1100" dirty="0">
+                        <a:latin typeface="Meiryo" charset="0"/>
+                        <a:ea typeface="Meiryo" charset="0"/>
+                        <a:cs typeface="Meiryo" charset="0"/>
+                      </a:endParaRPr>
+                    </a:p>
+                  </a:txBody>
+                  <a:tcPr anchor="ctr" marT="18000" marB="18000" marL="64008" marR="45720">
+                    <a:lnL w="9525" cap="flat" cmpd="sng" algn="ctr">
+                      <a:solidFill>
+                        <a:srgbClr val="BFBFBF"/>
+                      </a:solidFill>
+                      <a:prstDash val="solid"/>
+                      <a:round/>
+                      <a:headEnd type="none" w="med" len="med"/>
+                      <a:tailEnd type="none" w="med" len="med"/>
+                    </a:lnL>
+                    <a:lnR w="9525" cap="flat" cmpd="sng" algn="ctr">
+                      <a:solidFill>
+                        <a:srgbClr val="BFBFBF"/>
+                      </a:solidFill>
+                      <a:prstDash val="solid"/>
+                      <a:round/>
+                      <a:headEnd type="none" w="med" len="med"/>
+                      <a:tailEnd type="none" w="med" len="med"/>
+                    </a:lnR>
+                    <a:lnT w="9525" cap="flat" cmpd="sng" algn="ctr">
+                      <a:solidFill>
+                        <a:srgbClr val="BFBFBF"/>
+                      </a:solidFill>
+                      <a:prstDash val="solid"/>
+                      <a:round/>
+                      <a:headEnd type="none" w="med" len="med"/>
+                      <a:tailEnd type="none" w="med" len="med"/>
+                    </a:lnT>
+                    <a:lnB w="9525" cap="flat" cmpd="sng" algn="ctr">
+                      <a:solidFill>
+                        <a:srgbClr val="BFBFBF"/>
+                      </a:solidFill>
+                      <a:prstDash val="solid"/>
+                      <a:round/>
+                      <a:headEnd type="none" w="med" len="med"/>
+                      <a:tailEnd type="none" w="med" len="med"/>
+                    </a:lnB>
+                  </a:tcPr>
+                </a:tc>
+                <a:tc>
+                  <a:txBody>
+                    <a:bodyPr/>
+                    <a:lstStyle/>
+                    <a:p>
+                      <a:pPr marL="0" indent="0" algn="l">
+                        <a:buNone/>
+                      </a:pPr>
+                      <a:r>
+                        <a:rPr lang="en-US" sz="800" dirty="0">
+                          <a:solidFill>
+                            <a:srgbClr val="222222"/>
+                          </a:solidFill>
+                          <a:latin typeface="Meiryo" pitchFamily="34" charset="0"/>
+                          <a:ea typeface="Meiryo" pitchFamily="34" charset="-122"/>
+                          <a:cs typeface="Meiryo" pitchFamily="34" charset="-120"/>
+                        </a:rPr>
+                        <a:t>日吉台5-15-2</a:t>
+                      </a:r>
+                      <a:endParaRPr lang="en-US" sz="1100" dirty="0">
+                        <a:latin typeface="Meiryo" charset="0"/>
+                        <a:ea typeface="Meiryo" charset="0"/>
+                        <a:cs typeface="Meiryo" charset="0"/>
+                      </a:endParaRPr>
+                    </a:p>
+                  </a:txBody>
+                  <a:tcPr anchor="ctr" marT="18000" marB="18000" marL="64008" marR="45720">
+                    <a:lnL w="9525" cap="flat" cmpd="sng" algn="ctr">
+                      <a:solidFill>
+                        <a:srgbClr val="BFBFBF"/>
+                      </a:solidFill>
+                      <a:prstDash val="solid"/>
+                      <a:round/>
+                      <a:headEnd type="none" w="med" len="med"/>
+                      <a:tailEnd type="none" w="med" len="med"/>
+                    </a:lnL>
+                    <a:lnR w="9525" cap="flat" cmpd="sng" algn="ctr">
+                      <a:solidFill>
+                        <a:srgbClr val="BFBFBF"/>
+                      </a:solidFill>
+                      <a:prstDash val="solid"/>
+                      <a:round/>
+                      <a:headEnd type="none" w="med" len="med"/>
+                      <a:tailEnd type="none" w="med" len="med"/>
+                    </a:lnR>
+                    <a:lnT w="9525" cap="flat" cmpd="sng" algn="ctr">
+                      <a:solidFill>
+                        <a:srgbClr val="BFBFBF"/>
+                      </a:solidFill>
+                      <a:prstDash val="solid"/>
+                      <a:round/>
+                      <a:headEnd type="none" w="med" len="med"/>
+                      <a:tailEnd type="none" w="med" len="med"/>
+                    </a:lnT>
+                    <a:lnB w="9525" cap="flat" cmpd="sng" algn="ctr">
+                      <a:solidFill>
+                        <a:srgbClr val="BFBFBF"/>
+                      </a:solidFill>
+                      <a:prstDash val="solid"/>
+                      <a:round/>
+                      <a:headEnd type="none" w="med" len="med"/>
+                      <a:tailEnd type="none" w="med" len="med"/>
+                    </a:lnB>
+                  </a:tcPr>
+                </a:tc>
+                <a:tc>
+                  <a:txBody>
+                    <a:bodyPr/>
+                    <a:lstStyle/>
+                    <a:p>
+                      <a:pPr marL="0" indent="0" algn="l">
+                        <a:buNone/>
+                      </a:pPr>
+                      <a:r>
+                        <a:rPr lang="en-US" sz="800" dirty="0">
+                          <a:solidFill>
+                            <a:srgbClr val="222222"/>
+                          </a:solidFill>
+                          <a:latin typeface="Meiryo" pitchFamily="34" charset="0"/>
+                          <a:ea typeface="Meiryo" pitchFamily="34" charset="-122"/>
+                          <a:cs typeface="Meiryo" pitchFamily="34" charset="-120"/>
+                        </a:rPr>
+                        <a:t>0475-51-6845</a:t>
+                      </a:r>
+                      <a:endParaRPr lang="en-US" sz="1100" dirty="0">
+                        <a:latin typeface="Meiryo" charset="0"/>
+                        <a:ea typeface="Meiryo" charset="0"/>
+                        <a:cs typeface="Meiryo" charset="0"/>
+                      </a:endParaRPr>
+                    </a:p>
+                  </a:txBody>
+                  <a:tcPr anchor="ctr" marT="18000" marB="18000" marL="64008" marR="45720">
+                    <a:lnL w="9525" cap="flat" cmpd="sng" algn="ctr">
+                      <a:solidFill>
+                        <a:srgbClr val="BFBFBF"/>
+                      </a:solidFill>
+                      <a:prstDash val="solid"/>
+                      <a:round/>
+                      <a:headEnd type="none" w="med" len="med"/>
+                      <a:tailEnd type="none" w="med" len="med"/>
+                    </a:lnL>
+                    <a:lnR w="9525" cap="flat" cmpd="sng" algn="ctr">
+                      <a:solidFill>
+                        <a:srgbClr val="BFBFBF"/>
+                      </a:solidFill>
+                      <a:prstDash val="solid"/>
+                      <a:round/>
+                      <a:headEnd type="none" w="med" len="med"/>
+                      <a:tailEnd type="none" w="med" len="med"/>
+                    </a:lnR>
+                    <a:lnT w="9525" cap="flat" cmpd="sng" algn="ctr">
+                      <a:solidFill>
+                        <a:srgbClr val="BFBFBF"/>
+                      </a:solidFill>
+                      <a:prstDash val="solid"/>
+                      <a:round/>
+                      <a:headEnd type="none" w="med" len="med"/>
+                      <a:tailEnd type="none" w="med" len="med"/>
+                    </a:lnT>
+                    <a:lnB w="9525" cap="flat" cmpd="sng" algn="ctr">
+                      <a:solidFill>
+                        <a:srgbClr val="BFBFBF"/>
+                      </a:solidFill>
+                      <a:prstDash val="solid"/>
+                      <a:round/>
+                      <a:headEnd type="none" w="med" len="med"/>
+                      <a:tailEnd type="none" w="med" len="med"/>
+                    </a:lnB>
+                  </a:tcPr>
+                </a:tc>
+                <a:tc>
+                  <a:txBody>
+                    <a:bodyPr/>
+                    <a:lstStyle/>
+                    <a:p>
+                      <a:pPr marL="0" indent="0" algn="l">
+                        <a:buNone/>
+                      </a:pPr>
+                      <a:r>
+                        <a:rPr lang="en-US" sz="800" dirty="0" u="sng">
+                          <a:solidFill>
+                            <a:srgbClr val="1F5FA8"/>
+                          </a:solidFill>
+                          <a:latin typeface="Meiryo" charset="0"/>
+                          <a:ea typeface="Meiryo" charset="0"/>
+                          <a:cs typeface="Meiryo" charset="0"/>
+                          <a:hlinkClick r:id="rId8"/>
+                        </a:rPr>
+                        <a:t>kihonjuku-yuuyuu.com</a:t>
+                      </a:r>
+                    </a:p>
+                  </a:txBody>
+                  <a:tcPr anchor="ctr" marT="18000" marB="18000" marL="64008" marR="45720">
+                    <a:lnL w="9525" cap="flat" cmpd="sng" algn="ctr">
+                      <a:solidFill>
+                        <a:srgbClr val="BFBFBF"/>
+                      </a:solidFill>
+                      <a:prstDash val="solid"/>
+                      <a:round/>
+                      <a:headEnd type="none" w="med" len="med"/>
+                      <a:tailEnd type="none" w="med" len="med"/>
+                    </a:lnL>
+                    <a:lnR w="9525" cap="flat" cmpd="sng" algn="ctr">
+                      <a:solidFill>
+                        <a:srgbClr val="BFBFBF"/>
+                      </a:solidFill>
+                      <a:prstDash val="solid"/>
+                      <a:round/>
+                      <a:headEnd type="none" w="med" len="med"/>
+                      <a:tailEnd type="none" w="med" len="med"/>
+                    </a:lnR>
+                    <a:lnT w="9525" cap="flat" cmpd="sng" algn="ctr">
+                      <a:solidFill>
+                        <a:srgbClr val="BFBFBF"/>
+                      </a:solidFill>
+                      <a:prstDash val="solid"/>
+                      <a:round/>
+                      <a:headEnd type="none" w="med" len="med"/>
+                      <a:tailEnd type="none" w="med" len="med"/>
+                    </a:lnT>
+                    <a:lnB w="9525" cap="flat" cmpd="sng" algn="ctr">
+                      <a:solidFill>
+                        <a:srgbClr val="BFBFBF"/>
+                      </a:solidFill>
+                      <a:prstDash val="solid"/>
+                      <a:round/>
+                      <a:headEnd type="none" w="med" len="med"/>
+                      <a:tailEnd type="none" w="med" len="med"/>
+                    </a:lnB>
+                  </a:tcPr>
+                </a:tc>
+                <a:extLst>
+                  <a:ext uri="{0D108BD9-81ED-4DB2-BD59-A6C34878D82A}">
+                    <a16:rowId xmlns:a16="http://schemas.microsoft.com/office/drawing/2014/main" val="10001"/>
+                  </a:ext>
+                </a:extLst>
+              </a:tr>
+              <a:tr h="240971">
+                <a:tc>
+                  <a:txBody>
+                    <a:bodyPr/>
+                    <a:lstStyle/>
+                    <a:p>
+                      <a:pPr marL="0" indent="0" algn="ctr">
+                        <a:buNone/>
+                      </a:pPr>
+                      <a:r>
+                        <a:rPr lang="en-US" sz="800" b="1" dirty="0">
+                          <a:solidFill>
+                            <a:srgbClr val="222222"/>
+                          </a:solidFill>
+                          <a:latin typeface="Meiryo" pitchFamily="34" charset="0"/>
+                          <a:ea typeface="Meiryo" pitchFamily="34" charset="-122"/>
+                          <a:cs typeface="Meiryo" pitchFamily="34" charset="-120"/>
+                        </a:rPr>
+                        <a:t>⑥</a:t>
+                      </a:r>
+                      <a:endParaRPr lang="en-US" sz="1100" dirty="0">
+                        <a:latin typeface="Meiryo" charset="0"/>
+                        <a:ea typeface="Meiryo" charset="0"/>
+                        <a:cs typeface="Meiryo" charset="0"/>
+                      </a:endParaRPr>
+                    </a:p>
+                  </a:txBody>
+                  <a:tcPr anchor="ctr" marT="18000" marB="18000" marL="64008" marR="45720">
+                    <a:lnL w="9525" cap="flat" cmpd="sng" algn="ctr">
+                      <a:solidFill>
+                        <a:srgbClr val="BFBFBF"/>
+                      </a:solidFill>
+                      <a:prstDash val="solid"/>
+                      <a:round/>
+                      <a:headEnd type="none" w="med" len="med"/>
+                      <a:tailEnd type="none" w="med" len="med"/>
+                    </a:lnL>
+                    <a:lnR w="9525" cap="flat" cmpd="sng" algn="ctr">
+                      <a:solidFill>
+                        <a:srgbClr val="BFBFBF"/>
+                      </a:solidFill>
+                      <a:prstDash val="solid"/>
+                      <a:round/>
+                      <a:headEnd type="none" w="med" len="med"/>
+                      <a:tailEnd type="none" w="med" len="med"/>
+                    </a:lnR>
+                    <a:lnT w="9525" cap="flat" cmpd="sng" algn="ctr">
+                      <a:solidFill>
+                        <a:srgbClr val="BFBFBF"/>
+                      </a:solidFill>
+                      <a:prstDash val="solid"/>
+                      <a:round/>
+                      <a:headEnd type="none" w="med" len="med"/>
+                      <a:tailEnd type="none" w="med" len="med"/>
+                    </a:lnT>
+                    <a:lnB w="9525" cap="flat" cmpd="sng" algn="ctr">
+                      <a:solidFill>
+                        <a:srgbClr val="BFBFBF"/>
+                      </a:solidFill>
+                      <a:prstDash val="solid"/>
+                      <a:round/>
+                      <a:headEnd type="none" w="med" len="med"/>
+                      <a:tailEnd type="none" w="med" len="med"/>
+                    </a:lnB>
+                  </a:tcPr>
+                </a:tc>
+                <a:tc>
+                  <a:txBody>
+                    <a:bodyPr/>
+                    <a:lstStyle/>
+                    <a:p>
+                      <a:pPr marL="0" indent="0" algn="l">
+                        <a:buNone/>
+                      </a:pPr>
+                      <a:r>
+                        <a:rPr lang="en-US" sz="800" b="1" dirty="0">
                           <a:solidFill>
                             <a:srgbClr val="222222"/>
                           </a:solidFill>
@@ -7836,7 +10534,7 @@
                         <a:buNone/>
                       </a:pPr>
                       <a:r>
-                        <a:rPr lang="en-US" sz="900" dirty="0">
+                        <a:rPr lang="en-US" sz="800" dirty="0">
                           <a:solidFill>
                             <a:srgbClr val="222222"/>
                           </a:solidFill>
@@ -7901,7 +10599,7 @@
                         <a:buNone/>
                       </a:pPr>
                       <a:r>
-                        <a:rPr lang="en-US" sz="900" dirty="0">
+                        <a:rPr lang="en-US" sz="800" dirty="0">
                           <a:solidFill>
                             <a:srgbClr val="222222"/>
                           </a:solidFill>
@@ -7966,7 +10664,7 @@
                         <a:buNone/>
                       </a:pPr>
                       <a:r>
-                        <a:rPr lang="en-US" sz="900" dirty="0">
+                        <a:rPr lang="en-US" sz="800" dirty="0">
                           <a:solidFill>
                             <a:srgbClr val="222222"/>
                           </a:solidFill>
@@ -8031,7 +10729,7 @@
                         <a:buNone/>
                       </a:pPr>
                       <a:r>
-                        <a:rPr lang="en-US" sz="900" dirty="0" u="sng">
+                        <a:rPr lang="en-US" sz="800" dirty="0" u="sng">
                           <a:solidFill>
                             <a:srgbClr val="1F5FA8"/>
                           </a:solidFill>
@@ -8089,7 +10787,7 @@
                   </a:ext>
                 </a:extLst>
               </a:tr>
-              <a:tr h="305972">
+              <a:tr h="240971">
                 <a:tc>
                   <a:txBody>
                     <a:bodyPr/>
@@ -8099,7 +10797,7 @@
                         <a:buNone/>
                       </a:pPr>
                       <a:r>
-                        <a:rPr lang="en-US" sz="900" b="1" dirty="0">
+                        <a:rPr lang="en-US" sz="800" b="1" dirty="0">
                           <a:solidFill>
                             <a:srgbClr val="222222"/>
                           </a:solidFill>
@@ -8164,7 +10862,7 @@
                         <a:buNone/>
                       </a:pPr>
                       <a:r>
-                        <a:rPr lang="en-US" sz="900" b="1" dirty="0">
+                        <a:rPr lang="en-US" sz="800" b="1" dirty="0">
                           <a:solidFill>
                             <a:srgbClr val="222222"/>
                           </a:solidFill>
@@ -8172,7 +10870,7 @@
                           <a:ea typeface="Meiryo" pitchFamily="34" charset="-122"/>
                           <a:cs typeface="Meiryo" pitchFamily="34" charset="-120"/>
                         </a:rPr>
-                        <a:t>基本塾優遊 八坂台</a:t>
+                        <a:t>基本塾優遊 八坂西</a:t>
                       </a:r>
                       <a:endParaRPr lang="en-US" sz="1100" dirty="0">
                         <a:latin typeface="Meiryo" charset="0"/>
@@ -8229,7 +10927,7 @@
                         <a:buNone/>
                       </a:pPr>
                       <a:r>
-                        <a:rPr lang="en-US" sz="900" dirty="0">
+                        <a:rPr lang="en-US" sz="800" dirty="0">
                           <a:solidFill>
                             <a:srgbClr val="222222"/>
                           </a:solidFill>
@@ -8294,7 +10992,400 @@
                         <a:buNone/>
                       </a:pPr>
                       <a:r>
-                        <a:rPr lang="en-US" sz="900" dirty="0">
+                        <a:rPr lang="en-US" sz="800" dirty="0">
+                          <a:solidFill>
+                            <a:srgbClr val="222222"/>
+                          </a:solidFill>
+                          <a:latin typeface="Meiryo" pitchFamily="34" charset="0"/>
+                          <a:ea typeface="Meiryo" pitchFamily="34" charset="-122"/>
+                          <a:cs typeface="Meiryo" pitchFamily="34" charset="-120"/>
+                        </a:rPr>
+                        <a:t>八坂台4-2-4</a:t>
+                      </a:r>
+                      <a:endParaRPr lang="en-US" sz="1100" dirty="0">
+                        <a:latin typeface="Meiryo" charset="0"/>
+                        <a:ea typeface="Meiryo" charset="0"/>
+                        <a:cs typeface="Meiryo" charset="0"/>
+                      </a:endParaRPr>
+                    </a:p>
+                  </a:txBody>
+                  <a:tcPr anchor="ctr" marT="18000" marB="18000" marL="64008" marR="45720">
+                    <a:lnL w="9525" cap="flat" cmpd="sng" algn="ctr">
+                      <a:solidFill>
+                        <a:srgbClr val="BFBFBF"/>
+                      </a:solidFill>
+                      <a:prstDash val="solid"/>
+                      <a:round/>
+                      <a:headEnd type="none" w="med" len="med"/>
+                      <a:tailEnd type="none" w="med" len="med"/>
+                    </a:lnL>
+                    <a:lnR w="9525" cap="flat" cmpd="sng" algn="ctr">
+                      <a:solidFill>
+                        <a:srgbClr val="BFBFBF"/>
+                      </a:solidFill>
+                      <a:prstDash val="solid"/>
+                      <a:round/>
+                      <a:headEnd type="none" w="med" len="med"/>
+                      <a:tailEnd type="none" w="med" len="med"/>
+                    </a:lnR>
+                    <a:lnT w="9525" cap="flat" cmpd="sng" algn="ctr">
+                      <a:solidFill>
+                        <a:srgbClr val="BFBFBF"/>
+                      </a:solidFill>
+                      <a:prstDash val="solid"/>
+                      <a:round/>
+                      <a:headEnd type="none" w="med" len="med"/>
+                      <a:tailEnd type="none" w="med" len="med"/>
+                    </a:lnT>
+                    <a:lnB w="9525" cap="flat" cmpd="sng" algn="ctr">
+                      <a:solidFill>
+                        <a:srgbClr val="BFBFBF"/>
+                      </a:solidFill>
+                      <a:prstDash val="solid"/>
+                      <a:round/>
+                      <a:headEnd type="none" w="med" len="med"/>
+                      <a:tailEnd type="none" w="med" len="med"/>
+                    </a:lnB>
+                  </a:tcPr>
+                </a:tc>
+                <a:tc>
+                  <a:txBody>
+                    <a:bodyPr/>
+                    <a:lstStyle/>
+                    <a:p>
+                      <a:pPr marL="0" indent="0" algn="l">
+                        <a:buNone/>
+                      </a:pPr>
+                      <a:r>
+                        <a:rPr lang="en-US" sz="800" dirty="0">
+                          <a:solidFill>
+                            <a:srgbClr val="222222"/>
+                          </a:solidFill>
+                          <a:latin typeface="Meiryo" pitchFamily="34" charset="0"/>
+                          <a:ea typeface="Meiryo" pitchFamily="34" charset="-122"/>
+                          <a:cs typeface="Meiryo" pitchFamily="34" charset="-120"/>
+                        </a:rPr>
+                        <a:t>0475-51-6631</a:t>
+                      </a:r>
+                      <a:endParaRPr lang="en-US" sz="1100" dirty="0">
+                        <a:latin typeface="Meiryo" charset="0"/>
+                        <a:ea typeface="Meiryo" charset="0"/>
+                        <a:cs typeface="Meiryo" charset="0"/>
+                      </a:endParaRPr>
+                    </a:p>
+                  </a:txBody>
+                  <a:tcPr anchor="ctr" marT="18000" marB="18000" marL="64008" marR="45720">
+                    <a:lnL w="9525" cap="flat" cmpd="sng" algn="ctr">
+                      <a:solidFill>
+                        <a:srgbClr val="BFBFBF"/>
+                      </a:solidFill>
+                      <a:prstDash val="solid"/>
+                      <a:round/>
+                      <a:headEnd type="none" w="med" len="med"/>
+                      <a:tailEnd type="none" w="med" len="med"/>
+                    </a:lnL>
+                    <a:lnR w="9525" cap="flat" cmpd="sng" algn="ctr">
+                      <a:solidFill>
+                        <a:srgbClr val="BFBFBF"/>
+                      </a:solidFill>
+                      <a:prstDash val="solid"/>
+                      <a:round/>
+                      <a:headEnd type="none" w="med" len="med"/>
+                      <a:tailEnd type="none" w="med" len="med"/>
+                    </a:lnR>
+                    <a:lnT w="9525" cap="flat" cmpd="sng" algn="ctr">
+                      <a:solidFill>
+                        <a:srgbClr val="BFBFBF"/>
+                      </a:solidFill>
+                      <a:prstDash val="solid"/>
+                      <a:round/>
+                      <a:headEnd type="none" w="med" len="med"/>
+                      <a:tailEnd type="none" w="med" len="med"/>
+                    </a:lnT>
+                    <a:lnB w="9525" cap="flat" cmpd="sng" algn="ctr">
+                      <a:solidFill>
+                        <a:srgbClr val="BFBFBF"/>
+                      </a:solidFill>
+                      <a:prstDash val="solid"/>
+                      <a:round/>
+                      <a:headEnd type="none" w="med" len="med"/>
+                      <a:tailEnd type="none" w="med" len="med"/>
+                    </a:lnB>
+                  </a:tcPr>
+                </a:tc>
+                <a:tc>
+                  <a:txBody>
+                    <a:bodyPr/>
+                    <a:lstStyle/>
+                    <a:p>
+                      <a:pPr marL="0" indent="0" algn="l">
+                        <a:buNone/>
+                      </a:pPr>
+                      <a:r>
+                        <a:rPr lang="en-US" sz="800" dirty="0" u="sng">
+                          <a:solidFill>
+                            <a:srgbClr val="1F5FA8"/>
+                          </a:solidFill>
+                          <a:latin typeface="Meiryo" charset="0"/>
+                          <a:ea typeface="Meiryo" charset="0"/>
+                          <a:cs typeface="Meiryo" charset="0"/>
+                          <a:hlinkClick r:id="rId8"/>
+                        </a:rPr>
+                        <a:t>kihonjuku-yuuyuu.com</a:t>
+                      </a:r>
+                    </a:p>
+                  </a:txBody>
+                  <a:tcPr anchor="ctr" marT="18000" marB="18000" marL="64008" marR="45720">
+                    <a:lnL w="9525" cap="flat" cmpd="sng" algn="ctr">
+                      <a:solidFill>
+                        <a:srgbClr val="BFBFBF"/>
+                      </a:solidFill>
+                      <a:prstDash val="solid"/>
+                      <a:round/>
+                      <a:headEnd type="none" w="med" len="med"/>
+                      <a:tailEnd type="none" w="med" len="med"/>
+                    </a:lnL>
+                    <a:lnR w="9525" cap="flat" cmpd="sng" algn="ctr">
+                      <a:solidFill>
+                        <a:srgbClr val="BFBFBF"/>
+                      </a:solidFill>
+                      <a:prstDash val="solid"/>
+                      <a:round/>
+                      <a:headEnd type="none" w="med" len="med"/>
+                      <a:tailEnd type="none" w="med" len="med"/>
+                    </a:lnR>
+                    <a:lnT w="9525" cap="flat" cmpd="sng" algn="ctr">
+                      <a:solidFill>
+                        <a:srgbClr val="BFBFBF"/>
+                      </a:solidFill>
+                      <a:prstDash val="solid"/>
+                      <a:round/>
+                      <a:headEnd type="none" w="med" len="med"/>
+                      <a:tailEnd type="none" w="med" len="med"/>
+                    </a:lnT>
+                    <a:lnB w="9525" cap="flat" cmpd="sng" algn="ctr">
+                      <a:solidFill>
+                        <a:srgbClr val="BFBFBF"/>
+                      </a:solidFill>
+                      <a:prstDash val="solid"/>
+                      <a:round/>
+                      <a:headEnd type="none" w="med" len="med"/>
+                      <a:tailEnd type="none" w="med" len="med"/>
+                    </a:lnB>
+                  </a:tcPr>
+                </a:tc>
+                <a:extLst>
+                  <a:ext uri="{0D108BD9-81ED-4DB2-BD59-A6C34878D82A}">
+                    <a16:rowId xmlns:a16="http://schemas.microsoft.com/office/drawing/2014/main" val="10001"/>
+                  </a:ext>
+                </a:extLst>
+              </a:tr>
+              <a:tr h="240971">
+                <a:tc>
+                  <a:txBody>
+                    <a:bodyPr/>
+                    <a:lstStyle/>
+                    <a:p>
+                      <a:pPr marL="0" indent="0" algn="ctr">
+                        <a:buNone/>
+                      </a:pPr>
+                      <a:r>
+                        <a:rPr lang="en-US" sz="800" b="1" dirty="0">
+                          <a:solidFill>
+                            <a:srgbClr val="222222"/>
+                          </a:solidFill>
+                          <a:latin typeface="Meiryo" pitchFamily="34" charset="0"/>
+                          <a:ea typeface="Meiryo" pitchFamily="34" charset="-122"/>
+                          <a:cs typeface="Meiryo" pitchFamily="34" charset="-120"/>
+                        </a:rPr>
+                        <a:t>⑥</a:t>
+                      </a:r>
+                      <a:endParaRPr lang="en-US" sz="1100" dirty="0">
+                        <a:latin typeface="Meiryo" charset="0"/>
+                        <a:ea typeface="Meiryo" charset="0"/>
+                        <a:cs typeface="Meiryo" charset="0"/>
+                      </a:endParaRPr>
+                    </a:p>
+                  </a:txBody>
+                  <a:tcPr anchor="ctr" marT="18000" marB="18000" marL="64008" marR="45720">
+                    <a:lnL w="9525" cap="flat" cmpd="sng" algn="ctr">
+                      <a:solidFill>
+                        <a:srgbClr val="BFBFBF"/>
+                      </a:solidFill>
+                      <a:prstDash val="solid"/>
+                      <a:round/>
+                      <a:headEnd type="none" w="med" len="med"/>
+                      <a:tailEnd type="none" w="med" len="med"/>
+                    </a:lnL>
+                    <a:lnR w="9525" cap="flat" cmpd="sng" algn="ctr">
+                      <a:solidFill>
+                        <a:srgbClr val="BFBFBF"/>
+                      </a:solidFill>
+                      <a:prstDash val="solid"/>
+                      <a:round/>
+                      <a:headEnd type="none" w="med" len="med"/>
+                      <a:tailEnd type="none" w="med" len="med"/>
+                    </a:lnR>
+                    <a:lnT w="9525" cap="flat" cmpd="sng" algn="ctr">
+                      <a:solidFill>
+                        <a:srgbClr val="BFBFBF"/>
+                      </a:solidFill>
+                      <a:prstDash val="solid"/>
+                      <a:round/>
+                      <a:headEnd type="none" w="med" len="med"/>
+                      <a:tailEnd type="none" w="med" len="med"/>
+                    </a:lnT>
+                    <a:lnB w="9525" cap="flat" cmpd="sng" algn="ctr">
+                      <a:solidFill>
+                        <a:srgbClr val="BFBFBF"/>
+                      </a:solidFill>
+                      <a:prstDash val="solid"/>
+                      <a:round/>
+                      <a:headEnd type="none" w="med" len="med"/>
+                      <a:tailEnd type="none" w="med" len="med"/>
+                    </a:lnB>
+                  </a:tcPr>
+                </a:tc>
+                <a:tc>
+                  <a:txBody>
+                    <a:bodyPr/>
+                    <a:lstStyle/>
+                    <a:p>
+                      <a:pPr marL="0" indent="0" algn="l">
+                        <a:buNone/>
+                      </a:pPr>
+                      <a:r>
+                        <a:rPr lang="en-US" sz="800" b="1" dirty="0">
+                          <a:solidFill>
+                            <a:srgbClr val="222222"/>
+                          </a:solidFill>
+                          <a:latin typeface="Meiryo" pitchFamily="34" charset="0"/>
+                          <a:ea typeface="Meiryo" pitchFamily="34" charset="-122"/>
+                          <a:cs typeface="Meiryo" pitchFamily="34" charset="-120"/>
+                        </a:rPr>
+                        <a:t>基本塾優遊 八坂台 ※</a:t>
+                      </a:r>
+                      <a:endParaRPr lang="en-US" sz="1100" dirty="0">
+                        <a:latin typeface="Meiryo" charset="0"/>
+                        <a:ea typeface="Meiryo" charset="0"/>
+                        <a:cs typeface="Meiryo" charset="0"/>
+                      </a:endParaRPr>
+                    </a:p>
+                  </a:txBody>
+                  <a:tcPr anchor="ctr" marT="18000" marB="18000" marL="64008" marR="45720">
+                    <a:lnL w="9525" cap="flat" cmpd="sng" algn="ctr">
+                      <a:solidFill>
+                        <a:srgbClr val="BFBFBF"/>
+                      </a:solidFill>
+                      <a:prstDash val="solid"/>
+                      <a:round/>
+                      <a:headEnd type="none" w="med" len="med"/>
+                      <a:tailEnd type="none" w="med" len="med"/>
+                    </a:lnL>
+                    <a:lnR w="9525" cap="flat" cmpd="sng" algn="ctr">
+                      <a:solidFill>
+                        <a:srgbClr val="BFBFBF"/>
+                      </a:solidFill>
+                      <a:prstDash val="solid"/>
+                      <a:round/>
+                      <a:headEnd type="none" w="med" len="med"/>
+                      <a:tailEnd type="none" w="med" len="med"/>
+                    </a:lnR>
+                    <a:lnT w="9525" cap="flat" cmpd="sng" algn="ctr">
+                      <a:solidFill>
+                        <a:srgbClr val="BFBFBF"/>
+                      </a:solidFill>
+                      <a:prstDash val="solid"/>
+                      <a:round/>
+                      <a:headEnd type="none" w="med" len="med"/>
+                      <a:tailEnd type="none" w="med" len="med"/>
+                    </a:lnT>
+                    <a:lnB w="9525" cap="flat" cmpd="sng" algn="ctr">
+                      <a:solidFill>
+                        <a:srgbClr val="BFBFBF"/>
+                      </a:solidFill>
+                      <a:prstDash val="solid"/>
+                      <a:round/>
+                      <a:headEnd type="none" w="med" len="med"/>
+                      <a:tailEnd type="none" w="med" len="med"/>
+                    </a:lnB>
+                  </a:tcPr>
+                </a:tc>
+                <a:tc>
+                  <a:txBody>
+                    <a:bodyPr/>
+                    <a:lstStyle/>
+                    <a:p>
+                      <a:pPr marL="0" indent="0" algn="l">
+                        <a:buNone/>
+                      </a:pPr>
+                      <a:r>
+                        <a:rPr lang="en-US" sz="800" dirty="0">
+                          <a:solidFill>
+                            <a:srgbClr val="222222"/>
+                          </a:solidFill>
+                          <a:latin typeface="Meiryo" pitchFamily="34" charset="0"/>
+                          <a:ea typeface="Meiryo" pitchFamily="34" charset="-122"/>
+                          <a:cs typeface="Meiryo" pitchFamily="34" charset="-120"/>
+                        </a:rPr>
+                        <a:t>NPO法人 基本塾</a:t>
+                      </a:r>
+                      <a:endParaRPr lang="en-US" sz="1100" dirty="0">
+                        <a:latin typeface="Meiryo" charset="0"/>
+                        <a:ea typeface="Meiryo" charset="0"/>
+                        <a:cs typeface="Meiryo" charset="0"/>
+                      </a:endParaRPr>
+                    </a:p>
+                  </a:txBody>
+                  <a:tcPr anchor="ctr" marT="18000" marB="18000" marL="64008" marR="45720">
+                    <a:lnL w="9525" cap="flat" cmpd="sng" algn="ctr">
+                      <a:solidFill>
+                        <a:srgbClr val="BFBFBF"/>
+                      </a:solidFill>
+                      <a:prstDash val="solid"/>
+                      <a:round/>
+                      <a:headEnd type="none" w="med" len="med"/>
+                      <a:tailEnd type="none" w="med" len="med"/>
+                    </a:lnL>
+                    <a:lnR w="9525" cap="flat" cmpd="sng" algn="ctr">
+                      <a:solidFill>
+                        <a:srgbClr val="BFBFBF"/>
+                      </a:solidFill>
+                      <a:prstDash val="solid"/>
+                      <a:round/>
+                      <a:headEnd type="none" w="med" len="med"/>
+                      <a:tailEnd type="none" w="med" len="med"/>
+                    </a:lnR>
+                    <a:lnT w="9525" cap="flat" cmpd="sng" algn="ctr">
+                      <a:solidFill>
+                        <a:srgbClr val="BFBFBF"/>
+                      </a:solidFill>
+                      <a:prstDash val="solid"/>
+                      <a:round/>
+                      <a:headEnd type="none" w="med" len="med"/>
+                      <a:tailEnd type="none" w="med" len="med"/>
+                    </a:lnT>
+                    <a:lnB w="9525" cap="flat" cmpd="sng" algn="ctr">
+                      <a:solidFill>
+                        <a:srgbClr val="BFBFBF"/>
+                      </a:solidFill>
+                      <a:prstDash val="solid"/>
+                      <a:round/>
+                      <a:headEnd type="none" w="med" len="med"/>
+                      <a:tailEnd type="none" w="med" len="med"/>
+                    </a:lnB>
+                  </a:tcPr>
+                </a:tc>
+                <a:tc>
+                  <a:txBody>
+                    <a:bodyPr/>
+                    <a:lstStyle/>
+                    <a:p>
+                      <a:pPr marL="0" indent="0" algn="l">
+                        <a:buNone/>
+                      </a:pPr>
+                      <a:r>
+                        <a:rPr lang="en-US" sz="800" dirty="0">
                           <a:solidFill>
                             <a:srgbClr val="222222"/>
                           </a:solidFill>
@@ -8359,7 +11450,7 @@
                         <a:buNone/>
                       </a:pPr>
                       <a:r>
-                        <a:rPr lang="en-US" sz="900" dirty="0">
+                        <a:rPr lang="en-US" sz="800" dirty="0">
                           <a:solidFill>
                             <a:srgbClr val="222222"/>
                           </a:solidFill>
@@ -8424,7 +11515,7 @@
                         <a:buNone/>
                       </a:pPr>
                       <a:r>
-                        <a:rPr lang="en-US" sz="900" dirty="0" u="sng">
+                        <a:rPr lang="en-US" sz="800" dirty="0" u="sng">
                           <a:solidFill>
                             <a:srgbClr val="1F5FA8"/>
                           </a:solidFill>
@@ -8482,7 +11573,7 @@
                   </a:ext>
                 </a:extLst>
               </a:tr>
-              <a:tr h="305972">
+              <a:tr h="240971">
                 <a:tc>
                   <a:txBody>
                     <a:bodyPr/>
@@ -8492,7 +11583,7 @@
                         <a:buNone/>
                       </a:pPr>
                       <a:r>
-                        <a:rPr lang="en-US" sz="900" b="1" dirty="0">
+                        <a:rPr lang="en-US" sz="800" b="1" dirty="0">
                           <a:solidFill>
                             <a:srgbClr val="222222"/>
                           </a:solidFill>
@@ -8557,7 +11648,7 @@
                         <a:buNone/>
                       </a:pPr>
                       <a:r>
-                        <a:rPr lang="en-US" sz="900" b="1" dirty="0">
+                        <a:rPr lang="en-US" sz="800" b="1" dirty="0">
                           <a:solidFill>
                             <a:srgbClr val="222222"/>
                           </a:solidFill>
@@ -8565,7 +11656,7 @@
                           <a:ea typeface="Meiryo" pitchFamily="34" charset="-122"/>
                           <a:cs typeface="Meiryo" pitchFamily="34" charset="-120"/>
                         </a:rPr>
-                        <a:t>基本塾優遊 八坂西</a:t>
+                        <a:t>基本塾優遊 八坂中央 ※</a:t>
                       </a:r>
                       <a:endParaRPr lang="en-US" sz="1100" dirty="0">
                         <a:latin typeface="Meiryo" charset="0"/>
@@ -8622,7 +11713,7 @@
                         <a:buNone/>
                       </a:pPr>
                       <a:r>
-                        <a:rPr lang="en-US" sz="900" dirty="0">
+                        <a:rPr lang="en-US" sz="800" dirty="0">
                           <a:solidFill>
                             <a:srgbClr val="222222"/>
                           </a:solidFill>
@@ -8687,7 +11778,7 @@
                         <a:buNone/>
                       </a:pPr>
                       <a:r>
-                        <a:rPr lang="en-US" sz="900" dirty="0">
+                        <a:rPr lang="en-US" sz="800" dirty="0">
                           <a:solidFill>
                             <a:srgbClr val="222222"/>
                           </a:solidFill>
@@ -8695,7 +11786,7 @@
                           <a:ea typeface="Meiryo" pitchFamily="34" charset="-122"/>
                           <a:cs typeface="Meiryo" pitchFamily="34" charset="-120"/>
                         </a:rPr>
-                        <a:t>八坂台4-2-4</a:t>
+                        <a:t>八坂台4-3-14</a:t>
                       </a:r>
                       <a:endParaRPr lang="en-US" sz="1100" dirty="0">
                         <a:latin typeface="Meiryo" charset="0"/>
@@ -8752,400 +11843,7 @@
                         <a:buNone/>
                       </a:pPr>
                       <a:r>
-                        <a:rPr lang="en-US" sz="900" dirty="0">
-                          <a:solidFill>
-                            <a:srgbClr val="222222"/>
-                          </a:solidFill>
-                          <a:latin typeface="Meiryo" pitchFamily="34" charset="0"/>
-                          <a:ea typeface="Meiryo" pitchFamily="34" charset="-122"/>
-                          <a:cs typeface="Meiryo" pitchFamily="34" charset="-120"/>
-                        </a:rPr>
-                        <a:t>0475-51-6631</a:t>
-                      </a:r>
-                      <a:endParaRPr lang="en-US" sz="1100" dirty="0">
-                        <a:latin typeface="Meiryo" charset="0"/>
-                        <a:ea typeface="Meiryo" charset="0"/>
-                        <a:cs typeface="Meiryo" charset="0"/>
-                      </a:endParaRPr>
-                    </a:p>
-                  </a:txBody>
-                  <a:tcPr anchor="ctr" marT="18000" marB="18000" marL="64008" marR="45720">
-                    <a:lnL w="9525" cap="flat" cmpd="sng" algn="ctr">
-                      <a:solidFill>
-                        <a:srgbClr val="BFBFBF"/>
-                      </a:solidFill>
-                      <a:prstDash val="solid"/>
-                      <a:round/>
-                      <a:headEnd type="none" w="med" len="med"/>
-                      <a:tailEnd type="none" w="med" len="med"/>
-                    </a:lnL>
-                    <a:lnR w="9525" cap="flat" cmpd="sng" algn="ctr">
-                      <a:solidFill>
-                        <a:srgbClr val="BFBFBF"/>
-                      </a:solidFill>
-                      <a:prstDash val="solid"/>
-                      <a:round/>
-                      <a:headEnd type="none" w="med" len="med"/>
-                      <a:tailEnd type="none" w="med" len="med"/>
-                    </a:lnR>
-                    <a:lnT w="9525" cap="flat" cmpd="sng" algn="ctr">
-                      <a:solidFill>
-                        <a:srgbClr val="BFBFBF"/>
-                      </a:solidFill>
-                      <a:prstDash val="solid"/>
-                      <a:round/>
-                      <a:headEnd type="none" w="med" len="med"/>
-                      <a:tailEnd type="none" w="med" len="med"/>
-                    </a:lnT>
-                    <a:lnB w="9525" cap="flat" cmpd="sng" algn="ctr">
-                      <a:solidFill>
-                        <a:srgbClr val="BFBFBF"/>
-                      </a:solidFill>
-                      <a:prstDash val="solid"/>
-                      <a:round/>
-                      <a:headEnd type="none" w="med" len="med"/>
-                      <a:tailEnd type="none" w="med" len="med"/>
-                    </a:lnB>
-                  </a:tcPr>
-                </a:tc>
-                <a:tc>
-                  <a:txBody>
-                    <a:bodyPr/>
-                    <a:lstStyle/>
-                    <a:p>
-                      <a:pPr marL="0" indent="0" algn="l">
-                        <a:buNone/>
-                      </a:pPr>
-                      <a:r>
-                        <a:rPr lang="en-US" sz="900" dirty="0" u="sng">
-                          <a:solidFill>
-                            <a:srgbClr val="1F5FA8"/>
-                          </a:solidFill>
-                          <a:latin typeface="Meiryo" charset="0"/>
-                          <a:ea typeface="Meiryo" charset="0"/>
-                          <a:cs typeface="Meiryo" charset="0"/>
-                          <a:hlinkClick r:id="rId8"/>
-                        </a:rPr>
-                        <a:t>kihonjuku-yuuyuu.com</a:t>
-                      </a:r>
-                    </a:p>
-                  </a:txBody>
-                  <a:tcPr anchor="ctr" marT="18000" marB="18000" marL="64008" marR="45720">
-                    <a:lnL w="9525" cap="flat" cmpd="sng" algn="ctr">
-                      <a:solidFill>
-                        <a:srgbClr val="BFBFBF"/>
-                      </a:solidFill>
-                      <a:prstDash val="solid"/>
-                      <a:round/>
-                      <a:headEnd type="none" w="med" len="med"/>
-                      <a:tailEnd type="none" w="med" len="med"/>
-                    </a:lnL>
-                    <a:lnR w="9525" cap="flat" cmpd="sng" algn="ctr">
-                      <a:solidFill>
-                        <a:srgbClr val="BFBFBF"/>
-                      </a:solidFill>
-                      <a:prstDash val="solid"/>
-                      <a:round/>
-                      <a:headEnd type="none" w="med" len="med"/>
-                      <a:tailEnd type="none" w="med" len="med"/>
-                    </a:lnR>
-                    <a:lnT w="9525" cap="flat" cmpd="sng" algn="ctr">
-                      <a:solidFill>
-                        <a:srgbClr val="BFBFBF"/>
-                      </a:solidFill>
-                      <a:prstDash val="solid"/>
-                      <a:round/>
-                      <a:headEnd type="none" w="med" len="med"/>
-                      <a:tailEnd type="none" w="med" len="med"/>
-                    </a:lnT>
-                    <a:lnB w="9525" cap="flat" cmpd="sng" algn="ctr">
-                      <a:solidFill>
-                        <a:srgbClr val="BFBFBF"/>
-                      </a:solidFill>
-                      <a:prstDash val="solid"/>
-                      <a:round/>
-                      <a:headEnd type="none" w="med" len="med"/>
-                      <a:tailEnd type="none" w="med" len="med"/>
-                    </a:lnB>
-                  </a:tcPr>
-                </a:tc>
-                <a:extLst>
-                  <a:ext uri="{0D108BD9-81ED-4DB2-BD59-A6C34878D82A}">
-                    <a16:rowId xmlns:a16="http://schemas.microsoft.com/office/drawing/2014/main" val="10001"/>
-                  </a:ext>
-                </a:extLst>
-              </a:tr>
-              <a:tr h="305972">
-                <a:tc>
-                  <a:txBody>
-                    <a:bodyPr/>
-                    <a:lstStyle/>
-                    <a:p>
-                      <a:pPr marL="0" indent="0" algn="ctr">
-                        <a:buNone/>
-                      </a:pPr>
-                      <a:r>
-                        <a:rPr lang="en-US" sz="900" b="1" dirty="0">
-                          <a:solidFill>
-                            <a:srgbClr val="222222"/>
-                          </a:solidFill>
-                          <a:latin typeface="Meiryo" pitchFamily="34" charset="0"/>
-                          <a:ea typeface="Meiryo" pitchFamily="34" charset="-122"/>
-                          <a:cs typeface="Meiryo" pitchFamily="34" charset="-120"/>
-                        </a:rPr>
-                        <a:t>⑥</a:t>
-                      </a:r>
-                      <a:endParaRPr lang="en-US" sz="1100" dirty="0">
-                        <a:latin typeface="Meiryo" charset="0"/>
-                        <a:ea typeface="Meiryo" charset="0"/>
-                        <a:cs typeface="Meiryo" charset="0"/>
-                      </a:endParaRPr>
-                    </a:p>
-                  </a:txBody>
-                  <a:tcPr anchor="ctr" marT="18000" marB="18000" marL="64008" marR="45720">
-                    <a:lnL w="9525" cap="flat" cmpd="sng" algn="ctr">
-                      <a:solidFill>
-                        <a:srgbClr val="BFBFBF"/>
-                      </a:solidFill>
-                      <a:prstDash val="solid"/>
-                      <a:round/>
-                      <a:headEnd type="none" w="med" len="med"/>
-                      <a:tailEnd type="none" w="med" len="med"/>
-                    </a:lnL>
-                    <a:lnR w="9525" cap="flat" cmpd="sng" algn="ctr">
-                      <a:solidFill>
-                        <a:srgbClr val="BFBFBF"/>
-                      </a:solidFill>
-                      <a:prstDash val="solid"/>
-                      <a:round/>
-                      <a:headEnd type="none" w="med" len="med"/>
-                      <a:tailEnd type="none" w="med" len="med"/>
-                    </a:lnR>
-                    <a:lnT w="9525" cap="flat" cmpd="sng" algn="ctr">
-                      <a:solidFill>
-                        <a:srgbClr val="BFBFBF"/>
-                      </a:solidFill>
-                      <a:prstDash val="solid"/>
-                      <a:round/>
-                      <a:headEnd type="none" w="med" len="med"/>
-                      <a:tailEnd type="none" w="med" len="med"/>
-                    </a:lnT>
-                    <a:lnB w="9525" cap="flat" cmpd="sng" algn="ctr">
-                      <a:solidFill>
-                        <a:srgbClr val="BFBFBF"/>
-                      </a:solidFill>
-                      <a:prstDash val="solid"/>
-                      <a:round/>
-                      <a:headEnd type="none" w="med" len="med"/>
-                      <a:tailEnd type="none" w="med" len="med"/>
-                    </a:lnB>
-                  </a:tcPr>
-                </a:tc>
-                <a:tc>
-                  <a:txBody>
-                    <a:bodyPr/>
-                    <a:lstStyle/>
-                    <a:p>
-                      <a:pPr marL="0" indent="0" algn="l">
-                        <a:buNone/>
-                      </a:pPr>
-                      <a:r>
-                        <a:rPr lang="en-US" sz="900" b="1" dirty="0">
-                          <a:solidFill>
-                            <a:srgbClr val="222222"/>
-                          </a:solidFill>
-                          <a:latin typeface="Meiryo" pitchFamily="34" charset="0"/>
-                          <a:ea typeface="Meiryo" pitchFamily="34" charset="-122"/>
-                          <a:cs typeface="Meiryo" pitchFamily="34" charset="-120"/>
-                        </a:rPr>
-                        <a:t>基本塾優遊 八坂中央</a:t>
-                      </a:r>
-                      <a:endParaRPr lang="en-US" sz="1100" dirty="0">
-                        <a:latin typeface="Meiryo" charset="0"/>
-                        <a:ea typeface="Meiryo" charset="0"/>
-                        <a:cs typeface="Meiryo" charset="0"/>
-                      </a:endParaRPr>
-                    </a:p>
-                  </a:txBody>
-                  <a:tcPr anchor="ctr" marT="18000" marB="18000" marL="64008" marR="45720">
-                    <a:lnL w="9525" cap="flat" cmpd="sng" algn="ctr">
-                      <a:solidFill>
-                        <a:srgbClr val="BFBFBF"/>
-                      </a:solidFill>
-                      <a:prstDash val="solid"/>
-                      <a:round/>
-                      <a:headEnd type="none" w="med" len="med"/>
-                      <a:tailEnd type="none" w="med" len="med"/>
-                    </a:lnL>
-                    <a:lnR w="9525" cap="flat" cmpd="sng" algn="ctr">
-                      <a:solidFill>
-                        <a:srgbClr val="BFBFBF"/>
-                      </a:solidFill>
-                      <a:prstDash val="solid"/>
-                      <a:round/>
-                      <a:headEnd type="none" w="med" len="med"/>
-                      <a:tailEnd type="none" w="med" len="med"/>
-                    </a:lnR>
-                    <a:lnT w="9525" cap="flat" cmpd="sng" algn="ctr">
-                      <a:solidFill>
-                        <a:srgbClr val="BFBFBF"/>
-                      </a:solidFill>
-                      <a:prstDash val="solid"/>
-                      <a:round/>
-                      <a:headEnd type="none" w="med" len="med"/>
-                      <a:tailEnd type="none" w="med" len="med"/>
-                    </a:lnT>
-                    <a:lnB w="9525" cap="flat" cmpd="sng" algn="ctr">
-                      <a:solidFill>
-                        <a:srgbClr val="BFBFBF"/>
-                      </a:solidFill>
-                      <a:prstDash val="solid"/>
-                      <a:round/>
-                      <a:headEnd type="none" w="med" len="med"/>
-                      <a:tailEnd type="none" w="med" len="med"/>
-                    </a:lnB>
-                  </a:tcPr>
-                </a:tc>
-                <a:tc>
-                  <a:txBody>
-                    <a:bodyPr/>
-                    <a:lstStyle/>
-                    <a:p>
-                      <a:pPr marL="0" indent="0" algn="l">
-                        <a:buNone/>
-                      </a:pPr>
-                      <a:r>
-                        <a:rPr lang="en-US" sz="900" dirty="0">
-                          <a:solidFill>
-                            <a:srgbClr val="222222"/>
-                          </a:solidFill>
-                          <a:latin typeface="Meiryo" pitchFamily="34" charset="0"/>
-                          <a:ea typeface="Meiryo" pitchFamily="34" charset="-122"/>
-                          <a:cs typeface="Meiryo" pitchFamily="34" charset="-120"/>
-                        </a:rPr>
-                        <a:t>NPO法人 基本塾</a:t>
-                      </a:r>
-                      <a:endParaRPr lang="en-US" sz="1100" dirty="0">
-                        <a:latin typeface="Meiryo" charset="0"/>
-                        <a:ea typeface="Meiryo" charset="0"/>
-                        <a:cs typeface="Meiryo" charset="0"/>
-                      </a:endParaRPr>
-                    </a:p>
-                  </a:txBody>
-                  <a:tcPr anchor="ctr" marT="18000" marB="18000" marL="64008" marR="45720">
-                    <a:lnL w="9525" cap="flat" cmpd="sng" algn="ctr">
-                      <a:solidFill>
-                        <a:srgbClr val="BFBFBF"/>
-                      </a:solidFill>
-                      <a:prstDash val="solid"/>
-                      <a:round/>
-                      <a:headEnd type="none" w="med" len="med"/>
-                      <a:tailEnd type="none" w="med" len="med"/>
-                    </a:lnL>
-                    <a:lnR w="9525" cap="flat" cmpd="sng" algn="ctr">
-                      <a:solidFill>
-                        <a:srgbClr val="BFBFBF"/>
-                      </a:solidFill>
-                      <a:prstDash val="solid"/>
-                      <a:round/>
-                      <a:headEnd type="none" w="med" len="med"/>
-                      <a:tailEnd type="none" w="med" len="med"/>
-                    </a:lnR>
-                    <a:lnT w="9525" cap="flat" cmpd="sng" algn="ctr">
-                      <a:solidFill>
-                        <a:srgbClr val="BFBFBF"/>
-                      </a:solidFill>
-                      <a:prstDash val="solid"/>
-                      <a:round/>
-                      <a:headEnd type="none" w="med" len="med"/>
-                      <a:tailEnd type="none" w="med" len="med"/>
-                    </a:lnT>
-                    <a:lnB w="9525" cap="flat" cmpd="sng" algn="ctr">
-                      <a:solidFill>
-                        <a:srgbClr val="BFBFBF"/>
-                      </a:solidFill>
-                      <a:prstDash val="solid"/>
-                      <a:round/>
-                      <a:headEnd type="none" w="med" len="med"/>
-                      <a:tailEnd type="none" w="med" len="med"/>
-                    </a:lnB>
-                  </a:tcPr>
-                </a:tc>
-                <a:tc>
-                  <a:txBody>
-                    <a:bodyPr/>
-                    <a:lstStyle/>
-                    <a:p>
-                      <a:pPr marL="0" indent="0" algn="l">
-                        <a:buNone/>
-                      </a:pPr>
-                      <a:r>
-                        <a:rPr lang="en-US" sz="900" dirty="0">
-                          <a:solidFill>
-                            <a:srgbClr val="222222"/>
-                          </a:solidFill>
-                          <a:latin typeface="Meiryo" pitchFamily="34" charset="0"/>
-                          <a:ea typeface="Meiryo" pitchFamily="34" charset="-122"/>
-                          <a:cs typeface="Meiryo" pitchFamily="34" charset="-120"/>
-                        </a:rPr>
-                        <a:t>八坂台地区（要確認）</a:t>
-                      </a:r>
-                      <a:endParaRPr lang="en-US" sz="1100" dirty="0">
-                        <a:latin typeface="Meiryo" charset="0"/>
-                        <a:ea typeface="Meiryo" charset="0"/>
-                        <a:cs typeface="Meiryo" charset="0"/>
-                      </a:endParaRPr>
-                    </a:p>
-                  </a:txBody>
-                  <a:tcPr anchor="ctr" marT="18000" marB="18000" marL="64008" marR="45720">
-                    <a:lnL w="9525" cap="flat" cmpd="sng" algn="ctr">
-                      <a:solidFill>
-                        <a:srgbClr val="BFBFBF"/>
-                      </a:solidFill>
-                      <a:prstDash val="solid"/>
-                      <a:round/>
-                      <a:headEnd type="none" w="med" len="med"/>
-                      <a:tailEnd type="none" w="med" len="med"/>
-                    </a:lnL>
-                    <a:lnR w="9525" cap="flat" cmpd="sng" algn="ctr">
-                      <a:solidFill>
-                        <a:srgbClr val="BFBFBF"/>
-                      </a:solidFill>
-                      <a:prstDash val="solid"/>
-                      <a:round/>
-                      <a:headEnd type="none" w="med" len="med"/>
-                      <a:tailEnd type="none" w="med" len="med"/>
-                    </a:lnR>
-                    <a:lnT w="9525" cap="flat" cmpd="sng" algn="ctr">
-                      <a:solidFill>
-                        <a:srgbClr val="BFBFBF"/>
-                      </a:solidFill>
-                      <a:prstDash val="solid"/>
-                      <a:round/>
-                      <a:headEnd type="none" w="med" len="med"/>
-                      <a:tailEnd type="none" w="med" len="med"/>
-                    </a:lnT>
-                    <a:lnB w="9525" cap="flat" cmpd="sng" algn="ctr">
-                      <a:solidFill>
-                        <a:srgbClr val="BFBFBF"/>
-                      </a:solidFill>
-                      <a:prstDash val="solid"/>
-                      <a:round/>
-                      <a:headEnd type="none" w="med" len="med"/>
-                      <a:tailEnd type="none" w="med" len="med"/>
-                    </a:lnB>
-                  </a:tcPr>
-                </a:tc>
-                <a:tc>
-                  <a:txBody>
-                    <a:bodyPr/>
-                    <a:lstStyle/>
-                    <a:p>
-                      <a:pPr marL="0" indent="0" algn="l">
-                        <a:buNone/>
-                      </a:pPr>
-                      <a:r>
-                        <a:rPr lang="en-US" sz="900" dirty="0">
+                        <a:rPr lang="en-US" sz="800" dirty="0">
                           <a:solidFill>
                             <a:srgbClr val="222222"/>
                           </a:solidFill>
@@ -9210,7 +11908,7 @@
                         <a:buNone/>
                       </a:pPr>
                       <a:r>
-                        <a:rPr lang="en-US" sz="900" dirty="0" u="sng">
+                        <a:rPr lang="en-US" sz="800" dirty="0" u="sng">
                           <a:solidFill>
                             <a:srgbClr val="1F5FA8"/>
                           </a:solidFill>
@@ -9268,7 +11966,7 @@
                   </a:ext>
                 </a:extLst>
               </a:tr>
-              <a:tr h="305972">
+              <a:tr h="240971">
                 <a:tc>
                   <a:txBody>
                     <a:bodyPr/>
@@ -9278,7 +11976,7 @@
                         <a:buNone/>
                       </a:pPr>
                       <a:r>
-                        <a:rPr lang="en-US" sz="900" b="1" dirty="0">
+                        <a:rPr lang="en-US" sz="800" b="1" dirty="0">
                           <a:solidFill>
                             <a:srgbClr val="222222"/>
                           </a:solidFill>
@@ -9343,7 +12041,7 @@
                         <a:buNone/>
                       </a:pPr>
                       <a:r>
-                        <a:rPr lang="en-US" sz="900" b="1" dirty="0">
+                        <a:rPr lang="en-US" sz="800" b="1" dirty="0">
                           <a:solidFill>
                             <a:srgbClr val="222222"/>
                           </a:solidFill>
@@ -9351,7 +12049,7 @@
                           <a:ea typeface="Meiryo" pitchFamily="34" charset="-122"/>
                           <a:cs typeface="Meiryo" pitchFamily="34" charset="-120"/>
                         </a:rPr>
-                        <a:t>児童発達支援コンパッション保育所</a:t>
+                        <a:t>エスポワール</a:t>
                       </a:r>
                       <a:endParaRPr lang="en-US" sz="1100" dirty="0">
                         <a:latin typeface="Meiryo" charset="0"/>
@@ -9408,7 +12106,1186 @@
                         <a:buNone/>
                       </a:pPr>
                       <a:r>
-                        <a:rPr lang="en-US" sz="900" dirty="0">
+                        <a:rPr lang="en-US" sz="800" dirty="0">
+                          <a:solidFill>
+                            <a:srgbClr val="222222"/>
+                          </a:solidFill>
+                          <a:latin typeface="Meiryo" pitchFamily="34" charset="0"/>
+                          <a:ea typeface="Meiryo" pitchFamily="34" charset="-122"/>
+                          <a:cs typeface="Meiryo" pitchFamily="34" charset="-120"/>
+                        </a:rPr>
+                        <a:t>要確認</a:t>
+                      </a:r>
+                      <a:endParaRPr lang="en-US" sz="1100" dirty="0">
+                        <a:latin typeface="Meiryo" charset="0"/>
+                        <a:ea typeface="Meiryo" charset="0"/>
+                        <a:cs typeface="Meiryo" charset="0"/>
+                      </a:endParaRPr>
+                    </a:p>
+                  </a:txBody>
+                  <a:tcPr anchor="ctr" marT="18000" marB="18000" marL="64008" marR="45720">
+                    <a:lnL w="9525" cap="flat" cmpd="sng" algn="ctr">
+                      <a:solidFill>
+                        <a:srgbClr val="BFBFBF"/>
+                      </a:solidFill>
+                      <a:prstDash val="solid"/>
+                      <a:round/>
+                      <a:headEnd type="none" w="med" len="med"/>
+                      <a:tailEnd type="none" w="med" len="med"/>
+                    </a:lnL>
+                    <a:lnR w="9525" cap="flat" cmpd="sng" algn="ctr">
+                      <a:solidFill>
+                        <a:srgbClr val="BFBFBF"/>
+                      </a:solidFill>
+                      <a:prstDash val="solid"/>
+                      <a:round/>
+                      <a:headEnd type="none" w="med" len="med"/>
+                      <a:tailEnd type="none" w="med" len="med"/>
+                    </a:lnR>
+                    <a:lnT w="9525" cap="flat" cmpd="sng" algn="ctr">
+                      <a:solidFill>
+                        <a:srgbClr val="BFBFBF"/>
+                      </a:solidFill>
+                      <a:prstDash val="solid"/>
+                      <a:round/>
+                      <a:headEnd type="none" w="med" len="med"/>
+                      <a:tailEnd type="none" w="med" len="med"/>
+                    </a:lnT>
+                    <a:lnB w="9525" cap="flat" cmpd="sng" algn="ctr">
+                      <a:solidFill>
+                        <a:srgbClr val="BFBFBF"/>
+                      </a:solidFill>
+                      <a:prstDash val="solid"/>
+                      <a:round/>
+                      <a:headEnd type="none" w="med" len="med"/>
+                      <a:tailEnd type="none" w="med" len="med"/>
+                    </a:lnB>
+                  </a:tcPr>
+                </a:tc>
+                <a:tc>
+                  <a:txBody>
+                    <a:bodyPr/>
+                    <a:lstStyle/>
+                    <a:p>
+                      <a:pPr marL="0" indent="0" algn="l">
+                        <a:buNone/>
+                      </a:pPr>
+                      <a:r>
+                        <a:rPr lang="en-US" sz="800" dirty="0">
+                          <a:solidFill>
+                            <a:srgbClr val="222222"/>
+                          </a:solidFill>
+                          <a:latin typeface="Meiryo" pitchFamily="34" charset="0"/>
+                          <a:ea typeface="Meiryo" pitchFamily="34" charset="-122"/>
+                          <a:cs typeface="Meiryo" pitchFamily="34" charset="-120"/>
+                        </a:rPr>
+                        <a:t>田間2-56-10</a:t>
+                      </a:r>
+                      <a:endParaRPr lang="en-US" sz="1100" dirty="0">
+                        <a:latin typeface="Meiryo" charset="0"/>
+                        <a:ea typeface="Meiryo" charset="0"/>
+                        <a:cs typeface="Meiryo" charset="0"/>
+                      </a:endParaRPr>
+                    </a:p>
+                  </a:txBody>
+                  <a:tcPr anchor="ctr" marT="18000" marB="18000" marL="64008" marR="45720">
+                    <a:lnL w="9525" cap="flat" cmpd="sng" algn="ctr">
+                      <a:solidFill>
+                        <a:srgbClr val="BFBFBF"/>
+                      </a:solidFill>
+                      <a:prstDash val="solid"/>
+                      <a:round/>
+                      <a:headEnd type="none" w="med" len="med"/>
+                      <a:tailEnd type="none" w="med" len="med"/>
+                    </a:lnL>
+                    <a:lnR w="9525" cap="flat" cmpd="sng" algn="ctr">
+                      <a:solidFill>
+                        <a:srgbClr val="BFBFBF"/>
+                      </a:solidFill>
+                      <a:prstDash val="solid"/>
+                      <a:round/>
+                      <a:headEnd type="none" w="med" len="med"/>
+                      <a:tailEnd type="none" w="med" len="med"/>
+                    </a:lnR>
+                    <a:lnT w="9525" cap="flat" cmpd="sng" algn="ctr">
+                      <a:solidFill>
+                        <a:srgbClr val="BFBFBF"/>
+                      </a:solidFill>
+                      <a:prstDash val="solid"/>
+                      <a:round/>
+                      <a:headEnd type="none" w="med" len="med"/>
+                      <a:tailEnd type="none" w="med" len="med"/>
+                    </a:lnT>
+                    <a:lnB w="9525" cap="flat" cmpd="sng" algn="ctr">
+                      <a:solidFill>
+                        <a:srgbClr val="BFBFBF"/>
+                      </a:solidFill>
+                      <a:prstDash val="solid"/>
+                      <a:round/>
+                      <a:headEnd type="none" w="med" len="med"/>
+                      <a:tailEnd type="none" w="med" len="med"/>
+                    </a:lnB>
+                  </a:tcPr>
+                </a:tc>
+                <a:tc>
+                  <a:txBody>
+                    <a:bodyPr/>
+                    <a:lstStyle/>
+                    <a:p>
+                      <a:pPr marL="0" indent="0" algn="l">
+                        <a:buNone/>
+                      </a:pPr>
+                      <a:r>
+                        <a:rPr lang="en-US" sz="800" dirty="0">
+                          <a:solidFill>
+                            <a:srgbClr val="222222"/>
+                          </a:solidFill>
+                          <a:latin typeface="Meiryo" pitchFamily="34" charset="0"/>
+                          <a:ea typeface="Meiryo" pitchFamily="34" charset="-122"/>
+                          <a:cs typeface="Meiryo" pitchFamily="34" charset="-120"/>
+                        </a:rPr>
+                        <a:t>050-3145-9731</a:t>
+                      </a:r>
+                      <a:endParaRPr lang="en-US" sz="1100" dirty="0">
+                        <a:latin typeface="Meiryo" charset="0"/>
+                        <a:ea typeface="Meiryo" charset="0"/>
+                        <a:cs typeface="Meiryo" charset="0"/>
+                      </a:endParaRPr>
+                    </a:p>
+                  </a:txBody>
+                  <a:tcPr anchor="ctr" marT="18000" marB="18000" marL="64008" marR="45720">
+                    <a:lnL w="9525" cap="flat" cmpd="sng" algn="ctr">
+                      <a:solidFill>
+                        <a:srgbClr val="BFBFBF"/>
+                      </a:solidFill>
+                      <a:prstDash val="solid"/>
+                      <a:round/>
+                      <a:headEnd type="none" w="med" len="med"/>
+                      <a:tailEnd type="none" w="med" len="med"/>
+                    </a:lnL>
+                    <a:lnR w="9525" cap="flat" cmpd="sng" algn="ctr">
+                      <a:solidFill>
+                        <a:srgbClr val="BFBFBF"/>
+                      </a:solidFill>
+                      <a:prstDash val="solid"/>
+                      <a:round/>
+                      <a:headEnd type="none" w="med" len="med"/>
+                      <a:tailEnd type="none" w="med" len="med"/>
+                    </a:lnR>
+                    <a:lnT w="9525" cap="flat" cmpd="sng" algn="ctr">
+                      <a:solidFill>
+                        <a:srgbClr val="BFBFBF"/>
+                      </a:solidFill>
+                      <a:prstDash val="solid"/>
+                      <a:round/>
+                      <a:headEnd type="none" w="med" len="med"/>
+                      <a:tailEnd type="none" w="med" len="med"/>
+                    </a:lnT>
+                    <a:lnB w="9525" cap="flat" cmpd="sng" algn="ctr">
+                      <a:solidFill>
+                        <a:srgbClr val="BFBFBF"/>
+                      </a:solidFill>
+                      <a:prstDash val="solid"/>
+                      <a:round/>
+                      <a:headEnd type="none" w="med" len="med"/>
+                      <a:tailEnd type="none" w="med" len="med"/>
+                    </a:lnB>
+                  </a:tcPr>
+                </a:tc>
+                <a:tc>
+                  <a:txBody>
+                    <a:bodyPr/>
+                    <a:lstStyle/>
+                    <a:p>
+                      <a:pPr marL="0" indent="0" algn="l">
+                        <a:buNone/>
+                      </a:pPr>
+                      <a:r>
+                        <a:rPr lang="en-US" sz="800" dirty="0" u="sng">
+                          <a:solidFill>
+                            <a:srgbClr val="1F5FA8"/>
+                          </a:solidFill>
+                          <a:latin typeface="Meiryo" charset="0"/>
+                          <a:ea typeface="Meiryo" charset="0"/>
+                          <a:cs typeface="Meiryo" charset="0"/>
+                          <a:hlinkClick r:id="rId9"/>
+                        </a:rPr>
+                        <a:t>ホイシル 事業所ページ</a:t>
+                      </a:r>
+                    </a:p>
+                  </a:txBody>
+                  <a:tcPr anchor="ctr" marT="18000" marB="18000" marL="64008" marR="45720">
+                    <a:lnL w="9525" cap="flat" cmpd="sng" algn="ctr">
+                      <a:solidFill>
+                        <a:srgbClr val="BFBFBF"/>
+                      </a:solidFill>
+                      <a:prstDash val="solid"/>
+                      <a:round/>
+                      <a:headEnd type="none" w="med" len="med"/>
+                      <a:tailEnd type="none" w="med" len="med"/>
+                    </a:lnL>
+                    <a:lnR w="9525" cap="flat" cmpd="sng" algn="ctr">
+                      <a:solidFill>
+                        <a:srgbClr val="BFBFBF"/>
+                      </a:solidFill>
+                      <a:prstDash val="solid"/>
+                      <a:round/>
+                      <a:headEnd type="none" w="med" len="med"/>
+                      <a:tailEnd type="none" w="med" len="med"/>
+                    </a:lnR>
+                    <a:lnT w="9525" cap="flat" cmpd="sng" algn="ctr">
+                      <a:solidFill>
+                        <a:srgbClr val="BFBFBF"/>
+                      </a:solidFill>
+                      <a:prstDash val="solid"/>
+                      <a:round/>
+                      <a:headEnd type="none" w="med" len="med"/>
+                      <a:tailEnd type="none" w="med" len="med"/>
+                    </a:lnT>
+                    <a:lnB w="9525" cap="flat" cmpd="sng" algn="ctr">
+                      <a:solidFill>
+                        <a:srgbClr val="BFBFBF"/>
+                      </a:solidFill>
+                      <a:prstDash val="solid"/>
+                      <a:round/>
+                      <a:headEnd type="none" w="med" len="med"/>
+                      <a:tailEnd type="none" w="med" len="med"/>
+                    </a:lnB>
+                  </a:tcPr>
+                </a:tc>
+                <a:extLst>
+                  <a:ext uri="{0D108BD9-81ED-4DB2-BD59-A6C34878D82A}">
+                    <a16:rowId xmlns:a16="http://schemas.microsoft.com/office/drawing/2014/main" val="10001"/>
+                  </a:ext>
+                </a:extLst>
+              </a:tr>
+              <a:tr h="240971">
+                <a:tc>
+                  <a:txBody>
+                    <a:bodyPr/>
+                    <a:lstStyle/>
+                    <a:p>
+                      <a:pPr marL="0" indent="0" algn="ctr">
+                        <a:buNone/>
+                      </a:pPr>
+                      <a:r>
+                        <a:rPr lang="en-US" sz="800" b="1" dirty="0">
+                          <a:solidFill>
+                            <a:srgbClr val="222222"/>
+                          </a:solidFill>
+                          <a:latin typeface="Meiryo" pitchFamily="34" charset="0"/>
+                          <a:ea typeface="Meiryo" pitchFamily="34" charset="-122"/>
+                          <a:cs typeface="Meiryo" pitchFamily="34" charset="-120"/>
+                        </a:rPr>
+                        <a:t>⑦</a:t>
+                      </a:r>
+                      <a:endParaRPr lang="en-US" sz="1100" dirty="0">
+                        <a:latin typeface="Meiryo" charset="0"/>
+                        <a:ea typeface="Meiryo" charset="0"/>
+                        <a:cs typeface="Meiryo" charset="0"/>
+                      </a:endParaRPr>
+                    </a:p>
+                  </a:txBody>
+                  <a:tcPr anchor="ctr" marT="18000" marB="18000" marL="64008" marR="45720">
+                    <a:lnL w="9525" cap="flat" cmpd="sng" algn="ctr">
+                      <a:solidFill>
+                        <a:srgbClr val="BFBFBF"/>
+                      </a:solidFill>
+                      <a:prstDash val="solid"/>
+                      <a:round/>
+                      <a:headEnd type="none" w="med" len="med"/>
+                      <a:tailEnd type="none" w="med" len="med"/>
+                    </a:lnL>
+                    <a:lnR w="9525" cap="flat" cmpd="sng" algn="ctr">
+                      <a:solidFill>
+                        <a:srgbClr val="BFBFBF"/>
+                      </a:solidFill>
+                      <a:prstDash val="solid"/>
+                      <a:round/>
+                      <a:headEnd type="none" w="med" len="med"/>
+                      <a:tailEnd type="none" w="med" len="med"/>
+                    </a:lnR>
+                    <a:lnT w="9525" cap="flat" cmpd="sng" algn="ctr">
+                      <a:solidFill>
+                        <a:srgbClr val="BFBFBF"/>
+                      </a:solidFill>
+                      <a:prstDash val="solid"/>
+                      <a:round/>
+                      <a:headEnd type="none" w="med" len="med"/>
+                      <a:tailEnd type="none" w="med" len="med"/>
+                    </a:lnT>
+                    <a:lnB w="9525" cap="flat" cmpd="sng" algn="ctr">
+                      <a:solidFill>
+                        <a:srgbClr val="BFBFBF"/>
+                      </a:solidFill>
+                      <a:prstDash val="solid"/>
+                      <a:round/>
+                      <a:headEnd type="none" w="med" len="med"/>
+                      <a:tailEnd type="none" w="med" len="med"/>
+                    </a:lnB>
+                  </a:tcPr>
+                </a:tc>
+                <a:tc>
+                  <a:txBody>
+                    <a:bodyPr/>
+                    <a:lstStyle/>
+                    <a:p>
+                      <a:pPr marL="0" indent="0" algn="l">
+                        <a:buNone/>
+                      </a:pPr>
+                      <a:r>
+                        <a:rPr lang="en-US" sz="800" b="1" dirty="0">
+                          <a:solidFill>
+                            <a:srgbClr val="222222"/>
+                          </a:solidFill>
+                          <a:latin typeface="Meiryo" pitchFamily="34" charset="0"/>
+                          <a:ea typeface="Meiryo" pitchFamily="34" charset="-122"/>
+                          <a:cs typeface="Meiryo" pitchFamily="34" charset="-120"/>
+                        </a:rPr>
+                        <a:t>エスポワール第2</a:t>
+                      </a:r>
+                      <a:endParaRPr lang="en-US" sz="1100" dirty="0">
+                        <a:latin typeface="Meiryo" charset="0"/>
+                        <a:ea typeface="Meiryo" charset="0"/>
+                        <a:cs typeface="Meiryo" charset="0"/>
+                      </a:endParaRPr>
+                    </a:p>
+                  </a:txBody>
+                  <a:tcPr anchor="ctr" marT="18000" marB="18000" marL="64008" marR="45720">
+                    <a:lnL w="9525" cap="flat" cmpd="sng" algn="ctr">
+                      <a:solidFill>
+                        <a:srgbClr val="BFBFBF"/>
+                      </a:solidFill>
+                      <a:prstDash val="solid"/>
+                      <a:round/>
+                      <a:headEnd type="none" w="med" len="med"/>
+                      <a:tailEnd type="none" w="med" len="med"/>
+                    </a:lnL>
+                    <a:lnR w="9525" cap="flat" cmpd="sng" algn="ctr">
+                      <a:solidFill>
+                        <a:srgbClr val="BFBFBF"/>
+                      </a:solidFill>
+                      <a:prstDash val="solid"/>
+                      <a:round/>
+                      <a:headEnd type="none" w="med" len="med"/>
+                      <a:tailEnd type="none" w="med" len="med"/>
+                    </a:lnR>
+                    <a:lnT w="9525" cap="flat" cmpd="sng" algn="ctr">
+                      <a:solidFill>
+                        <a:srgbClr val="BFBFBF"/>
+                      </a:solidFill>
+                      <a:prstDash val="solid"/>
+                      <a:round/>
+                      <a:headEnd type="none" w="med" len="med"/>
+                      <a:tailEnd type="none" w="med" len="med"/>
+                    </a:lnT>
+                    <a:lnB w="9525" cap="flat" cmpd="sng" algn="ctr">
+                      <a:solidFill>
+                        <a:srgbClr val="BFBFBF"/>
+                      </a:solidFill>
+                      <a:prstDash val="solid"/>
+                      <a:round/>
+                      <a:headEnd type="none" w="med" len="med"/>
+                      <a:tailEnd type="none" w="med" len="med"/>
+                    </a:lnB>
+                  </a:tcPr>
+                </a:tc>
+                <a:tc>
+                  <a:txBody>
+                    <a:bodyPr/>
+                    <a:lstStyle/>
+                    <a:p>
+                      <a:pPr marL="0" indent="0" algn="l">
+                        <a:buNone/>
+                      </a:pPr>
+                      <a:r>
+                        <a:rPr lang="en-US" sz="800" dirty="0">
+                          <a:solidFill>
+                            <a:srgbClr val="222222"/>
+                          </a:solidFill>
+                          <a:latin typeface="Meiryo" pitchFamily="34" charset="0"/>
+                          <a:ea typeface="Meiryo" pitchFamily="34" charset="-122"/>
+                          <a:cs typeface="Meiryo" pitchFamily="34" charset="-120"/>
+                        </a:rPr>
+                        <a:t>要確認</a:t>
+                      </a:r>
+                      <a:endParaRPr lang="en-US" sz="1100" dirty="0">
+                        <a:latin typeface="Meiryo" charset="0"/>
+                        <a:ea typeface="Meiryo" charset="0"/>
+                        <a:cs typeface="Meiryo" charset="0"/>
+                      </a:endParaRPr>
+                    </a:p>
+                  </a:txBody>
+                  <a:tcPr anchor="ctr" marT="18000" marB="18000" marL="64008" marR="45720">
+                    <a:lnL w="9525" cap="flat" cmpd="sng" algn="ctr">
+                      <a:solidFill>
+                        <a:srgbClr val="BFBFBF"/>
+                      </a:solidFill>
+                      <a:prstDash val="solid"/>
+                      <a:round/>
+                      <a:headEnd type="none" w="med" len="med"/>
+                      <a:tailEnd type="none" w="med" len="med"/>
+                    </a:lnL>
+                    <a:lnR w="9525" cap="flat" cmpd="sng" algn="ctr">
+                      <a:solidFill>
+                        <a:srgbClr val="BFBFBF"/>
+                      </a:solidFill>
+                      <a:prstDash val="solid"/>
+                      <a:round/>
+                      <a:headEnd type="none" w="med" len="med"/>
+                      <a:tailEnd type="none" w="med" len="med"/>
+                    </a:lnR>
+                    <a:lnT w="9525" cap="flat" cmpd="sng" algn="ctr">
+                      <a:solidFill>
+                        <a:srgbClr val="BFBFBF"/>
+                      </a:solidFill>
+                      <a:prstDash val="solid"/>
+                      <a:round/>
+                      <a:headEnd type="none" w="med" len="med"/>
+                      <a:tailEnd type="none" w="med" len="med"/>
+                    </a:lnT>
+                    <a:lnB w="9525" cap="flat" cmpd="sng" algn="ctr">
+                      <a:solidFill>
+                        <a:srgbClr val="BFBFBF"/>
+                      </a:solidFill>
+                      <a:prstDash val="solid"/>
+                      <a:round/>
+                      <a:headEnd type="none" w="med" len="med"/>
+                      <a:tailEnd type="none" w="med" len="med"/>
+                    </a:lnB>
+                  </a:tcPr>
+                </a:tc>
+                <a:tc>
+                  <a:txBody>
+                    <a:bodyPr/>
+                    <a:lstStyle/>
+                    <a:p>
+                      <a:pPr marL="0" indent="0" algn="l">
+                        <a:buNone/>
+                      </a:pPr>
+                      <a:r>
+                        <a:rPr lang="en-US" sz="800" dirty="0">
+                          <a:solidFill>
+                            <a:srgbClr val="222222"/>
+                          </a:solidFill>
+                          <a:latin typeface="Meiryo" pitchFamily="34" charset="0"/>
+                          <a:ea typeface="Meiryo" pitchFamily="34" charset="-122"/>
+                          <a:cs typeface="Meiryo" pitchFamily="34" charset="-120"/>
+                        </a:rPr>
+                        <a:t>求名駅から約229m（住所要確認）</a:t>
+                      </a:r>
+                      <a:endParaRPr lang="en-US" sz="1100" dirty="0">
+                        <a:latin typeface="Meiryo" charset="0"/>
+                        <a:ea typeface="Meiryo" charset="0"/>
+                        <a:cs typeface="Meiryo" charset="0"/>
+                      </a:endParaRPr>
+                    </a:p>
+                  </a:txBody>
+                  <a:tcPr anchor="ctr" marT="18000" marB="18000" marL="64008" marR="45720">
+                    <a:lnL w="9525" cap="flat" cmpd="sng" algn="ctr">
+                      <a:solidFill>
+                        <a:srgbClr val="BFBFBF"/>
+                      </a:solidFill>
+                      <a:prstDash val="solid"/>
+                      <a:round/>
+                      <a:headEnd type="none" w="med" len="med"/>
+                      <a:tailEnd type="none" w="med" len="med"/>
+                    </a:lnL>
+                    <a:lnR w="9525" cap="flat" cmpd="sng" algn="ctr">
+                      <a:solidFill>
+                        <a:srgbClr val="BFBFBF"/>
+                      </a:solidFill>
+                      <a:prstDash val="solid"/>
+                      <a:round/>
+                      <a:headEnd type="none" w="med" len="med"/>
+                      <a:tailEnd type="none" w="med" len="med"/>
+                    </a:lnR>
+                    <a:lnT w="9525" cap="flat" cmpd="sng" algn="ctr">
+                      <a:solidFill>
+                        <a:srgbClr val="BFBFBF"/>
+                      </a:solidFill>
+                      <a:prstDash val="solid"/>
+                      <a:round/>
+                      <a:headEnd type="none" w="med" len="med"/>
+                      <a:tailEnd type="none" w="med" len="med"/>
+                    </a:lnT>
+                    <a:lnB w="9525" cap="flat" cmpd="sng" algn="ctr">
+                      <a:solidFill>
+                        <a:srgbClr val="BFBFBF"/>
+                      </a:solidFill>
+                      <a:prstDash val="solid"/>
+                      <a:round/>
+                      <a:headEnd type="none" w="med" len="med"/>
+                      <a:tailEnd type="none" w="med" len="med"/>
+                    </a:lnB>
+                  </a:tcPr>
+                </a:tc>
+                <a:tc>
+                  <a:txBody>
+                    <a:bodyPr/>
+                    <a:lstStyle/>
+                    <a:p>
+                      <a:pPr marL="0" indent="0" algn="l">
+                        <a:buNone/>
+                      </a:pPr>
+                      <a:r>
+                        <a:rPr lang="en-US" sz="800" dirty="0">
+                          <a:solidFill>
+                            <a:srgbClr val="222222"/>
+                          </a:solidFill>
+                          <a:latin typeface="Meiryo" pitchFamily="34" charset="0"/>
+                          <a:ea typeface="Meiryo" pitchFamily="34" charset="-122"/>
+                          <a:cs typeface="Meiryo" pitchFamily="34" charset="-120"/>
+                        </a:rPr>
+                        <a:t>要確認</a:t>
+                      </a:r>
+                      <a:endParaRPr lang="en-US" sz="1100" dirty="0">
+                        <a:latin typeface="Meiryo" charset="0"/>
+                        <a:ea typeface="Meiryo" charset="0"/>
+                        <a:cs typeface="Meiryo" charset="0"/>
+                      </a:endParaRPr>
+                    </a:p>
+                  </a:txBody>
+                  <a:tcPr anchor="ctr" marT="18000" marB="18000" marL="64008" marR="45720">
+                    <a:lnL w="9525" cap="flat" cmpd="sng" algn="ctr">
+                      <a:solidFill>
+                        <a:srgbClr val="BFBFBF"/>
+                      </a:solidFill>
+                      <a:prstDash val="solid"/>
+                      <a:round/>
+                      <a:headEnd type="none" w="med" len="med"/>
+                      <a:tailEnd type="none" w="med" len="med"/>
+                    </a:lnL>
+                    <a:lnR w="9525" cap="flat" cmpd="sng" algn="ctr">
+                      <a:solidFill>
+                        <a:srgbClr val="BFBFBF"/>
+                      </a:solidFill>
+                      <a:prstDash val="solid"/>
+                      <a:round/>
+                      <a:headEnd type="none" w="med" len="med"/>
+                      <a:tailEnd type="none" w="med" len="med"/>
+                    </a:lnR>
+                    <a:lnT w="9525" cap="flat" cmpd="sng" algn="ctr">
+                      <a:solidFill>
+                        <a:srgbClr val="BFBFBF"/>
+                      </a:solidFill>
+                      <a:prstDash val="solid"/>
+                      <a:round/>
+                      <a:headEnd type="none" w="med" len="med"/>
+                      <a:tailEnd type="none" w="med" len="med"/>
+                    </a:lnT>
+                    <a:lnB w="9525" cap="flat" cmpd="sng" algn="ctr">
+                      <a:solidFill>
+                        <a:srgbClr val="BFBFBF"/>
+                      </a:solidFill>
+                      <a:prstDash val="solid"/>
+                      <a:round/>
+                      <a:headEnd type="none" w="med" len="med"/>
+                      <a:tailEnd type="none" w="med" len="med"/>
+                    </a:lnB>
+                  </a:tcPr>
+                </a:tc>
+                <a:tc>
+                  <a:txBody>
+                    <a:bodyPr/>
+                    <a:lstStyle/>
+                    <a:p>
+                      <a:pPr marL="0" indent="0" algn="l">
+                        <a:buNone/>
+                      </a:pPr>
+                      <a:r>
+                        <a:rPr lang="en-US" sz="800" dirty="0" u="sng">
+                          <a:solidFill>
+                            <a:srgbClr val="1F5FA8"/>
+                          </a:solidFill>
+                          <a:latin typeface="Meiryo" charset="0"/>
+                          <a:ea typeface="Meiryo" charset="0"/>
+                          <a:cs typeface="Meiryo" charset="0"/>
+                          <a:hlinkClick r:id="rId10"/>
+                        </a:rPr>
+                        <a:t>ホイシル 東金市 児発一覧</a:t>
+                      </a:r>
+                    </a:p>
+                  </a:txBody>
+                  <a:tcPr anchor="ctr" marT="18000" marB="18000" marL="64008" marR="45720">
+                    <a:lnL w="9525" cap="flat" cmpd="sng" algn="ctr">
+                      <a:solidFill>
+                        <a:srgbClr val="BFBFBF"/>
+                      </a:solidFill>
+                      <a:prstDash val="solid"/>
+                      <a:round/>
+                      <a:headEnd type="none" w="med" len="med"/>
+                      <a:tailEnd type="none" w="med" len="med"/>
+                    </a:lnL>
+                    <a:lnR w="9525" cap="flat" cmpd="sng" algn="ctr">
+                      <a:solidFill>
+                        <a:srgbClr val="BFBFBF"/>
+                      </a:solidFill>
+                      <a:prstDash val="solid"/>
+                      <a:round/>
+                      <a:headEnd type="none" w="med" len="med"/>
+                      <a:tailEnd type="none" w="med" len="med"/>
+                    </a:lnR>
+                    <a:lnT w="9525" cap="flat" cmpd="sng" algn="ctr">
+                      <a:solidFill>
+                        <a:srgbClr val="BFBFBF"/>
+                      </a:solidFill>
+                      <a:prstDash val="solid"/>
+                      <a:round/>
+                      <a:headEnd type="none" w="med" len="med"/>
+                      <a:tailEnd type="none" w="med" len="med"/>
+                    </a:lnT>
+                    <a:lnB w="9525" cap="flat" cmpd="sng" algn="ctr">
+                      <a:solidFill>
+                        <a:srgbClr val="BFBFBF"/>
+                      </a:solidFill>
+                      <a:prstDash val="solid"/>
+                      <a:round/>
+                      <a:headEnd type="none" w="med" len="med"/>
+                      <a:tailEnd type="none" w="med" len="med"/>
+                    </a:lnB>
+                  </a:tcPr>
+                </a:tc>
+                <a:extLst>
+                  <a:ext uri="{0D108BD9-81ED-4DB2-BD59-A6C34878D82A}">
+                    <a16:rowId xmlns:a16="http://schemas.microsoft.com/office/drawing/2014/main" val="10001"/>
+                  </a:ext>
+                </a:extLst>
+              </a:tr>
+              <a:tr h="240971">
+                <a:tc>
+                  <a:txBody>
+                    <a:bodyPr/>
+                    <a:lstStyle/>
+                    <a:p>
+                      <a:pPr marL="0" indent="0" algn="ctr">
+                        <a:buNone/>
+                      </a:pPr>
+                      <a:r>
+                        <a:rPr lang="en-US" sz="800" b="1" dirty="0">
+                          <a:solidFill>
+                            <a:srgbClr val="222222"/>
+                          </a:solidFill>
+                          <a:latin typeface="Meiryo" pitchFamily="34" charset="0"/>
+                          <a:ea typeface="Meiryo" pitchFamily="34" charset="-122"/>
+                          <a:cs typeface="Meiryo" pitchFamily="34" charset="-120"/>
+                        </a:rPr>
+                        <a:t>⑧</a:t>
+                      </a:r>
+                      <a:endParaRPr lang="en-US" sz="1100" dirty="0">
+                        <a:latin typeface="Meiryo" charset="0"/>
+                        <a:ea typeface="Meiryo" charset="0"/>
+                        <a:cs typeface="Meiryo" charset="0"/>
+                      </a:endParaRPr>
+                    </a:p>
+                  </a:txBody>
+                  <a:tcPr anchor="ctr" marT="18000" marB="18000" marL="64008" marR="45720">
+                    <a:lnL w="9525" cap="flat" cmpd="sng" algn="ctr">
+                      <a:solidFill>
+                        <a:srgbClr val="BFBFBF"/>
+                      </a:solidFill>
+                      <a:prstDash val="solid"/>
+                      <a:round/>
+                      <a:headEnd type="none" w="med" len="med"/>
+                      <a:tailEnd type="none" w="med" len="med"/>
+                    </a:lnL>
+                    <a:lnR w="9525" cap="flat" cmpd="sng" algn="ctr">
+                      <a:solidFill>
+                        <a:srgbClr val="BFBFBF"/>
+                      </a:solidFill>
+                      <a:prstDash val="solid"/>
+                      <a:round/>
+                      <a:headEnd type="none" w="med" len="med"/>
+                      <a:tailEnd type="none" w="med" len="med"/>
+                    </a:lnR>
+                    <a:lnT w="9525" cap="flat" cmpd="sng" algn="ctr">
+                      <a:solidFill>
+                        <a:srgbClr val="BFBFBF"/>
+                      </a:solidFill>
+                      <a:prstDash val="solid"/>
+                      <a:round/>
+                      <a:headEnd type="none" w="med" len="med"/>
+                      <a:tailEnd type="none" w="med" len="med"/>
+                    </a:lnT>
+                    <a:lnB w="9525" cap="flat" cmpd="sng" algn="ctr">
+                      <a:solidFill>
+                        <a:srgbClr val="BFBFBF"/>
+                      </a:solidFill>
+                      <a:prstDash val="solid"/>
+                      <a:round/>
+                      <a:headEnd type="none" w="med" len="med"/>
+                      <a:tailEnd type="none" w="med" len="med"/>
+                    </a:lnB>
+                  </a:tcPr>
+                </a:tc>
+                <a:tc>
+                  <a:txBody>
+                    <a:bodyPr/>
+                    <a:lstStyle/>
+                    <a:p>
+                      <a:pPr marL="0" indent="0" algn="l">
+                        <a:buNone/>
+                      </a:pPr>
+                      <a:r>
+                        <a:rPr lang="en-US" sz="800" b="1" dirty="0">
+                          <a:solidFill>
+                            <a:srgbClr val="222222"/>
+                          </a:solidFill>
+                          <a:latin typeface="Meiryo" pitchFamily="34" charset="0"/>
+                          <a:ea typeface="Meiryo" pitchFamily="34" charset="-122"/>
+                          <a:cs typeface="Meiryo" pitchFamily="34" charset="-120"/>
+                        </a:rPr>
+                        <a:t>果実の木 求名</a:t>
+                      </a:r>
+                      <a:endParaRPr lang="en-US" sz="1100" dirty="0">
+                        <a:latin typeface="Meiryo" charset="0"/>
+                        <a:ea typeface="Meiryo" charset="0"/>
+                        <a:cs typeface="Meiryo" charset="0"/>
+                      </a:endParaRPr>
+                    </a:p>
+                  </a:txBody>
+                  <a:tcPr anchor="ctr" marT="18000" marB="18000" marL="64008" marR="45720">
+                    <a:lnL w="9525" cap="flat" cmpd="sng" algn="ctr">
+                      <a:solidFill>
+                        <a:srgbClr val="BFBFBF"/>
+                      </a:solidFill>
+                      <a:prstDash val="solid"/>
+                      <a:round/>
+                      <a:headEnd type="none" w="med" len="med"/>
+                      <a:tailEnd type="none" w="med" len="med"/>
+                    </a:lnL>
+                    <a:lnR w="9525" cap="flat" cmpd="sng" algn="ctr">
+                      <a:solidFill>
+                        <a:srgbClr val="BFBFBF"/>
+                      </a:solidFill>
+                      <a:prstDash val="solid"/>
+                      <a:round/>
+                      <a:headEnd type="none" w="med" len="med"/>
+                      <a:tailEnd type="none" w="med" len="med"/>
+                    </a:lnR>
+                    <a:lnT w="9525" cap="flat" cmpd="sng" algn="ctr">
+                      <a:solidFill>
+                        <a:srgbClr val="BFBFBF"/>
+                      </a:solidFill>
+                      <a:prstDash val="solid"/>
+                      <a:round/>
+                      <a:headEnd type="none" w="med" len="med"/>
+                      <a:tailEnd type="none" w="med" len="med"/>
+                    </a:lnT>
+                    <a:lnB w="9525" cap="flat" cmpd="sng" algn="ctr">
+                      <a:solidFill>
+                        <a:srgbClr val="BFBFBF"/>
+                      </a:solidFill>
+                      <a:prstDash val="solid"/>
+                      <a:round/>
+                      <a:headEnd type="none" w="med" len="med"/>
+                      <a:tailEnd type="none" w="med" len="med"/>
+                    </a:lnB>
+                  </a:tcPr>
+                </a:tc>
+                <a:tc>
+                  <a:txBody>
+                    <a:bodyPr/>
+                    <a:lstStyle/>
+                    <a:p>
+                      <a:pPr marL="0" indent="0" algn="l">
+                        <a:buNone/>
+                      </a:pPr>
+                      <a:r>
+                        <a:rPr lang="en-US" sz="800" dirty="0">
+                          <a:solidFill>
+                            <a:srgbClr val="222222"/>
+                          </a:solidFill>
+                          <a:latin typeface="Meiryo" pitchFamily="34" charset="0"/>
+                          <a:ea typeface="Meiryo" pitchFamily="34" charset="-122"/>
+                          <a:cs typeface="Meiryo" pitchFamily="34" charset="-120"/>
+                        </a:rPr>
+                        <a:t>要確認</a:t>
+                      </a:r>
+                      <a:endParaRPr lang="en-US" sz="1100" dirty="0">
+                        <a:latin typeface="Meiryo" charset="0"/>
+                        <a:ea typeface="Meiryo" charset="0"/>
+                        <a:cs typeface="Meiryo" charset="0"/>
+                      </a:endParaRPr>
+                    </a:p>
+                  </a:txBody>
+                  <a:tcPr anchor="ctr" marT="18000" marB="18000" marL="64008" marR="45720">
+                    <a:lnL w="9525" cap="flat" cmpd="sng" algn="ctr">
+                      <a:solidFill>
+                        <a:srgbClr val="BFBFBF"/>
+                      </a:solidFill>
+                      <a:prstDash val="solid"/>
+                      <a:round/>
+                      <a:headEnd type="none" w="med" len="med"/>
+                      <a:tailEnd type="none" w="med" len="med"/>
+                    </a:lnL>
+                    <a:lnR w="9525" cap="flat" cmpd="sng" algn="ctr">
+                      <a:solidFill>
+                        <a:srgbClr val="BFBFBF"/>
+                      </a:solidFill>
+                      <a:prstDash val="solid"/>
+                      <a:round/>
+                      <a:headEnd type="none" w="med" len="med"/>
+                      <a:tailEnd type="none" w="med" len="med"/>
+                    </a:lnR>
+                    <a:lnT w="9525" cap="flat" cmpd="sng" algn="ctr">
+                      <a:solidFill>
+                        <a:srgbClr val="BFBFBF"/>
+                      </a:solidFill>
+                      <a:prstDash val="solid"/>
+                      <a:round/>
+                      <a:headEnd type="none" w="med" len="med"/>
+                      <a:tailEnd type="none" w="med" len="med"/>
+                    </a:lnT>
+                    <a:lnB w="9525" cap="flat" cmpd="sng" algn="ctr">
+                      <a:solidFill>
+                        <a:srgbClr val="BFBFBF"/>
+                      </a:solidFill>
+                      <a:prstDash val="solid"/>
+                      <a:round/>
+                      <a:headEnd type="none" w="med" len="med"/>
+                      <a:tailEnd type="none" w="med" len="med"/>
+                    </a:lnB>
+                  </a:tcPr>
+                </a:tc>
+                <a:tc>
+                  <a:txBody>
+                    <a:bodyPr/>
+                    <a:lstStyle/>
+                    <a:p>
+                      <a:pPr marL="0" indent="0" algn="l">
+                        <a:buNone/>
+                      </a:pPr>
+                      <a:r>
+                        <a:rPr lang="en-US" sz="800" dirty="0">
+                          <a:solidFill>
+                            <a:srgbClr val="222222"/>
+                          </a:solidFill>
+                          <a:latin typeface="Meiryo" pitchFamily="34" charset="0"/>
+                          <a:ea typeface="Meiryo" pitchFamily="34" charset="-122"/>
+                          <a:cs typeface="Meiryo" pitchFamily="34" charset="-120"/>
+                        </a:rPr>
+                        <a:t>求名駅から約593m（住所要確認）</a:t>
+                      </a:r>
+                      <a:endParaRPr lang="en-US" sz="1100" dirty="0">
+                        <a:latin typeface="Meiryo" charset="0"/>
+                        <a:ea typeface="Meiryo" charset="0"/>
+                        <a:cs typeface="Meiryo" charset="0"/>
+                      </a:endParaRPr>
+                    </a:p>
+                  </a:txBody>
+                  <a:tcPr anchor="ctr" marT="18000" marB="18000" marL="64008" marR="45720">
+                    <a:lnL w="9525" cap="flat" cmpd="sng" algn="ctr">
+                      <a:solidFill>
+                        <a:srgbClr val="BFBFBF"/>
+                      </a:solidFill>
+                      <a:prstDash val="solid"/>
+                      <a:round/>
+                      <a:headEnd type="none" w="med" len="med"/>
+                      <a:tailEnd type="none" w="med" len="med"/>
+                    </a:lnL>
+                    <a:lnR w="9525" cap="flat" cmpd="sng" algn="ctr">
+                      <a:solidFill>
+                        <a:srgbClr val="BFBFBF"/>
+                      </a:solidFill>
+                      <a:prstDash val="solid"/>
+                      <a:round/>
+                      <a:headEnd type="none" w="med" len="med"/>
+                      <a:tailEnd type="none" w="med" len="med"/>
+                    </a:lnR>
+                    <a:lnT w="9525" cap="flat" cmpd="sng" algn="ctr">
+                      <a:solidFill>
+                        <a:srgbClr val="BFBFBF"/>
+                      </a:solidFill>
+                      <a:prstDash val="solid"/>
+                      <a:round/>
+                      <a:headEnd type="none" w="med" len="med"/>
+                      <a:tailEnd type="none" w="med" len="med"/>
+                    </a:lnT>
+                    <a:lnB w="9525" cap="flat" cmpd="sng" algn="ctr">
+                      <a:solidFill>
+                        <a:srgbClr val="BFBFBF"/>
+                      </a:solidFill>
+                      <a:prstDash val="solid"/>
+                      <a:round/>
+                      <a:headEnd type="none" w="med" len="med"/>
+                      <a:tailEnd type="none" w="med" len="med"/>
+                    </a:lnB>
+                  </a:tcPr>
+                </a:tc>
+                <a:tc>
+                  <a:txBody>
+                    <a:bodyPr/>
+                    <a:lstStyle/>
+                    <a:p>
+                      <a:pPr marL="0" indent="0" algn="l">
+                        <a:buNone/>
+                      </a:pPr>
+                      <a:r>
+                        <a:rPr lang="en-US" sz="800" dirty="0">
+                          <a:solidFill>
+                            <a:srgbClr val="222222"/>
+                          </a:solidFill>
+                          <a:latin typeface="Meiryo" pitchFamily="34" charset="0"/>
+                          <a:ea typeface="Meiryo" pitchFamily="34" charset="-122"/>
+                          <a:cs typeface="Meiryo" pitchFamily="34" charset="-120"/>
+                        </a:rPr>
+                        <a:t>要確認</a:t>
+                      </a:r>
+                      <a:endParaRPr lang="en-US" sz="1100" dirty="0">
+                        <a:latin typeface="Meiryo" charset="0"/>
+                        <a:ea typeface="Meiryo" charset="0"/>
+                        <a:cs typeface="Meiryo" charset="0"/>
+                      </a:endParaRPr>
+                    </a:p>
+                  </a:txBody>
+                  <a:tcPr anchor="ctr" marT="18000" marB="18000" marL="64008" marR="45720">
+                    <a:lnL w="9525" cap="flat" cmpd="sng" algn="ctr">
+                      <a:solidFill>
+                        <a:srgbClr val="BFBFBF"/>
+                      </a:solidFill>
+                      <a:prstDash val="solid"/>
+                      <a:round/>
+                      <a:headEnd type="none" w="med" len="med"/>
+                      <a:tailEnd type="none" w="med" len="med"/>
+                    </a:lnL>
+                    <a:lnR w="9525" cap="flat" cmpd="sng" algn="ctr">
+                      <a:solidFill>
+                        <a:srgbClr val="BFBFBF"/>
+                      </a:solidFill>
+                      <a:prstDash val="solid"/>
+                      <a:round/>
+                      <a:headEnd type="none" w="med" len="med"/>
+                      <a:tailEnd type="none" w="med" len="med"/>
+                    </a:lnR>
+                    <a:lnT w="9525" cap="flat" cmpd="sng" algn="ctr">
+                      <a:solidFill>
+                        <a:srgbClr val="BFBFBF"/>
+                      </a:solidFill>
+                      <a:prstDash val="solid"/>
+                      <a:round/>
+                      <a:headEnd type="none" w="med" len="med"/>
+                      <a:tailEnd type="none" w="med" len="med"/>
+                    </a:lnT>
+                    <a:lnB w="9525" cap="flat" cmpd="sng" algn="ctr">
+                      <a:solidFill>
+                        <a:srgbClr val="BFBFBF"/>
+                      </a:solidFill>
+                      <a:prstDash val="solid"/>
+                      <a:round/>
+                      <a:headEnd type="none" w="med" len="med"/>
+                      <a:tailEnd type="none" w="med" len="med"/>
+                    </a:lnB>
+                  </a:tcPr>
+                </a:tc>
+                <a:tc>
+                  <a:txBody>
+                    <a:bodyPr/>
+                    <a:lstStyle/>
+                    <a:p>
+                      <a:pPr marL="0" indent="0" algn="l">
+                        <a:buNone/>
+                      </a:pPr>
+                      <a:r>
+                        <a:rPr lang="en-US" sz="800" dirty="0" u="sng">
+                          <a:solidFill>
+                            <a:srgbClr val="1F5FA8"/>
+                          </a:solidFill>
+                          <a:latin typeface="Meiryo" charset="0"/>
+                          <a:ea typeface="Meiryo" charset="0"/>
+                          <a:cs typeface="Meiryo" charset="0"/>
+                          <a:hlinkClick r:id="rId10"/>
+                        </a:rPr>
+                        <a:t>ホイシル 東金市 児発一覧</a:t>
+                      </a:r>
+                    </a:p>
+                  </a:txBody>
+                  <a:tcPr anchor="ctr" marT="18000" marB="18000" marL="64008" marR="45720">
+                    <a:lnL w="9525" cap="flat" cmpd="sng" algn="ctr">
+                      <a:solidFill>
+                        <a:srgbClr val="BFBFBF"/>
+                      </a:solidFill>
+                      <a:prstDash val="solid"/>
+                      <a:round/>
+                      <a:headEnd type="none" w="med" len="med"/>
+                      <a:tailEnd type="none" w="med" len="med"/>
+                    </a:lnL>
+                    <a:lnR w="9525" cap="flat" cmpd="sng" algn="ctr">
+                      <a:solidFill>
+                        <a:srgbClr val="BFBFBF"/>
+                      </a:solidFill>
+                      <a:prstDash val="solid"/>
+                      <a:round/>
+                      <a:headEnd type="none" w="med" len="med"/>
+                      <a:tailEnd type="none" w="med" len="med"/>
+                    </a:lnR>
+                    <a:lnT w="9525" cap="flat" cmpd="sng" algn="ctr">
+                      <a:solidFill>
+                        <a:srgbClr val="BFBFBF"/>
+                      </a:solidFill>
+                      <a:prstDash val="solid"/>
+                      <a:round/>
+                      <a:headEnd type="none" w="med" len="med"/>
+                      <a:tailEnd type="none" w="med" len="med"/>
+                    </a:lnT>
+                    <a:lnB w="9525" cap="flat" cmpd="sng" algn="ctr">
+                      <a:solidFill>
+                        <a:srgbClr val="BFBFBF"/>
+                      </a:solidFill>
+                      <a:prstDash val="solid"/>
+                      <a:round/>
+                      <a:headEnd type="none" w="med" len="med"/>
+                      <a:tailEnd type="none" w="med" len="med"/>
+                    </a:lnB>
+                  </a:tcPr>
+                </a:tc>
+                <a:extLst>
+                  <a:ext uri="{0D108BD9-81ED-4DB2-BD59-A6C34878D82A}">
+                    <a16:rowId xmlns:a16="http://schemas.microsoft.com/office/drawing/2014/main" val="10001"/>
+                  </a:ext>
+                </a:extLst>
+              </a:tr>
+              <a:tr h="240971">
+                <a:tc>
+                  <a:txBody>
+                    <a:bodyPr/>
+                    <a:lstStyle/>
+                    <a:p>
+                      <a:pPr marL="0" indent="0" algn="ctr">
+                        <a:buNone/>
+                      </a:pPr>
+                      <a:r>
+                        <a:rPr lang="en-US" sz="800" b="1" dirty="0">
+                          <a:solidFill>
+                            <a:srgbClr val="222222"/>
+                          </a:solidFill>
+                          <a:latin typeface="Meiryo" pitchFamily="34" charset="0"/>
+                          <a:ea typeface="Meiryo" pitchFamily="34" charset="-122"/>
+                          <a:cs typeface="Meiryo" pitchFamily="34" charset="-120"/>
+                        </a:rPr>
+                        <a:t>⑨</a:t>
+                      </a:r>
+                      <a:endParaRPr lang="en-US" sz="1100" dirty="0">
+                        <a:latin typeface="Meiryo" charset="0"/>
+                        <a:ea typeface="Meiryo" charset="0"/>
+                        <a:cs typeface="Meiryo" charset="0"/>
+                      </a:endParaRPr>
+                    </a:p>
+                  </a:txBody>
+                  <a:tcPr anchor="ctr" marT="18000" marB="18000" marL="64008" marR="45720">
+                    <a:lnL w="9525" cap="flat" cmpd="sng" algn="ctr">
+                      <a:solidFill>
+                        <a:srgbClr val="BFBFBF"/>
+                      </a:solidFill>
+                      <a:prstDash val="solid"/>
+                      <a:round/>
+                      <a:headEnd type="none" w="med" len="med"/>
+                      <a:tailEnd type="none" w="med" len="med"/>
+                    </a:lnL>
+                    <a:lnR w="9525" cap="flat" cmpd="sng" algn="ctr">
+                      <a:solidFill>
+                        <a:srgbClr val="BFBFBF"/>
+                      </a:solidFill>
+                      <a:prstDash val="solid"/>
+                      <a:round/>
+                      <a:headEnd type="none" w="med" len="med"/>
+                      <a:tailEnd type="none" w="med" len="med"/>
+                    </a:lnR>
+                    <a:lnT w="9525" cap="flat" cmpd="sng" algn="ctr">
+                      <a:solidFill>
+                        <a:srgbClr val="BFBFBF"/>
+                      </a:solidFill>
+                      <a:prstDash val="solid"/>
+                      <a:round/>
+                      <a:headEnd type="none" w="med" len="med"/>
+                      <a:tailEnd type="none" w="med" len="med"/>
+                    </a:lnT>
+                    <a:lnB w="9525" cap="flat" cmpd="sng" algn="ctr">
+                      <a:solidFill>
+                        <a:srgbClr val="BFBFBF"/>
+                      </a:solidFill>
+                      <a:prstDash val="solid"/>
+                      <a:round/>
+                      <a:headEnd type="none" w="med" len="med"/>
+                      <a:tailEnd type="none" w="med" len="med"/>
+                    </a:lnB>
+                  </a:tcPr>
+                </a:tc>
+                <a:tc>
+                  <a:txBody>
+                    <a:bodyPr/>
+                    <a:lstStyle/>
+                    <a:p>
+                      <a:pPr marL="0" indent="0" algn="l">
+                        <a:buNone/>
+                      </a:pPr>
+                      <a:r>
+                        <a:rPr lang="en-US" sz="800" b="1" dirty="0">
+                          <a:solidFill>
+                            <a:srgbClr val="222222"/>
+                          </a:solidFill>
+                          <a:latin typeface="Meiryo" pitchFamily="34" charset="0"/>
+                          <a:ea typeface="Meiryo" pitchFamily="34" charset="-122"/>
+                          <a:cs typeface="Meiryo" pitchFamily="34" charset="-120"/>
+                        </a:rPr>
+                        <a:t>児童発達支援コンパッション保育所 ※</a:t>
+                      </a:r>
+                      <a:endParaRPr lang="en-US" sz="1100" dirty="0">
+                        <a:latin typeface="Meiryo" charset="0"/>
+                        <a:ea typeface="Meiryo" charset="0"/>
+                        <a:cs typeface="Meiryo" charset="0"/>
+                      </a:endParaRPr>
+                    </a:p>
+                  </a:txBody>
+                  <a:tcPr anchor="ctr" marT="18000" marB="18000" marL="64008" marR="45720">
+                    <a:lnL w="9525" cap="flat" cmpd="sng" algn="ctr">
+                      <a:solidFill>
+                        <a:srgbClr val="BFBFBF"/>
+                      </a:solidFill>
+                      <a:prstDash val="solid"/>
+                      <a:round/>
+                      <a:headEnd type="none" w="med" len="med"/>
+                      <a:tailEnd type="none" w="med" len="med"/>
+                    </a:lnL>
+                    <a:lnR w="9525" cap="flat" cmpd="sng" algn="ctr">
+                      <a:solidFill>
+                        <a:srgbClr val="BFBFBF"/>
+                      </a:solidFill>
+                      <a:prstDash val="solid"/>
+                      <a:round/>
+                      <a:headEnd type="none" w="med" len="med"/>
+                      <a:tailEnd type="none" w="med" len="med"/>
+                    </a:lnR>
+                    <a:lnT w="9525" cap="flat" cmpd="sng" algn="ctr">
+                      <a:solidFill>
+                        <a:srgbClr val="BFBFBF"/>
+                      </a:solidFill>
+                      <a:prstDash val="solid"/>
+                      <a:round/>
+                      <a:headEnd type="none" w="med" len="med"/>
+                      <a:tailEnd type="none" w="med" len="med"/>
+                    </a:lnT>
+                    <a:lnB w="9525" cap="flat" cmpd="sng" algn="ctr">
+                      <a:solidFill>
+                        <a:srgbClr val="BFBFBF"/>
+                      </a:solidFill>
+                      <a:prstDash val="solid"/>
+                      <a:round/>
+                      <a:headEnd type="none" w="med" len="med"/>
+                      <a:tailEnd type="none" w="med" len="med"/>
+                    </a:lnB>
+                  </a:tcPr>
+                </a:tc>
+                <a:tc>
+                  <a:txBody>
+                    <a:bodyPr/>
+                    <a:lstStyle/>
+                    <a:p>
+                      <a:pPr marL="0" indent="0" algn="l">
+                        <a:buNone/>
+                      </a:pPr>
+                      <a:r>
+                        <a:rPr lang="en-US" sz="800" dirty="0">
                           <a:solidFill>
                             <a:srgbClr val="222222"/>
                           </a:solidFill>
@@ -9473,7 +13350,7 @@
                         <a:buNone/>
                       </a:pPr>
                       <a:r>
-                        <a:rPr lang="en-US" sz="900" dirty="0">
+                        <a:rPr lang="en-US" sz="800" dirty="0">
                           <a:solidFill>
                             <a:srgbClr val="222222"/>
                           </a:solidFill>
@@ -9538,7 +13415,7 @@
                         <a:buNone/>
                       </a:pPr>
                       <a:r>
-                        <a:rPr lang="en-US" sz="900" dirty="0">
+                        <a:rPr lang="en-US" sz="800" dirty="0">
                           <a:solidFill>
                             <a:srgbClr val="222222"/>
                           </a:solidFill>
@@ -9603,14 +13480,14 @@
                         <a:buNone/>
                       </a:pPr>
                       <a:r>
-                        <a:rPr lang="en-US" sz="900" dirty="0" u="sng">
+                        <a:rPr lang="en-US" sz="800" dirty="0" u="sng">
                           <a:solidFill>
                             <a:srgbClr val="1F5FA8"/>
                           </a:solidFill>
                           <a:latin typeface="Meiryo" charset="0"/>
                           <a:ea typeface="Meiryo" charset="0"/>
                           <a:cs typeface="Meiryo" charset="0"/>
-                          <a:hlinkClick r:id="rId9"/>
+                          <a:hlinkClick r:id="rId11"/>
                         </a:rPr>
                         <a:t>LITALICO発達ナビ 東金市一覧</a:t>
                       </a:r>
@@ -9661,7 +13538,7 @@
                   </a:ext>
                 </a:extLst>
               </a:tr>
-              <a:tr h="305972">
+              <a:tr h="240971">
                 <a:tc>
                   <a:txBody>
                     <a:bodyPr/>
@@ -9671,7 +13548,7 @@
                         <a:buNone/>
                       </a:pPr>
                       <a:r>
-                        <a:rPr lang="en-US" sz="900" b="1" dirty="0">
+                        <a:rPr lang="en-US" sz="800" b="1" dirty="0">
                           <a:solidFill>
                             <a:srgbClr val="222222"/>
                           </a:solidFill>
@@ -9679,7 +13556,7 @@
                           <a:ea typeface="Meiryo" pitchFamily="34" charset="-122"/>
                           <a:cs typeface="Meiryo" pitchFamily="34" charset="-120"/>
                         </a:rPr>
-                        <a:t>⑧</a:t>
+                        <a:t>⑩</a:t>
                       </a:r>
                       <a:endParaRPr lang="en-US" sz="1100" dirty="0">
                         <a:latin typeface="Meiryo" charset="0"/>
@@ -9736,7 +13613,7 @@
                         <a:buNone/>
                       </a:pPr>
                       <a:r>
-                        <a:rPr lang="en-US" sz="900" b="1" dirty="0">
+                        <a:rPr lang="en-US" sz="800" b="1" dirty="0">
                           <a:solidFill>
                             <a:srgbClr val="222222"/>
                           </a:solidFill>
@@ -9801,7 +13678,7 @@
                         <a:buNone/>
                       </a:pPr>
                       <a:r>
-                        <a:rPr lang="en-US" sz="900" dirty="0">
+                        <a:rPr lang="en-US" sz="800" dirty="0">
                           <a:solidFill>
                             <a:srgbClr val="222222"/>
                           </a:solidFill>
@@ -9866,7 +13743,7 @@
                         <a:buNone/>
                       </a:pPr>
                       <a:r>
-                        <a:rPr lang="en-US" sz="900" dirty="0">
+                        <a:rPr lang="en-US" sz="800" dirty="0">
                           <a:solidFill>
                             <a:srgbClr val="222222"/>
                           </a:solidFill>
@@ -9931,7 +13808,7 @@
                         <a:buNone/>
                       </a:pPr>
                       <a:r>
-                        <a:rPr lang="en-US" sz="900" dirty="0">
+                        <a:rPr lang="en-US" sz="800" dirty="0">
                           <a:solidFill>
                             <a:srgbClr val="222222"/>
                           </a:solidFill>
@@ -9996,16 +13873,16 @@
                         <a:buNone/>
                       </a:pPr>
                       <a:r>
-                        <a:rPr lang="en-US" sz="900" dirty="0" u="sng">
+                        <a:rPr lang="en-US" sz="800" dirty="0" u="sng">
                           <a:solidFill>
                             <a:srgbClr val="1F5FA8"/>
                           </a:solidFill>
                           <a:latin typeface="Meiryo" charset="0"/>
                           <a:ea typeface="Meiryo" charset="0"/>
                           <a:cs typeface="Meiryo" charset="0"/>
-                          <a:hlinkClick r:id="rId9"/>
+                          <a:hlinkClick r:id="rId12"/>
                         </a:rPr>
-                        <a:t>LITALICO発達ナビ 東金市一覧</a:t>
+                        <a:t>ホイシル 事業所ページ</a:t>
                       </a:r>
                     </a:p>
                   </a:txBody>
@@ -10091,7 +13968,7 @@
                 <a:ea typeface="Meiryo" pitchFamily="34" charset="-122"/>
                 <a:cs typeface="Meiryo" pitchFamily="34" charset="-120"/>
               </a:rPr>
-              <a:t>※「児童発達支援」の指定を受けている事業所を抽出。⑦を除き放課後等デイサービスを併設。②③は同一運営（公式サイト chibasha-kodomo2.com）、⑥基本塾優遊はNPO法人基本塾の5拠点で詳細頁では1枚に集約。「HP／出典」欄はクリックで該当ページを開きます。②③は事業所公式サイトのため未掲載の集約サイトあり。2026年8月時点の公開情報にもとづく整理のため、掲載内容は各事業所への確認を推奨。</a:t>
+              <a:t>※印（基本塾優遊 八坂台・八坂中央、コンパッション保育所）は、ホイシル等の児童発達支援一覧に掲載がなく、児発指定の有無は要確認。②③は同一運営（chibasha-kodomo2.com）、⑥基本塾優遊はNPO法人基本塾の6拠点、⑦エスポワールは2拠点で、詳細頁ではそれぞれ1枚に集約。「HP／出典」欄はクリックで該当ページを開きます。出典：ホイシル／LITALICO発達ナビ／東金市公式／各事業所公式サイト（2026年8月時点）。</a:t>
             </a:r>
             <a:endParaRPr lang="en-US" sz="1000" dirty="0"/>
           </a:p>
@@ -15361,7 +19238,7 @@
                 <a:ea typeface="Meiryo" pitchFamily="34" charset="-122"/>
                 <a:cs typeface="Meiryo" pitchFamily="34" charset="-120"/>
               </a:rPr>
-              <a:t>⑥ 基本塾優遊（市内5拠点）</a:t>
+              <a:t>⑥ 基本塾優遊（市内6拠点）</a:t>
             </a:r>
             <a:endParaRPr lang="en-US" sz="2100" dirty="0"/>
           </a:p>
@@ -15535,7 +19412,7 @@
                 <a:ea typeface="Meiryo" pitchFamily="34" charset="-122"/>
                 <a:cs typeface="Meiryo" pitchFamily="34" charset="-120"/>
               </a:rPr>
-              <a:t>基本塾優遊（運営：特定非営利活動法人 基本塾）　市内5拠点</a:t>
+              <a:t>基本塾優遊（運営：特定非営利活動法人 基本塾）　市内6拠点</a:t>
             </a:r>
             <a:endParaRPr lang="en-US" sz="1400" dirty="0"/>
           </a:p>
@@ -15599,7 +19476,7 @@
                 <a:ea typeface="Meiryo" pitchFamily="34" charset="-122"/>
                 <a:cs typeface="Meiryo" pitchFamily="34" charset="-120"/>
               </a:rPr>
-              <a:t>未就学児（児発）／就学児（放デイ）　※松之郷は身体・知的・精神障がい・難病まで対応、八坂台は小学生・翌年度就学予定児が中心</a:t>
+              <a:t>未就学児（児発）／就学児（放デイ）　※松之郷は身体・知的・精神障がい・難病まで対応</a:t>
             </a:r>
             <a:endParaRPr lang="en-US" sz="1050" dirty="0"/>
           </a:p>
@@ -15641,7 +19518,7 @@
                 <a:ea typeface="Meiryo" pitchFamily="34" charset="-122"/>
                 <a:cs typeface="Meiryo" pitchFamily="34" charset="-120"/>
               </a:rPr>
-              <a:t>【日吉台】日吉台2-26-3／0475-52-6414　【松之郷】松之郷2423-1／0475-51-4082</a:t>
+              <a:t>【日吉台】日吉台2-26-3／52-6414　【西が丘】日吉台5-15-2／51-6845　【松之郷】松之郷2423-1／51-4082</a:t>
             </a:r>
             <a:endParaRPr lang="en-US" sz="1050" dirty="0"/>
           </a:p>
@@ -15664,7 +19541,7 @@
                 <a:ea typeface="Meiryo" pitchFamily="34" charset="-122"/>
                 <a:cs typeface="Meiryo" pitchFamily="34" charset="-120"/>
               </a:rPr>
-              <a:t xml:space="preserve">　　　　　　【八坂台】八坂台5-11-1／0475-51-5010　【八坂西】八坂台4-2-4／0475-51-6631　【八坂中央】要確認</a:t>
+              <a:t xml:space="preserve">　　　　　　【八坂西】八坂台4-2-4／51-6631　【八坂台】八坂台5-11-1／51-5010　【八坂中央】八坂台4-3-14／要確認　※局番0475</a:t>
             </a:r>
             <a:endParaRPr lang="en-US" sz="1050" dirty="0"/>
           </a:p>
@@ -15748,7 +19625,7 @@
                 <a:ea typeface="Meiryo" pitchFamily="34" charset="-122"/>
                 <a:cs typeface="Meiryo" pitchFamily="34" charset="-120"/>
               </a:rPr>
-              <a:t>9:00〜18:00（共通の目安）・日曜祝日年末年始休　※八坂台は土曜も定休</a:t>
+              <a:t>9:00〜18:00（共通の目安）・日祝年末年始休（八坂台は土曜も定休）／松之郷10名・八坂台10名、他拠点は要確認</a:t>
             </a:r>
             <a:endParaRPr lang="en-US" sz="1050" dirty="0"/>
           </a:p>
@@ -15762,6 +19639,37 @@
               </a:spcAft>
               <a:buNone/>
             </a:pPr>
+            <a:endParaRPr lang="en-US" sz="1050" dirty="0"/>
+          </a:p>
+          <a:p>
+            <a:pPr marL="0" indent="0">
+              <a:lnSpc>
+                <a:spcPct val="103000"/>
+              </a:lnSpc>
+              <a:buNone/>
+            </a:pPr>
+            <a:r>
+              <a:rPr lang="en-US" sz="1000" b="1" dirty="0">
+                <a:solidFill>
+                  <a:srgbClr val="2E6BB8"/>
+                </a:solidFill>
+                <a:latin typeface="Meiryo" pitchFamily="34" charset="0"/>
+                <a:ea typeface="Meiryo" pitchFamily="34" charset="-122"/>
+                <a:cs typeface="Meiryo" pitchFamily="34" charset="-120"/>
+              </a:rPr>
+              <a:t>▶</a:t>
+            </a:r>
+            <a:r>
+              <a:rPr lang="en-US" sz="1000" b="1" dirty="0">
+                <a:solidFill>
+                  <a:srgbClr val="222222"/>
+                </a:solidFill>
+                <a:latin typeface="Meiryo" pitchFamily="34" charset="0"/>
+                <a:ea typeface="Meiryo" pitchFamily="34" charset="-122"/>
+                <a:cs typeface="Meiryo" pitchFamily="34" charset="-120"/>
+              </a:rPr>
+              <a:t>療育プログラムの特徴：</a:t>
+            </a:r>
             <a:r>
               <a:rPr lang="en-US" sz="1000" dirty="0">
                 <a:solidFill>
@@ -15771,7 +19679,7 @@
                 <a:ea typeface="Meiryo" pitchFamily="34" charset="-122"/>
                 <a:cs typeface="Meiryo" pitchFamily="34" charset="-120"/>
               </a:rPr>
-              <a:t xml:space="preserve">　　　　　　　　松之郷10名（送迎あり・要相談）、八坂台10名・職員9名（児発管1・児童指導員4・保育士4）、他拠点は要確認</a:t>
+              <a:t>個々のニーズに応じた個別支援プログラムと「10の活動」を全拠点共通の基本形とする。</a:t>
             </a:r>
             <a:endParaRPr lang="en-US" sz="1050" dirty="0"/>
           </a:p>
@@ -15785,37 +19693,6 @@
               </a:spcAft>
               <a:buNone/>
             </a:pPr>
-            <a:endParaRPr lang="en-US" sz="1050" dirty="0"/>
-          </a:p>
-          <a:p>
-            <a:pPr marL="0" indent="0">
-              <a:lnSpc>
-                <a:spcPct val="103000"/>
-              </a:lnSpc>
-              <a:buNone/>
-            </a:pPr>
-            <a:r>
-              <a:rPr lang="en-US" sz="1000" b="1" dirty="0">
-                <a:solidFill>
-                  <a:srgbClr val="2E6BB8"/>
-                </a:solidFill>
-                <a:latin typeface="Meiryo" pitchFamily="34" charset="0"/>
-                <a:ea typeface="Meiryo" pitchFamily="34" charset="-122"/>
-                <a:cs typeface="Meiryo" pitchFamily="34" charset="-120"/>
-              </a:rPr>
-              <a:t>▶</a:t>
-            </a:r>
-            <a:r>
-              <a:rPr lang="en-US" sz="1000" b="1" dirty="0">
-                <a:solidFill>
-                  <a:srgbClr val="222222"/>
-                </a:solidFill>
-                <a:latin typeface="Meiryo" pitchFamily="34" charset="0"/>
-                <a:ea typeface="Meiryo" pitchFamily="34" charset="-122"/>
-                <a:cs typeface="Meiryo" pitchFamily="34" charset="-120"/>
-              </a:rPr>
-              <a:t>療育プログラムの特徴：</a:t>
-            </a:r>
             <a:r>
               <a:rPr lang="en-US" sz="1000" dirty="0">
                 <a:solidFill>
@@ -15825,7 +19702,7 @@
                 <a:ea typeface="Meiryo" pitchFamily="34" charset="-122"/>
                 <a:cs typeface="Meiryo" pitchFamily="34" charset="-120"/>
               </a:rPr>
-              <a:t>個々のニーズに応じた個別支援プログラムと「10の活動」を全拠点共通の基本形とする。</a:t>
+              <a:t>・日吉台＝園庭あり。リトミック・体操・英語教育。校長／園長経験者、特別支援教育士、心理検査士、言語聴覚士が在籍。</a:t>
             </a:r>
             <a:endParaRPr lang="en-US" sz="1050" dirty="0"/>
           </a:p>
@@ -15848,7 +19725,7 @@
                 <a:ea typeface="Meiryo" pitchFamily="34" charset="-122"/>
                 <a:cs typeface="Meiryo" pitchFamily="34" charset="-120"/>
               </a:rPr>
-              <a:t>・日吉台＝園庭あり。リトミック・体操・英語教育。小学校校長／幼稚園園長経験者、特別支援教育士、心理検査士、言語聴覚士などが在籍。</a:t>
+              <a:t>・松之郷＝アートセラピー・運動・社会性のグループ活動／八坂台＝少人数の活動・制作、元サッカー選手の「サッカー療育」。</a:t>
             </a:r>
             <a:endParaRPr lang="en-US" sz="1050" dirty="0"/>
           </a:p>
@@ -15871,7 +19748,7 @@
                 <a:ea typeface="Meiryo" pitchFamily="34" charset="-122"/>
                 <a:cs typeface="Meiryo" pitchFamily="34" charset="-120"/>
               </a:rPr>
-              <a:t>・松之郷＝アートセラピー・運動・社会性を育むグループ活動。／八坂台＝少人数の活動・制作、地域連携イベント、元サッカー選手の「サッカー療育」。</a:t>
+              <a:t>・児発一覧で確認できるのは 日吉台・西が丘・松之郷・八坂西 の4拠点。八坂台・八坂中央は放デイ掲載のみで児発指定は要確認。</a:t>
             </a:r>
             <a:endParaRPr lang="en-US" sz="1050" dirty="0"/>
           </a:p>
@@ -15925,7 +19802,7 @@
                 <a:ea typeface="Meiryo" pitchFamily="34" charset="-122"/>
                 <a:cs typeface="Meiryo" pitchFamily="34" charset="-120"/>
               </a:rPr>
-              <a:t>公式HP kihonjuku-yuuyuu.com／LITALICO発達ナビ／児発ねっと／ホイシル／ADDS kikotto施設検索</a:t>
+              <a:t>公式HP kihonjuku-yuuyuu.com／ホイシル／LITALICO発達ナビ／児発ねっと／ADDS kikotto</a:t>
             </a:r>
             <a:endParaRPr lang="en-US" sz="1050" dirty="0"/>
           </a:p>
@@ -15967,7 +19844,7 @@
                 <a:ea typeface="Meiryo" pitchFamily="34" charset="-122"/>
                 <a:cs typeface="Meiryo" pitchFamily="34" charset="-120"/>
               </a:rPr>
-              <a:t>日吉台・八坂西・八坂中央の定員、児発と放デイの時間帯区分、各拠点の送迎範囲、八坂中央の開所時期・所在地・TEL</a:t>
+              <a:t>日吉台・西が丘・八坂西・八坂中央の定員、児発と放デイの時間帯区分、送迎範囲、八坂台・八坂中央の児発指定</a:t>
             </a:r>
             <a:endParaRPr lang="en-US" sz="1050" dirty="0"/>
           </a:p>
@@ -16143,7 +20020,7 @@
                 <a:ea typeface="メイリオ" panose="020B0604030504040204" pitchFamily="50" charset="-128"/>
                 <a:cs typeface="Meiryo" pitchFamily="34" charset="-120"/>
               </a:rPr>
-              <a:t>市内12拠点のうち5拠点を占める最大手。1法人で東金市の児童発達支援供給の4割超を握る。</a:t>
+              <a:t>市内16拠点のうち6拠点を占める最大手。1法人で東金市の児童発達支援供給の約4割を握る。</a:t>
             </a:r>
             <a:endParaRPr lang="en-US" sz="1000" dirty="0">
               <a:latin typeface="メイリオ" panose="020B0604030504040204" pitchFamily="50" charset="-128"/>
@@ -16191,7 +20068,7 @@
                 <a:ea typeface="メイリオ" panose="020B0604030504040204" pitchFamily="50" charset="-128"/>
                 <a:cs typeface="Meiryo" pitchFamily="34" charset="-120"/>
               </a:rPr>
-              <a:t>拠点を小規模に分散させ、少人数環境を保ちながら総定員を確保するモデル。八坂台エリアだけで3拠点。</a:t>
+              <a:t>日吉台エリアに2拠点（日吉台・西が丘）、八坂台エリアに3拠点を集中配置。小規模拠点を面で並べて総定員を確保するモデル。</a:t>
             </a:r>
             <a:endParaRPr lang="en-US" sz="1000" dirty="0">
               <a:latin typeface="メイリオ" panose="020B0604030504040204" pitchFamily="50" charset="-128"/>
@@ -16215,7 +20092,7 @@
                 <a:ea typeface="メイリオ" panose="020B0604030504040204" pitchFamily="50" charset="-128"/>
                 <a:cs typeface="Meiryo" pitchFamily="34" charset="-120"/>
               </a:rPr>
-              <a:t>八坂台・日吉台への新規出店は基本塾との正面競合。土曜（八坂台は定休）や送迎圏の隙間が狙い目となる。</a:t>
+              <a:t>日吉台・八坂台への新規出店は基本塾との正面競合。土曜（八坂台は定休）や送迎圏の隙間が狙い目となる。</a:t>
             </a:r>
             <a:endParaRPr lang="en-US" sz="1000" dirty="0">
               <a:latin typeface="メイリオ" panose="020B0604030504040204" pitchFamily="50" charset="-128"/>
@@ -16369,7 +20246,7 @@
                 <a:ea typeface="Meiryo" pitchFamily="34" charset="-122"/>
                 <a:cs typeface="Meiryo" pitchFamily="34" charset="-120"/>
               </a:rPr>
-              <a:t>⑦ 児童発達支援コンパッション保育所</a:t>
+              <a:t>⑦ エスポワール ／ エスポワール第2</a:t>
             </a:r>
             <a:endParaRPr lang="en-US" sz="2100" dirty="0"/>
           </a:p>
@@ -16543,7 +20420,7 @@
                 <a:ea typeface="Meiryo" pitchFamily="34" charset="-122"/>
                 <a:cs typeface="Meiryo" pitchFamily="34" charset="-120"/>
               </a:rPr>
-              <a:t>児童発達支援コンパッション保育所</a:t>
+              <a:t>エスポワール・エスポワール第2（児童発達支援・放課後等デイサービス）</a:t>
             </a:r>
             <a:endParaRPr lang="en-US" sz="1400" dirty="0"/>
           </a:p>
@@ -16607,7 +20484,7 @@
                 <a:ea typeface="Meiryo" pitchFamily="34" charset="-122"/>
                 <a:cs typeface="Meiryo" pitchFamily="34" charset="-120"/>
               </a:rPr>
-              <a:t>未就学児（児童発達支援）</a:t>
+              <a:t>未就学児（児童発達支援）／就学児（放課後等デイサービス）</a:t>
             </a:r>
             <a:endParaRPr lang="en-US" sz="1050" dirty="0"/>
           </a:p>
@@ -16649,91 +20526,7 @@
                 <a:ea typeface="Meiryo" pitchFamily="34" charset="-122"/>
                 <a:cs typeface="Meiryo" pitchFamily="34" charset="-120"/>
               </a:rPr>
-              <a:t>千葉県東金市家之子1671-36</a:t>
-            </a:r>
-            <a:endParaRPr lang="en-US" sz="1050" dirty="0"/>
-          </a:p>
-          <a:p>
-            <a:pPr marL="0" indent="0">
-              <a:lnSpc>
-                <a:spcPct val="103000"/>
-              </a:lnSpc>
-              <a:buNone/>
-            </a:pPr>
-            <a:r>
-              <a:rPr lang="en-US" sz="1050" b="1" dirty="0">
-                <a:solidFill>
-                  <a:srgbClr val="2E6BB8"/>
-                </a:solidFill>
-                <a:latin typeface="Meiryo" pitchFamily="34" charset="0"/>
-                <a:ea typeface="Meiryo" pitchFamily="34" charset="-122"/>
-                <a:cs typeface="Meiryo" pitchFamily="34" charset="-120"/>
-              </a:rPr>
-              <a:t>▶</a:t>
-            </a:r>
-            <a:r>
-              <a:rPr lang="en-US" sz="1050" b="1" dirty="0">
-                <a:solidFill>
-                  <a:srgbClr val="222222"/>
-                </a:solidFill>
-                <a:latin typeface="Meiryo" pitchFamily="34" charset="0"/>
-                <a:ea typeface="Meiryo" pitchFamily="34" charset="-122"/>
-                <a:cs typeface="Meiryo" pitchFamily="34" charset="-120"/>
-              </a:rPr>
-              <a:t>TEL／HP：</a:t>
-            </a:r>
-            <a:r>
-              <a:rPr lang="en-US" sz="1050" dirty="0">
-                <a:solidFill>
-                  <a:srgbClr val="222222"/>
-                </a:solidFill>
-                <a:latin typeface="Meiryo" pitchFamily="34" charset="0"/>
-                <a:ea typeface="Meiryo" pitchFamily="34" charset="-122"/>
-                <a:cs typeface="Meiryo" pitchFamily="34" charset="-120"/>
-              </a:rPr>
-              <a:t>要確認（公開情報に記載なし）</a:t>
-            </a:r>
-            <a:endParaRPr lang="en-US" sz="1050" dirty="0"/>
-          </a:p>
-          <a:p>
-            <a:pPr marL="0" indent="0">
-              <a:lnSpc>
-                <a:spcPct val="103000"/>
-              </a:lnSpc>
-              <a:buNone/>
-            </a:pPr>
-            <a:r>
-              <a:rPr lang="en-US" sz="1050" b="1" dirty="0">
-                <a:solidFill>
-                  <a:srgbClr val="2E6BB8"/>
-                </a:solidFill>
-                <a:latin typeface="Meiryo" pitchFamily="34" charset="0"/>
-                <a:ea typeface="Meiryo" pitchFamily="34" charset="-122"/>
-                <a:cs typeface="Meiryo" pitchFamily="34" charset="-120"/>
-              </a:rPr>
-              <a:t>▶</a:t>
-            </a:r>
-            <a:r>
-              <a:rPr lang="en-US" sz="1050" b="1" dirty="0">
-                <a:solidFill>
-                  <a:srgbClr val="222222"/>
-                </a:solidFill>
-                <a:latin typeface="Meiryo" pitchFamily="34" charset="0"/>
-                <a:ea typeface="Meiryo" pitchFamily="34" charset="-122"/>
-                <a:cs typeface="Meiryo" pitchFamily="34" charset="-120"/>
-              </a:rPr>
-              <a:t>サービス提供時間／定員：</a:t>
-            </a:r>
-            <a:r>
-              <a:rPr lang="en-US" sz="1050" dirty="0">
-                <a:solidFill>
-                  <a:srgbClr val="222222"/>
-                </a:solidFill>
-                <a:latin typeface="Meiryo" pitchFamily="34" charset="0"/>
-                <a:ea typeface="Meiryo" pitchFamily="34" charset="-122"/>
-                <a:cs typeface="Meiryo" pitchFamily="34" charset="-120"/>
-              </a:rPr>
-              <a:t>いずれも要確認</a:t>
+              <a:t>【エスポワール】〒283-0005 東金市田間2-56-10（JR東金線 東金駅から徒歩約16分）</a:t>
             </a:r>
             <a:endParaRPr lang="en-US" sz="1050" dirty="0"/>
           </a:p>
@@ -16747,6 +20540,17 @@
               </a:spcAft>
               <a:buNone/>
             </a:pPr>
+            <a:r>
+              <a:rPr lang="en-US" sz="1050" dirty="0">
+                <a:solidFill>
+                  <a:srgbClr val="222222"/>
+                </a:solidFill>
+                <a:latin typeface="Meiryo" pitchFamily="34" charset="0"/>
+                <a:ea typeface="Meiryo" pitchFamily="34" charset="-122"/>
+                <a:cs typeface="Meiryo" pitchFamily="34" charset="-120"/>
+              </a:rPr>
+              <a:t xml:space="preserve">　　　　　　【エスポワール第2】東金市 求名駅から約229m（正確な所在地は要確認）</a:t>
+            </a:r>
             <a:endParaRPr lang="en-US" sz="1050" dirty="0"/>
           </a:p>
           <a:p>
@@ -16776,7 +20580,7 @@
                 <a:ea typeface="Meiryo" pitchFamily="34" charset="-122"/>
                 <a:cs typeface="Meiryo" pitchFamily="34" charset="-120"/>
               </a:rPr>
-              <a:t>療育プログラムの特徴：</a:t>
+              <a:t>TEL／HP：</a:t>
             </a:r>
             <a:r>
               <a:rPr lang="en-US" sz="1050" dirty="0">
@@ -16787,7 +20591,91 @@
                 <a:ea typeface="Meiryo" pitchFamily="34" charset="-122"/>
                 <a:cs typeface="Meiryo" pitchFamily="34" charset="-120"/>
               </a:rPr>
-              <a:t>保育所を母体とする児童発達支援。保育の場と療育の場が同一施設にある併設型。</a:t>
+              <a:t>050-3145-9731（エスポワール）／ 公開HPは確認できず。ホイシル・発達ナビに事業所情報を掲載</a:t>
+            </a:r>
+            <a:endParaRPr lang="en-US" sz="1050" dirty="0"/>
+          </a:p>
+          <a:p>
+            <a:pPr marL="0" indent="0">
+              <a:lnSpc>
+                <a:spcPct val="103000"/>
+              </a:lnSpc>
+              <a:buNone/>
+            </a:pPr>
+            <a:r>
+              <a:rPr lang="en-US" sz="1050" b="1" dirty="0">
+                <a:solidFill>
+                  <a:srgbClr val="2E6BB8"/>
+                </a:solidFill>
+                <a:latin typeface="Meiryo" pitchFamily="34" charset="0"/>
+                <a:ea typeface="Meiryo" pitchFamily="34" charset="-122"/>
+                <a:cs typeface="Meiryo" pitchFamily="34" charset="-120"/>
+              </a:rPr>
+              <a:t>▶</a:t>
+            </a:r>
+            <a:r>
+              <a:rPr lang="en-US" sz="1050" b="1" dirty="0">
+                <a:solidFill>
+                  <a:srgbClr val="222222"/>
+                </a:solidFill>
+                <a:latin typeface="Meiryo" pitchFamily="34" charset="0"/>
+                <a:ea typeface="Meiryo" pitchFamily="34" charset="-122"/>
+                <a:cs typeface="Meiryo" pitchFamily="34" charset="-120"/>
+              </a:rPr>
+              <a:t>サービス提供時間／定員：</a:t>
+            </a:r>
+            <a:r>
+              <a:rPr lang="en-US" sz="1050" dirty="0">
+                <a:solidFill>
+                  <a:srgbClr val="222222"/>
+                </a:solidFill>
+                <a:latin typeface="Meiryo" pitchFamily="34" charset="0"/>
+                <a:ea typeface="Meiryo" pitchFamily="34" charset="-122"/>
+                <a:cs typeface="Meiryo" pitchFamily="34" charset="-120"/>
+              </a:rPr>
+              <a:t>いずれも要確認</a:t>
+            </a:r>
+            <a:endParaRPr lang="en-US" sz="1050" dirty="0"/>
+          </a:p>
+          <a:p>
+            <a:pPr marL="0" indent="0">
+              <a:lnSpc>
+                <a:spcPct val="103000"/>
+              </a:lnSpc>
+              <a:buNone/>
+            </a:pPr>
+            <a:r>
+              <a:rPr lang="en-US" sz="1050" b="1" dirty="0">
+                <a:solidFill>
+                  <a:srgbClr val="2E6BB8"/>
+                </a:solidFill>
+                <a:latin typeface="Meiryo" pitchFamily="34" charset="0"/>
+                <a:ea typeface="Meiryo" pitchFamily="34" charset="-122"/>
+                <a:cs typeface="Meiryo" pitchFamily="34" charset="-120"/>
+              </a:rPr>
+              <a:t>▶</a:t>
+            </a:r>
+            <a:r>
+              <a:rPr lang="en-US" sz="1050" b="1" dirty="0">
+                <a:solidFill>
+                  <a:srgbClr val="222222"/>
+                </a:solidFill>
+                <a:latin typeface="Meiryo" pitchFamily="34" charset="0"/>
+                <a:ea typeface="Meiryo" pitchFamily="34" charset="-122"/>
+                <a:cs typeface="Meiryo" pitchFamily="34" charset="-120"/>
+              </a:rPr>
+              <a:t>空き状況：</a:t>
+            </a:r>
+            <a:r>
+              <a:rPr lang="en-US" sz="1050" dirty="0">
+                <a:solidFill>
+                  <a:srgbClr val="222222"/>
+                </a:solidFill>
+                <a:latin typeface="Meiryo" pitchFamily="34" charset="0"/>
+                <a:ea typeface="Meiryo" pitchFamily="34" charset="-122"/>
+                <a:cs typeface="Meiryo" pitchFamily="34" charset="-120"/>
+              </a:rPr>
+              <a:t>LITALICO発達ナビ上で「空きあり」表示（2026年8月時点）</a:t>
             </a:r>
             <a:endParaRPr lang="en-US" sz="1050" dirty="0"/>
           </a:p>
@@ -16801,6 +20689,37 @@
               </a:spcAft>
               <a:buNone/>
             </a:pPr>
+            <a:endParaRPr lang="en-US" sz="1050" dirty="0"/>
+          </a:p>
+          <a:p>
+            <a:pPr marL="0" indent="0">
+              <a:lnSpc>
+                <a:spcPct val="103000"/>
+              </a:lnSpc>
+              <a:buNone/>
+            </a:pPr>
+            <a:r>
+              <a:rPr lang="en-US" sz="1050" b="1" dirty="0">
+                <a:solidFill>
+                  <a:srgbClr val="2E6BB8"/>
+                </a:solidFill>
+                <a:latin typeface="Meiryo" pitchFamily="34" charset="0"/>
+                <a:ea typeface="Meiryo" pitchFamily="34" charset="-122"/>
+                <a:cs typeface="Meiryo" pitchFamily="34" charset="-120"/>
+              </a:rPr>
+              <a:t>▶</a:t>
+            </a:r>
+            <a:r>
+              <a:rPr lang="en-US" sz="1050" b="1" dirty="0">
+                <a:solidFill>
+                  <a:srgbClr val="222222"/>
+                </a:solidFill>
+                <a:latin typeface="Meiryo" pitchFamily="34" charset="0"/>
+                <a:ea typeface="Meiryo" pitchFamily="34" charset="-122"/>
+                <a:cs typeface="Meiryo" pitchFamily="34" charset="-120"/>
+              </a:rPr>
+              <a:t>療育プログラムの特徴：</a:t>
+            </a:r>
             <a:r>
               <a:rPr lang="en-US" sz="1050" dirty="0">
                 <a:solidFill>
@@ -16810,7 +20729,7 @@
                 <a:ea typeface="Meiryo" pitchFamily="34" charset="-122"/>
                 <a:cs typeface="Meiryo" pitchFamily="34" charset="-120"/>
               </a:rPr>
-              <a:t>・市および発達支援施設検索サイトの児童発達支援事業所一覧に掲載されている。</a:t>
+              <a:t>児童発達支援と放課後等デイサービスを併設。プログラム内容は公開情報からは確認できず要確認。</a:t>
             </a:r>
             <a:endParaRPr lang="en-US" sz="1050" dirty="0"/>
           </a:p>
@@ -16833,7 +20752,7 @@
                 <a:ea typeface="Meiryo" pitchFamily="34" charset="-122"/>
                 <a:cs typeface="Meiryo" pitchFamily="34" charset="-120"/>
               </a:rPr>
-              <a:t>・Web上の公開情報は極めて限定的で、支援プログラムの詳細は現地・電話での確認が必要。</a:t>
+              <a:t>・市内2拠点体制。第2は求名駅至近に立地し、市南西部（求名・丘山方面）をカバー。</a:t>
             </a:r>
             <a:endParaRPr lang="en-US" sz="1050" dirty="0"/>
           </a:p>
@@ -16887,7 +20806,7 @@
                 <a:ea typeface="Meiryo" pitchFamily="34" charset="-122"/>
                 <a:cs typeface="Meiryo" pitchFamily="34" charset="-120"/>
               </a:rPr>
-              <a:t>東金市公式サイト／LITALICO発達ナビ 東金市 児童発達支援事業所一覧</a:t>
+              <a:t>ホイシル 東金市 児童発達支援一覧／LITALICO発達ナビ／障害者ドットコム</a:t>
             </a:r>
             <a:endParaRPr lang="en-US" sz="1050" dirty="0"/>
           </a:p>
@@ -16929,7 +20848,7 @@
                 <a:ea typeface="Meiryo" pitchFamily="34" charset="-122"/>
                 <a:cs typeface="Meiryo" pitchFamily="34" charset="-120"/>
               </a:rPr>
-              <a:t>運営法人、電話番号、定員、提供時間、母体となる保育所との関係　※公開情報がほぼ無い</a:t>
+              <a:t>運営法人、エスポワール第2の正確な所在地・TEL、両拠点の提供時間・定員、送迎の有無</a:t>
             </a:r>
             <a:endParaRPr lang="en-US" sz="1050" dirty="0"/>
           </a:p>
@@ -16998,7 +20917,7 @@
                 <a:ea typeface="Meiryo" pitchFamily="34" charset="-122"/>
                 <a:cs typeface="Meiryo" pitchFamily="34" charset="-120"/>
               </a:rPr>
-              <a:t>（LITALICO発達ナビ／東金市公式の施設外観・保育室の写真を挿入）</a:t>
+              <a:t>（ホイシル事業所ページ／LITALICO発達ナビ掲載の教室写真を挿入）</a:t>
             </a:r>
             <a:endParaRPr lang="en-US" sz="1200" dirty="0"/>
           </a:p>
@@ -17105,7 +21024,7 @@
                 <a:ea typeface="メイリオ" panose="020B0604030504040204" pitchFamily="50" charset="-128"/>
                 <a:cs typeface="Meiryo" pitchFamily="34" charset="-120"/>
               </a:rPr>
-              <a:t>市街地から離れた家之子地区（市北部）に立地し、周辺の事業所空白地帯をカバー。</a:t>
+              <a:t>東金市で2拠点を展開。田間（市街地）と求名（市南西部）で商圏を分ける配置をとる。</a:t>
             </a:r>
             <a:endParaRPr lang="en-US" sz="1000" dirty="0">
               <a:latin typeface="メイリオ" panose="020B0604030504040204" pitchFamily="50" charset="-128"/>
@@ -17129,7 +21048,7 @@
                 <a:ea typeface="メイリオ" panose="020B0604030504040204" pitchFamily="50" charset="-128"/>
                 <a:cs typeface="Meiryo" pitchFamily="34" charset="-120"/>
               </a:rPr>
-              <a:t>保育所併設型は市内で唯一。定型発達児との日常的な交流が可能な環境が構造的な強み。</a:t>
+              <a:t>求名駅圏は他事業所が少ない空白地帯で、第2の出店はその需要を先に押さえる動きとみられる。</a:t>
             </a:r>
             <a:endParaRPr lang="en-US" sz="1000" dirty="0">
               <a:latin typeface="メイリオ" panose="020B0604030504040204" pitchFamily="50" charset="-128"/>
@@ -17153,7 +21072,7 @@
                 <a:ea typeface="メイリオ" panose="020B0604030504040204" pitchFamily="50" charset="-128"/>
                 <a:cs typeface="Meiryo" pitchFamily="34" charset="-120"/>
               </a:rPr>
-              <a:t>情報発信がほぼ無く、稼働状況・空き枠の把握には直接ヒアリングが必須。</a:t>
+              <a:t>発達ナビ上で「空きあり」と表示されており、稼働に余力がある可能性がある。</a:t>
             </a:r>
             <a:endParaRPr lang="en-US" sz="1000" dirty="0">
               <a:latin typeface="メイリオ" panose="020B0604030504040204" pitchFamily="50" charset="-128"/>
@@ -17177,7 +21096,7 @@
                 <a:ea typeface="メイリオ" panose="020B0604030504040204" pitchFamily="50" charset="-128"/>
                 <a:cs typeface="Meiryo" pitchFamily="34" charset="-120"/>
               </a:rPr>
-              <a:t>市北部（家之子・丘山方面）は事業所が少なく、送迎圏として狙える余地がある。</a:t>
+              <a:t>公開情報が乏しく、運営法人・プログラム内容の把握には直接ヒアリングが必要。</a:t>
             </a:r>
             <a:endParaRPr lang="en-US" sz="1000" dirty="0">
               <a:latin typeface="メイリオ" panose="020B0604030504040204" pitchFamily="50" charset="-128"/>

--- a/東金市_児童発達支援_事業所調査.pptx
+++ b/東金市_児童発達支援_事業所調査.pptx
@@ -18,9 +18,7 @@
     <p:sldId id="263" r:id="rId19"/>
     <p:sldId id="264" r:id="rId20"/>
     <p:sldId id="265" r:id="rId21"/>
-    <p:sldId id="266" r:id="rId22"/>
-    <p:sldId id="267" r:id="rId23"/>
-    <p:sldId id="268" r:id="rId8"/>
+    <p:sldId id="266" r:id="rId8"/>
   </p:sldIdLst>
   <p:sldSz cx="12192000" cy="6858000"/>
   <p:notesSz cx="6858000" cy="12192000"/>
@@ -1099,7 +1097,7 @@
                 <a:ea typeface="メイリオ" panose="020B0604030504040204" pitchFamily="50" charset="-128"/>
                 <a:cs typeface="Meiryo" pitchFamily="34" charset="-120"/>
               </a:rPr>
-              <a:t>東金市内 全16拠点（運営主体8）の個別整理</a:t>
+              <a:t>東金市内 全14拠点（運営主体7）の個別整理</a:t>
             </a:r>
             <a:endParaRPr lang="en-US" altLang="ja-JP" sz="1600" b="1" dirty="0">
               <a:latin typeface="メイリオ" panose="020B0604030504040204" pitchFamily="50" charset="-128"/>
@@ -1427,7 +1425,7 @@
                 <a:ea typeface="Meiryo" pitchFamily="34" charset="-122"/>
                 <a:cs typeface="Meiryo" pitchFamily="34" charset="-120"/>
               </a:rPr>
-              <a:t>⑧ 果実の木 求名</a:t>
+              <a:t>⑧ 鴇嶺の家</a:t>
             </a:r>
             <a:endParaRPr lang="en-US" sz="2100" dirty="0"/>
           </a:p>
@@ -1601,7 +1599,7 @@
                 <a:ea typeface="Meiryo" pitchFamily="34" charset="-122"/>
                 <a:cs typeface="Meiryo" pitchFamily="34" charset="-120"/>
               </a:rPr>
-              <a:t>果実の木 求名（児童発達支援）</a:t>
+              <a:t>鴇嶺の家（児童発達支援・放課後等デイサービス）</a:t>
             </a:r>
             <a:endParaRPr lang="en-US" sz="1400" dirty="0"/>
           </a:p>
@@ -1665,7 +1663,7 @@
                 <a:ea typeface="Meiryo" pitchFamily="34" charset="-122"/>
                 <a:cs typeface="Meiryo" pitchFamily="34" charset="-120"/>
               </a:rPr>
-              <a:t>未就学児（児童発達支援）</a:t>
+              <a:t>未就学児（児童発達支援）〜就学児（放課後等デイサービス）</a:t>
             </a:r>
             <a:endParaRPr lang="en-US" sz="1050" dirty="0"/>
           </a:p>
@@ -1707,7 +1705,7 @@
                 <a:ea typeface="Meiryo" pitchFamily="34" charset="-122"/>
                 <a:cs typeface="Meiryo" pitchFamily="34" charset="-120"/>
               </a:rPr>
-              <a:t>千葉県東金市　JR東金線 求名駅から約593m（正確な所在地は要確認）</a:t>
+              <a:t>千葉県東金市東金425-2</a:t>
             </a:r>
             <a:endParaRPr lang="en-US" sz="1050" dirty="0"/>
           </a:p>
@@ -1749,7 +1747,7 @@
                 <a:ea typeface="Meiryo" pitchFamily="34" charset="-122"/>
                 <a:cs typeface="Meiryo" pitchFamily="34" charset="-120"/>
               </a:rPr>
-              <a:t>要確認（公開情報に記載なし）</a:t>
+              <a:t>要確認（公開情報では下4桁「0285」までの記載にとどまる）／公開HPなし</a:t>
             </a:r>
             <a:endParaRPr lang="en-US" sz="1050" dirty="0"/>
           </a:p>
@@ -1845,7 +1843,7 @@
                 <a:ea typeface="Meiryo" pitchFamily="34" charset="-122"/>
                 <a:cs typeface="Meiryo" pitchFamily="34" charset="-120"/>
               </a:rPr>
-              <a:t>公開情報が極めて限定的で、支援内容は要確認。</a:t>
+              <a:t>児童発達支援と放課後等デイサービスを併設。プログラム内容は公開情報からは確認できず要確認。</a:t>
             </a:r>
             <a:endParaRPr lang="en-US" sz="1050" dirty="0"/>
           </a:p>
@@ -1868,7 +1866,7 @@
                 <a:ea typeface="Meiryo" pitchFamily="34" charset="-122"/>
                 <a:cs typeface="Meiryo" pitchFamily="34" charset="-120"/>
               </a:rPr>
-              <a:t>・集約サイトの児童発達支援一覧に掲載。市南西部の求名駅圏に立地。</a:t>
+              <a:t>・東金地区（旧市街・鴇嶺小学校区）に立地し、学校からの通所導線が近い。</a:t>
             </a:r>
             <a:endParaRPr lang="en-US" sz="1050" dirty="0"/>
           </a:p>
@@ -1891,7 +1889,7 @@
                 <a:ea typeface="Meiryo" pitchFamily="34" charset="-122"/>
                 <a:cs typeface="Meiryo" pitchFamily="34" charset="-120"/>
               </a:rPr>
-              <a:t>・同一エリアにエスポワール第2があり、求名駅圏は2事業所が並ぶ。</a:t>
+              <a:t>・同一町域の東金723にスターワーク東金（放デイ）があり、東金駅東口エリアに事業所が集積。</a:t>
             </a:r>
             <a:endParaRPr lang="en-US" sz="1050" dirty="0"/>
           </a:p>
@@ -1905,29 +1903,6 @@
               </a:spcAft>
               <a:buNone/>
             </a:pPr>
-            <a:r>
-              <a:rPr lang="en-US" sz="1050" dirty="0">
-                <a:solidFill>
-                  <a:srgbClr val="222222"/>
-                </a:solidFill>
-                <a:latin typeface="Meiryo" pitchFamily="34" charset="0"/>
-                <a:ea typeface="Meiryo" pitchFamily="34" charset="-122"/>
-                <a:cs typeface="Meiryo" pitchFamily="34" charset="-120"/>
-              </a:rPr>
-              <a:t>・「果実の木」は熊本市等にも同名の放課後等デイサービスがあり、同系列か否かは要確認。</a:t>
-            </a:r>
-            <a:endParaRPr lang="en-US" sz="1050" dirty="0"/>
-          </a:p>
-          <a:p>
-            <a:pPr marL="0" indent="0">
-              <a:lnSpc>
-                <a:spcPct val="103000"/>
-              </a:lnSpc>
-              <a:spcAft>
-                <a:spcPts val="500"/>
-              </a:spcAft>
-              <a:buNone/>
-            </a:pPr>
             <a:endParaRPr lang="en-US" sz="1050" dirty="0"/>
           </a:p>
           <a:p>
@@ -1968,7 +1943,7 @@
                 <a:ea typeface="Meiryo" pitchFamily="34" charset="-122"/>
                 <a:cs typeface="Meiryo" pitchFamily="34" charset="-120"/>
               </a:rPr>
-              <a:t>ホイシル 東金市 児童発達支援一覧（www.hoicil.com/f?area=122131&amp;facility_kind=15）</a:t>
+              <a:t>東金市公式サイト／LITALICO発達ナビ 東金市 児童発達支援事業所一覧</a:t>
             </a:r>
             <a:endParaRPr lang="en-US" sz="1050" dirty="0"/>
           </a:p>
@@ -2010,7 +1985,7 @@
                 <a:ea typeface="Meiryo" pitchFamily="34" charset="-122"/>
                 <a:cs typeface="Meiryo" pitchFamily="34" charset="-120"/>
               </a:rPr>
-              <a:t>正式名称・所在地・電話番号、運営法人、定員、提供時間、他県の同名事業所との関係</a:t>
+              <a:t>運営法人、正確な電話番号、定員、提供時間、プログラム内容　※公開情報がほぼ無い</a:t>
             </a:r>
             <a:endParaRPr lang="en-US" sz="1050" dirty="0"/>
           </a:p>
@@ -2079,7 +2054,7 @@
                 <a:ea typeface="Meiryo" pitchFamily="34" charset="-122"/>
                 <a:cs typeface="Meiryo" pitchFamily="34" charset="-120"/>
               </a:rPr>
-              <a:t>（ホイシル／LITALICO発達ナビ掲載の施設写真を挿入）</a:t>
+              <a:t>（LITALICO発達ナビ／東金市公式の施設写真を挿入）</a:t>
             </a:r>
             <a:endParaRPr lang="en-US" sz="1200" dirty="0"/>
           </a:p>
@@ -2186,7 +2161,7 @@
                 <a:ea typeface="メイリオ" panose="020B0604030504040204" pitchFamily="50" charset="-128"/>
                 <a:cs typeface="Meiryo" pitchFamily="34" charset="-120"/>
               </a:rPr>
-              <a:t>求名駅圏で確認できる数少ない児童発達支援。市南西部の受け皿を担う。</a:t>
+              <a:t>鴇嶺小学校区の中心部に位置し、学区内からの徒歩・短距離送迎に適した立地。</a:t>
             </a:r>
             <a:endParaRPr lang="en-US" sz="1000" dirty="0">
               <a:latin typeface="メイリオ" panose="020B0604030504040204" pitchFamily="50" charset="-128"/>
@@ -2210,7 +2185,7 @@
                 <a:ea typeface="メイリオ" panose="020B0604030504040204" pitchFamily="50" charset="-128"/>
                 <a:cs typeface="Meiryo" pitchFamily="34" charset="-120"/>
               </a:rPr>
-              <a:t>東金駅圏に集中する既存事業所とは商圏が異なり、直接競合になりにくい立地。</a:t>
+              <a:t>東金駅東口エリアの事業所集積地にあり、競合との距離が近い。</a:t>
             </a:r>
             <a:endParaRPr lang="en-US" sz="1000" dirty="0">
               <a:latin typeface="メイリオ" panose="020B0604030504040204" pitchFamily="50" charset="-128"/>
@@ -2234,7 +2209,7 @@
                 <a:ea typeface="メイリオ" panose="020B0604030504040204" pitchFamily="50" charset="-128"/>
                 <a:cs typeface="Meiryo" pitchFamily="34" charset="-120"/>
               </a:rPr>
-              <a:t>市南西部（求名・丘山地区）は従来「空白地帯」と見ていたが、実際には出店が進みつつある。</a:t>
+              <a:t>情報発信が乏しく、実態把握は市社会福祉課・相談支援事業所経由での確認が現実的。</a:t>
             </a:r>
             <a:endParaRPr lang="en-US" sz="1000" dirty="0">
               <a:latin typeface="メイリオ" panose="020B0604030504040204" pitchFamily="50" charset="-128"/>
@@ -2258,7 +2233,7 @@
                 <a:ea typeface="メイリオ" panose="020B0604030504040204" pitchFamily="50" charset="-128"/>
                 <a:cs typeface="Meiryo" pitchFamily="34" charset="-120"/>
               </a:rPr>
-              <a:t>公開情報がほぼ無く、実態把握は市社会福祉課・相談支援事業所経由での確認が現実的。</a:t>
+              <a:t>東金駅東口は事業所集積地。新規参入するなら駅前以外の空白地を狙うのが現実的。</a:t>
             </a:r>
             <a:endParaRPr lang="en-US" sz="1000" dirty="0">
               <a:latin typeface="メイリオ" panose="020B0604030504040204" pitchFamily="50" charset="-128"/>
@@ -2276,1930 +2251,6 @@
 </file>
 
 <file path=ppt/slides/slide11.xml><?xml version="1.0" encoding="utf-8"?>
-<p:sld xmlns:a="http://schemas.openxmlformats.org/drawingml/2006/main" xmlns:r="http://schemas.openxmlformats.org/officeDocument/2006/relationships" xmlns:p="http://schemas.openxmlformats.org/presentationml/2006/main">
-  <p:cSld name="Slide 3">
-    <p:bg>
-      <p:bgPr>
-        <a:solidFill>
-          <a:srgbClr val="FFFFFF"/>
-        </a:solidFill>
-        <a:effectLst/>
-      </p:bgPr>
-    </p:bg>
-    <p:spTree>
-      <p:nvGrpSpPr>
-        <p:cNvPr id="1" name=""/>
-        <p:cNvGrpSpPr/>
-        <p:nvPr/>
-      </p:nvGrpSpPr>
-      <p:grpSpPr>
-        <a:xfrm>
-          <a:off x="0" y="0"/>
-          <a:ext cx="0" cy="0"/>
-          <a:chOff x="0" y="0"/>
-          <a:chExt cx="0" cy="0"/>
-        </a:xfrm>
-      </p:grpSpPr>
-      <p:sp>
-        <p:nvSpPr>
-          <p:cNvPr id="2" name="Shape 0"/>
-          <p:cNvSpPr/>
-          <p:nvPr/>
-        </p:nvSpPr>
-        <p:spPr>
-          <a:xfrm>
-            <a:off x="0" y="0"/>
-            <a:ext cx="12188952" cy="932688"/>
-          </a:xfrm>
-          <a:prstGeom prst="rect">
-            <a:avLst/>
-          </a:prstGeom>
-          <a:solidFill>
-            <a:srgbClr val="1B3A6B"/>
-          </a:solidFill>
-          <a:ln/>
-        </p:spPr>
-      </p:sp>
-      <p:sp>
-        <p:nvSpPr>
-          <p:cNvPr id="3" name="Shape 1"/>
-          <p:cNvSpPr/>
-          <p:nvPr/>
-        </p:nvSpPr>
-        <p:spPr>
-          <a:xfrm>
-            <a:off x="0" y="0"/>
-            <a:ext cx="164592" cy="932688"/>
-          </a:xfrm>
-          <a:prstGeom prst="rect">
-            <a:avLst/>
-          </a:prstGeom>
-          <a:solidFill>
-            <a:srgbClr val="13294B"/>
-          </a:solidFill>
-          <a:ln/>
-        </p:spPr>
-      </p:sp>
-      <p:sp>
-        <p:nvSpPr>
-          <p:cNvPr id="4" name="Text 2"/>
-          <p:cNvSpPr/>
-          <p:nvPr/>
-        </p:nvSpPr>
-        <p:spPr>
-          <a:xfrm>
-            <a:off x="502920" y="54864"/>
-            <a:ext cx="8686800" cy="822960"/>
-          </a:xfrm>
-          <a:prstGeom prst="rect">
-            <a:avLst/>
-          </a:prstGeom>
-          <a:noFill/>
-          <a:ln/>
-        </p:spPr>
-        <p:txBody>
-          <a:bodyPr wrap="square" lIns="0" tIns="0" rIns="0" bIns="0" rtlCol="0" anchor="ctr"/>
-          <a:lstStyle/>
-          <a:p>
-            <a:pPr marL="0" indent="0">
-              <a:buNone/>
-            </a:pPr>
-            <a:r>
-              <a:rPr lang="en-US" sz="3000" b="1" dirty="0">
-                <a:solidFill>
-                  <a:srgbClr val="FFFFFF"/>
-                </a:solidFill>
-                <a:latin typeface="Meiryo" pitchFamily="34" charset="0"/>
-                <a:ea typeface="Meiryo" pitchFamily="34" charset="-122"/>
-                <a:cs typeface="Meiryo" pitchFamily="34" charset="-120"/>
-              </a:rPr>
-              <a:t>II．　事業所別 詳細</a:t>
-            </a:r>
-            <a:endParaRPr lang="en-US" sz="3000" dirty="0"/>
-          </a:p>
-        </p:txBody>
-      </p:sp>
-      <p:sp>
-        <p:nvSpPr>
-          <p:cNvPr id="5" name="Text 3"/>
-          <p:cNvSpPr/>
-          <p:nvPr/>
-        </p:nvSpPr>
-        <p:spPr>
-          <a:xfrm>
-            <a:off x="502920" y="1115568"/>
-            <a:ext cx="8503920" cy="457200"/>
-          </a:xfrm>
-          <a:prstGeom prst="rect">
-            <a:avLst/>
-          </a:prstGeom>
-          <a:noFill/>
-          <a:ln/>
-        </p:spPr>
-        <p:txBody>
-          <a:bodyPr wrap="square" lIns="0" tIns="0" rIns="0" bIns="0" rtlCol="0" anchor="ctr"/>
-          <a:lstStyle/>
-          <a:p>
-            <a:pPr marL="0" indent="0">
-              <a:buNone/>
-            </a:pPr>
-            <a:r>
-              <a:rPr lang="en-US" sz="2100" b="1" dirty="0">
-                <a:solidFill>
-                  <a:srgbClr val="222222"/>
-                </a:solidFill>
-                <a:latin typeface="Meiryo" pitchFamily="34" charset="0"/>
-                <a:ea typeface="Meiryo" pitchFamily="34" charset="-122"/>
-                <a:cs typeface="Meiryo" pitchFamily="34" charset="-120"/>
-              </a:rPr>
-              <a:t>⑨ 児童発達支援コンパッション保育所</a:t>
-            </a:r>
-            <a:endParaRPr lang="en-US" sz="2100" dirty="0"/>
-          </a:p>
-        </p:txBody>
-      </p:sp>
-      <p:sp>
-        <p:nvSpPr>
-          <p:cNvPr id="6" name="Shape 4"/>
-          <p:cNvSpPr/>
-          <p:nvPr/>
-        </p:nvSpPr>
-        <p:spPr>
-          <a:xfrm>
-            <a:off x="10104120" y="1170432"/>
-            <a:ext cx="1600200" cy="457200"/>
-          </a:xfrm>
-          <a:prstGeom prst="rect">
-            <a:avLst/>
-          </a:prstGeom>
-          <a:solidFill>
-            <a:srgbClr val="FFFFFF"/>
-          </a:solidFill>
-          <a:ln w="15875">
-            <a:solidFill>
-              <a:srgbClr val="1B3A6B"/>
-            </a:solidFill>
-            <a:prstDash val="solid"/>
-          </a:ln>
-        </p:spPr>
-      </p:sp>
-      <p:sp>
-        <p:nvSpPr>
-          <p:cNvPr id="7" name="Text 5"/>
-          <p:cNvSpPr/>
-          <p:nvPr/>
-        </p:nvSpPr>
-        <p:spPr>
-          <a:xfrm>
-            <a:off x="10104120" y="1170432"/>
-            <a:ext cx="1600200" cy="457200"/>
-          </a:xfrm>
-          <a:prstGeom prst="rect">
-            <a:avLst/>
-          </a:prstGeom>
-          <a:noFill/>
-          <a:ln/>
-        </p:spPr>
-        <p:txBody>
-          <a:bodyPr wrap="square" lIns="0" tIns="0" rIns="0" bIns="0" rtlCol="0" anchor="ctr"/>
-          <a:lstStyle/>
-          <a:p>
-            <a:pPr marL="0" indent="0" algn="ctr">
-              <a:buNone/>
-            </a:pPr>
-            <a:r>
-              <a:rPr lang="en-US" sz="1400" b="1" dirty="0">
-                <a:solidFill>
-                  <a:srgbClr val="1B3A6B"/>
-                </a:solidFill>
-                <a:latin typeface="Meiryo" pitchFamily="34" charset="0"/>
-                <a:ea typeface="Meiryo" pitchFamily="34" charset="-122"/>
-                <a:cs typeface="Meiryo" pitchFamily="34" charset="-120"/>
-              </a:rPr>
-              <a:t>東金市</a:t>
-            </a:r>
-            <a:endParaRPr lang="en-US" sz="1400" dirty="0"/>
-          </a:p>
-        </p:txBody>
-      </p:sp>
-      <p:sp>
-        <p:nvSpPr>
-          <p:cNvPr id="8" name="Text 6"/>
-          <p:cNvSpPr/>
-          <p:nvPr/>
-        </p:nvSpPr>
-        <p:spPr>
-          <a:xfrm>
-            <a:off x="502920" y="6510528"/>
-            <a:ext cx="7315200" cy="274320"/>
-          </a:xfrm>
-          <a:prstGeom prst="rect">
-            <a:avLst/>
-          </a:prstGeom>
-          <a:noFill/>
-          <a:ln/>
-        </p:spPr>
-        <p:txBody>
-          <a:bodyPr wrap="square" lIns="0" tIns="0" rIns="0" bIns="0" rtlCol="0" anchor="ctr"/>
-          <a:lstStyle/>
-          <a:p>
-            <a:pPr marL="0" indent="0">
-              <a:buNone/>
-            </a:pPr>
-            <a:r>
-              <a:rPr lang="en-US" sz="850" dirty="0">
-                <a:solidFill>
-                  <a:srgbClr val="666666"/>
-                </a:solidFill>
-                <a:latin typeface="Meiryo" pitchFamily="34" charset="0"/>
-                <a:ea typeface="Meiryo" pitchFamily="34" charset="-122"/>
-                <a:cs typeface="Meiryo" pitchFamily="34" charset="-120"/>
-              </a:rPr>
-              <a:t>Copyright Funai Soken Group. All rights reserved.</a:t>
-            </a:r>
-            <a:endParaRPr lang="en-US" sz="850" dirty="0"/>
-          </a:p>
-        </p:txBody>
-      </p:sp>
-      <p:sp>
-        <p:nvSpPr>
-          <p:cNvPr id="9" name="Shape 7"/>
-          <p:cNvSpPr/>
-          <p:nvPr/>
-        </p:nvSpPr>
-        <p:spPr>
-          <a:xfrm>
-            <a:off x="502920" y="1783080"/>
-            <a:ext cx="6903720" cy="4434840"/>
-          </a:xfrm>
-          <a:prstGeom prst="rect">
-            <a:avLst/>
-          </a:prstGeom>
-          <a:solidFill>
-            <a:srgbClr val="FFFFFF"/>
-          </a:solidFill>
-          <a:ln w="12700">
-            <a:solidFill>
-              <a:srgbClr val="9AA7B8"/>
-            </a:solidFill>
-            <a:prstDash val="solid"/>
-          </a:ln>
-          <a:effectLst>
-            <a:outerShdw blurRad="63500" dist="25400" dir="8100000" algn="bl" rotWithShape="0">
-              <a:srgbClr val="000000">
-                <a:alpha val="12000"/>
-              </a:srgbClr>
-            </a:outerShdw>
-          </a:effectLst>
-        </p:spPr>
-      </p:sp>
-      <p:sp>
-        <p:nvSpPr>
-          <p:cNvPr id="10" name="Text 8"/>
-          <p:cNvSpPr/>
-          <p:nvPr/>
-        </p:nvSpPr>
-        <p:spPr>
-          <a:xfrm>
-            <a:off x="704088" y="1911096"/>
-            <a:ext cx="6501384" cy="384048"/>
-          </a:xfrm>
-          <a:prstGeom prst="rect">
-            <a:avLst/>
-          </a:prstGeom>
-          <a:noFill/>
-          <a:ln/>
-        </p:spPr>
-        <p:txBody>
-          <a:bodyPr wrap="square" lIns="0" tIns="0" rIns="0" bIns="0" rtlCol="0" anchor="ctr"/>
-          <a:lstStyle/>
-          <a:p>
-            <a:pPr marL="0" indent="0">
-              <a:buNone/>
-            </a:pPr>
-            <a:r>
-              <a:rPr lang="en-US" sz="1400" b="1" dirty="0">
-                <a:solidFill>
-                  <a:srgbClr val="1B3A6B"/>
-                </a:solidFill>
-                <a:latin typeface="Meiryo" pitchFamily="34" charset="0"/>
-                <a:ea typeface="Meiryo" pitchFamily="34" charset="-122"/>
-                <a:cs typeface="Meiryo" pitchFamily="34" charset="-120"/>
-              </a:rPr>
-              <a:t>児童発達支援コンパッション保育所</a:t>
-            </a:r>
-            <a:endParaRPr lang="en-US" sz="1400" dirty="0"/>
-          </a:p>
-        </p:txBody>
-      </p:sp>
-      <p:sp>
-        <p:nvSpPr>
-          <p:cNvPr id="11" name="Text 9"/>
-          <p:cNvSpPr/>
-          <p:nvPr/>
-        </p:nvSpPr>
-        <p:spPr>
-          <a:xfrm>
-            <a:off x="704088" y="2331720"/>
-            <a:ext cx="6501384" cy="3813048"/>
-          </a:xfrm>
-          <a:prstGeom prst="rect">
-            <a:avLst/>
-          </a:prstGeom>
-          <a:noFill/>
-          <a:ln/>
-        </p:spPr>
-        <p:txBody>
-          <a:bodyPr wrap="square" lIns="0" tIns="0" rIns="0" bIns="0" rtlCol="0" anchor="t"/>
-          <a:lstStyle/>
-          <a:p>
-            <a:pPr marL="0" indent="0">
-              <a:lnSpc>
-                <a:spcPct val="103000"/>
-              </a:lnSpc>
-              <a:buNone/>
-            </a:pPr>
-            <a:r>
-              <a:rPr lang="en-US" sz="1050" b="1" dirty="0">
-                <a:solidFill>
-                  <a:srgbClr val="2E6BB8"/>
-                </a:solidFill>
-                <a:latin typeface="Meiryo" pitchFamily="34" charset="0"/>
-                <a:ea typeface="Meiryo" pitchFamily="34" charset="-122"/>
-                <a:cs typeface="Meiryo" pitchFamily="34" charset="-120"/>
-              </a:rPr>
-              <a:t>▶</a:t>
-            </a:r>
-            <a:r>
-              <a:rPr lang="en-US" sz="1050" b="1" dirty="0">
-                <a:solidFill>
-                  <a:srgbClr val="222222"/>
-                </a:solidFill>
-                <a:latin typeface="Meiryo" pitchFamily="34" charset="0"/>
-                <a:ea typeface="Meiryo" pitchFamily="34" charset="-122"/>
-                <a:cs typeface="Meiryo" pitchFamily="34" charset="-120"/>
-              </a:rPr>
-              <a:t>対象：</a:t>
-            </a:r>
-            <a:r>
-              <a:rPr lang="en-US" sz="1050" dirty="0">
-                <a:solidFill>
-                  <a:srgbClr val="222222"/>
-                </a:solidFill>
-                <a:latin typeface="Meiryo" pitchFamily="34" charset="0"/>
-                <a:ea typeface="Meiryo" pitchFamily="34" charset="-122"/>
-                <a:cs typeface="Meiryo" pitchFamily="34" charset="-120"/>
-              </a:rPr>
-              <a:t>未就学児（児童発達支援）</a:t>
-            </a:r>
-            <a:endParaRPr lang="en-US" sz="1050" dirty="0"/>
-          </a:p>
-          <a:p>
-            <a:pPr marL="0" indent="0">
-              <a:lnSpc>
-                <a:spcPct val="103000"/>
-              </a:lnSpc>
-              <a:buNone/>
-            </a:pPr>
-            <a:r>
-              <a:rPr lang="en-US" sz="1050" b="1" dirty="0">
-                <a:solidFill>
-                  <a:srgbClr val="2E6BB8"/>
-                </a:solidFill>
-                <a:latin typeface="Meiryo" pitchFamily="34" charset="0"/>
-                <a:ea typeface="Meiryo" pitchFamily="34" charset="-122"/>
-                <a:cs typeface="Meiryo" pitchFamily="34" charset="-120"/>
-              </a:rPr>
-              <a:t>▶</a:t>
-            </a:r>
-            <a:r>
-              <a:rPr lang="en-US" sz="1050" b="1" dirty="0">
-                <a:solidFill>
-                  <a:srgbClr val="222222"/>
-                </a:solidFill>
-                <a:latin typeface="Meiryo" pitchFamily="34" charset="0"/>
-                <a:ea typeface="Meiryo" pitchFamily="34" charset="-122"/>
-                <a:cs typeface="Meiryo" pitchFamily="34" charset="-120"/>
-              </a:rPr>
-              <a:t>住所：</a:t>
-            </a:r>
-            <a:r>
-              <a:rPr lang="en-US" sz="1050" dirty="0">
-                <a:solidFill>
-                  <a:srgbClr val="222222"/>
-                </a:solidFill>
-                <a:latin typeface="Meiryo" pitchFamily="34" charset="0"/>
-                <a:ea typeface="Meiryo" pitchFamily="34" charset="-122"/>
-                <a:cs typeface="Meiryo" pitchFamily="34" charset="-120"/>
-              </a:rPr>
-              <a:t>千葉県東金市家之子1671-36</a:t>
-            </a:r>
-            <a:endParaRPr lang="en-US" sz="1050" dirty="0"/>
-          </a:p>
-          <a:p>
-            <a:pPr marL="0" indent="0">
-              <a:lnSpc>
-                <a:spcPct val="103000"/>
-              </a:lnSpc>
-              <a:buNone/>
-            </a:pPr>
-            <a:r>
-              <a:rPr lang="en-US" sz="1050" b="1" dirty="0">
-                <a:solidFill>
-                  <a:srgbClr val="2E6BB8"/>
-                </a:solidFill>
-                <a:latin typeface="Meiryo" pitchFamily="34" charset="0"/>
-                <a:ea typeface="Meiryo" pitchFamily="34" charset="-122"/>
-                <a:cs typeface="Meiryo" pitchFamily="34" charset="-120"/>
-              </a:rPr>
-              <a:t>▶</a:t>
-            </a:r>
-            <a:r>
-              <a:rPr lang="en-US" sz="1050" b="1" dirty="0">
-                <a:solidFill>
-                  <a:srgbClr val="222222"/>
-                </a:solidFill>
-                <a:latin typeface="Meiryo" pitchFamily="34" charset="0"/>
-                <a:ea typeface="Meiryo" pitchFamily="34" charset="-122"/>
-                <a:cs typeface="Meiryo" pitchFamily="34" charset="-120"/>
-              </a:rPr>
-              <a:t>TEL／HP：</a:t>
-            </a:r>
-            <a:r>
-              <a:rPr lang="en-US" sz="1050" dirty="0">
-                <a:solidFill>
-                  <a:srgbClr val="222222"/>
-                </a:solidFill>
-                <a:latin typeface="Meiryo" pitchFamily="34" charset="0"/>
-                <a:ea typeface="Meiryo" pitchFamily="34" charset="-122"/>
-                <a:cs typeface="Meiryo" pitchFamily="34" charset="-120"/>
-              </a:rPr>
-              <a:t>要確認（公開情報に記載なし）</a:t>
-            </a:r>
-            <a:endParaRPr lang="en-US" sz="1050" dirty="0"/>
-          </a:p>
-          <a:p>
-            <a:pPr marL="0" indent="0">
-              <a:lnSpc>
-                <a:spcPct val="103000"/>
-              </a:lnSpc>
-              <a:buNone/>
-            </a:pPr>
-            <a:r>
-              <a:rPr lang="en-US" sz="1050" b="1" dirty="0">
-                <a:solidFill>
-                  <a:srgbClr val="2E6BB8"/>
-                </a:solidFill>
-                <a:latin typeface="Meiryo" pitchFamily="34" charset="0"/>
-                <a:ea typeface="Meiryo" pitchFamily="34" charset="-122"/>
-                <a:cs typeface="Meiryo" pitchFamily="34" charset="-120"/>
-              </a:rPr>
-              <a:t>▶</a:t>
-            </a:r>
-            <a:r>
-              <a:rPr lang="en-US" sz="1050" b="1" dirty="0">
-                <a:solidFill>
-                  <a:srgbClr val="222222"/>
-                </a:solidFill>
-                <a:latin typeface="Meiryo" pitchFamily="34" charset="0"/>
-                <a:ea typeface="Meiryo" pitchFamily="34" charset="-122"/>
-                <a:cs typeface="Meiryo" pitchFamily="34" charset="-120"/>
-              </a:rPr>
-              <a:t>サービス提供時間／定員：</a:t>
-            </a:r>
-            <a:r>
-              <a:rPr lang="en-US" sz="1050" dirty="0">
-                <a:solidFill>
-                  <a:srgbClr val="222222"/>
-                </a:solidFill>
-                <a:latin typeface="Meiryo" pitchFamily="34" charset="0"/>
-                <a:ea typeface="Meiryo" pitchFamily="34" charset="-122"/>
-                <a:cs typeface="Meiryo" pitchFamily="34" charset="-120"/>
-              </a:rPr>
-              <a:t>いずれも要確認</a:t>
-            </a:r>
-            <a:endParaRPr lang="en-US" sz="1050" dirty="0"/>
-          </a:p>
-          <a:p>
-            <a:pPr marL="0" indent="0">
-              <a:lnSpc>
-                <a:spcPct val="103000"/>
-              </a:lnSpc>
-              <a:spcAft>
-                <a:spcPts val="500"/>
-              </a:spcAft>
-              <a:buNone/>
-            </a:pPr>
-            <a:endParaRPr lang="en-US" sz="1050" dirty="0"/>
-          </a:p>
-          <a:p>
-            <a:pPr marL="0" indent="0">
-              <a:lnSpc>
-                <a:spcPct val="103000"/>
-              </a:lnSpc>
-              <a:buNone/>
-            </a:pPr>
-            <a:r>
-              <a:rPr lang="en-US" sz="1050" b="1" dirty="0">
-                <a:solidFill>
-                  <a:srgbClr val="2E6BB8"/>
-                </a:solidFill>
-                <a:latin typeface="Meiryo" pitchFamily="34" charset="0"/>
-                <a:ea typeface="Meiryo" pitchFamily="34" charset="-122"/>
-                <a:cs typeface="Meiryo" pitchFamily="34" charset="-120"/>
-              </a:rPr>
-              <a:t>▶</a:t>
-            </a:r>
-            <a:r>
-              <a:rPr lang="en-US" sz="1050" b="1" dirty="0">
-                <a:solidFill>
-                  <a:srgbClr val="222222"/>
-                </a:solidFill>
-                <a:latin typeface="Meiryo" pitchFamily="34" charset="0"/>
-                <a:ea typeface="Meiryo" pitchFamily="34" charset="-122"/>
-                <a:cs typeface="Meiryo" pitchFamily="34" charset="-120"/>
-              </a:rPr>
-              <a:t>療育プログラムの特徴：</a:t>
-            </a:r>
-            <a:r>
-              <a:rPr lang="en-US" sz="1050" dirty="0">
-                <a:solidFill>
-                  <a:srgbClr val="222222"/>
-                </a:solidFill>
-                <a:latin typeface="Meiryo" pitchFamily="34" charset="0"/>
-                <a:ea typeface="Meiryo" pitchFamily="34" charset="-122"/>
-                <a:cs typeface="Meiryo" pitchFamily="34" charset="-120"/>
-              </a:rPr>
-              <a:t>保育所を母体とする児童発達支援。保育の場と療育の場が同一施設にある併設型。</a:t>
-            </a:r>
-            <a:endParaRPr lang="en-US" sz="1050" dirty="0"/>
-          </a:p>
-          <a:p>
-            <a:pPr marL="0" indent="0">
-              <a:lnSpc>
-                <a:spcPct val="103000"/>
-              </a:lnSpc>
-              <a:spcAft>
-                <a:spcPts val="500"/>
-              </a:spcAft>
-              <a:buNone/>
-            </a:pPr>
-            <a:r>
-              <a:rPr lang="en-US" sz="1050" dirty="0">
-                <a:solidFill>
-                  <a:srgbClr val="222222"/>
-                </a:solidFill>
-                <a:latin typeface="Meiryo" pitchFamily="34" charset="0"/>
-                <a:ea typeface="Meiryo" pitchFamily="34" charset="-122"/>
-                <a:cs typeface="Meiryo" pitchFamily="34" charset="-120"/>
-              </a:rPr>
-              <a:t>・市および発達支援施設検索サイトの児童発達支援事業所一覧に掲載されている。</a:t>
-            </a:r>
-            <a:endParaRPr lang="en-US" sz="1050" dirty="0"/>
-          </a:p>
-          <a:p>
-            <a:pPr marL="0" indent="0">
-              <a:lnSpc>
-                <a:spcPct val="103000"/>
-              </a:lnSpc>
-              <a:spcAft>
-                <a:spcPts val="500"/>
-              </a:spcAft>
-              <a:buNone/>
-            </a:pPr>
-            <a:r>
-              <a:rPr lang="en-US" sz="1050" dirty="0">
-                <a:solidFill>
-                  <a:srgbClr val="222222"/>
-                </a:solidFill>
-                <a:latin typeface="Meiryo" pitchFamily="34" charset="0"/>
-                <a:ea typeface="Meiryo" pitchFamily="34" charset="-122"/>
-                <a:cs typeface="Meiryo" pitchFamily="34" charset="-120"/>
-              </a:rPr>
-              <a:t>・Web上の公開情報は極めて限定的で、支援プログラムの詳細は現地・電話での確認が必要。</a:t>
-            </a:r>
-            <a:endParaRPr lang="en-US" sz="1050" dirty="0"/>
-          </a:p>
-          <a:p>
-            <a:pPr marL="0" indent="0">
-              <a:lnSpc>
-                <a:spcPct val="103000"/>
-              </a:lnSpc>
-              <a:spcAft>
-                <a:spcPts val="500"/>
-              </a:spcAft>
-              <a:buNone/>
-            </a:pPr>
-            <a:endParaRPr lang="en-US" sz="1050" dirty="0"/>
-          </a:p>
-          <a:p>
-            <a:pPr marL="0" indent="0">
-              <a:lnSpc>
-                <a:spcPct val="103000"/>
-              </a:lnSpc>
-              <a:buNone/>
-            </a:pPr>
-            <a:r>
-              <a:rPr lang="en-US" sz="1050" b="1" dirty="0">
-                <a:solidFill>
-                  <a:srgbClr val="2E6BB8"/>
-                </a:solidFill>
-                <a:latin typeface="Meiryo" pitchFamily="34" charset="0"/>
-                <a:ea typeface="Meiryo" pitchFamily="34" charset="-122"/>
-                <a:cs typeface="Meiryo" pitchFamily="34" charset="-120"/>
-              </a:rPr>
-              <a:t>▶</a:t>
-            </a:r>
-            <a:r>
-              <a:rPr lang="en-US" sz="1050" b="1" dirty="0">
-                <a:solidFill>
-                  <a:srgbClr val="222222"/>
-                </a:solidFill>
-                <a:latin typeface="Meiryo" pitchFamily="34" charset="0"/>
-                <a:ea typeface="Meiryo" pitchFamily="34" charset="-122"/>
-                <a:cs typeface="Meiryo" pitchFamily="34" charset="-120"/>
-              </a:rPr>
-              <a:t>出典：</a:t>
-            </a:r>
-            <a:r>
-              <a:rPr lang="en-US" sz="1050" dirty="0">
-                <a:solidFill>
-                  <a:srgbClr val="222222"/>
-                </a:solidFill>
-                <a:latin typeface="Meiryo" pitchFamily="34" charset="0"/>
-                <a:ea typeface="Meiryo" pitchFamily="34" charset="-122"/>
-                <a:cs typeface="Meiryo" pitchFamily="34" charset="-120"/>
-              </a:rPr>
-              <a:t>東金市公式サイト／LITALICO発達ナビ 東金市 児童発達支援事業所一覧</a:t>
-            </a:r>
-            <a:endParaRPr lang="en-US" sz="1050" dirty="0"/>
-          </a:p>
-          <a:p>
-            <a:pPr marL="0" indent="0">
-              <a:lnSpc>
-                <a:spcPct val="103000"/>
-              </a:lnSpc>
-              <a:buNone/>
-            </a:pPr>
-            <a:r>
-              <a:rPr lang="en-US" sz="1050" b="1" dirty="0">
-                <a:solidFill>
-                  <a:srgbClr val="2E6BB8"/>
-                </a:solidFill>
-                <a:latin typeface="Meiryo" pitchFamily="34" charset="0"/>
-                <a:ea typeface="Meiryo" pitchFamily="34" charset="-122"/>
-                <a:cs typeface="Meiryo" pitchFamily="34" charset="-120"/>
-              </a:rPr>
-              <a:t>▶</a:t>
-            </a:r>
-            <a:r>
-              <a:rPr lang="en-US" sz="1050" b="1" dirty="0">
-                <a:solidFill>
-                  <a:srgbClr val="222222"/>
-                </a:solidFill>
-                <a:latin typeface="Meiryo" pitchFamily="34" charset="0"/>
-                <a:ea typeface="Meiryo" pitchFamily="34" charset="-122"/>
-                <a:cs typeface="Meiryo" pitchFamily="34" charset="-120"/>
-              </a:rPr>
-              <a:t>要確認事項：</a:t>
-            </a:r>
-            <a:r>
-              <a:rPr lang="en-US" sz="1050" dirty="0">
-                <a:solidFill>
-                  <a:srgbClr val="222222"/>
-                </a:solidFill>
-                <a:latin typeface="Meiryo" pitchFamily="34" charset="0"/>
-                <a:ea typeface="Meiryo" pitchFamily="34" charset="-122"/>
-                <a:cs typeface="Meiryo" pitchFamily="34" charset="-120"/>
-              </a:rPr>
-              <a:t>運営法人、電話番号、定員、提供時間、母体となる保育所との関係　※公開情報がほぼ無い</a:t>
-            </a:r>
-            <a:endParaRPr lang="en-US" sz="1050" dirty="0"/>
-          </a:p>
-        </p:txBody>
-      </p:sp>
-      <p:sp>
-        <p:nvSpPr>
-          <p:cNvPr id="13" name="Text 11"/>
-          <p:cNvSpPr/>
-          <p:nvPr/>
-        </p:nvSpPr>
-        <p:spPr>
-          <a:xfrm>
-            <a:off x="7635240" y="1783080"/>
-            <a:ext cx="4069080" cy="2148840"/>
-          </a:xfrm>
-          <a:prstGeom prst="rect">
-            <a:avLst/>
-          </a:prstGeom>
-          <a:solidFill>
-            <a:srgbClr val="F4F6FA"/>
-          </a:solidFill>
-          <a:ln w="12700">
-            <a:solidFill>
-              <a:srgbClr val="9AA7B8"/>
-            </a:solidFill>
-            <a:prstDash val="dash"/>
-          </a:ln>
-        </p:spPr>
-        <p:txBody>
-          <a:bodyPr wrap="square" lIns="91440" tIns="45720" rIns="91440" bIns="45720" rtlCol="0" anchor="ctr"/>
-          <a:lstStyle/>
-          <a:p>
-            <a:pPr marL="0" indent="0" algn="ctr">
-              <a:lnSpc>
-                <a:spcPct val="110000"/>
-              </a:lnSpc>
-              <a:buNone/>
-            </a:pPr>
-            <a:r>
-              <a:rPr lang="en-US" sz="1200" b="1" dirty="0">
-                <a:solidFill>
-                  <a:srgbClr val="8A99AD"/>
-                </a:solidFill>
-                <a:latin typeface="Meiryo" pitchFamily="34" charset="0"/>
-                <a:ea typeface="Meiryo" pitchFamily="34" charset="-122"/>
-                <a:cs typeface="Meiryo" pitchFamily="34" charset="-120"/>
-              </a:rPr>
-              <a:t>［ 写真挿入エリア ］</a:t>
-            </a:r>
-            <a:endParaRPr lang="en-US" sz="1200" dirty="0"/>
-          </a:p>
-          <a:p>
-            <a:pPr marL="0" indent="0" algn="ctr">
-              <a:lnSpc>
-                <a:spcPct val="110000"/>
-              </a:lnSpc>
-              <a:buNone/>
-            </a:pPr>
-            <a:r>
-              <a:rPr lang="en-US" sz="950" dirty="0">
-                <a:solidFill>
-                  <a:srgbClr val="97A4B6"/>
-                </a:solidFill>
-                <a:latin typeface="Meiryo" pitchFamily="34" charset="0"/>
-                <a:ea typeface="Meiryo" pitchFamily="34" charset="-122"/>
-                <a:cs typeface="Meiryo" pitchFamily="34" charset="-120"/>
-              </a:rPr>
-              <a:t>（LITALICO発達ナビ／東金市公式の施設外観・保育室の写真を挿入）</a:t>
-            </a:r>
-            <a:endParaRPr lang="en-US" sz="1200" dirty="0"/>
-          </a:p>
-        </p:txBody>
-      </p:sp>
-      <p:sp>
-        <p:nvSpPr>
-          <p:cNvPr id="14" name="Shape 12"/>
-          <p:cNvSpPr/>
-          <p:nvPr/>
-        </p:nvSpPr>
-        <p:spPr>
-          <a:xfrm>
-            <a:off x="7635240" y="4069080"/>
-            <a:ext cx="4069080" cy="2148840"/>
-          </a:xfrm>
-          <a:prstGeom prst="rect">
-            <a:avLst/>
-          </a:prstGeom>
-          <a:solidFill>
-            <a:srgbClr val="EEF2F8"/>
-          </a:solidFill>
-          <a:ln w="12700">
-            <a:solidFill>
-              <a:srgbClr val="9AA7B8"/>
-            </a:solidFill>
-            <a:prstDash val="solid"/>
-          </a:ln>
-        </p:spPr>
-      </p:sp>
-      <p:sp>
-        <p:nvSpPr>
-          <p:cNvPr id="15" name="Text 13"/>
-          <p:cNvSpPr/>
-          <p:nvPr/>
-        </p:nvSpPr>
-        <p:spPr>
-          <a:xfrm>
-            <a:off x="7818120" y="4187952"/>
-            <a:ext cx="3703320" cy="320040"/>
-          </a:xfrm>
-          <a:prstGeom prst="rect">
-            <a:avLst/>
-          </a:prstGeom>
-          <a:noFill/>
-          <a:ln/>
-        </p:spPr>
-        <p:txBody>
-          <a:bodyPr wrap="square" lIns="0" tIns="0" rIns="0" bIns="0" rtlCol="0" anchor="ctr"/>
-          <a:lstStyle/>
-          <a:p>
-            <a:pPr marL="0" indent="0">
-              <a:buNone/>
-            </a:pPr>
-            <a:r>
-              <a:rPr lang="en-US" sz="1250" b="1" dirty="0">
-                <a:solidFill>
-                  <a:srgbClr val="1B3A6B"/>
-                </a:solidFill>
-                <a:latin typeface="Meiryo" pitchFamily="34" charset="0"/>
-                <a:ea typeface="Meiryo" pitchFamily="34" charset="-122"/>
-                <a:cs typeface="Meiryo" pitchFamily="34" charset="-120"/>
-              </a:rPr>
-              <a:t>注目ポイント</a:t>
-            </a:r>
-            <a:endParaRPr lang="en-US" sz="1250" dirty="0"/>
-          </a:p>
-        </p:txBody>
-      </p:sp>
-      <p:sp>
-        <p:nvSpPr>
-          <p:cNvPr id="16" name="Text 14"/>
-          <p:cNvSpPr/>
-          <p:nvPr/>
-        </p:nvSpPr>
-        <p:spPr>
-          <a:xfrm>
-            <a:off x="7818120" y="4553712"/>
-            <a:ext cx="3703320" cy="1554480"/>
-          </a:xfrm>
-          <a:prstGeom prst="rect">
-            <a:avLst/>
-          </a:prstGeom>
-          <a:noFill/>
-          <a:ln/>
-        </p:spPr>
-        <p:txBody>
-          <a:bodyPr wrap="square" lIns="0" tIns="0" rIns="0" bIns="0" rtlCol="0" anchor="t"/>
-          <a:lstStyle/>
-          <a:p>
-            <a:pPr marL="342900" indent="-342900">
-              <a:spcAft>
-                <a:spcPts val="700"/>
-              </a:spcAft>
-              <a:buSzPct val="100000"/>
-              <a:buChar char="•"/>
-            </a:pPr>
-            <a:r>
-              <a:rPr lang="en-US" sz="950" dirty="0">
-                <a:solidFill>
-                  <a:srgbClr val="222222"/>
-                </a:solidFill>
-                <a:latin typeface="メイリオ" panose="020B0604030504040204" pitchFamily="50" charset="-128"/>
-                <a:ea typeface="メイリオ" panose="020B0604030504040204" pitchFamily="50" charset="-128"/>
-                <a:cs typeface="Meiryo" pitchFamily="34" charset="-120"/>
-              </a:rPr>
-              <a:t>市街地から離れた家之子地区（市北部）に立地し、周辺の事業所空白地帯をカバー。</a:t>
-            </a:r>
-            <a:endParaRPr lang="en-US" sz="1000" dirty="0">
-              <a:latin typeface="メイリオ" panose="020B0604030504040204" pitchFamily="50" charset="-128"/>
-              <a:ea typeface="メイリオ" panose="020B0604030504040204" pitchFamily="50" charset="-128"/>
-            </a:endParaRPr>
-          </a:p>
-          <a:p>
-            <a:pPr marL="342900" indent="-342900">
-              <a:spcAft>
-                <a:spcPts val="700"/>
-              </a:spcAft>
-              <a:buSzPct val="100000"/>
-              <a:buChar char="•"/>
-            </a:pPr>
-            <a:r>
-              <a:rPr lang="en-US" sz="950" dirty="0">
-                <a:solidFill>
-                  <a:srgbClr val="222222"/>
-                </a:solidFill>
-                <a:latin typeface="メイリオ" panose="020B0604030504040204" pitchFamily="50" charset="-128"/>
-                <a:ea typeface="メイリオ" panose="020B0604030504040204" pitchFamily="50" charset="-128"/>
-                <a:cs typeface="Meiryo" pitchFamily="34" charset="-120"/>
-              </a:rPr>
-              <a:t>保育所併設型は市内で唯一。定型発達児との日常的な交流が可能な環境が構造的な強み。</a:t>
-            </a:r>
-            <a:endParaRPr lang="en-US" sz="1000" dirty="0">
-              <a:latin typeface="メイリオ" panose="020B0604030504040204" pitchFamily="50" charset="-128"/>
-              <a:ea typeface="メイリオ" panose="020B0604030504040204" pitchFamily="50" charset="-128"/>
-            </a:endParaRPr>
-          </a:p>
-          <a:p>
-            <a:pPr marL="342900" indent="-342900">
-              <a:spcAft>
-                <a:spcPts val="700"/>
-              </a:spcAft>
-              <a:buSzPct val="100000"/>
-              <a:buChar char="•"/>
-            </a:pPr>
-            <a:r>
-              <a:rPr lang="en-US" sz="950" dirty="0">
-                <a:solidFill>
-                  <a:srgbClr val="222222"/>
-                </a:solidFill>
-                <a:latin typeface="メイリオ" panose="020B0604030504040204" pitchFamily="50" charset="-128"/>
-                <a:ea typeface="メイリオ" panose="020B0604030504040204" pitchFamily="50" charset="-128"/>
-                <a:cs typeface="Meiryo" pitchFamily="34" charset="-120"/>
-              </a:rPr>
-              <a:t>情報発信がほぼ無く、稼働状況・空き枠の把握には直接ヒアリングが必須。</a:t>
-            </a:r>
-            <a:endParaRPr lang="en-US" sz="1000" dirty="0">
-              <a:latin typeface="メイリオ" panose="020B0604030504040204" pitchFamily="50" charset="-128"/>
-              <a:ea typeface="メイリオ" panose="020B0604030504040204" pitchFamily="50" charset="-128"/>
-            </a:endParaRPr>
-          </a:p>
-          <a:p>
-            <a:pPr marL="342900" indent="-342900">
-              <a:spcAft>
-                <a:spcPts val="700"/>
-              </a:spcAft>
-              <a:buSzPct val="100000"/>
-              <a:buChar char="•"/>
-            </a:pPr>
-            <a:r>
-              <a:rPr lang="en-US" sz="950" dirty="0">
-                <a:solidFill>
-                  <a:srgbClr val="222222"/>
-                </a:solidFill>
-                <a:latin typeface="メイリオ" panose="020B0604030504040204" pitchFamily="50" charset="-128"/>
-                <a:ea typeface="メイリオ" panose="020B0604030504040204" pitchFamily="50" charset="-128"/>
-                <a:cs typeface="Meiryo" pitchFamily="34" charset="-120"/>
-              </a:rPr>
-              <a:t>市北部（家之子・丘山方面）は事業所が少なく、送迎圏として狙える余地がある。</a:t>
-            </a:r>
-            <a:endParaRPr lang="en-US" sz="1000" dirty="0">
-              <a:latin typeface="メイリオ" panose="020B0604030504040204" pitchFamily="50" charset="-128"/>
-              <a:ea typeface="メイリオ" panose="020B0604030504040204" pitchFamily="50" charset="-128"/>
-            </a:endParaRPr>
-          </a:p>
-        </p:txBody>
-      </p:sp>
-    </p:spTree>
-  </p:cSld>
-  <p:clrMapOvr>
-    <a:masterClrMapping/>
-  </p:clrMapOvr>
-</p:sld>
-</file>
-
-<file path=ppt/slides/slide12.xml><?xml version="1.0" encoding="utf-8"?>
-<p:sld xmlns:a="http://schemas.openxmlformats.org/drawingml/2006/main" xmlns:r="http://schemas.openxmlformats.org/officeDocument/2006/relationships" xmlns:p="http://schemas.openxmlformats.org/presentationml/2006/main">
-  <p:cSld name="Slide 3">
-    <p:bg>
-      <p:bgPr>
-        <a:solidFill>
-          <a:srgbClr val="FFFFFF"/>
-        </a:solidFill>
-        <a:effectLst/>
-      </p:bgPr>
-    </p:bg>
-    <p:spTree>
-      <p:nvGrpSpPr>
-        <p:cNvPr id="1" name=""/>
-        <p:cNvGrpSpPr/>
-        <p:nvPr/>
-      </p:nvGrpSpPr>
-      <p:grpSpPr>
-        <a:xfrm>
-          <a:off x="0" y="0"/>
-          <a:ext cx="0" cy="0"/>
-          <a:chOff x="0" y="0"/>
-          <a:chExt cx="0" cy="0"/>
-        </a:xfrm>
-      </p:grpSpPr>
-      <p:sp>
-        <p:nvSpPr>
-          <p:cNvPr id="2" name="Shape 0"/>
-          <p:cNvSpPr/>
-          <p:nvPr/>
-        </p:nvSpPr>
-        <p:spPr>
-          <a:xfrm>
-            <a:off x="0" y="0"/>
-            <a:ext cx="12188952" cy="932688"/>
-          </a:xfrm>
-          <a:prstGeom prst="rect">
-            <a:avLst/>
-          </a:prstGeom>
-          <a:solidFill>
-            <a:srgbClr val="1B3A6B"/>
-          </a:solidFill>
-          <a:ln/>
-        </p:spPr>
-      </p:sp>
-      <p:sp>
-        <p:nvSpPr>
-          <p:cNvPr id="3" name="Shape 1"/>
-          <p:cNvSpPr/>
-          <p:nvPr/>
-        </p:nvSpPr>
-        <p:spPr>
-          <a:xfrm>
-            <a:off x="0" y="0"/>
-            <a:ext cx="164592" cy="932688"/>
-          </a:xfrm>
-          <a:prstGeom prst="rect">
-            <a:avLst/>
-          </a:prstGeom>
-          <a:solidFill>
-            <a:srgbClr val="13294B"/>
-          </a:solidFill>
-          <a:ln/>
-        </p:spPr>
-      </p:sp>
-      <p:sp>
-        <p:nvSpPr>
-          <p:cNvPr id="4" name="Text 2"/>
-          <p:cNvSpPr/>
-          <p:nvPr/>
-        </p:nvSpPr>
-        <p:spPr>
-          <a:xfrm>
-            <a:off x="502920" y="54864"/>
-            <a:ext cx="8686800" cy="822960"/>
-          </a:xfrm>
-          <a:prstGeom prst="rect">
-            <a:avLst/>
-          </a:prstGeom>
-          <a:noFill/>
-          <a:ln/>
-        </p:spPr>
-        <p:txBody>
-          <a:bodyPr wrap="square" lIns="0" tIns="0" rIns="0" bIns="0" rtlCol="0" anchor="ctr"/>
-          <a:lstStyle/>
-          <a:p>
-            <a:pPr marL="0" indent="0">
-              <a:buNone/>
-            </a:pPr>
-            <a:r>
-              <a:rPr lang="en-US" sz="3000" b="1" dirty="0">
-                <a:solidFill>
-                  <a:srgbClr val="FFFFFF"/>
-                </a:solidFill>
-                <a:latin typeface="Meiryo" pitchFamily="34" charset="0"/>
-                <a:ea typeface="Meiryo" pitchFamily="34" charset="-122"/>
-                <a:cs typeface="Meiryo" pitchFamily="34" charset="-120"/>
-              </a:rPr>
-              <a:t>II．　事業所別 詳細</a:t>
-            </a:r>
-            <a:endParaRPr lang="en-US" sz="3000" dirty="0"/>
-          </a:p>
-        </p:txBody>
-      </p:sp>
-      <p:sp>
-        <p:nvSpPr>
-          <p:cNvPr id="5" name="Text 3"/>
-          <p:cNvSpPr/>
-          <p:nvPr/>
-        </p:nvSpPr>
-        <p:spPr>
-          <a:xfrm>
-            <a:off x="502920" y="1115568"/>
-            <a:ext cx="8503920" cy="457200"/>
-          </a:xfrm>
-          <a:prstGeom prst="rect">
-            <a:avLst/>
-          </a:prstGeom>
-          <a:noFill/>
-          <a:ln/>
-        </p:spPr>
-        <p:txBody>
-          <a:bodyPr wrap="square" lIns="0" tIns="0" rIns="0" bIns="0" rtlCol="0" anchor="ctr"/>
-          <a:lstStyle/>
-          <a:p>
-            <a:pPr marL="0" indent="0">
-              <a:buNone/>
-            </a:pPr>
-            <a:r>
-              <a:rPr lang="en-US" sz="2100" b="1" dirty="0">
-                <a:solidFill>
-                  <a:srgbClr val="222222"/>
-                </a:solidFill>
-                <a:latin typeface="Meiryo" pitchFamily="34" charset="0"/>
-                <a:ea typeface="Meiryo" pitchFamily="34" charset="-122"/>
-                <a:cs typeface="Meiryo" pitchFamily="34" charset="-120"/>
-              </a:rPr>
-              <a:t>⑩ 鴇嶺の家</a:t>
-            </a:r>
-            <a:endParaRPr lang="en-US" sz="2100" dirty="0"/>
-          </a:p>
-        </p:txBody>
-      </p:sp>
-      <p:sp>
-        <p:nvSpPr>
-          <p:cNvPr id="6" name="Shape 4"/>
-          <p:cNvSpPr/>
-          <p:nvPr/>
-        </p:nvSpPr>
-        <p:spPr>
-          <a:xfrm>
-            <a:off x="10104120" y="1170432"/>
-            <a:ext cx="1600200" cy="457200"/>
-          </a:xfrm>
-          <a:prstGeom prst="rect">
-            <a:avLst/>
-          </a:prstGeom>
-          <a:solidFill>
-            <a:srgbClr val="FFFFFF"/>
-          </a:solidFill>
-          <a:ln w="15875">
-            <a:solidFill>
-              <a:srgbClr val="1B3A6B"/>
-            </a:solidFill>
-            <a:prstDash val="solid"/>
-          </a:ln>
-        </p:spPr>
-      </p:sp>
-      <p:sp>
-        <p:nvSpPr>
-          <p:cNvPr id="7" name="Text 5"/>
-          <p:cNvSpPr/>
-          <p:nvPr/>
-        </p:nvSpPr>
-        <p:spPr>
-          <a:xfrm>
-            <a:off x="10104120" y="1170432"/>
-            <a:ext cx="1600200" cy="457200"/>
-          </a:xfrm>
-          <a:prstGeom prst="rect">
-            <a:avLst/>
-          </a:prstGeom>
-          <a:noFill/>
-          <a:ln/>
-        </p:spPr>
-        <p:txBody>
-          <a:bodyPr wrap="square" lIns="0" tIns="0" rIns="0" bIns="0" rtlCol="0" anchor="ctr"/>
-          <a:lstStyle/>
-          <a:p>
-            <a:pPr marL="0" indent="0" algn="ctr">
-              <a:buNone/>
-            </a:pPr>
-            <a:r>
-              <a:rPr lang="en-US" sz="1400" b="1" dirty="0">
-                <a:solidFill>
-                  <a:srgbClr val="1B3A6B"/>
-                </a:solidFill>
-                <a:latin typeface="Meiryo" pitchFamily="34" charset="0"/>
-                <a:ea typeface="Meiryo" pitchFamily="34" charset="-122"/>
-                <a:cs typeface="Meiryo" pitchFamily="34" charset="-120"/>
-              </a:rPr>
-              <a:t>東金市</a:t>
-            </a:r>
-            <a:endParaRPr lang="en-US" sz="1400" dirty="0"/>
-          </a:p>
-        </p:txBody>
-      </p:sp>
-      <p:sp>
-        <p:nvSpPr>
-          <p:cNvPr id="8" name="Text 6"/>
-          <p:cNvSpPr/>
-          <p:nvPr/>
-        </p:nvSpPr>
-        <p:spPr>
-          <a:xfrm>
-            <a:off x="502920" y="6510528"/>
-            <a:ext cx="7315200" cy="274320"/>
-          </a:xfrm>
-          <a:prstGeom prst="rect">
-            <a:avLst/>
-          </a:prstGeom>
-          <a:noFill/>
-          <a:ln/>
-        </p:spPr>
-        <p:txBody>
-          <a:bodyPr wrap="square" lIns="0" tIns="0" rIns="0" bIns="0" rtlCol="0" anchor="ctr"/>
-          <a:lstStyle/>
-          <a:p>
-            <a:pPr marL="0" indent="0">
-              <a:buNone/>
-            </a:pPr>
-            <a:r>
-              <a:rPr lang="en-US" sz="850" dirty="0">
-                <a:solidFill>
-                  <a:srgbClr val="666666"/>
-                </a:solidFill>
-                <a:latin typeface="Meiryo" pitchFamily="34" charset="0"/>
-                <a:ea typeface="Meiryo" pitchFamily="34" charset="-122"/>
-                <a:cs typeface="Meiryo" pitchFamily="34" charset="-120"/>
-              </a:rPr>
-              <a:t>Copyright Funai Soken Group. All rights reserved.</a:t>
-            </a:r>
-            <a:endParaRPr lang="en-US" sz="850" dirty="0"/>
-          </a:p>
-        </p:txBody>
-      </p:sp>
-      <p:sp>
-        <p:nvSpPr>
-          <p:cNvPr id="9" name="Shape 7"/>
-          <p:cNvSpPr/>
-          <p:nvPr/>
-        </p:nvSpPr>
-        <p:spPr>
-          <a:xfrm>
-            <a:off x="502920" y="1783080"/>
-            <a:ext cx="6903720" cy="4434840"/>
-          </a:xfrm>
-          <a:prstGeom prst="rect">
-            <a:avLst/>
-          </a:prstGeom>
-          <a:solidFill>
-            <a:srgbClr val="FFFFFF"/>
-          </a:solidFill>
-          <a:ln w="12700">
-            <a:solidFill>
-              <a:srgbClr val="9AA7B8"/>
-            </a:solidFill>
-            <a:prstDash val="solid"/>
-          </a:ln>
-          <a:effectLst>
-            <a:outerShdw blurRad="63500" dist="25400" dir="8100000" algn="bl" rotWithShape="0">
-              <a:srgbClr val="000000">
-                <a:alpha val="12000"/>
-              </a:srgbClr>
-            </a:outerShdw>
-          </a:effectLst>
-        </p:spPr>
-      </p:sp>
-      <p:sp>
-        <p:nvSpPr>
-          <p:cNvPr id="10" name="Text 8"/>
-          <p:cNvSpPr/>
-          <p:nvPr/>
-        </p:nvSpPr>
-        <p:spPr>
-          <a:xfrm>
-            <a:off x="704088" y="1911096"/>
-            <a:ext cx="6501384" cy="384048"/>
-          </a:xfrm>
-          <a:prstGeom prst="rect">
-            <a:avLst/>
-          </a:prstGeom>
-          <a:noFill/>
-          <a:ln/>
-        </p:spPr>
-        <p:txBody>
-          <a:bodyPr wrap="square" lIns="0" tIns="0" rIns="0" bIns="0" rtlCol="0" anchor="ctr"/>
-          <a:lstStyle/>
-          <a:p>
-            <a:pPr marL="0" indent="0">
-              <a:buNone/>
-            </a:pPr>
-            <a:r>
-              <a:rPr lang="en-US" sz="1400" b="1" dirty="0">
-                <a:solidFill>
-                  <a:srgbClr val="1B3A6B"/>
-                </a:solidFill>
-                <a:latin typeface="Meiryo" pitchFamily="34" charset="0"/>
-                <a:ea typeface="Meiryo" pitchFamily="34" charset="-122"/>
-                <a:cs typeface="Meiryo" pitchFamily="34" charset="-120"/>
-              </a:rPr>
-              <a:t>鴇嶺の家（児童発達支援・放課後等デイサービス）</a:t>
-            </a:r>
-            <a:endParaRPr lang="en-US" sz="1400" dirty="0"/>
-          </a:p>
-        </p:txBody>
-      </p:sp>
-      <p:sp>
-        <p:nvSpPr>
-          <p:cNvPr id="11" name="Text 9"/>
-          <p:cNvSpPr/>
-          <p:nvPr/>
-        </p:nvSpPr>
-        <p:spPr>
-          <a:xfrm>
-            <a:off x="704088" y="2331720"/>
-            <a:ext cx="6501384" cy="3813048"/>
-          </a:xfrm>
-          <a:prstGeom prst="rect">
-            <a:avLst/>
-          </a:prstGeom>
-          <a:noFill/>
-          <a:ln/>
-        </p:spPr>
-        <p:txBody>
-          <a:bodyPr wrap="square" lIns="0" tIns="0" rIns="0" bIns="0" rtlCol="0" anchor="t"/>
-          <a:lstStyle/>
-          <a:p>
-            <a:pPr marL="0" indent="0">
-              <a:lnSpc>
-                <a:spcPct val="103000"/>
-              </a:lnSpc>
-              <a:buNone/>
-            </a:pPr>
-            <a:r>
-              <a:rPr lang="en-US" sz="1050" b="1" dirty="0">
-                <a:solidFill>
-                  <a:srgbClr val="2E6BB8"/>
-                </a:solidFill>
-                <a:latin typeface="Meiryo" pitchFamily="34" charset="0"/>
-                <a:ea typeface="Meiryo" pitchFamily="34" charset="-122"/>
-                <a:cs typeface="Meiryo" pitchFamily="34" charset="-120"/>
-              </a:rPr>
-              <a:t>▶</a:t>
-            </a:r>
-            <a:r>
-              <a:rPr lang="en-US" sz="1050" b="1" dirty="0">
-                <a:solidFill>
-                  <a:srgbClr val="222222"/>
-                </a:solidFill>
-                <a:latin typeface="Meiryo" pitchFamily="34" charset="0"/>
-                <a:ea typeface="Meiryo" pitchFamily="34" charset="-122"/>
-                <a:cs typeface="Meiryo" pitchFamily="34" charset="-120"/>
-              </a:rPr>
-              <a:t>対象：</a:t>
-            </a:r>
-            <a:r>
-              <a:rPr lang="en-US" sz="1050" dirty="0">
-                <a:solidFill>
-                  <a:srgbClr val="222222"/>
-                </a:solidFill>
-                <a:latin typeface="Meiryo" pitchFamily="34" charset="0"/>
-                <a:ea typeface="Meiryo" pitchFamily="34" charset="-122"/>
-                <a:cs typeface="Meiryo" pitchFamily="34" charset="-120"/>
-              </a:rPr>
-              <a:t>未就学児（児童発達支援）〜就学児（放課後等デイサービス）</a:t>
-            </a:r>
-            <a:endParaRPr lang="en-US" sz="1050" dirty="0"/>
-          </a:p>
-          <a:p>
-            <a:pPr marL="0" indent="0">
-              <a:lnSpc>
-                <a:spcPct val="103000"/>
-              </a:lnSpc>
-              <a:buNone/>
-            </a:pPr>
-            <a:r>
-              <a:rPr lang="en-US" sz="1050" b="1" dirty="0">
-                <a:solidFill>
-                  <a:srgbClr val="2E6BB8"/>
-                </a:solidFill>
-                <a:latin typeface="Meiryo" pitchFamily="34" charset="0"/>
-                <a:ea typeface="Meiryo" pitchFamily="34" charset="-122"/>
-                <a:cs typeface="Meiryo" pitchFamily="34" charset="-120"/>
-              </a:rPr>
-              <a:t>▶</a:t>
-            </a:r>
-            <a:r>
-              <a:rPr lang="en-US" sz="1050" b="1" dirty="0">
-                <a:solidFill>
-                  <a:srgbClr val="222222"/>
-                </a:solidFill>
-                <a:latin typeface="Meiryo" pitchFamily="34" charset="0"/>
-                <a:ea typeface="Meiryo" pitchFamily="34" charset="-122"/>
-                <a:cs typeface="Meiryo" pitchFamily="34" charset="-120"/>
-              </a:rPr>
-              <a:t>住所：</a:t>
-            </a:r>
-            <a:r>
-              <a:rPr lang="en-US" sz="1050" dirty="0">
-                <a:solidFill>
-                  <a:srgbClr val="222222"/>
-                </a:solidFill>
-                <a:latin typeface="Meiryo" pitchFamily="34" charset="0"/>
-                <a:ea typeface="Meiryo" pitchFamily="34" charset="-122"/>
-                <a:cs typeface="Meiryo" pitchFamily="34" charset="-120"/>
-              </a:rPr>
-              <a:t>千葉県東金市東金425-2</a:t>
-            </a:r>
-            <a:endParaRPr lang="en-US" sz="1050" dirty="0"/>
-          </a:p>
-          <a:p>
-            <a:pPr marL="0" indent="0">
-              <a:lnSpc>
-                <a:spcPct val="103000"/>
-              </a:lnSpc>
-              <a:buNone/>
-            </a:pPr>
-            <a:r>
-              <a:rPr lang="en-US" sz="1050" b="1" dirty="0">
-                <a:solidFill>
-                  <a:srgbClr val="2E6BB8"/>
-                </a:solidFill>
-                <a:latin typeface="Meiryo" pitchFamily="34" charset="0"/>
-                <a:ea typeface="Meiryo" pitchFamily="34" charset="-122"/>
-                <a:cs typeface="Meiryo" pitchFamily="34" charset="-120"/>
-              </a:rPr>
-              <a:t>▶</a:t>
-            </a:r>
-            <a:r>
-              <a:rPr lang="en-US" sz="1050" b="1" dirty="0">
-                <a:solidFill>
-                  <a:srgbClr val="222222"/>
-                </a:solidFill>
-                <a:latin typeface="Meiryo" pitchFamily="34" charset="0"/>
-                <a:ea typeface="Meiryo" pitchFamily="34" charset="-122"/>
-                <a:cs typeface="Meiryo" pitchFamily="34" charset="-120"/>
-              </a:rPr>
-              <a:t>TEL／HP：</a:t>
-            </a:r>
-            <a:r>
-              <a:rPr lang="en-US" sz="1050" dirty="0">
-                <a:solidFill>
-                  <a:srgbClr val="222222"/>
-                </a:solidFill>
-                <a:latin typeface="Meiryo" pitchFamily="34" charset="0"/>
-                <a:ea typeface="Meiryo" pitchFamily="34" charset="-122"/>
-                <a:cs typeface="Meiryo" pitchFamily="34" charset="-120"/>
-              </a:rPr>
-              <a:t>要確認（公開情報では下4桁「0285」までの記載にとどまる）／公開HPなし</a:t>
-            </a:r>
-            <a:endParaRPr lang="en-US" sz="1050" dirty="0"/>
-          </a:p>
-          <a:p>
-            <a:pPr marL="0" indent="0">
-              <a:lnSpc>
-                <a:spcPct val="103000"/>
-              </a:lnSpc>
-              <a:buNone/>
-            </a:pPr>
-            <a:r>
-              <a:rPr lang="en-US" sz="1050" b="1" dirty="0">
-                <a:solidFill>
-                  <a:srgbClr val="2E6BB8"/>
-                </a:solidFill>
-                <a:latin typeface="Meiryo" pitchFamily="34" charset="0"/>
-                <a:ea typeface="Meiryo" pitchFamily="34" charset="-122"/>
-                <a:cs typeface="Meiryo" pitchFamily="34" charset="-120"/>
-              </a:rPr>
-              <a:t>▶</a:t>
-            </a:r>
-            <a:r>
-              <a:rPr lang="en-US" sz="1050" b="1" dirty="0">
-                <a:solidFill>
-                  <a:srgbClr val="222222"/>
-                </a:solidFill>
-                <a:latin typeface="Meiryo" pitchFamily="34" charset="0"/>
-                <a:ea typeface="Meiryo" pitchFamily="34" charset="-122"/>
-                <a:cs typeface="Meiryo" pitchFamily="34" charset="-120"/>
-              </a:rPr>
-              <a:t>サービス提供時間／定員：</a:t>
-            </a:r>
-            <a:r>
-              <a:rPr lang="en-US" sz="1050" dirty="0">
-                <a:solidFill>
-                  <a:srgbClr val="222222"/>
-                </a:solidFill>
-                <a:latin typeface="Meiryo" pitchFamily="34" charset="0"/>
-                <a:ea typeface="Meiryo" pitchFamily="34" charset="-122"/>
-                <a:cs typeface="Meiryo" pitchFamily="34" charset="-120"/>
-              </a:rPr>
-              <a:t>いずれも要確認</a:t>
-            </a:r>
-            <a:endParaRPr lang="en-US" sz="1050" dirty="0"/>
-          </a:p>
-          <a:p>
-            <a:pPr marL="0" indent="0">
-              <a:lnSpc>
-                <a:spcPct val="103000"/>
-              </a:lnSpc>
-              <a:spcAft>
-                <a:spcPts val="500"/>
-              </a:spcAft>
-              <a:buNone/>
-            </a:pPr>
-            <a:endParaRPr lang="en-US" sz="1050" dirty="0"/>
-          </a:p>
-          <a:p>
-            <a:pPr marL="0" indent="0">
-              <a:lnSpc>
-                <a:spcPct val="103000"/>
-              </a:lnSpc>
-              <a:buNone/>
-            </a:pPr>
-            <a:r>
-              <a:rPr lang="en-US" sz="1050" b="1" dirty="0">
-                <a:solidFill>
-                  <a:srgbClr val="2E6BB8"/>
-                </a:solidFill>
-                <a:latin typeface="Meiryo" pitchFamily="34" charset="0"/>
-                <a:ea typeface="Meiryo" pitchFamily="34" charset="-122"/>
-                <a:cs typeface="Meiryo" pitchFamily="34" charset="-120"/>
-              </a:rPr>
-              <a:t>▶</a:t>
-            </a:r>
-            <a:r>
-              <a:rPr lang="en-US" sz="1050" b="1" dirty="0">
-                <a:solidFill>
-                  <a:srgbClr val="222222"/>
-                </a:solidFill>
-                <a:latin typeface="Meiryo" pitchFamily="34" charset="0"/>
-                <a:ea typeface="Meiryo" pitchFamily="34" charset="-122"/>
-                <a:cs typeface="Meiryo" pitchFamily="34" charset="-120"/>
-              </a:rPr>
-              <a:t>療育プログラムの特徴：</a:t>
-            </a:r>
-            <a:r>
-              <a:rPr lang="en-US" sz="1050" dirty="0">
-                <a:solidFill>
-                  <a:srgbClr val="222222"/>
-                </a:solidFill>
-                <a:latin typeface="Meiryo" pitchFamily="34" charset="0"/>
-                <a:ea typeface="Meiryo" pitchFamily="34" charset="-122"/>
-                <a:cs typeface="Meiryo" pitchFamily="34" charset="-120"/>
-              </a:rPr>
-              <a:t>児童発達支援と放課後等デイサービスを併設。プログラム内容は公開情報からは確認できず要確認。</a:t>
-            </a:r>
-            <a:endParaRPr lang="en-US" sz="1050" dirty="0"/>
-          </a:p>
-          <a:p>
-            <a:pPr marL="0" indent="0">
-              <a:lnSpc>
-                <a:spcPct val="103000"/>
-              </a:lnSpc>
-              <a:spcAft>
-                <a:spcPts val="500"/>
-              </a:spcAft>
-              <a:buNone/>
-            </a:pPr>
-            <a:r>
-              <a:rPr lang="en-US" sz="1050" dirty="0">
-                <a:solidFill>
-                  <a:srgbClr val="222222"/>
-                </a:solidFill>
-                <a:latin typeface="Meiryo" pitchFamily="34" charset="0"/>
-                <a:ea typeface="Meiryo" pitchFamily="34" charset="-122"/>
-                <a:cs typeface="Meiryo" pitchFamily="34" charset="-120"/>
-              </a:rPr>
-              <a:t>・東金地区（旧市街・鴇嶺小学校区）に立地し、学校からの通所導線が近い。</a:t>
-            </a:r>
-            <a:endParaRPr lang="en-US" sz="1050" dirty="0"/>
-          </a:p>
-          <a:p>
-            <a:pPr marL="0" indent="0">
-              <a:lnSpc>
-                <a:spcPct val="103000"/>
-              </a:lnSpc>
-              <a:spcAft>
-                <a:spcPts val="500"/>
-              </a:spcAft>
-              <a:buNone/>
-            </a:pPr>
-            <a:r>
-              <a:rPr lang="en-US" sz="1050" dirty="0">
-                <a:solidFill>
-                  <a:srgbClr val="222222"/>
-                </a:solidFill>
-                <a:latin typeface="Meiryo" pitchFamily="34" charset="0"/>
-                <a:ea typeface="Meiryo" pitchFamily="34" charset="-122"/>
-                <a:cs typeface="Meiryo" pitchFamily="34" charset="-120"/>
-              </a:rPr>
-              <a:t>・同一町域の東金723にスターワーク東金（放デイ）があり、東金駅東口エリアに事業所が集積。</a:t>
-            </a:r>
-            <a:endParaRPr lang="en-US" sz="1050" dirty="0"/>
-          </a:p>
-          <a:p>
-            <a:pPr marL="0" indent="0">
-              <a:lnSpc>
-                <a:spcPct val="103000"/>
-              </a:lnSpc>
-              <a:spcAft>
-                <a:spcPts val="500"/>
-              </a:spcAft>
-              <a:buNone/>
-            </a:pPr>
-            <a:endParaRPr lang="en-US" sz="1050" dirty="0"/>
-          </a:p>
-          <a:p>
-            <a:pPr marL="0" indent="0">
-              <a:lnSpc>
-                <a:spcPct val="103000"/>
-              </a:lnSpc>
-              <a:buNone/>
-            </a:pPr>
-            <a:r>
-              <a:rPr lang="en-US" sz="1050" b="1" dirty="0">
-                <a:solidFill>
-                  <a:srgbClr val="2E6BB8"/>
-                </a:solidFill>
-                <a:latin typeface="Meiryo" pitchFamily="34" charset="0"/>
-                <a:ea typeface="Meiryo" pitchFamily="34" charset="-122"/>
-                <a:cs typeface="Meiryo" pitchFamily="34" charset="-120"/>
-              </a:rPr>
-              <a:t>▶</a:t>
-            </a:r>
-            <a:r>
-              <a:rPr lang="en-US" sz="1050" b="1" dirty="0">
-                <a:solidFill>
-                  <a:srgbClr val="222222"/>
-                </a:solidFill>
-                <a:latin typeface="Meiryo" pitchFamily="34" charset="0"/>
-                <a:ea typeface="Meiryo" pitchFamily="34" charset="-122"/>
-                <a:cs typeface="Meiryo" pitchFamily="34" charset="-120"/>
-              </a:rPr>
-              <a:t>出典：</a:t>
-            </a:r>
-            <a:r>
-              <a:rPr lang="en-US" sz="1050" dirty="0">
-                <a:solidFill>
-                  <a:srgbClr val="222222"/>
-                </a:solidFill>
-                <a:latin typeface="Meiryo" pitchFamily="34" charset="0"/>
-                <a:ea typeface="Meiryo" pitchFamily="34" charset="-122"/>
-                <a:cs typeface="Meiryo" pitchFamily="34" charset="-120"/>
-              </a:rPr>
-              <a:t>東金市公式サイト／LITALICO発達ナビ 東金市 児童発達支援事業所一覧</a:t>
-            </a:r>
-            <a:endParaRPr lang="en-US" sz="1050" dirty="0"/>
-          </a:p>
-          <a:p>
-            <a:pPr marL="0" indent="0">
-              <a:lnSpc>
-                <a:spcPct val="103000"/>
-              </a:lnSpc>
-              <a:buNone/>
-            </a:pPr>
-            <a:r>
-              <a:rPr lang="en-US" sz="1050" b="1" dirty="0">
-                <a:solidFill>
-                  <a:srgbClr val="2E6BB8"/>
-                </a:solidFill>
-                <a:latin typeface="Meiryo" pitchFamily="34" charset="0"/>
-                <a:ea typeface="Meiryo" pitchFamily="34" charset="-122"/>
-                <a:cs typeface="Meiryo" pitchFamily="34" charset="-120"/>
-              </a:rPr>
-              <a:t>▶</a:t>
-            </a:r>
-            <a:r>
-              <a:rPr lang="en-US" sz="1050" b="1" dirty="0">
-                <a:solidFill>
-                  <a:srgbClr val="222222"/>
-                </a:solidFill>
-                <a:latin typeface="Meiryo" pitchFamily="34" charset="0"/>
-                <a:ea typeface="Meiryo" pitchFamily="34" charset="-122"/>
-                <a:cs typeface="Meiryo" pitchFamily="34" charset="-120"/>
-              </a:rPr>
-              <a:t>要確認事項：</a:t>
-            </a:r>
-            <a:r>
-              <a:rPr lang="en-US" sz="1050" dirty="0">
-                <a:solidFill>
-                  <a:srgbClr val="222222"/>
-                </a:solidFill>
-                <a:latin typeface="Meiryo" pitchFamily="34" charset="0"/>
-                <a:ea typeface="Meiryo" pitchFamily="34" charset="-122"/>
-                <a:cs typeface="Meiryo" pitchFamily="34" charset="-120"/>
-              </a:rPr>
-              <a:t>運営法人、正確な電話番号、定員、提供時間、プログラム内容　※公開情報がほぼ無い</a:t>
-            </a:r>
-            <a:endParaRPr lang="en-US" sz="1050" dirty="0"/>
-          </a:p>
-        </p:txBody>
-      </p:sp>
-      <p:sp>
-        <p:nvSpPr>
-          <p:cNvPr id="13" name="Text 11"/>
-          <p:cNvSpPr/>
-          <p:nvPr/>
-        </p:nvSpPr>
-        <p:spPr>
-          <a:xfrm>
-            <a:off x="7635240" y="1783080"/>
-            <a:ext cx="4069080" cy="2148840"/>
-          </a:xfrm>
-          <a:prstGeom prst="rect">
-            <a:avLst/>
-          </a:prstGeom>
-          <a:solidFill>
-            <a:srgbClr val="F4F6FA"/>
-          </a:solidFill>
-          <a:ln w="12700">
-            <a:solidFill>
-              <a:srgbClr val="9AA7B8"/>
-            </a:solidFill>
-            <a:prstDash val="dash"/>
-          </a:ln>
-        </p:spPr>
-        <p:txBody>
-          <a:bodyPr wrap="square" lIns="91440" tIns="45720" rIns="91440" bIns="45720" rtlCol="0" anchor="ctr"/>
-          <a:lstStyle/>
-          <a:p>
-            <a:pPr marL="0" indent="0" algn="ctr">
-              <a:lnSpc>
-                <a:spcPct val="110000"/>
-              </a:lnSpc>
-              <a:buNone/>
-            </a:pPr>
-            <a:r>
-              <a:rPr lang="en-US" sz="1200" b="1" dirty="0">
-                <a:solidFill>
-                  <a:srgbClr val="8A99AD"/>
-                </a:solidFill>
-                <a:latin typeface="Meiryo" pitchFamily="34" charset="0"/>
-                <a:ea typeface="Meiryo" pitchFamily="34" charset="-122"/>
-                <a:cs typeface="Meiryo" pitchFamily="34" charset="-120"/>
-              </a:rPr>
-              <a:t>［ 写真挿入エリア ］</a:t>
-            </a:r>
-            <a:endParaRPr lang="en-US" sz="1200" dirty="0"/>
-          </a:p>
-          <a:p>
-            <a:pPr marL="0" indent="0" algn="ctr">
-              <a:lnSpc>
-                <a:spcPct val="110000"/>
-              </a:lnSpc>
-              <a:buNone/>
-            </a:pPr>
-            <a:r>
-              <a:rPr lang="en-US" sz="950" dirty="0">
-                <a:solidFill>
-                  <a:srgbClr val="97A4B6"/>
-                </a:solidFill>
-                <a:latin typeface="Meiryo" pitchFamily="34" charset="0"/>
-                <a:ea typeface="Meiryo" pitchFamily="34" charset="-122"/>
-                <a:cs typeface="Meiryo" pitchFamily="34" charset="-120"/>
-              </a:rPr>
-              <a:t>（LITALICO発達ナビ／東金市公式の施設写真を挿入）</a:t>
-            </a:r>
-            <a:endParaRPr lang="en-US" sz="1200" dirty="0"/>
-          </a:p>
-        </p:txBody>
-      </p:sp>
-      <p:sp>
-        <p:nvSpPr>
-          <p:cNvPr id="14" name="Shape 12"/>
-          <p:cNvSpPr/>
-          <p:nvPr/>
-        </p:nvSpPr>
-        <p:spPr>
-          <a:xfrm>
-            <a:off x="7635240" y="4069080"/>
-            <a:ext cx="4069080" cy="2148840"/>
-          </a:xfrm>
-          <a:prstGeom prst="rect">
-            <a:avLst/>
-          </a:prstGeom>
-          <a:solidFill>
-            <a:srgbClr val="EEF2F8"/>
-          </a:solidFill>
-          <a:ln w="12700">
-            <a:solidFill>
-              <a:srgbClr val="9AA7B8"/>
-            </a:solidFill>
-            <a:prstDash val="solid"/>
-          </a:ln>
-        </p:spPr>
-      </p:sp>
-      <p:sp>
-        <p:nvSpPr>
-          <p:cNvPr id="15" name="Text 13"/>
-          <p:cNvSpPr/>
-          <p:nvPr/>
-        </p:nvSpPr>
-        <p:spPr>
-          <a:xfrm>
-            <a:off x="7818120" y="4187952"/>
-            <a:ext cx="3703320" cy="320040"/>
-          </a:xfrm>
-          <a:prstGeom prst="rect">
-            <a:avLst/>
-          </a:prstGeom>
-          <a:noFill/>
-          <a:ln/>
-        </p:spPr>
-        <p:txBody>
-          <a:bodyPr wrap="square" lIns="0" tIns="0" rIns="0" bIns="0" rtlCol="0" anchor="ctr"/>
-          <a:lstStyle/>
-          <a:p>
-            <a:pPr marL="0" indent="0">
-              <a:buNone/>
-            </a:pPr>
-            <a:r>
-              <a:rPr lang="en-US" sz="1250" b="1" dirty="0">
-                <a:solidFill>
-                  <a:srgbClr val="1B3A6B"/>
-                </a:solidFill>
-                <a:latin typeface="Meiryo" pitchFamily="34" charset="0"/>
-                <a:ea typeface="Meiryo" pitchFamily="34" charset="-122"/>
-                <a:cs typeface="Meiryo" pitchFamily="34" charset="-120"/>
-              </a:rPr>
-              <a:t>注目ポイント</a:t>
-            </a:r>
-            <a:endParaRPr lang="en-US" sz="1250" dirty="0"/>
-          </a:p>
-        </p:txBody>
-      </p:sp>
-      <p:sp>
-        <p:nvSpPr>
-          <p:cNvPr id="16" name="Text 14"/>
-          <p:cNvSpPr/>
-          <p:nvPr/>
-        </p:nvSpPr>
-        <p:spPr>
-          <a:xfrm>
-            <a:off x="7818120" y="4553712"/>
-            <a:ext cx="3703320" cy="1554480"/>
-          </a:xfrm>
-          <a:prstGeom prst="rect">
-            <a:avLst/>
-          </a:prstGeom>
-          <a:noFill/>
-          <a:ln/>
-        </p:spPr>
-        <p:txBody>
-          <a:bodyPr wrap="square" lIns="0" tIns="0" rIns="0" bIns="0" rtlCol="0" anchor="t"/>
-          <a:lstStyle/>
-          <a:p>
-            <a:pPr marL="342900" indent="-342900">
-              <a:spcAft>
-                <a:spcPts val="700"/>
-              </a:spcAft>
-              <a:buSzPct val="100000"/>
-              <a:buChar char="•"/>
-            </a:pPr>
-            <a:r>
-              <a:rPr lang="en-US" sz="950" dirty="0">
-                <a:solidFill>
-                  <a:srgbClr val="222222"/>
-                </a:solidFill>
-                <a:latin typeface="メイリオ" panose="020B0604030504040204" pitchFamily="50" charset="-128"/>
-                <a:ea typeface="メイリオ" panose="020B0604030504040204" pitchFamily="50" charset="-128"/>
-                <a:cs typeface="Meiryo" pitchFamily="34" charset="-120"/>
-              </a:rPr>
-              <a:t>鴇嶺小学校区の中心部に位置し、学区内からの徒歩・短距離送迎に適した立地。</a:t>
-            </a:r>
-            <a:endParaRPr lang="en-US" sz="1000" dirty="0">
-              <a:latin typeface="メイリオ" panose="020B0604030504040204" pitchFamily="50" charset="-128"/>
-              <a:ea typeface="メイリオ" panose="020B0604030504040204" pitchFamily="50" charset="-128"/>
-            </a:endParaRPr>
-          </a:p>
-          <a:p>
-            <a:pPr marL="342900" indent="-342900">
-              <a:spcAft>
-                <a:spcPts val="700"/>
-              </a:spcAft>
-              <a:buSzPct val="100000"/>
-              <a:buChar char="•"/>
-            </a:pPr>
-            <a:r>
-              <a:rPr lang="en-US" sz="950" dirty="0">
-                <a:solidFill>
-                  <a:srgbClr val="222222"/>
-                </a:solidFill>
-                <a:latin typeface="メイリオ" panose="020B0604030504040204" pitchFamily="50" charset="-128"/>
-                <a:ea typeface="メイリオ" panose="020B0604030504040204" pitchFamily="50" charset="-128"/>
-                <a:cs typeface="Meiryo" pitchFamily="34" charset="-120"/>
-              </a:rPr>
-              <a:t>東金駅東口エリアの事業所集積地にあり、競合との距離が近い。</a:t>
-            </a:r>
-            <a:endParaRPr lang="en-US" sz="1000" dirty="0">
-              <a:latin typeface="メイリオ" panose="020B0604030504040204" pitchFamily="50" charset="-128"/>
-              <a:ea typeface="メイリオ" panose="020B0604030504040204" pitchFamily="50" charset="-128"/>
-            </a:endParaRPr>
-          </a:p>
-          <a:p>
-            <a:pPr marL="342900" indent="-342900">
-              <a:spcAft>
-                <a:spcPts val="700"/>
-              </a:spcAft>
-              <a:buSzPct val="100000"/>
-              <a:buChar char="•"/>
-            </a:pPr>
-            <a:r>
-              <a:rPr lang="en-US" sz="950" dirty="0">
-                <a:solidFill>
-                  <a:srgbClr val="222222"/>
-                </a:solidFill>
-                <a:latin typeface="メイリオ" panose="020B0604030504040204" pitchFamily="50" charset="-128"/>
-                <a:ea typeface="メイリオ" panose="020B0604030504040204" pitchFamily="50" charset="-128"/>
-                <a:cs typeface="Meiryo" pitchFamily="34" charset="-120"/>
-              </a:rPr>
-              <a:t>情報発信が乏しく、実態把握は市社会福祉課・相談支援事業所経由での確認が現実的。</a:t>
-            </a:r>
-            <a:endParaRPr lang="en-US" sz="1000" dirty="0">
-              <a:latin typeface="メイリオ" panose="020B0604030504040204" pitchFamily="50" charset="-128"/>
-              <a:ea typeface="メイリオ" panose="020B0604030504040204" pitchFamily="50" charset="-128"/>
-            </a:endParaRPr>
-          </a:p>
-          <a:p>
-            <a:pPr marL="342900" indent="-342900">
-              <a:spcAft>
-                <a:spcPts val="700"/>
-              </a:spcAft>
-              <a:buSzPct val="100000"/>
-              <a:buChar char="•"/>
-            </a:pPr>
-            <a:r>
-              <a:rPr lang="en-US" sz="950" dirty="0">
-                <a:solidFill>
-                  <a:srgbClr val="222222"/>
-                </a:solidFill>
-                <a:latin typeface="メイリオ" panose="020B0604030504040204" pitchFamily="50" charset="-128"/>
-                <a:ea typeface="メイリオ" panose="020B0604030504040204" pitchFamily="50" charset="-128"/>
-                <a:cs typeface="Meiryo" pitchFamily="34" charset="-120"/>
-              </a:rPr>
-              <a:t>東金駅東口は事業所集積地。新規参入するなら駅前以外の空白地を狙うのが現実的。</a:t>
-            </a:r>
-            <a:endParaRPr lang="en-US" sz="1000" dirty="0">
-              <a:latin typeface="メイリオ" panose="020B0604030504040204" pitchFamily="50" charset="-128"/>
-              <a:ea typeface="メイリオ" panose="020B0604030504040204" pitchFamily="50" charset="-128"/>
-            </a:endParaRPr>
-          </a:p>
-        </p:txBody>
-      </p:sp>
-    </p:spTree>
-  </p:cSld>
-  <p:clrMapOvr>
-    <a:masterClrMapping/>
-  </p:clrMapOvr>
-</p:sld>
-</file>
-
-<file path=ppt/slides/slide13.xml><?xml version="1.0" encoding="utf-8"?>
 <p:sld xmlns:a="http://schemas.openxmlformats.org/drawingml/2006/main" xmlns:r="http://schemas.openxmlformats.org/officeDocument/2006/relationships" xmlns:p="http://schemas.openxmlformats.org/presentationml/2006/main">
   <p:cSld name="Slide 7">
     <p:bg>
@@ -5491,7 +3542,7 @@
                           <a:ea typeface="Meiryo" pitchFamily="34" charset="-122"/>
                           <a:cs typeface="Meiryo" pitchFamily="34" charset="-120"/>
                         </a:rPr>
-                        <a:t>子ども支援センター（まあちる／ぽけっと）</a:t>
+                        <a:t>子ども支援センター まあちる</a:t>
                       </a:r>
                       <a:endParaRPr lang="en-US" sz="1050" dirty="0">
                         <a:latin typeface="Meiryo" charset="0"/>
@@ -5556,7 +3607,7 @@
                           <a:ea typeface="Meiryo" pitchFamily="34" charset="-122"/>
                           <a:cs typeface="Meiryo" pitchFamily="34" charset="-120"/>
                         </a:rPr>
-                        <a:t>2</a:t>
+                        <a:t>1</a:t>
                       </a:r>
                       <a:endParaRPr lang="en-US" sz="1050" dirty="0">
                         <a:latin typeface="Meiryo" charset="0"/>
@@ -5621,7 +3672,7 @@
                           <a:ea typeface="Meiryo" pitchFamily="34" charset="-122"/>
                           <a:cs typeface="Meiryo" pitchFamily="34" charset="-120"/>
                         </a:rPr>
-                        <a:t>民間・年齢分離型</a:t>
+                        <a:t>民間・未就学〜小学生</a:t>
                       </a:r>
                       <a:endParaRPr lang="en-US" sz="1050" dirty="0">
                         <a:latin typeface="Meiryo" charset="0"/>
@@ -5686,7 +3737,7 @@
                           <a:ea typeface="Meiryo" pitchFamily="34" charset="-122"/>
                           <a:cs typeface="Meiryo" pitchFamily="34" charset="-120"/>
                         </a:rPr>
-                        <a:t>まあちる＝主に2〜12歳（火〜土）、ぽけっと＝主に6〜18歳（月〜土）</a:t>
+                        <a:t>在籍は主に2〜12歳。火曜〜土曜 9:00〜18:00</a:t>
                       </a:r>
                       <a:endParaRPr lang="en-US" sz="1050" dirty="0">
                         <a:latin typeface="Meiryo" charset="0"/>
@@ -5751,7 +3802,7 @@
                           <a:ea typeface="Meiryo" pitchFamily="34" charset="-122"/>
                           <a:cs typeface="Meiryo" pitchFamily="34" charset="-120"/>
                         </a:rPr>
-                        <a:t>東岩崎・東上宿</a:t>
+                        <a:t>東岩崎（東金駅至近）</a:t>
                       </a:r>
                       <a:endParaRPr lang="en-US" sz="1050" dirty="0">
                         <a:latin typeface="Meiryo" charset="0"/>
@@ -6487,7 +4538,7 @@
                           <a:ea typeface="Meiryo" pitchFamily="34" charset="-122"/>
                           <a:cs typeface="Meiryo" pitchFamily="34" charset="-120"/>
                         </a:rPr>
-                        <a:t>果実の木求名／コンパッション保育所／鴇嶺の家</a:t>
+                        <a:t>果実の木求名／鴇嶺の家</a:t>
                       </a:r>
                       <a:endParaRPr lang="en-US" sz="1050" dirty="0">
                         <a:latin typeface="Meiryo" charset="0"/>
@@ -6552,7 +4603,7 @@
                           <a:ea typeface="Meiryo" pitchFamily="34" charset="-122"/>
                           <a:cs typeface="Meiryo" pitchFamily="34" charset="-120"/>
                         </a:rPr>
-                        <a:t>3</a:t>
+                        <a:t>2</a:t>
                       </a:r>
                       <a:endParaRPr lang="en-US" sz="1050" dirty="0">
                         <a:latin typeface="Meiryo" charset="0"/>
@@ -6682,7 +4733,7 @@
                           <a:ea typeface="Meiryo" pitchFamily="34" charset="-122"/>
                           <a:cs typeface="Meiryo" pitchFamily="34" charset="-120"/>
                         </a:rPr>
-                        <a:t>求名駅圏・市北部・旧市街にそれぞれ立地。公開情報が乏しく要確認</a:t>
+                        <a:t>求名駅圏・旧市街にそれぞれ立地。公開情報が乏しく要確認</a:t>
                       </a:r>
                       <a:endParaRPr lang="en-US" sz="1050" dirty="0">
                         <a:latin typeface="Meiryo" charset="0"/>
@@ -6747,7 +4798,7 @@
                           <a:ea typeface="Meiryo" pitchFamily="34" charset="-122"/>
                           <a:cs typeface="Meiryo" pitchFamily="34" charset="-120"/>
                         </a:rPr>
-                        <a:t>求名・家之子・東金</a:t>
+                        <a:t>求名・東金</a:t>
                       </a:r>
                       <a:endParaRPr lang="en-US" sz="1050" dirty="0">
                         <a:latin typeface="Meiryo" charset="0"/>
@@ -6906,7 +4957,7 @@
                 <a:ea typeface="メイリオ" panose="020B0604030504040204" pitchFamily="50" charset="-128"/>
                 <a:cs typeface="Meiryo" pitchFamily="34" charset="-120"/>
               </a:rPr>
-              <a:t>東金市の児童発達支援は【公立1＋民間7運営主体／計16拠点】。基本塾6・ベストグロウ2・子ども支援センター2・エスポワール2と、上位4グループで市内拠点の四分の三を押さえる寡占構造にある。</a:t>
+              <a:t>東金市の児童発達支援は【公立1＋民間6運営主体／計14拠点】。基本塾6・ベストグロウ2・エスポワール2と、上位3グループで市内拠点の約7割を押さえる寡占構造にある。</a:t>
             </a:r>
             <a:endParaRPr lang="en-US" sz="1000" dirty="0">
               <a:latin typeface="メイリオ" panose="020B0604030504040204" pitchFamily="50" charset="-128"/>
@@ -6954,7 +5005,7 @@
                 <a:ea typeface="メイリオ" panose="020B0604030504040204" pitchFamily="50" charset="-128"/>
                 <a:cs typeface="Meiryo" pitchFamily="34" charset="-120"/>
               </a:rPr>
-              <a:t>子ども支援センターは まあちる（主に2〜12歳）と ぽけっと（主に6〜18歳）で年齢帯を分ける2拠点運営。市内で未就学の受け皿を明確に担うのは 公立①・まあちる②・こどもプラス④⑤・基本塾⑥ が中心。</a:t>
+              <a:t>市内で未就学の受け皿を明確に担うのは 公立①・まあちる②・こどもプラス③④・基本塾⑤ が中心。単独運営の②は在籍が主に2〜12歳で、未就学から小学生までを一貫して見る設計。</a:t>
             </a:r>
             <a:endParaRPr lang="en-US" sz="1000" dirty="0">
               <a:latin typeface="メイリオ" panose="020B0604030504040204" pitchFamily="50" charset="-128"/>
@@ -7002,7 +5053,7 @@
                 <a:ea typeface="メイリオ" panose="020B0604030504040204" pitchFamily="50" charset="-128"/>
                 <a:cs typeface="Meiryo" pitchFamily="34" charset="-120"/>
               </a:rPr>
-              <a:t>公開情報が乏しい事業所（⑦⑧⑨⑩）が4件あり、稼働率・空き枠・運営法人は市社会福祉課および相談支援事業所へのヒアリングで補完が必要。</a:t>
+              <a:t>公開情報が乏しい事業所（⑥⑦⑧）が3件あり、稼働率・空き枠・運営法人は市社会福祉課および相談支援事業所へのヒアリングで補完が必要。</a:t>
             </a:r>
             <a:endParaRPr lang="en-US" sz="1000" dirty="0">
               <a:latin typeface="メイリオ" panose="020B0604030504040204" pitchFamily="50" charset="-128"/>
@@ -7117,7 +5168,7 @@
                 <a:ea typeface="Meiryo" pitchFamily="34" charset="-122"/>
                 <a:cs typeface="Meiryo" pitchFamily="34" charset="-120"/>
               </a:rPr>
-              <a:t>■ 東金市内の児童発達支援事業所　全16拠点（運営主体8）</a:t>
+              <a:t>■ 東金市内の児童発達支援事業所　全14拠点（運営主体7）</a:t>
             </a:r>
             <a:endParaRPr lang="en-US" sz="2100" dirty="0"/>
           </a:p>
@@ -7178,7 +5229,7 @@
         </p:nvGraphicFramePr>
         <p:xfrm>
           <a:off x="502920" y="1719072"/>
-          <a:ext cx="11201400" cy="4096512"/>
+          <a:ext cx="11201400" cy="4041648"/>
         </p:xfrm>
         <a:graphic>
           <a:graphicData uri="http://schemas.openxmlformats.org/drawingml/2006/table">
@@ -7228,7 +5279,7 @@
                   </a:extLst>
                 </a:gridCol>
               </a:tblGrid>
-              <a:tr h="240971">
+              <a:tr h="269443">
                 <a:tc>
                   <a:txBody>
                     <a:bodyPr/>
@@ -7643,7 +5694,7 @@
                   </a:ext>
                 </a:extLst>
               </a:tr>
-              <a:tr h="240971">
+              <a:tr h="269443">
                 <a:tc>
                   <a:txBody>
                     <a:bodyPr/>
@@ -8036,7 +6087,7 @@
                   </a:ext>
                 </a:extLst>
               </a:tr>
-              <a:tr h="240971">
+              <a:tr h="269443">
                 <a:tc>
                   <a:txBody>
                     <a:bodyPr/>
@@ -8429,7 +6480,7 @@
                   </a:ext>
                 </a:extLst>
               </a:tr>
-              <a:tr h="240971">
+              <a:tr h="269443">
                 <a:tc>
                   <a:txBody>
                     <a:bodyPr/>
@@ -8448,399 +6499,6 @@
                           <a:cs typeface="Meiryo" pitchFamily="34" charset="-120"/>
                         </a:rPr>
                         <a:t>③</a:t>
-                      </a:r>
-                      <a:endParaRPr lang="en-US" sz="1100" dirty="0">
-                        <a:latin typeface="Meiryo" charset="0"/>
-                        <a:ea typeface="Meiryo" charset="0"/>
-                        <a:cs typeface="Meiryo" charset="0"/>
-                      </a:endParaRPr>
-                    </a:p>
-                  </a:txBody>
-                  <a:tcPr anchor="ctr" marT="18000" marB="18000" marL="64008" marR="45720">
-                    <a:lnL w="9525" cap="flat" cmpd="sng" algn="ctr">
-                      <a:solidFill>
-                        <a:srgbClr val="BFBFBF"/>
-                      </a:solidFill>
-                      <a:prstDash val="solid"/>
-                      <a:round/>
-                      <a:headEnd type="none" w="med" len="med"/>
-                      <a:tailEnd type="none" w="med" len="med"/>
-                    </a:lnL>
-                    <a:lnR w="9525" cap="flat" cmpd="sng" algn="ctr">
-                      <a:solidFill>
-                        <a:srgbClr val="BFBFBF"/>
-                      </a:solidFill>
-                      <a:prstDash val="solid"/>
-                      <a:round/>
-                      <a:headEnd type="none" w="med" len="med"/>
-                      <a:tailEnd type="none" w="med" len="med"/>
-                    </a:lnR>
-                    <a:lnT w="9525" cap="flat" cmpd="sng" algn="ctr">
-                      <a:solidFill>
-                        <a:srgbClr val="BFBFBF"/>
-                      </a:solidFill>
-                      <a:prstDash val="solid"/>
-                      <a:round/>
-                      <a:headEnd type="none" w="med" len="med"/>
-                      <a:tailEnd type="none" w="med" len="med"/>
-                    </a:lnT>
-                    <a:lnB w="9525" cap="flat" cmpd="sng" algn="ctr">
-                      <a:solidFill>
-                        <a:srgbClr val="BFBFBF"/>
-                      </a:solidFill>
-                      <a:prstDash val="solid"/>
-                      <a:round/>
-                      <a:headEnd type="none" w="med" len="med"/>
-                      <a:tailEnd type="none" w="med" len="med"/>
-                    </a:lnB>
-                  </a:tcPr>
-                </a:tc>
-                <a:tc>
-                  <a:txBody>
-                    <a:bodyPr/>
-                    <a:lstStyle/>
-                    <a:p>
-                      <a:pPr marL="0" indent="0" algn="l">
-                        <a:buNone/>
-                      </a:pPr>
-                      <a:r>
-                        <a:rPr lang="en-US" sz="800" b="1" dirty="0">
-                          <a:solidFill>
-                            <a:srgbClr val="222222"/>
-                          </a:solidFill>
-                          <a:latin typeface="Meiryo" pitchFamily="34" charset="0"/>
-                          <a:ea typeface="Meiryo" pitchFamily="34" charset="-122"/>
-                          <a:cs typeface="Meiryo" pitchFamily="34" charset="-120"/>
-                        </a:rPr>
-                        <a:t>子ども支援センター ぽけっと</a:t>
-                      </a:r>
-                      <a:endParaRPr lang="en-US" sz="1100" dirty="0">
-                        <a:latin typeface="Meiryo" charset="0"/>
-                        <a:ea typeface="Meiryo" charset="0"/>
-                        <a:cs typeface="Meiryo" charset="0"/>
-                      </a:endParaRPr>
-                    </a:p>
-                  </a:txBody>
-                  <a:tcPr anchor="ctr" marT="18000" marB="18000" marL="64008" marR="45720">
-                    <a:lnL w="9525" cap="flat" cmpd="sng" algn="ctr">
-                      <a:solidFill>
-                        <a:srgbClr val="BFBFBF"/>
-                      </a:solidFill>
-                      <a:prstDash val="solid"/>
-                      <a:round/>
-                      <a:headEnd type="none" w="med" len="med"/>
-                      <a:tailEnd type="none" w="med" len="med"/>
-                    </a:lnL>
-                    <a:lnR w="9525" cap="flat" cmpd="sng" algn="ctr">
-                      <a:solidFill>
-                        <a:srgbClr val="BFBFBF"/>
-                      </a:solidFill>
-                      <a:prstDash val="solid"/>
-                      <a:round/>
-                      <a:headEnd type="none" w="med" len="med"/>
-                      <a:tailEnd type="none" w="med" len="med"/>
-                    </a:lnR>
-                    <a:lnT w="9525" cap="flat" cmpd="sng" algn="ctr">
-                      <a:solidFill>
-                        <a:srgbClr val="BFBFBF"/>
-                      </a:solidFill>
-                      <a:prstDash val="solid"/>
-                      <a:round/>
-                      <a:headEnd type="none" w="med" len="med"/>
-                      <a:tailEnd type="none" w="med" len="med"/>
-                    </a:lnT>
-                    <a:lnB w="9525" cap="flat" cmpd="sng" algn="ctr">
-                      <a:solidFill>
-                        <a:srgbClr val="BFBFBF"/>
-                      </a:solidFill>
-                      <a:prstDash val="solid"/>
-                      <a:round/>
-                      <a:headEnd type="none" w="med" len="med"/>
-                      <a:tailEnd type="none" w="med" len="med"/>
-                    </a:lnB>
-                  </a:tcPr>
-                </a:tc>
-                <a:tc>
-                  <a:txBody>
-                    <a:bodyPr/>
-                    <a:lstStyle/>
-                    <a:p>
-                      <a:pPr marL="0" indent="0" algn="l">
-                        <a:buNone/>
-                      </a:pPr>
-                      <a:r>
-                        <a:rPr lang="en-US" sz="800" dirty="0">
-                          <a:solidFill>
-                            <a:srgbClr val="222222"/>
-                          </a:solidFill>
-                          <a:latin typeface="Meiryo" pitchFamily="34" charset="0"/>
-                          <a:ea typeface="Meiryo" pitchFamily="34" charset="-122"/>
-                          <a:cs typeface="Meiryo" pitchFamily="34" charset="-120"/>
-                        </a:rPr>
-                        <a:t>子ども支援センター（要確認）</a:t>
-                      </a:r>
-                      <a:endParaRPr lang="en-US" sz="1100" dirty="0">
-                        <a:latin typeface="Meiryo" charset="0"/>
-                        <a:ea typeface="Meiryo" charset="0"/>
-                        <a:cs typeface="Meiryo" charset="0"/>
-                      </a:endParaRPr>
-                    </a:p>
-                  </a:txBody>
-                  <a:tcPr anchor="ctr" marT="18000" marB="18000" marL="64008" marR="45720">
-                    <a:lnL w="9525" cap="flat" cmpd="sng" algn="ctr">
-                      <a:solidFill>
-                        <a:srgbClr val="BFBFBF"/>
-                      </a:solidFill>
-                      <a:prstDash val="solid"/>
-                      <a:round/>
-                      <a:headEnd type="none" w="med" len="med"/>
-                      <a:tailEnd type="none" w="med" len="med"/>
-                    </a:lnL>
-                    <a:lnR w="9525" cap="flat" cmpd="sng" algn="ctr">
-                      <a:solidFill>
-                        <a:srgbClr val="BFBFBF"/>
-                      </a:solidFill>
-                      <a:prstDash val="solid"/>
-                      <a:round/>
-                      <a:headEnd type="none" w="med" len="med"/>
-                      <a:tailEnd type="none" w="med" len="med"/>
-                    </a:lnR>
-                    <a:lnT w="9525" cap="flat" cmpd="sng" algn="ctr">
-                      <a:solidFill>
-                        <a:srgbClr val="BFBFBF"/>
-                      </a:solidFill>
-                      <a:prstDash val="solid"/>
-                      <a:round/>
-                      <a:headEnd type="none" w="med" len="med"/>
-                      <a:tailEnd type="none" w="med" len="med"/>
-                    </a:lnT>
-                    <a:lnB w="9525" cap="flat" cmpd="sng" algn="ctr">
-                      <a:solidFill>
-                        <a:srgbClr val="BFBFBF"/>
-                      </a:solidFill>
-                      <a:prstDash val="solid"/>
-                      <a:round/>
-                      <a:headEnd type="none" w="med" len="med"/>
-                      <a:tailEnd type="none" w="med" len="med"/>
-                    </a:lnB>
-                  </a:tcPr>
-                </a:tc>
-                <a:tc>
-                  <a:txBody>
-                    <a:bodyPr/>
-                    <a:lstStyle/>
-                    <a:p>
-                      <a:pPr marL="0" indent="0" algn="l">
-                        <a:buNone/>
-                      </a:pPr>
-                      <a:r>
-                        <a:rPr lang="en-US" sz="800" dirty="0">
-                          <a:solidFill>
-                            <a:srgbClr val="222222"/>
-                          </a:solidFill>
-                          <a:latin typeface="Meiryo" pitchFamily="34" charset="0"/>
-                          <a:ea typeface="Meiryo" pitchFamily="34" charset="-122"/>
-                          <a:cs typeface="Meiryo" pitchFamily="34" charset="-120"/>
-                        </a:rPr>
-                        <a:t>東上宿6番地2</a:t>
-                      </a:r>
-                      <a:endParaRPr lang="en-US" sz="1100" dirty="0">
-                        <a:latin typeface="Meiryo" charset="0"/>
-                        <a:ea typeface="Meiryo" charset="0"/>
-                        <a:cs typeface="Meiryo" charset="0"/>
-                      </a:endParaRPr>
-                    </a:p>
-                  </a:txBody>
-                  <a:tcPr anchor="ctr" marT="18000" marB="18000" marL="64008" marR="45720">
-                    <a:lnL w="9525" cap="flat" cmpd="sng" algn="ctr">
-                      <a:solidFill>
-                        <a:srgbClr val="BFBFBF"/>
-                      </a:solidFill>
-                      <a:prstDash val="solid"/>
-                      <a:round/>
-                      <a:headEnd type="none" w="med" len="med"/>
-                      <a:tailEnd type="none" w="med" len="med"/>
-                    </a:lnL>
-                    <a:lnR w="9525" cap="flat" cmpd="sng" algn="ctr">
-                      <a:solidFill>
-                        <a:srgbClr val="BFBFBF"/>
-                      </a:solidFill>
-                      <a:prstDash val="solid"/>
-                      <a:round/>
-                      <a:headEnd type="none" w="med" len="med"/>
-                      <a:tailEnd type="none" w="med" len="med"/>
-                    </a:lnR>
-                    <a:lnT w="9525" cap="flat" cmpd="sng" algn="ctr">
-                      <a:solidFill>
-                        <a:srgbClr val="BFBFBF"/>
-                      </a:solidFill>
-                      <a:prstDash val="solid"/>
-                      <a:round/>
-                      <a:headEnd type="none" w="med" len="med"/>
-                      <a:tailEnd type="none" w="med" len="med"/>
-                    </a:lnT>
-                    <a:lnB w="9525" cap="flat" cmpd="sng" algn="ctr">
-                      <a:solidFill>
-                        <a:srgbClr val="BFBFBF"/>
-                      </a:solidFill>
-                      <a:prstDash val="solid"/>
-                      <a:round/>
-                      <a:headEnd type="none" w="med" len="med"/>
-                      <a:tailEnd type="none" w="med" len="med"/>
-                    </a:lnB>
-                  </a:tcPr>
-                </a:tc>
-                <a:tc>
-                  <a:txBody>
-                    <a:bodyPr/>
-                    <a:lstStyle/>
-                    <a:p>
-                      <a:pPr marL="0" indent="0" algn="l">
-                        <a:buNone/>
-                      </a:pPr>
-                      <a:r>
-                        <a:rPr lang="en-US" sz="800" dirty="0">
-                          <a:solidFill>
-                            <a:srgbClr val="222222"/>
-                          </a:solidFill>
-                          <a:latin typeface="Meiryo" pitchFamily="34" charset="0"/>
-                          <a:ea typeface="Meiryo" pitchFamily="34" charset="-122"/>
-                          <a:cs typeface="Meiryo" pitchFamily="34" charset="-120"/>
-                        </a:rPr>
-                        <a:t>0475-50-1081</a:t>
-                      </a:r>
-                      <a:endParaRPr lang="en-US" sz="1100" dirty="0">
-                        <a:latin typeface="Meiryo" charset="0"/>
-                        <a:ea typeface="Meiryo" charset="0"/>
-                        <a:cs typeface="Meiryo" charset="0"/>
-                      </a:endParaRPr>
-                    </a:p>
-                  </a:txBody>
-                  <a:tcPr anchor="ctr" marT="18000" marB="18000" marL="64008" marR="45720">
-                    <a:lnL w="9525" cap="flat" cmpd="sng" algn="ctr">
-                      <a:solidFill>
-                        <a:srgbClr val="BFBFBF"/>
-                      </a:solidFill>
-                      <a:prstDash val="solid"/>
-                      <a:round/>
-                      <a:headEnd type="none" w="med" len="med"/>
-                      <a:tailEnd type="none" w="med" len="med"/>
-                    </a:lnL>
-                    <a:lnR w="9525" cap="flat" cmpd="sng" algn="ctr">
-                      <a:solidFill>
-                        <a:srgbClr val="BFBFBF"/>
-                      </a:solidFill>
-                      <a:prstDash val="solid"/>
-                      <a:round/>
-                      <a:headEnd type="none" w="med" len="med"/>
-                      <a:tailEnd type="none" w="med" len="med"/>
-                    </a:lnR>
-                    <a:lnT w="9525" cap="flat" cmpd="sng" algn="ctr">
-                      <a:solidFill>
-                        <a:srgbClr val="BFBFBF"/>
-                      </a:solidFill>
-                      <a:prstDash val="solid"/>
-                      <a:round/>
-                      <a:headEnd type="none" w="med" len="med"/>
-                      <a:tailEnd type="none" w="med" len="med"/>
-                    </a:lnT>
-                    <a:lnB w="9525" cap="flat" cmpd="sng" algn="ctr">
-                      <a:solidFill>
-                        <a:srgbClr val="BFBFBF"/>
-                      </a:solidFill>
-                      <a:prstDash val="solid"/>
-                      <a:round/>
-                      <a:headEnd type="none" w="med" len="med"/>
-                      <a:tailEnd type="none" w="med" len="med"/>
-                    </a:lnB>
-                  </a:tcPr>
-                </a:tc>
-                <a:tc>
-                  <a:txBody>
-                    <a:bodyPr/>
-                    <a:lstStyle/>
-                    <a:p>
-                      <a:pPr marL="0" indent="0" algn="l">
-                        <a:buNone/>
-                      </a:pPr>
-                      <a:r>
-                        <a:rPr lang="en-US" sz="800" dirty="0" u="sng">
-                          <a:solidFill>
-                            <a:srgbClr val="1F5FA8"/>
-                          </a:solidFill>
-                          <a:latin typeface="Meiryo" charset="0"/>
-                          <a:ea typeface="Meiryo" charset="0"/>
-                          <a:cs typeface="Meiryo" charset="0"/>
-                          <a:hlinkClick r:id="rId5"/>
-                        </a:rPr>
-                        <a:t>chibasha-kodomo2.com/poketto</a:t>
-                      </a:r>
-                    </a:p>
-                  </a:txBody>
-                  <a:tcPr anchor="ctr" marT="18000" marB="18000" marL="64008" marR="45720">
-                    <a:lnL w="9525" cap="flat" cmpd="sng" algn="ctr">
-                      <a:solidFill>
-                        <a:srgbClr val="BFBFBF"/>
-                      </a:solidFill>
-                      <a:prstDash val="solid"/>
-                      <a:round/>
-                      <a:headEnd type="none" w="med" len="med"/>
-                      <a:tailEnd type="none" w="med" len="med"/>
-                    </a:lnL>
-                    <a:lnR w="9525" cap="flat" cmpd="sng" algn="ctr">
-                      <a:solidFill>
-                        <a:srgbClr val="BFBFBF"/>
-                      </a:solidFill>
-                      <a:prstDash val="solid"/>
-                      <a:round/>
-                      <a:headEnd type="none" w="med" len="med"/>
-                      <a:tailEnd type="none" w="med" len="med"/>
-                    </a:lnR>
-                    <a:lnT w="9525" cap="flat" cmpd="sng" algn="ctr">
-                      <a:solidFill>
-                        <a:srgbClr val="BFBFBF"/>
-                      </a:solidFill>
-                      <a:prstDash val="solid"/>
-                      <a:round/>
-                      <a:headEnd type="none" w="med" len="med"/>
-                      <a:tailEnd type="none" w="med" len="med"/>
-                    </a:lnT>
-                    <a:lnB w="9525" cap="flat" cmpd="sng" algn="ctr">
-                      <a:solidFill>
-                        <a:srgbClr val="BFBFBF"/>
-                      </a:solidFill>
-                      <a:prstDash val="solid"/>
-                      <a:round/>
-                      <a:headEnd type="none" w="med" len="med"/>
-                      <a:tailEnd type="none" w="med" len="med"/>
-                    </a:lnB>
-                  </a:tcPr>
-                </a:tc>
-                <a:extLst>
-                  <a:ext uri="{0D108BD9-81ED-4DB2-BD59-A6C34878D82A}">
-                    <a16:rowId xmlns:a16="http://schemas.microsoft.com/office/drawing/2014/main" val="10001"/>
-                  </a:ext>
-                </a:extLst>
-              </a:tr>
-              <a:tr h="240971">
-                <a:tc>
-                  <a:txBody>
-                    <a:bodyPr/>
-                    <a:lstStyle/>
-                    <a:p>
-                      <a:pPr marL="0" indent="0" algn="ctr">
-                        <a:buNone/>
-                      </a:pPr>
-                      <a:r>
-                        <a:rPr lang="en-US" sz="800" b="1" dirty="0">
-                          <a:solidFill>
-                            <a:srgbClr val="222222"/>
-                          </a:solidFill>
-                          <a:latin typeface="Meiryo" pitchFamily="34" charset="0"/>
-                          <a:ea typeface="Meiryo" pitchFamily="34" charset="-122"/>
-                          <a:cs typeface="Meiryo" pitchFamily="34" charset="-120"/>
-                        </a:rPr>
-                        <a:t>④</a:t>
                       </a:r>
                       <a:endParaRPr lang="en-US" sz="1100" dirty="0">
                         <a:latin typeface="Meiryo" charset="0"/>
@@ -9164,7 +6822,7 @@
                           <a:latin typeface="Meiryo" charset="0"/>
                           <a:ea typeface="Meiryo" charset="0"/>
                           <a:cs typeface="Meiryo" charset="0"/>
-                          <a:hlinkClick r:id="rId6"/>
+                          <a:hlinkClick r:id="rId5"/>
                         </a:rPr>
                         <a:t>kp-tougane.com</a:t>
                       </a:r>
@@ -9215,7 +6873,7 @@
                   </a:ext>
                 </a:extLst>
               </a:tr>
-              <a:tr h="240971">
+              <a:tr h="269443">
                 <a:tc>
                   <a:txBody>
                     <a:bodyPr/>
@@ -9233,7 +6891,7 @@
                           <a:ea typeface="Meiryo" pitchFamily="34" charset="-122"/>
                           <a:cs typeface="Meiryo" pitchFamily="34" charset="-120"/>
                         </a:rPr>
-                        <a:t>⑤</a:t>
+                        <a:t>④</a:t>
                       </a:r>
                       <a:endParaRPr lang="en-US" sz="1100" dirty="0">
                         <a:latin typeface="Meiryo" charset="0"/>
@@ -9557,7 +7215,7 @@
                           <a:latin typeface="Meiryo" charset="0"/>
                           <a:ea typeface="Meiryo" charset="0"/>
                           <a:cs typeface="Meiryo" charset="0"/>
-                          <a:hlinkClick r:id="rId7"/>
+                          <a:hlinkClick r:id="rId6"/>
                         </a:rPr>
                         <a:t>kp-daini-tougane.com</a:t>
                       </a:r>
@@ -9608,7 +7266,7 @@
                   </a:ext>
                 </a:extLst>
               </a:tr>
-              <a:tr h="240971">
+              <a:tr h="269443">
                 <a:tc>
                   <a:txBody>
                     <a:bodyPr/>
@@ -9626,7 +7284,7 @@
                           <a:ea typeface="Meiryo" pitchFamily="34" charset="-122"/>
                           <a:cs typeface="Meiryo" pitchFamily="34" charset="-120"/>
                         </a:rPr>
-                        <a:t>⑥</a:t>
+                        <a:t>⑤</a:t>
                       </a:r>
                       <a:endParaRPr lang="en-US" sz="1100" dirty="0">
                         <a:latin typeface="Meiryo" charset="0"/>
@@ -9950,7 +7608,7 @@
                           <a:latin typeface="Meiryo" charset="0"/>
                           <a:ea typeface="Meiryo" charset="0"/>
                           <a:cs typeface="Meiryo" charset="0"/>
-                          <a:hlinkClick r:id="rId8"/>
+                          <a:hlinkClick r:id="rId7"/>
                         </a:rPr>
                         <a:t>kihonjuku-yuuyuu.com</a:t>
                       </a:r>
@@ -10001,7 +7659,7 @@
                   </a:ext>
                 </a:extLst>
               </a:tr>
-              <a:tr h="240971">
+              <a:tr h="269443">
                 <a:tc>
                   <a:txBody>
                     <a:bodyPr/>
@@ -10019,7 +7677,7 @@
                           <a:ea typeface="Meiryo" pitchFamily="34" charset="-122"/>
                           <a:cs typeface="Meiryo" pitchFamily="34" charset="-120"/>
                         </a:rPr>
-                        <a:t>⑥</a:t>
+                        <a:t>⑤</a:t>
                       </a:r>
                       <a:endParaRPr lang="en-US" sz="1100" dirty="0">
                         <a:latin typeface="Meiryo" charset="0"/>
@@ -10343,7 +8001,7 @@
                           <a:latin typeface="Meiryo" charset="0"/>
                           <a:ea typeface="Meiryo" charset="0"/>
                           <a:cs typeface="Meiryo" charset="0"/>
-                          <a:hlinkClick r:id="rId8"/>
+                          <a:hlinkClick r:id="rId7"/>
                         </a:rPr>
                         <a:t>kihonjuku-yuuyuu.com</a:t>
                       </a:r>
@@ -10394,7 +8052,7 @@
                   </a:ext>
                 </a:extLst>
               </a:tr>
-              <a:tr h="240971">
+              <a:tr h="269443">
                 <a:tc>
                   <a:txBody>
                     <a:bodyPr/>
@@ -10412,7 +8070,7 @@
                           <a:ea typeface="Meiryo" pitchFamily="34" charset="-122"/>
                           <a:cs typeface="Meiryo" pitchFamily="34" charset="-120"/>
                         </a:rPr>
-                        <a:t>⑥</a:t>
+                        <a:t>⑤</a:t>
                       </a:r>
                       <a:endParaRPr lang="en-US" sz="1100" dirty="0">
                         <a:latin typeface="Meiryo" charset="0"/>
@@ -10736,7 +8394,7 @@
                           <a:latin typeface="Meiryo" charset="0"/>
                           <a:ea typeface="Meiryo" charset="0"/>
                           <a:cs typeface="Meiryo" charset="0"/>
-                          <a:hlinkClick r:id="rId8"/>
+                          <a:hlinkClick r:id="rId7"/>
                         </a:rPr>
                         <a:t>kihonjuku-yuuyuu.com</a:t>
                       </a:r>
@@ -10787,7 +8445,7 @@
                   </a:ext>
                 </a:extLst>
               </a:tr>
-              <a:tr h="240971">
+              <a:tr h="269443">
                 <a:tc>
                   <a:txBody>
                     <a:bodyPr/>
@@ -10805,7 +8463,7 @@
                           <a:ea typeface="Meiryo" pitchFamily="34" charset="-122"/>
                           <a:cs typeface="Meiryo" pitchFamily="34" charset="-120"/>
                         </a:rPr>
-                        <a:t>⑥</a:t>
+                        <a:t>⑤</a:t>
                       </a:r>
                       <a:endParaRPr lang="en-US" sz="1100" dirty="0">
                         <a:latin typeface="Meiryo" charset="0"/>
@@ -11129,7 +8787,7 @@
                           <a:latin typeface="Meiryo" charset="0"/>
                           <a:ea typeface="Meiryo" charset="0"/>
                           <a:cs typeface="Meiryo" charset="0"/>
-                          <a:hlinkClick r:id="rId8"/>
+                          <a:hlinkClick r:id="rId7"/>
                         </a:rPr>
                         <a:t>kihonjuku-yuuyuu.com</a:t>
                       </a:r>
@@ -11180,7 +8838,7 @@
                   </a:ext>
                 </a:extLst>
               </a:tr>
-              <a:tr h="240971">
+              <a:tr h="269443">
                 <a:tc>
                   <a:txBody>
                     <a:bodyPr/>
@@ -11198,7 +8856,7 @@
                           <a:ea typeface="Meiryo" pitchFamily="34" charset="-122"/>
                           <a:cs typeface="Meiryo" pitchFamily="34" charset="-120"/>
                         </a:rPr>
-                        <a:t>⑥</a:t>
+                        <a:t>⑤</a:t>
                       </a:r>
                       <a:endParaRPr lang="en-US" sz="1100" dirty="0">
                         <a:latin typeface="Meiryo" charset="0"/>
@@ -11522,7 +9180,7 @@
                           <a:latin typeface="Meiryo" charset="0"/>
                           <a:ea typeface="Meiryo" charset="0"/>
                           <a:cs typeface="Meiryo" charset="0"/>
-                          <a:hlinkClick r:id="rId8"/>
+                          <a:hlinkClick r:id="rId7"/>
                         </a:rPr>
                         <a:t>kihonjuku-yuuyuu.com</a:t>
                       </a:r>
@@ -11573,7 +9231,7 @@
                   </a:ext>
                 </a:extLst>
               </a:tr>
-              <a:tr h="240971">
+              <a:tr h="269443">
                 <a:tc>
                   <a:txBody>
                     <a:bodyPr/>
@@ -11591,7 +9249,7 @@
                           <a:ea typeface="Meiryo" pitchFamily="34" charset="-122"/>
                           <a:cs typeface="Meiryo" pitchFamily="34" charset="-120"/>
                         </a:rPr>
-                        <a:t>⑥</a:t>
+                        <a:t>⑤</a:t>
                       </a:r>
                       <a:endParaRPr lang="en-US" sz="1100" dirty="0">
                         <a:latin typeface="Meiryo" charset="0"/>
@@ -11915,7 +9573,7 @@
                           <a:latin typeface="Meiryo" charset="0"/>
                           <a:ea typeface="Meiryo" charset="0"/>
                           <a:cs typeface="Meiryo" charset="0"/>
-                          <a:hlinkClick r:id="rId8"/>
+                          <a:hlinkClick r:id="rId7"/>
                         </a:rPr>
                         <a:t>kihonjuku-yuuyuu.com</a:t>
                       </a:r>
@@ -11966,7 +9624,7 @@
                   </a:ext>
                 </a:extLst>
               </a:tr>
-              <a:tr h="240971">
+              <a:tr h="269443">
                 <a:tc>
                   <a:txBody>
                     <a:bodyPr/>
@@ -11984,7 +9642,7 @@
                           <a:ea typeface="Meiryo" pitchFamily="34" charset="-122"/>
                           <a:cs typeface="Meiryo" pitchFamily="34" charset="-120"/>
                         </a:rPr>
-                        <a:t>⑦</a:t>
+                        <a:t>⑥</a:t>
                       </a:r>
                       <a:endParaRPr lang="en-US" sz="1100" dirty="0">
                         <a:latin typeface="Meiryo" charset="0"/>
@@ -12308,7 +9966,7 @@
                           <a:latin typeface="Meiryo" charset="0"/>
                           <a:ea typeface="Meiryo" charset="0"/>
                           <a:cs typeface="Meiryo" charset="0"/>
-                          <a:hlinkClick r:id="rId9"/>
+                          <a:hlinkClick r:id="rId8"/>
                         </a:rPr>
                         <a:t>ホイシル 事業所ページ</a:t>
                       </a:r>
@@ -12359,7 +10017,7 @@
                   </a:ext>
                 </a:extLst>
               </a:tr>
-              <a:tr h="240971">
+              <a:tr h="269443">
                 <a:tc>
                   <a:txBody>
                     <a:bodyPr/>
@@ -12377,7 +10035,7 @@
                           <a:ea typeface="Meiryo" pitchFamily="34" charset="-122"/>
                           <a:cs typeface="Meiryo" pitchFamily="34" charset="-120"/>
                         </a:rPr>
-                        <a:t>⑦</a:t>
+                        <a:t>⑥</a:t>
                       </a:r>
                       <a:endParaRPr lang="en-US" sz="1100" dirty="0">
                         <a:latin typeface="Meiryo" charset="0"/>
@@ -12701,7 +10359,7 @@
                           <a:latin typeface="Meiryo" charset="0"/>
                           <a:ea typeface="Meiryo" charset="0"/>
                           <a:cs typeface="Meiryo" charset="0"/>
-                          <a:hlinkClick r:id="rId10"/>
+                          <a:hlinkClick r:id="rId9"/>
                         </a:rPr>
                         <a:t>ホイシル 東金市 児発一覧</a:t>
                       </a:r>
@@ -12752,7 +10410,7 @@
                   </a:ext>
                 </a:extLst>
               </a:tr>
-              <a:tr h="240971">
+              <a:tr h="269443">
                 <a:tc>
                   <a:txBody>
                     <a:bodyPr/>
@@ -12770,7 +10428,7 @@
                           <a:ea typeface="Meiryo" pitchFamily="34" charset="-122"/>
                           <a:cs typeface="Meiryo" pitchFamily="34" charset="-120"/>
                         </a:rPr>
-                        <a:t>⑧</a:t>
+                        <a:t>⑦</a:t>
                       </a:r>
                       <a:endParaRPr lang="en-US" sz="1100" dirty="0">
                         <a:latin typeface="Meiryo" charset="0"/>
@@ -13094,7 +10752,7 @@
                           <a:latin typeface="Meiryo" charset="0"/>
                           <a:ea typeface="Meiryo" charset="0"/>
                           <a:cs typeface="Meiryo" charset="0"/>
-                          <a:hlinkClick r:id="rId10"/>
+                          <a:hlinkClick r:id="rId9"/>
                         </a:rPr>
                         <a:t>ホイシル 東金市 児発一覧</a:t>
                       </a:r>
@@ -13145,7 +10803,7 @@
                   </a:ext>
                 </a:extLst>
               </a:tr>
-              <a:tr h="240971">
+              <a:tr h="269443">
                 <a:tc>
                   <a:txBody>
                     <a:bodyPr/>
@@ -13163,7 +10821,7 @@
                           <a:ea typeface="Meiryo" pitchFamily="34" charset="-122"/>
                           <a:cs typeface="Meiryo" pitchFamily="34" charset="-120"/>
                         </a:rPr>
-                        <a:t>⑨</a:t>
+                        <a:t>⑧</a:t>
                       </a:r>
                       <a:endParaRPr lang="en-US" sz="1100" dirty="0">
                         <a:latin typeface="Meiryo" charset="0"/>
@@ -13228,137 +10886,7 @@
                           <a:ea typeface="Meiryo" pitchFamily="34" charset="-122"/>
                           <a:cs typeface="Meiryo" pitchFamily="34" charset="-120"/>
                         </a:rPr>
-                        <a:t>児童発達支援コンパッション保育所 ※</a:t>
-                      </a:r>
-                      <a:endParaRPr lang="en-US" sz="1100" dirty="0">
-                        <a:latin typeface="Meiryo" charset="0"/>
-                        <a:ea typeface="Meiryo" charset="0"/>
-                        <a:cs typeface="Meiryo" charset="0"/>
-                      </a:endParaRPr>
-                    </a:p>
-                  </a:txBody>
-                  <a:tcPr anchor="ctr" marT="18000" marB="18000" marL="64008" marR="45720">
-                    <a:lnL w="9525" cap="flat" cmpd="sng" algn="ctr">
-                      <a:solidFill>
-                        <a:srgbClr val="BFBFBF"/>
-                      </a:solidFill>
-                      <a:prstDash val="solid"/>
-                      <a:round/>
-                      <a:headEnd type="none" w="med" len="med"/>
-                      <a:tailEnd type="none" w="med" len="med"/>
-                    </a:lnL>
-                    <a:lnR w="9525" cap="flat" cmpd="sng" algn="ctr">
-                      <a:solidFill>
-                        <a:srgbClr val="BFBFBF"/>
-                      </a:solidFill>
-                      <a:prstDash val="solid"/>
-                      <a:round/>
-                      <a:headEnd type="none" w="med" len="med"/>
-                      <a:tailEnd type="none" w="med" len="med"/>
-                    </a:lnR>
-                    <a:lnT w="9525" cap="flat" cmpd="sng" algn="ctr">
-                      <a:solidFill>
-                        <a:srgbClr val="BFBFBF"/>
-                      </a:solidFill>
-                      <a:prstDash val="solid"/>
-                      <a:round/>
-                      <a:headEnd type="none" w="med" len="med"/>
-                      <a:tailEnd type="none" w="med" len="med"/>
-                    </a:lnT>
-                    <a:lnB w="9525" cap="flat" cmpd="sng" algn="ctr">
-                      <a:solidFill>
-                        <a:srgbClr val="BFBFBF"/>
-                      </a:solidFill>
-                      <a:prstDash val="solid"/>
-                      <a:round/>
-                      <a:headEnd type="none" w="med" len="med"/>
-                      <a:tailEnd type="none" w="med" len="med"/>
-                    </a:lnB>
-                  </a:tcPr>
-                </a:tc>
-                <a:tc>
-                  <a:txBody>
-                    <a:bodyPr/>
-                    <a:lstStyle/>
-                    <a:p>
-                      <a:pPr marL="0" indent="0" algn="l">
-                        <a:buNone/>
-                      </a:pPr>
-                      <a:r>
-                        <a:rPr lang="en-US" sz="800" dirty="0">
-                          <a:solidFill>
-                            <a:srgbClr val="222222"/>
-                          </a:solidFill>
-                          <a:latin typeface="Meiryo" pitchFamily="34" charset="0"/>
-                          <a:ea typeface="Meiryo" pitchFamily="34" charset="-122"/>
-                          <a:cs typeface="Meiryo" pitchFamily="34" charset="-120"/>
-                        </a:rPr>
-                        <a:t>要確認（保育所併設）</a:t>
-                      </a:r>
-                      <a:endParaRPr lang="en-US" sz="1100" dirty="0">
-                        <a:latin typeface="Meiryo" charset="0"/>
-                        <a:ea typeface="Meiryo" charset="0"/>
-                        <a:cs typeface="Meiryo" charset="0"/>
-                      </a:endParaRPr>
-                    </a:p>
-                  </a:txBody>
-                  <a:tcPr anchor="ctr" marT="18000" marB="18000" marL="64008" marR="45720">
-                    <a:lnL w="9525" cap="flat" cmpd="sng" algn="ctr">
-                      <a:solidFill>
-                        <a:srgbClr val="BFBFBF"/>
-                      </a:solidFill>
-                      <a:prstDash val="solid"/>
-                      <a:round/>
-                      <a:headEnd type="none" w="med" len="med"/>
-                      <a:tailEnd type="none" w="med" len="med"/>
-                    </a:lnL>
-                    <a:lnR w="9525" cap="flat" cmpd="sng" algn="ctr">
-                      <a:solidFill>
-                        <a:srgbClr val="BFBFBF"/>
-                      </a:solidFill>
-                      <a:prstDash val="solid"/>
-                      <a:round/>
-                      <a:headEnd type="none" w="med" len="med"/>
-                      <a:tailEnd type="none" w="med" len="med"/>
-                    </a:lnR>
-                    <a:lnT w="9525" cap="flat" cmpd="sng" algn="ctr">
-                      <a:solidFill>
-                        <a:srgbClr val="BFBFBF"/>
-                      </a:solidFill>
-                      <a:prstDash val="solid"/>
-                      <a:round/>
-                      <a:headEnd type="none" w="med" len="med"/>
-                      <a:tailEnd type="none" w="med" len="med"/>
-                    </a:lnT>
-                    <a:lnB w="9525" cap="flat" cmpd="sng" algn="ctr">
-                      <a:solidFill>
-                        <a:srgbClr val="BFBFBF"/>
-                      </a:solidFill>
-                      <a:prstDash val="solid"/>
-                      <a:round/>
-                      <a:headEnd type="none" w="med" len="med"/>
-                      <a:tailEnd type="none" w="med" len="med"/>
-                    </a:lnB>
-                  </a:tcPr>
-                </a:tc>
-                <a:tc>
-                  <a:txBody>
-                    <a:bodyPr/>
-                    <a:lstStyle/>
-                    <a:p>
-                      <a:pPr marL="0" indent="0" algn="l">
-                        <a:buNone/>
-                      </a:pPr>
-                      <a:r>
-                        <a:rPr lang="en-US" sz="800" dirty="0">
-                          <a:solidFill>
-                            <a:srgbClr val="222222"/>
-                          </a:solidFill>
-                          <a:latin typeface="Meiryo" pitchFamily="34" charset="0"/>
-                          <a:ea typeface="Meiryo" pitchFamily="34" charset="-122"/>
-                          <a:cs typeface="Meiryo" pitchFamily="34" charset="-120"/>
-                        </a:rPr>
-                        <a:t>家之子1671-36</a:t>
+                        <a:t>鴇嶺の家</a:t>
                       </a:r>
                       <a:endParaRPr lang="en-US" sz="1100" dirty="0">
                         <a:latin typeface="Meiryo" charset="0"/>
@@ -13480,75 +11008,7 @@
                         <a:buNone/>
                       </a:pPr>
                       <a:r>
-                        <a:rPr lang="en-US" sz="800" dirty="0" u="sng">
-                          <a:solidFill>
-                            <a:srgbClr val="1F5FA8"/>
-                          </a:solidFill>
-                          <a:latin typeface="Meiryo" charset="0"/>
-                          <a:ea typeface="Meiryo" charset="0"/>
-                          <a:cs typeface="Meiryo" charset="0"/>
-                          <a:hlinkClick r:id="rId11"/>
-                        </a:rPr>
-                        <a:t>LITALICO発達ナビ 東金市一覧</a:t>
-                      </a:r>
-                    </a:p>
-                  </a:txBody>
-                  <a:tcPr anchor="ctr" marT="18000" marB="18000" marL="64008" marR="45720">
-                    <a:lnL w="9525" cap="flat" cmpd="sng" algn="ctr">
-                      <a:solidFill>
-                        <a:srgbClr val="BFBFBF"/>
-                      </a:solidFill>
-                      <a:prstDash val="solid"/>
-                      <a:round/>
-                      <a:headEnd type="none" w="med" len="med"/>
-                      <a:tailEnd type="none" w="med" len="med"/>
-                    </a:lnL>
-                    <a:lnR w="9525" cap="flat" cmpd="sng" algn="ctr">
-                      <a:solidFill>
-                        <a:srgbClr val="BFBFBF"/>
-                      </a:solidFill>
-                      <a:prstDash val="solid"/>
-                      <a:round/>
-                      <a:headEnd type="none" w="med" len="med"/>
-                      <a:tailEnd type="none" w="med" len="med"/>
-                    </a:lnR>
-                    <a:lnT w="9525" cap="flat" cmpd="sng" algn="ctr">
-                      <a:solidFill>
-                        <a:srgbClr val="BFBFBF"/>
-                      </a:solidFill>
-                      <a:prstDash val="solid"/>
-                      <a:round/>
-                      <a:headEnd type="none" w="med" len="med"/>
-                      <a:tailEnd type="none" w="med" len="med"/>
-                    </a:lnT>
-                    <a:lnB w="9525" cap="flat" cmpd="sng" algn="ctr">
-                      <a:solidFill>
-                        <a:srgbClr val="BFBFBF"/>
-                      </a:solidFill>
-                      <a:prstDash val="solid"/>
-                      <a:round/>
-                      <a:headEnd type="none" w="med" len="med"/>
-                      <a:tailEnd type="none" w="med" len="med"/>
-                    </a:lnB>
-                  </a:tcPr>
-                </a:tc>
-                <a:extLst>
-                  <a:ext uri="{0D108BD9-81ED-4DB2-BD59-A6C34878D82A}">
-                    <a16:rowId xmlns:a16="http://schemas.microsoft.com/office/drawing/2014/main" val="10001"/>
-                  </a:ext>
-                </a:extLst>
-              </a:tr>
-              <a:tr h="240971">
-                <a:tc>
-                  <a:txBody>
-                    <a:bodyPr/>
-                    <a:lstStyle/>
-                    <a:p>
-                      <a:pPr marL="0" indent="0" algn="ctr">
-                        <a:buNone/>
-                      </a:pPr>
-                      <a:r>
-                        <a:rPr lang="en-US" sz="800" b="1" dirty="0">
+                        <a:rPr lang="en-US" sz="800" dirty="0">
                           <a:solidFill>
                             <a:srgbClr val="222222"/>
                           </a:solidFill>
@@ -13556,72 +11016,7 @@
                           <a:ea typeface="Meiryo" pitchFamily="34" charset="-122"/>
                           <a:cs typeface="Meiryo" pitchFamily="34" charset="-120"/>
                         </a:rPr>
-                        <a:t>⑩</a:t>
-                      </a:r>
-                      <a:endParaRPr lang="en-US" sz="1100" dirty="0">
-                        <a:latin typeface="Meiryo" charset="0"/>
-                        <a:ea typeface="Meiryo" charset="0"/>
-                        <a:cs typeface="Meiryo" charset="0"/>
-                      </a:endParaRPr>
-                    </a:p>
-                  </a:txBody>
-                  <a:tcPr anchor="ctr" marT="18000" marB="18000" marL="64008" marR="45720">
-                    <a:lnL w="9525" cap="flat" cmpd="sng" algn="ctr">
-                      <a:solidFill>
-                        <a:srgbClr val="BFBFBF"/>
-                      </a:solidFill>
-                      <a:prstDash val="solid"/>
-                      <a:round/>
-                      <a:headEnd type="none" w="med" len="med"/>
-                      <a:tailEnd type="none" w="med" len="med"/>
-                    </a:lnL>
-                    <a:lnR w="9525" cap="flat" cmpd="sng" algn="ctr">
-                      <a:solidFill>
-                        <a:srgbClr val="BFBFBF"/>
-                      </a:solidFill>
-                      <a:prstDash val="solid"/>
-                      <a:round/>
-                      <a:headEnd type="none" w="med" len="med"/>
-                      <a:tailEnd type="none" w="med" len="med"/>
-                    </a:lnR>
-                    <a:lnT w="9525" cap="flat" cmpd="sng" algn="ctr">
-                      <a:solidFill>
-                        <a:srgbClr val="BFBFBF"/>
-                      </a:solidFill>
-                      <a:prstDash val="solid"/>
-                      <a:round/>
-                      <a:headEnd type="none" w="med" len="med"/>
-                      <a:tailEnd type="none" w="med" len="med"/>
-                    </a:lnT>
-                    <a:lnB w="9525" cap="flat" cmpd="sng" algn="ctr">
-                      <a:solidFill>
-                        <a:srgbClr val="BFBFBF"/>
-                      </a:solidFill>
-                      <a:prstDash val="solid"/>
-                      <a:round/>
-                      <a:headEnd type="none" w="med" len="med"/>
-                      <a:tailEnd type="none" w="med" len="med"/>
-                    </a:lnB>
-                  </a:tcPr>
-                </a:tc>
-                <a:tc>
-                  <a:txBody>
-                    <a:bodyPr/>
-                    <a:lstStyle/>
-                    <a:p>
-                      <a:pPr marL="0" indent="0" algn="l">
-                        <a:buNone/>
-                      </a:pPr>
-                      <a:r>
-                        <a:rPr lang="en-US" sz="800" b="1" dirty="0">
-                          <a:solidFill>
-                            <a:srgbClr val="222222"/>
-                          </a:solidFill>
-                          <a:latin typeface="Meiryo" pitchFamily="34" charset="0"/>
-                          <a:ea typeface="Meiryo" pitchFamily="34" charset="-122"/>
-                          <a:cs typeface="Meiryo" pitchFamily="34" charset="-120"/>
-                        </a:rPr>
-                        <a:t>鴇嶺の家</a:t>
+                        <a:t>東金425-2</a:t>
                       </a:r>
                       <a:endParaRPr lang="en-US" sz="1100" dirty="0">
                         <a:latin typeface="Meiryo" charset="0"/>
@@ -13743,136 +11138,6 @@
                         <a:buNone/>
                       </a:pPr>
                       <a:r>
-                        <a:rPr lang="en-US" sz="800" dirty="0">
-                          <a:solidFill>
-                            <a:srgbClr val="222222"/>
-                          </a:solidFill>
-                          <a:latin typeface="Meiryo" pitchFamily="34" charset="0"/>
-                          <a:ea typeface="Meiryo" pitchFamily="34" charset="-122"/>
-                          <a:cs typeface="Meiryo" pitchFamily="34" charset="-120"/>
-                        </a:rPr>
-                        <a:t>東金425-2</a:t>
-                      </a:r>
-                      <a:endParaRPr lang="en-US" sz="1100" dirty="0">
-                        <a:latin typeface="Meiryo" charset="0"/>
-                        <a:ea typeface="Meiryo" charset="0"/>
-                        <a:cs typeface="Meiryo" charset="0"/>
-                      </a:endParaRPr>
-                    </a:p>
-                  </a:txBody>
-                  <a:tcPr anchor="ctr" marT="18000" marB="18000" marL="64008" marR="45720">
-                    <a:lnL w="9525" cap="flat" cmpd="sng" algn="ctr">
-                      <a:solidFill>
-                        <a:srgbClr val="BFBFBF"/>
-                      </a:solidFill>
-                      <a:prstDash val="solid"/>
-                      <a:round/>
-                      <a:headEnd type="none" w="med" len="med"/>
-                      <a:tailEnd type="none" w="med" len="med"/>
-                    </a:lnL>
-                    <a:lnR w="9525" cap="flat" cmpd="sng" algn="ctr">
-                      <a:solidFill>
-                        <a:srgbClr val="BFBFBF"/>
-                      </a:solidFill>
-                      <a:prstDash val="solid"/>
-                      <a:round/>
-                      <a:headEnd type="none" w="med" len="med"/>
-                      <a:tailEnd type="none" w="med" len="med"/>
-                    </a:lnR>
-                    <a:lnT w="9525" cap="flat" cmpd="sng" algn="ctr">
-                      <a:solidFill>
-                        <a:srgbClr val="BFBFBF"/>
-                      </a:solidFill>
-                      <a:prstDash val="solid"/>
-                      <a:round/>
-                      <a:headEnd type="none" w="med" len="med"/>
-                      <a:tailEnd type="none" w="med" len="med"/>
-                    </a:lnT>
-                    <a:lnB w="9525" cap="flat" cmpd="sng" algn="ctr">
-                      <a:solidFill>
-                        <a:srgbClr val="BFBFBF"/>
-                      </a:solidFill>
-                      <a:prstDash val="solid"/>
-                      <a:round/>
-                      <a:headEnd type="none" w="med" len="med"/>
-                      <a:tailEnd type="none" w="med" len="med"/>
-                    </a:lnB>
-                  </a:tcPr>
-                </a:tc>
-                <a:tc>
-                  <a:txBody>
-                    <a:bodyPr/>
-                    <a:lstStyle/>
-                    <a:p>
-                      <a:pPr marL="0" indent="0" algn="l">
-                        <a:buNone/>
-                      </a:pPr>
-                      <a:r>
-                        <a:rPr lang="en-US" sz="800" dirty="0">
-                          <a:solidFill>
-                            <a:srgbClr val="222222"/>
-                          </a:solidFill>
-                          <a:latin typeface="Meiryo" pitchFamily="34" charset="0"/>
-                          <a:ea typeface="Meiryo" pitchFamily="34" charset="-122"/>
-                          <a:cs typeface="Meiryo" pitchFamily="34" charset="-120"/>
-                        </a:rPr>
-                        <a:t>要確認</a:t>
-                      </a:r>
-                      <a:endParaRPr lang="en-US" sz="1100" dirty="0">
-                        <a:latin typeface="Meiryo" charset="0"/>
-                        <a:ea typeface="Meiryo" charset="0"/>
-                        <a:cs typeface="Meiryo" charset="0"/>
-                      </a:endParaRPr>
-                    </a:p>
-                  </a:txBody>
-                  <a:tcPr anchor="ctr" marT="18000" marB="18000" marL="64008" marR="45720">
-                    <a:lnL w="9525" cap="flat" cmpd="sng" algn="ctr">
-                      <a:solidFill>
-                        <a:srgbClr val="BFBFBF"/>
-                      </a:solidFill>
-                      <a:prstDash val="solid"/>
-                      <a:round/>
-                      <a:headEnd type="none" w="med" len="med"/>
-                      <a:tailEnd type="none" w="med" len="med"/>
-                    </a:lnL>
-                    <a:lnR w="9525" cap="flat" cmpd="sng" algn="ctr">
-                      <a:solidFill>
-                        <a:srgbClr val="BFBFBF"/>
-                      </a:solidFill>
-                      <a:prstDash val="solid"/>
-                      <a:round/>
-                      <a:headEnd type="none" w="med" len="med"/>
-                      <a:tailEnd type="none" w="med" len="med"/>
-                    </a:lnR>
-                    <a:lnT w="9525" cap="flat" cmpd="sng" algn="ctr">
-                      <a:solidFill>
-                        <a:srgbClr val="BFBFBF"/>
-                      </a:solidFill>
-                      <a:prstDash val="solid"/>
-                      <a:round/>
-                      <a:headEnd type="none" w="med" len="med"/>
-                      <a:tailEnd type="none" w="med" len="med"/>
-                    </a:lnT>
-                    <a:lnB w="9525" cap="flat" cmpd="sng" algn="ctr">
-                      <a:solidFill>
-                        <a:srgbClr val="BFBFBF"/>
-                      </a:solidFill>
-                      <a:prstDash val="solid"/>
-                      <a:round/>
-                      <a:headEnd type="none" w="med" len="med"/>
-                      <a:tailEnd type="none" w="med" len="med"/>
-                    </a:lnB>
-                  </a:tcPr>
-                </a:tc>
-                <a:tc>
-                  <a:txBody>
-                    <a:bodyPr/>
-                    <a:lstStyle/>
-                    <a:p>
-                      <a:pPr marL="0" indent="0" algn="l">
-                        <a:buNone/>
-                      </a:pPr>
-                      <a:r>
                         <a:rPr lang="en-US" sz="800" dirty="0" u="sng">
                           <a:solidFill>
                             <a:srgbClr val="1F5FA8"/>
@@ -13880,7 +11145,7 @@
                           <a:latin typeface="Meiryo" charset="0"/>
                           <a:ea typeface="Meiryo" charset="0"/>
                           <a:cs typeface="Meiryo" charset="0"/>
-                          <a:hlinkClick r:id="rId12"/>
+                          <a:hlinkClick r:id="rId10"/>
                         </a:rPr>
                         <a:t>ホイシル 事業所ページ</a:t>
                       </a:r>
@@ -13968,7 +11233,7 @@
                 <a:ea typeface="Meiryo" pitchFamily="34" charset="-122"/>
                 <a:cs typeface="Meiryo" pitchFamily="34" charset="-120"/>
               </a:rPr>
-              <a:t>※印（基本塾優遊 八坂台・八坂中央、コンパッション保育所）は、ホイシル等の児童発達支援一覧に掲載がなく、児発指定の有無は要確認。②③は同一運営（chibasha-kodomo2.com）、⑥基本塾優遊はNPO法人基本塾の6拠点、⑦エスポワールは2拠点で、詳細頁ではそれぞれ1枚に集約。「HP／出典」欄はクリックで該当ページを開きます。出典：ホイシル／LITALICO発達ナビ／東金市公式／各事業所公式サイト（2026年8月時点）。</a:t>
+              <a:t>※印（基本塾優遊 八坂台・八坂中央）は、ホイシル等の児童発達支援一覧に掲載がなく、児発指定の有無は要確認。⑤基本塾優遊はNPO法人基本塾の6拠点、⑥エスポワールは2拠点で、詳細頁ではそれぞれ1枚に集約。「HP／出典」欄はクリックで該当ページを開きます。出典：ホイシル／LITALICO発達ナビ／東金市公式／各事業所公式サイト（2026年8月時点）。</a:t>
             </a:r>
             <a:endParaRPr lang="en-US" sz="1000" dirty="0"/>
           </a:p>
@@ -15774,7 +13039,7 @@
                 <a:ea typeface="Meiryo" pitchFamily="34" charset="-122"/>
                 <a:cs typeface="Meiryo" pitchFamily="34" charset="-120"/>
               </a:rPr>
-              <a:t>公式サイト chibasha-kodomo2.com（子ども支援センター まあちる／ぽけっと）</a:t>
+              <a:t>公式サイト chibasha-kodomo2.com（子ども支援センター）</a:t>
             </a:r>
             <a:endParaRPr lang="en-US" sz="1050" dirty="0"/>
           </a:p>
@@ -15992,7 +13257,7 @@
                 <a:ea typeface="メイリオ" panose="020B0604030504040204" pitchFamily="50" charset="-128"/>
                 <a:cs typeface="Meiryo" pitchFamily="34" charset="-120"/>
               </a:rPr>
-              <a:t>同一運営の「ぽけっと」（主に6〜18歳）と年齢帯を分ける“年齢分離型”の2拠点運営。未就学の受け皿はまあちるが担う。</a:t>
+              <a:t>在籍が主に2〜12歳。未就学から小学生までを一貫して見られる点が訴求ポイント。</a:t>
             </a:r>
             <a:endParaRPr lang="en-US" sz="1000" dirty="0">
               <a:latin typeface="メイリオ" panose="020B0604030504040204" pitchFamily="50" charset="-128"/>
@@ -16016,7 +13281,7 @@
                 <a:ea typeface="メイリオ" panose="020B0604030504040204" pitchFamily="50" charset="-128"/>
                 <a:cs typeface="Meiryo" pitchFamily="34" charset="-120"/>
               </a:rPr>
-              <a:t>在籍が主に2〜12歳で、未就学から小学生までを継続して見られる点が訴求ポイント。</a:t>
+              <a:t>JR東金駅至近（東岩崎）の市街地立地で、駅・市役所方面からの通所導線が良い。</a:t>
             </a:r>
             <a:endParaRPr lang="en-US" sz="1000" dirty="0">
               <a:latin typeface="メイリオ" panose="020B0604030504040204" pitchFamily="50" charset="-128"/>
@@ -16040,7 +13305,7 @@
                 <a:ea typeface="メイリオ" panose="020B0604030504040204" pitchFamily="50" charset="-128"/>
                 <a:cs typeface="Meiryo" pitchFamily="34" charset="-120"/>
               </a:rPr>
-              <a:t>東岩崎はJR東金駅の東側エリア。ぽけっと（東上宿）とあわせ市街地を2拠点でカバー。</a:t>
+              <a:t>火曜〜土曜の稼働で土曜ニーズに対応する一方、日曜・月曜は受付外。</a:t>
             </a:r>
             <a:endParaRPr lang="en-US" sz="1000" dirty="0">
               <a:latin typeface="メイリオ" panose="020B0604030504040204" pitchFamily="50" charset="-128"/>
@@ -16218,7 +13483,7 @@
                 <a:ea typeface="Meiryo" pitchFamily="34" charset="-122"/>
                 <a:cs typeface="Meiryo" pitchFamily="34" charset="-120"/>
               </a:rPr>
-              <a:t>③ 子ども支援センター ぽけっと</a:t>
+              <a:t>③ こどもプラス東金教室</a:t>
             </a:r>
             <a:endParaRPr lang="en-US" sz="2100" dirty="0"/>
           </a:p>
@@ -16392,7 +13657,7 @@
                 <a:ea typeface="Meiryo" pitchFamily="34" charset="-122"/>
                 <a:cs typeface="Meiryo" pitchFamily="34" charset="-120"/>
               </a:rPr>
-              <a:t>子ども支援センター ぽけっと（児童発達支援・放課後等デイサービス）</a:t>
+              <a:t>こどもプラス東金教室（運営：株式会社ベストグロウ）</a:t>
             </a:r>
             <a:endParaRPr lang="en-US" sz="1400" dirty="0"/>
           </a:p>
@@ -16456,7 +13721,7 @@
                 <a:ea typeface="Meiryo" pitchFamily="34" charset="-122"/>
                 <a:cs typeface="Meiryo" pitchFamily="34" charset="-120"/>
               </a:rPr>
-              <a:t>通所受給者証をお持ちのお子さん　※在籍は主に6歳〜18歳（就学児が中心）</a:t>
+              <a:t>未就学児（児童発達支援）／就学児（放課後等デイサービス）</a:t>
             </a:r>
             <a:endParaRPr lang="en-US" sz="1050" dirty="0"/>
           </a:p>
@@ -16498,7 +13763,7 @@
                 <a:ea typeface="Meiryo" pitchFamily="34" charset="-122"/>
                 <a:cs typeface="Meiryo" pitchFamily="34" charset="-120"/>
               </a:rPr>
-              <a:t>〒283-0067 千葉県東金市東上宿6番地2</a:t>
+              <a:t>千葉県東金市東新宿18-1 酒造ビル105号（JR東金線 東金駅から徒歩約7〜9分）</a:t>
             </a:r>
             <a:endParaRPr lang="en-US" sz="1050" dirty="0"/>
           </a:p>
@@ -16540,7 +13805,7 @@
                 <a:ea typeface="Meiryo" pitchFamily="34" charset="-122"/>
                 <a:cs typeface="Meiryo" pitchFamily="34" charset="-120"/>
               </a:rPr>
-              <a:t>0475-50-1081 ／ chibasha-kodomo2.com/poketto</a:t>
+              <a:t>0475-77-8577 ／ kp-tougane.com</a:t>
             </a:r>
             <a:endParaRPr lang="en-US" sz="1050" dirty="0"/>
           </a:p>
@@ -16571,7 +13836,7 @@
                 <a:ea typeface="Meiryo" pitchFamily="34" charset="-122"/>
                 <a:cs typeface="Meiryo" pitchFamily="34" charset="-120"/>
               </a:rPr>
-              <a:t>受付時間：</a:t>
+              <a:t>サービス提供時間：</a:t>
             </a:r>
             <a:r>
               <a:rPr lang="en-US" sz="1050" dirty="0">
@@ -16582,49 +13847,7 @@
                 <a:ea typeface="Meiryo" pitchFamily="34" charset="-122"/>
                 <a:cs typeface="Meiryo" pitchFamily="34" charset="-120"/>
               </a:rPr>
-              <a:t>月曜〜土曜 9:00〜18:00</a:t>
-            </a:r>
-            <a:endParaRPr lang="en-US" sz="1050" dirty="0"/>
-          </a:p>
-          <a:p>
-            <a:pPr marL="0" indent="0">
-              <a:lnSpc>
-                <a:spcPct val="103000"/>
-              </a:lnSpc>
-              <a:buNone/>
-            </a:pPr>
-            <a:r>
-              <a:rPr lang="en-US" sz="1050" b="1" dirty="0">
-                <a:solidFill>
-                  <a:srgbClr val="2E6BB8"/>
-                </a:solidFill>
-                <a:latin typeface="Meiryo" pitchFamily="34" charset="0"/>
-                <a:ea typeface="Meiryo" pitchFamily="34" charset="-122"/>
-                <a:cs typeface="Meiryo" pitchFamily="34" charset="-120"/>
-              </a:rPr>
-              <a:t>▶</a:t>
-            </a:r>
-            <a:r>
-              <a:rPr lang="en-US" sz="1050" b="1" dirty="0">
-                <a:solidFill>
-                  <a:srgbClr val="222222"/>
-                </a:solidFill>
-                <a:latin typeface="Meiryo" pitchFamily="34" charset="0"/>
-                <a:ea typeface="Meiryo" pitchFamily="34" charset="-122"/>
-                <a:cs typeface="Meiryo" pitchFamily="34" charset="-120"/>
-              </a:rPr>
-              <a:t>定員：</a:t>
-            </a:r>
-            <a:r>
-              <a:rPr lang="en-US" sz="1050" dirty="0">
-                <a:solidFill>
-                  <a:srgbClr val="222222"/>
-                </a:solidFill>
-                <a:latin typeface="Meiryo" pitchFamily="34" charset="0"/>
-                <a:ea typeface="Meiryo" pitchFamily="34" charset="-122"/>
-                <a:cs typeface="Meiryo" pitchFamily="34" charset="-120"/>
-              </a:rPr>
-              <a:t>要確認</a:t>
+              <a:t>平日 9:00〜18:00　※送迎あり／開設：2015年7月1日</a:t>
             </a:r>
             <a:endParaRPr lang="en-US" sz="1050" dirty="0"/>
           </a:p>
@@ -16678,7 +13901,7 @@
                 <a:ea typeface="Meiryo" pitchFamily="34" charset="-122"/>
                 <a:cs typeface="Meiryo" pitchFamily="34" charset="-120"/>
               </a:rPr>
-              <a:t>「生きる力」を育むことを掲げ、児童発達支援と放課後等デイサービスを提供。</a:t>
+              <a:t>運動療育を主軸に、学習・あそびを取り入れた総合的な療育を提供。</a:t>
             </a:r>
             <a:endParaRPr lang="en-US" sz="1050" dirty="0"/>
           </a:p>
@@ -16701,7 +13924,7 @@
                 <a:ea typeface="Meiryo" pitchFamily="34" charset="-122"/>
                 <a:cs typeface="Meiryo" pitchFamily="34" charset="-120"/>
               </a:rPr>
-              <a:t>・在籍が主に6〜18歳のため、実態は放課後等デイサービス中心の運営とみられる。</a:t>
+              <a:t>・「柳沢運動プログラム」を導入。運動あそびが大脳活動の発達を促すという理論に基づくカリキュラム。</a:t>
             </a:r>
             <a:endParaRPr lang="en-US" sz="1050" dirty="0"/>
           </a:p>
@@ -16724,7 +13947,7 @@
                 <a:ea typeface="Meiryo" pitchFamily="34" charset="-122"/>
                 <a:cs typeface="Meiryo" pitchFamily="34" charset="-120"/>
               </a:rPr>
-              <a:t>・放デイは放課後・長期休暇に利用し、できることを増やして自立を促し、居場所を増やすことを目的に掲げる。</a:t>
+              <a:t>・全身の筋力向上・けがの減少に加え、情緒の安定、切り替えの上達、ルール理解の定着を効果として掲げる。</a:t>
             </a:r>
             <a:endParaRPr lang="en-US" sz="1050" dirty="0"/>
           </a:p>
@@ -16747,7 +13970,7 @@
                 <a:ea typeface="Meiryo" pitchFamily="34" charset="-122"/>
                 <a:cs typeface="Meiryo" pitchFamily="34" charset="-120"/>
               </a:rPr>
-              <a:t>・東金駅・市役所に近い東上宿に立地。同一町域（東上宿6-1）に相談支援事業所「街かど福祉相談室るると」が所在。</a:t>
+              <a:t>・運営法人は千葉県内に児発・放デイ・相談支援あわせて10事業所を展開（本社：東金市道庭925-1）。</a:t>
             </a:r>
             <a:endParaRPr lang="en-US" sz="1050" dirty="0"/>
           </a:p>
@@ -16761,29 +13984,6 @@
               </a:spcAft>
               <a:buNone/>
             </a:pPr>
-            <a:r>
-              <a:rPr lang="en-US" sz="1050" dirty="0">
-                <a:solidFill>
-                  <a:srgbClr val="222222"/>
-                </a:solidFill>
-                <a:latin typeface="Meiryo" pitchFamily="34" charset="0"/>
-                <a:ea typeface="Meiryo" pitchFamily="34" charset="-122"/>
-                <a:cs typeface="Meiryo" pitchFamily="34" charset="-120"/>
-              </a:rPr>
-              <a:t>・月刊で活動報告をWeb掲載（2026年8月時点で「7月のぽけっと」を公開）。</a:t>
-            </a:r>
-            <a:endParaRPr lang="en-US" sz="1050" dirty="0"/>
-          </a:p>
-          <a:p>
-            <a:pPr marL="0" indent="0">
-              <a:lnSpc>
-                <a:spcPct val="103000"/>
-              </a:lnSpc>
-              <a:spcAft>
-                <a:spcPts val="500"/>
-              </a:spcAft>
-              <a:buNone/>
-            </a:pPr>
             <a:endParaRPr lang="en-US" sz="1050" dirty="0"/>
           </a:p>
           <a:p>
@@ -16824,7 +14024,7 @@
                 <a:ea typeface="Meiryo" pitchFamily="34" charset="-122"/>
                 <a:cs typeface="Meiryo" pitchFamily="34" charset="-120"/>
               </a:rPr>
-              <a:t>公式サイト chibasha-kodomo2.com／WAM NET 障害福祉サービス等情報公表システム／LITALICO発達ナビ</a:t>
+              <a:t>公式HP kp-tougane.com／WAM NET／障害者ドットコム／児発ねっと</a:t>
             </a:r>
             <a:endParaRPr lang="en-US" sz="1050" dirty="0"/>
           </a:p>
@@ -16866,7 +14066,7 @@
                 <a:ea typeface="Meiryo" pitchFamily="34" charset="-122"/>
                 <a:cs typeface="Meiryo" pitchFamily="34" charset="-120"/>
               </a:rPr>
-              <a:t>運営法人の正式名称、定員、児発の受け入れ実績（未就学の在籍有無）、送迎の有無</a:t>
+              <a:t>定員、現在の空き状況、送迎範囲、児童発達支援と放課後等デイサービスの時間帯区分</a:t>
             </a:r>
             <a:endParaRPr lang="en-US" sz="1050" dirty="0"/>
           </a:p>
@@ -16935,7 +14135,7 @@
                 <a:ea typeface="Meiryo" pitchFamily="34" charset="-122"/>
                 <a:cs typeface="Meiryo" pitchFamily="34" charset="-120"/>
               </a:rPr>
-              <a:t>（公式サイト chibasha-kodomo2.com/poketto 掲載の教室・活動写真を挿入）</a:t>
+              <a:t>（公式HP kp-tougane.com 掲載の教室・運動あそびの写真を挿入）</a:t>
             </a:r>
             <a:endParaRPr lang="en-US" sz="1200" dirty="0"/>
           </a:p>
@@ -17042,7 +14242,7 @@
                 <a:ea typeface="メイリオ" panose="020B0604030504040204" pitchFamily="50" charset="-128"/>
                 <a:cs typeface="Meiryo" pitchFamily="34" charset="-120"/>
               </a:rPr>
-              <a:t>同一運営の「まあちる」と年齢帯を分担。ぽけっとは就学児〜高校生を受け持つ年長側の拠点。</a:t>
+              <a:t>東金駅至近＋送迎ありで、通所利便性は市内トップクラス。</a:t>
             </a:r>
             <a:endParaRPr lang="en-US" sz="1000" dirty="0">
               <a:latin typeface="メイリオ" panose="020B0604030504040204" pitchFamily="50" charset="-128"/>
@@ -17066,7 +14266,7 @@
                 <a:ea typeface="メイリオ" panose="020B0604030504040204" pitchFamily="50" charset="-128"/>
                 <a:cs typeface="Meiryo" pitchFamily="34" charset="-120"/>
               </a:rPr>
-              <a:t>月曜〜土曜受付とまあちる（火〜土）より稼働日が多く、土曜ニーズにも対応。</a:t>
+              <a:t>「運動療育」という明確なプログラム軸を打ち出し、Webでの情報発信量も市内最大級。</a:t>
             </a:r>
             <a:endParaRPr lang="en-US" sz="1000" dirty="0">
               <a:latin typeface="メイリオ" panose="020B0604030504040204" pitchFamily="50" charset="-128"/>
@@ -17090,7 +14290,7 @@
                 <a:ea typeface="メイリオ" panose="020B0604030504040204" pitchFamily="50" charset="-128"/>
                 <a:cs typeface="Meiryo" pitchFamily="34" charset="-120"/>
               </a:rPr>
-              <a:t>市街地中心部の立地で、駅・市役所方面からのアクセス性が高い。</a:t>
+              <a:t>同一法人の第2教室・相談支援事業所と連携し、相談から通所まで法人内で完結する導線を構築。</a:t>
             </a:r>
             <a:endParaRPr lang="en-US" sz="1000" dirty="0">
               <a:latin typeface="メイリオ" panose="020B0604030504040204" pitchFamily="50" charset="-128"/>
@@ -17114,7 +14314,7 @@
                 <a:ea typeface="メイリオ" panose="020B0604030504040204" pitchFamily="50" charset="-128"/>
                 <a:cs typeface="Meiryo" pitchFamily="34" charset="-120"/>
               </a:rPr>
-              <a:t>児発の指定はあるが在籍は就学児中心。未就学の療育ニーズは実質まあちるまたは他事業所へ流れる構造。</a:t>
+              <a:t>市内で最も認知度・集客力が高いと推察され、実質的なベンチマーク先となる事業所。</a:t>
             </a:r>
             <a:endParaRPr lang="en-US" sz="1000" dirty="0">
               <a:latin typeface="メイリオ" panose="020B0604030504040204" pitchFamily="50" charset="-128"/>
@@ -17268,7 +14468,7 @@
                 <a:ea typeface="Meiryo" pitchFamily="34" charset="-122"/>
                 <a:cs typeface="Meiryo" pitchFamily="34" charset="-120"/>
               </a:rPr>
-              <a:t>④ こどもプラス東金教室</a:t>
+              <a:t>④ こどもプラス第2東金教室</a:t>
             </a:r>
             <a:endParaRPr lang="en-US" sz="2100" dirty="0"/>
           </a:p>
@@ -17442,7 +14642,7 @@
                 <a:ea typeface="Meiryo" pitchFamily="34" charset="-122"/>
                 <a:cs typeface="Meiryo" pitchFamily="34" charset="-120"/>
               </a:rPr>
-              <a:t>こどもプラス東金教室（運営：株式会社ベストグロウ）</a:t>
+              <a:t>こどもプラス第2東金教室（運営：株式会社ベストグロウ）</a:t>
             </a:r>
             <a:endParaRPr lang="en-US" sz="1400" dirty="0"/>
           </a:p>
@@ -17548,7 +14748,7 @@
                 <a:ea typeface="Meiryo" pitchFamily="34" charset="-122"/>
                 <a:cs typeface="Meiryo" pitchFamily="34" charset="-120"/>
               </a:rPr>
-              <a:t>千葉県東金市東新宿18-1 酒造ビル105号（JR東金線 東金駅から徒歩約7〜9分）</a:t>
+              <a:t>千葉県東金市田間1丁目6番地4号</a:t>
             </a:r>
             <a:endParaRPr lang="en-US" sz="1050" dirty="0"/>
           </a:p>
@@ -17590,7 +14790,7 @@
                 <a:ea typeface="Meiryo" pitchFamily="34" charset="-122"/>
                 <a:cs typeface="Meiryo" pitchFamily="34" charset="-120"/>
               </a:rPr>
-              <a:t>0475-77-8577 ／ kp-tougane.com</a:t>
+              <a:t>要確認（法人代表 0475-77-8577）／ kp-daini-tougane.com</a:t>
             </a:r>
             <a:endParaRPr lang="en-US" sz="1050" dirty="0"/>
           </a:p>
@@ -17621,7 +14821,7 @@
                 <a:ea typeface="Meiryo" pitchFamily="34" charset="-122"/>
                 <a:cs typeface="Meiryo" pitchFamily="34" charset="-120"/>
               </a:rPr>
-              <a:t>サービス提供時間：</a:t>
+              <a:t>サービス提供時間／定員：</a:t>
             </a:r>
             <a:r>
               <a:rPr lang="en-US" sz="1050" dirty="0">
@@ -17632,7 +14832,7 @@
                 <a:ea typeface="Meiryo" pitchFamily="34" charset="-122"/>
                 <a:cs typeface="Meiryo" pitchFamily="34" charset="-120"/>
               </a:rPr>
-              <a:t>平日 9:00〜18:00　※送迎あり／開設：2015年7月1日</a:t>
+              <a:t>いずれも要確認</a:t>
             </a:r>
             <a:endParaRPr lang="en-US" sz="1050" dirty="0"/>
           </a:p>
@@ -17686,7 +14886,7 @@
                 <a:ea typeface="Meiryo" pitchFamily="34" charset="-122"/>
                 <a:cs typeface="Meiryo" pitchFamily="34" charset="-120"/>
               </a:rPr>
-              <a:t>運動療育を主軸に、学習・あそびを取り入れた総合的な療育を提供。</a:t>
+              <a:t>発達段階に合わせた支援と、楽しく取り組める運動療育を組み合わせて提供。</a:t>
             </a:r>
             <a:endParaRPr lang="en-US" sz="1050" dirty="0"/>
           </a:p>
@@ -17709,7 +14909,7 @@
                 <a:ea typeface="Meiryo" pitchFamily="34" charset="-122"/>
                 <a:cs typeface="Meiryo" pitchFamily="34" charset="-120"/>
               </a:rPr>
-              <a:t>・「柳沢運動プログラム」を導入。運動あそびが大脳活動の発達を促すという理論に基づくカリキュラム。</a:t>
+              <a:t>・脳の活性化につながる「柳沢運動プログラム」を取り入れ、毎日の活動を構成。</a:t>
             </a:r>
             <a:endParaRPr lang="en-US" sz="1050" dirty="0"/>
           </a:p>
@@ -17732,7 +14932,7 @@
                 <a:ea typeface="Meiryo" pitchFamily="34" charset="-122"/>
                 <a:cs typeface="Meiryo" pitchFamily="34" charset="-120"/>
               </a:rPr>
-              <a:t>・全身の筋力向上・けがの減少に加え、情緒の安定、切り替えの上達、ルール理解の定着を効果として掲げる。</a:t>
+              <a:t>・学習と運動あそびのバランスを取りながら、子どもの「できた！」を積み重ねることを重視。</a:t>
             </a:r>
             <a:endParaRPr lang="en-US" sz="1050" dirty="0"/>
           </a:p>
@@ -17755,7 +14955,7 @@
                 <a:ea typeface="Meiryo" pitchFamily="34" charset="-122"/>
                 <a:cs typeface="Meiryo" pitchFamily="34" charset="-120"/>
               </a:rPr>
-              <a:t>・運営法人は千葉県内に児発・放デイ・相談支援あわせて10事業所を展開（本社：東金市道庭925-1）。</a:t>
+              <a:t>・地域密着型の教室として、家庭と連携しながら安心して通える場所づくりを掲げる。</a:t>
             </a:r>
             <a:endParaRPr lang="en-US" sz="1050" dirty="0"/>
           </a:p>
@@ -17809,7 +15009,7 @@
                 <a:ea typeface="Meiryo" pitchFamily="34" charset="-122"/>
                 <a:cs typeface="Meiryo" pitchFamily="34" charset="-120"/>
               </a:rPr>
-              <a:t>公式HP kp-tougane.com／WAM NET／障害者ドットコム／児発ねっと</a:t>
+              <a:t>公式HP kp-daini-tougane.com／株式会社ベストグロウ公式（bestgrow-chiba.com）</a:t>
             </a:r>
             <a:endParaRPr lang="en-US" sz="1050" dirty="0"/>
           </a:p>
@@ -17851,7 +15051,7 @@
                 <a:ea typeface="Meiryo" pitchFamily="34" charset="-122"/>
                 <a:cs typeface="Meiryo" pitchFamily="34" charset="-120"/>
               </a:rPr>
-              <a:t>定員、現在の空き状況、送迎範囲、児童発達支援と放課後等デイサービスの時間帯区分</a:t>
+              <a:t>電話番号、サービス提供時間、定員、送迎範囲、第1教室との役割分担</a:t>
             </a:r>
             <a:endParaRPr lang="en-US" sz="1050" dirty="0"/>
           </a:p>
@@ -17920,7 +15120,7 @@
                 <a:ea typeface="Meiryo" pitchFamily="34" charset="-122"/>
                 <a:cs typeface="Meiryo" pitchFamily="34" charset="-120"/>
               </a:rPr>
-              <a:t>（公式HP kp-tougane.com 掲載の教室・運動あそびの写真を挿入）</a:t>
+              <a:t>（公式HP kp-daini-tougane.com 掲載の教室・活動風景の写真を挿入）</a:t>
             </a:r>
             <a:endParaRPr lang="en-US" sz="1200" dirty="0"/>
           </a:p>
@@ -18027,7 +15227,7 @@
                 <a:ea typeface="メイリオ" panose="020B0604030504040204" pitchFamily="50" charset="-128"/>
                 <a:cs typeface="Meiryo" pitchFamily="34" charset="-120"/>
               </a:rPr>
-              <a:t>東金駅至近＋送迎ありで、通所利便性は市内トップクラス。</a:t>
+              <a:t>③と同一法人・同一プログラムの2拠点目。田間エリア（市役所・ふれあいセンター側）をカバーし市内を面で展開。</a:t>
             </a:r>
             <a:endParaRPr lang="en-US" sz="1000" dirty="0">
               <a:latin typeface="メイリオ" panose="020B0604030504040204" pitchFamily="50" charset="-128"/>
@@ -18051,7 +15251,7 @@
                 <a:ea typeface="メイリオ" panose="020B0604030504040204" pitchFamily="50" charset="-128"/>
                 <a:cs typeface="Meiryo" pitchFamily="34" charset="-120"/>
               </a:rPr>
-              <a:t>「運動療育」という明確なプログラム軸を打ち出し、Webでの情報発信量も市内最大級。</a:t>
+              <a:t>公立の簡易マザーズホーム（田間3-9-1）と同一エリアにあり、公立からの移行導線が近い。</a:t>
             </a:r>
             <a:endParaRPr lang="en-US" sz="1000" dirty="0">
               <a:latin typeface="メイリオ" panose="020B0604030504040204" pitchFamily="50" charset="-128"/>
@@ -18075,7 +15275,7 @@
                 <a:ea typeface="メイリオ" panose="020B0604030504040204" pitchFamily="50" charset="-128"/>
                 <a:cs typeface="Meiryo" pitchFamily="34" charset="-120"/>
               </a:rPr>
-              <a:t>同一法人の第2教室・相談支援事業所と連携し、相談から通所まで法人内で完結する導線を構築。</a:t>
+              <a:t>第1教室が「運動主軸」なのに対し「学習と運動のバランス」を明示し、法人内でも訴求を微差別化。</a:t>
             </a:r>
             <a:endParaRPr lang="en-US" sz="1000" dirty="0">
               <a:latin typeface="メイリオ" panose="020B0604030504040204" pitchFamily="50" charset="-128"/>
@@ -18099,7 +15299,7 @@
                 <a:ea typeface="メイリオ" panose="020B0604030504040204" pitchFamily="50" charset="-128"/>
                 <a:cs typeface="Meiryo" pitchFamily="34" charset="-120"/>
               </a:rPr>
-              <a:t>市内で最も認知度・集客力が高いと推察され、実質的なベンチマーク先となる事業所。</a:t>
+              <a:t>田間エリアは公立・民間が近接する激戦区。差別化には時間帯と送迎範囲の設計が鍵となる。</a:t>
             </a:r>
             <a:endParaRPr lang="en-US" sz="1000" dirty="0">
               <a:latin typeface="メイリオ" panose="020B0604030504040204" pitchFamily="50" charset="-128"/>
@@ -18253,7 +15453,7 @@
                 <a:ea typeface="Meiryo" pitchFamily="34" charset="-122"/>
                 <a:cs typeface="Meiryo" pitchFamily="34" charset="-120"/>
               </a:rPr>
-              <a:t>⑤ こどもプラス第2東金教室</a:t>
+              <a:t>⑤ 基本塾優遊（市内6拠点）</a:t>
             </a:r>
             <a:endParaRPr lang="en-US" sz="2100" dirty="0"/>
           </a:p>
@@ -18427,7 +15627,7 @@
                 <a:ea typeface="Meiryo" pitchFamily="34" charset="-122"/>
                 <a:cs typeface="Meiryo" pitchFamily="34" charset="-120"/>
               </a:rPr>
-              <a:t>こどもプラス第2東金教室（運営：株式会社ベストグロウ）</a:t>
+              <a:t>基本塾優遊（運営：特定非営利活動法人 基本塾）　市内6拠点</a:t>
             </a:r>
             <a:endParaRPr lang="en-US" sz="1400" dirty="0"/>
           </a:p>
@@ -18461,7 +15661,7 @@
               <a:buNone/>
             </a:pPr>
             <a:r>
-              <a:rPr lang="en-US" sz="1050" b="1" dirty="0">
+              <a:rPr lang="en-US" sz="1000" b="1" dirty="0">
                 <a:solidFill>
                   <a:srgbClr val="2E6BB8"/>
                 </a:solidFill>
@@ -18472,7 +15672,7 @@
               <a:t>▶</a:t>
             </a:r>
             <a:r>
-              <a:rPr lang="en-US" sz="1050" b="1" dirty="0">
+              <a:rPr lang="en-US" sz="1000" b="1" dirty="0">
                 <a:solidFill>
                   <a:srgbClr val="222222"/>
                 </a:solidFill>
@@ -18483,7 +15683,7 @@
               <a:t>対象：</a:t>
             </a:r>
             <a:r>
-              <a:rPr lang="en-US" sz="1050" dirty="0">
+              <a:rPr lang="en-US" sz="1000" dirty="0">
                 <a:solidFill>
                   <a:srgbClr val="222222"/>
                 </a:solidFill>
@@ -18491,7 +15691,7 @@
                 <a:ea typeface="Meiryo" pitchFamily="34" charset="-122"/>
                 <a:cs typeface="Meiryo" pitchFamily="34" charset="-120"/>
               </a:rPr>
-              <a:t>未就学児（児童発達支援）／就学児（放課後等デイサービス）</a:t>
+              <a:t>未就学児（児発）／就学児（放デイ）　※松之郷は身体・知的・精神障がい・難病まで対応</a:t>
             </a:r>
             <a:endParaRPr lang="en-US" sz="1050" dirty="0"/>
           </a:p>
@@ -18503,7 +15703,7 @@
               <a:buNone/>
             </a:pPr>
             <a:r>
-              <a:rPr lang="en-US" sz="1050" b="1" dirty="0">
+              <a:rPr lang="en-US" sz="1000" b="1" dirty="0">
                 <a:solidFill>
                   <a:srgbClr val="2E6BB8"/>
                 </a:solidFill>
@@ -18514,7 +15714,7 @@
               <a:t>▶</a:t>
             </a:r>
             <a:r>
-              <a:rPr lang="en-US" sz="1050" b="1" dirty="0">
+              <a:rPr lang="en-US" sz="1000" b="1" dirty="0">
                 <a:solidFill>
                   <a:srgbClr val="222222"/>
                 </a:solidFill>
@@ -18522,10 +15722,10 @@
                 <a:ea typeface="Meiryo" pitchFamily="34" charset="-122"/>
                 <a:cs typeface="Meiryo" pitchFamily="34" charset="-120"/>
               </a:rPr>
-              <a:t>住所：</a:t>
-            </a:r>
-            <a:r>
-              <a:rPr lang="en-US" sz="1050" dirty="0">
+              <a:t>拠点／TEL：</a:t>
+            </a:r>
+            <a:r>
+              <a:rPr lang="en-US" sz="1000" dirty="0">
                 <a:solidFill>
                   <a:srgbClr val="222222"/>
                 </a:solidFill>
@@ -18533,91 +15733,7 @@
                 <a:ea typeface="Meiryo" pitchFamily="34" charset="-122"/>
                 <a:cs typeface="Meiryo" pitchFamily="34" charset="-120"/>
               </a:rPr>
-              <a:t>千葉県東金市田間1丁目6番地4号</a:t>
-            </a:r>
-            <a:endParaRPr lang="en-US" sz="1050" dirty="0"/>
-          </a:p>
-          <a:p>
-            <a:pPr marL="0" indent="0">
-              <a:lnSpc>
-                <a:spcPct val="103000"/>
-              </a:lnSpc>
-              <a:buNone/>
-            </a:pPr>
-            <a:r>
-              <a:rPr lang="en-US" sz="1050" b="1" dirty="0">
-                <a:solidFill>
-                  <a:srgbClr val="2E6BB8"/>
-                </a:solidFill>
-                <a:latin typeface="Meiryo" pitchFamily="34" charset="0"/>
-                <a:ea typeface="Meiryo" pitchFamily="34" charset="-122"/>
-                <a:cs typeface="Meiryo" pitchFamily="34" charset="-120"/>
-              </a:rPr>
-              <a:t>▶</a:t>
-            </a:r>
-            <a:r>
-              <a:rPr lang="en-US" sz="1050" b="1" dirty="0">
-                <a:solidFill>
-                  <a:srgbClr val="222222"/>
-                </a:solidFill>
-                <a:latin typeface="Meiryo" pitchFamily="34" charset="0"/>
-                <a:ea typeface="Meiryo" pitchFamily="34" charset="-122"/>
-                <a:cs typeface="Meiryo" pitchFamily="34" charset="-120"/>
-              </a:rPr>
-              <a:t>TEL／HP：</a:t>
-            </a:r>
-            <a:r>
-              <a:rPr lang="en-US" sz="1050" dirty="0">
-                <a:solidFill>
-                  <a:srgbClr val="222222"/>
-                </a:solidFill>
-                <a:latin typeface="Meiryo" pitchFamily="34" charset="0"/>
-                <a:ea typeface="Meiryo" pitchFamily="34" charset="-122"/>
-                <a:cs typeface="Meiryo" pitchFamily="34" charset="-120"/>
-              </a:rPr>
-              <a:t>要確認（法人代表 0475-77-8577）／ kp-daini-tougane.com</a:t>
-            </a:r>
-            <a:endParaRPr lang="en-US" sz="1050" dirty="0"/>
-          </a:p>
-          <a:p>
-            <a:pPr marL="0" indent="0">
-              <a:lnSpc>
-                <a:spcPct val="103000"/>
-              </a:lnSpc>
-              <a:buNone/>
-            </a:pPr>
-            <a:r>
-              <a:rPr lang="en-US" sz="1050" b="1" dirty="0">
-                <a:solidFill>
-                  <a:srgbClr val="2E6BB8"/>
-                </a:solidFill>
-                <a:latin typeface="Meiryo" pitchFamily="34" charset="0"/>
-                <a:ea typeface="Meiryo" pitchFamily="34" charset="-122"/>
-                <a:cs typeface="Meiryo" pitchFamily="34" charset="-120"/>
-              </a:rPr>
-              <a:t>▶</a:t>
-            </a:r>
-            <a:r>
-              <a:rPr lang="en-US" sz="1050" b="1" dirty="0">
-                <a:solidFill>
-                  <a:srgbClr val="222222"/>
-                </a:solidFill>
-                <a:latin typeface="Meiryo" pitchFamily="34" charset="0"/>
-                <a:ea typeface="Meiryo" pitchFamily="34" charset="-122"/>
-                <a:cs typeface="Meiryo" pitchFamily="34" charset="-120"/>
-              </a:rPr>
-              <a:t>サービス提供時間／定員：</a:t>
-            </a:r>
-            <a:r>
-              <a:rPr lang="en-US" sz="1050" dirty="0">
-                <a:solidFill>
-                  <a:srgbClr val="222222"/>
-                </a:solidFill>
-                <a:latin typeface="Meiryo" pitchFamily="34" charset="0"/>
-                <a:ea typeface="Meiryo" pitchFamily="34" charset="-122"/>
-                <a:cs typeface="Meiryo" pitchFamily="34" charset="-120"/>
-              </a:rPr>
-              <a:t>いずれも要確認</a:t>
+              <a:t>【日吉台】日吉台2-26-3／52-6414　【西が丘】日吉台5-15-2／51-6845　【松之郷】松之郷2423-1／51-4082</a:t>
             </a:r>
             <a:endParaRPr lang="en-US" sz="1050" dirty="0"/>
           </a:p>
@@ -18631,6 +15747,17 @@
               </a:spcAft>
               <a:buNone/>
             </a:pPr>
+            <a:r>
+              <a:rPr lang="en-US" sz="1000" dirty="0">
+                <a:solidFill>
+                  <a:srgbClr val="222222"/>
+                </a:solidFill>
+                <a:latin typeface="Meiryo" pitchFamily="34" charset="0"/>
+                <a:ea typeface="Meiryo" pitchFamily="34" charset="-122"/>
+                <a:cs typeface="Meiryo" pitchFamily="34" charset="-120"/>
+              </a:rPr>
+              <a:t xml:space="preserve">　　　　　　【八坂西】八坂台4-2-4／51-6631　【八坂台】八坂台5-11-1／51-5010　【八坂中央】八坂台4-3-14／要確認　※局番0475</a:t>
+            </a:r>
             <a:endParaRPr lang="en-US" sz="1050" dirty="0"/>
           </a:p>
           <a:p>
@@ -18641,7 +15768,7 @@
               <a:buNone/>
             </a:pPr>
             <a:r>
-              <a:rPr lang="en-US" sz="1050" b="1" dirty="0">
+              <a:rPr lang="en-US" sz="1000" b="1" dirty="0">
                 <a:solidFill>
                   <a:srgbClr val="2E6BB8"/>
                 </a:solidFill>
@@ -18652,7 +15779,7 @@
               <a:t>▶</a:t>
             </a:r>
             <a:r>
-              <a:rPr lang="en-US" sz="1050" b="1" dirty="0">
+              <a:rPr lang="en-US" sz="1000" b="1" dirty="0">
                 <a:solidFill>
                   <a:srgbClr val="222222"/>
                 </a:solidFill>
@@ -18660,10 +15787,10 @@
                 <a:ea typeface="Meiryo" pitchFamily="34" charset="-122"/>
                 <a:cs typeface="Meiryo" pitchFamily="34" charset="-120"/>
               </a:rPr>
-              <a:t>療育プログラムの特徴：</a:t>
-            </a:r>
-            <a:r>
-              <a:rPr lang="en-US" sz="1050" dirty="0">
+              <a:t>HP：</a:t>
+            </a:r>
+            <a:r>
+              <a:rPr lang="en-US" sz="1000" dirty="0">
                 <a:solidFill>
                   <a:srgbClr val="222222"/>
                 </a:solidFill>
@@ -18671,7 +15798,49 @@
                 <a:ea typeface="Meiryo" pitchFamily="34" charset="-122"/>
                 <a:cs typeface="Meiryo" pitchFamily="34" charset="-120"/>
               </a:rPr>
-              <a:t>発達段階に合わせた支援と、楽しく取り組める運動療育を組み合わせて提供。</a:t>
+              <a:t>kihonjuku-yuuyuu.com（info@kihonjuku-yuuyuu.com）</a:t>
+            </a:r>
+            <a:endParaRPr lang="en-US" sz="1050" dirty="0"/>
+          </a:p>
+          <a:p>
+            <a:pPr marL="0" indent="0">
+              <a:lnSpc>
+                <a:spcPct val="103000"/>
+              </a:lnSpc>
+              <a:buNone/>
+            </a:pPr>
+            <a:r>
+              <a:rPr lang="en-US" sz="1000" b="1" dirty="0">
+                <a:solidFill>
+                  <a:srgbClr val="2E6BB8"/>
+                </a:solidFill>
+                <a:latin typeface="Meiryo" pitchFamily="34" charset="0"/>
+                <a:ea typeface="Meiryo" pitchFamily="34" charset="-122"/>
+                <a:cs typeface="Meiryo" pitchFamily="34" charset="-120"/>
+              </a:rPr>
+              <a:t>▶</a:t>
+            </a:r>
+            <a:r>
+              <a:rPr lang="en-US" sz="1000" b="1" dirty="0">
+                <a:solidFill>
+                  <a:srgbClr val="222222"/>
+                </a:solidFill>
+                <a:latin typeface="Meiryo" pitchFamily="34" charset="0"/>
+                <a:ea typeface="Meiryo" pitchFamily="34" charset="-122"/>
+                <a:cs typeface="Meiryo" pitchFamily="34" charset="-120"/>
+              </a:rPr>
+              <a:t>提供時間／定員：</a:t>
+            </a:r>
+            <a:r>
+              <a:rPr lang="en-US" sz="1000" dirty="0">
+                <a:solidFill>
+                  <a:srgbClr val="222222"/>
+                </a:solidFill>
+                <a:latin typeface="Meiryo" pitchFamily="34" charset="0"/>
+                <a:ea typeface="Meiryo" pitchFamily="34" charset="-122"/>
+                <a:cs typeface="Meiryo" pitchFamily="34" charset="-120"/>
+              </a:rPr>
+              <a:t>9:00〜18:00（共通の目安）・日祝年末年始休（八坂台は土曜も定休）／松之郷10名・八坂台10名、他拠点は要確認</a:t>
             </a:r>
             <a:endParaRPr lang="en-US" sz="1050" dirty="0"/>
           </a:p>
@@ -18685,8 +15854,28 @@
               </a:spcAft>
               <a:buNone/>
             </a:pPr>
-            <a:r>
-              <a:rPr lang="en-US" sz="1050" dirty="0">
+            <a:endParaRPr lang="en-US" sz="1050" dirty="0"/>
+          </a:p>
+          <a:p>
+            <a:pPr marL="0" indent="0">
+              <a:lnSpc>
+                <a:spcPct val="103000"/>
+              </a:lnSpc>
+              <a:buNone/>
+            </a:pPr>
+            <a:r>
+              <a:rPr lang="en-US" sz="1000" b="1" dirty="0">
+                <a:solidFill>
+                  <a:srgbClr val="2E6BB8"/>
+                </a:solidFill>
+                <a:latin typeface="Meiryo" pitchFamily="34" charset="0"/>
+                <a:ea typeface="Meiryo" pitchFamily="34" charset="-122"/>
+                <a:cs typeface="Meiryo" pitchFamily="34" charset="-120"/>
+              </a:rPr>
+              <a:t>▶</a:t>
+            </a:r>
+            <a:r>
+              <a:rPr lang="en-US" sz="1000" b="1" dirty="0">
                 <a:solidFill>
                   <a:srgbClr val="222222"/>
                 </a:solidFill>
@@ -18694,7 +15883,18 @@
                 <a:ea typeface="Meiryo" pitchFamily="34" charset="-122"/>
                 <a:cs typeface="Meiryo" pitchFamily="34" charset="-120"/>
               </a:rPr>
-              <a:t>・脳の活性化につながる「柳沢運動プログラム」を取り入れ、毎日の活動を構成。</a:t>
+              <a:t>療育プログラムの特徴：</a:t>
+            </a:r>
+            <a:r>
+              <a:rPr lang="en-US" sz="1000" dirty="0">
+                <a:solidFill>
+                  <a:srgbClr val="222222"/>
+                </a:solidFill>
+                <a:latin typeface="Meiryo" pitchFamily="34" charset="0"/>
+                <a:ea typeface="Meiryo" pitchFamily="34" charset="-122"/>
+                <a:cs typeface="Meiryo" pitchFamily="34" charset="-120"/>
+              </a:rPr>
+              <a:t>個々のニーズに応じた個別支援プログラムと「10の活動」を全拠点共通の基本形とする。</a:t>
             </a:r>
             <a:endParaRPr lang="en-US" sz="1050" dirty="0"/>
           </a:p>
@@ -18709,7 +15909,7 @@
               <a:buNone/>
             </a:pPr>
             <a:r>
-              <a:rPr lang="en-US" sz="1050" dirty="0">
+              <a:rPr lang="en-US" sz="1000" dirty="0">
                 <a:solidFill>
                   <a:srgbClr val="222222"/>
                 </a:solidFill>
@@ -18717,7 +15917,7 @@
                 <a:ea typeface="Meiryo" pitchFamily="34" charset="-122"/>
                 <a:cs typeface="Meiryo" pitchFamily="34" charset="-120"/>
               </a:rPr>
-              <a:t>・学習と運動あそびのバランスを取りながら、子どもの「できた！」を積み重ねることを重視。</a:t>
+              <a:t>・日吉台＝園庭あり。リトミック・体操・英語教育。校長／園長経験者、特別支援教育士、心理検査士、言語聴覚士が在籍。</a:t>
             </a:r>
             <a:endParaRPr lang="en-US" sz="1050" dirty="0"/>
           </a:p>
@@ -18732,7 +15932,7 @@
               <a:buNone/>
             </a:pPr>
             <a:r>
-              <a:rPr lang="en-US" sz="1050" dirty="0">
+              <a:rPr lang="en-US" sz="1000" dirty="0">
                 <a:solidFill>
                   <a:srgbClr val="222222"/>
                 </a:solidFill>
@@ -18740,7 +15940,7 @@
                 <a:ea typeface="Meiryo" pitchFamily="34" charset="-122"/>
                 <a:cs typeface="Meiryo" pitchFamily="34" charset="-120"/>
               </a:rPr>
-              <a:t>・地域密着型の教室として、家庭と連携しながら安心して通える場所づくりを掲げる。</a:t>
+              <a:t>・松之郷＝アートセラピー・運動・社会性のグループ活動／八坂台＝少人数の活動・制作、元サッカー選手の「サッカー療育」。</a:t>
             </a:r>
             <a:endParaRPr lang="en-US" sz="1050" dirty="0"/>
           </a:p>
@@ -18754,6 +15954,29 @@
               </a:spcAft>
               <a:buNone/>
             </a:pPr>
+            <a:r>
+              <a:rPr lang="en-US" sz="1000" dirty="0">
+                <a:solidFill>
+                  <a:srgbClr val="222222"/>
+                </a:solidFill>
+                <a:latin typeface="Meiryo" pitchFamily="34" charset="0"/>
+                <a:ea typeface="Meiryo" pitchFamily="34" charset="-122"/>
+                <a:cs typeface="Meiryo" pitchFamily="34" charset="-120"/>
+              </a:rPr>
+              <a:t>・児発一覧で確認できるのは 日吉台・西が丘・松之郷・八坂西 の4拠点。八坂台・八坂中央は放デイ掲載のみで児発指定は要確認。</a:t>
+            </a:r>
+            <a:endParaRPr lang="en-US" sz="1050" dirty="0"/>
+          </a:p>
+          <a:p>
+            <a:pPr marL="0" indent="0">
+              <a:lnSpc>
+                <a:spcPct val="103000"/>
+              </a:lnSpc>
+              <a:spcAft>
+                <a:spcPts val="500"/>
+              </a:spcAft>
+              <a:buNone/>
+            </a:pPr>
             <a:endParaRPr lang="en-US" sz="1050" dirty="0"/>
           </a:p>
           <a:p>
@@ -18764,7 +15987,7 @@
               <a:buNone/>
             </a:pPr>
             <a:r>
-              <a:rPr lang="en-US" sz="1050" b="1" dirty="0">
+              <a:rPr lang="en-US" sz="1000" b="1" dirty="0">
                 <a:solidFill>
                   <a:srgbClr val="2E6BB8"/>
                 </a:solidFill>
@@ -18775,7 +15998,7 @@
               <a:t>▶</a:t>
             </a:r>
             <a:r>
-              <a:rPr lang="en-US" sz="1050" b="1" dirty="0">
+              <a:rPr lang="en-US" sz="1000" b="1" dirty="0">
                 <a:solidFill>
                   <a:srgbClr val="222222"/>
                 </a:solidFill>
@@ -18786,7 +16009,7 @@
               <a:t>出典：</a:t>
             </a:r>
             <a:r>
-              <a:rPr lang="en-US" sz="1050" dirty="0">
+              <a:rPr lang="en-US" sz="1000" dirty="0">
                 <a:solidFill>
                   <a:srgbClr val="222222"/>
                 </a:solidFill>
@@ -18794,7 +16017,7 @@
                 <a:ea typeface="Meiryo" pitchFamily="34" charset="-122"/>
                 <a:cs typeface="Meiryo" pitchFamily="34" charset="-120"/>
               </a:rPr>
-              <a:t>公式HP kp-daini-tougane.com／株式会社ベストグロウ公式（bestgrow-chiba.com）</a:t>
+              <a:t>公式HP kihonjuku-yuuyuu.com／ホイシル／LITALICO発達ナビ／児発ねっと／ADDS kikotto</a:t>
             </a:r>
             <a:endParaRPr lang="en-US" sz="1050" dirty="0"/>
           </a:p>
@@ -18806,7 +16029,7 @@
               <a:buNone/>
             </a:pPr>
             <a:r>
-              <a:rPr lang="en-US" sz="1050" b="1" dirty="0">
+              <a:rPr lang="en-US" sz="1000" b="1" dirty="0">
                 <a:solidFill>
                   <a:srgbClr val="2E6BB8"/>
                 </a:solidFill>
@@ -18817,7 +16040,7 @@
               <a:t>▶</a:t>
             </a:r>
             <a:r>
-              <a:rPr lang="en-US" sz="1050" b="1" dirty="0">
+              <a:rPr lang="en-US" sz="1000" b="1" dirty="0">
                 <a:solidFill>
                   <a:srgbClr val="222222"/>
                 </a:solidFill>
@@ -18828,7 +16051,7 @@
               <a:t>要確認事項：</a:t>
             </a:r>
             <a:r>
-              <a:rPr lang="en-US" sz="1050" dirty="0">
+              <a:rPr lang="en-US" sz="1000" dirty="0">
                 <a:solidFill>
                   <a:srgbClr val="222222"/>
                 </a:solidFill>
@@ -18836,7 +16059,7 @@
                 <a:ea typeface="Meiryo" pitchFamily="34" charset="-122"/>
                 <a:cs typeface="Meiryo" pitchFamily="34" charset="-120"/>
               </a:rPr>
-              <a:t>電話番号、サービス提供時間、定員、送迎範囲、第1教室との役割分担</a:t>
+              <a:t>日吉台・西が丘・八坂西・八坂中央の定員、児発と放デイの時間帯区分、送迎範囲、八坂台・八坂中央の児発指定</a:t>
             </a:r>
             <a:endParaRPr lang="en-US" sz="1050" dirty="0"/>
           </a:p>
@@ -18905,7 +16128,7 @@
                 <a:ea typeface="Meiryo" pitchFamily="34" charset="-122"/>
                 <a:cs typeface="Meiryo" pitchFamily="34" charset="-120"/>
               </a:rPr>
-              <a:t>（公式HP kp-daini-tougane.com 掲載の教室・活動風景の写真を挿入）</a:t>
+              <a:t>（公式HP kihonjuku-yuuyuu.com 掲載の各拠点の教室・園庭・活動写真を挿入）</a:t>
             </a:r>
             <a:endParaRPr lang="en-US" sz="1200" dirty="0"/>
           </a:p>
@@ -19012,7 +16235,7 @@
                 <a:ea typeface="メイリオ" panose="020B0604030504040204" pitchFamily="50" charset="-128"/>
                 <a:cs typeface="Meiryo" pitchFamily="34" charset="-120"/>
               </a:rPr>
-              <a:t>④と同一法人・同一プログラムの2拠点目。田間エリア（市役所・ふれあいセンター側）をカバーし市内を面で展開。</a:t>
+              <a:t>市内14拠点のうち6拠点を占める最大手。1法人で東金市の児童発達支援供給の4割超を握る。</a:t>
             </a:r>
             <a:endParaRPr lang="en-US" sz="1000" dirty="0">
               <a:latin typeface="メイリオ" panose="020B0604030504040204" pitchFamily="50" charset="-128"/>
@@ -19036,7 +16259,7 @@
                 <a:ea typeface="メイリオ" panose="020B0604030504040204" pitchFamily="50" charset="-128"/>
                 <a:cs typeface="Meiryo" pitchFamily="34" charset="-120"/>
               </a:rPr>
-              <a:t>公立の簡易マザーズホーム（田間3-9-1）と同一エリアにあり、公立からの移行導線が近い。</a:t>
+              <a:t>教育畑の専門人材（校長・園長経験者、言語聴覚士、心理検査士）の厚みが最大の差別化要素で、参入障壁も高い。</a:t>
             </a:r>
             <a:endParaRPr lang="en-US" sz="1000" dirty="0">
               <a:latin typeface="メイリオ" panose="020B0604030504040204" pitchFamily="50" charset="-128"/>
@@ -19060,7 +16283,7 @@
                 <a:ea typeface="メイリオ" panose="020B0604030504040204" pitchFamily="50" charset="-128"/>
                 <a:cs typeface="Meiryo" pitchFamily="34" charset="-120"/>
               </a:rPr>
-              <a:t>第1教室が「運動主軸」なのに対し「学習と運動のバランス」を明示し、法人内でも訴求を微差別化。</a:t>
+              <a:t>日吉台エリアに2拠点（日吉台・西が丘）、八坂台エリアに3拠点を集中配置。小規模拠点を面で並べて総定員を確保するモデル。</a:t>
             </a:r>
             <a:endParaRPr lang="en-US" sz="1000" dirty="0">
               <a:latin typeface="メイリオ" panose="020B0604030504040204" pitchFamily="50" charset="-128"/>
@@ -19084,7 +16307,7 @@
                 <a:ea typeface="メイリオ" panose="020B0604030504040204" pitchFamily="50" charset="-128"/>
                 <a:cs typeface="Meiryo" pitchFamily="34" charset="-120"/>
               </a:rPr>
-              <a:t>田間エリアは公立・民間が近接する激戦区。差別化には時間帯と送迎範囲の設計が鍵となる。</a:t>
+              <a:t>日吉台・八坂台への新規出店は基本塾との正面競合。土曜（八坂台は定休）や送迎圏の隙間が狙い目となる。</a:t>
             </a:r>
             <a:endParaRPr lang="en-US" sz="1000" dirty="0">
               <a:latin typeface="メイリオ" panose="020B0604030504040204" pitchFamily="50" charset="-128"/>
@@ -19238,7 +16461,7 @@
                 <a:ea typeface="Meiryo" pitchFamily="34" charset="-122"/>
                 <a:cs typeface="Meiryo" pitchFamily="34" charset="-120"/>
               </a:rPr>
-              <a:t>⑥ 基本塾優遊（市内6拠点）</a:t>
+              <a:t>⑥ エスポワール ／ エスポワール第2</a:t>
             </a:r>
             <a:endParaRPr lang="en-US" sz="2100" dirty="0"/>
           </a:p>
@@ -19412,7 +16635,7 @@
                 <a:ea typeface="Meiryo" pitchFamily="34" charset="-122"/>
                 <a:cs typeface="Meiryo" pitchFamily="34" charset="-120"/>
               </a:rPr>
-              <a:t>基本塾優遊（運営：特定非営利活動法人 基本塾）　市内6拠点</a:t>
+              <a:t>エスポワール・エスポワール第2（児童発達支援・放課後等デイサービス）</a:t>
             </a:r>
             <a:endParaRPr lang="en-US" sz="1400" dirty="0"/>
           </a:p>
@@ -19446,7 +16669,7 @@
               <a:buNone/>
             </a:pPr>
             <a:r>
-              <a:rPr lang="en-US" sz="1000" b="1" dirty="0">
+              <a:rPr lang="en-US" sz="1050" b="1" dirty="0">
                 <a:solidFill>
                   <a:srgbClr val="2E6BB8"/>
                 </a:solidFill>
@@ -19457,7 +16680,7 @@
               <a:t>▶</a:t>
             </a:r>
             <a:r>
-              <a:rPr lang="en-US" sz="1000" b="1" dirty="0">
+              <a:rPr lang="en-US" sz="1050" b="1" dirty="0">
                 <a:solidFill>
                   <a:srgbClr val="222222"/>
                 </a:solidFill>
@@ -19468,7 +16691,7 @@
               <a:t>対象：</a:t>
             </a:r>
             <a:r>
-              <a:rPr lang="en-US" sz="1000" dirty="0">
+              <a:rPr lang="en-US" sz="1050" dirty="0">
                 <a:solidFill>
                   <a:srgbClr val="222222"/>
                 </a:solidFill>
@@ -19476,7 +16699,7 @@
                 <a:ea typeface="Meiryo" pitchFamily="34" charset="-122"/>
                 <a:cs typeface="Meiryo" pitchFamily="34" charset="-120"/>
               </a:rPr>
-              <a:t>未就学児（児発）／就学児（放デイ）　※松之郷は身体・知的・精神障がい・難病まで対応</a:t>
+              <a:t>未就学児（児童発達支援）／就学児（放課後等デイサービス）</a:t>
             </a:r>
             <a:endParaRPr lang="en-US" sz="1050" dirty="0"/>
           </a:p>
@@ -19488,7 +16711,7 @@
               <a:buNone/>
             </a:pPr>
             <a:r>
-              <a:rPr lang="en-US" sz="1000" b="1" dirty="0">
+              <a:rPr lang="en-US" sz="1050" b="1" dirty="0">
                 <a:solidFill>
                   <a:srgbClr val="2E6BB8"/>
                 </a:solidFill>
@@ -19499,7 +16722,7 @@
               <a:t>▶</a:t>
             </a:r>
             <a:r>
-              <a:rPr lang="en-US" sz="1000" b="1" dirty="0">
+              <a:rPr lang="en-US" sz="1050" b="1" dirty="0">
                 <a:solidFill>
                   <a:srgbClr val="222222"/>
                 </a:solidFill>
@@ -19507,10 +16730,10 @@
                 <a:ea typeface="Meiryo" pitchFamily="34" charset="-122"/>
                 <a:cs typeface="Meiryo" pitchFamily="34" charset="-120"/>
               </a:rPr>
-              <a:t>拠点／TEL：</a:t>
-            </a:r>
-            <a:r>
-              <a:rPr lang="en-US" sz="1000" dirty="0">
+              <a:t>住所：</a:t>
+            </a:r>
+            <a:r>
+              <a:rPr lang="en-US" sz="1050" dirty="0">
                 <a:solidFill>
                   <a:srgbClr val="222222"/>
                 </a:solidFill>
@@ -19518,7 +16741,7 @@
                 <a:ea typeface="Meiryo" pitchFamily="34" charset="-122"/>
                 <a:cs typeface="Meiryo" pitchFamily="34" charset="-120"/>
               </a:rPr>
-              <a:t>【日吉台】日吉台2-26-3／52-6414　【西が丘】日吉台5-15-2／51-6845　【松之郷】松之郷2423-1／51-4082</a:t>
+              <a:t>【エスポワール】〒283-0005 東金市田間2-56-10（JR東金線 東金駅から徒歩約16分）</a:t>
             </a:r>
             <a:endParaRPr lang="en-US" sz="1050" dirty="0"/>
           </a:p>
@@ -19533,7 +16756,7 @@
               <a:buNone/>
             </a:pPr>
             <a:r>
-              <a:rPr lang="en-US" sz="1000" dirty="0">
+              <a:rPr lang="en-US" sz="1050" dirty="0">
                 <a:solidFill>
                   <a:srgbClr val="222222"/>
                 </a:solidFill>
@@ -19541,7 +16764,7 @@
                 <a:ea typeface="Meiryo" pitchFamily="34" charset="-122"/>
                 <a:cs typeface="Meiryo" pitchFamily="34" charset="-120"/>
               </a:rPr>
-              <a:t xml:space="preserve">　　　　　　【八坂西】八坂台4-2-4／51-6631　【八坂台】八坂台5-11-1／51-5010　【八坂中央】八坂台4-3-14／要確認　※局番0475</a:t>
+              <a:t xml:space="preserve">　　　　　　【エスポワール第2】東金市 求名駅から約229m（正確な所在地は要確認）</a:t>
             </a:r>
             <a:endParaRPr lang="en-US" sz="1050" dirty="0"/>
           </a:p>
@@ -19553,7 +16776,7 @@
               <a:buNone/>
             </a:pPr>
             <a:r>
-              <a:rPr lang="en-US" sz="1000" b="1" dirty="0">
+              <a:rPr lang="en-US" sz="1050" b="1" dirty="0">
                 <a:solidFill>
                   <a:srgbClr val="2E6BB8"/>
                 </a:solidFill>
@@ -19564,7 +16787,7 @@
               <a:t>▶</a:t>
             </a:r>
             <a:r>
-              <a:rPr lang="en-US" sz="1000" b="1" dirty="0">
+              <a:rPr lang="en-US" sz="1050" b="1" dirty="0">
                 <a:solidFill>
                   <a:srgbClr val="222222"/>
                 </a:solidFill>
@@ -19572,10 +16795,10 @@
                 <a:ea typeface="Meiryo" pitchFamily="34" charset="-122"/>
                 <a:cs typeface="Meiryo" pitchFamily="34" charset="-120"/>
               </a:rPr>
-              <a:t>HP：</a:t>
-            </a:r>
-            <a:r>
-              <a:rPr lang="en-US" sz="1000" dirty="0">
+              <a:t>TEL／HP：</a:t>
+            </a:r>
+            <a:r>
+              <a:rPr lang="en-US" sz="1050" dirty="0">
                 <a:solidFill>
                   <a:srgbClr val="222222"/>
                 </a:solidFill>
@@ -19583,7 +16806,7 @@
                 <a:ea typeface="Meiryo" pitchFamily="34" charset="-122"/>
                 <a:cs typeface="Meiryo" pitchFamily="34" charset="-120"/>
               </a:rPr>
-              <a:t>kihonjuku-yuuyuu.com（info@kihonjuku-yuuyuu.com）</a:t>
+              <a:t>050-3145-9731（エスポワール）／ 公開HPは確認できず。ホイシル・発達ナビに事業所情報を掲載</a:t>
             </a:r>
             <a:endParaRPr lang="en-US" sz="1050" dirty="0"/>
           </a:p>
@@ -19595,7 +16818,7 @@
               <a:buNone/>
             </a:pPr>
             <a:r>
-              <a:rPr lang="en-US" sz="1000" b="1" dirty="0">
+              <a:rPr lang="en-US" sz="1050" b="1" dirty="0">
                 <a:solidFill>
                   <a:srgbClr val="2E6BB8"/>
                 </a:solidFill>
@@ -19606,7 +16829,7 @@
               <a:t>▶</a:t>
             </a:r>
             <a:r>
-              <a:rPr lang="en-US" sz="1000" b="1" dirty="0">
+              <a:rPr lang="en-US" sz="1050" b="1" dirty="0">
                 <a:solidFill>
                   <a:srgbClr val="222222"/>
                 </a:solidFill>
@@ -19614,10 +16837,10 @@
                 <a:ea typeface="Meiryo" pitchFamily="34" charset="-122"/>
                 <a:cs typeface="Meiryo" pitchFamily="34" charset="-120"/>
               </a:rPr>
-              <a:t>提供時間／定員：</a:t>
-            </a:r>
-            <a:r>
-              <a:rPr lang="en-US" sz="1000" dirty="0">
+              <a:t>サービス提供時間／定員：</a:t>
+            </a:r>
+            <a:r>
+              <a:rPr lang="en-US" sz="1050" dirty="0">
                 <a:solidFill>
                   <a:srgbClr val="222222"/>
                 </a:solidFill>
@@ -19625,7 +16848,49 @@
                 <a:ea typeface="Meiryo" pitchFamily="34" charset="-122"/>
                 <a:cs typeface="Meiryo" pitchFamily="34" charset="-120"/>
               </a:rPr>
-              <a:t>9:00〜18:00（共通の目安）・日祝年末年始休（八坂台は土曜も定休）／松之郷10名・八坂台10名、他拠点は要確認</a:t>
+              <a:t>いずれも要確認</a:t>
+            </a:r>
+            <a:endParaRPr lang="en-US" sz="1050" dirty="0"/>
+          </a:p>
+          <a:p>
+            <a:pPr marL="0" indent="0">
+              <a:lnSpc>
+                <a:spcPct val="103000"/>
+              </a:lnSpc>
+              <a:buNone/>
+            </a:pPr>
+            <a:r>
+              <a:rPr lang="en-US" sz="1050" b="1" dirty="0">
+                <a:solidFill>
+                  <a:srgbClr val="2E6BB8"/>
+                </a:solidFill>
+                <a:latin typeface="Meiryo" pitchFamily="34" charset="0"/>
+                <a:ea typeface="Meiryo" pitchFamily="34" charset="-122"/>
+                <a:cs typeface="Meiryo" pitchFamily="34" charset="-120"/>
+              </a:rPr>
+              <a:t>▶</a:t>
+            </a:r>
+            <a:r>
+              <a:rPr lang="en-US" sz="1050" b="1" dirty="0">
+                <a:solidFill>
+                  <a:srgbClr val="222222"/>
+                </a:solidFill>
+                <a:latin typeface="Meiryo" pitchFamily="34" charset="0"/>
+                <a:ea typeface="Meiryo" pitchFamily="34" charset="-122"/>
+                <a:cs typeface="Meiryo" pitchFamily="34" charset="-120"/>
+              </a:rPr>
+              <a:t>空き状況：</a:t>
+            </a:r>
+            <a:r>
+              <a:rPr lang="en-US" sz="1050" dirty="0">
+                <a:solidFill>
+                  <a:srgbClr val="222222"/>
+                </a:solidFill>
+                <a:latin typeface="Meiryo" pitchFamily="34" charset="0"/>
+                <a:ea typeface="Meiryo" pitchFamily="34" charset="-122"/>
+                <a:cs typeface="Meiryo" pitchFamily="34" charset="-120"/>
+              </a:rPr>
+              <a:t>LITALICO発達ナビ上で「空きあり」表示（2026年8月時点）</a:t>
             </a:r>
             <a:endParaRPr lang="en-US" sz="1050" dirty="0"/>
           </a:p>
@@ -19649,7 +16914,7 @@
               <a:buNone/>
             </a:pPr>
             <a:r>
-              <a:rPr lang="en-US" sz="1000" b="1" dirty="0">
+              <a:rPr lang="en-US" sz="1050" b="1" dirty="0">
                 <a:solidFill>
                   <a:srgbClr val="2E6BB8"/>
                 </a:solidFill>
@@ -19660,7 +16925,7 @@
               <a:t>▶</a:t>
             </a:r>
             <a:r>
-              <a:rPr lang="en-US" sz="1000" b="1" dirty="0">
+              <a:rPr lang="en-US" sz="1050" b="1" dirty="0">
                 <a:solidFill>
                   <a:srgbClr val="222222"/>
                 </a:solidFill>
@@ -19671,7 +16936,7 @@
               <a:t>療育プログラムの特徴：</a:t>
             </a:r>
             <a:r>
-              <a:rPr lang="en-US" sz="1000" dirty="0">
+              <a:rPr lang="en-US" sz="1050" dirty="0">
                 <a:solidFill>
                   <a:srgbClr val="222222"/>
                 </a:solidFill>
@@ -19679,7 +16944,7 @@
                 <a:ea typeface="Meiryo" pitchFamily="34" charset="-122"/>
                 <a:cs typeface="Meiryo" pitchFamily="34" charset="-120"/>
               </a:rPr>
-              <a:t>個々のニーズに応じた個別支援プログラムと「10の活動」を全拠点共通の基本形とする。</a:t>
+              <a:t>児童発達支援と放課後等デイサービスを併設。プログラム内容は公開情報からは確認できず要確認。</a:t>
             </a:r>
             <a:endParaRPr lang="en-US" sz="1050" dirty="0"/>
           </a:p>
@@ -19694,7 +16959,7 @@
               <a:buNone/>
             </a:pPr>
             <a:r>
-              <a:rPr lang="en-US" sz="1000" dirty="0">
+              <a:rPr lang="en-US" sz="1050" dirty="0">
                 <a:solidFill>
                   <a:srgbClr val="222222"/>
                 </a:solidFill>
@@ -19702,7 +16967,7 @@
                 <a:ea typeface="Meiryo" pitchFamily="34" charset="-122"/>
                 <a:cs typeface="Meiryo" pitchFamily="34" charset="-120"/>
               </a:rPr>
-              <a:t>・日吉台＝園庭あり。リトミック・体操・英語教育。校長／園長経験者、特別支援教育士、心理検査士、言語聴覚士が在籍。</a:t>
+              <a:t>・市内2拠点体制。第2は求名駅至近に立地し、市南西部（求名・丘山方面）をカバー。</a:t>
             </a:r>
             <a:endParaRPr lang="en-US" sz="1050" dirty="0"/>
           </a:p>
@@ -19716,52 +16981,6 @@
               </a:spcAft>
               <a:buNone/>
             </a:pPr>
-            <a:r>
-              <a:rPr lang="en-US" sz="1000" dirty="0">
-                <a:solidFill>
-                  <a:srgbClr val="222222"/>
-                </a:solidFill>
-                <a:latin typeface="Meiryo" pitchFamily="34" charset="0"/>
-                <a:ea typeface="Meiryo" pitchFamily="34" charset="-122"/>
-                <a:cs typeface="Meiryo" pitchFamily="34" charset="-120"/>
-              </a:rPr>
-              <a:t>・松之郷＝アートセラピー・運動・社会性のグループ活動／八坂台＝少人数の活動・制作、元サッカー選手の「サッカー療育」。</a:t>
-            </a:r>
-            <a:endParaRPr lang="en-US" sz="1050" dirty="0"/>
-          </a:p>
-          <a:p>
-            <a:pPr marL="0" indent="0">
-              <a:lnSpc>
-                <a:spcPct val="103000"/>
-              </a:lnSpc>
-              <a:spcAft>
-                <a:spcPts val="500"/>
-              </a:spcAft>
-              <a:buNone/>
-            </a:pPr>
-            <a:r>
-              <a:rPr lang="en-US" sz="1000" dirty="0">
-                <a:solidFill>
-                  <a:srgbClr val="222222"/>
-                </a:solidFill>
-                <a:latin typeface="Meiryo" pitchFamily="34" charset="0"/>
-                <a:ea typeface="Meiryo" pitchFamily="34" charset="-122"/>
-                <a:cs typeface="Meiryo" pitchFamily="34" charset="-120"/>
-              </a:rPr>
-              <a:t>・児発一覧で確認できるのは 日吉台・西が丘・松之郷・八坂西 の4拠点。八坂台・八坂中央は放デイ掲載のみで児発指定は要確認。</a:t>
-            </a:r>
-            <a:endParaRPr lang="en-US" sz="1050" dirty="0"/>
-          </a:p>
-          <a:p>
-            <a:pPr marL="0" indent="0">
-              <a:lnSpc>
-                <a:spcPct val="103000"/>
-              </a:lnSpc>
-              <a:spcAft>
-                <a:spcPts val="500"/>
-              </a:spcAft>
-              <a:buNone/>
-            </a:pPr>
             <a:endParaRPr lang="en-US" sz="1050" dirty="0"/>
           </a:p>
           <a:p>
@@ -19772,7 +16991,7 @@
               <a:buNone/>
             </a:pPr>
             <a:r>
-              <a:rPr lang="en-US" sz="1000" b="1" dirty="0">
+              <a:rPr lang="en-US" sz="1050" b="1" dirty="0">
                 <a:solidFill>
                   <a:srgbClr val="2E6BB8"/>
                 </a:solidFill>
@@ -19783,7 +17002,7 @@
               <a:t>▶</a:t>
             </a:r>
             <a:r>
-              <a:rPr lang="en-US" sz="1000" b="1" dirty="0">
+              <a:rPr lang="en-US" sz="1050" b="1" dirty="0">
                 <a:solidFill>
                   <a:srgbClr val="222222"/>
                 </a:solidFill>
@@ -19794,7 +17013,7 @@
               <a:t>出典：</a:t>
             </a:r>
             <a:r>
-              <a:rPr lang="en-US" sz="1000" dirty="0">
+              <a:rPr lang="en-US" sz="1050" dirty="0">
                 <a:solidFill>
                   <a:srgbClr val="222222"/>
                 </a:solidFill>
@@ -19802,7 +17021,7 @@
                 <a:ea typeface="Meiryo" pitchFamily="34" charset="-122"/>
                 <a:cs typeface="Meiryo" pitchFamily="34" charset="-120"/>
               </a:rPr>
-              <a:t>公式HP kihonjuku-yuuyuu.com／ホイシル／LITALICO発達ナビ／児発ねっと／ADDS kikotto</a:t>
+              <a:t>ホイシル 東金市 児童発達支援一覧／LITALICO発達ナビ／障害者ドットコム</a:t>
             </a:r>
             <a:endParaRPr lang="en-US" sz="1050" dirty="0"/>
           </a:p>
@@ -19814,7 +17033,7 @@
               <a:buNone/>
             </a:pPr>
             <a:r>
-              <a:rPr lang="en-US" sz="1000" b="1" dirty="0">
+              <a:rPr lang="en-US" sz="1050" b="1" dirty="0">
                 <a:solidFill>
                   <a:srgbClr val="2E6BB8"/>
                 </a:solidFill>
@@ -19825,7 +17044,7 @@
               <a:t>▶</a:t>
             </a:r>
             <a:r>
-              <a:rPr lang="en-US" sz="1000" b="1" dirty="0">
+              <a:rPr lang="en-US" sz="1050" b="1" dirty="0">
                 <a:solidFill>
                   <a:srgbClr val="222222"/>
                 </a:solidFill>
@@ -19836,7 +17055,7 @@
               <a:t>要確認事項：</a:t>
             </a:r>
             <a:r>
-              <a:rPr lang="en-US" sz="1000" dirty="0">
+              <a:rPr lang="en-US" sz="1050" dirty="0">
                 <a:solidFill>
                   <a:srgbClr val="222222"/>
                 </a:solidFill>
@@ -19844,7 +17063,7 @@
                 <a:ea typeface="Meiryo" pitchFamily="34" charset="-122"/>
                 <a:cs typeface="Meiryo" pitchFamily="34" charset="-120"/>
               </a:rPr>
-              <a:t>日吉台・西が丘・八坂西・八坂中央の定員、児発と放デイの時間帯区分、送迎範囲、八坂台・八坂中央の児発指定</a:t>
+              <a:t>運営法人、エスポワール第2の正確な所在地・TEL、両拠点の提供時間・定員、送迎の有無</a:t>
             </a:r>
             <a:endParaRPr lang="en-US" sz="1050" dirty="0"/>
           </a:p>
@@ -19913,7 +17132,7 @@
                 <a:ea typeface="Meiryo" pitchFamily="34" charset="-122"/>
                 <a:cs typeface="Meiryo" pitchFamily="34" charset="-120"/>
               </a:rPr>
-              <a:t>（公式HP kihonjuku-yuuyuu.com 掲載の各拠点の教室・園庭・活動写真を挿入）</a:t>
+              <a:t>（ホイシル事業所ページ／LITALICO発達ナビ掲載の教室写真を挿入）</a:t>
             </a:r>
             <a:endParaRPr lang="en-US" sz="1200" dirty="0"/>
           </a:p>
@@ -20020,7 +17239,7 @@
                 <a:ea typeface="メイリオ" panose="020B0604030504040204" pitchFamily="50" charset="-128"/>
                 <a:cs typeface="Meiryo" pitchFamily="34" charset="-120"/>
               </a:rPr>
-              <a:t>市内16拠点のうち6拠点を占める最大手。1法人で東金市の児童発達支援供給の約4割を握る。</a:t>
+              <a:t>東金市で2拠点を展開。田間（市街地）と求名（市南西部）で商圏を分ける配置をとる。</a:t>
             </a:r>
             <a:endParaRPr lang="en-US" sz="1000" dirty="0">
               <a:latin typeface="メイリオ" panose="020B0604030504040204" pitchFamily="50" charset="-128"/>
@@ -20044,7 +17263,7 @@
                 <a:ea typeface="メイリオ" panose="020B0604030504040204" pitchFamily="50" charset="-128"/>
                 <a:cs typeface="Meiryo" pitchFamily="34" charset="-120"/>
               </a:rPr>
-              <a:t>教育畑の専門人材（校長・園長経験者、言語聴覚士、心理検査士）の厚みが最大の差別化要素で、参入障壁も高い。</a:t>
+              <a:t>求名駅圏は他事業所が少ない空白地帯で、第2の出店はその需要を先に押さえる動きとみられる。</a:t>
             </a:r>
             <a:endParaRPr lang="en-US" sz="1000" dirty="0">
               <a:latin typeface="メイリオ" panose="020B0604030504040204" pitchFamily="50" charset="-128"/>
@@ -20068,7 +17287,7 @@
                 <a:ea typeface="メイリオ" panose="020B0604030504040204" pitchFamily="50" charset="-128"/>
                 <a:cs typeface="Meiryo" pitchFamily="34" charset="-120"/>
               </a:rPr>
-              <a:t>日吉台エリアに2拠点（日吉台・西が丘）、八坂台エリアに3拠点を集中配置。小規模拠点を面で並べて総定員を確保するモデル。</a:t>
+              <a:t>発達ナビ上で「空きあり」と表示されており、稼働に余力がある可能性がある。</a:t>
             </a:r>
             <a:endParaRPr lang="en-US" sz="1000" dirty="0">
               <a:latin typeface="メイリオ" panose="020B0604030504040204" pitchFamily="50" charset="-128"/>
@@ -20092,7 +17311,7 @@
                 <a:ea typeface="メイリオ" panose="020B0604030504040204" pitchFamily="50" charset="-128"/>
                 <a:cs typeface="Meiryo" pitchFamily="34" charset="-120"/>
               </a:rPr>
-              <a:t>日吉台・八坂台への新規出店は基本塾との正面競合。土曜（八坂台は定休）や送迎圏の隙間が狙い目となる。</a:t>
+              <a:t>公開情報が乏しく、運営法人・プログラム内容の把握には直接ヒアリングが必要。</a:t>
             </a:r>
             <a:endParaRPr lang="en-US" sz="1000" dirty="0">
               <a:latin typeface="メイリオ" panose="020B0604030504040204" pitchFamily="50" charset="-128"/>
@@ -20246,7 +17465,7 @@
                 <a:ea typeface="Meiryo" pitchFamily="34" charset="-122"/>
                 <a:cs typeface="Meiryo" pitchFamily="34" charset="-120"/>
               </a:rPr>
-              <a:t>⑦ エスポワール ／ エスポワール第2</a:t>
+              <a:t>⑦ 果実の木 求名</a:t>
             </a:r>
             <a:endParaRPr lang="en-US" sz="2100" dirty="0"/>
           </a:p>
@@ -20420,7 +17639,7 @@
                 <a:ea typeface="Meiryo" pitchFamily="34" charset="-122"/>
                 <a:cs typeface="Meiryo" pitchFamily="34" charset="-120"/>
               </a:rPr>
-              <a:t>エスポワール・エスポワール第2（児童発達支援・放課後等デイサービス）</a:t>
+              <a:t>果実の木 求名（児童発達支援）</a:t>
             </a:r>
             <a:endParaRPr lang="en-US" sz="1400" dirty="0"/>
           </a:p>
@@ -20484,7 +17703,7 @@
                 <a:ea typeface="Meiryo" pitchFamily="34" charset="-122"/>
                 <a:cs typeface="Meiryo" pitchFamily="34" charset="-120"/>
               </a:rPr>
-              <a:t>未就学児（児童発達支援）／就学児（放課後等デイサービス）</a:t>
+              <a:t>未就学児（児童発達支援）</a:t>
             </a:r>
             <a:endParaRPr lang="en-US" sz="1050" dirty="0"/>
           </a:p>
@@ -20526,7 +17745,91 @@
                 <a:ea typeface="Meiryo" pitchFamily="34" charset="-122"/>
                 <a:cs typeface="Meiryo" pitchFamily="34" charset="-120"/>
               </a:rPr>
-              <a:t>【エスポワール】〒283-0005 東金市田間2-56-10（JR東金線 東金駅から徒歩約16分）</a:t>
+              <a:t>千葉県東金市　JR東金線 求名駅から約593m（正確な所在地は要確認）</a:t>
+            </a:r>
+            <a:endParaRPr lang="en-US" sz="1050" dirty="0"/>
+          </a:p>
+          <a:p>
+            <a:pPr marL="0" indent="0">
+              <a:lnSpc>
+                <a:spcPct val="103000"/>
+              </a:lnSpc>
+              <a:buNone/>
+            </a:pPr>
+            <a:r>
+              <a:rPr lang="en-US" sz="1050" b="1" dirty="0">
+                <a:solidFill>
+                  <a:srgbClr val="2E6BB8"/>
+                </a:solidFill>
+                <a:latin typeface="Meiryo" pitchFamily="34" charset="0"/>
+                <a:ea typeface="Meiryo" pitchFamily="34" charset="-122"/>
+                <a:cs typeface="Meiryo" pitchFamily="34" charset="-120"/>
+              </a:rPr>
+              <a:t>▶</a:t>
+            </a:r>
+            <a:r>
+              <a:rPr lang="en-US" sz="1050" b="1" dirty="0">
+                <a:solidFill>
+                  <a:srgbClr val="222222"/>
+                </a:solidFill>
+                <a:latin typeface="Meiryo" pitchFamily="34" charset="0"/>
+                <a:ea typeface="Meiryo" pitchFamily="34" charset="-122"/>
+                <a:cs typeface="Meiryo" pitchFamily="34" charset="-120"/>
+              </a:rPr>
+              <a:t>TEL／HP：</a:t>
+            </a:r>
+            <a:r>
+              <a:rPr lang="en-US" sz="1050" dirty="0">
+                <a:solidFill>
+                  <a:srgbClr val="222222"/>
+                </a:solidFill>
+                <a:latin typeface="Meiryo" pitchFamily="34" charset="0"/>
+                <a:ea typeface="Meiryo" pitchFamily="34" charset="-122"/>
+                <a:cs typeface="Meiryo" pitchFamily="34" charset="-120"/>
+              </a:rPr>
+              <a:t>要確認（公開情報に記載なし）</a:t>
+            </a:r>
+            <a:endParaRPr lang="en-US" sz="1050" dirty="0"/>
+          </a:p>
+          <a:p>
+            <a:pPr marL="0" indent="0">
+              <a:lnSpc>
+                <a:spcPct val="103000"/>
+              </a:lnSpc>
+              <a:buNone/>
+            </a:pPr>
+            <a:r>
+              <a:rPr lang="en-US" sz="1050" b="1" dirty="0">
+                <a:solidFill>
+                  <a:srgbClr val="2E6BB8"/>
+                </a:solidFill>
+                <a:latin typeface="Meiryo" pitchFamily="34" charset="0"/>
+                <a:ea typeface="Meiryo" pitchFamily="34" charset="-122"/>
+                <a:cs typeface="Meiryo" pitchFamily="34" charset="-120"/>
+              </a:rPr>
+              <a:t>▶</a:t>
+            </a:r>
+            <a:r>
+              <a:rPr lang="en-US" sz="1050" b="1" dirty="0">
+                <a:solidFill>
+                  <a:srgbClr val="222222"/>
+                </a:solidFill>
+                <a:latin typeface="Meiryo" pitchFamily="34" charset="0"/>
+                <a:ea typeface="Meiryo" pitchFamily="34" charset="-122"/>
+                <a:cs typeface="Meiryo" pitchFamily="34" charset="-120"/>
+              </a:rPr>
+              <a:t>サービス提供時間／定員：</a:t>
+            </a:r>
+            <a:r>
+              <a:rPr lang="en-US" sz="1050" dirty="0">
+                <a:solidFill>
+                  <a:srgbClr val="222222"/>
+                </a:solidFill>
+                <a:latin typeface="Meiryo" pitchFamily="34" charset="0"/>
+                <a:ea typeface="Meiryo" pitchFamily="34" charset="-122"/>
+                <a:cs typeface="Meiryo" pitchFamily="34" charset="-120"/>
+              </a:rPr>
+              <a:t>いずれも要確認</a:t>
             </a:r>
             <a:endParaRPr lang="en-US" sz="1050" dirty="0"/>
           </a:p>
@@ -20540,17 +17843,6 @@
               </a:spcAft>
               <a:buNone/>
             </a:pPr>
-            <a:r>
-              <a:rPr lang="en-US" sz="1050" dirty="0">
-                <a:solidFill>
-                  <a:srgbClr val="222222"/>
-                </a:solidFill>
-                <a:latin typeface="Meiryo" pitchFamily="34" charset="0"/>
-                <a:ea typeface="Meiryo" pitchFamily="34" charset="-122"/>
-                <a:cs typeface="Meiryo" pitchFamily="34" charset="-120"/>
-              </a:rPr>
-              <a:t xml:space="preserve">　　　　　　【エスポワール第2】東金市 求名駅から約229m（正確な所在地は要確認）</a:t>
-            </a:r>
             <a:endParaRPr lang="en-US" sz="1050" dirty="0"/>
           </a:p>
           <a:p>
@@ -20580,7 +17872,7 @@
                 <a:ea typeface="Meiryo" pitchFamily="34" charset="-122"/>
                 <a:cs typeface="Meiryo" pitchFamily="34" charset="-120"/>
               </a:rPr>
-              <a:t>TEL／HP：</a:t>
+              <a:t>療育プログラムの特徴：</a:t>
             </a:r>
             <a:r>
               <a:rPr lang="en-US" sz="1050" dirty="0">
@@ -20591,91 +17883,7 @@
                 <a:ea typeface="Meiryo" pitchFamily="34" charset="-122"/>
                 <a:cs typeface="Meiryo" pitchFamily="34" charset="-120"/>
               </a:rPr>
-              <a:t>050-3145-9731（エスポワール）／ 公開HPは確認できず。ホイシル・発達ナビに事業所情報を掲載</a:t>
-            </a:r>
-            <a:endParaRPr lang="en-US" sz="1050" dirty="0"/>
-          </a:p>
-          <a:p>
-            <a:pPr marL="0" indent="0">
-              <a:lnSpc>
-                <a:spcPct val="103000"/>
-              </a:lnSpc>
-              <a:buNone/>
-            </a:pPr>
-            <a:r>
-              <a:rPr lang="en-US" sz="1050" b="1" dirty="0">
-                <a:solidFill>
-                  <a:srgbClr val="2E6BB8"/>
-                </a:solidFill>
-                <a:latin typeface="Meiryo" pitchFamily="34" charset="0"/>
-                <a:ea typeface="Meiryo" pitchFamily="34" charset="-122"/>
-                <a:cs typeface="Meiryo" pitchFamily="34" charset="-120"/>
-              </a:rPr>
-              <a:t>▶</a:t>
-            </a:r>
-            <a:r>
-              <a:rPr lang="en-US" sz="1050" b="1" dirty="0">
-                <a:solidFill>
-                  <a:srgbClr val="222222"/>
-                </a:solidFill>
-                <a:latin typeface="Meiryo" pitchFamily="34" charset="0"/>
-                <a:ea typeface="Meiryo" pitchFamily="34" charset="-122"/>
-                <a:cs typeface="Meiryo" pitchFamily="34" charset="-120"/>
-              </a:rPr>
-              <a:t>サービス提供時間／定員：</a:t>
-            </a:r>
-            <a:r>
-              <a:rPr lang="en-US" sz="1050" dirty="0">
-                <a:solidFill>
-                  <a:srgbClr val="222222"/>
-                </a:solidFill>
-                <a:latin typeface="Meiryo" pitchFamily="34" charset="0"/>
-                <a:ea typeface="Meiryo" pitchFamily="34" charset="-122"/>
-                <a:cs typeface="Meiryo" pitchFamily="34" charset="-120"/>
-              </a:rPr>
-              <a:t>いずれも要確認</a:t>
-            </a:r>
-            <a:endParaRPr lang="en-US" sz="1050" dirty="0"/>
-          </a:p>
-          <a:p>
-            <a:pPr marL="0" indent="0">
-              <a:lnSpc>
-                <a:spcPct val="103000"/>
-              </a:lnSpc>
-              <a:buNone/>
-            </a:pPr>
-            <a:r>
-              <a:rPr lang="en-US" sz="1050" b="1" dirty="0">
-                <a:solidFill>
-                  <a:srgbClr val="2E6BB8"/>
-                </a:solidFill>
-                <a:latin typeface="Meiryo" pitchFamily="34" charset="0"/>
-                <a:ea typeface="Meiryo" pitchFamily="34" charset="-122"/>
-                <a:cs typeface="Meiryo" pitchFamily="34" charset="-120"/>
-              </a:rPr>
-              <a:t>▶</a:t>
-            </a:r>
-            <a:r>
-              <a:rPr lang="en-US" sz="1050" b="1" dirty="0">
-                <a:solidFill>
-                  <a:srgbClr val="222222"/>
-                </a:solidFill>
-                <a:latin typeface="Meiryo" pitchFamily="34" charset="0"/>
-                <a:ea typeface="Meiryo" pitchFamily="34" charset="-122"/>
-                <a:cs typeface="Meiryo" pitchFamily="34" charset="-120"/>
-              </a:rPr>
-              <a:t>空き状況：</a:t>
-            </a:r>
-            <a:r>
-              <a:rPr lang="en-US" sz="1050" dirty="0">
-                <a:solidFill>
-                  <a:srgbClr val="222222"/>
-                </a:solidFill>
-                <a:latin typeface="Meiryo" pitchFamily="34" charset="0"/>
-                <a:ea typeface="Meiryo" pitchFamily="34" charset="-122"/>
-                <a:cs typeface="Meiryo" pitchFamily="34" charset="-120"/>
-              </a:rPr>
-              <a:t>LITALICO発達ナビ上で「空きあり」表示（2026年8月時点）</a:t>
+              <a:t>公開情報が極めて限定的で、支援内容は要確認。</a:t>
             </a:r>
             <a:endParaRPr lang="en-US" sz="1050" dirty="0"/>
           </a:p>
@@ -20689,28 +17897,8 @@
               </a:spcAft>
               <a:buNone/>
             </a:pPr>
-            <a:endParaRPr lang="en-US" sz="1050" dirty="0"/>
-          </a:p>
-          <a:p>
-            <a:pPr marL="0" indent="0">
-              <a:lnSpc>
-                <a:spcPct val="103000"/>
-              </a:lnSpc>
-              <a:buNone/>
-            </a:pPr>
-            <a:r>
-              <a:rPr lang="en-US" sz="1050" b="1" dirty="0">
-                <a:solidFill>
-                  <a:srgbClr val="2E6BB8"/>
-                </a:solidFill>
-                <a:latin typeface="Meiryo" pitchFamily="34" charset="0"/>
-                <a:ea typeface="Meiryo" pitchFamily="34" charset="-122"/>
-                <a:cs typeface="Meiryo" pitchFamily="34" charset="-120"/>
-              </a:rPr>
-              <a:t>▶</a:t>
-            </a:r>
-            <a:r>
-              <a:rPr lang="en-US" sz="1050" b="1" dirty="0">
+            <a:r>
+              <a:rPr lang="en-US" sz="1050" dirty="0">
                 <a:solidFill>
                   <a:srgbClr val="222222"/>
                 </a:solidFill>
@@ -20718,18 +17906,7 @@
                 <a:ea typeface="Meiryo" pitchFamily="34" charset="-122"/>
                 <a:cs typeface="Meiryo" pitchFamily="34" charset="-120"/>
               </a:rPr>
-              <a:t>療育プログラムの特徴：</a:t>
-            </a:r>
-            <a:r>
-              <a:rPr lang="en-US" sz="1050" dirty="0">
-                <a:solidFill>
-                  <a:srgbClr val="222222"/>
-                </a:solidFill>
-                <a:latin typeface="Meiryo" pitchFamily="34" charset="0"/>
-                <a:ea typeface="Meiryo" pitchFamily="34" charset="-122"/>
-                <a:cs typeface="Meiryo" pitchFamily="34" charset="-120"/>
-              </a:rPr>
-              <a:t>児童発達支援と放課後等デイサービスを併設。プログラム内容は公開情報からは確認できず要確認。</a:t>
+              <a:t>・集約サイトの児童発達支援一覧に掲載。市南西部の求名駅圏に立地。</a:t>
             </a:r>
             <a:endParaRPr lang="en-US" sz="1050" dirty="0"/>
           </a:p>
@@ -20752,7 +17929,7 @@
                 <a:ea typeface="Meiryo" pitchFamily="34" charset="-122"/>
                 <a:cs typeface="Meiryo" pitchFamily="34" charset="-120"/>
               </a:rPr>
-              <a:t>・市内2拠点体制。第2は求名駅至近に立地し、市南西部（求名・丘山方面）をカバー。</a:t>
+              <a:t>・同一エリアにエスポワール第2があり、求名駅圏は2事業所が並ぶ。</a:t>
             </a:r>
             <a:endParaRPr lang="en-US" sz="1050" dirty="0"/>
           </a:p>
@@ -20766,6 +17943,29 @@
               </a:spcAft>
               <a:buNone/>
             </a:pPr>
+            <a:r>
+              <a:rPr lang="en-US" sz="1050" dirty="0">
+                <a:solidFill>
+                  <a:srgbClr val="222222"/>
+                </a:solidFill>
+                <a:latin typeface="Meiryo" pitchFamily="34" charset="0"/>
+                <a:ea typeface="Meiryo" pitchFamily="34" charset="-122"/>
+                <a:cs typeface="Meiryo" pitchFamily="34" charset="-120"/>
+              </a:rPr>
+              <a:t>・「果実の木」は熊本市等にも同名の放課後等デイサービスがあり、同系列か否かは要確認。</a:t>
+            </a:r>
+            <a:endParaRPr lang="en-US" sz="1050" dirty="0"/>
+          </a:p>
+          <a:p>
+            <a:pPr marL="0" indent="0">
+              <a:lnSpc>
+                <a:spcPct val="103000"/>
+              </a:lnSpc>
+              <a:spcAft>
+                <a:spcPts val="500"/>
+              </a:spcAft>
+              <a:buNone/>
+            </a:pPr>
             <a:endParaRPr lang="en-US" sz="1050" dirty="0"/>
           </a:p>
           <a:p>
@@ -20806,7 +18006,7 @@
                 <a:ea typeface="Meiryo" pitchFamily="34" charset="-122"/>
                 <a:cs typeface="Meiryo" pitchFamily="34" charset="-120"/>
               </a:rPr>
-              <a:t>ホイシル 東金市 児童発達支援一覧／LITALICO発達ナビ／障害者ドットコム</a:t>
+              <a:t>ホイシル 東金市 児童発達支援一覧（www.hoicil.com/f?area=122131&amp;facility_kind=15）</a:t>
             </a:r>
             <a:endParaRPr lang="en-US" sz="1050" dirty="0"/>
           </a:p>
@@ -20848,7 +18048,7 @@
                 <a:ea typeface="Meiryo" pitchFamily="34" charset="-122"/>
                 <a:cs typeface="Meiryo" pitchFamily="34" charset="-120"/>
               </a:rPr>
-              <a:t>運営法人、エスポワール第2の正確な所在地・TEL、両拠点の提供時間・定員、送迎の有無</a:t>
+              <a:t>正式名称・所在地・電話番号、運営法人、定員、提供時間、他県の同名事業所との関係</a:t>
             </a:r>
             <a:endParaRPr lang="en-US" sz="1050" dirty="0"/>
           </a:p>
@@ -20917,7 +18117,7 @@
                 <a:ea typeface="Meiryo" pitchFamily="34" charset="-122"/>
                 <a:cs typeface="Meiryo" pitchFamily="34" charset="-120"/>
               </a:rPr>
-              <a:t>（ホイシル事業所ページ／LITALICO発達ナビ掲載の教室写真を挿入）</a:t>
+              <a:t>（ホイシル／LITALICO発達ナビ掲載の施設写真を挿入）</a:t>
             </a:r>
             <a:endParaRPr lang="en-US" sz="1200" dirty="0"/>
           </a:p>
@@ -21024,7 +18224,7 @@
                 <a:ea typeface="メイリオ" panose="020B0604030504040204" pitchFamily="50" charset="-128"/>
                 <a:cs typeface="Meiryo" pitchFamily="34" charset="-120"/>
               </a:rPr>
-              <a:t>東金市で2拠点を展開。田間（市街地）と求名（市南西部）で商圏を分ける配置をとる。</a:t>
+              <a:t>求名駅圏で確認できる数少ない児童発達支援。市南西部の受け皿を担う。</a:t>
             </a:r>
             <a:endParaRPr lang="en-US" sz="1000" dirty="0">
               <a:latin typeface="メイリオ" panose="020B0604030504040204" pitchFamily="50" charset="-128"/>
@@ -21048,7 +18248,7 @@
                 <a:ea typeface="メイリオ" panose="020B0604030504040204" pitchFamily="50" charset="-128"/>
                 <a:cs typeface="Meiryo" pitchFamily="34" charset="-120"/>
               </a:rPr>
-              <a:t>求名駅圏は他事業所が少ない空白地帯で、第2の出店はその需要を先に押さえる動きとみられる。</a:t>
+              <a:t>東金駅圏に集中する既存事業所とは商圏が異なり、直接競合になりにくい立地。</a:t>
             </a:r>
             <a:endParaRPr lang="en-US" sz="1000" dirty="0">
               <a:latin typeface="メイリオ" panose="020B0604030504040204" pitchFamily="50" charset="-128"/>
@@ -21072,7 +18272,7 @@
                 <a:ea typeface="メイリオ" panose="020B0604030504040204" pitchFamily="50" charset="-128"/>
                 <a:cs typeface="Meiryo" pitchFamily="34" charset="-120"/>
               </a:rPr>
-              <a:t>発達ナビ上で「空きあり」と表示されており、稼働に余力がある可能性がある。</a:t>
+              <a:t>市南西部（求名・丘山地区）は従来「空白地帯」と見ていたが、実際には出店が進みつつある。</a:t>
             </a:r>
             <a:endParaRPr lang="en-US" sz="1000" dirty="0">
               <a:latin typeface="メイリオ" panose="020B0604030504040204" pitchFamily="50" charset="-128"/>
@@ -21096,7 +18296,7 @@
                 <a:ea typeface="メイリオ" panose="020B0604030504040204" pitchFamily="50" charset="-128"/>
                 <a:cs typeface="Meiryo" pitchFamily="34" charset="-120"/>
               </a:rPr>
-              <a:t>公開情報が乏しく、運営法人・プログラム内容の把握には直接ヒアリングが必要。</a:t>
+              <a:t>公開情報がほぼ無く、実態把握は市社会福祉課・相談支援事業所経由での確認が現実的。</a:t>
             </a:r>
             <a:endParaRPr lang="en-US" sz="1000" dirty="0">
               <a:latin typeface="メイリオ" panose="020B0604030504040204" pitchFamily="50" charset="-128"/>
